--- a/reports/Parque_Arauco/TMP_7MALLS/entrega_diego_anibal/Recorrido_ejecutivo_PA_MAE_20260817.pptx
+++ b/reports/Parque_Arauco/TMP_7MALLS/entrega_diego_anibal/Recorrido_ejecutivo_PA_MAE_20260817.pptx
@@ -8,6 +8,7 @@
     <p:sldId id="256" r:id="rId7"/>
     <p:sldId id="257" r:id="rId8"/>
     <p:sldId id="258" r:id="rId9"/>
+    <p:sldId id="259" r:id="rId10"/>
   </p:sldIdLst>
   <p:sldSz cx="12191695" cy="6858000" type="screen4x3"/>
   <p:notesSz cx="6858000" cy="9144000"/>
@@ -5244,6 +5245,624 @@
                 <a:latin typeface="Calibri"/>
               </a:rPr>
               <a:t>Dorado = lo que agosto ya lleva. Tramo claro = proyección del resto del mes. Mayo cierra más alto por Estanque Sur, antes de la reparación del 10/06.</a:t>
+            </a:r>
+          </a:p>
+        </p:txBody>
+      </p:sp>
+    </p:spTree>
+  </p:cSld>
+  <p:clrMapOvr>
+    <a:masterClrMapping/>
+  </p:clrMapOvr>
+</p:sld>
+</file>
+
+<file path=ppt/slides/slide4.xml><?xml version="1.0" encoding="utf-8"?>
+<p:sld xmlns:a="http://schemas.openxmlformats.org/drawingml/2006/main" xmlns:p="http://schemas.openxmlformats.org/presentationml/2006/main" xmlns:r="http://schemas.openxmlformats.org/officeDocument/2006/relationships">
+  <p:cSld>
+    <p:spTree>
+      <p:nvGrpSpPr>
+        <p:cNvPr id="1" name=""/>
+        <p:cNvGrpSpPr/>
+        <p:nvPr/>
+      </p:nvGrpSpPr>
+      <p:grpSpPr/>
+      <p:sp>
+        <p:nvSpPr>
+          <p:cNvPr id="2" name="Rectangle 1"/>
+          <p:cNvSpPr/>
+          <p:nvPr/>
+        </p:nvSpPr>
+        <p:spPr>
+          <a:xfrm>
+            <a:off x="0" y="0"/>
+            <a:ext cx="12191695" cy="841248"/>
+          </a:xfrm>
+          <a:prstGeom prst="rect">
+            <a:avLst/>
+          </a:prstGeom>
+          <a:solidFill>
+            <a:srgbClr val="0D3B66"/>
+          </a:solidFill>
+          <a:ln>
+            <a:noFill/>
+          </a:ln>
+        </p:spPr>
+        <p:style>
+          <a:lnRef idx="1">
+            <a:schemeClr val="accent1"/>
+          </a:lnRef>
+          <a:fillRef idx="3">
+            <a:schemeClr val="accent1"/>
+          </a:fillRef>
+          <a:effectRef idx="2">
+            <a:schemeClr val="accent1"/>
+          </a:effectRef>
+          <a:fontRef idx="minor">
+            <a:schemeClr val="lt1"/>
+          </a:fontRef>
+        </p:style>
+        <p:txBody>
+          <a:bodyPr rtlCol="0" anchor="ctr"/>
+          <a:lstStyle/>
+          <a:p>
+            <a:pPr algn="ctr"/>
+          </a:p>
+        </p:txBody>
+      </p:sp>
+      <p:sp>
+        <p:nvSpPr>
+          <p:cNvPr id="3" name="Rectangle 2"/>
+          <p:cNvSpPr/>
+          <p:nvPr/>
+        </p:nvSpPr>
+        <p:spPr>
+          <a:xfrm>
+            <a:off x="0" y="841248"/>
+            <a:ext cx="12191695" cy="54864"/>
+          </a:xfrm>
+          <a:prstGeom prst="rect">
+            <a:avLst/>
+          </a:prstGeom>
+          <a:solidFill>
+            <a:srgbClr val="C9A227"/>
+          </a:solidFill>
+          <a:ln>
+            <a:noFill/>
+          </a:ln>
+        </p:spPr>
+        <p:style>
+          <a:lnRef idx="1">
+            <a:schemeClr val="accent1"/>
+          </a:lnRef>
+          <a:fillRef idx="3">
+            <a:schemeClr val="accent1"/>
+          </a:fillRef>
+          <a:effectRef idx="2">
+            <a:schemeClr val="accent1"/>
+          </a:effectRef>
+          <a:fontRef idx="minor">
+            <a:schemeClr val="lt1"/>
+          </a:fontRef>
+        </p:style>
+        <p:txBody>
+          <a:bodyPr rtlCol="0" anchor="ctr"/>
+          <a:lstStyle/>
+          <a:p>
+            <a:pPr algn="ctr"/>
+          </a:p>
+        </p:txBody>
+      </p:sp>
+      <p:pic>
+        <p:nvPicPr>
+          <p:cNvPr id="4" name="Picture 3" descr="logo wes.bmp"/>
+          <p:cNvPicPr>
+            <a:picLocks noChangeAspect="1"/>
+          </p:cNvPicPr>
+          <p:nvPr/>
+        </p:nvPicPr>
+        <p:blipFill>
+          <a:blip r:embed="rId2"/>
+          <a:stretch>
+            <a:fillRect/>
+          </a:stretch>
+        </p:blipFill>
+        <p:spPr>
+          <a:xfrm>
+            <a:off x="10835640" y="146304"/>
+            <a:ext cx="1143000" cy="253401"/>
+          </a:xfrm>
+          <a:prstGeom prst="rect">
+            <a:avLst/>
+          </a:prstGeom>
+        </p:spPr>
+      </p:pic>
+      <p:sp>
+        <p:nvSpPr>
+          <p:cNvPr id="5" name="TextBox 4"/>
+          <p:cNvSpPr txBox="1"/>
+          <p:nvPr/>
+        </p:nvSpPr>
+        <p:spPr>
+          <a:xfrm>
+            <a:off x="256032" y="109728"/>
+            <a:ext cx="10607040" cy="384048"/>
+          </a:xfrm>
+          <a:prstGeom prst="rect">
+            <a:avLst/>
+          </a:prstGeom>
+          <a:noFill/>
+        </p:spPr>
+        <p:txBody>
+          <a:bodyPr wrap="square">
+            <a:spAutoFit/>
+          </a:bodyPr>
+          <a:lstStyle/>
+          <a:p>
+            <a:pPr algn="l">
+              <a:spcAft>
+                <a:spcPts val="300"/>
+              </a:spcAft>
+            </a:pPr>
+            <a:r>
+              <a:rPr sz="2000" b="1">
+                <a:solidFill>
+                  <a:srgbClr val="FFFFFF"/>
+                </a:solidFill>
+                <a:latin typeface="Calibri"/>
+              </a:rPr>
+              <a:t>MAE  ·  3. Hallazgos</a:t>
+            </a:r>
+          </a:p>
+        </p:txBody>
+      </p:sp>
+      <p:sp>
+        <p:nvSpPr>
+          <p:cNvPr id="6" name="TextBox 5"/>
+          <p:cNvSpPr txBox="1"/>
+          <p:nvPr/>
+        </p:nvSpPr>
+        <p:spPr>
+          <a:xfrm>
+            <a:off x="256032" y="457200"/>
+            <a:ext cx="10607040" cy="329184"/>
+          </a:xfrm>
+          <a:prstGeom prst="rect">
+            <a:avLst/>
+          </a:prstGeom>
+          <a:noFill/>
+        </p:spPr>
+        <p:txBody>
+          <a:bodyPr wrap="square">
+            <a:spAutoFit/>
+          </a:bodyPr>
+          <a:lstStyle/>
+          <a:p>
+            <a:pPr algn="l">
+              <a:spcAft>
+                <a:spcPts val="300"/>
+              </a:spcAft>
+            </a:pPr>
+            <a:r>
+              <a:rPr sz="1100" b="0">
+                <a:solidFill>
+                  <a:srgbClr val="DCE6F0"/>
+                </a:solidFill>
+                <a:latin typeface="Calibri"/>
+              </a:rPr>
+              <a:t>Estanque Sur: reparación de presostatos (10/06)  ·  Controles nocturnos: noche con control ≠ fuga</a:t>
+            </a:r>
+          </a:p>
+        </p:txBody>
+      </p:sp>
+      <p:sp>
+        <p:nvSpPr>
+          <p:cNvPr id="7" name="Rounded Rectangle 6"/>
+          <p:cNvSpPr/>
+          <p:nvPr/>
+        </p:nvSpPr>
+        <p:spPr>
+          <a:xfrm>
+            <a:off x="201168" y="1005840"/>
+            <a:ext cx="11777472" cy="1024128"/>
+          </a:xfrm>
+          <a:prstGeom prst="roundRect">
+            <a:avLst>
+              <a:gd name="adj" fmla="val 8000"/>
+            </a:avLst>
+          </a:prstGeom>
+          <a:solidFill>
+            <a:srgbClr val="FFF9EB"/>
+          </a:solidFill>
+          <a:ln w="6350">
+            <a:solidFill>
+              <a:srgbClr val="C9A227"/>
+            </a:solidFill>
+          </a:ln>
+        </p:spPr>
+        <p:style>
+          <a:lnRef idx="1">
+            <a:schemeClr val="accent1"/>
+          </a:lnRef>
+          <a:fillRef idx="3">
+            <a:schemeClr val="accent1"/>
+          </a:fillRef>
+          <a:effectRef idx="2">
+            <a:schemeClr val="accent1"/>
+          </a:effectRef>
+          <a:fontRef idx="minor">
+            <a:schemeClr val="lt1"/>
+          </a:fontRef>
+        </p:style>
+        <p:txBody>
+          <a:bodyPr rtlCol="0" anchor="ctr"/>
+          <a:lstStyle/>
+          <a:p>
+            <a:pPr algn="ctr"/>
+          </a:p>
+        </p:txBody>
+      </p:sp>
+      <p:sp>
+        <p:nvSpPr>
+          <p:cNvPr id="8" name="TextBox 7"/>
+          <p:cNvSpPr txBox="1"/>
+          <p:nvPr/>
+        </p:nvSpPr>
+        <p:spPr>
+          <a:xfrm>
+            <a:off x="365760" y="1060704"/>
+            <a:ext cx="11475720" cy="256032"/>
+          </a:xfrm>
+          <a:prstGeom prst="rect">
+            <a:avLst/>
+          </a:prstGeom>
+          <a:noFill/>
+        </p:spPr>
+        <p:txBody>
+          <a:bodyPr wrap="square">
+            <a:spAutoFit/>
+          </a:bodyPr>
+          <a:lstStyle/>
+          <a:p>
+            <a:pPr algn="l">
+              <a:spcAft>
+                <a:spcPts val="300"/>
+              </a:spcAft>
+            </a:pPr>
+            <a:r>
+              <a:rPr sz="1100" b="1">
+                <a:solidFill>
+                  <a:srgbClr val="C9A227"/>
+                </a:solidFill>
+                <a:latin typeface="Calibri"/>
+              </a:rPr>
+              <a:t>ESTANQUE SUR  ·  PRESÓSTATOS</a:t>
+            </a:r>
+          </a:p>
+        </p:txBody>
+      </p:sp>
+      <p:sp>
+        <p:nvSpPr>
+          <p:cNvPr id="9" name="TextBox 8"/>
+          <p:cNvSpPr txBox="1"/>
+          <p:nvPr/>
+        </p:nvSpPr>
+        <p:spPr>
+          <a:xfrm>
+            <a:off x="365760" y="1316736"/>
+            <a:ext cx="11475720" cy="621792"/>
+          </a:xfrm>
+          <a:prstGeom prst="rect">
+            <a:avLst/>
+          </a:prstGeom>
+          <a:noFill/>
+        </p:spPr>
+        <p:txBody>
+          <a:bodyPr wrap="square">
+            <a:spAutoFit/>
+          </a:bodyPr>
+          <a:lstStyle/>
+          <a:p>
+            <a:pPr algn="l">
+              <a:spcAft>
+                <a:spcPts val="300"/>
+              </a:spcAft>
+            </a:pPr>
+            <a:r>
+              <a:rPr sz="1300" b="0">
+                <a:solidFill>
+                  <a:srgbClr val="0D3B66"/>
+                </a:solidFill>
+                <a:latin typeface="Calibri"/>
+              </a:rPr>
+              <a:t>El 10/06 se repararon los presostatos. El estanque venía en 89 m³/día (mayo–9/jun) y ese día ya marca 39 m³. Desde el 11/06 se sostiene en 28 m³/día (−61 m³/día, 68%). No es fuga residual: la baja quedó en el dato diario.</a:t>
+            </a:r>
+          </a:p>
+        </p:txBody>
+      </p:sp>
+      <p:sp>
+        <p:nvSpPr>
+          <p:cNvPr id="10" name="Rounded Rectangle 9"/>
+          <p:cNvSpPr/>
+          <p:nvPr/>
+        </p:nvSpPr>
+        <p:spPr>
+          <a:xfrm>
+            <a:off x="201168" y="2121408"/>
+            <a:ext cx="5285232" cy="3584448"/>
+          </a:xfrm>
+          <a:prstGeom prst="roundRect">
+            <a:avLst>
+              <a:gd name="adj" fmla="val 8000"/>
+            </a:avLst>
+          </a:prstGeom>
+          <a:solidFill>
+            <a:srgbClr val="F5F7FA"/>
+          </a:solidFill>
+          <a:ln>
+            <a:noFill/>
+          </a:ln>
+        </p:spPr>
+        <p:style>
+          <a:lnRef idx="1">
+            <a:schemeClr val="accent1"/>
+          </a:lnRef>
+          <a:fillRef idx="3">
+            <a:schemeClr val="accent1"/>
+          </a:fillRef>
+          <a:effectRef idx="2">
+            <a:schemeClr val="accent1"/>
+          </a:effectRef>
+          <a:fontRef idx="minor">
+            <a:schemeClr val="lt1"/>
+          </a:fontRef>
+        </p:style>
+        <p:txBody>
+          <a:bodyPr rtlCol="0" anchor="ctr"/>
+          <a:lstStyle/>
+          <a:p>
+            <a:pPr algn="ctr"/>
+          </a:p>
+        </p:txBody>
+      </p:sp>
+      <p:sp>
+        <p:nvSpPr>
+          <p:cNvPr id="11" name="TextBox 10"/>
+          <p:cNvSpPr txBox="1"/>
+          <p:nvPr/>
+        </p:nvSpPr>
+        <p:spPr>
+          <a:xfrm>
+            <a:off x="329184" y="2176272"/>
+            <a:ext cx="5029200" cy="256032"/>
+          </a:xfrm>
+          <a:prstGeom prst="rect">
+            <a:avLst/>
+          </a:prstGeom>
+          <a:noFill/>
+        </p:spPr>
+        <p:txBody>
+          <a:bodyPr wrap="square">
+            <a:spAutoFit/>
+          </a:bodyPr>
+          <a:lstStyle/>
+          <a:p>
+            <a:pPr algn="l">
+              <a:spcAft>
+                <a:spcPts val="300"/>
+              </a:spcAft>
+            </a:pPr>
+            <a:r>
+              <a:rPr sz="1100" b="1">
+                <a:solidFill>
+                  <a:srgbClr val="1F77B4"/>
+                </a:solidFill>
+                <a:latin typeface="Calibri"/>
+              </a:rPr>
+              <a:t>CONTROLES NOCTURNOS — lo que se consiguió</a:t>
+            </a:r>
+          </a:p>
+        </p:txBody>
+      </p:sp>
+      <p:pic>
+        <p:nvPicPr>
+          <p:cNvPr id="12" name="Picture 11" descr="mae_controles_nocturnos.png"/>
+          <p:cNvPicPr>
+            <a:picLocks noChangeAspect="1"/>
+          </p:cNvPicPr>
+          <p:nvPr/>
+        </p:nvPicPr>
+        <p:blipFill>
+          <a:blip r:embed="rId3"/>
+          <a:stretch>
+            <a:fillRect/>
+          </a:stretch>
+        </p:blipFill>
+        <p:spPr>
+          <a:xfrm>
+            <a:off x="329184" y="2450592"/>
+            <a:ext cx="5010912" cy="3035808"/>
+          </a:xfrm>
+          <a:prstGeom prst="rect">
+            <a:avLst/>
+          </a:prstGeom>
+        </p:spPr>
+      </p:pic>
+      <p:sp>
+        <p:nvSpPr>
+          <p:cNvPr id="13" name="Rounded Rectangle 12"/>
+          <p:cNvSpPr/>
+          <p:nvPr/>
+        </p:nvSpPr>
+        <p:spPr>
+          <a:xfrm>
+            <a:off x="5614416" y="2121408"/>
+            <a:ext cx="6364224" cy="3584448"/>
+          </a:xfrm>
+          <a:prstGeom prst="roundRect">
+            <a:avLst>
+              <a:gd name="adj" fmla="val 8000"/>
+            </a:avLst>
+          </a:prstGeom>
+          <a:solidFill>
+            <a:srgbClr val="F5F7FA"/>
+          </a:solidFill>
+          <a:ln>
+            <a:noFill/>
+          </a:ln>
+        </p:spPr>
+        <p:style>
+          <a:lnRef idx="1">
+            <a:schemeClr val="accent1"/>
+          </a:lnRef>
+          <a:fillRef idx="3">
+            <a:schemeClr val="accent1"/>
+          </a:fillRef>
+          <a:effectRef idx="2">
+            <a:schemeClr val="accent1"/>
+          </a:effectRef>
+          <a:fontRef idx="minor">
+            <a:schemeClr val="lt1"/>
+          </a:fontRef>
+        </p:style>
+        <p:txBody>
+          <a:bodyPr rtlCol="0" anchor="ctr"/>
+          <a:lstStyle/>
+          <a:p>
+            <a:pPr algn="ctr"/>
+          </a:p>
+        </p:txBody>
+      </p:sp>
+      <p:sp>
+        <p:nvSpPr>
+          <p:cNvPr id="14" name="TextBox 13"/>
+          <p:cNvSpPr txBox="1"/>
+          <p:nvPr/>
+        </p:nvSpPr>
+        <p:spPr>
+          <a:xfrm>
+            <a:off x="5742432" y="2176272"/>
+            <a:ext cx="6108192" cy="256032"/>
+          </a:xfrm>
+          <a:prstGeom prst="rect">
+            <a:avLst/>
+          </a:prstGeom>
+          <a:noFill/>
+        </p:spPr>
+        <p:txBody>
+          <a:bodyPr wrap="square">
+            <a:spAutoFit/>
+          </a:bodyPr>
+          <a:lstStyle/>
+          <a:p>
+            <a:pPr algn="l">
+              <a:spcAft>
+                <a:spcPts val="300"/>
+              </a:spcAft>
+            </a:pPr>
+            <a:r>
+              <a:rPr sz="1100" b="1">
+                <a:solidFill>
+                  <a:srgbClr val="1F77B4"/>
+                </a:solidFill>
+                <a:latin typeface="Calibri"/>
+              </a:rPr>
+              <a:t>ESTANQUE SUR — m³/día (la baja post 10/06)</a:t>
+            </a:r>
+          </a:p>
+        </p:txBody>
+      </p:sp>
+      <p:pic>
+        <p:nvPicPr>
+          <p:cNvPr id="15" name="Picture 14" descr="mae_sur_diario_presostatos.png"/>
+          <p:cNvPicPr>
+            <a:picLocks noChangeAspect="1"/>
+          </p:cNvPicPr>
+          <p:nvPr/>
+        </p:nvPicPr>
+        <p:blipFill>
+          <a:blip r:embed="rId4"/>
+          <a:stretch>
+            <a:fillRect/>
+          </a:stretch>
+        </p:blipFill>
+        <p:spPr>
+          <a:xfrm>
+            <a:off x="5742432" y="2450592"/>
+            <a:ext cx="6108192" cy="3035808"/>
+          </a:xfrm>
+          <a:prstGeom prst="rect">
+            <a:avLst/>
+          </a:prstGeom>
+        </p:spPr>
+      </p:pic>
+      <p:sp>
+        <p:nvSpPr>
+          <p:cNvPr id="16" name="TextBox 15"/>
+          <p:cNvSpPr txBox="1"/>
+          <p:nvPr/>
+        </p:nvSpPr>
+        <p:spPr>
+          <a:xfrm>
+            <a:off x="256032" y="5779008"/>
+            <a:ext cx="11704320" cy="932688"/>
+          </a:xfrm>
+          <a:prstGeom prst="rect">
+            <a:avLst/>
+          </a:prstGeom>
+          <a:noFill/>
+        </p:spPr>
+        <p:txBody>
+          <a:bodyPr wrap="square">
+            <a:spAutoFit/>
+          </a:bodyPr>
+          <a:lstStyle/>
+          <a:p>
+            <a:pPr algn="l">
+              <a:spcAft>
+                <a:spcPts val="300"/>
+              </a:spcAft>
+            </a:pPr>
+            <a:r>
+              <a:rPr sz="1200" b="0">
+                <a:solidFill>
+                  <a:srgbClr val="0D3B66"/>
+                </a:solidFill>
+                <a:latin typeface="Calibri"/>
+              </a:rPr>
+              <a:t>Pizza Hut (01/07): noche típica 0,1 → 0 m³. El control sostiene el cero. El 26–29/07 la noche volvió (~40 m³); no entra a la mediana.</a:t>
+            </a:r>
+          </a:p>
+          <a:p>
+            <a:pPr algn="l">
+              <a:spcAft>
+                <a:spcPts val="300"/>
+              </a:spcAft>
+            </a:pPr>
+            <a:r>
+              <a:rPr sz="1200" b="0">
+                <a:solidFill>
+                  <a:srgbClr val="0D3B66"/>
+                </a:solidFill>
+                <a:latin typeface="Calibri"/>
+              </a:rPr>
+              <a:t>Estanque Norte (05/08): 4,8 → 1,1 m³/noche (ahorro 3,7 m³/noche; 48 m³ en 13 noches). Esa madrugada no se lee como fuga.</a:t>
+            </a:r>
+          </a:p>
+          <a:p>
+            <a:pPr algn="l">
+              <a:spcAft>
+                <a:spcPts val="300"/>
+              </a:spcAft>
+            </a:pPr>
+            <a:r>
+              <a:rPr sz="1100" b="0">
+                <a:solidFill>
+                  <a:srgbClr val="5A5A5A"/>
+                </a:solidFill>
+                <a:latin typeface="Calibri"/>
+              </a:rPr>
+              <a:t>Estanque Sur: corte on/off a cargo de mantención nocturna (no automático). Noche con control: no se lee como fuga.</a:t>
             </a:r>
           </a:p>
         </p:txBody>

--- a/reports/Parque_Arauco/TMP_7MALLS/entrega_diego_anibal/Recorrido_ejecutivo_PA_MAE_20260817.pptx
+++ b/reports/Parque_Arauco/TMP_7MALLS/entrega_diego_anibal/Recorrido_ejecutivo_PA_MAE_20260817.pptx
@@ -5450,7 +5450,7 @@
                 </a:solidFill>
                 <a:latin typeface="Calibri"/>
               </a:rPr>
-              <a:t>Estanque Sur: reparación de presostatos (10/06)  ·  Controles nocturnos: noche con control ≠ fuga</a:t>
+              <a:t>Estanque Sur: reparación de presostatos (10/06)  ·  Control nocturno: horas en cero</a:t>
             </a:r>
           </a:p>
         </p:txBody>
@@ -5659,14 +5659,14 @@
                 </a:solidFill>
                 <a:latin typeface="Calibri"/>
               </a:rPr>
-              <a:t>CONTROLES NOCTURNOS — lo que se consiguió</a:t>
+              <a:t>ESTANQUE NORTE — horas en cero (desde 05/08)</a:t>
             </a:r>
           </a:p>
         </p:txBody>
       </p:sp>
       <p:pic>
         <p:nvPicPr>
-          <p:cNvPr id="12" name="Picture 11" descr="mae_controles_nocturnos.png"/>
+          <p:cNvPr id="12" name="Picture 11" descr="mae_horas_en_cero.png"/>
           <p:cNvPicPr>
             <a:picLocks noChangeAspect="1"/>
           </p:cNvPicPr>
@@ -5830,7 +5830,7 @@
                 </a:solidFill>
                 <a:latin typeface="Calibri"/>
               </a:rPr>
-              <a:t>Pizza Hut (01/07): noche típica 0,1 → 0 m³. El control sostiene el cero. El 26–29/07 la noche volvió (~40 m³); no entra a la mediana.</a:t>
+              <a:t>Estanque Norte (control 05/08): en cero 02:00–05:00 (13 noches). Algunos días el cero parte desde las 00:00 (p. ej. 05/08).</a:t>
             </a:r>
           </a:p>
           <a:p>
@@ -5842,27 +5842,11 @@
             <a:r>
               <a:rPr sz="1200" b="0">
                 <a:solidFill>
-                  <a:srgbClr val="0D3B66"/>
+                  <a:srgbClr val="5A5A5A"/>
                 </a:solidFill>
                 <a:latin typeface="Calibri"/>
               </a:rPr>
-              <a:t>Estanque Norte (05/08): 4,8 → 1,1 m³/noche (ahorro 3,7 m³/noche; 48 m³ en 13 noches). Esa madrugada no se lee como fuga.</a:t>
-            </a:r>
-          </a:p>
-          <a:p>
-            <a:pPr algn="l">
-              <a:spcAft>
-                <a:spcPts val="300"/>
-              </a:spcAft>
-            </a:pPr>
-            <a:r>
-              <a:rPr sz="1100" b="0">
-                <a:solidFill>
-                  <a:srgbClr val="5A5A5A"/>
-                </a:solidFill>
-                <a:latin typeface="Calibri"/>
-              </a:rPr>
-              <a:t>Estanque Sur: corte on/off a cargo de mantención nocturna (no automático). Noche con control: no se lee como fuga.</a:t>
+              <a:t>Pizza Hut (control 01/07): en cero 00:00–06:00. Estanque Sur: corte on/off de mantención nocturna.</a:t>
             </a:r>
           </a:p>
         </p:txBody>

--- a/reports/Parque_Arauco/TMP_7MALLS/entrega_diego_anibal/Recorrido_ejecutivo_PA_MAE_20260817.pptx
+++ b/reports/Parque_Arauco/TMP_7MALLS/entrega_diego_anibal/Recorrido_ejecutivo_PA_MAE_20260817.pptx
@@ -5463,8 +5463,8 @@
         </p:nvSpPr>
         <p:spPr>
           <a:xfrm>
-            <a:off x="201168" y="1005840"/>
-            <a:ext cx="11777472" cy="1024128"/>
+            <a:off x="201168" y="987552"/>
+            <a:ext cx="11777472" cy="1170432"/>
           </a:xfrm>
           <a:prstGeom prst="roundRect">
             <a:avLst>
@@ -5510,8 +5510,8 @@
         </p:nvSpPr>
         <p:spPr>
           <a:xfrm>
-            <a:off x="365760" y="1060704"/>
-            <a:ext cx="11475720" cy="256032"/>
+            <a:off x="365760" y="1042415"/>
+            <a:ext cx="11475720" cy="237744"/>
           </a:xfrm>
           <a:prstGeom prst="rect">
             <a:avLst/>
@@ -5549,8 +5549,8 @@
         </p:nvSpPr>
         <p:spPr>
           <a:xfrm>
-            <a:off x="365760" y="1316736"/>
-            <a:ext cx="11475720" cy="621792"/>
+            <a:off x="365760" y="1280160"/>
+            <a:ext cx="11475720" cy="804672"/>
           </a:xfrm>
           <a:prstGeom prst="rect">
             <a:avLst/>
@@ -5569,13 +5569,13 @@
               </a:spcAft>
             </a:pPr>
             <a:r>
-              <a:rPr sz="1300" b="0">
+              <a:rPr sz="1200" b="0">
                 <a:solidFill>
                   <a:srgbClr val="0D3B66"/>
                 </a:solidFill>
                 <a:latin typeface="Calibri"/>
               </a:rPr>
-              <a:t>El 10/06 se repararon los presostatos. El estanque venía en 89 m³/día (mayo–9/jun) y ese día ya marca 39 m³. Desde el 11/06 se sostiene en 28 m³/día (−61 m³/día, 68%). No es fuga residual: la baja quedó en el dato diario.</a:t>
+              <a:t>El 10/06 se repararon los presostatos. El estanque venía en 89 m³/día (mayo–9/jun) y ese día ya marca 39 m³. Desde el 11/06 se sostiene en 28 m³/día (−61 m³/día, 68%). A $1.400/m³: $84.897/día  ·  $2.546.923/mes  ·  acumulado 11/06–17/08: $5.688.128 (4.063 m³ en 67 días).</a:t>
             </a:r>
           </a:p>
         </p:txBody>
@@ -5588,8 +5588,8 @@
         </p:nvSpPr>
         <p:spPr>
           <a:xfrm>
-            <a:off x="201168" y="2121408"/>
-            <a:ext cx="5285232" cy="3584448"/>
+            <a:off x="201168" y="2249424"/>
+            <a:ext cx="5285232" cy="3456432"/>
           </a:xfrm>
           <a:prstGeom prst="roundRect">
             <a:avLst>
@@ -5633,8 +5633,8 @@
         </p:nvSpPr>
         <p:spPr>
           <a:xfrm>
-            <a:off x="329184" y="2176272"/>
-            <a:ext cx="5029200" cy="256032"/>
+            <a:off x="329184" y="2304288"/>
+            <a:ext cx="5029200" cy="237744"/>
           </a:xfrm>
           <a:prstGeom prst="rect">
             <a:avLst/>
@@ -5680,8 +5680,8 @@
         </p:blipFill>
         <p:spPr>
           <a:xfrm>
-            <a:off x="329184" y="2450592"/>
-            <a:ext cx="5010912" cy="3035808"/>
+            <a:off x="329184" y="2560320"/>
+            <a:ext cx="5010912" cy="2926080"/>
           </a:xfrm>
           <a:prstGeom prst="rect">
             <a:avLst/>
@@ -5696,8 +5696,8 @@
         </p:nvSpPr>
         <p:spPr>
           <a:xfrm>
-            <a:off x="5614416" y="2121408"/>
-            <a:ext cx="6364224" cy="3584448"/>
+            <a:off x="5614416" y="2249424"/>
+            <a:ext cx="6364224" cy="3456432"/>
           </a:xfrm>
           <a:prstGeom prst="roundRect">
             <a:avLst>
@@ -5741,8 +5741,8 @@
         </p:nvSpPr>
         <p:spPr>
           <a:xfrm>
-            <a:off x="5742432" y="2176272"/>
-            <a:ext cx="6108192" cy="256032"/>
+            <a:off x="5742432" y="2304288"/>
+            <a:ext cx="6108192" cy="237744"/>
           </a:xfrm>
           <a:prstGeom prst="rect">
             <a:avLst/>
@@ -5767,7 +5767,7 @@
                 </a:solidFill>
                 <a:latin typeface="Calibri"/>
               </a:rPr>
-              <a:t>ESTANQUE SUR — m³/día (la baja post 10/06)</a:t>
+              <a:t>ESTANQUE SUR — m³/día y costo evitado</a:t>
             </a:r>
           </a:p>
         </p:txBody>
@@ -5788,8 +5788,8 @@
         </p:blipFill>
         <p:spPr>
           <a:xfrm>
-            <a:off x="5742432" y="2450592"/>
-            <a:ext cx="6108192" cy="3035808"/>
+            <a:off x="5742432" y="2560320"/>
+            <a:ext cx="6108192" cy="2926080"/>
           </a:xfrm>
           <a:prstGeom prst="rect">
             <a:avLst/>

--- a/reports/Parque_Arauco/TMP_7MALLS/entrega_diego_anibal/Recorrido_ejecutivo_PA_MAE_20260817.pptx
+++ b/reports/Parque_Arauco/TMP_7MALLS/entrega_diego_anibal/Recorrido_ejecutivo_PA_MAE_20260817.pptx
@@ -5450,7 +5450,7 @@
                 </a:solidFill>
                 <a:latin typeface="Calibri"/>
               </a:rPr>
-              <a:t>Estanque Sur: reparación de presostatos (10/06)  ·  Control nocturno: horas en cero</a:t>
+              <a:t>Estanque Sur: reparación de presostatos (10/06)  ·  Estanque Norte: control nocturno</a:t>
             </a:r>
           </a:p>
         </p:txBody>
@@ -5659,14 +5659,14 @@
                 </a:solidFill>
                 <a:latin typeface="Calibri"/>
               </a:rPr>
-              <a:t>ESTANQUE NORTE — horas en cero (desde 05/08)</a:t>
+              <a:t>CONTROLES NOCTURNOS — noche típica antes vs con control</a:t>
             </a:r>
           </a:p>
         </p:txBody>
       </p:sp>
       <p:pic>
         <p:nvPicPr>
-          <p:cNvPr id="12" name="Picture 11" descr="mae_horas_en_cero.png"/>
+          <p:cNvPr id="12" name="Picture 11" descr="mae_controles_nocturnos.png"/>
           <p:cNvPicPr>
             <a:picLocks noChangeAspect="1"/>
           </p:cNvPicPr>
@@ -5830,7 +5830,7 @@
                 </a:solidFill>
                 <a:latin typeface="Calibri"/>
               </a:rPr>
-              <a:t>Estanque Norte (control 05/08): en cero 02:00–05:00 (13 noches). Algunos días el cero parte desde las 00:00 (p. ej. 05/08).</a:t>
+              <a:t>Estanque Norte (control 05/08): noche típica 4,8 → 1,1 m³. Ahorro 3,7 m³/noche ($5.194/noche · $155.820/mes). En 13 noches: 48 m³ = $67.522 (tarifa $1.400/m³).</a:t>
             </a:r>
           </a:p>
           <a:p>
@@ -5846,7 +5846,7 @@
                 </a:solidFill>
                 <a:latin typeface="Calibri"/>
               </a:rPr>
-              <a:t>Pizza Hut (control 01/07): en cero 00:00–06:00. Estanque Sur: corte on/off de mantención nocturna.</a:t>
+              <a:t>Pizza Hut: control desde el 01/07. Estanque Sur: corte on/off de mantención nocturna.</a:t>
             </a:r>
           </a:p>
         </p:txBody>

--- a/reports/Parque_Arauco/TMP_7MALLS/entrega_diego_anibal/Recorrido_ejecutivo_PA_MAE_20260817.pptx
+++ b/reports/Parque_Arauco/TMP_7MALLS/entrega_diego_anibal/Recorrido_ejecutivo_PA_MAE_20260817.pptx
@@ -5804,8 +5804,8 @@
         </p:nvSpPr>
         <p:spPr>
           <a:xfrm>
-            <a:off x="256032" y="5779008"/>
-            <a:ext cx="11704320" cy="932688"/>
+            <a:off x="256032" y="5742432"/>
+            <a:ext cx="11704320" cy="1024128"/>
           </a:xfrm>
           <a:prstGeom prst="rect">
             <a:avLst/>
@@ -5842,11 +5842,43 @@
             <a:r>
               <a:rPr sz="1200" b="0">
                 <a:solidFill>
-                  <a:srgbClr val="5A5A5A"/>
+                  <a:srgbClr val="0D3B66"/>
                 </a:solidFill>
                 <a:latin typeface="Calibri"/>
               </a:rPr>
-              <a:t>Pizza Hut: control desde el 01/07. Estanque Sur: corte on/off de mantención nocturna.</a:t>
+              <a:t>Pizza Hut (control 01/07): noche típica 0,1 → 0 m³.</a:t>
+            </a:r>
+          </a:p>
+          <a:p>
+            <a:pPr algn="l">
+              <a:spcAft>
+                <a:spcPts val="300"/>
+              </a:spcAft>
+            </a:pPr>
+            <a:r>
+              <a:rPr sz="1200" b="0">
+                <a:solidFill>
+                  <a:srgbClr val="0D3B66"/>
+                </a:solidFill>
+                <a:latin typeface="Calibri"/>
+              </a:rPr>
+              <a:t>Estanque Sur: corte on/off a cargo de mantención nocturna.</a:t>
+            </a:r>
+          </a:p>
+          <a:p>
+            <a:pPr algn="l">
+              <a:spcAft>
+                <a:spcPts val="300"/>
+              </a:spcAft>
+            </a:pPr>
+            <a:r>
+              <a:rPr sz="1200" b="0">
+                <a:solidFill>
+                  <a:srgbClr val="0D3B66"/>
+                </a:solidFill>
+                <a:latin typeface="Calibri"/>
+              </a:rPr>
+              <a:t>Baños Guardias: control instalado; no está solicitado el uso.</a:t>
             </a:r>
           </a:p>
         </p:txBody>

--- a/reports/Parque_Arauco/TMP_7MALLS/entrega_diego_anibal/Recorrido_ejecutivo_PA_MAE_20260817.pptx
+++ b/reports/Parque_Arauco/TMP_7MALLS/entrega_diego_anibal/Recorrido_ejecutivo_PA_MAE_20260817.pptx
@@ -9,6 +9,8 @@
     <p:sldId id="257" r:id="rId8"/>
     <p:sldId id="258" r:id="rId9"/>
     <p:sldId id="259" r:id="rId10"/>
+    <p:sldId id="260" r:id="rId11"/>
+    <p:sldId id="261" r:id="rId12"/>
   </p:sldIdLst>
   <p:sldSz cx="12191695" cy="6858000" type="screen4x3"/>
   <p:notesSz cx="6858000" cy="9144000"/>
@@ -3270,7 +3272,7 @@
                 </a:solidFill>
                 <a:latin typeface="Calibri"/>
               </a:rPr>
-              <a:t>Empezamos por MAE  ·  Mall Arauco Estación</a:t>
+              <a:t>MAE · Estación   ·   MAM · Maipú</a:t>
             </a:r>
           </a:p>
           <a:p>
@@ -5879,6 +5881,2237 @@
                 <a:latin typeface="Calibri"/>
               </a:rPr>
               <a:t>Baños Guardias: control instalado; no está solicitado el uso.</a:t>
+            </a:r>
+          </a:p>
+        </p:txBody>
+      </p:sp>
+    </p:spTree>
+  </p:cSld>
+  <p:clrMapOvr>
+    <a:masterClrMapping/>
+  </p:clrMapOvr>
+</p:sld>
+</file>
+
+<file path=ppt/slides/slide5.xml><?xml version="1.0" encoding="utf-8"?>
+<p:sld xmlns:a="http://schemas.openxmlformats.org/drawingml/2006/main" xmlns:p="http://schemas.openxmlformats.org/presentationml/2006/main" xmlns:r="http://schemas.openxmlformats.org/officeDocument/2006/relationships">
+  <p:cSld>
+    <p:spTree>
+      <p:nvGrpSpPr>
+        <p:cNvPr id="1" name=""/>
+        <p:cNvGrpSpPr/>
+        <p:nvPr/>
+      </p:nvGrpSpPr>
+      <p:grpSpPr/>
+      <p:sp>
+        <p:nvSpPr>
+          <p:cNvPr id="2" name="Rectangle 1"/>
+          <p:cNvSpPr/>
+          <p:nvPr/>
+        </p:nvSpPr>
+        <p:spPr>
+          <a:xfrm>
+            <a:off x="0" y="0"/>
+            <a:ext cx="12191695" cy="841248"/>
+          </a:xfrm>
+          <a:prstGeom prst="rect">
+            <a:avLst/>
+          </a:prstGeom>
+          <a:solidFill>
+            <a:srgbClr val="0D3B66"/>
+          </a:solidFill>
+          <a:ln>
+            <a:noFill/>
+          </a:ln>
+        </p:spPr>
+        <p:style>
+          <a:lnRef idx="1">
+            <a:schemeClr val="accent1"/>
+          </a:lnRef>
+          <a:fillRef idx="3">
+            <a:schemeClr val="accent1"/>
+          </a:fillRef>
+          <a:effectRef idx="2">
+            <a:schemeClr val="accent1"/>
+          </a:effectRef>
+          <a:fontRef idx="minor">
+            <a:schemeClr val="lt1"/>
+          </a:fontRef>
+        </p:style>
+        <p:txBody>
+          <a:bodyPr rtlCol="0" anchor="ctr"/>
+          <a:lstStyle/>
+          <a:p>
+            <a:pPr algn="ctr"/>
+          </a:p>
+        </p:txBody>
+      </p:sp>
+      <p:sp>
+        <p:nvSpPr>
+          <p:cNvPr id="3" name="Rectangle 2"/>
+          <p:cNvSpPr/>
+          <p:nvPr/>
+        </p:nvSpPr>
+        <p:spPr>
+          <a:xfrm>
+            <a:off x="0" y="841248"/>
+            <a:ext cx="12191695" cy="54864"/>
+          </a:xfrm>
+          <a:prstGeom prst="rect">
+            <a:avLst/>
+          </a:prstGeom>
+          <a:solidFill>
+            <a:srgbClr val="C9A227"/>
+          </a:solidFill>
+          <a:ln>
+            <a:noFill/>
+          </a:ln>
+        </p:spPr>
+        <p:style>
+          <a:lnRef idx="1">
+            <a:schemeClr val="accent1"/>
+          </a:lnRef>
+          <a:fillRef idx="3">
+            <a:schemeClr val="accent1"/>
+          </a:fillRef>
+          <a:effectRef idx="2">
+            <a:schemeClr val="accent1"/>
+          </a:effectRef>
+          <a:fontRef idx="minor">
+            <a:schemeClr val="lt1"/>
+          </a:fontRef>
+        </p:style>
+        <p:txBody>
+          <a:bodyPr rtlCol="0" anchor="ctr"/>
+          <a:lstStyle/>
+          <a:p>
+            <a:pPr algn="ctr"/>
+          </a:p>
+        </p:txBody>
+      </p:sp>
+      <p:pic>
+        <p:nvPicPr>
+          <p:cNvPr id="4" name="Picture 3" descr="logo wes.bmp"/>
+          <p:cNvPicPr>
+            <a:picLocks noChangeAspect="1"/>
+          </p:cNvPicPr>
+          <p:nvPr/>
+        </p:nvPicPr>
+        <p:blipFill>
+          <a:blip r:embed="rId2"/>
+          <a:stretch>
+            <a:fillRect/>
+          </a:stretch>
+        </p:blipFill>
+        <p:spPr>
+          <a:xfrm>
+            <a:off x="10835640" y="146304"/>
+            <a:ext cx="1143000" cy="253401"/>
+          </a:xfrm>
+          <a:prstGeom prst="rect">
+            <a:avLst/>
+          </a:prstGeom>
+        </p:spPr>
+      </p:pic>
+      <p:sp>
+        <p:nvSpPr>
+          <p:cNvPr id="5" name="TextBox 4"/>
+          <p:cNvSpPr txBox="1"/>
+          <p:nvPr/>
+        </p:nvSpPr>
+        <p:spPr>
+          <a:xfrm>
+            <a:off x="256032" y="109728"/>
+            <a:ext cx="10607040" cy="384048"/>
+          </a:xfrm>
+          <a:prstGeom prst="rect">
+            <a:avLst/>
+          </a:prstGeom>
+          <a:noFill/>
+        </p:spPr>
+        <p:txBody>
+          <a:bodyPr wrap="square">
+            <a:spAutoFit/>
+          </a:bodyPr>
+          <a:lstStyle/>
+          <a:p>
+            <a:pPr algn="l">
+              <a:spcAft>
+                <a:spcPts val="300"/>
+              </a:spcAft>
+            </a:pPr>
+            <a:r>
+              <a:rPr sz="2000" b="1">
+                <a:solidFill>
+                  <a:srgbClr val="FFFFFF"/>
+                </a:solidFill>
+                <a:latin typeface="Calibri"/>
+              </a:rPr>
+              <a:t>MAM  ·  1. Equipos instalados</a:t>
+            </a:r>
+          </a:p>
+        </p:txBody>
+      </p:sp>
+      <p:sp>
+        <p:nvSpPr>
+          <p:cNvPr id="6" name="TextBox 5"/>
+          <p:cNvSpPr txBox="1"/>
+          <p:nvPr/>
+        </p:nvSpPr>
+        <p:spPr>
+          <a:xfrm>
+            <a:off x="256032" y="457200"/>
+            <a:ext cx="10607040" cy="329184"/>
+          </a:xfrm>
+          <a:prstGeom prst="rect">
+            <a:avLst/>
+          </a:prstGeom>
+          <a:noFill/>
+        </p:spPr>
+        <p:txBody>
+          <a:bodyPr wrap="square">
+            <a:spAutoFit/>
+          </a:bodyPr>
+          <a:lstStyle/>
+          <a:p>
+            <a:pPr algn="l">
+              <a:spcAft>
+                <a:spcPts val="300"/>
+              </a:spcAft>
+            </a:pPr>
+            <a:r>
+              <a:rPr sz="1100" b="0">
+                <a:solidFill>
+                  <a:srgbClr val="DCE6F0"/>
+                </a:solidFill>
+                <a:latin typeface="Calibri"/>
+              </a:rPr>
+              <a:t>5 puntos activos WES   |   Mall Arauco Maipú   |   Recepción 06/11/2025</a:t>
+            </a:r>
+          </a:p>
+        </p:txBody>
+      </p:sp>
+      <p:sp>
+        <p:nvSpPr>
+          <p:cNvPr id="7" name="Rounded Rectangle 6"/>
+          <p:cNvSpPr/>
+          <p:nvPr/>
+        </p:nvSpPr>
+        <p:spPr>
+          <a:xfrm>
+            <a:off x="256032" y="1078992"/>
+            <a:ext cx="3749039" cy="1938528"/>
+          </a:xfrm>
+          <a:prstGeom prst="roundRect">
+            <a:avLst>
+              <a:gd name="adj" fmla="val 8000"/>
+            </a:avLst>
+          </a:prstGeom>
+          <a:solidFill>
+            <a:srgbClr val="F5F7FA"/>
+          </a:solidFill>
+          <a:ln w="6350">
+            <a:solidFill>
+              <a:srgbClr val="1F77B4"/>
+            </a:solidFill>
+          </a:ln>
+        </p:spPr>
+        <p:style>
+          <a:lnRef idx="1">
+            <a:schemeClr val="accent1"/>
+          </a:lnRef>
+          <a:fillRef idx="3">
+            <a:schemeClr val="accent1"/>
+          </a:fillRef>
+          <a:effectRef idx="2">
+            <a:schemeClr val="accent1"/>
+          </a:effectRef>
+          <a:fontRef idx="minor">
+            <a:schemeClr val="lt1"/>
+          </a:fontRef>
+        </p:style>
+        <p:txBody>
+          <a:bodyPr rtlCol="0" anchor="ctr"/>
+          <a:lstStyle/>
+          <a:p>
+            <a:pPr algn="ctr"/>
+          </a:p>
+        </p:txBody>
+      </p:sp>
+      <p:sp>
+        <p:nvSpPr>
+          <p:cNvPr id="8" name="TextBox 7"/>
+          <p:cNvSpPr txBox="1"/>
+          <p:nvPr/>
+        </p:nvSpPr>
+        <p:spPr>
+          <a:xfrm>
+            <a:off x="420624" y="1207007"/>
+            <a:ext cx="3419856" cy="256032"/>
+          </a:xfrm>
+          <a:prstGeom prst="rect">
+            <a:avLst/>
+          </a:prstGeom>
+          <a:noFill/>
+        </p:spPr>
+        <p:txBody>
+          <a:bodyPr wrap="square">
+            <a:spAutoFit/>
+          </a:bodyPr>
+          <a:lstStyle/>
+          <a:p>
+            <a:pPr algn="l">
+              <a:spcAft>
+                <a:spcPts val="300"/>
+              </a:spcAft>
+            </a:pPr>
+            <a:r>
+              <a:rPr sz="1200" b="1">
+                <a:solidFill>
+                  <a:srgbClr val="C9A227"/>
+                </a:solidFill>
+                <a:latin typeface="Calibri"/>
+              </a:rPr>
+              <a:t>000025-08</a:t>
+            </a:r>
+          </a:p>
+        </p:txBody>
+      </p:sp>
+      <p:sp>
+        <p:nvSpPr>
+          <p:cNvPr id="9" name="TextBox 8"/>
+          <p:cNvSpPr txBox="1"/>
+          <p:nvPr/>
+        </p:nvSpPr>
+        <p:spPr>
+          <a:xfrm>
+            <a:off x="420624" y="1499616"/>
+            <a:ext cx="3419856" cy="713232"/>
+          </a:xfrm>
+          <a:prstGeom prst="rect">
+            <a:avLst/>
+          </a:prstGeom>
+          <a:noFill/>
+        </p:spPr>
+        <p:txBody>
+          <a:bodyPr wrap="square">
+            <a:spAutoFit/>
+          </a:bodyPr>
+          <a:lstStyle/>
+          <a:p>
+            <a:pPr algn="l">
+              <a:spcAft>
+                <a:spcPts val="300"/>
+              </a:spcAft>
+            </a:pPr>
+            <a:r>
+              <a:rPr sz="1800" b="1">
+                <a:solidFill>
+                  <a:srgbClr val="0D3B66"/>
+                </a:solidFill>
+                <a:latin typeface="Calibri"/>
+              </a:rPr>
+              <a:t>Placa Bancaria</a:t>
+            </a:r>
+          </a:p>
+        </p:txBody>
+      </p:sp>
+      <p:sp>
+        <p:nvSpPr>
+          <p:cNvPr id="10" name="TextBox 9"/>
+          <p:cNvSpPr txBox="1"/>
+          <p:nvPr/>
+        </p:nvSpPr>
+        <p:spPr>
+          <a:xfrm>
+            <a:off x="420624" y="2286000"/>
+            <a:ext cx="3419856" cy="530352"/>
+          </a:xfrm>
+          <a:prstGeom prst="rect">
+            <a:avLst/>
+          </a:prstGeom>
+          <a:noFill/>
+        </p:spPr>
+        <p:txBody>
+          <a:bodyPr wrap="square">
+            <a:spAutoFit/>
+          </a:bodyPr>
+          <a:lstStyle/>
+          <a:p>
+            <a:pPr algn="l">
+              <a:spcAft>
+                <a:spcPts val="300"/>
+              </a:spcAft>
+            </a:pPr>
+            <a:r>
+              <a:rPr sz="1300" b="0">
+                <a:solidFill>
+                  <a:srgbClr val="5A5A5A"/>
+                </a:solidFill>
+                <a:latin typeface="Calibri"/>
+              </a:rPr>
+              <a:t>Placa bancaria del recinto</a:t>
+            </a:r>
+          </a:p>
+        </p:txBody>
+      </p:sp>
+      <p:sp>
+        <p:nvSpPr>
+          <p:cNvPr id="11" name="Rounded Rectangle 10"/>
+          <p:cNvSpPr/>
+          <p:nvPr/>
+        </p:nvSpPr>
+        <p:spPr>
+          <a:xfrm>
+            <a:off x="4169663" y="1078992"/>
+            <a:ext cx="3749039" cy="1938528"/>
+          </a:xfrm>
+          <a:prstGeom prst="roundRect">
+            <a:avLst>
+              <a:gd name="adj" fmla="val 8000"/>
+            </a:avLst>
+          </a:prstGeom>
+          <a:solidFill>
+            <a:srgbClr val="F5F7FA"/>
+          </a:solidFill>
+          <a:ln w="6350">
+            <a:solidFill>
+              <a:srgbClr val="1F77B4"/>
+            </a:solidFill>
+          </a:ln>
+        </p:spPr>
+        <p:style>
+          <a:lnRef idx="1">
+            <a:schemeClr val="accent1"/>
+          </a:lnRef>
+          <a:fillRef idx="3">
+            <a:schemeClr val="accent1"/>
+          </a:fillRef>
+          <a:effectRef idx="2">
+            <a:schemeClr val="accent1"/>
+          </a:effectRef>
+          <a:fontRef idx="minor">
+            <a:schemeClr val="lt1"/>
+          </a:fontRef>
+        </p:style>
+        <p:txBody>
+          <a:bodyPr rtlCol="0" anchor="ctr"/>
+          <a:lstStyle/>
+          <a:p>
+            <a:pPr algn="ctr"/>
+          </a:p>
+        </p:txBody>
+      </p:sp>
+      <p:sp>
+        <p:nvSpPr>
+          <p:cNvPr id="12" name="TextBox 11"/>
+          <p:cNvSpPr txBox="1"/>
+          <p:nvPr/>
+        </p:nvSpPr>
+        <p:spPr>
+          <a:xfrm>
+            <a:off x="4334255" y="1207007"/>
+            <a:ext cx="3419856" cy="256032"/>
+          </a:xfrm>
+          <a:prstGeom prst="rect">
+            <a:avLst/>
+          </a:prstGeom>
+          <a:noFill/>
+        </p:spPr>
+        <p:txBody>
+          <a:bodyPr wrap="square">
+            <a:spAutoFit/>
+          </a:bodyPr>
+          <a:lstStyle/>
+          <a:p>
+            <a:pPr algn="l">
+              <a:spcAft>
+                <a:spcPts val="300"/>
+              </a:spcAft>
+            </a:pPr>
+            <a:r>
+              <a:rPr sz="1200" b="1">
+                <a:solidFill>
+                  <a:srgbClr val="C9A227"/>
+                </a:solidFill>
+                <a:latin typeface="Calibri"/>
+              </a:rPr>
+              <a:t>000025-10</a:t>
+            </a:r>
+          </a:p>
+        </p:txBody>
+      </p:sp>
+      <p:sp>
+        <p:nvSpPr>
+          <p:cNvPr id="13" name="TextBox 12"/>
+          <p:cNvSpPr txBox="1"/>
+          <p:nvPr/>
+        </p:nvSpPr>
+        <p:spPr>
+          <a:xfrm>
+            <a:off x="4334255" y="1499616"/>
+            <a:ext cx="3419856" cy="713232"/>
+          </a:xfrm>
+          <a:prstGeom prst="rect">
+            <a:avLst/>
+          </a:prstGeom>
+          <a:noFill/>
+        </p:spPr>
+        <p:txBody>
+          <a:bodyPr wrap="square">
+            <a:spAutoFit/>
+          </a:bodyPr>
+          <a:lstStyle/>
+          <a:p>
+            <a:pPr algn="l">
+              <a:spcAft>
+                <a:spcPts val="300"/>
+              </a:spcAft>
+            </a:pPr>
+            <a:r>
+              <a:rPr sz="1800" b="1">
+                <a:solidFill>
+                  <a:srgbClr val="0D3B66"/>
+                </a:solidFill>
+                <a:latin typeface="Calibri"/>
+              </a:rPr>
+              <a:t>Impulsión Ripley</a:t>
+            </a:r>
+          </a:p>
+        </p:txBody>
+      </p:sp>
+      <p:sp>
+        <p:nvSpPr>
+          <p:cNvPr id="14" name="TextBox 13"/>
+          <p:cNvSpPr txBox="1"/>
+          <p:nvPr/>
+        </p:nvSpPr>
+        <p:spPr>
+          <a:xfrm>
+            <a:off x="4334255" y="2286000"/>
+            <a:ext cx="3419856" cy="530352"/>
+          </a:xfrm>
+          <a:prstGeom prst="rect">
+            <a:avLst/>
+          </a:prstGeom>
+          <a:noFill/>
+        </p:spPr>
+        <p:txBody>
+          <a:bodyPr wrap="square">
+            <a:spAutoFit/>
+          </a:bodyPr>
+          <a:lstStyle/>
+          <a:p>
+            <a:pPr algn="l">
+              <a:spcAft>
+                <a:spcPts val="300"/>
+              </a:spcAft>
+            </a:pPr>
+            <a:r>
+              <a:rPr sz="1300" b="0">
+                <a:solidFill>
+                  <a:srgbClr val="5A5A5A"/>
+                </a:solidFill>
+                <a:latin typeface="Calibri"/>
+              </a:rPr>
+              <a:t>Impulsión Ripley</a:t>
+            </a:r>
+          </a:p>
+        </p:txBody>
+      </p:sp>
+      <p:sp>
+        <p:nvSpPr>
+          <p:cNvPr id="15" name="Rounded Rectangle 14"/>
+          <p:cNvSpPr/>
+          <p:nvPr/>
+        </p:nvSpPr>
+        <p:spPr>
+          <a:xfrm>
+            <a:off x="8083296" y="1078992"/>
+            <a:ext cx="3749039" cy="1938528"/>
+          </a:xfrm>
+          <a:prstGeom prst="roundRect">
+            <a:avLst>
+              <a:gd name="adj" fmla="val 8000"/>
+            </a:avLst>
+          </a:prstGeom>
+          <a:solidFill>
+            <a:srgbClr val="F5F7FA"/>
+          </a:solidFill>
+          <a:ln w="6350">
+            <a:solidFill>
+              <a:srgbClr val="1F77B4"/>
+            </a:solidFill>
+          </a:ln>
+        </p:spPr>
+        <p:style>
+          <a:lnRef idx="1">
+            <a:schemeClr val="accent1"/>
+          </a:lnRef>
+          <a:fillRef idx="3">
+            <a:schemeClr val="accent1"/>
+          </a:fillRef>
+          <a:effectRef idx="2">
+            <a:schemeClr val="accent1"/>
+          </a:effectRef>
+          <a:fontRef idx="minor">
+            <a:schemeClr val="lt1"/>
+          </a:fontRef>
+        </p:style>
+        <p:txBody>
+          <a:bodyPr rtlCol="0" anchor="ctr"/>
+          <a:lstStyle/>
+          <a:p>
+            <a:pPr algn="ctr"/>
+          </a:p>
+        </p:txBody>
+      </p:sp>
+      <p:sp>
+        <p:nvSpPr>
+          <p:cNvPr id="16" name="TextBox 15"/>
+          <p:cNvSpPr txBox="1"/>
+          <p:nvPr/>
+        </p:nvSpPr>
+        <p:spPr>
+          <a:xfrm>
+            <a:off x="8247888" y="1207007"/>
+            <a:ext cx="3419856" cy="256032"/>
+          </a:xfrm>
+          <a:prstGeom prst="rect">
+            <a:avLst/>
+          </a:prstGeom>
+          <a:noFill/>
+        </p:spPr>
+        <p:txBody>
+          <a:bodyPr wrap="square">
+            <a:spAutoFit/>
+          </a:bodyPr>
+          <a:lstStyle/>
+          <a:p>
+            <a:pPr algn="l">
+              <a:spcAft>
+                <a:spcPts val="300"/>
+              </a:spcAft>
+            </a:pPr>
+            <a:r>
+              <a:rPr sz="1200" b="1">
+                <a:solidFill>
+                  <a:srgbClr val="C9A227"/>
+                </a:solidFill>
+                <a:latin typeface="Calibri"/>
+              </a:rPr>
+              <a:t>000025-09</a:t>
+            </a:r>
+          </a:p>
+        </p:txBody>
+      </p:sp>
+      <p:sp>
+        <p:nvSpPr>
+          <p:cNvPr id="17" name="TextBox 16"/>
+          <p:cNvSpPr txBox="1"/>
+          <p:nvPr/>
+        </p:nvSpPr>
+        <p:spPr>
+          <a:xfrm>
+            <a:off x="8247888" y="1499616"/>
+            <a:ext cx="3419856" cy="713232"/>
+          </a:xfrm>
+          <a:prstGeom prst="rect">
+            <a:avLst/>
+          </a:prstGeom>
+          <a:noFill/>
+        </p:spPr>
+        <p:txBody>
+          <a:bodyPr wrap="square">
+            <a:spAutoFit/>
+          </a:bodyPr>
+          <a:lstStyle/>
+          <a:p>
+            <a:pPr algn="l">
+              <a:spcAft>
+                <a:spcPts val="300"/>
+              </a:spcAft>
+            </a:pPr>
+            <a:r>
+              <a:rPr sz="1800" b="1">
+                <a:solidFill>
+                  <a:srgbClr val="0D3B66"/>
+                </a:solidFill>
+                <a:latin typeface="Calibri"/>
+              </a:rPr>
+              <a:t>Impulsión Falabella</a:t>
+            </a:r>
+          </a:p>
+        </p:txBody>
+      </p:sp>
+      <p:sp>
+        <p:nvSpPr>
+          <p:cNvPr id="18" name="TextBox 17"/>
+          <p:cNvSpPr txBox="1"/>
+          <p:nvPr/>
+        </p:nvSpPr>
+        <p:spPr>
+          <a:xfrm>
+            <a:off x="8247888" y="2286000"/>
+            <a:ext cx="3419856" cy="530352"/>
+          </a:xfrm>
+          <a:prstGeom prst="rect">
+            <a:avLst/>
+          </a:prstGeom>
+          <a:noFill/>
+        </p:spPr>
+        <p:txBody>
+          <a:bodyPr wrap="square">
+            <a:spAutoFit/>
+          </a:bodyPr>
+          <a:lstStyle/>
+          <a:p>
+            <a:pPr algn="l">
+              <a:spcAft>
+                <a:spcPts val="300"/>
+              </a:spcAft>
+            </a:pPr>
+            <a:r>
+              <a:rPr sz="1300" b="0">
+                <a:solidFill>
+                  <a:srgbClr val="5A5A5A"/>
+                </a:solidFill>
+                <a:latin typeface="Calibri"/>
+              </a:rPr>
+              <a:t>Activo desde 11/08/2026 (OC / cambio de equipo)</a:t>
+            </a:r>
+          </a:p>
+        </p:txBody>
+      </p:sp>
+      <p:sp>
+        <p:nvSpPr>
+          <p:cNvPr id="19" name="Rounded Rectangle 18"/>
+          <p:cNvSpPr/>
+          <p:nvPr/>
+        </p:nvSpPr>
+        <p:spPr>
+          <a:xfrm>
+            <a:off x="256032" y="3182112"/>
+            <a:ext cx="5742432" cy="1938528"/>
+          </a:xfrm>
+          <a:prstGeom prst="roundRect">
+            <a:avLst>
+              <a:gd name="adj" fmla="val 8000"/>
+            </a:avLst>
+          </a:prstGeom>
+          <a:solidFill>
+            <a:srgbClr val="F5F7FA"/>
+          </a:solidFill>
+          <a:ln w="6350">
+            <a:solidFill>
+              <a:srgbClr val="1F77B4"/>
+            </a:solidFill>
+          </a:ln>
+        </p:spPr>
+        <p:style>
+          <a:lnRef idx="1">
+            <a:schemeClr val="accent1"/>
+          </a:lnRef>
+          <a:fillRef idx="3">
+            <a:schemeClr val="accent1"/>
+          </a:fillRef>
+          <a:effectRef idx="2">
+            <a:schemeClr val="accent1"/>
+          </a:effectRef>
+          <a:fontRef idx="minor">
+            <a:schemeClr val="lt1"/>
+          </a:fontRef>
+        </p:style>
+        <p:txBody>
+          <a:bodyPr rtlCol="0" anchor="ctr"/>
+          <a:lstStyle/>
+          <a:p>
+            <a:pPr algn="ctr"/>
+          </a:p>
+        </p:txBody>
+      </p:sp>
+      <p:sp>
+        <p:nvSpPr>
+          <p:cNvPr id="20" name="TextBox 19"/>
+          <p:cNvSpPr txBox="1"/>
+          <p:nvPr/>
+        </p:nvSpPr>
+        <p:spPr>
+          <a:xfrm>
+            <a:off x="420624" y="3310128"/>
+            <a:ext cx="5413248" cy="256032"/>
+          </a:xfrm>
+          <a:prstGeom prst="rect">
+            <a:avLst/>
+          </a:prstGeom>
+          <a:noFill/>
+        </p:spPr>
+        <p:txBody>
+          <a:bodyPr wrap="square">
+            <a:spAutoFit/>
+          </a:bodyPr>
+          <a:lstStyle/>
+          <a:p>
+            <a:pPr algn="l">
+              <a:spcAft>
+                <a:spcPts val="300"/>
+              </a:spcAft>
+            </a:pPr>
+            <a:r>
+              <a:rPr sz="1200" b="1">
+                <a:solidFill>
+                  <a:srgbClr val="C9A227"/>
+                </a:solidFill>
+                <a:latin typeface="Calibri"/>
+              </a:rPr>
+              <a:t>000025-32</a:t>
+            </a:r>
+          </a:p>
+        </p:txBody>
+      </p:sp>
+      <p:sp>
+        <p:nvSpPr>
+          <p:cNvPr id="21" name="TextBox 20"/>
+          <p:cNvSpPr txBox="1"/>
+          <p:nvPr/>
+        </p:nvSpPr>
+        <p:spPr>
+          <a:xfrm>
+            <a:off x="420624" y="3602736"/>
+            <a:ext cx="5413248" cy="713232"/>
+          </a:xfrm>
+          <a:prstGeom prst="rect">
+            <a:avLst/>
+          </a:prstGeom>
+          <a:noFill/>
+        </p:spPr>
+        <p:txBody>
+          <a:bodyPr wrap="square">
+            <a:spAutoFit/>
+          </a:bodyPr>
+          <a:lstStyle/>
+          <a:p>
+            <a:pPr algn="l">
+              <a:spcAft>
+                <a:spcPts val="300"/>
+              </a:spcAft>
+            </a:pPr>
+            <a:r>
+              <a:rPr sz="1800" b="1">
+                <a:solidFill>
+                  <a:srgbClr val="0D3B66"/>
+                </a:solidFill>
+                <a:latin typeface="Calibri"/>
+              </a:rPr>
+              <a:t>Matriz Pasillo Técnico Boulevard</a:t>
+            </a:r>
+          </a:p>
+        </p:txBody>
+      </p:sp>
+      <p:sp>
+        <p:nvSpPr>
+          <p:cNvPr id="22" name="TextBox 21"/>
+          <p:cNvSpPr txBox="1"/>
+          <p:nvPr/>
+        </p:nvSpPr>
+        <p:spPr>
+          <a:xfrm>
+            <a:off x="420624" y="4389120"/>
+            <a:ext cx="5413248" cy="530352"/>
+          </a:xfrm>
+          <a:prstGeom prst="rect">
+            <a:avLst/>
+          </a:prstGeom>
+          <a:noFill/>
+        </p:spPr>
+        <p:txBody>
+          <a:bodyPr wrap="square">
+            <a:spAutoFit/>
+          </a:bodyPr>
+          <a:lstStyle/>
+          <a:p>
+            <a:pPr algn="l">
+              <a:spcAft>
+                <a:spcPts val="300"/>
+              </a:spcAft>
+            </a:pPr>
+            <a:r>
+              <a:rPr sz="1300" b="0">
+                <a:solidFill>
+                  <a:srgbClr val="5A5A5A"/>
+                </a:solidFill>
+                <a:latin typeface="Calibri"/>
+              </a:rPr>
+              <a:t>Matriz pasillo técnico Boulevard</a:t>
+            </a:r>
+          </a:p>
+        </p:txBody>
+      </p:sp>
+      <p:sp>
+        <p:nvSpPr>
+          <p:cNvPr id="23" name="Rounded Rectangle 22"/>
+          <p:cNvSpPr/>
+          <p:nvPr/>
+        </p:nvSpPr>
+        <p:spPr>
+          <a:xfrm>
+            <a:off x="6199632" y="3182112"/>
+            <a:ext cx="5742432" cy="1938528"/>
+          </a:xfrm>
+          <a:prstGeom prst="roundRect">
+            <a:avLst>
+              <a:gd name="adj" fmla="val 8000"/>
+            </a:avLst>
+          </a:prstGeom>
+          <a:solidFill>
+            <a:srgbClr val="F5F7FA"/>
+          </a:solidFill>
+          <a:ln w="6350">
+            <a:solidFill>
+              <a:srgbClr val="1F77B4"/>
+            </a:solidFill>
+          </a:ln>
+        </p:spPr>
+        <p:style>
+          <a:lnRef idx="1">
+            <a:schemeClr val="accent1"/>
+          </a:lnRef>
+          <a:fillRef idx="3">
+            <a:schemeClr val="accent1"/>
+          </a:fillRef>
+          <a:effectRef idx="2">
+            <a:schemeClr val="accent1"/>
+          </a:effectRef>
+          <a:fontRef idx="minor">
+            <a:schemeClr val="lt1"/>
+          </a:fontRef>
+        </p:style>
+        <p:txBody>
+          <a:bodyPr rtlCol="0" anchor="ctr"/>
+          <a:lstStyle/>
+          <a:p>
+            <a:pPr algn="ctr"/>
+          </a:p>
+        </p:txBody>
+      </p:sp>
+      <p:sp>
+        <p:nvSpPr>
+          <p:cNvPr id="24" name="TextBox 23"/>
+          <p:cNvSpPr txBox="1"/>
+          <p:nvPr/>
+        </p:nvSpPr>
+        <p:spPr>
+          <a:xfrm>
+            <a:off x="6364224" y="3310128"/>
+            <a:ext cx="5413248" cy="256032"/>
+          </a:xfrm>
+          <a:prstGeom prst="rect">
+            <a:avLst/>
+          </a:prstGeom>
+          <a:noFill/>
+        </p:spPr>
+        <p:txBody>
+          <a:bodyPr wrap="square">
+            <a:spAutoFit/>
+          </a:bodyPr>
+          <a:lstStyle/>
+          <a:p>
+            <a:pPr algn="l">
+              <a:spcAft>
+                <a:spcPts val="300"/>
+              </a:spcAft>
+            </a:pPr>
+            <a:r>
+              <a:rPr sz="1200" b="1">
+                <a:solidFill>
+                  <a:srgbClr val="C9A227"/>
+                </a:solidFill>
+                <a:latin typeface="Calibri"/>
+              </a:rPr>
+              <a:t>000025-33</a:t>
+            </a:r>
+          </a:p>
+        </p:txBody>
+      </p:sp>
+      <p:sp>
+        <p:nvSpPr>
+          <p:cNvPr id="25" name="TextBox 24"/>
+          <p:cNvSpPr txBox="1"/>
+          <p:nvPr/>
+        </p:nvSpPr>
+        <p:spPr>
+          <a:xfrm>
+            <a:off x="6364224" y="3602736"/>
+            <a:ext cx="5413248" cy="713232"/>
+          </a:xfrm>
+          <a:prstGeom prst="rect">
+            <a:avLst/>
+          </a:prstGeom>
+          <a:noFill/>
+        </p:spPr>
+        <p:txBody>
+          <a:bodyPr wrap="square">
+            <a:spAutoFit/>
+          </a:bodyPr>
+          <a:lstStyle/>
+          <a:p>
+            <a:pPr algn="l">
+              <a:spcAft>
+                <a:spcPts val="300"/>
+              </a:spcAft>
+            </a:pPr>
+            <a:r>
+              <a:rPr sz="1800" b="1">
+                <a:solidFill>
+                  <a:srgbClr val="0D3B66"/>
+                </a:solidFill>
+                <a:latin typeface="Calibri"/>
+              </a:rPr>
+              <a:t>Salida de emergencia pasillo 1 ARROW</a:t>
+            </a:r>
+          </a:p>
+        </p:txBody>
+      </p:sp>
+      <p:sp>
+        <p:nvSpPr>
+          <p:cNvPr id="26" name="TextBox 25"/>
+          <p:cNvSpPr txBox="1"/>
+          <p:nvPr/>
+        </p:nvSpPr>
+        <p:spPr>
+          <a:xfrm>
+            <a:off x="6364224" y="4389120"/>
+            <a:ext cx="5413248" cy="530352"/>
+          </a:xfrm>
+          <a:prstGeom prst="rect">
+            <a:avLst/>
+          </a:prstGeom>
+          <a:noFill/>
+        </p:spPr>
+        <p:txBody>
+          <a:bodyPr wrap="square">
+            <a:spAutoFit/>
+          </a:bodyPr>
+          <a:lstStyle/>
+          <a:p>
+            <a:pPr algn="l">
+              <a:spcAft>
+                <a:spcPts val="300"/>
+              </a:spcAft>
+            </a:pPr>
+            <a:r>
+              <a:rPr sz="1300" b="0">
+                <a:solidFill>
+                  <a:srgbClr val="5A5A5A"/>
+                </a:solidFill>
+                <a:latin typeface="Calibri"/>
+              </a:rPr>
+              <a:t>Salida de emergencia pasillo 1 ARROW</a:t>
+            </a:r>
+          </a:p>
+        </p:txBody>
+      </p:sp>
+      <p:sp>
+        <p:nvSpPr>
+          <p:cNvPr id="27" name="Rounded Rectangle 26"/>
+          <p:cNvSpPr/>
+          <p:nvPr/>
+        </p:nvSpPr>
+        <p:spPr>
+          <a:xfrm>
+            <a:off x="256032" y="5394960"/>
+            <a:ext cx="11686032" cy="1170432"/>
+          </a:xfrm>
+          <a:prstGeom prst="roundRect">
+            <a:avLst>
+              <a:gd name="adj" fmla="val 8000"/>
+            </a:avLst>
+          </a:prstGeom>
+          <a:solidFill>
+            <a:srgbClr val="FFF9EB"/>
+          </a:solidFill>
+          <a:ln w="6350">
+            <a:solidFill>
+              <a:srgbClr val="C9A227"/>
+            </a:solidFill>
+          </a:ln>
+        </p:spPr>
+        <p:style>
+          <a:lnRef idx="1">
+            <a:schemeClr val="accent1"/>
+          </a:lnRef>
+          <a:fillRef idx="3">
+            <a:schemeClr val="accent1"/>
+          </a:fillRef>
+          <a:effectRef idx="2">
+            <a:schemeClr val="accent1"/>
+          </a:effectRef>
+          <a:fontRef idx="minor">
+            <a:schemeClr val="lt1"/>
+          </a:fontRef>
+        </p:style>
+        <p:txBody>
+          <a:bodyPr rtlCol="0" anchor="ctr"/>
+          <a:lstStyle/>
+          <a:p>
+            <a:pPr algn="ctr"/>
+          </a:p>
+        </p:txBody>
+      </p:sp>
+      <p:sp>
+        <p:nvSpPr>
+          <p:cNvPr id="28" name="TextBox 27"/>
+          <p:cNvSpPr txBox="1"/>
+          <p:nvPr/>
+        </p:nvSpPr>
+        <p:spPr>
+          <a:xfrm>
+            <a:off x="438912" y="5504688"/>
+            <a:ext cx="11338560" cy="256032"/>
+          </a:xfrm>
+          <a:prstGeom prst="rect">
+            <a:avLst/>
+          </a:prstGeom>
+          <a:noFill/>
+        </p:spPr>
+        <p:txBody>
+          <a:bodyPr wrap="square">
+            <a:spAutoFit/>
+          </a:bodyPr>
+          <a:lstStyle/>
+          <a:p>
+            <a:pPr algn="l">
+              <a:spcAft>
+                <a:spcPts val="300"/>
+              </a:spcAft>
+            </a:pPr>
+            <a:r>
+              <a:rPr sz="1100" b="1">
+                <a:solidFill>
+                  <a:srgbClr val="C9A227"/>
+                </a:solidFill>
+                <a:latin typeface="Calibri"/>
+              </a:rPr>
+              <a:t>RECINTO</a:t>
+            </a:r>
+          </a:p>
+        </p:txBody>
+      </p:sp>
+      <p:sp>
+        <p:nvSpPr>
+          <p:cNvPr id="29" name="TextBox 28"/>
+          <p:cNvSpPr txBox="1"/>
+          <p:nvPr/>
+        </p:nvSpPr>
+        <p:spPr>
+          <a:xfrm>
+            <a:off x="438912" y="5779008"/>
+            <a:ext cx="11338560" cy="658368"/>
+          </a:xfrm>
+          <a:prstGeom prst="rect">
+            <a:avLst/>
+          </a:prstGeom>
+          <a:noFill/>
+        </p:spPr>
+        <p:txBody>
+          <a:bodyPr wrap="square">
+            <a:spAutoFit/>
+          </a:bodyPr>
+          <a:lstStyle/>
+          <a:p>
+            <a:pPr algn="l">
+              <a:spcAft>
+                <a:spcPts val="300"/>
+              </a:spcAft>
+            </a:pPr>
+            <a:r>
+              <a:rPr sz="1300" b="0">
+                <a:solidFill>
+                  <a:srgbClr val="0D3B66"/>
+                </a:solidFill>
+                <a:latin typeface="Calibri"/>
+              </a:rPr>
+              <a:t>Recepción 06/11/2025  ·  Capacitación 14/11/2025  ·  Usuarios: Miguel Rupayan — Encargado de Operaciones  ·  Constanza Vilches — Analista Ambiental  ·  Equipo Mantención: C. Bustamante, O. Cuevas y Supervisor Eléctrico</a:t>
+            </a:r>
+          </a:p>
+        </p:txBody>
+      </p:sp>
+    </p:spTree>
+  </p:cSld>
+  <p:clrMapOvr>
+    <a:masterClrMapping/>
+  </p:clrMapOvr>
+</p:sld>
+</file>
+
+<file path=ppt/slides/slide6.xml><?xml version="1.0" encoding="utf-8"?>
+<p:sld xmlns:a="http://schemas.openxmlformats.org/drawingml/2006/main" xmlns:p="http://schemas.openxmlformats.org/presentationml/2006/main" xmlns:r="http://schemas.openxmlformats.org/officeDocument/2006/relationships">
+  <p:cSld>
+    <p:spTree>
+      <p:nvGrpSpPr>
+        <p:cNvPr id="1" name=""/>
+        <p:cNvGrpSpPr/>
+        <p:nvPr/>
+      </p:nvGrpSpPr>
+      <p:grpSpPr/>
+      <p:sp>
+        <p:nvSpPr>
+          <p:cNvPr id="2" name="Rectangle 1"/>
+          <p:cNvSpPr/>
+          <p:nvPr/>
+        </p:nvSpPr>
+        <p:spPr>
+          <a:xfrm>
+            <a:off x="0" y="0"/>
+            <a:ext cx="12191695" cy="841248"/>
+          </a:xfrm>
+          <a:prstGeom prst="rect">
+            <a:avLst/>
+          </a:prstGeom>
+          <a:solidFill>
+            <a:srgbClr val="0D3B66"/>
+          </a:solidFill>
+          <a:ln>
+            <a:noFill/>
+          </a:ln>
+        </p:spPr>
+        <p:style>
+          <a:lnRef idx="1">
+            <a:schemeClr val="accent1"/>
+          </a:lnRef>
+          <a:fillRef idx="3">
+            <a:schemeClr val="accent1"/>
+          </a:fillRef>
+          <a:effectRef idx="2">
+            <a:schemeClr val="accent1"/>
+          </a:effectRef>
+          <a:fontRef idx="minor">
+            <a:schemeClr val="lt1"/>
+          </a:fontRef>
+        </p:style>
+        <p:txBody>
+          <a:bodyPr rtlCol="0" anchor="ctr"/>
+          <a:lstStyle/>
+          <a:p>
+            <a:pPr algn="ctr"/>
+          </a:p>
+        </p:txBody>
+      </p:sp>
+      <p:sp>
+        <p:nvSpPr>
+          <p:cNvPr id="3" name="Rectangle 2"/>
+          <p:cNvSpPr/>
+          <p:nvPr/>
+        </p:nvSpPr>
+        <p:spPr>
+          <a:xfrm>
+            <a:off x="0" y="841248"/>
+            <a:ext cx="12191695" cy="54864"/>
+          </a:xfrm>
+          <a:prstGeom prst="rect">
+            <a:avLst/>
+          </a:prstGeom>
+          <a:solidFill>
+            <a:srgbClr val="C9A227"/>
+          </a:solidFill>
+          <a:ln>
+            <a:noFill/>
+          </a:ln>
+        </p:spPr>
+        <p:style>
+          <a:lnRef idx="1">
+            <a:schemeClr val="accent1"/>
+          </a:lnRef>
+          <a:fillRef idx="3">
+            <a:schemeClr val="accent1"/>
+          </a:fillRef>
+          <a:effectRef idx="2">
+            <a:schemeClr val="accent1"/>
+          </a:effectRef>
+          <a:fontRef idx="minor">
+            <a:schemeClr val="lt1"/>
+          </a:fontRef>
+        </p:style>
+        <p:txBody>
+          <a:bodyPr rtlCol="0" anchor="ctr"/>
+          <a:lstStyle/>
+          <a:p>
+            <a:pPr algn="ctr"/>
+          </a:p>
+        </p:txBody>
+      </p:sp>
+      <p:pic>
+        <p:nvPicPr>
+          <p:cNvPr id="4" name="Picture 3" descr="logo wes.bmp"/>
+          <p:cNvPicPr>
+            <a:picLocks noChangeAspect="1"/>
+          </p:cNvPicPr>
+          <p:nvPr/>
+        </p:nvPicPr>
+        <p:blipFill>
+          <a:blip r:embed="rId2"/>
+          <a:stretch>
+            <a:fillRect/>
+          </a:stretch>
+        </p:blipFill>
+        <p:spPr>
+          <a:xfrm>
+            <a:off x="10835640" y="146304"/>
+            <a:ext cx="1143000" cy="253401"/>
+          </a:xfrm>
+          <a:prstGeom prst="rect">
+            <a:avLst/>
+          </a:prstGeom>
+        </p:spPr>
+      </p:pic>
+      <p:sp>
+        <p:nvSpPr>
+          <p:cNvPr id="5" name="TextBox 4"/>
+          <p:cNvSpPr txBox="1"/>
+          <p:nvPr/>
+        </p:nvSpPr>
+        <p:spPr>
+          <a:xfrm>
+            <a:off x="256032" y="109728"/>
+            <a:ext cx="10607040" cy="384048"/>
+          </a:xfrm>
+          <a:prstGeom prst="rect">
+            <a:avLst/>
+          </a:prstGeom>
+          <a:noFill/>
+        </p:spPr>
+        <p:txBody>
+          <a:bodyPr wrap="square">
+            <a:spAutoFit/>
+          </a:bodyPr>
+          <a:lstStyle/>
+          <a:p>
+            <a:pPr algn="l">
+              <a:spcAft>
+                <a:spcPts val="300"/>
+              </a:spcAft>
+            </a:pPr>
+            <a:r>
+              <a:rPr sz="2000" b="1">
+                <a:solidFill>
+                  <a:srgbClr val="FFFFFF"/>
+                </a:solidFill>
+                <a:latin typeface="Calibri"/>
+              </a:rPr>
+              <a:t>MAM  ·  2. Consumo mensualizado</a:t>
+            </a:r>
+          </a:p>
+        </p:txBody>
+      </p:sp>
+      <p:sp>
+        <p:nvSpPr>
+          <p:cNvPr id="6" name="TextBox 5"/>
+          <p:cNvSpPr txBox="1"/>
+          <p:nvPr/>
+        </p:nvSpPr>
+        <p:spPr>
+          <a:xfrm>
+            <a:off x="256032" y="457200"/>
+            <a:ext cx="10607040" cy="329184"/>
+          </a:xfrm>
+          <a:prstGeom prst="rect">
+            <a:avLst/>
+          </a:prstGeom>
+          <a:noFill/>
+        </p:spPr>
+        <p:txBody>
+          <a:bodyPr wrap="square">
+            <a:spAutoFit/>
+          </a:bodyPr>
+          <a:lstStyle/>
+          <a:p>
+            <a:pPr algn="l">
+              <a:spcAft>
+                <a:spcPts val="300"/>
+              </a:spcAft>
+            </a:pPr>
+            <a:r>
+              <a:rPr sz="1100" b="0">
+                <a:solidFill>
+                  <a:srgbClr val="DCE6F0"/>
+                </a:solidFill>
+                <a:latin typeface="Calibri"/>
+              </a:rPr>
+              <a:t>Suma de los 5 puntos WES   |   01/05/2026 – 17/08/2026   |   Agosto: a la fecha vs proyección al 31</a:t>
+            </a:r>
+          </a:p>
+        </p:txBody>
+      </p:sp>
+      <p:sp>
+        <p:nvSpPr>
+          <p:cNvPr id="7" name="Rounded Rectangle 6"/>
+          <p:cNvSpPr/>
+          <p:nvPr/>
+        </p:nvSpPr>
+        <p:spPr>
+          <a:xfrm>
+            <a:off x="201168" y="1024128"/>
+            <a:ext cx="7973568" cy="4617720"/>
+          </a:xfrm>
+          <a:prstGeom prst="roundRect">
+            <a:avLst>
+              <a:gd name="adj" fmla="val 8000"/>
+            </a:avLst>
+          </a:prstGeom>
+          <a:solidFill>
+            <a:srgbClr val="F5F7FA"/>
+          </a:solidFill>
+          <a:ln>
+            <a:noFill/>
+          </a:ln>
+        </p:spPr>
+        <p:style>
+          <a:lnRef idx="1">
+            <a:schemeClr val="accent1"/>
+          </a:lnRef>
+          <a:fillRef idx="3">
+            <a:schemeClr val="accent1"/>
+          </a:fillRef>
+          <a:effectRef idx="2">
+            <a:schemeClr val="accent1"/>
+          </a:effectRef>
+          <a:fontRef idx="minor">
+            <a:schemeClr val="lt1"/>
+          </a:fontRef>
+        </p:style>
+        <p:txBody>
+          <a:bodyPr rtlCol="0" anchor="ctr"/>
+          <a:lstStyle/>
+          <a:p>
+            <a:pPr algn="ctr"/>
+          </a:p>
+        </p:txBody>
+      </p:sp>
+      <p:pic>
+        <p:nvPicPr>
+          <p:cNvPr id="8" name="Picture 7" descr="mam_mensual_may_ago.png"/>
+          <p:cNvPicPr>
+            <a:picLocks noChangeAspect="1"/>
+          </p:cNvPicPr>
+          <p:nvPr/>
+        </p:nvPicPr>
+        <p:blipFill>
+          <a:blip r:embed="rId3"/>
+          <a:stretch>
+            <a:fillRect/>
+          </a:stretch>
+        </p:blipFill>
+        <p:spPr>
+          <a:xfrm>
+            <a:off x="347472" y="1115568"/>
+            <a:ext cx="7680960" cy="3759628"/>
+          </a:xfrm>
+          <a:prstGeom prst="rect">
+            <a:avLst/>
+          </a:prstGeom>
+        </p:spPr>
+      </p:pic>
+      <p:sp>
+        <p:nvSpPr>
+          <p:cNvPr id="9" name="Rounded Rectangle 8"/>
+          <p:cNvSpPr/>
+          <p:nvPr/>
+        </p:nvSpPr>
+        <p:spPr>
+          <a:xfrm>
+            <a:off x="8302752" y="1024128"/>
+            <a:ext cx="3675887" cy="4617720"/>
+          </a:xfrm>
+          <a:prstGeom prst="roundRect">
+            <a:avLst>
+              <a:gd name="adj" fmla="val 8000"/>
+            </a:avLst>
+          </a:prstGeom>
+          <a:solidFill>
+            <a:srgbClr val="FFFFFF"/>
+          </a:solidFill>
+          <a:ln w="6350">
+            <a:solidFill>
+              <a:srgbClr val="1F77B4"/>
+            </a:solidFill>
+          </a:ln>
+        </p:spPr>
+        <p:style>
+          <a:lnRef idx="1">
+            <a:schemeClr val="accent1"/>
+          </a:lnRef>
+          <a:fillRef idx="3">
+            <a:schemeClr val="accent1"/>
+          </a:fillRef>
+          <a:effectRef idx="2">
+            <a:schemeClr val="accent1"/>
+          </a:effectRef>
+          <a:fontRef idx="minor">
+            <a:schemeClr val="lt1"/>
+          </a:fontRef>
+        </p:style>
+        <p:txBody>
+          <a:bodyPr rtlCol="0" anchor="ctr"/>
+          <a:lstStyle/>
+          <a:p>
+            <a:pPr algn="ctr"/>
+          </a:p>
+        </p:txBody>
+      </p:sp>
+      <p:sp>
+        <p:nvSpPr>
+          <p:cNvPr id="10" name="TextBox 9"/>
+          <p:cNvSpPr txBox="1"/>
+          <p:nvPr/>
+        </p:nvSpPr>
+        <p:spPr>
+          <a:xfrm>
+            <a:off x="8430768" y="1078992"/>
+            <a:ext cx="3419856" cy="219456"/>
+          </a:xfrm>
+          <a:prstGeom prst="rect">
+            <a:avLst/>
+          </a:prstGeom>
+          <a:noFill/>
+        </p:spPr>
+        <p:txBody>
+          <a:bodyPr wrap="square">
+            <a:spAutoFit/>
+          </a:bodyPr>
+          <a:lstStyle/>
+          <a:p>
+            <a:pPr algn="l">
+              <a:spcAft>
+                <a:spcPts val="300"/>
+              </a:spcAft>
+            </a:pPr>
+            <a:r>
+              <a:rPr sz="1100" b="1">
+                <a:solidFill>
+                  <a:srgbClr val="1F77B4"/>
+                </a:solidFill>
+                <a:latin typeface="Calibri"/>
+              </a:rPr>
+              <a:t>JULIO · último mes cerrado</a:t>
+            </a:r>
+          </a:p>
+        </p:txBody>
+      </p:sp>
+      <p:sp>
+        <p:nvSpPr>
+          <p:cNvPr id="11" name="TextBox 10"/>
+          <p:cNvSpPr txBox="1"/>
+          <p:nvPr/>
+        </p:nvSpPr>
+        <p:spPr>
+          <a:xfrm>
+            <a:off x="8430768" y="1298448"/>
+            <a:ext cx="3419856" cy="384048"/>
+          </a:xfrm>
+          <a:prstGeom prst="rect">
+            <a:avLst/>
+          </a:prstGeom>
+          <a:noFill/>
+        </p:spPr>
+        <p:txBody>
+          <a:bodyPr wrap="square">
+            <a:spAutoFit/>
+          </a:bodyPr>
+          <a:lstStyle/>
+          <a:p>
+            <a:pPr algn="l">
+              <a:spcAft>
+                <a:spcPts val="300"/>
+              </a:spcAft>
+            </a:pPr>
+            <a:r>
+              <a:rPr sz="1200" b="0">
+                <a:solidFill>
+                  <a:srgbClr val="5A5A5A"/>
+                </a:solidFill>
+                <a:latin typeface="Calibri"/>
+              </a:rPr>
+              <a:t>El recinto sumó 10.356 m³. Peso de cada equipo:</a:t>
+            </a:r>
+          </a:p>
+        </p:txBody>
+      </p:sp>
+      <p:sp>
+        <p:nvSpPr>
+          <p:cNvPr id="12" name="Rounded Rectangle 11"/>
+          <p:cNvSpPr/>
+          <p:nvPr/>
+        </p:nvSpPr>
+        <p:spPr>
+          <a:xfrm>
+            <a:off x="8430768" y="1719072"/>
+            <a:ext cx="3419856" cy="713232"/>
+          </a:xfrm>
+          <a:prstGeom prst="roundRect">
+            <a:avLst>
+              <a:gd name="adj" fmla="val 8000"/>
+            </a:avLst>
+          </a:prstGeom>
+          <a:solidFill>
+            <a:srgbClr val="F5F7FA"/>
+          </a:solidFill>
+          <a:ln w="6350">
+            <a:solidFill>
+              <a:srgbClr val="0D3B66"/>
+            </a:solidFill>
+          </a:ln>
+        </p:spPr>
+        <p:style>
+          <a:lnRef idx="1">
+            <a:schemeClr val="accent1"/>
+          </a:lnRef>
+          <a:fillRef idx="3">
+            <a:schemeClr val="accent1"/>
+          </a:fillRef>
+          <a:effectRef idx="2">
+            <a:schemeClr val="accent1"/>
+          </a:effectRef>
+          <a:fontRef idx="minor">
+            <a:schemeClr val="lt1"/>
+          </a:fontRef>
+        </p:style>
+        <p:txBody>
+          <a:bodyPr rtlCol="0" anchor="ctr"/>
+          <a:lstStyle/>
+          <a:p>
+            <a:pPr algn="ctr"/>
+          </a:p>
+        </p:txBody>
+      </p:sp>
+      <p:sp>
+        <p:nvSpPr>
+          <p:cNvPr id="13" name="TextBox 12"/>
+          <p:cNvSpPr txBox="1"/>
+          <p:nvPr/>
+        </p:nvSpPr>
+        <p:spPr>
+          <a:xfrm>
+            <a:off x="8558784" y="1764792"/>
+            <a:ext cx="3163824" cy="219456"/>
+          </a:xfrm>
+          <a:prstGeom prst="rect">
+            <a:avLst/>
+          </a:prstGeom>
+          <a:noFill/>
+        </p:spPr>
+        <p:txBody>
+          <a:bodyPr wrap="square">
+            <a:spAutoFit/>
+          </a:bodyPr>
+          <a:lstStyle/>
+          <a:p>
+            <a:pPr algn="l">
+              <a:spcAft>
+                <a:spcPts val="300"/>
+              </a:spcAft>
+            </a:pPr>
+            <a:r>
+              <a:rPr sz="1200" b="1">
+                <a:solidFill>
+                  <a:srgbClr val="0D3B66"/>
+                </a:solidFill>
+                <a:latin typeface="Calibri"/>
+              </a:rPr>
+              <a:t>Placa Bancaria</a:t>
+            </a:r>
+          </a:p>
+        </p:txBody>
+      </p:sp>
+      <p:sp>
+        <p:nvSpPr>
+          <p:cNvPr id="14" name="TextBox 13"/>
+          <p:cNvSpPr txBox="1"/>
+          <p:nvPr/>
+        </p:nvSpPr>
+        <p:spPr>
+          <a:xfrm>
+            <a:off x="8558784" y="2011679"/>
+            <a:ext cx="3163824" cy="347472"/>
+          </a:xfrm>
+          <a:prstGeom prst="rect">
+            <a:avLst/>
+          </a:prstGeom>
+          <a:noFill/>
+        </p:spPr>
+        <p:txBody>
+          <a:bodyPr wrap="square">
+            <a:spAutoFit/>
+          </a:bodyPr>
+          <a:lstStyle/>
+          <a:p>
+            <a:pPr algn="l">
+              <a:spcAft>
+                <a:spcPts val="300"/>
+              </a:spcAft>
+            </a:pPr>
+            <a:r>
+              <a:rPr sz="1600" b="1">
+                <a:solidFill>
+                  <a:srgbClr val="0D3B66"/>
+                </a:solidFill>
+                <a:latin typeface="Calibri"/>
+              </a:rPr>
+              <a:t>7.084 m³    68 %</a:t>
+            </a:r>
+          </a:p>
+        </p:txBody>
+      </p:sp>
+      <p:sp>
+        <p:nvSpPr>
+          <p:cNvPr id="15" name="Rounded Rectangle 14"/>
+          <p:cNvSpPr/>
+          <p:nvPr/>
+        </p:nvSpPr>
+        <p:spPr>
+          <a:xfrm>
+            <a:off x="8430768" y="2468879"/>
+            <a:ext cx="3419856" cy="713232"/>
+          </a:xfrm>
+          <a:prstGeom prst="roundRect">
+            <a:avLst>
+              <a:gd name="adj" fmla="val 8000"/>
+            </a:avLst>
+          </a:prstGeom>
+          <a:solidFill>
+            <a:srgbClr val="F5F7FA"/>
+          </a:solidFill>
+          <a:ln w="6350">
+            <a:solidFill>
+              <a:srgbClr val="1F77B4"/>
+            </a:solidFill>
+          </a:ln>
+        </p:spPr>
+        <p:style>
+          <a:lnRef idx="1">
+            <a:schemeClr val="accent1"/>
+          </a:lnRef>
+          <a:fillRef idx="3">
+            <a:schemeClr val="accent1"/>
+          </a:fillRef>
+          <a:effectRef idx="2">
+            <a:schemeClr val="accent1"/>
+          </a:effectRef>
+          <a:fontRef idx="minor">
+            <a:schemeClr val="lt1"/>
+          </a:fontRef>
+        </p:style>
+        <p:txBody>
+          <a:bodyPr rtlCol="0" anchor="ctr"/>
+          <a:lstStyle/>
+          <a:p>
+            <a:pPr algn="ctr"/>
+          </a:p>
+        </p:txBody>
+      </p:sp>
+      <p:sp>
+        <p:nvSpPr>
+          <p:cNvPr id="16" name="TextBox 15"/>
+          <p:cNvSpPr txBox="1"/>
+          <p:nvPr/>
+        </p:nvSpPr>
+        <p:spPr>
+          <a:xfrm>
+            <a:off x="8558784" y="2514599"/>
+            <a:ext cx="3163824" cy="219456"/>
+          </a:xfrm>
+          <a:prstGeom prst="rect">
+            <a:avLst/>
+          </a:prstGeom>
+          <a:noFill/>
+        </p:spPr>
+        <p:txBody>
+          <a:bodyPr wrap="square">
+            <a:spAutoFit/>
+          </a:bodyPr>
+          <a:lstStyle/>
+          <a:p>
+            <a:pPr algn="l">
+              <a:spcAft>
+                <a:spcPts val="300"/>
+              </a:spcAft>
+            </a:pPr>
+            <a:r>
+              <a:rPr sz="1200" b="1">
+                <a:solidFill>
+                  <a:srgbClr val="1F77B4"/>
+                </a:solidFill>
+                <a:latin typeface="Calibri"/>
+              </a:rPr>
+              <a:t>Ripley</a:t>
+            </a:r>
+          </a:p>
+        </p:txBody>
+      </p:sp>
+      <p:sp>
+        <p:nvSpPr>
+          <p:cNvPr id="17" name="TextBox 16"/>
+          <p:cNvSpPr txBox="1"/>
+          <p:nvPr/>
+        </p:nvSpPr>
+        <p:spPr>
+          <a:xfrm>
+            <a:off x="8558784" y="2761487"/>
+            <a:ext cx="3163824" cy="347472"/>
+          </a:xfrm>
+          <a:prstGeom prst="rect">
+            <a:avLst/>
+          </a:prstGeom>
+          <a:noFill/>
+        </p:spPr>
+        <p:txBody>
+          <a:bodyPr wrap="square">
+            <a:spAutoFit/>
+          </a:bodyPr>
+          <a:lstStyle/>
+          <a:p>
+            <a:pPr algn="l">
+              <a:spcAft>
+                <a:spcPts val="300"/>
+              </a:spcAft>
+            </a:pPr>
+            <a:r>
+              <a:rPr sz="1600" b="1">
+                <a:solidFill>
+                  <a:srgbClr val="0D3B66"/>
+                </a:solidFill>
+                <a:latin typeface="Calibri"/>
+              </a:rPr>
+              <a:t>3.245 m³    31 %</a:t>
+            </a:r>
+          </a:p>
+        </p:txBody>
+      </p:sp>
+      <p:sp>
+        <p:nvSpPr>
+          <p:cNvPr id="18" name="Rounded Rectangle 17"/>
+          <p:cNvSpPr/>
+          <p:nvPr/>
+        </p:nvSpPr>
+        <p:spPr>
+          <a:xfrm>
+            <a:off x="8430768" y="3218687"/>
+            <a:ext cx="3419856" cy="713232"/>
+          </a:xfrm>
+          <a:prstGeom prst="roundRect">
+            <a:avLst>
+              <a:gd name="adj" fmla="val 8000"/>
+            </a:avLst>
+          </a:prstGeom>
+          <a:solidFill>
+            <a:srgbClr val="F5F7FA"/>
+          </a:solidFill>
+          <a:ln w="6350">
+            <a:solidFill>
+              <a:srgbClr val="7BA3C9"/>
+            </a:solidFill>
+          </a:ln>
+        </p:spPr>
+        <p:style>
+          <a:lnRef idx="1">
+            <a:schemeClr val="accent1"/>
+          </a:lnRef>
+          <a:fillRef idx="3">
+            <a:schemeClr val="accent1"/>
+          </a:fillRef>
+          <a:effectRef idx="2">
+            <a:schemeClr val="accent1"/>
+          </a:effectRef>
+          <a:fontRef idx="minor">
+            <a:schemeClr val="lt1"/>
+          </a:fontRef>
+        </p:style>
+        <p:txBody>
+          <a:bodyPr rtlCol="0" anchor="ctr"/>
+          <a:lstStyle/>
+          <a:p>
+            <a:pPr algn="ctr"/>
+          </a:p>
+        </p:txBody>
+      </p:sp>
+      <p:sp>
+        <p:nvSpPr>
+          <p:cNvPr id="19" name="TextBox 18"/>
+          <p:cNvSpPr txBox="1"/>
+          <p:nvPr/>
+        </p:nvSpPr>
+        <p:spPr>
+          <a:xfrm>
+            <a:off x="8558784" y="3264407"/>
+            <a:ext cx="3163824" cy="219456"/>
+          </a:xfrm>
+          <a:prstGeom prst="rect">
+            <a:avLst/>
+          </a:prstGeom>
+          <a:noFill/>
+        </p:spPr>
+        <p:txBody>
+          <a:bodyPr wrap="square">
+            <a:spAutoFit/>
+          </a:bodyPr>
+          <a:lstStyle/>
+          <a:p>
+            <a:pPr algn="l">
+              <a:spcAft>
+                <a:spcPts val="300"/>
+              </a:spcAft>
+            </a:pPr>
+            <a:r>
+              <a:rPr sz="1200" b="1">
+                <a:solidFill>
+                  <a:srgbClr val="7BA3C9"/>
+                </a:solidFill>
+                <a:latin typeface="Calibri"/>
+              </a:rPr>
+              <a:t>Pasillo Técnico</a:t>
+            </a:r>
+          </a:p>
+        </p:txBody>
+      </p:sp>
+      <p:sp>
+        <p:nvSpPr>
+          <p:cNvPr id="20" name="TextBox 19"/>
+          <p:cNvSpPr txBox="1"/>
+          <p:nvPr/>
+        </p:nvSpPr>
+        <p:spPr>
+          <a:xfrm>
+            <a:off x="8558784" y="3511295"/>
+            <a:ext cx="3163824" cy="347472"/>
+          </a:xfrm>
+          <a:prstGeom prst="rect">
+            <a:avLst/>
+          </a:prstGeom>
+          <a:noFill/>
+        </p:spPr>
+        <p:txBody>
+          <a:bodyPr wrap="square">
+            <a:spAutoFit/>
+          </a:bodyPr>
+          <a:lstStyle/>
+          <a:p>
+            <a:pPr algn="l">
+              <a:spcAft>
+                <a:spcPts val="300"/>
+              </a:spcAft>
+            </a:pPr>
+            <a:r>
+              <a:rPr sz="1600" b="1">
+                <a:solidFill>
+                  <a:srgbClr val="0D3B66"/>
+                </a:solidFill>
+                <a:latin typeface="Calibri"/>
+              </a:rPr>
+              <a:t>26 m³    0 %</a:t>
+            </a:r>
+          </a:p>
+        </p:txBody>
+      </p:sp>
+      <p:sp>
+        <p:nvSpPr>
+          <p:cNvPr id="21" name="Rounded Rectangle 20"/>
+          <p:cNvSpPr/>
+          <p:nvPr/>
+        </p:nvSpPr>
+        <p:spPr>
+          <a:xfrm>
+            <a:off x="8430768" y="3968496"/>
+            <a:ext cx="3419856" cy="713232"/>
+          </a:xfrm>
+          <a:prstGeom prst="roundRect">
+            <a:avLst>
+              <a:gd name="adj" fmla="val 8000"/>
+            </a:avLst>
+          </a:prstGeom>
+          <a:solidFill>
+            <a:srgbClr val="F5F7FA"/>
+          </a:solidFill>
+          <a:ln w="6350">
+            <a:solidFill>
+              <a:srgbClr val="5A8C6E"/>
+            </a:solidFill>
+          </a:ln>
+        </p:spPr>
+        <p:style>
+          <a:lnRef idx="1">
+            <a:schemeClr val="accent1"/>
+          </a:lnRef>
+          <a:fillRef idx="3">
+            <a:schemeClr val="accent1"/>
+          </a:fillRef>
+          <a:effectRef idx="2">
+            <a:schemeClr val="accent1"/>
+          </a:effectRef>
+          <a:fontRef idx="minor">
+            <a:schemeClr val="lt1"/>
+          </a:fontRef>
+        </p:style>
+        <p:txBody>
+          <a:bodyPr rtlCol="0" anchor="ctr"/>
+          <a:lstStyle/>
+          <a:p>
+            <a:pPr algn="ctr"/>
+          </a:p>
+        </p:txBody>
+      </p:sp>
+      <p:sp>
+        <p:nvSpPr>
+          <p:cNvPr id="22" name="TextBox 21"/>
+          <p:cNvSpPr txBox="1"/>
+          <p:nvPr/>
+        </p:nvSpPr>
+        <p:spPr>
+          <a:xfrm>
+            <a:off x="8558784" y="4014215"/>
+            <a:ext cx="3163824" cy="219456"/>
+          </a:xfrm>
+          <a:prstGeom prst="rect">
+            <a:avLst/>
+          </a:prstGeom>
+          <a:noFill/>
+        </p:spPr>
+        <p:txBody>
+          <a:bodyPr wrap="square">
+            <a:spAutoFit/>
+          </a:bodyPr>
+          <a:lstStyle/>
+          <a:p>
+            <a:pPr algn="l">
+              <a:spcAft>
+                <a:spcPts val="300"/>
+              </a:spcAft>
+            </a:pPr>
+            <a:r>
+              <a:rPr sz="1200" b="1">
+                <a:solidFill>
+                  <a:srgbClr val="5A8C6E"/>
+                </a:solidFill>
+                <a:latin typeface="Calibri"/>
+              </a:rPr>
+              <a:t>Salida ARROW</a:t>
+            </a:r>
+          </a:p>
+        </p:txBody>
+      </p:sp>
+      <p:sp>
+        <p:nvSpPr>
+          <p:cNvPr id="23" name="TextBox 22"/>
+          <p:cNvSpPr txBox="1"/>
+          <p:nvPr/>
+        </p:nvSpPr>
+        <p:spPr>
+          <a:xfrm>
+            <a:off x="8558784" y="4261104"/>
+            <a:ext cx="3163824" cy="347472"/>
+          </a:xfrm>
+          <a:prstGeom prst="rect">
+            <a:avLst/>
+          </a:prstGeom>
+          <a:noFill/>
+        </p:spPr>
+        <p:txBody>
+          <a:bodyPr wrap="square">
+            <a:spAutoFit/>
+          </a:bodyPr>
+          <a:lstStyle/>
+          <a:p>
+            <a:pPr algn="l">
+              <a:spcAft>
+                <a:spcPts val="300"/>
+              </a:spcAft>
+            </a:pPr>
+            <a:r>
+              <a:rPr sz="1600" b="1">
+                <a:solidFill>
+                  <a:srgbClr val="0D3B66"/>
+                </a:solidFill>
+                <a:latin typeface="Calibri"/>
+              </a:rPr>
+              <a:t>1 m³    0 %</a:t>
+            </a:r>
+          </a:p>
+        </p:txBody>
+      </p:sp>
+      <p:sp>
+        <p:nvSpPr>
+          <p:cNvPr id="24" name="Rounded Rectangle 23"/>
+          <p:cNvSpPr/>
+          <p:nvPr/>
+        </p:nvSpPr>
+        <p:spPr>
+          <a:xfrm>
+            <a:off x="8430768" y="4718304"/>
+            <a:ext cx="3419856" cy="713232"/>
+          </a:xfrm>
+          <a:prstGeom prst="roundRect">
+            <a:avLst>
+              <a:gd name="adj" fmla="val 8000"/>
+            </a:avLst>
+          </a:prstGeom>
+          <a:solidFill>
+            <a:srgbClr val="F5F7FA"/>
+          </a:solidFill>
+          <a:ln w="6350">
+            <a:solidFill>
+              <a:srgbClr val="C9A227"/>
+            </a:solidFill>
+          </a:ln>
+        </p:spPr>
+        <p:style>
+          <a:lnRef idx="1">
+            <a:schemeClr val="accent1"/>
+          </a:lnRef>
+          <a:fillRef idx="3">
+            <a:schemeClr val="accent1"/>
+          </a:fillRef>
+          <a:effectRef idx="2">
+            <a:schemeClr val="accent1"/>
+          </a:effectRef>
+          <a:fontRef idx="minor">
+            <a:schemeClr val="lt1"/>
+          </a:fontRef>
+        </p:style>
+        <p:txBody>
+          <a:bodyPr rtlCol="0" anchor="ctr"/>
+          <a:lstStyle/>
+          <a:p>
+            <a:pPr algn="ctr"/>
+          </a:p>
+        </p:txBody>
+      </p:sp>
+      <p:sp>
+        <p:nvSpPr>
+          <p:cNvPr id="25" name="TextBox 24"/>
+          <p:cNvSpPr txBox="1"/>
+          <p:nvPr/>
+        </p:nvSpPr>
+        <p:spPr>
+          <a:xfrm>
+            <a:off x="8558784" y="4764024"/>
+            <a:ext cx="3163824" cy="219456"/>
+          </a:xfrm>
+          <a:prstGeom prst="rect">
+            <a:avLst/>
+          </a:prstGeom>
+          <a:noFill/>
+        </p:spPr>
+        <p:txBody>
+          <a:bodyPr wrap="square">
+            <a:spAutoFit/>
+          </a:bodyPr>
+          <a:lstStyle/>
+          <a:p>
+            <a:pPr algn="l">
+              <a:spcAft>
+                <a:spcPts val="300"/>
+              </a:spcAft>
+            </a:pPr>
+            <a:r>
+              <a:rPr sz="1200" b="1">
+                <a:solidFill>
+                  <a:srgbClr val="C9A227"/>
+                </a:solidFill>
+                <a:latin typeface="Calibri"/>
+              </a:rPr>
+              <a:t>Falabella</a:t>
+            </a:r>
+          </a:p>
+        </p:txBody>
+      </p:sp>
+      <p:sp>
+        <p:nvSpPr>
+          <p:cNvPr id="26" name="TextBox 25"/>
+          <p:cNvSpPr txBox="1"/>
+          <p:nvPr/>
+        </p:nvSpPr>
+        <p:spPr>
+          <a:xfrm>
+            <a:off x="8558784" y="5010912"/>
+            <a:ext cx="3163824" cy="347472"/>
+          </a:xfrm>
+          <a:prstGeom prst="rect">
+            <a:avLst/>
+          </a:prstGeom>
+          <a:noFill/>
+        </p:spPr>
+        <p:txBody>
+          <a:bodyPr wrap="square">
+            <a:spAutoFit/>
+          </a:bodyPr>
+          <a:lstStyle/>
+          <a:p>
+            <a:pPr algn="l">
+              <a:spcAft>
+                <a:spcPts val="300"/>
+              </a:spcAft>
+            </a:pPr>
+            <a:r>
+              <a:rPr sz="1400" b="1">
+                <a:solidFill>
+                  <a:srgbClr val="0D3B66"/>
+                </a:solidFill>
+                <a:latin typeface="Calibri"/>
+              </a:rPr>
+              <a:t>0 m³    0 %  ·  activo 11/08</a:t>
+            </a:r>
+          </a:p>
+        </p:txBody>
+      </p:sp>
+      <p:sp>
+        <p:nvSpPr>
+          <p:cNvPr id="27" name="TextBox 26"/>
+          <p:cNvSpPr txBox="1"/>
+          <p:nvPr/>
+        </p:nvSpPr>
+        <p:spPr>
+          <a:xfrm>
+            <a:off x="256032" y="5742432"/>
+            <a:ext cx="11887200" cy="960120"/>
+          </a:xfrm>
+          <a:prstGeom prst="rect">
+            <a:avLst/>
+          </a:prstGeom>
+          <a:noFill/>
+        </p:spPr>
+        <p:txBody>
+          <a:bodyPr wrap="square">
+            <a:spAutoFit/>
+          </a:bodyPr>
+          <a:lstStyle/>
+          <a:p>
+            <a:pPr algn="l">
+              <a:spcAft>
+                <a:spcPts val="300"/>
+              </a:spcAft>
+            </a:pPr>
+            <a:r>
+              <a:rPr sz="1300" b="0">
+                <a:solidFill>
+                  <a:srgbClr val="0D3B66"/>
+                </a:solidFill>
+                <a:latin typeface="Calibri"/>
+              </a:rPr>
+              <a:t>Mayo 7.511 m³   ·   Junio 10.014 m³   ·   Julio 10.356 m³   ·   Agosto 1–17: 4.165 m³   ·   Proyección agosto: 7.595 m³ (245 m³/día × 31).</a:t>
+            </a:r>
+          </a:p>
+          <a:p>
+            <a:pPr algn="l">
+              <a:spcAft>
+                <a:spcPts val="300"/>
+              </a:spcAft>
+            </a:pPr>
+            <a:r>
+              <a:rPr sz="1200" b="0">
+                <a:solidFill>
+                  <a:srgbClr val="5A5A5A"/>
+                </a:solidFill>
+                <a:latin typeface="Calibri"/>
+              </a:rPr>
+              <a:t>Dorado = lo que agosto ya lleva. Tramo claro = proyección del resto del mes. Junio sube por Placa Bancaria (salto 18/06). Falabella no entra en julio: activo desde el 11/08.</a:t>
             </a:r>
           </a:p>
         </p:txBody>

--- a/reports/Parque_Arauco/TMP_7MALLS/entrega_diego_anibal/Recorrido_ejecutivo_PA_MAE_20260817.pptx
+++ b/reports/Parque_Arauco/TMP_7MALLS/entrega_diego_anibal/Recorrido_ejecutivo_PA_MAE_20260817.pptx
@@ -11,6 +11,7 @@
     <p:sldId id="259" r:id="rId10"/>
     <p:sldId id="260" r:id="rId11"/>
     <p:sldId id="261" r:id="rId12"/>
+    <p:sldId id="262" r:id="rId13"/>
   </p:sldIdLst>
   <p:sldSz cx="12191695" cy="6858000" type="screen4x3"/>
   <p:notesSz cx="6858000" cy="9144000"/>
@@ -8112,6 +8113,1914 @@
                 <a:latin typeface="Calibri"/>
               </a:rPr>
               <a:t>Dorado = lo que agosto ya lleva. Tramo claro = proyección del resto del mes. Junio sube por Placa Bancaria (salto 18/06). Falabella no entra en julio: activo desde el 11/08.</a:t>
+            </a:r>
+          </a:p>
+        </p:txBody>
+      </p:sp>
+    </p:spTree>
+  </p:cSld>
+  <p:clrMapOvr>
+    <a:masterClrMapping/>
+  </p:clrMapOvr>
+</p:sld>
+</file>
+
+<file path=ppt/slides/slide7.xml><?xml version="1.0" encoding="utf-8"?>
+<p:sld xmlns:a="http://schemas.openxmlformats.org/drawingml/2006/main" xmlns:p="http://schemas.openxmlformats.org/presentationml/2006/main" xmlns:r="http://schemas.openxmlformats.org/officeDocument/2006/relationships">
+  <p:cSld>
+    <p:spTree>
+      <p:nvGrpSpPr>
+        <p:cNvPr id="1" name=""/>
+        <p:cNvGrpSpPr/>
+        <p:nvPr/>
+      </p:nvGrpSpPr>
+      <p:grpSpPr/>
+      <p:sp>
+        <p:nvSpPr>
+          <p:cNvPr id="2" name="Rectangle 1"/>
+          <p:cNvSpPr/>
+          <p:nvPr/>
+        </p:nvSpPr>
+        <p:spPr>
+          <a:xfrm>
+            <a:off x="0" y="0"/>
+            <a:ext cx="12191695" cy="841248"/>
+          </a:xfrm>
+          <a:prstGeom prst="rect">
+            <a:avLst/>
+          </a:prstGeom>
+          <a:solidFill>
+            <a:srgbClr val="0D3B66"/>
+          </a:solidFill>
+          <a:ln>
+            <a:noFill/>
+          </a:ln>
+        </p:spPr>
+        <p:style>
+          <a:lnRef idx="1">
+            <a:schemeClr val="accent1"/>
+          </a:lnRef>
+          <a:fillRef idx="3">
+            <a:schemeClr val="accent1"/>
+          </a:fillRef>
+          <a:effectRef idx="2">
+            <a:schemeClr val="accent1"/>
+          </a:effectRef>
+          <a:fontRef idx="minor">
+            <a:schemeClr val="lt1"/>
+          </a:fontRef>
+        </p:style>
+        <p:txBody>
+          <a:bodyPr rtlCol="0" anchor="ctr"/>
+          <a:lstStyle/>
+          <a:p>
+            <a:pPr algn="ctr"/>
+          </a:p>
+        </p:txBody>
+      </p:sp>
+      <p:sp>
+        <p:nvSpPr>
+          <p:cNvPr id="3" name="Rectangle 2"/>
+          <p:cNvSpPr/>
+          <p:nvPr/>
+        </p:nvSpPr>
+        <p:spPr>
+          <a:xfrm>
+            <a:off x="0" y="841248"/>
+            <a:ext cx="12191695" cy="54864"/>
+          </a:xfrm>
+          <a:prstGeom prst="rect">
+            <a:avLst/>
+          </a:prstGeom>
+          <a:solidFill>
+            <a:srgbClr val="C9A227"/>
+          </a:solidFill>
+          <a:ln>
+            <a:noFill/>
+          </a:ln>
+        </p:spPr>
+        <p:style>
+          <a:lnRef idx="1">
+            <a:schemeClr val="accent1"/>
+          </a:lnRef>
+          <a:fillRef idx="3">
+            <a:schemeClr val="accent1"/>
+          </a:fillRef>
+          <a:effectRef idx="2">
+            <a:schemeClr val="accent1"/>
+          </a:effectRef>
+          <a:fontRef idx="minor">
+            <a:schemeClr val="lt1"/>
+          </a:fontRef>
+        </p:style>
+        <p:txBody>
+          <a:bodyPr rtlCol="0" anchor="ctr"/>
+          <a:lstStyle/>
+          <a:p>
+            <a:pPr algn="ctr"/>
+          </a:p>
+        </p:txBody>
+      </p:sp>
+      <p:pic>
+        <p:nvPicPr>
+          <p:cNvPr id="4" name="Picture 3" descr="logo wes.bmp"/>
+          <p:cNvPicPr>
+            <a:picLocks noChangeAspect="1"/>
+          </p:cNvPicPr>
+          <p:nvPr/>
+        </p:nvPicPr>
+        <p:blipFill>
+          <a:blip r:embed="rId2"/>
+          <a:stretch>
+            <a:fillRect/>
+          </a:stretch>
+        </p:blipFill>
+        <p:spPr>
+          <a:xfrm>
+            <a:off x="10835640" y="146304"/>
+            <a:ext cx="1143000" cy="253401"/>
+          </a:xfrm>
+          <a:prstGeom prst="rect">
+            <a:avLst/>
+          </a:prstGeom>
+        </p:spPr>
+      </p:pic>
+      <p:sp>
+        <p:nvSpPr>
+          <p:cNvPr id="5" name="TextBox 4"/>
+          <p:cNvSpPr txBox="1"/>
+          <p:nvPr/>
+        </p:nvSpPr>
+        <p:spPr>
+          <a:xfrm>
+            <a:off x="256032" y="109728"/>
+            <a:ext cx="10607040" cy="384048"/>
+          </a:xfrm>
+          <a:prstGeom prst="rect">
+            <a:avLst/>
+          </a:prstGeom>
+          <a:noFill/>
+        </p:spPr>
+        <p:txBody>
+          <a:bodyPr wrap="square">
+            <a:spAutoFit/>
+          </a:bodyPr>
+          <a:lstStyle/>
+          <a:p>
+            <a:pPr algn="l">
+              <a:spcAft>
+                <a:spcPts val="300"/>
+              </a:spcAft>
+            </a:pPr>
+            <a:r>
+              <a:rPr sz="2000" b="1">
+                <a:solidFill>
+                  <a:srgbClr val="FFFFFF"/>
+                </a:solidFill>
+                <a:latin typeface="Calibri"/>
+              </a:rPr>
+              <a:t>MAM  ·  Equipos y consumo</a:t>
+            </a:r>
+          </a:p>
+        </p:txBody>
+      </p:sp>
+      <p:sp>
+        <p:nvSpPr>
+          <p:cNvPr id="6" name="TextBox 5"/>
+          <p:cNvSpPr txBox="1"/>
+          <p:nvPr/>
+        </p:nvSpPr>
+        <p:spPr>
+          <a:xfrm>
+            <a:off x="256032" y="457200"/>
+            <a:ext cx="10607040" cy="329184"/>
+          </a:xfrm>
+          <a:prstGeom prst="rect">
+            <a:avLst/>
+          </a:prstGeom>
+          <a:noFill/>
+        </p:spPr>
+        <p:txBody>
+          <a:bodyPr wrap="square">
+            <a:spAutoFit/>
+          </a:bodyPr>
+          <a:lstStyle/>
+          <a:p>
+            <a:pPr algn="l">
+              <a:spcAft>
+                <a:spcPts val="300"/>
+              </a:spcAft>
+            </a:pPr>
+            <a:r>
+              <a:rPr sz="1100" b="0">
+                <a:solidFill>
+                  <a:srgbClr val="DCE6F0"/>
+                </a:solidFill>
+                <a:latin typeface="Calibri"/>
+              </a:rPr>
+              <a:t>Mall Arauco Maipú   |   5 puntos WES   |   01/05/2026 – 17/08/2026   |   propuesta: una lámina</a:t>
+            </a:r>
+          </a:p>
+        </p:txBody>
+      </p:sp>
+      <p:sp>
+        <p:nvSpPr>
+          <p:cNvPr id="7" name="Rounded Rectangle 6"/>
+          <p:cNvSpPr/>
+          <p:nvPr/>
+        </p:nvSpPr>
+        <p:spPr>
+          <a:xfrm>
+            <a:off x="201168" y="1024128"/>
+            <a:ext cx="2286000" cy="658368"/>
+          </a:xfrm>
+          <a:prstGeom prst="roundRect">
+            <a:avLst>
+              <a:gd name="adj" fmla="val 8000"/>
+            </a:avLst>
+          </a:prstGeom>
+          <a:solidFill>
+            <a:srgbClr val="F5F7FA"/>
+          </a:solidFill>
+          <a:ln w="6350">
+            <a:solidFill>
+              <a:srgbClr val="1F77B4"/>
+            </a:solidFill>
+          </a:ln>
+        </p:spPr>
+        <p:style>
+          <a:lnRef idx="1">
+            <a:schemeClr val="accent1"/>
+          </a:lnRef>
+          <a:fillRef idx="3">
+            <a:schemeClr val="accent1"/>
+          </a:fillRef>
+          <a:effectRef idx="2">
+            <a:schemeClr val="accent1"/>
+          </a:effectRef>
+          <a:fontRef idx="minor">
+            <a:schemeClr val="lt1"/>
+          </a:fontRef>
+        </p:style>
+        <p:txBody>
+          <a:bodyPr rtlCol="0" anchor="ctr"/>
+          <a:lstStyle/>
+          <a:p>
+            <a:pPr algn="ctr"/>
+          </a:p>
+        </p:txBody>
+      </p:sp>
+      <p:sp>
+        <p:nvSpPr>
+          <p:cNvPr id="8" name="TextBox 7"/>
+          <p:cNvSpPr txBox="1"/>
+          <p:nvPr/>
+        </p:nvSpPr>
+        <p:spPr>
+          <a:xfrm>
+            <a:off x="292608" y="1060704"/>
+            <a:ext cx="2121408" cy="201168"/>
+          </a:xfrm>
+          <a:prstGeom prst="rect">
+            <a:avLst/>
+          </a:prstGeom>
+          <a:noFill/>
+        </p:spPr>
+        <p:txBody>
+          <a:bodyPr wrap="square">
+            <a:spAutoFit/>
+          </a:bodyPr>
+          <a:lstStyle/>
+          <a:p>
+            <a:pPr algn="l">
+              <a:spcAft>
+                <a:spcPts val="300"/>
+              </a:spcAft>
+            </a:pPr>
+            <a:r>
+              <a:rPr sz="1000" b="1">
+                <a:solidFill>
+                  <a:srgbClr val="C9A227"/>
+                </a:solidFill>
+                <a:latin typeface="Calibri"/>
+              </a:rPr>
+              <a:t>000025-08</a:t>
+            </a:r>
+          </a:p>
+        </p:txBody>
+      </p:sp>
+      <p:sp>
+        <p:nvSpPr>
+          <p:cNvPr id="9" name="TextBox 8"/>
+          <p:cNvSpPr txBox="1"/>
+          <p:nvPr/>
+        </p:nvSpPr>
+        <p:spPr>
+          <a:xfrm>
+            <a:off x="292608" y="1261872"/>
+            <a:ext cx="2121408" cy="219456"/>
+          </a:xfrm>
+          <a:prstGeom prst="rect">
+            <a:avLst/>
+          </a:prstGeom>
+          <a:noFill/>
+        </p:spPr>
+        <p:txBody>
+          <a:bodyPr wrap="square">
+            <a:spAutoFit/>
+          </a:bodyPr>
+          <a:lstStyle/>
+          <a:p>
+            <a:pPr algn="l">
+              <a:spcAft>
+                <a:spcPts val="300"/>
+              </a:spcAft>
+            </a:pPr>
+            <a:r>
+              <a:rPr sz="1200" b="1">
+                <a:solidFill>
+                  <a:srgbClr val="0D3B66"/>
+                </a:solidFill>
+                <a:latin typeface="Calibri"/>
+              </a:rPr>
+              <a:t>Placa Bancaria</a:t>
+            </a:r>
+          </a:p>
+        </p:txBody>
+      </p:sp>
+      <p:sp>
+        <p:nvSpPr>
+          <p:cNvPr id="10" name="Rounded Rectangle 9"/>
+          <p:cNvSpPr/>
+          <p:nvPr/>
+        </p:nvSpPr>
+        <p:spPr>
+          <a:xfrm>
+            <a:off x="2578608" y="1024128"/>
+            <a:ext cx="2286000" cy="658368"/>
+          </a:xfrm>
+          <a:prstGeom prst="roundRect">
+            <a:avLst>
+              <a:gd name="adj" fmla="val 8000"/>
+            </a:avLst>
+          </a:prstGeom>
+          <a:solidFill>
+            <a:srgbClr val="F5F7FA"/>
+          </a:solidFill>
+          <a:ln w="6350">
+            <a:solidFill>
+              <a:srgbClr val="1F77B4"/>
+            </a:solidFill>
+          </a:ln>
+        </p:spPr>
+        <p:style>
+          <a:lnRef idx="1">
+            <a:schemeClr val="accent1"/>
+          </a:lnRef>
+          <a:fillRef idx="3">
+            <a:schemeClr val="accent1"/>
+          </a:fillRef>
+          <a:effectRef idx="2">
+            <a:schemeClr val="accent1"/>
+          </a:effectRef>
+          <a:fontRef idx="minor">
+            <a:schemeClr val="lt1"/>
+          </a:fontRef>
+        </p:style>
+        <p:txBody>
+          <a:bodyPr rtlCol="0" anchor="ctr"/>
+          <a:lstStyle/>
+          <a:p>
+            <a:pPr algn="ctr"/>
+          </a:p>
+        </p:txBody>
+      </p:sp>
+      <p:sp>
+        <p:nvSpPr>
+          <p:cNvPr id="11" name="TextBox 10"/>
+          <p:cNvSpPr txBox="1"/>
+          <p:nvPr/>
+        </p:nvSpPr>
+        <p:spPr>
+          <a:xfrm>
+            <a:off x="2670048" y="1060704"/>
+            <a:ext cx="2121408" cy="201168"/>
+          </a:xfrm>
+          <a:prstGeom prst="rect">
+            <a:avLst/>
+          </a:prstGeom>
+          <a:noFill/>
+        </p:spPr>
+        <p:txBody>
+          <a:bodyPr wrap="square">
+            <a:spAutoFit/>
+          </a:bodyPr>
+          <a:lstStyle/>
+          <a:p>
+            <a:pPr algn="l">
+              <a:spcAft>
+                <a:spcPts val="300"/>
+              </a:spcAft>
+            </a:pPr>
+            <a:r>
+              <a:rPr sz="1000" b="1">
+                <a:solidFill>
+                  <a:srgbClr val="C9A227"/>
+                </a:solidFill>
+                <a:latin typeface="Calibri"/>
+              </a:rPr>
+              <a:t>000025-10</a:t>
+            </a:r>
+          </a:p>
+        </p:txBody>
+      </p:sp>
+      <p:sp>
+        <p:nvSpPr>
+          <p:cNvPr id="12" name="TextBox 11"/>
+          <p:cNvSpPr txBox="1"/>
+          <p:nvPr/>
+        </p:nvSpPr>
+        <p:spPr>
+          <a:xfrm>
+            <a:off x="2670048" y="1261872"/>
+            <a:ext cx="2121408" cy="219456"/>
+          </a:xfrm>
+          <a:prstGeom prst="rect">
+            <a:avLst/>
+          </a:prstGeom>
+          <a:noFill/>
+        </p:spPr>
+        <p:txBody>
+          <a:bodyPr wrap="square">
+            <a:spAutoFit/>
+          </a:bodyPr>
+          <a:lstStyle/>
+          <a:p>
+            <a:pPr algn="l">
+              <a:spcAft>
+                <a:spcPts val="300"/>
+              </a:spcAft>
+            </a:pPr>
+            <a:r>
+              <a:rPr sz="1200" b="1">
+                <a:solidFill>
+                  <a:srgbClr val="0D3B66"/>
+                </a:solidFill>
+                <a:latin typeface="Calibri"/>
+              </a:rPr>
+              <a:t>Ripley</a:t>
+            </a:r>
+          </a:p>
+        </p:txBody>
+      </p:sp>
+      <p:sp>
+        <p:nvSpPr>
+          <p:cNvPr id="13" name="Rounded Rectangle 12"/>
+          <p:cNvSpPr/>
+          <p:nvPr/>
+        </p:nvSpPr>
+        <p:spPr>
+          <a:xfrm>
+            <a:off x="4956048" y="1024128"/>
+            <a:ext cx="2286000" cy="658368"/>
+          </a:xfrm>
+          <a:prstGeom prst="roundRect">
+            <a:avLst>
+              <a:gd name="adj" fmla="val 8000"/>
+            </a:avLst>
+          </a:prstGeom>
+          <a:solidFill>
+            <a:srgbClr val="F5F7FA"/>
+          </a:solidFill>
+          <a:ln w="6350">
+            <a:solidFill>
+              <a:srgbClr val="C9A227"/>
+            </a:solidFill>
+          </a:ln>
+        </p:spPr>
+        <p:style>
+          <a:lnRef idx="1">
+            <a:schemeClr val="accent1"/>
+          </a:lnRef>
+          <a:fillRef idx="3">
+            <a:schemeClr val="accent1"/>
+          </a:fillRef>
+          <a:effectRef idx="2">
+            <a:schemeClr val="accent1"/>
+          </a:effectRef>
+          <a:fontRef idx="minor">
+            <a:schemeClr val="lt1"/>
+          </a:fontRef>
+        </p:style>
+        <p:txBody>
+          <a:bodyPr rtlCol="0" anchor="ctr"/>
+          <a:lstStyle/>
+          <a:p>
+            <a:pPr algn="ctr"/>
+          </a:p>
+        </p:txBody>
+      </p:sp>
+      <p:sp>
+        <p:nvSpPr>
+          <p:cNvPr id="14" name="TextBox 13"/>
+          <p:cNvSpPr txBox="1"/>
+          <p:nvPr/>
+        </p:nvSpPr>
+        <p:spPr>
+          <a:xfrm>
+            <a:off x="5047488" y="1060704"/>
+            <a:ext cx="2121408" cy="201168"/>
+          </a:xfrm>
+          <a:prstGeom prst="rect">
+            <a:avLst/>
+          </a:prstGeom>
+          <a:noFill/>
+        </p:spPr>
+        <p:txBody>
+          <a:bodyPr wrap="square">
+            <a:spAutoFit/>
+          </a:bodyPr>
+          <a:lstStyle/>
+          <a:p>
+            <a:pPr algn="l">
+              <a:spcAft>
+                <a:spcPts val="300"/>
+              </a:spcAft>
+            </a:pPr>
+            <a:r>
+              <a:rPr sz="1000" b="1">
+                <a:solidFill>
+                  <a:srgbClr val="C9A227"/>
+                </a:solidFill>
+                <a:latin typeface="Calibri"/>
+              </a:rPr>
+              <a:t>000025-09</a:t>
+            </a:r>
+          </a:p>
+        </p:txBody>
+      </p:sp>
+      <p:sp>
+        <p:nvSpPr>
+          <p:cNvPr id="15" name="TextBox 14"/>
+          <p:cNvSpPr txBox="1"/>
+          <p:nvPr/>
+        </p:nvSpPr>
+        <p:spPr>
+          <a:xfrm>
+            <a:off x="5047488" y="1261872"/>
+            <a:ext cx="2121408" cy="219456"/>
+          </a:xfrm>
+          <a:prstGeom prst="rect">
+            <a:avLst/>
+          </a:prstGeom>
+          <a:noFill/>
+        </p:spPr>
+        <p:txBody>
+          <a:bodyPr wrap="square">
+            <a:spAutoFit/>
+          </a:bodyPr>
+          <a:lstStyle/>
+          <a:p>
+            <a:pPr algn="l">
+              <a:spcAft>
+                <a:spcPts val="300"/>
+              </a:spcAft>
+            </a:pPr>
+            <a:r>
+              <a:rPr sz="1200" b="1">
+                <a:solidFill>
+                  <a:srgbClr val="0D3B66"/>
+                </a:solidFill>
+                <a:latin typeface="Calibri"/>
+              </a:rPr>
+              <a:t>Falabella</a:t>
+            </a:r>
+          </a:p>
+        </p:txBody>
+      </p:sp>
+      <p:sp>
+        <p:nvSpPr>
+          <p:cNvPr id="16" name="TextBox 15"/>
+          <p:cNvSpPr txBox="1"/>
+          <p:nvPr/>
+        </p:nvSpPr>
+        <p:spPr>
+          <a:xfrm>
+            <a:off x="5047488" y="1463040"/>
+            <a:ext cx="2121408" cy="182880"/>
+          </a:xfrm>
+          <a:prstGeom prst="rect">
+            <a:avLst/>
+          </a:prstGeom>
+          <a:noFill/>
+        </p:spPr>
+        <p:txBody>
+          <a:bodyPr wrap="square">
+            <a:spAutoFit/>
+          </a:bodyPr>
+          <a:lstStyle/>
+          <a:p>
+            <a:pPr algn="l">
+              <a:spcAft>
+                <a:spcPts val="300"/>
+              </a:spcAft>
+            </a:pPr>
+            <a:r>
+              <a:rPr sz="1000" b="0">
+                <a:solidFill>
+                  <a:srgbClr val="5A5A5A"/>
+                </a:solidFill>
+                <a:latin typeface="Calibri"/>
+              </a:rPr>
+              <a:t>activo 11/08</a:t>
+            </a:r>
+          </a:p>
+        </p:txBody>
+      </p:sp>
+      <p:sp>
+        <p:nvSpPr>
+          <p:cNvPr id="17" name="Rounded Rectangle 16"/>
+          <p:cNvSpPr/>
+          <p:nvPr/>
+        </p:nvSpPr>
+        <p:spPr>
+          <a:xfrm>
+            <a:off x="7333488" y="1024128"/>
+            <a:ext cx="2286000" cy="658368"/>
+          </a:xfrm>
+          <a:prstGeom prst="roundRect">
+            <a:avLst>
+              <a:gd name="adj" fmla="val 8000"/>
+            </a:avLst>
+          </a:prstGeom>
+          <a:solidFill>
+            <a:srgbClr val="F5F7FA"/>
+          </a:solidFill>
+          <a:ln w="6350">
+            <a:solidFill>
+              <a:srgbClr val="1F77B4"/>
+            </a:solidFill>
+          </a:ln>
+        </p:spPr>
+        <p:style>
+          <a:lnRef idx="1">
+            <a:schemeClr val="accent1"/>
+          </a:lnRef>
+          <a:fillRef idx="3">
+            <a:schemeClr val="accent1"/>
+          </a:fillRef>
+          <a:effectRef idx="2">
+            <a:schemeClr val="accent1"/>
+          </a:effectRef>
+          <a:fontRef idx="minor">
+            <a:schemeClr val="lt1"/>
+          </a:fontRef>
+        </p:style>
+        <p:txBody>
+          <a:bodyPr rtlCol="0" anchor="ctr"/>
+          <a:lstStyle/>
+          <a:p>
+            <a:pPr algn="ctr"/>
+          </a:p>
+        </p:txBody>
+      </p:sp>
+      <p:sp>
+        <p:nvSpPr>
+          <p:cNvPr id="18" name="TextBox 17"/>
+          <p:cNvSpPr txBox="1"/>
+          <p:nvPr/>
+        </p:nvSpPr>
+        <p:spPr>
+          <a:xfrm>
+            <a:off x="7424928" y="1060704"/>
+            <a:ext cx="2121408" cy="201168"/>
+          </a:xfrm>
+          <a:prstGeom prst="rect">
+            <a:avLst/>
+          </a:prstGeom>
+          <a:noFill/>
+        </p:spPr>
+        <p:txBody>
+          <a:bodyPr wrap="square">
+            <a:spAutoFit/>
+          </a:bodyPr>
+          <a:lstStyle/>
+          <a:p>
+            <a:pPr algn="l">
+              <a:spcAft>
+                <a:spcPts val="300"/>
+              </a:spcAft>
+            </a:pPr>
+            <a:r>
+              <a:rPr sz="1000" b="1">
+                <a:solidFill>
+                  <a:srgbClr val="C9A227"/>
+                </a:solidFill>
+                <a:latin typeface="Calibri"/>
+              </a:rPr>
+              <a:t>000025-32</a:t>
+            </a:r>
+          </a:p>
+        </p:txBody>
+      </p:sp>
+      <p:sp>
+        <p:nvSpPr>
+          <p:cNvPr id="19" name="TextBox 18"/>
+          <p:cNvSpPr txBox="1"/>
+          <p:nvPr/>
+        </p:nvSpPr>
+        <p:spPr>
+          <a:xfrm>
+            <a:off x="7424928" y="1261872"/>
+            <a:ext cx="2121408" cy="219456"/>
+          </a:xfrm>
+          <a:prstGeom prst="rect">
+            <a:avLst/>
+          </a:prstGeom>
+          <a:noFill/>
+        </p:spPr>
+        <p:txBody>
+          <a:bodyPr wrap="square">
+            <a:spAutoFit/>
+          </a:bodyPr>
+          <a:lstStyle/>
+          <a:p>
+            <a:pPr algn="l">
+              <a:spcAft>
+                <a:spcPts val="300"/>
+              </a:spcAft>
+            </a:pPr>
+            <a:r>
+              <a:rPr sz="1200" b="1">
+                <a:solidFill>
+                  <a:srgbClr val="0D3B66"/>
+                </a:solidFill>
+                <a:latin typeface="Calibri"/>
+              </a:rPr>
+              <a:t>Pasillo Técnico</a:t>
+            </a:r>
+          </a:p>
+        </p:txBody>
+      </p:sp>
+      <p:sp>
+        <p:nvSpPr>
+          <p:cNvPr id="20" name="TextBox 19"/>
+          <p:cNvSpPr txBox="1"/>
+          <p:nvPr/>
+        </p:nvSpPr>
+        <p:spPr>
+          <a:xfrm>
+            <a:off x="7424928" y="1463040"/>
+            <a:ext cx="2121408" cy="182880"/>
+          </a:xfrm>
+          <a:prstGeom prst="rect">
+            <a:avLst/>
+          </a:prstGeom>
+          <a:noFill/>
+        </p:spPr>
+        <p:txBody>
+          <a:bodyPr wrap="square">
+            <a:spAutoFit/>
+          </a:bodyPr>
+          <a:lstStyle/>
+          <a:p>
+            <a:pPr algn="l">
+              <a:spcAft>
+                <a:spcPts val="300"/>
+              </a:spcAft>
+            </a:pPr>
+            <a:r>
+              <a:rPr sz="1000" b="0">
+                <a:solidFill>
+                  <a:srgbClr val="5A5A5A"/>
+                </a:solidFill>
+                <a:latin typeface="Calibri"/>
+              </a:rPr>
+              <a:t>residual</a:t>
+            </a:r>
+          </a:p>
+        </p:txBody>
+      </p:sp>
+      <p:sp>
+        <p:nvSpPr>
+          <p:cNvPr id="21" name="Rounded Rectangle 20"/>
+          <p:cNvSpPr/>
+          <p:nvPr/>
+        </p:nvSpPr>
+        <p:spPr>
+          <a:xfrm>
+            <a:off x="9710928" y="1024128"/>
+            <a:ext cx="2286000" cy="658368"/>
+          </a:xfrm>
+          <a:prstGeom prst="roundRect">
+            <a:avLst>
+              <a:gd name="adj" fmla="val 8000"/>
+            </a:avLst>
+          </a:prstGeom>
+          <a:solidFill>
+            <a:srgbClr val="F5F7FA"/>
+          </a:solidFill>
+          <a:ln w="6350">
+            <a:solidFill>
+              <a:srgbClr val="1F77B4"/>
+            </a:solidFill>
+          </a:ln>
+        </p:spPr>
+        <p:style>
+          <a:lnRef idx="1">
+            <a:schemeClr val="accent1"/>
+          </a:lnRef>
+          <a:fillRef idx="3">
+            <a:schemeClr val="accent1"/>
+          </a:fillRef>
+          <a:effectRef idx="2">
+            <a:schemeClr val="accent1"/>
+          </a:effectRef>
+          <a:fontRef idx="minor">
+            <a:schemeClr val="lt1"/>
+          </a:fontRef>
+        </p:style>
+        <p:txBody>
+          <a:bodyPr rtlCol="0" anchor="ctr"/>
+          <a:lstStyle/>
+          <a:p>
+            <a:pPr algn="ctr"/>
+          </a:p>
+        </p:txBody>
+      </p:sp>
+      <p:sp>
+        <p:nvSpPr>
+          <p:cNvPr id="22" name="TextBox 21"/>
+          <p:cNvSpPr txBox="1"/>
+          <p:nvPr/>
+        </p:nvSpPr>
+        <p:spPr>
+          <a:xfrm>
+            <a:off x="9802368" y="1060704"/>
+            <a:ext cx="2121408" cy="201168"/>
+          </a:xfrm>
+          <a:prstGeom prst="rect">
+            <a:avLst/>
+          </a:prstGeom>
+          <a:noFill/>
+        </p:spPr>
+        <p:txBody>
+          <a:bodyPr wrap="square">
+            <a:spAutoFit/>
+          </a:bodyPr>
+          <a:lstStyle/>
+          <a:p>
+            <a:pPr algn="l">
+              <a:spcAft>
+                <a:spcPts val="300"/>
+              </a:spcAft>
+            </a:pPr>
+            <a:r>
+              <a:rPr sz="1000" b="1">
+                <a:solidFill>
+                  <a:srgbClr val="C9A227"/>
+                </a:solidFill>
+                <a:latin typeface="Calibri"/>
+              </a:rPr>
+              <a:t>000025-33</a:t>
+            </a:r>
+          </a:p>
+        </p:txBody>
+      </p:sp>
+      <p:sp>
+        <p:nvSpPr>
+          <p:cNvPr id="23" name="TextBox 22"/>
+          <p:cNvSpPr txBox="1"/>
+          <p:nvPr/>
+        </p:nvSpPr>
+        <p:spPr>
+          <a:xfrm>
+            <a:off x="9802368" y="1261872"/>
+            <a:ext cx="2121408" cy="219456"/>
+          </a:xfrm>
+          <a:prstGeom prst="rect">
+            <a:avLst/>
+          </a:prstGeom>
+          <a:noFill/>
+        </p:spPr>
+        <p:txBody>
+          <a:bodyPr wrap="square">
+            <a:spAutoFit/>
+          </a:bodyPr>
+          <a:lstStyle/>
+          <a:p>
+            <a:pPr algn="l">
+              <a:spcAft>
+                <a:spcPts val="300"/>
+              </a:spcAft>
+            </a:pPr>
+            <a:r>
+              <a:rPr sz="1200" b="1">
+                <a:solidFill>
+                  <a:srgbClr val="0D3B66"/>
+                </a:solidFill>
+                <a:latin typeface="Calibri"/>
+              </a:rPr>
+              <a:t>Salida ARROW</a:t>
+            </a:r>
+          </a:p>
+        </p:txBody>
+      </p:sp>
+      <p:sp>
+        <p:nvSpPr>
+          <p:cNvPr id="24" name="TextBox 23"/>
+          <p:cNvSpPr txBox="1"/>
+          <p:nvPr/>
+        </p:nvSpPr>
+        <p:spPr>
+          <a:xfrm>
+            <a:off x="9802368" y="1463040"/>
+            <a:ext cx="2121408" cy="182880"/>
+          </a:xfrm>
+          <a:prstGeom prst="rect">
+            <a:avLst/>
+          </a:prstGeom>
+          <a:noFill/>
+        </p:spPr>
+        <p:txBody>
+          <a:bodyPr wrap="square">
+            <a:spAutoFit/>
+          </a:bodyPr>
+          <a:lstStyle/>
+          <a:p>
+            <a:pPr algn="l">
+              <a:spcAft>
+                <a:spcPts val="300"/>
+              </a:spcAft>
+            </a:pPr>
+            <a:r>
+              <a:rPr sz="1000" b="0">
+                <a:solidFill>
+                  <a:srgbClr val="5A5A5A"/>
+                </a:solidFill>
+                <a:latin typeface="Calibri"/>
+              </a:rPr>
+              <a:t>residual</a:t>
+            </a:r>
+          </a:p>
+        </p:txBody>
+      </p:sp>
+      <p:sp>
+        <p:nvSpPr>
+          <p:cNvPr id="25" name="Rounded Rectangle 24"/>
+          <p:cNvSpPr/>
+          <p:nvPr/>
+        </p:nvSpPr>
+        <p:spPr>
+          <a:xfrm>
+            <a:off x="201168" y="1792224"/>
+            <a:ext cx="7973568" cy="3822191"/>
+          </a:xfrm>
+          <a:prstGeom prst="roundRect">
+            <a:avLst>
+              <a:gd name="adj" fmla="val 8000"/>
+            </a:avLst>
+          </a:prstGeom>
+          <a:solidFill>
+            <a:srgbClr val="F5F7FA"/>
+          </a:solidFill>
+          <a:ln>
+            <a:noFill/>
+          </a:ln>
+        </p:spPr>
+        <p:style>
+          <a:lnRef idx="1">
+            <a:schemeClr val="accent1"/>
+          </a:lnRef>
+          <a:fillRef idx="3">
+            <a:schemeClr val="accent1"/>
+          </a:fillRef>
+          <a:effectRef idx="2">
+            <a:schemeClr val="accent1"/>
+          </a:effectRef>
+          <a:fontRef idx="minor">
+            <a:schemeClr val="lt1"/>
+          </a:fontRef>
+        </p:style>
+        <p:txBody>
+          <a:bodyPr rtlCol="0" anchor="ctr"/>
+          <a:lstStyle/>
+          <a:p>
+            <a:pPr algn="ctr"/>
+          </a:p>
+        </p:txBody>
+      </p:sp>
+      <p:pic>
+        <p:nvPicPr>
+          <p:cNvPr id="26" name="Picture 25" descr="mam_mensual_may_ago.png"/>
+          <p:cNvPicPr>
+            <a:picLocks noChangeAspect="1"/>
+          </p:cNvPicPr>
+          <p:nvPr/>
+        </p:nvPicPr>
+        <p:blipFill>
+          <a:blip r:embed="rId3"/>
+          <a:stretch>
+            <a:fillRect/>
+          </a:stretch>
+        </p:blipFill>
+        <p:spPr>
+          <a:xfrm>
+            <a:off x="329184" y="1865376"/>
+            <a:ext cx="7717536" cy="3777531"/>
+          </a:xfrm>
+          <a:prstGeom prst="rect">
+            <a:avLst/>
+          </a:prstGeom>
+        </p:spPr>
+      </p:pic>
+      <p:sp>
+        <p:nvSpPr>
+          <p:cNvPr id="27" name="Rounded Rectangle 26"/>
+          <p:cNvSpPr/>
+          <p:nvPr/>
+        </p:nvSpPr>
+        <p:spPr>
+          <a:xfrm>
+            <a:off x="8302752" y="1792224"/>
+            <a:ext cx="3675887" cy="3822191"/>
+          </a:xfrm>
+          <a:prstGeom prst="roundRect">
+            <a:avLst>
+              <a:gd name="adj" fmla="val 8000"/>
+            </a:avLst>
+          </a:prstGeom>
+          <a:solidFill>
+            <a:srgbClr val="FFFFFF"/>
+          </a:solidFill>
+          <a:ln w="6350">
+            <a:solidFill>
+              <a:srgbClr val="1F77B4"/>
+            </a:solidFill>
+          </a:ln>
+        </p:spPr>
+        <p:style>
+          <a:lnRef idx="1">
+            <a:schemeClr val="accent1"/>
+          </a:lnRef>
+          <a:fillRef idx="3">
+            <a:schemeClr val="accent1"/>
+          </a:fillRef>
+          <a:effectRef idx="2">
+            <a:schemeClr val="accent1"/>
+          </a:effectRef>
+          <a:fontRef idx="minor">
+            <a:schemeClr val="lt1"/>
+          </a:fontRef>
+        </p:style>
+        <p:txBody>
+          <a:bodyPr rtlCol="0" anchor="ctr"/>
+          <a:lstStyle/>
+          <a:p>
+            <a:pPr algn="ctr"/>
+          </a:p>
+        </p:txBody>
+      </p:sp>
+      <p:sp>
+        <p:nvSpPr>
+          <p:cNvPr id="28" name="TextBox 27"/>
+          <p:cNvSpPr txBox="1"/>
+          <p:nvPr/>
+        </p:nvSpPr>
+        <p:spPr>
+          <a:xfrm>
+            <a:off x="8430768" y="1847088"/>
+            <a:ext cx="3419856" cy="201168"/>
+          </a:xfrm>
+          <a:prstGeom prst="rect">
+            <a:avLst/>
+          </a:prstGeom>
+          <a:noFill/>
+        </p:spPr>
+        <p:txBody>
+          <a:bodyPr wrap="square">
+            <a:spAutoFit/>
+          </a:bodyPr>
+          <a:lstStyle/>
+          <a:p>
+            <a:pPr algn="l">
+              <a:spcAft>
+                <a:spcPts val="300"/>
+              </a:spcAft>
+            </a:pPr>
+            <a:r>
+              <a:rPr sz="1100" b="1">
+                <a:solidFill>
+                  <a:srgbClr val="1F77B4"/>
+                </a:solidFill>
+                <a:latin typeface="Calibri"/>
+              </a:rPr>
+              <a:t>JULIO · último mes cerrado</a:t>
+            </a:r>
+          </a:p>
+        </p:txBody>
+      </p:sp>
+      <p:sp>
+        <p:nvSpPr>
+          <p:cNvPr id="29" name="TextBox 28"/>
+          <p:cNvSpPr txBox="1"/>
+          <p:nvPr/>
+        </p:nvSpPr>
+        <p:spPr>
+          <a:xfrm>
+            <a:off x="8430768" y="2048256"/>
+            <a:ext cx="3419856" cy="256032"/>
+          </a:xfrm>
+          <a:prstGeom prst="rect">
+            <a:avLst/>
+          </a:prstGeom>
+          <a:noFill/>
+        </p:spPr>
+        <p:txBody>
+          <a:bodyPr wrap="square">
+            <a:spAutoFit/>
+          </a:bodyPr>
+          <a:lstStyle/>
+          <a:p>
+            <a:pPr algn="l">
+              <a:spcAft>
+                <a:spcPts val="300"/>
+              </a:spcAft>
+            </a:pPr>
+            <a:r>
+              <a:rPr sz="1200" b="0">
+                <a:solidFill>
+                  <a:srgbClr val="5A5A5A"/>
+                </a:solidFill>
+                <a:latin typeface="Calibri"/>
+              </a:rPr>
+              <a:t>El recinto sumó 10.356 m³</a:t>
+            </a:r>
+          </a:p>
+        </p:txBody>
+      </p:sp>
+      <p:sp>
+        <p:nvSpPr>
+          <p:cNvPr id="30" name="Rounded Rectangle 29"/>
+          <p:cNvSpPr/>
+          <p:nvPr/>
+        </p:nvSpPr>
+        <p:spPr>
+          <a:xfrm>
+            <a:off x="8430768" y="2359152"/>
+            <a:ext cx="3419856" cy="603504"/>
+          </a:xfrm>
+          <a:prstGeom prst="roundRect">
+            <a:avLst>
+              <a:gd name="adj" fmla="val 8000"/>
+            </a:avLst>
+          </a:prstGeom>
+          <a:solidFill>
+            <a:srgbClr val="F5F7FA"/>
+          </a:solidFill>
+          <a:ln w="6350">
+            <a:solidFill>
+              <a:srgbClr val="0D3B66"/>
+            </a:solidFill>
+          </a:ln>
+        </p:spPr>
+        <p:style>
+          <a:lnRef idx="1">
+            <a:schemeClr val="accent1"/>
+          </a:lnRef>
+          <a:fillRef idx="3">
+            <a:schemeClr val="accent1"/>
+          </a:fillRef>
+          <a:effectRef idx="2">
+            <a:schemeClr val="accent1"/>
+          </a:effectRef>
+          <a:fontRef idx="minor">
+            <a:schemeClr val="lt1"/>
+          </a:fontRef>
+        </p:style>
+        <p:txBody>
+          <a:bodyPr rtlCol="0" anchor="ctr"/>
+          <a:lstStyle/>
+          <a:p>
+            <a:pPr algn="ctr"/>
+          </a:p>
+        </p:txBody>
+      </p:sp>
+      <p:sp>
+        <p:nvSpPr>
+          <p:cNvPr id="31" name="TextBox 30"/>
+          <p:cNvSpPr txBox="1"/>
+          <p:nvPr/>
+        </p:nvSpPr>
+        <p:spPr>
+          <a:xfrm>
+            <a:off x="8540496" y="2395728"/>
+            <a:ext cx="3200400" cy="182880"/>
+          </a:xfrm>
+          <a:prstGeom prst="rect">
+            <a:avLst/>
+          </a:prstGeom>
+          <a:noFill/>
+        </p:spPr>
+        <p:txBody>
+          <a:bodyPr wrap="square">
+            <a:spAutoFit/>
+          </a:bodyPr>
+          <a:lstStyle/>
+          <a:p>
+            <a:pPr algn="l">
+              <a:spcAft>
+                <a:spcPts val="300"/>
+              </a:spcAft>
+            </a:pPr>
+            <a:r>
+              <a:rPr sz="1100" b="1">
+                <a:solidFill>
+                  <a:srgbClr val="0D3B66"/>
+                </a:solidFill>
+                <a:latin typeface="Calibri"/>
+              </a:rPr>
+              <a:t>000025-08  Placa Bancaria</a:t>
+            </a:r>
+          </a:p>
+        </p:txBody>
+      </p:sp>
+      <p:sp>
+        <p:nvSpPr>
+          <p:cNvPr id="32" name="TextBox 31"/>
+          <p:cNvSpPr txBox="1"/>
+          <p:nvPr/>
+        </p:nvSpPr>
+        <p:spPr>
+          <a:xfrm>
+            <a:off x="8540496" y="2615184"/>
+            <a:ext cx="3200400" cy="274320"/>
+          </a:xfrm>
+          <a:prstGeom prst="rect">
+            <a:avLst/>
+          </a:prstGeom>
+          <a:noFill/>
+        </p:spPr>
+        <p:txBody>
+          <a:bodyPr wrap="square">
+            <a:spAutoFit/>
+          </a:bodyPr>
+          <a:lstStyle/>
+          <a:p>
+            <a:pPr algn="l">
+              <a:spcAft>
+                <a:spcPts val="300"/>
+              </a:spcAft>
+            </a:pPr>
+            <a:r>
+              <a:rPr sz="1500" b="1">
+                <a:solidFill>
+                  <a:srgbClr val="0D3B66"/>
+                </a:solidFill>
+                <a:latin typeface="Calibri"/>
+              </a:rPr>
+              <a:t>7.084 m³    68 %</a:t>
+            </a:r>
+          </a:p>
+        </p:txBody>
+      </p:sp>
+      <p:sp>
+        <p:nvSpPr>
+          <p:cNvPr id="33" name="Rounded Rectangle 32"/>
+          <p:cNvSpPr/>
+          <p:nvPr/>
+        </p:nvSpPr>
+        <p:spPr>
+          <a:xfrm>
+            <a:off x="8430768" y="2999232"/>
+            <a:ext cx="3419856" cy="603504"/>
+          </a:xfrm>
+          <a:prstGeom prst="roundRect">
+            <a:avLst>
+              <a:gd name="adj" fmla="val 8000"/>
+            </a:avLst>
+          </a:prstGeom>
+          <a:solidFill>
+            <a:srgbClr val="F5F7FA"/>
+          </a:solidFill>
+          <a:ln w="6350">
+            <a:solidFill>
+              <a:srgbClr val="1F77B4"/>
+            </a:solidFill>
+          </a:ln>
+        </p:spPr>
+        <p:style>
+          <a:lnRef idx="1">
+            <a:schemeClr val="accent1"/>
+          </a:lnRef>
+          <a:fillRef idx="3">
+            <a:schemeClr val="accent1"/>
+          </a:fillRef>
+          <a:effectRef idx="2">
+            <a:schemeClr val="accent1"/>
+          </a:effectRef>
+          <a:fontRef idx="minor">
+            <a:schemeClr val="lt1"/>
+          </a:fontRef>
+        </p:style>
+        <p:txBody>
+          <a:bodyPr rtlCol="0" anchor="ctr"/>
+          <a:lstStyle/>
+          <a:p>
+            <a:pPr algn="ctr"/>
+          </a:p>
+        </p:txBody>
+      </p:sp>
+      <p:sp>
+        <p:nvSpPr>
+          <p:cNvPr id="34" name="TextBox 33"/>
+          <p:cNvSpPr txBox="1"/>
+          <p:nvPr/>
+        </p:nvSpPr>
+        <p:spPr>
+          <a:xfrm>
+            <a:off x="8540496" y="3035808"/>
+            <a:ext cx="3200400" cy="182880"/>
+          </a:xfrm>
+          <a:prstGeom prst="rect">
+            <a:avLst/>
+          </a:prstGeom>
+          <a:noFill/>
+        </p:spPr>
+        <p:txBody>
+          <a:bodyPr wrap="square">
+            <a:spAutoFit/>
+          </a:bodyPr>
+          <a:lstStyle/>
+          <a:p>
+            <a:pPr algn="l">
+              <a:spcAft>
+                <a:spcPts val="300"/>
+              </a:spcAft>
+            </a:pPr>
+            <a:r>
+              <a:rPr sz="1100" b="1">
+                <a:solidFill>
+                  <a:srgbClr val="1F77B4"/>
+                </a:solidFill>
+                <a:latin typeface="Calibri"/>
+              </a:rPr>
+              <a:t>000025-10  Ripley</a:t>
+            </a:r>
+          </a:p>
+        </p:txBody>
+      </p:sp>
+      <p:sp>
+        <p:nvSpPr>
+          <p:cNvPr id="35" name="TextBox 34"/>
+          <p:cNvSpPr txBox="1"/>
+          <p:nvPr/>
+        </p:nvSpPr>
+        <p:spPr>
+          <a:xfrm>
+            <a:off x="8540496" y="3255264"/>
+            <a:ext cx="3200400" cy="274320"/>
+          </a:xfrm>
+          <a:prstGeom prst="rect">
+            <a:avLst/>
+          </a:prstGeom>
+          <a:noFill/>
+        </p:spPr>
+        <p:txBody>
+          <a:bodyPr wrap="square">
+            <a:spAutoFit/>
+          </a:bodyPr>
+          <a:lstStyle/>
+          <a:p>
+            <a:pPr algn="l">
+              <a:spcAft>
+                <a:spcPts val="300"/>
+              </a:spcAft>
+            </a:pPr>
+            <a:r>
+              <a:rPr sz="1500" b="1">
+                <a:solidFill>
+                  <a:srgbClr val="0D3B66"/>
+                </a:solidFill>
+                <a:latin typeface="Calibri"/>
+              </a:rPr>
+              <a:t>3.245 m³    31 %</a:t>
+            </a:r>
+          </a:p>
+        </p:txBody>
+      </p:sp>
+      <p:sp>
+        <p:nvSpPr>
+          <p:cNvPr id="36" name="Rounded Rectangle 35"/>
+          <p:cNvSpPr/>
+          <p:nvPr/>
+        </p:nvSpPr>
+        <p:spPr>
+          <a:xfrm>
+            <a:off x="8430768" y="3639312"/>
+            <a:ext cx="3419856" cy="603504"/>
+          </a:xfrm>
+          <a:prstGeom prst="roundRect">
+            <a:avLst>
+              <a:gd name="adj" fmla="val 8000"/>
+            </a:avLst>
+          </a:prstGeom>
+          <a:solidFill>
+            <a:srgbClr val="F5F7FA"/>
+          </a:solidFill>
+          <a:ln w="6350">
+            <a:solidFill>
+              <a:srgbClr val="7BA3C9"/>
+            </a:solidFill>
+          </a:ln>
+        </p:spPr>
+        <p:style>
+          <a:lnRef idx="1">
+            <a:schemeClr val="accent1"/>
+          </a:lnRef>
+          <a:fillRef idx="3">
+            <a:schemeClr val="accent1"/>
+          </a:fillRef>
+          <a:effectRef idx="2">
+            <a:schemeClr val="accent1"/>
+          </a:effectRef>
+          <a:fontRef idx="minor">
+            <a:schemeClr val="lt1"/>
+          </a:fontRef>
+        </p:style>
+        <p:txBody>
+          <a:bodyPr rtlCol="0" anchor="ctr"/>
+          <a:lstStyle/>
+          <a:p>
+            <a:pPr algn="ctr"/>
+          </a:p>
+        </p:txBody>
+      </p:sp>
+      <p:sp>
+        <p:nvSpPr>
+          <p:cNvPr id="37" name="TextBox 36"/>
+          <p:cNvSpPr txBox="1"/>
+          <p:nvPr/>
+        </p:nvSpPr>
+        <p:spPr>
+          <a:xfrm>
+            <a:off x="8540496" y="3675888"/>
+            <a:ext cx="3200400" cy="182880"/>
+          </a:xfrm>
+          <a:prstGeom prst="rect">
+            <a:avLst/>
+          </a:prstGeom>
+          <a:noFill/>
+        </p:spPr>
+        <p:txBody>
+          <a:bodyPr wrap="square">
+            <a:spAutoFit/>
+          </a:bodyPr>
+          <a:lstStyle/>
+          <a:p>
+            <a:pPr algn="l">
+              <a:spcAft>
+                <a:spcPts val="300"/>
+              </a:spcAft>
+            </a:pPr>
+            <a:r>
+              <a:rPr sz="1100" b="1">
+                <a:solidFill>
+                  <a:srgbClr val="7BA3C9"/>
+                </a:solidFill>
+                <a:latin typeface="Calibri"/>
+              </a:rPr>
+              <a:t>000025-32  Pasillo Técnico</a:t>
+            </a:r>
+          </a:p>
+        </p:txBody>
+      </p:sp>
+      <p:sp>
+        <p:nvSpPr>
+          <p:cNvPr id="38" name="TextBox 37"/>
+          <p:cNvSpPr txBox="1"/>
+          <p:nvPr/>
+        </p:nvSpPr>
+        <p:spPr>
+          <a:xfrm>
+            <a:off x="8540496" y="3895344"/>
+            <a:ext cx="3200400" cy="274320"/>
+          </a:xfrm>
+          <a:prstGeom prst="rect">
+            <a:avLst/>
+          </a:prstGeom>
+          <a:noFill/>
+        </p:spPr>
+        <p:txBody>
+          <a:bodyPr wrap="square">
+            <a:spAutoFit/>
+          </a:bodyPr>
+          <a:lstStyle/>
+          <a:p>
+            <a:pPr algn="l">
+              <a:spcAft>
+                <a:spcPts val="300"/>
+              </a:spcAft>
+            </a:pPr>
+            <a:r>
+              <a:rPr sz="1500" b="1">
+                <a:solidFill>
+                  <a:srgbClr val="0D3B66"/>
+                </a:solidFill>
+                <a:latin typeface="Calibri"/>
+              </a:rPr>
+              <a:t>26 m³    0 %</a:t>
+            </a:r>
+          </a:p>
+        </p:txBody>
+      </p:sp>
+      <p:sp>
+        <p:nvSpPr>
+          <p:cNvPr id="39" name="Rounded Rectangle 38"/>
+          <p:cNvSpPr/>
+          <p:nvPr/>
+        </p:nvSpPr>
+        <p:spPr>
+          <a:xfrm>
+            <a:off x="8430768" y="4279392"/>
+            <a:ext cx="3419856" cy="603504"/>
+          </a:xfrm>
+          <a:prstGeom prst="roundRect">
+            <a:avLst>
+              <a:gd name="adj" fmla="val 8000"/>
+            </a:avLst>
+          </a:prstGeom>
+          <a:solidFill>
+            <a:srgbClr val="F5F7FA"/>
+          </a:solidFill>
+          <a:ln w="6350">
+            <a:solidFill>
+              <a:srgbClr val="5A8C6E"/>
+            </a:solidFill>
+          </a:ln>
+        </p:spPr>
+        <p:style>
+          <a:lnRef idx="1">
+            <a:schemeClr val="accent1"/>
+          </a:lnRef>
+          <a:fillRef idx="3">
+            <a:schemeClr val="accent1"/>
+          </a:fillRef>
+          <a:effectRef idx="2">
+            <a:schemeClr val="accent1"/>
+          </a:effectRef>
+          <a:fontRef idx="minor">
+            <a:schemeClr val="lt1"/>
+          </a:fontRef>
+        </p:style>
+        <p:txBody>
+          <a:bodyPr rtlCol="0" anchor="ctr"/>
+          <a:lstStyle/>
+          <a:p>
+            <a:pPr algn="ctr"/>
+          </a:p>
+        </p:txBody>
+      </p:sp>
+      <p:sp>
+        <p:nvSpPr>
+          <p:cNvPr id="40" name="TextBox 39"/>
+          <p:cNvSpPr txBox="1"/>
+          <p:nvPr/>
+        </p:nvSpPr>
+        <p:spPr>
+          <a:xfrm>
+            <a:off x="8540496" y="4315968"/>
+            <a:ext cx="3200400" cy="182880"/>
+          </a:xfrm>
+          <a:prstGeom prst="rect">
+            <a:avLst/>
+          </a:prstGeom>
+          <a:noFill/>
+        </p:spPr>
+        <p:txBody>
+          <a:bodyPr wrap="square">
+            <a:spAutoFit/>
+          </a:bodyPr>
+          <a:lstStyle/>
+          <a:p>
+            <a:pPr algn="l">
+              <a:spcAft>
+                <a:spcPts val="300"/>
+              </a:spcAft>
+            </a:pPr>
+            <a:r>
+              <a:rPr sz="1100" b="1">
+                <a:solidFill>
+                  <a:srgbClr val="5A8C6E"/>
+                </a:solidFill>
+                <a:latin typeface="Calibri"/>
+              </a:rPr>
+              <a:t>000025-33  Salida ARROW</a:t>
+            </a:r>
+          </a:p>
+        </p:txBody>
+      </p:sp>
+      <p:sp>
+        <p:nvSpPr>
+          <p:cNvPr id="41" name="TextBox 40"/>
+          <p:cNvSpPr txBox="1"/>
+          <p:nvPr/>
+        </p:nvSpPr>
+        <p:spPr>
+          <a:xfrm>
+            <a:off x="8540496" y="4535424"/>
+            <a:ext cx="3200400" cy="274320"/>
+          </a:xfrm>
+          <a:prstGeom prst="rect">
+            <a:avLst/>
+          </a:prstGeom>
+          <a:noFill/>
+        </p:spPr>
+        <p:txBody>
+          <a:bodyPr wrap="square">
+            <a:spAutoFit/>
+          </a:bodyPr>
+          <a:lstStyle/>
+          <a:p>
+            <a:pPr algn="l">
+              <a:spcAft>
+                <a:spcPts val="300"/>
+              </a:spcAft>
+            </a:pPr>
+            <a:r>
+              <a:rPr sz="1500" b="1">
+                <a:solidFill>
+                  <a:srgbClr val="0D3B66"/>
+                </a:solidFill>
+                <a:latin typeface="Calibri"/>
+              </a:rPr>
+              <a:t>1 m³    0 %</a:t>
+            </a:r>
+          </a:p>
+        </p:txBody>
+      </p:sp>
+      <p:sp>
+        <p:nvSpPr>
+          <p:cNvPr id="42" name="Rounded Rectangle 41"/>
+          <p:cNvSpPr/>
+          <p:nvPr/>
+        </p:nvSpPr>
+        <p:spPr>
+          <a:xfrm>
+            <a:off x="8430768" y="4919472"/>
+            <a:ext cx="3419856" cy="603504"/>
+          </a:xfrm>
+          <a:prstGeom prst="roundRect">
+            <a:avLst>
+              <a:gd name="adj" fmla="val 8000"/>
+            </a:avLst>
+          </a:prstGeom>
+          <a:solidFill>
+            <a:srgbClr val="F5F7FA"/>
+          </a:solidFill>
+          <a:ln w="6350">
+            <a:solidFill>
+              <a:srgbClr val="C9A227"/>
+            </a:solidFill>
+          </a:ln>
+        </p:spPr>
+        <p:style>
+          <a:lnRef idx="1">
+            <a:schemeClr val="accent1"/>
+          </a:lnRef>
+          <a:fillRef idx="3">
+            <a:schemeClr val="accent1"/>
+          </a:fillRef>
+          <a:effectRef idx="2">
+            <a:schemeClr val="accent1"/>
+          </a:effectRef>
+          <a:fontRef idx="minor">
+            <a:schemeClr val="lt1"/>
+          </a:fontRef>
+        </p:style>
+        <p:txBody>
+          <a:bodyPr rtlCol="0" anchor="ctr"/>
+          <a:lstStyle/>
+          <a:p>
+            <a:pPr algn="ctr"/>
+          </a:p>
+        </p:txBody>
+      </p:sp>
+      <p:sp>
+        <p:nvSpPr>
+          <p:cNvPr id="43" name="TextBox 42"/>
+          <p:cNvSpPr txBox="1"/>
+          <p:nvPr/>
+        </p:nvSpPr>
+        <p:spPr>
+          <a:xfrm>
+            <a:off x="8540496" y="4956048"/>
+            <a:ext cx="3200400" cy="182880"/>
+          </a:xfrm>
+          <a:prstGeom prst="rect">
+            <a:avLst/>
+          </a:prstGeom>
+          <a:noFill/>
+        </p:spPr>
+        <p:txBody>
+          <a:bodyPr wrap="square">
+            <a:spAutoFit/>
+          </a:bodyPr>
+          <a:lstStyle/>
+          <a:p>
+            <a:pPr algn="l">
+              <a:spcAft>
+                <a:spcPts val="300"/>
+              </a:spcAft>
+            </a:pPr>
+            <a:r>
+              <a:rPr sz="1100" b="1">
+                <a:solidFill>
+                  <a:srgbClr val="C9A227"/>
+                </a:solidFill>
+                <a:latin typeface="Calibri"/>
+              </a:rPr>
+              <a:t>000025-09  Falabella</a:t>
+            </a:r>
+          </a:p>
+        </p:txBody>
+      </p:sp>
+      <p:sp>
+        <p:nvSpPr>
+          <p:cNvPr id="44" name="TextBox 43"/>
+          <p:cNvSpPr txBox="1"/>
+          <p:nvPr/>
+        </p:nvSpPr>
+        <p:spPr>
+          <a:xfrm>
+            <a:off x="8540496" y="5175504"/>
+            <a:ext cx="3200400" cy="274320"/>
+          </a:xfrm>
+          <a:prstGeom prst="rect">
+            <a:avLst/>
+          </a:prstGeom>
+          <a:noFill/>
+        </p:spPr>
+        <p:txBody>
+          <a:bodyPr wrap="square">
+            <a:spAutoFit/>
+          </a:bodyPr>
+          <a:lstStyle/>
+          <a:p>
+            <a:pPr algn="l">
+              <a:spcAft>
+                <a:spcPts val="300"/>
+              </a:spcAft>
+            </a:pPr>
+            <a:r>
+              <a:rPr sz="1500" b="1">
+                <a:solidFill>
+                  <a:srgbClr val="0D3B66"/>
+                </a:solidFill>
+                <a:latin typeface="Calibri"/>
+              </a:rPr>
+              <a:t>0 m³    0 % · 11/08</a:t>
+            </a:r>
+          </a:p>
+        </p:txBody>
+      </p:sp>
+      <p:sp>
+        <p:nvSpPr>
+          <p:cNvPr id="45" name="Rounded Rectangle 44"/>
+          <p:cNvSpPr/>
+          <p:nvPr/>
+        </p:nvSpPr>
+        <p:spPr>
+          <a:xfrm>
+            <a:off x="201168" y="5705856"/>
+            <a:ext cx="11795760" cy="438912"/>
+          </a:xfrm>
+          <a:prstGeom prst="roundRect">
+            <a:avLst>
+              <a:gd name="adj" fmla="val 8000"/>
+            </a:avLst>
+          </a:prstGeom>
+          <a:solidFill>
+            <a:srgbClr val="FFF9EB"/>
+          </a:solidFill>
+          <a:ln w="6350">
+            <a:solidFill>
+              <a:srgbClr val="C9A227"/>
+            </a:solidFill>
+          </a:ln>
+        </p:spPr>
+        <p:style>
+          <a:lnRef idx="1">
+            <a:schemeClr val="accent1"/>
+          </a:lnRef>
+          <a:fillRef idx="3">
+            <a:schemeClr val="accent1"/>
+          </a:fillRef>
+          <a:effectRef idx="2">
+            <a:schemeClr val="accent1"/>
+          </a:effectRef>
+          <a:fontRef idx="minor">
+            <a:schemeClr val="lt1"/>
+          </a:fontRef>
+        </p:style>
+        <p:txBody>
+          <a:bodyPr rtlCol="0" anchor="ctr"/>
+          <a:lstStyle/>
+          <a:p>
+            <a:pPr algn="ctr"/>
+          </a:p>
+        </p:txBody>
+      </p:sp>
+      <p:sp>
+        <p:nvSpPr>
+          <p:cNvPr id="46" name="TextBox 45"/>
+          <p:cNvSpPr txBox="1"/>
+          <p:nvPr/>
+        </p:nvSpPr>
+        <p:spPr>
+          <a:xfrm>
+            <a:off x="329184" y="5779008"/>
+            <a:ext cx="11539728" cy="310896"/>
+          </a:xfrm>
+          <a:prstGeom prst="rect">
+            <a:avLst/>
+          </a:prstGeom>
+          <a:noFill/>
+        </p:spPr>
+        <p:txBody>
+          <a:bodyPr wrap="square">
+            <a:spAutoFit/>
+          </a:bodyPr>
+          <a:lstStyle/>
+          <a:p>
+            <a:pPr algn="l">
+              <a:spcAft>
+                <a:spcPts val="300"/>
+              </a:spcAft>
+            </a:pPr>
+            <a:r>
+              <a:rPr sz="1100" b="0">
+                <a:solidFill>
+                  <a:srgbClr val="0D3B66"/>
+                </a:solidFill>
+                <a:latin typeface="Calibri"/>
+              </a:rPr>
+              <a:t>Recepción 06/11/2025  ·  Capacitación 14/11/2025  ·  Miguel Rupayan  ·  Constanza Vilches  ·  Mantención: C. Bustamante, O. Cuevas y Supervisor Eléctrico</a:t>
+            </a:r>
+          </a:p>
+        </p:txBody>
+      </p:sp>
+      <p:sp>
+        <p:nvSpPr>
+          <p:cNvPr id="47" name="TextBox 46"/>
+          <p:cNvSpPr txBox="1"/>
+          <p:nvPr/>
+        </p:nvSpPr>
+        <p:spPr>
+          <a:xfrm>
+            <a:off x="256032" y="6181344"/>
+            <a:ext cx="11704320" cy="566928"/>
+          </a:xfrm>
+          <a:prstGeom prst="rect">
+            <a:avLst/>
+          </a:prstGeom>
+          <a:noFill/>
+        </p:spPr>
+        <p:txBody>
+          <a:bodyPr wrap="square">
+            <a:spAutoFit/>
+          </a:bodyPr>
+          <a:lstStyle/>
+          <a:p>
+            <a:pPr algn="l">
+              <a:spcAft>
+                <a:spcPts val="300"/>
+              </a:spcAft>
+            </a:pPr>
+            <a:r>
+              <a:rPr sz="1200" b="0">
+                <a:solidFill>
+                  <a:srgbClr val="0D3B66"/>
+                </a:solidFill>
+                <a:latin typeface="Calibri"/>
+              </a:rPr>
+              <a:t>Mayo 7.511   ·   Junio 10.014   ·   Julio 10.356   ·   Agosto 1–17: 4.165   ·   proy. ago 7.595 m³.</a:t>
+            </a:r>
+          </a:p>
+          <a:p>
+            <a:pPr algn="l">
+              <a:spcAft>
+                <a:spcPts val="300"/>
+              </a:spcAft>
+            </a:pPr>
+            <a:r>
+              <a:rPr sz="1100" b="0">
+                <a:solidFill>
+                  <a:srgbClr val="5A5A5A"/>
+                </a:solidFill>
+                <a:latin typeface="Calibri"/>
+              </a:rPr>
+              <a:t>Junio sube por Placa (18/06). Falabella no entra en julio: activo desde el 11/08.</a:t>
             </a:r>
           </a:p>
         </p:txBody>

--- a/reports/Parque_Arauco/TMP_7MALLS/entrega_diego_anibal/Recorrido_ejecutivo_PA_MAE_20260817.pptx
+++ b/reports/Parque_Arauco/TMP_7MALLS/entrega_diego_anibal/Recorrido_ejecutivo_PA_MAE_20260817.pptx
@@ -10,8 +10,6 @@
     <p:sldId id="258" r:id="rId9"/>
     <p:sldId id="259" r:id="rId10"/>
     <p:sldId id="260" r:id="rId11"/>
-    <p:sldId id="261" r:id="rId12"/>
-    <p:sldId id="262" r:id="rId13"/>
   </p:sldIdLst>
   <p:sldSz cx="12191695" cy="6858000" type="screen4x3"/>
   <p:notesSz cx="6858000" cy="9144000"/>
@@ -6048,7 +6046,7 @@
                 </a:solidFill>
                 <a:latin typeface="Calibri"/>
               </a:rPr>
-              <a:t>MAM  ·  1. Equipos instalados</a:t>
+              <a:t>MAM  ·  Equipos y consumo</a:t>
             </a:r>
           </a:p>
         </p:txBody>
@@ -6087,7 +6085,7 @@
                 </a:solidFill>
                 <a:latin typeface="Calibri"/>
               </a:rPr>
-              <a:t>5 puntos activos WES   |   Mall Arauco Maipú   |   Recepción 06/11/2025</a:t>
+              <a:t>Mall Arauco Maipú   |   5 puntos WES   |   01/05/2026 – 17/08/2026</a:t>
             </a:r>
           </a:p>
         </p:txBody>
@@ -6100,8 +6098,8 @@
         </p:nvSpPr>
         <p:spPr>
           <a:xfrm>
-            <a:off x="256032" y="1078992"/>
-            <a:ext cx="3749039" cy="1938528"/>
+            <a:off x="201168" y="1024128"/>
+            <a:ext cx="2286000" cy="658368"/>
           </a:xfrm>
           <a:prstGeom prst="roundRect">
             <a:avLst>
@@ -6147,8 +6145,8 @@
         </p:nvSpPr>
         <p:spPr>
           <a:xfrm>
-            <a:off x="420624" y="1207007"/>
-            <a:ext cx="3419856" cy="256032"/>
+            <a:off x="292608" y="1060704"/>
+            <a:ext cx="2121408" cy="201168"/>
           </a:xfrm>
           <a:prstGeom prst="rect">
             <a:avLst/>
@@ -6167,7 +6165,7 @@
               </a:spcAft>
             </a:pPr>
             <a:r>
-              <a:rPr sz="1200" b="1">
+              <a:rPr sz="1000" b="1">
                 <a:solidFill>
                   <a:srgbClr val="C9A227"/>
                 </a:solidFill>
@@ -6186,8 +6184,8 @@
         </p:nvSpPr>
         <p:spPr>
           <a:xfrm>
-            <a:off x="420624" y="1499616"/>
-            <a:ext cx="3419856" cy="713232"/>
+            <a:off x="292608" y="1261872"/>
+            <a:ext cx="2121408" cy="219456"/>
           </a:xfrm>
           <a:prstGeom prst="rect">
             <a:avLst/>
@@ -6206,7 +6204,7 @@
               </a:spcAft>
             </a:pPr>
             <a:r>
-              <a:rPr sz="1800" b="1">
+              <a:rPr sz="1200" b="1">
                 <a:solidFill>
                   <a:srgbClr val="0D3B66"/>
                 </a:solidFill>
@@ -6219,53 +6217,14 @@
       </p:sp>
       <p:sp>
         <p:nvSpPr>
-          <p:cNvPr id="10" name="TextBox 9"/>
-          <p:cNvSpPr txBox="1"/>
-          <p:nvPr/>
-        </p:nvSpPr>
-        <p:spPr>
-          <a:xfrm>
-            <a:off x="420624" y="2286000"/>
-            <a:ext cx="3419856" cy="530352"/>
-          </a:xfrm>
-          <a:prstGeom prst="rect">
-            <a:avLst/>
-          </a:prstGeom>
-          <a:noFill/>
-        </p:spPr>
-        <p:txBody>
-          <a:bodyPr wrap="square">
-            <a:spAutoFit/>
-          </a:bodyPr>
-          <a:lstStyle/>
-          <a:p>
-            <a:pPr algn="l">
-              <a:spcAft>
-                <a:spcPts val="300"/>
-              </a:spcAft>
-            </a:pPr>
-            <a:r>
-              <a:rPr sz="1300" b="0">
-                <a:solidFill>
-                  <a:srgbClr val="5A5A5A"/>
-                </a:solidFill>
-                <a:latin typeface="Calibri"/>
-              </a:rPr>
-              <a:t>Placa bancaria del recinto</a:t>
-            </a:r>
-          </a:p>
-        </p:txBody>
-      </p:sp>
-      <p:sp>
-        <p:nvSpPr>
-          <p:cNvPr id="11" name="Rounded Rectangle 10"/>
+          <p:cNvPr id="10" name="Rounded Rectangle 9"/>
           <p:cNvSpPr/>
           <p:nvPr/>
         </p:nvSpPr>
         <p:spPr>
           <a:xfrm>
-            <a:off x="4169663" y="1078992"/>
-            <a:ext cx="3749039" cy="1938528"/>
+            <a:off x="2578608" y="1024128"/>
+            <a:ext cx="2286000" cy="658368"/>
           </a:xfrm>
           <a:prstGeom prst="roundRect">
             <a:avLst>
@@ -6305,14 +6264,14 @@
       </p:sp>
       <p:sp>
         <p:nvSpPr>
-          <p:cNvPr id="12" name="TextBox 11"/>
+          <p:cNvPr id="11" name="TextBox 10"/>
           <p:cNvSpPr txBox="1"/>
           <p:nvPr/>
         </p:nvSpPr>
         <p:spPr>
           <a:xfrm>
-            <a:off x="4334255" y="1207007"/>
-            <a:ext cx="3419856" cy="256032"/>
+            <a:off x="2670048" y="1060704"/>
+            <a:ext cx="2121408" cy="201168"/>
           </a:xfrm>
           <a:prstGeom prst="rect">
             <a:avLst/>
@@ -6331,7 +6290,7 @@
               </a:spcAft>
             </a:pPr>
             <a:r>
-              <a:rPr sz="1200" b="1">
+              <a:rPr sz="1000" b="1">
                 <a:solidFill>
                   <a:srgbClr val="C9A227"/>
                 </a:solidFill>
@@ -6344,14 +6303,14 @@
       </p:sp>
       <p:sp>
         <p:nvSpPr>
-          <p:cNvPr id="13" name="TextBox 12"/>
+          <p:cNvPr id="12" name="TextBox 11"/>
           <p:cNvSpPr txBox="1"/>
           <p:nvPr/>
         </p:nvSpPr>
         <p:spPr>
           <a:xfrm>
-            <a:off x="4334255" y="1499616"/>
-            <a:ext cx="3419856" cy="713232"/>
+            <a:off x="2670048" y="1261872"/>
+            <a:ext cx="2121408" cy="219456"/>
           </a:xfrm>
           <a:prstGeom prst="rect">
             <a:avLst/>
@@ -6370,14 +6329,61 @@
               </a:spcAft>
             </a:pPr>
             <a:r>
-              <a:rPr sz="1800" b="1">
+              <a:rPr sz="1200" b="1">
                 <a:solidFill>
                   <a:srgbClr val="0D3B66"/>
                 </a:solidFill>
                 <a:latin typeface="Calibri"/>
               </a:rPr>
-              <a:t>Impulsión Ripley</a:t>
-            </a:r>
+              <a:t>Ripley</a:t>
+            </a:r>
+          </a:p>
+        </p:txBody>
+      </p:sp>
+      <p:sp>
+        <p:nvSpPr>
+          <p:cNvPr id="13" name="Rounded Rectangle 12"/>
+          <p:cNvSpPr/>
+          <p:nvPr/>
+        </p:nvSpPr>
+        <p:spPr>
+          <a:xfrm>
+            <a:off x="4956048" y="1024128"/>
+            <a:ext cx="2286000" cy="658368"/>
+          </a:xfrm>
+          <a:prstGeom prst="roundRect">
+            <a:avLst>
+              <a:gd name="adj" fmla="val 8000"/>
+            </a:avLst>
+          </a:prstGeom>
+          <a:solidFill>
+            <a:srgbClr val="F5F7FA"/>
+          </a:solidFill>
+          <a:ln w="6350">
+            <a:solidFill>
+              <a:srgbClr val="C9A227"/>
+            </a:solidFill>
+          </a:ln>
+        </p:spPr>
+        <p:style>
+          <a:lnRef idx="1">
+            <a:schemeClr val="accent1"/>
+          </a:lnRef>
+          <a:fillRef idx="3">
+            <a:schemeClr val="accent1"/>
+          </a:fillRef>
+          <a:effectRef idx="2">
+            <a:schemeClr val="accent1"/>
+          </a:effectRef>
+          <a:fontRef idx="minor">
+            <a:schemeClr val="lt1"/>
+          </a:fontRef>
+        </p:style>
+        <p:txBody>
+          <a:bodyPr rtlCol="0" anchor="ctr"/>
+          <a:lstStyle/>
+          <a:p>
+            <a:pPr algn="ctr"/>
           </a:p>
         </p:txBody>
       </p:sp>
@@ -6389,8 +6395,8 @@
         </p:nvSpPr>
         <p:spPr>
           <a:xfrm>
-            <a:off x="4334255" y="2286000"/>
-            <a:ext cx="3419856" cy="530352"/>
+            <a:off x="5047488" y="1060704"/>
+            <a:ext cx="2121408" cy="201168"/>
           </a:xfrm>
           <a:prstGeom prst="rect">
             <a:avLst/>
@@ -6409,27 +6415,105 @@
               </a:spcAft>
             </a:pPr>
             <a:r>
-              <a:rPr sz="1300" b="0">
-                <a:solidFill>
-                  <a:srgbClr val="5A5A5A"/>
+              <a:rPr sz="1000" b="1">
+                <a:solidFill>
+                  <a:srgbClr val="C9A227"/>
                 </a:solidFill>
                 <a:latin typeface="Calibri"/>
               </a:rPr>
-              <a:t>Impulsión Ripley</a:t>
-            </a:r>
-          </a:p>
-        </p:txBody>
-      </p:sp>
-      <p:sp>
-        <p:nvSpPr>
-          <p:cNvPr id="15" name="Rounded Rectangle 14"/>
+              <a:t>000025-09</a:t>
+            </a:r>
+          </a:p>
+        </p:txBody>
+      </p:sp>
+      <p:sp>
+        <p:nvSpPr>
+          <p:cNvPr id="15" name="TextBox 14"/>
+          <p:cNvSpPr txBox="1"/>
+          <p:nvPr/>
+        </p:nvSpPr>
+        <p:spPr>
+          <a:xfrm>
+            <a:off x="5047488" y="1261872"/>
+            <a:ext cx="2121408" cy="219456"/>
+          </a:xfrm>
+          <a:prstGeom prst="rect">
+            <a:avLst/>
+          </a:prstGeom>
+          <a:noFill/>
+        </p:spPr>
+        <p:txBody>
+          <a:bodyPr wrap="square">
+            <a:spAutoFit/>
+          </a:bodyPr>
+          <a:lstStyle/>
+          <a:p>
+            <a:pPr algn="l">
+              <a:spcAft>
+                <a:spcPts val="300"/>
+              </a:spcAft>
+            </a:pPr>
+            <a:r>
+              <a:rPr sz="1200" b="1">
+                <a:solidFill>
+                  <a:srgbClr val="0D3B66"/>
+                </a:solidFill>
+                <a:latin typeface="Calibri"/>
+              </a:rPr>
+              <a:t>Falabella</a:t>
+            </a:r>
+          </a:p>
+        </p:txBody>
+      </p:sp>
+      <p:sp>
+        <p:nvSpPr>
+          <p:cNvPr id="16" name="TextBox 15"/>
+          <p:cNvSpPr txBox="1"/>
+          <p:nvPr/>
+        </p:nvSpPr>
+        <p:spPr>
+          <a:xfrm>
+            <a:off x="5047488" y="1463040"/>
+            <a:ext cx="2121408" cy="182880"/>
+          </a:xfrm>
+          <a:prstGeom prst="rect">
+            <a:avLst/>
+          </a:prstGeom>
+          <a:noFill/>
+        </p:spPr>
+        <p:txBody>
+          <a:bodyPr wrap="square">
+            <a:spAutoFit/>
+          </a:bodyPr>
+          <a:lstStyle/>
+          <a:p>
+            <a:pPr algn="l">
+              <a:spcAft>
+                <a:spcPts val="300"/>
+              </a:spcAft>
+            </a:pPr>
+            <a:r>
+              <a:rPr sz="1000" b="0">
+                <a:solidFill>
+                  <a:srgbClr val="5A5A5A"/>
+                </a:solidFill>
+                <a:latin typeface="Calibri"/>
+              </a:rPr>
+              <a:t>activo 11/08</a:t>
+            </a:r>
+          </a:p>
+        </p:txBody>
+      </p:sp>
+      <p:sp>
+        <p:nvSpPr>
+          <p:cNvPr id="17" name="Rounded Rectangle 16"/>
           <p:cNvSpPr/>
           <p:nvPr/>
         </p:nvSpPr>
         <p:spPr>
           <a:xfrm>
-            <a:off x="8083296" y="1078992"/>
-            <a:ext cx="3749039" cy="1938528"/>
+            <a:off x="7333488" y="1024128"/>
+            <a:ext cx="2286000" cy="658368"/>
           </a:xfrm>
           <a:prstGeom prst="roundRect">
             <a:avLst>
@@ -6469,14 +6553,14 @@
       </p:sp>
       <p:sp>
         <p:nvSpPr>
-          <p:cNvPr id="16" name="TextBox 15"/>
+          <p:cNvPr id="18" name="TextBox 17"/>
           <p:cNvSpPr txBox="1"/>
           <p:nvPr/>
         </p:nvSpPr>
         <p:spPr>
           <a:xfrm>
-            <a:off x="8247888" y="1207007"/>
-            <a:ext cx="3419856" cy="256032"/>
+            <a:off x="7424928" y="1060704"/>
+            <a:ext cx="2121408" cy="201168"/>
           </a:xfrm>
           <a:prstGeom prst="rect">
             <a:avLst/>
@@ -6495,27 +6579,27 @@
               </a:spcAft>
             </a:pPr>
             <a:r>
-              <a:rPr sz="1200" b="1">
+              <a:rPr sz="1000" b="1">
                 <a:solidFill>
                   <a:srgbClr val="C9A227"/>
                 </a:solidFill>
                 <a:latin typeface="Calibri"/>
               </a:rPr>
-              <a:t>000025-09</a:t>
-            </a:r>
-          </a:p>
-        </p:txBody>
-      </p:sp>
-      <p:sp>
-        <p:nvSpPr>
-          <p:cNvPr id="17" name="TextBox 16"/>
+              <a:t>000025-32</a:t>
+            </a:r>
+          </a:p>
+        </p:txBody>
+      </p:sp>
+      <p:sp>
+        <p:nvSpPr>
+          <p:cNvPr id="19" name="TextBox 18"/>
           <p:cNvSpPr txBox="1"/>
           <p:nvPr/>
         </p:nvSpPr>
         <p:spPr>
           <a:xfrm>
-            <a:off x="8247888" y="1499616"/>
-            <a:ext cx="3419856" cy="713232"/>
+            <a:off x="7424928" y="1261872"/>
+            <a:ext cx="2121408" cy="219456"/>
           </a:xfrm>
           <a:prstGeom prst="rect">
             <a:avLst/>
@@ -6534,27 +6618,27 @@
               </a:spcAft>
             </a:pPr>
             <a:r>
-              <a:rPr sz="1800" b="1">
+              <a:rPr sz="1200" b="1">
                 <a:solidFill>
                   <a:srgbClr val="0D3B66"/>
                 </a:solidFill>
                 <a:latin typeface="Calibri"/>
               </a:rPr>
-              <a:t>Impulsión Falabella</a:t>
-            </a:r>
-          </a:p>
-        </p:txBody>
-      </p:sp>
-      <p:sp>
-        <p:nvSpPr>
-          <p:cNvPr id="18" name="TextBox 17"/>
+              <a:t>Pasillo Técnico</a:t>
+            </a:r>
+          </a:p>
+        </p:txBody>
+      </p:sp>
+      <p:sp>
+        <p:nvSpPr>
+          <p:cNvPr id="20" name="TextBox 19"/>
           <p:cNvSpPr txBox="1"/>
           <p:nvPr/>
         </p:nvSpPr>
         <p:spPr>
           <a:xfrm>
-            <a:off x="8247888" y="2286000"/>
-            <a:ext cx="3419856" cy="530352"/>
+            <a:off x="7424928" y="1463040"/>
+            <a:ext cx="2121408" cy="182880"/>
           </a:xfrm>
           <a:prstGeom prst="rect">
             <a:avLst/>
@@ -6573,27 +6657,27 @@
               </a:spcAft>
             </a:pPr>
             <a:r>
-              <a:rPr sz="1300" b="0">
+              <a:rPr sz="1000" b="0">
                 <a:solidFill>
                   <a:srgbClr val="5A5A5A"/>
                 </a:solidFill>
                 <a:latin typeface="Calibri"/>
               </a:rPr>
-              <a:t>Activo desde 11/08/2026 (OC / cambio de equipo)</a:t>
-            </a:r>
-          </a:p>
-        </p:txBody>
-      </p:sp>
-      <p:sp>
-        <p:nvSpPr>
-          <p:cNvPr id="19" name="Rounded Rectangle 18"/>
+              <a:t>residual</a:t>
+            </a:r>
+          </a:p>
+        </p:txBody>
+      </p:sp>
+      <p:sp>
+        <p:nvSpPr>
+          <p:cNvPr id="21" name="Rounded Rectangle 20"/>
           <p:cNvSpPr/>
           <p:nvPr/>
         </p:nvSpPr>
         <p:spPr>
           <a:xfrm>
-            <a:off x="256032" y="3182112"/>
-            <a:ext cx="5742432" cy="1938528"/>
+            <a:off x="9710928" y="1024128"/>
+            <a:ext cx="2286000" cy="658368"/>
           </a:xfrm>
           <a:prstGeom prst="roundRect">
             <a:avLst>
@@ -6633,14 +6717,14 @@
       </p:sp>
       <p:sp>
         <p:nvSpPr>
-          <p:cNvPr id="20" name="TextBox 19"/>
+          <p:cNvPr id="22" name="TextBox 21"/>
           <p:cNvSpPr txBox="1"/>
           <p:nvPr/>
         </p:nvSpPr>
         <p:spPr>
           <a:xfrm>
-            <a:off x="420624" y="3310128"/>
-            <a:ext cx="5413248" cy="256032"/>
+            <a:off x="9802368" y="1060704"/>
+            <a:ext cx="2121408" cy="201168"/>
           </a:xfrm>
           <a:prstGeom prst="rect">
             <a:avLst/>
@@ -6659,27 +6743,27 @@
               </a:spcAft>
             </a:pPr>
             <a:r>
-              <a:rPr sz="1200" b="1">
+              <a:rPr sz="1000" b="1">
                 <a:solidFill>
                   <a:srgbClr val="C9A227"/>
                 </a:solidFill>
                 <a:latin typeface="Calibri"/>
               </a:rPr>
-              <a:t>000025-32</a:t>
-            </a:r>
-          </a:p>
-        </p:txBody>
-      </p:sp>
-      <p:sp>
-        <p:nvSpPr>
-          <p:cNvPr id="21" name="TextBox 20"/>
+              <a:t>000025-33</a:t>
+            </a:r>
+          </a:p>
+        </p:txBody>
+      </p:sp>
+      <p:sp>
+        <p:nvSpPr>
+          <p:cNvPr id="23" name="TextBox 22"/>
           <p:cNvSpPr txBox="1"/>
           <p:nvPr/>
         </p:nvSpPr>
         <p:spPr>
           <a:xfrm>
-            <a:off x="420624" y="3602736"/>
-            <a:ext cx="5413248" cy="713232"/>
+            <a:off x="9802368" y="1261872"/>
+            <a:ext cx="2121408" cy="219456"/>
           </a:xfrm>
           <a:prstGeom prst="rect">
             <a:avLst/>
@@ -6698,27 +6782,27 @@
               </a:spcAft>
             </a:pPr>
             <a:r>
-              <a:rPr sz="1800" b="1">
+              <a:rPr sz="1200" b="1">
                 <a:solidFill>
                   <a:srgbClr val="0D3B66"/>
                 </a:solidFill>
                 <a:latin typeface="Calibri"/>
               </a:rPr>
-              <a:t>Matriz Pasillo Técnico Boulevard</a:t>
-            </a:r>
-          </a:p>
-        </p:txBody>
-      </p:sp>
-      <p:sp>
-        <p:nvSpPr>
-          <p:cNvPr id="22" name="TextBox 21"/>
+              <a:t>Salida ARROW</a:t>
+            </a:r>
+          </a:p>
+        </p:txBody>
+      </p:sp>
+      <p:sp>
+        <p:nvSpPr>
+          <p:cNvPr id="24" name="TextBox 23"/>
           <p:cNvSpPr txBox="1"/>
           <p:nvPr/>
         </p:nvSpPr>
         <p:spPr>
           <a:xfrm>
-            <a:off x="420624" y="4389120"/>
-            <a:ext cx="5413248" cy="530352"/>
+            <a:off x="9802368" y="1463040"/>
+            <a:ext cx="2121408" cy="182880"/>
           </a:xfrm>
           <a:prstGeom prst="rect">
             <a:avLst/>
@@ -6737,27 +6821,346 @@
               </a:spcAft>
             </a:pPr>
             <a:r>
-              <a:rPr sz="1300" b="0">
+              <a:rPr sz="1000" b="0">
                 <a:solidFill>
                   <a:srgbClr val="5A5A5A"/>
                 </a:solidFill>
                 <a:latin typeface="Calibri"/>
               </a:rPr>
-              <a:t>Matriz pasillo técnico Boulevard</a:t>
-            </a:r>
-          </a:p>
-        </p:txBody>
-      </p:sp>
-      <p:sp>
-        <p:nvSpPr>
-          <p:cNvPr id="23" name="Rounded Rectangle 22"/>
+              <a:t>residual</a:t>
+            </a:r>
+          </a:p>
+        </p:txBody>
+      </p:sp>
+      <p:sp>
+        <p:nvSpPr>
+          <p:cNvPr id="25" name="Rounded Rectangle 24"/>
           <p:cNvSpPr/>
           <p:nvPr/>
         </p:nvSpPr>
         <p:spPr>
           <a:xfrm>
-            <a:off x="6199632" y="3182112"/>
-            <a:ext cx="5742432" cy="1938528"/>
+            <a:off x="201168" y="1792224"/>
+            <a:ext cx="7973568" cy="3822191"/>
+          </a:xfrm>
+          <a:prstGeom prst="roundRect">
+            <a:avLst>
+              <a:gd name="adj" fmla="val 8000"/>
+            </a:avLst>
+          </a:prstGeom>
+          <a:solidFill>
+            <a:srgbClr val="F5F7FA"/>
+          </a:solidFill>
+          <a:ln>
+            <a:noFill/>
+          </a:ln>
+        </p:spPr>
+        <p:style>
+          <a:lnRef idx="1">
+            <a:schemeClr val="accent1"/>
+          </a:lnRef>
+          <a:fillRef idx="3">
+            <a:schemeClr val="accent1"/>
+          </a:fillRef>
+          <a:effectRef idx="2">
+            <a:schemeClr val="accent1"/>
+          </a:effectRef>
+          <a:fontRef idx="minor">
+            <a:schemeClr val="lt1"/>
+          </a:fontRef>
+        </p:style>
+        <p:txBody>
+          <a:bodyPr rtlCol="0" anchor="ctr"/>
+          <a:lstStyle/>
+          <a:p>
+            <a:pPr algn="ctr"/>
+          </a:p>
+        </p:txBody>
+      </p:sp>
+      <p:pic>
+        <p:nvPicPr>
+          <p:cNvPr id="26" name="Picture 25" descr="mam_mensual_may_ago.png"/>
+          <p:cNvPicPr>
+            <a:picLocks noChangeAspect="1"/>
+          </p:cNvPicPr>
+          <p:nvPr/>
+        </p:nvPicPr>
+        <p:blipFill>
+          <a:blip r:embed="rId3"/>
+          <a:stretch>
+            <a:fillRect/>
+          </a:stretch>
+        </p:blipFill>
+        <p:spPr>
+          <a:xfrm>
+            <a:off x="329184" y="1865376"/>
+            <a:ext cx="7717536" cy="3777531"/>
+          </a:xfrm>
+          <a:prstGeom prst="rect">
+            <a:avLst/>
+          </a:prstGeom>
+        </p:spPr>
+      </p:pic>
+      <p:sp>
+        <p:nvSpPr>
+          <p:cNvPr id="27" name="Rounded Rectangle 26"/>
+          <p:cNvSpPr/>
+          <p:nvPr/>
+        </p:nvSpPr>
+        <p:spPr>
+          <a:xfrm>
+            <a:off x="8302752" y="1792224"/>
+            <a:ext cx="3675887" cy="3822191"/>
+          </a:xfrm>
+          <a:prstGeom prst="roundRect">
+            <a:avLst>
+              <a:gd name="adj" fmla="val 8000"/>
+            </a:avLst>
+          </a:prstGeom>
+          <a:solidFill>
+            <a:srgbClr val="FFFFFF"/>
+          </a:solidFill>
+          <a:ln w="6350">
+            <a:solidFill>
+              <a:srgbClr val="1F77B4"/>
+            </a:solidFill>
+          </a:ln>
+        </p:spPr>
+        <p:style>
+          <a:lnRef idx="1">
+            <a:schemeClr val="accent1"/>
+          </a:lnRef>
+          <a:fillRef idx="3">
+            <a:schemeClr val="accent1"/>
+          </a:fillRef>
+          <a:effectRef idx="2">
+            <a:schemeClr val="accent1"/>
+          </a:effectRef>
+          <a:fontRef idx="minor">
+            <a:schemeClr val="lt1"/>
+          </a:fontRef>
+        </p:style>
+        <p:txBody>
+          <a:bodyPr rtlCol="0" anchor="ctr"/>
+          <a:lstStyle/>
+          <a:p>
+            <a:pPr algn="ctr"/>
+          </a:p>
+        </p:txBody>
+      </p:sp>
+      <p:sp>
+        <p:nvSpPr>
+          <p:cNvPr id="28" name="TextBox 27"/>
+          <p:cNvSpPr txBox="1"/>
+          <p:nvPr/>
+        </p:nvSpPr>
+        <p:spPr>
+          <a:xfrm>
+            <a:off x="8430768" y="1847088"/>
+            <a:ext cx="3419856" cy="201168"/>
+          </a:xfrm>
+          <a:prstGeom prst="rect">
+            <a:avLst/>
+          </a:prstGeom>
+          <a:noFill/>
+        </p:spPr>
+        <p:txBody>
+          <a:bodyPr wrap="square">
+            <a:spAutoFit/>
+          </a:bodyPr>
+          <a:lstStyle/>
+          <a:p>
+            <a:pPr algn="l">
+              <a:spcAft>
+                <a:spcPts val="300"/>
+              </a:spcAft>
+            </a:pPr>
+            <a:r>
+              <a:rPr sz="1100" b="1">
+                <a:solidFill>
+                  <a:srgbClr val="1F77B4"/>
+                </a:solidFill>
+                <a:latin typeface="Calibri"/>
+              </a:rPr>
+              <a:t>JULIO · último mes cerrado</a:t>
+            </a:r>
+          </a:p>
+        </p:txBody>
+      </p:sp>
+      <p:sp>
+        <p:nvSpPr>
+          <p:cNvPr id="29" name="TextBox 28"/>
+          <p:cNvSpPr txBox="1"/>
+          <p:nvPr/>
+        </p:nvSpPr>
+        <p:spPr>
+          <a:xfrm>
+            <a:off x="8430768" y="2048256"/>
+            <a:ext cx="3419856" cy="256032"/>
+          </a:xfrm>
+          <a:prstGeom prst="rect">
+            <a:avLst/>
+          </a:prstGeom>
+          <a:noFill/>
+        </p:spPr>
+        <p:txBody>
+          <a:bodyPr wrap="square">
+            <a:spAutoFit/>
+          </a:bodyPr>
+          <a:lstStyle/>
+          <a:p>
+            <a:pPr algn="l">
+              <a:spcAft>
+                <a:spcPts val="300"/>
+              </a:spcAft>
+            </a:pPr>
+            <a:r>
+              <a:rPr sz="1200" b="0">
+                <a:solidFill>
+                  <a:srgbClr val="5A5A5A"/>
+                </a:solidFill>
+                <a:latin typeface="Calibri"/>
+              </a:rPr>
+              <a:t>El recinto sumó 10.356 m³</a:t>
+            </a:r>
+          </a:p>
+        </p:txBody>
+      </p:sp>
+      <p:sp>
+        <p:nvSpPr>
+          <p:cNvPr id="30" name="Rounded Rectangle 29"/>
+          <p:cNvSpPr/>
+          <p:nvPr/>
+        </p:nvSpPr>
+        <p:spPr>
+          <a:xfrm>
+            <a:off x="8430768" y="2359152"/>
+            <a:ext cx="3419856" cy="603504"/>
+          </a:xfrm>
+          <a:prstGeom prst="roundRect">
+            <a:avLst>
+              <a:gd name="adj" fmla="val 8000"/>
+            </a:avLst>
+          </a:prstGeom>
+          <a:solidFill>
+            <a:srgbClr val="F5F7FA"/>
+          </a:solidFill>
+          <a:ln w="6350">
+            <a:solidFill>
+              <a:srgbClr val="0D3B66"/>
+            </a:solidFill>
+          </a:ln>
+        </p:spPr>
+        <p:style>
+          <a:lnRef idx="1">
+            <a:schemeClr val="accent1"/>
+          </a:lnRef>
+          <a:fillRef idx="3">
+            <a:schemeClr val="accent1"/>
+          </a:fillRef>
+          <a:effectRef idx="2">
+            <a:schemeClr val="accent1"/>
+          </a:effectRef>
+          <a:fontRef idx="minor">
+            <a:schemeClr val="lt1"/>
+          </a:fontRef>
+        </p:style>
+        <p:txBody>
+          <a:bodyPr rtlCol="0" anchor="ctr"/>
+          <a:lstStyle/>
+          <a:p>
+            <a:pPr algn="ctr"/>
+          </a:p>
+        </p:txBody>
+      </p:sp>
+      <p:sp>
+        <p:nvSpPr>
+          <p:cNvPr id="31" name="TextBox 30"/>
+          <p:cNvSpPr txBox="1"/>
+          <p:nvPr/>
+        </p:nvSpPr>
+        <p:spPr>
+          <a:xfrm>
+            <a:off x="8540496" y="2395728"/>
+            <a:ext cx="3200400" cy="182880"/>
+          </a:xfrm>
+          <a:prstGeom prst="rect">
+            <a:avLst/>
+          </a:prstGeom>
+          <a:noFill/>
+        </p:spPr>
+        <p:txBody>
+          <a:bodyPr wrap="square">
+            <a:spAutoFit/>
+          </a:bodyPr>
+          <a:lstStyle/>
+          <a:p>
+            <a:pPr algn="l">
+              <a:spcAft>
+                <a:spcPts val="300"/>
+              </a:spcAft>
+            </a:pPr>
+            <a:r>
+              <a:rPr sz="1300" b="1">
+                <a:solidFill>
+                  <a:srgbClr val="0D3B66"/>
+                </a:solidFill>
+                <a:latin typeface="Calibri"/>
+              </a:rPr>
+              <a:t>Placa Bancaria</a:t>
+            </a:r>
+          </a:p>
+        </p:txBody>
+      </p:sp>
+      <p:sp>
+        <p:nvSpPr>
+          <p:cNvPr id="32" name="TextBox 31"/>
+          <p:cNvSpPr txBox="1"/>
+          <p:nvPr/>
+        </p:nvSpPr>
+        <p:spPr>
+          <a:xfrm>
+            <a:off x="8540496" y="2615184"/>
+            <a:ext cx="3200400" cy="274320"/>
+          </a:xfrm>
+          <a:prstGeom prst="rect">
+            <a:avLst/>
+          </a:prstGeom>
+          <a:noFill/>
+        </p:spPr>
+        <p:txBody>
+          <a:bodyPr wrap="square">
+            <a:spAutoFit/>
+          </a:bodyPr>
+          <a:lstStyle/>
+          <a:p>
+            <a:pPr algn="l">
+              <a:spcAft>
+                <a:spcPts val="300"/>
+              </a:spcAft>
+            </a:pPr>
+            <a:r>
+              <a:rPr sz="1500" b="1">
+                <a:solidFill>
+                  <a:srgbClr val="0D3B66"/>
+                </a:solidFill>
+                <a:latin typeface="Calibri"/>
+              </a:rPr>
+              <a:t>7.084 m³    68 %</a:t>
+            </a:r>
+          </a:p>
+        </p:txBody>
+      </p:sp>
+      <p:sp>
+        <p:nvSpPr>
+          <p:cNvPr id="33" name="Rounded Rectangle 32"/>
+          <p:cNvSpPr/>
+          <p:nvPr/>
+        </p:nvSpPr>
+        <p:spPr>
+          <a:xfrm>
+            <a:off x="8430768" y="2999232"/>
+            <a:ext cx="3419856" cy="603504"/>
           </a:xfrm>
           <a:prstGeom prst="roundRect">
             <a:avLst>
@@ -6797,14 +7200,14 @@
       </p:sp>
       <p:sp>
         <p:nvSpPr>
-          <p:cNvPr id="24" name="TextBox 23"/>
+          <p:cNvPr id="34" name="TextBox 33"/>
           <p:cNvSpPr txBox="1"/>
           <p:nvPr/>
         </p:nvSpPr>
         <p:spPr>
           <a:xfrm>
-            <a:off x="6364224" y="3310128"/>
-            <a:ext cx="5413248" cy="256032"/>
+            <a:off x="8540496" y="3035808"/>
+            <a:ext cx="3200400" cy="182880"/>
           </a:xfrm>
           <a:prstGeom prst="rect">
             <a:avLst/>
@@ -6823,27 +7226,27 @@
               </a:spcAft>
             </a:pPr>
             <a:r>
-              <a:rPr sz="1200" b="1">
-                <a:solidFill>
-                  <a:srgbClr val="C9A227"/>
+              <a:rPr sz="1300" b="1">
+                <a:solidFill>
+                  <a:srgbClr val="1F77B4"/>
                 </a:solidFill>
                 <a:latin typeface="Calibri"/>
               </a:rPr>
-              <a:t>000025-33</a:t>
-            </a:r>
-          </a:p>
-        </p:txBody>
-      </p:sp>
-      <p:sp>
-        <p:nvSpPr>
-          <p:cNvPr id="25" name="TextBox 24"/>
+              <a:t>Ripley</a:t>
+            </a:r>
+          </a:p>
+        </p:txBody>
+      </p:sp>
+      <p:sp>
+        <p:nvSpPr>
+          <p:cNvPr id="35" name="TextBox 34"/>
           <p:cNvSpPr txBox="1"/>
           <p:nvPr/>
         </p:nvSpPr>
         <p:spPr>
           <a:xfrm>
-            <a:off x="6364224" y="3602736"/>
-            <a:ext cx="5413248" cy="713232"/>
+            <a:off x="8540496" y="3255264"/>
+            <a:ext cx="3200400" cy="274320"/>
           </a:xfrm>
           <a:prstGeom prst="rect">
             <a:avLst/>
@@ -6862,821 +7265,7 @@
               </a:spcAft>
             </a:pPr>
             <a:r>
-              <a:rPr sz="1800" b="1">
-                <a:solidFill>
-                  <a:srgbClr val="0D3B66"/>
-                </a:solidFill>
-                <a:latin typeface="Calibri"/>
-              </a:rPr>
-              <a:t>Salida de emergencia pasillo 1 ARROW</a:t>
-            </a:r>
-          </a:p>
-        </p:txBody>
-      </p:sp>
-      <p:sp>
-        <p:nvSpPr>
-          <p:cNvPr id="26" name="TextBox 25"/>
-          <p:cNvSpPr txBox="1"/>
-          <p:nvPr/>
-        </p:nvSpPr>
-        <p:spPr>
-          <a:xfrm>
-            <a:off x="6364224" y="4389120"/>
-            <a:ext cx="5413248" cy="530352"/>
-          </a:xfrm>
-          <a:prstGeom prst="rect">
-            <a:avLst/>
-          </a:prstGeom>
-          <a:noFill/>
-        </p:spPr>
-        <p:txBody>
-          <a:bodyPr wrap="square">
-            <a:spAutoFit/>
-          </a:bodyPr>
-          <a:lstStyle/>
-          <a:p>
-            <a:pPr algn="l">
-              <a:spcAft>
-                <a:spcPts val="300"/>
-              </a:spcAft>
-            </a:pPr>
-            <a:r>
-              <a:rPr sz="1300" b="0">
-                <a:solidFill>
-                  <a:srgbClr val="5A5A5A"/>
-                </a:solidFill>
-                <a:latin typeface="Calibri"/>
-              </a:rPr>
-              <a:t>Salida de emergencia pasillo 1 ARROW</a:t>
-            </a:r>
-          </a:p>
-        </p:txBody>
-      </p:sp>
-      <p:sp>
-        <p:nvSpPr>
-          <p:cNvPr id="27" name="Rounded Rectangle 26"/>
-          <p:cNvSpPr/>
-          <p:nvPr/>
-        </p:nvSpPr>
-        <p:spPr>
-          <a:xfrm>
-            <a:off x="256032" y="5394960"/>
-            <a:ext cx="11686032" cy="1170432"/>
-          </a:xfrm>
-          <a:prstGeom prst="roundRect">
-            <a:avLst>
-              <a:gd name="adj" fmla="val 8000"/>
-            </a:avLst>
-          </a:prstGeom>
-          <a:solidFill>
-            <a:srgbClr val="FFF9EB"/>
-          </a:solidFill>
-          <a:ln w="6350">
-            <a:solidFill>
-              <a:srgbClr val="C9A227"/>
-            </a:solidFill>
-          </a:ln>
-        </p:spPr>
-        <p:style>
-          <a:lnRef idx="1">
-            <a:schemeClr val="accent1"/>
-          </a:lnRef>
-          <a:fillRef idx="3">
-            <a:schemeClr val="accent1"/>
-          </a:fillRef>
-          <a:effectRef idx="2">
-            <a:schemeClr val="accent1"/>
-          </a:effectRef>
-          <a:fontRef idx="minor">
-            <a:schemeClr val="lt1"/>
-          </a:fontRef>
-        </p:style>
-        <p:txBody>
-          <a:bodyPr rtlCol="0" anchor="ctr"/>
-          <a:lstStyle/>
-          <a:p>
-            <a:pPr algn="ctr"/>
-          </a:p>
-        </p:txBody>
-      </p:sp>
-      <p:sp>
-        <p:nvSpPr>
-          <p:cNvPr id="28" name="TextBox 27"/>
-          <p:cNvSpPr txBox="1"/>
-          <p:nvPr/>
-        </p:nvSpPr>
-        <p:spPr>
-          <a:xfrm>
-            <a:off x="438912" y="5504688"/>
-            <a:ext cx="11338560" cy="256032"/>
-          </a:xfrm>
-          <a:prstGeom prst="rect">
-            <a:avLst/>
-          </a:prstGeom>
-          <a:noFill/>
-        </p:spPr>
-        <p:txBody>
-          <a:bodyPr wrap="square">
-            <a:spAutoFit/>
-          </a:bodyPr>
-          <a:lstStyle/>
-          <a:p>
-            <a:pPr algn="l">
-              <a:spcAft>
-                <a:spcPts val="300"/>
-              </a:spcAft>
-            </a:pPr>
-            <a:r>
-              <a:rPr sz="1100" b="1">
-                <a:solidFill>
-                  <a:srgbClr val="C9A227"/>
-                </a:solidFill>
-                <a:latin typeface="Calibri"/>
-              </a:rPr>
-              <a:t>RECINTO</a:t>
-            </a:r>
-          </a:p>
-        </p:txBody>
-      </p:sp>
-      <p:sp>
-        <p:nvSpPr>
-          <p:cNvPr id="29" name="TextBox 28"/>
-          <p:cNvSpPr txBox="1"/>
-          <p:nvPr/>
-        </p:nvSpPr>
-        <p:spPr>
-          <a:xfrm>
-            <a:off x="438912" y="5779008"/>
-            <a:ext cx="11338560" cy="658368"/>
-          </a:xfrm>
-          <a:prstGeom prst="rect">
-            <a:avLst/>
-          </a:prstGeom>
-          <a:noFill/>
-        </p:spPr>
-        <p:txBody>
-          <a:bodyPr wrap="square">
-            <a:spAutoFit/>
-          </a:bodyPr>
-          <a:lstStyle/>
-          <a:p>
-            <a:pPr algn="l">
-              <a:spcAft>
-                <a:spcPts val="300"/>
-              </a:spcAft>
-            </a:pPr>
-            <a:r>
-              <a:rPr sz="1300" b="0">
-                <a:solidFill>
-                  <a:srgbClr val="0D3B66"/>
-                </a:solidFill>
-                <a:latin typeface="Calibri"/>
-              </a:rPr>
-              <a:t>Recepción 06/11/2025  ·  Capacitación 14/11/2025  ·  Usuarios: Miguel Rupayan — Encargado de Operaciones  ·  Constanza Vilches — Analista Ambiental  ·  Equipo Mantención: C. Bustamante, O. Cuevas y Supervisor Eléctrico</a:t>
-            </a:r>
-          </a:p>
-        </p:txBody>
-      </p:sp>
-    </p:spTree>
-  </p:cSld>
-  <p:clrMapOvr>
-    <a:masterClrMapping/>
-  </p:clrMapOvr>
-</p:sld>
-</file>
-
-<file path=ppt/slides/slide6.xml><?xml version="1.0" encoding="utf-8"?>
-<p:sld xmlns:a="http://schemas.openxmlformats.org/drawingml/2006/main" xmlns:p="http://schemas.openxmlformats.org/presentationml/2006/main" xmlns:r="http://schemas.openxmlformats.org/officeDocument/2006/relationships">
-  <p:cSld>
-    <p:spTree>
-      <p:nvGrpSpPr>
-        <p:cNvPr id="1" name=""/>
-        <p:cNvGrpSpPr/>
-        <p:nvPr/>
-      </p:nvGrpSpPr>
-      <p:grpSpPr/>
-      <p:sp>
-        <p:nvSpPr>
-          <p:cNvPr id="2" name="Rectangle 1"/>
-          <p:cNvSpPr/>
-          <p:nvPr/>
-        </p:nvSpPr>
-        <p:spPr>
-          <a:xfrm>
-            <a:off x="0" y="0"/>
-            <a:ext cx="12191695" cy="841248"/>
-          </a:xfrm>
-          <a:prstGeom prst="rect">
-            <a:avLst/>
-          </a:prstGeom>
-          <a:solidFill>
-            <a:srgbClr val="0D3B66"/>
-          </a:solidFill>
-          <a:ln>
-            <a:noFill/>
-          </a:ln>
-        </p:spPr>
-        <p:style>
-          <a:lnRef idx="1">
-            <a:schemeClr val="accent1"/>
-          </a:lnRef>
-          <a:fillRef idx="3">
-            <a:schemeClr val="accent1"/>
-          </a:fillRef>
-          <a:effectRef idx="2">
-            <a:schemeClr val="accent1"/>
-          </a:effectRef>
-          <a:fontRef idx="minor">
-            <a:schemeClr val="lt1"/>
-          </a:fontRef>
-        </p:style>
-        <p:txBody>
-          <a:bodyPr rtlCol="0" anchor="ctr"/>
-          <a:lstStyle/>
-          <a:p>
-            <a:pPr algn="ctr"/>
-          </a:p>
-        </p:txBody>
-      </p:sp>
-      <p:sp>
-        <p:nvSpPr>
-          <p:cNvPr id="3" name="Rectangle 2"/>
-          <p:cNvSpPr/>
-          <p:nvPr/>
-        </p:nvSpPr>
-        <p:spPr>
-          <a:xfrm>
-            <a:off x="0" y="841248"/>
-            <a:ext cx="12191695" cy="54864"/>
-          </a:xfrm>
-          <a:prstGeom prst="rect">
-            <a:avLst/>
-          </a:prstGeom>
-          <a:solidFill>
-            <a:srgbClr val="C9A227"/>
-          </a:solidFill>
-          <a:ln>
-            <a:noFill/>
-          </a:ln>
-        </p:spPr>
-        <p:style>
-          <a:lnRef idx="1">
-            <a:schemeClr val="accent1"/>
-          </a:lnRef>
-          <a:fillRef idx="3">
-            <a:schemeClr val="accent1"/>
-          </a:fillRef>
-          <a:effectRef idx="2">
-            <a:schemeClr val="accent1"/>
-          </a:effectRef>
-          <a:fontRef idx="minor">
-            <a:schemeClr val="lt1"/>
-          </a:fontRef>
-        </p:style>
-        <p:txBody>
-          <a:bodyPr rtlCol="0" anchor="ctr"/>
-          <a:lstStyle/>
-          <a:p>
-            <a:pPr algn="ctr"/>
-          </a:p>
-        </p:txBody>
-      </p:sp>
-      <p:pic>
-        <p:nvPicPr>
-          <p:cNvPr id="4" name="Picture 3" descr="logo wes.bmp"/>
-          <p:cNvPicPr>
-            <a:picLocks noChangeAspect="1"/>
-          </p:cNvPicPr>
-          <p:nvPr/>
-        </p:nvPicPr>
-        <p:blipFill>
-          <a:blip r:embed="rId2"/>
-          <a:stretch>
-            <a:fillRect/>
-          </a:stretch>
-        </p:blipFill>
-        <p:spPr>
-          <a:xfrm>
-            <a:off x="10835640" y="146304"/>
-            <a:ext cx="1143000" cy="253401"/>
-          </a:xfrm>
-          <a:prstGeom prst="rect">
-            <a:avLst/>
-          </a:prstGeom>
-        </p:spPr>
-      </p:pic>
-      <p:sp>
-        <p:nvSpPr>
-          <p:cNvPr id="5" name="TextBox 4"/>
-          <p:cNvSpPr txBox="1"/>
-          <p:nvPr/>
-        </p:nvSpPr>
-        <p:spPr>
-          <a:xfrm>
-            <a:off x="256032" y="109728"/>
-            <a:ext cx="10607040" cy="384048"/>
-          </a:xfrm>
-          <a:prstGeom prst="rect">
-            <a:avLst/>
-          </a:prstGeom>
-          <a:noFill/>
-        </p:spPr>
-        <p:txBody>
-          <a:bodyPr wrap="square">
-            <a:spAutoFit/>
-          </a:bodyPr>
-          <a:lstStyle/>
-          <a:p>
-            <a:pPr algn="l">
-              <a:spcAft>
-                <a:spcPts val="300"/>
-              </a:spcAft>
-            </a:pPr>
-            <a:r>
-              <a:rPr sz="2000" b="1">
-                <a:solidFill>
-                  <a:srgbClr val="FFFFFF"/>
-                </a:solidFill>
-                <a:latin typeface="Calibri"/>
-              </a:rPr>
-              <a:t>MAM  ·  2. Consumo mensualizado</a:t>
-            </a:r>
-          </a:p>
-        </p:txBody>
-      </p:sp>
-      <p:sp>
-        <p:nvSpPr>
-          <p:cNvPr id="6" name="TextBox 5"/>
-          <p:cNvSpPr txBox="1"/>
-          <p:nvPr/>
-        </p:nvSpPr>
-        <p:spPr>
-          <a:xfrm>
-            <a:off x="256032" y="457200"/>
-            <a:ext cx="10607040" cy="329184"/>
-          </a:xfrm>
-          <a:prstGeom prst="rect">
-            <a:avLst/>
-          </a:prstGeom>
-          <a:noFill/>
-        </p:spPr>
-        <p:txBody>
-          <a:bodyPr wrap="square">
-            <a:spAutoFit/>
-          </a:bodyPr>
-          <a:lstStyle/>
-          <a:p>
-            <a:pPr algn="l">
-              <a:spcAft>
-                <a:spcPts val="300"/>
-              </a:spcAft>
-            </a:pPr>
-            <a:r>
-              <a:rPr sz="1100" b="0">
-                <a:solidFill>
-                  <a:srgbClr val="DCE6F0"/>
-                </a:solidFill>
-                <a:latin typeface="Calibri"/>
-              </a:rPr>
-              <a:t>Suma de los 5 puntos WES   |   01/05/2026 – 17/08/2026   |   Agosto: a la fecha vs proyección al 31</a:t>
-            </a:r>
-          </a:p>
-        </p:txBody>
-      </p:sp>
-      <p:sp>
-        <p:nvSpPr>
-          <p:cNvPr id="7" name="Rounded Rectangle 6"/>
-          <p:cNvSpPr/>
-          <p:nvPr/>
-        </p:nvSpPr>
-        <p:spPr>
-          <a:xfrm>
-            <a:off x="201168" y="1024128"/>
-            <a:ext cx="7973568" cy="4617720"/>
-          </a:xfrm>
-          <a:prstGeom prst="roundRect">
-            <a:avLst>
-              <a:gd name="adj" fmla="val 8000"/>
-            </a:avLst>
-          </a:prstGeom>
-          <a:solidFill>
-            <a:srgbClr val="F5F7FA"/>
-          </a:solidFill>
-          <a:ln>
-            <a:noFill/>
-          </a:ln>
-        </p:spPr>
-        <p:style>
-          <a:lnRef idx="1">
-            <a:schemeClr val="accent1"/>
-          </a:lnRef>
-          <a:fillRef idx="3">
-            <a:schemeClr val="accent1"/>
-          </a:fillRef>
-          <a:effectRef idx="2">
-            <a:schemeClr val="accent1"/>
-          </a:effectRef>
-          <a:fontRef idx="minor">
-            <a:schemeClr val="lt1"/>
-          </a:fontRef>
-        </p:style>
-        <p:txBody>
-          <a:bodyPr rtlCol="0" anchor="ctr"/>
-          <a:lstStyle/>
-          <a:p>
-            <a:pPr algn="ctr"/>
-          </a:p>
-        </p:txBody>
-      </p:sp>
-      <p:pic>
-        <p:nvPicPr>
-          <p:cNvPr id="8" name="Picture 7" descr="mam_mensual_may_ago.png"/>
-          <p:cNvPicPr>
-            <a:picLocks noChangeAspect="1"/>
-          </p:cNvPicPr>
-          <p:nvPr/>
-        </p:nvPicPr>
-        <p:blipFill>
-          <a:blip r:embed="rId3"/>
-          <a:stretch>
-            <a:fillRect/>
-          </a:stretch>
-        </p:blipFill>
-        <p:spPr>
-          <a:xfrm>
-            <a:off x="347472" y="1115568"/>
-            <a:ext cx="7680960" cy="3759628"/>
-          </a:xfrm>
-          <a:prstGeom prst="rect">
-            <a:avLst/>
-          </a:prstGeom>
-        </p:spPr>
-      </p:pic>
-      <p:sp>
-        <p:nvSpPr>
-          <p:cNvPr id="9" name="Rounded Rectangle 8"/>
-          <p:cNvSpPr/>
-          <p:nvPr/>
-        </p:nvSpPr>
-        <p:spPr>
-          <a:xfrm>
-            <a:off x="8302752" y="1024128"/>
-            <a:ext cx="3675887" cy="4617720"/>
-          </a:xfrm>
-          <a:prstGeom prst="roundRect">
-            <a:avLst>
-              <a:gd name="adj" fmla="val 8000"/>
-            </a:avLst>
-          </a:prstGeom>
-          <a:solidFill>
-            <a:srgbClr val="FFFFFF"/>
-          </a:solidFill>
-          <a:ln w="6350">
-            <a:solidFill>
-              <a:srgbClr val="1F77B4"/>
-            </a:solidFill>
-          </a:ln>
-        </p:spPr>
-        <p:style>
-          <a:lnRef idx="1">
-            <a:schemeClr val="accent1"/>
-          </a:lnRef>
-          <a:fillRef idx="3">
-            <a:schemeClr val="accent1"/>
-          </a:fillRef>
-          <a:effectRef idx="2">
-            <a:schemeClr val="accent1"/>
-          </a:effectRef>
-          <a:fontRef idx="minor">
-            <a:schemeClr val="lt1"/>
-          </a:fontRef>
-        </p:style>
-        <p:txBody>
-          <a:bodyPr rtlCol="0" anchor="ctr"/>
-          <a:lstStyle/>
-          <a:p>
-            <a:pPr algn="ctr"/>
-          </a:p>
-        </p:txBody>
-      </p:sp>
-      <p:sp>
-        <p:nvSpPr>
-          <p:cNvPr id="10" name="TextBox 9"/>
-          <p:cNvSpPr txBox="1"/>
-          <p:nvPr/>
-        </p:nvSpPr>
-        <p:spPr>
-          <a:xfrm>
-            <a:off x="8430768" y="1078992"/>
-            <a:ext cx="3419856" cy="219456"/>
-          </a:xfrm>
-          <a:prstGeom prst="rect">
-            <a:avLst/>
-          </a:prstGeom>
-          <a:noFill/>
-        </p:spPr>
-        <p:txBody>
-          <a:bodyPr wrap="square">
-            <a:spAutoFit/>
-          </a:bodyPr>
-          <a:lstStyle/>
-          <a:p>
-            <a:pPr algn="l">
-              <a:spcAft>
-                <a:spcPts val="300"/>
-              </a:spcAft>
-            </a:pPr>
-            <a:r>
-              <a:rPr sz="1100" b="1">
-                <a:solidFill>
-                  <a:srgbClr val="1F77B4"/>
-                </a:solidFill>
-                <a:latin typeface="Calibri"/>
-              </a:rPr>
-              <a:t>JULIO · último mes cerrado</a:t>
-            </a:r>
-          </a:p>
-        </p:txBody>
-      </p:sp>
-      <p:sp>
-        <p:nvSpPr>
-          <p:cNvPr id="11" name="TextBox 10"/>
-          <p:cNvSpPr txBox="1"/>
-          <p:nvPr/>
-        </p:nvSpPr>
-        <p:spPr>
-          <a:xfrm>
-            <a:off x="8430768" y="1298448"/>
-            <a:ext cx="3419856" cy="384048"/>
-          </a:xfrm>
-          <a:prstGeom prst="rect">
-            <a:avLst/>
-          </a:prstGeom>
-          <a:noFill/>
-        </p:spPr>
-        <p:txBody>
-          <a:bodyPr wrap="square">
-            <a:spAutoFit/>
-          </a:bodyPr>
-          <a:lstStyle/>
-          <a:p>
-            <a:pPr algn="l">
-              <a:spcAft>
-                <a:spcPts val="300"/>
-              </a:spcAft>
-            </a:pPr>
-            <a:r>
-              <a:rPr sz="1200" b="0">
-                <a:solidFill>
-                  <a:srgbClr val="5A5A5A"/>
-                </a:solidFill>
-                <a:latin typeface="Calibri"/>
-              </a:rPr>
-              <a:t>El recinto sumó 10.356 m³. Peso de cada equipo:</a:t>
-            </a:r>
-          </a:p>
-        </p:txBody>
-      </p:sp>
-      <p:sp>
-        <p:nvSpPr>
-          <p:cNvPr id="12" name="Rounded Rectangle 11"/>
-          <p:cNvSpPr/>
-          <p:nvPr/>
-        </p:nvSpPr>
-        <p:spPr>
-          <a:xfrm>
-            <a:off x="8430768" y="1719072"/>
-            <a:ext cx="3419856" cy="713232"/>
-          </a:xfrm>
-          <a:prstGeom prst="roundRect">
-            <a:avLst>
-              <a:gd name="adj" fmla="val 8000"/>
-            </a:avLst>
-          </a:prstGeom>
-          <a:solidFill>
-            <a:srgbClr val="F5F7FA"/>
-          </a:solidFill>
-          <a:ln w="6350">
-            <a:solidFill>
-              <a:srgbClr val="0D3B66"/>
-            </a:solidFill>
-          </a:ln>
-        </p:spPr>
-        <p:style>
-          <a:lnRef idx="1">
-            <a:schemeClr val="accent1"/>
-          </a:lnRef>
-          <a:fillRef idx="3">
-            <a:schemeClr val="accent1"/>
-          </a:fillRef>
-          <a:effectRef idx="2">
-            <a:schemeClr val="accent1"/>
-          </a:effectRef>
-          <a:fontRef idx="minor">
-            <a:schemeClr val="lt1"/>
-          </a:fontRef>
-        </p:style>
-        <p:txBody>
-          <a:bodyPr rtlCol="0" anchor="ctr"/>
-          <a:lstStyle/>
-          <a:p>
-            <a:pPr algn="ctr"/>
-          </a:p>
-        </p:txBody>
-      </p:sp>
-      <p:sp>
-        <p:nvSpPr>
-          <p:cNvPr id="13" name="TextBox 12"/>
-          <p:cNvSpPr txBox="1"/>
-          <p:nvPr/>
-        </p:nvSpPr>
-        <p:spPr>
-          <a:xfrm>
-            <a:off x="8558784" y="1764792"/>
-            <a:ext cx="3163824" cy="219456"/>
-          </a:xfrm>
-          <a:prstGeom prst="rect">
-            <a:avLst/>
-          </a:prstGeom>
-          <a:noFill/>
-        </p:spPr>
-        <p:txBody>
-          <a:bodyPr wrap="square">
-            <a:spAutoFit/>
-          </a:bodyPr>
-          <a:lstStyle/>
-          <a:p>
-            <a:pPr algn="l">
-              <a:spcAft>
-                <a:spcPts val="300"/>
-              </a:spcAft>
-            </a:pPr>
-            <a:r>
-              <a:rPr sz="1200" b="1">
-                <a:solidFill>
-                  <a:srgbClr val="0D3B66"/>
-                </a:solidFill>
-                <a:latin typeface="Calibri"/>
-              </a:rPr>
-              <a:t>Placa Bancaria</a:t>
-            </a:r>
-          </a:p>
-        </p:txBody>
-      </p:sp>
-      <p:sp>
-        <p:nvSpPr>
-          <p:cNvPr id="14" name="TextBox 13"/>
-          <p:cNvSpPr txBox="1"/>
-          <p:nvPr/>
-        </p:nvSpPr>
-        <p:spPr>
-          <a:xfrm>
-            <a:off x="8558784" y="2011679"/>
-            <a:ext cx="3163824" cy="347472"/>
-          </a:xfrm>
-          <a:prstGeom prst="rect">
-            <a:avLst/>
-          </a:prstGeom>
-          <a:noFill/>
-        </p:spPr>
-        <p:txBody>
-          <a:bodyPr wrap="square">
-            <a:spAutoFit/>
-          </a:bodyPr>
-          <a:lstStyle/>
-          <a:p>
-            <a:pPr algn="l">
-              <a:spcAft>
-                <a:spcPts val="300"/>
-              </a:spcAft>
-            </a:pPr>
-            <a:r>
-              <a:rPr sz="1600" b="1">
-                <a:solidFill>
-                  <a:srgbClr val="0D3B66"/>
-                </a:solidFill>
-                <a:latin typeface="Calibri"/>
-              </a:rPr>
-              <a:t>7.084 m³    68 %</a:t>
-            </a:r>
-          </a:p>
-        </p:txBody>
-      </p:sp>
-      <p:sp>
-        <p:nvSpPr>
-          <p:cNvPr id="15" name="Rounded Rectangle 14"/>
-          <p:cNvSpPr/>
-          <p:nvPr/>
-        </p:nvSpPr>
-        <p:spPr>
-          <a:xfrm>
-            <a:off x="8430768" y="2468879"/>
-            <a:ext cx="3419856" cy="713232"/>
-          </a:xfrm>
-          <a:prstGeom prst="roundRect">
-            <a:avLst>
-              <a:gd name="adj" fmla="val 8000"/>
-            </a:avLst>
-          </a:prstGeom>
-          <a:solidFill>
-            <a:srgbClr val="F5F7FA"/>
-          </a:solidFill>
-          <a:ln w="6350">
-            <a:solidFill>
-              <a:srgbClr val="1F77B4"/>
-            </a:solidFill>
-          </a:ln>
-        </p:spPr>
-        <p:style>
-          <a:lnRef idx="1">
-            <a:schemeClr val="accent1"/>
-          </a:lnRef>
-          <a:fillRef idx="3">
-            <a:schemeClr val="accent1"/>
-          </a:fillRef>
-          <a:effectRef idx="2">
-            <a:schemeClr val="accent1"/>
-          </a:effectRef>
-          <a:fontRef idx="minor">
-            <a:schemeClr val="lt1"/>
-          </a:fontRef>
-        </p:style>
-        <p:txBody>
-          <a:bodyPr rtlCol="0" anchor="ctr"/>
-          <a:lstStyle/>
-          <a:p>
-            <a:pPr algn="ctr"/>
-          </a:p>
-        </p:txBody>
-      </p:sp>
-      <p:sp>
-        <p:nvSpPr>
-          <p:cNvPr id="16" name="TextBox 15"/>
-          <p:cNvSpPr txBox="1"/>
-          <p:nvPr/>
-        </p:nvSpPr>
-        <p:spPr>
-          <a:xfrm>
-            <a:off x="8558784" y="2514599"/>
-            <a:ext cx="3163824" cy="219456"/>
-          </a:xfrm>
-          <a:prstGeom prst="rect">
-            <a:avLst/>
-          </a:prstGeom>
-          <a:noFill/>
-        </p:spPr>
-        <p:txBody>
-          <a:bodyPr wrap="square">
-            <a:spAutoFit/>
-          </a:bodyPr>
-          <a:lstStyle/>
-          <a:p>
-            <a:pPr algn="l">
-              <a:spcAft>
-                <a:spcPts val="300"/>
-              </a:spcAft>
-            </a:pPr>
-            <a:r>
-              <a:rPr sz="1200" b="1">
-                <a:solidFill>
-                  <a:srgbClr val="1F77B4"/>
-                </a:solidFill>
-                <a:latin typeface="Calibri"/>
-              </a:rPr>
-              <a:t>Ripley</a:t>
-            </a:r>
-          </a:p>
-        </p:txBody>
-      </p:sp>
-      <p:sp>
-        <p:nvSpPr>
-          <p:cNvPr id="17" name="TextBox 16"/>
-          <p:cNvSpPr txBox="1"/>
-          <p:nvPr/>
-        </p:nvSpPr>
-        <p:spPr>
-          <a:xfrm>
-            <a:off x="8558784" y="2761487"/>
-            <a:ext cx="3163824" cy="347472"/>
-          </a:xfrm>
-          <a:prstGeom prst="rect">
-            <a:avLst/>
-          </a:prstGeom>
-          <a:noFill/>
-        </p:spPr>
-        <p:txBody>
-          <a:bodyPr wrap="square">
-            <a:spAutoFit/>
-          </a:bodyPr>
-          <a:lstStyle/>
-          <a:p>
-            <a:pPr algn="l">
-              <a:spcAft>
-                <a:spcPts val="300"/>
-              </a:spcAft>
-            </a:pPr>
-            <a:r>
-              <a:rPr sz="1600" b="1">
+              <a:rPr sz="1500" b="1">
                 <a:solidFill>
                   <a:srgbClr val="0D3B66"/>
                 </a:solidFill>
@@ -7689,14 +7278,14 @@
       </p:sp>
       <p:sp>
         <p:nvSpPr>
-          <p:cNvPr id="18" name="Rounded Rectangle 17"/>
+          <p:cNvPr id="36" name="Rounded Rectangle 35"/>
           <p:cNvSpPr/>
           <p:nvPr/>
         </p:nvSpPr>
         <p:spPr>
           <a:xfrm>
-            <a:off x="8430768" y="3218687"/>
-            <a:ext cx="3419856" cy="713232"/>
+            <a:off x="8430768" y="3639312"/>
+            <a:ext cx="3419856" cy="603504"/>
           </a:xfrm>
           <a:prstGeom prst="roundRect">
             <a:avLst>
@@ -7736,14 +7325,14 @@
       </p:sp>
       <p:sp>
         <p:nvSpPr>
-          <p:cNvPr id="19" name="TextBox 18"/>
+          <p:cNvPr id="37" name="TextBox 36"/>
           <p:cNvSpPr txBox="1"/>
           <p:nvPr/>
         </p:nvSpPr>
         <p:spPr>
           <a:xfrm>
-            <a:off x="8558784" y="3264407"/>
-            <a:ext cx="3163824" cy="219456"/>
+            <a:off x="8540496" y="3675888"/>
+            <a:ext cx="3200400" cy="182880"/>
           </a:xfrm>
           <a:prstGeom prst="rect">
             <a:avLst/>
@@ -7762,7 +7351,7 @@
               </a:spcAft>
             </a:pPr>
             <a:r>
-              <a:rPr sz="1200" b="1">
+              <a:rPr sz="1300" b="1">
                 <a:solidFill>
                   <a:srgbClr val="7BA3C9"/>
                 </a:solidFill>
@@ -7775,14 +7364,14 @@
       </p:sp>
       <p:sp>
         <p:nvSpPr>
-          <p:cNvPr id="20" name="TextBox 19"/>
+          <p:cNvPr id="38" name="TextBox 37"/>
           <p:cNvSpPr txBox="1"/>
           <p:nvPr/>
         </p:nvSpPr>
         <p:spPr>
           <a:xfrm>
-            <a:off x="8558784" y="3511295"/>
-            <a:ext cx="3163824" cy="347472"/>
+            <a:off x="8540496" y="3895344"/>
+            <a:ext cx="3200400" cy="274320"/>
           </a:xfrm>
           <a:prstGeom prst="rect">
             <a:avLst/>
@@ -7801,27 +7390,27 @@
               </a:spcAft>
             </a:pPr>
             <a:r>
-              <a:rPr sz="1600" b="1">
+              <a:rPr sz="1500" b="1">
                 <a:solidFill>
                   <a:srgbClr val="0D3B66"/>
                 </a:solidFill>
                 <a:latin typeface="Calibri"/>
               </a:rPr>
-              <a:t>26 m³    0 %</a:t>
-            </a:r>
-          </a:p>
-        </p:txBody>
-      </p:sp>
-      <p:sp>
-        <p:nvSpPr>
-          <p:cNvPr id="21" name="Rounded Rectangle 20"/>
+              <a:t>26 m³    0,3 %</a:t>
+            </a:r>
+          </a:p>
+        </p:txBody>
+      </p:sp>
+      <p:sp>
+        <p:nvSpPr>
+          <p:cNvPr id="39" name="Rounded Rectangle 38"/>
           <p:cNvSpPr/>
           <p:nvPr/>
         </p:nvSpPr>
         <p:spPr>
           <a:xfrm>
-            <a:off x="8430768" y="3968496"/>
-            <a:ext cx="3419856" cy="713232"/>
+            <a:off x="8430768" y="4279392"/>
+            <a:ext cx="3419856" cy="603504"/>
           </a:xfrm>
           <a:prstGeom prst="roundRect">
             <a:avLst>
@@ -7861,14 +7450,14 @@
       </p:sp>
       <p:sp>
         <p:nvSpPr>
-          <p:cNvPr id="22" name="TextBox 21"/>
+          <p:cNvPr id="40" name="TextBox 39"/>
           <p:cNvSpPr txBox="1"/>
           <p:nvPr/>
         </p:nvSpPr>
         <p:spPr>
           <a:xfrm>
-            <a:off x="8558784" y="4014215"/>
-            <a:ext cx="3163824" cy="219456"/>
+            <a:off x="8540496" y="4315968"/>
+            <a:ext cx="3200400" cy="182880"/>
           </a:xfrm>
           <a:prstGeom prst="rect">
             <a:avLst/>
@@ -7887,7 +7476,7 @@
               </a:spcAft>
             </a:pPr>
             <a:r>
-              <a:rPr sz="1200" b="1">
+              <a:rPr sz="1300" b="1">
                 <a:solidFill>
                   <a:srgbClr val="5A8C6E"/>
                 </a:solidFill>
@@ -7900,14 +7489,14 @@
       </p:sp>
       <p:sp>
         <p:nvSpPr>
-          <p:cNvPr id="23" name="TextBox 22"/>
+          <p:cNvPr id="41" name="TextBox 40"/>
           <p:cNvSpPr txBox="1"/>
           <p:nvPr/>
         </p:nvSpPr>
         <p:spPr>
           <a:xfrm>
-            <a:off x="8558784" y="4261104"/>
-            <a:ext cx="3163824" cy="347472"/>
+            <a:off x="8540496" y="4535424"/>
+            <a:ext cx="3200400" cy="274320"/>
           </a:xfrm>
           <a:prstGeom prst="rect">
             <a:avLst/>
@@ -7926,27 +7515,27 @@
               </a:spcAft>
             </a:pPr>
             <a:r>
-              <a:rPr sz="1600" b="1">
+              <a:rPr sz="1500" b="1">
                 <a:solidFill>
                   <a:srgbClr val="0D3B66"/>
                 </a:solidFill>
                 <a:latin typeface="Calibri"/>
               </a:rPr>
-              <a:t>1 m³    0 %</a:t>
-            </a:r>
-          </a:p>
-        </p:txBody>
-      </p:sp>
-      <p:sp>
-        <p:nvSpPr>
-          <p:cNvPr id="24" name="Rounded Rectangle 23"/>
+              <a:t>1 m³    &lt;0,1 %</a:t>
+            </a:r>
+          </a:p>
+        </p:txBody>
+      </p:sp>
+      <p:sp>
+        <p:nvSpPr>
+          <p:cNvPr id="42" name="Rounded Rectangle 41"/>
           <p:cNvSpPr/>
           <p:nvPr/>
         </p:nvSpPr>
         <p:spPr>
           <a:xfrm>
-            <a:off x="8430768" y="4718304"/>
-            <a:ext cx="3419856" cy="713232"/>
+            <a:off x="8430768" y="4919472"/>
+            <a:ext cx="3419856" cy="603504"/>
           </a:xfrm>
           <a:prstGeom prst="roundRect">
             <a:avLst>
@@ -7986,14 +7575,14 @@
       </p:sp>
       <p:sp>
         <p:nvSpPr>
-          <p:cNvPr id="25" name="TextBox 24"/>
+          <p:cNvPr id="43" name="TextBox 42"/>
           <p:cNvSpPr txBox="1"/>
           <p:nvPr/>
         </p:nvSpPr>
         <p:spPr>
           <a:xfrm>
-            <a:off x="8558784" y="4764024"/>
-            <a:ext cx="3163824" cy="219456"/>
+            <a:off x="8540496" y="4956048"/>
+            <a:ext cx="3200400" cy="182880"/>
           </a:xfrm>
           <a:prstGeom prst="rect">
             <a:avLst/>
@@ -8012,1835 +7601,13 @@
               </a:spcAft>
             </a:pPr>
             <a:r>
-              <a:rPr sz="1200" b="1">
+              <a:rPr sz="1300" b="1">
                 <a:solidFill>
                   <a:srgbClr val="C9A227"/>
                 </a:solidFill>
                 <a:latin typeface="Calibri"/>
               </a:rPr>
               <a:t>Falabella</a:t>
-            </a:r>
-          </a:p>
-        </p:txBody>
-      </p:sp>
-      <p:sp>
-        <p:nvSpPr>
-          <p:cNvPr id="26" name="TextBox 25"/>
-          <p:cNvSpPr txBox="1"/>
-          <p:nvPr/>
-        </p:nvSpPr>
-        <p:spPr>
-          <a:xfrm>
-            <a:off x="8558784" y="5010912"/>
-            <a:ext cx="3163824" cy="347472"/>
-          </a:xfrm>
-          <a:prstGeom prst="rect">
-            <a:avLst/>
-          </a:prstGeom>
-          <a:noFill/>
-        </p:spPr>
-        <p:txBody>
-          <a:bodyPr wrap="square">
-            <a:spAutoFit/>
-          </a:bodyPr>
-          <a:lstStyle/>
-          <a:p>
-            <a:pPr algn="l">
-              <a:spcAft>
-                <a:spcPts val="300"/>
-              </a:spcAft>
-            </a:pPr>
-            <a:r>
-              <a:rPr sz="1400" b="1">
-                <a:solidFill>
-                  <a:srgbClr val="0D3B66"/>
-                </a:solidFill>
-                <a:latin typeface="Calibri"/>
-              </a:rPr>
-              <a:t>0 m³    0 %  ·  activo 11/08</a:t>
-            </a:r>
-          </a:p>
-        </p:txBody>
-      </p:sp>
-      <p:sp>
-        <p:nvSpPr>
-          <p:cNvPr id="27" name="TextBox 26"/>
-          <p:cNvSpPr txBox="1"/>
-          <p:nvPr/>
-        </p:nvSpPr>
-        <p:spPr>
-          <a:xfrm>
-            <a:off x="256032" y="5742432"/>
-            <a:ext cx="11887200" cy="960120"/>
-          </a:xfrm>
-          <a:prstGeom prst="rect">
-            <a:avLst/>
-          </a:prstGeom>
-          <a:noFill/>
-        </p:spPr>
-        <p:txBody>
-          <a:bodyPr wrap="square">
-            <a:spAutoFit/>
-          </a:bodyPr>
-          <a:lstStyle/>
-          <a:p>
-            <a:pPr algn="l">
-              <a:spcAft>
-                <a:spcPts val="300"/>
-              </a:spcAft>
-            </a:pPr>
-            <a:r>
-              <a:rPr sz="1300" b="0">
-                <a:solidFill>
-                  <a:srgbClr val="0D3B66"/>
-                </a:solidFill>
-                <a:latin typeface="Calibri"/>
-              </a:rPr>
-              <a:t>Mayo 7.511 m³   ·   Junio 10.014 m³   ·   Julio 10.356 m³   ·   Agosto 1–17: 4.165 m³   ·   Proyección agosto: 7.595 m³ (245 m³/día × 31).</a:t>
-            </a:r>
-          </a:p>
-          <a:p>
-            <a:pPr algn="l">
-              <a:spcAft>
-                <a:spcPts val="300"/>
-              </a:spcAft>
-            </a:pPr>
-            <a:r>
-              <a:rPr sz="1200" b="0">
-                <a:solidFill>
-                  <a:srgbClr val="5A5A5A"/>
-                </a:solidFill>
-                <a:latin typeface="Calibri"/>
-              </a:rPr>
-              <a:t>Dorado = lo que agosto ya lleva. Tramo claro = proyección del resto del mes. Junio sube por Placa Bancaria (salto 18/06). Falabella no entra en julio: activo desde el 11/08.</a:t>
-            </a:r>
-          </a:p>
-        </p:txBody>
-      </p:sp>
-    </p:spTree>
-  </p:cSld>
-  <p:clrMapOvr>
-    <a:masterClrMapping/>
-  </p:clrMapOvr>
-</p:sld>
-</file>
-
-<file path=ppt/slides/slide7.xml><?xml version="1.0" encoding="utf-8"?>
-<p:sld xmlns:a="http://schemas.openxmlformats.org/drawingml/2006/main" xmlns:p="http://schemas.openxmlformats.org/presentationml/2006/main" xmlns:r="http://schemas.openxmlformats.org/officeDocument/2006/relationships">
-  <p:cSld>
-    <p:spTree>
-      <p:nvGrpSpPr>
-        <p:cNvPr id="1" name=""/>
-        <p:cNvGrpSpPr/>
-        <p:nvPr/>
-      </p:nvGrpSpPr>
-      <p:grpSpPr/>
-      <p:sp>
-        <p:nvSpPr>
-          <p:cNvPr id="2" name="Rectangle 1"/>
-          <p:cNvSpPr/>
-          <p:nvPr/>
-        </p:nvSpPr>
-        <p:spPr>
-          <a:xfrm>
-            <a:off x="0" y="0"/>
-            <a:ext cx="12191695" cy="841248"/>
-          </a:xfrm>
-          <a:prstGeom prst="rect">
-            <a:avLst/>
-          </a:prstGeom>
-          <a:solidFill>
-            <a:srgbClr val="0D3B66"/>
-          </a:solidFill>
-          <a:ln>
-            <a:noFill/>
-          </a:ln>
-        </p:spPr>
-        <p:style>
-          <a:lnRef idx="1">
-            <a:schemeClr val="accent1"/>
-          </a:lnRef>
-          <a:fillRef idx="3">
-            <a:schemeClr val="accent1"/>
-          </a:fillRef>
-          <a:effectRef idx="2">
-            <a:schemeClr val="accent1"/>
-          </a:effectRef>
-          <a:fontRef idx="minor">
-            <a:schemeClr val="lt1"/>
-          </a:fontRef>
-        </p:style>
-        <p:txBody>
-          <a:bodyPr rtlCol="0" anchor="ctr"/>
-          <a:lstStyle/>
-          <a:p>
-            <a:pPr algn="ctr"/>
-          </a:p>
-        </p:txBody>
-      </p:sp>
-      <p:sp>
-        <p:nvSpPr>
-          <p:cNvPr id="3" name="Rectangle 2"/>
-          <p:cNvSpPr/>
-          <p:nvPr/>
-        </p:nvSpPr>
-        <p:spPr>
-          <a:xfrm>
-            <a:off x="0" y="841248"/>
-            <a:ext cx="12191695" cy="54864"/>
-          </a:xfrm>
-          <a:prstGeom prst="rect">
-            <a:avLst/>
-          </a:prstGeom>
-          <a:solidFill>
-            <a:srgbClr val="C9A227"/>
-          </a:solidFill>
-          <a:ln>
-            <a:noFill/>
-          </a:ln>
-        </p:spPr>
-        <p:style>
-          <a:lnRef idx="1">
-            <a:schemeClr val="accent1"/>
-          </a:lnRef>
-          <a:fillRef idx="3">
-            <a:schemeClr val="accent1"/>
-          </a:fillRef>
-          <a:effectRef idx="2">
-            <a:schemeClr val="accent1"/>
-          </a:effectRef>
-          <a:fontRef idx="minor">
-            <a:schemeClr val="lt1"/>
-          </a:fontRef>
-        </p:style>
-        <p:txBody>
-          <a:bodyPr rtlCol="0" anchor="ctr"/>
-          <a:lstStyle/>
-          <a:p>
-            <a:pPr algn="ctr"/>
-          </a:p>
-        </p:txBody>
-      </p:sp>
-      <p:pic>
-        <p:nvPicPr>
-          <p:cNvPr id="4" name="Picture 3" descr="logo wes.bmp"/>
-          <p:cNvPicPr>
-            <a:picLocks noChangeAspect="1"/>
-          </p:cNvPicPr>
-          <p:nvPr/>
-        </p:nvPicPr>
-        <p:blipFill>
-          <a:blip r:embed="rId2"/>
-          <a:stretch>
-            <a:fillRect/>
-          </a:stretch>
-        </p:blipFill>
-        <p:spPr>
-          <a:xfrm>
-            <a:off x="10835640" y="146304"/>
-            <a:ext cx="1143000" cy="253401"/>
-          </a:xfrm>
-          <a:prstGeom prst="rect">
-            <a:avLst/>
-          </a:prstGeom>
-        </p:spPr>
-      </p:pic>
-      <p:sp>
-        <p:nvSpPr>
-          <p:cNvPr id="5" name="TextBox 4"/>
-          <p:cNvSpPr txBox="1"/>
-          <p:nvPr/>
-        </p:nvSpPr>
-        <p:spPr>
-          <a:xfrm>
-            <a:off x="256032" y="109728"/>
-            <a:ext cx="10607040" cy="384048"/>
-          </a:xfrm>
-          <a:prstGeom prst="rect">
-            <a:avLst/>
-          </a:prstGeom>
-          <a:noFill/>
-        </p:spPr>
-        <p:txBody>
-          <a:bodyPr wrap="square">
-            <a:spAutoFit/>
-          </a:bodyPr>
-          <a:lstStyle/>
-          <a:p>
-            <a:pPr algn="l">
-              <a:spcAft>
-                <a:spcPts val="300"/>
-              </a:spcAft>
-            </a:pPr>
-            <a:r>
-              <a:rPr sz="2000" b="1">
-                <a:solidFill>
-                  <a:srgbClr val="FFFFFF"/>
-                </a:solidFill>
-                <a:latin typeface="Calibri"/>
-              </a:rPr>
-              <a:t>MAM  ·  Equipos y consumo</a:t>
-            </a:r>
-          </a:p>
-        </p:txBody>
-      </p:sp>
-      <p:sp>
-        <p:nvSpPr>
-          <p:cNvPr id="6" name="TextBox 5"/>
-          <p:cNvSpPr txBox="1"/>
-          <p:nvPr/>
-        </p:nvSpPr>
-        <p:spPr>
-          <a:xfrm>
-            <a:off x="256032" y="457200"/>
-            <a:ext cx="10607040" cy="329184"/>
-          </a:xfrm>
-          <a:prstGeom prst="rect">
-            <a:avLst/>
-          </a:prstGeom>
-          <a:noFill/>
-        </p:spPr>
-        <p:txBody>
-          <a:bodyPr wrap="square">
-            <a:spAutoFit/>
-          </a:bodyPr>
-          <a:lstStyle/>
-          <a:p>
-            <a:pPr algn="l">
-              <a:spcAft>
-                <a:spcPts val="300"/>
-              </a:spcAft>
-            </a:pPr>
-            <a:r>
-              <a:rPr sz="1100" b="0">
-                <a:solidFill>
-                  <a:srgbClr val="DCE6F0"/>
-                </a:solidFill>
-                <a:latin typeface="Calibri"/>
-              </a:rPr>
-              <a:t>Mall Arauco Maipú   |   5 puntos WES   |   01/05/2026 – 17/08/2026   |   propuesta: una lámina</a:t>
-            </a:r>
-          </a:p>
-        </p:txBody>
-      </p:sp>
-      <p:sp>
-        <p:nvSpPr>
-          <p:cNvPr id="7" name="Rounded Rectangle 6"/>
-          <p:cNvSpPr/>
-          <p:nvPr/>
-        </p:nvSpPr>
-        <p:spPr>
-          <a:xfrm>
-            <a:off x="201168" y="1024128"/>
-            <a:ext cx="2286000" cy="658368"/>
-          </a:xfrm>
-          <a:prstGeom prst="roundRect">
-            <a:avLst>
-              <a:gd name="adj" fmla="val 8000"/>
-            </a:avLst>
-          </a:prstGeom>
-          <a:solidFill>
-            <a:srgbClr val="F5F7FA"/>
-          </a:solidFill>
-          <a:ln w="6350">
-            <a:solidFill>
-              <a:srgbClr val="1F77B4"/>
-            </a:solidFill>
-          </a:ln>
-        </p:spPr>
-        <p:style>
-          <a:lnRef idx="1">
-            <a:schemeClr val="accent1"/>
-          </a:lnRef>
-          <a:fillRef idx="3">
-            <a:schemeClr val="accent1"/>
-          </a:fillRef>
-          <a:effectRef idx="2">
-            <a:schemeClr val="accent1"/>
-          </a:effectRef>
-          <a:fontRef idx="minor">
-            <a:schemeClr val="lt1"/>
-          </a:fontRef>
-        </p:style>
-        <p:txBody>
-          <a:bodyPr rtlCol="0" anchor="ctr"/>
-          <a:lstStyle/>
-          <a:p>
-            <a:pPr algn="ctr"/>
-          </a:p>
-        </p:txBody>
-      </p:sp>
-      <p:sp>
-        <p:nvSpPr>
-          <p:cNvPr id="8" name="TextBox 7"/>
-          <p:cNvSpPr txBox="1"/>
-          <p:nvPr/>
-        </p:nvSpPr>
-        <p:spPr>
-          <a:xfrm>
-            <a:off x="292608" y="1060704"/>
-            <a:ext cx="2121408" cy="201168"/>
-          </a:xfrm>
-          <a:prstGeom prst="rect">
-            <a:avLst/>
-          </a:prstGeom>
-          <a:noFill/>
-        </p:spPr>
-        <p:txBody>
-          <a:bodyPr wrap="square">
-            <a:spAutoFit/>
-          </a:bodyPr>
-          <a:lstStyle/>
-          <a:p>
-            <a:pPr algn="l">
-              <a:spcAft>
-                <a:spcPts val="300"/>
-              </a:spcAft>
-            </a:pPr>
-            <a:r>
-              <a:rPr sz="1000" b="1">
-                <a:solidFill>
-                  <a:srgbClr val="C9A227"/>
-                </a:solidFill>
-                <a:latin typeface="Calibri"/>
-              </a:rPr>
-              <a:t>000025-08</a:t>
-            </a:r>
-          </a:p>
-        </p:txBody>
-      </p:sp>
-      <p:sp>
-        <p:nvSpPr>
-          <p:cNvPr id="9" name="TextBox 8"/>
-          <p:cNvSpPr txBox="1"/>
-          <p:nvPr/>
-        </p:nvSpPr>
-        <p:spPr>
-          <a:xfrm>
-            <a:off x="292608" y="1261872"/>
-            <a:ext cx="2121408" cy="219456"/>
-          </a:xfrm>
-          <a:prstGeom prst="rect">
-            <a:avLst/>
-          </a:prstGeom>
-          <a:noFill/>
-        </p:spPr>
-        <p:txBody>
-          <a:bodyPr wrap="square">
-            <a:spAutoFit/>
-          </a:bodyPr>
-          <a:lstStyle/>
-          <a:p>
-            <a:pPr algn="l">
-              <a:spcAft>
-                <a:spcPts val="300"/>
-              </a:spcAft>
-            </a:pPr>
-            <a:r>
-              <a:rPr sz="1200" b="1">
-                <a:solidFill>
-                  <a:srgbClr val="0D3B66"/>
-                </a:solidFill>
-                <a:latin typeface="Calibri"/>
-              </a:rPr>
-              <a:t>Placa Bancaria</a:t>
-            </a:r>
-          </a:p>
-        </p:txBody>
-      </p:sp>
-      <p:sp>
-        <p:nvSpPr>
-          <p:cNvPr id="10" name="Rounded Rectangle 9"/>
-          <p:cNvSpPr/>
-          <p:nvPr/>
-        </p:nvSpPr>
-        <p:spPr>
-          <a:xfrm>
-            <a:off x="2578608" y="1024128"/>
-            <a:ext cx="2286000" cy="658368"/>
-          </a:xfrm>
-          <a:prstGeom prst="roundRect">
-            <a:avLst>
-              <a:gd name="adj" fmla="val 8000"/>
-            </a:avLst>
-          </a:prstGeom>
-          <a:solidFill>
-            <a:srgbClr val="F5F7FA"/>
-          </a:solidFill>
-          <a:ln w="6350">
-            <a:solidFill>
-              <a:srgbClr val="1F77B4"/>
-            </a:solidFill>
-          </a:ln>
-        </p:spPr>
-        <p:style>
-          <a:lnRef idx="1">
-            <a:schemeClr val="accent1"/>
-          </a:lnRef>
-          <a:fillRef idx="3">
-            <a:schemeClr val="accent1"/>
-          </a:fillRef>
-          <a:effectRef idx="2">
-            <a:schemeClr val="accent1"/>
-          </a:effectRef>
-          <a:fontRef idx="minor">
-            <a:schemeClr val="lt1"/>
-          </a:fontRef>
-        </p:style>
-        <p:txBody>
-          <a:bodyPr rtlCol="0" anchor="ctr"/>
-          <a:lstStyle/>
-          <a:p>
-            <a:pPr algn="ctr"/>
-          </a:p>
-        </p:txBody>
-      </p:sp>
-      <p:sp>
-        <p:nvSpPr>
-          <p:cNvPr id="11" name="TextBox 10"/>
-          <p:cNvSpPr txBox="1"/>
-          <p:nvPr/>
-        </p:nvSpPr>
-        <p:spPr>
-          <a:xfrm>
-            <a:off x="2670048" y="1060704"/>
-            <a:ext cx="2121408" cy="201168"/>
-          </a:xfrm>
-          <a:prstGeom prst="rect">
-            <a:avLst/>
-          </a:prstGeom>
-          <a:noFill/>
-        </p:spPr>
-        <p:txBody>
-          <a:bodyPr wrap="square">
-            <a:spAutoFit/>
-          </a:bodyPr>
-          <a:lstStyle/>
-          <a:p>
-            <a:pPr algn="l">
-              <a:spcAft>
-                <a:spcPts val="300"/>
-              </a:spcAft>
-            </a:pPr>
-            <a:r>
-              <a:rPr sz="1000" b="1">
-                <a:solidFill>
-                  <a:srgbClr val="C9A227"/>
-                </a:solidFill>
-                <a:latin typeface="Calibri"/>
-              </a:rPr>
-              <a:t>000025-10</a:t>
-            </a:r>
-          </a:p>
-        </p:txBody>
-      </p:sp>
-      <p:sp>
-        <p:nvSpPr>
-          <p:cNvPr id="12" name="TextBox 11"/>
-          <p:cNvSpPr txBox="1"/>
-          <p:nvPr/>
-        </p:nvSpPr>
-        <p:spPr>
-          <a:xfrm>
-            <a:off x="2670048" y="1261872"/>
-            <a:ext cx="2121408" cy="219456"/>
-          </a:xfrm>
-          <a:prstGeom prst="rect">
-            <a:avLst/>
-          </a:prstGeom>
-          <a:noFill/>
-        </p:spPr>
-        <p:txBody>
-          <a:bodyPr wrap="square">
-            <a:spAutoFit/>
-          </a:bodyPr>
-          <a:lstStyle/>
-          <a:p>
-            <a:pPr algn="l">
-              <a:spcAft>
-                <a:spcPts val="300"/>
-              </a:spcAft>
-            </a:pPr>
-            <a:r>
-              <a:rPr sz="1200" b="1">
-                <a:solidFill>
-                  <a:srgbClr val="0D3B66"/>
-                </a:solidFill>
-                <a:latin typeface="Calibri"/>
-              </a:rPr>
-              <a:t>Ripley</a:t>
-            </a:r>
-          </a:p>
-        </p:txBody>
-      </p:sp>
-      <p:sp>
-        <p:nvSpPr>
-          <p:cNvPr id="13" name="Rounded Rectangle 12"/>
-          <p:cNvSpPr/>
-          <p:nvPr/>
-        </p:nvSpPr>
-        <p:spPr>
-          <a:xfrm>
-            <a:off x="4956048" y="1024128"/>
-            <a:ext cx="2286000" cy="658368"/>
-          </a:xfrm>
-          <a:prstGeom prst="roundRect">
-            <a:avLst>
-              <a:gd name="adj" fmla="val 8000"/>
-            </a:avLst>
-          </a:prstGeom>
-          <a:solidFill>
-            <a:srgbClr val="F5F7FA"/>
-          </a:solidFill>
-          <a:ln w="6350">
-            <a:solidFill>
-              <a:srgbClr val="C9A227"/>
-            </a:solidFill>
-          </a:ln>
-        </p:spPr>
-        <p:style>
-          <a:lnRef idx="1">
-            <a:schemeClr val="accent1"/>
-          </a:lnRef>
-          <a:fillRef idx="3">
-            <a:schemeClr val="accent1"/>
-          </a:fillRef>
-          <a:effectRef idx="2">
-            <a:schemeClr val="accent1"/>
-          </a:effectRef>
-          <a:fontRef idx="minor">
-            <a:schemeClr val="lt1"/>
-          </a:fontRef>
-        </p:style>
-        <p:txBody>
-          <a:bodyPr rtlCol="0" anchor="ctr"/>
-          <a:lstStyle/>
-          <a:p>
-            <a:pPr algn="ctr"/>
-          </a:p>
-        </p:txBody>
-      </p:sp>
-      <p:sp>
-        <p:nvSpPr>
-          <p:cNvPr id="14" name="TextBox 13"/>
-          <p:cNvSpPr txBox="1"/>
-          <p:nvPr/>
-        </p:nvSpPr>
-        <p:spPr>
-          <a:xfrm>
-            <a:off x="5047488" y="1060704"/>
-            <a:ext cx="2121408" cy="201168"/>
-          </a:xfrm>
-          <a:prstGeom prst="rect">
-            <a:avLst/>
-          </a:prstGeom>
-          <a:noFill/>
-        </p:spPr>
-        <p:txBody>
-          <a:bodyPr wrap="square">
-            <a:spAutoFit/>
-          </a:bodyPr>
-          <a:lstStyle/>
-          <a:p>
-            <a:pPr algn="l">
-              <a:spcAft>
-                <a:spcPts val="300"/>
-              </a:spcAft>
-            </a:pPr>
-            <a:r>
-              <a:rPr sz="1000" b="1">
-                <a:solidFill>
-                  <a:srgbClr val="C9A227"/>
-                </a:solidFill>
-                <a:latin typeface="Calibri"/>
-              </a:rPr>
-              <a:t>000025-09</a:t>
-            </a:r>
-          </a:p>
-        </p:txBody>
-      </p:sp>
-      <p:sp>
-        <p:nvSpPr>
-          <p:cNvPr id="15" name="TextBox 14"/>
-          <p:cNvSpPr txBox="1"/>
-          <p:nvPr/>
-        </p:nvSpPr>
-        <p:spPr>
-          <a:xfrm>
-            <a:off x="5047488" y="1261872"/>
-            <a:ext cx="2121408" cy="219456"/>
-          </a:xfrm>
-          <a:prstGeom prst="rect">
-            <a:avLst/>
-          </a:prstGeom>
-          <a:noFill/>
-        </p:spPr>
-        <p:txBody>
-          <a:bodyPr wrap="square">
-            <a:spAutoFit/>
-          </a:bodyPr>
-          <a:lstStyle/>
-          <a:p>
-            <a:pPr algn="l">
-              <a:spcAft>
-                <a:spcPts val="300"/>
-              </a:spcAft>
-            </a:pPr>
-            <a:r>
-              <a:rPr sz="1200" b="1">
-                <a:solidFill>
-                  <a:srgbClr val="0D3B66"/>
-                </a:solidFill>
-                <a:latin typeface="Calibri"/>
-              </a:rPr>
-              <a:t>Falabella</a:t>
-            </a:r>
-          </a:p>
-        </p:txBody>
-      </p:sp>
-      <p:sp>
-        <p:nvSpPr>
-          <p:cNvPr id="16" name="TextBox 15"/>
-          <p:cNvSpPr txBox="1"/>
-          <p:nvPr/>
-        </p:nvSpPr>
-        <p:spPr>
-          <a:xfrm>
-            <a:off x="5047488" y="1463040"/>
-            <a:ext cx="2121408" cy="182880"/>
-          </a:xfrm>
-          <a:prstGeom prst="rect">
-            <a:avLst/>
-          </a:prstGeom>
-          <a:noFill/>
-        </p:spPr>
-        <p:txBody>
-          <a:bodyPr wrap="square">
-            <a:spAutoFit/>
-          </a:bodyPr>
-          <a:lstStyle/>
-          <a:p>
-            <a:pPr algn="l">
-              <a:spcAft>
-                <a:spcPts val="300"/>
-              </a:spcAft>
-            </a:pPr>
-            <a:r>
-              <a:rPr sz="1000" b="0">
-                <a:solidFill>
-                  <a:srgbClr val="5A5A5A"/>
-                </a:solidFill>
-                <a:latin typeface="Calibri"/>
-              </a:rPr>
-              <a:t>activo 11/08</a:t>
-            </a:r>
-          </a:p>
-        </p:txBody>
-      </p:sp>
-      <p:sp>
-        <p:nvSpPr>
-          <p:cNvPr id="17" name="Rounded Rectangle 16"/>
-          <p:cNvSpPr/>
-          <p:nvPr/>
-        </p:nvSpPr>
-        <p:spPr>
-          <a:xfrm>
-            <a:off x="7333488" y="1024128"/>
-            <a:ext cx="2286000" cy="658368"/>
-          </a:xfrm>
-          <a:prstGeom prst="roundRect">
-            <a:avLst>
-              <a:gd name="adj" fmla="val 8000"/>
-            </a:avLst>
-          </a:prstGeom>
-          <a:solidFill>
-            <a:srgbClr val="F5F7FA"/>
-          </a:solidFill>
-          <a:ln w="6350">
-            <a:solidFill>
-              <a:srgbClr val="1F77B4"/>
-            </a:solidFill>
-          </a:ln>
-        </p:spPr>
-        <p:style>
-          <a:lnRef idx="1">
-            <a:schemeClr val="accent1"/>
-          </a:lnRef>
-          <a:fillRef idx="3">
-            <a:schemeClr val="accent1"/>
-          </a:fillRef>
-          <a:effectRef idx="2">
-            <a:schemeClr val="accent1"/>
-          </a:effectRef>
-          <a:fontRef idx="minor">
-            <a:schemeClr val="lt1"/>
-          </a:fontRef>
-        </p:style>
-        <p:txBody>
-          <a:bodyPr rtlCol="0" anchor="ctr"/>
-          <a:lstStyle/>
-          <a:p>
-            <a:pPr algn="ctr"/>
-          </a:p>
-        </p:txBody>
-      </p:sp>
-      <p:sp>
-        <p:nvSpPr>
-          <p:cNvPr id="18" name="TextBox 17"/>
-          <p:cNvSpPr txBox="1"/>
-          <p:nvPr/>
-        </p:nvSpPr>
-        <p:spPr>
-          <a:xfrm>
-            <a:off x="7424928" y="1060704"/>
-            <a:ext cx="2121408" cy="201168"/>
-          </a:xfrm>
-          <a:prstGeom prst="rect">
-            <a:avLst/>
-          </a:prstGeom>
-          <a:noFill/>
-        </p:spPr>
-        <p:txBody>
-          <a:bodyPr wrap="square">
-            <a:spAutoFit/>
-          </a:bodyPr>
-          <a:lstStyle/>
-          <a:p>
-            <a:pPr algn="l">
-              <a:spcAft>
-                <a:spcPts val="300"/>
-              </a:spcAft>
-            </a:pPr>
-            <a:r>
-              <a:rPr sz="1000" b="1">
-                <a:solidFill>
-                  <a:srgbClr val="C9A227"/>
-                </a:solidFill>
-                <a:latin typeface="Calibri"/>
-              </a:rPr>
-              <a:t>000025-32</a:t>
-            </a:r>
-          </a:p>
-        </p:txBody>
-      </p:sp>
-      <p:sp>
-        <p:nvSpPr>
-          <p:cNvPr id="19" name="TextBox 18"/>
-          <p:cNvSpPr txBox="1"/>
-          <p:nvPr/>
-        </p:nvSpPr>
-        <p:spPr>
-          <a:xfrm>
-            <a:off x="7424928" y="1261872"/>
-            <a:ext cx="2121408" cy="219456"/>
-          </a:xfrm>
-          <a:prstGeom prst="rect">
-            <a:avLst/>
-          </a:prstGeom>
-          <a:noFill/>
-        </p:spPr>
-        <p:txBody>
-          <a:bodyPr wrap="square">
-            <a:spAutoFit/>
-          </a:bodyPr>
-          <a:lstStyle/>
-          <a:p>
-            <a:pPr algn="l">
-              <a:spcAft>
-                <a:spcPts val="300"/>
-              </a:spcAft>
-            </a:pPr>
-            <a:r>
-              <a:rPr sz="1200" b="1">
-                <a:solidFill>
-                  <a:srgbClr val="0D3B66"/>
-                </a:solidFill>
-                <a:latin typeface="Calibri"/>
-              </a:rPr>
-              <a:t>Pasillo Técnico</a:t>
-            </a:r>
-          </a:p>
-        </p:txBody>
-      </p:sp>
-      <p:sp>
-        <p:nvSpPr>
-          <p:cNvPr id="20" name="TextBox 19"/>
-          <p:cNvSpPr txBox="1"/>
-          <p:nvPr/>
-        </p:nvSpPr>
-        <p:spPr>
-          <a:xfrm>
-            <a:off x="7424928" y="1463040"/>
-            <a:ext cx="2121408" cy="182880"/>
-          </a:xfrm>
-          <a:prstGeom prst="rect">
-            <a:avLst/>
-          </a:prstGeom>
-          <a:noFill/>
-        </p:spPr>
-        <p:txBody>
-          <a:bodyPr wrap="square">
-            <a:spAutoFit/>
-          </a:bodyPr>
-          <a:lstStyle/>
-          <a:p>
-            <a:pPr algn="l">
-              <a:spcAft>
-                <a:spcPts val="300"/>
-              </a:spcAft>
-            </a:pPr>
-            <a:r>
-              <a:rPr sz="1000" b="0">
-                <a:solidFill>
-                  <a:srgbClr val="5A5A5A"/>
-                </a:solidFill>
-                <a:latin typeface="Calibri"/>
-              </a:rPr>
-              <a:t>residual</a:t>
-            </a:r>
-          </a:p>
-        </p:txBody>
-      </p:sp>
-      <p:sp>
-        <p:nvSpPr>
-          <p:cNvPr id="21" name="Rounded Rectangle 20"/>
-          <p:cNvSpPr/>
-          <p:nvPr/>
-        </p:nvSpPr>
-        <p:spPr>
-          <a:xfrm>
-            <a:off x="9710928" y="1024128"/>
-            <a:ext cx="2286000" cy="658368"/>
-          </a:xfrm>
-          <a:prstGeom prst="roundRect">
-            <a:avLst>
-              <a:gd name="adj" fmla="val 8000"/>
-            </a:avLst>
-          </a:prstGeom>
-          <a:solidFill>
-            <a:srgbClr val="F5F7FA"/>
-          </a:solidFill>
-          <a:ln w="6350">
-            <a:solidFill>
-              <a:srgbClr val="1F77B4"/>
-            </a:solidFill>
-          </a:ln>
-        </p:spPr>
-        <p:style>
-          <a:lnRef idx="1">
-            <a:schemeClr val="accent1"/>
-          </a:lnRef>
-          <a:fillRef idx="3">
-            <a:schemeClr val="accent1"/>
-          </a:fillRef>
-          <a:effectRef idx="2">
-            <a:schemeClr val="accent1"/>
-          </a:effectRef>
-          <a:fontRef idx="minor">
-            <a:schemeClr val="lt1"/>
-          </a:fontRef>
-        </p:style>
-        <p:txBody>
-          <a:bodyPr rtlCol="0" anchor="ctr"/>
-          <a:lstStyle/>
-          <a:p>
-            <a:pPr algn="ctr"/>
-          </a:p>
-        </p:txBody>
-      </p:sp>
-      <p:sp>
-        <p:nvSpPr>
-          <p:cNvPr id="22" name="TextBox 21"/>
-          <p:cNvSpPr txBox="1"/>
-          <p:nvPr/>
-        </p:nvSpPr>
-        <p:spPr>
-          <a:xfrm>
-            <a:off x="9802368" y="1060704"/>
-            <a:ext cx="2121408" cy="201168"/>
-          </a:xfrm>
-          <a:prstGeom prst="rect">
-            <a:avLst/>
-          </a:prstGeom>
-          <a:noFill/>
-        </p:spPr>
-        <p:txBody>
-          <a:bodyPr wrap="square">
-            <a:spAutoFit/>
-          </a:bodyPr>
-          <a:lstStyle/>
-          <a:p>
-            <a:pPr algn="l">
-              <a:spcAft>
-                <a:spcPts val="300"/>
-              </a:spcAft>
-            </a:pPr>
-            <a:r>
-              <a:rPr sz="1000" b="1">
-                <a:solidFill>
-                  <a:srgbClr val="C9A227"/>
-                </a:solidFill>
-                <a:latin typeface="Calibri"/>
-              </a:rPr>
-              <a:t>000025-33</a:t>
-            </a:r>
-          </a:p>
-        </p:txBody>
-      </p:sp>
-      <p:sp>
-        <p:nvSpPr>
-          <p:cNvPr id="23" name="TextBox 22"/>
-          <p:cNvSpPr txBox="1"/>
-          <p:nvPr/>
-        </p:nvSpPr>
-        <p:spPr>
-          <a:xfrm>
-            <a:off x="9802368" y="1261872"/>
-            <a:ext cx="2121408" cy="219456"/>
-          </a:xfrm>
-          <a:prstGeom prst="rect">
-            <a:avLst/>
-          </a:prstGeom>
-          <a:noFill/>
-        </p:spPr>
-        <p:txBody>
-          <a:bodyPr wrap="square">
-            <a:spAutoFit/>
-          </a:bodyPr>
-          <a:lstStyle/>
-          <a:p>
-            <a:pPr algn="l">
-              <a:spcAft>
-                <a:spcPts val="300"/>
-              </a:spcAft>
-            </a:pPr>
-            <a:r>
-              <a:rPr sz="1200" b="1">
-                <a:solidFill>
-                  <a:srgbClr val="0D3B66"/>
-                </a:solidFill>
-                <a:latin typeface="Calibri"/>
-              </a:rPr>
-              <a:t>Salida ARROW</a:t>
-            </a:r>
-          </a:p>
-        </p:txBody>
-      </p:sp>
-      <p:sp>
-        <p:nvSpPr>
-          <p:cNvPr id="24" name="TextBox 23"/>
-          <p:cNvSpPr txBox="1"/>
-          <p:nvPr/>
-        </p:nvSpPr>
-        <p:spPr>
-          <a:xfrm>
-            <a:off x="9802368" y="1463040"/>
-            <a:ext cx="2121408" cy="182880"/>
-          </a:xfrm>
-          <a:prstGeom prst="rect">
-            <a:avLst/>
-          </a:prstGeom>
-          <a:noFill/>
-        </p:spPr>
-        <p:txBody>
-          <a:bodyPr wrap="square">
-            <a:spAutoFit/>
-          </a:bodyPr>
-          <a:lstStyle/>
-          <a:p>
-            <a:pPr algn="l">
-              <a:spcAft>
-                <a:spcPts val="300"/>
-              </a:spcAft>
-            </a:pPr>
-            <a:r>
-              <a:rPr sz="1000" b="0">
-                <a:solidFill>
-                  <a:srgbClr val="5A5A5A"/>
-                </a:solidFill>
-                <a:latin typeface="Calibri"/>
-              </a:rPr>
-              <a:t>residual</a:t>
-            </a:r>
-          </a:p>
-        </p:txBody>
-      </p:sp>
-      <p:sp>
-        <p:nvSpPr>
-          <p:cNvPr id="25" name="Rounded Rectangle 24"/>
-          <p:cNvSpPr/>
-          <p:nvPr/>
-        </p:nvSpPr>
-        <p:spPr>
-          <a:xfrm>
-            <a:off x="201168" y="1792224"/>
-            <a:ext cx="7973568" cy="3822191"/>
-          </a:xfrm>
-          <a:prstGeom prst="roundRect">
-            <a:avLst>
-              <a:gd name="adj" fmla="val 8000"/>
-            </a:avLst>
-          </a:prstGeom>
-          <a:solidFill>
-            <a:srgbClr val="F5F7FA"/>
-          </a:solidFill>
-          <a:ln>
-            <a:noFill/>
-          </a:ln>
-        </p:spPr>
-        <p:style>
-          <a:lnRef idx="1">
-            <a:schemeClr val="accent1"/>
-          </a:lnRef>
-          <a:fillRef idx="3">
-            <a:schemeClr val="accent1"/>
-          </a:fillRef>
-          <a:effectRef idx="2">
-            <a:schemeClr val="accent1"/>
-          </a:effectRef>
-          <a:fontRef idx="minor">
-            <a:schemeClr val="lt1"/>
-          </a:fontRef>
-        </p:style>
-        <p:txBody>
-          <a:bodyPr rtlCol="0" anchor="ctr"/>
-          <a:lstStyle/>
-          <a:p>
-            <a:pPr algn="ctr"/>
-          </a:p>
-        </p:txBody>
-      </p:sp>
-      <p:pic>
-        <p:nvPicPr>
-          <p:cNvPr id="26" name="Picture 25" descr="mam_mensual_may_ago.png"/>
-          <p:cNvPicPr>
-            <a:picLocks noChangeAspect="1"/>
-          </p:cNvPicPr>
-          <p:nvPr/>
-        </p:nvPicPr>
-        <p:blipFill>
-          <a:blip r:embed="rId3"/>
-          <a:stretch>
-            <a:fillRect/>
-          </a:stretch>
-        </p:blipFill>
-        <p:spPr>
-          <a:xfrm>
-            <a:off x="329184" y="1865376"/>
-            <a:ext cx="7717536" cy="3777531"/>
-          </a:xfrm>
-          <a:prstGeom prst="rect">
-            <a:avLst/>
-          </a:prstGeom>
-        </p:spPr>
-      </p:pic>
-      <p:sp>
-        <p:nvSpPr>
-          <p:cNvPr id="27" name="Rounded Rectangle 26"/>
-          <p:cNvSpPr/>
-          <p:nvPr/>
-        </p:nvSpPr>
-        <p:spPr>
-          <a:xfrm>
-            <a:off x="8302752" y="1792224"/>
-            <a:ext cx="3675887" cy="3822191"/>
-          </a:xfrm>
-          <a:prstGeom prst="roundRect">
-            <a:avLst>
-              <a:gd name="adj" fmla="val 8000"/>
-            </a:avLst>
-          </a:prstGeom>
-          <a:solidFill>
-            <a:srgbClr val="FFFFFF"/>
-          </a:solidFill>
-          <a:ln w="6350">
-            <a:solidFill>
-              <a:srgbClr val="1F77B4"/>
-            </a:solidFill>
-          </a:ln>
-        </p:spPr>
-        <p:style>
-          <a:lnRef idx="1">
-            <a:schemeClr val="accent1"/>
-          </a:lnRef>
-          <a:fillRef idx="3">
-            <a:schemeClr val="accent1"/>
-          </a:fillRef>
-          <a:effectRef idx="2">
-            <a:schemeClr val="accent1"/>
-          </a:effectRef>
-          <a:fontRef idx="minor">
-            <a:schemeClr val="lt1"/>
-          </a:fontRef>
-        </p:style>
-        <p:txBody>
-          <a:bodyPr rtlCol="0" anchor="ctr"/>
-          <a:lstStyle/>
-          <a:p>
-            <a:pPr algn="ctr"/>
-          </a:p>
-        </p:txBody>
-      </p:sp>
-      <p:sp>
-        <p:nvSpPr>
-          <p:cNvPr id="28" name="TextBox 27"/>
-          <p:cNvSpPr txBox="1"/>
-          <p:nvPr/>
-        </p:nvSpPr>
-        <p:spPr>
-          <a:xfrm>
-            <a:off x="8430768" y="1847088"/>
-            <a:ext cx="3419856" cy="201168"/>
-          </a:xfrm>
-          <a:prstGeom prst="rect">
-            <a:avLst/>
-          </a:prstGeom>
-          <a:noFill/>
-        </p:spPr>
-        <p:txBody>
-          <a:bodyPr wrap="square">
-            <a:spAutoFit/>
-          </a:bodyPr>
-          <a:lstStyle/>
-          <a:p>
-            <a:pPr algn="l">
-              <a:spcAft>
-                <a:spcPts val="300"/>
-              </a:spcAft>
-            </a:pPr>
-            <a:r>
-              <a:rPr sz="1100" b="1">
-                <a:solidFill>
-                  <a:srgbClr val="1F77B4"/>
-                </a:solidFill>
-                <a:latin typeface="Calibri"/>
-              </a:rPr>
-              <a:t>JULIO · último mes cerrado</a:t>
-            </a:r>
-          </a:p>
-        </p:txBody>
-      </p:sp>
-      <p:sp>
-        <p:nvSpPr>
-          <p:cNvPr id="29" name="TextBox 28"/>
-          <p:cNvSpPr txBox="1"/>
-          <p:nvPr/>
-        </p:nvSpPr>
-        <p:spPr>
-          <a:xfrm>
-            <a:off x="8430768" y="2048256"/>
-            <a:ext cx="3419856" cy="256032"/>
-          </a:xfrm>
-          <a:prstGeom prst="rect">
-            <a:avLst/>
-          </a:prstGeom>
-          <a:noFill/>
-        </p:spPr>
-        <p:txBody>
-          <a:bodyPr wrap="square">
-            <a:spAutoFit/>
-          </a:bodyPr>
-          <a:lstStyle/>
-          <a:p>
-            <a:pPr algn="l">
-              <a:spcAft>
-                <a:spcPts val="300"/>
-              </a:spcAft>
-            </a:pPr>
-            <a:r>
-              <a:rPr sz="1200" b="0">
-                <a:solidFill>
-                  <a:srgbClr val="5A5A5A"/>
-                </a:solidFill>
-                <a:latin typeface="Calibri"/>
-              </a:rPr>
-              <a:t>El recinto sumó 10.356 m³</a:t>
-            </a:r>
-          </a:p>
-        </p:txBody>
-      </p:sp>
-      <p:sp>
-        <p:nvSpPr>
-          <p:cNvPr id="30" name="Rounded Rectangle 29"/>
-          <p:cNvSpPr/>
-          <p:nvPr/>
-        </p:nvSpPr>
-        <p:spPr>
-          <a:xfrm>
-            <a:off x="8430768" y="2359152"/>
-            <a:ext cx="3419856" cy="603504"/>
-          </a:xfrm>
-          <a:prstGeom prst="roundRect">
-            <a:avLst>
-              <a:gd name="adj" fmla="val 8000"/>
-            </a:avLst>
-          </a:prstGeom>
-          <a:solidFill>
-            <a:srgbClr val="F5F7FA"/>
-          </a:solidFill>
-          <a:ln w="6350">
-            <a:solidFill>
-              <a:srgbClr val="0D3B66"/>
-            </a:solidFill>
-          </a:ln>
-        </p:spPr>
-        <p:style>
-          <a:lnRef idx="1">
-            <a:schemeClr val="accent1"/>
-          </a:lnRef>
-          <a:fillRef idx="3">
-            <a:schemeClr val="accent1"/>
-          </a:fillRef>
-          <a:effectRef idx="2">
-            <a:schemeClr val="accent1"/>
-          </a:effectRef>
-          <a:fontRef idx="minor">
-            <a:schemeClr val="lt1"/>
-          </a:fontRef>
-        </p:style>
-        <p:txBody>
-          <a:bodyPr rtlCol="0" anchor="ctr"/>
-          <a:lstStyle/>
-          <a:p>
-            <a:pPr algn="ctr"/>
-          </a:p>
-        </p:txBody>
-      </p:sp>
-      <p:sp>
-        <p:nvSpPr>
-          <p:cNvPr id="31" name="TextBox 30"/>
-          <p:cNvSpPr txBox="1"/>
-          <p:nvPr/>
-        </p:nvSpPr>
-        <p:spPr>
-          <a:xfrm>
-            <a:off x="8540496" y="2395728"/>
-            <a:ext cx="3200400" cy="182880"/>
-          </a:xfrm>
-          <a:prstGeom prst="rect">
-            <a:avLst/>
-          </a:prstGeom>
-          <a:noFill/>
-        </p:spPr>
-        <p:txBody>
-          <a:bodyPr wrap="square">
-            <a:spAutoFit/>
-          </a:bodyPr>
-          <a:lstStyle/>
-          <a:p>
-            <a:pPr algn="l">
-              <a:spcAft>
-                <a:spcPts val="300"/>
-              </a:spcAft>
-            </a:pPr>
-            <a:r>
-              <a:rPr sz="1100" b="1">
-                <a:solidFill>
-                  <a:srgbClr val="0D3B66"/>
-                </a:solidFill>
-                <a:latin typeface="Calibri"/>
-              </a:rPr>
-              <a:t>000025-08  Placa Bancaria</a:t>
-            </a:r>
-          </a:p>
-        </p:txBody>
-      </p:sp>
-      <p:sp>
-        <p:nvSpPr>
-          <p:cNvPr id="32" name="TextBox 31"/>
-          <p:cNvSpPr txBox="1"/>
-          <p:nvPr/>
-        </p:nvSpPr>
-        <p:spPr>
-          <a:xfrm>
-            <a:off x="8540496" y="2615184"/>
-            <a:ext cx="3200400" cy="274320"/>
-          </a:xfrm>
-          <a:prstGeom prst="rect">
-            <a:avLst/>
-          </a:prstGeom>
-          <a:noFill/>
-        </p:spPr>
-        <p:txBody>
-          <a:bodyPr wrap="square">
-            <a:spAutoFit/>
-          </a:bodyPr>
-          <a:lstStyle/>
-          <a:p>
-            <a:pPr algn="l">
-              <a:spcAft>
-                <a:spcPts val="300"/>
-              </a:spcAft>
-            </a:pPr>
-            <a:r>
-              <a:rPr sz="1500" b="1">
-                <a:solidFill>
-                  <a:srgbClr val="0D3B66"/>
-                </a:solidFill>
-                <a:latin typeface="Calibri"/>
-              </a:rPr>
-              <a:t>7.084 m³    68 %</a:t>
-            </a:r>
-          </a:p>
-        </p:txBody>
-      </p:sp>
-      <p:sp>
-        <p:nvSpPr>
-          <p:cNvPr id="33" name="Rounded Rectangle 32"/>
-          <p:cNvSpPr/>
-          <p:nvPr/>
-        </p:nvSpPr>
-        <p:spPr>
-          <a:xfrm>
-            <a:off x="8430768" y="2999232"/>
-            <a:ext cx="3419856" cy="603504"/>
-          </a:xfrm>
-          <a:prstGeom prst="roundRect">
-            <a:avLst>
-              <a:gd name="adj" fmla="val 8000"/>
-            </a:avLst>
-          </a:prstGeom>
-          <a:solidFill>
-            <a:srgbClr val="F5F7FA"/>
-          </a:solidFill>
-          <a:ln w="6350">
-            <a:solidFill>
-              <a:srgbClr val="1F77B4"/>
-            </a:solidFill>
-          </a:ln>
-        </p:spPr>
-        <p:style>
-          <a:lnRef idx="1">
-            <a:schemeClr val="accent1"/>
-          </a:lnRef>
-          <a:fillRef idx="3">
-            <a:schemeClr val="accent1"/>
-          </a:fillRef>
-          <a:effectRef idx="2">
-            <a:schemeClr val="accent1"/>
-          </a:effectRef>
-          <a:fontRef idx="minor">
-            <a:schemeClr val="lt1"/>
-          </a:fontRef>
-        </p:style>
-        <p:txBody>
-          <a:bodyPr rtlCol="0" anchor="ctr"/>
-          <a:lstStyle/>
-          <a:p>
-            <a:pPr algn="ctr"/>
-          </a:p>
-        </p:txBody>
-      </p:sp>
-      <p:sp>
-        <p:nvSpPr>
-          <p:cNvPr id="34" name="TextBox 33"/>
-          <p:cNvSpPr txBox="1"/>
-          <p:nvPr/>
-        </p:nvSpPr>
-        <p:spPr>
-          <a:xfrm>
-            <a:off x="8540496" y="3035808"/>
-            <a:ext cx="3200400" cy="182880"/>
-          </a:xfrm>
-          <a:prstGeom prst="rect">
-            <a:avLst/>
-          </a:prstGeom>
-          <a:noFill/>
-        </p:spPr>
-        <p:txBody>
-          <a:bodyPr wrap="square">
-            <a:spAutoFit/>
-          </a:bodyPr>
-          <a:lstStyle/>
-          <a:p>
-            <a:pPr algn="l">
-              <a:spcAft>
-                <a:spcPts val="300"/>
-              </a:spcAft>
-            </a:pPr>
-            <a:r>
-              <a:rPr sz="1100" b="1">
-                <a:solidFill>
-                  <a:srgbClr val="1F77B4"/>
-                </a:solidFill>
-                <a:latin typeface="Calibri"/>
-              </a:rPr>
-              <a:t>000025-10  Ripley</a:t>
-            </a:r>
-          </a:p>
-        </p:txBody>
-      </p:sp>
-      <p:sp>
-        <p:nvSpPr>
-          <p:cNvPr id="35" name="TextBox 34"/>
-          <p:cNvSpPr txBox="1"/>
-          <p:nvPr/>
-        </p:nvSpPr>
-        <p:spPr>
-          <a:xfrm>
-            <a:off x="8540496" y="3255264"/>
-            <a:ext cx="3200400" cy="274320"/>
-          </a:xfrm>
-          <a:prstGeom prst="rect">
-            <a:avLst/>
-          </a:prstGeom>
-          <a:noFill/>
-        </p:spPr>
-        <p:txBody>
-          <a:bodyPr wrap="square">
-            <a:spAutoFit/>
-          </a:bodyPr>
-          <a:lstStyle/>
-          <a:p>
-            <a:pPr algn="l">
-              <a:spcAft>
-                <a:spcPts val="300"/>
-              </a:spcAft>
-            </a:pPr>
-            <a:r>
-              <a:rPr sz="1500" b="1">
-                <a:solidFill>
-                  <a:srgbClr val="0D3B66"/>
-                </a:solidFill>
-                <a:latin typeface="Calibri"/>
-              </a:rPr>
-              <a:t>3.245 m³    31 %</a:t>
-            </a:r>
-          </a:p>
-        </p:txBody>
-      </p:sp>
-      <p:sp>
-        <p:nvSpPr>
-          <p:cNvPr id="36" name="Rounded Rectangle 35"/>
-          <p:cNvSpPr/>
-          <p:nvPr/>
-        </p:nvSpPr>
-        <p:spPr>
-          <a:xfrm>
-            <a:off x="8430768" y="3639312"/>
-            <a:ext cx="3419856" cy="603504"/>
-          </a:xfrm>
-          <a:prstGeom prst="roundRect">
-            <a:avLst>
-              <a:gd name="adj" fmla="val 8000"/>
-            </a:avLst>
-          </a:prstGeom>
-          <a:solidFill>
-            <a:srgbClr val="F5F7FA"/>
-          </a:solidFill>
-          <a:ln w="6350">
-            <a:solidFill>
-              <a:srgbClr val="7BA3C9"/>
-            </a:solidFill>
-          </a:ln>
-        </p:spPr>
-        <p:style>
-          <a:lnRef idx="1">
-            <a:schemeClr val="accent1"/>
-          </a:lnRef>
-          <a:fillRef idx="3">
-            <a:schemeClr val="accent1"/>
-          </a:fillRef>
-          <a:effectRef idx="2">
-            <a:schemeClr val="accent1"/>
-          </a:effectRef>
-          <a:fontRef idx="minor">
-            <a:schemeClr val="lt1"/>
-          </a:fontRef>
-        </p:style>
-        <p:txBody>
-          <a:bodyPr rtlCol="0" anchor="ctr"/>
-          <a:lstStyle/>
-          <a:p>
-            <a:pPr algn="ctr"/>
-          </a:p>
-        </p:txBody>
-      </p:sp>
-      <p:sp>
-        <p:nvSpPr>
-          <p:cNvPr id="37" name="TextBox 36"/>
-          <p:cNvSpPr txBox="1"/>
-          <p:nvPr/>
-        </p:nvSpPr>
-        <p:spPr>
-          <a:xfrm>
-            <a:off x="8540496" y="3675888"/>
-            <a:ext cx="3200400" cy="182880"/>
-          </a:xfrm>
-          <a:prstGeom prst="rect">
-            <a:avLst/>
-          </a:prstGeom>
-          <a:noFill/>
-        </p:spPr>
-        <p:txBody>
-          <a:bodyPr wrap="square">
-            <a:spAutoFit/>
-          </a:bodyPr>
-          <a:lstStyle/>
-          <a:p>
-            <a:pPr algn="l">
-              <a:spcAft>
-                <a:spcPts val="300"/>
-              </a:spcAft>
-            </a:pPr>
-            <a:r>
-              <a:rPr sz="1100" b="1">
-                <a:solidFill>
-                  <a:srgbClr val="7BA3C9"/>
-                </a:solidFill>
-                <a:latin typeface="Calibri"/>
-              </a:rPr>
-              <a:t>000025-32  Pasillo Técnico</a:t>
-            </a:r>
-          </a:p>
-        </p:txBody>
-      </p:sp>
-      <p:sp>
-        <p:nvSpPr>
-          <p:cNvPr id="38" name="TextBox 37"/>
-          <p:cNvSpPr txBox="1"/>
-          <p:nvPr/>
-        </p:nvSpPr>
-        <p:spPr>
-          <a:xfrm>
-            <a:off x="8540496" y="3895344"/>
-            <a:ext cx="3200400" cy="274320"/>
-          </a:xfrm>
-          <a:prstGeom prst="rect">
-            <a:avLst/>
-          </a:prstGeom>
-          <a:noFill/>
-        </p:spPr>
-        <p:txBody>
-          <a:bodyPr wrap="square">
-            <a:spAutoFit/>
-          </a:bodyPr>
-          <a:lstStyle/>
-          <a:p>
-            <a:pPr algn="l">
-              <a:spcAft>
-                <a:spcPts val="300"/>
-              </a:spcAft>
-            </a:pPr>
-            <a:r>
-              <a:rPr sz="1500" b="1">
-                <a:solidFill>
-                  <a:srgbClr val="0D3B66"/>
-                </a:solidFill>
-                <a:latin typeface="Calibri"/>
-              </a:rPr>
-              <a:t>26 m³    0 %</a:t>
-            </a:r>
-          </a:p>
-        </p:txBody>
-      </p:sp>
-      <p:sp>
-        <p:nvSpPr>
-          <p:cNvPr id="39" name="Rounded Rectangle 38"/>
-          <p:cNvSpPr/>
-          <p:nvPr/>
-        </p:nvSpPr>
-        <p:spPr>
-          <a:xfrm>
-            <a:off x="8430768" y="4279392"/>
-            <a:ext cx="3419856" cy="603504"/>
-          </a:xfrm>
-          <a:prstGeom prst="roundRect">
-            <a:avLst>
-              <a:gd name="adj" fmla="val 8000"/>
-            </a:avLst>
-          </a:prstGeom>
-          <a:solidFill>
-            <a:srgbClr val="F5F7FA"/>
-          </a:solidFill>
-          <a:ln w="6350">
-            <a:solidFill>
-              <a:srgbClr val="5A8C6E"/>
-            </a:solidFill>
-          </a:ln>
-        </p:spPr>
-        <p:style>
-          <a:lnRef idx="1">
-            <a:schemeClr val="accent1"/>
-          </a:lnRef>
-          <a:fillRef idx="3">
-            <a:schemeClr val="accent1"/>
-          </a:fillRef>
-          <a:effectRef idx="2">
-            <a:schemeClr val="accent1"/>
-          </a:effectRef>
-          <a:fontRef idx="minor">
-            <a:schemeClr val="lt1"/>
-          </a:fontRef>
-        </p:style>
-        <p:txBody>
-          <a:bodyPr rtlCol="0" anchor="ctr"/>
-          <a:lstStyle/>
-          <a:p>
-            <a:pPr algn="ctr"/>
-          </a:p>
-        </p:txBody>
-      </p:sp>
-      <p:sp>
-        <p:nvSpPr>
-          <p:cNvPr id="40" name="TextBox 39"/>
-          <p:cNvSpPr txBox="1"/>
-          <p:nvPr/>
-        </p:nvSpPr>
-        <p:spPr>
-          <a:xfrm>
-            <a:off x="8540496" y="4315968"/>
-            <a:ext cx="3200400" cy="182880"/>
-          </a:xfrm>
-          <a:prstGeom prst="rect">
-            <a:avLst/>
-          </a:prstGeom>
-          <a:noFill/>
-        </p:spPr>
-        <p:txBody>
-          <a:bodyPr wrap="square">
-            <a:spAutoFit/>
-          </a:bodyPr>
-          <a:lstStyle/>
-          <a:p>
-            <a:pPr algn="l">
-              <a:spcAft>
-                <a:spcPts val="300"/>
-              </a:spcAft>
-            </a:pPr>
-            <a:r>
-              <a:rPr sz="1100" b="1">
-                <a:solidFill>
-                  <a:srgbClr val="5A8C6E"/>
-                </a:solidFill>
-                <a:latin typeface="Calibri"/>
-              </a:rPr>
-              <a:t>000025-33  Salida ARROW</a:t>
-            </a:r>
-          </a:p>
-        </p:txBody>
-      </p:sp>
-      <p:sp>
-        <p:nvSpPr>
-          <p:cNvPr id="41" name="TextBox 40"/>
-          <p:cNvSpPr txBox="1"/>
-          <p:nvPr/>
-        </p:nvSpPr>
-        <p:spPr>
-          <a:xfrm>
-            <a:off x="8540496" y="4535424"/>
-            <a:ext cx="3200400" cy="274320"/>
-          </a:xfrm>
-          <a:prstGeom prst="rect">
-            <a:avLst/>
-          </a:prstGeom>
-          <a:noFill/>
-        </p:spPr>
-        <p:txBody>
-          <a:bodyPr wrap="square">
-            <a:spAutoFit/>
-          </a:bodyPr>
-          <a:lstStyle/>
-          <a:p>
-            <a:pPr algn="l">
-              <a:spcAft>
-                <a:spcPts val="300"/>
-              </a:spcAft>
-            </a:pPr>
-            <a:r>
-              <a:rPr sz="1500" b="1">
-                <a:solidFill>
-                  <a:srgbClr val="0D3B66"/>
-                </a:solidFill>
-                <a:latin typeface="Calibri"/>
-              </a:rPr>
-              <a:t>1 m³    0 %</a:t>
-            </a:r>
-          </a:p>
-        </p:txBody>
-      </p:sp>
-      <p:sp>
-        <p:nvSpPr>
-          <p:cNvPr id="42" name="Rounded Rectangle 41"/>
-          <p:cNvSpPr/>
-          <p:nvPr/>
-        </p:nvSpPr>
-        <p:spPr>
-          <a:xfrm>
-            <a:off x="8430768" y="4919472"/>
-            <a:ext cx="3419856" cy="603504"/>
-          </a:xfrm>
-          <a:prstGeom prst="roundRect">
-            <a:avLst>
-              <a:gd name="adj" fmla="val 8000"/>
-            </a:avLst>
-          </a:prstGeom>
-          <a:solidFill>
-            <a:srgbClr val="F5F7FA"/>
-          </a:solidFill>
-          <a:ln w="6350">
-            <a:solidFill>
-              <a:srgbClr val="C9A227"/>
-            </a:solidFill>
-          </a:ln>
-        </p:spPr>
-        <p:style>
-          <a:lnRef idx="1">
-            <a:schemeClr val="accent1"/>
-          </a:lnRef>
-          <a:fillRef idx="3">
-            <a:schemeClr val="accent1"/>
-          </a:fillRef>
-          <a:effectRef idx="2">
-            <a:schemeClr val="accent1"/>
-          </a:effectRef>
-          <a:fontRef idx="minor">
-            <a:schemeClr val="lt1"/>
-          </a:fontRef>
-        </p:style>
-        <p:txBody>
-          <a:bodyPr rtlCol="0" anchor="ctr"/>
-          <a:lstStyle/>
-          <a:p>
-            <a:pPr algn="ctr"/>
-          </a:p>
-        </p:txBody>
-      </p:sp>
-      <p:sp>
-        <p:nvSpPr>
-          <p:cNvPr id="43" name="TextBox 42"/>
-          <p:cNvSpPr txBox="1"/>
-          <p:nvPr/>
-        </p:nvSpPr>
-        <p:spPr>
-          <a:xfrm>
-            <a:off x="8540496" y="4956048"/>
-            <a:ext cx="3200400" cy="182880"/>
-          </a:xfrm>
-          <a:prstGeom prst="rect">
-            <a:avLst/>
-          </a:prstGeom>
-          <a:noFill/>
-        </p:spPr>
-        <p:txBody>
-          <a:bodyPr wrap="square">
-            <a:spAutoFit/>
-          </a:bodyPr>
-          <a:lstStyle/>
-          <a:p>
-            <a:pPr algn="l">
-              <a:spcAft>
-                <a:spcPts val="300"/>
-              </a:spcAft>
-            </a:pPr>
-            <a:r>
-              <a:rPr sz="1100" b="1">
-                <a:solidFill>
-                  <a:srgbClr val="C9A227"/>
-                </a:solidFill>
-                <a:latin typeface="Calibri"/>
-              </a:rPr>
-              <a:t>000025-09  Falabella</a:t>
             </a:r>
           </a:p>
         </p:txBody>

--- a/reports/Parque_Arauco/TMP_7MALLS/entrega_diego_anibal/Recorrido_ejecutivo_PA_MAE_20260817.pptx
+++ b/reports/Parque_Arauco/TMP_7MALLS/entrega_diego_anibal/Recorrido_ejecutivo_PA_MAE_20260817.pptx
@@ -9,7 +9,6 @@
     <p:sldId id="257" r:id="rId8"/>
     <p:sldId id="258" r:id="rId9"/>
     <p:sldId id="259" r:id="rId10"/>
-    <p:sldId id="260" r:id="rId11"/>
   </p:sldIdLst>
   <p:sldSz cx="12191695" cy="6858000" type="screen4x3"/>
   <p:notesSz cx="6858000" cy="9144000"/>
@@ -3470,7 +3469,7 @@
                 </a:solidFill>
                 <a:latin typeface="Calibri"/>
               </a:rPr>
-              <a:t>MAE  ·  1. Equipos instalados</a:t>
+              <a:t>MAE  ·  Equipos y consumo</a:t>
             </a:r>
           </a:p>
         </p:txBody>
@@ -3509,7 +3508,7 @@
                 </a:solidFill>
                 <a:latin typeface="Calibri"/>
               </a:rPr>
-              <a:t>4 puntos activos WES   |   Mall Arauco Estación   |   Recepción 20/10/2025</a:t>
+              <a:t>Mall Arauco Estación   |   4 puntos WES   |   01/05/2026 – 17/08/2026</a:t>
             </a:r>
           </a:p>
         </p:txBody>
@@ -3522,8 +3521,297 @@
         </p:nvSpPr>
         <p:spPr>
           <a:xfrm>
-            <a:off x="256032" y="1078992"/>
-            <a:ext cx="5742432" cy="1993392"/>
+            <a:off x="201168" y="1024128"/>
+            <a:ext cx="2866644" cy="658368"/>
+          </a:xfrm>
+          <a:prstGeom prst="roundRect">
+            <a:avLst>
+              <a:gd name="adj" fmla="val 8000"/>
+            </a:avLst>
+          </a:prstGeom>
+          <a:solidFill>
+            <a:srgbClr val="F5F7FA"/>
+          </a:solidFill>
+          <a:ln w="6350">
+            <a:solidFill>
+              <a:srgbClr val="0D3B66"/>
+            </a:solidFill>
+          </a:ln>
+        </p:spPr>
+        <p:style>
+          <a:lnRef idx="1">
+            <a:schemeClr val="accent1"/>
+          </a:lnRef>
+          <a:fillRef idx="3">
+            <a:schemeClr val="accent1"/>
+          </a:fillRef>
+          <a:effectRef idx="2">
+            <a:schemeClr val="accent1"/>
+          </a:effectRef>
+          <a:fontRef idx="minor">
+            <a:schemeClr val="lt1"/>
+          </a:fontRef>
+        </p:style>
+        <p:txBody>
+          <a:bodyPr rtlCol="0" anchor="ctr"/>
+          <a:lstStyle/>
+          <a:p>
+            <a:pPr algn="ctr"/>
+          </a:p>
+        </p:txBody>
+      </p:sp>
+      <p:sp>
+        <p:nvSpPr>
+          <p:cNvPr id="8" name="TextBox 7"/>
+          <p:cNvSpPr txBox="1"/>
+          <p:nvPr/>
+        </p:nvSpPr>
+        <p:spPr>
+          <a:xfrm>
+            <a:off x="310896" y="1060704"/>
+            <a:ext cx="2665475" cy="201168"/>
+          </a:xfrm>
+          <a:prstGeom prst="rect">
+            <a:avLst/>
+          </a:prstGeom>
+          <a:noFill/>
+        </p:spPr>
+        <p:txBody>
+          <a:bodyPr wrap="square">
+            <a:spAutoFit/>
+          </a:bodyPr>
+          <a:lstStyle/>
+          <a:p>
+            <a:pPr algn="l">
+              <a:spcAft>
+                <a:spcPts val="300"/>
+              </a:spcAft>
+            </a:pPr>
+            <a:r>
+              <a:rPr sz="1000" b="1">
+                <a:solidFill>
+                  <a:srgbClr val="C9A227"/>
+                </a:solidFill>
+                <a:latin typeface="Calibri"/>
+              </a:rPr>
+              <a:t>000025-01</a:t>
+            </a:r>
+          </a:p>
+        </p:txBody>
+      </p:sp>
+      <p:sp>
+        <p:nvSpPr>
+          <p:cNvPr id="9" name="TextBox 8"/>
+          <p:cNvSpPr txBox="1"/>
+          <p:nvPr/>
+        </p:nvSpPr>
+        <p:spPr>
+          <a:xfrm>
+            <a:off x="310896" y="1261872"/>
+            <a:ext cx="2665475" cy="219456"/>
+          </a:xfrm>
+          <a:prstGeom prst="rect">
+            <a:avLst/>
+          </a:prstGeom>
+          <a:noFill/>
+        </p:spPr>
+        <p:txBody>
+          <a:bodyPr wrap="square">
+            <a:spAutoFit/>
+          </a:bodyPr>
+          <a:lstStyle/>
+          <a:p>
+            <a:pPr algn="l">
+              <a:spcAft>
+                <a:spcPts val="300"/>
+              </a:spcAft>
+            </a:pPr>
+            <a:r>
+              <a:rPr sz="1300" b="1">
+                <a:solidFill>
+                  <a:srgbClr val="0D3B66"/>
+                </a:solidFill>
+                <a:latin typeface="Calibri"/>
+              </a:rPr>
+              <a:t>Estanque Norte</a:t>
+            </a:r>
+          </a:p>
+        </p:txBody>
+      </p:sp>
+      <p:sp>
+        <p:nvSpPr>
+          <p:cNvPr id="10" name="TextBox 9"/>
+          <p:cNvSpPr txBox="1"/>
+          <p:nvPr/>
+        </p:nvSpPr>
+        <p:spPr>
+          <a:xfrm>
+            <a:off x="310896" y="1463040"/>
+            <a:ext cx="2665475" cy="182880"/>
+          </a:xfrm>
+          <a:prstGeom prst="rect">
+            <a:avLst/>
+          </a:prstGeom>
+          <a:noFill/>
+        </p:spPr>
+        <p:txBody>
+          <a:bodyPr wrap="square">
+            <a:spAutoFit/>
+          </a:bodyPr>
+          <a:lstStyle/>
+          <a:p>
+            <a:pPr algn="l">
+              <a:spcAft>
+                <a:spcPts val="300"/>
+              </a:spcAft>
+            </a:pPr>
+            <a:r>
+              <a:rPr sz="1000" b="0">
+                <a:solidFill>
+                  <a:srgbClr val="5A5A5A"/>
+                </a:solidFill>
+                <a:latin typeface="Calibri"/>
+              </a:rPr>
+              <a:t>locales mall</a:t>
+            </a:r>
+          </a:p>
+        </p:txBody>
+      </p:sp>
+      <p:sp>
+        <p:nvSpPr>
+          <p:cNvPr id="11" name="Rounded Rectangle 10"/>
+          <p:cNvSpPr/>
+          <p:nvPr/>
+        </p:nvSpPr>
+        <p:spPr>
+          <a:xfrm>
+            <a:off x="3177540" y="1024128"/>
+            <a:ext cx="2866644" cy="658368"/>
+          </a:xfrm>
+          <a:prstGeom prst="roundRect">
+            <a:avLst>
+              <a:gd name="adj" fmla="val 8000"/>
+            </a:avLst>
+          </a:prstGeom>
+          <a:solidFill>
+            <a:srgbClr val="F5F7FA"/>
+          </a:solidFill>
+          <a:ln w="6350">
+            <a:solidFill>
+              <a:srgbClr val="C45C26"/>
+            </a:solidFill>
+          </a:ln>
+        </p:spPr>
+        <p:style>
+          <a:lnRef idx="1">
+            <a:schemeClr val="accent1"/>
+          </a:lnRef>
+          <a:fillRef idx="3">
+            <a:schemeClr val="accent1"/>
+          </a:fillRef>
+          <a:effectRef idx="2">
+            <a:schemeClr val="accent1"/>
+          </a:effectRef>
+          <a:fontRef idx="minor">
+            <a:schemeClr val="lt1"/>
+          </a:fontRef>
+        </p:style>
+        <p:txBody>
+          <a:bodyPr rtlCol="0" anchor="ctr"/>
+          <a:lstStyle/>
+          <a:p>
+            <a:pPr algn="ctr"/>
+          </a:p>
+        </p:txBody>
+      </p:sp>
+      <p:sp>
+        <p:nvSpPr>
+          <p:cNvPr id="12" name="TextBox 11"/>
+          <p:cNvSpPr txBox="1"/>
+          <p:nvPr/>
+        </p:nvSpPr>
+        <p:spPr>
+          <a:xfrm>
+            <a:off x="3287268" y="1060704"/>
+            <a:ext cx="2665475" cy="201168"/>
+          </a:xfrm>
+          <a:prstGeom prst="rect">
+            <a:avLst/>
+          </a:prstGeom>
+          <a:noFill/>
+        </p:spPr>
+        <p:txBody>
+          <a:bodyPr wrap="square">
+            <a:spAutoFit/>
+          </a:bodyPr>
+          <a:lstStyle/>
+          <a:p>
+            <a:pPr algn="l">
+              <a:spcAft>
+                <a:spcPts val="300"/>
+              </a:spcAft>
+            </a:pPr>
+            <a:r>
+              <a:rPr sz="1000" b="1">
+                <a:solidFill>
+                  <a:srgbClr val="C9A227"/>
+                </a:solidFill>
+                <a:latin typeface="Calibri"/>
+              </a:rPr>
+              <a:t>000025-07</a:t>
+            </a:r>
+          </a:p>
+        </p:txBody>
+      </p:sp>
+      <p:sp>
+        <p:nvSpPr>
+          <p:cNvPr id="13" name="TextBox 12"/>
+          <p:cNvSpPr txBox="1"/>
+          <p:nvPr/>
+        </p:nvSpPr>
+        <p:spPr>
+          <a:xfrm>
+            <a:off x="3287268" y="1261872"/>
+            <a:ext cx="2665475" cy="219456"/>
+          </a:xfrm>
+          <a:prstGeom prst="rect">
+            <a:avLst/>
+          </a:prstGeom>
+          <a:noFill/>
+        </p:spPr>
+        <p:txBody>
+          <a:bodyPr wrap="square">
+            <a:spAutoFit/>
+          </a:bodyPr>
+          <a:lstStyle/>
+          <a:p>
+            <a:pPr algn="l">
+              <a:spcAft>
+                <a:spcPts val="300"/>
+              </a:spcAft>
+            </a:pPr>
+            <a:r>
+              <a:rPr sz="1300" b="1">
+                <a:solidFill>
+                  <a:srgbClr val="0D3B66"/>
+                </a:solidFill>
+                <a:latin typeface="Calibri"/>
+              </a:rPr>
+              <a:t>Pizza Hut</a:t>
+            </a:r>
+          </a:p>
+        </p:txBody>
+      </p:sp>
+      <p:sp>
+        <p:nvSpPr>
+          <p:cNvPr id="14" name="Rounded Rectangle 13"/>
+          <p:cNvSpPr/>
+          <p:nvPr/>
+        </p:nvSpPr>
+        <p:spPr>
+          <a:xfrm>
+            <a:off x="6153912" y="1024128"/>
+            <a:ext cx="2866644" cy="658368"/>
           </a:xfrm>
           <a:prstGeom prst="roundRect">
             <a:avLst>
@@ -3563,14 +3851,14 @@
       </p:sp>
       <p:sp>
         <p:nvSpPr>
-          <p:cNvPr id="8" name="TextBox 7"/>
+          <p:cNvPr id="15" name="TextBox 14"/>
           <p:cNvSpPr txBox="1"/>
           <p:nvPr/>
         </p:nvSpPr>
         <p:spPr>
           <a:xfrm>
-            <a:off x="457200" y="1243584"/>
-            <a:ext cx="5349240" cy="292608"/>
+            <a:off x="6263640" y="1060704"/>
+            <a:ext cx="2665475" cy="201168"/>
           </a:xfrm>
           <a:prstGeom prst="rect">
             <a:avLst/>
@@ -3589,27 +3877,27 @@
               </a:spcAft>
             </a:pPr>
             <a:r>
-              <a:rPr sz="1200" b="1">
+              <a:rPr sz="1000" b="1">
                 <a:solidFill>
                   <a:srgbClr val="C9A227"/>
                 </a:solidFill>
                 <a:latin typeface="Calibri"/>
               </a:rPr>
-              <a:t>000025-01</a:t>
-            </a:r>
-          </a:p>
-        </p:txBody>
-      </p:sp>
-      <p:sp>
-        <p:nvSpPr>
-          <p:cNvPr id="9" name="TextBox 8"/>
+              <a:t>000025-19</a:t>
+            </a:r>
+          </a:p>
+        </p:txBody>
+      </p:sp>
+      <p:sp>
+        <p:nvSpPr>
+          <p:cNvPr id="16" name="TextBox 15"/>
           <p:cNvSpPr txBox="1"/>
           <p:nvPr/>
         </p:nvSpPr>
         <p:spPr>
           <a:xfrm>
-            <a:off x="457200" y="1554480"/>
-            <a:ext cx="5349240" cy="640080"/>
+            <a:off x="6263640" y="1261872"/>
+            <a:ext cx="2665475" cy="219456"/>
           </a:xfrm>
           <a:prstGeom prst="rect">
             <a:avLst/>
@@ -3628,27 +3916,27 @@
               </a:spcAft>
             </a:pPr>
             <a:r>
-              <a:rPr sz="2200" b="1">
+              <a:rPr sz="1300" b="1">
                 <a:solidFill>
                   <a:srgbClr val="0D3B66"/>
                 </a:solidFill>
                 <a:latin typeface="Calibri"/>
               </a:rPr>
-              <a:t>Estanque Norte Locales Mall</a:t>
-            </a:r>
-          </a:p>
-        </p:txBody>
-      </p:sp>
-      <p:sp>
-        <p:nvSpPr>
-          <p:cNvPr id="10" name="TextBox 9"/>
+              <a:t>Estanque Sur</a:t>
+            </a:r>
+          </a:p>
+        </p:txBody>
+      </p:sp>
+      <p:sp>
+        <p:nvSpPr>
+          <p:cNvPr id="17" name="TextBox 16"/>
           <p:cNvSpPr txBox="1"/>
           <p:nvPr/>
         </p:nvSpPr>
         <p:spPr>
           <a:xfrm>
-            <a:off x="457200" y="2286000"/>
-            <a:ext cx="5349240" cy="502920"/>
+            <a:off x="6263640" y="1463040"/>
+            <a:ext cx="2665475" cy="182880"/>
           </a:xfrm>
           <a:prstGeom prst="rect">
             <a:avLst/>
@@ -3667,27 +3955,596 @@
               </a:spcAft>
             </a:pPr>
             <a:r>
-              <a:rPr sz="1400" b="0">
+              <a:rPr sz="1000" b="0">
                 <a:solidFill>
                   <a:srgbClr val="5A5A5A"/>
                 </a:solidFill>
                 <a:latin typeface="Calibri"/>
               </a:rPr>
-              <a:t>Estanque Norte — locales mall</a:t>
-            </a:r>
-          </a:p>
-        </p:txBody>
-      </p:sp>
-      <p:sp>
-        <p:nvSpPr>
-          <p:cNvPr id="11" name="Rounded Rectangle 10"/>
+              <a:t>sala de bomba</a:t>
+            </a:r>
+          </a:p>
+        </p:txBody>
+      </p:sp>
+      <p:sp>
+        <p:nvSpPr>
+          <p:cNvPr id="18" name="Rounded Rectangle 17"/>
           <p:cNvSpPr/>
           <p:nvPr/>
         </p:nvSpPr>
         <p:spPr>
           <a:xfrm>
-            <a:off x="6199632" y="1078992"/>
-            <a:ext cx="5742432" cy="1993392"/>
+            <a:off x="9130284" y="1024128"/>
+            <a:ext cx="2866644" cy="658368"/>
+          </a:xfrm>
+          <a:prstGeom prst="roundRect">
+            <a:avLst>
+              <a:gd name="adj" fmla="val 8000"/>
+            </a:avLst>
+          </a:prstGeom>
+          <a:solidFill>
+            <a:srgbClr val="F5F7FA"/>
+          </a:solidFill>
+          <a:ln w="6350">
+            <a:solidFill>
+              <a:srgbClr val="7BA3C9"/>
+            </a:solidFill>
+          </a:ln>
+        </p:spPr>
+        <p:style>
+          <a:lnRef idx="1">
+            <a:schemeClr val="accent1"/>
+          </a:lnRef>
+          <a:fillRef idx="3">
+            <a:schemeClr val="accent1"/>
+          </a:fillRef>
+          <a:effectRef idx="2">
+            <a:schemeClr val="accent1"/>
+          </a:effectRef>
+          <a:fontRef idx="minor">
+            <a:schemeClr val="lt1"/>
+          </a:fontRef>
+        </p:style>
+        <p:txBody>
+          <a:bodyPr rtlCol="0" anchor="ctr"/>
+          <a:lstStyle/>
+          <a:p>
+            <a:pPr algn="ctr"/>
+          </a:p>
+        </p:txBody>
+      </p:sp>
+      <p:sp>
+        <p:nvSpPr>
+          <p:cNvPr id="19" name="TextBox 18"/>
+          <p:cNvSpPr txBox="1"/>
+          <p:nvPr/>
+        </p:nvSpPr>
+        <p:spPr>
+          <a:xfrm>
+            <a:off x="9240012" y="1060704"/>
+            <a:ext cx="2665475" cy="201168"/>
+          </a:xfrm>
+          <a:prstGeom prst="rect">
+            <a:avLst/>
+          </a:prstGeom>
+          <a:noFill/>
+        </p:spPr>
+        <p:txBody>
+          <a:bodyPr wrap="square">
+            <a:spAutoFit/>
+          </a:bodyPr>
+          <a:lstStyle/>
+          <a:p>
+            <a:pPr algn="l">
+              <a:spcAft>
+                <a:spcPts val="300"/>
+              </a:spcAft>
+            </a:pPr>
+            <a:r>
+              <a:rPr sz="1000" b="1">
+                <a:solidFill>
+                  <a:srgbClr val="C9A227"/>
+                </a:solidFill>
+                <a:latin typeface="Calibri"/>
+              </a:rPr>
+              <a:t>000025-04</a:t>
+            </a:r>
+          </a:p>
+        </p:txBody>
+      </p:sp>
+      <p:sp>
+        <p:nvSpPr>
+          <p:cNvPr id="20" name="TextBox 19"/>
+          <p:cNvSpPr txBox="1"/>
+          <p:nvPr/>
+        </p:nvSpPr>
+        <p:spPr>
+          <a:xfrm>
+            <a:off x="9240012" y="1261872"/>
+            <a:ext cx="2665475" cy="219456"/>
+          </a:xfrm>
+          <a:prstGeom prst="rect">
+            <a:avLst/>
+          </a:prstGeom>
+          <a:noFill/>
+        </p:spPr>
+        <p:txBody>
+          <a:bodyPr wrap="square">
+            <a:spAutoFit/>
+          </a:bodyPr>
+          <a:lstStyle/>
+          <a:p>
+            <a:pPr algn="l">
+              <a:spcAft>
+                <a:spcPts val="300"/>
+              </a:spcAft>
+            </a:pPr>
+            <a:r>
+              <a:rPr sz="1300" b="1">
+                <a:solidFill>
+                  <a:srgbClr val="0D3B66"/>
+                </a:solidFill>
+                <a:latin typeface="Calibri"/>
+              </a:rPr>
+              <a:t>Baños Públicos</a:t>
+            </a:r>
+          </a:p>
+        </p:txBody>
+      </p:sp>
+      <p:sp>
+        <p:nvSpPr>
+          <p:cNvPr id="21" name="Rounded Rectangle 20"/>
+          <p:cNvSpPr/>
+          <p:nvPr/>
+        </p:nvSpPr>
+        <p:spPr>
+          <a:xfrm>
+            <a:off x="201168" y="1792224"/>
+            <a:ext cx="7973568" cy="3822191"/>
+          </a:xfrm>
+          <a:prstGeom prst="roundRect">
+            <a:avLst>
+              <a:gd name="adj" fmla="val 8000"/>
+            </a:avLst>
+          </a:prstGeom>
+          <a:solidFill>
+            <a:srgbClr val="F5F7FA"/>
+          </a:solidFill>
+          <a:ln>
+            <a:noFill/>
+          </a:ln>
+        </p:spPr>
+        <p:style>
+          <a:lnRef idx="1">
+            <a:schemeClr val="accent1"/>
+          </a:lnRef>
+          <a:fillRef idx="3">
+            <a:schemeClr val="accent1"/>
+          </a:fillRef>
+          <a:effectRef idx="2">
+            <a:schemeClr val="accent1"/>
+          </a:effectRef>
+          <a:fontRef idx="minor">
+            <a:schemeClr val="lt1"/>
+          </a:fontRef>
+        </p:style>
+        <p:txBody>
+          <a:bodyPr rtlCol="0" anchor="ctr"/>
+          <a:lstStyle/>
+          <a:p>
+            <a:pPr algn="ctr"/>
+          </a:p>
+        </p:txBody>
+      </p:sp>
+      <p:pic>
+        <p:nvPicPr>
+          <p:cNvPr id="22" name="Picture 21" descr="mae_mensual_may_ago.png"/>
+          <p:cNvPicPr>
+            <a:picLocks noChangeAspect="1"/>
+          </p:cNvPicPr>
+          <p:nvPr/>
+        </p:nvPicPr>
+        <p:blipFill>
+          <a:blip r:embed="rId3"/>
+          <a:stretch>
+            <a:fillRect/>
+          </a:stretch>
+        </p:blipFill>
+        <p:spPr>
+          <a:xfrm>
+            <a:off x="329184" y="1865376"/>
+            <a:ext cx="7717536" cy="3777531"/>
+          </a:xfrm>
+          <a:prstGeom prst="rect">
+            <a:avLst/>
+          </a:prstGeom>
+        </p:spPr>
+      </p:pic>
+      <p:sp>
+        <p:nvSpPr>
+          <p:cNvPr id="23" name="Rounded Rectangle 22"/>
+          <p:cNvSpPr/>
+          <p:nvPr/>
+        </p:nvSpPr>
+        <p:spPr>
+          <a:xfrm>
+            <a:off x="8302752" y="1792224"/>
+            <a:ext cx="3675887" cy="3822191"/>
+          </a:xfrm>
+          <a:prstGeom prst="roundRect">
+            <a:avLst>
+              <a:gd name="adj" fmla="val 8000"/>
+            </a:avLst>
+          </a:prstGeom>
+          <a:solidFill>
+            <a:srgbClr val="FFFFFF"/>
+          </a:solidFill>
+          <a:ln w="6350">
+            <a:solidFill>
+              <a:srgbClr val="1F77B4"/>
+            </a:solidFill>
+          </a:ln>
+        </p:spPr>
+        <p:style>
+          <a:lnRef idx="1">
+            <a:schemeClr val="accent1"/>
+          </a:lnRef>
+          <a:fillRef idx="3">
+            <a:schemeClr val="accent1"/>
+          </a:fillRef>
+          <a:effectRef idx="2">
+            <a:schemeClr val="accent1"/>
+          </a:effectRef>
+          <a:fontRef idx="minor">
+            <a:schemeClr val="lt1"/>
+          </a:fontRef>
+        </p:style>
+        <p:txBody>
+          <a:bodyPr rtlCol="0" anchor="ctr"/>
+          <a:lstStyle/>
+          <a:p>
+            <a:pPr algn="ctr"/>
+          </a:p>
+        </p:txBody>
+      </p:sp>
+      <p:sp>
+        <p:nvSpPr>
+          <p:cNvPr id="24" name="TextBox 23"/>
+          <p:cNvSpPr txBox="1"/>
+          <p:nvPr/>
+        </p:nvSpPr>
+        <p:spPr>
+          <a:xfrm>
+            <a:off x="8430768" y="1847088"/>
+            <a:ext cx="3419856" cy="201168"/>
+          </a:xfrm>
+          <a:prstGeom prst="rect">
+            <a:avLst/>
+          </a:prstGeom>
+          <a:noFill/>
+        </p:spPr>
+        <p:txBody>
+          <a:bodyPr wrap="square">
+            <a:spAutoFit/>
+          </a:bodyPr>
+          <a:lstStyle/>
+          <a:p>
+            <a:pPr algn="l">
+              <a:spcAft>
+                <a:spcPts val="300"/>
+              </a:spcAft>
+            </a:pPr>
+            <a:r>
+              <a:rPr sz="1100" b="1">
+                <a:solidFill>
+                  <a:srgbClr val="1F77B4"/>
+                </a:solidFill>
+                <a:latin typeface="Calibri"/>
+              </a:rPr>
+              <a:t>JULIO · último mes cerrado</a:t>
+            </a:r>
+          </a:p>
+        </p:txBody>
+      </p:sp>
+      <p:sp>
+        <p:nvSpPr>
+          <p:cNvPr id="25" name="TextBox 24"/>
+          <p:cNvSpPr txBox="1"/>
+          <p:nvPr/>
+        </p:nvSpPr>
+        <p:spPr>
+          <a:xfrm>
+            <a:off x="8430768" y="2048256"/>
+            <a:ext cx="3419856" cy="256032"/>
+          </a:xfrm>
+          <a:prstGeom prst="rect">
+            <a:avLst/>
+          </a:prstGeom>
+          <a:noFill/>
+        </p:spPr>
+        <p:txBody>
+          <a:bodyPr wrap="square">
+            <a:spAutoFit/>
+          </a:bodyPr>
+          <a:lstStyle/>
+          <a:p>
+            <a:pPr algn="l">
+              <a:spcAft>
+                <a:spcPts val="300"/>
+              </a:spcAft>
+            </a:pPr>
+            <a:r>
+              <a:rPr sz="1200" b="0">
+                <a:solidFill>
+                  <a:srgbClr val="5A5A5A"/>
+                </a:solidFill>
+                <a:latin typeface="Calibri"/>
+              </a:rPr>
+              <a:t>El recinto sumó 3.074 m³</a:t>
+            </a:r>
+          </a:p>
+        </p:txBody>
+      </p:sp>
+      <p:sp>
+        <p:nvSpPr>
+          <p:cNvPr id="26" name="Rounded Rectangle 25"/>
+          <p:cNvSpPr/>
+          <p:nvPr/>
+        </p:nvSpPr>
+        <p:spPr>
+          <a:xfrm>
+            <a:off x="8430768" y="2340864"/>
+            <a:ext cx="3419856" cy="768096"/>
+          </a:xfrm>
+          <a:prstGeom prst="roundRect">
+            <a:avLst>
+              <a:gd name="adj" fmla="val 8000"/>
+            </a:avLst>
+          </a:prstGeom>
+          <a:solidFill>
+            <a:srgbClr val="F5F7FA"/>
+          </a:solidFill>
+          <a:ln w="6350">
+            <a:solidFill>
+              <a:srgbClr val="C45C26"/>
+            </a:solidFill>
+          </a:ln>
+        </p:spPr>
+        <p:style>
+          <a:lnRef idx="1">
+            <a:schemeClr val="accent1"/>
+          </a:lnRef>
+          <a:fillRef idx="3">
+            <a:schemeClr val="accent1"/>
+          </a:fillRef>
+          <a:effectRef idx="2">
+            <a:schemeClr val="accent1"/>
+          </a:effectRef>
+          <a:fontRef idx="minor">
+            <a:schemeClr val="lt1"/>
+          </a:fontRef>
+        </p:style>
+        <p:txBody>
+          <a:bodyPr rtlCol="0" anchor="ctr"/>
+          <a:lstStyle/>
+          <a:p>
+            <a:pPr algn="ctr"/>
+          </a:p>
+        </p:txBody>
+      </p:sp>
+      <p:sp>
+        <p:nvSpPr>
+          <p:cNvPr id="27" name="TextBox 26"/>
+          <p:cNvSpPr txBox="1"/>
+          <p:nvPr/>
+        </p:nvSpPr>
+        <p:spPr>
+          <a:xfrm>
+            <a:off x="8540496" y="2414016"/>
+            <a:ext cx="3200400" cy="219456"/>
+          </a:xfrm>
+          <a:prstGeom prst="rect">
+            <a:avLst/>
+          </a:prstGeom>
+          <a:noFill/>
+        </p:spPr>
+        <p:txBody>
+          <a:bodyPr wrap="square">
+            <a:spAutoFit/>
+          </a:bodyPr>
+          <a:lstStyle/>
+          <a:p>
+            <a:pPr algn="l">
+              <a:spcAft>
+                <a:spcPts val="300"/>
+              </a:spcAft>
+            </a:pPr>
+            <a:r>
+              <a:rPr sz="1300" b="1">
+                <a:solidFill>
+                  <a:srgbClr val="C45C26"/>
+                </a:solidFill>
+                <a:latin typeface="Calibri"/>
+              </a:rPr>
+              <a:t>Pizza Hut</a:t>
+            </a:r>
+          </a:p>
+        </p:txBody>
+      </p:sp>
+      <p:sp>
+        <p:nvSpPr>
+          <p:cNvPr id="28" name="TextBox 27"/>
+          <p:cNvSpPr txBox="1"/>
+          <p:nvPr/>
+        </p:nvSpPr>
+        <p:spPr>
+          <a:xfrm>
+            <a:off x="8540496" y="2688336"/>
+            <a:ext cx="3200400" cy="329184"/>
+          </a:xfrm>
+          <a:prstGeom prst="rect">
+            <a:avLst/>
+          </a:prstGeom>
+          <a:noFill/>
+        </p:spPr>
+        <p:txBody>
+          <a:bodyPr wrap="square">
+            <a:spAutoFit/>
+          </a:bodyPr>
+          <a:lstStyle/>
+          <a:p>
+            <a:pPr algn="l">
+              <a:spcAft>
+                <a:spcPts val="300"/>
+              </a:spcAft>
+            </a:pPr>
+            <a:r>
+              <a:rPr sz="1600" b="1">
+                <a:solidFill>
+                  <a:srgbClr val="0D3B66"/>
+                </a:solidFill>
+                <a:latin typeface="Calibri"/>
+              </a:rPr>
+              <a:t>1.169 m³    38 %</a:t>
+            </a:r>
+          </a:p>
+        </p:txBody>
+      </p:sp>
+      <p:sp>
+        <p:nvSpPr>
+          <p:cNvPr id="29" name="Rounded Rectangle 28"/>
+          <p:cNvSpPr/>
+          <p:nvPr/>
+        </p:nvSpPr>
+        <p:spPr>
+          <a:xfrm>
+            <a:off x="8430768" y="3145536"/>
+            <a:ext cx="3419856" cy="768096"/>
+          </a:xfrm>
+          <a:prstGeom prst="roundRect">
+            <a:avLst>
+              <a:gd name="adj" fmla="val 8000"/>
+            </a:avLst>
+          </a:prstGeom>
+          <a:solidFill>
+            <a:srgbClr val="F5F7FA"/>
+          </a:solidFill>
+          <a:ln w="6350">
+            <a:solidFill>
+              <a:srgbClr val="0D3B66"/>
+            </a:solidFill>
+          </a:ln>
+        </p:spPr>
+        <p:style>
+          <a:lnRef idx="1">
+            <a:schemeClr val="accent1"/>
+          </a:lnRef>
+          <a:fillRef idx="3">
+            <a:schemeClr val="accent1"/>
+          </a:fillRef>
+          <a:effectRef idx="2">
+            <a:schemeClr val="accent1"/>
+          </a:effectRef>
+          <a:fontRef idx="minor">
+            <a:schemeClr val="lt1"/>
+          </a:fontRef>
+        </p:style>
+        <p:txBody>
+          <a:bodyPr rtlCol="0" anchor="ctr"/>
+          <a:lstStyle/>
+          <a:p>
+            <a:pPr algn="ctr"/>
+          </a:p>
+        </p:txBody>
+      </p:sp>
+      <p:sp>
+        <p:nvSpPr>
+          <p:cNvPr id="30" name="TextBox 29"/>
+          <p:cNvSpPr txBox="1"/>
+          <p:nvPr/>
+        </p:nvSpPr>
+        <p:spPr>
+          <a:xfrm>
+            <a:off x="8540496" y="3218688"/>
+            <a:ext cx="3200400" cy="219456"/>
+          </a:xfrm>
+          <a:prstGeom prst="rect">
+            <a:avLst/>
+          </a:prstGeom>
+          <a:noFill/>
+        </p:spPr>
+        <p:txBody>
+          <a:bodyPr wrap="square">
+            <a:spAutoFit/>
+          </a:bodyPr>
+          <a:lstStyle/>
+          <a:p>
+            <a:pPr algn="l">
+              <a:spcAft>
+                <a:spcPts val="300"/>
+              </a:spcAft>
+            </a:pPr>
+            <a:r>
+              <a:rPr sz="1300" b="1">
+                <a:solidFill>
+                  <a:srgbClr val="0D3B66"/>
+                </a:solidFill>
+                <a:latin typeface="Calibri"/>
+              </a:rPr>
+              <a:t>Estanque Norte</a:t>
+            </a:r>
+          </a:p>
+        </p:txBody>
+      </p:sp>
+      <p:sp>
+        <p:nvSpPr>
+          <p:cNvPr id="31" name="TextBox 30"/>
+          <p:cNvSpPr txBox="1"/>
+          <p:nvPr/>
+        </p:nvSpPr>
+        <p:spPr>
+          <a:xfrm>
+            <a:off x="8540496" y="3493008"/>
+            <a:ext cx="3200400" cy="329184"/>
+          </a:xfrm>
+          <a:prstGeom prst="rect">
+            <a:avLst/>
+          </a:prstGeom>
+          <a:noFill/>
+        </p:spPr>
+        <p:txBody>
+          <a:bodyPr wrap="square">
+            <a:spAutoFit/>
+          </a:bodyPr>
+          <a:lstStyle/>
+          <a:p>
+            <a:pPr algn="l">
+              <a:spcAft>
+                <a:spcPts val="300"/>
+              </a:spcAft>
+            </a:pPr>
+            <a:r>
+              <a:rPr sz="1600" b="1">
+                <a:solidFill>
+                  <a:srgbClr val="0D3B66"/>
+                </a:solidFill>
+                <a:latin typeface="Calibri"/>
+              </a:rPr>
+              <a:t>886 m³    29 %</a:t>
+            </a:r>
+          </a:p>
+        </p:txBody>
+      </p:sp>
+      <p:sp>
+        <p:nvSpPr>
+          <p:cNvPr id="32" name="Rounded Rectangle 31"/>
+          <p:cNvSpPr/>
+          <p:nvPr/>
+        </p:nvSpPr>
+        <p:spPr>
+          <a:xfrm>
+            <a:off x="8430768" y="3950208"/>
+            <a:ext cx="3419856" cy="768096"/>
           </a:xfrm>
           <a:prstGeom prst="roundRect">
             <a:avLst>
@@ -3727,14 +4584,14 @@
       </p:sp>
       <p:sp>
         <p:nvSpPr>
-          <p:cNvPr id="12" name="TextBox 11"/>
+          <p:cNvPr id="33" name="TextBox 32"/>
           <p:cNvSpPr txBox="1"/>
           <p:nvPr/>
         </p:nvSpPr>
         <p:spPr>
           <a:xfrm>
-            <a:off x="6400800" y="1243584"/>
-            <a:ext cx="5349240" cy="292608"/>
+            <a:off x="8540496" y="4023360"/>
+            <a:ext cx="3200400" cy="219456"/>
           </a:xfrm>
           <a:prstGeom prst="rect">
             <a:avLst/>
@@ -3753,27 +4610,27 @@
               </a:spcAft>
             </a:pPr>
             <a:r>
-              <a:rPr sz="1200" b="1">
-                <a:solidFill>
-                  <a:srgbClr val="C9A227"/>
+              <a:rPr sz="1300" b="1">
+                <a:solidFill>
+                  <a:srgbClr val="1F77B4"/>
                 </a:solidFill>
                 <a:latin typeface="Calibri"/>
               </a:rPr>
-              <a:t>000025-04</a:t>
-            </a:r>
-          </a:p>
-        </p:txBody>
-      </p:sp>
-      <p:sp>
-        <p:nvSpPr>
-          <p:cNvPr id="13" name="TextBox 12"/>
+              <a:t>Estanque Sur</a:t>
+            </a:r>
+          </a:p>
+        </p:txBody>
+      </p:sp>
+      <p:sp>
+        <p:nvSpPr>
+          <p:cNvPr id="34" name="TextBox 33"/>
           <p:cNvSpPr txBox="1"/>
           <p:nvPr/>
         </p:nvSpPr>
         <p:spPr>
           <a:xfrm>
-            <a:off x="6400800" y="1554480"/>
-            <a:ext cx="5349240" cy="640080"/>
+            <a:off x="8540496" y="4297680"/>
+            <a:ext cx="3200400" cy="329184"/>
           </a:xfrm>
           <a:prstGeom prst="rect">
             <a:avLst/>
@@ -3792,27 +4649,74 @@
               </a:spcAft>
             </a:pPr>
             <a:r>
-              <a:rPr sz="2200" b="1">
+              <a:rPr sz="1600" b="1">
                 <a:solidFill>
                   <a:srgbClr val="0D3B66"/>
                 </a:solidFill>
                 <a:latin typeface="Calibri"/>
               </a:rPr>
-              <a:t>Baños Públicos</a:t>
-            </a:r>
-          </a:p>
-        </p:txBody>
-      </p:sp>
-      <p:sp>
-        <p:nvSpPr>
-          <p:cNvPr id="14" name="TextBox 13"/>
+              <a:t>802 m³    26 %</a:t>
+            </a:r>
+          </a:p>
+        </p:txBody>
+      </p:sp>
+      <p:sp>
+        <p:nvSpPr>
+          <p:cNvPr id="35" name="Rounded Rectangle 34"/>
+          <p:cNvSpPr/>
+          <p:nvPr/>
+        </p:nvSpPr>
+        <p:spPr>
+          <a:xfrm>
+            <a:off x="8430768" y="4754880"/>
+            <a:ext cx="3419856" cy="768096"/>
+          </a:xfrm>
+          <a:prstGeom prst="roundRect">
+            <a:avLst>
+              <a:gd name="adj" fmla="val 8000"/>
+            </a:avLst>
+          </a:prstGeom>
+          <a:solidFill>
+            <a:srgbClr val="F5F7FA"/>
+          </a:solidFill>
+          <a:ln w="6350">
+            <a:solidFill>
+              <a:srgbClr val="7BA3C9"/>
+            </a:solidFill>
+          </a:ln>
+        </p:spPr>
+        <p:style>
+          <a:lnRef idx="1">
+            <a:schemeClr val="accent1"/>
+          </a:lnRef>
+          <a:fillRef idx="3">
+            <a:schemeClr val="accent1"/>
+          </a:fillRef>
+          <a:effectRef idx="2">
+            <a:schemeClr val="accent1"/>
+          </a:effectRef>
+          <a:fontRef idx="minor">
+            <a:schemeClr val="lt1"/>
+          </a:fontRef>
+        </p:style>
+        <p:txBody>
+          <a:bodyPr rtlCol="0" anchor="ctr"/>
+          <a:lstStyle/>
+          <a:p>
+            <a:pPr algn="ctr"/>
+          </a:p>
+        </p:txBody>
+      </p:sp>
+      <p:sp>
+        <p:nvSpPr>
+          <p:cNvPr id="36" name="TextBox 35"/>
           <p:cNvSpPr txBox="1"/>
           <p:nvPr/>
         </p:nvSpPr>
         <p:spPr>
           <a:xfrm>
-            <a:off x="6400800" y="2286000"/>
-            <a:ext cx="5349240" cy="502920"/>
+            <a:off x="8540496" y="4828032"/>
+            <a:ext cx="3200400" cy="219456"/>
           </a:xfrm>
           <a:prstGeom prst="rect">
             <a:avLst/>
@@ -3831,74 +4735,27 @@
               </a:spcAft>
             </a:pPr>
             <a:r>
-              <a:rPr sz="1400" b="0">
-                <a:solidFill>
-                  <a:srgbClr val="5A5A5A"/>
+              <a:rPr sz="1300" b="1">
+                <a:solidFill>
+                  <a:srgbClr val="7BA3C9"/>
                 </a:solidFill>
                 <a:latin typeface="Calibri"/>
               </a:rPr>
-              <a:t>Baños públicos del recinto</a:t>
-            </a:r>
-          </a:p>
-        </p:txBody>
-      </p:sp>
-      <p:sp>
-        <p:nvSpPr>
-          <p:cNvPr id="15" name="Rounded Rectangle 14"/>
-          <p:cNvSpPr/>
-          <p:nvPr/>
-        </p:nvSpPr>
-        <p:spPr>
-          <a:xfrm>
-            <a:off x="256032" y="3246120"/>
-            <a:ext cx="5742432" cy="1993392"/>
-          </a:xfrm>
-          <a:prstGeom prst="roundRect">
-            <a:avLst>
-              <a:gd name="adj" fmla="val 8000"/>
-            </a:avLst>
-          </a:prstGeom>
-          <a:solidFill>
-            <a:srgbClr val="F5F7FA"/>
-          </a:solidFill>
-          <a:ln w="6350">
-            <a:solidFill>
-              <a:srgbClr val="1F77B4"/>
-            </a:solidFill>
-          </a:ln>
-        </p:spPr>
-        <p:style>
-          <a:lnRef idx="1">
-            <a:schemeClr val="accent1"/>
-          </a:lnRef>
-          <a:fillRef idx="3">
-            <a:schemeClr val="accent1"/>
-          </a:fillRef>
-          <a:effectRef idx="2">
-            <a:schemeClr val="accent1"/>
-          </a:effectRef>
-          <a:fontRef idx="minor">
-            <a:schemeClr val="lt1"/>
-          </a:fontRef>
-        </p:style>
-        <p:txBody>
-          <a:bodyPr rtlCol="0" anchor="ctr"/>
-          <a:lstStyle/>
-          <a:p>
-            <a:pPr algn="ctr"/>
-          </a:p>
-        </p:txBody>
-      </p:sp>
-      <p:sp>
-        <p:nvSpPr>
-          <p:cNvPr id="16" name="TextBox 15"/>
+              <a:t>Baños Públicos</a:t>
+            </a:r>
+          </a:p>
+        </p:txBody>
+      </p:sp>
+      <p:sp>
+        <p:nvSpPr>
+          <p:cNvPr id="37" name="TextBox 36"/>
           <p:cNvSpPr txBox="1"/>
           <p:nvPr/>
         </p:nvSpPr>
         <p:spPr>
           <a:xfrm>
-            <a:off x="457200" y="3410712"/>
-            <a:ext cx="5349240" cy="292608"/>
+            <a:off x="8540496" y="5102352"/>
+            <a:ext cx="3200400" cy="329184"/>
           </a:xfrm>
           <a:prstGeom prst="rect">
             <a:avLst/>
@@ -3917,269 +4774,27 @@
               </a:spcAft>
             </a:pPr>
             <a:r>
-              <a:rPr sz="1200" b="1">
-                <a:solidFill>
-                  <a:srgbClr val="C9A227"/>
+              <a:rPr sz="1600" b="1">
+                <a:solidFill>
+                  <a:srgbClr val="0D3B66"/>
                 </a:solidFill>
                 <a:latin typeface="Calibri"/>
               </a:rPr>
-              <a:t>000025-07</a:t>
-            </a:r>
-          </a:p>
-        </p:txBody>
-      </p:sp>
-      <p:sp>
-        <p:nvSpPr>
-          <p:cNvPr id="17" name="TextBox 16"/>
-          <p:cNvSpPr txBox="1"/>
-          <p:nvPr/>
-        </p:nvSpPr>
-        <p:spPr>
-          <a:xfrm>
-            <a:off x="457200" y="3721608"/>
-            <a:ext cx="5349240" cy="640080"/>
-          </a:xfrm>
-          <a:prstGeom prst="rect">
-            <a:avLst/>
-          </a:prstGeom>
-          <a:noFill/>
-        </p:spPr>
-        <p:txBody>
-          <a:bodyPr wrap="square">
-            <a:spAutoFit/>
-          </a:bodyPr>
-          <a:lstStyle/>
-          <a:p>
-            <a:pPr algn="l">
-              <a:spcAft>
-                <a:spcPts val="300"/>
-              </a:spcAft>
-            </a:pPr>
-            <a:r>
-              <a:rPr sz="2200" b="1">
-                <a:solidFill>
-                  <a:srgbClr val="0D3B66"/>
-                </a:solidFill>
-                <a:latin typeface="Calibri"/>
-              </a:rPr>
-              <a:t>Pizza Hut</a:t>
-            </a:r>
-          </a:p>
-        </p:txBody>
-      </p:sp>
-      <p:sp>
-        <p:nvSpPr>
-          <p:cNvPr id="18" name="TextBox 17"/>
-          <p:cNvSpPr txBox="1"/>
-          <p:nvPr/>
-        </p:nvSpPr>
-        <p:spPr>
-          <a:xfrm>
-            <a:off x="457200" y="4453128"/>
-            <a:ext cx="5349240" cy="502920"/>
-          </a:xfrm>
-          <a:prstGeom prst="rect">
-            <a:avLst/>
-          </a:prstGeom>
-          <a:noFill/>
-        </p:spPr>
-        <p:txBody>
-          <a:bodyPr wrap="square">
-            <a:spAutoFit/>
-          </a:bodyPr>
-          <a:lstStyle/>
-          <a:p>
-            <a:pPr algn="l">
-              <a:spcAft>
-                <a:spcPts val="300"/>
-              </a:spcAft>
-            </a:pPr>
-            <a:r>
-              <a:rPr sz="1400" b="0">
-                <a:solidFill>
-                  <a:srgbClr val="5A5A5A"/>
-                </a:solidFill>
-                <a:latin typeface="Calibri"/>
-              </a:rPr>
-              <a:t>Local Pizza Hut</a:t>
-            </a:r>
-          </a:p>
-        </p:txBody>
-      </p:sp>
-      <p:sp>
-        <p:nvSpPr>
-          <p:cNvPr id="19" name="Rounded Rectangle 18"/>
+              <a:t>217 m³    7 %</a:t>
+            </a:r>
+          </a:p>
+        </p:txBody>
+      </p:sp>
+      <p:sp>
+        <p:nvSpPr>
+          <p:cNvPr id="38" name="Rounded Rectangle 37"/>
           <p:cNvSpPr/>
           <p:nvPr/>
         </p:nvSpPr>
         <p:spPr>
           <a:xfrm>
-            <a:off x="6199632" y="3246120"/>
-            <a:ext cx="5742432" cy="1993392"/>
-          </a:xfrm>
-          <a:prstGeom prst="roundRect">
-            <a:avLst>
-              <a:gd name="adj" fmla="val 8000"/>
-            </a:avLst>
-          </a:prstGeom>
-          <a:solidFill>
-            <a:srgbClr val="F5F7FA"/>
-          </a:solidFill>
-          <a:ln w="6350">
-            <a:solidFill>
-              <a:srgbClr val="1F77B4"/>
-            </a:solidFill>
-          </a:ln>
-        </p:spPr>
-        <p:style>
-          <a:lnRef idx="1">
-            <a:schemeClr val="accent1"/>
-          </a:lnRef>
-          <a:fillRef idx="3">
-            <a:schemeClr val="accent1"/>
-          </a:fillRef>
-          <a:effectRef idx="2">
-            <a:schemeClr val="accent1"/>
-          </a:effectRef>
-          <a:fontRef idx="minor">
-            <a:schemeClr val="lt1"/>
-          </a:fontRef>
-        </p:style>
-        <p:txBody>
-          <a:bodyPr rtlCol="0" anchor="ctr"/>
-          <a:lstStyle/>
-          <a:p>
-            <a:pPr algn="ctr"/>
-          </a:p>
-        </p:txBody>
-      </p:sp>
-      <p:sp>
-        <p:nvSpPr>
-          <p:cNvPr id="20" name="TextBox 19"/>
-          <p:cNvSpPr txBox="1"/>
-          <p:nvPr/>
-        </p:nvSpPr>
-        <p:spPr>
-          <a:xfrm>
-            <a:off x="6400800" y="3410712"/>
-            <a:ext cx="5349240" cy="292608"/>
-          </a:xfrm>
-          <a:prstGeom prst="rect">
-            <a:avLst/>
-          </a:prstGeom>
-          <a:noFill/>
-        </p:spPr>
-        <p:txBody>
-          <a:bodyPr wrap="square">
-            <a:spAutoFit/>
-          </a:bodyPr>
-          <a:lstStyle/>
-          <a:p>
-            <a:pPr algn="l">
-              <a:spcAft>
-                <a:spcPts val="300"/>
-              </a:spcAft>
-            </a:pPr>
-            <a:r>
-              <a:rPr sz="1200" b="1">
-                <a:solidFill>
-                  <a:srgbClr val="C9A227"/>
-                </a:solidFill>
-                <a:latin typeface="Calibri"/>
-              </a:rPr>
-              <a:t>000025-19</a:t>
-            </a:r>
-          </a:p>
-        </p:txBody>
-      </p:sp>
-      <p:sp>
-        <p:nvSpPr>
-          <p:cNvPr id="21" name="TextBox 20"/>
-          <p:cNvSpPr txBox="1"/>
-          <p:nvPr/>
-        </p:nvSpPr>
-        <p:spPr>
-          <a:xfrm>
-            <a:off x="6400800" y="3721608"/>
-            <a:ext cx="5349240" cy="640080"/>
-          </a:xfrm>
-          <a:prstGeom prst="rect">
-            <a:avLst/>
-          </a:prstGeom>
-          <a:noFill/>
-        </p:spPr>
-        <p:txBody>
-          <a:bodyPr wrap="square">
-            <a:spAutoFit/>
-          </a:bodyPr>
-          <a:lstStyle/>
-          <a:p>
-            <a:pPr algn="l">
-              <a:spcAft>
-                <a:spcPts val="300"/>
-              </a:spcAft>
-            </a:pPr>
-            <a:r>
-              <a:rPr sz="2200" b="1">
-                <a:solidFill>
-                  <a:srgbClr val="0D3B66"/>
-                </a:solidFill>
-                <a:latin typeface="Calibri"/>
-              </a:rPr>
-              <a:t>Sala de Bomba Estanque Sur</a:t>
-            </a:r>
-          </a:p>
-        </p:txBody>
-      </p:sp>
-      <p:sp>
-        <p:nvSpPr>
-          <p:cNvPr id="22" name="TextBox 21"/>
-          <p:cNvSpPr txBox="1"/>
-          <p:nvPr/>
-        </p:nvSpPr>
-        <p:spPr>
-          <a:xfrm>
-            <a:off x="6400800" y="4453128"/>
-            <a:ext cx="5349240" cy="502920"/>
-          </a:xfrm>
-          <a:prstGeom prst="rect">
-            <a:avLst/>
-          </a:prstGeom>
-          <a:noFill/>
-        </p:spPr>
-        <p:txBody>
-          <a:bodyPr wrap="square">
-            <a:spAutoFit/>
-          </a:bodyPr>
-          <a:lstStyle/>
-          <a:p>
-            <a:pPr algn="l">
-              <a:spcAft>
-                <a:spcPts val="300"/>
-              </a:spcAft>
-            </a:pPr>
-            <a:r>
-              <a:rPr sz="1400" b="0">
-                <a:solidFill>
-                  <a:srgbClr val="5A5A5A"/>
-                </a:solidFill>
-                <a:latin typeface="Calibri"/>
-              </a:rPr>
-              <a:t>Sala de bomba — estanque sur</a:t>
-            </a:r>
-          </a:p>
-        </p:txBody>
-      </p:sp>
-      <p:sp>
-        <p:nvSpPr>
-          <p:cNvPr id="23" name="Rounded Rectangle 22"/>
-          <p:cNvSpPr/>
-          <p:nvPr/>
-        </p:nvSpPr>
-        <p:spPr>
-          <a:xfrm>
-            <a:off x="256032" y="5394960"/>
-            <a:ext cx="11686032" cy="1170432"/>
+            <a:off x="201168" y="5705856"/>
+            <a:ext cx="11795760" cy="438912"/>
           </a:xfrm>
           <a:prstGeom prst="roundRect">
             <a:avLst>
@@ -4219,14 +4834,14 @@
       </p:sp>
       <p:sp>
         <p:nvSpPr>
-          <p:cNvPr id="24" name="TextBox 23"/>
+          <p:cNvPr id="39" name="TextBox 38"/>
           <p:cNvSpPr txBox="1"/>
           <p:nvPr/>
         </p:nvSpPr>
         <p:spPr>
           <a:xfrm>
-            <a:off x="438912" y="5504688"/>
-            <a:ext cx="11338560" cy="256032"/>
+            <a:off x="329184" y="5779008"/>
+            <a:ext cx="11539728" cy="310896"/>
           </a:xfrm>
           <a:prstGeom prst="rect">
             <a:avLst/>
@@ -4245,27 +4860,27 @@
               </a:spcAft>
             </a:pPr>
             <a:r>
-              <a:rPr sz="1100" b="1">
-                <a:solidFill>
-                  <a:srgbClr val="C9A227"/>
+              <a:rPr sz="1100" b="0">
+                <a:solidFill>
+                  <a:srgbClr val="0D3B66"/>
                 </a:solidFill>
                 <a:latin typeface="Calibri"/>
               </a:rPr>
-              <a:t>RECINTO</a:t>
-            </a:r>
-          </a:p>
-        </p:txBody>
-      </p:sp>
-      <p:sp>
-        <p:nvSpPr>
-          <p:cNvPr id="25" name="TextBox 24"/>
+              <a:t>Recepción 20/10/2025  ·  Capacitación 18/02/2025  ·  medioambiente.dcl@parauco.com  ·  Sala de monitores MAE  ·  Sergio Fuenzalida — Analista Gestión Ambiental</a:t>
+            </a:r>
+          </a:p>
+        </p:txBody>
+      </p:sp>
+      <p:sp>
+        <p:nvSpPr>
+          <p:cNvPr id="40" name="TextBox 39"/>
           <p:cNvSpPr txBox="1"/>
           <p:nvPr/>
         </p:nvSpPr>
         <p:spPr>
           <a:xfrm>
-            <a:off x="438912" y="5779008"/>
-            <a:ext cx="11338560" cy="658368"/>
+            <a:off x="256032" y="6181344"/>
+            <a:ext cx="11704320" cy="566928"/>
           </a:xfrm>
           <a:prstGeom prst="rect">
             <a:avLst/>
@@ -4284,13 +4899,29 @@
               </a:spcAft>
             </a:pPr>
             <a:r>
-              <a:rPr sz="1300" b="0">
+              <a:rPr sz="1200" b="0">
                 <a:solidFill>
                   <a:srgbClr val="0D3B66"/>
                 </a:solidFill>
                 <a:latin typeface="Calibri"/>
               </a:rPr>
-              <a:t>Recepción 20/10/2025  ·  Capacitación 18/02/2025  ·  Usuarios: medioambiente.dcl@parauco.com  ·  Sala de monitores MAE  ·  Sergio Fuenzalida — Analista Gestión Ambiental</a:t>
+              <a:t>Mayo 5.107   ·   Junio 3.179   ·   Julio 3.074   ·   Agosto 1–17: 1.701   ·   proy. ago 3.101 m³.</a:t>
+            </a:r>
+          </a:p>
+          <a:p>
+            <a:pPr algn="l">
+              <a:spcAft>
+                <a:spcPts val="300"/>
+              </a:spcAft>
+            </a:pPr>
+            <a:r>
+              <a:rPr sz="1100" b="0">
+                <a:solidFill>
+                  <a:srgbClr val="5A5A5A"/>
+                </a:solidFill>
+                <a:latin typeface="Calibri"/>
+              </a:rPr>
+              <a:t>Mayo cierra más alto por Estanque Sur, antes de la reparación del 10/06.</a:t>
             </a:r>
           </a:p>
         </p:txBody>
@@ -4457,7 +5088,7 @@
                 </a:solidFill>
                 <a:latin typeface="Calibri"/>
               </a:rPr>
-              <a:t>MAE  ·  2. Consumo mensualizado</a:t>
+              <a:t>MAE  ·  Hallazgos</a:t>
             </a:r>
           </a:p>
         </p:txBody>
@@ -4496,7 +5127,7 @@
                 </a:solidFill>
                 <a:latin typeface="Calibri"/>
               </a:rPr>
-              <a:t>Suma de los 4 puntos WES   |   01/05/2026 – 17/08/2026   |   Agosto: a la fecha vs proyección al 31</a:t>
+              <a:t>Estanque Sur: reparación de presostatos (10/06)  ·  Estanque Norte: control nocturno</a:t>
             </a:r>
           </a:p>
         </p:txBody>
@@ -4509,8 +5140,133 @@
         </p:nvSpPr>
         <p:spPr>
           <a:xfrm>
-            <a:off x="201168" y="1024128"/>
-            <a:ext cx="7973568" cy="4617720"/>
+            <a:off x="201168" y="987552"/>
+            <a:ext cx="11777472" cy="1170432"/>
+          </a:xfrm>
+          <a:prstGeom prst="roundRect">
+            <a:avLst>
+              <a:gd name="adj" fmla="val 8000"/>
+            </a:avLst>
+          </a:prstGeom>
+          <a:solidFill>
+            <a:srgbClr val="FFF9EB"/>
+          </a:solidFill>
+          <a:ln w="6350">
+            <a:solidFill>
+              <a:srgbClr val="C9A227"/>
+            </a:solidFill>
+          </a:ln>
+        </p:spPr>
+        <p:style>
+          <a:lnRef idx="1">
+            <a:schemeClr val="accent1"/>
+          </a:lnRef>
+          <a:fillRef idx="3">
+            <a:schemeClr val="accent1"/>
+          </a:fillRef>
+          <a:effectRef idx="2">
+            <a:schemeClr val="accent1"/>
+          </a:effectRef>
+          <a:fontRef idx="minor">
+            <a:schemeClr val="lt1"/>
+          </a:fontRef>
+        </p:style>
+        <p:txBody>
+          <a:bodyPr rtlCol="0" anchor="ctr"/>
+          <a:lstStyle/>
+          <a:p>
+            <a:pPr algn="ctr"/>
+          </a:p>
+        </p:txBody>
+      </p:sp>
+      <p:sp>
+        <p:nvSpPr>
+          <p:cNvPr id="8" name="TextBox 7"/>
+          <p:cNvSpPr txBox="1"/>
+          <p:nvPr/>
+        </p:nvSpPr>
+        <p:spPr>
+          <a:xfrm>
+            <a:off x="365760" y="1042415"/>
+            <a:ext cx="11475720" cy="237744"/>
+          </a:xfrm>
+          <a:prstGeom prst="rect">
+            <a:avLst/>
+          </a:prstGeom>
+          <a:noFill/>
+        </p:spPr>
+        <p:txBody>
+          <a:bodyPr wrap="square">
+            <a:spAutoFit/>
+          </a:bodyPr>
+          <a:lstStyle/>
+          <a:p>
+            <a:pPr algn="l">
+              <a:spcAft>
+                <a:spcPts val="300"/>
+              </a:spcAft>
+            </a:pPr>
+            <a:r>
+              <a:rPr sz="1100" b="1">
+                <a:solidFill>
+                  <a:srgbClr val="C9A227"/>
+                </a:solidFill>
+                <a:latin typeface="Calibri"/>
+              </a:rPr>
+              <a:t>ESTANQUE SUR  ·  PRESÓSTATOS</a:t>
+            </a:r>
+          </a:p>
+        </p:txBody>
+      </p:sp>
+      <p:sp>
+        <p:nvSpPr>
+          <p:cNvPr id="9" name="TextBox 8"/>
+          <p:cNvSpPr txBox="1"/>
+          <p:nvPr/>
+        </p:nvSpPr>
+        <p:spPr>
+          <a:xfrm>
+            <a:off x="365760" y="1280160"/>
+            <a:ext cx="11475720" cy="804672"/>
+          </a:xfrm>
+          <a:prstGeom prst="rect">
+            <a:avLst/>
+          </a:prstGeom>
+          <a:noFill/>
+        </p:spPr>
+        <p:txBody>
+          <a:bodyPr wrap="square">
+            <a:spAutoFit/>
+          </a:bodyPr>
+          <a:lstStyle/>
+          <a:p>
+            <a:pPr algn="l">
+              <a:spcAft>
+                <a:spcPts val="300"/>
+              </a:spcAft>
+            </a:pPr>
+            <a:r>
+              <a:rPr sz="1200" b="0">
+                <a:solidFill>
+                  <a:srgbClr val="0D3B66"/>
+                </a:solidFill>
+                <a:latin typeface="Calibri"/>
+              </a:rPr>
+              <a:t>El 10/06 se repararon los presostatos. El estanque venía en 89 m³/día (mayo–9/jun) y ese día ya marca 39 m³. Desde el 11/06 se sostiene en 28 m³/día (−61 m³/día, 68%). A $1.400/m³: $84.897/día  ·  $2.546.923/mes  ·  acumulado 11/06–17/08: $5.688.128 (4.063 m³ en 67 días).</a:t>
+            </a:r>
+          </a:p>
+        </p:txBody>
+      </p:sp>
+      <p:sp>
+        <p:nvSpPr>
+          <p:cNvPr id="10" name="Rounded Rectangle 9"/>
+          <p:cNvSpPr/>
+          <p:nvPr/>
+        </p:nvSpPr>
+        <p:spPr>
+          <a:xfrm>
+            <a:off x="201168" y="2249424"/>
+            <a:ext cx="5285232" cy="3456432"/>
           </a:xfrm>
           <a:prstGeom prst="roundRect">
             <a:avLst>
@@ -4546,9 +5302,48 @@
           </a:p>
         </p:txBody>
       </p:sp>
+      <p:sp>
+        <p:nvSpPr>
+          <p:cNvPr id="11" name="TextBox 10"/>
+          <p:cNvSpPr txBox="1"/>
+          <p:nvPr/>
+        </p:nvSpPr>
+        <p:spPr>
+          <a:xfrm>
+            <a:off x="329184" y="2304288"/>
+            <a:ext cx="5029200" cy="237744"/>
+          </a:xfrm>
+          <a:prstGeom prst="rect">
+            <a:avLst/>
+          </a:prstGeom>
+          <a:noFill/>
+        </p:spPr>
+        <p:txBody>
+          <a:bodyPr wrap="square">
+            <a:spAutoFit/>
+          </a:bodyPr>
+          <a:lstStyle/>
+          <a:p>
+            <a:pPr algn="l">
+              <a:spcAft>
+                <a:spcPts val="300"/>
+              </a:spcAft>
+            </a:pPr>
+            <a:r>
+              <a:rPr sz="1100" b="1">
+                <a:solidFill>
+                  <a:srgbClr val="1F77B4"/>
+                </a:solidFill>
+                <a:latin typeface="Calibri"/>
+              </a:rPr>
+              <a:t>CONTROLES NOCTURNOS — noche típica antes vs con control</a:t>
+            </a:r>
+          </a:p>
+        </p:txBody>
+      </p:sp>
       <p:pic>
         <p:nvPicPr>
-          <p:cNvPr id="8" name="Picture 7" descr="mae_mensual_may_ago.png"/>
+          <p:cNvPr id="12" name="Picture 11" descr="mae_controles_nocturnos.png"/>
           <p:cNvPicPr>
             <a:picLocks noChangeAspect="1"/>
           </p:cNvPicPr>
@@ -4562,8 +5357,8 @@
         </p:blipFill>
         <p:spPr>
           <a:xfrm>
-            <a:off x="347472" y="1115568"/>
-            <a:ext cx="7680960" cy="3759628"/>
+            <a:off x="329184" y="2560320"/>
+            <a:ext cx="5010912" cy="2926080"/>
           </a:xfrm>
           <a:prstGeom prst="rect">
             <a:avLst/>
@@ -4572,14 +5367,14 @@
       </p:pic>
       <p:sp>
         <p:nvSpPr>
-          <p:cNvPr id="9" name="Rounded Rectangle 8"/>
+          <p:cNvPr id="13" name="Rounded Rectangle 12"/>
           <p:cNvSpPr/>
           <p:nvPr/>
         </p:nvSpPr>
         <p:spPr>
           <a:xfrm>
-            <a:off x="8302752" y="1024128"/>
-            <a:ext cx="3675887" cy="4617720"/>
+            <a:off x="5614416" y="2249424"/>
+            <a:ext cx="6364224" cy="3456432"/>
           </a:xfrm>
           <a:prstGeom prst="roundRect">
             <a:avLst>
@@ -4587,12 +5382,10 @@
             </a:avLst>
           </a:prstGeom>
           <a:solidFill>
-            <a:srgbClr val="FFFFFF"/>
+            <a:srgbClr val="F5F7FA"/>
           </a:solidFill>
-          <a:ln w="6350">
-            <a:solidFill>
-              <a:srgbClr val="1F77B4"/>
-            </a:solidFill>
+          <a:ln>
+            <a:noFill/>
           </a:ln>
         </p:spPr>
         <p:style>
@@ -4619,14 +5412,14 @@
       </p:sp>
       <p:sp>
         <p:nvSpPr>
-          <p:cNvPr id="10" name="TextBox 9"/>
+          <p:cNvPr id="14" name="TextBox 13"/>
           <p:cNvSpPr txBox="1"/>
           <p:nvPr/>
         </p:nvSpPr>
         <p:spPr>
           <a:xfrm>
-            <a:off x="8430768" y="1115568"/>
-            <a:ext cx="3419856" cy="256032"/>
+            <a:off x="5742432" y="2304288"/>
+            <a:ext cx="6108192" cy="237744"/>
           </a:xfrm>
           <a:prstGeom prst="rect">
             <a:avLst/>
@@ -4651,21 +5444,45 @@
                 </a:solidFill>
                 <a:latin typeface="Calibri"/>
               </a:rPr>
-              <a:t>JULIO · último mes cerrado</a:t>
-            </a:r>
-          </a:p>
-        </p:txBody>
-      </p:sp>
-      <p:sp>
-        <p:nvSpPr>
-          <p:cNvPr id="11" name="TextBox 10"/>
+              <a:t>ESTANQUE SUR — m³/día y costo evitado</a:t>
+            </a:r>
+          </a:p>
+        </p:txBody>
+      </p:sp>
+      <p:pic>
+        <p:nvPicPr>
+          <p:cNvPr id="15" name="Picture 14" descr="mae_sur_diario_presostatos.png"/>
+          <p:cNvPicPr>
+            <a:picLocks noChangeAspect="1"/>
+          </p:cNvPicPr>
+          <p:nvPr/>
+        </p:nvPicPr>
+        <p:blipFill>
+          <a:blip r:embed="rId4"/>
+          <a:stretch>
+            <a:fillRect/>
+          </a:stretch>
+        </p:blipFill>
+        <p:spPr>
+          <a:xfrm>
+            <a:off x="5742432" y="2560320"/>
+            <a:ext cx="6108192" cy="2926080"/>
+          </a:xfrm>
+          <a:prstGeom prst="rect">
+            <a:avLst/>
+          </a:prstGeom>
+        </p:spPr>
+      </p:pic>
+      <p:sp>
+        <p:nvSpPr>
+          <p:cNvPr id="16" name="TextBox 15"/>
           <p:cNvSpPr txBox="1"/>
           <p:nvPr/>
         </p:nvSpPr>
         <p:spPr>
           <a:xfrm>
-            <a:off x="8430768" y="1371600"/>
-            <a:ext cx="3419856" cy="566928"/>
+            <a:off x="256032" y="5742432"/>
+            <a:ext cx="11704320" cy="1024128"/>
           </a:xfrm>
           <a:prstGeom prst="rect">
             <a:avLst/>
@@ -4684,85 +5501,15 @@
               </a:spcAft>
             </a:pPr>
             <a:r>
-              <a:rPr sz="1300" b="0">
-                <a:solidFill>
-                  <a:srgbClr val="5A5A5A"/>
+              <a:rPr sz="1200" b="0">
+                <a:solidFill>
+                  <a:srgbClr val="0D3B66"/>
                 </a:solidFill>
                 <a:latin typeface="Calibri"/>
               </a:rPr>
-              <a:t>El recinto sumó 3.074 m³. Peso de cada equipo en el total:</a:t>
-            </a:r>
-          </a:p>
-        </p:txBody>
-      </p:sp>
-      <p:sp>
-        <p:nvSpPr>
-          <p:cNvPr id="12" name="Rounded Rectangle 11"/>
-          <p:cNvSpPr/>
-          <p:nvPr/>
-        </p:nvSpPr>
-        <p:spPr>
-          <a:xfrm>
-            <a:off x="8430768" y="2011680"/>
-            <a:ext cx="3419856" cy="804672"/>
-          </a:xfrm>
-          <a:prstGeom prst="roundRect">
-            <a:avLst>
-              <a:gd name="adj" fmla="val 8000"/>
-            </a:avLst>
-          </a:prstGeom>
-          <a:solidFill>
-            <a:srgbClr val="F5F7FA"/>
-          </a:solidFill>
-          <a:ln w="6350">
-            <a:solidFill>
-              <a:srgbClr val="C45C26"/>
-            </a:solidFill>
-          </a:ln>
-        </p:spPr>
-        <p:style>
-          <a:lnRef idx="1">
-            <a:schemeClr val="accent1"/>
-          </a:lnRef>
-          <a:fillRef idx="3">
-            <a:schemeClr val="accent1"/>
-          </a:fillRef>
-          <a:effectRef idx="2">
-            <a:schemeClr val="accent1"/>
-          </a:effectRef>
-          <a:fontRef idx="minor">
-            <a:schemeClr val="lt1"/>
-          </a:fontRef>
-        </p:style>
-        <p:txBody>
-          <a:bodyPr rtlCol="0" anchor="ctr"/>
-          <a:lstStyle/>
-          <a:p>
-            <a:pPr algn="ctr"/>
-          </a:p>
-        </p:txBody>
-      </p:sp>
-      <p:sp>
-        <p:nvSpPr>
-          <p:cNvPr id="13" name="TextBox 12"/>
-          <p:cNvSpPr txBox="1"/>
-          <p:nvPr/>
-        </p:nvSpPr>
-        <p:spPr>
-          <a:xfrm>
-            <a:off x="8558784" y="2084832"/>
-            <a:ext cx="3163824" cy="256032"/>
-          </a:xfrm>
-          <a:prstGeom prst="rect">
-            <a:avLst/>
-          </a:prstGeom>
-          <a:noFill/>
-        </p:spPr>
-        <p:txBody>
-          <a:bodyPr wrap="square">
-            <a:spAutoFit/>
-          </a:bodyPr>
-          <a:lstStyle/>
+              <a:t>Estanque Norte (control 05/08): noche típica 4,8 → 1,1 m³. Ahorro 3,7 m³/noche ($5.194/noche · $155.820/mes). En 13 noches: 48 m³ = $67.522 (tarifa $1.400/m³).</a:t>
+            </a:r>
+          </a:p>
           <a:p>
             <a:pPr algn="l">
               <a:spcAft>
@@ -4770,38 +5517,15 @@
               </a:spcAft>
             </a:pPr>
             <a:r>
-              <a:rPr sz="1300" b="1">
-                <a:solidFill>
-                  <a:srgbClr val="C45C26"/>
+              <a:rPr sz="1200" b="0">
+                <a:solidFill>
+                  <a:srgbClr val="0D3B66"/>
                 </a:solidFill>
                 <a:latin typeface="Calibri"/>
               </a:rPr>
-              <a:t>Pizza Hut</a:t>
-            </a:r>
-          </a:p>
-        </p:txBody>
-      </p:sp>
-      <p:sp>
-        <p:nvSpPr>
-          <p:cNvPr id="14" name="TextBox 13"/>
-          <p:cNvSpPr txBox="1"/>
-          <p:nvPr/>
-        </p:nvSpPr>
-        <p:spPr>
-          <a:xfrm>
-            <a:off x="8558784" y="2359152"/>
-            <a:ext cx="3163824" cy="365760"/>
-          </a:xfrm>
-          <a:prstGeom prst="rect">
-            <a:avLst/>
-          </a:prstGeom>
-          <a:noFill/>
-        </p:spPr>
-        <p:txBody>
-          <a:bodyPr wrap="square">
-            <a:spAutoFit/>
-          </a:bodyPr>
-          <a:lstStyle/>
+              <a:t>Pizza Hut (control 01/07): noche típica 0,1 → 0 m³.</a:t>
+            </a:r>
+          </a:p>
           <a:p>
             <a:pPr algn="l">
               <a:spcAft>
@@ -4809,85 +5533,15 @@
               </a:spcAft>
             </a:pPr>
             <a:r>
-              <a:rPr sz="1800" b="1">
+              <a:rPr sz="1200" b="0">
                 <a:solidFill>
                   <a:srgbClr val="0D3B66"/>
                 </a:solidFill>
                 <a:latin typeface="Calibri"/>
               </a:rPr>
-              <a:t>1.169 m³    38 %</a:t>
-            </a:r>
-          </a:p>
-        </p:txBody>
-      </p:sp>
-      <p:sp>
-        <p:nvSpPr>
-          <p:cNvPr id="15" name="Rounded Rectangle 14"/>
-          <p:cNvSpPr/>
-          <p:nvPr/>
-        </p:nvSpPr>
-        <p:spPr>
-          <a:xfrm>
-            <a:off x="8430768" y="2889504"/>
-            <a:ext cx="3419856" cy="804672"/>
-          </a:xfrm>
-          <a:prstGeom prst="roundRect">
-            <a:avLst>
-              <a:gd name="adj" fmla="val 8000"/>
-            </a:avLst>
-          </a:prstGeom>
-          <a:solidFill>
-            <a:srgbClr val="F5F7FA"/>
-          </a:solidFill>
-          <a:ln w="6350">
-            <a:solidFill>
-              <a:srgbClr val="0D3B66"/>
-            </a:solidFill>
-          </a:ln>
-        </p:spPr>
-        <p:style>
-          <a:lnRef idx="1">
-            <a:schemeClr val="accent1"/>
-          </a:lnRef>
-          <a:fillRef idx="3">
-            <a:schemeClr val="accent1"/>
-          </a:fillRef>
-          <a:effectRef idx="2">
-            <a:schemeClr val="accent1"/>
-          </a:effectRef>
-          <a:fontRef idx="minor">
-            <a:schemeClr val="lt1"/>
-          </a:fontRef>
-        </p:style>
-        <p:txBody>
-          <a:bodyPr rtlCol="0" anchor="ctr"/>
-          <a:lstStyle/>
-          <a:p>
-            <a:pPr algn="ctr"/>
-          </a:p>
-        </p:txBody>
-      </p:sp>
-      <p:sp>
-        <p:nvSpPr>
-          <p:cNvPr id="16" name="TextBox 15"/>
-          <p:cNvSpPr txBox="1"/>
-          <p:nvPr/>
-        </p:nvSpPr>
-        <p:spPr>
-          <a:xfrm>
-            <a:off x="8558784" y="2962656"/>
-            <a:ext cx="3163824" cy="256032"/>
-          </a:xfrm>
-          <a:prstGeom prst="rect">
-            <a:avLst/>
-          </a:prstGeom>
-          <a:noFill/>
-        </p:spPr>
-        <p:txBody>
-          <a:bodyPr wrap="square">
-            <a:spAutoFit/>
-          </a:bodyPr>
-          <a:lstStyle/>
+              <a:t>Estanque Sur: corte on/off a cargo de mantención nocturna.</a:t>
+            </a:r>
+          </a:p>
           <a:p>
             <a:pPr algn="l">
               <a:spcAft>
@@ -4895,357 +5549,13 @@
               </a:spcAft>
             </a:pPr>
             <a:r>
-              <a:rPr sz="1300" b="1">
+              <a:rPr sz="1200" b="0">
                 <a:solidFill>
                   <a:srgbClr val="0D3B66"/>
                 </a:solidFill>
                 <a:latin typeface="Calibri"/>
               </a:rPr>
-              <a:t>Estanque Norte</a:t>
-            </a:r>
-          </a:p>
-        </p:txBody>
-      </p:sp>
-      <p:sp>
-        <p:nvSpPr>
-          <p:cNvPr id="17" name="TextBox 16"/>
-          <p:cNvSpPr txBox="1"/>
-          <p:nvPr/>
-        </p:nvSpPr>
-        <p:spPr>
-          <a:xfrm>
-            <a:off x="8558784" y="3236976"/>
-            <a:ext cx="3163824" cy="365760"/>
-          </a:xfrm>
-          <a:prstGeom prst="rect">
-            <a:avLst/>
-          </a:prstGeom>
-          <a:noFill/>
-        </p:spPr>
-        <p:txBody>
-          <a:bodyPr wrap="square">
-            <a:spAutoFit/>
-          </a:bodyPr>
-          <a:lstStyle/>
-          <a:p>
-            <a:pPr algn="l">
-              <a:spcAft>
-                <a:spcPts val="300"/>
-              </a:spcAft>
-            </a:pPr>
-            <a:r>
-              <a:rPr sz="1800" b="1">
-                <a:solidFill>
-                  <a:srgbClr val="0D3B66"/>
-                </a:solidFill>
-                <a:latin typeface="Calibri"/>
-              </a:rPr>
-              <a:t>886 m³    29 %</a:t>
-            </a:r>
-          </a:p>
-        </p:txBody>
-      </p:sp>
-      <p:sp>
-        <p:nvSpPr>
-          <p:cNvPr id="18" name="Rounded Rectangle 17"/>
-          <p:cNvSpPr/>
-          <p:nvPr/>
-        </p:nvSpPr>
-        <p:spPr>
-          <a:xfrm>
-            <a:off x="8430768" y="3767328"/>
-            <a:ext cx="3419856" cy="804672"/>
-          </a:xfrm>
-          <a:prstGeom prst="roundRect">
-            <a:avLst>
-              <a:gd name="adj" fmla="val 8000"/>
-            </a:avLst>
-          </a:prstGeom>
-          <a:solidFill>
-            <a:srgbClr val="F5F7FA"/>
-          </a:solidFill>
-          <a:ln w="6350">
-            <a:solidFill>
-              <a:srgbClr val="1F77B4"/>
-            </a:solidFill>
-          </a:ln>
-        </p:spPr>
-        <p:style>
-          <a:lnRef idx="1">
-            <a:schemeClr val="accent1"/>
-          </a:lnRef>
-          <a:fillRef idx="3">
-            <a:schemeClr val="accent1"/>
-          </a:fillRef>
-          <a:effectRef idx="2">
-            <a:schemeClr val="accent1"/>
-          </a:effectRef>
-          <a:fontRef idx="minor">
-            <a:schemeClr val="lt1"/>
-          </a:fontRef>
-        </p:style>
-        <p:txBody>
-          <a:bodyPr rtlCol="0" anchor="ctr"/>
-          <a:lstStyle/>
-          <a:p>
-            <a:pPr algn="ctr"/>
-          </a:p>
-        </p:txBody>
-      </p:sp>
-      <p:sp>
-        <p:nvSpPr>
-          <p:cNvPr id="19" name="TextBox 18"/>
-          <p:cNvSpPr txBox="1"/>
-          <p:nvPr/>
-        </p:nvSpPr>
-        <p:spPr>
-          <a:xfrm>
-            <a:off x="8558784" y="3840480"/>
-            <a:ext cx="3163824" cy="256032"/>
-          </a:xfrm>
-          <a:prstGeom prst="rect">
-            <a:avLst/>
-          </a:prstGeom>
-          <a:noFill/>
-        </p:spPr>
-        <p:txBody>
-          <a:bodyPr wrap="square">
-            <a:spAutoFit/>
-          </a:bodyPr>
-          <a:lstStyle/>
-          <a:p>
-            <a:pPr algn="l">
-              <a:spcAft>
-                <a:spcPts val="300"/>
-              </a:spcAft>
-            </a:pPr>
-            <a:r>
-              <a:rPr sz="1300" b="1">
-                <a:solidFill>
-                  <a:srgbClr val="1F77B4"/>
-                </a:solidFill>
-                <a:latin typeface="Calibri"/>
-              </a:rPr>
-              <a:t>Estanque Sur</a:t>
-            </a:r>
-          </a:p>
-        </p:txBody>
-      </p:sp>
-      <p:sp>
-        <p:nvSpPr>
-          <p:cNvPr id="20" name="TextBox 19"/>
-          <p:cNvSpPr txBox="1"/>
-          <p:nvPr/>
-        </p:nvSpPr>
-        <p:spPr>
-          <a:xfrm>
-            <a:off x="8558784" y="4114800"/>
-            <a:ext cx="3163824" cy="365760"/>
-          </a:xfrm>
-          <a:prstGeom prst="rect">
-            <a:avLst/>
-          </a:prstGeom>
-          <a:noFill/>
-        </p:spPr>
-        <p:txBody>
-          <a:bodyPr wrap="square">
-            <a:spAutoFit/>
-          </a:bodyPr>
-          <a:lstStyle/>
-          <a:p>
-            <a:pPr algn="l">
-              <a:spcAft>
-                <a:spcPts val="300"/>
-              </a:spcAft>
-            </a:pPr>
-            <a:r>
-              <a:rPr sz="1800" b="1">
-                <a:solidFill>
-                  <a:srgbClr val="0D3B66"/>
-                </a:solidFill>
-                <a:latin typeface="Calibri"/>
-              </a:rPr>
-              <a:t>802 m³    26 %</a:t>
-            </a:r>
-          </a:p>
-        </p:txBody>
-      </p:sp>
-      <p:sp>
-        <p:nvSpPr>
-          <p:cNvPr id="21" name="Rounded Rectangle 20"/>
-          <p:cNvSpPr/>
-          <p:nvPr/>
-        </p:nvSpPr>
-        <p:spPr>
-          <a:xfrm>
-            <a:off x="8430768" y="4645152"/>
-            <a:ext cx="3419856" cy="804672"/>
-          </a:xfrm>
-          <a:prstGeom prst="roundRect">
-            <a:avLst>
-              <a:gd name="adj" fmla="val 8000"/>
-            </a:avLst>
-          </a:prstGeom>
-          <a:solidFill>
-            <a:srgbClr val="F5F7FA"/>
-          </a:solidFill>
-          <a:ln w="6350">
-            <a:solidFill>
-              <a:srgbClr val="7BA3C9"/>
-            </a:solidFill>
-          </a:ln>
-        </p:spPr>
-        <p:style>
-          <a:lnRef idx="1">
-            <a:schemeClr val="accent1"/>
-          </a:lnRef>
-          <a:fillRef idx="3">
-            <a:schemeClr val="accent1"/>
-          </a:fillRef>
-          <a:effectRef idx="2">
-            <a:schemeClr val="accent1"/>
-          </a:effectRef>
-          <a:fontRef idx="minor">
-            <a:schemeClr val="lt1"/>
-          </a:fontRef>
-        </p:style>
-        <p:txBody>
-          <a:bodyPr rtlCol="0" anchor="ctr"/>
-          <a:lstStyle/>
-          <a:p>
-            <a:pPr algn="ctr"/>
-          </a:p>
-        </p:txBody>
-      </p:sp>
-      <p:sp>
-        <p:nvSpPr>
-          <p:cNvPr id="22" name="TextBox 21"/>
-          <p:cNvSpPr txBox="1"/>
-          <p:nvPr/>
-        </p:nvSpPr>
-        <p:spPr>
-          <a:xfrm>
-            <a:off x="8558784" y="4718304"/>
-            <a:ext cx="3163824" cy="256032"/>
-          </a:xfrm>
-          <a:prstGeom prst="rect">
-            <a:avLst/>
-          </a:prstGeom>
-          <a:noFill/>
-        </p:spPr>
-        <p:txBody>
-          <a:bodyPr wrap="square">
-            <a:spAutoFit/>
-          </a:bodyPr>
-          <a:lstStyle/>
-          <a:p>
-            <a:pPr algn="l">
-              <a:spcAft>
-                <a:spcPts val="300"/>
-              </a:spcAft>
-            </a:pPr>
-            <a:r>
-              <a:rPr sz="1300" b="1">
-                <a:solidFill>
-                  <a:srgbClr val="7BA3C9"/>
-                </a:solidFill>
-                <a:latin typeface="Calibri"/>
-              </a:rPr>
-              <a:t>Baños Públicos</a:t>
-            </a:r>
-          </a:p>
-        </p:txBody>
-      </p:sp>
-      <p:sp>
-        <p:nvSpPr>
-          <p:cNvPr id="23" name="TextBox 22"/>
-          <p:cNvSpPr txBox="1"/>
-          <p:nvPr/>
-        </p:nvSpPr>
-        <p:spPr>
-          <a:xfrm>
-            <a:off x="8558784" y="4992624"/>
-            <a:ext cx="3163824" cy="365760"/>
-          </a:xfrm>
-          <a:prstGeom prst="rect">
-            <a:avLst/>
-          </a:prstGeom>
-          <a:noFill/>
-        </p:spPr>
-        <p:txBody>
-          <a:bodyPr wrap="square">
-            <a:spAutoFit/>
-          </a:bodyPr>
-          <a:lstStyle/>
-          <a:p>
-            <a:pPr algn="l">
-              <a:spcAft>
-                <a:spcPts val="300"/>
-              </a:spcAft>
-            </a:pPr>
-            <a:r>
-              <a:rPr sz="1800" b="1">
-                <a:solidFill>
-                  <a:srgbClr val="0D3B66"/>
-                </a:solidFill>
-                <a:latin typeface="Calibri"/>
-              </a:rPr>
-              <a:t>217 m³    7 %</a:t>
-            </a:r>
-          </a:p>
-        </p:txBody>
-      </p:sp>
-      <p:sp>
-        <p:nvSpPr>
-          <p:cNvPr id="24" name="TextBox 23"/>
-          <p:cNvSpPr txBox="1"/>
-          <p:nvPr/>
-        </p:nvSpPr>
-        <p:spPr>
-          <a:xfrm>
-            <a:off x="256032" y="5742432"/>
-            <a:ext cx="11887200" cy="960120"/>
-          </a:xfrm>
-          <a:prstGeom prst="rect">
-            <a:avLst/>
-          </a:prstGeom>
-          <a:noFill/>
-        </p:spPr>
-        <p:txBody>
-          <a:bodyPr wrap="square">
-            <a:spAutoFit/>
-          </a:bodyPr>
-          <a:lstStyle/>
-          <a:p>
-            <a:pPr algn="l">
-              <a:spcAft>
-                <a:spcPts val="300"/>
-              </a:spcAft>
-            </a:pPr>
-            <a:r>
-              <a:rPr sz="1300" b="0">
-                <a:solidFill>
-                  <a:srgbClr val="0D3B66"/>
-                </a:solidFill>
-                <a:latin typeface="Calibri"/>
-              </a:rPr>
-              <a:t>Mayo 5.107 m³   ·   Junio 3.179 m³   ·   Julio 3.074 m³   ·   Agosto 1–17: 1.701 m³   ·   Proyección agosto: 3.101 m³ (100 m³/día × 31).</a:t>
-            </a:r>
-          </a:p>
-          <a:p>
-            <a:pPr algn="l">
-              <a:spcAft>
-                <a:spcPts val="300"/>
-              </a:spcAft>
-            </a:pPr>
-            <a:r>
-              <a:rPr sz="1200" b="0">
-                <a:solidFill>
-                  <a:srgbClr val="5A5A5A"/>
-                </a:solidFill>
-                <a:latin typeface="Calibri"/>
-              </a:rPr>
-              <a:t>Dorado = lo que agosto ya lleva. Tramo claro = proyección del resto del mes. Mayo cierra más alto por Estanque Sur, antes de la reparación del 10/06.</a:t>
+              <a:t>Baños Guardias: control instalado; no está solicitado el uso.</a:t>
             </a:r>
           </a:p>
         </p:txBody>
@@ -5259,640 +5569,6 @@
 </file>
 
 <file path=ppt/slides/slide4.xml><?xml version="1.0" encoding="utf-8"?>
-<p:sld xmlns:a="http://schemas.openxmlformats.org/drawingml/2006/main" xmlns:p="http://schemas.openxmlformats.org/presentationml/2006/main" xmlns:r="http://schemas.openxmlformats.org/officeDocument/2006/relationships">
-  <p:cSld>
-    <p:spTree>
-      <p:nvGrpSpPr>
-        <p:cNvPr id="1" name=""/>
-        <p:cNvGrpSpPr/>
-        <p:nvPr/>
-      </p:nvGrpSpPr>
-      <p:grpSpPr/>
-      <p:sp>
-        <p:nvSpPr>
-          <p:cNvPr id="2" name="Rectangle 1"/>
-          <p:cNvSpPr/>
-          <p:nvPr/>
-        </p:nvSpPr>
-        <p:spPr>
-          <a:xfrm>
-            <a:off x="0" y="0"/>
-            <a:ext cx="12191695" cy="841248"/>
-          </a:xfrm>
-          <a:prstGeom prst="rect">
-            <a:avLst/>
-          </a:prstGeom>
-          <a:solidFill>
-            <a:srgbClr val="0D3B66"/>
-          </a:solidFill>
-          <a:ln>
-            <a:noFill/>
-          </a:ln>
-        </p:spPr>
-        <p:style>
-          <a:lnRef idx="1">
-            <a:schemeClr val="accent1"/>
-          </a:lnRef>
-          <a:fillRef idx="3">
-            <a:schemeClr val="accent1"/>
-          </a:fillRef>
-          <a:effectRef idx="2">
-            <a:schemeClr val="accent1"/>
-          </a:effectRef>
-          <a:fontRef idx="minor">
-            <a:schemeClr val="lt1"/>
-          </a:fontRef>
-        </p:style>
-        <p:txBody>
-          <a:bodyPr rtlCol="0" anchor="ctr"/>
-          <a:lstStyle/>
-          <a:p>
-            <a:pPr algn="ctr"/>
-          </a:p>
-        </p:txBody>
-      </p:sp>
-      <p:sp>
-        <p:nvSpPr>
-          <p:cNvPr id="3" name="Rectangle 2"/>
-          <p:cNvSpPr/>
-          <p:nvPr/>
-        </p:nvSpPr>
-        <p:spPr>
-          <a:xfrm>
-            <a:off x="0" y="841248"/>
-            <a:ext cx="12191695" cy="54864"/>
-          </a:xfrm>
-          <a:prstGeom prst="rect">
-            <a:avLst/>
-          </a:prstGeom>
-          <a:solidFill>
-            <a:srgbClr val="C9A227"/>
-          </a:solidFill>
-          <a:ln>
-            <a:noFill/>
-          </a:ln>
-        </p:spPr>
-        <p:style>
-          <a:lnRef idx="1">
-            <a:schemeClr val="accent1"/>
-          </a:lnRef>
-          <a:fillRef idx="3">
-            <a:schemeClr val="accent1"/>
-          </a:fillRef>
-          <a:effectRef idx="2">
-            <a:schemeClr val="accent1"/>
-          </a:effectRef>
-          <a:fontRef idx="minor">
-            <a:schemeClr val="lt1"/>
-          </a:fontRef>
-        </p:style>
-        <p:txBody>
-          <a:bodyPr rtlCol="0" anchor="ctr"/>
-          <a:lstStyle/>
-          <a:p>
-            <a:pPr algn="ctr"/>
-          </a:p>
-        </p:txBody>
-      </p:sp>
-      <p:pic>
-        <p:nvPicPr>
-          <p:cNvPr id="4" name="Picture 3" descr="logo wes.bmp"/>
-          <p:cNvPicPr>
-            <a:picLocks noChangeAspect="1"/>
-          </p:cNvPicPr>
-          <p:nvPr/>
-        </p:nvPicPr>
-        <p:blipFill>
-          <a:blip r:embed="rId2"/>
-          <a:stretch>
-            <a:fillRect/>
-          </a:stretch>
-        </p:blipFill>
-        <p:spPr>
-          <a:xfrm>
-            <a:off x="10835640" y="146304"/>
-            <a:ext cx="1143000" cy="253401"/>
-          </a:xfrm>
-          <a:prstGeom prst="rect">
-            <a:avLst/>
-          </a:prstGeom>
-        </p:spPr>
-      </p:pic>
-      <p:sp>
-        <p:nvSpPr>
-          <p:cNvPr id="5" name="TextBox 4"/>
-          <p:cNvSpPr txBox="1"/>
-          <p:nvPr/>
-        </p:nvSpPr>
-        <p:spPr>
-          <a:xfrm>
-            <a:off x="256032" y="109728"/>
-            <a:ext cx="10607040" cy="384048"/>
-          </a:xfrm>
-          <a:prstGeom prst="rect">
-            <a:avLst/>
-          </a:prstGeom>
-          <a:noFill/>
-        </p:spPr>
-        <p:txBody>
-          <a:bodyPr wrap="square">
-            <a:spAutoFit/>
-          </a:bodyPr>
-          <a:lstStyle/>
-          <a:p>
-            <a:pPr algn="l">
-              <a:spcAft>
-                <a:spcPts val="300"/>
-              </a:spcAft>
-            </a:pPr>
-            <a:r>
-              <a:rPr sz="2000" b="1">
-                <a:solidFill>
-                  <a:srgbClr val="FFFFFF"/>
-                </a:solidFill>
-                <a:latin typeface="Calibri"/>
-              </a:rPr>
-              <a:t>MAE  ·  3. Hallazgos</a:t>
-            </a:r>
-          </a:p>
-        </p:txBody>
-      </p:sp>
-      <p:sp>
-        <p:nvSpPr>
-          <p:cNvPr id="6" name="TextBox 5"/>
-          <p:cNvSpPr txBox="1"/>
-          <p:nvPr/>
-        </p:nvSpPr>
-        <p:spPr>
-          <a:xfrm>
-            <a:off x="256032" y="457200"/>
-            <a:ext cx="10607040" cy="329184"/>
-          </a:xfrm>
-          <a:prstGeom prst="rect">
-            <a:avLst/>
-          </a:prstGeom>
-          <a:noFill/>
-        </p:spPr>
-        <p:txBody>
-          <a:bodyPr wrap="square">
-            <a:spAutoFit/>
-          </a:bodyPr>
-          <a:lstStyle/>
-          <a:p>
-            <a:pPr algn="l">
-              <a:spcAft>
-                <a:spcPts val="300"/>
-              </a:spcAft>
-            </a:pPr>
-            <a:r>
-              <a:rPr sz="1100" b="0">
-                <a:solidFill>
-                  <a:srgbClr val="DCE6F0"/>
-                </a:solidFill>
-                <a:latin typeface="Calibri"/>
-              </a:rPr>
-              <a:t>Estanque Sur: reparación de presostatos (10/06)  ·  Estanque Norte: control nocturno</a:t>
-            </a:r>
-          </a:p>
-        </p:txBody>
-      </p:sp>
-      <p:sp>
-        <p:nvSpPr>
-          <p:cNvPr id="7" name="Rounded Rectangle 6"/>
-          <p:cNvSpPr/>
-          <p:nvPr/>
-        </p:nvSpPr>
-        <p:spPr>
-          <a:xfrm>
-            <a:off x="201168" y="987552"/>
-            <a:ext cx="11777472" cy="1170432"/>
-          </a:xfrm>
-          <a:prstGeom prst="roundRect">
-            <a:avLst>
-              <a:gd name="adj" fmla="val 8000"/>
-            </a:avLst>
-          </a:prstGeom>
-          <a:solidFill>
-            <a:srgbClr val="FFF9EB"/>
-          </a:solidFill>
-          <a:ln w="6350">
-            <a:solidFill>
-              <a:srgbClr val="C9A227"/>
-            </a:solidFill>
-          </a:ln>
-        </p:spPr>
-        <p:style>
-          <a:lnRef idx="1">
-            <a:schemeClr val="accent1"/>
-          </a:lnRef>
-          <a:fillRef idx="3">
-            <a:schemeClr val="accent1"/>
-          </a:fillRef>
-          <a:effectRef idx="2">
-            <a:schemeClr val="accent1"/>
-          </a:effectRef>
-          <a:fontRef idx="minor">
-            <a:schemeClr val="lt1"/>
-          </a:fontRef>
-        </p:style>
-        <p:txBody>
-          <a:bodyPr rtlCol="0" anchor="ctr"/>
-          <a:lstStyle/>
-          <a:p>
-            <a:pPr algn="ctr"/>
-          </a:p>
-        </p:txBody>
-      </p:sp>
-      <p:sp>
-        <p:nvSpPr>
-          <p:cNvPr id="8" name="TextBox 7"/>
-          <p:cNvSpPr txBox="1"/>
-          <p:nvPr/>
-        </p:nvSpPr>
-        <p:spPr>
-          <a:xfrm>
-            <a:off x="365760" y="1042415"/>
-            <a:ext cx="11475720" cy="237744"/>
-          </a:xfrm>
-          <a:prstGeom prst="rect">
-            <a:avLst/>
-          </a:prstGeom>
-          <a:noFill/>
-        </p:spPr>
-        <p:txBody>
-          <a:bodyPr wrap="square">
-            <a:spAutoFit/>
-          </a:bodyPr>
-          <a:lstStyle/>
-          <a:p>
-            <a:pPr algn="l">
-              <a:spcAft>
-                <a:spcPts val="300"/>
-              </a:spcAft>
-            </a:pPr>
-            <a:r>
-              <a:rPr sz="1100" b="1">
-                <a:solidFill>
-                  <a:srgbClr val="C9A227"/>
-                </a:solidFill>
-                <a:latin typeface="Calibri"/>
-              </a:rPr>
-              <a:t>ESTANQUE SUR  ·  PRESÓSTATOS</a:t>
-            </a:r>
-          </a:p>
-        </p:txBody>
-      </p:sp>
-      <p:sp>
-        <p:nvSpPr>
-          <p:cNvPr id="9" name="TextBox 8"/>
-          <p:cNvSpPr txBox="1"/>
-          <p:nvPr/>
-        </p:nvSpPr>
-        <p:spPr>
-          <a:xfrm>
-            <a:off x="365760" y="1280160"/>
-            <a:ext cx="11475720" cy="804672"/>
-          </a:xfrm>
-          <a:prstGeom prst="rect">
-            <a:avLst/>
-          </a:prstGeom>
-          <a:noFill/>
-        </p:spPr>
-        <p:txBody>
-          <a:bodyPr wrap="square">
-            <a:spAutoFit/>
-          </a:bodyPr>
-          <a:lstStyle/>
-          <a:p>
-            <a:pPr algn="l">
-              <a:spcAft>
-                <a:spcPts val="300"/>
-              </a:spcAft>
-            </a:pPr>
-            <a:r>
-              <a:rPr sz="1200" b="0">
-                <a:solidFill>
-                  <a:srgbClr val="0D3B66"/>
-                </a:solidFill>
-                <a:latin typeface="Calibri"/>
-              </a:rPr>
-              <a:t>El 10/06 se repararon los presostatos. El estanque venía en 89 m³/día (mayo–9/jun) y ese día ya marca 39 m³. Desde el 11/06 se sostiene en 28 m³/día (−61 m³/día, 68%). A $1.400/m³: $84.897/día  ·  $2.546.923/mes  ·  acumulado 11/06–17/08: $5.688.128 (4.063 m³ en 67 días).</a:t>
-            </a:r>
-          </a:p>
-        </p:txBody>
-      </p:sp>
-      <p:sp>
-        <p:nvSpPr>
-          <p:cNvPr id="10" name="Rounded Rectangle 9"/>
-          <p:cNvSpPr/>
-          <p:nvPr/>
-        </p:nvSpPr>
-        <p:spPr>
-          <a:xfrm>
-            <a:off x="201168" y="2249424"/>
-            <a:ext cx="5285232" cy="3456432"/>
-          </a:xfrm>
-          <a:prstGeom prst="roundRect">
-            <a:avLst>
-              <a:gd name="adj" fmla="val 8000"/>
-            </a:avLst>
-          </a:prstGeom>
-          <a:solidFill>
-            <a:srgbClr val="F5F7FA"/>
-          </a:solidFill>
-          <a:ln>
-            <a:noFill/>
-          </a:ln>
-        </p:spPr>
-        <p:style>
-          <a:lnRef idx="1">
-            <a:schemeClr val="accent1"/>
-          </a:lnRef>
-          <a:fillRef idx="3">
-            <a:schemeClr val="accent1"/>
-          </a:fillRef>
-          <a:effectRef idx="2">
-            <a:schemeClr val="accent1"/>
-          </a:effectRef>
-          <a:fontRef idx="minor">
-            <a:schemeClr val="lt1"/>
-          </a:fontRef>
-        </p:style>
-        <p:txBody>
-          <a:bodyPr rtlCol="0" anchor="ctr"/>
-          <a:lstStyle/>
-          <a:p>
-            <a:pPr algn="ctr"/>
-          </a:p>
-        </p:txBody>
-      </p:sp>
-      <p:sp>
-        <p:nvSpPr>
-          <p:cNvPr id="11" name="TextBox 10"/>
-          <p:cNvSpPr txBox="1"/>
-          <p:nvPr/>
-        </p:nvSpPr>
-        <p:spPr>
-          <a:xfrm>
-            <a:off x="329184" y="2304288"/>
-            <a:ext cx="5029200" cy="237744"/>
-          </a:xfrm>
-          <a:prstGeom prst="rect">
-            <a:avLst/>
-          </a:prstGeom>
-          <a:noFill/>
-        </p:spPr>
-        <p:txBody>
-          <a:bodyPr wrap="square">
-            <a:spAutoFit/>
-          </a:bodyPr>
-          <a:lstStyle/>
-          <a:p>
-            <a:pPr algn="l">
-              <a:spcAft>
-                <a:spcPts val="300"/>
-              </a:spcAft>
-            </a:pPr>
-            <a:r>
-              <a:rPr sz="1100" b="1">
-                <a:solidFill>
-                  <a:srgbClr val="1F77B4"/>
-                </a:solidFill>
-                <a:latin typeface="Calibri"/>
-              </a:rPr>
-              <a:t>CONTROLES NOCTURNOS — noche típica antes vs con control</a:t>
-            </a:r>
-          </a:p>
-        </p:txBody>
-      </p:sp>
-      <p:pic>
-        <p:nvPicPr>
-          <p:cNvPr id="12" name="Picture 11" descr="mae_controles_nocturnos.png"/>
-          <p:cNvPicPr>
-            <a:picLocks noChangeAspect="1"/>
-          </p:cNvPicPr>
-          <p:nvPr/>
-        </p:nvPicPr>
-        <p:blipFill>
-          <a:blip r:embed="rId3"/>
-          <a:stretch>
-            <a:fillRect/>
-          </a:stretch>
-        </p:blipFill>
-        <p:spPr>
-          <a:xfrm>
-            <a:off x="329184" y="2560320"/>
-            <a:ext cx="5010912" cy="2926080"/>
-          </a:xfrm>
-          <a:prstGeom prst="rect">
-            <a:avLst/>
-          </a:prstGeom>
-        </p:spPr>
-      </p:pic>
-      <p:sp>
-        <p:nvSpPr>
-          <p:cNvPr id="13" name="Rounded Rectangle 12"/>
-          <p:cNvSpPr/>
-          <p:nvPr/>
-        </p:nvSpPr>
-        <p:spPr>
-          <a:xfrm>
-            <a:off x="5614416" y="2249424"/>
-            <a:ext cx="6364224" cy="3456432"/>
-          </a:xfrm>
-          <a:prstGeom prst="roundRect">
-            <a:avLst>
-              <a:gd name="adj" fmla="val 8000"/>
-            </a:avLst>
-          </a:prstGeom>
-          <a:solidFill>
-            <a:srgbClr val="F5F7FA"/>
-          </a:solidFill>
-          <a:ln>
-            <a:noFill/>
-          </a:ln>
-        </p:spPr>
-        <p:style>
-          <a:lnRef idx="1">
-            <a:schemeClr val="accent1"/>
-          </a:lnRef>
-          <a:fillRef idx="3">
-            <a:schemeClr val="accent1"/>
-          </a:fillRef>
-          <a:effectRef idx="2">
-            <a:schemeClr val="accent1"/>
-          </a:effectRef>
-          <a:fontRef idx="minor">
-            <a:schemeClr val="lt1"/>
-          </a:fontRef>
-        </p:style>
-        <p:txBody>
-          <a:bodyPr rtlCol="0" anchor="ctr"/>
-          <a:lstStyle/>
-          <a:p>
-            <a:pPr algn="ctr"/>
-          </a:p>
-        </p:txBody>
-      </p:sp>
-      <p:sp>
-        <p:nvSpPr>
-          <p:cNvPr id="14" name="TextBox 13"/>
-          <p:cNvSpPr txBox="1"/>
-          <p:nvPr/>
-        </p:nvSpPr>
-        <p:spPr>
-          <a:xfrm>
-            <a:off x="5742432" y="2304288"/>
-            <a:ext cx="6108192" cy="237744"/>
-          </a:xfrm>
-          <a:prstGeom prst="rect">
-            <a:avLst/>
-          </a:prstGeom>
-          <a:noFill/>
-        </p:spPr>
-        <p:txBody>
-          <a:bodyPr wrap="square">
-            <a:spAutoFit/>
-          </a:bodyPr>
-          <a:lstStyle/>
-          <a:p>
-            <a:pPr algn="l">
-              <a:spcAft>
-                <a:spcPts val="300"/>
-              </a:spcAft>
-            </a:pPr>
-            <a:r>
-              <a:rPr sz="1100" b="1">
-                <a:solidFill>
-                  <a:srgbClr val="1F77B4"/>
-                </a:solidFill>
-                <a:latin typeface="Calibri"/>
-              </a:rPr>
-              <a:t>ESTANQUE SUR — m³/día y costo evitado</a:t>
-            </a:r>
-          </a:p>
-        </p:txBody>
-      </p:sp>
-      <p:pic>
-        <p:nvPicPr>
-          <p:cNvPr id="15" name="Picture 14" descr="mae_sur_diario_presostatos.png"/>
-          <p:cNvPicPr>
-            <a:picLocks noChangeAspect="1"/>
-          </p:cNvPicPr>
-          <p:nvPr/>
-        </p:nvPicPr>
-        <p:blipFill>
-          <a:blip r:embed="rId4"/>
-          <a:stretch>
-            <a:fillRect/>
-          </a:stretch>
-        </p:blipFill>
-        <p:spPr>
-          <a:xfrm>
-            <a:off x="5742432" y="2560320"/>
-            <a:ext cx="6108192" cy="2926080"/>
-          </a:xfrm>
-          <a:prstGeom prst="rect">
-            <a:avLst/>
-          </a:prstGeom>
-        </p:spPr>
-      </p:pic>
-      <p:sp>
-        <p:nvSpPr>
-          <p:cNvPr id="16" name="TextBox 15"/>
-          <p:cNvSpPr txBox="1"/>
-          <p:nvPr/>
-        </p:nvSpPr>
-        <p:spPr>
-          <a:xfrm>
-            <a:off x="256032" y="5742432"/>
-            <a:ext cx="11704320" cy="1024128"/>
-          </a:xfrm>
-          <a:prstGeom prst="rect">
-            <a:avLst/>
-          </a:prstGeom>
-          <a:noFill/>
-        </p:spPr>
-        <p:txBody>
-          <a:bodyPr wrap="square">
-            <a:spAutoFit/>
-          </a:bodyPr>
-          <a:lstStyle/>
-          <a:p>
-            <a:pPr algn="l">
-              <a:spcAft>
-                <a:spcPts val="300"/>
-              </a:spcAft>
-            </a:pPr>
-            <a:r>
-              <a:rPr sz="1200" b="0">
-                <a:solidFill>
-                  <a:srgbClr val="0D3B66"/>
-                </a:solidFill>
-                <a:latin typeface="Calibri"/>
-              </a:rPr>
-              <a:t>Estanque Norte (control 05/08): noche típica 4,8 → 1,1 m³. Ahorro 3,7 m³/noche ($5.194/noche · $155.820/mes). En 13 noches: 48 m³ = $67.522 (tarifa $1.400/m³).</a:t>
-            </a:r>
-          </a:p>
-          <a:p>
-            <a:pPr algn="l">
-              <a:spcAft>
-                <a:spcPts val="300"/>
-              </a:spcAft>
-            </a:pPr>
-            <a:r>
-              <a:rPr sz="1200" b="0">
-                <a:solidFill>
-                  <a:srgbClr val="0D3B66"/>
-                </a:solidFill>
-                <a:latin typeface="Calibri"/>
-              </a:rPr>
-              <a:t>Pizza Hut (control 01/07): noche típica 0,1 → 0 m³.</a:t>
-            </a:r>
-          </a:p>
-          <a:p>
-            <a:pPr algn="l">
-              <a:spcAft>
-                <a:spcPts val="300"/>
-              </a:spcAft>
-            </a:pPr>
-            <a:r>
-              <a:rPr sz="1200" b="0">
-                <a:solidFill>
-                  <a:srgbClr val="0D3B66"/>
-                </a:solidFill>
-                <a:latin typeface="Calibri"/>
-              </a:rPr>
-              <a:t>Estanque Sur: corte on/off a cargo de mantención nocturna.</a:t>
-            </a:r>
-          </a:p>
-          <a:p>
-            <a:pPr algn="l">
-              <a:spcAft>
-                <a:spcPts val="300"/>
-              </a:spcAft>
-            </a:pPr>
-            <a:r>
-              <a:rPr sz="1200" b="0">
-                <a:solidFill>
-                  <a:srgbClr val="0D3B66"/>
-                </a:solidFill>
-                <a:latin typeface="Calibri"/>
-              </a:rPr>
-              <a:t>Baños Guardias: control instalado; no está solicitado el uso.</a:t>
-            </a:r>
-          </a:p>
-        </p:txBody>
-      </p:sp>
-    </p:spTree>
-  </p:cSld>
-  <p:clrMapOvr>
-    <a:masterClrMapping/>
-  </p:clrMapOvr>
-</p:sld>
-</file>
-
-<file path=ppt/slides/slide5.xml><?xml version="1.0" encoding="utf-8"?>
 <p:sld xmlns:a="http://schemas.openxmlformats.org/drawingml/2006/main" xmlns:p="http://schemas.openxmlformats.org/presentationml/2006/main" xmlns:r="http://schemas.openxmlformats.org/officeDocument/2006/relationships">
   <p:cSld>
     <p:spTree>

--- a/reports/Parque_Arauco/TMP_7MALLS/entrega_diego_anibal/Recorrido_ejecutivo_PA_MAE_20260817.pptx
+++ b/reports/Parque_Arauco/TMP_7MALLS/entrega_diego_anibal/Recorrido_ejecutivo_PA_MAE_20260817.pptx
@@ -9,6 +9,11 @@
     <p:sldId id="257" r:id="rId8"/>
     <p:sldId id="258" r:id="rId9"/>
     <p:sldId id="259" r:id="rId10"/>
+    <p:sldId id="260" r:id="rId11"/>
+    <p:sldId id="261" r:id="rId12"/>
+    <p:sldId id="262" r:id="rId13"/>
+    <p:sldId id="263" r:id="rId14"/>
+    <p:sldId id="264" r:id="rId15"/>
   </p:sldIdLst>
   <p:sldSz cx="12191695" cy="6858000" type="screen4x3"/>
   <p:notesSz cx="6858000" cy="9144000"/>
@@ -3270,7 +3275,7 @@
                 </a:solidFill>
                 <a:latin typeface="Calibri"/>
               </a:rPr>
-              <a:t>MAE · Estación   ·   MAM · Maipú</a:t>
+              <a:t>Una lámina de presentación por recinto</a:t>
             </a:r>
           </a:p>
           <a:p>
@@ -3302,7 +3307,7 @@
                 </a:solidFill>
                 <a:latin typeface="Calibri"/>
               </a:rPr>
-              <a:t>PPT aparte de las fichas  ·  un tema por lámina</a:t>
+              <a:t>La segunda lámina (hallazgos) la armamos mall por mall</a:t>
             </a:r>
           </a:p>
         </p:txBody>
@@ -3522,7 +3527,7 @@
         <p:spPr>
           <a:xfrm>
             <a:off x="201168" y="1024128"/>
-            <a:ext cx="2866644" cy="658368"/>
+            <a:ext cx="2880360" cy="658368"/>
           </a:xfrm>
           <a:prstGeom prst="roundRect">
             <a:avLst>
@@ -3568,8 +3573,8 @@
         </p:nvSpPr>
         <p:spPr>
           <a:xfrm>
-            <a:off x="310896" y="1060704"/>
-            <a:ext cx="2665475" cy="201168"/>
+            <a:off x="292608" y="1060704"/>
+            <a:ext cx="2715768" cy="182880"/>
           </a:xfrm>
           <a:prstGeom prst="rect">
             <a:avLst/>
@@ -3607,27 +3612,27 @@
         </p:nvSpPr>
         <p:spPr>
           <a:xfrm>
-            <a:off x="310896" y="1261872"/>
-            <a:ext cx="2665475" cy="219456"/>
-          </a:xfrm>
-          <a:prstGeom prst="rect">
-            <a:avLst/>
-          </a:prstGeom>
-          <a:noFill/>
-        </p:spPr>
-        <p:txBody>
-          <a:bodyPr wrap="square">
-            <a:spAutoFit/>
-          </a:bodyPr>
-          <a:lstStyle/>
-          <a:p>
-            <a:pPr algn="l">
-              <a:spcAft>
-                <a:spcPts val="300"/>
-              </a:spcAft>
-            </a:pPr>
-            <a:r>
-              <a:rPr sz="1300" b="1">
+            <a:off x="292608" y="1243584"/>
+            <a:ext cx="2715768" cy="219456"/>
+          </a:xfrm>
+          <a:prstGeom prst="rect">
+            <a:avLst/>
+          </a:prstGeom>
+          <a:noFill/>
+        </p:spPr>
+        <p:txBody>
+          <a:bodyPr wrap="square">
+            <a:spAutoFit/>
+          </a:bodyPr>
+          <a:lstStyle/>
+          <a:p>
+            <a:pPr algn="l">
+              <a:spcAft>
+                <a:spcPts val="300"/>
+              </a:spcAft>
+            </a:pPr>
+            <a:r>
+              <a:rPr sz="1200" b="1">
                 <a:solidFill>
                   <a:srgbClr val="0D3B66"/>
                 </a:solidFill>
@@ -3646,8 +3651,8 @@
         </p:nvSpPr>
         <p:spPr>
           <a:xfrm>
-            <a:off x="310896" y="1463040"/>
-            <a:ext cx="2665475" cy="182880"/>
+            <a:off x="292608" y="1444752"/>
+            <a:ext cx="2715768" cy="164592"/>
           </a:xfrm>
           <a:prstGeom prst="rect">
             <a:avLst/>
@@ -3685,8 +3690,8 @@
         </p:nvSpPr>
         <p:spPr>
           <a:xfrm>
-            <a:off x="3177540" y="1024128"/>
-            <a:ext cx="2866644" cy="658368"/>
+            <a:off x="3172968" y="1024128"/>
+            <a:ext cx="2880360" cy="658368"/>
           </a:xfrm>
           <a:prstGeom prst="roundRect">
             <a:avLst>
@@ -3732,8 +3737,8 @@
         </p:nvSpPr>
         <p:spPr>
           <a:xfrm>
-            <a:off x="3287268" y="1060704"/>
-            <a:ext cx="2665475" cy="201168"/>
+            <a:off x="3264408" y="1060704"/>
+            <a:ext cx="2715768" cy="182880"/>
           </a:xfrm>
           <a:prstGeom prst="rect">
             <a:avLst/>
@@ -3771,27 +3776,27 @@
         </p:nvSpPr>
         <p:spPr>
           <a:xfrm>
-            <a:off x="3287268" y="1261872"/>
-            <a:ext cx="2665475" cy="219456"/>
-          </a:xfrm>
-          <a:prstGeom prst="rect">
-            <a:avLst/>
-          </a:prstGeom>
-          <a:noFill/>
-        </p:spPr>
-        <p:txBody>
-          <a:bodyPr wrap="square">
-            <a:spAutoFit/>
-          </a:bodyPr>
-          <a:lstStyle/>
-          <a:p>
-            <a:pPr algn="l">
-              <a:spcAft>
-                <a:spcPts val="300"/>
-              </a:spcAft>
-            </a:pPr>
-            <a:r>
-              <a:rPr sz="1300" b="1">
+            <a:off x="3264408" y="1243584"/>
+            <a:ext cx="2715768" cy="219456"/>
+          </a:xfrm>
+          <a:prstGeom prst="rect">
+            <a:avLst/>
+          </a:prstGeom>
+          <a:noFill/>
+        </p:spPr>
+        <p:txBody>
+          <a:bodyPr wrap="square">
+            <a:spAutoFit/>
+          </a:bodyPr>
+          <a:lstStyle/>
+          <a:p>
+            <a:pPr algn="l">
+              <a:spcAft>
+                <a:spcPts val="300"/>
+              </a:spcAft>
+            </a:pPr>
+            <a:r>
+              <a:rPr sz="1200" b="1">
                 <a:solidFill>
                   <a:srgbClr val="0D3B66"/>
                 </a:solidFill>
@@ -3810,8 +3815,8 @@
         </p:nvSpPr>
         <p:spPr>
           <a:xfrm>
-            <a:off x="6153912" y="1024128"/>
-            <a:ext cx="2866644" cy="658368"/>
+            <a:off x="6144768" y="1024128"/>
+            <a:ext cx="2880360" cy="658368"/>
           </a:xfrm>
           <a:prstGeom prst="roundRect">
             <a:avLst>
@@ -3857,8 +3862,8 @@
         </p:nvSpPr>
         <p:spPr>
           <a:xfrm>
-            <a:off x="6263640" y="1060704"/>
-            <a:ext cx="2665475" cy="201168"/>
+            <a:off x="6236207" y="1060704"/>
+            <a:ext cx="2715768" cy="182880"/>
           </a:xfrm>
           <a:prstGeom prst="rect">
             <a:avLst/>
@@ -3896,27 +3901,27 @@
         </p:nvSpPr>
         <p:spPr>
           <a:xfrm>
-            <a:off x="6263640" y="1261872"/>
-            <a:ext cx="2665475" cy="219456"/>
-          </a:xfrm>
-          <a:prstGeom prst="rect">
-            <a:avLst/>
-          </a:prstGeom>
-          <a:noFill/>
-        </p:spPr>
-        <p:txBody>
-          <a:bodyPr wrap="square">
-            <a:spAutoFit/>
-          </a:bodyPr>
-          <a:lstStyle/>
-          <a:p>
-            <a:pPr algn="l">
-              <a:spcAft>
-                <a:spcPts val="300"/>
-              </a:spcAft>
-            </a:pPr>
-            <a:r>
-              <a:rPr sz="1300" b="1">
+            <a:off x="6236207" y="1243584"/>
+            <a:ext cx="2715768" cy="219456"/>
+          </a:xfrm>
+          <a:prstGeom prst="rect">
+            <a:avLst/>
+          </a:prstGeom>
+          <a:noFill/>
+        </p:spPr>
+        <p:txBody>
+          <a:bodyPr wrap="square">
+            <a:spAutoFit/>
+          </a:bodyPr>
+          <a:lstStyle/>
+          <a:p>
+            <a:pPr algn="l">
+              <a:spcAft>
+                <a:spcPts val="300"/>
+              </a:spcAft>
+            </a:pPr>
+            <a:r>
+              <a:rPr sz="1200" b="1">
                 <a:solidFill>
                   <a:srgbClr val="0D3B66"/>
                 </a:solidFill>
@@ -3935,8 +3940,8 @@
         </p:nvSpPr>
         <p:spPr>
           <a:xfrm>
-            <a:off x="6263640" y="1463040"/>
-            <a:ext cx="2665475" cy="182880"/>
+            <a:off x="6236207" y="1444752"/>
+            <a:ext cx="2715768" cy="164592"/>
           </a:xfrm>
           <a:prstGeom prst="rect">
             <a:avLst/>
@@ -3974,8 +3979,8 @@
         </p:nvSpPr>
         <p:spPr>
           <a:xfrm>
-            <a:off x="9130284" y="1024128"/>
-            <a:ext cx="2866644" cy="658368"/>
+            <a:off x="9116568" y="1024128"/>
+            <a:ext cx="2880360" cy="658368"/>
           </a:xfrm>
           <a:prstGeom prst="roundRect">
             <a:avLst>
@@ -4021,8 +4026,8 @@
         </p:nvSpPr>
         <p:spPr>
           <a:xfrm>
-            <a:off x="9240012" y="1060704"/>
-            <a:ext cx="2665475" cy="201168"/>
+            <a:off x="9208008" y="1060704"/>
+            <a:ext cx="2715768" cy="182880"/>
           </a:xfrm>
           <a:prstGeom prst="rect">
             <a:avLst/>
@@ -4060,27 +4065,27 @@
         </p:nvSpPr>
         <p:spPr>
           <a:xfrm>
-            <a:off x="9240012" y="1261872"/>
-            <a:ext cx="2665475" cy="219456"/>
-          </a:xfrm>
-          <a:prstGeom prst="rect">
-            <a:avLst/>
-          </a:prstGeom>
-          <a:noFill/>
-        </p:spPr>
-        <p:txBody>
-          <a:bodyPr wrap="square">
-            <a:spAutoFit/>
-          </a:bodyPr>
-          <a:lstStyle/>
-          <a:p>
-            <a:pPr algn="l">
-              <a:spcAft>
-                <a:spcPts val="300"/>
-              </a:spcAft>
-            </a:pPr>
-            <a:r>
-              <a:rPr sz="1300" b="1">
+            <a:off x="9208008" y="1243584"/>
+            <a:ext cx="2715768" cy="219456"/>
+          </a:xfrm>
+          <a:prstGeom prst="rect">
+            <a:avLst/>
+          </a:prstGeom>
+          <a:noFill/>
+        </p:spPr>
+        <p:txBody>
+          <a:bodyPr wrap="square">
+            <a:spAutoFit/>
+          </a:bodyPr>
+          <a:lstStyle/>
+          <a:p>
+            <a:pPr algn="l">
+              <a:spcAft>
+                <a:spcPts val="300"/>
+              </a:spcAft>
+            </a:pPr>
+            <a:r>
+              <a:rPr sz="1200" b="1">
                 <a:solidFill>
                   <a:srgbClr val="0D3B66"/>
                 </a:solidFill>
@@ -4216,7 +4221,7 @@
         <p:spPr>
           <a:xfrm>
             <a:off x="8430768" y="1847088"/>
-            <a:ext cx="3419856" cy="201168"/>
+            <a:ext cx="3419856" cy="182880"/>
           </a:xfrm>
           <a:prstGeom prst="rect">
             <a:avLst/>
@@ -4254,8 +4259,8 @@
         </p:nvSpPr>
         <p:spPr>
           <a:xfrm>
-            <a:off x="8430768" y="2048256"/>
-            <a:ext cx="3419856" cy="256032"/>
+            <a:off x="8430768" y="2029967"/>
+            <a:ext cx="3419856" cy="219456"/>
           </a:xfrm>
           <a:prstGeom prst="rect">
             <a:avLst/>
@@ -4293,7 +4298,7 @@
         </p:nvSpPr>
         <p:spPr>
           <a:xfrm>
-            <a:off x="8430768" y="2340864"/>
+            <a:off x="8430768" y="2267712"/>
             <a:ext cx="3419856" cy="768096"/>
           </a:xfrm>
           <a:prstGeom prst="roundRect">
@@ -4340,8 +4345,8 @@
         </p:nvSpPr>
         <p:spPr>
           <a:xfrm>
-            <a:off x="8540496" y="2414016"/>
-            <a:ext cx="3200400" cy="219456"/>
+            <a:off x="8540496" y="2304288"/>
+            <a:ext cx="3200400" cy="182880"/>
           </a:xfrm>
           <a:prstGeom prst="rect">
             <a:avLst/>
@@ -4379,8 +4384,8 @@
         </p:nvSpPr>
         <p:spPr>
           <a:xfrm>
-            <a:off x="8540496" y="2688336"/>
-            <a:ext cx="3200400" cy="329184"/>
+            <a:off x="8540496" y="2590312"/>
+            <a:ext cx="3200400" cy="292608"/>
           </a:xfrm>
           <a:prstGeom prst="rect">
             <a:avLst/>
@@ -4418,7 +4423,7 @@
         </p:nvSpPr>
         <p:spPr>
           <a:xfrm>
-            <a:off x="8430768" y="3145536"/>
+            <a:off x="8430768" y="3086100"/>
             <a:ext cx="3419856" cy="768096"/>
           </a:xfrm>
           <a:prstGeom prst="roundRect">
@@ -4465,8 +4470,8 @@
         </p:nvSpPr>
         <p:spPr>
           <a:xfrm>
-            <a:off x="8540496" y="3218688"/>
-            <a:ext cx="3200400" cy="219456"/>
+            <a:off x="8540496" y="3122676"/>
+            <a:ext cx="3200400" cy="182880"/>
           </a:xfrm>
           <a:prstGeom prst="rect">
             <a:avLst/>
@@ -4504,8 +4509,8 @@
         </p:nvSpPr>
         <p:spPr>
           <a:xfrm>
-            <a:off x="8540496" y="3493008"/>
-            <a:ext cx="3200400" cy="329184"/>
+            <a:off x="8540496" y="3408700"/>
+            <a:ext cx="3200400" cy="292608"/>
           </a:xfrm>
           <a:prstGeom prst="rect">
             <a:avLst/>
@@ -4543,7 +4548,7 @@
         </p:nvSpPr>
         <p:spPr>
           <a:xfrm>
-            <a:off x="8430768" y="3950208"/>
+            <a:off x="8430768" y="3904487"/>
             <a:ext cx="3419856" cy="768096"/>
           </a:xfrm>
           <a:prstGeom prst="roundRect">
@@ -4590,8 +4595,8 @@
         </p:nvSpPr>
         <p:spPr>
           <a:xfrm>
-            <a:off x="8540496" y="4023360"/>
-            <a:ext cx="3200400" cy="219456"/>
+            <a:off x="8540496" y="3941063"/>
+            <a:ext cx="3200400" cy="182880"/>
           </a:xfrm>
           <a:prstGeom prst="rect">
             <a:avLst/>
@@ -4629,8 +4634,8 @@
         </p:nvSpPr>
         <p:spPr>
           <a:xfrm>
-            <a:off x="8540496" y="4297680"/>
-            <a:ext cx="3200400" cy="329184"/>
+            <a:off x="8540496" y="4227088"/>
+            <a:ext cx="3200400" cy="292608"/>
           </a:xfrm>
           <a:prstGeom prst="rect">
             <a:avLst/>
@@ -4668,7 +4673,7 @@
         </p:nvSpPr>
         <p:spPr>
           <a:xfrm>
-            <a:off x="8430768" y="4754880"/>
+            <a:off x="8430768" y="4722875"/>
             <a:ext cx="3419856" cy="768096"/>
           </a:xfrm>
           <a:prstGeom prst="roundRect">
@@ -4715,8 +4720,8 @@
         </p:nvSpPr>
         <p:spPr>
           <a:xfrm>
-            <a:off x="8540496" y="4828032"/>
-            <a:ext cx="3200400" cy="219456"/>
+            <a:off x="8540496" y="4759451"/>
+            <a:ext cx="3200400" cy="182880"/>
           </a:xfrm>
           <a:prstGeom prst="rect">
             <a:avLst/>
@@ -4754,8 +4759,8 @@
         </p:nvSpPr>
         <p:spPr>
           <a:xfrm>
-            <a:off x="8540496" y="5102352"/>
-            <a:ext cx="3200400" cy="329184"/>
+            <a:off x="8540496" y="5045476"/>
+            <a:ext cx="3200400" cy="292608"/>
           </a:xfrm>
           <a:prstGeom prst="rect">
             <a:avLst/>
@@ -4866,7 +4871,7 @@
                 </a:solidFill>
                 <a:latin typeface="Calibri"/>
               </a:rPr>
-              <a:t>Recepción 20/10/2025  ·  Capacitación 18/02/2025  ·  medioambiente.dcl@parauco.com  ·  Sala de monitores MAE  ·  Sergio Fuenzalida — Analista Gestión Ambiental</a:t>
+              <a:t>Recepción 20/10/2025  ·  Capacitación 18/02/2025  ·  medioambiente.dcl@parauco.com  ·  Sala de monitores MAE  ·  Sergio Fuenzalida</a:t>
             </a:r>
           </a:p>
         </p:txBody>
@@ -5787,7 +5792,7 @@
           </a:solidFill>
           <a:ln w="6350">
             <a:solidFill>
-              <a:srgbClr val="1F77B4"/>
+              <a:srgbClr val="0D3B66"/>
             </a:solidFill>
           </a:ln>
         </p:spPr>
@@ -5822,7 +5827,7 @@
         <p:spPr>
           <a:xfrm>
             <a:off x="292608" y="1060704"/>
-            <a:ext cx="2121408" cy="201168"/>
+            <a:ext cx="2121408" cy="182880"/>
           </a:xfrm>
           <a:prstGeom prst="rect">
             <a:avLst/>
@@ -5860,7 +5865,7 @@
         </p:nvSpPr>
         <p:spPr>
           <a:xfrm>
-            <a:off x="292608" y="1261872"/>
+            <a:off x="292608" y="1243584"/>
             <a:ext cx="2121408" cy="219456"/>
           </a:xfrm>
           <a:prstGeom prst="rect">
@@ -5947,7 +5952,7 @@
         <p:spPr>
           <a:xfrm>
             <a:off x="2670048" y="1060704"/>
-            <a:ext cx="2121408" cy="201168"/>
+            <a:ext cx="2121408" cy="182880"/>
           </a:xfrm>
           <a:prstGeom prst="rect">
             <a:avLst/>
@@ -5985,7 +5990,7 @@
         </p:nvSpPr>
         <p:spPr>
           <a:xfrm>
-            <a:off x="2670048" y="1261872"/>
+            <a:off x="2670048" y="1243584"/>
             <a:ext cx="2121408" cy="219456"/>
           </a:xfrm>
           <a:prstGeom prst="rect">
@@ -6072,7 +6077,7 @@
         <p:spPr>
           <a:xfrm>
             <a:off x="5047488" y="1060704"/>
-            <a:ext cx="2121408" cy="201168"/>
+            <a:ext cx="2121408" cy="182880"/>
           </a:xfrm>
           <a:prstGeom prst="rect">
             <a:avLst/>
@@ -6110,7 +6115,7 @@
         </p:nvSpPr>
         <p:spPr>
           <a:xfrm>
-            <a:off x="5047488" y="1261872"/>
+            <a:off x="5047488" y="1243584"/>
             <a:ext cx="2121408" cy="219456"/>
           </a:xfrm>
           <a:prstGeom prst="rect">
@@ -6149,8 +6154,8 @@
         </p:nvSpPr>
         <p:spPr>
           <a:xfrm>
-            <a:off x="5047488" y="1463040"/>
-            <a:ext cx="2121408" cy="182880"/>
+            <a:off x="5047488" y="1444752"/>
+            <a:ext cx="2121408" cy="164592"/>
           </a:xfrm>
           <a:prstGeom prst="rect">
             <a:avLst/>
@@ -6190,6 +6195,653 @@
           <a:xfrm>
             <a:off x="7333488" y="1024128"/>
             <a:ext cx="2286000" cy="658368"/>
+          </a:xfrm>
+          <a:prstGeom prst="roundRect">
+            <a:avLst>
+              <a:gd name="adj" fmla="val 8000"/>
+            </a:avLst>
+          </a:prstGeom>
+          <a:solidFill>
+            <a:srgbClr val="F5F7FA"/>
+          </a:solidFill>
+          <a:ln w="6350">
+            <a:solidFill>
+              <a:srgbClr val="7BA3C9"/>
+            </a:solidFill>
+          </a:ln>
+        </p:spPr>
+        <p:style>
+          <a:lnRef idx="1">
+            <a:schemeClr val="accent1"/>
+          </a:lnRef>
+          <a:fillRef idx="3">
+            <a:schemeClr val="accent1"/>
+          </a:fillRef>
+          <a:effectRef idx="2">
+            <a:schemeClr val="accent1"/>
+          </a:effectRef>
+          <a:fontRef idx="minor">
+            <a:schemeClr val="lt1"/>
+          </a:fontRef>
+        </p:style>
+        <p:txBody>
+          <a:bodyPr rtlCol="0" anchor="ctr"/>
+          <a:lstStyle/>
+          <a:p>
+            <a:pPr algn="ctr"/>
+          </a:p>
+        </p:txBody>
+      </p:sp>
+      <p:sp>
+        <p:nvSpPr>
+          <p:cNvPr id="18" name="TextBox 17"/>
+          <p:cNvSpPr txBox="1"/>
+          <p:nvPr/>
+        </p:nvSpPr>
+        <p:spPr>
+          <a:xfrm>
+            <a:off x="7424928" y="1060704"/>
+            <a:ext cx="2121408" cy="182880"/>
+          </a:xfrm>
+          <a:prstGeom prst="rect">
+            <a:avLst/>
+          </a:prstGeom>
+          <a:noFill/>
+        </p:spPr>
+        <p:txBody>
+          <a:bodyPr wrap="square">
+            <a:spAutoFit/>
+          </a:bodyPr>
+          <a:lstStyle/>
+          <a:p>
+            <a:pPr algn="l">
+              <a:spcAft>
+                <a:spcPts val="300"/>
+              </a:spcAft>
+            </a:pPr>
+            <a:r>
+              <a:rPr sz="1000" b="1">
+                <a:solidFill>
+                  <a:srgbClr val="C9A227"/>
+                </a:solidFill>
+                <a:latin typeface="Calibri"/>
+              </a:rPr>
+              <a:t>000025-32</a:t>
+            </a:r>
+          </a:p>
+        </p:txBody>
+      </p:sp>
+      <p:sp>
+        <p:nvSpPr>
+          <p:cNvPr id="19" name="TextBox 18"/>
+          <p:cNvSpPr txBox="1"/>
+          <p:nvPr/>
+        </p:nvSpPr>
+        <p:spPr>
+          <a:xfrm>
+            <a:off x="7424928" y="1243584"/>
+            <a:ext cx="2121408" cy="219456"/>
+          </a:xfrm>
+          <a:prstGeom prst="rect">
+            <a:avLst/>
+          </a:prstGeom>
+          <a:noFill/>
+        </p:spPr>
+        <p:txBody>
+          <a:bodyPr wrap="square">
+            <a:spAutoFit/>
+          </a:bodyPr>
+          <a:lstStyle/>
+          <a:p>
+            <a:pPr algn="l">
+              <a:spcAft>
+                <a:spcPts val="300"/>
+              </a:spcAft>
+            </a:pPr>
+            <a:r>
+              <a:rPr sz="1200" b="1">
+                <a:solidFill>
+                  <a:srgbClr val="0D3B66"/>
+                </a:solidFill>
+                <a:latin typeface="Calibri"/>
+              </a:rPr>
+              <a:t>Pasillo Técnico</a:t>
+            </a:r>
+          </a:p>
+        </p:txBody>
+      </p:sp>
+      <p:sp>
+        <p:nvSpPr>
+          <p:cNvPr id="20" name="TextBox 19"/>
+          <p:cNvSpPr txBox="1"/>
+          <p:nvPr/>
+        </p:nvSpPr>
+        <p:spPr>
+          <a:xfrm>
+            <a:off x="7424928" y="1444752"/>
+            <a:ext cx="2121408" cy="164592"/>
+          </a:xfrm>
+          <a:prstGeom prst="rect">
+            <a:avLst/>
+          </a:prstGeom>
+          <a:noFill/>
+        </p:spPr>
+        <p:txBody>
+          <a:bodyPr wrap="square">
+            <a:spAutoFit/>
+          </a:bodyPr>
+          <a:lstStyle/>
+          <a:p>
+            <a:pPr algn="l">
+              <a:spcAft>
+                <a:spcPts val="300"/>
+              </a:spcAft>
+            </a:pPr>
+            <a:r>
+              <a:rPr sz="1000" b="0">
+                <a:solidFill>
+                  <a:srgbClr val="5A5A5A"/>
+                </a:solidFill>
+                <a:latin typeface="Calibri"/>
+              </a:rPr>
+              <a:t>residual</a:t>
+            </a:r>
+          </a:p>
+        </p:txBody>
+      </p:sp>
+      <p:sp>
+        <p:nvSpPr>
+          <p:cNvPr id="21" name="Rounded Rectangle 20"/>
+          <p:cNvSpPr/>
+          <p:nvPr/>
+        </p:nvSpPr>
+        <p:spPr>
+          <a:xfrm>
+            <a:off x="9710928" y="1024128"/>
+            <a:ext cx="2286000" cy="658368"/>
+          </a:xfrm>
+          <a:prstGeom prst="roundRect">
+            <a:avLst>
+              <a:gd name="adj" fmla="val 8000"/>
+            </a:avLst>
+          </a:prstGeom>
+          <a:solidFill>
+            <a:srgbClr val="F5F7FA"/>
+          </a:solidFill>
+          <a:ln w="6350">
+            <a:solidFill>
+              <a:srgbClr val="5A8C6E"/>
+            </a:solidFill>
+          </a:ln>
+        </p:spPr>
+        <p:style>
+          <a:lnRef idx="1">
+            <a:schemeClr val="accent1"/>
+          </a:lnRef>
+          <a:fillRef idx="3">
+            <a:schemeClr val="accent1"/>
+          </a:fillRef>
+          <a:effectRef idx="2">
+            <a:schemeClr val="accent1"/>
+          </a:effectRef>
+          <a:fontRef idx="minor">
+            <a:schemeClr val="lt1"/>
+          </a:fontRef>
+        </p:style>
+        <p:txBody>
+          <a:bodyPr rtlCol="0" anchor="ctr"/>
+          <a:lstStyle/>
+          <a:p>
+            <a:pPr algn="ctr"/>
+          </a:p>
+        </p:txBody>
+      </p:sp>
+      <p:sp>
+        <p:nvSpPr>
+          <p:cNvPr id="22" name="TextBox 21"/>
+          <p:cNvSpPr txBox="1"/>
+          <p:nvPr/>
+        </p:nvSpPr>
+        <p:spPr>
+          <a:xfrm>
+            <a:off x="9802368" y="1060704"/>
+            <a:ext cx="2121408" cy="182880"/>
+          </a:xfrm>
+          <a:prstGeom prst="rect">
+            <a:avLst/>
+          </a:prstGeom>
+          <a:noFill/>
+        </p:spPr>
+        <p:txBody>
+          <a:bodyPr wrap="square">
+            <a:spAutoFit/>
+          </a:bodyPr>
+          <a:lstStyle/>
+          <a:p>
+            <a:pPr algn="l">
+              <a:spcAft>
+                <a:spcPts val="300"/>
+              </a:spcAft>
+            </a:pPr>
+            <a:r>
+              <a:rPr sz="1000" b="1">
+                <a:solidFill>
+                  <a:srgbClr val="C9A227"/>
+                </a:solidFill>
+                <a:latin typeface="Calibri"/>
+              </a:rPr>
+              <a:t>000025-33</a:t>
+            </a:r>
+          </a:p>
+        </p:txBody>
+      </p:sp>
+      <p:sp>
+        <p:nvSpPr>
+          <p:cNvPr id="23" name="TextBox 22"/>
+          <p:cNvSpPr txBox="1"/>
+          <p:nvPr/>
+        </p:nvSpPr>
+        <p:spPr>
+          <a:xfrm>
+            <a:off x="9802368" y="1243584"/>
+            <a:ext cx="2121408" cy="219456"/>
+          </a:xfrm>
+          <a:prstGeom prst="rect">
+            <a:avLst/>
+          </a:prstGeom>
+          <a:noFill/>
+        </p:spPr>
+        <p:txBody>
+          <a:bodyPr wrap="square">
+            <a:spAutoFit/>
+          </a:bodyPr>
+          <a:lstStyle/>
+          <a:p>
+            <a:pPr algn="l">
+              <a:spcAft>
+                <a:spcPts val="300"/>
+              </a:spcAft>
+            </a:pPr>
+            <a:r>
+              <a:rPr sz="1200" b="1">
+                <a:solidFill>
+                  <a:srgbClr val="0D3B66"/>
+                </a:solidFill>
+                <a:latin typeface="Calibri"/>
+              </a:rPr>
+              <a:t>Salida ARROW</a:t>
+            </a:r>
+          </a:p>
+        </p:txBody>
+      </p:sp>
+      <p:sp>
+        <p:nvSpPr>
+          <p:cNvPr id="24" name="TextBox 23"/>
+          <p:cNvSpPr txBox="1"/>
+          <p:nvPr/>
+        </p:nvSpPr>
+        <p:spPr>
+          <a:xfrm>
+            <a:off x="9802368" y="1444752"/>
+            <a:ext cx="2121408" cy="164592"/>
+          </a:xfrm>
+          <a:prstGeom prst="rect">
+            <a:avLst/>
+          </a:prstGeom>
+          <a:noFill/>
+        </p:spPr>
+        <p:txBody>
+          <a:bodyPr wrap="square">
+            <a:spAutoFit/>
+          </a:bodyPr>
+          <a:lstStyle/>
+          <a:p>
+            <a:pPr algn="l">
+              <a:spcAft>
+                <a:spcPts val="300"/>
+              </a:spcAft>
+            </a:pPr>
+            <a:r>
+              <a:rPr sz="1000" b="0">
+                <a:solidFill>
+                  <a:srgbClr val="5A5A5A"/>
+                </a:solidFill>
+                <a:latin typeface="Calibri"/>
+              </a:rPr>
+              <a:t>residual</a:t>
+            </a:r>
+          </a:p>
+        </p:txBody>
+      </p:sp>
+      <p:sp>
+        <p:nvSpPr>
+          <p:cNvPr id="25" name="Rounded Rectangle 24"/>
+          <p:cNvSpPr/>
+          <p:nvPr/>
+        </p:nvSpPr>
+        <p:spPr>
+          <a:xfrm>
+            <a:off x="201168" y="1792224"/>
+            <a:ext cx="7973568" cy="3822191"/>
+          </a:xfrm>
+          <a:prstGeom prst="roundRect">
+            <a:avLst>
+              <a:gd name="adj" fmla="val 8000"/>
+            </a:avLst>
+          </a:prstGeom>
+          <a:solidFill>
+            <a:srgbClr val="F5F7FA"/>
+          </a:solidFill>
+          <a:ln>
+            <a:noFill/>
+          </a:ln>
+        </p:spPr>
+        <p:style>
+          <a:lnRef idx="1">
+            <a:schemeClr val="accent1"/>
+          </a:lnRef>
+          <a:fillRef idx="3">
+            <a:schemeClr val="accent1"/>
+          </a:fillRef>
+          <a:effectRef idx="2">
+            <a:schemeClr val="accent1"/>
+          </a:effectRef>
+          <a:fontRef idx="minor">
+            <a:schemeClr val="lt1"/>
+          </a:fontRef>
+        </p:style>
+        <p:txBody>
+          <a:bodyPr rtlCol="0" anchor="ctr"/>
+          <a:lstStyle/>
+          <a:p>
+            <a:pPr algn="ctr"/>
+          </a:p>
+        </p:txBody>
+      </p:sp>
+      <p:pic>
+        <p:nvPicPr>
+          <p:cNvPr id="26" name="Picture 25" descr="mam_mensual_may_ago.png"/>
+          <p:cNvPicPr>
+            <a:picLocks noChangeAspect="1"/>
+          </p:cNvPicPr>
+          <p:nvPr/>
+        </p:nvPicPr>
+        <p:blipFill>
+          <a:blip r:embed="rId3"/>
+          <a:stretch>
+            <a:fillRect/>
+          </a:stretch>
+        </p:blipFill>
+        <p:spPr>
+          <a:xfrm>
+            <a:off x="329184" y="1865376"/>
+            <a:ext cx="7717536" cy="3777531"/>
+          </a:xfrm>
+          <a:prstGeom prst="rect">
+            <a:avLst/>
+          </a:prstGeom>
+        </p:spPr>
+      </p:pic>
+      <p:sp>
+        <p:nvSpPr>
+          <p:cNvPr id="27" name="Rounded Rectangle 26"/>
+          <p:cNvSpPr/>
+          <p:nvPr/>
+        </p:nvSpPr>
+        <p:spPr>
+          <a:xfrm>
+            <a:off x="8302752" y="1792224"/>
+            <a:ext cx="3675887" cy="3822191"/>
+          </a:xfrm>
+          <a:prstGeom prst="roundRect">
+            <a:avLst>
+              <a:gd name="adj" fmla="val 8000"/>
+            </a:avLst>
+          </a:prstGeom>
+          <a:solidFill>
+            <a:srgbClr val="FFFFFF"/>
+          </a:solidFill>
+          <a:ln w="6350">
+            <a:solidFill>
+              <a:srgbClr val="1F77B4"/>
+            </a:solidFill>
+          </a:ln>
+        </p:spPr>
+        <p:style>
+          <a:lnRef idx="1">
+            <a:schemeClr val="accent1"/>
+          </a:lnRef>
+          <a:fillRef idx="3">
+            <a:schemeClr val="accent1"/>
+          </a:fillRef>
+          <a:effectRef idx="2">
+            <a:schemeClr val="accent1"/>
+          </a:effectRef>
+          <a:fontRef idx="minor">
+            <a:schemeClr val="lt1"/>
+          </a:fontRef>
+        </p:style>
+        <p:txBody>
+          <a:bodyPr rtlCol="0" anchor="ctr"/>
+          <a:lstStyle/>
+          <a:p>
+            <a:pPr algn="ctr"/>
+          </a:p>
+        </p:txBody>
+      </p:sp>
+      <p:sp>
+        <p:nvSpPr>
+          <p:cNvPr id="28" name="TextBox 27"/>
+          <p:cNvSpPr txBox="1"/>
+          <p:nvPr/>
+        </p:nvSpPr>
+        <p:spPr>
+          <a:xfrm>
+            <a:off x="8430768" y="1847088"/>
+            <a:ext cx="3419856" cy="182880"/>
+          </a:xfrm>
+          <a:prstGeom prst="rect">
+            <a:avLst/>
+          </a:prstGeom>
+          <a:noFill/>
+        </p:spPr>
+        <p:txBody>
+          <a:bodyPr wrap="square">
+            <a:spAutoFit/>
+          </a:bodyPr>
+          <a:lstStyle/>
+          <a:p>
+            <a:pPr algn="l">
+              <a:spcAft>
+                <a:spcPts val="300"/>
+              </a:spcAft>
+            </a:pPr>
+            <a:r>
+              <a:rPr sz="1100" b="1">
+                <a:solidFill>
+                  <a:srgbClr val="1F77B4"/>
+                </a:solidFill>
+                <a:latin typeface="Calibri"/>
+              </a:rPr>
+              <a:t>JULIO · último mes cerrado</a:t>
+            </a:r>
+          </a:p>
+        </p:txBody>
+      </p:sp>
+      <p:sp>
+        <p:nvSpPr>
+          <p:cNvPr id="29" name="TextBox 28"/>
+          <p:cNvSpPr txBox="1"/>
+          <p:nvPr/>
+        </p:nvSpPr>
+        <p:spPr>
+          <a:xfrm>
+            <a:off x="8430768" y="2029967"/>
+            <a:ext cx="3419856" cy="219456"/>
+          </a:xfrm>
+          <a:prstGeom prst="rect">
+            <a:avLst/>
+          </a:prstGeom>
+          <a:noFill/>
+        </p:spPr>
+        <p:txBody>
+          <a:bodyPr wrap="square">
+            <a:spAutoFit/>
+          </a:bodyPr>
+          <a:lstStyle/>
+          <a:p>
+            <a:pPr algn="l">
+              <a:spcAft>
+                <a:spcPts val="300"/>
+              </a:spcAft>
+            </a:pPr>
+            <a:r>
+              <a:rPr sz="1200" b="0">
+                <a:solidFill>
+                  <a:srgbClr val="5A5A5A"/>
+                </a:solidFill>
+                <a:latin typeface="Calibri"/>
+              </a:rPr>
+              <a:t>El recinto sumó 10.356 m³</a:t>
+            </a:r>
+          </a:p>
+        </p:txBody>
+      </p:sp>
+      <p:sp>
+        <p:nvSpPr>
+          <p:cNvPr id="30" name="Rounded Rectangle 29"/>
+          <p:cNvSpPr/>
+          <p:nvPr/>
+        </p:nvSpPr>
+        <p:spPr>
+          <a:xfrm>
+            <a:off x="8430768" y="2267712"/>
+            <a:ext cx="3419856" cy="618134"/>
+          </a:xfrm>
+          <a:prstGeom prst="roundRect">
+            <a:avLst>
+              <a:gd name="adj" fmla="val 8000"/>
+            </a:avLst>
+          </a:prstGeom>
+          <a:solidFill>
+            <a:srgbClr val="F5F7FA"/>
+          </a:solidFill>
+          <a:ln w="6350">
+            <a:solidFill>
+              <a:srgbClr val="0D3B66"/>
+            </a:solidFill>
+          </a:ln>
+        </p:spPr>
+        <p:style>
+          <a:lnRef idx="1">
+            <a:schemeClr val="accent1"/>
+          </a:lnRef>
+          <a:fillRef idx="3">
+            <a:schemeClr val="accent1"/>
+          </a:fillRef>
+          <a:effectRef idx="2">
+            <a:schemeClr val="accent1"/>
+          </a:effectRef>
+          <a:fontRef idx="minor">
+            <a:schemeClr val="lt1"/>
+          </a:fontRef>
+        </p:style>
+        <p:txBody>
+          <a:bodyPr rtlCol="0" anchor="ctr"/>
+          <a:lstStyle/>
+          <a:p>
+            <a:pPr algn="ctr"/>
+          </a:p>
+        </p:txBody>
+      </p:sp>
+      <p:sp>
+        <p:nvSpPr>
+          <p:cNvPr id="31" name="TextBox 30"/>
+          <p:cNvSpPr txBox="1"/>
+          <p:nvPr/>
+        </p:nvSpPr>
+        <p:spPr>
+          <a:xfrm>
+            <a:off x="8540496" y="2304288"/>
+            <a:ext cx="3200400" cy="182880"/>
+          </a:xfrm>
+          <a:prstGeom prst="rect">
+            <a:avLst/>
+          </a:prstGeom>
+          <a:noFill/>
+        </p:spPr>
+        <p:txBody>
+          <a:bodyPr wrap="square">
+            <a:spAutoFit/>
+          </a:bodyPr>
+          <a:lstStyle/>
+          <a:p>
+            <a:pPr algn="l">
+              <a:spcAft>
+                <a:spcPts val="300"/>
+              </a:spcAft>
+            </a:pPr>
+            <a:r>
+              <a:rPr sz="1300" b="1">
+                <a:solidFill>
+                  <a:srgbClr val="0D3B66"/>
+                </a:solidFill>
+                <a:latin typeface="Calibri"/>
+              </a:rPr>
+              <a:t>Placa Bancaria</a:t>
+            </a:r>
+          </a:p>
+        </p:txBody>
+      </p:sp>
+      <p:sp>
+        <p:nvSpPr>
+          <p:cNvPr id="32" name="TextBox 31"/>
+          <p:cNvSpPr txBox="1"/>
+          <p:nvPr/>
+        </p:nvSpPr>
+        <p:spPr>
+          <a:xfrm>
+            <a:off x="8540496" y="2527328"/>
+            <a:ext cx="3200400" cy="292608"/>
+          </a:xfrm>
+          <a:prstGeom prst="rect">
+            <a:avLst/>
+          </a:prstGeom>
+          <a:noFill/>
+        </p:spPr>
+        <p:txBody>
+          <a:bodyPr wrap="square">
+            <a:spAutoFit/>
+          </a:bodyPr>
+          <a:lstStyle/>
+          <a:p>
+            <a:pPr algn="l">
+              <a:spcAft>
+                <a:spcPts val="300"/>
+              </a:spcAft>
+            </a:pPr>
+            <a:r>
+              <a:rPr sz="1600" b="1">
+                <a:solidFill>
+                  <a:srgbClr val="0D3B66"/>
+                </a:solidFill>
+                <a:latin typeface="Calibri"/>
+              </a:rPr>
+              <a:t>7.084 m³    68 %</a:t>
+            </a:r>
+          </a:p>
+        </p:txBody>
+      </p:sp>
+      <p:sp>
+        <p:nvSpPr>
+          <p:cNvPr id="33" name="Rounded Rectangle 32"/>
+          <p:cNvSpPr/>
+          <p:nvPr/>
+        </p:nvSpPr>
+        <p:spPr>
+          <a:xfrm>
+            <a:off x="8430768" y="2922422"/>
+            <a:ext cx="3419856" cy="618134"/>
           </a:xfrm>
           <a:prstGeom prst="roundRect">
             <a:avLst>
@@ -6229,14 +6881,861 @@
       </p:sp>
       <p:sp>
         <p:nvSpPr>
-          <p:cNvPr id="18" name="TextBox 17"/>
-          <p:cNvSpPr txBox="1"/>
-          <p:nvPr/>
-        </p:nvSpPr>
-        <p:spPr>
-          <a:xfrm>
-            <a:off x="7424928" y="1060704"/>
-            <a:ext cx="2121408" cy="201168"/>
+          <p:cNvPr id="34" name="TextBox 33"/>
+          <p:cNvSpPr txBox="1"/>
+          <p:nvPr/>
+        </p:nvSpPr>
+        <p:spPr>
+          <a:xfrm>
+            <a:off x="8540496" y="2958998"/>
+            <a:ext cx="3200400" cy="182880"/>
+          </a:xfrm>
+          <a:prstGeom prst="rect">
+            <a:avLst/>
+          </a:prstGeom>
+          <a:noFill/>
+        </p:spPr>
+        <p:txBody>
+          <a:bodyPr wrap="square">
+            <a:spAutoFit/>
+          </a:bodyPr>
+          <a:lstStyle/>
+          <a:p>
+            <a:pPr algn="l">
+              <a:spcAft>
+                <a:spcPts val="300"/>
+              </a:spcAft>
+            </a:pPr>
+            <a:r>
+              <a:rPr sz="1300" b="1">
+                <a:solidFill>
+                  <a:srgbClr val="1F77B4"/>
+                </a:solidFill>
+                <a:latin typeface="Calibri"/>
+              </a:rPr>
+              <a:t>Ripley</a:t>
+            </a:r>
+          </a:p>
+        </p:txBody>
+      </p:sp>
+      <p:sp>
+        <p:nvSpPr>
+          <p:cNvPr id="35" name="TextBox 34"/>
+          <p:cNvSpPr txBox="1"/>
+          <p:nvPr/>
+        </p:nvSpPr>
+        <p:spPr>
+          <a:xfrm>
+            <a:off x="8540496" y="3182038"/>
+            <a:ext cx="3200400" cy="292608"/>
+          </a:xfrm>
+          <a:prstGeom prst="rect">
+            <a:avLst/>
+          </a:prstGeom>
+          <a:noFill/>
+        </p:spPr>
+        <p:txBody>
+          <a:bodyPr wrap="square">
+            <a:spAutoFit/>
+          </a:bodyPr>
+          <a:lstStyle/>
+          <a:p>
+            <a:pPr algn="l">
+              <a:spcAft>
+                <a:spcPts val="300"/>
+              </a:spcAft>
+            </a:pPr>
+            <a:r>
+              <a:rPr sz="1600" b="1">
+                <a:solidFill>
+                  <a:srgbClr val="0D3B66"/>
+                </a:solidFill>
+                <a:latin typeface="Calibri"/>
+              </a:rPr>
+              <a:t>3.245 m³    31 %</a:t>
+            </a:r>
+          </a:p>
+        </p:txBody>
+      </p:sp>
+      <p:sp>
+        <p:nvSpPr>
+          <p:cNvPr id="36" name="Rounded Rectangle 35"/>
+          <p:cNvSpPr/>
+          <p:nvPr/>
+        </p:nvSpPr>
+        <p:spPr>
+          <a:xfrm>
+            <a:off x="8430768" y="3577132"/>
+            <a:ext cx="3419856" cy="618134"/>
+          </a:xfrm>
+          <a:prstGeom prst="roundRect">
+            <a:avLst>
+              <a:gd name="adj" fmla="val 8000"/>
+            </a:avLst>
+          </a:prstGeom>
+          <a:solidFill>
+            <a:srgbClr val="F5F7FA"/>
+          </a:solidFill>
+          <a:ln w="6350">
+            <a:solidFill>
+              <a:srgbClr val="7BA3C9"/>
+            </a:solidFill>
+          </a:ln>
+        </p:spPr>
+        <p:style>
+          <a:lnRef idx="1">
+            <a:schemeClr val="accent1"/>
+          </a:lnRef>
+          <a:fillRef idx="3">
+            <a:schemeClr val="accent1"/>
+          </a:fillRef>
+          <a:effectRef idx="2">
+            <a:schemeClr val="accent1"/>
+          </a:effectRef>
+          <a:fontRef idx="minor">
+            <a:schemeClr val="lt1"/>
+          </a:fontRef>
+        </p:style>
+        <p:txBody>
+          <a:bodyPr rtlCol="0" anchor="ctr"/>
+          <a:lstStyle/>
+          <a:p>
+            <a:pPr algn="ctr"/>
+          </a:p>
+        </p:txBody>
+      </p:sp>
+      <p:sp>
+        <p:nvSpPr>
+          <p:cNvPr id="37" name="TextBox 36"/>
+          <p:cNvSpPr txBox="1"/>
+          <p:nvPr/>
+        </p:nvSpPr>
+        <p:spPr>
+          <a:xfrm>
+            <a:off x="8540496" y="3613708"/>
+            <a:ext cx="3200400" cy="182880"/>
+          </a:xfrm>
+          <a:prstGeom prst="rect">
+            <a:avLst/>
+          </a:prstGeom>
+          <a:noFill/>
+        </p:spPr>
+        <p:txBody>
+          <a:bodyPr wrap="square">
+            <a:spAutoFit/>
+          </a:bodyPr>
+          <a:lstStyle/>
+          <a:p>
+            <a:pPr algn="l">
+              <a:spcAft>
+                <a:spcPts val="300"/>
+              </a:spcAft>
+            </a:pPr>
+            <a:r>
+              <a:rPr sz="1300" b="1">
+                <a:solidFill>
+                  <a:srgbClr val="7BA3C9"/>
+                </a:solidFill>
+                <a:latin typeface="Calibri"/>
+              </a:rPr>
+              <a:t>Pasillo Técnico</a:t>
+            </a:r>
+          </a:p>
+        </p:txBody>
+      </p:sp>
+      <p:sp>
+        <p:nvSpPr>
+          <p:cNvPr id="38" name="TextBox 37"/>
+          <p:cNvSpPr txBox="1"/>
+          <p:nvPr/>
+        </p:nvSpPr>
+        <p:spPr>
+          <a:xfrm>
+            <a:off x="8540496" y="3836749"/>
+            <a:ext cx="3200400" cy="292608"/>
+          </a:xfrm>
+          <a:prstGeom prst="rect">
+            <a:avLst/>
+          </a:prstGeom>
+          <a:noFill/>
+        </p:spPr>
+        <p:txBody>
+          <a:bodyPr wrap="square">
+            <a:spAutoFit/>
+          </a:bodyPr>
+          <a:lstStyle/>
+          <a:p>
+            <a:pPr algn="l">
+              <a:spcAft>
+                <a:spcPts val="300"/>
+              </a:spcAft>
+            </a:pPr>
+            <a:r>
+              <a:rPr sz="1600" b="1">
+                <a:solidFill>
+                  <a:srgbClr val="0D3B66"/>
+                </a:solidFill>
+                <a:latin typeface="Calibri"/>
+              </a:rPr>
+              <a:t>26 m³    0,3 %</a:t>
+            </a:r>
+          </a:p>
+        </p:txBody>
+      </p:sp>
+      <p:sp>
+        <p:nvSpPr>
+          <p:cNvPr id="39" name="Rounded Rectangle 38"/>
+          <p:cNvSpPr/>
+          <p:nvPr/>
+        </p:nvSpPr>
+        <p:spPr>
+          <a:xfrm>
+            <a:off x="8430768" y="4231843"/>
+            <a:ext cx="3419856" cy="618134"/>
+          </a:xfrm>
+          <a:prstGeom prst="roundRect">
+            <a:avLst>
+              <a:gd name="adj" fmla="val 8000"/>
+            </a:avLst>
+          </a:prstGeom>
+          <a:solidFill>
+            <a:srgbClr val="F5F7FA"/>
+          </a:solidFill>
+          <a:ln w="6350">
+            <a:solidFill>
+              <a:srgbClr val="5A8C6E"/>
+            </a:solidFill>
+          </a:ln>
+        </p:spPr>
+        <p:style>
+          <a:lnRef idx="1">
+            <a:schemeClr val="accent1"/>
+          </a:lnRef>
+          <a:fillRef idx="3">
+            <a:schemeClr val="accent1"/>
+          </a:fillRef>
+          <a:effectRef idx="2">
+            <a:schemeClr val="accent1"/>
+          </a:effectRef>
+          <a:fontRef idx="minor">
+            <a:schemeClr val="lt1"/>
+          </a:fontRef>
+        </p:style>
+        <p:txBody>
+          <a:bodyPr rtlCol="0" anchor="ctr"/>
+          <a:lstStyle/>
+          <a:p>
+            <a:pPr algn="ctr"/>
+          </a:p>
+        </p:txBody>
+      </p:sp>
+      <p:sp>
+        <p:nvSpPr>
+          <p:cNvPr id="40" name="TextBox 39"/>
+          <p:cNvSpPr txBox="1"/>
+          <p:nvPr/>
+        </p:nvSpPr>
+        <p:spPr>
+          <a:xfrm>
+            <a:off x="8540496" y="4268419"/>
+            <a:ext cx="3200400" cy="182880"/>
+          </a:xfrm>
+          <a:prstGeom prst="rect">
+            <a:avLst/>
+          </a:prstGeom>
+          <a:noFill/>
+        </p:spPr>
+        <p:txBody>
+          <a:bodyPr wrap="square">
+            <a:spAutoFit/>
+          </a:bodyPr>
+          <a:lstStyle/>
+          <a:p>
+            <a:pPr algn="l">
+              <a:spcAft>
+                <a:spcPts val="300"/>
+              </a:spcAft>
+            </a:pPr>
+            <a:r>
+              <a:rPr sz="1300" b="1">
+                <a:solidFill>
+                  <a:srgbClr val="5A8C6E"/>
+                </a:solidFill>
+                <a:latin typeface="Calibri"/>
+              </a:rPr>
+              <a:t>Salida ARROW</a:t>
+            </a:r>
+          </a:p>
+        </p:txBody>
+      </p:sp>
+      <p:sp>
+        <p:nvSpPr>
+          <p:cNvPr id="41" name="TextBox 40"/>
+          <p:cNvSpPr txBox="1"/>
+          <p:nvPr/>
+        </p:nvSpPr>
+        <p:spPr>
+          <a:xfrm>
+            <a:off x="8540496" y="4491459"/>
+            <a:ext cx="3200400" cy="292608"/>
+          </a:xfrm>
+          <a:prstGeom prst="rect">
+            <a:avLst/>
+          </a:prstGeom>
+          <a:noFill/>
+        </p:spPr>
+        <p:txBody>
+          <a:bodyPr wrap="square">
+            <a:spAutoFit/>
+          </a:bodyPr>
+          <a:lstStyle/>
+          <a:p>
+            <a:pPr algn="l">
+              <a:spcAft>
+                <a:spcPts val="300"/>
+              </a:spcAft>
+            </a:pPr>
+            <a:r>
+              <a:rPr sz="1600" b="1">
+                <a:solidFill>
+                  <a:srgbClr val="0D3B66"/>
+                </a:solidFill>
+                <a:latin typeface="Calibri"/>
+              </a:rPr>
+              <a:t>1 m³    &lt;0,1 %</a:t>
+            </a:r>
+          </a:p>
+        </p:txBody>
+      </p:sp>
+      <p:sp>
+        <p:nvSpPr>
+          <p:cNvPr id="42" name="Rounded Rectangle 41"/>
+          <p:cNvSpPr/>
+          <p:nvPr/>
+        </p:nvSpPr>
+        <p:spPr>
+          <a:xfrm>
+            <a:off x="8430768" y="4886553"/>
+            <a:ext cx="3419856" cy="618134"/>
+          </a:xfrm>
+          <a:prstGeom prst="roundRect">
+            <a:avLst>
+              <a:gd name="adj" fmla="val 8000"/>
+            </a:avLst>
+          </a:prstGeom>
+          <a:solidFill>
+            <a:srgbClr val="F5F7FA"/>
+          </a:solidFill>
+          <a:ln w="6350">
+            <a:solidFill>
+              <a:srgbClr val="C9A227"/>
+            </a:solidFill>
+          </a:ln>
+        </p:spPr>
+        <p:style>
+          <a:lnRef idx="1">
+            <a:schemeClr val="accent1"/>
+          </a:lnRef>
+          <a:fillRef idx="3">
+            <a:schemeClr val="accent1"/>
+          </a:fillRef>
+          <a:effectRef idx="2">
+            <a:schemeClr val="accent1"/>
+          </a:effectRef>
+          <a:fontRef idx="minor">
+            <a:schemeClr val="lt1"/>
+          </a:fontRef>
+        </p:style>
+        <p:txBody>
+          <a:bodyPr rtlCol="0" anchor="ctr"/>
+          <a:lstStyle/>
+          <a:p>
+            <a:pPr algn="ctr"/>
+          </a:p>
+        </p:txBody>
+      </p:sp>
+      <p:sp>
+        <p:nvSpPr>
+          <p:cNvPr id="43" name="TextBox 42"/>
+          <p:cNvSpPr txBox="1"/>
+          <p:nvPr/>
+        </p:nvSpPr>
+        <p:spPr>
+          <a:xfrm>
+            <a:off x="8540496" y="4923129"/>
+            <a:ext cx="3200400" cy="182880"/>
+          </a:xfrm>
+          <a:prstGeom prst="rect">
+            <a:avLst/>
+          </a:prstGeom>
+          <a:noFill/>
+        </p:spPr>
+        <p:txBody>
+          <a:bodyPr wrap="square">
+            <a:spAutoFit/>
+          </a:bodyPr>
+          <a:lstStyle/>
+          <a:p>
+            <a:pPr algn="l">
+              <a:spcAft>
+                <a:spcPts val="300"/>
+              </a:spcAft>
+            </a:pPr>
+            <a:r>
+              <a:rPr sz="1300" b="1">
+                <a:solidFill>
+                  <a:srgbClr val="C9A227"/>
+                </a:solidFill>
+                <a:latin typeface="Calibri"/>
+              </a:rPr>
+              <a:t>Falabella</a:t>
+            </a:r>
+          </a:p>
+        </p:txBody>
+      </p:sp>
+      <p:sp>
+        <p:nvSpPr>
+          <p:cNvPr id="44" name="TextBox 43"/>
+          <p:cNvSpPr txBox="1"/>
+          <p:nvPr/>
+        </p:nvSpPr>
+        <p:spPr>
+          <a:xfrm>
+            <a:off x="8540496" y="5146170"/>
+            <a:ext cx="3200400" cy="292608"/>
+          </a:xfrm>
+          <a:prstGeom prst="rect">
+            <a:avLst/>
+          </a:prstGeom>
+          <a:noFill/>
+        </p:spPr>
+        <p:txBody>
+          <a:bodyPr wrap="square">
+            <a:spAutoFit/>
+          </a:bodyPr>
+          <a:lstStyle/>
+          <a:p>
+            <a:pPr algn="l">
+              <a:spcAft>
+                <a:spcPts val="300"/>
+              </a:spcAft>
+            </a:pPr>
+            <a:r>
+              <a:rPr sz="1600" b="1">
+                <a:solidFill>
+                  <a:srgbClr val="0D3B66"/>
+                </a:solidFill>
+                <a:latin typeface="Calibri"/>
+              </a:rPr>
+              <a:t>0 m³    0 % · 11/08</a:t>
+            </a:r>
+          </a:p>
+        </p:txBody>
+      </p:sp>
+      <p:sp>
+        <p:nvSpPr>
+          <p:cNvPr id="45" name="Rounded Rectangle 44"/>
+          <p:cNvSpPr/>
+          <p:nvPr/>
+        </p:nvSpPr>
+        <p:spPr>
+          <a:xfrm>
+            <a:off x="201168" y="5705856"/>
+            <a:ext cx="11795760" cy="438912"/>
+          </a:xfrm>
+          <a:prstGeom prst="roundRect">
+            <a:avLst>
+              <a:gd name="adj" fmla="val 8000"/>
+            </a:avLst>
+          </a:prstGeom>
+          <a:solidFill>
+            <a:srgbClr val="FFF9EB"/>
+          </a:solidFill>
+          <a:ln w="6350">
+            <a:solidFill>
+              <a:srgbClr val="C9A227"/>
+            </a:solidFill>
+          </a:ln>
+        </p:spPr>
+        <p:style>
+          <a:lnRef idx="1">
+            <a:schemeClr val="accent1"/>
+          </a:lnRef>
+          <a:fillRef idx="3">
+            <a:schemeClr val="accent1"/>
+          </a:fillRef>
+          <a:effectRef idx="2">
+            <a:schemeClr val="accent1"/>
+          </a:effectRef>
+          <a:fontRef idx="minor">
+            <a:schemeClr val="lt1"/>
+          </a:fontRef>
+        </p:style>
+        <p:txBody>
+          <a:bodyPr rtlCol="0" anchor="ctr"/>
+          <a:lstStyle/>
+          <a:p>
+            <a:pPr algn="ctr"/>
+          </a:p>
+        </p:txBody>
+      </p:sp>
+      <p:sp>
+        <p:nvSpPr>
+          <p:cNvPr id="46" name="TextBox 45"/>
+          <p:cNvSpPr txBox="1"/>
+          <p:nvPr/>
+        </p:nvSpPr>
+        <p:spPr>
+          <a:xfrm>
+            <a:off x="329184" y="5779008"/>
+            <a:ext cx="11539728" cy="310896"/>
+          </a:xfrm>
+          <a:prstGeom prst="rect">
+            <a:avLst/>
+          </a:prstGeom>
+          <a:noFill/>
+        </p:spPr>
+        <p:txBody>
+          <a:bodyPr wrap="square">
+            <a:spAutoFit/>
+          </a:bodyPr>
+          <a:lstStyle/>
+          <a:p>
+            <a:pPr algn="l">
+              <a:spcAft>
+                <a:spcPts val="300"/>
+              </a:spcAft>
+            </a:pPr>
+            <a:r>
+              <a:rPr sz="1100" b="0">
+                <a:solidFill>
+                  <a:srgbClr val="0D3B66"/>
+                </a:solidFill>
+                <a:latin typeface="Calibri"/>
+              </a:rPr>
+              <a:t>Recepción 06/11/2025  ·  Capacitación 14/11/2025  ·  Miguel Rupayan  ·  Constanza Vilches  ·  Mantención: C. Bustamante, O. Cuevas y Supervisor Eléctrico</a:t>
+            </a:r>
+          </a:p>
+        </p:txBody>
+      </p:sp>
+      <p:sp>
+        <p:nvSpPr>
+          <p:cNvPr id="47" name="TextBox 46"/>
+          <p:cNvSpPr txBox="1"/>
+          <p:nvPr/>
+        </p:nvSpPr>
+        <p:spPr>
+          <a:xfrm>
+            <a:off x="256032" y="6181344"/>
+            <a:ext cx="11704320" cy="566928"/>
+          </a:xfrm>
+          <a:prstGeom prst="rect">
+            <a:avLst/>
+          </a:prstGeom>
+          <a:noFill/>
+        </p:spPr>
+        <p:txBody>
+          <a:bodyPr wrap="square">
+            <a:spAutoFit/>
+          </a:bodyPr>
+          <a:lstStyle/>
+          <a:p>
+            <a:pPr algn="l">
+              <a:spcAft>
+                <a:spcPts val="300"/>
+              </a:spcAft>
+            </a:pPr>
+            <a:r>
+              <a:rPr sz="1200" b="0">
+                <a:solidFill>
+                  <a:srgbClr val="0D3B66"/>
+                </a:solidFill>
+                <a:latin typeface="Calibri"/>
+              </a:rPr>
+              <a:t>Mayo 7.511   ·   Junio 10.014   ·   Julio 10.356   ·   Agosto 1–17: 4.165   ·   proy. ago 7.595 m³.</a:t>
+            </a:r>
+          </a:p>
+          <a:p>
+            <a:pPr algn="l">
+              <a:spcAft>
+                <a:spcPts val="300"/>
+              </a:spcAft>
+            </a:pPr>
+            <a:r>
+              <a:rPr sz="1100" b="0">
+                <a:solidFill>
+                  <a:srgbClr val="5A5A5A"/>
+                </a:solidFill>
+                <a:latin typeface="Calibri"/>
+              </a:rPr>
+              <a:t>Junio sube por Placa (18/06). Falabella no entra en julio: activo desde el 11/08.</a:t>
+            </a:r>
+          </a:p>
+        </p:txBody>
+      </p:sp>
+    </p:spTree>
+  </p:cSld>
+  <p:clrMapOvr>
+    <a:masterClrMapping/>
+  </p:clrMapOvr>
+</p:sld>
+</file>
+
+<file path=ppt/slides/slide5.xml><?xml version="1.0" encoding="utf-8"?>
+<p:sld xmlns:a="http://schemas.openxmlformats.org/drawingml/2006/main" xmlns:p="http://schemas.openxmlformats.org/presentationml/2006/main" xmlns:r="http://schemas.openxmlformats.org/officeDocument/2006/relationships">
+  <p:cSld>
+    <p:spTree>
+      <p:nvGrpSpPr>
+        <p:cNvPr id="1" name=""/>
+        <p:cNvGrpSpPr/>
+        <p:nvPr/>
+      </p:nvGrpSpPr>
+      <p:grpSpPr/>
+      <p:sp>
+        <p:nvSpPr>
+          <p:cNvPr id="2" name="Rectangle 1"/>
+          <p:cNvSpPr/>
+          <p:nvPr/>
+        </p:nvSpPr>
+        <p:spPr>
+          <a:xfrm>
+            <a:off x="0" y="0"/>
+            <a:ext cx="12191695" cy="841248"/>
+          </a:xfrm>
+          <a:prstGeom prst="rect">
+            <a:avLst/>
+          </a:prstGeom>
+          <a:solidFill>
+            <a:srgbClr val="0D3B66"/>
+          </a:solidFill>
+          <a:ln>
+            <a:noFill/>
+          </a:ln>
+        </p:spPr>
+        <p:style>
+          <a:lnRef idx="1">
+            <a:schemeClr val="accent1"/>
+          </a:lnRef>
+          <a:fillRef idx="3">
+            <a:schemeClr val="accent1"/>
+          </a:fillRef>
+          <a:effectRef idx="2">
+            <a:schemeClr val="accent1"/>
+          </a:effectRef>
+          <a:fontRef idx="minor">
+            <a:schemeClr val="lt1"/>
+          </a:fontRef>
+        </p:style>
+        <p:txBody>
+          <a:bodyPr rtlCol="0" anchor="ctr"/>
+          <a:lstStyle/>
+          <a:p>
+            <a:pPr algn="ctr"/>
+          </a:p>
+        </p:txBody>
+      </p:sp>
+      <p:sp>
+        <p:nvSpPr>
+          <p:cNvPr id="3" name="Rectangle 2"/>
+          <p:cNvSpPr/>
+          <p:nvPr/>
+        </p:nvSpPr>
+        <p:spPr>
+          <a:xfrm>
+            <a:off x="0" y="841248"/>
+            <a:ext cx="12191695" cy="54864"/>
+          </a:xfrm>
+          <a:prstGeom prst="rect">
+            <a:avLst/>
+          </a:prstGeom>
+          <a:solidFill>
+            <a:srgbClr val="C9A227"/>
+          </a:solidFill>
+          <a:ln>
+            <a:noFill/>
+          </a:ln>
+        </p:spPr>
+        <p:style>
+          <a:lnRef idx="1">
+            <a:schemeClr val="accent1"/>
+          </a:lnRef>
+          <a:fillRef idx="3">
+            <a:schemeClr val="accent1"/>
+          </a:fillRef>
+          <a:effectRef idx="2">
+            <a:schemeClr val="accent1"/>
+          </a:effectRef>
+          <a:fontRef idx="minor">
+            <a:schemeClr val="lt1"/>
+          </a:fontRef>
+        </p:style>
+        <p:txBody>
+          <a:bodyPr rtlCol="0" anchor="ctr"/>
+          <a:lstStyle/>
+          <a:p>
+            <a:pPr algn="ctr"/>
+          </a:p>
+        </p:txBody>
+      </p:sp>
+      <p:pic>
+        <p:nvPicPr>
+          <p:cNvPr id="4" name="Picture 3" descr="logo wes.bmp"/>
+          <p:cNvPicPr>
+            <a:picLocks noChangeAspect="1"/>
+          </p:cNvPicPr>
+          <p:nvPr/>
+        </p:nvPicPr>
+        <p:blipFill>
+          <a:blip r:embed="rId2"/>
+          <a:stretch>
+            <a:fillRect/>
+          </a:stretch>
+        </p:blipFill>
+        <p:spPr>
+          <a:xfrm>
+            <a:off x="10835640" y="146304"/>
+            <a:ext cx="1143000" cy="253401"/>
+          </a:xfrm>
+          <a:prstGeom prst="rect">
+            <a:avLst/>
+          </a:prstGeom>
+        </p:spPr>
+      </p:pic>
+      <p:sp>
+        <p:nvSpPr>
+          <p:cNvPr id="5" name="TextBox 4"/>
+          <p:cNvSpPr txBox="1"/>
+          <p:nvPr/>
+        </p:nvSpPr>
+        <p:spPr>
+          <a:xfrm>
+            <a:off x="256032" y="109728"/>
+            <a:ext cx="10607040" cy="384048"/>
+          </a:xfrm>
+          <a:prstGeom prst="rect">
+            <a:avLst/>
+          </a:prstGeom>
+          <a:noFill/>
+        </p:spPr>
+        <p:txBody>
+          <a:bodyPr wrap="square">
+            <a:spAutoFit/>
+          </a:bodyPr>
+          <a:lstStyle/>
+          <a:p>
+            <a:pPr algn="l">
+              <a:spcAft>
+                <a:spcPts val="300"/>
+              </a:spcAft>
+            </a:pPr>
+            <a:r>
+              <a:rPr sz="2000" b="1">
+                <a:solidFill>
+                  <a:srgbClr val="FFFFFF"/>
+                </a:solidFill>
+                <a:latin typeface="Calibri"/>
+              </a:rPr>
+              <a:t>MAQ  ·  Equipos y consumo</a:t>
+            </a:r>
+          </a:p>
+        </p:txBody>
+      </p:sp>
+      <p:sp>
+        <p:nvSpPr>
+          <p:cNvPr id="6" name="TextBox 5"/>
+          <p:cNvSpPr txBox="1"/>
+          <p:nvPr/>
+        </p:nvSpPr>
+        <p:spPr>
+          <a:xfrm>
+            <a:off x="256032" y="457200"/>
+            <a:ext cx="10607040" cy="329184"/>
+          </a:xfrm>
+          <a:prstGeom prst="rect">
+            <a:avLst/>
+          </a:prstGeom>
+          <a:noFill/>
+        </p:spPr>
+        <p:txBody>
+          <a:bodyPr wrap="square">
+            <a:spAutoFit/>
+          </a:bodyPr>
+          <a:lstStyle/>
+          <a:p>
+            <a:pPr algn="l">
+              <a:spcAft>
+                <a:spcPts val="300"/>
+              </a:spcAft>
+            </a:pPr>
+            <a:r>
+              <a:rPr sz="1100" b="0">
+                <a:solidFill>
+                  <a:srgbClr val="DCE6F0"/>
+                </a:solidFill>
+                <a:latin typeface="Calibri"/>
+              </a:rPr>
+              <a:t>Mall Arauco Quilicura   |   2 puntos WES   |   01/05/2026 – 17/08/2026</a:t>
+            </a:r>
+          </a:p>
+        </p:txBody>
+      </p:sp>
+      <p:sp>
+        <p:nvSpPr>
+          <p:cNvPr id="7" name="Rounded Rectangle 6"/>
+          <p:cNvSpPr/>
+          <p:nvPr/>
+        </p:nvSpPr>
+        <p:spPr>
+          <a:xfrm>
+            <a:off x="201168" y="1024128"/>
+            <a:ext cx="5852160" cy="658368"/>
+          </a:xfrm>
+          <a:prstGeom prst="roundRect">
+            <a:avLst>
+              <a:gd name="adj" fmla="val 8000"/>
+            </a:avLst>
+          </a:prstGeom>
+          <a:solidFill>
+            <a:srgbClr val="F5F7FA"/>
+          </a:solidFill>
+          <a:ln w="6350">
+            <a:solidFill>
+              <a:srgbClr val="0D3B66"/>
+            </a:solidFill>
+          </a:ln>
+        </p:spPr>
+        <p:style>
+          <a:lnRef idx="1">
+            <a:schemeClr val="accent1"/>
+          </a:lnRef>
+          <a:fillRef idx="3">
+            <a:schemeClr val="accent1"/>
+          </a:fillRef>
+          <a:effectRef idx="2">
+            <a:schemeClr val="accent1"/>
+          </a:effectRef>
+          <a:fontRef idx="minor">
+            <a:schemeClr val="lt1"/>
+          </a:fontRef>
+        </p:style>
+        <p:txBody>
+          <a:bodyPr rtlCol="0" anchor="ctr"/>
+          <a:lstStyle/>
+          <a:p>
+            <a:pPr algn="ctr"/>
+          </a:p>
+        </p:txBody>
+      </p:sp>
+      <p:sp>
+        <p:nvSpPr>
+          <p:cNvPr id="8" name="TextBox 7"/>
+          <p:cNvSpPr txBox="1"/>
+          <p:nvPr/>
+        </p:nvSpPr>
+        <p:spPr>
+          <a:xfrm>
+            <a:off x="292608" y="1060704"/>
+            <a:ext cx="5687568" cy="182880"/>
           </a:xfrm>
           <a:prstGeom prst="rect">
             <a:avLst/>
@@ -6261,21 +7760,21 @@
                 </a:solidFill>
                 <a:latin typeface="Calibri"/>
               </a:rPr>
-              <a:t>000025-32</a:t>
-            </a:r>
-          </a:p>
-        </p:txBody>
-      </p:sp>
-      <p:sp>
-        <p:nvSpPr>
-          <p:cNvPr id="19" name="TextBox 18"/>
-          <p:cNvSpPr txBox="1"/>
-          <p:nvPr/>
-        </p:nvSpPr>
-        <p:spPr>
-          <a:xfrm>
-            <a:off x="7424928" y="1261872"/>
-            <a:ext cx="2121408" cy="219456"/>
+              <a:t>000025-13</a:t>
+            </a:r>
+          </a:p>
+        </p:txBody>
+      </p:sp>
+      <p:sp>
+        <p:nvSpPr>
+          <p:cNvPr id="9" name="TextBox 8"/>
+          <p:cNvSpPr txBox="1"/>
+          <p:nvPr/>
+        </p:nvSpPr>
+        <p:spPr>
+          <a:xfrm>
+            <a:off x="292608" y="1243584"/>
+            <a:ext cx="5687568" cy="219456"/>
           </a:xfrm>
           <a:prstGeom prst="rect">
             <a:avLst/>
@@ -6300,60 +7799,21 @@
                 </a:solidFill>
                 <a:latin typeface="Calibri"/>
               </a:rPr>
-              <a:t>Pasillo Técnico</a:t>
-            </a:r>
-          </a:p>
-        </p:txBody>
-      </p:sp>
-      <p:sp>
-        <p:nvSpPr>
-          <p:cNvPr id="20" name="TextBox 19"/>
-          <p:cNvSpPr txBox="1"/>
-          <p:nvPr/>
-        </p:nvSpPr>
-        <p:spPr>
-          <a:xfrm>
-            <a:off x="7424928" y="1463040"/>
-            <a:ext cx="2121408" cy="182880"/>
-          </a:xfrm>
-          <a:prstGeom prst="rect">
-            <a:avLst/>
-          </a:prstGeom>
-          <a:noFill/>
-        </p:spPr>
-        <p:txBody>
-          <a:bodyPr wrap="square">
-            <a:spAutoFit/>
-          </a:bodyPr>
-          <a:lstStyle/>
-          <a:p>
-            <a:pPr algn="l">
-              <a:spcAft>
-                <a:spcPts val="300"/>
-              </a:spcAft>
-            </a:pPr>
-            <a:r>
-              <a:rPr sz="1000" b="0">
-                <a:solidFill>
-                  <a:srgbClr val="5A5A5A"/>
-                </a:solidFill>
-                <a:latin typeface="Calibri"/>
-              </a:rPr>
-              <a:t>residual</a:t>
-            </a:r>
-          </a:p>
-        </p:txBody>
-      </p:sp>
-      <p:sp>
-        <p:nvSpPr>
-          <p:cNvPr id="21" name="Rounded Rectangle 20"/>
+              <a:t>Matriz Principal</a:t>
+            </a:r>
+          </a:p>
+        </p:txBody>
+      </p:sp>
+      <p:sp>
+        <p:nvSpPr>
+          <p:cNvPr id="10" name="Rounded Rectangle 9"/>
           <p:cNvSpPr/>
           <p:nvPr/>
         </p:nvSpPr>
         <p:spPr>
           <a:xfrm>
-            <a:off x="9710928" y="1024128"/>
-            <a:ext cx="2286000" cy="658368"/>
+            <a:off x="6144768" y="1024128"/>
+            <a:ext cx="5852160" cy="658368"/>
           </a:xfrm>
           <a:prstGeom prst="roundRect">
             <a:avLst>
@@ -6393,14 +7853,14 @@
       </p:sp>
       <p:sp>
         <p:nvSpPr>
-          <p:cNvPr id="22" name="TextBox 21"/>
-          <p:cNvSpPr txBox="1"/>
-          <p:nvPr/>
-        </p:nvSpPr>
-        <p:spPr>
-          <a:xfrm>
-            <a:off x="9802368" y="1060704"/>
-            <a:ext cx="2121408" cy="201168"/>
+          <p:cNvPr id="11" name="TextBox 10"/>
+          <p:cNvSpPr txBox="1"/>
+          <p:nvPr/>
+        </p:nvSpPr>
+        <p:spPr>
+          <a:xfrm>
+            <a:off x="6236207" y="1060704"/>
+            <a:ext cx="5687568" cy="182880"/>
           </a:xfrm>
           <a:prstGeom prst="rect">
             <a:avLst/>
@@ -6425,21 +7885,21 @@
                 </a:solidFill>
                 <a:latin typeface="Calibri"/>
               </a:rPr>
-              <a:t>000025-33</a:t>
-            </a:r>
-          </a:p>
-        </p:txBody>
-      </p:sp>
-      <p:sp>
-        <p:nvSpPr>
-          <p:cNvPr id="23" name="TextBox 22"/>
-          <p:cNvSpPr txBox="1"/>
-          <p:nvPr/>
-        </p:nvSpPr>
-        <p:spPr>
-          <a:xfrm>
-            <a:off x="9802368" y="1261872"/>
-            <a:ext cx="2121408" cy="219456"/>
+              <a:t>000025-34</a:t>
+            </a:r>
+          </a:p>
+        </p:txBody>
+      </p:sp>
+      <p:sp>
+        <p:nvSpPr>
+          <p:cNvPr id="12" name="TextBox 11"/>
+          <p:cNvSpPr txBox="1"/>
+          <p:nvPr/>
+        </p:nvSpPr>
+        <p:spPr>
+          <a:xfrm>
+            <a:off x="6236207" y="1243584"/>
+            <a:ext cx="5687568" cy="219456"/>
           </a:xfrm>
           <a:prstGeom prst="rect">
             <a:avLst/>
@@ -6464,21 +7924,21 @@
                 </a:solidFill>
                 <a:latin typeface="Calibri"/>
               </a:rPr>
-              <a:t>Salida ARROW</a:t>
-            </a:r>
-          </a:p>
-        </p:txBody>
-      </p:sp>
-      <p:sp>
-        <p:nvSpPr>
-          <p:cNvPr id="24" name="TextBox 23"/>
-          <p:cNvSpPr txBox="1"/>
-          <p:nvPr/>
-        </p:nvSpPr>
-        <p:spPr>
-          <a:xfrm>
-            <a:off x="9802368" y="1463040"/>
-            <a:ext cx="2121408" cy="182880"/>
+              <a:t>Alim. Baños</a:t>
+            </a:r>
+          </a:p>
+        </p:txBody>
+      </p:sp>
+      <p:sp>
+        <p:nvSpPr>
+          <p:cNvPr id="13" name="TextBox 12"/>
+          <p:cNvSpPr txBox="1"/>
+          <p:nvPr/>
+        </p:nvSpPr>
+        <p:spPr>
+          <a:xfrm>
+            <a:off x="6236207" y="1444752"/>
+            <a:ext cx="5687568" cy="164592"/>
           </a:xfrm>
           <a:prstGeom prst="rect">
             <a:avLst/>
@@ -6503,14 +7963,14 @@
                 </a:solidFill>
                 <a:latin typeface="Calibri"/>
               </a:rPr>
-              <a:t>residual</a:t>
-            </a:r>
-          </a:p>
-        </p:txBody>
-      </p:sp>
-      <p:sp>
-        <p:nvSpPr>
-          <p:cNvPr id="25" name="Rounded Rectangle 24"/>
+              <a:t>uso hábil</a:t>
+            </a:r>
+          </a:p>
+        </p:txBody>
+      </p:sp>
+      <p:sp>
+        <p:nvSpPr>
+          <p:cNvPr id="14" name="Rounded Rectangle 13"/>
           <p:cNvSpPr/>
           <p:nvPr/>
         </p:nvSpPr>
@@ -6555,7 +8015,7 @@
       </p:sp>
       <p:pic>
         <p:nvPicPr>
-          <p:cNvPr id="26" name="Picture 25" descr="mam_mensual_may_ago.png"/>
+          <p:cNvPr id="15" name="Picture 14" descr="maq_mensual_may_ago.png"/>
           <p:cNvPicPr>
             <a:picLocks noChangeAspect="1"/>
           </p:cNvPicPr>
@@ -6579,7 +8039,7 @@
       </p:pic>
       <p:sp>
         <p:nvSpPr>
-          <p:cNvPr id="27" name="Rounded Rectangle 26"/>
+          <p:cNvPr id="16" name="Rounded Rectangle 15"/>
           <p:cNvSpPr/>
           <p:nvPr/>
         </p:nvSpPr>
@@ -6626,14 +8086,14 @@
       </p:sp>
       <p:sp>
         <p:nvSpPr>
-          <p:cNvPr id="28" name="TextBox 27"/>
+          <p:cNvPr id="17" name="TextBox 16"/>
           <p:cNvSpPr txBox="1"/>
           <p:nvPr/>
         </p:nvSpPr>
         <p:spPr>
           <a:xfrm>
             <a:off x="8430768" y="1847088"/>
-            <a:ext cx="3419856" cy="201168"/>
+            <a:ext cx="3419856" cy="182880"/>
           </a:xfrm>
           <a:prstGeom prst="rect">
             <a:avLst/>
@@ -6665,14 +8125,14 @@
       </p:sp>
       <p:sp>
         <p:nvSpPr>
-          <p:cNvPr id="29" name="TextBox 28"/>
-          <p:cNvSpPr txBox="1"/>
-          <p:nvPr/>
-        </p:nvSpPr>
-        <p:spPr>
-          <a:xfrm>
-            <a:off x="8430768" y="2048256"/>
-            <a:ext cx="3419856" cy="256032"/>
+          <p:cNvPr id="18" name="TextBox 17"/>
+          <p:cNvSpPr txBox="1"/>
+          <p:nvPr/>
+        </p:nvSpPr>
+        <p:spPr>
+          <a:xfrm>
+            <a:off x="8430768" y="2029967"/>
+            <a:ext cx="3419856" cy="219456"/>
           </a:xfrm>
           <a:prstGeom prst="rect">
             <a:avLst/>
@@ -6697,21 +8157,21 @@
                 </a:solidFill>
                 <a:latin typeface="Calibri"/>
               </a:rPr>
-              <a:t>El recinto sumó 10.356 m³</a:t>
-            </a:r>
-          </a:p>
-        </p:txBody>
-      </p:sp>
-      <p:sp>
-        <p:nvSpPr>
-          <p:cNvPr id="30" name="Rounded Rectangle 29"/>
+              <a:t>El recinto sumó 6.056 m³</a:t>
+            </a:r>
+          </a:p>
+        </p:txBody>
+      </p:sp>
+      <p:sp>
+        <p:nvSpPr>
+          <p:cNvPr id="19" name="Rounded Rectangle 18"/>
           <p:cNvSpPr/>
           <p:nvPr/>
         </p:nvSpPr>
         <p:spPr>
           <a:xfrm>
-            <a:off x="8430768" y="2359152"/>
-            <a:ext cx="3419856" cy="603504"/>
+            <a:off x="8430768" y="2267712"/>
+            <a:ext cx="3419856" cy="768096"/>
           </a:xfrm>
           <a:prstGeom prst="roundRect">
             <a:avLst>
@@ -6751,13 +8211,13 @@
       </p:sp>
       <p:sp>
         <p:nvSpPr>
-          <p:cNvPr id="31" name="TextBox 30"/>
-          <p:cNvSpPr txBox="1"/>
-          <p:nvPr/>
-        </p:nvSpPr>
-        <p:spPr>
-          <a:xfrm>
-            <a:off x="8540496" y="2395728"/>
+          <p:cNvPr id="20" name="TextBox 19"/>
+          <p:cNvSpPr txBox="1"/>
+          <p:nvPr/>
+        </p:nvSpPr>
+        <p:spPr>
+          <a:xfrm>
+            <a:off x="8540496" y="2304288"/>
             <a:ext cx="3200400" cy="182880"/>
           </a:xfrm>
           <a:prstGeom prst="rect">
@@ -6783,60 +8243,60 @@
                 </a:solidFill>
                 <a:latin typeface="Calibri"/>
               </a:rPr>
-              <a:t>Placa Bancaria</a:t>
-            </a:r>
-          </a:p>
-        </p:txBody>
-      </p:sp>
-      <p:sp>
-        <p:nvSpPr>
-          <p:cNvPr id="32" name="TextBox 31"/>
-          <p:cNvSpPr txBox="1"/>
-          <p:nvPr/>
-        </p:nvSpPr>
-        <p:spPr>
-          <a:xfrm>
-            <a:off x="8540496" y="2615184"/>
-            <a:ext cx="3200400" cy="274320"/>
-          </a:xfrm>
-          <a:prstGeom prst="rect">
-            <a:avLst/>
-          </a:prstGeom>
-          <a:noFill/>
-        </p:spPr>
-        <p:txBody>
-          <a:bodyPr wrap="square">
-            <a:spAutoFit/>
-          </a:bodyPr>
-          <a:lstStyle/>
-          <a:p>
-            <a:pPr algn="l">
-              <a:spcAft>
-                <a:spcPts val="300"/>
-              </a:spcAft>
-            </a:pPr>
-            <a:r>
-              <a:rPr sz="1500" b="1">
+              <a:t>Matriz Principal</a:t>
+            </a:r>
+          </a:p>
+        </p:txBody>
+      </p:sp>
+      <p:sp>
+        <p:nvSpPr>
+          <p:cNvPr id="21" name="TextBox 20"/>
+          <p:cNvSpPr txBox="1"/>
+          <p:nvPr/>
+        </p:nvSpPr>
+        <p:spPr>
+          <a:xfrm>
+            <a:off x="8540496" y="2590312"/>
+            <a:ext cx="3200400" cy="292608"/>
+          </a:xfrm>
+          <a:prstGeom prst="rect">
+            <a:avLst/>
+          </a:prstGeom>
+          <a:noFill/>
+        </p:spPr>
+        <p:txBody>
+          <a:bodyPr wrap="square">
+            <a:spAutoFit/>
+          </a:bodyPr>
+          <a:lstStyle/>
+          <a:p>
+            <a:pPr algn="l">
+              <a:spcAft>
+                <a:spcPts val="300"/>
+              </a:spcAft>
+            </a:pPr>
+            <a:r>
+              <a:rPr sz="1600" b="1">
                 <a:solidFill>
                   <a:srgbClr val="0D3B66"/>
                 </a:solidFill>
                 <a:latin typeface="Calibri"/>
               </a:rPr>
-              <a:t>7.084 m³    68 %</a:t>
-            </a:r>
-          </a:p>
-        </p:txBody>
-      </p:sp>
-      <p:sp>
-        <p:nvSpPr>
-          <p:cNvPr id="33" name="Rounded Rectangle 32"/>
+              <a:t>5.994 m³    99 %</a:t>
+            </a:r>
+          </a:p>
+        </p:txBody>
+      </p:sp>
+      <p:sp>
+        <p:nvSpPr>
+          <p:cNvPr id="22" name="Rounded Rectangle 21"/>
           <p:cNvSpPr/>
           <p:nvPr/>
         </p:nvSpPr>
         <p:spPr>
           <a:xfrm>
-            <a:off x="8430768" y="2999232"/>
-            <a:ext cx="3419856" cy="603504"/>
+            <a:off x="8430768" y="3904487"/>
+            <a:ext cx="3419856" cy="768096"/>
           </a:xfrm>
           <a:prstGeom prst="roundRect">
             <a:avLst>
@@ -6876,13 +8336,13 @@
       </p:sp>
       <p:sp>
         <p:nvSpPr>
-          <p:cNvPr id="34" name="TextBox 33"/>
-          <p:cNvSpPr txBox="1"/>
-          <p:nvPr/>
-        </p:nvSpPr>
-        <p:spPr>
-          <a:xfrm>
-            <a:off x="8540496" y="3035808"/>
+          <p:cNvPr id="23" name="TextBox 22"/>
+          <p:cNvSpPr txBox="1"/>
+          <p:nvPr/>
+        </p:nvSpPr>
+        <p:spPr>
+          <a:xfrm>
+            <a:off x="8540496" y="3941063"/>
             <a:ext cx="3200400" cy="182880"/>
           </a:xfrm>
           <a:prstGeom prst="rect">
@@ -6908,60 +8368,2692 @@
                 </a:solidFill>
                 <a:latin typeface="Calibri"/>
               </a:rPr>
-              <a:t>Ripley</a:t>
-            </a:r>
-          </a:p>
-        </p:txBody>
-      </p:sp>
-      <p:sp>
-        <p:nvSpPr>
-          <p:cNvPr id="35" name="TextBox 34"/>
-          <p:cNvSpPr txBox="1"/>
-          <p:nvPr/>
-        </p:nvSpPr>
-        <p:spPr>
-          <a:xfrm>
-            <a:off x="8540496" y="3255264"/>
-            <a:ext cx="3200400" cy="274320"/>
-          </a:xfrm>
-          <a:prstGeom prst="rect">
-            <a:avLst/>
-          </a:prstGeom>
-          <a:noFill/>
-        </p:spPr>
-        <p:txBody>
-          <a:bodyPr wrap="square">
-            <a:spAutoFit/>
-          </a:bodyPr>
-          <a:lstStyle/>
-          <a:p>
-            <a:pPr algn="l">
-              <a:spcAft>
-                <a:spcPts val="300"/>
-              </a:spcAft>
-            </a:pPr>
-            <a:r>
-              <a:rPr sz="1500" b="1">
+              <a:t>Alim. Baños</a:t>
+            </a:r>
+          </a:p>
+        </p:txBody>
+      </p:sp>
+      <p:sp>
+        <p:nvSpPr>
+          <p:cNvPr id="24" name="TextBox 23"/>
+          <p:cNvSpPr txBox="1"/>
+          <p:nvPr/>
+        </p:nvSpPr>
+        <p:spPr>
+          <a:xfrm>
+            <a:off x="8540496" y="4227088"/>
+            <a:ext cx="3200400" cy="292608"/>
+          </a:xfrm>
+          <a:prstGeom prst="rect">
+            <a:avLst/>
+          </a:prstGeom>
+          <a:noFill/>
+        </p:spPr>
+        <p:txBody>
+          <a:bodyPr wrap="square">
+            <a:spAutoFit/>
+          </a:bodyPr>
+          <a:lstStyle/>
+          <a:p>
+            <a:pPr algn="l">
+              <a:spcAft>
+                <a:spcPts val="300"/>
+              </a:spcAft>
+            </a:pPr>
+            <a:r>
+              <a:rPr sz="1600" b="1">
                 <a:solidFill>
                   <a:srgbClr val="0D3B66"/>
                 </a:solidFill>
                 <a:latin typeface="Calibri"/>
               </a:rPr>
-              <a:t>3.245 m³    31 %</a:t>
-            </a:r>
-          </a:p>
-        </p:txBody>
-      </p:sp>
-      <p:sp>
-        <p:nvSpPr>
-          <p:cNvPr id="36" name="Rounded Rectangle 35"/>
+              <a:t>62 m³    1 %</a:t>
+            </a:r>
+          </a:p>
+        </p:txBody>
+      </p:sp>
+      <p:sp>
+        <p:nvSpPr>
+          <p:cNvPr id="25" name="Rounded Rectangle 24"/>
           <p:cNvSpPr/>
           <p:nvPr/>
         </p:nvSpPr>
         <p:spPr>
           <a:xfrm>
-            <a:off x="8430768" y="3639312"/>
-            <a:ext cx="3419856" cy="603504"/>
+            <a:off x="201168" y="5705856"/>
+            <a:ext cx="11795760" cy="438912"/>
+          </a:xfrm>
+          <a:prstGeom prst="roundRect">
+            <a:avLst>
+              <a:gd name="adj" fmla="val 8000"/>
+            </a:avLst>
+          </a:prstGeom>
+          <a:solidFill>
+            <a:srgbClr val="FFF9EB"/>
+          </a:solidFill>
+          <a:ln w="6350">
+            <a:solidFill>
+              <a:srgbClr val="C9A227"/>
+            </a:solidFill>
+          </a:ln>
+        </p:spPr>
+        <p:style>
+          <a:lnRef idx="1">
+            <a:schemeClr val="accent1"/>
+          </a:lnRef>
+          <a:fillRef idx="3">
+            <a:schemeClr val="accent1"/>
+          </a:fillRef>
+          <a:effectRef idx="2">
+            <a:schemeClr val="accent1"/>
+          </a:effectRef>
+          <a:fontRef idx="minor">
+            <a:schemeClr val="lt1"/>
+          </a:fontRef>
+        </p:style>
+        <p:txBody>
+          <a:bodyPr rtlCol="0" anchor="ctr"/>
+          <a:lstStyle/>
+          <a:p>
+            <a:pPr algn="ctr"/>
+          </a:p>
+        </p:txBody>
+      </p:sp>
+      <p:sp>
+        <p:nvSpPr>
+          <p:cNvPr id="26" name="TextBox 25"/>
+          <p:cNvSpPr txBox="1"/>
+          <p:nvPr/>
+        </p:nvSpPr>
+        <p:spPr>
+          <a:xfrm>
+            <a:off x="329184" y="5779008"/>
+            <a:ext cx="11539728" cy="310896"/>
+          </a:xfrm>
+          <a:prstGeom prst="rect">
+            <a:avLst/>
+          </a:prstGeom>
+          <a:noFill/>
+        </p:spPr>
+        <p:txBody>
+          <a:bodyPr wrap="square">
+            <a:spAutoFit/>
+          </a:bodyPr>
+          <a:lstStyle/>
+          <a:p>
+            <a:pPr algn="l">
+              <a:spcAft>
+                <a:spcPts val="300"/>
+              </a:spcAft>
+            </a:pPr>
+            <a:r>
+              <a:rPr sz="1100" b="0">
+                <a:solidFill>
+                  <a:srgbClr val="0D3B66"/>
+                </a:solidFill>
+                <a:latin typeface="Calibri"/>
+              </a:rPr>
+              <a:t>Recepción 06/11/2025 / relocalizado 17/02/2026  ·  Capacitación 14/11/2025  ·  Mario Freitez  ·  Tomás Saba  ·  Sebastián Araneda  ·  Mantención: I. Dustan, K. Varas, L. Méndez, C. Leyto</a:t>
+            </a:r>
+          </a:p>
+        </p:txBody>
+      </p:sp>
+      <p:sp>
+        <p:nvSpPr>
+          <p:cNvPr id="27" name="TextBox 26"/>
+          <p:cNvSpPr txBox="1"/>
+          <p:nvPr/>
+        </p:nvSpPr>
+        <p:spPr>
+          <a:xfrm>
+            <a:off x="256032" y="6181344"/>
+            <a:ext cx="11704320" cy="566928"/>
+          </a:xfrm>
+          <a:prstGeom prst="rect">
+            <a:avLst/>
+          </a:prstGeom>
+          <a:noFill/>
+        </p:spPr>
+        <p:txBody>
+          <a:bodyPr wrap="square">
+            <a:spAutoFit/>
+          </a:bodyPr>
+          <a:lstStyle/>
+          <a:p>
+            <a:pPr algn="l">
+              <a:spcAft>
+                <a:spcPts val="300"/>
+              </a:spcAft>
+            </a:pPr>
+            <a:r>
+              <a:rPr sz="1200" b="0">
+                <a:solidFill>
+                  <a:srgbClr val="0D3B66"/>
+                </a:solidFill>
+                <a:latin typeface="Calibri"/>
+              </a:rPr>
+              <a:t>Mayo 3.148   ·   Junio 4.033   ·   Julio 6.056   ·   Agosto 1–17: 3.487   ·   proy. ago 6.360 m³.</a:t>
+            </a:r>
+          </a:p>
+          <a:p>
+            <a:pPr algn="l">
+              <a:spcAft>
+                <a:spcPts val="300"/>
+              </a:spcAft>
+            </a:pPr>
+            <a:r>
+              <a:rPr sz="1100" b="0">
+                <a:solidFill>
+                  <a:srgbClr val="5A5A5A"/>
+                </a:solidFill>
+                <a:latin typeface="Calibri"/>
+              </a:rPr>
+              <a:t>Matriz Principal concentra el recinto; Baños es consumo de uso hábil.</a:t>
+            </a:r>
+          </a:p>
+        </p:txBody>
+      </p:sp>
+    </p:spTree>
+  </p:cSld>
+  <p:clrMapOvr>
+    <a:masterClrMapping/>
+  </p:clrMapOvr>
+</p:sld>
+</file>
+
+<file path=ppt/slides/slide6.xml><?xml version="1.0" encoding="utf-8"?>
+<p:sld xmlns:a="http://schemas.openxmlformats.org/drawingml/2006/main" xmlns:p="http://schemas.openxmlformats.org/presentationml/2006/main" xmlns:r="http://schemas.openxmlformats.org/officeDocument/2006/relationships">
+  <p:cSld>
+    <p:spTree>
+      <p:nvGrpSpPr>
+        <p:cNvPr id="1" name=""/>
+        <p:cNvGrpSpPr/>
+        <p:nvPr/>
+      </p:nvGrpSpPr>
+      <p:grpSpPr/>
+      <p:sp>
+        <p:nvSpPr>
+          <p:cNvPr id="2" name="Rectangle 1"/>
+          <p:cNvSpPr/>
+          <p:nvPr/>
+        </p:nvSpPr>
+        <p:spPr>
+          <a:xfrm>
+            <a:off x="0" y="0"/>
+            <a:ext cx="12191695" cy="841248"/>
+          </a:xfrm>
+          <a:prstGeom prst="rect">
+            <a:avLst/>
+          </a:prstGeom>
+          <a:solidFill>
+            <a:srgbClr val="0D3B66"/>
+          </a:solidFill>
+          <a:ln>
+            <a:noFill/>
+          </a:ln>
+        </p:spPr>
+        <p:style>
+          <a:lnRef idx="1">
+            <a:schemeClr val="accent1"/>
+          </a:lnRef>
+          <a:fillRef idx="3">
+            <a:schemeClr val="accent1"/>
+          </a:fillRef>
+          <a:effectRef idx="2">
+            <a:schemeClr val="accent1"/>
+          </a:effectRef>
+          <a:fontRef idx="minor">
+            <a:schemeClr val="lt1"/>
+          </a:fontRef>
+        </p:style>
+        <p:txBody>
+          <a:bodyPr rtlCol="0" anchor="ctr"/>
+          <a:lstStyle/>
+          <a:p>
+            <a:pPr algn="ctr"/>
+          </a:p>
+        </p:txBody>
+      </p:sp>
+      <p:sp>
+        <p:nvSpPr>
+          <p:cNvPr id="3" name="Rectangle 2"/>
+          <p:cNvSpPr/>
+          <p:nvPr/>
+        </p:nvSpPr>
+        <p:spPr>
+          <a:xfrm>
+            <a:off x="0" y="841248"/>
+            <a:ext cx="12191695" cy="54864"/>
+          </a:xfrm>
+          <a:prstGeom prst="rect">
+            <a:avLst/>
+          </a:prstGeom>
+          <a:solidFill>
+            <a:srgbClr val="C9A227"/>
+          </a:solidFill>
+          <a:ln>
+            <a:noFill/>
+          </a:ln>
+        </p:spPr>
+        <p:style>
+          <a:lnRef idx="1">
+            <a:schemeClr val="accent1"/>
+          </a:lnRef>
+          <a:fillRef idx="3">
+            <a:schemeClr val="accent1"/>
+          </a:fillRef>
+          <a:effectRef idx="2">
+            <a:schemeClr val="accent1"/>
+          </a:effectRef>
+          <a:fontRef idx="minor">
+            <a:schemeClr val="lt1"/>
+          </a:fontRef>
+        </p:style>
+        <p:txBody>
+          <a:bodyPr rtlCol="0" anchor="ctr"/>
+          <a:lstStyle/>
+          <a:p>
+            <a:pPr algn="ctr"/>
+          </a:p>
+        </p:txBody>
+      </p:sp>
+      <p:pic>
+        <p:nvPicPr>
+          <p:cNvPr id="4" name="Picture 3" descr="logo wes.bmp"/>
+          <p:cNvPicPr>
+            <a:picLocks noChangeAspect="1"/>
+          </p:cNvPicPr>
+          <p:nvPr/>
+        </p:nvPicPr>
+        <p:blipFill>
+          <a:blip r:embed="rId2"/>
+          <a:stretch>
+            <a:fillRect/>
+          </a:stretch>
+        </p:blipFill>
+        <p:spPr>
+          <a:xfrm>
+            <a:off x="10835640" y="146304"/>
+            <a:ext cx="1143000" cy="253401"/>
+          </a:xfrm>
+          <a:prstGeom prst="rect">
+            <a:avLst/>
+          </a:prstGeom>
+        </p:spPr>
+      </p:pic>
+      <p:sp>
+        <p:nvSpPr>
+          <p:cNvPr id="5" name="TextBox 4"/>
+          <p:cNvSpPr txBox="1"/>
+          <p:nvPr/>
+        </p:nvSpPr>
+        <p:spPr>
+          <a:xfrm>
+            <a:off x="256032" y="109728"/>
+            <a:ext cx="10607040" cy="384048"/>
+          </a:xfrm>
+          <a:prstGeom prst="rect">
+            <a:avLst/>
+          </a:prstGeom>
+          <a:noFill/>
+        </p:spPr>
+        <p:txBody>
+          <a:bodyPr wrap="square">
+            <a:spAutoFit/>
+          </a:bodyPr>
+          <a:lstStyle/>
+          <a:p>
+            <a:pPr algn="l">
+              <a:spcAft>
+                <a:spcPts val="300"/>
+              </a:spcAft>
+            </a:pPr>
+            <a:r>
+              <a:rPr sz="2000" b="1">
+                <a:solidFill>
+                  <a:srgbClr val="FFFFFF"/>
+                </a:solidFill>
+                <a:latin typeface="Calibri"/>
+              </a:rPr>
+              <a:t>BOM  ·  Equipos y consumo</a:t>
+            </a:r>
+          </a:p>
+        </p:txBody>
+      </p:sp>
+      <p:sp>
+        <p:nvSpPr>
+          <p:cNvPr id="6" name="TextBox 5"/>
+          <p:cNvSpPr txBox="1"/>
+          <p:nvPr/>
+        </p:nvSpPr>
+        <p:spPr>
+          <a:xfrm>
+            <a:off x="256032" y="457200"/>
+            <a:ext cx="10607040" cy="329184"/>
+          </a:xfrm>
+          <a:prstGeom prst="rect">
+            <a:avLst/>
+          </a:prstGeom>
+          <a:noFill/>
+        </p:spPr>
+        <p:txBody>
+          <a:bodyPr wrap="square">
+            <a:spAutoFit/>
+          </a:bodyPr>
+          <a:lstStyle/>
+          <a:p>
+            <a:pPr algn="l">
+              <a:spcAft>
+                <a:spcPts val="300"/>
+              </a:spcAft>
+            </a:pPr>
+            <a:r>
+              <a:rPr sz="1100" b="0">
+                <a:solidFill>
+                  <a:srgbClr val="DCE6F0"/>
+                </a:solidFill>
+                <a:latin typeface="Calibri"/>
+              </a:rPr>
+              <a:t>Buenaventura (San Ignacio)   |   2 puntos WES   |   01/05/2026 – 17/08/2026</a:t>
+            </a:r>
+          </a:p>
+        </p:txBody>
+      </p:sp>
+      <p:sp>
+        <p:nvSpPr>
+          <p:cNvPr id="7" name="Rounded Rectangle 6"/>
+          <p:cNvSpPr/>
+          <p:nvPr/>
+        </p:nvSpPr>
+        <p:spPr>
+          <a:xfrm>
+            <a:off x="201168" y="1024128"/>
+            <a:ext cx="5852160" cy="658368"/>
+          </a:xfrm>
+          <a:prstGeom prst="roundRect">
+            <a:avLst>
+              <a:gd name="adj" fmla="val 8000"/>
+            </a:avLst>
+          </a:prstGeom>
+          <a:solidFill>
+            <a:srgbClr val="F5F7FA"/>
+          </a:solidFill>
+          <a:ln w="6350">
+            <a:solidFill>
+              <a:srgbClr val="0D3B66"/>
+            </a:solidFill>
+          </a:ln>
+        </p:spPr>
+        <p:style>
+          <a:lnRef idx="1">
+            <a:schemeClr val="accent1"/>
+          </a:lnRef>
+          <a:fillRef idx="3">
+            <a:schemeClr val="accent1"/>
+          </a:fillRef>
+          <a:effectRef idx="2">
+            <a:schemeClr val="accent1"/>
+          </a:effectRef>
+          <a:fontRef idx="minor">
+            <a:schemeClr val="lt1"/>
+          </a:fontRef>
+        </p:style>
+        <p:txBody>
+          <a:bodyPr rtlCol="0" anchor="ctr"/>
+          <a:lstStyle/>
+          <a:p>
+            <a:pPr algn="ctr"/>
+          </a:p>
+        </p:txBody>
+      </p:sp>
+      <p:sp>
+        <p:nvSpPr>
+          <p:cNvPr id="8" name="TextBox 7"/>
+          <p:cNvSpPr txBox="1"/>
+          <p:nvPr/>
+        </p:nvSpPr>
+        <p:spPr>
+          <a:xfrm>
+            <a:off x="292608" y="1060704"/>
+            <a:ext cx="5687568" cy="182880"/>
+          </a:xfrm>
+          <a:prstGeom prst="rect">
+            <a:avLst/>
+          </a:prstGeom>
+          <a:noFill/>
+        </p:spPr>
+        <p:txBody>
+          <a:bodyPr wrap="square">
+            <a:spAutoFit/>
+          </a:bodyPr>
+          <a:lstStyle/>
+          <a:p>
+            <a:pPr algn="l">
+              <a:spcAft>
+                <a:spcPts val="300"/>
+              </a:spcAft>
+            </a:pPr>
+            <a:r>
+              <a:rPr sz="1000" b="1">
+                <a:solidFill>
+                  <a:srgbClr val="C9A227"/>
+                </a:solidFill>
+                <a:latin typeface="Calibri"/>
+              </a:rPr>
+              <a:t>000025-18</a:t>
+            </a:r>
+          </a:p>
+        </p:txBody>
+      </p:sp>
+      <p:sp>
+        <p:nvSpPr>
+          <p:cNvPr id="9" name="TextBox 8"/>
+          <p:cNvSpPr txBox="1"/>
+          <p:nvPr/>
+        </p:nvSpPr>
+        <p:spPr>
+          <a:xfrm>
+            <a:off x="292608" y="1243584"/>
+            <a:ext cx="5687568" cy="219456"/>
+          </a:xfrm>
+          <a:prstGeom prst="rect">
+            <a:avLst/>
+          </a:prstGeom>
+          <a:noFill/>
+        </p:spPr>
+        <p:txBody>
+          <a:bodyPr wrap="square">
+            <a:spAutoFit/>
+          </a:bodyPr>
+          <a:lstStyle/>
+          <a:p>
+            <a:pPr algn="l">
+              <a:spcAft>
+                <a:spcPts val="300"/>
+              </a:spcAft>
+            </a:pPr>
+            <a:r>
+              <a:rPr sz="1200" b="1">
+                <a:solidFill>
+                  <a:srgbClr val="0D3B66"/>
+                </a:solidFill>
+                <a:latin typeface="Calibri"/>
+              </a:rPr>
+              <a:t>San Ignacio 500</a:t>
+            </a:r>
+          </a:p>
+        </p:txBody>
+      </p:sp>
+      <p:sp>
+        <p:nvSpPr>
+          <p:cNvPr id="10" name="TextBox 9"/>
+          <p:cNvSpPr txBox="1"/>
+          <p:nvPr/>
+        </p:nvSpPr>
+        <p:spPr>
+          <a:xfrm>
+            <a:off x="292608" y="1444752"/>
+            <a:ext cx="5687568" cy="164592"/>
+          </a:xfrm>
+          <a:prstGeom prst="rect">
+            <a:avLst/>
+          </a:prstGeom>
+          <a:noFill/>
+        </p:spPr>
+        <p:txBody>
+          <a:bodyPr wrap="square">
+            <a:spAutoFit/>
+          </a:bodyPr>
+          <a:lstStyle/>
+          <a:p>
+            <a:pPr algn="l">
+              <a:spcAft>
+                <a:spcPts val="300"/>
+              </a:spcAft>
+            </a:pPr>
+            <a:r>
+              <a:rPr sz="1000" b="0">
+                <a:solidFill>
+                  <a:srgbClr val="5A5A5A"/>
+                </a:solidFill>
+                <a:latin typeface="Calibri"/>
+              </a:rPr>
+              <a:t>control 16/07</a:t>
+            </a:r>
+          </a:p>
+        </p:txBody>
+      </p:sp>
+      <p:sp>
+        <p:nvSpPr>
+          <p:cNvPr id="11" name="Rounded Rectangle 10"/>
+          <p:cNvSpPr/>
+          <p:nvPr/>
+        </p:nvSpPr>
+        <p:spPr>
+          <a:xfrm>
+            <a:off x="6144768" y="1024128"/>
+            <a:ext cx="5852160" cy="658368"/>
+          </a:xfrm>
+          <a:prstGeom prst="roundRect">
+            <a:avLst>
+              <a:gd name="adj" fmla="val 8000"/>
+            </a:avLst>
+          </a:prstGeom>
+          <a:solidFill>
+            <a:srgbClr val="F5F7FA"/>
+          </a:solidFill>
+          <a:ln w="6350">
+            <a:solidFill>
+              <a:srgbClr val="C45C26"/>
+            </a:solidFill>
+          </a:ln>
+        </p:spPr>
+        <p:style>
+          <a:lnRef idx="1">
+            <a:schemeClr val="accent1"/>
+          </a:lnRef>
+          <a:fillRef idx="3">
+            <a:schemeClr val="accent1"/>
+          </a:fillRef>
+          <a:effectRef idx="2">
+            <a:schemeClr val="accent1"/>
+          </a:effectRef>
+          <a:fontRef idx="minor">
+            <a:schemeClr val="lt1"/>
+          </a:fontRef>
+        </p:style>
+        <p:txBody>
+          <a:bodyPr rtlCol="0" anchor="ctr"/>
+          <a:lstStyle/>
+          <a:p>
+            <a:pPr algn="ctr"/>
+          </a:p>
+        </p:txBody>
+      </p:sp>
+      <p:sp>
+        <p:nvSpPr>
+          <p:cNvPr id="12" name="TextBox 11"/>
+          <p:cNvSpPr txBox="1"/>
+          <p:nvPr/>
+        </p:nvSpPr>
+        <p:spPr>
+          <a:xfrm>
+            <a:off x="6236207" y="1060704"/>
+            <a:ext cx="5687568" cy="182880"/>
+          </a:xfrm>
+          <a:prstGeom prst="rect">
+            <a:avLst/>
+          </a:prstGeom>
+          <a:noFill/>
+        </p:spPr>
+        <p:txBody>
+          <a:bodyPr wrap="square">
+            <a:spAutoFit/>
+          </a:bodyPr>
+          <a:lstStyle/>
+          <a:p>
+            <a:pPr algn="l">
+              <a:spcAft>
+                <a:spcPts val="300"/>
+              </a:spcAft>
+            </a:pPr>
+            <a:r>
+              <a:rPr sz="1000" b="1">
+                <a:solidFill>
+                  <a:srgbClr val="C9A227"/>
+                </a:solidFill>
+                <a:latin typeface="Calibri"/>
+              </a:rPr>
+              <a:t>000025-17</a:t>
+            </a:r>
+          </a:p>
+        </p:txBody>
+      </p:sp>
+      <p:sp>
+        <p:nvSpPr>
+          <p:cNvPr id="13" name="TextBox 12"/>
+          <p:cNvSpPr txBox="1"/>
+          <p:nvPr/>
+        </p:nvSpPr>
+        <p:spPr>
+          <a:xfrm>
+            <a:off x="6236207" y="1243584"/>
+            <a:ext cx="5687568" cy="219456"/>
+          </a:xfrm>
+          <a:prstGeom prst="rect">
+            <a:avLst/>
+          </a:prstGeom>
+          <a:noFill/>
+        </p:spPr>
+        <p:txBody>
+          <a:bodyPr wrap="square">
+            <a:spAutoFit/>
+          </a:bodyPr>
+          <a:lstStyle/>
+          <a:p>
+            <a:pPr algn="l">
+              <a:spcAft>
+                <a:spcPts val="300"/>
+              </a:spcAft>
+            </a:pPr>
+            <a:r>
+              <a:rPr sz="1200" b="1">
+                <a:solidFill>
+                  <a:srgbClr val="0D3B66"/>
+                </a:solidFill>
+                <a:latin typeface="Calibri"/>
+              </a:rPr>
+              <a:t>San Ignacio 300</a:t>
+            </a:r>
+          </a:p>
+        </p:txBody>
+      </p:sp>
+      <p:sp>
+        <p:nvSpPr>
+          <p:cNvPr id="14" name="TextBox 13"/>
+          <p:cNvSpPr txBox="1"/>
+          <p:nvPr/>
+        </p:nvSpPr>
+        <p:spPr>
+          <a:xfrm>
+            <a:off x="6236207" y="1444752"/>
+            <a:ext cx="5687568" cy="164592"/>
+          </a:xfrm>
+          <a:prstGeom prst="rect">
+            <a:avLst/>
+          </a:prstGeom>
+          <a:noFill/>
+        </p:spPr>
+        <p:txBody>
+          <a:bodyPr wrap="square">
+            <a:spAutoFit/>
+          </a:bodyPr>
+          <a:lstStyle/>
+          <a:p>
+            <a:pPr algn="l">
+              <a:spcAft>
+                <a:spcPts val="300"/>
+              </a:spcAft>
+            </a:pPr>
+            <a:r>
+              <a:rPr sz="1000" b="0">
+                <a:solidFill>
+                  <a:srgbClr val="5A5A5A"/>
+                </a:solidFill>
+                <a:latin typeface="Calibri"/>
+              </a:rPr>
+              <a:t>monitoreo</a:t>
+            </a:r>
+          </a:p>
+        </p:txBody>
+      </p:sp>
+      <p:sp>
+        <p:nvSpPr>
+          <p:cNvPr id="15" name="Rounded Rectangle 14"/>
+          <p:cNvSpPr/>
+          <p:nvPr/>
+        </p:nvSpPr>
+        <p:spPr>
+          <a:xfrm>
+            <a:off x="201168" y="1792224"/>
+            <a:ext cx="7973568" cy="3822191"/>
+          </a:xfrm>
+          <a:prstGeom prst="roundRect">
+            <a:avLst>
+              <a:gd name="adj" fmla="val 8000"/>
+            </a:avLst>
+          </a:prstGeom>
+          <a:solidFill>
+            <a:srgbClr val="F5F7FA"/>
+          </a:solidFill>
+          <a:ln>
+            <a:noFill/>
+          </a:ln>
+        </p:spPr>
+        <p:style>
+          <a:lnRef idx="1">
+            <a:schemeClr val="accent1"/>
+          </a:lnRef>
+          <a:fillRef idx="3">
+            <a:schemeClr val="accent1"/>
+          </a:fillRef>
+          <a:effectRef idx="2">
+            <a:schemeClr val="accent1"/>
+          </a:effectRef>
+          <a:fontRef idx="minor">
+            <a:schemeClr val="lt1"/>
+          </a:fontRef>
+        </p:style>
+        <p:txBody>
+          <a:bodyPr rtlCol="0" anchor="ctr"/>
+          <a:lstStyle/>
+          <a:p>
+            <a:pPr algn="ctr"/>
+          </a:p>
+        </p:txBody>
+      </p:sp>
+      <p:pic>
+        <p:nvPicPr>
+          <p:cNvPr id="16" name="Picture 15" descr="bom_mensual_may_ago.png"/>
+          <p:cNvPicPr>
+            <a:picLocks noChangeAspect="1"/>
+          </p:cNvPicPr>
+          <p:nvPr/>
+        </p:nvPicPr>
+        <p:blipFill>
+          <a:blip r:embed="rId3"/>
+          <a:stretch>
+            <a:fillRect/>
+          </a:stretch>
+        </p:blipFill>
+        <p:spPr>
+          <a:xfrm>
+            <a:off x="329184" y="1865376"/>
+            <a:ext cx="7717536" cy="3777531"/>
+          </a:xfrm>
+          <a:prstGeom prst="rect">
+            <a:avLst/>
+          </a:prstGeom>
+        </p:spPr>
+      </p:pic>
+      <p:sp>
+        <p:nvSpPr>
+          <p:cNvPr id="17" name="Rounded Rectangle 16"/>
+          <p:cNvSpPr/>
+          <p:nvPr/>
+        </p:nvSpPr>
+        <p:spPr>
+          <a:xfrm>
+            <a:off x="8302752" y="1792224"/>
+            <a:ext cx="3675887" cy="3822191"/>
+          </a:xfrm>
+          <a:prstGeom prst="roundRect">
+            <a:avLst>
+              <a:gd name="adj" fmla="val 8000"/>
+            </a:avLst>
+          </a:prstGeom>
+          <a:solidFill>
+            <a:srgbClr val="FFFFFF"/>
+          </a:solidFill>
+          <a:ln w="6350">
+            <a:solidFill>
+              <a:srgbClr val="1F77B4"/>
+            </a:solidFill>
+          </a:ln>
+        </p:spPr>
+        <p:style>
+          <a:lnRef idx="1">
+            <a:schemeClr val="accent1"/>
+          </a:lnRef>
+          <a:fillRef idx="3">
+            <a:schemeClr val="accent1"/>
+          </a:fillRef>
+          <a:effectRef idx="2">
+            <a:schemeClr val="accent1"/>
+          </a:effectRef>
+          <a:fontRef idx="minor">
+            <a:schemeClr val="lt1"/>
+          </a:fontRef>
+        </p:style>
+        <p:txBody>
+          <a:bodyPr rtlCol="0" anchor="ctr"/>
+          <a:lstStyle/>
+          <a:p>
+            <a:pPr algn="ctr"/>
+          </a:p>
+        </p:txBody>
+      </p:sp>
+      <p:sp>
+        <p:nvSpPr>
+          <p:cNvPr id="18" name="TextBox 17"/>
+          <p:cNvSpPr txBox="1"/>
+          <p:nvPr/>
+        </p:nvSpPr>
+        <p:spPr>
+          <a:xfrm>
+            <a:off x="8430768" y="1847088"/>
+            <a:ext cx="3419856" cy="182880"/>
+          </a:xfrm>
+          <a:prstGeom prst="rect">
+            <a:avLst/>
+          </a:prstGeom>
+          <a:noFill/>
+        </p:spPr>
+        <p:txBody>
+          <a:bodyPr wrap="square">
+            <a:spAutoFit/>
+          </a:bodyPr>
+          <a:lstStyle/>
+          <a:p>
+            <a:pPr algn="l">
+              <a:spcAft>
+                <a:spcPts val="300"/>
+              </a:spcAft>
+            </a:pPr>
+            <a:r>
+              <a:rPr sz="1100" b="1">
+                <a:solidFill>
+                  <a:srgbClr val="1F77B4"/>
+                </a:solidFill>
+                <a:latin typeface="Calibri"/>
+              </a:rPr>
+              <a:t>JULIO · último mes cerrado</a:t>
+            </a:r>
+          </a:p>
+        </p:txBody>
+      </p:sp>
+      <p:sp>
+        <p:nvSpPr>
+          <p:cNvPr id="19" name="TextBox 18"/>
+          <p:cNvSpPr txBox="1"/>
+          <p:nvPr/>
+        </p:nvSpPr>
+        <p:spPr>
+          <a:xfrm>
+            <a:off x="8430768" y="2029967"/>
+            <a:ext cx="3419856" cy="219456"/>
+          </a:xfrm>
+          <a:prstGeom prst="rect">
+            <a:avLst/>
+          </a:prstGeom>
+          <a:noFill/>
+        </p:spPr>
+        <p:txBody>
+          <a:bodyPr wrap="square">
+            <a:spAutoFit/>
+          </a:bodyPr>
+          <a:lstStyle/>
+          <a:p>
+            <a:pPr algn="l">
+              <a:spcAft>
+                <a:spcPts val="300"/>
+              </a:spcAft>
+            </a:pPr>
+            <a:r>
+              <a:rPr sz="1200" b="0">
+                <a:solidFill>
+                  <a:srgbClr val="5A5A5A"/>
+                </a:solidFill>
+                <a:latin typeface="Calibri"/>
+              </a:rPr>
+              <a:t>El recinto sumó 5.116 m³</a:t>
+            </a:r>
+          </a:p>
+        </p:txBody>
+      </p:sp>
+      <p:sp>
+        <p:nvSpPr>
+          <p:cNvPr id="20" name="Rounded Rectangle 19"/>
+          <p:cNvSpPr/>
+          <p:nvPr/>
+        </p:nvSpPr>
+        <p:spPr>
+          <a:xfrm>
+            <a:off x="8430768" y="2267712"/>
+            <a:ext cx="3419856" cy="768096"/>
+          </a:xfrm>
+          <a:prstGeom prst="roundRect">
+            <a:avLst>
+              <a:gd name="adj" fmla="val 8000"/>
+            </a:avLst>
+          </a:prstGeom>
+          <a:solidFill>
+            <a:srgbClr val="F5F7FA"/>
+          </a:solidFill>
+          <a:ln w="6350">
+            <a:solidFill>
+              <a:srgbClr val="0D3B66"/>
+            </a:solidFill>
+          </a:ln>
+        </p:spPr>
+        <p:style>
+          <a:lnRef idx="1">
+            <a:schemeClr val="accent1"/>
+          </a:lnRef>
+          <a:fillRef idx="3">
+            <a:schemeClr val="accent1"/>
+          </a:fillRef>
+          <a:effectRef idx="2">
+            <a:schemeClr val="accent1"/>
+          </a:effectRef>
+          <a:fontRef idx="minor">
+            <a:schemeClr val="lt1"/>
+          </a:fontRef>
+        </p:style>
+        <p:txBody>
+          <a:bodyPr rtlCol="0" anchor="ctr"/>
+          <a:lstStyle/>
+          <a:p>
+            <a:pPr algn="ctr"/>
+          </a:p>
+        </p:txBody>
+      </p:sp>
+      <p:sp>
+        <p:nvSpPr>
+          <p:cNvPr id="21" name="TextBox 20"/>
+          <p:cNvSpPr txBox="1"/>
+          <p:nvPr/>
+        </p:nvSpPr>
+        <p:spPr>
+          <a:xfrm>
+            <a:off x="8540496" y="2304288"/>
+            <a:ext cx="3200400" cy="182880"/>
+          </a:xfrm>
+          <a:prstGeom prst="rect">
+            <a:avLst/>
+          </a:prstGeom>
+          <a:noFill/>
+        </p:spPr>
+        <p:txBody>
+          <a:bodyPr wrap="square">
+            <a:spAutoFit/>
+          </a:bodyPr>
+          <a:lstStyle/>
+          <a:p>
+            <a:pPr algn="l">
+              <a:spcAft>
+                <a:spcPts val="300"/>
+              </a:spcAft>
+            </a:pPr>
+            <a:r>
+              <a:rPr sz="1300" b="1">
+                <a:solidFill>
+                  <a:srgbClr val="0D3B66"/>
+                </a:solidFill>
+                <a:latin typeface="Calibri"/>
+              </a:rPr>
+              <a:t>San Ignacio 500</a:t>
+            </a:r>
+          </a:p>
+        </p:txBody>
+      </p:sp>
+      <p:sp>
+        <p:nvSpPr>
+          <p:cNvPr id="22" name="TextBox 21"/>
+          <p:cNvSpPr txBox="1"/>
+          <p:nvPr/>
+        </p:nvSpPr>
+        <p:spPr>
+          <a:xfrm>
+            <a:off x="8540496" y="2590312"/>
+            <a:ext cx="3200400" cy="292608"/>
+          </a:xfrm>
+          <a:prstGeom prst="rect">
+            <a:avLst/>
+          </a:prstGeom>
+          <a:noFill/>
+        </p:spPr>
+        <p:txBody>
+          <a:bodyPr wrap="square">
+            <a:spAutoFit/>
+          </a:bodyPr>
+          <a:lstStyle/>
+          <a:p>
+            <a:pPr algn="l">
+              <a:spcAft>
+                <a:spcPts val="300"/>
+              </a:spcAft>
+            </a:pPr>
+            <a:r>
+              <a:rPr sz="1600" b="1">
+                <a:solidFill>
+                  <a:srgbClr val="0D3B66"/>
+                </a:solidFill>
+                <a:latin typeface="Calibri"/>
+              </a:rPr>
+              <a:t>4.067 m³    79 %</a:t>
+            </a:r>
+          </a:p>
+        </p:txBody>
+      </p:sp>
+      <p:sp>
+        <p:nvSpPr>
+          <p:cNvPr id="23" name="Rounded Rectangle 22"/>
+          <p:cNvSpPr/>
+          <p:nvPr/>
+        </p:nvSpPr>
+        <p:spPr>
+          <a:xfrm>
+            <a:off x="8430768" y="3904487"/>
+            <a:ext cx="3419856" cy="768096"/>
+          </a:xfrm>
+          <a:prstGeom prst="roundRect">
+            <a:avLst>
+              <a:gd name="adj" fmla="val 8000"/>
+            </a:avLst>
+          </a:prstGeom>
+          <a:solidFill>
+            <a:srgbClr val="F5F7FA"/>
+          </a:solidFill>
+          <a:ln w="6350">
+            <a:solidFill>
+              <a:srgbClr val="C45C26"/>
+            </a:solidFill>
+          </a:ln>
+        </p:spPr>
+        <p:style>
+          <a:lnRef idx="1">
+            <a:schemeClr val="accent1"/>
+          </a:lnRef>
+          <a:fillRef idx="3">
+            <a:schemeClr val="accent1"/>
+          </a:fillRef>
+          <a:effectRef idx="2">
+            <a:schemeClr val="accent1"/>
+          </a:effectRef>
+          <a:fontRef idx="minor">
+            <a:schemeClr val="lt1"/>
+          </a:fontRef>
+        </p:style>
+        <p:txBody>
+          <a:bodyPr rtlCol="0" anchor="ctr"/>
+          <a:lstStyle/>
+          <a:p>
+            <a:pPr algn="ctr"/>
+          </a:p>
+        </p:txBody>
+      </p:sp>
+      <p:sp>
+        <p:nvSpPr>
+          <p:cNvPr id="24" name="TextBox 23"/>
+          <p:cNvSpPr txBox="1"/>
+          <p:nvPr/>
+        </p:nvSpPr>
+        <p:spPr>
+          <a:xfrm>
+            <a:off x="8540496" y="3941063"/>
+            <a:ext cx="3200400" cy="182880"/>
+          </a:xfrm>
+          <a:prstGeom prst="rect">
+            <a:avLst/>
+          </a:prstGeom>
+          <a:noFill/>
+        </p:spPr>
+        <p:txBody>
+          <a:bodyPr wrap="square">
+            <a:spAutoFit/>
+          </a:bodyPr>
+          <a:lstStyle/>
+          <a:p>
+            <a:pPr algn="l">
+              <a:spcAft>
+                <a:spcPts val="300"/>
+              </a:spcAft>
+            </a:pPr>
+            <a:r>
+              <a:rPr sz="1300" b="1">
+                <a:solidFill>
+                  <a:srgbClr val="C45C26"/>
+                </a:solidFill>
+                <a:latin typeface="Calibri"/>
+              </a:rPr>
+              <a:t>San Ignacio 300</a:t>
+            </a:r>
+          </a:p>
+        </p:txBody>
+      </p:sp>
+      <p:sp>
+        <p:nvSpPr>
+          <p:cNvPr id="25" name="TextBox 24"/>
+          <p:cNvSpPr txBox="1"/>
+          <p:nvPr/>
+        </p:nvSpPr>
+        <p:spPr>
+          <a:xfrm>
+            <a:off x="8540496" y="4227088"/>
+            <a:ext cx="3200400" cy="292608"/>
+          </a:xfrm>
+          <a:prstGeom prst="rect">
+            <a:avLst/>
+          </a:prstGeom>
+          <a:noFill/>
+        </p:spPr>
+        <p:txBody>
+          <a:bodyPr wrap="square">
+            <a:spAutoFit/>
+          </a:bodyPr>
+          <a:lstStyle/>
+          <a:p>
+            <a:pPr algn="l">
+              <a:spcAft>
+                <a:spcPts val="300"/>
+              </a:spcAft>
+            </a:pPr>
+            <a:r>
+              <a:rPr sz="1600" b="1">
+                <a:solidFill>
+                  <a:srgbClr val="0D3B66"/>
+                </a:solidFill>
+                <a:latin typeface="Calibri"/>
+              </a:rPr>
+              <a:t>1.049 m³    21 %</a:t>
+            </a:r>
+          </a:p>
+        </p:txBody>
+      </p:sp>
+      <p:sp>
+        <p:nvSpPr>
+          <p:cNvPr id="26" name="Rounded Rectangle 25"/>
+          <p:cNvSpPr/>
+          <p:nvPr/>
+        </p:nvSpPr>
+        <p:spPr>
+          <a:xfrm>
+            <a:off x="201168" y="5705856"/>
+            <a:ext cx="11795760" cy="438912"/>
+          </a:xfrm>
+          <a:prstGeom prst="roundRect">
+            <a:avLst>
+              <a:gd name="adj" fmla="val 8000"/>
+            </a:avLst>
+          </a:prstGeom>
+          <a:solidFill>
+            <a:srgbClr val="FFF9EB"/>
+          </a:solidFill>
+          <a:ln w="6350">
+            <a:solidFill>
+              <a:srgbClr val="C9A227"/>
+            </a:solidFill>
+          </a:ln>
+        </p:spPr>
+        <p:style>
+          <a:lnRef idx="1">
+            <a:schemeClr val="accent1"/>
+          </a:lnRef>
+          <a:fillRef idx="3">
+            <a:schemeClr val="accent1"/>
+          </a:fillRef>
+          <a:effectRef idx="2">
+            <a:schemeClr val="accent1"/>
+          </a:effectRef>
+          <a:fontRef idx="minor">
+            <a:schemeClr val="lt1"/>
+          </a:fontRef>
+        </p:style>
+        <p:txBody>
+          <a:bodyPr rtlCol="0" anchor="ctr"/>
+          <a:lstStyle/>
+          <a:p>
+            <a:pPr algn="ctr"/>
+          </a:p>
+        </p:txBody>
+      </p:sp>
+      <p:sp>
+        <p:nvSpPr>
+          <p:cNvPr id="27" name="TextBox 26"/>
+          <p:cNvSpPr txBox="1"/>
+          <p:nvPr/>
+        </p:nvSpPr>
+        <p:spPr>
+          <a:xfrm>
+            <a:off x="329184" y="5779008"/>
+            <a:ext cx="11539728" cy="310896"/>
+          </a:xfrm>
+          <a:prstGeom prst="rect">
+            <a:avLst/>
+          </a:prstGeom>
+          <a:noFill/>
+        </p:spPr>
+        <p:txBody>
+          <a:bodyPr wrap="square">
+            <a:spAutoFit/>
+          </a:bodyPr>
+          <a:lstStyle/>
+          <a:p>
+            <a:pPr algn="l">
+              <a:spcAft>
+                <a:spcPts val="300"/>
+              </a:spcAft>
+            </a:pPr>
+            <a:r>
+              <a:rPr sz="1100" b="0">
+                <a:solidFill>
+                  <a:srgbClr val="0D3B66"/>
+                </a:solidFill>
+                <a:latin typeface="Calibri"/>
+              </a:rPr>
+              <a:t>Recepción 18/11/2025  ·  Capacitación 11/12/2025  ·  Aliro Cortés  ·  Tomás Saba  ·  Sebastián Araneda</a:t>
+            </a:r>
+          </a:p>
+        </p:txBody>
+      </p:sp>
+      <p:sp>
+        <p:nvSpPr>
+          <p:cNvPr id="28" name="TextBox 27"/>
+          <p:cNvSpPr txBox="1"/>
+          <p:nvPr/>
+        </p:nvSpPr>
+        <p:spPr>
+          <a:xfrm>
+            <a:off x="256032" y="6181344"/>
+            <a:ext cx="11704320" cy="566928"/>
+          </a:xfrm>
+          <a:prstGeom prst="rect">
+            <a:avLst/>
+          </a:prstGeom>
+          <a:noFill/>
+        </p:spPr>
+        <p:txBody>
+          <a:bodyPr wrap="square">
+            <a:spAutoFit/>
+          </a:bodyPr>
+          <a:lstStyle/>
+          <a:p>
+            <a:pPr algn="l">
+              <a:spcAft>
+                <a:spcPts val="300"/>
+              </a:spcAft>
+            </a:pPr>
+            <a:r>
+              <a:rPr sz="1200" b="0">
+                <a:solidFill>
+                  <a:srgbClr val="0D3B66"/>
+                </a:solidFill>
+                <a:latin typeface="Calibri"/>
+              </a:rPr>
+              <a:t>Mayo 1.565   ·   Junio 1.762   ·   Julio 5.116   ·   Agosto 1–17: 2.686   ·   proy. ago 4.899 m³.</a:t>
+            </a:r>
+          </a:p>
+          <a:p>
+            <a:pPr algn="l">
+              <a:spcAft>
+                <a:spcPts val="300"/>
+              </a:spcAft>
+            </a:pPr>
+            <a:r>
+              <a:rPr sz="1100" b="0">
+                <a:solidFill>
+                  <a:srgbClr val="5A5A5A"/>
+                </a:solidFill>
+                <a:latin typeface="Calibri"/>
+              </a:rPr>
+              <a:t>San Ignacio 500 es el mayor volumen; 300 queda en monitoreo.</a:t>
+            </a:r>
+          </a:p>
+        </p:txBody>
+      </p:sp>
+    </p:spTree>
+  </p:cSld>
+  <p:clrMapOvr>
+    <a:masterClrMapping/>
+  </p:clrMapOvr>
+</p:sld>
+</file>
+
+<file path=ppt/slides/slide7.xml><?xml version="1.0" encoding="utf-8"?>
+<p:sld xmlns:a="http://schemas.openxmlformats.org/drawingml/2006/main" xmlns:p="http://schemas.openxmlformats.org/presentationml/2006/main" xmlns:r="http://schemas.openxmlformats.org/officeDocument/2006/relationships">
+  <p:cSld>
+    <p:spTree>
+      <p:nvGrpSpPr>
+        <p:cNvPr id="1" name=""/>
+        <p:cNvGrpSpPr/>
+        <p:nvPr/>
+      </p:nvGrpSpPr>
+      <p:grpSpPr/>
+      <p:sp>
+        <p:nvSpPr>
+          <p:cNvPr id="2" name="Rectangle 1"/>
+          <p:cNvSpPr/>
+          <p:nvPr/>
+        </p:nvSpPr>
+        <p:spPr>
+          <a:xfrm>
+            <a:off x="0" y="0"/>
+            <a:ext cx="12191695" cy="841248"/>
+          </a:xfrm>
+          <a:prstGeom prst="rect">
+            <a:avLst/>
+          </a:prstGeom>
+          <a:solidFill>
+            <a:srgbClr val="0D3B66"/>
+          </a:solidFill>
+          <a:ln>
+            <a:noFill/>
+          </a:ln>
+        </p:spPr>
+        <p:style>
+          <a:lnRef idx="1">
+            <a:schemeClr val="accent1"/>
+          </a:lnRef>
+          <a:fillRef idx="3">
+            <a:schemeClr val="accent1"/>
+          </a:fillRef>
+          <a:effectRef idx="2">
+            <a:schemeClr val="accent1"/>
+          </a:effectRef>
+          <a:fontRef idx="minor">
+            <a:schemeClr val="lt1"/>
+          </a:fontRef>
+        </p:style>
+        <p:txBody>
+          <a:bodyPr rtlCol="0" anchor="ctr"/>
+          <a:lstStyle/>
+          <a:p>
+            <a:pPr algn="ctr"/>
+          </a:p>
+        </p:txBody>
+      </p:sp>
+      <p:sp>
+        <p:nvSpPr>
+          <p:cNvPr id="3" name="Rectangle 2"/>
+          <p:cNvSpPr/>
+          <p:nvPr/>
+        </p:nvSpPr>
+        <p:spPr>
+          <a:xfrm>
+            <a:off x="0" y="841248"/>
+            <a:ext cx="12191695" cy="54864"/>
+          </a:xfrm>
+          <a:prstGeom prst="rect">
+            <a:avLst/>
+          </a:prstGeom>
+          <a:solidFill>
+            <a:srgbClr val="C9A227"/>
+          </a:solidFill>
+          <a:ln>
+            <a:noFill/>
+          </a:ln>
+        </p:spPr>
+        <p:style>
+          <a:lnRef idx="1">
+            <a:schemeClr val="accent1"/>
+          </a:lnRef>
+          <a:fillRef idx="3">
+            <a:schemeClr val="accent1"/>
+          </a:fillRef>
+          <a:effectRef idx="2">
+            <a:schemeClr val="accent1"/>
+          </a:effectRef>
+          <a:fontRef idx="minor">
+            <a:schemeClr val="lt1"/>
+          </a:fontRef>
+        </p:style>
+        <p:txBody>
+          <a:bodyPr rtlCol="0" anchor="ctr"/>
+          <a:lstStyle/>
+          <a:p>
+            <a:pPr algn="ctr"/>
+          </a:p>
+        </p:txBody>
+      </p:sp>
+      <p:pic>
+        <p:nvPicPr>
+          <p:cNvPr id="4" name="Picture 3" descr="logo wes.bmp"/>
+          <p:cNvPicPr>
+            <a:picLocks noChangeAspect="1"/>
+          </p:cNvPicPr>
+          <p:nvPr/>
+        </p:nvPicPr>
+        <p:blipFill>
+          <a:blip r:embed="rId2"/>
+          <a:stretch>
+            <a:fillRect/>
+          </a:stretch>
+        </p:blipFill>
+        <p:spPr>
+          <a:xfrm>
+            <a:off x="10835640" y="146304"/>
+            <a:ext cx="1143000" cy="253401"/>
+          </a:xfrm>
+          <a:prstGeom prst="rect">
+            <a:avLst/>
+          </a:prstGeom>
+        </p:spPr>
+      </p:pic>
+      <p:sp>
+        <p:nvSpPr>
+          <p:cNvPr id="5" name="TextBox 4"/>
+          <p:cNvSpPr txBox="1"/>
+          <p:nvPr/>
+        </p:nvSpPr>
+        <p:spPr>
+          <a:xfrm>
+            <a:off x="256032" y="109728"/>
+            <a:ext cx="10607040" cy="384048"/>
+          </a:xfrm>
+          <a:prstGeom prst="rect">
+            <a:avLst/>
+          </a:prstGeom>
+          <a:noFill/>
+        </p:spPr>
+        <p:txBody>
+          <a:bodyPr wrap="square">
+            <a:spAutoFit/>
+          </a:bodyPr>
+          <a:lstStyle/>
+          <a:p>
+            <a:pPr algn="l">
+              <a:spcAft>
+                <a:spcPts val="300"/>
+              </a:spcAft>
+            </a:pPr>
+            <a:r>
+              <a:rPr sz="2000" b="1">
+                <a:solidFill>
+                  <a:srgbClr val="FFFFFF"/>
+                </a:solidFill>
+                <a:latin typeface="Calibri"/>
+              </a:rPr>
+              <a:t>AEB  ·  Equipos y consumo</a:t>
+            </a:r>
+          </a:p>
+        </p:txBody>
+      </p:sp>
+      <p:sp>
+        <p:nvSpPr>
+          <p:cNvPr id="6" name="TextBox 5"/>
+          <p:cNvSpPr txBox="1"/>
+          <p:nvPr/>
+        </p:nvSpPr>
+        <p:spPr>
+          <a:xfrm>
+            <a:off x="256032" y="457200"/>
+            <a:ext cx="10607040" cy="329184"/>
+          </a:xfrm>
+          <a:prstGeom prst="rect">
+            <a:avLst/>
+          </a:prstGeom>
+          <a:noFill/>
+        </p:spPr>
+        <p:txBody>
+          <a:bodyPr wrap="square">
+            <a:spAutoFit/>
+          </a:bodyPr>
+          <a:lstStyle/>
+          <a:p>
+            <a:pPr algn="l">
+              <a:spcAft>
+                <a:spcPts val="300"/>
+              </a:spcAft>
+            </a:pPr>
+            <a:r>
+              <a:rPr sz="1100" b="0">
+                <a:solidFill>
+                  <a:srgbClr val="DCE6F0"/>
+                </a:solidFill>
+                <a:latin typeface="Calibri"/>
+              </a:rPr>
+              <a:t>Arauco El Bosque   |   2 puntos WES   |   01/05/2026 – 17/08/2026</a:t>
+            </a:r>
+          </a:p>
+        </p:txBody>
+      </p:sp>
+      <p:sp>
+        <p:nvSpPr>
+          <p:cNvPr id="7" name="Rounded Rectangle 6"/>
+          <p:cNvSpPr/>
+          <p:nvPr/>
+        </p:nvSpPr>
+        <p:spPr>
+          <a:xfrm>
+            <a:off x="201168" y="1024128"/>
+            <a:ext cx="5852160" cy="658368"/>
+          </a:xfrm>
+          <a:prstGeom prst="roundRect">
+            <a:avLst>
+              <a:gd name="adj" fmla="val 8000"/>
+            </a:avLst>
+          </a:prstGeom>
+          <a:solidFill>
+            <a:srgbClr val="F5F7FA"/>
+          </a:solidFill>
+          <a:ln w="6350">
+            <a:solidFill>
+              <a:srgbClr val="C45C26"/>
+            </a:solidFill>
+          </a:ln>
+        </p:spPr>
+        <p:style>
+          <a:lnRef idx="1">
+            <a:schemeClr val="accent1"/>
+          </a:lnRef>
+          <a:fillRef idx="3">
+            <a:schemeClr val="accent1"/>
+          </a:fillRef>
+          <a:effectRef idx="2">
+            <a:schemeClr val="accent1"/>
+          </a:effectRef>
+          <a:fontRef idx="minor">
+            <a:schemeClr val="lt1"/>
+          </a:fontRef>
+        </p:style>
+        <p:txBody>
+          <a:bodyPr rtlCol="0" anchor="ctr"/>
+          <a:lstStyle/>
+          <a:p>
+            <a:pPr algn="ctr"/>
+          </a:p>
+        </p:txBody>
+      </p:sp>
+      <p:sp>
+        <p:nvSpPr>
+          <p:cNvPr id="8" name="TextBox 7"/>
+          <p:cNvSpPr txBox="1"/>
+          <p:nvPr/>
+        </p:nvSpPr>
+        <p:spPr>
+          <a:xfrm>
+            <a:off x="292608" y="1060704"/>
+            <a:ext cx="5687568" cy="182880"/>
+          </a:xfrm>
+          <a:prstGeom prst="rect">
+            <a:avLst/>
+          </a:prstGeom>
+          <a:noFill/>
+        </p:spPr>
+        <p:txBody>
+          <a:bodyPr wrap="square">
+            <a:spAutoFit/>
+          </a:bodyPr>
+          <a:lstStyle/>
+          <a:p>
+            <a:pPr algn="l">
+              <a:spcAft>
+                <a:spcPts val="300"/>
+              </a:spcAft>
+            </a:pPr>
+            <a:r>
+              <a:rPr sz="1000" b="1">
+                <a:solidFill>
+                  <a:srgbClr val="C9A227"/>
+                </a:solidFill>
+                <a:latin typeface="Calibri"/>
+              </a:rPr>
+              <a:t>000025-11</a:t>
+            </a:r>
+          </a:p>
+        </p:txBody>
+      </p:sp>
+      <p:sp>
+        <p:nvSpPr>
+          <p:cNvPr id="9" name="TextBox 8"/>
+          <p:cNvSpPr txBox="1"/>
+          <p:nvPr/>
+        </p:nvSpPr>
+        <p:spPr>
+          <a:xfrm>
+            <a:off x="292608" y="1243584"/>
+            <a:ext cx="5687568" cy="219456"/>
+          </a:xfrm>
+          <a:prstGeom prst="rect">
+            <a:avLst/>
+          </a:prstGeom>
+          <a:noFill/>
+        </p:spPr>
+        <p:txBody>
+          <a:bodyPr wrap="square">
+            <a:spAutoFit/>
+          </a:bodyPr>
+          <a:lstStyle/>
+          <a:p>
+            <a:pPr algn="l">
+              <a:spcAft>
+                <a:spcPts val="300"/>
+              </a:spcAft>
+            </a:pPr>
+            <a:r>
+              <a:rPr sz="1200" b="1">
+                <a:solidFill>
+                  <a:srgbClr val="0D3B66"/>
+                </a:solidFill>
+                <a:latin typeface="Calibri"/>
+              </a:rPr>
+              <a:t>Matriz 1° piso</a:t>
+            </a:r>
+          </a:p>
+        </p:txBody>
+      </p:sp>
+      <p:sp>
+        <p:nvSpPr>
+          <p:cNvPr id="10" name="Rounded Rectangle 9"/>
+          <p:cNvSpPr/>
+          <p:nvPr/>
+        </p:nvSpPr>
+        <p:spPr>
+          <a:xfrm>
+            <a:off x="6144768" y="1024128"/>
+            <a:ext cx="5852160" cy="658368"/>
+          </a:xfrm>
+          <a:prstGeom prst="roundRect">
+            <a:avLst>
+              <a:gd name="adj" fmla="val 8000"/>
+            </a:avLst>
+          </a:prstGeom>
+          <a:solidFill>
+            <a:srgbClr val="F5F7FA"/>
+          </a:solidFill>
+          <a:ln w="6350">
+            <a:solidFill>
+              <a:srgbClr val="C9A227"/>
+            </a:solidFill>
+          </a:ln>
+        </p:spPr>
+        <p:style>
+          <a:lnRef idx="1">
+            <a:schemeClr val="accent1"/>
+          </a:lnRef>
+          <a:fillRef idx="3">
+            <a:schemeClr val="accent1"/>
+          </a:fillRef>
+          <a:effectRef idx="2">
+            <a:schemeClr val="accent1"/>
+          </a:effectRef>
+          <a:fontRef idx="minor">
+            <a:schemeClr val="lt1"/>
+          </a:fontRef>
+        </p:style>
+        <p:txBody>
+          <a:bodyPr rtlCol="0" anchor="ctr"/>
+          <a:lstStyle/>
+          <a:p>
+            <a:pPr algn="ctr"/>
+          </a:p>
+        </p:txBody>
+      </p:sp>
+      <p:sp>
+        <p:nvSpPr>
+          <p:cNvPr id="11" name="TextBox 10"/>
+          <p:cNvSpPr txBox="1"/>
+          <p:nvPr/>
+        </p:nvSpPr>
+        <p:spPr>
+          <a:xfrm>
+            <a:off x="6236207" y="1060704"/>
+            <a:ext cx="5687568" cy="182880"/>
+          </a:xfrm>
+          <a:prstGeom prst="rect">
+            <a:avLst/>
+          </a:prstGeom>
+          <a:noFill/>
+        </p:spPr>
+        <p:txBody>
+          <a:bodyPr wrap="square">
+            <a:spAutoFit/>
+          </a:bodyPr>
+          <a:lstStyle/>
+          <a:p>
+            <a:pPr algn="l">
+              <a:spcAft>
+                <a:spcPts val="300"/>
+              </a:spcAft>
+            </a:pPr>
+            <a:r>
+              <a:rPr sz="1000" b="1">
+                <a:solidFill>
+                  <a:srgbClr val="C9A227"/>
+                </a:solidFill>
+                <a:latin typeface="Calibri"/>
+              </a:rPr>
+              <a:t>000025-12</a:t>
+            </a:r>
+          </a:p>
+        </p:txBody>
+      </p:sp>
+      <p:sp>
+        <p:nvSpPr>
+          <p:cNvPr id="12" name="TextBox 11"/>
+          <p:cNvSpPr txBox="1"/>
+          <p:nvPr/>
+        </p:nvSpPr>
+        <p:spPr>
+          <a:xfrm>
+            <a:off x="6236207" y="1243584"/>
+            <a:ext cx="5687568" cy="219456"/>
+          </a:xfrm>
+          <a:prstGeom prst="rect">
+            <a:avLst/>
+          </a:prstGeom>
+          <a:noFill/>
+        </p:spPr>
+        <p:txBody>
+          <a:bodyPr wrap="square">
+            <a:spAutoFit/>
+          </a:bodyPr>
+          <a:lstStyle/>
+          <a:p>
+            <a:pPr algn="l">
+              <a:spcAft>
+                <a:spcPts val="300"/>
+              </a:spcAft>
+            </a:pPr>
+            <a:r>
+              <a:rPr sz="1200" b="1">
+                <a:solidFill>
+                  <a:srgbClr val="0D3B66"/>
+                </a:solidFill>
+                <a:latin typeface="Calibri"/>
+              </a:rPr>
+              <a:t>Anillo Plaza</a:t>
+            </a:r>
+          </a:p>
+        </p:txBody>
+      </p:sp>
+      <p:sp>
+        <p:nvSpPr>
+          <p:cNvPr id="13" name="Rounded Rectangle 12"/>
+          <p:cNvSpPr/>
+          <p:nvPr/>
+        </p:nvSpPr>
+        <p:spPr>
+          <a:xfrm>
+            <a:off x="201168" y="1792224"/>
+            <a:ext cx="7973568" cy="3822191"/>
+          </a:xfrm>
+          <a:prstGeom prst="roundRect">
+            <a:avLst>
+              <a:gd name="adj" fmla="val 8000"/>
+            </a:avLst>
+          </a:prstGeom>
+          <a:solidFill>
+            <a:srgbClr val="F5F7FA"/>
+          </a:solidFill>
+          <a:ln>
+            <a:noFill/>
+          </a:ln>
+        </p:spPr>
+        <p:style>
+          <a:lnRef idx="1">
+            <a:schemeClr val="accent1"/>
+          </a:lnRef>
+          <a:fillRef idx="3">
+            <a:schemeClr val="accent1"/>
+          </a:fillRef>
+          <a:effectRef idx="2">
+            <a:schemeClr val="accent1"/>
+          </a:effectRef>
+          <a:fontRef idx="minor">
+            <a:schemeClr val="lt1"/>
+          </a:fontRef>
+        </p:style>
+        <p:txBody>
+          <a:bodyPr rtlCol="0" anchor="ctr"/>
+          <a:lstStyle/>
+          <a:p>
+            <a:pPr algn="ctr"/>
+          </a:p>
+        </p:txBody>
+      </p:sp>
+      <p:pic>
+        <p:nvPicPr>
+          <p:cNvPr id="14" name="Picture 13" descr="aeb_mensual_may_ago.png"/>
+          <p:cNvPicPr>
+            <a:picLocks noChangeAspect="1"/>
+          </p:cNvPicPr>
+          <p:nvPr/>
+        </p:nvPicPr>
+        <p:blipFill>
+          <a:blip r:embed="rId3"/>
+          <a:stretch>
+            <a:fillRect/>
+          </a:stretch>
+        </p:blipFill>
+        <p:spPr>
+          <a:xfrm>
+            <a:off x="329184" y="1865376"/>
+            <a:ext cx="7717536" cy="3777531"/>
+          </a:xfrm>
+          <a:prstGeom prst="rect">
+            <a:avLst/>
+          </a:prstGeom>
+        </p:spPr>
+      </p:pic>
+      <p:sp>
+        <p:nvSpPr>
+          <p:cNvPr id="15" name="Rounded Rectangle 14"/>
+          <p:cNvSpPr/>
+          <p:nvPr/>
+        </p:nvSpPr>
+        <p:spPr>
+          <a:xfrm>
+            <a:off x="8302752" y="1792224"/>
+            <a:ext cx="3675887" cy="3822191"/>
+          </a:xfrm>
+          <a:prstGeom prst="roundRect">
+            <a:avLst>
+              <a:gd name="adj" fmla="val 8000"/>
+            </a:avLst>
+          </a:prstGeom>
+          <a:solidFill>
+            <a:srgbClr val="FFFFFF"/>
+          </a:solidFill>
+          <a:ln w="6350">
+            <a:solidFill>
+              <a:srgbClr val="1F77B4"/>
+            </a:solidFill>
+          </a:ln>
+        </p:spPr>
+        <p:style>
+          <a:lnRef idx="1">
+            <a:schemeClr val="accent1"/>
+          </a:lnRef>
+          <a:fillRef idx="3">
+            <a:schemeClr val="accent1"/>
+          </a:fillRef>
+          <a:effectRef idx="2">
+            <a:schemeClr val="accent1"/>
+          </a:effectRef>
+          <a:fontRef idx="minor">
+            <a:schemeClr val="lt1"/>
+          </a:fontRef>
+        </p:style>
+        <p:txBody>
+          <a:bodyPr rtlCol="0" anchor="ctr"/>
+          <a:lstStyle/>
+          <a:p>
+            <a:pPr algn="ctr"/>
+          </a:p>
+        </p:txBody>
+      </p:sp>
+      <p:sp>
+        <p:nvSpPr>
+          <p:cNvPr id="16" name="TextBox 15"/>
+          <p:cNvSpPr txBox="1"/>
+          <p:nvPr/>
+        </p:nvSpPr>
+        <p:spPr>
+          <a:xfrm>
+            <a:off x="8430768" y="1847088"/>
+            <a:ext cx="3419856" cy="182880"/>
+          </a:xfrm>
+          <a:prstGeom prst="rect">
+            <a:avLst/>
+          </a:prstGeom>
+          <a:noFill/>
+        </p:spPr>
+        <p:txBody>
+          <a:bodyPr wrap="square">
+            <a:spAutoFit/>
+          </a:bodyPr>
+          <a:lstStyle/>
+          <a:p>
+            <a:pPr algn="l">
+              <a:spcAft>
+                <a:spcPts val="300"/>
+              </a:spcAft>
+            </a:pPr>
+            <a:r>
+              <a:rPr sz="1100" b="1">
+                <a:solidFill>
+                  <a:srgbClr val="1F77B4"/>
+                </a:solidFill>
+                <a:latin typeface="Calibri"/>
+              </a:rPr>
+              <a:t>JULIO · último mes cerrado</a:t>
+            </a:r>
+          </a:p>
+        </p:txBody>
+      </p:sp>
+      <p:sp>
+        <p:nvSpPr>
+          <p:cNvPr id="17" name="TextBox 16"/>
+          <p:cNvSpPr txBox="1"/>
+          <p:nvPr/>
+        </p:nvSpPr>
+        <p:spPr>
+          <a:xfrm>
+            <a:off x="8430768" y="2029967"/>
+            <a:ext cx="3419856" cy="219456"/>
+          </a:xfrm>
+          <a:prstGeom prst="rect">
+            <a:avLst/>
+          </a:prstGeom>
+          <a:noFill/>
+        </p:spPr>
+        <p:txBody>
+          <a:bodyPr wrap="square">
+            <a:spAutoFit/>
+          </a:bodyPr>
+          <a:lstStyle/>
+          <a:p>
+            <a:pPr algn="l">
+              <a:spcAft>
+                <a:spcPts val="300"/>
+              </a:spcAft>
+            </a:pPr>
+            <a:r>
+              <a:rPr sz="1200" b="0">
+                <a:solidFill>
+                  <a:srgbClr val="5A5A5A"/>
+                </a:solidFill>
+                <a:latin typeface="Calibri"/>
+              </a:rPr>
+              <a:t>El recinto sumó 2.371 m³</a:t>
+            </a:r>
+          </a:p>
+        </p:txBody>
+      </p:sp>
+      <p:sp>
+        <p:nvSpPr>
+          <p:cNvPr id="18" name="Rounded Rectangle 17"/>
+          <p:cNvSpPr/>
+          <p:nvPr/>
+        </p:nvSpPr>
+        <p:spPr>
+          <a:xfrm>
+            <a:off x="8430768" y="2267712"/>
+            <a:ext cx="3419856" cy="768096"/>
+          </a:xfrm>
+          <a:prstGeom prst="roundRect">
+            <a:avLst>
+              <a:gd name="adj" fmla="val 8000"/>
+            </a:avLst>
+          </a:prstGeom>
+          <a:solidFill>
+            <a:srgbClr val="F5F7FA"/>
+          </a:solidFill>
+          <a:ln w="6350">
+            <a:solidFill>
+              <a:srgbClr val="C45C26"/>
+            </a:solidFill>
+          </a:ln>
+        </p:spPr>
+        <p:style>
+          <a:lnRef idx="1">
+            <a:schemeClr val="accent1"/>
+          </a:lnRef>
+          <a:fillRef idx="3">
+            <a:schemeClr val="accent1"/>
+          </a:fillRef>
+          <a:effectRef idx="2">
+            <a:schemeClr val="accent1"/>
+          </a:effectRef>
+          <a:fontRef idx="minor">
+            <a:schemeClr val="lt1"/>
+          </a:fontRef>
+        </p:style>
+        <p:txBody>
+          <a:bodyPr rtlCol="0" anchor="ctr"/>
+          <a:lstStyle/>
+          <a:p>
+            <a:pPr algn="ctr"/>
+          </a:p>
+        </p:txBody>
+      </p:sp>
+      <p:sp>
+        <p:nvSpPr>
+          <p:cNvPr id="19" name="TextBox 18"/>
+          <p:cNvSpPr txBox="1"/>
+          <p:nvPr/>
+        </p:nvSpPr>
+        <p:spPr>
+          <a:xfrm>
+            <a:off x="8540496" y="2304288"/>
+            <a:ext cx="3200400" cy="182880"/>
+          </a:xfrm>
+          <a:prstGeom prst="rect">
+            <a:avLst/>
+          </a:prstGeom>
+          <a:noFill/>
+        </p:spPr>
+        <p:txBody>
+          <a:bodyPr wrap="square">
+            <a:spAutoFit/>
+          </a:bodyPr>
+          <a:lstStyle/>
+          <a:p>
+            <a:pPr algn="l">
+              <a:spcAft>
+                <a:spcPts val="300"/>
+              </a:spcAft>
+            </a:pPr>
+            <a:r>
+              <a:rPr sz="1300" b="1">
+                <a:solidFill>
+                  <a:srgbClr val="C45C26"/>
+                </a:solidFill>
+                <a:latin typeface="Calibri"/>
+              </a:rPr>
+              <a:t>Matriz 1° piso</a:t>
+            </a:r>
+          </a:p>
+        </p:txBody>
+      </p:sp>
+      <p:sp>
+        <p:nvSpPr>
+          <p:cNvPr id="20" name="TextBox 19"/>
+          <p:cNvSpPr txBox="1"/>
+          <p:nvPr/>
+        </p:nvSpPr>
+        <p:spPr>
+          <a:xfrm>
+            <a:off x="8540496" y="2590312"/>
+            <a:ext cx="3200400" cy="292608"/>
+          </a:xfrm>
+          <a:prstGeom prst="rect">
+            <a:avLst/>
+          </a:prstGeom>
+          <a:noFill/>
+        </p:spPr>
+        <p:txBody>
+          <a:bodyPr wrap="square">
+            <a:spAutoFit/>
+          </a:bodyPr>
+          <a:lstStyle/>
+          <a:p>
+            <a:pPr algn="l">
+              <a:spcAft>
+                <a:spcPts val="300"/>
+              </a:spcAft>
+            </a:pPr>
+            <a:r>
+              <a:rPr sz="1600" b="1">
+                <a:solidFill>
+                  <a:srgbClr val="0D3B66"/>
+                </a:solidFill>
+                <a:latin typeface="Calibri"/>
+              </a:rPr>
+              <a:t>1.724 m³    73 %</a:t>
+            </a:r>
+          </a:p>
+        </p:txBody>
+      </p:sp>
+      <p:sp>
+        <p:nvSpPr>
+          <p:cNvPr id="21" name="Rounded Rectangle 20"/>
+          <p:cNvSpPr/>
+          <p:nvPr/>
+        </p:nvSpPr>
+        <p:spPr>
+          <a:xfrm>
+            <a:off x="8430768" y="3904487"/>
+            <a:ext cx="3419856" cy="768096"/>
+          </a:xfrm>
+          <a:prstGeom prst="roundRect">
+            <a:avLst>
+              <a:gd name="adj" fmla="val 8000"/>
+            </a:avLst>
+          </a:prstGeom>
+          <a:solidFill>
+            <a:srgbClr val="F5F7FA"/>
+          </a:solidFill>
+          <a:ln w="6350">
+            <a:solidFill>
+              <a:srgbClr val="C9A227"/>
+            </a:solidFill>
+          </a:ln>
+        </p:spPr>
+        <p:style>
+          <a:lnRef idx="1">
+            <a:schemeClr val="accent1"/>
+          </a:lnRef>
+          <a:fillRef idx="3">
+            <a:schemeClr val="accent1"/>
+          </a:fillRef>
+          <a:effectRef idx="2">
+            <a:schemeClr val="accent1"/>
+          </a:effectRef>
+          <a:fontRef idx="minor">
+            <a:schemeClr val="lt1"/>
+          </a:fontRef>
+        </p:style>
+        <p:txBody>
+          <a:bodyPr rtlCol="0" anchor="ctr"/>
+          <a:lstStyle/>
+          <a:p>
+            <a:pPr algn="ctr"/>
+          </a:p>
+        </p:txBody>
+      </p:sp>
+      <p:sp>
+        <p:nvSpPr>
+          <p:cNvPr id="22" name="TextBox 21"/>
+          <p:cNvSpPr txBox="1"/>
+          <p:nvPr/>
+        </p:nvSpPr>
+        <p:spPr>
+          <a:xfrm>
+            <a:off x="8540496" y="3941063"/>
+            <a:ext cx="3200400" cy="182880"/>
+          </a:xfrm>
+          <a:prstGeom prst="rect">
+            <a:avLst/>
+          </a:prstGeom>
+          <a:noFill/>
+        </p:spPr>
+        <p:txBody>
+          <a:bodyPr wrap="square">
+            <a:spAutoFit/>
+          </a:bodyPr>
+          <a:lstStyle/>
+          <a:p>
+            <a:pPr algn="l">
+              <a:spcAft>
+                <a:spcPts val="300"/>
+              </a:spcAft>
+            </a:pPr>
+            <a:r>
+              <a:rPr sz="1300" b="1">
+                <a:solidFill>
+                  <a:srgbClr val="C9A227"/>
+                </a:solidFill>
+                <a:latin typeface="Calibri"/>
+              </a:rPr>
+              <a:t>Anillo Plaza</a:t>
+            </a:r>
+          </a:p>
+        </p:txBody>
+      </p:sp>
+      <p:sp>
+        <p:nvSpPr>
+          <p:cNvPr id="23" name="TextBox 22"/>
+          <p:cNvSpPr txBox="1"/>
+          <p:nvPr/>
+        </p:nvSpPr>
+        <p:spPr>
+          <a:xfrm>
+            <a:off x="8540496" y="4227088"/>
+            <a:ext cx="3200400" cy="292608"/>
+          </a:xfrm>
+          <a:prstGeom prst="rect">
+            <a:avLst/>
+          </a:prstGeom>
+          <a:noFill/>
+        </p:spPr>
+        <p:txBody>
+          <a:bodyPr wrap="square">
+            <a:spAutoFit/>
+          </a:bodyPr>
+          <a:lstStyle/>
+          <a:p>
+            <a:pPr algn="l">
+              <a:spcAft>
+                <a:spcPts val="300"/>
+              </a:spcAft>
+            </a:pPr>
+            <a:r>
+              <a:rPr sz="1600" b="1">
+                <a:solidFill>
+                  <a:srgbClr val="0D3B66"/>
+                </a:solidFill>
+                <a:latin typeface="Calibri"/>
+              </a:rPr>
+              <a:t>647 m³    27 %</a:t>
+            </a:r>
+          </a:p>
+        </p:txBody>
+      </p:sp>
+      <p:sp>
+        <p:nvSpPr>
+          <p:cNvPr id="24" name="Rounded Rectangle 23"/>
+          <p:cNvSpPr/>
+          <p:nvPr/>
+        </p:nvSpPr>
+        <p:spPr>
+          <a:xfrm>
+            <a:off x="201168" y="5705856"/>
+            <a:ext cx="11795760" cy="438912"/>
+          </a:xfrm>
+          <a:prstGeom prst="roundRect">
+            <a:avLst>
+              <a:gd name="adj" fmla="val 8000"/>
+            </a:avLst>
+          </a:prstGeom>
+          <a:solidFill>
+            <a:srgbClr val="FFF9EB"/>
+          </a:solidFill>
+          <a:ln w="6350">
+            <a:solidFill>
+              <a:srgbClr val="C9A227"/>
+            </a:solidFill>
+          </a:ln>
+        </p:spPr>
+        <p:style>
+          <a:lnRef idx="1">
+            <a:schemeClr val="accent1"/>
+          </a:lnRef>
+          <a:fillRef idx="3">
+            <a:schemeClr val="accent1"/>
+          </a:fillRef>
+          <a:effectRef idx="2">
+            <a:schemeClr val="accent1"/>
+          </a:effectRef>
+          <a:fontRef idx="minor">
+            <a:schemeClr val="lt1"/>
+          </a:fontRef>
+        </p:style>
+        <p:txBody>
+          <a:bodyPr rtlCol="0" anchor="ctr"/>
+          <a:lstStyle/>
+          <a:p>
+            <a:pPr algn="ctr"/>
+          </a:p>
+        </p:txBody>
+      </p:sp>
+      <p:sp>
+        <p:nvSpPr>
+          <p:cNvPr id="25" name="TextBox 24"/>
+          <p:cNvSpPr txBox="1"/>
+          <p:nvPr/>
+        </p:nvSpPr>
+        <p:spPr>
+          <a:xfrm>
+            <a:off x="329184" y="5779008"/>
+            <a:ext cx="11539728" cy="310896"/>
+          </a:xfrm>
+          <a:prstGeom prst="rect">
+            <a:avLst/>
+          </a:prstGeom>
+          <a:noFill/>
+        </p:spPr>
+        <p:txBody>
+          <a:bodyPr wrap="square">
+            <a:spAutoFit/>
+          </a:bodyPr>
+          <a:lstStyle/>
+          <a:p>
+            <a:pPr algn="l">
+              <a:spcAft>
+                <a:spcPts val="300"/>
+              </a:spcAft>
+            </a:pPr>
+            <a:r>
+              <a:rPr sz="1100" b="0">
+                <a:solidFill>
+                  <a:srgbClr val="0D3B66"/>
+                </a:solidFill>
+                <a:latin typeface="Calibri"/>
+              </a:rPr>
+              <a:t>Recepción 29/10/2025 / relocalizado 16/01/2026  ·  Capacitación 20/11/2025  ·  Tamara Martínez  ·  Tomás Saba  ·  Sebastián Araneda</a:t>
+            </a:r>
+          </a:p>
+        </p:txBody>
+      </p:sp>
+      <p:sp>
+        <p:nvSpPr>
+          <p:cNvPr id="26" name="TextBox 25"/>
+          <p:cNvSpPr txBox="1"/>
+          <p:nvPr/>
+        </p:nvSpPr>
+        <p:spPr>
+          <a:xfrm>
+            <a:off x="256032" y="6181344"/>
+            <a:ext cx="11704320" cy="566928"/>
+          </a:xfrm>
+          <a:prstGeom prst="rect">
+            <a:avLst/>
+          </a:prstGeom>
+          <a:noFill/>
+        </p:spPr>
+        <p:txBody>
+          <a:bodyPr wrap="square">
+            <a:spAutoFit/>
+          </a:bodyPr>
+          <a:lstStyle/>
+          <a:p>
+            <a:pPr algn="l">
+              <a:spcAft>
+                <a:spcPts val="300"/>
+              </a:spcAft>
+            </a:pPr>
+            <a:r>
+              <a:rPr sz="1200" b="0">
+                <a:solidFill>
+                  <a:srgbClr val="0D3B66"/>
+                </a:solidFill>
+                <a:latin typeface="Calibri"/>
+              </a:rPr>
+              <a:t>Mayo 1.015   ·   Junio 2.116   ·   Julio 2.371   ·   Agosto 1–17: 1.217   ·   proy. ago 2.218 m³.</a:t>
+            </a:r>
+          </a:p>
+          <a:p>
+            <a:pPr algn="l">
+              <a:spcAft>
+                <a:spcPts val="300"/>
+              </a:spcAft>
+            </a:pPr>
+            <a:r>
+              <a:rPr sz="1100" b="0">
+                <a:solidFill>
+                  <a:srgbClr val="5A5A5A"/>
+                </a:solidFill>
+                <a:latin typeface="Calibri"/>
+              </a:rPr>
+              <a:t>Matriz 1° piso y Anillo Plaza. Relocalizado en enero 2026.</a:t>
+            </a:r>
+          </a:p>
+        </p:txBody>
+      </p:sp>
+    </p:spTree>
+  </p:cSld>
+  <p:clrMapOvr>
+    <a:masterClrMapping/>
+  </p:clrMapOvr>
+</p:sld>
+</file>
+
+<file path=ppt/slides/slide8.xml><?xml version="1.0" encoding="utf-8"?>
+<p:sld xmlns:a="http://schemas.openxmlformats.org/drawingml/2006/main" xmlns:p="http://schemas.openxmlformats.org/presentationml/2006/main" xmlns:r="http://schemas.openxmlformats.org/officeDocument/2006/relationships">
+  <p:cSld>
+    <p:spTree>
+      <p:nvGrpSpPr>
+        <p:cNvPr id="1" name=""/>
+        <p:cNvGrpSpPr/>
+        <p:nvPr/>
+      </p:nvGrpSpPr>
+      <p:grpSpPr/>
+      <p:sp>
+        <p:nvSpPr>
+          <p:cNvPr id="2" name="Rectangle 1"/>
+          <p:cNvSpPr/>
+          <p:nvPr/>
+        </p:nvSpPr>
+        <p:spPr>
+          <a:xfrm>
+            <a:off x="0" y="0"/>
+            <a:ext cx="12191695" cy="841248"/>
+          </a:xfrm>
+          <a:prstGeom prst="rect">
+            <a:avLst/>
+          </a:prstGeom>
+          <a:solidFill>
+            <a:srgbClr val="0D3B66"/>
+          </a:solidFill>
+          <a:ln>
+            <a:noFill/>
+          </a:ln>
+        </p:spPr>
+        <p:style>
+          <a:lnRef idx="1">
+            <a:schemeClr val="accent1"/>
+          </a:lnRef>
+          <a:fillRef idx="3">
+            <a:schemeClr val="accent1"/>
+          </a:fillRef>
+          <a:effectRef idx="2">
+            <a:schemeClr val="accent1"/>
+          </a:effectRef>
+          <a:fontRef idx="minor">
+            <a:schemeClr val="lt1"/>
+          </a:fontRef>
+        </p:style>
+        <p:txBody>
+          <a:bodyPr rtlCol="0" anchor="ctr"/>
+          <a:lstStyle/>
+          <a:p>
+            <a:pPr algn="ctr"/>
+          </a:p>
+        </p:txBody>
+      </p:sp>
+      <p:sp>
+        <p:nvSpPr>
+          <p:cNvPr id="3" name="Rectangle 2"/>
+          <p:cNvSpPr/>
+          <p:nvPr/>
+        </p:nvSpPr>
+        <p:spPr>
+          <a:xfrm>
+            <a:off x="0" y="841248"/>
+            <a:ext cx="12191695" cy="54864"/>
+          </a:xfrm>
+          <a:prstGeom prst="rect">
+            <a:avLst/>
+          </a:prstGeom>
+          <a:solidFill>
+            <a:srgbClr val="C9A227"/>
+          </a:solidFill>
+          <a:ln>
+            <a:noFill/>
+          </a:ln>
+        </p:spPr>
+        <p:style>
+          <a:lnRef idx="1">
+            <a:schemeClr val="accent1"/>
+          </a:lnRef>
+          <a:fillRef idx="3">
+            <a:schemeClr val="accent1"/>
+          </a:fillRef>
+          <a:effectRef idx="2">
+            <a:schemeClr val="accent1"/>
+          </a:effectRef>
+          <a:fontRef idx="minor">
+            <a:schemeClr val="lt1"/>
+          </a:fontRef>
+        </p:style>
+        <p:txBody>
+          <a:bodyPr rtlCol="0" anchor="ctr"/>
+          <a:lstStyle/>
+          <a:p>
+            <a:pPr algn="ctr"/>
+          </a:p>
+        </p:txBody>
+      </p:sp>
+      <p:pic>
+        <p:nvPicPr>
+          <p:cNvPr id="4" name="Picture 3" descr="logo wes.bmp"/>
+          <p:cNvPicPr>
+            <a:picLocks noChangeAspect="1"/>
+          </p:cNvPicPr>
+          <p:nvPr/>
+        </p:nvPicPr>
+        <p:blipFill>
+          <a:blip r:embed="rId2"/>
+          <a:stretch>
+            <a:fillRect/>
+          </a:stretch>
+        </p:blipFill>
+        <p:spPr>
+          <a:xfrm>
+            <a:off x="10835640" y="146304"/>
+            <a:ext cx="1143000" cy="253401"/>
+          </a:xfrm>
+          <a:prstGeom prst="rect">
+            <a:avLst/>
+          </a:prstGeom>
+        </p:spPr>
+      </p:pic>
+      <p:sp>
+        <p:nvSpPr>
+          <p:cNvPr id="5" name="TextBox 4"/>
+          <p:cNvSpPr txBox="1"/>
+          <p:nvPr/>
+        </p:nvSpPr>
+        <p:spPr>
+          <a:xfrm>
+            <a:off x="256032" y="109728"/>
+            <a:ext cx="10607040" cy="384048"/>
+          </a:xfrm>
+          <a:prstGeom prst="rect">
+            <a:avLst/>
+          </a:prstGeom>
+          <a:noFill/>
+        </p:spPr>
+        <p:txBody>
+          <a:bodyPr wrap="square">
+            <a:spAutoFit/>
+          </a:bodyPr>
+          <a:lstStyle/>
+          <a:p>
+            <a:pPr algn="l">
+              <a:spcAft>
+                <a:spcPts val="300"/>
+              </a:spcAft>
+            </a:pPr>
+            <a:r>
+              <a:rPr sz="2000" b="1">
+                <a:solidFill>
+                  <a:srgbClr val="FFFFFF"/>
+                </a:solidFill>
+                <a:latin typeface="Calibri"/>
+              </a:rPr>
+              <a:t>CUR  ·  Equipos y consumo</a:t>
+            </a:r>
+          </a:p>
+        </p:txBody>
+      </p:sp>
+      <p:sp>
+        <p:nvSpPr>
+          <p:cNvPr id="6" name="TextBox 5"/>
+          <p:cNvSpPr txBox="1"/>
+          <p:nvPr/>
+        </p:nvSpPr>
+        <p:spPr>
+          <a:xfrm>
+            <a:off x="256032" y="457200"/>
+            <a:ext cx="10607040" cy="329184"/>
+          </a:xfrm>
+          <a:prstGeom prst="rect">
+            <a:avLst/>
+          </a:prstGeom>
+          <a:noFill/>
+        </p:spPr>
+        <p:txBody>
+          <a:bodyPr wrap="square">
+            <a:spAutoFit/>
+          </a:bodyPr>
+          <a:lstStyle/>
+          <a:p>
+            <a:pPr algn="l">
+              <a:spcAft>
+                <a:spcPts val="300"/>
+              </a:spcAft>
+            </a:pPr>
+            <a:r>
+              <a:rPr sz="1100" b="0">
+                <a:solidFill>
+                  <a:srgbClr val="DCE6F0"/>
+                </a:solidFill>
+                <a:latin typeface="Calibri"/>
+              </a:rPr>
+              <a:t>Arauco Curauma   |   2 puntos WES   |   01/05/2026 – 17/08/2026</a:t>
+            </a:r>
+          </a:p>
+        </p:txBody>
+      </p:sp>
+      <p:sp>
+        <p:nvSpPr>
+          <p:cNvPr id="7" name="Rounded Rectangle 6"/>
+          <p:cNvSpPr/>
+          <p:nvPr/>
+        </p:nvSpPr>
+        <p:spPr>
+          <a:xfrm>
+            <a:off x="201168" y="1024128"/>
+            <a:ext cx="5852160" cy="658368"/>
+          </a:xfrm>
+          <a:prstGeom prst="roundRect">
+            <a:avLst>
+              <a:gd name="adj" fmla="val 8000"/>
+            </a:avLst>
+          </a:prstGeom>
+          <a:solidFill>
+            <a:srgbClr val="F5F7FA"/>
+          </a:solidFill>
+          <a:ln w="6350">
+            <a:solidFill>
+              <a:srgbClr val="5A8C6E"/>
+            </a:solidFill>
+          </a:ln>
+        </p:spPr>
+        <p:style>
+          <a:lnRef idx="1">
+            <a:schemeClr val="accent1"/>
+          </a:lnRef>
+          <a:fillRef idx="3">
+            <a:schemeClr val="accent1"/>
+          </a:fillRef>
+          <a:effectRef idx="2">
+            <a:schemeClr val="accent1"/>
+          </a:effectRef>
+          <a:fontRef idx="minor">
+            <a:schemeClr val="lt1"/>
+          </a:fontRef>
+        </p:style>
+        <p:txBody>
+          <a:bodyPr rtlCol="0" anchor="ctr"/>
+          <a:lstStyle/>
+          <a:p>
+            <a:pPr algn="ctr"/>
+          </a:p>
+        </p:txBody>
+      </p:sp>
+      <p:sp>
+        <p:nvSpPr>
+          <p:cNvPr id="8" name="TextBox 7"/>
+          <p:cNvSpPr txBox="1"/>
+          <p:nvPr/>
+        </p:nvSpPr>
+        <p:spPr>
+          <a:xfrm>
+            <a:off x="292608" y="1060704"/>
+            <a:ext cx="5687568" cy="182880"/>
+          </a:xfrm>
+          <a:prstGeom prst="rect">
+            <a:avLst/>
+          </a:prstGeom>
+          <a:noFill/>
+        </p:spPr>
+        <p:txBody>
+          <a:bodyPr wrap="square">
+            <a:spAutoFit/>
+          </a:bodyPr>
+          <a:lstStyle/>
+          <a:p>
+            <a:pPr algn="l">
+              <a:spcAft>
+                <a:spcPts val="300"/>
+              </a:spcAft>
+            </a:pPr>
+            <a:r>
+              <a:rPr sz="1000" b="1">
+                <a:solidFill>
+                  <a:srgbClr val="C9A227"/>
+                </a:solidFill>
+                <a:latin typeface="Calibri"/>
+              </a:rPr>
+              <a:t>000025-38</a:t>
+            </a:r>
+          </a:p>
+        </p:txBody>
+      </p:sp>
+      <p:sp>
+        <p:nvSpPr>
+          <p:cNvPr id="9" name="TextBox 8"/>
+          <p:cNvSpPr txBox="1"/>
+          <p:nvPr/>
+        </p:nvSpPr>
+        <p:spPr>
+          <a:xfrm>
+            <a:off x="292608" y="1243584"/>
+            <a:ext cx="5687568" cy="219456"/>
+          </a:xfrm>
+          <a:prstGeom prst="rect">
+            <a:avLst/>
+          </a:prstGeom>
+          <a:noFill/>
+        </p:spPr>
+        <p:txBody>
+          <a:bodyPr wrap="square">
+            <a:spAutoFit/>
+          </a:bodyPr>
+          <a:lstStyle/>
+          <a:p>
+            <a:pPr algn="l">
+              <a:spcAft>
+                <a:spcPts val="300"/>
+              </a:spcAft>
+            </a:pPr>
+            <a:r>
+              <a:rPr sz="1200" b="1">
+                <a:solidFill>
+                  <a:srgbClr val="0D3B66"/>
+                </a:solidFill>
+                <a:latin typeface="Calibri"/>
+              </a:rPr>
+              <a:t>Anillo Norte</a:t>
+            </a:r>
+          </a:p>
+        </p:txBody>
+      </p:sp>
+      <p:sp>
+        <p:nvSpPr>
+          <p:cNvPr id="10" name="Rounded Rectangle 9"/>
+          <p:cNvSpPr/>
+          <p:nvPr/>
+        </p:nvSpPr>
+        <p:spPr>
+          <a:xfrm>
+            <a:off x="6144768" y="1024128"/>
+            <a:ext cx="5852160" cy="658368"/>
           </a:xfrm>
           <a:prstGeom prst="roundRect">
             <a:avLst>
@@ -7001,13 +11093,332 @@
       </p:sp>
       <p:sp>
         <p:nvSpPr>
-          <p:cNvPr id="37" name="TextBox 36"/>
-          <p:cNvSpPr txBox="1"/>
-          <p:nvPr/>
-        </p:nvSpPr>
-        <p:spPr>
-          <a:xfrm>
-            <a:off x="8540496" y="3675888"/>
+          <p:cNvPr id="11" name="TextBox 10"/>
+          <p:cNvSpPr txBox="1"/>
+          <p:nvPr/>
+        </p:nvSpPr>
+        <p:spPr>
+          <a:xfrm>
+            <a:off x="6236207" y="1060704"/>
+            <a:ext cx="5687568" cy="182880"/>
+          </a:xfrm>
+          <a:prstGeom prst="rect">
+            <a:avLst/>
+          </a:prstGeom>
+          <a:noFill/>
+        </p:spPr>
+        <p:txBody>
+          <a:bodyPr wrap="square">
+            <a:spAutoFit/>
+          </a:bodyPr>
+          <a:lstStyle/>
+          <a:p>
+            <a:pPr algn="l">
+              <a:spcAft>
+                <a:spcPts val="300"/>
+              </a:spcAft>
+            </a:pPr>
+            <a:r>
+              <a:rPr sz="1000" b="1">
+                <a:solidFill>
+                  <a:srgbClr val="C9A227"/>
+                </a:solidFill>
+                <a:latin typeface="Calibri"/>
+              </a:rPr>
+              <a:t>000025-37</a:t>
+            </a:r>
+          </a:p>
+        </p:txBody>
+      </p:sp>
+      <p:sp>
+        <p:nvSpPr>
+          <p:cNvPr id="12" name="TextBox 11"/>
+          <p:cNvSpPr txBox="1"/>
+          <p:nvPr/>
+        </p:nvSpPr>
+        <p:spPr>
+          <a:xfrm>
+            <a:off x="6236207" y="1243584"/>
+            <a:ext cx="5687568" cy="219456"/>
+          </a:xfrm>
+          <a:prstGeom prst="rect">
+            <a:avLst/>
+          </a:prstGeom>
+          <a:noFill/>
+        </p:spPr>
+        <p:txBody>
+          <a:bodyPr wrap="square">
+            <a:spAutoFit/>
+          </a:bodyPr>
+          <a:lstStyle/>
+          <a:p>
+            <a:pPr algn="l">
+              <a:spcAft>
+                <a:spcPts val="300"/>
+              </a:spcAft>
+            </a:pPr>
+            <a:r>
+              <a:rPr sz="1200" b="1">
+                <a:solidFill>
+                  <a:srgbClr val="0D3B66"/>
+                </a:solidFill>
+                <a:latin typeface="Calibri"/>
+              </a:rPr>
+              <a:t>Anillo Sur</a:t>
+            </a:r>
+          </a:p>
+        </p:txBody>
+      </p:sp>
+      <p:sp>
+        <p:nvSpPr>
+          <p:cNvPr id="13" name="Rounded Rectangle 12"/>
+          <p:cNvSpPr/>
+          <p:nvPr/>
+        </p:nvSpPr>
+        <p:spPr>
+          <a:xfrm>
+            <a:off x="201168" y="1792224"/>
+            <a:ext cx="7973568" cy="3822191"/>
+          </a:xfrm>
+          <a:prstGeom prst="roundRect">
+            <a:avLst>
+              <a:gd name="adj" fmla="val 8000"/>
+            </a:avLst>
+          </a:prstGeom>
+          <a:solidFill>
+            <a:srgbClr val="F5F7FA"/>
+          </a:solidFill>
+          <a:ln>
+            <a:noFill/>
+          </a:ln>
+        </p:spPr>
+        <p:style>
+          <a:lnRef idx="1">
+            <a:schemeClr val="accent1"/>
+          </a:lnRef>
+          <a:fillRef idx="3">
+            <a:schemeClr val="accent1"/>
+          </a:fillRef>
+          <a:effectRef idx="2">
+            <a:schemeClr val="accent1"/>
+          </a:effectRef>
+          <a:fontRef idx="minor">
+            <a:schemeClr val="lt1"/>
+          </a:fontRef>
+        </p:style>
+        <p:txBody>
+          <a:bodyPr rtlCol="0" anchor="ctr"/>
+          <a:lstStyle/>
+          <a:p>
+            <a:pPr algn="ctr"/>
+          </a:p>
+        </p:txBody>
+      </p:sp>
+      <p:pic>
+        <p:nvPicPr>
+          <p:cNvPr id="14" name="Picture 13" descr="cur_mensual_may_ago.png"/>
+          <p:cNvPicPr>
+            <a:picLocks noChangeAspect="1"/>
+          </p:cNvPicPr>
+          <p:nvPr/>
+        </p:nvPicPr>
+        <p:blipFill>
+          <a:blip r:embed="rId3"/>
+          <a:stretch>
+            <a:fillRect/>
+          </a:stretch>
+        </p:blipFill>
+        <p:spPr>
+          <a:xfrm>
+            <a:off x="329184" y="1865376"/>
+            <a:ext cx="7717536" cy="3777531"/>
+          </a:xfrm>
+          <a:prstGeom prst="rect">
+            <a:avLst/>
+          </a:prstGeom>
+        </p:spPr>
+      </p:pic>
+      <p:sp>
+        <p:nvSpPr>
+          <p:cNvPr id="15" name="Rounded Rectangle 14"/>
+          <p:cNvSpPr/>
+          <p:nvPr/>
+        </p:nvSpPr>
+        <p:spPr>
+          <a:xfrm>
+            <a:off x="8302752" y="1792224"/>
+            <a:ext cx="3675887" cy="3822191"/>
+          </a:xfrm>
+          <a:prstGeom prst="roundRect">
+            <a:avLst>
+              <a:gd name="adj" fmla="val 8000"/>
+            </a:avLst>
+          </a:prstGeom>
+          <a:solidFill>
+            <a:srgbClr val="FFFFFF"/>
+          </a:solidFill>
+          <a:ln w="6350">
+            <a:solidFill>
+              <a:srgbClr val="1F77B4"/>
+            </a:solidFill>
+          </a:ln>
+        </p:spPr>
+        <p:style>
+          <a:lnRef idx="1">
+            <a:schemeClr val="accent1"/>
+          </a:lnRef>
+          <a:fillRef idx="3">
+            <a:schemeClr val="accent1"/>
+          </a:fillRef>
+          <a:effectRef idx="2">
+            <a:schemeClr val="accent1"/>
+          </a:effectRef>
+          <a:fontRef idx="minor">
+            <a:schemeClr val="lt1"/>
+          </a:fontRef>
+        </p:style>
+        <p:txBody>
+          <a:bodyPr rtlCol="0" anchor="ctr"/>
+          <a:lstStyle/>
+          <a:p>
+            <a:pPr algn="ctr"/>
+          </a:p>
+        </p:txBody>
+      </p:sp>
+      <p:sp>
+        <p:nvSpPr>
+          <p:cNvPr id="16" name="TextBox 15"/>
+          <p:cNvSpPr txBox="1"/>
+          <p:nvPr/>
+        </p:nvSpPr>
+        <p:spPr>
+          <a:xfrm>
+            <a:off x="8430768" y="1847088"/>
+            <a:ext cx="3419856" cy="182880"/>
+          </a:xfrm>
+          <a:prstGeom prst="rect">
+            <a:avLst/>
+          </a:prstGeom>
+          <a:noFill/>
+        </p:spPr>
+        <p:txBody>
+          <a:bodyPr wrap="square">
+            <a:spAutoFit/>
+          </a:bodyPr>
+          <a:lstStyle/>
+          <a:p>
+            <a:pPr algn="l">
+              <a:spcAft>
+                <a:spcPts val="300"/>
+              </a:spcAft>
+            </a:pPr>
+            <a:r>
+              <a:rPr sz="1100" b="1">
+                <a:solidFill>
+                  <a:srgbClr val="1F77B4"/>
+                </a:solidFill>
+                <a:latin typeface="Calibri"/>
+              </a:rPr>
+              <a:t>JULIO · último mes cerrado</a:t>
+            </a:r>
+          </a:p>
+        </p:txBody>
+      </p:sp>
+      <p:sp>
+        <p:nvSpPr>
+          <p:cNvPr id="17" name="TextBox 16"/>
+          <p:cNvSpPr txBox="1"/>
+          <p:nvPr/>
+        </p:nvSpPr>
+        <p:spPr>
+          <a:xfrm>
+            <a:off x="8430768" y="2029967"/>
+            <a:ext cx="3419856" cy="219456"/>
+          </a:xfrm>
+          <a:prstGeom prst="rect">
+            <a:avLst/>
+          </a:prstGeom>
+          <a:noFill/>
+        </p:spPr>
+        <p:txBody>
+          <a:bodyPr wrap="square">
+            <a:spAutoFit/>
+          </a:bodyPr>
+          <a:lstStyle/>
+          <a:p>
+            <a:pPr algn="l">
+              <a:spcAft>
+                <a:spcPts val="300"/>
+              </a:spcAft>
+            </a:pPr>
+            <a:r>
+              <a:rPr sz="1200" b="0">
+                <a:solidFill>
+                  <a:srgbClr val="5A5A5A"/>
+                </a:solidFill>
+                <a:latin typeface="Calibri"/>
+              </a:rPr>
+              <a:t>El recinto sumó 618 m³</a:t>
+            </a:r>
+          </a:p>
+        </p:txBody>
+      </p:sp>
+      <p:sp>
+        <p:nvSpPr>
+          <p:cNvPr id="18" name="Rounded Rectangle 17"/>
+          <p:cNvSpPr/>
+          <p:nvPr/>
+        </p:nvSpPr>
+        <p:spPr>
+          <a:xfrm>
+            <a:off x="8430768" y="2267712"/>
+            <a:ext cx="3419856" cy="768096"/>
+          </a:xfrm>
+          <a:prstGeom prst="roundRect">
+            <a:avLst>
+              <a:gd name="adj" fmla="val 8000"/>
+            </a:avLst>
+          </a:prstGeom>
+          <a:solidFill>
+            <a:srgbClr val="F5F7FA"/>
+          </a:solidFill>
+          <a:ln w="6350">
+            <a:solidFill>
+              <a:srgbClr val="7BA3C9"/>
+            </a:solidFill>
+          </a:ln>
+        </p:spPr>
+        <p:style>
+          <a:lnRef idx="1">
+            <a:schemeClr val="accent1"/>
+          </a:lnRef>
+          <a:fillRef idx="3">
+            <a:schemeClr val="accent1"/>
+          </a:fillRef>
+          <a:effectRef idx="2">
+            <a:schemeClr val="accent1"/>
+          </a:effectRef>
+          <a:fontRef idx="minor">
+            <a:schemeClr val="lt1"/>
+          </a:fontRef>
+        </p:style>
+        <p:txBody>
+          <a:bodyPr rtlCol="0" anchor="ctr"/>
+          <a:lstStyle/>
+          <a:p>
+            <a:pPr algn="ctr"/>
+          </a:p>
+        </p:txBody>
+      </p:sp>
+      <p:sp>
+        <p:nvSpPr>
+          <p:cNvPr id="19" name="TextBox 18"/>
+          <p:cNvSpPr txBox="1"/>
+          <p:nvPr/>
+        </p:nvSpPr>
+        <p:spPr>
+          <a:xfrm>
+            <a:off x="8540496" y="2304288"/>
             <a:ext cx="3200400" cy="182880"/>
           </a:xfrm>
           <a:prstGeom prst="rect">
@@ -7033,60 +11444,60 @@
                 </a:solidFill>
                 <a:latin typeface="Calibri"/>
               </a:rPr>
-              <a:t>Pasillo Técnico</a:t>
-            </a:r>
-          </a:p>
-        </p:txBody>
-      </p:sp>
-      <p:sp>
-        <p:nvSpPr>
-          <p:cNvPr id="38" name="TextBox 37"/>
-          <p:cNvSpPr txBox="1"/>
-          <p:nvPr/>
-        </p:nvSpPr>
-        <p:spPr>
-          <a:xfrm>
-            <a:off x="8540496" y="3895344"/>
-            <a:ext cx="3200400" cy="274320"/>
-          </a:xfrm>
-          <a:prstGeom prst="rect">
-            <a:avLst/>
-          </a:prstGeom>
-          <a:noFill/>
-        </p:spPr>
-        <p:txBody>
-          <a:bodyPr wrap="square">
-            <a:spAutoFit/>
-          </a:bodyPr>
-          <a:lstStyle/>
-          <a:p>
-            <a:pPr algn="l">
-              <a:spcAft>
-                <a:spcPts val="300"/>
-              </a:spcAft>
-            </a:pPr>
-            <a:r>
-              <a:rPr sz="1500" b="1">
+              <a:t>Anillo Sur</a:t>
+            </a:r>
+          </a:p>
+        </p:txBody>
+      </p:sp>
+      <p:sp>
+        <p:nvSpPr>
+          <p:cNvPr id="20" name="TextBox 19"/>
+          <p:cNvSpPr txBox="1"/>
+          <p:nvPr/>
+        </p:nvSpPr>
+        <p:spPr>
+          <a:xfrm>
+            <a:off x="8540496" y="2590312"/>
+            <a:ext cx="3200400" cy="292608"/>
+          </a:xfrm>
+          <a:prstGeom prst="rect">
+            <a:avLst/>
+          </a:prstGeom>
+          <a:noFill/>
+        </p:spPr>
+        <p:txBody>
+          <a:bodyPr wrap="square">
+            <a:spAutoFit/>
+          </a:bodyPr>
+          <a:lstStyle/>
+          <a:p>
+            <a:pPr algn="l">
+              <a:spcAft>
+                <a:spcPts val="300"/>
+              </a:spcAft>
+            </a:pPr>
+            <a:r>
+              <a:rPr sz="1600" b="1">
                 <a:solidFill>
                   <a:srgbClr val="0D3B66"/>
                 </a:solidFill>
                 <a:latin typeface="Calibri"/>
               </a:rPr>
-              <a:t>26 m³    0,3 %</a:t>
-            </a:r>
-          </a:p>
-        </p:txBody>
-      </p:sp>
-      <p:sp>
-        <p:nvSpPr>
-          <p:cNvPr id="39" name="Rounded Rectangle 38"/>
+              <a:t>332 m³    54 %</a:t>
+            </a:r>
+          </a:p>
+        </p:txBody>
+      </p:sp>
+      <p:sp>
+        <p:nvSpPr>
+          <p:cNvPr id="21" name="Rounded Rectangle 20"/>
           <p:cNvSpPr/>
           <p:nvPr/>
         </p:nvSpPr>
         <p:spPr>
           <a:xfrm>
-            <a:off x="8430768" y="4279392"/>
-            <a:ext cx="3419856" cy="603504"/>
+            <a:off x="8430768" y="3904487"/>
+            <a:ext cx="3419856" cy="768096"/>
           </a:xfrm>
           <a:prstGeom prst="roundRect">
             <a:avLst>
@@ -7126,13 +11537,13 @@
       </p:sp>
       <p:sp>
         <p:nvSpPr>
-          <p:cNvPr id="40" name="TextBox 39"/>
-          <p:cNvSpPr txBox="1"/>
-          <p:nvPr/>
-        </p:nvSpPr>
-        <p:spPr>
-          <a:xfrm>
-            <a:off x="8540496" y="4315968"/>
+          <p:cNvPr id="22" name="TextBox 21"/>
+          <p:cNvSpPr txBox="1"/>
+          <p:nvPr/>
+        </p:nvSpPr>
+        <p:spPr>
+          <a:xfrm>
+            <a:off x="8540496" y="3941063"/>
             <a:ext cx="3200400" cy="182880"/>
           </a:xfrm>
           <a:prstGeom prst="rect">
@@ -7158,60 +11569,1157 @@
                 </a:solidFill>
                 <a:latin typeface="Calibri"/>
               </a:rPr>
-              <a:t>Salida ARROW</a:t>
-            </a:r>
-          </a:p>
-        </p:txBody>
-      </p:sp>
-      <p:sp>
-        <p:nvSpPr>
-          <p:cNvPr id="41" name="TextBox 40"/>
-          <p:cNvSpPr txBox="1"/>
-          <p:nvPr/>
-        </p:nvSpPr>
-        <p:spPr>
-          <a:xfrm>
-            <a:off x="8540496" y="4535424"/>
-            <a:ext cx="3200400" cy="274320"/>
-          </a:xfrm>
-          <a:prstGeom prst="rect">
-            <a:avLst/>
-          </a:prstGeom>
-          <a:noFill/>
-        </p:spPr>
-        <p:txBody>
-          <a:bodyPr wrap="square">
-            <a:spAutoFit/>
-          </a:bodyPr>
-          <a:lstStyle/>
-          <a:p>
-            <a:pPr algn="l">
-              <a:spcAft>
-                <a:spcPts val="300"/>
-              </a:spcAft>
-            </a:pPr>
-            <a:r>
-              <a:rPr sz="1500" b="1">
+              <a:t>Anillo Norte</a:t>
+            </a:r>
+          </a:p>
+        </p:txBody>
+      </p:sp>
+      <p:sp>
+        <p:nvSpPr>
+          <p:cNvPr id="23" name="TextBox 22"/>
+          <p:cNvSpPr txBox="1"/>
+          <p:nvPr/>
+        </p:nvSpPr>
+        <p:spPr>
+          <a:xfrm>
+            <a:off x="8540496" y="4227088"/>
+            <a:ext cx="3200400" cy="292608"/>
+          </a:xfrm>
+          <a:prstGeom prst="rect">
+            <a:avLst/>
+          </a:prstGeom>
+          <a:noFill/>
+        </p:spPr>
+        <p:txBody>
+          <a:bodyPr wrap="square">
+            <a:spAutoFit/>
+          </a:bodyPr>
+          <a:lstStyle/>
+          <a:p>
+            <a:pPr algn="l">
+              <a:spcAft>
+                <a:spcPts val="300"/>
+              </a:spcAft>
+            </a:pPr>
+            <a:r>
+              <a:rPr sz="1600" b="1">
                 <a:solidFill>
                   <a:srgbClr val="0D3B66"/>
                 </a:solidFill>
                 <a:latin typeface="Calibri"/>
               </a:rPr>
-              <a:t>1 m³    &lt;0,1 %</a:t>
-            </a:r>
-          </a:p>
-        </p:txBody>
-      </p:sp>
-      <p:sp>
-        <p:nvSpPr>
-          <p:cNvPr id="42" name="Rounded Rectangle 41"/>
+              <a:t>287 m³    46 %</a:t>
+            </a:r>
+          </a:p>
+        </p:txBody>
+      </p:sp>
+      <p:sp>
+        <p:nvSpPr>
+          <p:cNvPr id="24" name="Rounded Rectangle 23"/>
           <p:cNvSpPr/>
           <p:nvPr/>
         </p:nvSpPr>
         <p:spPr>
           <a:xfrm>
-            <a:off x="8430768" y="4919472"/>
-            <a:ext cx="3419856" cy="603504"/>
+            <a:off x="201168" y="5705856"/>
+            <a:ext cx="11795760" cy="438912"/>
+          </a:xfrm>
+          <a:prstGeom prst="roundRect">
+            <a:avLst>
+              <a:gd name="adj" fmla="val 8000"/>
+            </a:avLst>
+          </a:prstGeom>
+          <a:solidFill>
+            <a:srgbClr val="FFF9EB"/>
+          </a:solidFill>
+          <a:ln w="6350">
+            <a:solidFill>
+              <a:srgbClr val="C9A227"/>
+            </a:solidFill>
+          </a:ln>
+        </p:spPr>
+        <p:style>
+          <a:lnRef idx="1">
+            <a:schemeClr val="accent1"/>
+          </a:lnRef>
+          <a:fillRef idx="3">
+            <a:schemeClr val="accent1"/>
+          </a:fillRef>
+          <a:effectRef idx="2">
+            <a:schemeClr val="accent1"/>
+          </a:effectRef>
+          <a:fontRef idx="minor">
+            <a:schemeClr val="lt1"/>
+          </a:fontRef>
+        </p:style>
+        <p:txBody>
+          <a:bodyPr rtlCol="0" anchor="ctr"/>
+          <a:lstStyle/>
+          <a:p>
+            <a:pPr algn="ctr"/>
+          </a:p>
+        </p:txBody>
+      </p:sp>
+      <p:sp>
+        <p:nvSpPr>
+          <p:cNvPr id="25" name="TextBox 24"/>
+          <p:cNvSpPr txBox="1"/>
+          <p:nvPr/>
+        </p:nvSpPr>
+        <p:spPr>
+          <a:xfrm>
+            <a:off x="329184" y="5779008"/>
+            <a:ext cx="11539728" cy="310896"/>
+          </a:xfrm>
+          <a:prstGeom prst="rect">
+            <a:avLst/>
+          </a:prstGeom>
+          <a:noFill/>
+        </p:spPr>
+        <p:txBody>
+          <a:bodyPr wrap="square">
+            <a:spAutoFit/>
+          </a:bodyPr>
+          <a:lstStyle/>
+          <a:p>
+            <a:pPr algn="l">
+              <a:spcAft>
+                <a:spcPts val="300"/>
+              </a:spcAft>
+            </a:pPr>
+            <a:r>
+              <a:rPr sz="1100" b="0">
+                <a:solidFill>
+                  <a:srgbClr val="0D3B66"/>
+                </a:solidFill>
+                <a:latin typeface="Calibri"/>
+              </a:rPr>
+              <a:t>Recepción 29/04/2026 (Anillo Norte / Anillo Sur)  ·  Capacitación 12/12/2025  ·  Joceline Lazo  ·  Constanza Vilches</a:t>
+            </a:r>
+          </a:p>
+        </p:txBody>
+      </p:sp>
+      <p:sp>
+        <p:nvSpPr>
+          <p:cNvPr id="26" name="TextBox 25"/>
+          <p:cNvSpPr txBox="1"/>
+          <p:nvPr/>
+        </p:nvSpPr>
+        <p:spPr>
+          <a:xfrm>
+            <a:off x="256032" y="6181344"/>
+            <a:ext cx="11704320" cy="566928"/>
+          </a:xfrm>
+          <a:prstGeom prst="rect">
+            <a:avLst/>
+          </a:prstGeom>
+          <a:noFill/>
+        </p:spPr>
+        <p:txBody>
+          <a:bodyPr wrap="square">
+            <a:spAutoFit/>
+          </a:bodyPr>
+          <a:lstStyle/>
+          <a:p>
+            <a:pPr algn="l">
+              <a:spcAft>
+                <a:spcPts val="300"/>
+              </a:spcAft>
+            </a:pPr>
+            <a:r>
+              <a:rPr sz="1200" b="0">
+                <a:solidFill>
+                  <a:srgbClr val="0D3B66"/>
+                </a:solidFill>
+                <a:latin typeface="Calibri"/>
+              </a:rPr>
+              <a:t>Mayo 31.150   ·   Junio 664   ·   Julio 618   ·   Agosto 1–17: 366   ·   proy. ago 667 m³.</a:t>
+            </a:r>
+          </a:p>
+          <a:p>
+            <a:pPr algn="l">
+              <a:spcAft>
+                <a:spcPts val="300"/>
+              </a:spcAft>
+            </a:pPr>
+            <a:r>
+              <a:rPr sz="1100" b="0">
+                <a:solidFill>
+                  <a:srgbClr val="5A5A5A"/>
+                </a:solidFill>
+                <a:latin typeface="Calibri"/>
+              </a:rPr>
+              <a:t>Anillo Norte y Anillo Sur cubren el recinto.</a:t>
+            </a:r>
+          </a:p>
+        </p:txBody>
+      </p:sp>
+    </p:spTree>
+  </p:cSld>
+  <p:clrMapOvr>
+    <a:masterClrMapping/>
+  </p:clrMapOvr>
+</p:sld>
+</file>
+
+<file path=ppt/slides/slide9.xml><?xml version="1.0" encoding="utf-8"?>
+<p:sld xmlns:a="http://schemas.openxmlformats.org/drawingml/2006/main" xmlns:p="http://schemas.openxmlformats.org/presentationml/2006/main" xmlns:r="http://schemas.openxmlformats.org/officeDocument/2006/relationships">
+  <p:cSld>
+    <p:spTree>
+      <p:nvGrpSpPr>
+        <p:cNvPr id="1" name=""/>
+        <p:cNvGrpSpPr/>
+        <p:nvPr/>
+      </p:nvGrpSpPr>
+      <p:grpSpPr/>
+      <p:sp>
+        <p:nvSpPr>
+          <p:cNvPr id="2" name="Rectangle 1"/>
+          <p:cNvSpPr/>
+          <p:nvPr/>
+        </p:nvSpPr>
+        <p:spPr>
+          <a:xfrm>
+            <a:off x="0" y="0"/>
+            <a:ext cx="12191695" cy="841248"/>
+          </a:xfrm>
+          <a:prstGeom prst="rect">
+            <a:avLst/>
+          </a:prstGeom>
+          <a:solidFill>
+            <a:srgbClr val="0D3B66"/>
+          </a:solidFill>
+          <a:ln>
+            <a:noFill/>
+          </a:ln>
+        </p:spPr>
+        <p:style>
+          <a:lnRef idx="1">
+            <a:schemeClr val="accent1"/>
+          </a:lnRef>
+          <a:fillRef idx="3">
+            <a:schemeClr val="accent1"/>
+          </a:fillRef>
+          <a:effectRef idx="2">
+            <a:schemeClr val="accent1"/>
+          </a:effectRef>
+          <a:fontRef idx="minor">
+            <a:schemeClr val="lt1"/>
+          </a:fontRef>
+        </p:style>
+        <p:txBody>
+          <a:bodyPr rtlCol="0" anchor="ctr"/>
+          <a:lstStyle/>
+          <a:p>
+            <a:pPr algn="ctr"/>
+          </a:p>
+        </p:txBody>
+      </p:sp>
+      <p:sp>
+        <p:nvSpPr>
+          <p:cNvPr id="3" name="Rectangle 2"/>
+          <p:cNvSpPr/>
+          <p:nvPr/>
+        </p:nvSpPr>
+        <p:spPr>
+          <a:xfrm>
+            <a:off x="0" y="841248"/>
+            <a:ext cx="12191695" cy="54864"/>
+          </a:xfrm>
+          <a:prstGeom prst="rect">
+            <a:avLst/>
+          </a:prstGeom>
+          <a:solidFill>
+            <a:srgbClr val="C9A227"/>
+          </a:solidFill>
+          <a:ln>
+            <a:noFill/>
+          </a:ln>
+        </p:spPr>
+        <p:style>
+          <a:lnRef idx="1">
+            <a:schemeClr val="accent1"/>
+          </a:lnRef>
+          <a:fillRef idx="3">
+            <a:schemeClr val="accent1"/>
+          </a:fillRef>
+          <a:effectRef idx="2">
+            <a:schemeClr val="accent1"/>
+          </a:effectRef>
+          <a:fontRef idx="minor">
+            <a:schemeClr val="lt1"/>
+          </a:fontRef>
+        </p:style>
+        <p:txBody>
+          <a:bodyPr rtlCol="0" anchor="ctr"/>
+          <a:lstStyle/>
+          <a:p>
+            <a:pPr algn="ctr"/>
+          </a:p>
+        </p:txBody>
+      </p:sp>
+      <p:pic>
+        <p:nvPicPr>
+          <p:cNvPr id="4" name="Picture 3" descr="logo wes.bmp"/>
+          <p:cNvPicPr>
+            <a:picLocks noChangeAspect="1"/>
+          </p:cNvPicPr>
+          <p:nvPr/>
+        </p:nvPicPr>
+        <p:blipFill>
+          <a:blip r:embed="rId2"/>
+          <a:stretch>
+            <a:fillRect/>
+          </a:stretch>
+        </p:blipFill>
+        <p:spPr>
+          <a:xfrm>
+            <a:off x="10835640" y="146304"/>
+            <a:ext cx="1143000" cy="253401"/>
+          </a:xfrm>
+          <a:prstGeom prst="rect">
+            <a:avLst/>
+          </a:prstGeom>
+        </p:spPr>
+      </p:pic>
+      <p:sp>
+        <p:nvSpPr>
+          <p:cNvPr id="5" name="TextBox 4"/>
+          <p:cNvSpPr txBox="1"/>
+          <p:nvPr/>
+        </p:nvSpPr>
+        <p:spPr>
+          <a:xfrm>
+            <a:off x="256032" y="109728"/>
+            <a:ext cx="10607040" cy="384048"/>
+          </a:xfrm>
+          <a:prstGeom prst="rect">
+            <a:avLst/>
+          </a:prstGeom>
+          <a:noFill/>
+        </p:spPr>
+        <p:txBody>
+          <a:bodyPr wrap="square">
+            <a:spAutoFit/>
+          </a:bodyPr>
+          <a:lstStyle/>
+          <a:p>
+            <a:pPr algn="l">
+              <a:spcAft>
+                <a:spcPts val="300"/>
+              </a:spcAft>
+            </a:pPr>
+            <a:r>
+              <a:rPr sz="2000" b="1">
+                <a:solidFill>
+                  <a:srgbClr val="FFFFFF"/>
+                </a:solidFill>
+                <a:latin typeface="Calibri"/>
+              </a:rPr>
+              <a:t>PAK  ·  Equipos y consumo</a:t>
+            </a:r>
+          </a:p>
+        </p:txBody>
+      </p:sp>
+      <p:sp>
+        <p:nvSpPr>
+          <p:cNvPr id="6" name="TextBox 5"/>
+          <p:cNvSpPr txBox="1"/>
+          <p:nvPr/>
+        </p:nvSpPr>
+        <p:spPr>
+          <a:xfrm>
+            <a:off x="256032" y="457200"/>
+            <a:ext cx="10607040" cy="329184"/>
+          </a:xfrm>
+          <a:prstGeom prst="rect">
+            <a:avLst/>
+          </a:prstGeom>
+          <a:noFill/>
+        </p:spPr>
+        <p:txBody>
+          <a:bodyPr wrap="square">
+            <a:spAutoFit/>
+          </a:bodyPr>
+          <a:lstStyle/>
+          <a:p>
+            <a:pPr algn="l">
+              <a:spcAft>
+                <a:spcPts val="300"/>
+              </a:spcAft>
+            </a:pPr>
+            <a:r>
+              <a:rPr sz="1100" b="0">
+                <a:solidFill>
+                  <a:srgbClr val="DCE6F0"/>
+                </a:solidFill>
+                <a:latin typeface="Calibri"/>
+              </a:rPr>
+              <a:t>Parque Arauco Kennedy   |   7 puntos WES   |   01/05/2026 – 17/08/2026</a:t>
+            </a:r>
+          </a:p>
+        </p:txBody>
+      </p:sp>
+      <p:sp>
+        <p:nvSpPr>
+          <p:cNvPr id="7" name="Rounded Rectangle 6"/>
+          <p:cNvSpPr/>
+          <p:nvPr/>
+        </p:nvSpPr>
+        <p:spPr>
+          <a:xfrm>
+            <a:off x="201168" y="1024128"/>
+            <a:ext cx="2880360" cy="530352"/>
+          </a:xfrm>
+          <a:prstGeom prst="roundRect">
+            <a:avLst>
+              <a:gd name="adj" fmla="val 8000"/>
+            </a:avLst>
+          </a:prstGeom>
+          <a:solidFill>
+            <a:srgbClr val="F5F7FA"/>
+          </a:solidFill>
+          <a:ln w="6350">
+            <a:solidFill>
+              <a:srgbClr val="8C5A5A"/>
+            </a:solidFill>
+          </a:ln>
+        </p:spPr>
+        <p:style>
+          <a:lnRef idx="1">
+            <a:schemeClr val="accent1"/>
+          </a:lnRef>
+          <a:fillRef idx="3">
+            <a:schemeClr val="accent1"/>
+          </a:fillRef>
+          <a:effectRef idx="2">
+            <a:schemeClr val="accent1"/>
+          </a:effectRef>
+          <a:fontRef idx="minor">
+            <a:schemeClr val="lt1"/>
+          </a:fontRef>
+        </p:style>
+        <p:txBody>
+          <a:bodyPr rtlCol="0" anchor="ctr"/>
+          <a:lstStyle/>
+          <a:p>
+            <a:pPr algn="ctr"/>
+          </a:p>
+        </p:txBody>
+      </p:sp>
+      <p:sp>
+        <p:nvSpPr>
+          <p:cNvPr id="8" name="TextBox 7"/>
+          <p:cNvSpPr txBox="1"/>
+          <p:nvPr/>
+        </p:nvSpPr>
+        <p:spPr>
+          <a:xfrm>
+            <a:off x="292608" y="1060704"/>
+            <a:ext cx="2715768" cy="182880"/>
+          </a:xfrm>
+          <a:prstGeom prst="rect">
+            <a:avLst/>
+          </a:prstGeom>
+          <a:noFill/>
+        </p:spPr>
+        <p:txBody>
+          <a:bodyPr wrap="square">
+            <a:spAutoFit/>
+          </a:bodyPr>
+          <a:lstStyle/>
+          <a:p>
+            <a:pPr algn="l">
+              <a:spcAft>
+                <a:spcPts val="300"/>
+              </a:spcAft>
+            </a:pPr>
+            <a:r>
+              <a:rPr sz="1000" b="1">
+                <a:solidFill>
+                  <a:srgbClr val="C9A227"/>
+                </a:solidFill>
+                <a:latin typeface="Calibri"/>
+              </a:rPr>
+              <a:t>000025-20</a:t>
+            </a:r>
+          </a:p>
+        </p:txBody>
+      </p:sp>
+      <p:sp>
+        <p:nvSpPr>
+          <p:cNvPr id="9" name="TextBox 8"/>
+          <p:cNvSpPr txBox="1"/>
+          <p:nvPr/>
+        </p:nvSpPr>
+        <p:spPr>
+          <a:xfrm>
+            <a:off x="292608" y="1243584"/>
+            <a:ext cx="2715768" cy="219456"/>
+          </a:xfrm>
+          <a:prstGeom prst="rect">
+            <a:avLst/>
+          </a:prstGeom>
+          <a:noFill/>
+        </p:spPr>
+        <p:txBody>
+          <a:bodyPr wrap="square">
+            <a:spAutoFit/>
+          </a:bodyPr>
+          <a:lstStyle/>
+          <a:p>
+            <a:pPr algn="l">
+              <a:spcAft>
+                <a:spcPts val="300"/>
+              </a:spcAft>
+            </a:pPr>
+            <a:r>
+              <a:rPr sz="1200" b="1">
+                <a:solidFill>
+                  <a:srgbClr val="0D3B66"/>
+                </a:solidFill>
+                <a:latin typeface="Calibri"/>
+              </a:rPr>
+              <a:t>Matriz Andén</a:t>
+            </a:r>
+          </a:p>
+        </p:txBody>
+      </p:sp>
+      <p:sp>
+        <p:nvSpPr>
+          <p:cNvPr id="10" name="Rounded Rectangle 9"/>
+          <p:cNvSpPr/>
+          <p:nvPr/>
+        </p:nvSpPr>
+        <p:spPr>
+          <a:xfrm>
+            <a:off x="3172968" y="1024128"/>
+            <a:ext cx="2880360" cy="530352"/>
+          </a:xfrm>
+          <a:prstGeom prst="roundRect">
+            <a:avLst>
+              <a:gd name="adj" fmla="val 8000"/>
+            </a:avLst>
+          </a:prstGeom>
+          <a:solidFill>
+            <a:srgbClr val="F5F7FA"/>
+          </a:solidFill>
+          <a:ln w="6350">
+            <a:solidFill>
+              <a:srgbClr val="46648C"/>
+            </a:solidFill>
+          </a:ln>
+        </p:spPr>
+        <p:style>
+          <a:lnRef idx="1">
+            <a:schemeClr val="accent1"/>
+          </a:lnRef>
+          <a:fillRef idx="3">
+            <a:schemeClr val="accent1"/>
+          </a:fillRef>
+          <a:effectRef idx="2">
+            <a:schemeClr val="accent1"/>
+          </a:effectRef>
+          <a:fontRef idx="minor">
+            <a:schemeClr val="lt1"/>
+          </a:fontRef>
+        </p:style>
+        <p:txBody>
+          <a:bodyPr rtlCol="0" anchor="ctr"/>
+          <a:lstStyle/>
+          <a:p>
+            <a:pPr algn="ctr"/>
+          </a:p>
+        </p:txBody>
+      </p:sp>
+      <p:sp>
+        <p:nvSpPr>
+          <p:cNvPr id="11" name="TextBox 10"/>
+          <p:cNvSpPr txBox="1"/>
+          <p:nvPr/>
+        </p:nvSpPr>
+        <p:spPr>
+          <a:xfrm>
+            <a:off x="3264408" y="1060704"/>
+            <a:ext cx="2715768" cy="182880"/>
+          </a:xfrm>
+          <a:prstGeom prst="rect">
+            <a:avLst/>
+          </a:prstGeom>
+          <a:noFill/>
+        </p:spPr>
+        <p:txBody>
+          <a:bodyPr wrap="square">
+            <a:spAutoFit/>
+          </a:bodyPr>
+          <a:lstStyle/>
+          <a:p>
+            <a:pPr algn="l">
+              <a:spcAft>
+                <a:spcPts val="300"/>
+              </a:spcAft>
+            </a:pPr>
+            <a:r>
+              <a:rPr sz="1000" b="1">
+                <a:solidFill>
+                  <a:srgbClr val="C9A227"/>
+                </a:solidFill>
+                <a:latin typeface="Calibri"/>
+              </a:rPr>
+              <a:t>000025-21</a:t>
+            </a:r>
+          </a:p>
+        </p:txBody>
+      </p:sp>
+      <p:sp>
+        <p:nvSpPr>
+          <p:cNvPr id="12" name="TextBox 11"/>
+          <p:cNvSpPr txBox="1"/>
+          <p:nvPr/>
+        </p:nvSpPr>
+        <p:spPr>
+          <a:xfrm>
+            <a:off x="3264408" y="1243584"/>
+            <a:ext cx="2715768" cy="219456"/>
+          </a:xfrm>
+          <a:prstGeom prst="rect">
+            <a:avLst/>
+          </a:prstGeom>
+          <a:noFill/>
+        </p:spPr>
+        <p:txBody>
+          <a:bodyPr wrap="square">
+            <a:spAutoFit/>
+          </a:bodyPr>
+          <a:lstStyle/>
+          <a:p>
+            <a:pPr algn="l">
+              <a:spcAft>
+                <a:spcPts val="300"/>
+              </a:spcAft>
+            </a:pPr>
+            <a:r>
+              <a:rPr sz="1200" b="1">
+                <a:solidFill>
+                  <a:srgbClr val="0D3B66"/>
+                </a:solidFill>
+                <a:latin typeface="Calibri"/>
+              </a:rPr>
+              <a:t>Locales Gast.</a:t>
+            </a:r>
+          </a:p>
+        </p:txBody>
+      </p:sp>
+      <p:sp>
+        <p:nvSpPr>
+          <p:cNvPr id="13" name="Rounded Rectangle 12"/>
+          <p:cNvSpPr/>
+          <p:nvPr/>
+        </p:nvSpPr>
+        <p:spPr>
+          <a:xfrm>
+            <a:off x="6144768" y="1024128"/>
+            <a:ext cx="2880360" cy="530352"/>
+          </a:xfrm>
+          <a:prstGeom prst="roundRect">
+            <a:avLst>
+              <a:gd name="adj" fmla="val 8000"/>
+            </a:avLst>
+          </a:prstGeom>
+          <a:solidFill>
+            <a:srgbClr val="F5F7FA"/>
+          </a:solidFill>
+          <a:ln w="6350">
+            <a:solidFill>
+              <a:srgbClr val="A0783C"/>
+            </a:solidFill>
+          </a:ln>
+        </p:spPr>
+        <p:style>
+          <a:lnRef idx="1">
+            <a:schemeClr val="accent1"/>
+          </a:lnRef>
+          <a:fillRef idx="3">
+            <a:schemeClr val="accent1"/>
+          </a:fillRef>
+          <a:effectRef idx="2">
+            <a:schemeClr val="accent1"/>
+          </a:effectRef>
+          <a:fontRef idx="minor">
+            <a:schemeClr val="lt1"/>
+          </a:fontRef>
+        </p:style>
+        <p:txBody>
+          <a:bodyPr rtlCol="0" anchor="ctr"/>
+          <a:lstStyle/>
+          <a:p>
+            <a:pPr algn="ctr"/>
+          </a:p>
+        </p:txBody>
+      </p:sp>
+      <p:sp>
+        <p:nvSpPr>
+          <p:cNvPr id="14" name="TextBox 13"/>
+          <p:cNvSpPr txBox="1"/>
+          <p:nvPr/>
+        </p:nvSpPr>
+        <p:spPr>
+          <a:xfrm>
+            <a:off x="6236207" y="1060704"/>
+            <a:ext cx="2715768" cy="182880"/>
+          </a:xfrm>
+          <a:prstGeom prst="rect">
+            <a:avLst/>
+          </a:prstGeom>
+          <a:noFill/>
+        </p:spPr>
+        <p:txBody>
+          <a:bodyPr wrap="square">
+            <a:spAutoFit/>
+          </a:bodyPr>
+          <a:lstStyle/>
+          <a:p>
+            <a:pPr algn="l">
+              <a:spcAft>
+                <a:spcPts val="300"/>
+              </a:spcAft>
+            </a:pPr>
+            <a:r>
+              <a:rPr sz="1000" b="1">
+                <a:solidFill>
+                  <a:srgbClr val="C9A227"/>
+                </a:solidFill>
+                <a:latin typeface="Calibri"/>
+              </a:rPr>
+              <a:t>000025-22</a:t>
+            </a:r>
+          </a:p>
+        </p:txBody>
+      </p:sp>
+      <p:sp>
+        <p:nvSpPr>
+          <p:cNvPr id="15" name="TextBox 14"/>
+          <p:cNvSpPr txBox="1"/>
+          <p:nvPr/>
+        </p:nvSpPr>
+        <p:spPr>
+          <a:xfrm>
+            <a:off x="6236207" y="1243584"/>
+            <a:ext cx="2715768" cy="219456"/>
+          </a:xfrm>
+          <a:prstGeom prst="rect">
+            <a:avLst/>
+          </a:prstGeom>
+          <a:noFill/>
+        </p:spPr>
+        <p:txBody>
+          <a:bodyPr wrap="square">
+            <a:spAutoFit/>
+          </a:bodyPr>
+          <a:lstStyle/>
+          <a:p>
+            <a:pPr algn="l">
+              <a:spcAft>
+                <a:spcPts val="300"/>
+              </a:spcAft>
+            </a:pPr>
+            <a:r>
+              <a:rPr sz="1200" b="1">
+                <a:solidFill>
+                  <a:srgbClr val="0D3B66"/>
+                </a:solidFill>
+                <a:latin typeface="Calibri"/>
+              </a:rPr>
+              <a:t>Sandía Antigua</a:t>
+            </a:r>
+          </a:p>
+        </p:txBody>
+      </p:sp>
+      <p:sp>
+        <p:nvSpPr>
+          <p:cNvPr id="16" name="Rounded Rectangle 15"/>
+          <p:cNvSpPr/>
+          <p:nvPr/>
+        </p:nvSpPr>
+        <p:spPr>
+          <a:xfrm>
+            <a:off x="9116568" y="1024128"/>
+            <a:ext cx="2880360" cy="530352"/>
+          </a:xfrm>
+          <a:prstGeom prst="roundRect">
+            <a:avLst>
+              <a:gd name="adj" fmla="val 8000"/>
+            </a:avLst>
+          </a:prstGeom>
+          <a:solidFill>
+            <a:srgbClr val="F5F7FA"/>
+          </a:solidFill>
+          <a:ln w="6350">
+            <a:solidFill>
+              <a:srgbClr val="508282"/>
+            </a:solidFill>
+          </a:ln>
+        </p:spPr>
+        <p:style>
+          <a:lnRef idx="1">
+            <a:schemeClr val="accent1"/>
+          </a:lnRef>
+          <a:fillRef idx="3">
+            <a:schemeClr val="accent1"/>
+          </a:fillRef>
+          <a:effectRef idx="2">
+            <a:schemeClr val="accent1"/>
+          </a:effectRef>
+          <a:fontRef idx="minor">
+            <a:schemeClr val="lt1"/>
+          </a:fontRef>
+        </p:style>
+        <p:txBody>
+          <a:bodyPr rtlCol="0" anchor="ctr"/>
+          <a:lstStyle/>
+          <a:p>
+            <a:pPr algn="ctr"/>
+          </a:p>
+        </p:txBody>
+      </p:sp>
+      <p:sp>
+        <p:nvSpPr>
+          <p:cNvPr id="17" name="TextBox 16"/>
+          <p:cNvSpPr txBox="1"/>
+          <p:nvPr/>
+        </p:nvSpPr>
+        <p:spPr>
+          <a:xfrm>
+            <a:off x="9208008" y="1060704"/>
+            <a:ext cx="2715768" cy="182880"/>
+          </a:xfrm>
+          <a:prstGeom prst="rect">
+            <a:avLst/>
+          </a:prstGeom>
+          <a:noFill/>
+        </p:spPr>
+        <p:txBody>
+          <a:bodyPr wrap="square">
+            <a:spAutoFit/>
+          </a:bodyPr>
+          <a:lstStyle/>
+          <a:p>
+            <a:pPr algn="l">
+              <a:spcAft>
+                <a:spcPts val="300"/>
+              </a:spcAft>
+            </a:pPr>
+            <a:r>
+              <a:rPr sz="1000" b="1">
+                <a:solidFill>
+                  <a:srgbClr val="C9A227"/>
+                </a:solidFill>
+                <a:latin typeface="Calibri"/>
+              </a:rPr>
+              <a:t>000025-23</a:t>
+            </a:r>
+          </a:p>
+        </p:txBody>
+      </p:sp>
+      <p:sp>
+        <p:nvSpPr>
+          <p:cNvPr id="18" name="TextBox 17"/>
+          <p:cNvSpPr txBox="1"/>
+          <p:nvPr/>
+        </p:nvSpPr>
+        <p:spPr>
+          <a:xfrm>
+            <a:off x="9208008" y="1243584"/>
+            <a:ext cx="2715768" cy="219456"/>
+          </a:xfrm>
+          <a:prstGeom prst="rect">
+            <a:avLst/>
+          </a:prstGeom>
+          <a:noFill/>
+        </p:spPr>
+        <p:txBody>
+          <a:bodyPr wrap="square">
+            <a:spAutoFit/>
+          </a:bodyPr>
+          <a:lstStyle/>
+          <a:p>
+            <a:pPr algn="l">
+              <a:spcAft>
+                <a:spcPts val="300"/>
+              </a:spcAft>
+            </a:pPr>
+            <a:r>
+              <a:rPr sz="1200" b="1">
+                <a:solidFill>
+                  <a:srgbClr val="0D3B66"/>
+                </a:solidFill>
+                <a:latin typeface="Calibri"/>
+              </a:rPr>
+              <a:t>Pileta</a:t>
+            </a:r>
+          </a:p>
+        </p:txBody>
+      </p:sp>
+      <p:sp>
+        <p:nvSpPr>
+          <p:cNvPr id="19" name="Rounded Rectangle 18"/>
+          <p:cNvSpPr/>
+          <p:nvPr/>
+        </p:nvSpPr>
+        <p:spPr>
+          <a:xfrm>
+            <a:off x="201168" y="1627632"/>
+            <a:ext cx="3870960" cy="530352"/>
+          </a:xfrm>
+          <a:prstGeom prst="roundRect">
+            <a:avLst>
+              <a:gd name="adj" fmla="val 8000"/>
+            </a:avLst>
+          </a:prstGeom>
+          <a:solidFill>
+            <a:srgbClr val="F5F7FA"/>
+          </a:solidFill>
+          <a:ln w="6350">
+            <a:solidFill>
+              <a:srgbClr val="0D3B66"/>
+            </a:solidFill>
+          </a:ln>
+        </p:spPr>
+        <p:style>
+          <a:lnRef idx="1">
+            <a:schemeClr val="accent1"/>
+          </a:lnRef>
+          <a:fillRef idx="3">
+            <a:schemeClr val="accent1"/>
+          </a:fillRef>
+          <a:effectRef idx="2">
+            <a:schemeClr val="accent1"/>
+          </a:effectRef>
+          <a:fontRef idx="minor">
+            <a:schemeClr val="lt1"/>
+          </a:fontRef>
+        </p:style>
+        <p:txBody>
+          <a:bodyPr rtlCol="0" anchor="ctr"/>
+          <a:lstStyle/>
+          <a:p>
+            <a:pPr algn="ctr"/>
+          </a:p>
+        </p:txBody>
+      </p:sp>
+      <p:sp>
+        <p:nvSpPr>
+          <p:cNvPr id="20" name="TextBox 19"/>
+          <p:cNvSpPr txBox="1"/>
+          <p:nvPr/>
+        </p:nvSpPr>
+        <p:spPr>
+          <a:xfrm>
+            <a:off x="292608" y="1664208"/>
+            <a:ext cx="3706368" cy="182880"/>
+          </a:xfrm>
+          <a:prstGeom prst="rect">
+            <a:avLst/>
+          </a:prstGeom>
+          <a:noFill/>
+        </p:spPr>
+        <p:txBody>
+          <a:bodyPr wrap="square">
+            <a:spAutoFit/>
+          </a:bodyPr>
+          <a:lstStyle/>
+          <a:p>
+            <a:pPr algn="l">
+              <a:spcAft>
+                <a:spcPts val="300"/>
+              </a:spcAft>
+            </a:pPr>
+            <a:r>
+              <a:rPr sz="1000" b="1">
+                <a:solidFill>
+                  <a:srgbClr val="C9A227"/>
+                </a:solidFill>
+                <a:latin typeface="Calibri"/>
+              </a:rPr>
+              <a:t>000025-24</a:t>
+            </a:r>
+          </a:p>
+        </p:txBody>
+      </p:sp>
+      <p:sp>
+        <p:nvSpPr>
+          <p:cNvPr id="21" name="TextBox 20"/>
+          <p:cNvSpPr txBox="1"/>
+          <p:nvPr/>
+        </p:nvSpPr>
+        <p:spPr>
+          <a:xfrm>
+            <a:off x="292608" y="1847088"/>
+            <a:ext cx="3706368" cy="219456"/>
+          </a:xfrm>
+          <a:prstGeom prst="rect">
+            <a:avLst/>
+          </a:prstGeom>
+          <a:noFill/>
+        </p:spPr>
+        <p:txBody>
+          <a:bodyPr wrap="square">
+            <a:spAutoFit/>
+          </a:bodyPr>
+          <a:lstStyle/>
+          <a:p>
+            <a:pPr algn="l">
+              <a:spcAft>
+                <a:spcPts val="300"/>
+              </a:spcAft>
+            </a:pPr>
+            <a:r>
+              <a:rPr sz="1200" b="1">
+                <a:solidFill>
+                  <a:srgbClr val="0D3B66"/>
+                </a:solidFill>
+                <a:latin typeface="Calibri"/>
+              </a:rPr>
+              <a:t>Cascada</a:t>
+            </a:r>
+          </a:p>
+        </p:txBody>
+      </p:sp>
+      <p:sp>
+        <p:nvSpPr>
+          <p:cNvPr id="22" name="Rounded Rectangle 21"/>
+          <p:cNvSpPr/>
+          <p:nvPr/>
+        </p:nvSpPr>
+        <p:spPr>
+          <a:xfrm>
+            <a:off x="4163568" y="1627632"/>
+            <a:ext cx="3870960" cy="530352"/>
+          </a:xfrm>
+          <a:prstGeom prst="roundRect">
+            <a:avLst>
+              <a:gd name="adj" fmla="val 8000"/>
+            </a:avLst>
+          </a:prstGeom>
+          <a:solidFill>
+            <a:srgbClr val="F5F7FA"/>
+          </a:solidFill>
+          <a:ln w="6350">
+            <a:solidFill>
+              <a:srgbClr val="C45C26"/>
+            </a:solidFill>
+          </a:ln>
+        </p:spPr>
+        <p:style>
+          <a:lnRef idx="1">
+            <a:schemeClr val="accent1"/>
+          </a:lnRef>
+          <a:fillRef idx="3">
+            <a:schemeClr val="accent1"/>
+          </a:fillRef>
+          <a:effectRef idx="2">
+            <a:schemeClr val="accent1"/>
+          </a:effectRef>
+          <a:fontRef idx="minor">
+            <a:schemeClr val="lt1"/>
+          </a:fontRef>
+        </p:style>
+        <p:txBody>
+          <a:bodyPr rtlCol="0" anchor="ctr"/>
+          <a:lstStyle/>
+          <a:p>
+            <a:pPr algn="ctr"/>
+          </a:p>
+        </p:txBody>
+      </p:sp>
+      <p:sp>
+        <p:nvSpPr>
+          <p:cNvPr id="23" name="TextBox 22"/>
+          <p:cNvSpPr txBox="1"/>
+          <p:nvPr/>
+        </p:nvSpPr>
+        <p:spPr>
+          <a:xfrm>
+            <a:off x="4255008" y="1664208"/>
+            <a:ext cx="3706368" cy="182880"/>
+          </a:xfrm>
+          <a:prstGeom prst="rect">
+            <a:avLst/>
+          </a:prstGeom>
+          <a:noFill/>
+        </p:spPr>
+        <p:txBody>
+          <a:bodyPr wrap="square">
+            <a:spAutoFit/>
+          </a:bodyPr>
+          <a:lstStyle/>
+          <a:p>
+            <a:pPr algn="l">
+              <a:spcAft>
+                <a:spcPts val="300"/>
+              </a:spcAft>
+            </a:pPr>
+            <a:r>
+              <a:rPr sz="1000" b="1">
+                <a:solidFill>
+                  <a:srgbClr val="C9A227"/>
+                </a:solidFill>
+                <a:latin typeface="Calibri"/>
+              </a:rPr>
+              <a:t>000025-28</a:t>
+            </a:r>
+          </a:p>
+        </p:txBody>
+      </p:sp>
+      <p:sp>
+        <p:nvSpPr>
+          <p:cNvPr id="24" name="TextBox 23"/>
+          <p:cNvSpPr txBox="1"/>
+          <p:nvPr/>
+        </p:nvSpPr>
+        <p:spPr>
+          <a:xfrm>
+            <a:off x="4255008" y="1847088"/>
+            <a:ext cx="3706368" cy="219456"/>
+          </a:xfrm>
+          <a:prstGeom prst="rect">
+            <a:avLst/>
+          </a:prstGeom>
+          <a:noFill/>
+        </p:spPr>
+        <p:txBody>
+          <a:bodyPr wrap="square">
+            <a:spAutoFit/>
+          </a:bodyPr>
+          <a:lstStyle/>
+          <a:p>
+            <a:pPr algn="l">
+              <a:spcAft>
+                <a:spcPts val="300"/>
+              </a:spcAft>
+            </a:pPr>
+            <a:r>
+              <a:rPr sz="1200" b="1">
+                <a:solidFill>
+                  <a:srgbClr val="0D3B66"/>
+                </a:solidFill>
+                <a:latin typeface="Calibri"/>
+              </a:rPr>
+              <a:t>Sandía Nueva</a:t>
+            </a:r>
+          </a:p>
+        </p:txBody>
+      </p:sp>
+      <p:sp>
+        <p:nvSpPr>
+          <p:cNvPr id="25" name="Rounded Rectangle 24"/>
+          <p:cNvSpPr/>
+          <p:nvPr/>
+        </p:nvSpPr>
+        <p:spPr>
+          <a:xfrm>
+            <a:off x="8125968" y="1627632"/>
+            <a:ext cx="3870960" cy="530352"/>
           </a:xfrm>
           <a:prstGeom prst="roundRect">
             <a:avLst>
@@ -7251,13 +12759,707 @@
       </p:sp>
       <p:sp>
         <p:nvSpPr>
+          <p:cNvPr id="26" name="TextBox 25"/>
+          <p:cNvSpPr txBox="1"/>
+          <p:nvPr/>
+        </p:nvSpPr>
+        <p:spPr>
+          <a:xfrm>
+            <a:off x="8217408" y="1664208"/>
+            <a:ext cx="3706368" cy="182880"/>
+          </a:xfrm>
+          <a:prstGeom prst="rect">
+            <a:avLst/>
+          </a:prstGeom>
+          <a:noFill/>
+        </p:spPr>
+        <p:txBody>
+          <a:bodyPr wrap="square">
+            <a:spAutoFit/>
+          </a:bodyPr>
+          <a:lstStyle/>
+          <a:p>
+            <a:pPr algn="l">
+              <a:spcAft>
+                <a:spcPts val="300"/>
+              </a:spcAft>
+            </a:pPr>
+            <a:r>
+              <a:rPr sz="1000" b="1">
+                <a:solidFill>
+                  <a:srgbClr val="C9A227"/>
+                </a:solidFill>
+                <a:latin typeface="Calibri"/>
+              </a:rPr>
+              <a:t>000025-29</a:t>
+            </a:r>
+          </a:p>
+        </p:txBody>
+      </p:sp>
+      <p:sp>
+        <p:nvSpPr>
+          <p:cNvPr id="27" name="TextBox 26"/>
+          <p:cNvSpPr txBox="1"/>
+          <p:nvPr/>
+        </p:nvSpPr>
+        <p:spPr>
+          <a:xfrm>
+            <a:off x="8217408" y="1847088"/>
+            <a:ext cx="3706368" cy="219456"/>
+          </a:xfrm>
+          <a:prstGeom prst="rect">
+            <a:avLst/>
+          </a:prstGeom>
+          <a:noFill/>
+        </p:spPr>
+        <p:txBody>
+          <a:bodyPr wrap="square">
+            <a:spAutoFit/>
+          </a:bodyPr>
+          <a:lstStyle/>
+          <a:p>
+            <a:pPr algn="l">
+              <a:spcAft>
+                <a:spcPts val="300"/>
+              </a:spcAft>
+            </a:pPr>
+            <a:r>
+              <a:rPr sz="1200" b="1">
+                <a:solidFill>
+                  <a:srgbClr val="0D3B66"/>
+                </a:solidFill>
+                <a:latin typeface="Calibri"/>
+              </a:rPr>
+              <a:t>Restaurante</a:t>
+            </a:r>
+          </a:p>
+        </p:txBody>
+      </p:sp>
+      <p:sp>
+        <p:nvSpPr>
+          <p:cNvPr id="28" name="Rounded Rectangle 27"/>
+          <p:cNvSpPr/>
+          <p:nvPr/>
+        </p:nvSpPr>
+        <p:spPr>
+          <a:xfrm>
+            <a:off x="201168" y="2267712"/>
+            <a:ext cx="7973568" cy="3346703"/>
+          </a:xfrm>
+          <a:prstGeom prst="roundRect">
+            <a:avLst>
+              <a:gd name="adj" fmla="val 8000"/>
+            </a:avLst>
+          </a:prstGeom>
+          <a:solidFill>
+            <a:srgbClr val="F5F7FA"/>
+          </a:solidFill>
+          <a:ln>
+            <a:noFill/>
+          </a:ln>
+        </p:spPr>
+        <p:style>
+          <a:lnRef idx="1">
+            <a:schemeClr val="accent1"/>
+          </a:lnRef>
+          <a:fillRef idx="3">
+            <a:schemeClr val="accent1"/>
+          </a:fillRef>
+          <a:effectRef idx="2">
+            <a:schemeClr val="accent1"/>
+          </a:effectRef>
+          <a:fontRef idx="minor">
+            <a:schemeClr val="lt1"/>
+          </a:fontRef>
+        </p:style>
+        <p:txBody>
+          <a:bodyPr rtlCol="0" anchor="ctr"/>
+          <a:lstStyle/>
+          <a:p>
+            <a:pPr algn="ctr"/>
+          </a:p>
+        </p:txBody>
+      </p:sp>
+      <p:pic>
+        <p:nvPicPr>
+          <p:cNvPr id="29" name="Picture 28" descr="pak_mensual_may_ago.png"/>
+          <p:cNvPicPr>
+            <a:picLocks noChangeAspect="1"/>
+          </p:cNvPicPr>
+          <p:nvPr/>
+        </p:nvPicPr>
+        <p:blipFill>
+          <a:blip r:embed="rId3"/>
+          <a:stretch>
+            <a:fillRect/>
+          </a:stretch>
+        </p:blipFill>
+        <p:spPr>
+          <a:xfrm>
+            <a:off x="329184" y="2340864"/>
+            <a:ext cx="7717536" cy="3777531"/>
+          </a:xfrm>
+          <a:prstGeom prst="rect">
+            <a:avLst/>
+          </a:prstGeom>
+        </p:spPr>
+      </p:pic>
+      <p:sp>
+        <p:nvSpPr>
+          <p:cNvPr id="30" name="Rounded Rectangle 29"/>
+          <p:cNvSpPr/>
+          <p:nvPr/>
+        </p:nvSpPr>
+        <p:spPr>
+          <a:xfrm>
+            <a:off x="8302752" y="2267712"/>
+            <a:ext cx="3675887" cy="3346703"/>
+          </a:xfrm>
+          <a:prstGeom prst="roundRect">
+            <a:avLst>
+              <a:gd name="adj" fmla="val 8000"/>
+            </a:avLst>
+          </a:prstGeom>
+          <a:solidFill>
+            <a:srgbClr val="FFFFFF"/>
+          </a:solidFill>
+          <a:ln w="6350">
+            <a:solidFill>
+              <a:srgbClr val="1F77B4"/>
+            </a:solidFill>
+          </a:ln>
+        </p:spPr>
+        <p:style>
+          <a:lnRef idx="1">
+            <a:schemeClr val="accent1"/>
+          </a:lnRef>
+          <a:fillRef idx="3">
+            <a:schemeClr val="accent1"/>
+          </a:fillRef>
+          <a:effectRef idx="2">
+            <a:schemeClr val="accent1"/>
+          </a:effectRef>
+          <a:fontRef idx="minor">
+            <a:schemeClr val="lt1"/>
+          </a:fontRef>
+        </p:style>
+        <p:txBody>
+          <a:bodyPr rtlCol="0" anchor="ctr"/>
+          <a:lstStyle/>
+          <a:p>
+            <a:pPr algn="ctr"/>
+          </a:p>
+        </p:txBody>
+      </p:sp>
+      <p:sp>
+        <p:nvSpPr>
+          <p:cNvPr id="31" name="TextBox 30"/>
+          <p:cNvSpPr txBox="1"/>
+          <p:nvPr/>
+        </p:nvSpPr>
+        <p:spPr>
+          <a:xfrm>
+            <a:off x="8430768" y="2322576"/>
+            <a:ext cx="3419856" cy="182880"/>
+          </a:xfrm>
+          <a:prstGeom prst="rect">
+            <a:avLst/>
+          </a:prstGeom>
+          <a:noFill/>
+        </p:spPr>
+        <p:txBody>
+          <a:bodyPr wrap="square">
+            <a:spAutoFit/>
+          </a:bodyPr>
+          <a:lstStyle/>
+          <a:p>
+            <a:pPr algn="l">
+              <a:spcAft>
+                <a:spcPts val="300"/>
+              </a:spcAft>
+            </a:pPr>
+            <a:r>
+              <a:rPr sz="1100" b="1">
+                <a:solidFill>
+                  <a:srgbClr val="1F77B4"/>
+                </a:solidFill>
+                <a:latin typeface="Calibri"/>
+              </a:rPr>
+              <a:t>JULIO · cabecera</a:t>
+            </a:r>
+          </a:p>
+        </p:txBody>
+      </p:sp>
+      <p:sp>
+        <p:nvSpPr>
+          <p:cNvPr id="32" name="TextBox 31"/>
+          <p:cNvSpPr txBox="1"/>
+          <p:nvPr/>
+        </p:nvSpPr>
+        <p:spPr>
+          <a:xfrm>
+            <a:off x="8430768" y="2505456"/>
+            <a:ext cx="3419856" cy="219456"/>
+          </a:xfrm>
+          <a:prstGeom prst="rect">
+            <a:avLst/>
+          </a:prstGeom>
+          <a:noFill/>
+        </p:spPr>
+        <p:txBody>
+          <a:bodyPr wrap="square">
+            <a:spAutoFit/>
+          </a:bodyPr>
+          <a:lstStyle/>
+          <a:p>
+            <a:pPr algn="l">
+              <a:spcAft>
+                <a:spcPts val="300"/>
+              </a:spcAft>
+            </a:pPr>
+            <a:r>
+              <a:rPr sz="1200" b="0">
+                <a:solidFill>
+                  <a:srgbClr val="5A5A5A"/>
+                </a:solidFill>
+                <a:latin typeface="Calibri"/>
+              </a:rPr>
+              <a:t>El recinto sumó 31.239 m³</a:t>
+            </a:r>
+          </a:p>
+        </p:txBody>
+      </p:sp>
+      <p:sp>
+        <p:nvSpPr>
+          <p:cNvPr id="33" name="Rounded Rectangle 32"/>
+          <p:cNvSpPr/>
+          <p:nvPr/>
+        </p:nvSpPr>
+        <p:spPr>
+          <a:xfrm>
+            <a:off x="8430768" y="2743200"/>
+            <a:ext cx="3419856" cy="363147"/>
+          </a:xfrm>
+          <a:prstGeom prst="roundRect">
+            <a:avLst>
+              <a:gd name="adj" fmla="val 8000"/>
+            </a:avLst>
+          </a:prstGeom>
+          <a:solidFill>
+            <a:srgbClr val="F5F7FA"/>
+          </a:solidFill>
+          <a:ln w="6350">
+            <a:solidFill>
+              <a:srgbClr val="A0783C"/>
+            </a:solidFill>
+          </a:ln>
+        </p:spPr>
+        <p:style>
+          <a:lnRef idx="1">
+            <a:schemeClr val="accent1"/>
+          </a:lnRef>
+          <a:fillRef idx="3">
+            <a:schemeClr val="accent1"/>
+          </a:fillRef>
+          <a:effectRef idx="2">
+            <a:schemeClr val="accent1"/>
+          </a:effectRef>
+          <a:fontRef idx="minor">
+            <a:schemeClr val="lt1"/>
+          </a:fontRef>
+        </p:style>
+        <p:txBody>
+          <a:bodyPr rtlCol="0" anchor="ctr"/>
+          <a:lstStyle/>
+          <a:p>
+            <a:pPr algn="ctr"/>
+          </a:p>
+        </p:txBody>
+      </p:sp>
+      <p:sp>
+        <p:nvSpPr>
+          <p:cNvPr id="34" name="TextBox 33"/>
+          <p:cNvSpPr txBox="1"/>
+          <p:nvPr/>
+        </p:nvSpPr>
+        <p:spPr>
+          <a:xfrm>
+            <a:off x="8540496" y="2779776"/>
+            <a:ext cx="3200400" cy="182880"/>
+          </a:xfrm>
+          <a:prstGeom prst="rect">
+            <a:avLst/>
+          </a:prstGeom>
+          <a:noFill/>
+        </p:spPr>
+        <p:txBody>
+          <a:bodyPr wrap="square">
+            <a:spAutoFit/>
+          </a:bodyPr>
+          <a:lstStyle/>
+          <a:p>
+            <a:pPr algn="l">
+              <a:spcAft>
+                <a:spcPts val="300"/>
+              </a:spcAft>
+            </a:pPr>
+            <a:r>
+              <a:rPr sz="1100" b="1">
+                <a:solidFill>
+                  <a:srgbClr val="A0783C"/>
+                </a:solidFill>
+                <a:latin typeface="Calibri"/>
+              </a:rPr>
+              <a:t>Sandía Antigua</a:t>
+            </a:r>
+          </a:p>
+        </p:txBody>
+      </p:sp>
+      <p:sp>
+        <p:nvSpPr>
+          <p:cNvPr id="35" name="TextBox 34"/>
+          <p:cNvSpPr txBox="1"/>
+          <p:nvPr/>
+        </p:nvSpPr>
+        <p:spPr>
+          <a:xfrm>
+            <a:off x="8540496" y="2895721"/>
+            <a:ext cx="3200400" cy="292608"/>
+          </a:xfrm>
+          <a:prstGeom prst="rect">
+            <a:avLst/>
+          </a:prstGeom>
+          <a:noFill/>
+        </p:spPr>
+        <p:txBody>
+          <a:bodyPr wrap="square">
+            <a:spAutoFit/>
+          </a:bodyPr>
+          <a:lstStyle/>
+          <a:p>
+            <a:pPr algn="l">
+              <a:spcAft>
+                <a:spcPts val="300"/>
+              </a:spcAft>
+            </a:pPr>
+            <a:r>
+              <a:rPr sz="1300" b="1">
+                <a:solidFill>
+                  <a:srgbClr val="0D3B66"/>
+                </a:solidFill>
+                <a:latin typeface="Calibri"/>
+              </a:rPr>
+              <a:t>13.661 m³    43,7 %</a:t>
+            </a:r>
+          </a:p>
+        </p:txBody>
+      </p:sp>
+      <p:sp>
+        <p:nvSpPr>
+          <p:cNvPr id="36" name="Rounded Rectangle 35"/>
+          <p:cNvSpPr/>
+          <p:nvPr/>
+        </p:nvSpPr>
+        <p:spPr>
+          <a:xfrm>
+            <a:off x="8430768" y="3142923"/>
+            <a:ext cx="3419856" cy="363147"/>
+          </a:xfrm>
+          <a:prstGeom prst="roundRect">
+            <a:avLst>
+              <a:gd name="adj" fmla="val 8000"/>
+            </a:avLst>
+          </a:prstGeom>
+          <a:solidFill>
+            <a:srgbClr val="F5F7FA"/>
+          </a:solidFill>
+          <a:ln w="6350">
+            <a:solidFill>
+              <a:srgbClr val="C45C26"/>
+            </a:solidFill>
+          </a:ln>
+        </p:spPr>
+        <p:style>
+          <a:lnRef idx="1">
+            <a:schemeClr val="accent1"/>
+          </a:lnRef>
+          <a:fillRef idx="3">
+            <a:schemeClr val="accent1"/>
+          </a:fillRef>
+          <a:effectRef idx="2">
+            <a:schemeClr val="accent1"/>
+          </a:effectRef>
+          <a:fontRef idx="minor">
+            <a:schemeClr val="lt1"/>
+          </a:fontRef>
+        </p:style>
+        <p:txBody>
+          <a:bodyPr rtlCol="0" anchor="ctr"/>
+          <a:lstStyle/>
+          <a:p>
+            <a:pPr algn="ctr"/>
+          </a:p>
+        </p:txBody>
+      </p:sp>
+      <p:sp>
+        <p:nvSpPr>
+          <p:cNvPr id="37" name="TextBox 36"/>
+          <p:cNvSpPr txBox="1"/>
+          <p:nvPr/>
+        </p:nvSpPr>
+        <p:spPr>
+          <a:xfrm>
+            <a:off x="8540496" y="3179499"/>
+            <a:ext cx="3200400" cy="182880"/>
+          </a:xfrm>
+          <a:prstGeom prst="rect">
+            <a:avLst/>
+          </a:prstGeom>
+          <a:noFill/>
+        </p:spPr>
+        <p:txBody>
+          <a:bodyPr wrap="square">
+            <a:spAutoFit/>
+          </a:bodyPr>
+          <a:lstStyle/>
+          <a:p>
+            <a:pPr algn="l">
+              <a:spcAft>
+                <a:spcPts val="300"/>
+              </a:spcAft>
+            </a:pPr>
+            <a:r>
+              <a:rPr sz="1100" b="1">
+                <a:solidFill>
+                  <a:srgbClr val="C45C26"/>
+                </a:solidFill>
+                <a:latin typeface="Calibri"/>
+              </a:rPr>
+              <a:t>Sandía Nueva</a:t>
+            </a:r>
+          </a:p>
+        </p:txBody>
+      </p:sp>
+      <p:sp>
+        <p:nvSpPr>
+          <p:cNvPr id="38" name="TextBox 37"/>
+          <p:cNvSpPr txBox="1"/>
+          <p:nvPr/>
+        </p:nvSpPr>
+        <p:spPr>
+          <a:xfrm>
+            <a:off x="8540496" y="3295445"/>
+            <a:ext cx="3200400" cy="292608"/>
+          </a:xfrm>
+          <a:prstGeom prst="rect">
+            <a:avLst/>
+          </a:prstGeom>
+          <a:noFill/>
+        </p:spPr>
+        <p:txBody>
+          <a:bodyPr wrap="square">
+            <a:spAutoFit/>
+          </a:bodyPr>
+          <a:lstStyle/>
+          <a:p>
+            <a:pPr algn="l">
+              <a:spcAft>
+                <a:spcPts val="300"/>
+              </a:spcAft>
+            </a:pPr>
+            <a:r>
+              <a:rPr sz="1300" b="1">
+                <a:solidFill>
+                  <a:srgbClr val="0D3B66"/>
+                </a:solidFill>
+                <a:latin typeface="Calibri"/>
+              </a:rPr>
+              <a:t>9.619 m³    30,8 %</a:t>
+            </a:r>
+          </a:p>
+        </p:txBody>
+      </p:sp>
+      <p:sp>
+        <p:nvSpPr>
+          <p:cNvPr id="39" name="Rounded Rectangle 38"/>
+          <p:cNvSpPr/>
+          <p:nvPr/>
+        </p:nvSpPr>
+        <p:spPr>
+          <a:xfrm>
+            <a:off x="8430768" y="3542646"/>
+            <a:ext cx="3419856" cy="363147"/>
+          </a:xfrm>
+          <a:prstGeom prst="roundRect">
+            <a:avLst>
+              <a:gd name="adj" fmla="val 8000"/>
+            </a:avLst>
+          </a:prstGeom>
+          <a:solidFill>
+            <a:srgbClr val="F5F7FA"/>
+          </a:solidFill>
+          <a:ln w="6350">
+            <a:solidFill>
+              <a:srgbClr val="46648C"/>
+            </a:solidFill>
+          </a:ln>
+        </p:spPr>
+        <p:style>
+          <a:lnRef idx="1">
+            <a:schemeClr val="accent1"/>
+          </a:lnRef>
+          <a:fillRef idx="3">
+            <a:schemeClr val="accent1"/>
+          </a:fillRef>
+          <a:effectRef idx="2">
+            <a:schemeClr val="accent1"/>
+          </a:effectRef>
+          <a:fontRef idx="minor">
+            <a:schemeClr val="lt1"/>
+          </a:fontRef>
+        </p:style>
+        <p:txBody>
+          <a:bodyPr rtlCol="0" anchor="ctr"/>
+          <a:lstStyle/>
+          <a:p>
+            <a:pPr algn="ctr"/>
+          </a:p>
+        </p:txBody>
+      </p:sp>
+      <p:sp>
+        <p:nvSpPr>
+          <p:cNvPr id="40" name="TextBox 39"/>
+          <p:cNvSpPr txBox="1"/>
+          <p:nvPr/>
+        </p:nvSpPr>
+        <p:spPr>
+          <a:xfrm>
+            <a:off x="8540496" y="3579222"/>
+            <a:ext cx="3200400" cy="182880"/>
+          </a:xfrm>
+          <a:prstGeom prst="rect">
+            <a:avLst/>
+          </a:prstGeom>
+          <a:noFill/>
+        </p:spPr>
+        <p:txBody>
+          <a:bodyPr wrap="square">
+            <a:spAutoFit/>
+          </a:bodyPr>
+          <a:lstStyle/>
+          <a:p>
+            <a:pPr algn="l">
+              <a:spcAft>
+                <a:spcPts val="300"/>
+              </a:spcAft>
+            </a:pPr>
+            <a:r>
+              <a:rPr sz="1100" b="1">
+                <a:solidFill>
+                  <a:srgbClr val="46648C"/>
+                </a:solidFill>
+                <a:latin typeface="Calibri"/>
+              </a:rPr>
+              <a:t>Locales Gast.</a:t>
+            </a:r>
+          </a:p>
+        </p:txBody>
+      </p:sp>
+      <p:sp>
+        <p:nvSpPr>
+          <p:cNvPr id="41" name="TextBox 40"/>
+          <p:cNvSpPr txBox="1"/>
+          <p:nvPr/>
+        </p:nvSpPr>
+        <p:spPr>
+          <a:xfrm>
+            <a:off x="8540496" y="3695168"/>
+            <a:ext cx="3200400" cy="292608"/>
+          </a:xfrm>
+          <a:prstGeom prst="rect">
+            <a:avLst/>
+          </a:prstGeom>
+          <a:noFill/>
+        </p:spPr>
+        <p:txBody>
+          <a:bodyPr wrap="square">
+            <a:spAutoFit/>
+          </a:bodyPr>
+          <a:lstStyle/>
+          <a:p>
+            <a:pPr algn="l">
+              <a:spcAft>
+                <a:spcPts val="300"/>
+              </a:spcAft>
+            </a:pPr>
+            <a:r>
+              <a:rPr sz="1300" b="1">
+                <a:solidFill>
+                  <a:srgbClr val="0D3B66"/>
+                </a:solidFill>
+                <a:latin typeface="Calibri"/>
+              </a:rPr>
+              <a:t>4.583 m³    14,7 %</a:t>
+            </a:r>
+          </a:p>
+        </p:txBody>
+      </p:sp>
+      <p:sp>
+        <p:nvSpPr>
+          <p:cNvPr id="42" name="Rounded Rectangle 41"/>
+          <p:cNvSpPr/>
+          <p:nvPr/>
+        </p:nvSpPr>
+        <p:spPr>
+          <a:xfrm>
+            <a:off x="8430768" y="3942370"/>
+            <a:ext cx="3419856" cy="363147"/>
+          </a:xfrm>
+          <a:prstGeom prst="roundRect">
+            <a:avLst>
+              <a:gd name="adj" fmla="val 8000"/>
+            </a:avLst>
+          </a:prstGeom>
+          <a:solidFill>
+            <a:srgbClr val="F5F7FA"/>
+          </a:solidFill>
+          <a:ln w="6350">
+            <a:solidFill>
+              <a:srgbClr val="8C5A5A"/>
+            </a:solidFill>
+          </a:ln>
+        </p:spPr>
+        <p:style>
+          <a:lnRef idx="1">
+            <a:schemeClr val="accent1"/>
+          </a:lnRef>
+          <a:fillRef idx="3">
+            <a:schemeClr val="accent1"/>
+          </a:fillRef>
+          <a:effectRef idx="2">
+            <a:schemeClr val="accent1"/>
+          </a:effectRef>
+          <a:fontRef idx="minor">
+            <a:schemeClr val="lt1"/>
+          </a:fontRef>
+        </p:style>
+        <p:txBody>
+          <a:bodyPr rtlCol="0" anchor="ctr"/>
+          <a:lstStyle/>
+          <a:p>
+            <a:pPr algn="ctr"/>
+          </a:p>
+        </p:txBody>
+      </p:sp>
+      <p:sp>
+        <p:nvSpPr>
           <p:cNvPr id="43" name="TextBox 42"/>
           <p:cNvSpPr txBox="1"/>
           <p:nvPr/>
         </p:nvSpPr>
         <p:spPr>
           <a:xfrm>
-            <a:off x="8540496" y="4956048"/>
+            <a:off x="8540496" y="3978946"/>
             <a:ext cx="3200400" cy="182880"/>
           </a:xfrm>
           <a:prstGeom prst="rect">
@@ -7277,59 +13479,434 @@
               </a:spcAft>
             </a:pPr>
             <a:r>
+              <a:rPr sz="1100" b="1">
+                <a:solidFill>
+                  <a:srgbClr val="8C5A5A"/>
+                </a:solidFill>
+                <a:latin typeface="Calibri"/>
+              </a:rPr>
+              <a:t>Matriz Andén</a:t>
+            </a:r>
+          </a:p>
+        </p:txBody>
+      </p:sp>
+      <p:sp>
+        <p:nvSpPr>
+          <p:cNvPr id="44" name="TextBox 43"/>
+          <p:cNvSpPr txBox="1"/>
+          <p:nvPr/>
+        </p:nvSpPr>
+        <p:spPr>
+          <a:xfrm>
+            <a:off x="8540496" y="4094892"/>
+            <a:ext cx="3200400" cy="292608"/>
+          </a:xfrm>
+          <a:prstGeom prst="rect">
+            <a:avLst/>
+          </a:prstGeom>
+          <a:noFill/>
+        </p:spPr>
+        <p:txBody>
+          <a:bodyPr wrap="square">
+            <a:spAutoFit/>
+          </a:bodyPr>
+          <a:lstStyle/>
+          <a:p>
+            <a:pPr algn="l">
+              <a:spcAft>
+                <a:spcPts val="300"/>
+              </a:spcAft>
+            </a:pPr>
+            <a:r>
               <a:rPr sz="1300" b="1">
                 <a:solidFill>
+                  <a:srgbClr val="0D3B66"/>
+                </a:solidFill>
+                <a:latin typeface="Calibri"/>
+              </a:rPr>
+              <a:t>3.086 m³    9,9 %</a:t>
+            </a:r>
+          </a:p>
+        </p:txBody>
+      </p:sp>
+      <p:sp>
+        <p:nvSpPr>
+          <p:cNvPr id="45" name="Rounded Rectangle 44"/>
+          <p:cNvSpPr/>
+          <p:nvPr/>
+        </p:nvSpPr>
+        <p:spPr>
+          <a:xfrm>
+            <a:off x="8430768" y="4342093"/>
+            <a:ext cx="3419856" cy="363147"/>
+          </a:xfrm>
+          <a:prstGeom prst="roundRect">
+            <a:avLst>
+              <a:gd name="adj" fmla="val 8000"/>
+            </a:avLst>
+          </a:prstGeom>
+          <a:solidFill>
+            <a:srgbClr val="F5F7FA"/>
+          </a:solidFill>
+          <a:ln w="6350">
+            <a:solidFill>
+              <a:srgbClr val="508282"/>
+            </a:solidFill>
+          </a:ln>
+        </p:spPr>
+        <p:style>
+          <a:lnRef idx="1">
+            <a:schemeClr val="accent1"/>
+          </a:lnRef>
+          <a:fillRef idx="3">
+            <a:schemeClr val="accent1"/>
+          </a:fillRef>
+          <a:effectRef idx="2">
+            <a:schemeClr val="accent1"/>
+          </a:effectRef>
+          <a:fontRef idx="minor">
+            <a:schemeClr val="lt1"/>
+          </a:fontRef>
+        </p:style>
+        <p:txBody>
+          <a:bodyPr rtlCol="0" anchor="ctr"/>
+          <a:lstStyle/>
+          <a:p>
+            <a:pPr algn="ctr"/>
+          </a:p>
+        </p:txBody>
+      </p:sp>
+      <p:sp>
+        <p:nvSpPr>
+          <p:cNvPr id="46" name="TextBox 45"/>
+          <p:cNvSpPr txBox="1"/>
+          <p:nvPr/>
+        </p:nvSpPr>
+        <p:spPr>
+          <a:xfrm>
+            <a:off x="8540496" y="4378669"/>
+            <a:ext cx="3200400" cy="182880"/>
+          </a:xfrm>
+          <a:prstGeom prst="rect">
+            <a:avLst/>
+          </a:prstGeom>
+          <a:noFill/>
+        </p:spPr>
+        <p:txBody>
+          <a:bodyPr wrap="square">
+            <a:spAutoFit/>
+          </a:bodyPr>
+          <a:lstStyle/>
+          <a:p>
+            <a:pPr algn="l">
+              <a:spcAft>
+                <a:spcPts val="300"/>
+              </a:spcAft>
+            </a:pPr>
+            <a:r>
+              <a:rPr sz="1100" b="1">
+                <a:solidFill>
+                  <a:srgbClr val="508282"/>
+                </a:solidFill>
+                <a:latin typeface="Calibri"/>
+              </a:rPr>
+              <a:t>Pileta</a:t>
+            </a:r>
+          </a:p>
+        </p:txBody>
+      </p:sp>
+      <p:sp>
+        <p:nvSpPr>
+          <p:cNvPr id="47" name="TextBox 46"/>
+          <p:cNvSpPr txBox="1"/>
+          <p:nvPr/>
+        </p:nvSpPr>
+        <p:spPr>
+          <a:xfrm>
+            <a:off x="8540496" y="4494615"/>
+            <a:ext cx="3200400" cy="292608"/>
+          </a:xfrm>
+          <a:prstGeom prst="rect">
+            <a:avLst/>
+          </a:prstGeom>
+          <a:noFill/>
+        </p:spPr>
+        <p:txBody>
+          <a:bodyPr wrap="square">
+            <a:spAutoFit/>
+          </a:bodyPr>
+          <a:lstStyle/>
+          <a:p>
+            <a:pPr algn="l">
+              <a:spcAft>
+                <a:spcPts val="300"/>
+              </a:spcAft>
+            </a:pPr>
+            <a:r>
+              <a:rPr sz="1300" b="1">
+                <a:solidFill>
+                  <a:srgbClr val="0D3B66"/>
+                </a:solidFill>
+                <a:latin typeface="Calibri"/>
+              </a:rPr>
+              <a:t>172 m³    0,5 %</a:t>
+            </a:r>
+          </a:p>
+        </p:txBody>
+      </p:sp>
+      <p:sp>
+        <p:nvSpPr>
+          <p:cNvPr id="48" name="Rounded Rectangle 47"/>
+          <p:cNvSpPr/>
+          <p:nvPr/>
+        </p:nvSpPr>
+        <p:spPr>
+          <a:xfrm>
+            <a:off x="8430768" y="4741817"/>
+            <a:ext cx="3419856" cy="363147"/>
+          </a:xfrm>
+          <a:prstGeom prst="roundRect">
+            <a:avLst>
+              <a:gd name="adj" fmla="val 8000"/>
+            </a:avLst>
+          </a:prstGeom>
+          <a:solidFill>
+            <a:srgbClr val="F5F7FA"/>
+          </a:solidFill>
+          <a:ln w="6350">
+            <a:solidFill>
+              <a:srgbClr val="C9A227"/>
+            </a:solidFill>
+          </a:ln>
+        </p:spPr>
+        <p:style>
+          <a:lnRef idx="1">
+            <a:schemeClr val="accent1"/>
+          </a:lnRef>
+          <a:fillRef idx="3">
+            <a:schemeClr val="accent1"/>
+          </a:fillRef>
+          <a:effectRef idx="2">
+            <a:schemeClr val="accent1"/>
+          </a:effectRef>
+          <a:fontRef idx="minor">
+            <a:schemeClr val="lt1"/>
+          </a:fontRef>
+        </p:style>
+        <p:txBody>
+          <a:bodyPr rtlCol="0" anchor="ctr"/>
+          <a:lstStyle/>
+          <a:p>
+            <a:pPr algn="ctr"/>
+          </a:p>
+        </p:txBody>
+      </p:sp>
+      <p:sp>
+        <p:nvSpPr>
+          <p:cNvPr id="49" name="TextBox 48"/>
+          <p:cNvSpPr txBox="1"/>
+          <p:nvPr/>
+        </p:nvSpPr>
+        <p:spPr>
+          <a:xfrm>
+            <a:off x="8540496" y="4778393"/>
+            <a:ext cx="3200400" cy="182880"/>
+          </a:xfrm>
+          <a:prstGeom prst="rect">
+            <a:avLst/>
+          </a:prstGeom>
+          <a:noFill/>
+        </p:spPr>
+        <p:txBody>
+          <a:bodyPr wrap="square">
+            <a:spAutoFit/>
+          </a:bodyPr>
+          <a:lstStyle/>
+          <a:p>
+            <a:pPr algn="l">
+              <a:spcAft>
+                <a:spcPts val="300"/>
+              </a:spcAft>
+            </a:pPr>
+            <a:r>
+              <a:rPr sz="1100" b="1">
+                <a:solidFill>
                   <a:srgbClr val="C9A227"/>
                 </a:solidFill>
                 <a:latin typeface="Calibri"/>
               </a:rPr>
-              <a:t>Falabella</a:t>
-            </a:r>
-          </a:p>
-        </p:txBody>
-      </p:sp>
-      <p:sp>
-        <p:nvSpPr>
-          <p:cNvPr id="44" name="TextBox 43"/>
-          <p:cNvSpPr txBox="1"/>
-          <p:nvPr/>
-        </p:nvSpPr>
-        <p:spPr>
-          <a:xfrm>
-            <a:off x="8540496" y="5175504"/>
-            <a:ext cx="3200400" cy="274320"/>
-          </a:xfrm>
-          <a:prstGeom prst="rect">
-            <a:avLst/>
-          </a:prstGeom>
-          <a:noFill/>
-        </p:spPr>
-        <p:txBody>
-          <a:bodyPr wrap="square">
-            <a:spAutoFit/>
-          </a:bodyPr>
-          <a:lstStyle/>
-          <a:p>
-            <a:pPr algn="l">
-              <a:spcAft>
-                <a:spcPts val="300"/>
-              </a:spcAft>
-            </a:pPr>
-            <a:r>
-              <a:rPr sz="1500" b="1">
+              <a:t>Restaurante</a:t>
+            </a:r>
+          </a:p>
+        </p:txBody>
+      </p:sp>
+      <p:sp>
+        <p:nvSpPr>
+          <p:cNvPr id="50" name="TextBox 49"/>
+          <p:cNvSpPr txBox="1"/>
+          <p:nvPr/>
+        </p:nvSpPr>
+        <p:spPr>
+          <a:xfrm>
+            <a:off x="8540496" y="4894339"/>
+            <a:ext cx="3200400" cy="292608"/>
+          </a:xfrm>
+          <a:prstGeom prst="rect">
+            <a:avLst/>
+          </a:prstGeom>
+          <a:noFill/>
+        </p:spPr>
+        <p:txBody>
+          <a:bodyPr wrap="square">
+            <a:spAutoFit/>
+          </a:bodyPr>
+          <a:lstStyle/>
+          <a:p>
+            <a:pPr algn="l">
+              <a:spcAft>
+                <a:spcPts val="300"/>
+              </a:spcAft>
+            </a:pPr>
+            <a:r>
+              <a:rPr sz="1300" b="1">
                 <a:solidFill>
                   <a:srgbClr val="0D3B66"/>
                 </a:solidFill>
                 <a:latin typeface="Calibri"/>
               </a:rPr>
-              <a:t>0 m³    0 % · 11/08</a:t>
-            </a:r>
-          </a:p>
-        </p:txBody>
-      </p:sp>
-      <p:sp>
-        <p:nvSpPr>
-          <p:cNvPr id="45" name="Rounded Rectangle 44"/>
+              <a:t>98 m³    0,3 %</a:t>
+            </a:r>
+          </a:p>
+        </p:txBody>
+      </p:sp>
+      <p:sp>
+        <p:nvSpPr>
+          <p:cNvPr id="51" name="Rounded Rectangle 50"/>
+          <p:cNvSpPr/>
+          <p:nvPr/>
+        </p:nvSpPr>
+        <p:spPr>
+          <a:xfrm>
+            <a:off x="8430768" y="5141540"/>
+            <a:ext cx="3419856" cy="363147"/>
+          </a:xfrm>
+          <a:prstGeom prst="roundRect">
+            <a:avLst>
+              <a:gd name="adj" fmla="val 8000"/>
+            </a:avLst>
+          </a:prstGeom>
+          <a:solidFill>
+            <a:srgbClr val="F5F7FA"/>
+          </a:solidFill>
+          <a:ln w="6350">
+            <a:solidFill>
+              <a:srgbClr val="0D3B66"/>
+            </a:solidFill>
+          </a:ln>
+        </p:spPr>
+        <p:style>
+          <a:lnRef idx="1">
+            <a:schemeClr val="accent1"/>
+          </a:lnRef>
+          <a:fillRef idx="3">
+            <a:schemeClr val="accent1"/>
+          </a:fillRef>
+          <a:effectRef idx="2">
+            <a:schemeClr val="accent1"/>
+          </a:effectRef>
+          <a:fontRef idx="minor">
+            <a:schemeClr val="lt1"/>
+          </a:fontRef>
+        </p:style>
+        <p:txBody>
+          <a:bodyPr rtlCol="0" anchor="ctr"/>
+          <a:lstStyle/>
+          <a:p>
+            <a:pPr algn="ctr"/>
+          </a:p>
+        </p:txBody>
+      </p:sp>
+      <p:sp>
+        <p:nvSpPr>
+          <p:cNvPr id="52" name="TextBox 51"/>
+          <p:cNvSpPr txBox="1"/>
+          <p:nvPr/>
+        </p:nvSpPr>
+        <p:spPr>
+          <a:xfrm>
+            <a:off x="8540496" y="5178116"/>
+            <a:ext cx="3200400" cy="182880"/>
+          </a:xfrm>
+          <a:prstGeom prst="rect">
+            <a:avLst/>
+          </a:prstGeom>
+          <a:noFill/>
+        </p:spPr>
+        <p:txBody>
+          <a:bodyPr wrap="square">
+            <a:spAutoFit/>
+          </a:bodyPr>
+          <a:lstStyle/>
+          <a:p>
+            <a:pPr algn="l">
+              <a:spcAft>
+                <a:spcPts val="300"/>
+              </a:spcAft>
+            </a:pPr>
+            <a:r>
+              <a:rPr sz="1100" b="1">
+                <a:solidFill>
+                  <a:srgbClr val="0D3B66"/>
+                </a:solidFill>
+                <a:latin typeface="Calibri"/>
+              </a:rPr>
+              <a:t>Cascada</a:t>
+            </a:r>
+          </a:p>
+        </p:txBody>
+      </p:sp>
+      <p:sp>
+        <p:nvSpPr>
+          <p:cNvPr id="53" name="TextBox 52"/>
+          <p:cNvSpPr txBox="1"/>
+          <p:nvPr/>
+        </p:nvSpPr>
+        <p:spPr>
+          <a:xfrm>
+            <a:off x="8540496" y="5294062"/>
+            <a:ext cx="3200400" cy="292608"/>
+          </a:xfrm>
+          <a:prstGeom prst="rect">
+            <a:avLst/>
+          </a:prstGeom>
+          <a:noFill/>
+        </p:spPr>
+        <p:txBody>
+          <a:bodyPr wrap="square">
+            <a:spAutoFit/>
+          </a:bodyPr>
+          <a:lstStyle/>
+          <a:p>
+            <a:pPr algn="l">
+              <a:spcAft>
+                <a:spcPts val="300"/>
+              </a:spcAft>
+            </a:pPr>
+            <a:r>
+              <a:rPr sz="1300" b="1">
+                <a:solidFill>
+                  <a:srgbClr val="0D3B66"/>
+                </a:solidFill>
+                <a:latin typeface="Calibri"/>
+              </a:rPr>
+              <a:t>20 m³    &lt;0,1 %</a:t>
+            </a:r>
+          </a:p>
+        </p:txBody>
+      </p:sp>
+      <p:sp>
+        <p:nvSpPr>
+          <p:cNvPr id="54" name="Rounded Rectangle 53"/>
           <p:cNvSpPr/>
           <p:nvPr/>
         </p:nvSpPr>
@@ -7376,7 +13953,7 @@
       </p:sp>
       <p:sp>
         <p:nvSpPr>
-          <p:cNvPr id="46" name="TextBox 45"/>
+          <p:cNvPr id="55" name="TextBox 54"/>
           <p:cNvSpPr txBox="1"/>
           <p:nvPr/>
         </p:nvSpPr>
@@ -7408,14 +13985,14 @@
                 </a:solidFill>
                 <a:latin typeface="Calibri"/>
               </a:rPr>
-              <a:t>Recepción 06/11/2025  ·  Capacitación 14/11/2025  ·  Miguel Rupayan  ·  Constanza Vilches  ·  Mantención: C. Bustamante, O. Cuevas y Supervisor Eléctrico</a:t>
-            </a:r>
-          </a:p>
-        </p:txBody>
-      </p:sp>
-      <p:sp>
-        <p:nvSpPr>
-          <p:cNvPr id="47" name="TextBox 46"/>
+              <a:t>Recepción 12/12/2025  ·  Capacitación 17/12/2025  ·  Francisco Jeldres  ·  Paula Azolas  ·  Mantención: C. Naranjo, M. Jara, R. Moreno, R. Díaz, J. Gutiérrez, H. Fierro</a:t>
+            </a:r>
+          </a:p>
+        </p:txBody>
+      </p:sp>
+      <p:sp>
+        <p:nvSpPr>
+          <p:cNvPr id="56" name="TextBox 55"/>
           <p:cNvSpPr txBox="1"/>
           <p:nvPr/>
         </p:nvSpPr>
@@ -7447,7 +14024,7 @@
                 </a:solidFill>
                 <a:latin typeface="Calibri"/>
               </a:rPr>
-              <a:t>Mayo 7.511   ·   Junio 10.014   ·   Julio 10.356   ·   Agosto 1–17: 4.165   ·   proy. ago 7.595 m³.</a:t>
+              <a:t>Mayo 26.357   ·   Junio 20.927   ·   Julio 31.239   ·   Agosto 1–17: 21.494   ·   proy. ago 39.195 m³.</a:t>
             </a:r>
           </a:p>
           <a:p>
@@ -7463,7 +14040,7 @@
                 </a:solidFill>
                 <a:latin typeface="Calibri"/>
               </a:rPr>
-              <a:t>Junio sube por Placa (18/06). Falabella no entra en julio: activo desde el 11/08.</a:t>
+              <a:t>Totales de cabecera. DL, Bazar y Kennedy no se suman (doble conteo).</a:t>
             </a:r>
           </a:p>
         </p:txBody>

--- a/reports/Parque_Arauco/TMP_7MALLS/entrega_diego_anibal/Recorrido_ejecutivo_PA_MAE_20260817.pptx
+++ b/reports/Parque_Arauco/TMP_7MALLS/entrega_diego_anibal/Recorrido_ejecutivo_PA_MAE_20260817.pptx
@@ -4158,7 +4158,7 @@
         <p:spPr>
           <a:xfrm>
             <a:off x="329184" y="1865376"/>
-            <a:ext cx="7717536" cy="3777531"/>
+            <a:ext cx="7717536" cy="3889192"/>
           </a:xfrm>
           <a:prstGeom prst="rect">
             <a:avLst/>
@@ -6575,7 +6575,7 @@
         <p:spPr>
           <a:xfrm>
             <a:off x="329184" y="1865376"/>
-            <a:ext cx="7717536" cy="3777531"/>
+            <a:ext cx="7717536" cy="3884121"/>
           </a:xfrm>
           <a:prstGeom prst="rect">
             <a:avLst/>
@@ -8030,7 +8030,7 @@
         <p:spPr>
           <a:xfrm>
             <a:off x="329184" y="1865376"/>
-            <a:ext cx="7717536" cy="3777531"/>
+            <a:ext cx="7717536" cy="3889192"/>
           </a:xfrm>
           <a:prstGeom prst="rect">
             <a:avLst/>
@@ -9149,7 +9149,7 @@
         <p:spPr>
           <a:xfrm>
             <a:off x="329184" y="1865376"/>
-            <a:ext cx="7717536" cy="3777531"/>
+            <a:ext cx="7717536" cy="3889192"/>
           </a:xfrm>
           <a:prstGeom prst="rect">
             <a:avLst/>
@@ -10190,7 +10190,7 @@
         <p:spPr>
           <a:xfrm>
             <a:off x="329184" y="1865376"/>
-            <a:ext cx="7717536" cy="3777531"/>
+            <a:ext cx="7717536" cy="3889192"/>
           </a:xfrm>
           <a:prstGeom prst="rect">
             <a:avLst/>
@@ -11231,7 +11231,7 @@
         <p:spPr>
           <a:xfrm>
             <a:off x="329184" y="1865376"/>
-            <a:ext cx="7717536" cy="3777531"/>
+            <a:ext cx="7717536" cy="3889192"/>
           </a:xfrm>
           <a:prstGeom prst="rect">
             <a:avLst/>
@@ -11733,7 +11733,7 @@
                 </a:solidFill>
                 <a:latin typeface="Calibri"/>
               </a:rPr>
-              <a:t>Mayo 31.150   ·   Junio 664   ·   Julio 618   ·   Agosto 1–17: 366   ·   proy. ago 667 m³.</a:t>
+              <a:t>Junio 664   ·   Julio 618   ·   Agosto 1–17: 366   ·   proy. ago 667 m³.</a:t>
             </a:r>
           </a:p>
           <a:p>
@@ -11749,7 +11749,7 @@
                 </a:solidFill>
                 <a:latin typeface="Calibri"/>
               </a:rPr>
-              <a:t>Anillo Norte y Anillo Sur cubren el recinto.</a:t>
+              <a:t>Cambio de monitoreo: se dejó Baños y Matriz Principal. Anillo Norte y Sur con lectura correcta desde el 19/05 (mayo no se grafica).</a:t>
             </a:r>
           </a:p>
         </p:txBody>
@@ -12897,7 +12897,7 @@
         <p:spPr>
           <a:xfrm>
             <a:off x="329184" y="2340864"/>
-            <a:ext cx="7717536" cy="3777531"/>
+            <a:ext cx="7717536" cy="3904585"/>
           </a:xfrm>
           <a:prstGeom prst="rect">
             <a:avLst/>
@@ -14040,7 +14040,7 @@
                 </a:solidFill>
                 <a:latin typeface="Calibri"/>
               </a:rPr>
-              <a:t>Totales de cabecera. DL, Bazar y Kennedy no se suman (doble conteo).</a:t>
+              <a:t>No se suman 000025-27 (Distrito de Lujo) ni 35 y 36 (subdivisión de Sandía Antigua).</a:t>
             </a:r>
           </a:p>
         </p:txBody>

--- a/reports/Parque_Arauco/TMP_7MALLS/entrega_diego_anibal/Recorrido_ejecutivo_PA_MAE_20260817.pptx
+++ b/reports/Parque_Arauco/TMP_7MALLS/entrega_diego_anibal/Recorrido_ejecutivo_PA_MAE_20260817.pptx
@@ -14,6 +14,7 @@
     <p:sldId id="262" r:id="rId13"/>
     <p:sldId id="263" r:id="rId14"/>
     <p:sldId id="264" r:id="rId15"/>
+    <p:sldId id="265" r:id="rId16"/>
   </p:sldIdLst>
   <p:sldSz cx="12191695" cy="6858000" type="screen4x3"/>
   <p:notesSz cx="6858000" cy="9144000"/>
@@ -3307,7 +3308,1359 @@
                 </a:solidFill>
                 <a:latin typeface="Calibri"/>
               </a:rPr>
-              <a:t>La segunda lámina (hallazgos) la armamos mall por mall</a:t>
+              <a:t>Lámina 2: MAE hallazgos  ·  PAK cadena Sandía / Distrito de Lujo</a:t>
+            </a:r>
+          </a:p>
+        </p:txBody>
+      </p:sp>
+    </p:spTree>
+  </p:cSld>
+  <p:clrMapOvr>
+    <a:masterClrMapping/>
+  </p:clrMapOvr>
+</p:sld>
+</file>
+
+<file path=ppt/slides/slide10.xml><?xml version="1.0" encoding="utf-8"?>
+<p:sld xmlns:a="http://schemas.openxmlformats.org/drawingml/2006/main" xmlns:p="http://schemas.openxmlformats.org/presentationml/2006/main" xmlns:r="http://schemas.openxmlformats.org/officeDocument/2006/relationships">
+  <p:cSld>
+    <p:spTree>
+      <p:nvGrpSpPr>
+        <p:cNvPr id="1" name=""/>
+        <p:cNvGrpSpPr/>
+        <p:nvPr/>
+      </p:nvGrpSpPr>
+      <p:grpSpPr/>
+      <p:sp>
+        <p:nvSpPr>
+          <p:cNvPr id="2" name="Rectangle 1"/>
+          <p:cNvSpPr/>
+          <p:nvPr/>
+        </p:nvSpPr>
+        <p:spPr>
+          <a:xfrm>
+            <a:off x="0" y="0"/>
+            <a:ext cx="12191695" cy="841248"/>
+          </a:xfrm>
+          <a:prstGeom prst="rect">
+            <a:avLst/>
+          </a:prstGeom>
+          <a:solidFill>
+            <a:srgbClr val="0D3B66"/>
+          </a:solidFill>
+          <a:ln>
+            <a:noFill/>
+          </a:ln>
+        </p:spPr>
+        <p:style>
+          <a:lnRef idx="1">
+            <a:schemeClr val="accent1"/>
+          </a:lnRef>
+          <a:fillRef idx="3">
+            <a:schemeClr val="accent1"/>
+          </a:fillRef>
+          <a:effectRef idx="2">
+            <a:schemeClr val="accent1"/>
+          </a:effectRef>
+          <a:fontRef idx="minor">
+            <a:schemeClr val="lt1"/>
+          </a:fontRef>
+        </p:style>
+        <p:txBody>
+          <a:bodyPr rtlCol="0" anchor="ctr"/>
+          <a:lstStyle/>
+          <a:p>
+            <a:pPr algn="ctr"/>
+          </a:p>
+        </p:txBody>
+      </p:sp>
+      <p:sp>
+        <p:nvSpPr>
+          <p:cNvPr id="3" name="Rectangle 2"/>
+          <p:cNvSpPr/>
+          <p:nvPr/>
+        </p:nvSpPr>
+        <p:spPr>
+          <a:xfrm>
+            <a:off x="0" y="841248"/>
+            <a:ext cx="12191695" cy="54864"/>
+          </a:xfrm>
+          <a:prstGeom prst="rect">
+            <a:avLst/>
+          </a:prstGeom>
+          <a:solidFill>
+            <a:srgbClr val="C9A227"/>
+          </a:solidFill>
+          <a:ln>
+            <a:noFill/>
+          </a:ln>
+        </p:spPr>
+        <p:style>
+          <a:lnRef idx="1">
+            <a:schemeClr val="accent1"/>
+          </a:lnRef>
+          <a:fillRef idx="3">
+            <a:schemeClr val="accent1"/>
+          </a:fillRef>
+          <a:effectRef idx="2">
+            <a:schemeClr val="accent1"/>
+          </a:effectRef>
+          <a:fontRef idx="minor">
+            <a:schemeClr val="lt1"/>
+          </a:fontRef>
+        </p:style>
+        <p:txBody>
+          <a:bodyPr rtlCol="0" anchor="ctr"/>
+          <a:lstStyle/>
+          <a:p>
+            <a:pPr algn="ctr"/>
+          </a:p>
+        </p:txBody>
+      </p:sp>
+      <p:pic>
+        <p:nvPicPr>
+          <p:cNvPr id="4" name="Picture 3" descr="logo wes.bmp"/>
+          <p:cNvPicPr>
+            <a:picLocks noChangeAspect="1"/>
+          </p:cNvPicPr>
+          <p:nvPr/>
+        </p:nvPicPr>
+        <p:blipFill>
+          <a:blip r:embed="rId2"/>
+          <a:stretch>
+            <a:fillRect/>
+          </a:stretch>
+        </p:blipFill>
+        <p:spPr>
+          <a:xfrm>
+            <a:off x="10835640" y="146304"/>
+            <a:ext cx="1143000" cy="253401"/>
+          </a:xfrm>
+          <a:prstGeom prst="rect">
+            <a:avLst/>
+          </a:prstGeom>
+        </p:spPr>
+      </p:pic>
+      <p:sp>
+        <p:nvSpPr>
+          <p:cNvPr id="5" name="TextBox 4"/>
+          <p:cNvSpPr txBox="1"/>
+          <p:nvPr/>
+        </p:nvSpPr>
+        <p:spPr>
+          <a:xfrm>
+            <a:off x="256032" y="109728"/>
+            <a:ext cx="10607040" cy="384048"/>
+          </a:xfrm>
+          <a:prstGeom prst="rect">
+            <a:avLst/>
+          </a:prstGeom>
+          <a:noFill/>
+        </p:spPr>
+        <p:txBody>
+          <a:bodyPr wrap="square">
+            <a:spAutoFit/>
+          </a:bodyPr>
+          <a:lstStyle/>
+          <a:p>
+            <a:pPr algn="l">
+              <a:spcAft>
+                <a:spcPts val="300"/>
+              </a:spcAft>
+            </a:pPr>
+            <a:r>
+              <a:rPr sz="2000" b="1">
+                <a:solidFill>
+                  <a:srgbClr val="FFFFFF"/>
+                </a:solidFill>
+                <a:latin typeface="Calibri"/>
+              </a:rPr>
+              <a:t>PAK  ·  2. Cadena Sandía / Distrito de Lujo</a:t>
+            </a:r>
+          </a:p>
+        </p:txBody>
+      </p:sp>
+      <p:sp>
+        <p:nvSpPr>
+          <p:cNvPr id="6" name="TextBox 5"/>
+          <p:cNvSpPr txBox="1"/>
+          <p:nvPr/>
+        </p:nvSpPr>
+        <p:spPr>
+          <a:xfrm>
+            <a:off x="256032" y="457200"/>
+            <a:ext cx="10607040" cy="329184"/>
+          </a:xfrm>
+          <a:prstGeom prst="rect">
+            <a:avLst/>
+          </a:prstGeom>
+          <a:noFill/>
+        </p:spPr>
+        <p:txBody>
+          <a:bodyPr wrap="square">
+            <a:spAutoFit/>
+          </a:bodyPr>
+          <a:lstStyle/>
+          <a:p>
+            <a:pPr algn="l">
+              <a:spcAft>
+                <a:spcPts val="300"/>
+              </a:spcAft>
+            </a:pPr>
+            <a:r>
+              <a:rPr sz="1100" b="0">
+                <a:solidFill>
+                  <a:srgbClr val="DCE6F0"/>
+                </a:solidFill>
+                <a:latin typeface="Calibri"/>
+              </a:rPr>
+              <a:t>22 + 28 alimentan 000025-27  ·  27 se divide en 35 y 36  ·  no entran a cabecera</a:t>
+            </a:r>
+          </a:p>
+        </p:txBody>
+      </p:sp>
+      <p:sp>
+        <p:nvSpPr>
+          <p:cNvPr id="7" name="Rounded Rectangle 6"/>
+          <p:cNvSpPr/>
+          <p:nvPr/>
+        </p:nvSpPr>
+        <p:spPr>
+          <a:xfrm>
+            <a:off x="201168" y="987552"/>
+            <a:ext cx="11777472" cy="713232"/>
+          </a:xfrm>
+          <a:prstGeom prst="roundRect">
+            <a:avLst>
+              <a:gd name="adj" fmla="val 8000"/>
+            </a:avLst>
+          </a:prstGeom>
+          <a:solidFill>
+            <a:srgbClr val="FFF9EB"/>
+          </a:solidFill>
+          <a:ln w="6350">
+            <a:solidFill>
+              <a:srgbClr val="C9A227"/>
+            </a:solidFill>
+          </a:ln>
+        </p:spPr>
+        <p:style>
+          <a:lnRef idx="1">
+            <a:schemeClr val="accent1"/>
+          </a:lnRef>
+          <a:fillRef idx="3">
+            <a:schemeClr val="accent1"/>
+          </a:fillRef>
+          <a:effectRef idx="2">
+            <a:schemeClr val="accent1"/>
+          </a:effectRef>
+          <a:fontRef idx="minor">
+            <a:schemeClr val="lt1"/>
+          </a:fontRef>
+        </p:style>
+        <p:txBody>
+          <a:bodyPr rtlCol="0" anchor="ctr"/>
+          <a:lstStyle/>
+          <a:p>
+            <a:pPr algn="ctr"/>
+          </a:p>
+        </p:txBody>
+      </p:sp>
+      <p:sp>
+        <p:nvSpPr>
+          <p:cNvPr id="8" name="TextBox 7"/>
+          <p:cNvSpPr txBox="1"/>
+          <p:nvPr/>
+        </p:nvSpPr>
+        <p:spPr>
+          <a:xfrm>
+            <a:off x="365760" y="1042415"/>
+            <a:ext cx="11475720" cy="603504"/>
+          </a:xfrm>
+          <a:prstGeom prst="rect">
+            <a:avLst/>
+          </a:prstGeom>
+          <a:noFill/>
+        </p:spPr>
+        <p:txBody>
+          <a:bodyPr wrap="square">
+            <a:spAutoFit/>
+          </a:bodyPr>
+          <a:lstStyle/>
+          <a:p>
+            <a:pPr algn="l">
+              <a:spcAft>
+                <a:spcPts val="300"/>
+              </a:spcAft>
+            </a:pPr>
+            <a:r>
+              <a:rPr sz="1300" b="0">
+                <a:solidFill>
+                  <a:srgbClr val="0D3B66"/>
+                </a:solidFill>
+                <a:latin typeface="Calibri"/>
+              </a:rPr>
+              <a:t>Sandía Antigua (000025-22) y Sandía Nueva (000025-28) alimentan 000025-27 (Distrito de Lujo). Desde 27 el caudal se divide en 000025-35 (Bazar Gourmet) y 000025-36 (DL Kennedy). Por eso 27, 35 y 36 no se suman a la cabecera: sería doble conteo.</a:t>
+            </a:r>
+          </a:p>
+        </p:txBody>
+      </p:sp>
+      <p:sp>
+        <p:nvSpPr>
+          <p:cNvPr id="9" name="Rounded Rectangle 8"/>
+          <p:cNvSpPr/>
+          <p:nvPr/>
+        </p:nvSpPr>
+        <p:spPr>
+          <a:xfrm>
+            <a:off x="201168" y="1792224"/>
+            <a:ext cx="1975104" cy="530352"/>
+          </a:xfrm>
+          <a:prstGeom prst="roundRect">
+            <a:avLst>
+              <a:gd name="adj" fmla="val 8000"/>
+            </a:avLst>
+          </a:prstGeom>
+          <a:solidFill>
+            <a:srgbClr val="F5F7FA"/>
+          </a:solidFill>
+          <a:ln w="6350">
+            <a:solidFill>
+              <a:srgbClr val="A0783C"/>
+            </a:solidFill>
+          </a:ln>
+        </p:spPr>
+        <p:style>
+          <a:lnRef idx="1">
+            <a:schemeClr val="accent1"/>
+          </a:lnRef>
+          <a:fillRef idx="3">
+            <a:schemeClr val="accent1"/>
+          </a:fillRef>
+          <a:effectRef idx="2">
+            <a:schemeClr val="accent1"/>
+          </a:effectRef>
+          <a:fontRef idx="minor">
+            <a:schemeClr val="lt1"/>
+          </a:fontRef>
+        </p:style>
+        <p:txBody>
+          <a:bodyPr rtlCol="0" anchor="ctr"/>
+          <a:lstStyle/>
+          <a:p>
+            <a:pPr algn="ctr"/>
+          </a:p>
+        </p:txBody>
+      </p:sp>
+      <p:sp>
+        <p:nvSpPr>
+          <p:cNvPr id="10" name="TextBox 9"/>
+          <p:cNvSpPr txBox="1"/>
+          <p:nvPr/>
+        </p:nvSpPr>
+        <p:spPr>
+          <a:xfrm>
+            <a:off x="274320" y="1810512"/>
+            <a:ext cx="1828800" cy="164592"/>
+          </a:xfrm>
+          <a:prstGeom prst="rect">
+            <a:avLst/>
+          </a:prstGeom>
+          <a:noFill/>
+        </p:spPr>
+        <p:txBody>
+          <a:bodyPr wrap="square">
+            <a:spAutoFit/>
+          </a:bodyPr>
+          <a:lstStyle/>
+          <a:p>
+            <a:pPr algn="l">
+              <a:spcAft>
+                <a:spcPts val="300"/>
+              </a:spcAft>
+            </a:pPr>
+            <a:r>
+              <a:rPr sz="900" b="1">
+                <a:solidFill>
+                  <a:srgbClr val="C9A227"/>
+                </a:solidFill>
+                <a:latin typeface="Calibri"/>
+              </a:rPr>
+              <a:t>000025-22</a:t>
+            </a:r>
+          </a:p>
+        </p:txBody>
+      </p:sp>
+      <p:sp>
+        <p:nvSpPr>
+          <p:cNvPr id="11" name="TextBox 10"/>
+          <p:cNvSpPr txBox="1"/>
+          <p:nvPr/>
+        </p:nvSpPr>
+        <p:spPr>
+          <a:xfrm>
+            <a:off x="274320" y="1993392"/>
+            <a:ext cx="1828800" cy="274320"/>
+          </a:xfrm>
+          <a:prstGeom prst="rect">
+            <a:avLst/>
+          </a:prstGeom>
+          <a:noFill/>
+        </p:spPr>
+        <p:txBody>
+          <a:bodyPr wrap="square">
+            <a:spAutoFit/>
+          </a:bodyPr>
+          <a:lstStyle/>
+          <a:p>
+            <a:pPr algn="l">
+              <a:spcAft>
+                <a:spcPts val="300"/>
+              </a:spcAft>
+            </a:pPr>
+            <a:r>
+              <a:rPr sz="1100" b="1">
+                <a:solidFill>
+                  <a:srgbClr val="0D3B66"/>
+                </a:solidFill>
+                <a:latin typeface="Calibri"/>
+              </a:rPr>
+              <a:t>Sandía Antigua</a:t>
+            </a:r>
+          </a:p>
+        </p:txBody>
+      </p:sp>
+      <p:sp>
+        <p:nvSpPr>
+          <p:cNvPr id="12" name="Rounded Rectangle 11"/>
+          <p:cNvSpPr/>
+          <p:nvPr/>
+        </p:nvSpPr>
+        <p:spPr>
+          <a:xfrm>
+            <a:off x="2267712" y="1792224"/>
+            <a:ext cx="1975104" cy="530352"/>
+          </a:xfrm>
+          <a:prstGeom prst="roundRect">
+            <a:avLst>
+              <a:gd name="adj" fmla="val 8000"/>
+            </a:avLst>
+          </a:prstGeom>
+          <a:solidFill>
+            <a:srgbClr val="F5F7FA"/>
+          </a:solidFill>
+          <a:ln w="6350">
+            <a:solidFill>
+              <a:srgbClr val="1F77B4"/>
+            </a:solidFill>
+          </a:ln>
+        </p:spPr>
+        <p:style>
+          <a:lnRef idx="1">
+            <a:schemeClr val="accent1"/>
+          </a:lnRef>
+          <a:fillRef idx="3">
+            <a:schemeClr val="accent1"/>
+          </a:fillRef>
+          <a:effectRef idx="2">
+            <a:schemeClr val="accent1"/>
+          </a:effectRef>
+          <a:fontRef idx="minor">
+            <a:schemeClr val="lt1"/>
+          </a:fontRef>
+        </p:style>
+        <p:txBody>
+          <a:bodyPr rtlCol="0" anchor="ctr"/>
+          <a:lstStyle/>
+          <a:p>
+            <a:pPr algn="ctr"/>
+          </a:p>
+        </p:txBody>
+      </p:sp>
+      <p:sp>
+        <p:nvSpPr>
+          <p:cNvPr id="13" name="TextBox 12"/>
+          <p:cNvSpPr txBox="1"/>
+          <p:nvPr/>
+        </p:nvSpPr>
+        <p:spPr>
+          <a:xfrm>
+            <a:off x="2340864" y="1810512"/>
+            <a:ext cx="1828800" cy="164592"/>
+          </a:xfrm>
+          <a:prstGeom prst="rect">
+            <a:avLst/>
+          </a:prstGeom>
+          <a:noFill/>
+        </p:spPr>
+        <p:txBody>
+          <a:bodyPr wrap="square">
+            <a:spAutoFit/>
+          </a:bodyPr>
+          <a:lstStyle/>
+          <a:p>
+            <a:pPr algn="l">
+              <a:spcAft>
+                <a:spcPts val="300"/>
+              </a:spcAft>
+            </a:pPr>
+            <a:r>
+              <a:rPr sz="900" b="1">
+                <a:solidFill>
+                  <a:srgbClr val="C9A227"/>
+                </a:solidFill>
+                <a:latin typeface="Calibri"/>
+              </a:rPr>
+              <a:t>000025-28</a:t>
+            </a:r>
+          </a:p>
+        </p:txBody>
+      </p:sp>
+      <p:sp>
+        <p:nvSpPr>
+          <p:cNvPr id="14" name="TextBox 13"/>
+          <p:cNvSpPr txBox="1"/>
+          <p:nvPr/>
+        </p:nvSpPr>
+        <p:spPr>
+          <a:xfrm>
+            <a:off x="2340864" y="1993392"/>
+            <a:ext cx="1828800" cy="274320"/>
+          </a:xfrm>
+          <a:prstGeom prst="rect">
+            <a:avLst/>
+          </a:prstGeom>
+          <a:noFill/>
+        </p:spPr>
+        <p:txBody>
+          <a:bodyPr wrap="square">
+            <a:spAutoFit/>
+          </a:bodyPr>
+          <a:lstStyle/>
+          <a:p>
+            <a:pPr algn="l">
+              <a:spcAft>
+                <a:spcPts val="300"/>
+              </a:spcAft>
+            </a:pPr>
+            <a:r>
+              <a:rPr sz="1100" b="1">
+                <a:solidFill>
+                  <a:srgbClr val="0D3B66"/>
+                </a:solidFill>
+                <a:latin typeface="Calibri"/>
+              </a:rPr>
+              <a:t>Sandía Nueva</a:t>
+            </a:r>
+          </a:p>
+        </p:txBody>
+      </p:sp>
+      <p:sp>
+        <p:nvSpPr>
+          <p:cNvPr id="15" name="Rounded Rectangle 14"/>
+          <p:cNvSpPr/>
+          <p:nvPr/>
+        </p:nvSpPr>
+        <p:spPr>
+          <a:xfrm>
+            <a:off x="4736592" y="1792224"/>
+            <a:ext cx="1975104" cy="530352"/>
+          </a:xfrm>
+          <a:prstGeom prst="roundRect">
+            <a:avLst>
+              <a:gd name="adj" fmla="val 8000"/>
+            </a:avLst>
+          </a:prstGeom>
+          <a:solidFill>
+            <a:srgbClr val="FFF9EB"/>
+          </a:solidFill>
+          <a:ln w="6350">
+            <a:solidFill>
+              <a:srgbClr val="C45C26"/>
+            </a:solidFill>
+          </a:ln>
+        </p:spPr>
+        <p:style>
+          <a:lnRef idx="1">
+            <a:schemeClr val="accent1"/>
+          </a:lnRef>
+          <a:fillRef idx="3">
+            <a:schemeClr val="accent1"/>
+          </a:fillRef>
+          <a:effectRef idx="2">
+            <a:schemeClr val="accent1"/>
+          </a:effectRef>
+          <a:fontRef idx="minor">
+            <a:schemeClr val="lt1"/>
+          </a:fontRef>
+        </p:style>
+        <p:txBody>
+          <a:bodyPr rtlCol="0" anchor="ctr"/>
+          <a:lstStyle/>
+          <a:p>
+            <a:pPr algn="ctr"/>
+          </a:p>
+        </p:txBody>
+      </p:sp>
+      <p:sp>
+        <p:nvSpPr>
+          <p:cNvPr id="16" name="TextBox 15"/>
+          <p:cNvSpPr txBox="1"/>
+          <p:nvPr/>
+        </p:nvSpPr>
+        <p:spPr>
+          <a:xfrm>
+            <a:off x="4809744" y="1810512"/>
+            <a:ext cx="1828800" cy="164592"/>
+          </a:xfrm>
+          <a:prstGeom prst="rect">
+            <a:avLst/>
+          </a:prstGeom>
+          <a:noFill/>
+        </p:spPr>
+        <p:txBody>
+          <a:bodyPr wrap="square">
+            <a:spAutoFit/>
+          </a:bodyPr>
+          <a:lstStyle/>
+          <a:p>
+            <a:pPr algn="l">
+              <a:spcAft>
+                <a:spcPts val="300"/>
+              </a:spcAft>
+            </a:pPr>
+            <a:r>
+              <a:rPr sz="900" b="1">
+                <a:solidFill>
+                  <a:srgbClr val="C9A227"/>
+                </a:solidFill>
+                <a:latin typeface="Calibri"/>
+              </a:rPr>
+              <a:t>000025-27</a:t>
+            </a:r>
+          </a:p>
+        </p:txBody>
+      </p:sp>
+      <p:sp>
+        <p:nvSpPr>
+          <p:cNvPr id="17" name="TextBox 16"/>
+          <p:cNvSpPr txBox="1"/>
+          <p:nvPr/>
+        </p:nvSpPr>
+        <p:spPr>
+          <a:xfrm>
+            <a:off x="4809744" y="1993392"/>
+            <a:ext cx="1828800" cy="274320"/>
+          </a:xfrm>
+          <a:prstGeom prst="rect">
+            <a:avLst/>
+          </a:prstGeom>
+          <a:noFill/>
+        </p:spPr>
+        <p:txBody>
+          <a:bodyPr wrap="square">
+            <a:spAutoFit/>
+          </a:bodyPr>
+          <a:lstStyle/>
+          <a:p>
+            <a:pPr algn="l">
+              <a:spcAft>
+                <a:spcPts val="300"/>
+              </a:spcAft>
+            </a:pPr>
+            <a:r>
+              <a:rPr sz="1100" b="1">
+                <a:solidFill>
+                  <a:srgbClr val="0D3B66"/>
+                </a:solidFill>
+                <a:latin typeface="Calibri"/>
+              </a:rPr>
+              <a:t>Distrito Lujo  ·  tronco</a:t>
+            </a:r>
+          </a:p>
+        </p:txBody>
+      </p:sp>
+      <p:sp>
+        <p:nvSpPr>
+          <p:cNvPr id="18" name="Rounded Rectangle 17"/>
+          <p:cNvSpPr/>
+          <p:nvPr/>
+        </p:nvSpPr>
+        <p:spPr>
+          <a:xfrm>
+            <a:off x="7717536" y="1792224"/>
+            <a:ext cx="1975104" cy="530352"/>
+          </a:xfrm>
+          <a:prstGeom prst="roundRect">
+            <a:avLst>
+              <a:gd name="adj" fmla="val 8000"/>
+            </a:avLst>
+          </a:prstGeom>
+          <a:solidFill>
+            <a:srgbClr val="F5F7FA"/>
+          </a:solidFill>
+          <a:ln w="6350">
+            <a:solidFill>
+              <a:srgbClr val="C9A227"/>
+            </a:solidFill>
+          </a:ln>
+        </p:spPr>
+        <p:style>
+          <a:lnRef idx="1">
+            <a:schemeClr val="accent1"/>
+          </a:lnRef>
+          <a:fillRef idx="3">
+            <a:schemeClr val="accent1"/>
+          </a:fillRef>
+          <a:effectRef idx="2">
+            <a:schemeClr val="accent1"/>
+          </a:effectRef>
+          <a:fontRef idx="minor">
+            <a:schemeClr val="lt1"/>
+          </a:fontRef>
+        </p:style>
+        <p:txBody>
+          <a:bodyPr rtlCol="0" anchor="ctr"/>
+          <a:lstStyle/>
+          <a:p>
+            <a:pPr algn="ctr"/>
+          </a:p>
+        </p:txBody>
+      </p:sp>
+      <p:sp>
+        <p:nvSpPr>
+          <p:cNvPr id="19" name="TextBox 18"/>
+          <p:cNvSpPr txBox="1"/>
+          <p:nvPr/>
+        </p:nvSpPr>
+        <p:spPr>
+          <a:xfrm>
+            <a:off x="7790688" y="1810512"/>
+            <a:ext cx="1828800" cy="164592"/>
+          </a:xfrm>
+          <a:prstGeom prst="rect">
+            <a:avLst/>
+          </a:prstGeom>
+          <a:noFill/>
+        </p:spPr>
+        <p:txBody>
+          <a:bodyPr wrap="square">
+            <a:spAutoFit/>
+          </a:bodyPr>
+          <a:lstStyle/>
+          <a:p>
+            <a:pPr algn="l">
+              <a:spcAft>
+                <a:spcPts val="300"/>
+              </a:spcAft>
+            </a:pPr>
+            <a:r>
+              <a:rPr sz="900" b="1">
+                <a:solidFill>
+                  <a:srgbClr val="C9A227"/>
+                </a:solidFill>
+                <a:latin typeface="Calibri"/>
+              </a:rPr>
+              <a:t>000025-35</a:t>
+            </a:r>
+          </a:p>
+        </p:txBody>
+      </p:sp>
+      <p:sp>
+        <p:nvSpPr>
+          <p:cNvPr id="20" name="TextBox 19"/>
+          <p:cNvSpPr txBox="1"/>
+          <p:nvPr/>
+        </p:nvSpPr>
+        <p:spPr>
+          <a:xfrm>
+            <a:off x="7790688" y="1993392"/>
+            <a:ext cx="1828800" cy="274320"/>
+          </a:xfrm>
+          <a:prstGeom prst="rect">
+            <a:avLst/>
+          </a:prstGeom>
+          <a:noFill/>
+        </p:spPr>
+        <p:txBody>
+          <a:bodyPr wrap="square">
+            <a:spAutoFit/>
+          </a:bodyPr>
+          <a:lstStyle/>
+          <a:p>
+            <a:pPr algn="l">
+              <a:spcAft>
+                <a:spcPts val="300"/>
+              </a:spcAft>
+            </a:pPr>
+            <a:r>
+              <a:rPr sz="1100" b="1">
+                <a:solidFill>
+                  <a:srgbClr val="0D3B66"/>
+                </a:solidFill>
+                <a:latin typeface="Calibri"/>
+              </a:rPr>
+              <a:t>Bazar Gourmet</a:t>
+            </a:r>
+          </a:p>
+        </p:txBody>
+      </p:sp>
+      <p:sp>
+        <p:nvSpPr>
+          <p:cNvPr id="21" name="Rounded Rectangle 20"/>
+          <p:cNvSpPr/>
+          <p:nvPr/>
+        </p:nvSpPr>
+        <p:spPr>
+          <a:xfrm>
+            <a:off x="9784080" y="1792224"/>
+            <a:ext cx="1975104" cy="530352"/>
+          </a:xfrm>
+          <a:prstGeom prst="roundRect">
+            <a:avLst>
+              <a:gd name="adj" fmla="val 8000"/>
+            </a:avLst>
+          </a:prstGeom>
+          <a:solidFill>
+            <a:srgbClr val="F5F7FA"/>
+          </a:solidFill>
+          <a:ln w="6350">
+            <a:solidFill>
+              <a:srgbClr val="5A8C6E"/>
+            </a:solidFill>
+          </a:ln>
+        </p:spPr>
+        <p:style>
+          <a:lnRef idx="1">
+            <a:schemeClr val="accent1"/>
+          </a:lnRef>
+          <a:fillRef idx="3">
+            <a:schemeClr val="accent1"/>
+          </a:fillRef>
+          <a:effectRef idx="2">
+            <a:schemeClr val="accent1"/>
+          </a:effectRef>
+          <a:fontRef idx="minor">
+            <a:schemeClr val="lt1"/>
+          </a:fontRef>
+        </p:style>
+        <p:txBody>
+          <a:bodyPr rtlCol="0" anchor="ctr"/>
+          <a:lstStyle/>
+          <a:p>
+            <a:pPr algn="ctr"/>
+          </a:p>
+        </p:txBody>
+      </p:sp>
+      <p:sp>
+        <p:nvSpPr>
+          <p:cNvPr id="22" name="TextBox 21"/>
+          <p:cNvSpPr txBox="1"/>
+          <p:nvPr/>
+        </p:nvSpPr>
+        <p:spPr>
+          <a:xfrm>
+            <a:off x="9857232" y="1810512"/>
+            <a:ext cx="1828800" cy="164592"/>
+          </a:xfrm>
+          <a:prstGeom prst="rect">
+            <a:avLst/>
+          </a:prstGeom>
+          <a:noFill/>
+        </p:spPr>
+        <p:txBody>
+          <a:bodyPr wrap="square">
+            <a:spAutoFit/>
+          </a:bodyPr>
+          <a:lstStyle/>
+          <a:p>
+            <a:pPr algn="l">
+              <a:spcAft>
+                <a:spcPts val="300"/>
+              </a:spcAft>
+            </a:pPr>
+            <a:r>
+              <a:rPr sz="900" b="1">
+                <a:solidFill>
+                  <a:srgbClr val="C9A227"/>
+                </a:solidFill>
+                <a:latin typeface="Calibri"/>
+              </a:rPr>
+              <a:t>000025-36</a:t>
+            </a:r>
+          </a:p>
+        </p:txBody>
+      </p:sp>
+      <p:sp>
+        <p:nvSpPr>
+          <p:cNvPr id="23" name="TextBox 22"/>
+          <p:cNvSpPr txBox="1"/>
+          <p:nvPr/>
+        </p:nvSpPr>
+        <p:spPr>
+          <a:xfrm>
+            <a:off x="9857232" y="1993392"/>
+            <a:ext cx="1828800" cy="274320"/>
+          </a:xfrm>
+          <a:prstGeom prst="rect">
+            <a:avLst/>
+          </a:prstGeom>
+          <a:noFill/>
+        </p:spPr>
+        <p:txBody>
+          <a:bodyPr wrap="square">
+            <a:spAutoFit/>
+          </a:bodyPr>
+          <a:lstStyle/>
+          <a:p>
+            <a:pPr algn="l">
+              <a:spcAft>
+                <a:spcPts val="300"/>
+              </a:spcAft>
+            </a:pPr>
+            <a:r>
+              <a:rPr sz="1100" b="1">
+                <a:solidFill>
+                  <a:srgbClr val="0D3B66"/>
+                </a:solidFill>
+                <a:latin typeface="Calibri"/>
+              </a:rPr>
+              <a:t>DL Kennedy</a:t>
+            </a:r>
+          </a:p>
+        </p:txBody>
+      </p:sp>
+      <p:sp>
+        <p:nvSpPr>
+          <p:cNvPr id="24" name="TextBox 23"/>
+          <p:cNvSpPr txBox="1"/>
+          <p:nvPr/>
+        </p:nvSpPr>
+        <p:spPr>
+          <a:xfrm>
+            <a:off x="2103120" y="1920240"/>
+            <a:ext cx="201168" cy="256032"/>
+          </a:xfrm>
+          <a:prstGeom prst="rect">
+            <a:avLst/>
+          </a:prstGeom>
+          <a:noFill/>
+        </p:spPr>
+        <p:txBody>
+          <a:bodyPr wrap="square">
+            <a:spAutoFit/>
+          </a:bodyPr>
+          <a:lstStyle/>
+          <a:p>
+            <a:pPr algn="ctr">
+              <a:spcAft>
+                <a:spcPts val="300"/>
+              </a:spcAft>
+            </a:pPr>
+            <a:r>
+              <a:rPr sz="1600" b="1">
+                <a:solidFill>
+                  <a:srgbClr val="C9A227"/>
+                </a:solidFill>
+                <a:latin typeface="Calibri"/>
+              </a:rPr>
+              <a:t>+</a:t>
+            </a:r>
+          </a:p>
+        </p:txBody>
+      </p:sp>
+      <p:sp>
+        <p:nvSpPr>
+          <p:cNvPr id="25" name="TextBox 24"/>
+          <p:cNvSpPr txBox="1"/>
+          <p:nvPr/>
+        </p:nvSpPr>
+        <p:spPr>
+          <a:xfrm>
+            <a:off x="4242816" y="1920240"/>
+            <a:ext cx="493776" cy="256032"/>
+          </a:xfrm>
+          <a:prstGeom prst="rect">
+            <a:avLst/>
+          </a:prstGeom>
+          <a:noFill/>
+        </p:spPr>
+        <p:txBody>
+          <a:bodyPr wrap="square">
+            <a:spAutoFit/>
+          </a:bodyPr>
+          <a:lstStyle/>
+          <a:p>
+            <a:pPr algn="ctr">
+              <a:spcAft>
+                <a:spcPts val="300"/>
+              </a:spcAft>
+            </a:pPr>
+            <a:r>
+              <a:rPr sz="1800" b="1">
+                <a:solidFill>
+                  <a:srgbClr val="C9A227"/>
+                </a:solidFill>
+                <a:latin typeface="Calibri"/>
+              </a:rPr>
+              <a:t>→</a:t>
+            </a:r>
+          </a:p>
+        </p:txBody>
+      </p:sp>
+      <p:sp>
+        <p:nvSpPr>
+          <p:cNvPr id="26" name="TextBox 25"/>
+          <p:cNvSpPr txBox="1"/>
+          <p:nvPr/>
+        </p:nvSpPr>
+        <p:spPr>
+          <a:xfrm>
+            <a:off x="7223760" y="1920240"/>
+            <a:ext cx="493776" cy="256032"/>
+          </a:xfrm>
+          <a:prstGeom prst="rect">
+            <a:avLst/>
+          </a:prstGeom>
+          <a:noFill/>
+        </p:spPr>
+        <p:txBody>
+          <a:bodyPr wrap="square">
+            <a:spAutoFit/>
+          </a:bodyPr>
+          <a:lstStyle/>
+          <a:p>
+            <a:pPr algn="ctr">
+              <a:spcAft>
+                <a:spcPts val="300"/>
+              </a:spcAft>
+            </a:pPr>
+            <a:r>
+              <a:rPr sz="1800" b="1">
+                <a:solidFill>
+                  <a:srgbClr val="C9A227"/>
+                </a:solidFill>
+                <a:latin typeface="Calibri"/>
+              </a:rPr>
+              <a:t>→</a:t>
+            </a:r>
+          </a:p>
+        </p:txBody>
+      </p:sp>
+      <p:sp>
+        <p:nvSpPr>
+          <p:cNvPr id="27" name="Rounded Rectangle 26"/>
+          <p:cNvSpPr/>
+          <p:nvPr/>
+        </p:nvSpPr>
+        <p:spPr>
+          <a:xfrm>
+            <a:off x="201168" y="2432304"/>
+            <a:ext cx="5833872" cy="3108960"/>
+          </a:xfrm>
+          <a:prstGeom prst="roundRect">
+            <a:avLst>
+              <a:gd name="adj" fmla="val 8000"/>
+            </a:avLst>
+          </a:prstGeom>
+          <a:solidFill>
+            <a:srgbClr val="F5F7FA"/>
+          </a:solidFill>
+          <a:ln>
+            <a:noFill/>
+          </a:ln>
+        </p:spPr>
+        <p:style>
+          <a:lnRef idx="1">
+            <a:schemeClr val="accent1"/>
+          </a:lnRef>
+          <a:fillRef idx="3">
+            <a:schemeClr val="accent1"/>
+          </a:fillRef>
+          <a:effectRef idx="2">
+            <a:schemeClr val="accent1"/>
+          </a:effectRef>
+          <a:fontRef idx="minor">
+            <a:schemeClr val="lt1"/>
+          </a:fontRef>
+        </p:style>
+        <p:txBody>
+          <a:bodyPr rtlCol="0" anchor="ctr"/>
+          <a:lstStyle/>
+          <a:p>
+            <a:pPr algn="ctr"/>
+          </a:p>
+        </p:txBody>
+      </p:sp>
+      <p:sp>
+        <p:nvSpPr>
+          <p:cNvPr id="28" name="TextBox 27"/>
+          <p:cNvSpPr txBox="1"/>
+          <p:nvPr/>
+        </p:nvSpPr>
+        <p:spPr>
+          <a:xfrm>
+            <a:off x="329184" y="2468880"/>
+            <a:ext cx="5577840" cy="201168"/>
+          </a:xfrm>
+          <a:prstGeom prst="rect">
+            <a:avLst/>
+          </a:prstGeom>
+          <a:noFill/>
+        </p:spPr>
+        <p:txBody>
+          <a:bodyPr wrap="square">
+            <a:spAutoFit/>
+          </a:bodyPr>
+          <a:lstStyle/>
+          <a:p>
+            <a:pPr algn="l">
+              <a:spcAft>
+                <a:spcPts val="300"/>
+              </a:spcAft>
+            </a:pPr>
+            <a:r>
+              <a:rPr sz="1100" b="1">
+                <a:solidFill>
+                  <a:srgbClr val="1F77B4"/>
+                </a:solidFill>
+                <a:latin typeface="Calibri"/>
+              </a:rPr>
+              <a:t>10/08 · perfil 24 h  (sombra = 00:00–06:00)</a:t>
+            </a:r>
+          </a:p>
+        </p:txBody>
+      </p:sp>
+      <p:pic>
+        <p:nvPicPr>
+          <p:cNvPr id="29" name="Picture 28" descr="pak_cadena_perfil_20260810.png"/>
+          <p:cNvPicPr>
+            <a:picLocks noChangeAspect="1"/>
+          </p:cNvPicPr>
+          <p:nvPr/>
+        </p:nvPicPr>
+        <p:blipFill>
+          <a:blip r:embed="rId3"/>
+          <a:stretch>
+            <a:fillRect/>
+          </a:stretch>
+        </p:blipFill>
+        <p:spPr>
+          <a:xfrm>
+            <a:off x="292608" y="2809776"/>
+            <a:ext cx="5650992" cy="2518606"/>
+          </a:xfrm>
+          <a:prstGeom prst="rect">
+            <a:avLst/>
+          </a:prstGeom>
+        </p:spPr>
+      </p:pic>
+      <p:sp>
+        <p:nvSpPr>
+          <p:cNvPr id="30" name="Rounded Rectangle 29"/>
+          <p:cNvSpPr/>
+          <p:nvPr/>
+        </p:nvSpPr>
+        <p:spPr>
+          <a:xfrm>
+            <a:off x="6163056" y="2432304"/>
+            <a:ext cx="5815584" cy="3108960"/>
+          </a:xfrm>
+          <a:prstGeom prst="roundRect">
+            <a:avLst>
+              <a:gd name="adj" fmla="val 8000"/>
+            </a:avLst>
+          </a:prstGeom>
+          <a:solidFill>
+            <a:srgbClr val="F5F7FA"/>
+          </a:solidFill>
+          <a:ln>
+            <a:noFill/>
+          </a:ln>
+        </p:spPr>
+        <p:style>
+          <a:lnRef idx="1">
+            <a:schemeClr val="accent1"/>
+          </a:lnRef>
+          <a:fillRef idx="3">
+            <a:schemeClr val="accent1"/>
+          </a:fillRef>
+          <a:effectRef idx="2">
+            <a:schemeClr val="accent1"/>
+          </a:effectRef>
+          <a:fontRef idx="minor">
+            <a:schemeClr val="lt1"/>
+          </a:fontRef>
+        </p:style>
+        <p:txBody>
+          <a:bodyPr rtlCol="0" anchor="ctr"/>
+          <a:lstStyle/>
+          <a:p>
+            <a:pPr algn="ctr"/>
+          </a:p>
+        </p:txBody>
+      </p:sp>
+      <p:sp>
+        <p:nvSpPr>
+          <p:cNvPr id="31" name="TextBox 30"/>
+          <p:cNvSpPr txBox="1"/>
+          <p:nvPr/>
+        </p:nvSpPr>
+        <p:spPr>
+          <a:xfrm>
+            <a:off x="6291072" y="2468880"/>
+            <a:ext cx="5559552" cy="201168"/>
+          </a:xfrm>
+          <a:prstGeom prst="rect">
+            <a:avLst/>
+          </a:prstGeom>
+          <a:noFill/>
+        </p:spPr>
+        <p:txBody>
+          <a:bodyPr wrap="square">
+            <a:spAutoFit/>
+          </a:bodyPr>
+          <a:lstStyle/>
+          <a:p>
+            <a:pPr algn="l">
+              <a:spcAft>
+                <a:spcPts val="300"/>
+              </a:spcAft>
+            </a:pPr>
+            <a:r>
+              <a:rPr sz="1100" b="1">
+                <a:solidFill>
+                  <a:srgbClr val="1F77B4"/>
+                </a:solidFill>
+                <a:latin typeface="Calibri"/>
+              </a:rPr>
+              <a:t>Agosto · m³ de madrugada (00:00–06:00)</a:t>
+            </a:r>
+          </a:p>
+        </p:txBody>
+      </p:sp>
+      <p:pic>
+        <p:nvPicPr>
+          <p:cNvPr id="32" name="Picture 31" descr="pak_cadena_noches_ago.png"/>
+          <p:cNvPicPr>
+            <a:picLocks noChangeAspect="1"/>
+          </p:cNvPicPr>
+          <p:nvPr/>
+        </p:nvPicPr>
+        <p:blipFill>
+          <a:blip r:embed="rId4"/>
+          <a:stretch>
+            <a:fillRect/>
+          </a:stretch>
+        </p:blipFill>
+        <p:spPr>
+          <a:xfrm>
+            <a:off x="6254496" y="2813851"/>
+            <a:ext cx="5632704" cy="2510456"/>
+          </a:xfrm>
+          <a:prstGeom prst="rect">
+            <a:avLst/>
+          </a:prstGeom>
+        </p:spPr>
+      </p:pic>
+      <p:sp>
+        <p:nvSpPr>
+          <p:cNvPr id="33" name="Rounded Rectangle 32"/>
+          <p:cNvSpPr/>
+          <p:nvPr/>
+        </p:nvSpPr>
+        <p:spPr>
+          <a:xfrm>
+            <a:off x="201168" y="5632704"/>
+            <a:ext cx="11777472" cy="1060704"/>
+          </a:xfrm>
+          <a:prstGeom prst="roundRect">
+            <a:avLst>
+              <a:gd name="adj" fmla="val 8000"/>
+            </a:avLst>
+          </a:prstGeom>
+          <a:solidFill>
+            <a:srgbClr val="FFF9EB"/>
+          </a:solidFill>
+          <a:ln w="6350">
+            <a:solidFill>
+              <a:srgbClr val="C9A227"/>
+            </a:solidFill>
+          </a:ln>
+        </p:spPr>
+        <p:style>
+          <a:lnRef idx="1">
+            <a:schemeClr val="accent1"/>
+          </a:lnRef>
+          <a:fillRef idx="3">
+            <a:schemeClr val="accent1"/>
+          </a:fillRef>
+          <a:effectRef idx="2">
+            <a:schemeClr val="accent1"/>
+          </a:effectRef>
+          <a:fontRef idx="minor">
+            <a:schemeClr val="lt1"/>
+          </a:fontRef>
+        </p:style>
+        <p:txBody>
+          <a:bodyPr rtlCol="0" anchor="ctr"/>
+          <a:lstStyle/>
+          <a:p>
+            <a:pPr algn="ctr"/>
+          </a:p>
+        </p:txBody>
+      </p:sp>
+      <p:sp>
+        <p:nvSpPr>
+          <p:cNvPr id="34" name="TextBox 33"/>
+          <p:cNvSpPr txBox="1"/>
+          <p:nvPr/>
+        </p:nvSpPr>
+        <p:spPr>
+          <a:xfrm>
+            <a:off x="365760" y="5669280"/>
+            <a:ext cx="11475720" cy="969264"/>
+          </a:xfrm>
+          <a:prstGeom prst="rect">
+            <a:avLst/>
+          </a:prstGeom>
+          <a:noFill/>
+        </p:spPr>
+        <p:txBody>
+          <a:bodyPr wrap="square">
+            <a:spAutoFit/>
+          </a:bodyPr>
+          <a:lstStyle/>
+          <a:p>
+            <a:pPr algn="l">
+              <a:spcAft>
+                <a:spcPts val="300"/>
+              </a:spcAft>
+            </a:pPr>
+            <a:r>
+              <a:rPr sz="1300" b="0">
+                <a:solidFill>
+                  <a:srgbClr val="0D3B66"/>
+                </a:solidFill>
+                <a:latin typeface="Calibri"/>
+              </a:rPr>
+              <a:t>10/08 noche 00–06: Distrito de Lujo 41,2 m³  ·  Bazar 28,2 m³  ·  DL Kennedy 0,9 m³. Julio: 27 = 9.669 m³  ·  35 = 6.256 m³  ·  36 = 503 m³.</a:t>
+            </a:r>
+          </a:p>
+          <a:p>
+            <a:pPr algn="l">
+              <a:spcAft>
+                <a:spcPts val="300"/>
+              </a:spcAft>
+            </a:pPr>
+            <a:r>
+              <a:rPr sz="1300" b="1">
+                <a:solidFill>
+                  <a:srgbClr val="0D3B66"/>
+                </a:solidFill>
+                <a:latin typeface="Calibri"/>
+              </a:rPr>
+              <a:t>Propuesta: instalar control nocturno en 000025-27 (tronco). De madrugada, Bazar (35) sigue a 27 y DL Kennedy (36) queda residual. Cortar 27 corta el caudal de noche del Distrito de Lujo.</a:t>
             </a:r>
           </a:p>
         </p:txBody>
@@ -3527,7 +4880,7 @@
         <p:spPr>
           <a:xfrm>
             <a:off x="201168" y="1024128"/>
-            <a:ext cx="2880360" cy="658368"/>
+            <a:ext cx="2894076" cy="658368"/>
           </a:xfrm>
           <a:prstGeom prst="roundRect">
             <a:avLst>
@@ -3573,8 +4926,8 @@
         </p:nvSpPr>
         <p:spPr>
           <a:xfrm>
-            <a:off x="292608" y="1060704"/>
-            <a:ext cx="2715768" cy="182880"/>
+            <a:off x="274320" y="1051560"/>
+            <a:ext cx="2766060" cy="164592"/>
           </a:xfrm>
           <a:prstGeom prst="rect">
             <a:avLst/>
@@ -3612,8 +4965,8 @@
         </p:nvSpPr>
         <p:spPr>
           <a:xfrm>
-            <a:off x="292608" y="1243584"/>
-            <a:ext cx="2715768" cy="219456"/>
+            <a:off x="274320" y="1243584"/>
+            <a:ext cx="2766060" cy="201168"/>
           </a:xfrm>
           <a:prstGeom prst="rect">
             <a:avLst/>
@@ -3651,8 +5004,8 @@
         </p:nvSpPr>
         <p:spPr>
           <a:xfrm>
-            <a:off x="292608" y="1444752"/>
-            <a:ext cx="2715768" cy="164592"/>
+            <a:off x="274320" y="1499616"/>
+            <a:ext cx="2766060" cy="164592"/>
           </a:xfrm>
           <a:prstGeom prst="rect">
             <a:avLst/>
@@ -3690,8 +5043,8 @@
         </p:nvSpPr>
         <p:spPr>
           <a:xfrm>
-            <a:off x="3172968" y="1024128"/>
-            <a:ext cx="2880360" cy="658368"/>
+            <a:off x="3168396" y="1024128"/>
+            <a:ext cx="2894076" cy="658368"/>
           </a:xfrm>
           <a:prstGeom prst="roundRect">
             <a:avLst>
@@ -3737,8 +5090,8 @@
         </p:nvSpPr>
         <p:spPr>
           <a:xfrm>
-            <a:off x="3264408" y="1060704"/>
-            <a:ext cx="2715768" cy="182880"/>
+            <a:off x="3241548" y="1051560"/>
+            <a:ext cx="2766060" cy="164592"/>
           </a:xfrm>
           <a:prstGeom prst="rect">
             <a:avLst/>
@@ -3776,8 +5129,8 @@
         </p:nvSpPr>
         <p:spPr>
           <a:xfrm>
-            <a:off x="3264408" y="1243584"/>
-            <a:ext cx="2715768" cy="219456"/>
+            <a:off x="3241548" y="1243584"/>
+            <a:ext cx="2766060" cy="201168"/>
           </a:xfrm>
           <a:prstGeom prst="rect">
             <a:avLst/>
@@ -3815,8 +5168,8 @@
         </p:nvSpPr>
         <p:spPr>
           <a:xfrm>
-            <a:off x="6144768" y="1024128"/>
-            <a:ext cx="2880360" cy="658368"/>
+            <a:off x="6135624" y="1024128"/>
+            <a:ext cx="2894076" cy="658368"/>
           </a:xfrm>
           <a:prstGeom prst="roundRect">
             <a:avLst>
@@ -3862,8 +5215,8 @@
         </p:nvSpPr>
         <p:spPr>
           <a:xfrm>
-            <a:off x="6236207" y="1060704"/>
-            <a:ext cx="2715768" cy="182880"/>
+            <a:off x="6208776" y="1051560"/>
+            <a:ext cx="2766060" cy="164592"/>
           </a:xfrm>
           <a:prstGeom prst="rect">
             <a:avLst/>
@@ -3901,8 +5254,8 @@
         </p:nvSpPr>
         <p:spPr>
           <a:xfrm>
-            <a:off x="6236207" y="1243584"/>
-            <a:ext cx="2715768" cy="219456"/>
+            <a:off x="6208776" y="1243584"/>
+            <a:ext cx="2766060" cy="201168"/>
           </a:xfrm>
           <a:prstGeom prst="rect">
             <a:avLst/>
@@ -3940,8 +5293,8 @@
         </p:nvSpPr>
         <p:spPr>
           <a:xfrm>
-            <a:off x="6236207" y="1444752"/>
-            <a:ext cx="2715768" cy="164592"/>
+            <a:off x="6208776" y="1499616"/>
+            <a:ext cx="2766060" cy="164592"/>
           </a:xfrm>
           <a:prstGeom prst="rect">
             <a:avLst/>
@@ -3979,8 +5332,8 @@
         </p:nvSpPr>
         <p:spPr>
           <a:xfrm>
-            <a:off x="9116568" y="1024128"/>
-            <a:ext cx="2880360" cy="658368"/>
+            <a:off x="9102852" y="1024128"/>
+            <a:ext cx="2894076" cy="658368"/>
           </a:xfrm>
           <a:prstGeom prst="roundRect">
             <a:avLst>
@@ -4026,8 +5379,8 @@
         </p:nvSpPr>
         <p:spPr>
           <a:xfrm>
-            <a:off x="9208008" y="1060704"/>
-            <a:ext cx="2715768" cy="182880"/>
+            <a:off x="9176004" y="1051560"/>
+            <a:ext cx="2766060" cy="164592"/>
           </a:xfrm>
           <a:prstGeom prst="rect">
             <a:avLst/>
@@ -4065,8 +5418,8 @@
         </p:nvSpPr>
         <p:spPr>
           <a:xfrm>
-            <a:off x="9208008" y="1243584"/>
-            <a:ext cx="2715768" cy="219456"/>
+            <a:off x="9176004" y="1243584"/>
+            <a:ext cx="2766060" cy="201168"/>
           </a:xfrm>
           <a:prstGeom prst="rect">
             <a:avLst/>
@@ -4157,8 +5510,8 @@
         </p:blipFill>
         <p:spPr>
           <a:xfrm>
-            <a:off x="329184" y="1865376"/>
-            <a:ext cx="7717536" cy="3889192"/>
+            <a:off x="274320" y="2031551"/>
+            <a:ext cx="7827264" cy="3343536"/>
           </a:xfrm>
           <a:prstGeom prst="rect">
             <a:avLst/>
@@ -4220,8 +5573,8 @@
         </p:nvSpPr>
         <p:spPr>
           <a:xfrm>
-            <a:off x="8430768" y="1847088"/>
-            <a:ext cx="3419856" cy="182880"/>
+            <a:off x="8430768" y="1837943"/>
+            <a:ext cx="3419856" cy="164592"/>
           </a:xfrm>
           <a:prstGeom prst="rect">
             <a:avLst/>
@@ -4259,8 +5612,8 @@
         </p:nvSpPr>
         <p:spPr>
           <a:xfrm>
-            <a:off x="8430768" y="2029967"/>
-            <a:ext cx="3419856" cy="219456"/>
+            <a:off x="8430768" y="2002536"/>
+            <a:ext cx="3419856" cy="201168"/>
           </a:xfrm>
           <a:prstGeom prst="rect">
             <a:avLst/>
@@ -4298,7 +5651,7 @@
         </p:nvSpPr>
         <p:spPr>
           <a:xfrm>
-            <a:off x="8430768" y="2267712"/>
+            <a:off x="8430768" y="2212848"/>
             <a:ext cx="3419856" cy="768096"/>
           </a:xfrm>
           <a:prstGeom prst="roundRect">
@@ -4345,8 +5698,8 @@
         </p:nvSpPr>
         <p:spPr>
           <a:xfrm>
-            <a:off x="8540496" y="2304288"/>
-            <a:ext cx="3200400" cy="182880"/>
+            <a:off x="8540496" y="2240279"/>
+            <a:ext cx="3200400" cy="164592"/>
           </a:xfrm>
           <a:prstGeom prst="rect">
             <a:avLst/>
@@ -4384,8 +5737,8 @@
         </p:nvSpPr>
         <p:spPr>
           <a:xfrm>
-            <a:off x="8540496" y="2590312"/>
-            <a:ext cx="3200400" cy="292608"/>
+            <a:off x="8540496" y="2535448"/>
+            <a:ext cx="3200400" cy="237744"/>
           </a:xfrm>
           <a:prstGeom prst="rect">
             <a:avLst/>
@@ -4423,7 +5776,7 @@
         </p:nvSpPr>
         <p:spPr>
           <a:xfrm>
-            <a:off x="8430768" y="3086100"/>
+            <a:off x="8430768" y="3044952"/>
             <a:ext cx="3419856" cy="768096"/>
           </a:xfrm>
           <a:prstGeom prst="roundRect">
@@ -4470,8 +5823,8 @@
         </p:nvSpPr>
         <p:spPr>
           <a:xfrm>
-            <a:off x="8540496" y="3122676"/>
-            <a:ext cx="3200400" cy="182880"/>
+            <a:off x="8540496" y="3072384"/>
+            <a:ext cx="3200400" cy="164592"/>
           </a:xfrm>
           <a:prstGeom prst="rect">
             <a:avLst/>
@@ -4509,8 +5862,8 @@
         </p:nvSpPr>
         <p:spPr>
           <a:xfrm>
-            <a:off x="8540496" y="3408700"/>
-            <a:ext cx="3200400" cy="292608"/>
+            <a:off x="8540496" y="3367552"/>
+            <a:ext cx="3200400" cy="237744"/>
           </a:xfrm>
           <a:prstGeom prst="rect">
             <a:avLst/>
@@ -4548,7 +5901,7 @@
         </p:nvSpPr>
         <p:spPr>
           <a:xfrm>
-            <a:off x="8430768" y="3904487"/>
+            <a:off x="8430768" y="3877056"/>
             <a:ext cx="3419856" cy="768096"/>
           </a:xfrm>
           <a:prstGeom prst="roundRect">
@@ -4595,8 +5948,8 @@
         </p:nvSpPr>
         <p:spPr>
           <a:xfrm>
-            <a:off x="8540496" y="3941063"/>
-            <a:ext cx="3200400" cy="182880"/>
+            <a:off x="8540496" y="3904488"/>
+            <a:ext cx="3200400" cy="164592"/>
           </a:xfrm>
           <a:prstGeom prst="rect">
             <a:avLst/>
@@ -4634,8 +5987,8 @@
         </p:nvSpPr>
         <p:spPr>
           <a:xfrm>
-            <a:off x="8540496" y="4227088"/>
-            <a:ext cx="3200400" cy="292608"/>
+            <a:off x="8540496" y="4199656"/>
+            <a:ext cx="3200400" cy="237744"/>
           </a:xfrm>
           <a:prstGeom prst="rect">
             <a:avLst/>
@@ -4673,7 +6026,7 @@
         </p:nvSpPr>
         <p:spPr>
           <a:xfrm>
-            <a:off x="8430768" y="4722875"/>
+            <a:off x="8430768" y="4709160"/>
             <a:ext cx="3419856" cy="768096"/>
           </a:xfrm>
           <a:prstGeom prst="roundRect">
@@ -4720,8 +6073,8 @@
         </p:nvSpPr>
         <p:spPr>
           <a:xfrm>
-            <a:off x="8540496" y="4759451"/>
-            <a:ext cx="3200400" cy="182880"/>
+            <a:off x="8540496" y="4736592"/>
+            <a:ext cx="3200400" cy="164592"/>
           </a:xfrm>
           <a:prstGeom prst="rect">
             <a:avLst/>
@@ -4759,8 +6112,8 @@
         </p:nvSpPr>
         <p:spPr>
           <a:xfrm>
-            <a:off x="8540496" y="5045476"/>
-            <a:ext cx="3200400" cy="292608"/>
+            <a:off x="8540496" y="5031760"/>
+            <a:ext cx="3200400" cy="237744"/>
           </a:xfrm>
           <a:prstGeom prst="rect">
             <a:avLst/>
@@ -5780,7 +7133,7 @@
         <p:spPr>
           <a:xfrm>
             <a:off x="201168" y="1024128"/>
-            <a:ext cx="2286000" cy="658368"/>
+            <a:ext cx="2300630" cy="658368"/>
           </a:xfrm>
           <a:prstGeom prst="roundRect">
             <a:avLst>
@@ -5826,8 +7179,8 @@
         </p:nvSpPr>
         <p:spPr>
           <a:xfrm>
-            <a:off x="292608" y="1060704"/>
-            <a:ext cx="2121408" cy="182880"/>
+            <a:off x="274320" y="1051560"/>
+            <a:ext cx="2172614" cy="164592"/>
           </a:xfrm>
           <a:prstGeom prst="rect">
             <a:avLst/>
@@ -5865,8 +7218,8 @@
         </p:nvSpPr>
         <p:spPr>
           <a:xfrm>
-            <a:off x="292608" y="1243584"/>
-            <a:ext cx="2121408" cy="219456"/>
+            <a:off x="274320" y="1243584"/>
+            <a:ext cx="2172614" cy="201168"/>
           </a:xfrm>
           <a:prstGeom prst="rect">
             <a:avLst/>
@@ -5904,8 +7257,8 @@
         </p:nvSpPr>
         <p:spPr>
           <a:xfrm>
-            <a:off x="2578608" y="1024128"/>
-            <a:ext cx="2286000" cy="658368"/>
+            <a:off x="2574950" y="1024128"/>
+            <a:ext cx="2300630" cy="658368"/>
           </a:xfrm>
           <a:prstGeom prst="roundRect">
             <a:avLst>
@@ -5951,8 +7304,8 @@
         </p:nvSpPr>
         <p:spPr>
           <a:xfrm>
-            <a:off x="2670048" y="1060704"/>
-            <a:ext cx="2121408" cy="182880"/>
+            <a:off x="2648102" y="1051560"/>
+            <a:ext cx="2172614" cy="164592"/>
           </a:xfrm>
           <a:prstGeom prst="rect">
             <a:avLst/>
@@ -5990,8 +7343,8 @@
         </p:nvSpPr>
         <p:spPr>
           <a:xfrm>
-            <a:off x="2670048" y="1243584"/>
-            <a:ext cx="2121408" cy="219456"/>
+            <a:off x="2648102" y="1243584"/>
+            <a:ext cx="2172614" cy="201168"/>
           </a:xfrm>
           <a:prstGeom prst="rect">
             <a:avLst/>
@@ -6029,8 +7382,8 @@
         </p:nvSpPr>
         <p:spPr>
           <a:xfrm>
-            <a:off x="4956048" y="1024128"/>
-            <a:ext cx="2286000" cy="658368"/>
+            <a:off x="4948732" y="1024128"/>
+            <a:ext cx="2300630" cy="658368"/>
           </a:xfrm>
           <a:prstGeom prst="roundRect">
             <a:avLst>
@@ -6076,8 +7429,8 @@
         </p:nvSpPr>
         <p:spPr>
           <a:xfrm>
-            <a:off x="5047488" y="1060704"/>
-            <a:ext cx="2121408" cy="182880"/>
+            <a:off x="5021884" y="1051560"/>
+            <a:ext cx="2172614" cy="164592"/>
           </a:xfrm>
           <a:prstGeom prst="rect">
             <a:avLst/>
@@ -6115,8 +7468,8 @@
         </p:nvSpPr>
         <p:spPr>
           <a:xfrm>
-            <a:off x="5047488" y="1243584"/>
-            <a:ext cx="2121408" cy="219456"/>
+            <a:off x="5021884" y="1243584"/>
+            <a:ext cx="2172614" cy="201168"/>
           </a:xfrm>
           <a:prstGeom prst="rect">
             <a:avLst/>
@@ -6154,8 +7507,8 @@
         </p:nvSpPr>
         <p:spPr>
           <a:xfrm>
-            <a:off x="5047488" y="1444752"/>
-            <a:ext cx="2121408" cy="164592"/>
+            <a:off x="5021884" y="1499616"/>
+            <a:ext cx="2172614" cy="164592"/>
           </a:xfrm>
           <a:prstGeom prst="rect">
             <a:avLst/>
@@ -6193,8 +7546,8 @@
         </p:nvSpPr>
         <p:spPr>
           <a:xfrm>
-            <a:off x="7333488" y="1024128"/>
-            <a:ext cx="2286000" cy="658368"/>
+            <a:off x="7322515" y="1024128"/>
+            <a:ext cx="2300630" cy="658368"/>
           </a:xfrm>
           <a:prstGeom prst="roundRect">
             <a:avLst>
@@ -6240,8 +7593,8 @@
         </p:nvSpPr>
         <p:spPr>
           <a:xfrm>
-            <a:off x="7424928" y="1060704"/>
-            <a:ext cx="2121408" cy="182880"/>
+            <a:off x="7395667" y="1051560"/>
+            <a:ext cx="2172614" cy="164592"/>
           </a:xfrm>
           <a:prstGeom prst="rect">
             <a:avLst/>
@@ -6279,8 +7632,8 @@
         </p:nvSpPr>
         <p:spPr>
           <a:xfrm>
-            <a:off x="7424928" y="1243584"/>
-            <a:ext cx="2121408" cy="219456"/>
+            <a:off x="7395667" y="1243584"/>
+            <a:ext cx="2172614" cy="201168"/>
           </a:xfrm>
           <a:prstGeom prst="rect">
             <a:avLst/>
@@ -6318,8 +7671,8 @@
         </p:nvSpPr>
         <p:spPr>
           <a:xfrm>
-            <a:off x="7424928" y="1444752"/>
-            <a:ext cx="2121408" cy="164592"/>
+            <a:off x="7395667" y="1499616"/>
+            <a:ext cx="2172614" cy="164592"/>
           </a:xfrm>
           <a:prstGeom prst="rect">
             <a:avLst/>
@@ -6357,8 +7710,8 @@
         </p:nvSpPr>
         <p:spPr>
           <a:xfrm>
-            <a:off x="9710928" y="1024128"/>
-            <a:ext cx="2286000" cy="658368"/>
+            <a:off x="9696297" y="1024128"/>
+            <a:ext cx="2300630" cy="658368"/>
           </a:xfrm>
           <a:prstGeom prst="roundRect">
             <a:avLst>
@@ -6404,8 +7757,8 @@
         </p:nvSpPr>
         <p:spPr>
           <a:xfrm>
-            <a:off x="9802368" y="1060704"/>
-            <a:ext cx="2121408" cy="182880"/>
+            <a:off x="9769449" y="1051560"/>
+            <a:ext cx="2172614" cy="164592"/>
           </a:xfrm>
           <a:prstGeom prst="rect">
             <a:avLst/>
@@ -6443,8 +7796,8 @@
         </p:nvSpPr>
         <p:spPr>
           <a:xfrm>
-            <a:off x="9802368" y="1243584"/>
-            <a:ext cx="2121408" cy="219456"/>
+            <a:off x="9769449" y="1243584"/>
+            <a:ext cx="2172614" cy="201168"/>
           </a:xfrm>
           <a:prstGeom prst="rect">
             <a:avLst/>
@@ -6482,8 +7835,8 @@
         </p:nvSpPr>
         <p:spPr>
           <a:xfrm>
-            <a:off x="9802368" y="1444752"/>
-            <a:ext cx="2121408" cy="164592"/>
+            <a:off x="9769449" y="1499616"/>
+            <a:ext cx="2172614" cy="164592"/>
           </a:xfrm>
           <a:prstGeom prst="rect">
             <a:avLst/>
@@ -6574,8 +7927,8 @@
         </p:blipFill>
         <p:spPr>
           <a:xfrm>
-            <a:off x="329184" y="1865376"/>
-            <a:ext cx="7717536" cy="3884121"/>
+            <a:off x="274320" y="2036687"/>
+            <a:ext cx="7827264" cy="3333264"/>
           </a:xfrm>
           <a:prstGeom prst="rect">
             <a:avLst/>
@@ -6637,8 +7990,8 @@
         </p:nvSpPr>
         <p:spPr>
           <a:xfrm>
-            <a:off x="8430768" y="1847088"/>
-            <a:ext cx="3419856" cy="182880"/>
+            <a:off x="8430768" y="1837943"/>
+            <a:ext cx="3419856" cy="164592"/>
           </a:xfrm>
           <a:prstGeom prst="rect">
             <a:avLst/>
@@ -6676,8 +8029,8 @@
         </p:nvSpPr>
         <p:spPr>
           <a:xfrm>
-            <a:off x="8430768" y="2029967"/>
-            <a:ext cx="3419856" cy="219456"/>
+            <a:off x="8430768" y="2002536"/>
+            <a:ext cx="3419856" cy="201168"/>
           </a:xfrm>
           <a:prstGeom prst="rect">
             <a:avLst/>
@@ -6715,8 +8068,8 @@
         </p:nvSpPr>
         <p:spPr>
           <a:xfrm>
-            <a:off x="8430768" y="2267712"/>
-            <a:ext cx="3419856" cy="618134"/>
+            <a:off x="8430768" y="2212848"/>
+            <a:ext cx="3419856" cy="629107"/>
           </a:xfrm>
           <a:prstGeom prst="roundRect">
             <a:avLst>
@@ -6762,8 +8115,8 @@
         </p:nvSpPr>
         <p:spPr>
           <a:xfrm>
-            <a:off x="8540496" y="2304288"/>
-            <a:ext cx="3200400" cy="182880"/>
+            <a:off x="8540496" y="2240279"/>
+            <a:ext cx="3200400" cy="164592"/>
           </a:xfrm>
           <a:prstGeom prst="rect">
             <a:avLst/>
@@ -6801,8 +8154,8 @@
         </p:nvSpPr>
         <p:spPr>
           <a:xfrm>
-            <a:off x="8540496" y="2527328"/>
-            <a:ext cx="3200400" cy="292608"/>
+            <a:off x="8540496" y="2477073"/>
+            <a:ext cx="3200400" cy="237744"/>
           </a:xfrm>
           <a:prstGeom prst="rect">
             <a:avLst/>
@@ -6840,8 +8193,8 @@
         </p:nvSpPr>
         <p:spPr>
           <a:xfrm>
-            <a:off x="8430768" y="2922422"/>
-            <a:ext cx="3419856" cy="618134"/>
+            <a:off x="8430768" y="2878531"/>
+            <a:ext cx="3419856" cy="629107"/>
           </a:xfrm>
           <a:prstGeom prst="roundRect">
             <a:avLst>
@@ -6887,8 +8240,8 @@
         </p:nvSpPr>
         <p:spPr>
           <a:xfrm>
-            <a:off x="8540496" y="2958998"/>
-            <a:ext cx="3200400" cy="182880"/>
+            <a:off x="8540496" y="2905963"/>
+            <a:ext cx="3200400" cy="164592"/>
           </a:xfrm>
           <a:prstGeom prst="rect">
             <a:avLst/>
@@ -6926,8 +8279,8 @@
         </p:nvSpPr>
         <p:spPr>
           <a:xfrm>
-            <a:off x="8540496" y="3182038"/>
-            <a:ext cx="3200400" cy="292608"/>
+            <a:off x="8540496" y="3142756"/>
+            <a:ext cx="3200400" cy="237744"/>
           </a:xfrm>
           <a:prstGeom prst="rect">
             <a:avLst/>
@@ -6965,8 +8318,8 @@
         </p:nvSpPr>
         <p:spPr>
           <a:xfrm>
-            <a:off x="8430768" y="3577132"/>
-            <a:ext cx="3419856" cy="618134"/>
+            <a:off x="8430768" y="3544214"/>
+            <a:ext cx="3419856" cy="629107"/>
           </a:xfrm>
           <a:prstGeom prst="roundRect">
             <a:avLst>
@@ -7012,8 +8365,8 @@
         </p:nvSpPr>
         <p:spPr>
           <a:xfrm>
-            <a:off x="8540496" y="3613708"/>
-            <a:ext cx="3200400" cy="182880"/>
+            <a:off x="8540496" y="3571646"/>
+            <a:ext cx="3200400" cy="164592"/>
           </a:xfrm>
           <a:prstGeom prst="rect">
             <a:avLst/>
@@ -7051,8 +8404,8 @@
         </p:nvSpPr>
         <p:spPr>
           <a:xfrm>
-            <a:off x="8540496" y="3836749"/>
-            <a:ext cx="3200400" cy="292608"/>
+            <a:off x="8540496" y="3808439"/>
+            <a:ext cx="3200400" cy="237744"/>
           </a:xfrm>
           <a:prstGeom prst="rect">
             <a:avLst/>
@@ -7090,8 +8443,8 @@
         </p:nvSpPr>
         <p:spPr>
           <a:xfrm>
-            <a:off x="8430768" y="4231843"/>
-            <a:ext cx="3419856" cy="618134"/>
+            <a:off x="8430768" y="4209897"/>
+            <a:ext cx="3419856" cy="629107"/>
           </a:xfrm>
           <a:prstGeom prst="roundRect">
             <a:avLst>
@@ -7137,8 +8490,8 @@
         </p:nvSpPr>
         <p:spPr>
           <a:xfrm>
-            <a:off x="8540496" y="4268419"/>
-            <a:ext cx="3200400" cy="182880"/>
+            <a:off x="8540496" y="4237329"/>
+            <a:ext cx="3200400" cy="164592"/>
           </a:xfrm>
           <a:prstGeom prst="rect">
             <a:avLst/>
@@ -7176,8 +8529,8 @@
         </p:nvSpPr>
         <p:spPr>
           <a:xfrm>
-            <a:off x="8540496" y="4491459"/>
-            <a:ext cx="3200400" cy="292608"/>
+            <a:off x="8540496" y="4474122"/>
+            <a:ext cx="3200400" cy="237744"/>
           </a:xfrm>
           <a:prstGeom prst="rect">
             <a:avLst/>
@@ -7215,8 +8568,8 @@
         </p:nvSpPr>
         <p:spPr>
           <a:xfrm>
-            <a:off x="8430768" y="4886553"/>
-            <a:ext cx="3419856" cy="618134"/>
+            <a:off x="8430768" y="4875580"/>
+            <a:ext cx="3419856" cy="629107"/>
           </a:xfrm>
           <a:prstGeom prst="roundRect">
             <a:avLst>
@@ -7262,8 +8615,8 @@
         </p:nvSpPr>
         <p:spPr>
           <a:xfrm>
-            <a:off x="8540496" y="4923129"/>
-            <a:ext cx="3200400" cy="182880"/>
+            <a:off x="8540496" y="4903012"/>
+            <a:ext cx="3200400" cy="164592"/>
           </a:xfrm>
           <a:prstGeom prst="rect">
             <a:avLst/>
@@ -7301,8 +8654,8 @@
         </p:nvSpPr>
         <p:spPr>
           <a:xfrm>
-            <a:off x="8540496" y="5146170"/>
-            <a:ext cx="3200400" cy="292608"/>
+            <a:off x="8540496" y="5139805"/>
+            <a:ext cx="3200400" cy="237744"/>
           </a:xfrm>
           <a:prstGeom prst="rect">
             <a:avLst/>
@@ -7688,7 +9041,7 @@
         <p:spPr>
           <a:xfrm>
             <a:off x="201168" y="1024128"/>
-            <a:ext cx="5852160" cy="658368"/>
+            <a:ext cx="5861304" cy="658368"/>
           </a:xfrm>
           <a:prstGeom prst="roundRect">
             <a:avLst>
@@ -7734,8 +9087,8 @@
         </p:nvSpPr>
         <p:spPr>
           <a:xfrm>
-            <a:off x="292608" y="1060704"/>
-            <a:ext cx="5687568" cy="182880"/>
+            <a:off x="274320" y="1051560"/>
+            <a:ext cx="5733288" cy="164592"/>
           </a:xfrm>
           <a:prstGeom prst="rect">
             <a:avLst/>
@@ -7773,8 +9126,8 @@
         </p:nvSpPr>
         <p:spPr>
           <a:xfrm>
-            <a:off x="292608" y="1243584"/>
-            <a:ext cx="5687568" cy="219456"/>
+            <a:off x="274320" y="1243584"/>
+            <a:ext cx="5733288" cy="201168"/>
           </a:xfrm>
           <a:prstGeom prst="rect">
             <a:avLst/>
@@ -7812,8 +9165,8 @@
         </p:nvSpPr>
         <p:spPr>
           <a:xfrm>
-            <a:off x="6144768" y="1024128"/>
-            <a:ext cx="5852160" cy="658368"/>
+            <a:off x="6135624" y="1024128"/>
+            <a:ext cx="5861304" cy="658368"/>
           </a:xfrm>
           <a:prstGeom prst="roundRect">
             <a:avLst>
@@ -7859,8 +9212,8 @@
         </p:nvSpPr>
         <p:spPr>
           <a:xfrm>
-            <a:off x="6236207" y="1060704"/>
-            <a:ext cx="5687568" cy="182880"/>
+            <a:off x="6208776" y="1051560"/>
+            <a:ext cx="5733288" cy="164592"/>
           </a:xfrm>
           <a:prstGeom prst="rect">
             <a:avLst/>
@@ -7898,8 +9251,8 @@
         </p:nvSpPr>
         <p:spPr>
           <a:xfrm>
-            <a:off x="6236207" y="1243584"/>
-            <a:ext cx="5687568" cy="219456"/>
+            <a:off x="6208776" y="1243584"/>
+            <a:ext cx="5733288" cy="201168"/>
           </a:xfrm>
           <a:prstGeom prst="rect">
             <a:avLst/>
@@ -7937,8 +9290,8 @@
         </p:nvSpPr>
         <p:spPr>
           <a:xfrm>
-            <a:off x="6236207" y="1444752"/>
-            <a:ext cx="5687568" cy="164592"/>
+            <a:off x="6208776" y="1499616"/>
+            <a:ext cx="5733288" cy="164592"/>
           </a:xfrm>
           <a:prstGeom prst="rect">
             <a:avLst/>
@@ -8029,8 +9382,8 @@
         </p:blipFill>
         <p:spPr>
           <a:xfrm>
-            <a:off x="329184" y="1865376"/>
-            <a:ext cx="7717536" cy="3889192"/>
+            <a:off x="274320" y="2031551"/>
+            <a:ext cx="7827264" cy="3343536"/>
           </a:xfrm>
           <a:prstGeom prst="rect">
             <a:avLst/>
@@ -8092,8 +9445,8 @@
         </p:nvSpPr>
         <p:spPr>
           <a:xfrm>
-            <a:off x="8430768" y="1847088"/>
-            <a:ext cx="3419856" cy="182880"/>
+            <a:off x="8430768" y="1837943"/>
+            <a:ext cx="3419856" cy="164592"/>
           </a:xfrm>
           <a:prstGeom prst="rect">
             <a:avLst/>
@@ -8131,8 +9484,8 @@
         </p:nvSpPr>
         <p:spPr>
           <a:xfrm>
-            <a:off x="8430768" y="2029967"/>
-            <a:ext cx="3419856" cy="219456"/>
+            <a:off x="8430768" y="2002536"/>
+            <a:ext cx="3419856" cy="201168"/>
           </a:xfrm>
           <a:prstGeom prst="rect">
             <a:avLst/>
@@ -8170,7 +9523,7 @@
         </p:nvSpPr>
         <p:spPr>
           <a:xfrm>
-            <a:off x="8430768" y="2267712"/>
+            <a:off x="8430768" y="2212848"/>
             <a:ext cx="3419856" cy="768096"/>
           </a:xfrm>
           <a:prstGeom prst="roundRect">
@@ -8217,8 +9570,8 @@
         </p:nvSpPr>
         <p:spPr>
           <a:xfrm>
-            <a:off x="8540496" y="2304288"/>
-            <a:ext cx="3200400" cy="182880"/>
+            <a:off x="8540496" y="2240279"/>
+            <a:ext cx="3200400" cy="164592"/>
           </a:xfrm>
           <a:prstGeom prst="rect">
             <a:avLst/>
@@ -8256,8 +9609,8 @@
         </p:nvSpPr>
         <p:spPr>
           <a:xfrm>
-            <a:off x="8540496" y="2590312"/>
-            <a:ext cx="3200400" cy="292608"/>
+            <a:off x="8540496" y="2535448"/>
+            <a:ext cx="3200400" cy="237744"/>
           </a:xfrm>
           <a:prstGeom prst="rect">
             <a:avLst/>
@@ -8295,7 +9648,7 @@
         </p:nvSpPr>
         <p:spPr>
           <a:xfrm>
-            <a:off x="8430768" y="3904487"/>
+            <a:off x="8430768" y="3877056"/>
             <a:ext cx="3419856" cy="768096"/>
           </a:xfrm>
           <a:prstGeom prst="roundRect">
@@ -8342,8 +9695,8 @@
         </p:nvSpPr>
         <p:spPr>
           <a:xfrm>
-            <a:off x="8540496" y="3941063"/>
-            <a:ext cx="3200400" cy="182880"/>
+            <a:off x="8540496" y="3904488"/>
+            <a:ext cx="3200400" cy="164592"/>
           </a:xfrm>
           <a:prstGeom prst="rect">
             <a:avLst/>
@@ -8381,8 +9734,8 @@
         </p:nvSpPr>
         <p:spPr>
           <a:xfrm>
-            <a:off x="8540496" y="4227088"/>
-            <a:ext cx="3200400" cy="292608"/>
+            <a:off x="8540496" y="4199656"/>
+            <a:ext cx="3200400" cy="237744"/>
           </a:xfrm>
           <a:prstGeom prst="rect">
             <a:avLst/>
@@ -8768,7 +10121,7 @@
         <p:spPr>
           <a:xfrm>
             <a:off x="201168" y="1024128"/>
-            <a:ext cx="5852160" cy="658368"/>
+            <a:ext cx="5861304" cy="658368"/>
           </a:xfrm>
           <a:prstGeom prst="roundRect">
             <a:avLst>
@@ -8814,8 +10167,8 @@
         </p:nvSpPr>
         <p:spPr>
           <a:xfrm>
-            <a:off x="292608" y="1060704"/>
-            <a:ext cx="5687568" cy="182880"/>
+            <a:off x="274320" y="1051560"/>
+            <a:ext cx="5733288" cy="164592"/>
           </a:xfrm>
           <a:prstGeom prst="rect">
             <a:avLst/>
@@ -8853,8 +10206,8 @@
         </p:nvSpPr>
         <p:spPr>
           <a:xfrm>
-            <a:off x="292608" y="1243584"/>
-            <a:ext cx="5687568" cy="219456"/>
+            <a:off x="274320" y="1243584"/>
+            <a:ext cx="5733288" cy="201168"/>
           </a:xfrm>
           <a:prstGeom prst="rect">
             <a:avLst/>
@@ -8886,53 +10239,14 @@
       </p:sp>
       <p:sp>
         <p:nvSpPr>
-          <p:cNvPr id="10" name="TextBox 9"/>
-          <p:cNvSpPr txBox="1"/>
-          <p:nvPr/>
-        </p:nvSpPr>
-        <p:spPr>
-          <a:xfrm>
-            <a:off x="292608" y="1444752"/>
-            <a:ext cx="5687568" cy="164592"/>
-          </a:xfrm>
-          <a:prstGeom prst="rect">
-            <a:avLst/>
-          </a:prstGeom>
-          <a:noFill/>
-        </p:spPr>
-        <p:txBody>
-          <a:bodyPr wrap="square">
-            <a:spAutoFit/>
-          </a:bodyPr>
-          <a:lstStyle/>
-          <a:p>
-            <a:pPr algn="l">
-              <a:spcAft>
-                <a:spcPts val="300"/>
-              </a:spcAft>
-            </a:pPr>
-            <a:r>
-              <a:rPr sz="1000" b="0">
-                <a:solidFill>
-                  <a:srgbClr val="5A5A5A"/>
-                </a:solidFill>
-                <a:latin typeface="Calibri"/>
-              </a:rPr>
-              <a:t>control 16/07</a:t>
-            </a:r>
-          </a:p>
-        </p:txBody>
-      </p:sp>
-      <p:sp>
-        <p:nvSpPr>
-          <p:cNvPr id="11" name="Rounded Rectangle 10"/>
+          <p:cNvPr id="10" name="Rounded Rectangle 9"/>
           <p:cNvSpPr/>
           <p:nvPr/>
         </p:nvSpPr>
         <p:spPr>
           <a:xfrm>
-            <a:off x="6144768" y="1024128"/>
-            <a:ext cx="5852160" cy="658368"/>
+            <a:off x="6135624" y="1024128"/>
+            <a:ext cx="5861304" cy="658368"/>
           </a:xfrm>
           <a:prstGeom prst="roundRect">
             <a:avLst>
@@ -8972,39 +10286,78 @@
       </p:sp>
       <p:sp>
         <p:nvSpPr>
+          <p:cNvPr id="11" name="TextBox 10"/>
+          <p:cNvSpPr txBox="1"/>
+          <p:nvPr/>
+        </p:nvSpPr>
+        <p:spPr>
+          <a:xfrm>
+            <a:off x="6208776" y="1051560"/>
+            <a:ext cx="5733288" cy="164592"/>
+          </a:xfrm>
+          <a:prstGeom prst="rect">
+            <a:avLst/>
+          </a:prstGeom>
+          <a:noFill/>
+        </p:spPr>
+        <p:txBody>
+          <a:bodyPr wrap="square">
+            <a:spAutoFit/>
+          </a:bodyPr>
+          <a:lstStyle/>
+          <a:p>
+            <a:pPr algn="l">
+              <a:spcAft>
+                <a:spcPts val="300"/>
+              </a:spcAft>
+            </a:pPr>
+            <a:r>
+              <a:rPr sz="1000" b="1">
+                <a:solidFill>
+                  <a:srgbClr val="C9A227"/>
+                </a:solidFill>
+                <a:latin typeface="Calibri"/>
+              </a:rPr>
+              <a:t>000025-17</a:t>
+            </a:r>
+          </a:p>
+        </p:txBody>
+      </p:sp>
+      <p:sp>
+        <p:nvSpPr>
           <p:cNvPr id="12" name="TextBox 11"/>
           <p:cNvSpPr txBox="1"/>
           <p:nvPr/>
         </p:nvSpPr>
         <p:spPr>
           <a:xfrm>
-            <a:off x="6236207" y="1060704"/>
-            <a:ext cx="5687568" cy="182880"/>
-          </a:xfrm>
-          <a:prstGeom prst="rect">
-            <a:avLst/>
-          </a:prstGeom>
-          <a:noFill/>
-        </p:spPr>
-        <p:txBody>
-          <a:bodyPr wrap="square">
-            <a:spAutoFit/>
-          </a:bodyPr>
-          <a:lstStyle/>
-          <a:p>
-            <a:pPr algn="l">
-              <a:spcAft>
-                <a:spcPts val="300"/>
-              </a:spcAft>
-            </a:pPr>
-            <a:r>
-              <a:rPr sz="1000" b="1">
-                <a:solidFill>
-                  <a:srgbClr val="C9A227"/>
-                </a:solidFill>
-                <a:latin typeface="Calibri"/>
-              </a:rPr>
-              <a:t>000025-17</a:t>
+            <a:off x="6208776" y="1243584"/>
+            <a:ext cx="5733288" cy="201168"/>
+          </a:xfrm>
+          <a:prstGeom prst="rect">
+            <a:avLst/>
+          </a:prstGeom>
+          <a:noFill/>
+        </p:spPr>
+        <p:txBody>
+          <a:bodyPr wrap="square">
+            <a:spAutoFit/>
+          </a:bodyPr>
+          <a:lstStyle/>
+          <a:p>
+            <a:pPr algn="l">
+              <a:spcAft>
+                <a:spcPts val="300"/>
+              </a:spcAft>
+            </a:pPr>
+            <a:r>
+              <a:rPr sz="1200" b="1">
+                <a:solidFill>
+                  <a:srgbClr val="0D3B66"/>
+                </a:solidFill>
+                <a:latin typeface="Calibri"/>
+              </a:rPr>
+              <a:t>San Ignacio 300</a:t>
             </a:r>
           </a:p>
         </p:txBody>
@@ -9017,47 +10370,8 @@
         </p:nvSpPr>
         <p:spPr>
           <a:xfrm>
-            <a:off x="6236207" y="1243584"/>
-            <a:ext cx="5687568" cy="219456"/>
-          </a:xfrm>
-          <a:prstGeom prst="rect">
-            <a:avLst/>
-          </a:prstGeom>
-          <a:noFill/>
-        </p:spPr>
-        <p:txBody>
-          <a:bodyPr wrap="square">
-            <a:spAutoFit/>
-          </a:bodyPr>
-          <a:lstStyle/>
-          <a:p>
-            <a:pPr algn="l">
-              <a:spcAft>
-                <a:spcPts val="300"/>
-              </a:spcAft>
-            </a:pPr>
-            <a:r>
-              <a:rPr sz="1200" b="1">
-                <a:solidFill>
-                  <a:srgbClr val="0D3B66"/>
-                </a:solidFill>
-                <a:latin typeface="Calibri"/>
-              </a:rPr>
-              <a:t>San Ignacio 300</a:t>
-            </a:r>
-          </a:p>
-        </p:txBody>
-      </p:sp>
-      <p:sp>
-        <p:nvSpPr>
-          <p:cNvPr id="14" name="TextBox 13"/>
-          <p:cNvSpPr txBox="1"/>
-          <p:nvPr/>
-        </p:nvSpPr>
-        <p:spPr>
-          <a:xfrm>
-            <a:off x="6236207" y="1444752"/>
-            <a:ext cx="5687568" cy="164592"/>
+            <a:off x="6208776" y="1499616"/>
+            <a:ext cx="5733288" cy="164592"/>
           </a:xfrm>
           <a:prstGeom prst="rect">
             <a:avLst/>
@@ -9089,7 +10403,7 @@
       </p:sp>
       <p:sp>
         <p:nvSpPr>
-          <p:cNvPr id="15" name="Rounded Rectangle 14"/>
+          <p:cNvPr id="14" name="Rounded Rectangle 13"/>
           <p:cNvSpPr/>
           <p:nvPr/>
         </p:nvSpPr>
@@ -9134,7 +10448,7 @@
       </p:sp>
       <p:pic>
         <p:nvPicPr>
-          <p:cNvPr id="16" name="Picture 15" descr="bom_mensual_may_ago.png"/>
+          <p:cNvPr id="15" name="Picture 14" descr="bom_mensual_may_ago.png"/>
           <p:cNvPicPr>
             <a:picLocks noChangeAspect="1"/>
           </p:cNvPicPr>
@@ -9148,8 +10462,8 @@
         </p:blipFill>
         <p:spPr>
           <a:xfrm>
-            <a:off x="329184" y="1865376"/>
-            <a:ext cx="7717536" cy="3889192"/>
+            <a:off x="274320" y="2031551"/>
+            <a:ext cx="7827264" cy="3343536"/>
           </a:xfrm>
           <a:prstGeom prst="rect">
             <a:avLst/>
@@ -9158,7 +10472,7 @@
       </p:pic>
       <p:sp>
         <p:nvSpPr>
-          <p:cNvPr id="17" name="Rounded Rectangle 16"/>
+          <p:cNvPr id="16" name="Rounded Rectangle 15"/>
           <p:cNvSpPr/>
           <p:nvPr/>
         </p:nvSpPr>
@@ -9205,53 +10519,53 @@
       </p:sp>
       <p:sp>
         <p:nvSpPr>
+          <p:cNvPr id="17" name="TextBox 16"/>
+          <p:cNvSpPr txBox="1"/>
+          <p:nvPr/>
+        </p:nvSpPr>
+        <p:spPr>
+          <a:xfrm>
+            <a:off x="8430768" y="1837943"/>
+            <a:ext cx="3419856" cy="164592"/>
+          </a:xfrm>
+          <a:prstGeom prst="rect">
+            <a:avLst/>
+          </a:prstGeom>
+          <a:noFill/>
+        </p:spPr>
+        <p:txBody>
+          <a:bodyPr wrap="square">
+            <a:spAutoFit/>
+          </a:bodyPr>
+          <a:lstStyle/>
+          <a:p>
+            <a:pPr algn="l">
+              <a:spcAft>
+                <a:spcPts val="300"/>
+              </a:spcAft>
+            </a:pPr>
+            <a:r>
+              <a:rPr sz="1100" b="1">
+                <a:solidFill>
+                  <a:srgbClr val="1F77B4"/>
+                </a:solidFill>
+                <a:latin typeface="Calibri"/>
+              </a:rPr>
+              <a:t>JULIO · último mes cerrado</a:t>
+            </a:r>
+          </a:p>
+        </p:txBody>
+      </p:sp>
+      <p:sp>
+        <p:nvSpPr>
           <p:cNvPr id="18" name="TextBox 17"/>
           <p:cNvSpPr txBox="1"/>
           <p:nvPr/>
         </p:nvSpPr>
         <p:spPr>
           <a:xfrm>
-            <a:off x="8430768" y="1847088"/>
-            <a:ext cx="3419856" cy="182880"/>
-          </a:xfrm>
-          <a:prstGeom prst="rect">
-            <a:avLst/>
-          </a:prstGeom>
-          <a:noFill/>
-        </p:spPr>
-        <p:txBody>
-          <a:bodyPr wrap="square">
-            <a:spAutoFit/>
-          </a:bodyPr>
-          <a:lstStyle/>
-          <a:p>
-            <a:pPr algn="l">
-              <a:spcAft>
-                <a:spcPts val="300"/>
-              </a:spcAft>
-            </a:pPr>
-            <a:r>
-              <a:rPr sz="1100" b="1">
-                <a:solidFill>
-                  <a:srgbClr val="1F77B4"/>
-                </a:solidFill>
-                <a:latin typeface="Calibri"/>
-              </a:rPr>
-              <a:t>JULIO · último mes cerrado</a:t>
-            </a:r>
-          </a:p>
-        </p:txBody>
-      </p:sp>
-      <p:sp>
-        <p:nvSpPr>
-          <p:cNvPr id="19" name="TextBox 18"/>
-          <p:cNvSpPr txBox="1"/>
-          <p:nvPr/>
-        </p:nvSpPr>
-        <p:spPr>
-          <a:xfrm>
-            <a:off x="8430768" y="2029967"/>
-            <a:ext cx="3419856" cy="219456"/>
+            <a:off x="8430768" y="2002536"/>
+            <a:ext cx="3419856" cy="201168"/>
           </a:xfrm>
           <a:prstGeom prst="rect">
             <a:avLst/>
@@ -9283,13 +10597,13 @@
       </p:sp>
       <p:sp>
         <p:nvSpPr>
-          <p:cNvPr id="20" name="Rounded Rectangle 19"/>
+          <p:cNvPr id="19" name="Rounded Rectangle 18"/>
           <p:cNvSpPr/>
           <p:nvPr/>
         </p:nvSpPr>
         <p:spPr>
           <a:xfrm>
-            <a:off x="8430768" y="2267712"/>
+            <a:off x="8430768" y="2212848"/>
             <a:ext cx="3419856" cy="768096"/>
           </a:xfrm>
           <a:prstGeom prst="roundRect">
@@ -9330,77 +10644,77 @@
       </p:sp>
       <p:sp>
         <p:nvSpPr>
+          <p:cNvPr id="20" name="TextBox 19"/>
+          <p:cNvSpPr txBox="1"/>
+          <p:nvPr/>
+        </p:nvSpPr>
+        <p:spPr>
+          <a:xfrm>
+            <a:off x="8540496" y="2240279"/>
+            <a:ext cx="3200400" cy="164592"/>
+          </a:xfrm>
+          <a:prstGeom prst="rect">
+            <a:avLst/>
+          </a:prstGeom>
+          <a:noFill/>
+        </p:spPr>
+        <p:txBody>
+          <a:bodyPr wrap="square">
+            <a:spAutoFit/>
+          </a:bodyPr>
+          <a:lstStyle/>
+          <a:p>
+            <a:pPr algn="l">
+              <a:spcAft>
+                <a:spcPts val="300"/>
+              </a:spcAft>
+            </a:pPr>
+            <a:r>
+              <a:rPr sz="1300" b="1">
+                <a:solidFill>
+                  <a:srgbClr val="0D3B66"/>
+                </a:solidFill>
+                <a:latin typeface="Calibri"/>
+              </a:rPr>
+              <a:t>San Ignacio 500</a:t>
+            </a:r>
+          </a:p>
+        </p:txBody>
+      </p:sp>
+      <p:sp>
+        <p:nvSpPr>
           <p:cNvPr id="21" name="TextBox 20"/>
           <p:cNvSpPr txBox="1"/>
           <p:nvPr/>
         </p:nvSpPr>
         <p:spPr>
           <a:xfrm>
-            <a:off x="8540496" y="2304288"/>
-            <a:ext cx="3200400" cy="182880"/>
-          </a:xfrm>
-          <a:prstGeom prst="rect">
-            <a:avLst/>
-          </a:prstGeom>
-          <a:noFill/>
-        </p:spPr>
-        <p:txBody>
-          <a:bodyPr wrap="square">
-            <a:spAutoFit/>
-          </a:bodyPr>
-          <a:lstStyle/>
-          <a:p>
-            <a:pPr algn="l">
-              <a:spcAft>
-                <a:spcPts val="300"/>
-              </a:spcAft>
-            </a:pPr>
-            <a:r>
-              <a:rPr sz="1300" b="1">
+            <a:off x="8540496" y="2535448"/>
+            <a:ext cx="3200400" cy="237744"/>
+          </a:xfrm>
+          <a:prstGeom prst="rect">
+            <a:avLst/>
+          </a:prstGeom>
+          <a:noFill/>
+        </p:spPr>
+        <p:txBody>
+          <a:bodyPr wrap="square">
+            <a:spAutoFit/>
+          </a:bodyPr>
+          <a:lstStyle/>
+          <a:p>
+            <a:pPr algn="l">
+              <a:spcAft>
+                <a:spcPts val="300"/>
+              </a:spcAft>
+            </a:pPr>
+            <a:r>
+              <a:rPr sz="1600" b="1">
                 <a:solidFill>
                   <a:srgbClr val="0D3B66"/>
                 </a:solidFill>
                 <a:latin typeface="Calibri"/>
               </a:rPr>
-              <a:t>San Ignacio 500</a:t>
-            </a:r>
-          </a:p>
-        </p:txBody>
-      </p:sp>
-      <p:sp>
-        <p:nvSpPr>
-          <p:cNvPr id="22" name="TextBox 21"/>
-          <p:cNvSpPr txBox="1"/>
-          <p:nvPr/>
-        </p:nvSpPr>
-        <p:spPr>
-          <a:xfrm>
-            <a:off x="8540496" y="2590312"/>
-            <a:ext cx="3200400" cy="292608"/>
-          </a:xfrm>
-          <a:prstGeom prst="rect">
-            <a:avLst/>
-          </a:prstGeom>
-          <a:noFill/>
-        </p:spPr>
-        <p:txBody>
-          <a:bodyPr wrap="square">
-            <a:spAutoFit/>
-          </a:bodyPr>
-          <a:lstStyle/>
-          <a:p>
-            <a:pPr algn="l">
-              <a:spcAft>
-                <a:spcPts val="300"/>
-              </a:spcAft>
-            </a:pPr>
-            <a:r>
-              <a:rPr sz="1600" b="1">
-                <a:solidFill>
-                  <a:srgbClr val="0D3B66"/>
-                </a:solidFill>
-                <a:latin typeface="Calibri"/>
-              </a:rPr>
               <a:t>4.067 m³    79 %</a:t>
             </a:r>
           </a:p>
@@ -9408,13 +10722,13 @@
       </p:sp>
       <p:sp>
         <p:nvSpPr>
-          <p:cNvPr id="23" name="Rounded Rectangle 22"/>
+          <p:cNvPr id="22" name="Rounded Rectangle 21"/>
           <p:cNvSpPr/>
           <p:nvPr/>
         </p:nvSpPr>
         <p:spPr>
           <a:xfrm>
-            <a:off x="8430768" y="3904487"/>
+            <a:off x="8430768" y="3877056"/>
             <a:ext cx="3419856" cy="768096"/>
           </a:xfrm>
           <a:prstGeom prst="roundRect">
@@ -9455,53 +10769,53 @@
       </p:sp>
       <p:sp>
         <p:nvSpPr>
+          <p:cNvPr id="23" name="TextBox 22"/>
+          <p:cNvSpPr txBox="1"/>
+          <p:nvPr/>
+        </p:nvSpPr>
+        <p:spPr>
+          <a:xfrm>
+            <a:off x="8540496" y="3904488"/>
+            <a:ext cx="3200400" cy="164592"/>
+          </a:xfrm>
+          <a:prstGeom prst="rect">
+            <a:avLst/>
+          </a:prstGeom>
+          <a:noFill/>
+        </p:spPr>
+        <p:txBody>
+          <a:bodyPr wrap="square">
+            <a:spAutoFit/>
+          </a:bodyPr>
+          <a:lstStyle/>
+          <a:p>
+            <a:pPr algn="l">
+              <a:spcAft>
+                <a:spcPts val="300"/>
+              </a:spcAft>
+            </a:pPr>
+            <a:r>
+              <a:rPr sz="1300" b="1">
+                <a:solidFill>
+                  <a:srgbClr val="C45C26"/>
+                </a:solidFill>
+                <a:latin typeface="Calibri"/>
+              </a:rPr>
+              <a:t>San Ignacio 300</a:t>
+            </a:r>
+          </a:p>
+        </p:txBody>
+      </p:sp>
+      <p:sp>
+        <p:nvSpPr>
           <p:cNvPr id="24" name="TextBox 23"/>
           <p:cNvSpPr txBox="1"/>
           <p:nvPr/>
         </p:nvSpPr>
         <p:spPr>
           <a:xfrm>
-            <a:off x="8540496" y="3941063"/>
-            <a:ext cx="3200400" cy="182880"/>
-          </a:xfrm>
-          <a:prstGeom prst="rect">
-            <a:avLst/>
-          </a:prstGeom>
-          <a:noFill/>
-        </p:spPr>
-        <p:txBody>
-          <a:bodyPr wrap="square">
-            <a:spAutoFit/>
-          </a:bodyPr>
-          <a:lstStyle/>
-          <a:p>
-            <a:pPr algn="l">
-              <a:spcAft>
-                <a:spcPts val="300"/>
-              </a:spcAft>
-            </a:pPr>
-            <a:r>
-              <a:rPr sz="1300" b="1">
-                <a:solidFill>
-                  <a:srgbClr val="C45C26"/>
-                </a:solidFill>
-                <a:latin typeface="Calibri"/>
-              </a:rPr>
-              <a:t>San Ignacio 300</a:t>
-            </a:r>
-          </a:p>
-        </p:txBody>
-      </p:sp>
-      <p:sp>
-        <p:nvSpPr>
-          <p:cNvPr id="25" name="TextBox 24"/>
-          <p:cNvSpPr txBox="1"/>
-          <p:nvPr/>
-        </p:nvSpPr>
-        <p:spPr>
-          <a:xfrm>
-            <a:off x="8540496" y="4227088"/>
-            <a:ext cx="3200400" cy="292608"/>
+            <a:off x="8540496" y="4199656"/>
+            <a:ext cx="3200400" cy="237744"/>
           </a:xfrm>
           <a:prstGeom prst="rect">
             <a:avLst/>
@@ -9533,7 +10847,7 @@
       </p:sp>
       <p:sp>
         <p:nvSpPr>
-          <p:cNvPr id="26" name="Rounded Rectangle 25"/>
+          <p:cNvPr id="25" name="Rounded Rectangle 24"/>
           <p:cNvSpPr/>
           <p:nvPr/>
         </p:nvSpPr>
@@ -9580,7 +10894,7 @@
       </p:sp>
       <p:sp>
         <p:nvSpPr>
-          <p:cNvPr id="27" name="TextBox 26"/>
+          <p:cNvPr id="26" name="TextBox 25"/>
           <p:cNvSpPr txBox="1"/>
           <p:nvPr/>
         </p:nvSpPr>
@@ -9619,7 +10933,7 @@
       </p:sp>
       <p:sp>
         <p:nvSpPr>
-          <p:cNvPr id="28" name="TextBox 27"/>
+          <p:cNvPr id="27" name="TextBox 26"/>
           <p:cNvSpPr txBox="1"/>
           <p:nvPr/>
         </p:nvSpPr>
@@ -9887,7 +11201,7 @@
         <p:spPr>
           <a:xfrm>
             <a:off x="201168" y="1024128"/>
-            <a:ext cx="5852160" cy="658368"/>
+            <a:ext cx="5861304" cy="658368"/>
           </a:xfrm>
           <a:prstGeom prst="roundRect">
             <a:avLst>
@@ -9933,8 +11247,8 @@
         </p:nvSpPr>
         <p:spPr>
           <a:xfrm>
-            <a:off x="292608" y="1060704"/>
-            <a:ext cx="5687568" cy="182880"/>
+            <a:off x="274320" y="1051560"/>
+            <a:ext cx="5733288" cy="164592"/>
           </a:xfrm>
           <a:prstGeom prst="rect">
             <a:avLst/>
@@ -9972,8 +11286,8 @@
         </p:nvSpPr>
         <p:spPr>
           <a:xfrm>
-            <a:off x="292608" y="1243584"/>
-            <a:ext cx="5687568" cy="219456"/>
+            <a:off x="274320" y="1243584"/>
+            <a:ext cx="5733288" cy="201168"/>
           </a:xfrm>
           <a:prstGeom prst="rect">
             <a:avLst/>
@@ -10011,8 +11325,8 @@
         </p:nvSpPr>
         <p:spPr>
           <a:xfrm>
-            <a:off x="6144768" y="1024128"/>
-            <a:ext cx="5852160" cy="658368"/>
+            <a:off x="6135624" y="1024128"/>
+            <a:ext cx="5861304" cy="658368"/>
           </a:xfrm>
           <a:prstGeom prst="roundRect">
             <a:avLst>
@@ -10058,8 +11372,8 @@
         </p:nvSpPr>
         <p:spPr>
           <a:xfrm>
-            <a:off x="6236207" y="1060704"/>
-            <a:ext cx="5687568" cy="182880"/>
+            <a:off x="6208776" y="1051560"/>
+            <a:ext cx="5733288" cy="164592"/>
           </a:xfrm>
           <a:prstGeom prst="rect">
             <a:avLst/>
@@ -10097,8 +11411,8 @@
         </p:nvSpPr>
         <p:spPr>
           <a:xfrm>
-            <a:off x="6236207" y="1243584"/>
-            <a:ext cx="5687568" cy="219456"/>
+            <a:off x="6208776" y="1243584"/>
+            <a:ext cx="5733288" cy="201168"/>
           </a:xfrm>
           <a:prstGeom prst="rect">
             <a:avLst/>
@@ -10189,8 +11503,8 @@
         </p:blipFill>
         <p:spPr>
           <a:xfrm>
-            <a:off x="329184" y="1865376"/>
-            <a:ext cx="7717536" cy="3889192"/>
+            <a:off x="274320" y="2031551"/>
+            <a:ext cx="7827264" cy="3343536"/>
           </a:xfrm>
           <a:prstGeom prst="rect">
             <a:avLst/>
@@ -10252,8 +11566,8 @@
         </p:nvSpPr>
         <p:spPr>
           <a:xfrm>
-            <a:off x="8430768" y="1847088"/>
-            <a:ext cx="3419856" cy="182880"/>
+            <a:off x="8430768" y="1837943"/>
+            <a:ext cx="3419856" cy="164592"/>
           </a:xfrm>
           <a:prstGeom prst="rect">
             <a:avLst/>
@@ -10291,8 +11605,8 @@
         </p:nvSpPr>
         <p:spPr>
           <a:xfrm>
-            <a:off x="8430768" y="2029967"/>
-            <a:ext cx="3419856" cy="219456"/>
+            <a:off x="8430768" y="2002536"/>
+            <a:ext cx="3419856" cy="201168"/>
           </a:xfrm>
           <a:prstGeom prst="rect">
             <a:avLst/>
@@ -10330,7 +11644,7 @@
         </p:nvSpPr>
         <p:spPr>
           <a:xfrm>
-            <a:off x="8430768" y="2267712"/>
+            <a:off x="8430768" y="2212848"/>
             <a:ext cx="3419856" cy="768096"/>
           </a:xfrm>
           <a:prstGeom prst="roundRect">
@@ -10377,8 +11691,8 @@
         </p:nvSpPr>
         <p:spPr>
           <a:xfrm>
-            <a:off x="8540496" y="2304288"/>
-            <a:ext cx="3200400" cy="182880"/>
+            <a:off x="8540496" y="2240279"/>
+            <a:ext cx="3200400" cy="164592"/>
           </a:xfrm>
           <a:prstGeom prst="rect">
             <a:avLst/>
@@ -10416,8 +11730,8 @@
         </p:nvSpPr>
         <p:spPr>
           <a:xfrm>
-            <a:off x="8540496" y="2590312"/>
-            <a:ext cx="3200400" cy="292608"/>
+            <a:off x="8540496" y="2535448"/>
+            <a:ext cx="3200400" cy="237744"/>
           </a:xfrm>
           <a:prstGeom prst="rect">
             <a:avLst/>
@@ -10455,7 +11769,7 @@
         </p:nvSpPr>
         <p:spPr>
           <a:xfrm>
-            <a:off x="8430768" y="3904487"/>
+            <a:off x="8430768" y="3877056"/>
             <a:ext cx="3419856" cy="768096"/>
           </a:xfrm>
           <a:prstGeom prst="roundRect">
@@ -10502,8 +11816,8 @@
         </p:nvSpPr>
         <p:spPr>
           <a:xfrm>
-            <a:off x="8540496" y="3941063"/>
-            <a:ext cx="3200400" cy="182880"/>
+            <a:off x="8540496" y="3904488"/>
+            <a:ext cx="3200400" cy="164592"/>
           </a:xfrm>
           <a:prstGeom prst="rect">
             <a:avLst/>
@@ -10541,8 +11855,8 @@
         </p:nvSpPr>
         <p:spPr>
           <a:xfrm>
-            <a:off x="8540496" y="4227088"/>
-            <a:ext cx="3200400" cy="292608"/>
+            <a:off x="8540496" y="4199656"/>
+            <a:ext cx="3200400" cy="237744"/>
           </a:xfrm>
           <a:prstGeom prst="rect">
             <a:avLst/>
@@ -10928,7 +12242,7 @@
         <p:spPr>
           <a:xfrm>
             <a:off x="201168" y="1024128"/>
-            <a:ext cx="5852160" cy="658368"/>
+            <a:ext cx="5861304" cy="658368"/>
           </a:xfrm>
           <a:prstGeom prst="roundRect">
             <a:avLst>
@@ -10974,8 +12288,8 @@
         </p:nvSpPr>
         <p:spPr>
           <a:xfrm>
-            <a:off x="292608" y="1060704"/>
-            <a:ext cx="5687568" cy="182880"/>
+            <a:off x="274320" y="1051560"/>
+            <a:ext cx="5733288" cy="164592"/>
           </a:xfrm>
           <a:prstGeom prst="rect">
             <a:avLst/>
@@ -11013,8 +12327,8 @@
         </p:nvSpPr>
         <p:spPr>
           <a:xfrm>
-            <a:off x="292608" y="1243584"/>
-            <a:ext cx="5687568" cy="219456"/>
+            <a:off x="274320" y="1243584"/>
+            <a:ext cx="5733288" cy="201168"/>
           </a:xfrm>
           <a:prstGeom prst="rect">
             <a:avLst/>
@@ -11052,8 +12366,8 @@
         </p:nvSpPr>
         <p:spPr>
           <a:xfrm>
-            <a:off x="6144768" y="1024128"/>
-            <a:ext cx="5852160" cy="658368"/>
+            <a:off x="6135624" y="1024128"/>
+            <a:ext cx="5861304" cy="658368"/>
           </a:xfrm>
           <a:prstGeom prst="roundRect">
             <a:avLst>
@@ -11099,8 +12413,8 @@
         </p:nvSpPr>
         <p:spPr>
           <a:xfrm>
-            <a:off x="6236207" y="1060704"/>
-            <a:ext cx="5687568" cy="182880"/>
+            <a:off x="6208776" y="1051560"/>
+            <a:ext cx="5733288" cy="164592"/>
           </a:xfrm>
           <a:prstGeom prst="rect">
             <a:avLst/>
@@ -11138,8 +12452,8 @@
         </p:nvSpPr>
         <p:spPr>
           <a:xfrm>
-            <a:off x="6236207" y="1243584"/>
-            <a:ext cx="5687568" cy="219456"/>
+            <a:off x="6208776" y="1243584"/>
+            <a:ext cx="5733288" cy="201168"/>
           </a:xfrm>
           <a:prstGeom prst="rect">
             <a:avLst/>
@@ -11230,8 +12544,8 @@
         </p:blipFill>
         <p:spPr>
           <a:xfrm>
-            <a:off x="329184" y="1865376"/>
-            <a:ext cx="7717536" cy="3889192"/>
+            <a:off x="274320" y="2031551"/>
+            <a:ext cx="7827264" cy="3343536"/>
           </a:xfrm>
           <a:prstGeom prst="rect">
             <a:avLst/>
@@ -11293,8 +12607,8 @@
         </p:nvSpPr>
         <p:spPr>
           <a:xfrm>
-            <a:off x="8430768" y="1847088"/>
-            <a:ext cx="3419856" cy="182880"/>
+            <a:off x="8430768" y="1837943"/>
+            <a:ext cx="3419856" cy="164592"/>
           </a:xfrm>
           <a:prstGeom prst="rect">
             <a:avLst/>
@@ -11332,8 +12646,8 @@
         </p:nvSpPr>
         <p:spPr>
           <a:xfrm>
-            <a:off x="8430768" y="2029967"/>
-            <a:ext cx="3419856" cy="219456"/>
+            <a:off x="8430768" y="2002536"/>
+            <a:ext cx="3419856" cy="201168"/>
           </a:xfrm>
           <a:prstGeom prst="rect">
             <a:avLst/>
@@ -11371,7 +12685,7 @@
         </p:nvSpPr>
         <p:spPr>
           <a:xfrm>
-            <a:off x="8430768" y="2267712"/>
+            <a:off x="8430768" y="2212848"/>
             <a:ext cx="3419856" cy="768096"/>
           </a:xfrm>
           <a:prstGeom prst="roundRect">
@@ -11418,8 +12732,8 @@
         </p:nvSpPr>
         <p:spPr>
           <a:xfrm>
-            <a:off x="8540496" y="2304288"/>
-            <a:ext cx="3200400" cy="182880"/>
+            <a:off x="8540496" y="2240279"/>
+            <a:ext cx="3200400" cy="164592"/>
           </a:xfrm>
           <a:prstGeom prst="rect">
             <a:avLst/>
@@ -11457,8 +12771,8 @@
         </p:nvSpPr>
         <p:spPr>
           <a:xfrm>
-            <a:off x="8540496" y="2590312"/>
-            <a:ext cx="3200400" cy="292608"/>
+            <a:off x="8540496" y="2535448"/>
+            <a:ext cx="3200400" cy="237744"/>
           </a:xfrm>
           <a:prstGeom prst="rect">
             <a:avLst/>
@@ -11496,7 +12810,7 @@
         </p:nvSpPr>
         <p:spPr>
           <a:xfrm>
-            <a:off x="8430768" y="3904487"/>
+            <a:off x="8430768" y="3877056"/>
             <a:ext cx="3419856" cy="768096"/>
           </a:xfrm>
           <a:prstGeom prst="roundRect">
@@ -11543,8 +12857,8 @@
         </p:nvSpPr>
         <p:spPr>
           <a:xfrm>
-            <a:off x="8540496" y="3941063"/>
-            <a:ext cx="3200400" cy="182880"/>
+            <a:off x="8540496" y="3904488"/>
+            <a:ext cx="3200400" cy="164592"/>
           </a:xfrm>
           <a:prstGeom prst="rect">
             <a:avLst/>
@@ -11582,8 +12896,8 @@
         </p:nvSpPr>
         <p:spPr>
           <a:xfrm>
-            <a:off x="8540496" y="4227088"/>
-            <a:ext cx="3200400" cy="292608"/>
+            <a:off x="8540496" y="4199656"/>
+            <a:ext cx="3200400" cy="237744"/>
           </a:xfrm>
           <a:prstGeom prst="rect">
             <a:avLst/>
@@ -11955,7 +13269,7 @@
                 </a:solidFill>
                 <a:latin typeface="Calibri"/>
               </a:rPr>
-              <a:t>Parque Arauco Kennedy   |   7 puntos WES   |   01/05/2026 – 17/08/2026</a:t>
+              <a:t>Parque Arauco Kennedy   |   10 puntos WES   |   julio = cabecera (sin 27, 35 y 36)   |   01/05/2026 – 17/08/2026</a:t>
             </a:r>
           </a:p>
         </p:txBody>
@@ -11969,7 +13283,7 @@
         <p:spPr>
           <a:xfrm>
             <a:off x="201168" y="1024128"/>
-            <a:ext cx="2880360" cy="530352"/>
+            <a:ext cx="2300630" cy="566928"/>
           </a:xfrm>
           <a:prstGeom prst="roundRect">
             <a:avLst>
@@ -12015,27 +13329,27 @@
         </p:nvSpPr>
         <p:spPr>
           <a:xfrm>
-            <a:off x="292608" y="1060704"/>
-            <a:ext cx="2715768" cy="182880"/>
-          </a:xfrm>
-          <a:prstGeom prst="rect">
-            <a:avLst/>
-          </a:prstGeom>
-          <a:noFill/>
-        </p:spPr>
-        <p:txBody>
-          <a:bodyPr wrap="square">
-            <a:spAutoFit/>
-          </a:bodyPr>
-          <a:lstStyle/>
-          <a:p>
-            <a:pPr algn="l">
-              <a:spcAft>
-                <a:spcPts val="300"/>
-              </a:spcAft>
-            </a:pPr>
-            <a:r>
-              <a:rPr sz="1000" b="1">
+            <a:off x="274320" y="1051560"/>
+            <a:ext cx="2172614" cy="164592"/>
+          </a:xfrm>
+          <a:prstGeom prst="rect">
+            <a:avLst/>
+          </a:prstGeom>
+          <a:noFill/>
+        </p:spPr>
+        <p:txBody>
+          <a:bodyPr wrap="square">
+            <a:spAutoFit/>
+          </a:bodyPr>
+          <a:lstStyle/>
+          <a:p>
+            <a:pPr algn="l">
+              <a:spcAft>
+                <a:spcPts val="300"/>
+              </a:spcAft>
+            </a:pPr>
+            <a:r>
+              <a:rPr sz="900" b="1">
                 <a:solidFill>
                   <a:srgbClr val="C9A227"/>
                 </a:solidFill>
@@ -12054,27 +13368,27 @@
         </p:nvSpPr>
         <p:spPr>
           <a:xfrm>
-            <a:off x="292608" y="1243584"/>
-            <a:ext cx="2715768" cy="219456"/>
-          </a:xfrm>
-          <a:prstGeom prst="rect">
-            <a:avLst/>
-          </a:prstGeom>
-          <a:noFill/>
-        </p:spPr>
-        <p:txBody>
-          <a:bodyPr wrap="square">
-            <a:spAutoFit/>
-          </a:bodyPr>
-          <a:lstStyle/>
-          <a:p>
-            <a:pPr algn="l">
-              <a:spcAft>
-                <a:spcPts val="300"/>
-              </a:spcAft>
-            </a:pPr>
-            <a:r>
-              <a:rPr sz="1200" b="1">
+            <a:off x="274320" y="1207008"/>
+            <a:ext cx="2172614" cy="201168"/>
+          </a:xfrm>
+          <a:prstGeom prst="rect">
+            <a:avLst/>
+          </a:prstGeom>
+          <a:noFill/>
+        </p:spPr>
+        <p:txBody>
+          <a:bodyPr wrap="square">
+            <a:spAutoFit/>
+          </a:bodyPr>
+          <a:lstStyle/>
+          <a:p>
+            <a:pPr algn="l">
+              <a:spcAft>
+                <a:spcPts val="300"/>
+              </a:spcAft>
+            </a:pPr>
+            <a:r>
+              <a:rPr sz="1100" b="1">
                 <a:solidFill>
                   <a:srgbClr val="0D3B66"/>
                 </a:solidFill>
@@ -12093,8 +13407,8 @@
         </p:nvSpPr>
         <p:spPr>
           <a:xfrm>
-            <a:off x="3172968" y="1024128"/>
-            <a:ext cx="2880360" cy="530352"/>
+            <a:off x="2574950" y="1024128"/>
+            <a:ext cx="2300630" cy="566928"/>
           </a:xfrm>
           <a:prstGeom prst="roundRect">
             <a:avLst>
@@ -12140,27 +13454,27 @@
         </p:nvSpPr>
         <p:spPr>
           <a:xfrm>
-            <a:off x="3264408" y="1060704"/>
-            <a:ext cx="2715768" cy="182880"/>
-          </a:xfrm>
-          <a:prstGeom prst="rect">
-            <a:avLst/>
-          </a:prstGeom>
-          <a:noFill/>
-        </p:spPr>
-        <p:txBody>
-          <a:bodyPr wrap="square">
-            <a:spAutoFit/>
-          </a:bodyPr>
-          <a:lstStyle/>
-          <a:p>
-            <a:pPr algn="l">
-              <a:spcAft>
-                <a:spcPts val="300"/>
-              </a:spcAft>
-            </a:pPr>
-            <a:r>
-              <a:rPr sz="1000" b="1">
+            <a:off x="2648102" y="1051560"/>
+            <a:ext cx="2172614" cy="164592"/>
+          </a:xfrm>
+          <a:prstGeom prst="rect">
+            <a:avLst/>
+          </a:prstGeom>
+          <a:noFill/>
+        </p:spPr>
+        <p:txBody>
+          <a:bodyPr wrap="square">
+            <a:spAutoFit/>
+          </a:bodyPr>
+          <a:lstStyle/>
+          <a:p>
+            <a:pPr algn="l">
+              <a:spcAft>
+                <a:spcPts val="300"/>
+              </a:spcAft>
+            </a:pPr>
+            <a:r>
+              <a:rPr sz="900" b="1">
                 <a:solidFill>
                   <a:srgbClr val="C9A227"/>
                 </a:solidFill>
@@ -12179,27 +13493,27 @@
         </p:nvSpPr>
         <p:spPr>
           <a:xfrm>
-            <a:off x="3264408" y="1243584"/>
-            <a:ext cx="2715768" cy="219456"/>
-          </a:xfrm>
-          <a:prstGeom prst="rect">
-            <a:avLst/>
-          </a:prstGeom>
-          <a:noFill/>
-        </p:spPr>
-        <p:txBody>
-          <a:bodyPr wrap="square">
-            <a:spAutoFit/>
-          </a:bodyPr>
-          <a:lstStyle/>
-          <a:p>
-            <a:pPr algn="l">
-              <a:spcAft>
-                <a:spcPts val="300"/>
-              </a:spcAft>
-            </a:pPr>
-            <a:r>
-              <a:rPr sz="1200" b="1">
+            <a:off x="2648102" y="1207008"/>
+            <a:ext cx="2172614" cy="201168"/>
+          </a:xfrm>
+          <a:prstGeom prst="rect">
+            <a:avLst/>
+          </a:prstGeom>
+          <a:noFill/>
+        </p:spPr>
+        <p:txBody>
+          <a:bodyPr wrap="square">
+            <a:spAutoFit/>
+          </a:bodyPr>
+          <a:lstStyle/>
+          <a:p>
+            <a:pPr algn="l">
+              <a:spcAft>
+                <a:spcPts val="300"/>
+              </a:spcAft>
+            </a:pPr>
+            <a:r>
+              <a:rPr sz="1100" b="1">
                 <a:solidFill>
                   <a:srgbClr val="0D3B66"/>
                 </a:solidFill>
@@ -12218,8 +13532,8 @@
         </p:nvSpPr>
         <p:spPr>
           <a:xfrm>
-            <a:off x="6144768" y="1024128"/>
-            <a:ext cx="2880360" cy="530352"/>
+            <a:off x="4948732" y="1024128"/>
+            <a:ext cx="2300630" cy="566928"/>
           </a:xfrm>
           <a:prstGeom prst="roundRect">
             <a:avLst>
@@ -12265,27 +13579,27 @@
         </p:nvSpPr>
         <p:spPr>
           <a:xfrm>
-            <a:off x="6236207" y="1060704"/>
-            <a:ext cx="2715768" cy="182880"/>
-          </a:xfrm>
-          <a:prstGeom prst="rect">
-            <a:avLst/>
-          </a:prstGeom>
-          <a:noFill/>
-        </p:spPr>
-        <p:txBody>
-          <a:bodyPr wrap="square">
-            <a:spAutoFit/>
-          </a:bodyPr>
-          <a:lstStyle/>
-          <a:p>
-            <a:pPr algn="l">
-              <a:spcAft>
-                <a:spcPts val="300"/>
-              </a:spcAft>
-            </a:pPr>
-            <a:r>
-              <a:rPr sz="1000" b="1">
+            <a:off x="5021884" y="1051560"/>
+            <a:ext cx="2172614" cy="164592"/>
+          </a:xfrm>
+          <a:prstGeom prst="rect">
+            <a:avLst/>
+          </a:prstGeom>
+          <a:noFill/>
+        </p:spPr>
+        <p:txBody>
+          <a:bodyPr wrap="square">
+            <a:spAutoFit/>
+          </a:bodyPr>
+          <a:lstStyle/>
+          <a:p>
+            <a:pPr algn="l">
+              <a:spcAft>
+                <a:spcPts val="300"/>
+              </a:spcAft>
+            </a:pPr>
+            <a:r>
+              <a:rPr sz="900" b="1">
                 <a:solidFill>
                   <a:srgbClr val="C9A227"/>
                 </a:solidFill>
@@ -12304,27 +13618,27 @@
         </p:nvSpPr>
         <p:spPr>
           <a:xfrm>
-            <a:off x="6236207" y="1243584"/>
-            <a:ext cx="2715768" cy="219456"/>
-          </a:xfrm>
-          <a:prstGeom prst="rect">
-            <a:avLst/>
-          </a:prstGeom>
-          <a:noFill/>
-        </p:spPr>
-        <p:txBody>
-          <a:bodyPr wrap="square">
-            <a:spAutoFit/>
-          </a:bodyPr>
-          <a:lstStyle/>
-          <a:p>
-            <a:pPr algn="l">
-              <a:spcAft>
-                <a:spcPts val="300"/>
-              </a:spcAft>
-            </a:pPr>
-            <a:r>
-              <a:rPr sz="1200" b="1">
+            <a:off x="5021884" y="1207008"/>
+            <a:ext cx="2172614" cy="201168"/>
+          </a:xfrm>
+          <a:prstGeom prst="rect">
+            <a:avLst/>
+          </a:prstGeom>
+          <a:noFill/>
+        </p:spPr>
+        <p:txBody>
+          <a:bodyPr wrap="square">
+            <a:spAutoFit/>
+          </a:bodyPr>
+          <a:lstStyle/>
+          <a:p>
+            <a:pPr algn="l">
+              <a:spcAft>
+                <a:spcPts val="300"/>
+              </a:spcAft>
+            </a:pPr>
+            <a:r>
+              <a:rPr sz="1100" b="1">
                 <a:solidFill>
                   <a:srgbClr val="0D3B66"/>
                 </a:solidFill>
@@ -12337,14 +13651,342 @@
       </p:sp>
       <p:sp>
         <p:nvSpPr>
-          <p:cNvPr id="16" name="Rounded Rectangle 15"/>
+          <p:cNvPr id="16" name="TextBox 15"/>
+          <p:cNvSpPr txBox="1"/>
+          <p:nvPr/>
+        </p:nvSpPr>
+        <p:spPr>
+          <a:xfrm>
+            <a:off x="5021884" y="1408176"/>
+            <a:ext cx="2172614" cy="164592"/>
+          </a:xfrm>
+          <a:prstGeom prst="rect">
+            <a:avLst/>
+          </a:prstGeom>
+          <a:noFill/>
+        </p:spPr>
+        <p:txBody>
+          <a:bodyPr wrap="square">
+            <a:spAutoFit/>
+          </a:bodyPr>
+          <a:lstStyle/>
+          <a:p>
+            <a:pPr algn="l">
+              <a:spcAft>
+                <a:spcPts val="300"/>
+              </a:spcAft>
+            </a:pPr>
+            <a:r>
+              <a:rPr sz="800" b="0">
+                <a:solidFill>
+                  <a:srgbClr val="5A5A5A"/>
+                </a:solidFill>
+                <a:latin typeface="Calibri"/>
+              </a:rPr>
+              <a:t>alimenta 27</a:t>
+            </a:r>
+          </a:p>
+        </p:txBody>
+      </p:sp>
+      <p:sp>
+        <p:nvSpPr>
+          <p:cNvPr id="17" name="Rounded Rectangle 16"/>
           <p:cNvSpPr/>
           <p:nvPr/>
         </p:nvSpPr>
         <p:spPr>
           <a:xfrm>
-            <a:off x="9116568" y="1024128"/>
-            <a:ext cx="2880360" cy="530352"/>
+            <a:off x="7322515" y="1024128"/>
+            <a:ext cx="2300630" cy="566928"/>
+          </a:xfrm>
+          <a:prstGeom prst="roundRect">
+            <a:avLst>
+              <a:gd name="adj" fmla="val 8000"/>
+            </a:avLst>
+          </a:prstGeom>
+          <a:solidFill>
+            <a:srgbClr val="F5F7FA"/>
+          </a:solidFill>
+          <a:ln w="6350">
+            <a:solidFill>
+              <a:srgbClr val="1F77B4"/>
+            </a:solidFill>
+          </a:ln>
+        </p:spPr>
+        <p:style>
+          <a:lnRef idx="1">
+            <a:schemeClr val="accent1"/>
+          </a:lnRef>
+          <a:fillRef idx="3">
+            <a:schemeClr val="accent1"/>
+          </a:fillRef>
+          <a:effectRef idx="2">
+            <a:schemeClr val="accent1"/>
+          </a:effectRef>
+          <a:fontRef idx="minor">
+            <a:schemeClr val="lt1"/>
+          </a:fontRef>
+        </p:style>
+        <p:txBody>
+          <a:bodyPr rtlCol="0" anchor="ctr"/>
+          <a:lstStyle/>
+          <a:p>
+            <a:pPr algn="ctr"/>
+          </a:p>
+        </p:txBody>
+      </p:sp>
+      <p:sp>
+        <p:nvSpPr>
+          <p:cNvPr id="18" name="TextBox 17"/>
+          <p:cNvSpPr txBox="1"/>
+          <p:nvPr/>
+        </p:nvSpPr>
+        <p:spPr>
+          <a:xfrm>
+            <a:off x="7395667" y="1051560"/>
+            <a:ext cx="2172614" cy="164592"/>
+          </a:xfrm>
+          <a:prstGeom prst="rect">
+            <a:avLst/>
+          </a:prstGeom>
+          <a:noFill/>
+        </p:spPr>
+        <p:txBody>
+          <a:bodyPr wrap="square">
+            <a:spAutoFit/>
+          </a:bodyPr>
+          <a:lstStyle/>
+          <a:p>
+            <a:pPr algn="l">
+              <a:spcAft>
+                <a:spcPts val="300"/>
+              </a:spcAft>
+            </a:pPr>
+            <a:r>
+              <a:rPr sz="900" b="1">
+                <a:solidFill>
+                  <a:srgbClr val="C9A227"/>
+                </a:solidFill>
+                <a:latin typeface="Calibri"/>
+              </a:rPr>
+              <a:t>000025-28</a:t>
+            </a:r>
+          </a:p>
+        </p:txBody>
+      </p:sp>
+      <p:sp>
+        <p:nvSpPr>
+          <p:cNvPr id="19" name="TextBox 18"/>
+          <p:cNvSpPr txBox="1"/>
+          <p:nvPr/>
+        </p:nvSpPr>
+        <p:spPr>
+          <a:xfrm>
+            <a:off x="7395667" y="1207008"/>
+            <a:ext cx="2172614" cy="201168"/>
+          </a:xfrm>
+          <a:prstGeom prst="rect">
+            <a:avLst/>
+          </a:prstGeom>
+          <a:noFill/>
+        </p:spPr>
+        <p:txBody>
+          <a:bodyPr wrap="square">
+            <a:spAutoFit/>
+          </a:bodyPr>
+          <a:lstStyle/>
+          <a:p>
+            <a:pPr algn="l">
+              <a:spcAft>
+                <a:spcPts val="300"/>
+              </a:spcAft>
+            </a:pPr>
+            <a:r>
+              <a:rPr sz="1100" b="1">
+                <a:solidFill>
+                  <a:srgbClr val="0D3B66"/>
+                </a:solidFill>
+                <a:latin typeface="Calibri"/>
+              </a:rPr>
+              <a:t>Sandía Nueva</a:t>
+            </a:r>
+          </a:p>
+        </p:txBody>
+      </p:sp>
+      <p:sp>
+        <p:nvSpPr>
+          <p:cNvPr id="20" name="TextBox 19"/>
+          <p:cNvSpPr txBox="1"/>
+          <p:nvPr/>
+        </p:nvSpPr>
+        <p:spPr>
+          <a:xfrm>
+            <a:off x="7395667" y="1408176"/>
+            <a:ext cx="2172614" cy="164592"/>
+          </a:xfrm>
+          <a:prstGeom prst="rect">
+            <a:avLst/>
+          </a:prstGeom>
+          <a:noFill/>
+        </p:spPr>
+        <p:txBody>
+          <a:bodyPr wrap="square">
+            <a:spAutoFit/>
+          </a:bodyPr>
+          <a:lstStyle/>
+          <a:p>
+            <a:pPr algn="l">
+              <a:spcAft>
+                <a:spcPts val="300"/>
+              </a:spcAft>
+            </a:pPr>
+            <a:r>
+              <a:rPr sz="800" b="0">
+                <a:solidFill>
+                  <a:srgbClr val="5A5A5A"/>
+                </a:solidFill>
+                <a:latin typeface="Calibri"/>
+              </a:rPr>
+              <a:t>alimenta 27</a:t>
+            </a:r>
+          </a:p>
+        </p:txBody>
+      </p:sp>
+      <p:sp>
+        <p:nvSpPr>
+          <p:cNvPr id="21" name="Rounded Rectangle 20"/>
+          <p:cNvSpPr/>
+          <p:nvPr/>
+        </p:nvSpPr>
+        <p:spPr>
+          <a:xfrm>
+            <a:off x="9696297" y="1024128"/>
+            <a:ext cx="2300630" cy="566928"/>
+          </a:xfrm>
+          <a:prstGeom prst="roundRect">
+            <a:avLst>
+              <a:gd name="adj" fmla="val 8000"/>
+            </a:avLst>
+          </a:prstGeom>
+          <a:solidFill>
+            <a:srgbClr val="F5F7FA"/>
+          </a:solidFill>
+          <a:ln w="6350">
+            <a:solidFill>
+              <a:srgbClr val="C45C26"/>
+            </a:solidFill>
+          </a:ln>
+        </p:spPr>
+        <p:style>
+          <a:lnRef idx="1">
+            <a:schemeClr val="accent1"/>
+          </a:lnRef>
+          <a:fillRef idx="3">
+            <a:schemeClr val="accent1"/>
+          </a:fillRef>
+          <a:effectRef idx="2">
+            <a:schemeClr val="accent1"/>
+          </a:effectRef>
+          <a:fontRef idx="minor">
+            <a:schemeClr val="lt1"/>
+          </a:fontRef>
+        </p:style>
+        <p:txBody>
+          <a:bodyPr rtlCol="0" anchor="ctr"/>
+          <a:lstStyle/>
+          <a:p>
+            <a:pPr algn="ctr"/>
+          </a:p>
+        </p:txBody>
+      </p:sp>
+      <p:sp>
+        <p:nvSpPr>
+          <p:cNvPr id="22" name="TextBox 21"/>
+          <p:cNvSpPr txBox="1"/>
+          <p:nvPr/>
+        </p:nvSpPr>
+        <p:spPr>
+          <a:xfrm>
+            <a:off x="9769449" y="1051560"/>
+            <a:ext cx="2172614" cy="164592"/>
+          </a:xfrm>
+          <a:prstGeom prst="rect">
+            <a:avLst/>
+          </a:prstGeom>
+          <a:noFill/>
+        </p:spPr>
+        <p:txBody>
+          <a:bodyPr wrap="square">
+            <a:spAutoFit/>
+          </a:bodyPr>
+          <a:lstStyle/>
+          <a:p>
+            <a:pPr algn="l">
+              <a:spcAft>
+                <a:spcPts val="300"/>
+              </a:spcAft>
+            </a:pPr>
+            <a:r>
+              <a:rPr sz="900" b="1">
+                <a:solidFill>
+                  <a:srgbClr val="C9A227"/>
+                </a:solidFill>
+                <a:latin typeface="Calibri"/>
+              </a:rPr>
+              <a:t>000025-29</a:t>
+            </a:r>
+          </a:p>
+        </p:txBody>
+      </p:sp>
+      <p:sp>
+        <p:nvSpPr>
+          <p:cNvPr id="23" name="TextBox 22"/>
+          <p:cNvSpPr txBox="1"/>
+          <p:nvPr/>
+        </p:nvSpPr>
+        <p:spPr>
+          <a:xfrm>
+            <a:off x="9769449" y="1207008"/>
+            <a:ext cx="2172614" cy="201168"/>
+          </a:xfrm>
+          <a:prstGeom prst="rect">
+            <a:avLst/>
+          </a:prstGeom>
+          <a:noFill/>
+        </p:spPr>
+        <p:txBody>
+          <a:bodyPr wrap="square">
+            <a:spAutoFit/>
+          </a:bodyPr>
+          <a:lstStyle/>
+          <a:p>
+            <a:pPr algn="l">
+              <a:spcAft>
+                <a:spcPts val="300"/>
+              </a:spcAft>
+            </a:pPr>
+            <a:r>
+              <a:rPr sz="1100" b="1">
+                <a:solidFill>
+                  <a:srgbClr val="0D3B66"/>
+                </a:solidFill>
+                <a:latin typeface="Calibri"/>
+              </a:rPr>
+              <a:t>Restaurante</a:t>
+            </a:r>
+          </a:p>
+        </p:txBody>
+      </p:sp>
+      <p:sp>
+        <p:nvSpPr>
+          <p:cNvPr id="24" name="Rounded Rectangle 23"/>
+          <p:cNvSpPr/>
+          <p:nvPr/>
+        </p:nvSpPr>
+        <p:spPr>
+          <a:xfrm>
+            <a:off x="201168" y="1636776"/>
+            <a:ext cx="2300630" cy="566928"/>
           </a:xfrm>
           <a:prstGeom prst="roundRect">
             <a:avLst>
@@ -12384,33 +14026,33 @@
       </p:sp>
       <p:sp>
         <p:nvSpPr>
-          <p:cNvPr id="17" name="TextBox 16"/>
-          <p:cNvSpPr txBox="1"/>
-          <p:nvPr/>
-        </p:nvSpPr>
-        <p:spPr>
-          <a:xfrm>
-            <a:off x="9208008" y="1060704"/>
-            <a:ext cx="2715768" cy="182880"/>
-          </a:xfrm>
-          <a:prstGeom prst="rect">
-            <a:avLst/>
-          </a:prstGeom>
-          <a:noFill/>
-        </p:spPr>
-        <p:txBody>
-          <a:bodyPr wrap="square">
-            <a:spAutoFit/>
-          </a:bodyPr>
-          <a:lstStyle/>
-          <a:p>
-            <a:pPr algn="l">
-              <a:spcAft>
-                <a:spcPts val="300"/>
-              </a:spcAft>
-            </a:pPr>
-            <a:r>
-              <a:rPr sz="1000" b="1">
+          <p:cNvPr id="25" name="TextBox 24"/>
+          <p:cNvSpPr txBox="1"/>
+          <p:nvPr/>
+        </p:nvSpPr>
+        <p:spPr>
+          <a:xfrm>
+            <a:off x="274320" y="1664208"/>
+            <a:ext cx="2172614" cy="164592"/>
+          </a:xfrm>
+          <a:prstGeom prst="rect">
+            <a:avLst/>
+          </a:prstGeom>
+          <a:noFill/>
+        </p:spPr>
+        <p:txBody>
+          <a:bodyPr wrap="square">
+            <a:spAutoFit/>
+          </a:bodyPr>
+          <a:lstStyle/>
+          <a:p>
+            <a:pPr algn="l">
+              <a:spcAft>
+                <a:spcPts val="300"/>
+              </a:spcAft>
+            </a:pPr>
+            <a:r>
+              <a:rPr sz="900" b="1">
                 <a:solidFill>
                   <a:srgbClr val="C9A227"/>
                 </a:solidFill>
@@ -12423,33 +14065,33 @@
       </p:sp>
       <p:sp>
         <p:nvSpPr>
-          <p:cNvPr id="18" name="TextBox 17"/>
-          <p:cNvSpPr txBox="1"/>
-          <p:nvPr/>
-        </p:nvSpPr>
-        <p:spPr>
-          <a:xfrm>
-            <a:off x="9208008" y="1243584"/>
-            <a:ext cx="2715768" cy="219456"/>
-          </a:xfrm>
-          <a:prstGeom prst="rect">
-            <a:avLst/>
-          </a:prstGeom>
-          <a:noFill/>
-        </p:spPr>
-        <p:txBody>
-          <a:bodyPr wrap="square">
-            <a:spAutoFit/>
-          </a:bodyPr>
-          <a:lstStyle/>
-          <a:p>
-            <a:pPr algn="l">
-              <a:spcAft>
-                <a:spcPts val="300"/>
-              </a:spcAft>
-            </a:pPr>
-            <a:r>
-              <a:rPr sz="1200" b="1">
+          <p:cNvPr id="26" name="TextBox 25"/>
+          <p:cNvSpPr txBox="1"/>
+          <p:nvPr/>
+        </p:nvSpPr>
+        <p:spPr>
+          <a:xfrm>
+            <a:off x="274320" y="1819656"/>
+            <a:ext cx="2172614" cy="201168"/>
+          </a:xfrm>
+          <a:prstGeom prst="rect">
+            <a:avLst/>
+          </a:prstGeom>
+          <a:noFill/>
+        </p:spPr>
+        <p:txBody>
+          <a:bodyPr wrap="square">
+            <a:spAutoFit/>
+          </a:bodyPr>
+          <a:lstStyle/>
+          <a:p>
+            <a:pPr algn="l">
+              <a:spcAft>
+                <a:spcPts val="300"/>
+              </a:spcAft>
+            </a:pPr>
+            <a:r>
+              <a:rPr sz="1100" b="1">
                 <a:solidFill>
                   <a:srgbClr val="0D3B66"/>
                 </a:solidFill>
@@ -12462,14 +14104,14 @@
       </p:sp>
       <p:sp>
         <p:nvSpPr>
-          <p:cNvPr id="19" name="Rounded Rectangle 18"/>
+          <p:cNvPr id="27" name="Rounded Rectangle 26"/>
           <p:cNvSpPr/>
           <p:nvPr/>
         </p:nvSpPr>
         <p:spPr>
           <a:xfrm>
-            <a:off x="201168" y="1627632"/>
-            <a:ext cx="3870960" cy="530352"/>
+            <a:off x="2574950" y="1636776"/>
+            <a:ext cx="2300630" cy="566928"/>
           </a:xfrm>
           <a:prstGeom prst="roundRect">
             <a:avLst>
@@ -12509,14 +14151,825 @@
       </p:sp>
       <p:sp>
         <p:nvSpPr>
-          <p:cNvPr id="20" name="TextBox 19"/>
-          <p:cNvSpPr txBox="1"/>
-          <p:nvPr/>
-        </p:nvSpPr>
-        <p:spPr>
-          <a:xfrm>
-            <a:off x="292608" y="1664208"/>
-            <a:ext cx="3706368" cy="182880"/>
+          <p:cNvPr id="28" name="TextBox 27"/>
+          <p:cNvSpPr txBox="1"/>
+          <p:nvPr/>
+        </p:nvSpPr>
+        <p:spPr>
+          <a:xfrm>
+            <a:off x="2648102" y="1664208"/>
+            <a:ext cx="2172614" cy="164592"/>
+          </a:xfrm>
+          <a:prstGeom prst="rect">
+            <a:avLst/>
+          </a:prstGeom>
+          <a:noFill/>
+        </p:spPr>
+        <p:txBody>
+          <a:bodyPr wrap="square">
+            <a:spAutoFit/>
+          </a:bodyPr>
+          <a:lstStyle/>
+          <a:p>
+            <a:pPr algn="l">
+              <a:spcAft>
+                <a:spcPts val="300"/>
+              </a:spcAft>
+            </a:pPr>
+            <a:r>
+              <a:rPr sz="900" b="1">
+                <a:solidFill>
+                  <a:srgbClr val="C9A227"/>
+                </a:solidFill>
+                <a:latin typeface="Calibri"/>
+              </a:rPr>
+              <a:t>000025-24</a:t>
+            </a:r>
+          </a:p>
+        </p:txBody>
+      </p:sp>
+      <p:sp>
+        <p:nvSpPr>
+          <p:cNvPr id="29" name="TextBox 28"/>
+          <p:cNvSpPr txBox="1"/>
+          <p:nvPr/>
+        </p:nvSpPr>
+        <p:spPr>
+          <a:xfrm>
+            <a:off x="2648102" y="1819656"/>
+            <a:ext cx="2172614" cy="201168"/>
+          </a:xfrm>
+          <a:prstGeom prst="rect">
+            <a:avLst/>
+          </a:prstGeom>
+          <a:noFill/>
+        </p:spPr>
+        <p:txBody>
+          <a:bodyPr wrap="square">
+            <a:spAutoFit/>
+          </a:bodyPr>
+          <a:lstStyle/>
+          <a:p>
+            <a:pPr algn="l">
+              <a:spcAft>
+                <a:spcPts val="300"/>
+              </a:spcAft>
+            </a:pPr>
+            <a:r>
+              <a:rPr sz="1100" b="1">
+                <a:solidFill>
+                  <a:srgbClr val="0D3B66"/>
+                </a:solidFill>
+                <a:latin typeface="Calibri"/>
+              </a:rPr>
+              <a:t>Cascada</a:t>
+            </a:r>
+          </a:p>
+        </p:txBody>
+      </p:sp>
+      <p:sp>
+        <p:nvSpPr>
+          <p:cNvPr id="30" name="Rounded Rectangle 29"/>
+          <p:cNvSpPr/>
+          <p:nvPr/>
+        </p:nvSpPr>
+        <p:spPr>
+          <a:xfrm>
+            <a:off x="4948732" y="1636776"/>
+            <a:ext cx="2300630" cy="566928"/>
+          </a:xfrm>
+          <a:prstGeom prst="roundRect">
+            <a:avLst>
+              <a:gd name="adj" fmla="val 8000"/>
+            </a:avLst>
+          </a:prstGeom>
+          <a:solidFill>
+            <a:srgbClr val="FFF9EB"/>
+          </a:solidFill>
+          <a:ln w="6350">
+            <a:solidFill>
+              <a:srgbClr val="C45C26"/>
+            </a:solidFill>
+          </a:ln>
+        </p:spPr>
+        <p:style>
+          <a:lnRef idx="1">
+            <a:schemeClr val="accent1"/>
+          </a:lnRef>
+          <a:fillRef idx="3">
+            <a:schemeClr val="accent1"/>
+          </a:fillRef>
+          <a:effectRef idx="2">
+            <a:schemeClr val="accent1"/>
+          </a:effectRef>
+          <a:fontRef idx="minor">
+            <a:schemeClr val="lt1"/>
+          </a:fontRef>
+        </p:style>
+        <p:txBody>
+          <a:bodyPr rtlCol="0" anchor="ctr"/>
+          <a:lstStyle/>
+          <a:p>
+            <a:pPr algn="ctr"/>
+          </a:p>
+        </p:txBody>
+      </p:sp>
+      <p:sp>
+        <p:nvSpPr>
+          <p:cNvPr id="31" name="TextBox 30"/>
+          <p:cNvSpPr txBox="1"/>
+          <p:nvPr/>
+        </p:nvSpPr>
+        <p:spPr>
+          <a:xfrm>
+            <a:off x="5021884" y="1664208"/>
+            <a:ext cx="2172614" cy="164592"/>
+          </a:xfrm>
+          <a:prstGeom prst="rect">
+            <a:avLst/>
+          </a:prstGeom>
+          <a:noFill/>
+        </p:spPr>
+        <p:txBody>
+          <a:bodyPr wrap="square">
+            <a:spAutoFit/>
+          </a:bodyPr>
+          <a:lstStyle/>
+          <a:p>
+            <a:pPr algn="l">
+              <a:spcAft>
+                <a:spcPts val="300"/>
+              </a:spcAft>
+            </a:pPr>
+            <a:r>
+              <a:rPr sz="900" b="1">
+                <a:solidFill>
+                  <a:srgbClr val="C9A227"/>
+                </a:solidFill>
+                <a:latin typeface="Calibri"/>
+              </a:rPr>
+              <a:t>000025-27</a:t>
+            </a:r>
+          </a:p>
+        </p:txBody>
+      </p:sp>
+      <p:sp>
+        <p:nvSpPr>
+          <p:cNvPr id="32" name="TextBox 31"/>
+          <p:cNvSpPr txBox="1"/>
+          <p:nvPr/>
+        </p:nvSpPr>
+        <p:spPr>
+          <a:xfrm>
+            <a:off x="5021884" y="1819656"/>
+            <a:ext cx="2172614" cy="201168"/>
+          </a:xfrm>
+          <a:prstGeom prst="rect">
+            <a:avLst/>
+          </a:prstGeom>
+          <a:noFill/>
+        </p:spPr>
+        <p:txBody>
+          <a:bodyPr wrap="square">
+            <a:spAutoFit/>
+          </a:bodyPr>
+          <a:lstStyle/>
+          <a:p>
+            <a:pPr algn="l">
+              <a:spcAft>
+                <a:spcPts val="300"/>
+              </a:spcAft>
+            </a:pPr>
+            <a:r>
+              <a:rPr sz="1100" b="1">
+                <a:solidFill>
+                  <a:srgbClr val="0D3B66"/>
+                </a:solidFill>
+                <a:latin typeface="Calibri"/>
+              </a:rPr>
+              <a:t>Distrito Lujo</a:t>
+            </a:r>
+          </a:p>
+        </p:txBody>
+      </p:sp>
+      <p:sp>
+        <p:nvSpPr>
+          <p:cNvPr id="33" name="TextBox 32"/>
+          <p:cNvSpPr txBox="1"/>
+          <p:nvPr/>
+        </p:nvSpPr>
+        <p:spPr>
+          <a:xfrm>
+            <a:off x="5021884" y="2020824"/>
+            <a:ext cx="2172614" cy="164592"/>
+          </a:xfrm>
+          <a:prstGeom prst="rect">
+            <a:avLst/>
+          </a:prstGeom>
+          <a:noFill/>
+        </p:spPr>
+        <p:txBody>
+          <a:bodyPr wrap="square">
+            <a:spAutoFit/>
+          </a:bodyPr>
+          <a:lstStyle/>
+          <a:p>
+            <a:pPr algn="l">
+              <a:spcAft>
+                <a:spcPts val="300"/>
+              </a:spcAft>
+            </a:pPr>
+            <a:r>
+              <a:rPr sz="800" b="0">
+                <a:solidFill>
+                  <a:srgbClr val="5A5A5A"/>
+                </a:solidFill>
+                <a:latin typeface="Calibri"/>
+              </a:rPr>
+              <a:t>cadena · no suma</a:t>
+            </a:r>
+          </a:p>
+        </p:txBody>
+      </p:sp>
+      <p:sp>
+        <p:nvSpPr>
+          <p:cNvPr id="34" name="Rounded Rectangle 33"/>
+          <p:cNvSpPr/>
+          <p:nvPr/>
+        </p:nvSpPr>
+        <p:spPr>
+          <a:xfrm>
+            <a:off x="7322515" y="1636776"/>
+            <a:ext cx="2300630" cy="566928"/>
+          </a:xfrm>
+          <a:prstGeom prst="roundRect">
+            <a:avLst>
+              <a:gd name="adj" fmla="val 8000"/>
+            </a:avLst>
+          </a:prstGeom>
+          <a:solidFill>
+            <a:srgbClr val="FFF9EB"/>
+          </a:solidFill>
+          <a:ln w="6350">
+            <a:solidFill>
+              <a:srgbClr val="C9A227"/>
+            </a:solidFill>
+          </a:ln>
+        </p:spPr>
+        <p:style>
+          <a:lnRef idx="1">
+            <a:schemeClr val="accent1"/>
+          </a:lnRef>
+          <a:fillRef idx="3">
+            <a:schemeClr val="accent1"/>
+          </a:fillRef>
+          <a:effectRef idx="2">
+            <a:schemeClr val="accent1"/>
+          </a:effectRef>
+          <a:fontRef idx="minor">
+            <a:schemeClr val="lt1"/>
+          </a:fontRef>
+        </p:style>
+        <p:txBody>
+          <a:bodyPr rtlCol="0" anchor="ctr"/>
+          <a:lstStyle/>
+          <a:p>
+            <a:pPr algn="ctr"/>
+          </a:p>
+        </p:txBody>
+      </p:sp>
+      <p:sp>
+        <p:nvSpPr>
+          <p:cNvPr id="35" name="TextBox 34"/>
+          <p:cNvSpPr txBox="1"/>
+          <p:nvPr/>
+        </p:nvSpPr>
+        <p:spPr>
+          <a:xfrm>
+            <a:off x="7395667" y="1664208"/>
+            <a:ext cx="2172614" cy="164592"/>
+          </a:xfrm>
+          <a:prstGeom prst="rect">
+            <a:avLst/>
+          </a:prstGeom>
+          <a:noFill/>
+        </p:spPr>
+        <p:txBody>
+          <a:bodyPr wrap="square">
+            <a:spAutoFit/>
+          </a:bodyPr>
+          <a:lstStyle/>
+          <a:p>
+            <a:pPr algn="l">
+              <a:spcAft>
+                <a:spcPts val="300"/>
+              </a:spcAft>
+            </a:pPr>
+            <a:r>
+              <a:rPr sz="900" b="1">
+                <a:solidFill>
+                  <a:srgbClr val="C9A227"/>
+                </a:solidFill>
+                <a:latin typeface="Calibri"/>
+              </a:rPr>
+              <a:t>000025-35</a:t>
+            </a:r>
+          </a:p>
+        </p:txBody>
+      </p:sp>
+      <p:sp>
+        <p:nvSpPr>
+          <p:cNvPr id="36" name="TextBox 35"/>
+          <p:cNvSpPr txBox="1"/>
+          <p:nvPr/>
+        </p:nvSpPr>
+        <p:spPr>
+          <a:xfrm>
+            <a:off x="7395667" y="1819656"/>
+            <a:ext cx="2172614" cy="201168"/>
+          </a:xfrm>
+          <a:prstGeom prst="rect">
+            <a:avLst/>
+          </a:prstGeom>
+          <a:noFill/>
+        </p:spPr>
+        <p:txBody>
+          <a:bodyPr wrap="square">
+            <a:spAutoFit/>
+          </a:bodyPr>
+          <a:lstStyle/>
+          <a:p>
+            <a:pPr algn="l">
+              <a:spcAft>
+                <a:spcPts val="300"/>
+              </a:spcAft>
+            </a:pPr>
+            <a:r>
+              <a:rPr sz="1100" b="1">
+                <a:solidFill>
+                  <a:srgbClr val="0D3B66"/>
+                </a:solidFill>
+                <a:latin typeface="Calibri"/>
+              </a:rPr>
+              <a:t>Bazar Gourmet</a:t>
+            </a:r>
+          </a:p>
+        </p:txBody>
+      </p:sp>
+      <p:sp>
+        <p:nvSpPr>
+          <p:cNvPr id="37" name="TextBox 36"/>
+          <p:cNvSpPr txBox="1"/>
+          <p:nvPr/>
+        </p:nvSpPr>
+        <p:spPr>
+          <a:xfrm>
+            <a:off x="7395667" y="2020824"/>
+            <a:ext cx="2172614" cy="164592"/>
+          </a:xfrm>
+          <a:prstGeom prst="rect">
+            <a:avLst/>
+          </a:prstGeom>
+          <a:noFill/>
+        </p:spPr>
+        <p:txBody>
+          <a:bodyPr wrap="square">
+            <a:spAutoFit/>
+          </a:bodyPr>
+          <a:lstStyle/>
+          <a:p>
+            <a:pPr algn="l">
+              <a:spcAft>
+                <a:spcPts val="300"/>
+              </a:spcAft>
+            </a:pPr>
+            <a:r>
+              <a:rPr sz="800" b="0">
+                <a:solidFill>
+                  <a:srgbClr val="5A5A5A"/>
+                </a:solidFill>
+                <a:latin typeface="Calibri"/>
+              </a:rPr>
+              <a:t>sale de 27</a:t>
+            </a:r>
+          </a:p>
+        </p:txBody>
+      </p:sp>
+      <p:sp>
+        <p:nvSpPr>
+          <p:cNvPr id="38" name="Rounded Rectangle 37"/>
+          <p:cNvSpPr/>
+          <p:nvPr/>
+        </p:nvSpPr>
+        <p:spPr>
+          <a:xfrm>
+            <a:off x="9696297" y="1636776"/>
+            <a:ext cx="2300630" cy="566928"/>
+          </a:xfrm>
+          <a:prstGeom prst="roundRect">
+            <a:avLst>
+              <a:gd name="adj" fmla="val 8000"/>
+            </a:avLst>
+          </a:prstGeom>
+          <a:solidFill>
+            <a:srgbClr val="FFF9EB"/>
+          </a:solidFill>
+          <a:ln w="6350">
+            <a:solidFill>
+              <a:srgbClr val="5A8C6E"/>
+            </a:solidFill>
+          </a:ln>
+        </p:spPr>
+        <p:style>
+          <a:lnRef idx="1">
+            <a:schemeClr val="accent1"/>
+          </a:lnRef>
+          <a:fillRef idx="3">
+            <a:schemeClr val="accent1"/>
+          </a:fillRef>
+          <a:effectRef idx="2">
+            <a:schemeClr val="accent1"/>
+          </a:effectRef>
+          <a:fontRef idx="minor">
+            <a:schemeClr val="lt1"/>
+          </a:fontRef>
+        </p:style>
+        <p:txBody>
+          <a:bodyPr rtlCol="0" anchor="ctr"/>
+          <a:lstStyle/>
+          <a:p>
+            <a:pPr algn="ctr"/>
+          </a:p>
+        </p:txBody>
+      </p:sp>
+      <p:sp>
+        <p:nvSpPr>
+          <p:cNvPr id="39" name="TextBox 38"/>
+          <p:cNvSpPr txBox="1"/>
+          <p:nvPr/>
+        </p:nvSpPr>
+        <p:spPr>
+          <a:xfrm>
+            <a:off x="9769449" y="1664208"/>
+            <a:ext cx="2172614" cy="164592"/>
+          </a:xfrm>
+          <a:prstGeom prst="rect">
+            <a:avLst/>
+          </a:prstGeom>
+          <a:noFill/>
+        </p:spPr>
+        <p:txBody>
+          <a:bodyPr wrap="square">
+            <a:spAutoFit/>
+          </a:bodyPr>
+          <a:lstStyle/>
+          <a:p>
+            <a:pPr algn="l">
+              <a:spcAft>
+                <a:spcPts val="300"/>
+              </a:spcAft>
+            </a:pPr>
+            <a:r>
+              <a:rPr sz="900" b="1">
+                <a:solidFill>
+                  <a:srgbClr val="C9A227"/>
+                </a:solidFill>
+                <a:latin typeface="Calibri"/>
+              </a:rPr>
+              <a:t>000025-36</a:t>
+            </a:r>
+          </a:p>
+        </p:txBody>
+      </p:sp>
+      <p:sp>
+        <p:nvSpPr>
+          <p:cNvPr id="40" name="TextBox 39"/>
+          <p:cNvSpPr txBox="1"/>
+          <p:nvPr/>
+        </p:nvSpPr>
+        <p:spPr>
+          <a:xfrm>
+            <a:off x="9769449" y="1819656"/>
+            <a:ext cx="2172614" cy="201168"/>
+          </a:xfrm>
+          <a:prstGeom prst="rect">
+            <a:avLst/>
+          </a:prstGeom>
+          <a:noFill/>
+        </p:spPr>
+        <p:txBody>
+          <a:bodyPr wrap="square">
+            <a:spAutoFit/>
+          </a:bodyPr>
+          <a:lstStyle/>
+          <a:p>
+            <a:pPr algn="l">
+              <a:spcAft>
+                <a:spcPts val="300"/>
+              </a:spcAft>
+            </a:pPr>
+            <a:r>
+              <a:rPr sz="1100" b="1">
+                <a:solidFill>
+                  <a:srgbClr val="0D3B66"/>
+                </a:solidFill>
+                <a:latin typeface="Calibri"/>
+              </a:rPr>
+              <a:t>DL Kennedy</a:t>
+            </a:r>
+          </a:p>
+        </p:txBody>
+      </p:sp>
+      <p:sp>
+        <p:nvSpPr>
+          <p:cNvPr id="41" name="TextBox 40"/>
+          <p:cNvSpPr txBox="1"/>
+          <p:nvPr/>
+        </p:nvSpPr>
+        <p:spPr>
+          <a:xfrm>
+            <a:off x="9769449" y="2020824"/>
+            <a:ext cx="2172614" cy="164592"/>
+          </a:xfrm>
+          <a:prstGeom prst="rect">
+            <a:avLst/>
+          </a:prstGeom>
+          <a:noFill/>
+        </p:spPr>
+        <p:txBody>
+          <a:bodyPr wrap="square">
+            <a:spAutoFit/>
+          </a:bodyPr>
+          <a:lstStyle/>
+          <a:p>
+            <a:pPr algn="l">
+              <a:spcAft>
+                <a:spcPts val="300"/>
+              </a:spcAft>
+            </a:pPr>
+            <a:r>
+              <a:rPr sz="800" b="0">
+                <a:solidFill>
+                  <a:srgbClr val="5A5A5A"/>
+                </a:solidFill>
+                <a:latin typeface="Calibri"/>
+              </a:rPr>
+              <a:t>sale de 27</a:t>
+            </a:r>
+          </a:p>
+        </p:txBody>
+      </p:sp>
+      <p:sp>
+        <p:nvSpPr>
+          <p:cNvPr id="42" name="Rounded Rectangle 41"/>
+          <p:cNvSpPr/>
+          <p:nvPr/>
+        </p:nvSpPr>
+        <p:spPr>
+          <a:xfrm>
+            <a:off x="201168" y="2276856"/>
+            <a:ext cx="7973568" cy="3337559"/>
+          </a:xfrm>
+          <a:prstGeom prst="roundRect">
+            <a:avLst>
+              <a:gd name="adj" fmla="val 8000"/>
+            </a:avLst>
+          </a:prstGeom>
+          <a:solidFill>
+            <a:srgbClr val="F5F7FA"/>
+          </a:solidFill>
+          <a:ln>
+            <a:noFill/>
+          </a:ln>
+        </p:spPr>
+        <p:style>
+          <a:lnRef idx="1">
+            <a:schemeClr val="accent1"/>
+          </a:lnRef>
+          <a:fillRef idx="3">
+            <a:schemeClr val="accent1"/>
+          </a:fillRef>
+          <a:effectRef idx="2">
+            <a:schemeClr val="accent1"/>
+          </a:effectRef>
+          <a:fontRef idx="minor">
+            <a:schemeClr val="lt1"/>
+          </a:fontRef>
+        </p:style>
+        <p:txBody>
+          <a:bodyPr rtlCol="0" anchor="ctr"/>
+          <a:lstStyle/>
+          <a:p>
+            <a:pPr algn="ctr"/>
+          </a:p>
+        </p:txBody>
+      </p:sp>
+      <p:pic>
+        <p:nvPicPr>
+          <p:cNvPr id="43" name="Picture 42" descr="pak_mensual_may_ago.png"/>
+          <p:cNvPicPr>
+            <a:picLocks noChangeAspect="1"/>
+          </p:cNvPicPr>
+          <p:nvPr/>
+        </p:nvPicPr>
+        <p:blipFill>
+          <a:blip r:embed="rId3"/>
+          <a:stretch>
+            <a:fillRect/>
+          </a:stretch>
+        </p:blipFill>
+        <p:spPr>
+          <a:xfrm>
+            <a:off x="424627" y="2331720"/>
+            <a:ext cx="7526649" cy="3227831"/>
+          </a:xfrm>
+          <a:prstGeom prst="rect">
+            <a:avLst/>
+          </a:prstGeom>
+        </p:spPr>
+      </p:pic>
+      <p:sp>
+        <p:nvSpPr>
+          <p:cNvPr id="44" name="Rounded Rectangle 43"/>
+          <p:cNvSpPr/>
+          <p:nvPr/>
+        </p:nvSpPr>
+        <p:spPr>
+          <a:xfrm>
+            <a:off x="8302752" y="2276856"/>
+            <a:ext cx="3675887" cy="3337559"/>
+          </a:xfrm>
+          <a:prstGeom prst="roundRect">
+            <a:avLst>
+              <a:gd name="adj" fmla="val 8000"/>
+            </a:avLst>
+          </a:prstGeom>
+          <a:solidFill>
+            <a:srgbClr val="FFFFFF"/>
+          </a:solidFill>
+          <a:ln w="6350">
+            <a:solidFill>
+              <a:srgbClr val="1F77B4"/>
+            </a:solidFill>
+          </a:ln>
+        </p:spPr>
+        <p:style>
+          <a:lnRef idx="1">
+            <a:schemeClr val="accent1"/>
+          </a:lnRef>
+          <a:fillRef idx="3">
+            <a:schemeClr val="accent1"/>
+          </a:fillRef>
+          <a:effectRef idx="2">
+            <a:schemeClr val="accent1"/>
+          </a:effectRef>
+          <a:fontRef idx="minor">
+            <a:schemeClr val="lt1"/>
+          </a:fontRef>
+        </p:style>
+        <p:txBody>
+          <a:bodyPr rtlCol="0" anchor="ctr"/>
+          <a:lstStyle/>
+          <a:p>
+            <a:pPr algn="ctr"/>
+          </a:p>
+        </p:txBody>
+      </p:sp>
+      <p:sp>
+        <p:nvSpPr>
+          <p:cNvPr id="45" name="TextBox 44"/>
+          <p:cNvSpPr txBox="1"/>
+          <p:nvPr/>
+        </p:nvSpPr>
+        <p:spPr>
+          <a:xfrm>
+            <a:off x="8430768" y="2322576"/>
+            <a:ext cx="3419856" cy="164592"/>
+          </a:xfrm>
+          <a:prstGeom prst="rect">
+            <a:avLst/>
+          </a:prstGeom>
+          <a:noFill/>
+        </p:spPr>
+        <p:txBody>
+          <a:bodyPr wrap="square">
+            <a:spAutoFit/>
+          </a:bodyPr>
+          <a:lstStyle/>
+          <a:p>
+            <a:pPr algn="l">
+              <a:spcAft>
+                <a:spcPts val="300"/>
+              </a:spcAft>
+            </a:pPr>
+            <a:r>
+              <a:rPr sz="1100" b="1">
+                <a:solidFill>
+                  <a:srgbClr val="1F77B4"/>
+                </a:solidFill>
+                <a:latin typeface="Calibri"/>
+              </a:rPr>
+              <a:t>JULIO · cabecera</a:t>
+            </a:r>
+          </a:p>
+        </p:txBody>
+      </p:sp>
+      <p:sp>
+        <p:nvSpPr>
+          <p:cNvPr id="46" name="TextBox 45"/>
+          <p:cNvSpPr txBox="1"/>
+          <p:nvPr/>
+        </p:nvSpPr>
+        <p:spPr>
+          <a:xfrm>
+            <a:off x="8430768" y="2487168"/>
+            <a:ext cx="3419856" cy="201168"/>
+          </a:xfrm>
+          <a:prstGeom prst="rect">
+            <a:avLst/>
+          </a:prstGeom>
+          <a:noFill/>
+        </p:spPr>
+        <p:txBody>
+          <a:bodyPr wrap="square">
+            <a:spAutoFit/>
+          </a:bodyPr>
+          <a:lstStyle/>
+          <a:p>
+            <a:pPr algn="l">
+              <a:spcAft>
+                <a:spcPts val="300"/>
+              </a:spcAft>
+            </a:pPr>
+            <a:r>
+              <a:rPr sz="1200" b="0">
+                <a:solidFill>
+                  <a:srgbClr val="5A5A5A"/>
+                </a:solidFill>
+                <a:latin typeface="Calibri"/>
+              </a:rPr>
+              <a:t>El recinto sumó 31.239 m³</a:t>
+            </a:r>
+          </a:p>
+        </p:txBody>
+      </p:sp>
+      <p:sp>
+        <p:nvSpPr>
+          <p:cNvPr id="47" name="Rounded Rectangle 46"/>
+          <p:cNvSpPr/>
+          <p:nvPr/>
+        </p:nvSpPr>
+        <p:spPr>
+          <a:xfrm>
+            <a:off x="8430768" y="2697480"/>
+            <a:ext cx="3419856" cy="369678"/>
+          </a:xfrm>
+          <a:prstGeom prst="roundRect">
+            <a:avLst>
+              <a:gd name="adj" fmla="val 8000"/>
+            </a:avLst>
+          </a:prstGeom>
+          <a:solidFill>
+            <a:srgbClr val="F5F7FA"/>
+          </a:solidFill>
+          <a:ln w="6350">
+            <a:solidFill>
+              <a:srgbClr val="A0783C"/>
+            </a:solidFill>
+          </a:ln>
+        </p:spPr>
+        <p:style>
+          <a:lnRef idx="1">
+            <a:schemeClr val="accent1"/>
+          </a:lnRef>
+          <a:fillRef idx="3">
+            <a:schemeClr val="accent1"/>
+          </a:fillRef>
+          <a:effectRef idx="2">
+            <a:schemeClr val="accent1"/>
+          </a:effectRef>
+          <a:fontRef idx="minor">
+            <a:schemeClr val="lt1"/>
+          </a:fontRef>
+        </p:style>
+        <p:txBody>
+          <a:bodyPr rtlCol="0" anchor="ctr"/>
+          <a:lstStyle/>
+          <a:p>
+            <a:pPr algn="ctr"/>
+          </a:p>
+        </p:txBody>
+      </p:sp>
+      <p:sp>
+        <p:nvSpPr>
+          <p:cNvPr id="48" name="TextBox 47"/>
+          <p:cNvSpPr txBox="1"/>
+          <p:nvPr/>
+        </p:nvSpPr>
+        <p:spPr>
+          <a:xfrm>
+            <a:off x="8540496" y="2724912"/>
+            <a:ext cx="3200400" cy="155265"/>
           </a:xfrm>
           <a:prstGeom prst="rect">
             <a:avLst/>
@@ -12537,25 +14990,25 @@
             <a:r>
               <a:rPr sz="1000" b="1">
                 <a:solidFill>
-                  <a:srgbClr val="C9A227"/>
-                </a:solidFill>
-                <a:latin typeface="Calibri"/>
-              </a:rPr>
-              <a:t>000025-24</a:t>
-            </a:r>
-          </a:p>
-        </p:txBody>
-      </p:sp>
-      <p:sp>
-        <p:nvSpPr>
-          <p:cNvPr id="21" name="TextBox 20"/>
-          <p:cNvSpPr txBox="1"/>
-          <p:nvPr/>
-        </p:nvSpPr>
-        <p:spPr>
-          <a:xfrm>
-            <a:off x="292608" y="1847088"/>
-            <a:ext cx="3706368" cy="219456"/>
+                  <a:srgbClr val="A0783C"/>
+                </a:solidFill>
+                <a:latin typeface="Calibri"/>
+              </a:rPr>
+              <a:t>Sandía Antigua</a:t>
+            </a:r>
+          </a:p>
+        </p:txBody>
+      </p:sp>
+      <p:sp>
+        <p:nvSpPr>
+          <p:cNvPr id="49" name="TextBox 48"/>
+          <p:cNvSpPr txBox="1"/>
+          <p:nvPr/>
+        </p:nvSpPr>
+        <p:spPr>
+          <a:xfrm>
+            <a:off x="8540496" y="2852745"/>
+            <a:ext cx="3200400" cy="192233"/>
           </a:xfrm>
           <a:prstGeom prst="rect">
             <a:avLst/>
@@ -12580,21 +15033,521 @@
                 </a:solidFill>
                 <a:latin typeface="Calibri"/>
               </a:rPr>
-              <a:t>Cascada</a:t>
-            </a:r>
-          </a:p>
-        </p:txBody>
-      </p:sp>
-      <p:sp>
-        <p:nvSpPr>
-          <p:cNvPr id="22" name="Rounded Rectangle 21"/>
+              <a:t>13.661 m³    43,7 %</a:t>
+            </a:r>
+          </a:p>
+        </p:txBody>
+      </p:sp>
+      <p:sp>
+        <p:nvSpPr>
+          <p:cNvPr id="50" name="Rounded Rectangle 49"/>
           <p:cNvSpPr/>
           <p:nvPr/>
         </p:nvSpPr>
         <p:spPr>
           <a:xfrm>
-            <a:off x="4163568" y="1627632"/>
-            <a:ext cx="3870960" cy="530352"/>
+            <a:off x="8430768" y="3103734"/>
+            <a:ext cx="3419856" cy="369678"/>
+          </a:xfrm>
+          <a:prstGeom prst="roundRect">
+            <a:avLst>
+              <a:gd name="adj" fmla="val 8000"/>
+            </a:avLst>
+          </a:prstGeom>
+          <a:solidFill>
+            <a:srgbClr val="F5F7FA"/>
+          </a:solidFill>
+          <a:ln w="6350">
+            <a:solidFill>
+              <a:srgbClr val="1F77B4"/>
+            </a:solidFill>
+          </a:ln>
+        </p:spPr>
+        <p:style>
+          <a:lnRef idx="1">
+            <a:schemeClr val="accent1"/>
+          </a:lnRef>
+          <a:fillRef idx="3">
+            <a:schemeClr val="accent1"/>
+          </a:fillRef>
+          <a:effectRef idx="2">
+            <a:schemeClr val="accent1"/>
+          </a:effectRef>
+          <a:fontRef idx="minor">
+            <a:schemeClr val="lt1"/>
+          </a:fontRef>
+        </p:style>
+        <p:txBody>
+          <a:bodyPr rtlCol="0" anchor="ctr"/>
+          <a:lstStyle/>
+          <a:p>
+            <a:pPr algn="ctr"/>
+          </a:p>
+        </p:txBody>
+      </p:sp>
+      <p:sp>
+        <p:nvSpPr>
+          <p:cNvPr id="51" name="TextBox 50"/>
+          <p:cNvSpPr txBox="1"/>
+          <p:nvPr/>
+        </p:nvSpPr>
+        <p:spPr>
+          <a:xfrm>
+            <a:off x="8540496" y="3131166"/>
+            <a:ext cx="3200400" cy="155265"/>
+          </a:xfrm>
+          <a:prstGeom prst="rect">
+            <a:avLst/>
+          </a:prstGeom>
+          <a:noFill/>
+        </p:spPr>
+        <p:txBody>
+          <a:bodyPr wrap="square">
+            <a:spAutoFit/>
+          </a:bodyPr>
+          <a:lstStyle/>
+          <a:p>
+            <a:pPr algn="l">
+              <a:spcAft>
+                <a:spcPts val="300"/>
+              </a:spcAft>
+            </a:pPr>
+            <a:r>
+              <a:rPr sz="1000" b="1">
+                <a:solidFill>
+                  <a:srgbClr val="1F77B4"/>
+                </a:solidFill>
+                <a:latin typeface="Calibri"/>
+              </a:rPr>
+              <a:t>Sandía Nueva</a:t>
+            </a:r>
+          </a:p>
+        </p:txBody>
+      </p:sp>
+      <p:sp>
+        <p:nvSpPr>
+          <p:cNvPr id="52" name="TextBox 51"/>
+          <p:cNvSpPr txBox="1"/>
+          <p:nvPr/>
+        </p:nvSpPr>
+        <p:spPr>
+          <a:xfrm>
+            <a:off x="8540496" y="3258999"/>
+            <a:ext cx="3200400" cy="192233"/>
+          </a:xfrm>
+          <a:prstGeom prst="rect">
+            <a:avLst/>
+          </a:prstGeom>
+          <a:noFill/>
+        </p:spPr>
+        <p:txBody>
+          <a:bodyPr wrap="square">
+            <a:spAutoFit/>
+          </a:bodyPr>
+          <a:lstStyle/>
+          <a:p>
+            <a:pPr algn="l">
+              <a:spcAft>
+                <a:spcPts val="300"/>
+              </a:spcAft>
+            </a:pPr>
+            <a:r>
+              <a:rPr sz="1200" b="1">
+                <a:solidFill>
+                  <a:srgbClr val="0D3B66"/>
+                </a:solidFill>
+                <a:latin typeface="Calibri"/>
+              </a:rPr>
+              <a:t>9.619 m³    30,8 %</a:t>
+            </a:r>
+          </a:p>
+        </p:txBody>
+      </p:sp>
+      <p:sp>
+        <p:nvSpPr>
+          <p:cNvPr id="53" name="Rounded Rectangle 52"/>
+          <p:cNvSpPr/>
+          <p:nvPr/>
+        </p:nvSpPr>
+        <p:spPr>
+          <a:xfrm>
+            <a:off x="8430768" y="3509989"/>
+            <a:ext cx="3419856" cy="369678"/>
+          </a:xfrm>
+          <a:prstGeom prst="roundRect">
+            <a:avLst>
+              <a:gd name="adj" fmla="val 8000"/>
+            </a:avLst>
+          </a:prstGeom>
+          <a:solidFill>
+            <a:srgbClr val="F5F7FA"/>
+          </a:solidFill>
+          <a:ln w="6350">
+            <a:solidFill>
+              <a:srgbClr val="46648C"/>
+            </a:solidFill>
+          </a:ln>
+        </p:spPr>
+        <p:style>
+          <a:lnRef idx="1">
+            <a:schemeClr val="accent1"/>
+          </a:lnRef>
+          <a:fillRef idx="3">
+            <a:schemeClr val="accent1"/>
+          </a:fillRef>
+          <a:effectRef idx="2">
+            <a:schemeClr val="accent1"/>
+          </a:effectRef>
+          <a:fontRef idx="minor">
+            <a:schemeClr val="lt1"/>
+          </a:fontRef>
+        </p:style>
+        <p:txBody>
+          <a:bodyPr rtlCol="0" anchor="ctr"/>
+          <a:lstStyle/>
+          <a:p>
+            <a:pPr algn="ctr"/>
+          </a:p>
+        </p:txBody>
+      </p:sp>
+      <p:sp>
+        <p:nvSpPr>
+          <p:cNvPr id="54" name="TextBox 53"/>
+          <p:cNvSpPr txBox="1"/>
+          <p:nvPr/>
+        </p:nvSpPr>
+        <p:spPr>
+          <a:xfrm>
+            <a:off x="8540496" y="3537421"/>
+            <a:ext cx="3200400" cy="155265"/>
+          </a:xfrm>
+          <a:prstGeom prst="rect">
+            <a:avLst/>
+          </a:prstGeom>
+          <a:noFill/>
+        </p:spPr>
+        <p:txBody>
+          <a:bodyPr wrap="square">
+            <a:spAutoFit/>
+          </a:bodyPr>
+          <a:lstStyle/>
+          <a:p>
+            <a:pPr algn="l">
+              <a:spcAft>
+                <a:spcPts val="300"/>
+              </a:spcAft>
+            </a:pPr>
+            <a:r>
+              <a:rPr sz="1000" b="1">
+                <a:solidFill>
+                  <a:srgbClr val="46648C"/>
+                </a:solidFill>
+                <a:latin typeface="Calibri"/>
+              </a:rPr>
+              <a:t>Locales Gast.</a:t>
+            </a:r>
+          </a:p>
+        </p:txBody>
+      </p:sp>
+      <p:sp>
+        <p:nvSpPr>
+          <p:cNvPr id="55" name="TextBox 54"/>
+          <p:cNvSpPr txBox="1"/>
+          <p:nvPr/>
+        </p:nvSpPr>
+        <p:spPr>
+          <a:xfrm>
+            <a:off x="8540496" y="3665254"/>
+            <a:ext cx="3200400" cy="192233"/>
+          </a:xfrm>
+          <a:prstGeom prst="rect">
+            <a:avLst/>
+          </a:prstGeom>
+          <a:noFill/>
+        </p:spPr>
+        <p:txBody>
+          <a:bodyPr wrap="square">
+            <a:spAutoFit/>
+          </a:bodyPr>
+          <a:lstStyle/>
+          <a:p>
+            <a:pPr algn="l">
+              <a:spcAft>
+                <a:spcPts val="300"/>
+              </a:spcAft>
+            </a:pPr>
+            <a:r>
+              <a:rPr sz="1200" b="1">
+                <a:solidFill>
+                  <a:srgbClr val="0D3B66"/>
+                </a:solidFill>
+                <a:latin typeface="Calibri"/>
+              </a:rPr>
+              <a:t>4.583 m³    14,7 %</a:t>
+            </a:r>
+          </a:p>
+        </p:txBody>
+      </p:sp>
+      <p:sp>
+        <p:nvSpPr>
+          <p:cNvPr id="56" name="Rounded Rectangle 55"/>
+          <p:cNvSpPr/>
+          <p:nvPr/>
+        </p:nvSpPr>
+        <p:spPr>
+          <a:xfrm>
+            <a:off x="8430768" y="3916244"/>
+            <a:ext cx="3419856" cy="369678"/>
+          </a:xfrm>
+          <a:prstGeom prst="roundRect">
+            <a:avLst>
+              <a:gd name="adj" fmla="val 8000"/>
+            </a:avLst>
+          </a:prstGeom>
+          <a:solidFill>
+            <a:srgbClr val="F5F7FA"/>
+          </a:solidFill>
+          <a:ln w="6350">
+            <a:solidFill>
+              <a:srgbClr val="8C5A5A"/>
+            </a:solidFill>
+          </a:ln>
+        </p:spPr>
+        <p:style>
+          <a:lnRef idx="1">
+            <a:schemeClr val="accent1"/>
+          </a:lnRef>
+          <a:fillRef idx="3">
+            <a:schemeClr val="accent1"/>
+          </a:fillRef>
+          <a:effectRef idx="2">
+            <a:schemeClr val="accent1"/>
+          </a:effectRef>
+          <a:fontRef idx="minor">
+            <a:schemeClr val="lt1"/>
+          </a:fontRef>
+        </p:style>
+        <p:txBody>
+          <a:bodyPr rtlCol="0" anchor="ctr"/>
+          <a:lstStyle/>
+          <a:p>
+            <a:pPr algn="ctr"/>
+          </a:p>
+        </p:txBody>
+      </p:sp>
+      <p:sp>
+        <p:nvSpPr>
+          <p:cNvPr id="57" name="TextBox 56"/>
+          <p:cNvSpPr txBox="1"/>
+          <p:nvPr/>
+        </p:nvSpPr>
+        <p:spPr>
+          <a:xfrm>
+            <a:off x="8540496" y="3943676"/>
+            <a:ext cx="3200400" cy="155265"/>
+          </a:xfrm>
+          <a:prstGeom prst="rect">
+            <a:avLst/>
+          </a:prstGeom>
+          <a:noFill/>
+        </p:spPr>
+        <p:txBody>
+          <a:bodyPr wrap="square">
+            <a:spAutoFit/>
+          </a:bodyPr>
+          <a:lstStyle/>
+          <a:p>
+            <a:pPr algn="l">
+              <a:spcAft>
+                <a:spcPts val="300"/>
+              </a:spcAft>
+            </a:pPr>
+            <a:r>
+              <a:rPr sz="1000" b="1">
+                <a:solidFill>
+                  <a:srgbClr val="8C5A5A"/>
+                </a:solidFill>
+                <a:latin typeface="Calibri"/>
+              </a:rPr>
+              <a:t>Matriz Andén</a:t>
+            </a:r>
+          </a:p>
+        </p:txBody>
+      </p:sp>
+      <p:sp>
+        <p:nvSpPr>
+          <p:cNvPr id="58" name="TextBox 57"/>
+          <p:cNvSpPr txBox="1"/>
+          <p:nvPr/>
+        </p:nvSpPr>
+        <p:spPr>
+          <a:xfrm>
+            <a:off x="8540496" y="4071509"/>
+            <a:ext cx="3200400" cy="192233"/>
+          </a:xfrm>
+          <a:prstGeom prst="rect">
+            <a:avLst/>
+          </a:prstGeom>
+          <a:noFill/>
+        </p:spPr>
+        <p:txBody>
+          <a:bodyPr wrap="square">
+            <a:spAutoFit/>
+          </a:bodyPr>
+          <a:lstStyle/>
+          <a:p>
+            <a:pPr algn="l">
+              <a:spcAft>
+                <a:spcPts val="300"/>
+              </a:spcAft>
+            </a:pPr>
+            <a:r>
+              <a:rPr sz="1200" b="1">
+                <a:solidFill>
+                  <a:srgbClr val="0D3B66"/>
+                </a:solidFill>
+                <a:latin typeface="Calibri"/>
+              </a:rPr>
+              <a:t>3.086 m³    9,9 %</a:t>
+            </a:r>
+          </a:p>
+        </p:txBody>
+      </p:sp>
+      <p:sp>
+        <p:nvSpPr>
+          <p:cNvPr id="59" name="Rounded Rectangle 58"/>
+          <p:cNvSpPr/>
+          <p:nvPr/>
+        </p:nvSpPr>
+        <p:spPr>
+          <a:xfrm>
+            <a:off x="8430768" y="4322499"/>
+            <a:ext cx="3419856" cy="369678"/>
+          </a:xfrm>
+          <a:prstGeom prst="roundRect">
+            <a:avLst>
+              <a:gd name="adj" fmla="val 8000"/>
+            </a:avLst>
+          </a:prstGeom>
+          <a:solidFill>
+            <a:srgbClr val="F5F7FA"/>
+          </a:solidFill>
+          <a:ln w="6350">
+            <a:solidFill>
+              <a:srgbClr val="508282"/>
+            </a:solidFill>
+          </a:ln>
+        </p:spPr>
+        <p:style>
+          <a:lnRef idx="1">
+            <a:schemeClr val="accent1"/>
+          </a:lnRef>
+          <a:fillRef idx="3">
+            <a:schemeClr val="accent1"/>
+          </a:fillRef>
+          <a:effectRef idx="2">
+            <a:schemeClr val="accent1"/>
+          </a:effectRef>
+          <a:fontRef idx="minor">
+            <a:schemeClr val="lt1"/>
+          </a:fontRef>
+        </p:style>
+        <p:txBody>
+          <a:bodyPr rtlCol="0" anchor="ctr"/>
+          <a:lstStyle/>
+          <a:p>
+            <a:pPr algn="ctr"/>
+          </a:p>
+        </p:txBody>
+      </p:sp>
+      <p:sp>
+        <p:nvSpPr>
+          <p:cNvPr id="60" name="TextBox 59"/>
+          <p:cNvSpPr txBox="1"/>
+          <p:nvPr/>
+        </p:nvSpPr>
+        <p:spPr>
+          <a:xfrm>
+            <a:off x="8540496" y="4349931"/>
+            <a:ext cx="3200400" cy="155265"/>
+          </a:xfrm>
+          <a:prstGeom prst="rect">
+            <a:avLst/>
+          </a:prstGeom>
+          <a:noFill/>
+        </p:spPr>
+        <p:txBody>
+          <a:bodyPr wrap="square">
+            <a:spAutoFit/>
+          </a:bodyPr>
+          <a:lstStyle/>
+          <a:p>
+            <a:pPr algn="l">
+              <a:spcAft>
+                <a:spcPts val="300"/>
+              </a:spcAft>
+            </a:pPr>
+            <a:r>
+              <a:rPr sz="1000" b="1">
+                <a:solidFill>
+                  <a:srgbClr val="508282"/>
+                </a:solidFill>
+                <a:latin typeface="Calibri"/>
+              </a:rPr>
+              <a:t>Pileta</a:t>
+            </a:r>
+          </a:p>
+        </p:txBody>
+      </p:sp>
+      <p:sp>
+        <p:nvSpPr>
+          <p:cNvPr id="61" name="TextBox 60"/>
+          <p:cNvSpPr txBox="1"/>
+          <p:nvPr/>
+        </p:nvSpPr>
+        <p:spPr>
+          <a:xfrm>
+            <a:off x="8540496" y="4477764"/>
+            <a:ext cx="3200400" cy="192233"/>
+          </a:xfrm>
+          <a:prstGeom prst="rect">
+            <a:avLst/>
+          </a:prstGeom>
+          <a:noFill/>
+        </p:spPr>
+        <p:txBody>
+          <a:bodyPr wrap="square">
+            <a:spAutoFit/>
+          </a:bodyPr>
+          <a:lstStyle/>
+          <a:p>
+            <a:pPr algn="l">
+              <a:spcAft>
+                <a:spcPts val="300"/>
+              </a:spcAft>
+            </a:pPr>
+            <a:r>
+              <a:rPr sz="1200" b="1">
+                <a:solidFill>
+                  <a:srgbClr val="0D3B66"/>
+                </a:solidFill>
+                <a:latin typeface="Calibri"/>
+              </a:rPr>
+              <a:t>172 m³    0,5 %</a:t>
+            </a:r>
+          </a:p>
+        </p:txBody>
+      </p:sp>
+      <p:sp>
+        <p:nvSpPr>
+          <p:cNvPr id="62" name="Rounded Rectangle 61"/>
+          <p:cNvSpPr/>
+          <p:nvPr/>
+        </p:nvSpPr>
+        <p:spPr>
+          <a:xfrm>
+            <a:off x="8430768" y="4728754"/>
+            <a:ext cx="3419856" cy="369678"/>
           </a:xfrm>
           <a:prstGeom prst="roundRect">
             <a:avLst>
@@ -12634,14 +15587,14 @@
       </p:sp>
       <p:sp>
         <p:nvSpPr>
-          <p:cNvPr id="23" name="TextBox 22"/>
-          <p:cNvSpPr txBox="1"/>
-          <p:nvPr/>
-        </p:nvSpPr>
-        <p:spPr>
-          <a:xfrm>
-            <a:off x="4255008" y="1664208"/>
-            <a:ext cx="3706368" cy="182880"/>
+          <p:cNvPr id="63" name="TextBox 62"/>
+          <p:cNvSpPr txBox="1"/>
+          <p:nvPr/>
+        </p:nvSpPr>
+        <p:spPr>
+          <a:xfrm>
+            <a:off x="8540496" y="4756186"/>
+            <a:ext cx="3200400" cy="155265"/>
           </a:xfrm>
           <a:prstGeom prst="rect">
             <a:avLst/>
@@ -12662,25 +15615,25 @@
             <a:r>
               <a:rPr sz="1000" b="1">
                 <a:solidFill>
-                  <a:srgbClr val="C9A227"/>
-                </a:solidFill>
-                <a:latin typeface="Calibri"/>
-              </a:rPr>
-              <a:t>000025-28</a:t>
-            </a:r>
-          </a:p>
-        </p:txBody>
-      </p:sp>
-      <p:sp>
-        <p:nvSpPr>
-          <p:cNvPr id="24" name="TextBox 23"/>
-          <p:cNvSpPr txBox="1"/>
-          <p:nvPr/>
-        </p:nvSpPr>
-        <p:spPr>
-          <a:xfrm>
-            <a:off x="4255008" y="1847088"/>
-            <a:ext cx="3706368" cy="219456"/>
+                  <a:srgbClr val="C45C26"/>
+                </a:solidFill>
+                <a:latin typeface="Calibri"/>
+              </a:rPr>
+              <a:t>Restaurante</a:t>
+            </a:r>
+          </a:p>
+        </p:txBody>
+      </p:sp>
+      <p:sp>
+        <p:nvSpPr>
+          <p:cNvPr id="64" name="TextBox 63"/>
+          <p:cNvSpPr txBox="1"/>
+          <p:nvPr/>
+        </p:nvSpPr>
+        <p:spPr>
+          <a:xfrm>
+            <a:off x="8540496" y="4884019"/>
+            <a:ext cx="3200400" cy="192233"/>
           </a:xfrm>
           <a:prstGeom prst="rect">
             <a:avLst/>
@@ -12705,1090 +15658,21 @@
                 </a:solidFill>
                 <a:latin typeface="Calibri"/>
               </a:rPr>
-              <a:t>Sandía Nueva</a:t>
-            </a:r>
-          </a:p>
-        </p:txBody>
-      </p:sp>
-      <p:sp>
-        <p:nvSpPr>
-          <p:cNvPr id="25" name="Rounded Rectangle 24"/>
+              <a:t>98 m³    0,3 %</a:t>
+            </a:r>
+          </a:p>
+        </p:txBody>
+      </p:sp>
+      <p:sp>
+        <p:nvSpPr>
+          <p:cNvPr id="65" name="Rounded Rectangle 64"/>
           <p:cNvSpPr/>
           <p:nvPr/>
         </p:nvSpPr>
         <p:spPr>
           <a:xfrm>
-            <a:off x="8125968" y="1627632"/>
-            <a:ext cx="3870960" cy="530352"/>
-          </a:xfrm>
-          <a:prstGeom prst="roundRect">
-            <a:avLst>
-              <a:gd name="adj" fmla="val 8000"/>
-            </a:avLst>
-          </a:prstGeom>
-          <a:solidFill>
-            <a:srgbClr val="F5F7FA"/>
-          </a:solidFill>
-          <a:ln w="6350">
-            <a:solidFill>
-              <a:srgbClr val="C9A227"/>
-            </a:solidFill>
-          </a:ln>
-        </p:spPr>
-        <p:style>
-          <a:lnRef idx="1">
-            <a:schemeClr val="accent1"/>
-          </a:lnRef>
-          <a:fillRef idx="3">
-            <a:schemeClr val="accent1"/>
-          </a:fillRef>
-          <a:effectRef idx="2">
-            <a:schemeClr val="accent1"/>
-          </a:effectRef>
-          <a:fontRef idx="minor">
-            <a:schemeClr val="lt1"/>
-          </a:fontRef>
-        </p:style>
-        <p:txBody>
-          <a:bodyPr rtlCol="0" anchor="ctr"/>
-          <a:lstStyle/>
-          <a:p>
-            <a:pPr algn="ctr"/>
-          </a:p>
-        </p:txBody>
-      </p:sp>
-      <p:sp>
-        <p:nvSpPr>
-          <p:cNvPr id="26" name="TextBox 25"/>
-          <p:cNvSpPr txBox="1"/>
-          <p:nvPr/>
-        </p:nvSpPr>
-        <p:spPr>
-          <a:xfrm>
-            <a:off x="8217408" y="1664208"/>
-            <a:ext cx="3706368" cy="182880"/>
-          </a:xfrm>
-          <a:prstGeom prst="rect">
-            <a:avLst/>
-          </a:prstGeom>
-          <a:noFill/>
-        </p:spPr>
-        <p:txBody>
-          <a:bodyPr wrap="square">
-            <a:spAutoFit/>
-          </a:bodyPr>
-          <a:lstStyle/>
-          <a:p>
-            <a:pPr algn="l">
-              <a:spcAft>
-                <a:spcPts val="300"/>
-              </a:spcAft>
-            </a:pPr>
-            <a:r>
-              <a:rPr sz="1000" b="1">
-                <a:solidFill>
-                  <a:srgbClr val="C9A227"/>
-                </a:solidFill>
-                <a:latin typeface="Calibri"/>
-              </a:rPr>
-              <a:t>000025-29</a:t>
-            </a:r>
-          </a:p>
-        </p:txBody>
-      </p:sp>
-      <p:sp>
-        <p:nvSpPr>
-          <p:cNvPr id="27" name="TextBox 26"/>
-          <p:cNvSpPr txBox="1"/>
-          <p:nvPr/>
-        </p:nvSpPr>
-        <p:spPr>
-          <a:xfrm>
-            <a:off x="8217408" y="1847088"/>
-            <a:ext cx="3706368" cy="219456"/>
-          </a:xfrm>
-          <a:prstGeom prst="rect">
-            <a:avLst/>
-          </a:prstGeom>
-          <a:noFill/>
-        </p:spPr>
-        <p:txBody>
-          <a:bodyPr wrap="square">
-            <a:spAutoFit/>
-          </a:bodyPr>
-          <a:lstStyle/>
-          <a:p>
-            <a:pPr algn="l">
-              <a:spcAft>
-                <a:spcPts val="300"/>
-              </a:spcAft>
-            </a:pPr>
-            <a:r>
-              <a:rPr sz="1200" b="1">
-                <a:solidFill>
-                  <a:srgbClr val="0D3B66"/>
-                </a:solidFill>
-                <a:latin typeface="Calibri"/>
-              </a:rPr>
-              <a:t>Restaurante</a:t>
-            </a:r>
-          </a:p>
-        </p:txBody>
-      </p:sp>
-      <p:sp>
-        <p:nvSpPr>
-          <p:cNvPr id="28" name="Rounded Rectangle 27"/>
-          <p:cNvSpPr/>
-          <p:nvPr/>
-        </p:nvSpPr>
-        <p:spPr>
-          <a:xfrm>
-            <a:off x="201168" y="2267712"/>
-            <a:ext cx="7973568" cy="3346703"/>
-          </a:xfrm>
-          <a:prstGeom prst="roundRect">
-            <a:avLst>
-              <a:gd name="adj" fmla="val 8000"/>
-            </a:avLst>
-          </a:prstGeom>
-          <a:solidFill>
-            <a:srgbClr val="F5F7FA"/>
-          </a:solidFill>
-          <a:ln>
-            <a:noFill/>
-          </a:ln>
-        </p:spPr>
-        <p:style>
-          <a:lnRef idx="1">
-            <a:schemeClr val="accent1"/>
-          </a:lnRef>
-          <a:fillRef idx="3">
-            <a:schemeClr val="accent1"/>
-          </a:fillRef>
-          <a:effectRef idx="2">
-            <a:schemeClr val="accent1"/>
-          </a:effectRef>
-          <a:fontRef idx="minor">
-            <a:schemeClr val="lt1"/>
-          </a:fontRef>
-        </p:style>
-        <p:txBody>
-          <a:bodyPr rtlCol="0" anchor="ctr"/>
-          <a:lstStyle/>
-          <a:p>
-            <a:pPr algn="ctr"/>
-          </a:p>
-        </p:txBody>
-      </p:sp>
-      <p:pic>
-        <p:nvPicPr>
-          <p:cNvPr id="29" name="Picture 28" descr="pak_mensual_may_ago.png"/>
-          <p:cNvPicPr>
-            <a:picLocks noChangeAspect="1"/>
-          </p:cNvPicPr>
-          <p:nvPr/>
-        </p:nvPicPr>
-        <p:blipFill>
-          <a:blip r:embed="rId3"/>
-          <a:stretch>
-            <a:fillRect/>
-          </a:stretch>
-        </p:blipFill>
-        <p:spPr>
-          <a:xfrm>
-            <a:off x="329184" y="2340864"/>
-            <a:ext cx="7717536" cy="3904585"/>
-          </a:xfrm>
-          <a:prstGeom prst="rect">
-            <a:avLst/>
-          </a:prstGeom>
-        </p:spPr>
-      </p:pic>
-      <p:sp>
-        <p:nvSpPr>
-          <p:cNvPr id="30" name="Rounded Rectangle 29"/>
-          <p:cNvSpPr/>
-          <p:nvPr/>
-        </p:nvSpPr>
-        <p:spPr>
-          <a:xfrm>
-            <a:off x="8302752" y="2267712"/>
-            <a:ext cx="3675887" cy="3346703"/>
-          </a:xfrm>
-          <a:prstGeom prst="roundRect">
-            <a:avLst>
-              <a:gd name="adj" fmla="val 8000"/>
-            </a:avLst>
-          </a:prstGeom>
-          <a:solidFill>
-            <a:srgbClr val="FFFFFF"/>
-          </a:solidFill>
-          <a:ln w="6350">
-            <a:solidFill>
-              <a:srgbClr val="1F77B4"/>
-            </a:solidFill>
-          </a:ln>
-        </p:spPr>
-        <p:style>
-          <a:lnRef idx="1">
-            <a:schemeClr val="accent1"/>
-          </a:lnRef>
-          <a:fillRef idx="3">
-            <a:schemeClr val="accent1"/>
-          </a:fillRef>
-          <a:effectRef idx="2">
-            <a:schemeClr val="accent1"/>
-          </a:effectRef>
-          <a:fontRef idx="minor">
-            <a:schemeClr val="lt1"/>
-          </a:fontRef>
-        </p:style>
-        <p:txBody>
-          <a:bodyPr rtlCol="0" anchor="ctr"/>
-          <a:lstStyle/>
-          <a:p>
-            <a:pPr algn="ctr"/>
-          </a:p>
-        </p:txBody>
-      </p:sp>
-      <p:sp>
-        <p:nvSpPr>
-          <p:cNvPr id="31" name="TextBox 30"/>
-          <p:cNvSpPr txBox="1"/>
-          <p:nvPr/>
-        </p:nvSpPr>
-        <p:spPr>
-          <a:xfrm>
-            <a:off x="8430768" y="2322576"/>
-            <a:ext cx="3419856" cy="182880"/>
-          </a:xfrm>
-          <a:prstGeom prst="rect">
-            <a:avLst/>
-          </a:prstGeom>
-          <a:noFill/>
-        </p:spPr>
-        <p:txBody>
-          <a:bodyPr wrap="square">
-            <a:spAutoFit/>
-          </a:bodyPr>
-          <a:lstStyle/>
-          <a:p>
-            <a:pPr algn="l">
-              <a:spcAft>
-                <a:spcPts val="300"/>
-              </a:spcAft>
-            </a:pPr>
-            <a:r>
-              <a:rPr sz="1100" b="1">
-                <a:solidFill>
-                  <a:srgbClr val="1F77B4"/>
-                </a:solidFill>
-                <a:latin typeface="Calibri"/>
-              </a:rPr>
-              <a:t>JULIO · cabecera</a:t>
-            </a:r>
-          </a:p>
-        </p:txBody>
-      </p:sp>
-      <p:sp>
-        <p:nvSpPr>
-          <p:cNvPr id="32" name="TextBox 31"/>
-          <p:cNvSpPr txBox="1"/>
-          <p:nvPr/>
-        </p:nvSpPr>
-        <p:spPr>
-          <a:xfrm>
-            <a:off x="8430768" y="2505456"/>
-            <a:ext cx="3419856" cy="219456"/>
-          </a:xfrm>
-          <a:prstGeom prst="rect">
-            <a:avLst/>
-          </a:prstGeom>
-          <a:noFill/>
-        </p:spPr>
-        <p:txBody>
-          <a:bodyPr wrap="square">
-            <a:spAutoFit/>
-          </a:bodyPr>
-          <a:lstStyle/>
-          <a:p>
-            <a:pPr algn="l">
-              <a:spcAft>
-                <a:spcPts val="300"/>
-              </a:spcAft>
-            </a:pPr>
-            <a:r>
-              <a:rPr sz="1200" b="0">
-                <a:solidFill>
-                  <a:srgbClr val="5A5A5A"/>
-                </a:solidFill>
-                <a:latin typeface="Calibri"/>
-              </a:rPr>
-              <a:t>El recinto sumó 31.239 m³</a:t>
-            </a:r>
-          </a:p>
-        </p:txBody>
-      </p:sp>
-      <p:sp>
-        <p:nvSpPr>
-          <p:cNvPr id="33" name="Rounded Rectangle 32"/>
-          <p:cNvSpPr/>
-          <p:nvPr/>
-        </p:nvSpPr>
-        <p:spPr>
-          <a:xfrm>
-            <a:off x="8430768" y="2743200"/>
-            <a:ext cx="3419856" cy="363147"/>
-          </a:xfrm>
-          <a:prstGeom prst="roundRect">
-            <a:avLst>
-              <a:gd name="adj" fmla="val 8000"/>
-            </a:avLst>
-          </a:prstGeom>
-          <a:solidFill>
-            <a:srgbClr val="F5F7FA"/>
-          </a:solidFill>
-          <a:ln w="6350">
-            <a:solidFill>
-              <a:srgbClr val="A0783C"/>
-            </a:solidFill>
-          </a:ln>
-        </p:spPr>
-        <p:style>
-          <a:lnRef idx="1">
-            <a:schemeClr val="accent1"/>
-          </a:lnRef>
-          <a:fillRef idx="3">
-            <a:schemeClr val="accent1"/>
-          </a:fillRef>
-          <a:effectRef idx="2">
-            <a:schemeClr val="accent1"/>
-          </a:effectRef>
-          <a:fontRef idx="minor">
-            <a:schemeClr val="lt1"/>
-          </a:fontRef>
-        </p:style>
-        <p:txBody>
-          <a:bodyPr rtlCol="0" anchor="ctr"/>
-          <a:lstStyle/>
-          <a:p>
-            <a:pPr algn="ctr"/>
-          </a:p>
-        </p:txBody>
-      </p:sp>
-      <p:sp>
-        <p:nvSpPr>
-          <p:cNvPr id="34" name="TextBox 33"/>
-          <p:cNvSpPr txBox="1"/>
-          <p:nvPr/>
-        </p:nvSpPr>
-        <p:spPr>
-          <a:xfrm>
-            <a:off x="8540496" y="2779776"/>
-            <a:ext cx="3200400" cy="182880"/>
-          </a:xfrm>
-          <a:prstGeom prst="rect">
-            <a:avLst/>
-          </a:prstGeom>
-          <a:noFill/>
-        </p:spPr>
-        <p:txBody>
-          <a:bodyPr wrap="square">
-            <a:spAutoFit/>
-          </a:bodyPr>
-          <a:lstStyle/>
-          <a:p>
-            <a:pPr algn="l">
-              <a:spcAft>
-                <a:spcPts val="300"/>
-              </a:spcAft>
-            </a:pPr>
-            <a:r>
-              <a:rPr sz="1100" b="1">
-                <a:solidFill>
-                  <a:srgbClr val="A0783C"/>
-                </a:solidFill>
-                <a:latin typeface="Calibri"/>
-              </a:rPr>
-              <a:t>Sandía Antigua</a:t>
-            </a:r>
-          </a:p>
-        </p:txBody>
-      </p:sp>
-      <p:sp>
-        <p:nvSpPr>
-          <p:cNvPr id="35" name="TextBox 34"/>
-          <p:cNvSpPr txBox="1"/>
-          <p:nvPr/>
-        </p:nvSpPr>
-        <p:spPr>
-          <a:xfrm>
-            <a:off x="8540496" y="2895721"/>
-            <a:ext cx="3200400" cy="292608"/>
-          </a:xfrm>
-          <a:prstGeom prst="rect">
-            <a:avLst/>
-          </a:prstGeom>
-          <a:noFill/>
-        </p:spPr>
-        <p:txBody>
-          <a:bodyPr wrap="square">
-            <a:spAutoFit/>
-          </a:bodyPr>
-          <a:lstStyle/>
-          <a:p>
-            <a:pPr algn="l">
-              <a:spcAft>
-                <a:spcPts val="300"/>
-              </a:spcAft>
-            </a:pPr>
-            <a:r>
-              <a:rPr sz="1300" b="1">
-                <a:solidFill>
-                  <a:srgbClr val="0D3B66"/>
-                </a:solidFill>
-                <a:latin typeface="Calibri"/>
-              </a:rPr>
-              <a:t>13.661 m³    43,7 %</a:t>
-            </a:r>
-          </a:p>
-        </p:txBody>
-      </p:sp>
-      <p:sp>
-        <p:nvSpPr>
-          <p:cNvPr id="36" name="Rounded Rectangle 35"/>
-          <p:cNvSpPr/>
-          <p:nvPr/>
-        </p:nvSpPr>
-        <p:spPr>
-          <a:xfrm>
-            <a:off x="8430768" y="3142923"/>
-            <a:ext cx="3419856" cy="363147"/>
-          </a:xfrm>
-          <a:prstGeom prst="roundRect">
-            <a:avLst>
-              <a:gd name="adj" fmla="val 8000"/>
-            </a:avLst>
-          </a:prstGeom>
-          <a:solidFill>
-            <a:srgbClr val="F5F7FA"/>
-          </a:solidFill>
-          <a:ln w="6350">
-            <a:solidFill>
-              <a:srgbClr val="C45C26"/>
-            </a:solidFill>
-          </a:ln>
-        </p:spPr>
-        <p:style>
-          <a:lnRef idx="1">
-            <a:schemeClr val="accent1"/>
-          </a:lnRef>
-          <a:fillRef idx="3">
-            <a:schemeClr val="accent1"/>
-          </a:fillRef>
-          <a:effectRef idx="2">
-            <a:schemeClr val="accent1"/>
-          </a:effectRef>
-          <a:fontRef idx="minor">
-            <a:schemeClr val="lt1"/>
-          </a:fontRef>
-        </p:style>
-        <p:txBody>
-          <a:bodyPr rtlCol="0" anchor="ctr"/>
-          <a:lstStyle/>
-          <a:p>
-            <a:pPr algn="ctr"/>
-          </a:p>
-        </p:txBody>
-      </p:sp>
-      <p:sp>
-        <p:nvSpPr>
-          <p:cNvPr id="37" name="TextBox 36"/>
-          <p:cNvSpPr txBox="1"/>
-          <p:nvPr/>
-        </p:nvSpPr>
-        <p:spPr>
-          <a:xfrm>
-            <a:off x="8540496" y="3179499"/>
-            <a:ext cx="3200400" cy="182880"/>
-          </a:xfrm>
-          <a:prstGeom prst="rect">
-            <a:avLst/>
-          </a:prstGeom>
-          <a:noFill/>
-        </p:spPr>
-        <p:txBody>
-          <a:bodyPr wrap="square">
-            <a:spAutoFit/>
-          </a:bodyPr>
-          <a:lstStyle/>
-          <a:p>
-            <a:pPr algn="l">
-              <a:spcAft>
-                <a:spcPts val="300"/>
-              </a:spcAft>
-            </a:pPr>
-            <a:r>
-              <a:rPr sz="1100" b="1">
-                <a:solidFill>
-                  <a:srgbClr val="C45C26"/>
-                </a:solidFill>
-                <a:latin typeface="Calibri"/>
-              </a:rPr>
-              <a:t>Sandía Nueva</a:t>
-            </a:r>
-          </a:p>
-        </p:txBody>
-      </p:sp>
-      <p:sp>
-        <p:nvSpPr>
-          <p:cNvPr id="38" name="TextBox 37"/>
-          <p:cNvSpPr txBox="1"/>
-          <p:nvPr/>
-        </p:nvSpPr>
-        <p:spPr>
-          <a:xfrm>
-            <a:off x="8540496" y="3295445"/>
-            <a:ext cx="3200400" cy="292608"/>
-          </a:xfrm>
-          <a:prstGeom prst="rect">
-            <a:avLst/>
-          </a:prstGeom>
-          <a:noFill/>
-        </p:spPr>
-        <p:txBody>
-          <a:bodyPr wrap="square">
-            <a:spAutoFit/>
-          </a:bodyPr>
-          <a:lstStyle/>
-          <a:p>
-            <a:pPr algn="l">
-              <a:spcAft>
-                <a:spcPts val="300"/>
-              </a:spcAft>
-            </a:pPr>
-            <a:r>
-              <a:rPr sz="1300" b="1">
-                <a:solidFill>
-                  <a:srgbClr val="0D3B66"/>
-                </a:solidFill>
-                <a:latin typeface="Calibri"/>
-              </a:rPr>
-              <a:t>9.619 m³    30,8 %</a:t>
-            </a:r>
-          </a:p>
-        </p:txBody>
-      </p:sp>
-      <p:sp>
-        <p:nvSpPr>
-          <p:cNvPr id="39" name="Rounded Rectangle 38"/>
-          <p:cNvSpPr/>
-          <p:nvPr/>
-        </p:nvSpPr>
-        <p:spPr>
-          <a:xfrm>
-            <a:off x="8430768" y="3542646"/>
-            <a:ext cx="3419856" cy="363147"/>
-          </a:xfrm>
-          <a:prstGeom prst="roundRect">
-            <a:avLst>
-              <a:gd name="adj" fmla="val 8000"/>
-            </a:avLst>
-          </a:prstGeom>
-          <a:solidFill>
-            <a:srgbClr val="F5F7FA"/>
-          </a:solidFill>
-          <a:ln w="6350">
-            <a:solidFill>
-              <a:srgbClr val="46648C"/>
-            </a:solidFill>
-          </a:ln>
-        </p:spPr>
-        <p:style>
-          <a:lnRef idx="1">
-            <a:schemeClr val="accent1"/>
-          </a:lnRef>
-          <a:fillRef idx="3">
-            <a:schemeClr val="accent1"/>
-          </a:fillRef>
-          <a:effectRef idx="2">
-            <a:schemeClr val="accent1"/>
-          </a:effectRef>
-          <a:fontRef idx="minor">
-            <a:schemeClr val="lt1"/>
-          </a:fontRef>
-        </p:style>
-        <p:txBody>
-          <a:bodyPr rtlCol="0" anchor="ctr"/>
-          <a:lstStyle/>
-          <a:p>
-            <a:pPr algn="ctr"/>
-          </a:p>
-        </p:txBody>
-      </p:sp>
-      <p:sp>
-        <p:nvSpPr>
-          <p:cNvPr id="40" name="TextBox 39"/>
-          <p:cNvSpPr txBox="1"/>
-          <p:nvPr/>
-        </p:nvSpPr>
-        <p:spPr>
-          <a:xfrm>
-            <a:off x="8540496" y="3579222"/>
-            <a:ext cx="3200400" cy="182880"/>
-          </a:xfrm>
-          <a:prstGeom prst="rect">
-            <a:avLst/>
-          </a:prstGeom>
-          <a:noFill/>
-        </p:spPr>
-        <p:txBody>
-          <a:bodyPr wrap="square">
-            <a:spAutoFit/>
-          </a:bodyPr>
-          <a:lstStyle/>
-          <a:p>
-            <a:pPr algn="l">
-              <a:spcAft>
-                <a:spcPts val="300"/>
-              </a:spcAft>
-            </a:pPr>
-            <a:r>
-              <a:rPr sz="1100" b="1">
-                <a:solidFill>
-                  <a:srgbClr val="46648C"/>
-                </a:solidFill>
-                <a:latin typeface="Calibri"/>
-              </a:rPr>
-              <a:t>Locales Gast.</a:t>
-            </a:r>
-          </a:p>
-        </p:txBody>
-      </p:sp>
-      <p:sp>
-        <p:nvSpPr>
-          <p:cNvPr id="41" name="TextBox 40"/>
-          <p:cNvSpPr txBox="1"/>
-          <p:nvPr/>
-        </p:nvSpPr>
-        <p:spPr>
-          <a:xfrm>
-            <a:off x="8540496" y="3695168"/>
-            <a:ext cx="3200400" cy="292608"/>
-          </a:xfrm>
-          <a:prstGeom prst="rect">
-            <a:avLst/>
-          </a:prstGeom>
-          <a:noFill/>
-        </p:spPr>
-        <p:txBody>
-          <a:bodyPr wrap="square">
-            <a:spAutoFit/>
-          </a:bodyPr>
-          <a:lstStyle/>
-          <a:p>
-            <a:pPr algn="l">
-              <a:spcAft>
-                <a:spcPts val="300"/>
-              </a:spcAft>
-            </a:pPr>
-            <a:r>
-              <a:rPr sz="1300" b="1">
-                <a:solidFill>
-                  <a:srgbClr val="0D3B66"/>
-                </a:solidFill>
-                <a:latin typeface="Calibri"/>
-              </a:rPr>
-              <a:t>4.583 m³    14,7 %</a:t>
-            </a:r>
-          </a:p>
-        </p:txBody>
-      </p:sp>
-      <p:sp>
-        <p:nvSpPr>
-          <p:cNvPr id="42" name="Rounded Rectangle 41"/>
-          <p:cNvSpPr/>
-          <p:nvPr/>
-        </p:nvSpPr>
-        <p:spPr>
-          <a:xfrm>
-            <a:off x="8430768" y="3942370"/>
-            <a:ext cx="3419856" cy="363147"/>
-          </a:xfrm>
-          <a:prstGeom prst="roundRect">
-            <a:avLst>
-              <a:gd name="adj" fmla="val 8000"/>
-            </a:avLst>
-          </a:prstGeom>
-          <a:solidFill>
-            <a:srgbClr val="F5F7FA"/>
-          </a:solidFill>
-          <a:ln w="6350">
-            <a:solidFill>
-              <a:srgbClr val="8C5A5A"/>
-            </a:solidFill>
-          </a:ln>
-        </p:spPr>
-        <p:style>
-          <a:lnRef idx="1">
-            <a:schemeClr val="accent1"/>
-          </a:lnRef>
-          <a:fillRef idx="3">
-            <a:schemeClr val="accent1"/>
-          </a:fillRef>
-          <a:effectRef idx="2">
-            <a:schemeClr val="accent1"/>
-          </a:effectRef>
-          <a:fontRef idx="minor">
-            <a:schemeClr val="lt1"/>
-          </a:fontRef>
-        </p:style>
-        <p:txBody>
-          <a:bodyPr rtlCol="0" anchor="ctr"/>
-          <a:lstStyle/>
-          <a:p>
-            <a:pPr algn="ctr"/>
-          </a:p>
-        </p:txBody>
-      </p:sp>
-      <p:sp>
-        <p:nvSpPr>
-          <p:cNvPr id="43" name="TextBox 42"/>
-          <p:cNvSpPr txBox="1"/>
-          <p:nvPr/>
-        </p:nvSpPr>
-        <p:spPr>
-          <a:xfrm>
-            <a:off x="8540496" y="3978946"/>
-            <a:ext cx="3200400" cy="182880"/>
-          </a:xfrm>
-          <a:prstGeom prst="rect">
-            <a:avLst/>
-          </a:prstGeom>
-          <a:noFill/>
-        </p:spPr>
-        <p:txBody>
-          <a:bodyPr wrap="square">
-            <a:spAutoFit/>
-          </a:bodyPr>
-          <a:lstStyle/>
-          <a:p>
-            <a:pPr algn="l">
-              <a:spcAft>
-                <a:spcPts val="300"/>
-              </a:spcAft>
-            </a:pPr>
-            <a:r>
-              <a:rPr sz="1100" b="1">
-                <a:solidFill>
-                  <a:srgbClr val="8C5A5A"/>
-                </a:solidFill>
-                <a:latin typeface="Calibri"/>
-              </a:rPr>
-              <a:t>Matriz Andén</a:t>
-            </a:r>
-          </a:p>
-        </p:txBody>
-      </p:sp>
-      <p:sp>
-        <p:nvSpPr>
-          <p:cNvPr id="44" name="TextBox 43"/>
-          <p:cNvSpPr txBox="1"/>
-          <p:nvPr/>
-        </p:nvSpPr>
-        <p:spPr>
-          <a:xfrm>
-            <a:off x="8540496" y="4094892"/>
-            <a:ext cx="3200400" cy="292608"/>
-          </a:xfrm>
-          <a:prstGeom prst="rect">
-            <a:avLst/>
-          </a:prstGeom>
-          <a:noFill/>
-        </p:spPr>
-        <p:txBody>
-          <a:bodyPr wrap="square">
-            <a:spAutoFit/>
-          </a:bodyPr>
-          <a:lstStyle/>
-          <a:p>
-            <a:pPr algn="l">
-              <a:spcAft>
-                <a:spcPts val="300"/>
-              </a:spcAft>
-            </a:pPr>
-            <a:r>
-              <a:rPr sz="1300" b="1">
-                <a:solidFill>
-                  <a:srgbClr val="0D3B66"/>
-                </a:solidFill>
-                <a:latin typeface="Calibri"/>
-              </a:rPr>
-              <a:t>3.086 m³    9,9 %</a:t>
-            </a:r>
-          </a:p>
-        </p:txBody>
-      </p:sp>
-      <p:sp>
-        <p:nvSpPr>
-          <p:cNvPr id="45" name="Rounded Rectangle 44"/>
-          <p:cNvSpPr/>
-          <p:nvPr/>
-        </p:nvSpPr>
-        <p:spPr>
-          <a:xfrm>
-            <a:off x="8430768" y="4342093"/>
-            <a:ext cx="3419856" cy="363147"/>
-          </a:xfrm>
-          <a:prstGeom prst="roundRect">
-            <a:avLst>
-              <a:gd name="adj" fmla="val 8000"/>
-            </a:avLst>
-          </a:prstGeom>
-          <a:solidFill>
-            <a:srgbClr val="F5F7FA"/>
-          </a:solidFill>
-          <a:ln w="6350">
-            <a:solidFill>
-              <a:srgbClr val="508282"/>
-            </a:solidFill>
-          </a:ln>
-        </p:spPr>
-        <p:style>
-          <a:lnRef idx="1">
-            <a:schemeClr val="accent1"/>
-          </a:lnRef>
-          <a:fillRef idx="3">
-            <a:schemeClr val="accent1"/>
-          </a:fillRef>
-          <a:effectRef idx="2">
-            <a:schemeClr val="accent1"/>
-          </a:effectRef>
-          <a:fontRef idx="minor">
-            <a:schemeClr val="lt1"/>
-          </a:fontRef>
-        </p:style>
-        <p:txBody>
-          <a:bodyPr rtlCol="0" anchor="ctr"/>
-          <a:lstStyle/>
-          <a:p>
-            <a:pPr algn="ctr"/>
-          </a:p>
-        </p:txBody>
-      </p:sp>
-      <p:sp>
-        <p:nvSpPr>
-          <p:cNvPr id="46" name="TextBox 45"/>
-          <p:cNvSpPr txBox="1"/>
-          <p:nvPr/>
-        </p:nvSpPr>
-        <p:spPr>
-          <a:xfrm>
-            <a:off x="8540496" y="4378669"/>
-            <a:ext cx="3200400" cy="182880"/>
-          </a:xfrm>
-          <a:prstGeom prst="rect">
-            <a:avLst/>
-          </a:prstGeom>
-          <a:noFill/>
-        </p:spPr>
-        <p:txBody>
-          <a:bodyPr wrap="square">
-            <a:spAutoFit/>
-          </a:bodyPr>
-          <a:lstStyle/>
-          <a:p>
-            <a:pPr algn="l">
-              <a:spcAft>
-                <a:spcPts val="300"/>
-              </a:spcAft>
-            </a:pPr>
-            <a:r>
-              <a:rPr sz="1100" b="1">
-                <a:solidFill>
-                  <a:srgbClr val="508282"/>
-                </a:solidFill>
-                <a:latin typeface="Calibri"/>
-              </a:rPr>
-              <a:t>Pileta</a:t>
-            </a:r>
-          </a:p>
-        </p:txBody>
-      </p:sp>
-      <p:sp>
-        <p:nvSpPr>
-          <p:cNvPr id="47" name="TextBox 46"/>
-          <p:cNvSpPr txBox="1"/>
-          <p:nvPr/>
-        </p:nvSpPr>
-        <p:spPr>
-          <a:xfrm>
-            <a:off x="8540496" y="4494615"/>
-            <a:ext cx="3200400" cy="292608"/>
-          </a:xfrm>
-          <a:prstGeom prst="rect">
-            <a:avLst/>
-          </a:prstGeom>
-          <a:noFill/>
-        </p:spPr>
-        <p:txBody>
-          <a:bodyPr wrap="square">
-            <a:spAutoFit/>
-          </a:bodyPr>
-          <a:lstStyle/>
-          <a:p>
-            <a:pPr algn="l">
-              <a:spcAft>
-                <a:spcPts val="300"/>
-              </a:spcAft>
-            </a:pPr>
-            <a:r>
-              <a:rPr sz="1300" b="1">
-                <a:solidFill>
-                  <a:srgbClr val="0D3B66"/>
-                </a:solidFill>
-                <a:latin typeface="Calibri"/>
-              </a:rPr>
-              <a:t>172 m³    0,5 %</a:t>
-            </a:r>
-          </a:p>
-        </p:txBody>
-      </p:sp>
-      <p:sp>
-        <p:nvSpPr>
-          <p:cNvPr id="48" name="Rounded Rectangle 47"/>
-          <p:cNvSpPr/>
-          <p:nvPr/>
-        </p:nvSpPr>
-        <p:spPr>
-          <a:xfrm>
-            <a:off x="8430768" y="4741817"/>
-            <a:ext cx="3419856" cy="363147"/>
-          </a:xfrm>
-          <a:prstGeom prst="roundRect">
-            <a:avLst>
-              <a:gd name="adj" fmla="val 8000"/>
-            </a:avLst>
-          </a:prstGeom>
-          <a:solidFill>
-            <a:srgbClr val="F5F7FA"/>
-          </a:solidFill>
-          <a:ln w="6350">
-            <a:solidFill>
-              <a:srgbClr val="C9A227"/>
-            </a:solidFill>
-          </a:ln>
-        </p:spPr>
-        <p:style>
-          <a:lnRef idx="1">
-            <a:schemeClr val="accent1"/>
-          </a:lnRef>
-          <a:fillRef idx="3">
-            <a:schemeClr val="accent1"/>
-          </a:fillRef>
-          <a:effectRef idx="2">
-            <a:schemeClr val="accent1"/>
-          </a:effectRef>
-          <a:fontRef idx="minor">
-            <a:schemeClr val="lt1"/>
-          </a:fontRef>
-        </p:style>
-        <p:txBody>
-          <a:bodyPr rtlCol="0" anchor="ctr"/>
-          <a:lstStyle/>
-          <a:p>
-            <a:pPr algn="ctr"/>
-          </a:p>
-        </p:txBody>
-      </p:sp>
-      <p:sp>
-        <p:nvSpPr>
-          <p:cNvPr id="49" name="TextBox 48"/>
-          <p:cNvSpPr txBox="1"/>
-          <p:nvPr/>
-        </p:nvSpPr>
-        <p:spPr>
-          <a:xfrm>
-            <a:off x="8540496" y="4778393"/>
-            <a:ext cx="3200400" cy="182880"/>
-          </a:xfrm>
-          <a:prstGeom prst="rect">
-            <a:avLst/>
-          </a:prstGeom>
-          <a:noFill/>
-        </p:spPr>
-        <p:txBody>
-          <a:bodyPr wrap="square">
-            <a:spAutoFit/>
-          </a:bodyPr>
-          <a:lstStyle/>
-          <a:p>
-            <a:pPr algn="l">
-              <a:spcAft>
-                <a:spcPts val="300"/>
-              </a:spcAft>
-            </a:pPr>
-            <a:r>
-              <a:rPr sz="1100" b="1">
-                <a:solidFill>
-                  <a:srgbClr val="C9A227"/>
-                </a:solidFill>
-                <a:latin typeface="Calibri"/>
-              </a:rPr>
-              <a:t>Restaurante</a:t>
-            </a:r>
-          </a:p>
-        </p:txBody>
-      </p:sp>
-      <p:sp>
-        <p:nvSpPr>
-          <p:cNvPr id="50" name="TextBox 49"/>
-          <p:cNvSpPr txBox="1"/>
-          <p:nvPr/>
-        </p:nvSpPr>
-        <p:spPr>
-          <a:xfrm>
-            <a:off x="8540496" y="4894339"/>
-            <a:ext cx="3200400" cy="292608"/>
-          </a:xfrm>
-          <a:prstGeom prst="rect">
-            <a:avLst/>
-          </a:prstGeom>
-          <a:noFill/>
-        </p:spPr>
-        <p:txBody>
-          <a:bodyPr wrap="square">
-            <a:spAutoFit/>
-          </a:bodyPr>
-          <a:lstStyle/>
-          <a:p>
-            <a:pPr algn="l">
-              <a:spcAft>
-                <a:spcPts val="300"/>
-              </a:spcAft>
-            </a:pPr>
-            <a:r>
-              <a:rPr sz="1300" b="1">
-                <a:solidFill>
-                  <a:srgbClr val="0D3B66"/>
-                </a:solidFill>
-                <a:latin typeface="Calibri"/>
-              </a:rPr>
-              <a:t>98 m³    0,3 %</a:t>
-            </a:r>
-          </a:p>
-        </p:txBody>
-      </p:sp>
-      <p:sp>
-        <p:nvSpPr>
-          <p:cNvPr id="51" name="Rounded Rectangle 50"/>
-          <p:cNvSpPr/>
-          <p:nvPr/>
-        </p:nvSpPr>
-        <p:spPr>
-          <a:xfrm>
-            <a:off x="8430768" y="5141540"/>
-            <a:ext cx="3419856" cy="363147"/>
+            <a:off x="8430768" y="5135009"/>
+            <a:ext cx="3419856" cy="369678"/>
           </a:xfrm>
           <a:prstGeom prst="roundRect">
             <a:avLst>
@@ -13828,33 +15712,33 @@
       </p:sp>
       <p:sp>
         <p:nvSpPr>
-          <p:cNvPr id="52" name="TextBox 51"/>
-          <p:cNvSpPr txBox="1"/>
-          <p:nvPr/>
-        </p:nvSpPr>
-        <p:spPr>
-          <a:xfrm>
-            <a:off x="8540496" y="5178116"/>
-            <a:ext cx="3200400" cy="182880"/>
-          </a:xfrm>
-          <a:prstGeom prst="rect">
-            <a:avLst/>
-          </a:prstGeom>
-          <a:noFill/>
-        </p:spPr>
-        <p:txBody>
-          <a:bodyPr wrap="square">
-            <a:spAutoFit/>
-          </a:bodyPr>
-          <a:lstStyle/>
-          <a:p>
-            <a:pPr algn="l">
-              <a:spcAft>
-                <a:spcPts val="300"/>
-              </a:spcAft>
-            </a:pPr>
-            <a:r>
-              <a:rPr sz="1100" b="1">
+          <p:cNvPr id="66" name="TextBox 65"/>
+          <p:cNvSpPr txBox="1"/>
+          <p:nvPr/>
+        </p:nvSpPr>
+        <p:spPr>
+          <a:xfrm>
+            <a:off x="8540496" y="5162441"/>
+            <a:ext cx="3200400" cy="155265"/>
+          </a:xfrm>
+          <a:prstGeom prst="rect">
+            <a:avLst/>
+          </a:prstGeom>
+          <a:noFill/>
+        </p:spPr>
+        <p:txBody>
+          <a:bodyPr wrap="square">
+            <a:spAutoFit/>
+          </a:bodyPr>
+          <a:lstStyle/>
+          <a:p>
+            <a:pPr algn="l">
+              <a:spcAft>
+                <a:spcPts val="300"/>
+              </a:spcAft>
+            </a:pPr>
+            <a:r>
+              <a:rPr sz="1000" b="1">
                 <a:solidFill>
                   <a:srgbClr val="0D3B66"/>
                 </a:solidFill>
@@ -13867,33 +15751,33 @@
       </p:sp>
       <p:sp>
         <p:nvSpPr>
-          <p:cNvPr id="53" name="TextBox 52"/>
-          <p:cNvSpPr txBox="1"/>
-          <p:nvPr/>
-        </p:nvSpPr>
-        <p:spPr>
-          <a:xfrm>
-            <a:off x="8540496" y="5294062"/>
-            <a:ext cx="3200400" cy="292608"/>
-          </a:xfrm>
-          <a:prstGeom prst="rect">
-            <a:avLst/>
-          </a:prstGeom>
-          <a:noFill/>
-        </p:spPr>
-        <p:txBody>
-          <a:bodyPr wrap="square">
-            <a:spAutoFit/>
-          </a:bodyPr>
-          <a:lstStyle/>
-          <a:p>
-            <a:pPr algn="l">
-              <a:spcAft>
-                <a:spcPts val="300"/>
-              </a:spcAft>
-            </a:pPr>
-            <a:r>
-              <a:rPr sz="1300" b="1">
+          <p:cNvPr id="67" name="TextBox 66"/>
+          <p:cNvSpPr txBox="1"/>
+          <p:nvPr/>
+        </p:nvSpPr>
+        <p:spPr>
+          <a:xfrm>
+            <a:off x="8540496" y="5290274"/>
+            <a:ext cx="3200400" cy="192233"/>
+          </a:xfrm>
+          <a:prstGeom prst="rect">
+            <a:avLst/>
+          </a:prstGeom>
+          <a:noFill/>
+        </p:spPr>
+        <p:txBody>
+          <a:bodyPr wrap="square">
+            <a:spAutoFit/>
+          </a:bodyPr>
+          <a:lstStyle/>
+          <a:p>
+            <a:pPr algn="l">
+              <a:spcAft>
+                <a:spcPts val="300"/>
+              </a:spcAft>
+            </a:pPr>
+            <a:r>
+              <a:rPr sz="1200" b="1">
                 <a:solidFill>
                   <a:srgbClr val="0D3B66"/>
                 </a:solidFill>
@@ -13906,7 +15790,7 @@
       </p:sp>
       <p:sp>
         <p:nvSpPr>
-          <p:cNvPr id="54" name="Rounded Rectangle 53"/>
+          <p:cNvPr id="68" name="Rounded Rectangle 67"/>
           <p:cNvSpPr/>
           <p:nvPr/>
         </p:nvSpPr>
@@ -13953,7 +15837,7 @@
       </p:sp>
       <p:sp>
         <p:nvSpPr>
-          <p:cNvPr id="55" name="TextBox 54"/>
+          <p:cNvPr id="69" name="TextBox 68"/>
           <p:cNvSpPr txBox="1"/>
           <p:nvPr/>
         </p:nvSpPr>
@@ -13992,7 +15876,7 @@
       </p:sp>
       <p:sp>
         <p:nvSpPr>
-          <p:cNvPr id="56" name="TextBox 55"/>
+          <p:cNvPr id="70" name="TextBox 69"/>
           <p:cNvSpPr txBox="1"/>
           <p:nvPr/>
         </p:nvSpPr>
@@ -14040,7 +15924,7 @@
                 </a:solidFill>
                 <a:latin typeface="Calibri"/>
               </a:rPr>
-              <a:t>No se suman 000025-27 (Distrito de Lujo) ni 35 y 36 (subdivisión de Sandía Antigua).</a:t>
+              <a:t>Julio = cabecera (7 puntos). 27, 35 y 36 no se suman: cadena Sandía → DL (lámina 2).</a:t>
             </a:r>
           </a:p>
         </p:txBody>

--- a/reports/Parque_Arauco/TMP_7MALLS/entrega_diego_anibal/Recorrido_ejecutivo_PA_MAE_20260817.pptx
+++ b/reports/Parque_Arauco/TMP_7MALLS/entrega_diego_anibal/Recorrido_ejecutivo_PA_MAE_20260817.pptx
@@ -3514,7 +3514,7 @@
                 </a:solidFill>
                 <a:latin typeface="Calibri"/>
               </a:rPr>
-              <a:t>22 + 28 alimentan 000025-27  ·  27 se divide en 35 y 36  ·  no entran a cabecera</a:t>
+              <a:t>Sandía Antigua y Sandía Nueva alimentan Distrito de Lujo  ·  se divide en Bazar Gourmet y DL Kennedy</a:t>
             </a:r>
           </a:p>
         </p:txBody>
@@ -3528,7 +3528,7 @@
         <p:spPr>
           <a:xfrm>
             <a:off x="201168" y="987552"/>
-            <a:ext cx="11777472" cy="713232"/>
+            <a:ext cx="11777472" cy="512064"/>
           </a:xfrm>
           <a:prstGeom prst="roundRect">
             <a:avLst>
@@ -3575,7 +3575,7 @@
         <p:spPr>
           <a:xfrm>
             <a:off x="365760" y="1042415"/>
-            <a:ext cx="11475720" cy="603504"/>
+            <a:ext cx="11475720" cy="402336"/>
           </a:xfrm>
           <a:prstGeom prst="rect">
             <a:avLst/>
@@ -3600,7 +3600,7 @@
                 </a:solidFill>
                 <a:latin typeface="Calibri"/>
               </a:rPr>
-              <a:t>Sandía Antigua (000025-22) y Sandía Nueva (000025-28) alimentan 000025-27 (Distrito de Lujo). Desde 27 el caudal se divide en 000025-35 (Bazar Gourmet) y 000025-36 (DL Kennedy). Por eso 27, 35 y 36 no se suman a la cabecera: sería doble conteo.</a:t>
+              <a:t>Sandía Antigua y Sandía Nueva alimentan Distrito de Lujo. Desde ahí el caudal se divide en Bazar Gourmet y DL Kennedy. Por eso esos tres puntos no se suman a la cabecera: sería doble conteo.</a:t>
             </a:r>
           </a:p>
         </p:txBody>
@@ -3613,8 +3613,8 @@
         </p:nvSpPr>
         <p:spPr>
           <a:xfrm>
-            <a:off x="201168" y="1792224"/>
-            <a:ext cx="1975104" cy="530352"/>
+            <a:off x="201168" y="1591056"/>
+            <a:ext cx="1938528" cy="457200"/>
           </a:xfrm>
           <a:prstGeom prst="roundRect">
             <a:avLst>
@@ -3660,66 +3660,27 @@
         </p:nvSpPr>
         <p:spPr>
           <a:xfrm>
-            <a:off x="274320" y="1810512"/>
-            <a:ext cx="1828800" cy="164592"/>
-          </a:xfrm>
-          <a:prstGeom prst="rect">
-            <a:avLst/>
-          </a:prstGeom>
-          <a:noFill/>
-        </p:spPr>
-        <p:txBody>
-          <a:bodyPr wrap="square">
-            <a:spAutoFit/>
-          </a:bodyPr>
-          <a:lstStyle/>
-          <a:p>
-            <a:pPr algn="l">
-              <a:spcAft>
-                <a:spcPts val="300"/>
-              </a:spcAft>
-            </a:pPr>
-            <a:r>
-              <a:rPr sz="900" b="1">
-                <a:solidFill>
-                  <a:srgbClr val="C9A227"/>
-                </a:solidFill>
-                <a:latin typeface="Calibri"/>
-              </a:rPr>
-              <a:t>000025-22</a:t>
-            </a:r>
-          </a:p>
-        </p:txBody>
-      </p:sp>
-      <p:sp>
-        <p:nvSpPr>
-          <p:cNvPr id="11" name="TextBox 10"/>
-          <p:cNvSpPr txBox="1"/>
-          <p:nvPr/>
-        </p:nvSpPr>
-        <p:spPr>
-          <a:xfrm>
-            <a:off x="274320" y="1993392"/>
-            <a:ext cx="1828800" cy="274320"/>
-          </a:xfrm>
-          <a:prstGeom prst="rect">
-            <a:avLst/>
-          </a:prstGeom>
-          <a:noFill/>
-        </p:spPr>
-        <p:txBody>
-          <a:bodyPr wrap="square">
-            <a:spAutoFit/>
-          </a:bodyPr>
-          <a:lstStyle/>
-          <a:p>
-            <a:pPr algn="l">
-              <a:spcAft>
-                <a:spcPts val="300"/>
-              </a:spcAft>
-            </a:pPr>
-            <a:r>
-              <a:rPr sz="1100" b="1">
+            <a:off x="274320" y="1700784"/>
+            <a:ext cx="1792224" cy="256032"/>
+          </a:xfrm>
+          <a:prstGeom prst="rect">
+            <a:avLst/>
+          </a:prstGeom>
+          <a:noFill/>
+        </p:spPr>
+        <p:txBody>
+          <a:bodyPr wrap="square">
+            <a:spAutoFit/>
+          </a:bodyPr>
+          <a:lstStyle/>
+          <a:p>
+            <a:pPr algn="ctr">
+              <a:spcAft>
+                <a:spcPts val="300"/>
+              </a:spcAft>
+            </a:pPr>
+            <a:r>
+              <a:rPr sz="1200" b="1">
                 <a:solidFill>
                   <a:srgbClr val="0D3B66"/>
                 </a:solidFill>
@@ -3732,14 +3693,14 @@
       </p:sp>
       <p:sp>
         <p:nvSpPr>
-          <p:cNvPr id="12" name="Rounded Rectangle 11"/>
+          <p:cNvPr id="11" name="Rounded Rectangle 10"/>
           <p:cNvSpPr/>
           <p:nvPr/>
         </p:nvSpPr>
         <p:spPr>
           <a:xfrm>
-            <a:off x="2267712" y="1792224"/>
-            <a:ext cx="1975104" cy="530352"/>
+            <a:off x="2468880" y="1591056"/>
+            <a:ext cx="1938528" cy="457200"/>
           </a:xfrm>
           <a:prstGeom prst="roundRect">
             <a:avLst>
@@ -3779,72 +3740,33 @@
       </p:sp>
       <p:sp>
         <p:nvSpPr>
-          <p:cNvPr id="13" name="TextBox 12"/>
-          <p:cNvSpPr txBox="1"/>
-          <p:nvPr/>
-        </p:nvSpPr>
-        <p:spPr>
-          <a:xfrm>
-            <a:off x="2340864" y="1810512"/>
-            <a:ext cx="1828800" cy="164592"/>
-          </a:xfrm>
-          <a:prstGeom prst="rect">
-            <a:avLst/>
-          </a:prstGeom>
-          <a:noFill/>
-        </p:spPr>
-        <p:txBody>
-          <a:bodyPr wrap="square">
-            <a:spAutoFit/>
-          </a:bodyPr>
-          <a:lstStyle/>
-          <a:p>
-            <a:pPr algn="l">
-              <a:spcAft>
-                <a:spcPts val="300"/>
-              </a:spcAft>
-            </a:pPr>
-            <a:r>
-              <a:rPr sz="900" b="1">
-                <a:solidFill>
-                  <a:srgbClr val="C9A227"/>
-                </a:solidFill>
-                <a:latin typeface="Calibri"/>
-              </a:rPr>
-              <a:t>000025-28</a:t>
-            </a:r>
-          </a:p>
-        </p:txBody>
-      </p:sp>
-      <p:sp>
-        <p:nvSpPr>
-          <p:cNvPr id="14" name="TextBox 13"/>
-          <p:cNvSpPr txBox="1"/>
-          <p:nvPr/>
-        </p:nvSpPr>
-        <p:spPr>
-          <a:xfrm>
-            <a:off x="2340864" y="1993392"/>
-            <a:ext cx="1828800" cy="274320"/>
-          </a:xfrm>
-          <a:prstGeom prst="rect">
-            <a:avLst/>
-          </a:prstGeom>
-          <a:noFill/>
-        </p:spPr>
-        <p:txBody>
-          <a:bodyPr wrap="square">
-            <a:spAutoFit/>
-          </a:bodyPr>
-          <a:lstStyle/>
-          <a:p>
-            <a:pPr algn="l">
-              <a:spcAft>
-                <a:spcPts val="300"/>
-              </a:spcAft>
-            </a:pPr>
-            <a:r>
-              <a:rPr sz="1100" b="1">
+          <p:cNvPr id="12" name="TextBox 11"/>
+          <p:cNvSpPr txBox="1"/>
+          <p:nvPr/>
+        </p:nvSpPr>
+        <p:spPr>
+          <a:xfrm>
+            <a:off x="2542032" y="1700784"/>
+            <a:ext cx="1792224" cy="256032"/>
+          </a:xfrm>
+          <a:prstGeom prst="rect">
+            <a:avLst/>
+          </a:prstGeom>
+          <a:noFill/>
+        </p:spPr>
+        <p:txBody>
+          <a:bodyPr wrap="square">
+            <a:spAutoFit/>
+          </a:bodyPr>
+          <a:lstStyle/>
+          <a:p>
+            <a:pPr algn="ctr">
+              <a:spcAft>
+                <a:spcPts val="300"/>
+              </a:spcAft>
+            </a:pPr>
+            <a:r>
+              <a:rPr sz="1200" b="1">
                 <a:solidFill>
                   <a:srgbClr val="0D3B66"/>
                 </a:solidFill>
@@ -3857,14 +3779,14 @@
       </p:sp>
       <p:sp>
         <p:nvSpPr>
-          <p:cNvPr id="15" name="Rounded Rectangle 14"/>
+          <p:cNvPr id="13" name="Rounded Rectangle 12"/>
           <p:cNvSpPr/>
           <p:nvPr/>
         </p:nvSpPr>
         <p:spPr>
           <a:xfrm>
-            <a:off x="4736592" y="1792224"/>
-            <a:ext cx="1975104" cy="530352"/>
+            <a:off x="4864608" y="1591056"/>
+            <a:ext cx="2194560" cy="457200"/>
           </a:xfrm>
           <a:prstGeom prst="roundRect">
             <a:avLst>
@@ -3904,92 +3826,53 @@
       </p:sp>
       <p:sp>
         <p:nvSpPr>
-          <p:cNvPr id="16" name="TextBox 15"/>
-          <p:cNvSpPr txBox="1"/>
-          <p:nvPr/>
-        </p:nvSpPr>
-        <p:spPr>
-          <a:xfrm>
-            <a:off x="4809744" y="1810512"/>
-            <a:ext cx="1828800" cy="164592"/>
-          </a:xfrm>
-          <a:prstGeom prst="rect">
-            <a:avLst/>
-          </a:prstGeom>
-          <a:noFill/>
-        </p:spPr>
-        <p:txBody>
-          <a:bodyPr wrap="square">
-            <a:spAutoFit/>
-          </a:bodyPr>
-          <a:lstStyle/>
-          <a:p>
-            <a:pPr algn="l">
-              <a:spcAft>
-                <a:spcPts val="300"/>
-              </a:spcAft>
-            </a:pPr>
-            <a:r>
-              <a:rPr sz="900" b="1">
-                <a:solidFill>
-                  <a:srgbClr val="C9A227"/>
-                </a:solidFill>
-                <a:latin typeface="Calibri"/>
-              </a:rPr>
-              <a:t>000025-27</a:t>
-            </a:r>
-          </a:p>
-        </p:txBody>
-      </p:sp>
-      <p:sp>
-        <p:nvSpPr>
-          <p:cNvPr id="17" name="TextBox 16"/>
-          <p:cNvSpPr txBox="1"/>
-          <p:nvPr/>
-        </p:nvSpPr>
-        <p:spPr>
-          <a:xfrm>
-            <a:off x="4809744" y="1993392"/>
-            <a:ext cx="1828800" cy="274320"/>
-          </a:xfrm>
-          <a:prstGeom prst="rect">
-            <a:avLst/>
-          </a:prstGeom>
-          <a:noFill/>
-        </p:spPr>
-        <p:txBody>
-          <a:bodyPr wrap="square">
-            <a:spAutoFit/>
-          </a:bodyPr>
-          <a:lstStyle/>
-          <a:p>
-            <a:pPr algn="l">
-              <a:spcAft>
-                <a:spcPts val="300"/>
-              </a:spcAft>
-            </a:pPr>
-            <a:r>
-              <a:rPr sz="1100" b="1">
+          <p:cNvPr id="14" name="TextBox 13"/>
+          <p:cNvSpPr txBox="1"/>
+          <p:nvPr/>
+        </p:nvSpPr>
+        <p:spPr>
+          <a:xfrm>
+            <a:off x="4937760" y="1700784"/>
+            <a:ext cx="2048255" cy="256032"/>
+          </a:xfrm>
+          <a:prstGeom prst="rect">
+            <a:avLst/>
+          </a:prstGeom>
+          <a:noFill/>
+        </p:spPr>
+        <p:txBody>
+          <a:bodyPr wrap="square">
+            <a:spAutoFit/>
+          </a:bodyPr>
+          <a:lstStyle/>
+          <a:p>
+            <a:pPr algn="ctr">
+              <a:spcAft>
+                <a:spcPts val="300"/>
+              </a:spcAft>
+            </a:pPr>
+            <a:r>
+              <a:rPr sz="1200" b="1">
                 <a:solidFill>
                   <a:srgbClr val="0D3B66"/>
                 </a:solidFill>
                 <a:latin typeface="Calibri"/>
               </a:rPr>
-              <a:t>Distrito Lujo  ·  tronco</a:t>
-            </a:r>
-          </a:p>
-        </p:txBody>
-      </p:sp>
-      <p:sp>
-        <p:nvSpPr>
-          <p:cNvPr id="18" name="Rounded Rectangle 17"/>
+              <a:t>Distrito de Lujo</a:t>
+            </a:r>
+          </a:p>
+        </p:txBody>
+      </p:sp>
+      <p:sp>
+        <p:nvSpPr>
+          <p:cNvPr id="15" name="Rounded Rectangle 14"/>
           <p:cNvSpPr/>
           <p:nvPr/>
         </p:nvSpPr>
         <p:spPr>
           <a:xfrm>
-            <a:off x="7717536" y="1792224"/>
-            <a:ext cx="1975104" cy="530352"/>
+            <a:off x="7516368" y="1591056"/>
+            <a:ext cx="1938528" cy="457200"/>
           </a:xfrm>
           <a:prstGeom prst="roundRect">
             <a:avLst>
@@ -4029,72 +3912,33 @@
       </p:sp>
       <p:sp>
         <p:nvSpPr>
-          <p:cNvPr id="19" name="TextBox 18"/>
-          <p:cNvSpPr txBox="1"/>
-          <p:nvPr/>
-        </p:nvSpPr>
-        <p:spPr>
-          <a:xfrm>
-            <a:off x="7790688" y="1810512"/>
-            <a:ext cx="1828800" cy="164592"/>
-          </a:xfrm>
-          <a:prstGeom prst="rect">
-            <a:avLst/>
-          </a:prstGeom>
-          <a:noFill/>
-        </p:spPr>
-        <p:txBody>
-          <a:bodyPr wrap="square">
-            <a:spAutoFit/>
-          </a:bodyPr>
-          <a:lstStyle/>
-          <a:p>
-            <a:pPr algn="l">
-              <a:spcAft>
-                <a:spcPts val="300"/>
-              </a:spcAft>
-            </a:pPr>
-            <a:r>
-              <a:rPr sz="900" b="1">
-                <a:solidFill>
-                  <a:srgbClr val="C9A227"/>
-                </a:solidFill>
-                <a:latin typeface="Calibri"/>
-              </a:rPr>
-              <a:t>000025-35</a:t>
-            </a:r>
-          </a:p>
-        </p:txBody>
-      </p:sp>
-      <p:sp>
-        <p:nvSpPr>
-          <p:cNvPr id="20" name="TextBox 19"/>
-          <p:cNvSpPr txBox="1"/>
-          <p:nvPr/>
-        </p:nvSpPr>
-        <p:spPr>
-          <a:xfrm>
-            <a:off x="7790688" y="1993392"/>
-            <a:ext cx="1828800" cy="274320"/>
-          </a:xfrm>
-          <a:prstGeom prst="rect">
-            <a:avLst/>
-          </a:prstGeom>
-          <a:noFill/>
-        </p:spPr>
-        <p:txBody>
-          <a:bodyPr wrap="square">
-            <a:spAutoFit/>
-          </a:bodyPr>
-          <a:lstStyle/>
-          <a:p>
-            <a:pPr algn="l">
-              <a:spcAft>
-                <a:spcPts val="300"/>
-              </a:spcAft>
-            </a:pPr>
-            <a:r>
-              <a:rPr sz="1100" b="1">
+          <p:cNvPr id="16" name="TextBox 15"/>
+          <p:cNvSpPr txBox="1"/>
+          <p:nvPr/>
+        </p:nvSpPr>
+        <p:spPr>
+          <a:xfrm>
+            <a:off x="7589520" y="1700784"/>
+            <a:ext cx="1792224" cy="256032"/>
+          </a:xfrm>
+          <a:prstGeom prst="rect">
+            <a:avLst/>
+          </a:prstGeom>
+          <a:noFill/>
+        </p:spPr>
+        <p:txBody>
+          <a:bodyPr wrap="square">
+            <a:spAutoFit/>
+          </a:bodyPr>
+          <a:lstStyle/>
+          <a:p>
+            <a:pPr algn="ctr">
+              <a:spcAft>
+                <a:spcPts val="300"/>
+              </a:spcAft>
+            </a:pPr>
+            <a:r>
+              <a:rPr sz="1200" b="1">
                 <a:solidFill>
                   <a:srgbClr val="0D3B66"/>
                 </a:solidFill>
@@ -4107,14 +3951,14 @@
       </p:sp>
       <p:sp>
         <p:nvSpPr>
-          <p:cNvPr id="21" name="Rounded Rectangle 20"/>
+          <p:cNvPr id="17" name="Rounded Rectangle 16"/>
           <p:cNvSpPr/>
           <p:nvPr/>
         </p:nvSpPr>
         <p:spPr>
           <a:xfrm>
-            <a:off x="9784080" y="1792224"/>
-            <a:ext cx="1975104" cy="530352"/>
+            <a:off x="9546336" y="1591056"/>
+            <a:ext cx="1938528" cy="457200"/>
           </a:xfrm>
           <a:prstGeom prst="roundRect">
             <a:avLst>
@@ -4154,92 +3998,92 @@
       </p:sp>
       <p:sp>
         <p:nvSpPr>
-          <p:cNvPr id="22" name="TextBox 21"/>
-          <p:cNvSpPr txBox="1"/>
-          <p:nvPr/>
-        </p:nvSpPr>
-        <p:spPr>
-          <a:xfrm>
-            <a:off x="9857232" y="1810512"/>
-            <a:ext cx="1828800" cy="164592"/>
-          </a:xfrm>
-          <a:prstGeom prst="rect">
-            <a:avLst/>
-          </a:prstGeom>
-          <a:noFill/>
-        </p:spPr>
-        <p:txBody>
-          <a:bodyPr wrap="square">
-            <a:spAutoFit/>
-          </a:bodyPr>
-          <a:lstStyle/>
-          <a:p>
-            <a:pPr algn="l">
-              <a:spcAft>
-                <a:spcPts val="300"/>
-              </a:spcAft>
-            </a:pPr>
-            <a:r>
-              <a:rPr sz="900" b="1">
+          <p:cNvPr id="18" name="TextBox 17"/>
+          <p:cNvSpPr txBox="1"/>
+          <p:nvPr/>
+        </p:nvSpPr>
+        <p:spPr>
+          <a:xfrm>
+            <a:off x="9619488" y="1700784"/>
+            <a:ext cx="1792224" cy="256032"/>
+          </a:xfrm>
+          <a:prstGeom prst="rect">
+            <a:avLst/>
+          </a:prstGeom>
+          <a:noFill/>
+        </p:spPr>
+        <p:txBody>
+          <a:bodyPr wrap="square">
+            <a:spAutoFit/>
+          </a:bodyPr>
+          <a:lstStyle/>
+          <a:p>
+            <a:pPr algn="ctr">
+              <a:spcAft>
+                <a:spcPts val="300"/>
+              </a:spcAft>
+            </a:pPr>
+            <a:r>
+              <a:rPr sz="1200" b="1">
+                <a:solidFill>
+                  <a:srgbClr val="0D3B66"/>
+                </a:solidFill>
+                <a:latin typeface="Calibri"/>
+              </a:rPr>
+              <a:t>DL Kennedy</a:t>
+            </a:r>
+          </a:p>
+        </p:txBody>
+      </p:sp>
+      <p:sp>
+        <p:nvSpPr>
+          <p:cNvPr id="19" name="TextBox 18"/>
+          <p:cNvSpPr txBox="1"/>
+          <p:nvPr/>
+        </p:nvSpPr>
+        <p:spPr>
+          <a:xfrm>
+            <a:off x="2139696" y="1664208"/>
+            <a:ext cx="329184" cy="310896"/>
+          </a:xfrm>
+          <a:prstGeom prst="rect">
+            <a:avLst/>
+          </a:prstGeom>
+          <a:noFill/>
+        </p:spPr>
+        <p:txBody>
+          <a:bodyPr wrap="square">
+            <a:spAutoFit/>
+          </a:bodyPr>
+          <a:lstStyle/>
+          <a:p>
+            <a:pPr algn="ctr">
+              <a:spcAft>
+                <a:spcPts val="300"/>
+              </a:spcAft>
+            </a:pPr>
+            <a:r>
+              <a:rPr sz="1600" b="1">
                 <a:solidFill>
                   <a:srgbClr val="C9A227"/>
                 </a:solidFill>
                 <a:latin typeface="Calibri"/>
               </a:rPr>
-              <a:t>000025-36</a:t>
-            </a:r>
-          </a:p>
-        </p:txBody>
-      </p:sp>
-      <p:sp>
-        <p:nvSpPr>
-          <p:cNvPr id="23" name="TextBox 22"/>
-          <p:cNvSpPr txBox="1"/>
-          <p:nvPr/>
-        </p:nvSpPr>
-        <p:spPr>
-          <a:xfrm>
-            <a:off x="9857232" y="1993392"/>
-            <a:ext cx="1828800" cy="274320"/>
-          </a:xfrm>
-          <a:prstGeom prst="rect">
-            <a:avLst/>
-          </a:prstGeom>
-          <a:noFill/>
-        </p:spPr>
-        <p:txBody>
-          <a:bodyPr wrap="square">
-            <a:spAutoFit/>
-          </a:bodyPr>
-          <a:lstStyle/>
-          <a:p>
-            <a:pPr algn="l">
-              <a:spcAft>
-                <a:spcPts val="300"/>
-              </a:spcAft>
-            </a:pPr>
-            <a:r>
-              <a:rPr sz="1100" b="1">
-                <a:solidFill>
-                  <a:srgbClr val="0D3B66"/>
-                </a:solidFill>
-                <a:latin typeface="Calibri"/>
-              </a:rPr>
-              <a:t>DL Kennedy</a:t>
-            </a:r>
-          </a:p>
-        </p:txBody>
-      </p:sp>
-      <p:sp>
-        <p:nvSpPr>
-          <p:cNvPr id="24" name="TextBox 23"/>
-          <p:cNvSpPr txBox="1"/>
-          <p:nvPr/>
-        </p:nvSpPr>
-        <p:spPr>
-          <a:xfrm>
-            <a:off x="2103120" y="1920240"/>
-            <a:ext cx="201168" cy="256032"/>
+              <a:t>+</a:t>
+            </a:r>
+          </a:p>
+        </p:txBody>
+      </p:sp>
+      <p:sp>
+        <p:nvSpPr>
+          <p:cNvPr id="20" name="TextBox 19"/>
+          <p:cNvSpPr txBox="1"/>
+          <p:nvPr/>
+        </p:nvSpPr>
+        <p:spPr>
+          <a:xfrm>
+            <a:off x="4407408" y="1664208"/>
+            <a:ext cx="457200" cy="310896"/>
           </a:xfrm>
           <a:prstGeom prst="rect">
             <a:avLst/>
@@ -4258,27 +4102,27 @@
               </a:spcAft>
             </a:pPr>
             <a:r>
-              <a:rPr sz="1600" b="1">
+              <a:rPr sz="1800" b="1">
                 <a:solidFill>
                   <a:srgbClr val="C9A227"/>
                 </a:solidFill>
                 <a:latin typeface="Calibri"/>
               </a:rPr>
-              <a:t>+</a:t>
-            </a:r>
-          </a:p>
-        </p:txBody>
-      </p:sp>
-      <p:sp>
-        <p:nvSpPr>
-          <p:cNvPr id="25" name="TextBox 24"/>
-          <p:cNvSpPr txBox="1"/>
-          <p:nvPr/>
-        </p:nvSpPr>
-        <p:spPr>
-          <a:xfrm>
-            <a:off x="4242816" y="1920240"/>
-            <a:ext cx="493776" cy="256032"/>
+              <a:t>→</a:t>
+            </a:r>
+          </a:p>
+        </p:txBody>
+      </p:sp>
+      <p:sp>
+        <p:nvSpPr>
+          <p:cNvPr id="21" name="TextBox 20"/>
+          <p:cNvSpPr txBox="1"/>
+          <p:nvPr/>
+        </p:nvSpPr>
+        <p:spPr>
+          <a:xfrm>
+            <a:off x="7059168" y="1664208"/>
+            <a:ext cx="457200" cy="310896"/>
           </a:xfrm>
           <a:prstGeom prst="rect">
             <a:avLst/>
@@ -4310,53 +4154,14 @@
       </p:sp>
       <p:sp>
         <p:nvSpPr>
-          <p:cNvPr id="26" name="TextBox 25"/>
-          <p:cNvSpPr txBox="1"/>
-          <p:nvPr/>
-        </p:nvSpPr>
-        <p:spPr>
-          <a:xfrm>
-            <a:off x="7223760" y="1920240"/>
-            <a:ext cx="493776" cy="256032"/>
-          </a:xfrm>
-          <a:prstGeom prst="rect">
-            <a:avLst/>
-          </a:prstGeom>
-          <a:noFill/>
-        </p:spPr>
-        <p:txBody>
-          <a:bodyPr wrap="square">
-            <a:spAutoFit/>
-          </a:bodyPr>
-          <a:lstStyle/>
-          <a:p>
-            <a:pPr algn="ctr">
-              <a:spcAft>
-                <a:spcPts val="300"/>
-              </a:spcAft>
-            </a:pPr>
-            <a:r>
-              <a:rPr sz="1800" b="1">
-                <a:solidFill>
-                  <a:srgbClr val="C9A227"/>
-                </a:solidFill>
-                <a:latin typeface="Calibri"/>
-              </a:rPr>
-              <a:t>→</a:t>
-            </a:r>
-          </a:p>
-        </p:txBody>
-      </p:sp>
-      <p:sp>
-        <p:nvSpPr>
-          <p:cNvPr id="27" name="Rounded Rectangle 26"/>
+          <p:cNvPr id="22" name="Rounded Rectangle 21"/>
           <p:cNvSpPr/>
           <p:nvPr/>
         </p:nvSpPr>
         <p:spPr>
           <a:xfrm>
-            <a:off x="201168" y="2432304"/>
-            <a:ext cx="5833872" cy="3108960"/>
+            <a:off x="201168" y="2157984"/>
+            <a:ext cx="5833872" cy="3383280"/>
           </a:xfrm>
           <a:prstGeom prst="roundRect">
             <a:avLst>
@@ -4394,13 +4199,13 @@
       </p:sp>
       <p:sp>
         <p:nvSpPr>
-          <p:cNvPr id="28" name="TextBox 27"/>
-          <p:cNvSpPr txBox="1"/>
-          <p:nvPr/>
-        </p:nvSpPr>
-        <p:spPr>
-          <a:xfrm>
-            <a:off x="329184" y="2468880"/>
+          <p:cNvPr id="23" name="TextBox 22"/>
+          <p:cNvSpPr txBox="1"/>
+          <p:nvPr/>
+        </p:nvSpPr>
+        <p:spPr>
+          <a:xfrm>
+            <a:off x="329184" y="2194560"/>
             <a:ext cx="5577840" cy="201168"/>
           </a:xfrm>
           <a:prstGeom prst="rect">
@@ -4433,7 +4238,7 @@
       </p:sp>
       <p:pic>
         <p:nvPicPr>
-          <p:cNvPr id="29" name="Picture 28" descr="pak_cadena_perfil_20260810.png"/>
+          <p:cNvPr id="24" name="Picture 23" descr="pak_cadena_perfil_20260810.png"/>
           <p:cNvPicPr>
             <a:picLocks noChangeAspect="1"/>
           </p:cNvPicPr>
@@ -4447,7 +4252,7 @@
         </p:blipFill>
         <p:spPr>
           <a:xfrm>
-            <a:off x="292608" y="2809776"/>
+            <a:off x="292608" y="2672616"/>
             <a:ext cx="5650992" cy="2518606"/>
           </a:xfrm>
           <a:prstGeom prst="rect">
@@ -4457,14 +4262,14 @@
       </p:pic>
       <p:sp>
         <p:nvSpPr>
-          <p:cNvPr id="30" name="Rounded Rectangle 29"/>
+          <p:cNvPr id="25" name="Rounded Rectangle 24"/>
           <p:cNvSpPr/>
           <p:nvPr/>
         </p:nvSpPr>
         <p:spPr>
           <a:xfrm>
-            <a:off x="6163056" y="2432304"/>
-            <a:ext cx="5815584" cy="3108960"/>
+            <a:off x="6163056" y="2157984"/>
+            <a:ext cx="5815584" cy="3383280"/>
           </a:xfrm>
           <a:prstGeom prst="roundRect">
             <a:avLst>
@@ -4502,13 +4307,13 @@
       </p:sp>
       <p:sp>
         <p:nvSpPr>
-          <p:cNvPr id="31" name="TextBox 30"/>
-          <p:cNvSpPr txBox="1"/>
-          <p:nvPr/>
-        </p:nvSpPr>
-        <p:spPr>
-          <a:xfrm>
-            <a:off x="6291072" y="2468880"/>
+          <p:cNvPr id="26" name="TextBox 25"/>
+          <p:cNvSpPr txBox="1"/>
+          <p:nvPr/>
+        </p:nvSpPr>
+        <p:spPr>
+          <a:xfrm>
+            <a:off x="6291072" y="2194560"/>
             <a:ext cx="5559552" cy="201168"/>
           </a:xfrm>
           <a:prstGeom prst="rect">
@@ -4534,14 +4339,14 @@
                 </a:solidFill>
                 <a:latin typeface="Calibri"/>
               </a:rPr>
-              <a:t>Agosto · m³ de madrugada (00:00–06:00)</a:t>
+              <a:t>Julio · m³ de madrugada (00:00–06:00)</a:t>
             </a:r>
           </a:p>
         </p:txBody>
       </p:sp>
       <p:pic>
         <p:nvPicPr>
-          <p:cNvPr id="32" name="Picture 31" descr="pak_cadena_noches_ago.png"/>
+          <p:cNvPr id="27" name="Picture 26" descr="pak_cadena_noches_jul.png"/>
           <p:cNvPicPr>
             <a:picLocks noChangeAspect="1"/>
           </p:cNvPicPr>
@@ -4555,7 +4360,7 @@
         </p:blipFill>
         <p:spPr>
           <a:xfrm>
-            <a:off x="6254496" y="2813851"/>
+            <a:off x="6254496" y="2676691"/>
             <a:ext cx="5632704" cy="2510456"/>
           </a:xfrm>
           <a:prstGeom prst="rect">
@@ -4565,7 +4370,7 @@
       </p:pic>
       <p:sp>
         <p:nvSpPr>
-          <p:cNvPr id="33" name="Rounded Rectangle 32"/>
+          <p:cNvPr id="28" name="Rounded Rectangle 27"/>
           <p:cNvSpPr/>
           <p:nvPr/>
         </p:nvSpPr>
@@ -4612,7 +4417,7 @@
       </p:sp>
       <p:sp>
         <p:nvSpPr>
-          <p:cNvPr id="34" name="TextBox 33"/>
+          <p:cNvPr id="29" name="TextBox 28"/>
           <p:cNvSpPr txBox="1"/>
           <p:nvPr/>
         </p:nvSpPr>
@@ -4644,7 +4449,7 @@
                 </a:solidFill>
                 <a:latin typeface="Calibri"/>
               </a:rPr>
-              <a:t>10/08 noche 00–06: Distrito de Lujo 41,2 m³  ·  Bazar 28,2 m³  ·  DL Kennedy 0,9 m³. Julio: 27 = 9.669 m³  ·  35 = 6.256 m³  ·  36 = 503 m³.</a:t>
+              <a:t>Julio (31 noches): Distrito de Lujo mediana 42,6 m³  ·  Bazar Gourmet 28,7 m³  ·  DL Kennedy 1,3 m³. Ejemplo 10/08 00–06: Distrito de Lujo 41,2 m³  ·  Bazar 28,2 m³  ·  DL Kennedy 0,9 m³.</a:t>
             </a:r>
           </a:p>
           <a:p>
@@ -4660,7 +4465,7 @@
                 </a:solidFill>
                 <a:latin typeface="Calibri"/>
               </a:rPr>
-              <a:t>Propuesta: instalar control nocturno en 000025-27 (tronco). De madrugada, Bazar (35) sigue a 27 y DL Kennedy (36) queda residual. Cortar 27 corta el caudal de noche del Distrito de Lujo.</a:t>
+              <a:t>Propuesta: instalar control nocturno en Distrito de Lujo (tronco). De madrugada, Bazar Gourmet sigue al tronco y DL Kennedy queda residual. Cortar el tronco corta el caudal de noche del Distrito de Lujo.</a:t>
             </a:r>
           </a:p>
         </p:txBody>
@@ -4926,8 +4731,8 @@
         </p:nvSpPr>
         <p:spPr>
           <a:xfrm>
-            <a:off x="274320" y="1051560"/>
-            <a:ext cx="2766060" cy="164592"/>
+            <a:off x="274320" y="1060704"/>
+            <a:ext cx="2766060" cy="146304"/>
           </a:xfrm>
           <a:prstGeom prst="rect">
             <a:avLst/>
@@ -5004,7 +4809,7 @@
         </p:nvSpPr>
         <p:spPr>
           <a:xfrm>
-            <a:off x="274320" y="1499616"/>
+            <a:off x="274320" y="1481328"/>
             <a:ext cx="2766060" cy="164592"/>
           </a:xfrm>
           <a:prstGeom prst="rect">
@@ -5090,8 +4895,8 @@
         </p:nvSpPr>
         <p:spPr>
           <a:xfrm>
-            <a:off x="3241548" y="1051560"/>
-            <a:ext cx="2766060" cy="164592"/>
+            <a:off x="3241548" y="1060704"/>
+            <a:ext cx="2766060" cy="146304"/>
           </a:xfrm>
           <a:prstGeom prst="rect">
             <a:avLst/>
@@ -5215,8 +5020,8 @@
         </p:nvSpPr>
         <p:spPr>
           <a:xfrm>
-            <a:off x="6208776" y="1051560"/>
-            <a:ext cx="2766060" cy="164592"/>
+            <a:off x="6208776" y="1060704"/>
+            <a:ext cx="2766060" cy="146304"/>
           </a:xfrm>
           <a:prstGeom prst="rect">
             <a:avLst/>
@@ -5293,7 +5098,7 @@
         </p:nvSpPr>
         <p:spPr>
           <a:xfrm>
-            <a:off x="6208776" y="1499616"/>
+            <a:off x="6208776" y="1481328"/>
             <a:ext cx="2766060" cy="164592"/>
           </a:xfrm>
           <a:prstGeom prst="rect">
@@ -5379,8 +5184,8 @@
         </p:nvSpPr>
         <p:spPr>
           <a:xfrm>
-            <a:off x="9176004" y="1051560"/>
-            <a:ext cx="2766060" cy="164592"/>
+            <a:off x="9176004" y="1060704"/>
+            <a:ext cx="2766060" cy="146304"/>
           </a:xfrm>
           <a:prstGeom prst="rect">
             <a:avLst/>
@@ -7179,8 +6984,8 @@
         </p:nvSpPr>
         <p:spPr>
           <a:xfrm>
-            <a:off x="274320" y="1051560"/>
-            <a:ext cx="2172614" cy="164592"/>
+            <a:off x="274320" y="1060704"/>
+            <a:ext cx="2172614" cy="146304"/>
           </a:xfrm>
           <a:prstGeom prst="rect">
             <a:avLst/>
@@ -7304,8 +7109,8 @@
         </p:nvSpPr>
         <p:spPr>
           <a:xfrm>
-            <a:off x="2648102" y="1051560"/>
-            <a:ext cx="2172614" cy="164592"/>
+            <a:off x="2648102" y="1060704"/>
+            <a:ext cx="2172614" cy="146304"/>
           </a:xfrm>
           <a:prstGeom prst="rect">
             <a:avLst/>
@@ -7429,8 +7234,8 @@
         </p:nvSpPr>
         <p:spPr>
           <a:xfrm>
-            <a:off x="5021884" y="1051560"/>
-            <a:ext cx="2172614" cy="164592"/>
+            <a:off x="5021884" y="1060704"/>
+            <a:ext cx="2172614" cy="146304"/>
           </a:xfrm>
           <a:prstGeom prst="rect">
             <a:avLst/>
@@ -7507,7 +7312,7 @@
         </p:nvSpPr>
         <p:spPr>
           <a:xfrm>
-            <a:off x="5021884" y="1499616"/>
+            <a:off x="5021884" y="1481328"/>
             <a:ext cx="2172614" cy="164592"/>
           </a:xfrm>
           <a:prstGeom prst="rect">
@@ -7593,8 +7398,8 @@
         </p:nvSpPr>
         <p:spPr>
           <a:xfrm>
-            <a:off x="7395667" y="1051560"/>
-            <a:ext cx="2172614" cy="164592"/>
+            <a:off x="7395667" y="1060704"/>
+            <a:ext cx="2172614" cy="146304"/>
           </a:xfrm>
           <a:prstGeom prst="rect">
             <a:avLst/>
@@ -7671,7 +7476,7 @@
         </p:nvSpPr>
         <p:spPr>
           <a:xfrm>
-            <a:off x="7395667" y="1499616"/>
+            <a:off x="7395667" y="1481328"/>
             <a:ext cx="2172614" cy="164592"/>
           </a:xfrm>
           <a:prstGeom prst="rect">
@@ -7757,8 +7562,8 @@
         </p:nvSpPr>
         <p:spPr>
           <a:xfrm>
-            <a:off x="9769449" y="1051560"/>
-            <a:ext cx="2172614" cy="164592"/>
+            <a:off x="9769449" y="1060704"/>
+            <a:ext cx="2172614" cy="146304"/>
           </a:xfrm>
           <a:prstGeom prst="rect">
             <a:avLst/>
@@ -7835,7 +7640,7 @@
         </p:nvSpPr>
         <p:spPr>
           <a:xfrm>
-            <a:off x="9769449" y="1499616"/>
+            <a:off x="9769449" y="1481328"/>
             <a:ext cx="2172614" cy="164592"/>
           </a:xfrm>
           <a:prstGeom prst="rect">
@@ -9087,8 +8892,8 @@
         </p:nvSpPr>
         <p:spPr>
           <a:xfrm>
-            <a:off x="274320" y="1051560"/>
-            <a:ext cx="5733288" cy="164592"/>
+            <a:off x="274320" y="1060704"/>
+            <a:ext cx="5733288" cy="146304"/>
           </a:xfrm>
           <a:prstGeom prst="rect">
             <a:avLst/>
@@ -9212,8 +9017,8 @@
         </p:nvSpPr>
         <p:spPr>
           <a:xfrm>
-            <a:off x="6208776" y="1051560"/>
-            <a:ext cx="5733288" cy="164592"/>
+            <a:off x="6208776" y="1060704"/>
+            <a:ext cx="5733288" cy="146304"/>
           </a:xfrm>
           <a:prstGeom prst="rect">
             <a:avLst/>
@@ -9290,7 +9095,7 @@
         </p:nvSpPr>
         <p:spPr>
           <a:xfrm>
-            <a:off x="6208776" y="1499616"/>
+            <a:off x="6208776" y="1481328"/>
             <a:ext cx="5733288" cy="164592"/>
           </a:xfrm>
           <a:prstGeom prst="rect">
@@ -10167,8 +9972,8 @@
         </p:nvSpPr>
         <p:spPr>
           <a:xfrm>
-            <a:off x="274320" y="1051560"/>
-            <a:ext cx="5733288" cy="164592"/>
+            <a:off x="274320" y="1060704"/>
+            <a:ext cx="5733288" cy="146304"/>
           </a:xfrm>
           <a:prstGeom prst="rect">
             <a:avLst/>
@@ -10292,8 +10097,8 @@
         </p:nvSpPr>
         <p:spPr>
           <a:xfrm>
-            <a:off x="6208776" y="1051560"/>
-            <a:ext cx="5733288" cy="164592"/>
+            <a:off x="6208776" y="1060704"/>
+            <a:ext cx="5733288" cy="146304"/>
           </a:xfrm>
           <a:prstGeom prst="rect">
             <a:avLst/>
@@ -10370,7 +10175,7 @@
         </p:nvSpPr>
         <p:spPr>
           <a:xfrm>
-            <a:off x="6208776" y="1499616"/>
+            <a:off x="6208776" y="1481328"/>
             <a:ext cx="5733288" cy="164592"/>
           </a:xfrm>
           <a:prstGeom prst="rect">
@@ -11247,8 +11052,8 @@
         </p:nvSpPr>
         <p:spPr>
           <a:xfrm>
-            <a:off x="274320" y="1051560"/>
-            <a:ext cx="5733288" cy="164592"/>
+            <a:off x="274320" y="1060704"/>
+            <a:ext cx="5733288" cy="146304"/>
           </a:xfrm>
           <a:prstGeom prst="rect">
             <a:avLst/>
@@ -11372,8 +11177,8 @@
         </p:nvSpPr>
         <p:spPr>
           <a:xfrm>
-            <a:off x="6208776" y="1051560"/>
-            <a:ext cx="5733288" cy="164592"/>
+            <a:off x="6208776" y="1060704"/>
+            <a:ext cx="5733288" cy="146304"/>
           </a:xfrm>
           <a:prstGeom prst="rect">
             <a:avLst/>
@@ -12288,8 +12093,8 @@
         </p:nvSpPr>
         <p:spPr>
           <a:xfrm>
-            <a:off x="274320" y="1051560"/>
-            <a:ext cx="5733288" cy="164592"/>
+            <a:off x="274320" y="1060704"/>
+            <a:ext cx="5733288" cy="146304"/>
           </a:xfrm>
           <a:prstGeom prst="rect">
             <a:avLst/>
@@ -12413,8 +12218,8 @@
         </p:nvSpPr>
         <p:spPr>
           <a:xfrm>
-            <a:off x="6208776" y="1051560"/>
-            <a:ext cx="5733288" cy="164592"/>
+            <a:off x="6208776" y="1060704"/>
+            <a:ext cx="5733288" cy="146304"/>
           </a:xfrm>
           <a:prstGeom prst="rect">
             <a:avLst/>
@@ -13283,7 +13088,7 @@
         <p:spPr>
           <a:xfrm>
             <a:off x="201168" y="1024128"/>
-            <a:ext cx="2300630" cy="566928"/>
+            <a:ext cx="2286000" cy="621792"/>
           </a:xfrm>
           <a:prstGeom prst="roundRect">
             <a:avLst>
@@ -13329,8 +13134,8 @@
         </p:nvSpPr>
         <p:spPr>
           <a:xfrm>
-            <a:off x="274320" y="1051560"/>
-            <a:ext cx="2172614" cy="164592"/>
+            <a:off x="274320" y="1060704"/>
+            <a:ext cx="2157984" cy="146304"/>
           </a:xfrm>
           <a:prstGeom prst="rect">
             <a:avLst/>
@@ -13368,8 +13173,8 @@
         </p:nvSpPr>
         <p:spPr>
           <a:xfrm>
-            <a:off x="274320" y="1207008"/>
-            <a:ext cx="2172614" cy="201168"/>
+            <a:off x="274320" y="1225296"/>
+            <a:ext cx="2157984" cy="201168"/>
           </a:xfrm>
           <a:prstGeom prst="rect">
             <a:avLst/>
@@ -13407,8 +13212,8 @@
         </p:nvSpPr>
         <p:spPr>
           <a:xfrm>
-            <a:off x="2574950" y="1024128"/>
-            <a:ext cx="2300630" cy="566928"/>
+            <a:off x="2578608" y="1024128"/>
+            <a:ext cx="2286000" cy="621792"/>
           </a:xfrm>
           <a:prstGeom prst="roundRect">
             <a:avLst>
@@ -13454,8 +13259,8 @@
         </p:nvSpPr>
         <p:spPr>
           <a:xfrm>
-            <a:off x="2648102" y="1051560"/>
-            <a:ext cx="2172614" cy="164592"/>
+            <a:off x="2651760" y="1060704"/>
+            <a:ext cx="2157984" cy="146304"/>
           </a:xfrm>
           <a:prstGeom prst="rect">
             <a:avLst/>
@@ -13493,8 +13298,8 @@
         </p:nvSpPr>
         <p:spPr>
           <a:xfrm>
-            <a:off x="2648102" y="1207008"/>
-            <a:ext cx="2172614" cy="201168"/>
+            <a:off x="2651760" y="1225296"/>
+            <a:ext cx="2157984" cy="201168"/>
           </a:xfrm>
           <a:prstGeom prst="rect">
             <a:avLst/>
@@ -13532,8 +13337,8 @@
         </p:nvSpPr>
         <p:spPr>
           <a:xfrm>
-            <a:off x="4948732" y="1024128"/>
-            <a:ext cx="2300630" cy="566928"/>
+            <a:off x="4956048" y="1024128"/>
+            <a:ext cx="2286000" cy="621792"/>
           </a:xfrm>
           <a:prstGeom prst="roundRect">
             <a:avLst>
@@ -13579,8 +13384,8 @@
         </p:nvSpPr>
         <p:spPr>
           <a:xfrm>
-            <a:off x="5021884" y="1051560"/>
-            <a:ext cx="2172614" cy="164592"/>
+            <a:off x="5029200" y="1060704"/>
+            <a:ext cx="2157984" cy="146304"/>
           </a:xfrm>
           <a:prstGeom prst="rect">
             <a:avLst/>
@@ -13618,8 +13423,8 @@
         </p:nvSpPr>
         <p:spPr>
           <a:xfrm>
-            <a:off x="5021884" y="1207008"/>
-            <a:ext cx="2172614" cy="201168"/>
+            <a:off x="5029200" y="1225296"/>
+            <a:ext cx="2157984" cy="201168"/>
           </a:xfrm>
           <a:prstGeom prst="rect">
             <a:avLst/>
@@ -13657,8 +13462,8 @@
         </p:nvSpPr>
         <p:spPr>
           <a:xfrm>
-            <a:off x="5021884" y="1408176"/>
-            <a:ext cx="2172614" cy="164592"/>
+            <a:off x="5029200" y="1444752"/>
+            <a:ext cx="2157984" cy="164592"/>
           </a:xfrm>
           <a:prstGeom prst="rect">
             <a:avLst/>
@@ -13696,8 +13501,8 @@
         </p:nvSpPr>
         <p:spPr>
           <a:xfrm>
-            <a:off x="7322515" y="1024128"/>
-            <a:ext cx="2300630" cy="566928"/>
+            <a:off x="7333488" y="1024128"/>
+            <a:ext cx="2286000" cy="621792"/>
           </a:xfrm>
           <a:prstGeom prst="roundRect">
             <a:avLst>
@@ -13743,8 +13548,8 @@
         </p:nvSpPr>
         <p:spPr>
           <a:xfrm>
-            <a:off x="7395667" y="1051560"/>
-            <a:ext cx="2172614" cy="164592"/>
+            <a:off x="7406640" y="1060704"/>
+            <a:ext cx="2157984" cy="146304"/>
           </a:xfrm>
           <a:prstGeom prst="rect">
             <a:avLst/>
@@ -13782,8 +13587,8 @@
         </p:nvSpPr>
         <p:spPr>
           <a:xfrm>
-            <a:off x="7395667" y="1207008"/>
-            <a:ext cx="2172614" cy="201168"/>
+            <a:off x="7406640" y="1225296"/>
+            <a:ext cx="2157984" cy="201168"/>
           </a:xfrm>
           <a:prstGeom prst="rect">
             <a:avLst/>
@@ -13821,8 +13626,8 @@
         </p:nvSpPr>
         <p:spPr>
           <a:xfrm>
-            <a:off x="7395667" y="1408176"/>
-            <a:ext cx="2172614" cy="164592"/>
+            <a:off x="7406640" y="1444752"/>
+            <a:ext cx="2157984" cy="164592"/>
           </a:xfrm>
           <a:prstGeom prst="rect">
             <a:avLst/>
@@ -13860,8 +13665,8 @@
         </p:nvSpPr>
         <p:spPr>
           <a:xfrm>
-            <a:off x="9696297" y="1024128"/>
-            <a:ext cx="2300630" cy="566928"/>
+            <a:off x="9710928" y="1024128"/>
+            <a:ext cx="2286000" cy="621792"/>
           </a:xfrm>
           <a:prstGeom prst="roundRect">
             <a:avLst>
@@ -13907,8 +13712,8 @@
         </p:nvSpPr>
         <p:spPr>
           <a:xfrm>
-            <a:off x="9769449" y="1051560"/>
-            <a:ext cx="2172614" cy="164592"/>
+            <a:off x="9784080" y="1060704"/>
+            <a:ext cx="2157984" cy="146304"/>
           </a:xfrm>
           <a:prstGeom prst="rect">
             <a:avLst/>
@@ -13946,8 +13751,8 @@
         </p:nvSpPr>
         <p:spPr>
           <a:xfrm>
-            <a:off x="9769449" y="1207008"/>
-            <a:ext cx="2172614" cy="201168"/>
+            <a:off x="9784080" y="1225296"/>
+            <a:ext cx="2157984" cy="201168"/>
           </a:xfrm>
           <a:prstGeom prst="rect">
             <a:avLst/>
@@ -13985,8 +13790,8 @@
         </p:nvSpPr>
         <p:spPr>
           <a:xfrm>
-            <a:off x="201168" y="1636776"/>
-            <a:ext cx="2300630" cy="566928"/>
+            <a:off x="201168" y="1719072"/>
+            <a:ext cx="2286000" cy="621792"/>
           </a:xfrm>
           <a:prstGeom prst="roundRect">
             <a:avLst>
@@ -14032,8 +13837,8 @@
         </p:nvSpPr>
         <p:spPr>
           <a:xfrm>
-            <a:off x="274320" y="1664208"/>
-            <a:ext cx="2172614" cy="164592"/>
+            <a:off x="274320" y="1755648"/>
+            <a:ext cx="2157984" cy="146304"/>
           </a:xfrm>
           <a:prstGeom prst="rect">
             <a:avLst/>
@@ -14071,8 +13876,8 @@
         </p:nvSpPr>
         <p:spPr>
           <a:xfrm>
-            <a:off x="274320" y="1819656"/>
-            <a:ext cx="2172614" cy="201168"/>
+            <a:off x="274320" y="1920240"/>
+            <a:ext cx="2157984" cy="201168"/>
           </a:xfrm>
           <a:prstGeom prst="rect">
             <a:avLst/>
@@ -14110,8 +13915,8 @@
         </p:nvSpPr>
         <p:spPr>
           <a:xfrm>
-            <a:off x="2574950" y="1636776"/>
-            <a:ext cx="2300630" cy="566928"/>
+            <a:off x="2578608" y="1719072"/>
+            <a:ext cx="2286000" cy="621792"/>
           </a:xfrm>
           <a:prstGeom prst="roundRect">
             <a:avLst>
@@ -14157,8 +13962,8 @@
         </p:nvSpPr>
         <p:spPr>
           <a:xfrm>
-            <a:off x="2648102" y="1664208"/>
-            <a:ext cx="2172614" cy="164592"/>
+            <a:off x="2651760" y="1755648"/>
+            <a:ext cx="2157984" cy="146304"/>
           </a:xfrm>
           <a:prstGeom prst="rect">
             <a:avLst/>
@@ -14196,8 +14001,8 @@
         </p:nvSpPr>
         <p:spPr>
           <a:xfrm>
-            <a:off x="2648102" y="1819656"/>
-            <a:ext cx="2172614" cy="201168"/>
+            <a:off x="2651760" y="1920240"/>
+            <a:ext cx="2157984" cy="201168"/>
           </a:xfrm>
           <a:prstGeom prst="rect">
             <a:avLst/>
@@ -14235,8 +14040,8 @@
         </p:nvSpPr>
         <p:spPr>
           <a:xfrm>
-            <a:off x="4948732" y="1636776"/>
-            <a:ext cx="2300630" cy="566928"/>
+            <a:off x="4956048" y="1719072"/>
+            <a:ext cx="2286000" cy="621792"/>
           </a:xfrm>
           <a:prstGeom prst="roundRect">
             <a:avLst>
@@ -14282,8 +14087,8 @@
         </p:nvSpPr>
         <p:spPr>
           <a:xfrm>
-            <a:off x="5021884" y="1664208"/>
-            <a:ext cx="2172614" cy="164592"/>
+            <a:off x="5029200" y="1755648"/>
+            <a:ext cx="2157984" cy="146304"/>
           </a:xfrm>
           <a:prstGeom prst="rect">
             <a:avLst/>
@@ -14321,8 +14126,8 @@
         </p:nvSpPr>
         <p:spPr>
           <a:xfrm>
-            <a:off x="5021884" y="1819656"/>
-            <a:ext cx="2172614" cy="201168"/>
+            <a:off x="5029200" y="1920240"/>
+            <a:ext cx="2157984" cy="201168"/>
           </a:xfrm>
           <a:prstGeom prst="rect">
             <a:avLst/>
@@ -14360,8 +14165,8 @@
         </p:nvSpPr>
         <p:spPr>
           <a:xfrm>
-            <a:off x="5021884" y="2020824"/>
-            <a:ext cx="2172614" cy="164592"/>
+            <a:off x="5029200" y="2139696"/>
+            <a:ext cx="2157984" cy="164592"/>
           </a:xfrm>
           <a:prstGeom prst="rect">
             <a:avLst/>
@@ -14399,8 +14204,8 @@
         </p:nvSpPr>
         <p:spPr>
           <a:xfrm>
-            <a:off x="7322515" y="1636776"/>
-            <a:ext cx="2300630" cy="566928"/>
+            <a:off x="7333488" y="1719072"/>
+            <a:ext cx="2286000" cy="621792"/>
           </a:xfrm>
           <a:prstGeom prst="roundRect">
             <a:avLst>
@@ -14446,8 +14251,8 @@
         </p:nvSpPr>
         <p:spPr>
           <a:xfrm>
-            <a:off x="7395667" y="1664208"/>
-            <a:ext cx="2172614" cy="164592"/>
+            <a:off x="7406640" y="1755648"/>
+            <a:ext cx="2157984" cy="146304"/>
           </a:xfrm>
           <a:prstGeom prst="rect">
             <a:avLst/>
@@ -14485,8 +14290,8 @@
         </p:nvSpPr>
         <p:spPr>
           <a:xfrm>
-            <a:off x="7395667" y="1819656"/>
-            <a:ext cx="2172614" cy="201168"/>
+            <a:off x="7406640" y="1920240"/>
+            <a:ext cx="2157984" cy="201168"/>
           </a:xfrm>
           <a:prstGeom prst="rect">
             <a:avLst/>
@@ -14524,8 +14329,8 @@
         </p:nvSpPr>
         <p:spPr>
           <a:xfrm>
-            <a:off x="7395667" y="2020824"/>
-            <a:ext cx="2172614" cy="164592"/>
+            <a:off x="7406640" y="2139696"/>
+            <a:ext cx="2157984" cy="164592"/>
           </a:xfrm>
           <a:prstGeom prst="rect">
             <a:avLst/>
@@ -14563,8 +14368,8 @@
         </p:nvSpPr>
         <p:spPr>
           <a:xfrm>
-            <a:off x="9696297" y="1636776"/>
-            <a:ext cx="2300630" cy="566928"/>
+            <a:off x="9710928" y="1719072"/>
+            <a:ext cx="2286000" cy="621792"/>
           </a:xfrm>
           <a:prstGeom prst="roundRect">
             <a:avLst>
@@ -14610,8 +14415,8 @@
         </p:nvSpPr>
         <p:spPr>
           <a:xfrm>
-            <a:off x="9769449" y="1664208"/>
-            <a:ext cx="2172614" cy="164592"/>
+            <a:off x="9784080" y="1755648"/>
+            <a:ext cx="2157984" cy="146304"/>
           </a:xfrm>
           <a:prstGeom prst="rect">
             <a:avLst/>
@@ -14649,8 +14454,8 @@
         </p:nvSpPr>
         <p:spPr>
           <a:xfrm>
-            <a:off x="9769449" y="1819656"/>
-            <a:ext cx="2172614" cy="201168"/>
+            <a:off x="9784080" y="1920240"/>
+            <a:ext cx="2157984" cy="201168"/>
           </a:xfrm>
           <a:prstGeom prst="rect">
             <a:avLst/>
@@ -14688,8 +14493,8 @@
         </p:nvSpPr>
         <p:spPr>
           <a:xfrm>
-            <a:off x="9769449" y="2020824"/>
-            <a:ext cx="2172614" cy="164592"/>
+            <a:off x="9784080" y="2139696"/>
+            <a:ext cx="2157984" cy="164592"/>
           </a:xfrm>
           <a:prstGeom prst="rect">
             <a:avLst/>
@@ -14727,8 +14532,8 @@
         </p:nvSpPr>
         <p:spPr>
           <a:xfrm>
-            <a:off x="201168" y="2276856"/>
-            <a:ext cx="7973568" cy="3337559"/>
+            <a:off x="201168" y="2432304"/>
+            <a:ext cx="7973568" cy="3182111"/>
           </a:xfrm>
           <a:prstGeom prst="roundRect">
             <a:avLst>
@@ -14780,8 +14585,8 @@
         </p:blipFill>
         <p:spPr>
           <a:xfrm>
-            <a:off x="424627" y="2331720"/>
-            <a:ext cx="7526649" cy="3227831"/>
+            <a:off x="605863" y="2487168"/>
+            <a:ext cx="7164176" cy="3072383"/>
           </a:xfrm>
           <a:prstGeom prst="rect">
             <a:avLst/>
@@ -14796,8 +14601,8 @@
         </p:nvSpPr>
         <p:spPr>
           <a:xfrm>
-            <a:off x="8302752" y="2276856"/>
-            <a:ext cx="3675887" cy="3337559"/>
+            <a:off x="8302752" y="2432304"/>
+            <a:ext cx="3675887" cy="3182111"/>
           </a:xfrm>
           <a:prstGeom prst="roundRect">
             <a:avLst>
@@ -14843,7 +14648,7 @@
         </p:nvSpPr>
         <p:spPr>
           <a:xfrm>
-            <a:off x="8430768" y="2322576"/>
+            <a:off x="8430768" y="2478024"/>
             <a:ext cx="3419856" cy="164592"/>
           </a:xfrm>
           <a:prstGeom prst="rect">
@@ -14882,7 +14687,7 @@
         </p:nvSpPr>
         <p:spPr>
           <a:xfrm>
-            <a:off x="8430768" y="2487168"/>
+            <a:off x="8430768" y="2642616"/>
             <a:ext cx="3419856" cy="201168"/>
           </a:xfrm>
           <a:prstGeom prst="rect">
@@ -14921,8 +14726,8 @@
         </p:nvSpPr>
         <p:spPr>
           <a:xfrm>
-            <a:off x="8430768" y="2697480"/>
-            <a:ext cx="3419856" cy="369678"/>
+            <a:off x="8430768" y="2852928"/>
+            <a:ext cx="3419856" cy="347471"/>
           </a:xfrm>
           <a:prstGeom prst="roundRect">
             <a:avLst>
@@ -14968,8 +14773,8 @@
         </p:nvSpPr>
         <p:spPr>
           <a:xfrm>
-            <a:off x="8540496" y="2724912"/>
-            <a:ext cx="3200400" cy="155265"/>
+            <a:off x="8540496" y="2880360"/>
+            <a:ext cx="3200400" cy="145938"/>
           </a:xfrm>
           <a:prstGeom prst="rect">
             <a:avLst/>
@@ -15007,8 +14812,8 @@
         </p:nvSpPr>
         <p:spPr>
           <a:xfrm>
-            <a:off x="8540496" y="2852745"/>
-            <a:ext cx="3200400" cy="192233"/>
+            <a:off x="8540496" y="2998866"/>
+            <a:ext cx="3200400" cy="180685"/>
           </a:xfrm>
           <a:prstGeom prst="rect">
             <a:avLst/>
@@ -15046,8 +14851,8 @@
         </p:nvSpPr>
         <p:spPr>
           <a:xfrm>
-            <a:off x="8430768" y="3103734"/>
-            <a:ext cx="3419856" cy="369678"/>
+            <a:off x="8430768" y="3236976"/>
+            <a:ext cx="3419856" cy="347471"/>
           </a:xfrm>
           <a:prstGeom prst="roundRect">
             <a:avLst>
@@ -15093,8 +14898,8 @@
         </p:nvSpPr>
         <p:spPr>
           <a:xfrm>
-            <a:off x="8540496" y="3131166"/>
-            <a:ext cx="3200400" cy="155265"/>
+            <a:off x="8540496" y="3264408"/>
+            <a:ext cx="3200400" cy="145938"/>
           </a:xfrm>
           <a:prstGeom prst="rect">
             <a:avLst/>
@@ -15132,8 +14937,8 @@
         </p:nvSpPr>
         <p:spPr>
           <a:xfrm>
-            <a:off x="8540496" y="3258999"/>
-            <a:ext cx="3200400" cy="192233"/>
+            <a:off x="8540496" y="3382914"/>
+            <a:ext cx="3200400" cy="180685"/>
           </a:xfrm>
           <a:prstGeom prst="rect">
             <a:avLst/>
@@ -15171,8 +14976,8 @@
         </p:nvSpPr>
         <p:spPr>
           <a:xfrm>
-            <a:off x="8430768" y="3509989"/>
-            <a:ext cx="3419856" cy="369678"/>
+            <a:off x="8430768" y="3621024"/>
+            <a:ext cx="3419856" cy="347471"/>
           </a:xfrm>
           <a:prstGeom prst="roundRect">
             <a:avLst>
@@ -15218,8 +15023,8 @@
         </p:nvSpPr>
         <p:spPr>
           <a:xfrm>
-            <a:off x="8540496" y="3537421"/>
-            <a:ext cx="3200400" cy="155265"/>
+            <a:off x="8540496" y="3648456"/>
+            <a:ext cx="3200400" cy="145938"/>
           </a:xfrm>
           <a:prstGeom prst="rect">
             <a:avLst/>
@@ -15257,8 +15062,8 @@
         </p:nvSpPr>
         <p:spPr>
           <a:xfrm>
-            <a:off x="8540496" y="3665254"/>
-            <a:ext cx="3200400" cy="192233"/>
+            <a:off x="8540496" y="3766962"/>
+            <a:ext cx="3200400" cy="180685"/>
           </a:xfrm>
           <a:prstGeom prst="rect">
             <a:avLst/>
@@ -15296,8 +15101,8 @@
         </p:nvSpPr>
         <p:spPr>
           <a:xfrm>
-            <a:off x="8430768" y="3916244"/>
-            <a:ext cx="3419856" cy="369678"/>
+            <a:off x="8430768" y="4005072"/>
+            <a:ext cx="3419856" cy="347471"/>
           </a:xfrm>
           <a:prstGeom prst="roundRect">
             <a:avLst>
@@ -15343,8 +15148,8 @@
         </p:nvSpPr>
         <p:spPr>
           <a:xfrm>
-            <a:off x="8540496" y="3943676"/>
-            <a:ext cx="3200400" cy="155265"/>
+            <a:off x="8540496" y="4032504"/>
+            <a:ext cx="3200400" cy="145938"/>
           </a:xfrm>
           <a:prstGeom prst="rect">
             <a:avLst/>
@@ -15382,8 +15187,8 @@
         </p:nvSpPr>
         <p:spPr>
           <a:xfrm>
-            <a:off x="8540496" y="4071509"/>
-            <a:ext cx="3200400" cy="192233"/>
+            <a:off x="8540496" y="4151010"/>
+            <a:ext cx="3200400" cy="180685"/>
           </a:xfrm>
           <a:prstGeom prst="rect">
             <a:avLst/>
@@ -15421,8 +15226,8 @@
         </p:nvSpPr>
         <p:spPr>
           <a:xfrm>
-            <a:off x="8430768" y="4322499"/>
-            <a:ext cx="3419856" cy="369678"/>
+            <a:off x="8430768" y="4389120"/>
+            <a:ext cx="3419856" cy="347471"/>
           </a:xfrm>
           <a:prstGeom prst="roundRect">
             <a:avLst>
@@ -15468,8 +15273,8 @@
         </p:nvSpPr>
         <p:spPr>
           <a:xfrm>
-            <a:off x="8540496" y="4349931"/>
-            <a:ext cx="3200400" cy="155265"/>
+            <a:off x="8540496" y="4416552"/>
+            <a:ext cx="3200400" cy="145938"/>
           </a:xfrm>
           <a:prstGeom prst="rect">
             <a:avLst/>
@@ -15507,8 +15312,8 @@
         </p:nvSpPr>
         <p:spPr>
           <a:xfrm>
-            <a:off x="8540496" y="4477764"/>
-            <a:ext cx="3200400" cy="192233"/>
+            <a:off x="8540496" y="4535058"/>
+            <a:ext cx="3200400" cy="180685"/>
           </a:xfrm>
           <a:prstGeom prst="rect">
             <a:avLst/>
@@ -15546,8 +15351,8 @@
         </p:nvSpPr>
         <p:spPr>
           <a:xfrm>
-            <a:off x="8430768" y="4728754"/>
-            <a:ext cx="3419856" cy="369678"/>
+            <a:off x="8430768" y="4773168"/>
+            <a:ext cx="3419856" cy="347471"/>
           </a:xfrm>
           <a:prstGeom prst="roundRect">
             <a:avLst>
@@ -15593,8 +15398,8 @@
         </p:nvSpPr>
         <p:spPr>
           <a:xfrm>
-            <a:off x="8540496" y="4756186"/>
-            <a:ext cx="3200400" cy="155265"/>
+            <a:off x="8540496" y="4800600"/>
+            <a:ext cx="3200400" cy="145938"/>
           </a:xfrm>
           <a:prstGeom prst="rect">
             <a:avLst/>
@@ -15632,8 +15437,8 @@
         </p:nvSpPr>
         <p:spPr>
           <a:xfrm>
-            <a:off x="8540496" y="4884019"/>
-            <a:ext cx="3200400" cy="192233"/>
+            <a:off x="8540496" y="4919106"/>
+            <a:ext cx="3200400" cy="180685"/>
           </a:xfrm>
           <a:prstGeom prst="rect">
             <a:avLst/>
@@ -15671,8 +15476,8 @@
         </p:nvSpPr>
         <p:spPr>
           <a:xfrm>
-            <a:off x="8430768" y="5135009"/>
-            <a:ext cx="3419856" cy="369678"/>
+            <a:off x="8430768" y="5157216"/>
+            <a:ext cx="3419856" cy="347471"/>
           </a:xfrm>
           <a:prstGeom prst="roundRect">
             <a:avLst>
@@ -15718,8 +15523,8 @@
         </p:nvSpPr>
         <p:spPr>
           <a:xfrm>
-            <a:off x="8540496" y="5162441"/>
-            <a:ext cx="3200400" cy="155265"/>
+            <a:off x="8540496" y="5184648"/>
+            <a:ext cx="3200400" cy="145938"/>
           </a:xfrm>
           <a:prstGeom prst="rect">
             <a:avLst/>
@@ -15757,8 +15562,8 @@
         </p:nvSpPr>
         <p:spPr>
           <a:xfrm>
-            <a:off x="8540496" y="5290274"/>
-            <a:ext cx="3200400" cy="192233"/>
+            <a:off x="8540496" y="5303154"/>
+            <a:ext cx="3200400" cy="180685"/>
           </a:xfrm>
           <a:prstGeom prst="rect">
             <a:avLst/>

--- a/reports/Parque_Arauco/TMP_7MALLS/entrega_diego_anibal/Recorrido_ejecutivo_PA_MAE_20260817.pptx
+++ b/reports/Parque_Arauco/TMP_7MALLS/entrega_diego_anibal/Recorrido_ejecutivo_PA_MAE_20260817.pptx
@@ -4443,29 +4443,29 @@
               </a:spcAft>
             </a:pPr>
             <a:r>
-              <a:rPr sz="1300" b="0">
+              <a:rPr sz="1200" b="0">
                 <a:solidFill>
                   <a:srgbClr val="0D3B66"/>
                 </a:solidFill>
                 <a:latin typeface="Calibri"/>
               </a:rPr>
-              <a:t>Julio (31 noches): Distrito de Lujo mediana 42,6 m³  ·  Bazar Gourmet 28,7 m³  ·  DL Kennedy 1,3 m³. Ejemplo 10/08 00–06: Distrito de Lujo 41,2 m³  ·  Bazar 28,2 m³  ·  DL Kennedy 0,9 m³.</a:t>
-            </a:r>
-          </a:p>
-          <a:p>
-            <a:pPr algn="l">
-              <a:spcAft>
-                <a:spcPts val="300"/>
-              </a:spcAft>
-            </a:pPr>
-            <a:r>
-              <a:rPr sz="1300" b="1">
+              <a:t>10/08 00–06: Distrito de Lujo 41,2 m³  ·  Bazar 28,2 + DL Kennedy 0,9 = 29,1 m³. Quedan 12,1 m³ en el tronco que no aparecen en esos dos ramales. En julio esa diferencia de madrugada es estable (mediana 13,1 m³/noche; Bazar + Kennedy cubren 71 % del tronco).</a:t>
+            </a:r>
+          </a:p>
+          <a:p>
+            <a:pPr algn="l">
+              <a:spcAft>
+                <a:spcPts val="300"/>
+              </a:spcAft>
+            </a:pPr>
+            <a:r>
+              <a:rPr sz="1200" b="1">
                 <a:solidFill>
                   <a:srgbClr val="0D3B66"/>
                 </a:solidFill>
                 <a:latin typeface="Calibri"/>
               </a:rPr>
-              <a:t>Propuesta: instalar control nocturno en Distrito de Lujo (tronco). De madrugada, Bazar Gourmet sigue al tronco y DL Kennedy queda residual. Cortar el tronco corta el caudal de noche del Distrito de Lujo.</a:t>
+              <a:t>No asignamos ese hueco a un destino: no está en Bazar ni en DL Kennedy. Propuesta: control nocturno en Distrito de Lujo (tronco). Cortar el tronco corta Bazar, DL Kennedy y también ese caudal no ramaleado.</a:t>
             </a:r>
           </a:p>
         </p:txBody>

--- a/reports/Parque_Arauco/TMP_7MALLS/entrega_diego_anibal/Recorrido_ejecutivo_PA_MAE_20260817.pptx
+++ b/reports/Parque_Arauco/TMP_7MALLS/entrega_diego_anibal/Recorrido_ejecutivo_PA_MAE_20260817.pptx
@@ -15,6 +15,7 @@
     <p:sldId id="263" r:id="rId14"/>
     <p:sldId id="264" r:id="rId15"/>
     <p:sldId id="265" r:id="rId16"/>
+    <p:sldId id="266" r:id="rId17"/>
   </p:sldIdLst>
   <p:sldSz cx="12191695" cy="6858000" type="screen4x3"/>
   <p:notesSz cx="6858000" cy="9144000"/>
@@ -3308,7 +3309,7 @@
                 </a:solidFill>
                 <a:latin typeface="Calibri"/>
               </a:rPr>
-              <a:t>Lámina 2: MAE hallazgos  ·  PAK cadena Sandía / Distrito de Lujo</a:t>
+              <a:t>Lámina 2: MAE hallazgos  ·  MAM Placa Bancaria  ·  PAK cadena Sandía / DL</a:t>
             </a:r>
           </a:p>
         </p:txBody>
@@ -3475,6 +3476,2867 @@
                 </a:solidFill>
                 <a:latin typeface="Calibri"/>
               </a:rPr>
+              <a:t>PAK  ·  Equipos y consumo</a:t>
+            </a:r>
+          </a:p>
+        </p:txBody>
+      </p:sp>
+      <p:sp>
+        <p:nvSpPr>
+          <p:cNvPr id="6" name="TextBox 5"/>
+          <p:cNvSpPr txBox="1"/>
+          <p:nvPr/>
+        </p:nvSpPr>
+        <p:spPr>
+          <a:xfrm>
+            <a:off x="256032" y="457200"/>
+            <a:ext cx="10607040" cy="329184"/>
+          </a:xfrm>
+          <a:prstGeom prst="rect">
+            <a:avLst/>
+          </a:prstGeom>
+          <a:noFill/>
+        </p:spPr>
+        <p:txBody>
+          <a:bodyPr wrap="square">
+            <a:spAutoFit/>
+          </a:bodyPr>
+          <a:lstStyle/>
+          <a:p>
+            <a:pPr algn="l">
+              <a:spcAft>
+                <a:spcPts val="300"/>
+              </a:spcAft>
+            </a:pPr>
+            <a:r>
+              <a:rPr sz="1100" b="0">
+                <a:solidFill>
+                  <a:srgbClr val="DCE6F0"/>
+                </a:solidFill>
+                <a:latin typeface="Calibri"/>
+              </a:rPr>
+              <a:t>Parque Arauco Kennedy   |   10 puntos WES   |   julio = cabecera (sin 27, 35 y 36)   |   01/05/2026 – 17/08/2026</a:t>
+            </a:r>
+          </a:p>
+        </p:txBody>
+      </p:sp>
+      <p:sp>
+        <p:nvSpPr>
+          <p:cNvPr id="7" name="Rounded Rectangle 6"/>
+          <p:cNvSpPr/>
+          <p:nvPr/>
+        </p:nvSpPr>
+        <p:spPr>
+          <a:xfrm>
+            <a:off x="201168" y="1024128"/>
+            <a:ext cx="2286000" cy="621792"/>
+          </a:xfrm>
+          <a:prstGeom prst="roundRect">
+            <a:avLst>
+              <a:gd name="adj" fmla="val 8000"/>
+            </a:avLst>
+          </a:prstGeom>
+          <a:solidFill>
+            <a:srgbClr val="F5F7FA"/>
+          </a:solidFill>
+          <a:ln w="6350">
+            <a:solidFill>
+              <a:srgbClr val="8C5A5A"/>
+            </a:solidFill>
+          </a:ln>
+        </p:spPr>
+        <p:style>
+          <a:lnRef idx="1">
+            <a:schemeClr val="accent1"/>
+          </a:lnRef>
+          <a:fillRef idx="3">
+            <a:schemeClr val="accent1"/>
+          </a:fillRef>
+          <a:effectRef idx="2">
+            <a:schemeClr val="accent1"/>
+          </a:effectRef>
+          <a:fontRef idx="minor">
+            <a:schemeClr val="lt1"/>
+          </a:fontRef>
+        </p:style>
+        <p:txBody>
+          <a:bodyPr rtlCol="0" anchor="ctr"/>
+          <a:lstStyle/>
+          <a:p>
+            <a:pPr algn="ctr"/>
+          </a:p>
+        </p:txBody>
+      </p:sp>
+      <p:sp>
+        <p:nvSpPr>
+          <p:cNvPr id="8" name="TextBox 7"/>
+          <p:cNvSpPr txBox="1"/>
+          <p:nvPr/>
+        </p:nvSpPr>
+        <p:spPr>
+          <a:xfrm>
+            <a:off x="274320" y="1060704"/>
+            <a:ext cx="2157984" cy="146304"/>
+          </a:xfrm>
+          <a:prstGeom prst="rect">
+            <a:avLst/>
+          </a:prstGeom>
+          <a:noFill/>
+        </p:spPr>
+        <p:txBody>
+          <a:bodyPr wrap="square">
+            <a:spAutoFit/>
+          </a:bodyPr>
+          <a:lstStyle/>
+          <a:p>
+            <a:pPr algn="l">
+              <a:spcAft>
+                <a:spcPts val="300"/>
+              </a:spcAft>
+            </a:pPr>
+            <a:r>
+              <a:rPr sz="900" b="1">
+                <a:solidFill>
+                  <a:srgbClr val="C9A227"/>
+                </a:solidFill>
+                <a:latin typeface="Calibri"/>
+              </a:rPr>
+              <a:t>000025-20</a:t>
+            </a:r>
+          </a:p>
+        </p:txBody>
+      </p:sp>
+      <p:sp>
+        <p:nvSpPr>
+          <p:cNvPr id="9" name="TextBox 8"/>
+          <p:cNvSpPr txBox="1"/>
+          <p:nvPr/>
+        </p:nvSpPr>
+        <p:spPr>
+          <a:xfrm>
+            <a:off x="274320" y="1225296"/>
+            <a:ext cx="2157984" cy="201168"/>
+          </a:xfrm>
+          <a:prstGeom prst="rect">
+            <a:avLst/>
+          </a:prstGeom>
+          <a:noFill/>
+        </p:spPr>
+        <p:txBody>
+          <a:bodyPr wrap="square">
+            <a:spAutoFit/>
+          </a:bodyPr>
+          <a:lstStyle/>
+          <a:p>
+            <a:pPr algn="l">
+              <a:spcAft>
+                <a:spcPts val="300"/>
+              </a:spcAft>
+            </a:pPr>
+            <a:r>
+              <a:rPr sz="1100" b="1">
+                <a:solidFill>
+                  <a:srgbClr val="0D3B66"/>
+                </a:solidFill>
+                <a:latin typeface="Calibri"/>
+              </a:rPr>
+              <a:t>Matriz Andén</a:t>
+            </a:r>
+          </a:p>
+        </p:txBody>
+      </p:sp>
+      <p:sp>
+        <p:nvSpPr>
+          <p:cNvPr id="10" name="Rounded Rectangle 9"/>
+          <p:cNvSpPr/>
+          <p:nvPr/>
+        </p:nvSpPr>
+        <p:spPr>
+          <a:xfrm>
+            <a:off x="2578608" y="1024128"/>
+            <a:ext cx="2286000" cy="621792"/>
+          </a:xfrm>
+          <a:prstGeom prst="roundRect">
+            <a:avLst>
+              <a:gd name="adj" fmla="val 8000"/>
+            </a:avLst>
+          </a:prstGeom>
+          <a:solidFill>
+            <a:srgbClr val="F5F7FA"/>
+          </a:solidFill>
+          <a:ln w="6350">
+            <a:solidFill>
+              <a:srgbClr val="46648C"/>
+            </a:solidFill>
+          </a:ln>
+        </p:spPr>
+        <p:style>
+          <a:lnRef idx="1">
+            <a:schemeClr val="accent1"/>
+          </a:lnRef>
+          <a:fillRef idx="3">
+            <a:schemeClr val="accent1"/>
+          </a:fillRef>
+          <a:effectRef idx="2">
+            <a:schemeClr val="accent1"/>
+          </a:effectRef>
+          <a:fontRef idx="minor">
+            <a:schemeClr val="lt1"/>
+          </a:fontRef>
+        </p:style>
+        <p:txBody>
+          <a:bodyPr rtlCol="0" anchor="ctr"/>
+          <a:lstStyle/>
+          <a:p>
+            <a:pPr algn="ctr"/>
+          </a:p>
+        </p:txBody>
+      </p:sp>
+      <p:sp>
+        <p:nvSpPr>
+          <p:cNvPr id="11" name="TextBox 10"/>
+          <p:cNvSpPr txBox="1"/>
+          <p:nvPr/>
+        </p:nvSpPr>
+        <p:spPr>
+          <a:xfrm>
+            <a:off x="2651760" y="1060704"/>
+            <a:ext cx="2157984" cy="146304"/>
+          </a:xfrm>
+          <a:prstGeom prst="rect">
+            <a:avLst/>
+          </a:prstGeom>
+          <a:noFill/>
+        </p:spPr>
+        <p:txBody>
+          <a:bodyPr wrap="square">
+            <a:spAutoFit/>
+          </a:bodyPr>
+          <a:lstStyle/>
+          <a:p>
+            <a:pPr algn="l">
+              <a:spcAft>
+                <a:spcPts val="300"/>
+              </a:spcAft>
+            </a:pPr>
+            <a:r>
+              <a:rPr sz="900" b="1">
+                <a:solidFill>
+                  <a:srgbClr val="C9A227"/>
+                </a:solidFill>
+                <a:latin typeface="Calibri"/>
+              </a:rPr>
+              <a:t>000025-21</a:t>
+            </a:r>
+          </a:p>
+        </p:txBody>
+      </p:sp>
+      <p:sp>
+        <p:nvSpPr>
+          <p:cNvPr id="12" name="TextBox 11"/>
+          <p:cNvSpPr txBox="1"/>
+          <p:nvPr/>
+        </p:nvSpPr>
+        <p:spPr>
+          <a:xfrm>
+            <a:off x="2651760" y="1225296"/>
+            <a:ext cx="2157984" cy="201168"/>
+          </a:xfrm>
+          <a:prstGeom prst="rect">
+            <a:avLst/>
+          </a:prstGeom>
+          <a:noFill/>
+        </p:spPr>
+        <p:txBody>
+          <a:bodyPr wrap="square">
+            <a:spAutoFit/>
+          </a:bodyPr>
+          <a:lstStyle/>
+          <a:p>
+            <a:pPr algn="l">
+              <a:spcAft>
+                <a:spcPts val="300"/>
+              </a:spcAft>
+            </a:pPr>
+            <a:r>
+              <a:rPr sz="1100" b="1">
+                <a:solidFill>
+                  <a:srgbClr val="0D3B66"/>
+                </a:solidFill>
+                <a:latin typeface="Calibri"/>
+              </a:rPr>
+              <a:t>Locales Gast.</a:t>
+            </a:r>
+          </a:p>
+        </p:txBody>
+      </p:sp>
+      <p:sp>
+        <p:nvSpPr>
+          <p:cNvPr id="13" name="Rounded Rectangle 12"/>
+          <p:cNvSpPr/>
+          <p:nvPr/>
+        </p:nvSpPr>
+        <p:spPr>
+          <a:xfrm>
+            <a:off x="4956048" y="1024128"/>
+            <a:ext cx="2286000" cy="621792"/>
+          </a:xfrm>
+          <a:prstGeom prst="roundRect">
+            <a:avLst>
+              <a:gd name="adj" fmla="val 8000"/>
+            </a:avLst>
+          </a:prstGeom>
+          <a:solidFill>
+            <a:srgbClr val="F5F7FA"/>
+          </a:solidFill>
+          <a:ln w="6350">
+            <a:solidFill>
+              <a:srgbClr val="A0783C"/>
+            </a:solidFill>
+          </a:ln>
+        </p:spPr>
+        <p:style>
+          <a:lnRef idx="1">
+            <a:schemeClr val="accent1"/>
+          </a:lnRef>
+          <a:fillRef idx="3">
+            <a:schemeClr val="accent1"/>
+          </a:fillRef>
+          <a:effectRef idx="2">
+            <a:schemeClr val="accent1"/>
+          </a:effectRef>
+          <a:fontRef idx="minor">
+            <a:schemeClr val="lt1"/>
+          </a:fontRef>
+        </p:style>
+        <p:txBody>
+          <a:bodyPr rtlCol="0" anchor="ctr"/>
+          <a:lstStyle/>
+          <a:p>
+            <a:pPr algn="ctr"/>
+          </a:p>
+        </p:txBody>
+      </p:sp>
+      <p:sp>
+        <p:nvSpPr>
+          <p:cNvPr id="14" name="TextBox 13"/>
+          <p:cNvSpPr txBox="1"/>
+          <p:nvPr/>
+        </p:nvSpPr>
+        <p:spPr>
+          <a:xfrm>
+            <a:off x="5029200" y="1060704"/>
+            <a:ext cx="2157984" cy="146304"/>
+          </a:xfrm>
+          <a:prstGeom prst="rect">
+            <a:avLst/>
+          </a:prstGeom>
+          <a:noFill/>
+        </p:spPr>
+        <p:txBody>
+          <a:bodyPr wrap="square">
+            <a:spAutoFit/>
+          </a:bodyPr>
+          <a:lstStyle/>
+          <a:p>
+            <a:pPr algn="l">
+              <a:spcAft>
+                <a:spcPts val="300"/>
+              </a:spcAft>
+            </a:pPr>
+            <a:r>
+              <a:rPr sz="900" b="1">
+                <a:solidFill>
+                  <a:srgbClr val="C9A227"/>
+                </a:solidFill>
+                <a:latin typeface="Calibri"/>
+              </a:rPr>
+              <a:t>000025-22</a:t>
+            </a:r>
+          </a:p>
+        </p:txBody>
+      </p:sp>
+      <p:sp>
+        <p:nvSpPr>
+          <p:cNvPr id="15" name="TextBox 14"/>
+          <p:cNvSpPr txBox="1"/>
+          <p:nvPr/>
+        </p:nvSpPr>
+        <p:spPr>
+          <a:xfrm>
+            <a:off x="5029200" y="1225296"/>
+            <a:ext cx="2157984" cy="201168"/>
+          </a:xfrm>
+          <a:prstGeom prst="rect">
+            <a:avLst/>
+          </a:prstGeom>
+          <a:noFill/>
+        </p:spPr>
+        <p:txBody>
+          <a:bodyPr wrap="square">
+            <a:spAutoFit/>
+          </a:bodyPr>
+          <a:lstStyle/>
+          <a:p>
+            <a:pPr algn="l">
+              <a:spcAft>
+                <a:spcPts val="300"/>
+              </a:spcAft>
+            </a:pPr>
+            <a:r>
+              <a:rPr sz="1100" b="1">
+                <a:solidFill>
+                  <a:srgbClr val="0D3B66"/>
+                </a:solidFill>
+                <a:latin typeface="Calibri"/>
+              </a:rPr>
+              <a:t>Sandía Antigua</a:t>
+            </a:r>
+          </a:p>
+        </p:txBody>
+      </p:sp>
+      <p:sp>
+        <p:nvSpPr>
+          <p:cNvPr id="16" name="TextBox 15"/>
+          <p:cNvSpPr txBox="1"/>
+          <p:nvPr/>
+        </p:nvSpPr>
+        <p:spPr>
+          <a:xfrm>
+            <a:off x="5029200" y="1444752"/>
+            <a:ext cx="2157984" cy="164592"/>
+          </a:xfrm>
+          <a:prstGeom prst="rect">
+            <a:avLst/>
+          </a:prstGeom>
+          <a:noFill/>
+        </p:spPr>
+        <p:txBody>
+          <a:bodyPr wrap="square">
+            <a:spAutoFit/>
+          </a:bodyPr>
+          <a:lstStyle/>
+          <a:p>
+            <a:pPr algn="l">
+              <a:spcAft>
+                <a:spcPts val="300"/>
+              </a:spcAft>
+            </a:pPr>
+            <a:r>
+              <a:rPr sz="800" b="0">
+                <a:solidFill>
+                  <a:srgbClr val="5A5A5A"/>
+                </a:solidFill>
+                <a:latin typeface="Calibri"/>
+              </a:rPr>
+              <a:t>alimenta 27</a:t>
+            </a:r>
+          </a:p>
+        </p:txBody>
+      </p:sp>
+      <p:sp>
+        <p:nvSpPr>
+          <p:cNvPr id="17" name="Rounded Rectangle 16"/>
+          <p:cNvSpPr/>
+          <p:nvPr/>
+        </p:nvSpPr>
+        <p:spPr>
+          <a:xfrm>
+            <a:off x="7333488" y="1024128"/>
+            <a:ext cx="2286000" cy="621792"/>
+          </a:xfrm>
+          <a:prstGeom prst="roundRect">
+            <a:avLst>
+              <a:gd name="adj" fmla="val 8000"/>
+            </a:avLst>
+          </a:prstGeom>
+          <a:solidFill>
+            <a:srgbClr val="F5F7FA"/>
+          </a:solidFill>
+          <a:ln w="6350">
+            <a:solidFill>
+              <a:srgbClr val="1F77B4"/>
+            </a:solidFill>
+          </a:ln>
+        </p:spPr>
+        <p:style>
+          <a:lnRef idx="1">
+            <a:schemeClr val="accent1"/>
+          </a:lnRef>
+          <a:fillRef idx="3">
+            <a:schemeClr val="accent1"/>
+          </a:fillRef>
+          <a:effectRef idx="2">
+            <a:schemeClr val="accent1"/>
+          </a:effectRef>
+          <a:fontRef idx="minor">
+            <a:schemeClr val="lt1"/>
+          </a:fontRef>
+        </p:style>
+        <p:txBody>
+          <a:bodyPr rtlCol="0" anchor="ctr"/>
+          <a:lstStyle/>
+          <a:p>
+            <a:pPr algn="ctr"/>
+          </a:p>
+        </p:txBody>
+      </p:sp>
+      <p:sp>
+        <p:nvSpPr>
+          <p:cNvPr id="18" name="TextBox 17"/>
+          <p:cNvSpPr txBox="1"/>
+          <p:nvPr/>
+        </p:nvSpPr>
+        <p:spPr>
+          <a:xfrm>
+            <a:off x="7406640" y="1060704"/>
+            <a:ext cx="2157984" cy="146304"/>
+          </a:xfrm>
+          <a:prstGeom prst="rect">
+            <a:avLst/>
+          </a:prstGeom>
+          <a:noFill/>
+        </p:spPr>
+        <p:txBody>
+          <a:bodyPr wrap="square">
+            <a:spAutoFit/>
+          </a:bodyPr>
+          <a:lstStyle/>
+          <a:p>
+            <a:pPr algn="l">
+              <a:spcAft>
+                <a:spcPts val="300"/>
+              </a:spcAft>
+            </a:pPr>
+            <a:r>
+              <a:rPr sz="900" b="1">
+                <a:solidFill>
+                  <a:srgbClr val="C9A227"/>
+                </a:solidFill>
+                <a:latin typeface="Calibri"/>
+              </a:rPr>
+              <a:t>000025-28</a:t>
+            </a:r>
+          </a:p>
+        </p:txBody>
+      </p:sp>
+      <p:sp>
+        <p:nvSpPr>
+          <p:cNvPr id="19" name="TextBox 18"/>
+          <p:cNvSpPr txBox="1"/>
+          <p:nvPr/>
+        </p:nvSpPr>
+        <p:spPr>
+          <a:xfrm>
+            <a:off x="7406640" y="1225296"/>
+            <a:ext cx="2157984" cy="201168"/>
+          </a:xfrm>
+          <a:prstGeom prst="rect">
+            <a:avLst/>
+          </a:prstGeom>
+          <a:noFill/>
+        </p:spPr>
+        <p:txBody>
+          <a:bodyPr wrap="square">
+            <a:spAutoFit/>
+          </a:bodyPr>
+          <a:lstStyle/>
+          <a:p>
+            <a:pPr algn="l">
+              <a:spcAft>
+                <a:spcPts val="300"/>
+              </a:spcAft>
+            </a:pPr>
+            <a:r>
+              <a:rPr sz="1100" b="1">
+                <a:solidFill>
+                  <a:srgbClr val="0D3B66"/>
+                </a:solidFill>
+                <a:latin typeface="Calibri"/>
+              </a:rPr>
+              <a:t>Sandía Nueva</a:t>
+            </a:r>
+          </a:p>
+        </p:txBody>
+      </p:sp>
+      <p:sp>
+        <p:nvSpPr>
+          <p:cNvPr id="20" name="TextBox 19"/>
+          <p:cNvSpPr txBox="1"/>
+          <p:nvPr/>
+        </p:nvSpPr>
+        <p:spPr>
+          <a:xfrm>
+            <a:off x="7406640" y="1444752"/>
+            <a:ext cx="2157984" cy="164592"/>
+          </a:xfrm>
+          <a:prstGeom prst="rect">
+            <a:avLst/>
+          </a:prstGeom>
+          <a:noFill/>
+        </p:spPr>
+        <p:txBody>
+          <a:bodyPr wrap="square">
+            <a:spAutoFit/>
+          </a:bodyPr>
+          <a:lstStyle/>
+          <a:p>
+            <a:pPr algn="l">
+              <a:spcAft>
+                <a:spcPts val="300"/>
+              </a:spcAft>
+            </a:pPr>
+            <a:r>
+              <a:rPr sz="800" b="0">
+                <a:solidFill>
+                  <a:srgbClr val="5A5A5A"/>
+                </a:solidFill>
+                <a:latin typeface="Calibri"/>
+              </a:rPr>
+              <a:t>alimenta 27</a:t>
+            </a:r>
+          </a:p>
+        </p:txBody>
+      </p:sp>
+      <p:sp>
+        <p:nvSpPr>
+          <p:cNvPr id="21" name="Rounded Rectangle 20"/>
+          <p:cNvSpPr/>
+          <p:nvPr/>
+        </p:nvSpPr>
+        <p:spPr>
+          <a:xfrm>
+            <a:off x="9710928" y="1024128"/>
+            <a:ext cx="2286000" cy="621792"/>
+          </a:xfrm>
+          <a:prstGeom prst="roundRect">
+            <a:avLst>
+              <a:gd name="adj" fmla="val 8000"/>
+            </a:avLst>
+          </a:prstGeom>
+          <a:solidFill>
+            <a:srgbClr val="F5F7FA"/>
+          </a:solidFill>
+          <a:ln w="6350">
+            <a:solidFill>
+              <a:srgbClr val="C45C26"/>
+            </a:solidFill>
+          </a:ln>
+        </p:spPr>
+        <p:style>
+          <a:lnRef idx="1">
+            <a:schemeClr val="accent1"/>
+          </a:lnRef>
+          <a:fillRef idx="3">
+            <a:schemeClr val="accent1"/>
+          </a:fillRef>
+          <a:effectRef idx="2">
+            <a:schemeClr val="accent1"/>
+          </a:effectRef>
+          <a:fontRef idx="minor">
+            <a:schemeClr val="lt1"/>
+          </a:fontRef>
+        </p:style>
+        <p:txBody>
+          <a:bodyPr rtlCol="0" anchor="ctr"/>
+          <a:lstStyle/>
+          <a:p>
+            <a:pPr algn="ctr"/>
+          </a:p>
+        </p:txBody>
+      </p:sp>
+      <p:sp>
+        <p:nvSpPr>
+          <p:cNvPr id="22" name="TextBox 21"/>
+          <p:cNvSpPr txBox="1"/>
+          <p:nvPr/>
+        </p:nvSpPr>
+        <p:spPr>
+          <a:xfrm>
+            <a:off x="9784080" y="1060704"/>
+            <a:ext cx="2157984" cy="146304"/>
+          </a:xfrm>
+          <a:prstGeom prst="rect">
+            <a:avLst/>
+          </a:prstGeom>
+          <a:noFill/>
+        </p:spPr>
+        <p:txBody>
+          <a:bodyPr wrap="square">
+            <a:spAutoFit/>
+          </a:bodyPr>
+          <a:lstStyle/>
+          <a:p>
+            <a:pPr algn="l">
+              <a:spcAft>
+                <a:spcPts val="300"/>
+              </a:spcAft>
+            </a:pPr>
+            <a:r>
+              <a:rPr sz="900" b="1">
+                <a:solidFill>
+                  <a:srgbClr val="C9A227"/>
+                </a:solidFill>
+                <a:latin typeface="Calibri"/>
+              </a:rPr>
+              <a:t>000025-29</a:t>
+            </a:r>
+          </a:p>
+        </p:txBody>
+      </p:sp>
+      <p:sp>
+        <p:nvSpPr>
+          <p:cNvPr id="23" name="TextBox 22"/>
+          <p:cNvSpPr txBox="1"/>
+          <p:nvPr/>
+        </p:nvSpPr>
+        <p:spPr>
+          <a:xfrm>
+            <a:off x="9784080" y="1225296"/>
+            <a:ext cx="2157984" cy="201168"/>
+          </a:xfrm>
+          <a:prstGeom prst="rect">
+            <a:avLst/>
+          </a:prstGeom>
+          <a:noFill/>
+        </p:spPr>
+        <p:txBody>
+          <a:bodyPr wrap="square">
+            <a:spAutoFit/>
+          </a:bodyPr>
+          <a:lstStyle/>
+          <a:p>
+            <a:pPr algn="l">
+              <a:spcAft>
+                <a:spcPts val="300"/>
+              </a:spcAft>
+            </a:pPr>
+            <a:r>
+              <a:rPr sz="1100" b="1">
+                <a:solidFill>
+                  <a:srgbClr val="0D3B66"/>
+                </a:solidFill>
+                <a:latin typeface="Calibri"/>
+              </a:rPr>
+              <a:t>Restaurante</a:t>
+            </a:r>
+          </a:p>
+        </p:txBody>
+      </p:sp>
+      <p:sp>
+        <p:nvSpPr>
+          <p:cNvPr id="24" name="Rounded Rectangle 23"/>
+          <p:cNvSpPr/>
+          <p:nvPr/>
+        </p:nvSpPr>
+        <p:spPr>
+          <a:xfrm>
+            <a:off x="201168" y="1719072"/>
+            <a:ext cx="2286000" cy="621792"/>
+          </a:xfrm>
+          <a:prstGeom prst="roundRect">
+            <a:avLst>
+              <a:gd name="adj" fmla="val 8000"/>
+            </a:avLst>
+          </a:prstGeom>
+          <a:solidFill>
+            <a:srgbClr val="F5F7FA"/>
+          </a:solidFill>
+          <a:ln w="6350">
+            <a:solidFill>
+              <a:srgbClr val="508282"/>
+            </a:solidFill>
+          </a:ln>
+        </p:spPr>
+        <p:style>
+          <a:lnRef idx="1">
+            <a:schemeClr val="accent1"/>
+          </a:lnRef>
+          <a:fillRef idx="3">
+            <a:schemeClr val="accent1"/>
+          </a:fillRef>
+          <a:effectRef idx="2">
+            <a:schemeClr val="accent1"/>
+          </a:effectRef>
+          <a:fontRef idx="minor">
+            <a:schemeClr val="lt1"/>
+          </a:fontRef>
+        </p:style>
+        <p:txBody>
+          <a:bodyPr rtlCol="0" anchor="ctr"/>
+          <a:lstStyle/>
+          <a:p>
+            <a:pPr algn="ctr"/>
+          </a:p>
+        </p:txBody>
+      </p:sp>
+      <p:sp>
+        <p:nvSpPr>
+          <p:cNvPr id="25" name="TextBox 24"/>
+          <p:cNvSpPr txBox="1"/>
+          <p:nvPr/>
+        </p:nvSpPr>
+        <p:spPr>
+          <a:xfrm>
+            <a:off x="274320" y="1755648"/>
+            <a:ext cx="2157984" cy="146304"/>
+          </a:xfrm>
+          <a:prstGeom prst="rect">
+            <a:avLst/>
+          </a:prstGeom>
+          <a:noFill/>
+        </p:spPr>
+        <p:txBody>
+          <a:bodyPr wrap="square">
+            <a:spAutoFit/>
+          </a:bodyPr>
+          <a:lstStyle/>
+          <a:p>
+            <a:pPr algn="l">
+              <a:spcAft>
+                <a:spcPts val="300"/>
+              </a:spcAft>
+            </a:pPr>
+            <a:r>
+              <a:rPr sz="900" b="1">
+                <a:solidFill>
+                  <a:srgbClr val="C9A227"/>
+                </a:solidFill>
+                <a:latin typeface="Calibri"/>
+              </a:rPr>
+              <a:t>000025-23</a:t>
+            </a:r>
+          </a:p>
+        </p:txBody>
+      </p:sp>
+      <p:sp>
+        <p:nvSpPr>
+          <p:cNvPr id="26" name="TextBox 25"/>
+          <p:cNvSpPr txBox="1"/>
+          <p:nvPr/>
+        </p:nvSpPr>
+        <p:spPr>
+          <a:xfrm>
+            <a:off x="274320" y="1920240"/>
+            <a:ext cx="2157984" cy="201168"/>
+          </a:xfrm>
+          <a:prstGeom prst="rect">
+            <a:avLst/>
+          </a:prstGeom>
+          <a:noFill/>
+        </p:spPr>
+        <p:txBody>
+          <a:bodyPr wrap="square">
+            <a:spAutoFit/>
+          </a:bodyPr>
+          <a:lstStyle/>
+          <a:p>
+            <a:pPr algn="l">
+              <a:spcAft>
+                <a:spcPts val="300"/>
+              </a:spcAft>
+            </a:pPr>
+            <a:r>
+              <a:rPr sz="1100" b="1">
+                <a:solidFill>
+                  <a:srgbClr val="0D3B66"/>
+                </a:solidFill>
+                <a:latin typeface="Calibri"/>
+              </a:rPr>
+              <a:t>Pileta</a:t>
+            </a:r>
+          </a:p>
+        </p:txBody>
+      </p:sp>
+      <p:sp>
+        <p:nvSpPr>
+          <p:cNvPr id="27" name="Rounded Rectangle 26"/>
+          <p:cNvSpPr/>
+          <p:nvPr/>
+        </p:nvSpPr>
+        <p:spPr>
+          <a:xfrm>
+            <a:off x="2578608" y="1719072"/>
+            <a:ext cx="2286000" cy="621792"/>
+          </a:xfrm>
+          <a:prstGeom prst="roundRect">
+            <a:avLst>
+              <a:gd name="adj" fmla="val 8000"/>
+            </a:avLst>
+          </a:prstGeom>
+          <a:solidFill>
+            <a:srgbClr val="F5F7FA"/>
+          </a:solidFill>
+          <a:ln w="6350">
+            <a:solidFill>
+              <a:srgbClr val="0D3B66"/>
+            </a:solidFill>
+          </a:ln>
+        </p:spPr>
+        <p:style>
+          <a:lnRef idx="1">
+            <a:schemeClr val="accent1"/>
+          </a:lnRef>
+          <a:fillRef idx="3">
+            <a:schemeClr val="accent1"/>
+          </a:fillRef>
+          <a:effectRef idx="2">
+            <a:schemeClr val="accent1"/>
+          </a:effectRef>
+          <a:fontRef idx="minor">
+            <a:schemeClr val="lt1"/>
+          </a:fontRef>
+        </p:style>
+        <p:txBody>
+          <a:bodyPr rtlCol="0" anchor="ctr"/>
+          <a:lstStyle/>
+          <a:p>
+            <a:pPr algn="ctr"/>
+          </a:p>
+        </p:txBody>
+      </p:sp>
+      <p:sp>
+        <p:nvSpPr>
+          <p:cNvPr id="28" name="TextBox 27"/>
+          <p:cNvSpPr txBox="1"/>
+          <p:nvPr/>
+        </p:nvSpPr>
+        <p:spPr>
+          <a:xfrm>
+            <a:off x="2651760" y="1755648"/>
+            <a:ext cx="2157984" cy="146304"/>
+          </a:xfrm>
+          <a:prstGeom prst="rect">
+            <a:avLst/>
+          </a:prstGeom>
+          <a:noFill/>
+        </p:spPr>
+        <p:txBody>
+          <a:bodyPr wrap="square">
+            <a:spAutoFit/>
+          </a:bodyPr>
+          <a:lstStyle/>
+          <a:p>
+            <a:pPr algn="l">
+              <a:spcAft>
+                <a:spcPts val="300"/>
+              </a:spcAft>
+            </a:pPr>
+            <a:r>
+              <a:rPr sz="900" b="1">
+                <a:solidFill>
+                  <a:srgbClr val="C9A227"/>
+                </a:solidFill>
+                <a:latin typeface="Calibri"/>
+              </a:rPr>
+              <a:t>000025-24</a:t>
+            </a:r>
+          </a:p>
+        </p:txBody>
+      </p:sp>
+      <p:sp>
+        <p:nvSpPr>
+          <p:cNvPr id="29" name="TextBox 28"/>
+          <p:cNvSpPr txBox="1"/>
+          <p:nvPr/>
+        </p:nvSpPr>
+        <p:spPr>
+          <a:xfrm>
+            <a:off x="2651760" y="1920240"/>
+            <a:ext cx="2157984" cy="201168"/>
+          </a:xfrm>
+          <a:prstGeom prst="rect">
+            <a:avLst/>
+          </a:prstGeom>
+          <a:noFill/>
+        </p:spPr>
+        <p:txBody>
+          <a:bodyPr wrap="square">
+            <a:spAutoFit/>
+          </a:bodyPr>
+          <a:lstStyle/>
+          <a:p>
+            <a:pPr algn="l">
+              <a:spcAft>
+                <a:spcPts val="300"/>
+              </a:spcAft>
+            </a:pPr>
+            <a:r>
+              <a:rPr sz="1100" b="1">
+                <a:solidFill>
+                  <a:srgbClr val="0D3B66"/>
+                </a:solidFill>
+                <a:latin typeface="Calibri"/>
+              </a:rPr>
+              <a:t>Cascada</a:t>
+            </a:r>
+          </a:p>
+        </p:txBody>
+      </p:sp>
+      <p:sp>
+        <p:nvSpPr>
+          <p:cNvPr id="30" name="Rounded Rectangle 29"/>
+          <p:cNvSpPr/>
+          <p:nvPr/>
+        </p:nvSpPr>
+        <p:spPr>
+          <a:xfrm>
+            <a:off x="4956048" y="1719072"/>
+            <a:ext cx="2286000" cy="621792"/>
+          </a:xfrm>
+          <a:prstGeom prst="roundRect">
+            <a:avLst>
+              <a:gd name="adj" fmla="val 8000"/>
+            </a:avLst>
+          </a:prstGeom>
+          <a:solidFill>
+            <a:srgbClr val="FFF9EB"/>
+          </a:solidFill>
+          <a:ln w="6350">
+            <a:solidFill>
+              <a:srgbClr val="C45C26"/>
+            </a:solidFill>
+          </a:ln>
+        </p:spPr>
+        <p:style>
+          <a:lnRef idx="1">
+            <a:schemeClr val="accent1"/>
+          </a:lnRef>
+          <a:fillRef idx="3">
+            <a:schemeClr val="accent1"/>
+          </a:fillRef>
+          <a:effectRef idx="2">
+            <a:schemeClr val="accent1"/>
+          </a:effectRef>
+          <a:fontRef idx="minor">
+            <a:schemeClr val="lt1"/>
+          </a:fontRef>
+        </p:style>
+        <p:txBody>
+          <a:bodyPr rtlCol="0" anchor="ctr"/>
+          <a:lstStyle/>
+          <a:p>
+            <a:pPr algn="ctr"/>
+          </a:p>
+        </p:txBody>
+      </p:sp>
+      <p:sp>
+        <p:nvSpPr>
+          <p:cNvPr id="31" name="TextBox 30"/>
+          <p:cNvSpPr txBox="1"/>
+          <p:nvPr/>
+        </p:nvSpPr>
+        <p:spPr>
+          <a:xfrm>
+            <a:off x="5029200" y="1755648"/>
+            <a:ext cx="2157984" cy="146304"/>
+          </a:xfrm>
+          <a:prstGeom prst="rect">
+            <a:avLst/>
+          </a:prstGeom>
+          <a:noFill/>
+        </p:spPr>
+        <p:txBody>
+          <a:bodyPr wrap="square">
+            <a:spAutoFit/>
+          </a:bodyPr>
+          <a:lstStyle/>
+          <a:p>
+            <a:pPr algn="l">
+              <a:spcAft>
+                <a:spcPts val="300"/>
+              </a:spcAft>
+            </a:pPr>
+            <a:r>
+              <a:rPr sz="900" b="1">
+                <a:solidFill>
+                  <a:srgbClr val="C9A227"/>
+                </a:solidFill>
+                <a:latin typeface="Calibri"/>
+              </a:rPr>
+              <a:t>000025-27</a:t>
+            </a:r>
+          </a:p>
+        </p:txBody>
+      </p:sp>
+      <p:sp>
+        <p:nvSpPr>
+          <p:cNvPr id="32" name="TextBox 31"/>
+          <p:cNvSpPr txBox="1"/>
+          <p:nvPr/>
+        </p:nvSpPr>
+        <p:spPr>
+          <a:xfrm>
+            <a:off x="5029200" y="1920240"/>
+            <a:ext cx="2157984" cy="201168"/>
+          </a:xfrm>
+          <a:prstGeom prst="rect">
+            <a:avLst/>
+          </a:prstGeom>
+          <a:noFill/>
+        </p:spPr>
+        <p:txBody>
+          <a:bodyPr wrap="square">
+            <a:spAutoFit/>
+          </a:bodyPr>
+          <a:lstStyle/>
+          <a:p>
+            <a:pPr algn="l">
+              <a:spcAft>
+                <a:spcPts val="300"/>
+              </a:spcAft>
+            </a:pPr>
+            <a:r>
+              <a:rPr sz="1100" b="1">
+                <a:solidFill>
+                  <a:srgbClr val="0D3B66"/>
+                </a:solidFill>
+                <a:latin typeface="Calibri"/>
+              </a:rPr>
+              <a:t>Distrito Lujo</a:t>
+            </a:r>
+          </a:p>
+        </p:txBody>
+      </p:sp>
+      <p:sp>
+        <p:nvSpPr>
+          <p:cNvPr id="33" name="TextBox 32"/>
+          <p:cNvSpPr txBox="1"/>
+          <p:nvPr/>
+        </p:nvSpPr>
+        <p:spPr>
+          <a:xfrm>
+            <a:off x="5029200" y="2139696"/>
+            <a:ext cx="2157984" cy="164592"/>
+          </a:xfrm>
+          <a:prstGeom prst="rect">
+            <a:avLst/>
+          </a:prstGeom>
+          <a:noFill/>
+        </p:spPr>
+        <p:txBody>
+          <a:bodyPr wrap="square">
+            <a:spAutoFit/>
+          </a:bodyPr>
+          <a:lstStyle/>
+          <a:p>
+            <a:pPr algn="l">
+              <a:spcAft>
+                <a:spcPts val="300"/>
+              </a:spcAft>
+            </a:pPr>
+            <a:r>
+              <a:rPr sz="800" b="0">
+                <a:solidFill>
+                  <a:srgbClr val="5A5A5A"/>
+                </a:solidFill>
+                <a:latin typeface="Calibri"/>
+              </a:rPr>
+              <a:t>cadena · no suma</a:t>
+            </a:r>
+          </a:p>
+        </p:txBody>
+      </p:sp>
+      <p:sp>
+        <p:nvSpPr>
+          <p:cNvPr id="34" name="Rounded Rectangle 33"/>
+          <p:cNvSpPr/>
+          <p:nvPr/>
+        </p:nvSpPr>
+        <p:spPr>
+          <a:xfrm>
+            <a:off x="7333488" y="1719072"/>
+            <a:ext cx="2286000" cy="621792"/>
+          </a:xfrm>
+          <a:prstGeom prst="roundRect">
+            <a:avLst>
+              <a:gd name="adj" fmla="val 8000"/>
+            </a:avLst>
+          </a:prstGeom>
+          <a:solidFill>
+            <a:srgbClr val="FFF9EB"/>
+          </a:solidFill>
+          <a:ln w="6350">
+            <a:solidFill>
+              <a:srgbClr val="C9A227"/>
+            </a:solidFill>
+          </a:ln>
+        </p:spPr>
+        <p:style>
+          <a:lnRef idx="1">
+            <a:schemeClr val="accent1"/>
+          </a:lnRef>
+          <a:fillRef idx="3">
+            <a:schemeClr val="accent1"/>
+          </a:fillRef>
+          <a:effectRef idx="2">
+            <a:schemeClr val="accent1"/>
+          </a:effectRef>
+          <a:fontRef idx="minor">
+            <a:schemeClr val="lt1"/>
+          </a:fontRef>
+        </p:style>
+        <p:txBody>
+          <a:bodyPr rtlCol="0" anchor="ctr"/>
+          <a:lstStyle/>
+          <a:p>
+            <a:pPr algn="ctr"/>
+          </a:p>
+        </p:txBody>
+      </p:sp>
+      <p:sp>
+        <p:nvSpPr>
+          <p:cNvPr id="35" name="TextBox 34"/>
+          <p:cNvSpPr txBox="1"/>
+          <p:nvPr/>
+        </p:nvSpPr>
+        <p:spPr>
+          <a:xfrm>
+            <a:off x="7406640" y="1755648"/>
+            <a:ext cx="2157984" cy="146304"/>
+          </a:xfrm>
+          <a:prstGeom prst="rect">
+            <a:avLst/>
+          </a:prstGeom>
+          <a:noFill/>
+        </p:spPr>
+        <p:txBody>
+          <a:bodyPr wrap="square">
+            <a:spAutoFit/>
+          </a:bodyPr>
+          <a:lstStyle/>
+          <a:p>
+            <a:pPr algn="l">
+              <a:spcAft>
+                <a:spcPts val="300"/>
+              </a:spcAft>
+            </a:pPr>
+            <a:r>
+              <a:rPr sz="900" b="1">
+                <a:solidFill>
+                  <a:srgbClr val="C9A227"/>
+                </a:solidFill>
+                <a:latin typeface="Calibri"/>
+              </a:rPr>
+              <a:t>000025-35</a:t>
+            </a:r>
+          </a:p>
+        </p:txBody>
+      </p:sp>
+      <p:sp>
+        <p:nvSpPr>
+          <p:cNvPr id="36" name="TextBox 35"/>
+          <p:cNvSpPr txBox="1"/>
+          <p:nvPr/>
+        </p:nvSpPr>
+        <p:spPr>
+          <a:xfrm>
+            <a:off x="7406640" y="1920240"/>
+            <a:ext cx="2157984" cy="201168"/>
+          </a:xfrm>
+          <a:prstGeom prst="rect">
+            <a:avLst/>
+          </a:prstGeom>
+          <a:noFill/>
+        </p:spPr>
+        <p:txBody>
+          <a:bodyPr wrap="square">
+            <a:spAutoFit/>
+          </a:bodyPr>
+          <a:lstStyle/>
+          <a:p>
+            <a:pPr algn="l">
+              <a:spcAft>
+                <a:spcPts val="300"/>
+              </a:spcAft>
+            </a:pPr>
+            <a:r>
+              <a:rPr sz="1100" b="1">
+                <a:solidFill>
+                  <a:srgbClr val="0D3B66"/>
+                </a:solidFill>
+                <a:latin typeface="Calibri"/>
+              </a:rPr>
+              <a:t>Bazar Gourmet</a:t>
+            </a:r>
+          </a:p>
+        </p:txBody>
+      </p:sp>
+      <p:sp>
+        <p:nvSpPr>
+          <p:cNvPr id="37" name="TextBox 36"/>
+          <p:cNvSpPr txBox="1"/>
+          <p:nvPr/>
+        </p:nvSpPr>
+        <p:spPr>
+          <a:xfrm>
+            <a:off x="7406640" y="2139696"/>
+            <a:ext cx="2157984" cy="164592"/>
+          </a:xfrm>
+          <a:prstGeom prst="rect">
+            <a:avLst/>
+          </a:prstGeom>
+          <a:noFill/>
+        </p:spPr>
+        <p:txBody>
+          <a:bodyPr wrap="square">
+            <a:spAutoFit/>
+          </a:bodyPr>
+          <a:lstStyle/>
+          <a:p>
+            <a:pPr algn="l">
+              <a:spcAft>
+                <a:spcPts val="300"/>
+              </a:spcAft>
+            </a:pPr>
+            <a:r>
+              <a:rPr sz="800" b="0">
+                <a:solidFill>
+                  <a:srgbClr val="5A5A5A"/>
+                </a:solidFill>
+                <a:latin typeface="Calibri"/>
+              </a:rPr>
+              <a:t>sale de 27</a:t>
+            </a:r>
+          </a:p>
+        </p:txBody>
+      </p:sp>
+      <p:sp>
+        <p:nvSpPr>
+          <p:cNvPr id="38" name="Rounded Rectangle 37"/>
+          <p:cNvSpPr/>
+          <p:nvPr/>
+        </p:nvSpPr>
+        <p:spPr>
+          <a:xfrm>
+            <a:off x="9710928" y="1719072"/>
+            <a:ext cx="2286000" cy="621792"/>
+          </a:xfrm>
+          <a:prstGeom prst="roundRect">
+            <a:avLst>
+              <a:gd name="adj" fmla="val 8000"/>
+            </a:avLst>
+          </a:prstGeom>
+          <a:solidFill>
+            <a:srgbClr val="FFF9EB"/>
+          </a:solidFill>
+          <a:ln w="6350">
+            <a:solidFill>
+              <a:srgbClr val="5A8C6E"/>
+            </a:solidFill>
+          </a:ln>
+        </p:spPr>
+        <p:style>
+          <a:lnRef idx="1">
+            <a:schemeClr val="accent1"/>
+          </a:lnRef>
+          <a:fillRef idx="3">
+            <a:schemeClr val="accent1"/>
+          </a:fillRef>
+          <a:effectRef idx="2">
+            <a:schemeClr val="accent1"/>
+          </a:effectRef>
+          <a:fontRef idx="minor">
+            <a:schemeClr val="lt1"/>
+          </a:fontRef>
+        </p:style>
+        <p:txBody>
+          <a:bodyPr rtlCol="0" anchor="ctr"/>
+          <a:lstStyle/>
+          <a:p>
+            <a:pPr algn="ctr"/>
+          </a:p>
+        </p:txBody>
+      </p:sp>
+      <p:sp>
+        <p:nvSpPr>
+          <p:cNvPr id="39" name="TextBox 38"/>
+          <p:cNvSpPr txBox="1"/>
+          <p:nvPr/>
+        </p:nvSpPr>
+        <p:spPr>
+          <a:xfrm>
+            <a:off x="9784080" y="1755648"/>
+            <a:ext cx="2157984" cy="146304"/>
+          </a:xfrm>
+          <a:prstGeom prst="rect">
+            <a:avLst/>
+          </a:prstGeom>
+          <a:noFill/>
+        </p:spPr>
+        <p:txBody>
+          <a:bodyPr wrap="square">
+            <a:spAutoFit/>
+          </a:bodyPr>
+          <a:lstStyle/>
+          <a:p>
+            <a:pPr algn="l">
+              <a:spcAft>
+                <a:spcPts val="300"/>
+              </a:spcAft>
+            </a:pPr>
+            <a:r>
+              <a:rPr sz="900" b="1">
+                <a:solidFill>
+                  <a:srgbClr val="C9A227"/>
+                </a:solidFill>
+                <a:latin typeface="Calibri"/>
+              </a:rPr>
+              <a:t>000025-36</a:t>
+            </a:r>
+          </a:p>
+        </p:txBody>
+      </p:sp>
+      <p:sp>
+        <p:nvSpPr>
+          <p:cNvPr id="40" name="TextBox 39"/>
+          <p:cNvSpPr txBox="1"/>
+          <p:nvPr/>
+        </p:nvSpPr>
+        <p:spPr>
+          <a:xfrm>
+            <a:off x="9784080" y="1920240"/>
+            <a:ext cx="2157984" cy="201168"/>
+          </a:xfrm>
+          <a:prstGeom prst="rect">
+            <a:avLst/>
+          </a:prstGeom>
+          <a:noFill/>
+        </p:spPr>
+        <p:txBody>
+          <a:bodyPr wrap="square">
+            <a:spAutoFit/>
+          </a:bodyPr>
+          <a:lstStyle/>
+          <a:p>
+            <a:pPr algn="l">
+              <a:spcAft>
+                <a:spcPts val="300"/>
+              </a:spcAft>
+            </a:pPr>
+            <a:r>
+              <a:rPr sz="1100" b="1">
+                <a:solidFill>
+                  <a:srgbClr val="0D3B66"/>
+                </a:solidFill>
+                <a:latin typeface="Calibri"/>
+              </a:rPr>
+              <a:t>DL Kennedy</a:t>
+            </a:r>
+          </a:p>
+        </p:txBody>
+      </p:sp>
+      <p:sp>
+        <p:nvSpPr>
+          <p:cNvPr id="41" name="TextBox 40"/>
+          <p:cNvSpPr txBox="1"/>
+          <p:nvPr/>
+        </p:nvSpPr>
+        <p:spPr>
+          <a:xfrm>
+            <a:off x="9784080" y="2139696"/>
+            <a:ext cx="2157984" cy="164592"/>
+          </a:xfrm>
+          <a:prstGeom prst="rect">
+            <a:avLst/>
+          </a:prstGeom>
+          <a:noFill/>
+        </p:spPr>
+        <p:txBody>
+          <a:bodyPr wrap="square">
+            <a:spAutoFit/>
+          </a:bodyPr>
+          <a:lstStyle/>
+          <a:p>
+            <a:pPr algn="l">
+              <a:spcAft>
+                <a:spcPts val="300"/>
+              </a:spcAft>
+            </a:pPr>
+            <a:r>
+              <a:rPr sz="800" b="0">
+                <a:solidFill>
+                  <a:srgbClr val="5A5A5A"/>
+                </a:solidFill>
+                <a:latin typeface="Calibri"/>
+              </a:rPr>
+              <a:t>sale de 27</a:t>
+            </a:r>
+          </a:p>
+        </p:txBody>
+      </p:sp>
+      <p:sp>
+        <p:nvSpPr>
+          <p:cNvPr id="42" name="Rounded Rectangle 41"/>
+          <p:cNvSpPr/>
+          <p:nvPr/>
+        </p:nvSpPr>
+        <p:spPr>
+          <a:xfrm>
+            <a:off x="201168" y="2432304"/>
+            <a:ext cx="7973568" cy="3182111"/>
+          </a:xfrm>
+          <a:prstGeom prst="roundRect">
+            <a:avLst>
+              <a:gd name="adj" fmla="val 8000"/>
+            </a:avLst>
+          </a:prstGeom>
+          <a:solidFill>
+            <a:srgbClr val="F5F7FA"/>
+          </a:solidFill>
+          <a:ln>
+            <a:noFill/>
+          </a:ln>
+        </p:spPr>
+        <p:style>
+          <a:lnRef idx="1">
+            <a:schemeClr val="accent1"/>
+          </a:lnRef>
+          <a:fillRef idx="3">
+            <a:schemeClr val="accent1"/>
+          </a:fillRef>
+          <a:effectRef idx="2">
+            <a:schemeClr val="accent1"/>
+          </a:effectRef>
+          <a:fontRef idx="minor">
+            <a:schemeClr val="lt1"/>
+          </a:fontRef>
+        </p:style>
+        <p:txBody>
+          <a:bodyPr rtlCol="0" anchor="ctr"/>
+          <a:lstStyle/>
+          <a:p>
+            <a:pPr algn="ctr"/>
+          </a:p>
+        </p:txBody>
+      </p:sp>
+      <p:pic>
+        <p:nvPicPr>
+          <p:cNvPr id="43" name="Picture 42" descr="pak_mensual_may_ago.png"/>
+          <p:cNvPicPr>
+            <a:picLocks noChangeAspect="1"/>
+          </p:cNvPicPr>
+          <p:nvPr/>
+        </p:nvPicPr>
+        <p:blipFill>
+          <a:blip r:embed="rId3"/>
+          <a:stretch>
+            <a:fillRect/>
+          </a:stretch>
+        </p:blipFill>
+        <p:spPr>
+          <a:xfrm>
+            <a:off x="605863" y="2487168"/>
+            <a:ext cx="7164176" cy="3072383"/>
+          </a:xfrm>
+          <a:prstGeom prst="rect">
+            <a:avLst/>
+          </a:prstGeom>
+        </p:spPr>
+      </p:pic>
+      <p:sp>
+        <p:nvSpPr>
+          <p:cNvPr id="44" name="Rounded Rectangle 43"/>
+          <p:cNvSpPr/>
+          <p:nvPr/>
+        </p:nvSpPr>
+        <p:spPr>
+          <a:xfrm>
+            <a:off x="8302752" y="2432304"/>
+            <a:ext cx="3675887" cy="3182111"/>
+          </a:xfrm>
+          <a:prstGeom prst="roundRect">
+            <a:avLst>
+              <a:gd name="adj" fmla="val 8000"/>
+            </a:avLst>
+          </a:prstGeom>
+          <a:solidFill>
+            <a:srgbClr val="FFFFFF"/>
+          </a:solidFill>
+          <a:ln w="6350">
+            <a:solidFill>
+              <a:srgbClr val="1F77B4"/>
+            </a:solidFill>
+          </a:ln>
+        </p:spPr>
+        <p:style>
+          <a:lnRef idx="1">
+            <a:schemeClr val="accent1"/>
+          </a:lnRef>
+          <a:fillRef idx="3">
+            <a:schemeClr val="accent1"/>
+          </a:fillRef>
+          <a:effectRef idx="2">
+            <a:schemeClr val="accent1"/>
+          </a:effectRef>
+          <a:fontRef idx="minor">
+            <a:schemeClr val="lt1"/>
+          </a:fontRef>
+        </p:style>
+        <p:txBody>
+          <a:bodyPr rtlCol="0" anchor="ctr"/>
+          <a:lstStyle/>
+          <a:p>
+            <a:pPr algn="ctr"/>
+          </a:p>
+        </p:txBody>
+      </p:sp>
+      <p:sp>
+        <p:nvSpPr>
+          <p:cNvPr id="45" name="TextBox 44"/>
+          <p:cNvSpPr txBox="1"/>
+          <p:nvPr/>
+        </p:nvSpPr>
+        <p:spPr>
+          <a:xfrm>
+            <a:off x="8430768" y="2478024"/>
+            <a:ext cx="3419856" cy="164592"/>
+          </a:xfrm>
+          <a:prstGeom prst="rect">
+            <a:avLst/>
+          </a:prstGeom>
+          <a:noFill/>
+        </p:spPr>
+        <p:txBody>
+          <a:bodyPr wrap="square">
+            <a:spAutoFit/>
+          </a:bodyPr>
+          <a:lstStyle/>
+          <a:p>
+            <a:pPr algn="l">
+              <a:spcAft>
+                <a:spcPts val="300"/>
+              </a:spcAft>
+            </a:pPr>
+            <a:r>
+              <a:rPr sz="1100" b="1">
+                <a:solidFill>
+                  <a:srgbClr val="1F77B4"/>
+                </a:solidFill>
+                <a:latin typeface="Calibri"/>
+              </a:rPr>
+              <a:t>JULIO · cabecera</a:t>
+            </a:r>
+          </a:p>
+        </p:txBody>
+      </p:sp>
+      <p:sp>
+        <p:nvSpPr>
+          <p:cNvPr id="46" name="TextBox 45"/>
+          <p:cNvSpPr txBox="1"/>
+          <p:nvPr/>
+        </p:nvSpPr>
+        <p:spPr>
+          <a:xfrm>
+            <a:off x="8430768" y="2642616"/>
+            <a:ext cx="3419856" cy="201168"/>
+          </a:xfrm>
+          <a:prstGeom prst="rect">
+            <a:avLst/>
+          </a:prstGeom>
+          <a:noFill/>
+        </p:spPr>
+        <p:txBody>
+          <a:bodyPr wrap="square">
+            <a:spAutoFit/>
+          </a:bodyPr>
+          <a:lstStyle/>
+          <a:p>
+            <a:pPr algn="l">
+              <a:spcAft>
+                <a:spcPts val="300"/>
+              </a:spcAft>
+            </a:pPr>
+            <a:r>
+              <a:rPr sz="1200" b="0">
+                <a:solidFill>
+                  <a:srgbClr val="5A5A5A"/>
+                </a:solidFill>
+                <a:latin typeface="Calibri"/>
+              </a:rPr>
+              <a:t>El recinto sumó 31.239 m³</a:t>
+            </a:r>
+          </a:p>
+        </p:txBody>
+      </p:sp>
+      <p:sp>
+        <p:nvSpPr>
+          <p:cNvPr id="47" name="Rounded Rectangle 46"/>
+          <p:cNvSpPr/>
+          <p:nvPr/>
+        </p:nvSpPr>
+        <p:spPr>
+          <a:xfrm>
+            <a:off x="8430768" y="2852928"/>
+            <a:ext cx="3419856" cy="347471"/>
+          </a:xfrm>
+          <a:prstGeom prst="roundRect">
+            <a:avLst>
+              <a:gd name="adj" fmla="val 8000"/>
+            </a:avLst>
+          </a:prstGeom>
+          <a:solidFill>
+            <a:srgbClr val="F5F7FA"/>
+          </a:solidFill>
+          <a:ln w="6350">
+            <a:solidFill>
+              <a:srgbClr val="A0783C"/>
+            </a:solidFill>
+          </a:ln>
+        </p:spPr>
+        <p:style>
+          <a:lnRef idx="1">
+            <a:schemeClr val="accent1"/>
+          </a:lnRef>
+          <a:fillRef idx="3">
+            <a:schemeClr val="accent1"/>
+          </a:fillRef>
+          <a:effectRef idx="2">
+            <a:schemeClr val="accent1"/>
+          </a:effectRef>
+          <a:fontRef idx="minor">
+            <a:schemeClr val="lt1"/>
+          </a:fontRef>
+        </p:style>
+        <p:txBody>
+          <a:bodyPr rtlCol="0" anchor="ctr"/>
+          <a:lstStyle/>
+          <a:p>
+            <a:pPr algn="ctr"/>
+          </a:p>
+        </p:txBody>
+      </p:sp>
+      <p:sp>
+        <p:nvSpPr>
+          <p:cNvPr id="48" name="TextBox 47"/>
+          <p:cNvSpPr txBox="1"/>
+          <p:nvPr/>
+        </p:nvSpPr>
+        <p:spPr>
+          <a:xfrm>
+            <a:off x="8540496" y="2880360"/>
+            <a:ext cx="3200400" cy="145938"/>
+          </a:xfrm>
+          <a:prstGeom prst="rect">
+            <a:avLst/>
+          </a:prstGeom>
+          <a:noFill/>
+        </p:spPr>
+        <p:txBody>
+          <a:bodyPr wrap="square">
+            <a:spAutoFit/>
+          </a:bodyPr>
+          <a:lstStyle/>
+          <a:p>
+            <a:pPr algn="l">
+              <a:spcAft>
+                <a:spcPts val="300"/>
+              </a:spcAft>
+            </a:pPr>
+            <a:r>
+              <a:rPr sz="1000" b="1">
+                <a:solidFill>
+                  <a:srgbClr val="A0783C"/>
+                </a:solidFill>
+                <a:latin typeface="Calibri"/>
+              </a:rPr>
+              <a:t>Sandía Antigua</a:t>
+            </a:r>
+          </a:p>
+        </p:txBody>
+      </p:sp>
+      <p:sp>
+        <p:nvSpPr>
+          <p:cNvPr id="49" name="TextBox 48"/>
+          <p:cNvSpPr txBox="1"/>
+          <p:nvPr/>
+        </p:nvSpPr>
+        <p:spPr>
+          <a:xfrm>
+            <a:off x="8540496" y="2998866"/>
+            <a:ext cx="3200400" cy="180685"/>
+          </a:xfrm>
+          <a:prstGeom prst="rect">
+            <a:avLst/>
+          </a:prstGeom>
+          <a:noFill/>
+        </p:spPr>
+        <p:txBody>
+          <a:bodyPr wrap="square">
+            <a:spAutoFit/>
+          </a:bodyPr>
+          <a:lstStyle/>
+          <a:p>
+            <a:pPr algn="l">
+              <a:spcAft>
+                <a:spcPts val="300"/>
+              </a:spcAft>
+            </a:pPr>
+            <a:r>
+              <a:rPr sz="1200" b="1">
+                <a:solidFill>
+                  <a:srgbClr val="0D3B66"/>
+                </a:solidFill>
+                <a:latin typeface="Calibri"/>
+              </a:rPr>
+              <a:t>13.661 m³    43,7 %</a:t>
+            </a:r>
+          </a:p>
+        </p:txBody>
+      </p:sp>
+      <p:sp>
+        <p:nvSpPr>
+          <p:cNvPr id="50" name="Rounded Rectangle 49"/>
+          <p:cNvSpPr/>
+          <p:nvPr/>
+        </p:nvSpPr>
+        <p:spPr>
+          <a:xfrm>
+            <a:off x="8430768" y="3236976"/>
+            <a:ext cx="3419856" cy="347471"/>
+          </a:xfrm>
+          <a:prstGeom prst="roundRect">
+            <a:avLst>
+              <a:gd name="adj" fmla="val 8000"/>
+            </a:avLst>
+          </a:prstGeom>
+          <a:solidFill>
+            <a:srgbClr val="F5F7FA"/>
+          </a:solidFill>
+          <a:ln w="6350">
+            <a:solidFill>
+              <a:srgbClr val="1F77B4"/>
+            </a:solidFill>
+          </a:ln>
+        </p:spPr>
+        <p:style>
+          <a:lnRef idx="1">
+            <a:schemeClr val="accent1"/>
+          </a:lnRef>
+          <a:fillRef idx="3">
+            <a:schemeClr val="accent1"/>
+          </a:fillRef>
+          <a:effectRef idx="2">
+            <a:schemeClr val="accent1"/>
+          </a:effectRef>
+          <a:fontRef idx="minor">
+            <a:schemeClr val="lt1"/>
+          </a:fontRef>
+        </p:style>
+        <p:txBody>
+          <a:bodyPr rtlCol="0" anchor="ctr"/>
+          <a:lstStyle/>
+          <a:p>
+            <a:pPr algn="ctr"/>
+          </a:p>
+        </p:txBody>
+      </p:sp>
+      <p:sp>
+        <p:nvSpPr>
+          <p:cNvPr id="51" name="TextBox 50"/>
+          <p:cNvSpPr txBox="1"/>
+          <p:nvPr/>
+        </p:nvSpPr>
+        <p:spPr>
+          <a:xfrm>
+            <a:off x="8540496" y="3264408"/>
+            <a:ext cx="3200400" cy="145938"/>
+          </a:xfrm>
+          <a:prstGeom prst="rect">
+            <a:avLst/>
+          </a:prstGeom>
+          <a:noFill/>
+        </p:spPr>
+        <p:txBody>
+          <a:bodyPr wrap="square">
+            <a:spAutoFit/>
+          </a:bodyPr>
+          <a:lstStyle/>
+          <a:p>
+            <a:pPr algn="l">
+              <a:spcAft>
+                <a:spcPts val="300"/>
+              </a:spcAft>
+            </a:pPr>
+            <a:r>
+              <a:rPr sz="1000" b="1">
+                <a:solidFill>
+                  <a:srgbClr val="1F77B4"/>
+                </a:solidFill>
+                <a:latin typeface="Calibri"/>
+              </a:rPr>
+              <a:t>Sandía Nueva</a:t>
+            </a:r>
+          </a:p>
+        </p:txBody>
+      </p:sp>
+      <p:sp>
+        <p:nvSpPr>
+          <p:cNvPr id="52" name="TextBox 51"/>
+          <p:cNvSpPr txBox="1"/>
+          <p:nvPr/>
+        </p:nvSpPr>
+        <p:spPr>
+          <a:xfrm>
+            <a:off x="8540496" y="3382914"/>
+            <a:ext cx="3200400" cy="180685"/>
+          </a:xfrm>
+          <a:prstGeom prst="rect">
+            <a:avLst/>
+          </a:prstGeom>
+          <a:noFill/>
+        </p:spPr>
+        <p:txBody>
+          <a:bodyPr wrap="square">
+            <a:spAutoFit/>
+          </a:bodyPr>
+          <a:lstStyle/>
+          <a:p>
+            <a:pPr algn="l">
+              <a:spcAft>
+                <a:spcPts val="300"/>
+              </a:spcAft>
+            </a:pPr>
+            <a:r>
+              <a:rPr sz="1200" b="1">
+                <a:solidFill>
+                  <a:srgbClr val="0D3B66"/>
+                </a:solidFill>
+                <a:latin typeface="Calibri"/>
+              </a:rPr>
+              <a:t>9.619 m³    30,8 %</a:t>
+            </a:r>
+          </a:p>
+        </p:txBody>
+      </p:sp>
+      <p:sp>
+        <p:nvSpPr>
+          <p:cNvPr id="53" name="Rounded Rectangle 52"/>
+          <p:cNvSpPr/>
+          <p:nvPr/>
+        </p:nvSpPr>
+        <p:spPr>
+          <a:xfrm>
+            <a:off x="8430768" y="3621024"/>
+            <a:ext cx="3419856" cy="347471"/>
+          </a:xfrm>
+          <a:prstGeom prst="roundRect">
+            <a:avLst>
+              <a:gd name="adj" fmla="val 8000"/>
+            </a:avLst>
+          </a:prstGeom>
+          <a:solidFill>
+            <a:srgbClr val="F5F7FA"/>
+          </a:solidFill>
+          <a:ln w="6350">
+            <a:solidFill>
+              <a:srgbClr val="46648C"/>
+            </a:solidFill>
+          </a:ln>
+        </p:spPr>
+        <p:style>
+          <a:lnRef idx="1">
+            <a:schemeClr val="accent1"/>
+          </a:lnRef>
+          <a:fillRef idx="3">
+            <a:schemeClr val="accent1"/>
+          </a:fillRef>
+          <a:effectRef idx="2">
+            <a:schemeClr val="accent1"/>
+          </a:effectRef>
+          <a:fontRef idx="minor">
+            <a:schemeClr val="lt1"/>
+          </a:fontRef>
+        </p:style>
+        <p:txBody>
+          <a:bodyPr rtlCol="0" anchor="ctr"/>
+          <a:lstStyle/>
+          <a:p>
+            <a:pPr algn="ctr"/>
+          </a:p>
+        </p:txBody>
+      </p:sp>
+      <p:sp>
+        <p:nvSpPr>
+          <p:cNvPr id="54" name="TextBox 53"/>
+          <p:cNvSpPr txBox="1"/>
+          <p:nvPr/>
+        </p:nvSpPr>
+        <p:spPr>
+          <a:xfrm>
+            <a:off x="8540496" y="3648456"/>
+            <a:ext cx="3200400" cy="145938"/>
+          </a:xfrm>
+          <a:prstGeom prst="rect">
+            <a:avLst/>
+          </a:prstGeom>
+          <a:noFill/>
+        </p:spPr>
+        <p:txBody>
+          <a:bodyPr wrap="square">
+            <a:spAutoFit/>
+          </a:bodyPr>
+          <a:lstStyle/>
+          <a:p>
+            <a:pPr algn="l">
+              <a:spcAft>
+                <a:spcPts val="300"/>
+              </a:spcAft>
+            </a:pPr>
+            <a:r>
+              <a:rPr sz="1000" b="1">
+                <a:solidFill>
+                  <a:srgbClr val="46648C"/>
+                </a:solidFill>
+                <a:latin typeface="Calibri"/>
+              </a:rPr>
+              <a:t>Locales Gast.</a:t>
+            </a:r>
+          </a:p>
+        </p:txBody>
+      </p:sp>
+      <p:sp>
+        <p:nvSpPr>
+          <p:cNvPr id="55" name="TextBox 54"/>
+          <p:cNvSpPr txBox="1"/>
+          <p:nvPr/>
+        </p:nvSpPr>
+        <p:spPr>
+          <a:xfrm>
+            <a:off x="8540496" y="3766962"/>
+            <a:ext cx="3200400" cy="180685"/>
+          </a:xfrm>
+          <a:prstGeom prst="rect">
+            <a:avLst/>
+          </a:prstGeom>
+          <a:noFill/>
+        </p:spPr>
+        <p:txBody>
+          <a:bodyPr wrap="square">
+            <a:spAutoFit/>
+          </a:bodyPr>
+          <a:lstStyle/>
+          <a:p>
+            <a:pPr algn="l">
+              <a:spcAft>
+                <a:spcPts val="300"/>
+              </a:spcAft>
+            </a:pPr>
+            <a:r>
+              <a:rPr sz="1200" b="1">
+                <a:solidFill>
+                  <a:srgbClr val="0D3B66"/>
+                </a:solidFill>
+                <a:latin typeface="Calibri"/>
+              </a:rPr>
+              <a:t>4.583 m³    14,7 %</a:t>
+            </a:r>
+          </a:p>
+        </p:txBody>
+      </p:sp>
+      <p:sp>
+        <p:nvSpPr>
+          <p:cNvPr id="56" name="Rounded Rectangle 55"/>
+          <p:cNvSpPr/>
+          <p:nvPr/>
+        </p:nvSpPr>
+        <p:spPr>
+          <a:xfrm>
+            <a:off x="8430768" y="4005072"/>
+            <a:ext cx="3419856" cy="347471"/>
+          </a:xfrm>
+          <a:prstGeom prst="roundRect">
+            <a:avLst>
+              <a:gd name="adj" fmla="val 8000"/>
+            </a:avLst>
+          </a:prstGeom>
+          <a:solidFill>
+            <a:srgbClr val="F5F7FA"/>
+          </a:solidFill>
+          <a:ln w="6350">
+            <a:solidFill>
+              <a:srgbClr val="8C5A5A"/>
+            </a:solidFill>
+          </a:ln>
+        </p:spPr>
+        <p:style>
+          <a:lnRef idx="1">
+            <a:schemeClr val="accent1"/>
+          </a:lnRef>
+          <a:fillRef idx="3">
+            <a:schemeClr val="accent1"/>
+          </a:fillRef>
+          <a:effectRef idx="2">
+            <a:schemeClr val="accent1"/>
+          </a:effectRef>
+          <a:fontRef idx="minor">
+            <a:schemeClr val="lt1"/>
+          </a:fontRef>
+        </p:style>
+        <p:txBody>
+          <a:bodyPr rtlCol="0" anchor="ctr"/>
+          <a:lstStyle/>
+          <a:p>
+            <a:pPr algn="ctr"/>
+          </a:p>
+        </p:txBody>
+      </p:sp>
+      <p:sp>
+        <p:nvSpPr>
+          <p:cNvPr id="57" name="TextBox 56"/>
+          <p:cNvSpPr txBox="1"/>
+          <p:nvPr/>
+        </p:nvSpPr>
+        <p:spPr>
+          <a:xfrm>
+            <a:off x="8540496" y="4032504"/>
+            <a:ext cx="3200400" cy="145938"/>
+          </a:xfrm>
+          <a:prstGeom prst="rect">
+            <a:avLst/>
+          </a:prstGeom>
+          <a:noFill/>
+        </p:spPr>
+        <p:txBody>
+          <a:bodyPr wrap="square">
+            <a:spAutoFit/>
+          </a:bodyPr>
+          <a:lstStyle/>
+          <a:p>
+            <a:pPr algn="l">
+              <a:spcAft>
+                <a:spcPts val="300"/>
+              </a:spcAft>
+            </a:pPr>
+            <a:r>
+              <a:rPr sz="1000" b="1">
+                <a:solidFill>
+                  <a:srgbClr val="8C5A5A"/>
+                </a:solidFill>
+                <a:latin typeface="Calibri"/>
+              </a:rPr>
+              <a:t>Matriz Andén</a:t>
+            </a:r>
+          </a:p>
+        </p:txBody>
+      </p:sp>
+      <p:sp>
+        <p:nvSpPr>
+          <p:cNvPr id="58" name="TextBox 57"/>
+          <p:cNvSpPr txBox="1"/>
+          <p:nvPr/>
+        </p:nvSpPr>
+        <p:spPr>
+          <a:xfrm>
+            <a:off x="8540496" y="4151010"/>
+            <a:ext cx="3200400" cy="180685"/>
+          </a:xfrm>
+          <a:prstGeom prst="rect">
+            <a:avLst/>
+          </a:prstGeom>
+          <a:noFill/>
+        </p:spPr>
+        <p:txBody>
+          <a:bodyPr wrap="square">
+            <a:spAutoFit/>
+          </a:bodyPr>
+          <a:lstStyle/>
+          <a:p>
+            <a:pPr algn="l">
+              <a:spcAft>
+                <a:spcPts val="300"/>
+              </a:spcAft>
+            </a:pPr>
+            <a:r>
+              <a:rPr sz="1200" b="1">
+                <a:solidFill>
+                  <a:srgbClr val="0D3B66"/>
+                </a:solidFill>
+                <a:latin typeface="Calibri"/>
+              </a:rPr>
+              <a:t>3.086 m³    9,9 %</a:t>
+            </a:r>
+          </a:p>
+        </p:txBody>
+      </p:sp>
+      <p:sp>
+        <p:nvSpPr>
+          <p:cNvPr id="59" name="Rounded Rectangle 58"/>
+          <p:cNvSpPr/>
+          <p:nvPr/>
+        </p:nvSpPr>
+        <p:spPr>
+          <a:xfrm>
+            <a:off x="8430768" y="4389120"/>
+            <a:ext cx="3419856" cy="347471"/>
+          </a:xfrm>
+          <a:prstGeom prst="roundRect">
+            <a:avLst>
+              <a:gd name="adj" fmla="val 8000"/>
+            </a:avLst>
+          </a:prstGeom>
+          <a:solidFill>
+            <a:srgbClr val="F5F7FA"/>
+          </a:solidFill>
+          <a:ln w="6350">
+            <a:solidFill>
+              <a:srgbClr val="508282"/>
+            </a:solidFill>
+          </a:ln>
+        </p:spPr>
+        <p:style>
+          <a:lnRef idx="1">
+            <a:schemeClr val="accent1"/>
+          </a:lnRef>
+          <a:fillRef idx="3">
+            <a:schemeClr val="accent1"/>
+          </a:fillRef>
+          <a:effectRef idx="2">
+            <a:schemeClr val="accent1"/>
+          </a:effectRef>
+          <a:fontRef idx="minor">
+            <a:schemeClr val="lt1"/>
+          </a:fontRef>
+        </p:style>
+        <p:txBody>
+          <a:bodyPr rtlCol="0" anchor="ctr"/>
+          <a:lstStyle/>
+          <a:p>
+            <a:pPr algn="ctr"/>
+          </a:p>
+        </p:txBody>
+      </p:sp>
+      <p:sp>
+        <p:nvSpPr>
+          <p:cNvPr id="60" name="TextBox 59"/>
+          <p:cNvSpPr txBox="1"/>
+          <p:nvPr/>
+        </p:nvSpPr>
+        <p:spPr>
+          <a:xfrm>
+            <a:off x="8540496" y="4416552"/>
+            <a:ext cx="3200400" cy="145938"/>
+          </a:xfrm>
+          <a:prstGeom prst="rect">
+            <a:avLst/>
+          </a:prstGeom>
+          <a:noFill/>
+        </p:spPr>
+        <p:txBody>
+          <a:bodyPr wrap="square">
+            <a:spAutoFit/>
+          </a:bodyPr>
+          <a:lstStyle/>
+          <a:p>
+            <a:pPr algn="l">
+              <a:spcAft>
+                <a:spcPts val="300"/>
+              </a:spcAft>
+            </a:pPr>
+            <a:r>
+              <a:rPr sz="1000" b="1">
+                <a:solidFill>
+                  <a:srgbClr val="508282"/>
+                </a:solidFill>
+                <a:latin typeface="Calibri"/>
+              </a:rPr>
+              <a:t>Pileta</a:t>
+            </a:r>
+          </a:p>
+        </p:txBody>
+      </p:sp>
+      <p:sp>
+        <p:nvSpPr>
+          <p:cNvPr id="61" name="TextBox 60"/>
+          <p:cNvSpPr txBox="1"/>
+          <p:nvPr/>
+        </p:nvSpPr>
+        <p:spPr>
+          <a:xfrm>
+            <a:off x="8540496" y="4535058"/>
+            <a:ext cx="3200400" cy="180685"/>
+          </a:xfrm>
+          <a:prstGeom prst="rect">
+            <a:avLst/>
+          </a:prstGeom>
+          <a:noFill/>
+        </p:spPr>
+        <p:txBody>
+          <a:bodyPr wrap="square">
+            <a:spAutoFit/>
+          </a:bodyPr>
+          <a:lstStyle/>
+          <a:p>
+            <a:pPr algn="l">
+              <a:spcAft>
+                <a:spcPts val="300"/>
+              </a:spcAft>
+            </a:pPr>
+            <a:r>
+              <a:rPr sz="1200" b="1">
+                <a:solidFill>
+                  <a:srgbClr val="0D3B66"/>
+                </a:solidFill>
+                <a:latin typeface="Calibri"/>
+              </a:rPr>
+              <a:t>172 m³    0,5 %</a:t>
+            </a:r>
+          </a:p>
+        </p:txBody>
+      </p:sp>
+      <p:sp>
+        <p:nvSpPr>
+          <p:cNvPr id="62" name="Rounded Rectangle 61"/>
+          <p:cNvSpPr/>
+          <p:nvPr/>
+        </p:nvSpPr>
+        <p:spPr>
+          <a:xfrm>
+            <a:off x="8430768" y="4773168"/>
+            <a:ext cx="3419856" cy="347471"/>
+          </a:xfrm>
+          <a:prstGeom prst="roundRect">
+            <a:avLst>
+              <a:gd name="adj" fmla="val 8000"/>
+            </a:avLst>
+          </a:prstGeom>
+          <a:solidFill>
+            <a:srgbClr val="F5F7FA"/>
+          </a:solidFill>
+          <a:ln w="6350">
+            <a:solidFill>
+              <a:srgbClr val="C45C26"/>
+            </a:solidFill>
+          </a:ln>
+        </p:spPr>
+        <p:style>
+          <a:lnRef idx="1">
+            <a:schemeClr val="accent1"/>
+          </a:lnRef>
+          <a:fillRef idx="3">
+            <a:schemeClr val="accent1"/>
+          </a:fillRef>
+          <a:effectRef idx="2">
+            <a:schemeClr val="accent1"/>
+          </a:effectRef>
+          <a:fontRef idx="minor">
+            <a:schemeClr val="lt1"/>
+          </a:fontRef>
+        </p:style>
+        <p:txBody>
+          <a:bodyPr rtlCol="0" anchor="ctr"/>
+          <a:lstStyle/>
+          <a:p>
+            <a:pPr algn="ctr"/>
+          </a:p>
+        </p:txBody>
+      </p:sp>
+      <p:sp>
+        <p:nvSpPr>
+          <p:cNvPr id="63" name="TextBox 62"/>
+          <p:cNvSpPr txBox="1"/>
+          <p:nvPr/>
+        </p:nvSpPr>
+        <p:spPr>
+          <a:xfrm>
+            <a:off x="8540496" y="4800600"/>
+            <a:ext cx="3200400" cy="145938"/>
+          </a:xfrm>
+          <a:prstGeom prst="rect">
+            <a:avLst/>
+          </a:prstGeom>
+          <a:noFill/>
+        </p:spPr>
+        <p:txBody>
+          <a:bodyPr wrap="square">
+            <a:spAutoFit/>
+          </a:bodyPr>
+          <a:lstStyle/>
+          <a:p>
+            <a:pPr algn="l">
+              <a:spcAft>
+                <a:spcPts val="300"/>
+              </a:spcAft>
+            </a:pPr>
+            <a:r>
+              <a:rPr sz="1000" b="1">
+                <a:solidFill>
+                  <a:srgbClr val="C45C26"/>
+                </a:solidFill>
+                <a:latin typeface="Calibri"/>
+              </a:rPr>
+              <a:t>Restaurante</a:t>
+            </a:r>
+          </a:p>
+        </p:txBody>
+      </p:sp>
+      <p:sp>
+        <p:nvSpPr>
+          <p:cNvPr id="64" name="TextBox 63"/>
+          <p:cNvSpPr txBox="1"/>
+          <p:nvPr/>
+        </p:nvSpPr>
+        <p:spPr>
+          <a:xfrm>
+            <a:off x="8540496" y="4919106"/>
+            <a:ext cx="3200400" cy="180685"/>
+          </a:xfrm>
+          <a:prstGeom prst="rect">
+            <a:avLst/>
+          </a:prstGeom>
+          <a:noFill/>
+        </p:spPr>
+        <p:txBody>
+          <a:bodyPr wrap="square">
+            <a:spAutoFit/>
+          </a:bodyPr>
+          <a:lstStyle/>
+          <a:p>
+            <a:pPr algn="l">
+              <a:spcAft>
+                <a:spcPts val="300"/>
+              </a:spcAft>
+            </a:pPr>
+            <a:r>
+              <a:rPr sz="1200" b="1">
+                <a:solidFill>
+                  <a:srgbClr val="0D3B66"/>
+                </a:solidFill>
+                <a:latin typeface="Calibri"/>
+              </a:rPr>
+              <a:t>98 m³    0,3 %</a:t>
+            </a:r>
+          </a:p>
+        </p:txBody>
+      </p:sp>
+      <p:sp>
+        <p:nvSpPr>
+          <p:cNvPr id="65" name="Rounded Rectangle 64"/>
+          <p:cNvSpPr/>
+          <p:nvPr/>
+        </p:nvSpPr>
+        <p:spPr>
+          <a:xfrm>
+            <a:off x="8430768" y="5157216"/>
+            <a:ext cx="3419856" cy="347471"/>
+          </a:xfrm>
+          <a:prstGeom prst="roundRect">
+            <a:avLst>
+              <a:gd name="adj" fmla="val 8000"/>
+            </a:avLst>
+          </a:prstGeom>
+          <a:solidFill>
+            <a:srgbClr val="F5F7FA"/>
+          </a:solidFill>
+          <a:ln w="6350">
+            <a:solidFill>
+              <a:srgbClr val="0D3B66"/>
+            </a:solidFill>
+          </a:ln>
+        </p:spPr>
+        <p:style>
+          <a:lnRef idx="1">
+            <a:schemeClr val="accent1"/>
+          </a:lnRef>
+          <a:fillRef idx="3">
+            <a:schemeClr val="accent1"/>
+          </a:fillRef>
+          <a:effectRef idx="2">
+            <a:schemeClr val="accent1"/>
+          </a:effectRef>
+          <a:fontRef idx="minor">
+            <a:schemeClr val="lt1"/>
+          </a:fontRef>
+        </p:style>
+        <p:txBody>
+          <a:bodyPr rtlCol="0" anchor="ctr"/>
+          <a:lstStyle/>
+          <a:p>
+            <a:pPr algn="ctr"/>
+          </a:p>
+        </p:txBody>
+      </p:sp>
+      <p:sp>
+        <p:nvSpPr>
+          <p:cNvPr id="66" name="TextBox 65"/>
+          <p:cNvSpPr txBox="1"/>
+          <p:nvPr/>
+        </p:nvSpPr>
+        <p:spPr>
+          <a:xfrm>
+            <a:off x="8540496" y="5184648"/>
+            <a:ext cx="3200400" cy="145938"/>
+          </a:xfrm>
+          <a:prstGeom prst="rect">
+            <a:avLst/>
+          </a:prstGeom>
+          <a:noFill/>
+        </p:spPr>
+        <p:txBody>
+          <a:bodyPr wrap="square">
+            <a:spAutoFit/>
+          </a:bodyPr>
+          <a:lstStyle/>
+          <a:p>
+            <a:pPr algn="l">
+              <a:spcAft>
+                <a:spcPts val="300"/>
+              </a:spcAft>
+            </a:pPr>
+            <a:r>
+              <a:rPr sz="1000" b="1">
+                <a:solidFill>
+                  <a:srgbClr val="0D3B66"/>
+                </a:solidFill>
+                <a:latin typeface="Calibri"/>
+              </a:rPr>
+              <a:t>Cascada</a:t>
+            </a:r>
+          </a:p>
+        </p:txBody>
+      </p:sp>
+      <p:sp>
+        <p:nvSpPr>
+          <p:cNvPr id="67" name="TextBox 66"/>
+          <p:cNvSpPr txBox="1"/>
+          <p:nvPr/>
+        </p:nvSpPr>
+        <p:spPr>
+          <a:xfrm>
+            <a:off x="8540496" y="5303154"/>
+            <a:ext cx="3200400" cy="180685"/>
+          </a:xfrm>
+          <a:prstGeom prst="rect">
+            <a:avLst/>
+          </a:prstGeom>
+          <a:noFill/>
+        </p:spPr>
+        <p:txBody>
+          <a:bodyPr wrap="square">
+            <a:spAutoFit/>
+          </a:bodyPr>
+          <a:lstStyle/>
+          <a:p>
+            <a:pPr algn="l">
+              <a:spcAft>
+                <a:spcPts val="300"/>
+              </a:spcAft>
+            </a:pPr>
+            <a:r>
+              <a:rPr sz="1200" b="1">
+                <a:solidFill>
+                  <a:srgbClr val="0D3B66"/>
+                </a:solidFill>
+                <a:latin typeface="Calibri"/>
+              </a:rPr>
+              <a:t>20 m³    &lt;0,1 %</a:t>
+            </a:r>
+          </a:p>
+        </p:txBody>
+      </p:sp>
+      <p:sp>
+        <p:nvSpPr>
+          <p:cNvPr id="68" name="Rounded Rectangle 67"/>
+          <p:cNvSpPr/>
+          <p:nvPr/>
+        </p:nvSpPr>
+        <p:spPr>
+          <a:xfrm>
+            <a:off x="201168" y="5705856"/>
+            <a:ext cx="11795760" cy="438912"/>
+          </a:xfrm>
+          <a:prstGeom prst="roundRect">
+            <a:avLst>
+              <a:gd name="adj" fmla="val 8000"/>
+            </a:avLst>
+          </a:prstGeom>
+          <a:solidFill>
+            <a:srgbClr val="FFF9EB"/>
+          </a:solidFill>
+          <a:ln w="6350">
+            <a:solidFill>
+              <a:srgbClr val="C9A227"/>
+            </a:solidFill>
+          </a:ln>
+        </p:spPr>
+        <p:style>
+          <a:lnRef idx="1">
+            <a:schemeClr val="accent1"/>
+          </a:lnRef>
+          <a:fillRef idx="3">
+            <a:schemeClr val="accent1"/>
+          </a:fillRef>
+          <a:effectRef idx="2">
+            <a:schemeClr val="accent1"/>
+          </a:effectRef>
+          <a:fontRef idx="minor">
+            <a:schemeClr val="lt1"/>
+          </a:fontRef>
+        </p:style>
+        <p:txBody>
+          <a:bodyPr rtlCol="0" anchor="ctr"/>
+          <a:lstStyle/>
+          <a:p>
+            <a:pPr algn="ctr"/>
+          </a:p>
+        </p:txBody>
+      </p:sp>
+      <p:sp>
+        <p:nvSpPr>
+          <p:cNvPr id="69" name="TextBox 68"/>
+          <p:cNvSpPr txBox="1"/>
+          <p:nvPr/>
+        </p:nvSpPr>
+        <p:spPr>
+          <a:xfrm>
+            <a:off x="329184" y="5779008"/>
+            <a:ext cx="11539728" cy="310896"/>
+          </a:xfrm>
+          <a:prstGeom prst="rect">
+            <a:avLst/>
+          </a:prstGeom>
+          <a:noFill/>
+        </p:spPr>
+        <p:txBody>
+          <a:bodyPr wrap="square">
+            <a:spAutoFit/>
+          </a:bodyPr>
+          <a:lstStyle/>
+          <a:p>
+            <a:pPr algn="l">
+              <a:spcAft>
+                <a:spcPts val="300"/>
+              </a:spcAft>
+            </a:pPr>
+            <a:r>
+              <a:rPr sz="1100" b="0">
+                <a:solidFill>
+                  <a:srgbClr val="0D3B66"/>
+                </a:solidFill>
+                <a:latin typeface="Calibri"/>
+              </a:rPr>
+              <a:t>Recepción 12/12/2025  ·  Capacitación 17/12/2025  ·  Francisco Jeldres  ·  Paula Azolas  ·  Mantención: C. Naranjo, M. Jara, R. Moreno, R. Díaz, J. Gutiérrez, H. Fierro</a:t>
+            </a:r>
+          </a:p>
+        </p:txBody>
+      </p:sp>
+      <p:sp>
+        <p:nvSpPr>
+          <p:cNvPr id="70" name="TextBox 69"/>
+          <p:cNvSpPr txBox="1"/>
+          <p:nvPr/>
+        </p:nvSpPr>
+        <p:spPr>
+          <a:xfrm>
+            <a:off x="256032" y="6181344"/>
+            <a:ext cx="11704320" cy="566928"/>
+          </a:xfrm>
+          <a:prstGeom prst="rect">
+            <a:avLst/>
+          </a:prstGeom>
+          <a:noFill/>
+        </p:spPr>
+        <p:txBody>
+          <a:bodyPr wrap="square">
+            <a:spAutoFit/>
+          </a:bodyPr>
+          <a:lstStyle/>
+          <a:p>
+            <a:pPr algn="l">
+              <a:spcAft>
+                <a:spcPts val="300"/>
+              </a:spcAft>
+            </a:pPr>
+            <a:r>
+              <a:rPr sz="1200" b="0">
+                <a:solidFill>
+                  <a:srgbClr val="0D3B66"/>
+                </a:solidFill>
+                <a:latin typeface="Calibri"/>
+              </a:rPr>
+              <a:t>Mayo 26.357   ·   Junio 20.927   ·   Julio 31.239   ·   Agosto 1–17: 21.494   ·   proy. ago 39.195 m³.</a:t>
+            </a:r>
+          </a:p>
+          <a:p>
+            <a:pPr algn="l">
+              <a:spcAft>
+                <a:spcPts val="300"/>
+              </a:spcAft>
+            </a:pPr>
+            <a:r>
+              <a:rPr sz="1100" b="0">
+                <a:solidFill>
+                  <a:srgbClr val="5A5A5A"/>
+                </a:solidFill>
+                <a:latin typeface="Calibri"/>
+              </a:rPr>
+              <a:t>Julio = cabecera (7 puntos). 27, 35 y 36 no se suman: cadena Sandía → DL (lámina 2).</a:t>
+            </a:r>
+          </a:p>
+        </p:txBody>
+      </p:sp>
+    </p:spTree>
+  </p:cSld>
+  <p:clrMapOvr>
+    <a:masterClrMapping/>
+  </p:clrMapOvr>
+</p:sld>
+</file>
+
+<file path=ppt/slides/slide11.xml><?xml version="1.0" encoding="utf-8"?>
+<p:sld xmlns:a="http://schemas.openxmlformats.org/drawingml/2006/main" xmlns:p="http://schemas.openxmlformats.org/presentationml/2006/main" xmlns:r="http://schemas.openxmlformats.org/officeDocument/2006/relationships">
+  <p:cSld>
+    <p:spTree>
+      <p:nvGrpSpPr>
+        <p:cNvPr id="1" name=""/>
+        <p:cNvGrpSpPr/>
+        <p:nvPr/>
+      </p:nvGrpSpPr>
+      <p:grpSpPr/>
+      <p:sp>
+        <p:nvSpPr>
+          <p:cNvPr id="2" name="Rectangle 1"/>
+          <p:cNvSpPr/>
+          <p:nvPr/>
+        </p:nvSpPr>
+        <p:spPr>
+          <a:xfrm>
+            <a:off x="0" y="0"/>
+            <a:ext cx="12191695" cy="841248"/>
+          </a:xfrm>
+          <a:prstGeom prst="rect">
+            <a:avLst/>
+          </a:prstGeom>
+          <a:solidFill>
+            <a:srgbClr val="0D3B66"/>
+          </a:solidFill>
+          <a:ln>
+            <a:noFill/>
+          </a:ln>
+        </p:spPr>
+        <p:style>
+          <a:lnRef idx="1">
+            <a:schemeClr val="accent1"/>
+          </a:lnRef>
+          <a:fillRef idx="3">
+            <a:schemeClr val="accent1"/>
+          </a:fillRef>
+          <a:effectRef idx="2">
+            <a:schemeClr val="accent1"/>
+          </a:effectRef>
+          <a:fontRef idx="minor">
+            <a:schemeClr val="lt1"/>
+          </a:fontRef>
+        </p:style>
+        <p:txBody>
+          <a:bodyPr rtlCol="0" anchor="ctr"/>
+          <a:lstStyle/>
+          <a:p>
+            <a:pPr algn="ctr"/>
+          </a:p>
+        </p:txBody>
+      </p:sp>
+      <p:sp>
+        <p:nvSpPr>
+          <p:cNvPr id="3" name="Rectangle 2"/>
+          <p:cNvSpPr/>
+          <p:nvPr/>
+        </p:nvSpPr>
+        <p:spPr>
+          <a:xfrm>
+            <a:off x="0" y="841248"/>
+            <a:ext cx="12191695" cy="54864"/>
+          </a:xfrm>
+          <a:prstGeom prst="rect">
+            <a:avLst/>
+          </a:prstGeom>
+          <a:solidFill>
+            <a:srgbClr val="C9A227"/>
+          </a:solidFill>
+          <a:ln>
+            <a:noFill/>
+          </a:ln>
+        </p:spPr>
+        <p:style>
+          <a:lnRef idx="1">
+            <a:schemeClr val="accent1"/>
+          </a:lnRef>
+          <a:fillRef idx="3">
+            <a:schemeClr val="accent1"/>
+          </a:fillRef>
+          <a:effectRef idx="2">
+            <a:schemeClr val="accent1"/>
+          </a:effectRef>
+          <a:fontRef idx="minor">
+            <a:schemeClr val="lt1"/>
+          </a:fontRef>
+        </p:style>
+        <p:txBody>
+          <a:bodyPr rtlCol="0" anchor="ctr"/>
+          <a:lstStyle/>
+          <a:p>
+            <a:pPr algn="ctr"/>
+          </a:p>
+        </p:txBody>
+      </p:sp>
+      <p:pic>
+        <p:nvPicPr>
+          <p:cNvPr id="4" name="Picture 3" descr="logo wes.bmp"/>
+          <p:cNvPicPr>
+            <a:picLocks noChangeAspect="1"/>
+          </p:cNvPicPr>
+          <p:nvPr/>
+        </p:nvPicPr>
+        <p:blipFill>
+          <a:blip r:embed="rId2"/>
+          <a:stretch>
+            <a:fillRect/>
+          </a:stretch>
+        </p:blipFill>
+        <p:spPr>
+          <a:xfrm>
+            <a:off x="10835640" y="146304"/>
+            <a:ext cx="1143000" cy="253401"/>
+          </a:xfrm>
+          <a:prstGeom prst="rect">
+            <a:avLst/>
+          </a:prstGeom>
+        </p:spPr>
+      </p:pic>
+      <p:sp>
+        <p:nvSpPr>
+          <p:cNvPr id="5" name="TextBox 4"/>
+          <p:cNvSpPr txBox="1"/>
+          <p:nvPr/>
+        </p:nvSpPr>
+        <p:spPr>
+          <a:xfrm>
+            <a:off x="256032" y="109728"/>
+            <a:ext cx="10607040" cy="384048"/>
+          </a:xfrm>
+          <a:prstGeom prst="rect">
+            <a:avLst/>
+          </a:prstGeom>
+          <a:noFill/>
+        </p:spPr>
+        <p:txBody>
+          <a:bodyPr wrap="square">
+            <a:spAutoFit/>
+          </a:bodyPr>
+          <a:lstStyle/>
+          <a:p>
+            <a:pPr algn="l">
+              <a:spcAft>
+                <a:spcPts val="300"/>
+              </a:spcAft>
+            </a:pPr>
+            <a:r>
+              <a:rPr sz="2000" b="1">
+                <a:solidFill>
+                  <a:srgbClr val="FFFFFF"/>
+                </a:solidFill>
+                <a:latin typeface="Calibri"/>
+              </a:rPr>
               <a:t>PAK  ·  2. Cadena Sandía / Distrito de Lujo</a:t>
             </a:r>
           </a:p>
@@ -8626,7 +11488,7 @@
                 </a:solidFill>
                 <a:latin typeface="Calibri"/>
               </a:rPr>
-              <a:t>Junio sube por Placa (18/06). Falabella no entra en julio: activo desde el 11/08.</a:t>
+              <a:t>Junio sube por Placa (18/06). Falabella activo 11/08. Lámina 2: noche, umbral y reubicación.</a:t>
             </a:r>
           </a:p>
         </p:txBody>
@@ -8793,7 +11655,7 @@
                 </a:solidFill>
                 <a:latin typeface="Calibri"/>
               </a:rPr>
-              <a:t>MAQ  ·  Equipos y consumo</a:t>
+              <a:t>MAM  ·  2. Placa Bancaria</a:t>
             </a:r>
           </a:p>
         </p:txBody>
@@ -8832,7 +11694,7 @@
                 </a:solidFill>
                 <a:latin typeface="Calibri"/>
               </a:rPr>
-              <a:t>Mall Arauco Quilicura   |   2 puntos WES   |   01/05/2026 – 17/08/2026</a:t>
+              <a:t>Mayor consumo del recinto  ·  noche  ·  umbral  ·  Placa vs Falabella desde el 11/08</a:t>
             </a:r>
           </a:p>
         </p:txBody>
@@ -8845,741 +11707,8 @@
         </p:nvSpPr>
         <p:spPr>
           <a:xfrm>
-            <a:off x="201168" y="1024128"/>
-            <a:ext cx="5861304" cy="658368"/>
-          </a:xfrm>
-          <a:prstGeom prst="roundRect">
-            <a:avLst>
-              <a:gd name="adj" fmla="val 8000"/>
-            </a:avLst>
-          </a:prstGeom>
-          <a:solidFill>
-            <a:srgbClr val="F5F7FA"/>
-          </a:solidFill>
-          <a:ln w="6350">
-            <a:solidFill>
-              <a:srgbClr val="0D3B66"/>
-            </a:solidFill>
-          </a:ln>
-        </p:spPr>
-        <p:style>
-          <a:lnRef idx="1">
-            <a:schemeClr val="accent1"/>
-          </a:lnRef>
-          <a:fillRef idx="3">
-            <a:schemeClr val="accent1"/>
-          </a:fillRef>
-          <a:effectRef idx="2">
-            <a:schemeClr val="accent1"/>
-          </a:effectRef>
-          <a:fontRef idx="minor">
-            <a:schemeClr val="lt1"/>
-          </a:fontRef>
-        </p:style>
-        <p:txBody>
-          <a:bodyPr rtlCol="0" anchor="ctr"/>
-          <a:lstStyle/>
-          <a:p>
-            <a:pPr algn="ctr"/>
-          </a:p>
-        </p:txBody>
-      </p:sp>
-      <p:sp>
-        <p:nvSpPr>
-          <p:cNvPr id="8" name="TextBox 7"/>
-          <p:cNvSpPr txBox="1"/>
-          <p:nvPr/>
-        </p:nvSpPr>
-        <p:spPr>
-          <a:xfrm>
-            <a:off x="274320" y="1060704"/>
-            <a:ext cx="5733288" cy="146304"/>
-          </a:xfrm>
-          <a:prstGeom prst="rect">
-            <a:avLst/>
-          </a:prstGeom>
-          <a:noFill/>
-        </p:spPr>
-        <p:txBody>
-          <a:bodyPr wrap="square">
-            <a:spAutoFit/>
-          </a:bodyPr>
-          <a:lstStyle/>
-          <a:p>
-            <a:pPr algn="l">
-              <a:spcAft>
-                <a:spcPts val="300"/>
-              </a:spcAft>
-            </a:pPr>
-            <a:r>
-              <a:rPr sz="1000" b="1">
-                <a:solidFill>
-                  <a:srgbClr val="C9A227"/>
-                </a:solidFill>
-                <a:latin typeface="Calibri"/>
-              </a:rPr>
-              <a:t>000025-13</a:t>
-            </a:r>
-          </a:p>
-        </p:txBody>
-      </p:sp>
-      <p:sp>
-        <p:nvSpPr>
-          <p:cNvPr id="9" name="TextBox 8"/>
-          <p:cNvSpPr txBox="1"/>
-          <p:nvPr/>
-        </p:nvSpPr>
-        <p:spPr>
-          <a:xfrm>
-            <a:off x="274320" y="1243584"/>
-            <a:ext cx="5733288" cy="201168"/>
-          </a:xfrm>
-          <a:prstGeom prst="rect">
-            <a:avLst/>
-          </a:prstGeom>
-          <a:noFill/>
-        </p:spPr>
-        <p:txBody>
-          <a:bodyPr wrap="square">
-            <a:spAutoFit/>
-          </a:bodyPr>
-          <a:lstStyle/>
-          <a:p>
-            <a:pPr algn="l">
-              <a:spcAft>
-                <a:spcPts val="300"/>
-              </a:spcAft>
-            </a:pPr>
-            <a:r>
-              <a:rPr sz="1200" b="1">
-                <a:solidFill>
-                  <a:srgbClr val="0D3B66"/>
-                </a:solidFill>
-                <a:latin typeface="Calibri"/>
-              </a:rPr>
-              <a:t>Matriz Principal</a:t>
-            </a:r>
-          </a:p>
-        </p:txBody>
-      </p:sp>
-      <p:sp>
-        <p:nvSpPr>
-          <p:cNvPr id="10" name="Rounded Rectangle 9"/>
-          <p:cNvSpPr/>
-          <p:nvPr/>
-        </p:nvSpPr>
-        <p:spPr>
-          <a:xfrm>
-            <a:off x="6135624" y="1024128"/>
-            <a:ext cx="5861304" cy="658368"/>
-          </a:xfrm>
-          <a:prstGeom prst="roundRect">
-            <a:avLst>
-              <a:gd name="adj" fmla="val 8000"/>
-            </a:avLst>
-          </a:prstGeom>
-          <a:solidFill>
-            <a:srgbClr val="F5F7FA"/>
-          </a:solidFill>
-          <a:ln w="6350">
-            <a:solidFill>
-              <a:srgbClr val="1F77B4"/>
-            </a:solidFill>
-          </a:ln>
-        </p:spPr>
-        <p:style>
-          <a:lnRef idx="1">
-            <a:schemeClr val="accent1"/>
-          </a:lnRef>
-          <a:fillRef idx="3">
-            <a:schemeClr val="accent1"/>
-          </a:fillRef>
-          <a:effectRef idx="2">
-            <a:schemeClr val="accent1"/>
-          </a:effectRef>
-          <a:fontRef idx="minor">
-            <a:schemeClr val="lt1"/>
-          </a:fontRef>
-        </p:style>
-        <p:txBody>
-          <a:bodyPr rtlCol="0" anchor="ctr"/>
-          <a:lstStyle/>
-          <a:p>
-            <a:pPr algn="ctr"/>
-          </a:p>
-        </p:txBody>
-      </p:sp>
-      <p:sp>
-        <p:nvSpPr>
-          <p:cNvPr id="11" name="TextBox 10"/>
-          <p:cNvSpPr txBox="1"/>
-          <p:nvPr/>
-        </p:nvSpPr>
-        <p:spPr>
-          <a:xfrm>
-            <a:off x="6208776" y="1060704"/>
-            <a:ext cx="5733288" cy="146304"/>
-          </a:xfrm>
-          <a:prstGeom prst="rect">
-            <a:avLst/>
-          </a:prstGeom>
-          <a:noFill/>
-        </p:spPr>
-        <p:txBody>
-          <a:bodyPr wrap="square">
-            <a:spAutoFit/>
-          </a:bodyPr>
-          <a:lstStyle/>
-          <a:p>
-            <a:pPr algn="l">
-              <a:spcAft>
-                <a:spcPts val="300"/>
-              </a:spcAft>
-            </a:pPr>
-            <a:r>
-              <a:rPr sz="1000" b="1">
-                <a:solidFill>
-                  <a:srgbClr val="C9A227"/>
-                </a:solidFill>
-                <a:latin typeface="Calibri"/>
-              </a:rPr>
-              <a:t>000025-34</a:t>
-            </a:r>
-          </a:p>
-        </p:txBody>
-      </p:sp>
-      <p:sp>
-        <p:nvSpPr>
-          <p:cNvPr id="12" name="TextBox 11"/>
-          <p:cNvSpPr txBox="1"/>
-          <p:nvPr/>
-        </p:nvSpPr>
-        <p:spPr>
-          <a:xfrm>
-            <a:off x="6208776" y="1243584"/>
-            <a:ext cx="5733288" cy="201168"/>
-          </a:xfrm>
-          <a:prstGeom prst="rect">
-            <a:avLst/>
-          </a:prstGeom>
-          <a:noFill/>
-        </p:spPr>
-        <p:txBody>
-          <a:bodyPr wrap="square">
-            <a:spAutoFit/>
-          </a:bodyPr>
-          <a:lstStyle/>
-          <a:p>
-            <a:pPr algn="l">
-              <a:spcAft>
-                <a:spcPts val="300"/>
-              </a:spcAft>
-            </a:pPr>
-            <a:r>
-              <a:rPr sz="1200" b="1">
-                <a:solidFill>
-                  <a:srgbClr val="0D3B66"/>
-                </a:solidFill>
-                <a:latin typeface="Calibri"/>
-              </a:rPr>
-              <a:t>Alim. Baños</a:t>
-            </a:r>
-          </a:p>
-        </p:txBody>
-      </p:sp>
-      <p:sp>
-        <p:nvSpPr>
-          <p:cNvPr id="13" name="TextBox 12"/>
-          <p:cNvSpPr txBox="1"/>
-          <p:nvPr/>
-        </p:nvSpPr>
-        <p:spPr>
-          <a:xfrm>
-            <a:off x="6208776" y="1481328"/>
-            <a:ext cx="5733288" cy="164592"/>
-          </a:xfrm>
-          <a:prstGeom prst="rect">
-            <a:avLst/>
-          </a:prstGeom>
-          <a:noFill/>
-        </p:spPr>
-        <p:txBody>
-          <a:bodyPr wrap="square">
-            <a:spAutoFit/>
-          </a:bodyPr>
-          <a:lstStyle/>
-          <a:p>
-            <a:pPr algn="l">
-              <a:spcAft>
-                <a:spcPts val="300"/>
-              </a:spcAft>
-            </a:pPr>
-            <a:r>
-              <a:rPr sz="1000" b="0">
-                <a:solidFill>
-                  <a:srgbClr val="5A5A5A"/>
-                </a:solidFill>
-                <a:latin typeface="Calibri"/>
-              </a:rPr>
-              <a:t>uso hábil</a:t>
-            </a:r>
-          </a:p>
-        </p:txBody>
-      </p:sp>
-      <p:sp>
-        <p:nvSpPr>
-          <p:cNvPr id="14" name="Rounded Rectangle 13"/>
-          <p:cNvSpPr/>
-          <p:nvPr/>
-        </p:nvSpPr>
-        <p:spPr>
-          <a:xfrm>
-            <a:off x="201168" y="1792224"/>
-            <a:ext cx="7973568" cy="3822191"/>
-          </a:xfrm>
-          <a:prstGeom prst="roundRect">
-            <a:avLst>
-              <a:gd name="adj" fmla="val 8000"/>
-            </a:avLst>
-          </a:prstGeom>
-          <a:solidFill>
-            <a:srgbClr val="F5F7FA"/>
-          </a:solidFill>
-          <a:ln>
-            <a:noFill/>
-          </a:ln>
-        </p:spPr>
-        <p:style>
-          <a:lnRef idx="1">
-            <a:schemeClr val="accent1"/>
-          </a:lnRef>
-          <a:fillRef idx="3">
-            <a:schemeClr val="accent1"/>
-          </a:fillRef>
-          <a:effectRef idx="2">
-            <a:schemeClr val="accent1"/>
-          </a:effectRef>
-          <a:fontRef idx="minor">
-            <a:schemeClr val="lt1"/>
-          </a:fontRef>
-        </p:style>
-        <p:txBody>
-          <a:bodyPr rtlCol="0" anchor="ctr"/>
-          <a:lstStyle/>
-          <a:p>
-            <a:pPr algn="ctr"/>
-          </a:p>
-        </p:txBody>
-      </p:sp>
-      <p:pic>
-        <p:nvPicPr>
-          <p:cNvPr id="15" name="Picture 14" descr="maq_mensual_may_ago.png"/>
-          <p:cNvPicPr>
-            <a:picLocks noChangeAspect="1"/>
-          </p:cNvPicPr>
-          <p:nvPr/>
-        </p:nvPicPr>
-        <p:blipFill>
-          <a:blip r:embed="rId3"/>
-          <a:stretch>
-            <a:fillRect/>
-          </a:stretch>
-        </p:blipFill>
-        <p:spPr>
-          <a:xfrm>
-            <a:off x="274320" y="2031551"/>
-            <a:ext cx="7827264" cy="3343536"/>
-          </a:xfrm>
-          <a:prstGeom prst="rect">
-            <a:avLst/>
-          </a:prstGeom>
-        </p:spPr>
-      </p:pic>
-      <p:sp>
-        <p:nvSpPr>
-          <p:cNvPr id="16" name="Rounded Rectangle 15"/>
-          <p:cNvSpPr/>
-          <p:nvPr/>
-        </p:nvSpPr>
-        <p:spPr>
-          <a:xfrm>
-            <a:off x="8302752" y="1792224"/>
-            <a:ext cx="3675887" cy="3822191"/>
-          </a:xfrm>
-          <a:prstGeom prst="roundRect">
-            <a:avLst>
-              <a:gd name="adj" fmla="val 8000"/>
-            </a:avLst>
-          </a:prstGeom>
-          <a:solidFill>
-            <a:srgbClr val="FFFFFF"/>
-          </a:solidFill>
-          <a:ln w="6350">
-            <a:solidFill>
-              <a:srgbClr val="1F77B4"/>
-            </a:solidFill>
-          </a:ln>
-        </p:spPr>
-        <p:style>
-          <a:lnRef idx="1">
-            <a:schemeClr val="accent1"/>
-          </a:lnRef>
-          <a:fillRef idx="3">
-            <a:schemeClr val="accent1"/>
-          </a:fillRef>
-          <a:effectRef idx="2">
-            <a:schemeClr val="accent1"/>
-          </a:effectRef>
-          <a:fontRef idx="minor">
-            <a:schemeClr val="lt1"/>
-          </a:fontRef>
-        </p:style>
-        <p:txBody>
-          <a:bodyPr rtlCol="0" anchor="ctr"/>
-          <a:lstStyle/>
-          <a:p>
-            <a:pPr algn="ctr"/>
-          </a:p>
-        </p:txBody>
-      </p:sp>
-      <p:sp>
-        <p:nvSpPr>
-          <p:cNvPr id="17" name="TextBox 16"/>
-          <p:cNvSpPr txBox="1"/>
-          <p:nvPr/>
-        </p:nvSpPr>
-        <p:spPr>
-          <a:xfrm>
-            <a:off x="8430768" y="1837943"/>
-            <a:ext cx="3419856" cy="164592"/>
-          </a:xfrm>
-          <a:prstGeom prst="rect">
-            <a:avLst/>
-          </a:prstGeom>
-          <a:noFill/>
-        </p:spPr>
-        <p:txBody>
-          <a:bodyPr wrap="square">
-            <a:spAutoFit/>
-          </a:bodyPr>
-          <a:lstStyle/>
-          <a:p>
-            <a:pPr algn="l">
-              <a:spcAft>
-                <a:spcPts val="300"/>
-              </a:spcAft>
-            </a:pPr>
-            <a:r>
-              <a:rPr sz="1100" b="1">
-                <a:solidFill>
-                  <a:srgbClr val="1F77B4"/>
-                </a:solidFill>
-                <a:latin typeface="Calibri"/>
-              </a:rPr>
-              <a:t>JULIO · último mes cerrado</a:t>
-            </a:r>
-          </a:p>
-        </p:txBody>
-      </p:sp>
-      <p:sp>
-        <p:nvSpPr>
-          <p:cNvPr id="18" name="TextBox 17"/>
-          <p:cNvSpPr txBox="1"/>
-          <p:nvPr/>
-        </p:nvSpPr>
-        <p:spPr>
-          <a:xfrm>
-            <a:off x="8430768" y="2002536"/>
-            <a:ext cx="3419856" cy="201168"/>
-          </a:xfrm>
-          <a:prstGeom prst="rect">
-            <a:avLst/>
-          </a:prstGeom>
-          <a:noFill/>
-        </p:spPr>
-        <p:txBody>
-          <a:bodyPr wrap="square">
-            <a:spAutoFit/>
-          </a:bodyPr>
-          <a:lstStyle/>
-          <a:p>
-            <a:pPr algn="l">
-              <a:spcAft>
-                <a:spcPts val="300"/>
-              </a:spcAft>
-            </a:pPr>
-            <a:r>
-              <a:rPr sz="1200" b="0">
-                <a:solidFill>
-                  <a:srgbClr val="5A5A5A"/>
-                </a:solidFill>
-                <a:latin typeface="Calibri"/>
-              </a:rPr>
-              <a:t>El recinto sumó 6.056 m³</a:t>
-            </a:r>
-          </a:p>
-        </p:txBody>
-      </p:sp>
-      <p:sp>
-        <p:nvSpPr>
-          <p:cNvPr id="19" name="Rounded Rectangle 18"/>
-          <p:cNvSpPr/>
-          <p:nvPr/>
-        </p:nvSpPr>
-        <p:spPr>
-          <a:xfrm>
-            <a:off x="8430768" y="2212848"/>
-            <a:ext cx="3419856" cy="768096"/>
-          </a:xfrm>
-          <a:prstGeom prst="roundRect">
-            <a:avLst>
-              <a:gd name="adj" fmla="val 8000"/>
-            </a:avLst>
-          </a:prstGeom>
-          <a:solidFill>
-            <a:srgbClr val="F5F7FA"/>
-          </a:solidFill>
-          <a:ln w="6350">
-            <a:solidFill>
-              <a:srgbClr val="0D3B66"/>
-            </a:solidFill>
-          </a:ln>
-        </p:spPr>
-        <p:style>
-          <a:lnRef idx="1">
-            <a:schemeClr val="accent1"/>
-          </a:lnRef>
-          <a:fillRef idx="3">
-            <a:schemeClr val="accent1"/>
-          </a:fillRef>
-          <a:effectRef idx="2">
-            <a:schemeClr val="accent1"/>
-          </a:effectRef>
-          <a:fontRef idx="minor">
-            <a:schemeClr val="lt1"/>
-          </a:fontRef>
-        </p:style>
-        <p:txBody>
-          <a:bodyPr rtlCol="0" anchor="ctr"/>
-          <a:lstStyle/>
-          <a:p>
-            <a:pPr algn="ctr"/>
-          </a:p>
-        </p:txBody>
-      </p:sp>
-      <p:sp>
-        <p:nvSpPr>
-          <p:cNvPr id="20" name="TextBox 19"/>
-          <p:cNvSpPr txBox="1"/>
-          <p:nvPr/>
-        </p:nvSpPr>
-        <p:spPr>
-          <a:xfrm>
-            <a:off x="8540496" y="2240279"/>
-            <a:ext cx="3200400" cy="164592"/>
-          </a:xfrm>
-          <a:prstGeom prst="rect">
-            <a:avLst/>
-          </a:prstGeom>
-          <a:noFill/>
-        </p:spPr>
-        <p:txBody>
-          <a:bodyPr wrap="square">
-            <a:spAutoFit/>
-          </a:bodyPr>
-          <a:lstStyle/>
-          <a:p>
-            <a:pPr algn="l">
-              <a:spcAft>
-                <a:spcPts val="300"/>
-              </a:spcAft>
-            </a:pPr>
-            <a:r>
-              <a:rPr sz="1300" b="1">
-                <a:solidFill>
-                  <a:srgbClr val="0D3B66"/>
-                </a:solidFill>
-                <a:latin typeface="Calibri"/>
-              </a:rPr>
-              <a:t>Matriz Principal</a:t>
-            </a:r>
-          </a:p>
-        </p:txBody>
-      </p:sp>
-      <p:sp>
-        <p:nvSpPr>
-          <p:cNvPr id="21" name="TextBox 20"/>
-          <p:cNvSpPr txBox="1"/>
-          <p:nvPr/>
-        </p:nvSpPr>
-        <p:spPr>
-          <a:xfrm>
-            <a:off x="8540496" y="2535448"/>
-            <a:ext cx="3200400" cy="237744"/>
-          </a:xfrm>
-          <a:prstGeom prst="rect">
-            <a:avLst/>
-          </a:prstGeom>
-          <a:noFill/>
-        </p:spPr>
-        <p:txBody>
-          <a:bodyPr wrap="square">
-            <a:spAutoFit/>
-          </a:bodyPr>
-          <a:lstStyle/>
-          <a:p>
-            <a:pPr algn="l">
-              <a:spcAft>
-                <a:spcPts val="300"/>
-              </a:spcAft>
-            </a:pPr>
-            <a:r>
-              <a:rPr sz="1600" b="1">
-                <a:solidFill>
-                  <a:srgbClr val="0D3B66"/>
-                </a:solidFill>
-                <a:latin typeface="Calibri"/>
-              </a:rPr>
-              <a:t>5.994 m³    99 %</a:t>
-            </a:r>
-          </a:p>
-        </p:txBody>
-      </p:sp>
-      <p:sp>
-        <p:nvSpPr>
-          <p:cNvPr id="22" name="Rounded Rectangle 21"/>
-          <p:cNvSpPr/>
-          <p:nvPr/>
-        </p:nvSpPr>
-        <p:spPr>
-          <a:xfrm>
-            <a:off x="8430768" y="3877056"/>
-            <a:ext cx="3419856" cy="768096"/>
-          </a:xfrm>
-          <a:prstGeom prst="roundRect">
-            <a:avLst>
-              <a:gd name="adj" fmla="val 8000"/>
-            </a:avLst>
-          </a:prstGeom>
-          <a:solidFill>
-            <a:srgbClr val="F5F7FA"/>
-          </a:solidFill>
-          <a:ln w="6350">
-            <a:solidFill>
-              <a:srgbClr val="1F77B4"/>
-            </a:solidFill>
-          </a:ln>
-        </p:spPr>
-        <p:style>
-          <a:lnRef idx="1">
-            <a:schemeClr val="accent1"/>
-          </a:lnRef>
-          <a:fillRef idx="3">
-            <a:schemeClr val="accent1"/>
-          </a:fillRef>
-          <a:effectRef idx="2">
-            <a:schemeClr val="accent1"/>
-          </a:effectRef>
-          <a:fontRef idx="minor">
-            <a:schemeClr val="lt1"/>
-          </a:fontRef>
-        </p:style>
-        <p:txBody>
-          <a:bodyPr rtlCol="0" anchor="ctr"/>
-          <a:lstStyle/>
-          <a:p>
-            <a:pPr algn="ctr"/>
-          </a:p>
-        </p:txBody>
-      </p:sp>
-      <p:sp>
-        <p:nvSpPr>
-          <p:cNvPr id="23" name="TextBox 22"/>
-          <p:cNvSpPr txBox="1"/>
-          <p:nvPr/>
-        </p:nvSpPr>
-        <p:spPr>
-          <a:xfrm>
-            <a:off x="8540496" y="3904488"/>
-            <a:ext cx="3200400" cy="164592"/>
-          </a:xfrm>
-          <a:prstGeom prst="rect">
-            <a:avLst/>
-          </a:prstGeom>
-          <a:noFill/>
-        </p:spPr>
-        <p:txBody>
-          <a:bodyPr wrap="square">
-            <a:spAutoFit/>
-          </a:bodyPr>
-          <a:lstStyle/>
-          <a:p>
-            <a:pPr algn="l">
-              <a:spcAft>
-                <a:spcPts val="300"/>
-              </a:spcAft>
-            </a:pPr>
-            <a:r>
-              <a:rPr sz="1300" b="1">
-                <a:solidFill>
-                  <a:srgbClr val="1F77B4"/>
-                </a:solidFill>
-                <a:latin typeface="Calibri"/>
-              </a:rPr>
-              <a:t>Alim. Baños</a:t>
-            </a:r>
-          </a:p>
-        </p:txBody>
-      </p:sp>
-      <p:sp>
-        <p:nvSpPr>
-          <p:cNvPr id="24" name="TextBox 23"/>
-          <p:cNvSpPr txBox="1"/>
-          <p:nvPr/>
-        </p:nvSpPr>
-        <p:spPr>
-          <a:xfrm>
-            <a:off x="8540496" y="4199656"/>
-            <a:ext cx="3200400" cy="237744"/>
-          </a:xfrm>
-          <a:prstGeom prst="rect">
-            <a:avLst/>
-          </a:prstGeom>
-          <a:noFill/>
-        </p:spPr>
-        <p:txBody>
-          <a:bodyPr wrap="square">
-            <a:spAutoFit/>
-          </a:bodyPr>
-          <a:lstStyle/>
-          <a:p>
-            <a:pPr algn="l">
-              <a:spcAft>
-                <a:spcPts val="300"/>
-              </a:spcAft>
-            </a:pPr>
-            <a:r>
-              <a:rPr sz="1600" b="1">
-                <a:solidFill>
-                  <a:srgbClr val="0D3B66"/>
-                </a:solidFill>
-                <a:latin typeface="Calibri"/>
-              </a:rPr>
-              <a:t>62 m³    1 %</a:t>
-            </a:r>
-          </a:p>
-        </p:txBody>
-      </p:sp>
-      <p:sp>
-        <p:nvSpPr>
-          <p:cNvPr id="25" name="Rounded Rectangle 24"/>
-          <p:cNvSpPr/>
-          <p:nvPr/>
-        </p:nvSpPr>
-        <p:spPr>
-          <a:xfrm>
-            <a:off x="201168" y="5705856"/>
-            <a:ext cx="11795760" cy="438912"/>
+            <a:off x="201168" y="987552"/>
+            <a:ext cx="11777472" cy="713232"/>
           </a:xfrm>
           <a:prstGeom prst="roundRect">
             <a:avLst>
@@ -9619,53 +11748,316 @@
       </p:sp>
       <p:sp>
         <p:nvSpPr>
-          <p:cNvPr id="26" name="TextBox 25"/>
-          <p:cNvSpPr txBox="1"/>
-          <p:nvPr/>
-        </p:nvSpPr>
-        <p:spPr>
-          <a:xfrm>
-            <a:off x="329184" y="5779008"/>
-            <a:ext cx="11539728" cy="310896"/>
-          </a:xfrm>
-          <a:prstGeom prst="rect">
-            <a:avLst/>
-          </a:prstGeom>
-          <a:noFill/>
-        </p:spPr>
-        <p:txBody>
-          <a:bodyPr wrap="square">
-            <a:spAutoFit/>
-          </a:bodyPr>
-          <a:lstStyle/>
-          <a:p>
-            <a:pPr algn="l">
-              <a:spcAft>
-                <a:spcPts val="300"/>
-              </a:spcAft>
-            </a:pPr>
-            <a:r>
-              <a:rPr sz="1100" b="0">
+          <p:cNvPr id="8" name="TextBox 7"/>
+          <p:cNvSpPr txBox="1"/>
+          <p:nvPr/>
+        </p:nvSpPr>
+        <p:spPr>
+          <a:xfrm>
+            <a:off x="365760" y="1042415"/>
+            <a:ext cx="11475720" cy="603504"/>
+          </a:xfrm>
+          <a:prstGeom prst="rect">
+            <a:avLst/>
+          </a:prstGeom>
+          <a:noFill/>
+        </p:spPr>
+        <p:txBody>
+          <a:bodyPr wrap="square">
+            <a:spAutoFit/>
+          </a:bodyPr>
+          <a:lstStyle/>
+          <a:p>
+            <a:pPr algn="l">
+              <a:spcAft>
+                <a:spcPts val="300"/>
+              </a:spcAft>
+            </a:pPr>
+            <a:r>
+              <a:rPr sz="1300" b="0">
                 <a:solidFill>
                   <a:srgbClr val="0D3B66"/>
                 </a:solidFill>
                 <a:latin typeface="Calibri"/>
               </a:rPr>
-              <a:t>Recepción 06/11/2025 / relocalizado 17/02/2026  ·  Capacitación 14/11/2025  ·  Mario Freitez  ·  Tomás Saba  ·  Sebastián Araneda  ·  Mantención: I. Dustan, K. Varas, L. Méndez, C. Leyto</a:t>
-            </a:r>
-          </a:p>
-        </p:txBody>
-      </p:sp>
-      <p:sp>
-        <p:nvSpPr>
-          <p:cNvPr id="27" name="TextBox 26"/>
-          <p:cNvSpPr txBox="1"/>
-          <p:nvPr/>
-        </p:nvSpPr>
-        <p:spPr>
-          <a:xfrm>
-            <a:off x="256032" y="6181344"/>
-            <a:ext cx="11704320" cy="566928"/>
+              <a:t>Placa Bancaria se lleva 68 % de julio (7.084 m³). Pasillo Técnico (26 m³) y ARROW (0,5 m³) son residuales. Propuesta: reubicar esos dos puntos para subdividir Placa y ver qué zona alimenta el volumen. En julio hubo madrugadas altas (hasta 65 m³); en agosto la noche queda ~0. Si esas noches vuelven, un control on/off en Placa tiene sentido. Hoy el mayor valor es partir el caudal diurno.</a:t>
+            </a:r>
+          </a:p>
+        </p:txBody>
+      </p:sp>
+      <p:sp>
+        <p:nvSpPr>
+          <p:cNvPr id="9" name="Rounded Rectangle 8"/>
+          <p:cNvSpPr/>
+          <p:nvPr/>
+        </p:nvSpPr>
+        <p:spPr>
+          <a:xfrm>
+            <a:off x="201168" y="1792224"/>
+            <a:ext cx="5833872" cy="3749039"/>
+          </a:xfrm>
+          <a:prstGeom prst="roundRect">
+            <a:avLst>
+              <a:gd name="adj" fmla="val 8000"/>
+            </a:avLst>
+          </a:prstGeom>
+          <a:solidFill>
+            <a:srgbClr val="F5F7FA"/>
+          </a:solidFill>
+          <a:ln>
+            <a:noFill/>
+          </a:ln>
+        </p:spPr>
+        <p:style>
+          <a:lnRef idx="1">
+            <a:schemeClr val="accent1"/>
+          </a:lnRef>
+          <a:fillRef idx="3">
+            <a:schemeClr val="accent1"/>
+          </a:fillRef>
+          <a:effectRef idx="2">
+            <a:schemeClr val="accent1"/>
+          </a:effectRef>
+          <a:fontRef idx="minor">
+            <a:schemeClr val="lt1"/>
+          </a:fontRef>
+        </p:style>
+        <p:txBody>
+          <a:bodyPr rtlCol="0" anchor="ctr"/>
+          <a:lstStyle/>
+          <a:p>
+            <a:pPr algn="ctr"/>
+          </a:p>
+        </p:txBody>
+      </p:sp>
+      <p:sp>
+        <p:nvSpPr>
+          <p:cNvPr id="10" name="TextBox 9"/>
+          <p:cNvSpPr txBox="1"/>
+          <p:nvPr/>
+        </p:nvSpPr>
+        <p:spPr>
+          <a:xfrm>
+            <a:off x="329184" y="1828800"/>
+            <a:ext cx="5577840" cy="201168"/>
+          </a:xfrm>
+          <a:prstGeom prst="rect">
+            <a:avLst/>
+          </a:prstGeom>
+          <a:noFill/>
+        </p:spPr>
+        <p:txBody>
+          <a:bodyPr wrap="square">
+            <a:spAutoFit/>
+          </a:bodyPr>
+          <a:lstStyle/>
+          <a:p>
+            <a:pPr algn="l">
+              <a:spcAft>
+                <a:spcPts val="300"/>
+              </a:spcAft>
+            </a:pPr>
+            <a:r>
+              <a:rPr sz="1100" b="1">
+                <a:solidFill>
+                  <a:srgbClr val="1F77B4"/>
+                </a:solidFill>
+                <a:latin typeface="Calibri"/>
+              </a:rPr>
+              <a:t>NOCHES DE PLACA — m³ 00:00–06:00 (jul–ago)</a:t>
+            </a:r>
+          </a:p>
+        </p:txBody>
+      </p:sp>
+      <p:pic>
+        <p:nvPicPr>
+          <p:cNvPr id="11" name="Picture 10" descr="mam_placa_noches_jul_ago.png"/>
+          <p:cNvPicPr>
+            <a:picLocks noChangeAspect="1"/>
+          </p:cNvPicPr>
+          <p:nvPr/>
+        </p:nvPicPr>
+        <p:blipFill>
+          <a:blip r:embed="rId3"/>
+          <a:stretch>
+            <a:fillRect/>
+          </a:stretch>
+        </p:blipFill>
+        <p:spPr>
+          <a:xfrm>
+            <a:off x="292608" y="2489736"/>
+            <a:ext cx="5650992" cy="2518606"/>
+          </a:xfrm>
+          <a:prstGeom prst="rect">
+            <a:avLst/>
+          </a:prstGeom>
+        </p:spPr>
+      </p:pic>
+      <p:sp>
+        <p:nvSpPr>
+          <p:cNvPr id="12" name="Rounded Rectangle 11"/>
+          <p:cNvSpPr/>
+          <p:nvPr/>
+        </p:nvSpPr>
+        <p:spPr>
+          <a:xfrm>
+            <a:off x="6163056" y="1792224"/>
+            <a:ext cx="5815584" cy="3749039"/>
+          </a:xfrm>
+          <a:prstGeom prst="roundRect">
+            <a:avLst>
+              <a:gd name="adj" fmla="val 8000"/>
+            </a:avLst>
+          </a:prstGeom>
+          <a:solidFill>
+            <a:srgbClr val="F5F7FA"/>
+          </a:solidFill>
+          <a:ln>
+            <a:noFill/>
+          </a:ln>
+        </p:spPr>
+        <p:style>
+          <a:lnRef idx="1">
+            <a:schemeClr val="accent1"/>
+          </a:lnRef>
+          <a:fillRef idx="3">
+            <a:schemeClr val="accent1"/>
+          </a:fillRef>
+          <a:effectRef idx="2">
+            <a:schemeClr val="accent1"/>
+          </a:effectRef>
+          <a:fontRef idx="minor">
+            <a:schemeClr val="lt1"/>
+          </a:fontRef>
+        </p:style>
+        <p:txBody>
+          <a:bodyPr rtlCol="0" anchor="ctr"/>
+          <a:lstStyle/>
+          <a:p>
+            <a:pPr algn="ctr"/>
+          </a:p>
+        </p:txBody>
+      </p:sp>
+      <p:sp>
+        <p:nvSpPr>
+          <p:cNvPr id="13" name="TextBox 12"/>
+          <p:cNvSpPr txBox="1"/>
+          <p:nvPr/>
+        </p:nvSpPr>
+        <p:spPr>
+          <a:xfrm>
+            <a:off x="6291072" y="1828800"/>
+            <a:ext cx="5559552" cy="201168"/>
+          </a:xfrm>
+          <a:prstGeom prst="rect">
+            <a:avLst/>
+          </a:prstGeom>
+          <a:noFill/>
+        </p:spPr>
+        <p:txBody>
+          <a:bodyPr wrap="square">
+            <a:spAutoFit/>
+          </a:bodyPr>
+          <a:lstStyle/>
+          <a:p>
+            <a:pPr algn="l">
+              <a:spcAft>
+                <a:spcPts val="300"/>
+              </a:spcAft>
+            </a:pPr>
+            <a:r>
+              <a:rPr sz="1100" b="1">
+                <a:solidFill>
+                  <a:srgbClr val="1F77B4"/>
+                </a:solidFill>
+                <a:latin typeface="Calibri"/>
+              </a:rPr>
+              <a:t>PLACA vs FALABELLA — m³/día desde el 11/08</a:t>
+            </a:r>
+          </a:p>
+        </p:txBody>
+      </p:sp>
+      <p:pic>
+        <p:nvPicPr>
+          <p:cNvPr id="14" name="Picture 13" descr="mam_placa_vs_falabella.png"/>
+          <p:cNvPicPr>
+            <a:picLocks noChangeAspect="1"/>
+          </p:cNvPicPr>
+          <p:nvPr/>
+        </p:nvPicPr>
+        <p:blipFill>
+          <a:blip r:embed="rId4"/>
+          <a:stretch>
+            <a:fillRect/>
+          </a:stretch>
+        </p:blipFill>
+        <p:spPr>
+          <a:xfrm>
+            <a:off x="6254496" y="2493811"/>
+            <a:ext cx="5632704" cy="2510456"/>
+          </a:xfrm>
+          <a:prstGeom prst="rect">
+            <a:avLst/>
+          </a:prstGeom>
+        </p:spPr>
+      </p:pic>
+      <p:sp>
+        <p:nvSpPr>
+          <p:cNvPr id="15" name="Rounded Rectangle 14"/>
+          <p:cNvSpPr/>
+          <p:nvPr/>
+        </p:nvSpPr>
+        <p:spPr>
+          <a:xfrm>
+            <a:off x="201168" y="5632704"/>
+            <a:ext cx="11777472" cy="1060704"/>
+          </a:xfrm>
+          <a:prstGeom prst="roundRect">
+            <a:avLst>
+              <a:gd name="adj" fmla="val 8000"/>
+            </a:avLst>
+          </a:prstGeom>
+          <a:solidFill>
+            <a:srgbClr val="FFF9EB"/>
+          </a:solidFill>
+          <a:ln w="6350">
+            <a:solidFill>
+              <a:srgbClr val="C9A227"/>
+            </a:solidFill>
+          </a:ln>
+        </p:spPr>
+        <p:style>
+          <a:lnRef idx="1">
+            <a:schemeClr val="accent1"/>
+          </a:lnRef>
+          <a:fillRef idx="3">
+            <a:schemeClr val="accent1"/>
+          </a:fillRef>
+          <a:effectRef idx="2">
+            <a:schemeClr val="accent1"/>
+          </a:effectRef>
+          <a:fontRef idx="minor">
+            <a:schemeClr val="lt1"/>
+          </a:fontRef>
+        </p:style>
+        <p:txBody>
+          <a:bodyPr rtlCol="0" anchor="ctr"/>
+          <a:lstStyle/>
+          <a:p>
+            <a:pPr algn="ctr"/>
+          </a:p>
+        </p:txBody>
+      </p:sp>
+      <p:sp>
+        <p:nvSpPr>
+          <p:cNvPr id="16" name="TextBox 15"/>
+          <p:cNvSpPr txBox="1"/>
+          <p:nvPr/>
+        </p:nvSpPr>
+        <p:spPr>
+          <a:xfrm>
+            <a:off x="365760" y="5669280"/>
+            <a:ext cx="11475720" cy="969264"/>
           </a:xfrm>
           <a:prstGeom prst="rect">
             <a:avLst/>
@@ -9690,23 +12082,23 @@
                 </a:solidFill>
                 <a:latin typeface="Calibri"/>
               </a:rPr>
-              <a:t>Mayo 3.148   ·   Junio 4.033   ·   Julio 6.056   ·   Agosto 1–17: 3.487   ·   proy. ago 6.360 m³.</a:t>
-            </a:r>
-          </a:p>
-          <a:p>
-            <a:pPr algn="l">
-              <a:spcAft>
-                <a:spcPts val="300"/>
-              </a:spcAft>
-            </a:pPr>
-            <a:r>
-              <a:rPr sz="1100" b="0">
-                <a:solidFill>
-                  <a:srgbClr val="5A5A5A"/>
-                </a:solidFill>
-                <a:latin typeface="Calibri"/>
-              </a:rPr>
-              <a:t>Matriz Principal concentra el recinto; Baños es consumo de uso hábil.</a:t>
+              <a:t>Umbral a cargar: diario Placa 155 m³/día (agosto operativo × 1,25; atrapa un salto tipo junio ~410). Nocturno 15 m³ en 00–06 (julio–ago mediana 1,5 m³; el 10/08 = 0 m³). Eso marca noches tipo 3/07 o 13/07 (48–65 m³) sin spamear agosto, ya ~0. Falabella aún sin umbral fijo (2–3 semanas de baseline; sus noches desde el 12/08 sí entran al análisis).</a:t>
+            </a:r>
+          </a:p>
+          <a:p>
+            <a:pPr algn="l">
+              <a:spcAft>
+                <a:spcPts val="300"/>
+              </a:spcAft>
+            </a:pPr>
+            <a:r>
+              <a:rPr sz="1200" b="1">
+                <a:solidFill>
+                  <a:srgbClr val="0D3B66"/>
+                </a:solidFill>
+                <a:latin typeface="Calibri"/>
+              </a:rPr>
+              <a:t>11–14/08: Placa 105 m³/día vs Falabella 43 m³/día (Placa ~2,5 veces Falabella). 15–17/08 Placa suma 1 m³ y Falabella 327 m³: validar en terreno si Placa se cortó o dejó de medir. Prioridad: reubicar Pasillo Técnico y ARROW para subdividir Placa.</a:t>
             </a:r>
           </a:p>
         </p:txBody>
@@ -9873,7 +12265,7 @@
                 </a:solidFill>
                 <a:latin typeface="Calibri"/>
               </a:rPr>
-              <a:t>BOM  ·  Equipos y consumo</a:t>
+              <a:t>MAQ  ·  Equipos y consumo</a:t>
             </a:r>
           </a:p>
         </p:txBody>
@@ -9912,7 +12304,7 @@
                 </a:solidFill>
                 <a:latin typeface="Calibri"/>
               </a:rPr>
-              <a:t>Buenaventura (San Ignacio)   |   2 puntos WES   |   01/05/2026 – 17/08/2026</a:t>
+              <a:t>Mall Arauco Quilicura   |   2 puntos WES   |   01/05/2026 – 17/08/2026</a:t>
             </a:r>
           </a:p>
         </p:txBody>
@@ -9998,7 +12390,7 @@
                 </a:solidFill>
                 <a:latin typeface="Calibri"/>
               </a:rPr>
-              <a:t>000025-18</a:t>
+              <a:t>000025-13</a:t>
             </a:r>
           </a:p>
         </p:txBody>
@@ -10037,7 +12429,7 @@
                 </a:solidFill>
                 <a:latin typeface="Calibri"/>
               </a:rPr>
-              <a:t>San Ignacio 500</a:t>
+              <a:t>Matriz Principal</a:t>
             </a:r>
           </a:p>
         </p:txBody>
@@ -10063,7 +12455,7 @@
           </a:solidFill>
           <a:ln w="6350">
             <a:solidFill>
-              <a:srgbClr val="C45C26"/>
+              <a:srgbClr val="1F77B4"/>
             </a:solidFill>
           </a:ln>
         </p:spPr>
@@ -10123,7 +12515,7 @@
                 </a:solidFill>
                 <a:latin typeface="Calibri"/>
               </a:rPr>
-              <a:t>000025-17</a:t>
+              <a:t>000025-34</a:t>
             </a:r>
           </a:p>
         </p:txBody>
@@ -10162,7 +12554,7 @@
                 </a:solidFill>
                 <a:latin typeface="Calibri"/>
               </a:rPr>
-              <a:t>San Ignacio 300</a:t>
+              <a:t>Alim. Baños</a:t>
             </a:r>
           </a:p>
         </p:txBody>
@@ -10201,7 +12593,7 @@
                 </a:solidFill>
                 <a:latin typeface="Calibri"/>
               </a:rPr>
-              <a:t>monitoreo</a:t>
+              <a:t>uso hábil</a:t>
             </a:r>
           </a:p>
         </p:txBody>
@@ -10253,7 +12645,7 @@
       </p:sp>
       <p:pic>
         <p:nvPicPr>
-          <p:cNvPr id="15" name="Picture 14" descr="bom_mensual_may_ago.png"/>
+          <p:cNvPr id="15" name="Picture 14" descr="maq_mensual_may_ago.png"/>
           <p:cNvPicPr>
             <a:picLocks noChangeAspect="1"/>
           </p:cNvPicPr>
@@ -10395,7 +12787,7 @@
                 </a:solidFill>
                 <a:latin typeface="Calibri"/>
               </a:rPr>
-              <a:t>El recinto sumó 5.116 m³</a:t>
+              <a:t>El recinto sumó 6.056 m³</a:t>
             </a:r>
           </a:p>
         </p:txBody>
@@ -10481,7 +12873,7 @@
                 </a:solidFill>
                 <a:latin typeface="Calibri"/>
               </a:rPr>
-              <a:t>San Ignacio 500</a:t>
+              <a:t>Matriz Principal</a:t>
             </a:r>
           </a:p>
         </p:txBody>
@@ -10520,7 +12912,7 @@
                 </a:solidFill>
                 <a:latin typeface="Calibri"/>
               </a:rPr>
-              <a:t>4.067 m³    79 %</a:t>
+              <a:t>5.994 m³    99 %</a:t>
             </a:r>
           </a:p>
         </p:txBody>
@@ -10546,7 +12938,7 @@
           </a:solidFill>
           <a:ln w="6350">
             <a:solidFill>
-              <a:srgbClr val="C45C26"/>
+              <a:srgbClr val="1F77B4"/>
             </a:solidFill>
           </a:ln>
         </p:spPr>
@@ -10602,11 +12994,11 @@
             <a:r>
               <a:rPr sz="1300" b="1">
                 <a:solidFill>
-                  <a:srgbClr val="C45C26"/>
-                </a:solidFill>
-                <a:latin typeface="Calibri"/>
-              </a:rPr>
-              <a:t>San Ignacio 300</a:t>
+                  <a:srgbClr val="1F77B4"/>
+                </a:solidFill>
+                <a:latin typeface="Calibri"/>
+              </a:rPr>
+              <a:t>Alim. Baños</a:t>
             </a:r>
           </a:p>
         </p:txBody>
@@ -10645,7 +13037,7 @@
                 </a:solidFill>
                 <a:latin typeface="Calibri"/>
               </a:rPr>
-              <a:t>1.049 m³    21 %</a:t>
+              <a:t>62 m³    1 %</a:t>
             </a:r>
           </a:p>
         </p:txBody>
@@ -10731,7 +13123,7 @@
                 </a:solidFill>
                 <a:latin typeface="Calibri"/>
               </a:rPr>
-              <a:t>Recepción 18/11/2025  ·  Capacitación 11/12/2025  ·  Aliro Cortés  ·  Tomás Saba  ·  Sebastián Araneda</a:t>
+              <a:t>Recepción 06/11/2025 / relocalizado 17/02/2026  ·  Capacitación 14/11/2025  ·  Mario Freitez  ·  Tomás Saba  ·  Sebastián Araneda  ·  Mantención: I. Dustan, K. Varas, L. Méndez, C. Leyto</a:t>
             </a:r>
           </a:p>
         </p:txBody>
@@ -10770,7 +13162,7 @@
                 </a:solidFill>
                 <a:latin typeface="Calibri"/>
               </a:rPr>
-              <a:t>Mayo 1.565   ·   Junio 1.762   ·   Julio 5.116   ·   Agosto 1–17: 2.686   ·   proy. ago 4.899 m³.</a:t>
+              <a:t>Mayo 3.148   ·   Junio 4.033   ·   Julio 6.056   ·   Agosto 1–17: 3.487   ·   proy. ago 6.360 m³.</a:t>
             </a:r>
           </a:p>
           <a:p>
@@ -10786,7 +13178,7 @@
                 </a:solidFill>
                 <a:latin typeface="Calibri"/>
               </a:rPr>
-              <a:t>San Ignacio 500 es el mayor volumen; 300 queda en monitoreo.</a:t>
+              <a:t>Matriz Principal concentra el recinto; Baños es consumo de uso hábil.</a:t>
             </a:r>
           </a:p>
         </p:txBody>
@@ -10953,7 +13345,7 @@
                 </a:solidFill>
                 <a:latin typeface="Calibri"/>
               </a:rPr>
-              <a:t>AEB  ·  Equipos y consumo</a:t>
+              <a:t>BOM  ·  Equipos y consumo</a:t>
             </a:r>
           </a:p>
         </p:txBody>
@@ -10992,7 +13384,7 @@
                 </a:solidFill>
                 <a:latin typeface="Calibri"/>
               </a:rPr>
-              <a:t>Arauco El Bosque   |   2 puntos WES   |   01/05/2026 – 17/08/2026</a:t>
+              <a:t>Buenaventura (San Ignacio)   |   2 puntos WES   |   01/05/2026 – 17/08/2026</a:t>
             </a:r>
           </a:p>
         </p:txBody>
@@ -11006,6 +13398,131 @@
         <p:spPr>
           <a:xfrm>
             <a:off x="201168" y="1024128"/>
+            <a:ext cx="5861304" cy="658368"/>
+          </a:xfrm>
+          <a:prstGeom prst="roundRect">
+            <a:avLst>
+              <a:gd name="adj" fmla="val 8000"/>
+            </a:avLst>
+          </a:prstGeom>
+          <a:solidFill>
+            <a:srgbClr val="F5F7FA"/>
+          </a:solidFill>
+          <a:ln w="6350">
+            <a:solidFill>
+              <a:srgbClr val="0D3B66"/>
+            </a:solidFill>
+          </a:ln>
+        </p:spPr>
+        <p:style>
+          <a:lnRef idx="1">
+            <a:schemeClr val="accent1"/>
+          </a:lnRef>
+          <a:fillRef idx="3">
+            <a:schemeClr val="accent1"/>
+          </a:fillRef>
+          <a:effectRef idx="2">
+            <a:schemeClr val="accent1"/>
+          </a:effectRef>
+          <a:fontRef idx="minor">
+            <a:schemeClr val="lt1"/>
+          </a:fontRef>
+        </p:style>
+        <p:txBody>
+          <a:bodyPr rtlCol="0" anchor="ctr"/>
+          <a:lstStyle/>
+          <a:p>
+            <a:pPr algn="ctr"/>
+          </a:p>
+        </p:txBody>
+      </p:sp>
+      <p:sp>
+        <p:nvSpPr>
+          <p:cNvPr id="8" name="TextBox 7"/>
+          <p:cNvSpPr txBox="1"/>
+          <p:nvPr/>
+        </p:nvSpPr>
+        <p:spPr>
+          <a:xfrm>
+            <a:off x="274320" y="1060704"/>
+            <a:ext cx="5733288" cy="146304"/>
+          </a:xfrm>
+          <a:prstGeom prst="rect">
+            <a:avLst/>
+          </a:prstGeom>
+          <a:noFill/>
+        </p:spPr>
+        <p:txBody>
+          <a:bodyPr wrap="square">
+            <a:spAutoFit/>
+          </a:bodyPr>
+          <a:lstStyle/>
+          <a:p>
+            <a:pPr algn="l">
+              <a:spcAft>
+                <a:spcPts val="300"/>
+              </a:spcAft>
+            </a:pPr>
+            <a:r>
+              <a:rPr sz="1000" b="1">
+                <a:solidFill>
+                  <a:srgbClr val="C9A227"/>
+                </a:solidFill>
+                <a:latin typeface="Calibri"/>
+              </a:rPr>
+              <a:t>000025-18</a:t>
+            </a:r>
+          </a:p>
+        </p:txBody>
+      </p:sp>
+      <p:sp>
+        <p:nvSpPr>
+          <p:cNvPr id="9" name="TextBox 8"/>
+          <p:cNvSpPr txBox="1"/>
+          <p:nvPr/>
+        </p:nvSpPr>
+        <p:spPr>
+          <a:xfrm>
+            <a:off x="274320" y="1243584"/>
+            <a:ext cx="5733288" cy="201168"/>
+          </a:xfrm>
+          <a:prstGeom prst="rect">
+            <a:avLst/>
+          </a:prstGeom>
+          <a:noFill/>
+        </p:spPr>
+        <p:txBody>
+          <a:bodyPr wrap="square">
+            <a:spAutoFit/>
+          </a:bodyPr>
+          <a:lstStyle/>
+          <a:p>
+            <a:pPr algn="l">
+              <a:spcAft>
+                <a:spcPts val="300"/>
+              </a:spcAft>
+            </a:pPr>
+            <a:r>
+              <a:rPr sz="1200" b="1">
+                <a:solidFill>
+                  <a:srgbClr val="0D3B66"/>
+                </a:solidFill>
+                <a:latin typeface="Calibri"/>
+              </a:rPr>
+              <a:t>San Ignacio 500</a:t>
+            </a:r>
+          </a:p>
+        </p:txBody>
+      </p:sp>
+      <p:sp>
+        <p:nvSpPr>
+          <p:cNvPr id="10" name="Rounded Rectangle 9"/>
+          <p:cNvSpPr/>
+          <p:nvPr/>
+        </p:nvSpPr>
+        <p:spPr>
+          <a:xfrm>
+            <a:off x="6135624" y="1024128"/>
             <a:ext cx="5861304" cy="658368"/>
           </a:xfrm>
           <a:prstGeom prst="roundRect">
@@ -11046,131 +13563,6 @@
       </p:sp>
       <p:sp>
         <p:nvSpPr>
-          <p:cNvPr id="8" name="TextBox 7"/>
-          <p:cNvSpPr txBox="1"/>
-          <p:nvPr/>
-        </p:nvSpPr>
-        <p:spPr>
-          <a:xfrm>
-            <a:off x="274320" y="1060704"/>
-            <a:ext cx="5733288" cy="146304"/>
-          </a:xfrm>
-          <a:prstGeom prst="rect">
-            <a:avLst/>
-          </a:prstGeom>
-          <a:noFill/>
-        </p:spPr>
-        <p:txBody>
-          <a:bodyPr wrap="square">
-            <a:spAutoFit/>
-          </a:bodyPr>
-          <a:lstStyle/>
-          <a:p>
-            <a:pPr algn="l">
-              <a:spcAft>
-                <a:spcPts val="300"/>
-              </a:spcAft>
-            </a:pPr>
-            <a:r>
-              <a:rPr sz="1000" b="1">
-                <a:solidFill>
-                  <a:srgbClr val="C9A227"/>
-                </a:solidFill>
-                <a:latin typeface="Calibri"/>
-              </a:rPr>
-              <a:t>000025-11</a:t>
-            </a:r>
-          </a:p>
-        </p:txBody>
-      </p:sp>
-      <p:sp>
-        <p:nvSpPr>
-          <p:cNvPr id="9" name="TextBox 8"/>
-          <p:cNvSpPr txBox="1"/>
-          <p:nvPr/>
-        </p:nvSpPr>
-        <p:spPr>
-          <a:xfrm>
-            <a:off x="274320" y="1243584"/>
-            <a:ext cx="5733288" cy="201168"/>
-          </a:xfrm>
-          <a:prstGeom prst="rect">
-            <a:avLst/>
-          </a:prstGeom>
-          <a:noFill/>
-        </p:spPr>
-        <p:txBody>
-          <a:bodyPr wrap="square">
-            <a:spAutoFit/>
-          </a:bodyPr>
-          <a:lstStyle/>
-          <a:p>
-            <a:pPr algn="l">
-              <a:spcAft>
-                <a:spcPts val="300"/>
-              </a:spcAft>
-            </a:pPr>
-            <a:r>
-              <a:rPr sz="1200" b="1">
-                <a:solidFill>
-                  <a:srgbClr val="0D3B66"/>
-                </a:solidFill>
-                <a:latin typeface="Calibri"/>
-              </a:rPr>
-              <a:t>Matriz 1° piso</a:t>
-            </a:r>
-          </a:p>
-        </p:txBody>
-      </p:sp>
-      <p:sp>
-        <p:nvSpPr>
-          <p:cNvPr id="10" name="Rounded Rectangle 9"/>
-          <p:cNvSpPr/>
-          <p:nvPr/>
-        </p:nvSpPr>
-        <p:spPr>
-          <a:xfrm>
-            <a:off x="6135624" y="1024128"/>
-            <a:ext cx="5861304" cy="658368"/>
-          </a:xfrm>
-          <a:prstGeom prst="roundRect">
-            <a:avLst>
-              <a:gd name="adj" fmla="val 8000"/>
-            </a:avLst>
-          </a:prstGeom>
-          <a:solidFill>
-            <a:srgbClr val="F5F7FA"/>
-          </a:solidFill>
-          <a:ln w="6350">
-            <a:solidFill>
-              <a:srgbClr val="C9A227"/>
-            </a:solidFill>
-          </a:ln>
-        </p:spPr>
-        <p:style>
-          <a:lnRef idx="1">
-            <a:schemeClr val="accent1"/>
-          </a:lnRef>
-          <a:fillRef idx="3">
-            <a:schemeClr val="accent1"/>
-          </a:fillRef>
-          <a:effectRef idx="2">
-            <a:schemeClr val="accent1"/>
-          </a:effectRef>
-          <a:fontRef idx="minor">
-            <a:schemeClr val="lt1"/>
-          </a:fontRef>
-        </p:style>
-        <p:txBody>
-          <a:bodyPr rtlCol="0" anchor="ctr"/>
-          <a:lstStyle/>
-          <a:p>
-            <a:pPr algn="ctr"/>
-          </a:p>
-        </p:txBody>
-      </p:sp>
-      <p:sp>
-        <p:nvSpPr>
           <p:cNvPr id="11" name="TextBox 10"/>
           <p:cNvSpPr txBox="1"/>
           <p:nvPr/>
@@ -11203,7 +13595,7 @@
                 </a:solidFill>
                 <a:latin typeface="Calibri"/>
               </a:rPr>
-              <a:t>000025-12</a:t>
+              <a:t>000025-17</a:t>
             </a:r>
           </a:p>
         </p:txBody>
@@ -11242,14 +13634,53 @@
                 </a:solidFill>
                 <a:latin typeface="Calibri"/>
               </a:rPr>
-              <a:t>Anillo Plaza</a:t>
-            </a:r>
-          </a:p>
-        </p:txBody>
-      </p:sp>
-      <p:sp>
-        <p:nvSpPr>
-          <p:cNvPr id="13" name="Rounded Rectangle 12"/>
+              <a:t>San Ignacio 300</a:t>
+            </a:r>
+          </a:p>
+        </p:txBody>
+      </p:sp>
+      <p:sp>
+        <p:nvSpPr>
+          <p:cNvPr id="13" name="TextBox 12"/>
+          <p:cNvSpPr txBox="1"/>
+          <p:nvPr/>
+        </p:nvSpPr>
+        <p:spPr>
+          <a:xfrm>
+            <a:off x="6208776" y="1481328"/>
+            <a:ext cx="5733288" cy="164592"/>
+          </a:xfrm>
+          <a:prstGeom prst="rect">
+            <a:avLst/>
+          </a:prstGeom>
+          <a:noFill/>
+        </p:spPr>
+        <p:txBody>
+          <a:bodyPr wrap="square">
+            <a:spAutoFit/>
+          </a:bodyPr>
+          <a:lstStyle/>
+          <a:p>
+            <a:pPr algn="l">
+              <a:spcAft>
+                <a:spcPts val="300"/>
+              </a:spcAft>
+            </a:pPr>
+            <a:r>
+              <a:rPr sz="1000" b="0">
+                <a:solidFill>
+                  <a:srgbClr val="5A5A5A"/>
+                </a:solidFill>
+                <a:latin typeface="Calibri"/>
+              </a:rPr>
+              <a:t>monitoreo</a:t>
+            </a:r>
+          </a:p>
+        </p:txBody>
+      </p:sp>
+      <p:sp>
+        <p:nvSpPr>
+          <p:cNvPr id="14" name="Rounded Rectangle 13"/>
           <p:cNvSpPr/>
           <p:nvPr/>
         </p:nvSpPr>
@@ -11294,7 +13725,7 @@
       </p:sp>
       <p:pic>
         <p:nvPicPr>
-          <p:cNvPr id="14" name="Picture 13" descr="aeb_mensual_may_ago.png"/>
+          <p:cNvPr id="15" name="Picture 14" descr="bom_mensual_may_ago.png"/>
           <p:cNvPicPr>
             <a:picLocks noChangeAspect="1"/>
           </p:cNvPicPr>
@@ -11318,7 +13749,7 @@
       </p:pic>
       <p:sp>
         <p:nvSpPr>
-          <p:cNvPr id="15" name="Rounded Rectangle 14"/>
+          <p:cNvPr id="16" name="Rounded Rectangle 15"/>
           <p:cNvSpPr/>
           <p:nvPr/>
         </p:nvSpPr>
@@ -11365,7 +13796,7 @@
       </p:sp>
       <p:sp>
         <p:nvSpPr>
-          <p:cNvPr id="16" name="TextBox 15"/>
+          <p:cNvPr id="17" name="TextBox 16"/>
           <p:cNvSpPr txBox="1"/>
           <p:nvPr/>
         </p:nvSpPr>
@@ -11404,7 +13835,7 @@
       </p:sp>
       <p:sp>
         <p:nvSpPr>
-          <p:cNvPr id="17" name="TextBox 16"/>
+          <p:cNvPr id="18" name="TextBox 17"/>
           <p:cNvSpPr txBox="1"/>
           <p:nvPr/>
         </p:nvSpPr>
@@ -11436,20 +13867,145 @@
                 </a:solidFill>
                 <a:latin typeface="Calibri"/>
               </a:rPr>
-              <a:t>El recinto sumó 2.371 m³</a:t>
-            </a:r>
-          </a:p>
-        </p:txBody>
-      </p:sp>
-      <p:sp>
-        <p:nvSpPr>
-          <p:cNvPr id="18" name="Rounded Rectangle 17"/>
+              <a:t>El recinto sumó 5.116 m³</a:t>
+            </a:r>
+          </a:p>
+        </p:txBody>
+      </p:sp>
+      <p:sp>
+        <p:nvSpPr>
+          <p:cNvPr id="19" name="Rounded Rectangle 18"/>
           <p:cNvSpPr/>
           <p:nvPr/>
         </p:nvSpPr>
         <p:spPr>
           <a:xfrm>
             <a:off x="8430768" y="2212848"/>
+            <a:ext cx="3419856" cy="768096"/>
+          </a:xfrm>
+          <a:prstGeom prst="roundRect">
+            <a:avLst>
+              <a:gd name="adj" fmla="val 8000"/>
+            </a:avLst>
+          </a:prstGeom>
+          <a:solidFill>
+            <a:srgbClr val="F5F7FA"/>
+          </a:solidFill>
+          <a:ln w="6350">
+            <a:solidFill>
+              <a:srgbClr val="0D3B66"/>
+            </a:solidFill>
+          </a:ln>
+        </p:spPr>
+        <p:style>
+          <a:lnRef idx="1">
+            <a:schemeClr val="accent1"/>
+          </a:lnRef>
+          <a:fillRef idx="3">
+            <a:schemeClr val="accent1"/>
+          </a:fillRef>
+          <a:effectRef idx="2">
+            <a:schemeClr val="accent1"/>
+          </a:effectRef>
+          <a:fontRef idx="minor">
+            <a:schemeClr val="lt1"/>
+          </a:fontRef>
+        </p:style>
+        <p:txBody>
+          <a:bodyPr rtlCol="0" anchor="ctr"/>
+          <a:lstStyle/>
+          <a:p>
+            <a:pPr algn="ctr"/>
+          </a:p>
+        </p:txBody>
+      </p:sp>
+      <p:sp>
+        <p:nvSpPr>
+          <p:cNvPr id="20" name="TextBox 19"/>
+          <p:cNvSpPr txBox="1"/>
+          <p:nvPr/>
+        </p:nvSpPr>
+        <p:spPr>
+          <a:xfrm>
+            <a:off x="8540496" y="2240279"/>
+            <a:ext cx="3200400" cy="164592"/>
+          </a:xfrm>
+          <a:prstGeom prst="rect">
+            <a:avLst/>
+          </a:prstGeom>
+          <a:noFill/>
+        </p:spPr>
+        <p:txBody>
+          <a:bodyPr wrap="square">
+            <a:spAutoFit/>
+          </a:bodyPr>
+          <a:lstStyle/>
+          <a:p>
+            <a:pPr algn="l">
+              <a:spcAft>
+                <a:spcPts val="300"/>
+              </a:spcAft>
+            </a:pPr>
+            <a:r>
+              <a:rPr sz="1300" b="1">
+                <a:solidFill>
+                  <a:srgbClr val="0D3B66"/>
+                </a:solidFill>
+                <a:latin typeface="Calibri"/>
+              </a:rPr>
+              <a:t>San Ignacio 500</a:t>
+            </a:r>
+          </a:p>
+        </p:txBody>
+      </p:sp>
+      <p:sp>
+        <p:nvSpPr>
+          <p:cNvPr id="21" name="TextBox 20"/>
+          <p:cNvSpPr txBox="1"/>
+          <p:nvPr/>
+        </p:nvSpPr>
+        <p:spPr>
+          <a:xfrm>
+            <a:off x="8540496" y="2535448"/>
+            <a:ext cx="3200400" cy="237744"/>
+          </a:xfrm>
+          <a:prstGeom prst="rect">
+            <a:avLst/>
+          </a:prstGeom>
+          <a:noFill/>
+        </p:spPr>
+        <p:txBody>
+          <a:bodyPr wrap="square">
+            <a:spAutoFit/>
+          </a:bodyPr>
+          <a:lstStyle/>
+          <a:p>
+            <a:pPr algn="l">
+              <a:spcAft>
+                <a:spcPts val="300"/>
+              </a:spcAft>
+            </a:pPr>
+            <a:r>
+              <a:rPr sz="1600" b="1">
+                <a:solidFill>
+                  <a:srgbClr val="0D3B66"/>
+                </a:solidFill>
+                <a:latin typeface="Calibri"/>
+              </a:rPr>
+              <a:t>4.067 m³    79 %</a:t>
+            </a:r>
+          </a:p>
+        </p:txBody>
+      </p:sp>
+      <p:sp>
+        <p:nvSpPr>
+          <p:cNvPr id="22" name="Rounded Rectangle 21"/>
+          <p:cNvSpPr/>
+          <p:nvPr/>
+        </p:nvSpPr>
+        <p:spPr>
+          <a:xfrm>
+            <a:off x="8430768" y="3877056"/>
             <a:ext cx="3419856" cy="768096"/>
           </a:xfrm>
           <a:prstGeom prst="roundRect">
@@ -11490,132 +14046,7 @@
       </p:sp>
       <p:sp>
         <p:nvSpPr>
-          <p:cNvPr id="19" name="TextBox 18"/>
-          <p:cNvSpPr txBox="1"/>
-          <p:nvPr/>
-        </p:nvSpPr>
-        <p:spPr>
-          <a:xfrm>
-            <a:off x="8540496" y="2240279"/>
-            <a:ext cx="3200400" cy="164592"/>
-          </a:xfrm>
-          <a:prstGeom prst="rect">
-            <a:avLst/>
-          </a:prstGeom>
-          <a:noFill/>
-        </p:spPr>
-        <p:txBody>
-          <a:bodyPr wrap="square">
-            <a:spAutoFit/>
-          </a:bodyPr>
-          <a:lstStyle/>
-          <a:p>
-            <a:pPr algn="l">
-              <a:spcAft>
-                <a:spcPts val="300"/>
-              </a:spcAft>
-            </a:pPr>
-            <a:r>
-              <a:rPr sz="1300" b="1">
-                <a:solidFill>
-                  <a:srgbClr val="C45C26"/>
-                </a:solidFill>
-                <a:latin typeface="Calibri"/>
-              </a:rPr>
-              <a:t>Matriz 1° piso</a:t>
-            </a:r>
-          </a:p>
-        </p:txBody>
-      </p:sp>
-      <p:sp>
-        <p:nvSpPr>
-          <p:cNvPr id="20" name="TextBox 19"/>
-          <p:cNvSpPr txBox="1"/>
-          <p:nvPr/>
-        </p:nvSpPr>
-        <p:spPr>
-          <a:xfrm>
-            <a:off x="8540496" y="2535448"/>
-            <a:ext cx="3200400" cy="237744"/>
-          </a:xfrm>
-          <a:prstGeom prst="rect">
-            <a:avLst/>
-          </a:prstGeom>
-          <a:noFill/>
-        </p:spPr>
-        <p:txBody>
-          <a:bodyPr wrap="square">
-            <a:spAutoFit/>
-          </a:bodyPr>
-          <a:lstStyle/>
-          <a:p>
-            <a:pPr algn="l">
-              <a:spcAft>
-                <a:spcPts val="300"/>
-              </a:spcAft>
-            </a:pPr>
-            <a:r>
-              <a:rPr sz="1600" b="1">
-                <a:solidFill>
-                  <a:srgbClr val="0D3B66"/>
-                </a:solidFill>
-                <a:latin typeface="Calibri"/>
-              </a:rPr>
-              <a:t>1.724 m³    73 %</a:t>
-            </a:r>
-          </a:p>
-        </p:txBody>
-      </p:sp>
-      <p:sp>
-        <p:nvSpPr>
-          <p:cNvPr id="21" name="Rounded Rectangle 20"/>
-          <p:cNvSpPr/>
-          <p:nvPr/>
-        </p:nvSpPr>
-        <p:spPr>
-          <a:xfrm>
-            <a:off x="8430768" y="3877056"/>
-            <a:ext cx="3419856" cy="768096"/>
-          </a:xfrm>
-          <a:prstGeom prst="roundRect">
-            <a:avLst>
-              <a:gd name="adj" fmla="val 8000"/>
-            </a:avLst>
-          </a:prstGeom>
-          <a:solidFill>
-            <a:srgbClr val="F5F7FA"/>
-          </a:solidFill>
-          <a:ln w="6350">
-            <a:solidFill>
-              <a:srgbClr val="C9A227"/>
-            </a:solidFill>
-          </a:ln>
-        </p:spPr>
-        <p:style>
-          <a:lnRef idx="1">
-            <a:schemeClr val="accent1"/>
-          </a:lnRef>
-          <a:fillRef idx="3">
-            <a:schemeClr val="accent1"/>
-          </a:fillRef>
-          <a:effectRef idx="2">
-            <a:schemeClr val="accent1"/>
-          </a:effectRef>
-          <a:fontRef idx="minor">
-            <a:schemeClr val="lt1"/>
-          </a:fontRef>
-        </p:style>
-        <p:txBody>
-          <a:bodyPr rtlCol="0" anchor="ctr"/>
-          <a:lstStyle/>
-          <a:p>
-            <a:pPr algn="ctr"/>
-          </a:p>
-        </p:txBody>
-      </p:sp>
-      <p:sp>
-        <p:nvSpPr>
-          <p:cNvPr id="22" name="TextBox 21"/>
+          <p:cNvPr id="23" name="TextBox 22"/>
           <p:cNvSpPr txBox="1"/>
           <p:nvPr/>
         </p:nvSpPr>
@@ -11643,18 +14074,18 @@
             <a:r>
               <a:rPr sz="1300" b="1">
                 <a:solidFill>
-                  <a:srgbClr val="C9A227"/>
-                </a:solidFill>
-                <a:latin typeface="Calibri"/>
-              </a:rPr>
-              <a:t>Anillo Plaza</a:t>
-            </a:r>
-          </a:p>
-        </p:txBody>
-      </p:sp>
-      <p:sp>
-        <p:nvSpPr>
-          <p:cNvPr id="23" name="TextBox 22"/>
+                  <a:srgbClr val="C45C26"/>
+                </a:solidFill>
+                <a:latin typeface="Calibri"/>
+              </a:rPr>
+              <a:t>San Ignacio 300</a:t>
+            </a:r>
+          </a:p>
+        </p:txBody>
+      </p:sp>
+      <p:sp>
+        <p:nvSpPr>
+          <p:cNvPr id="24" name="TextBox 23"/>
           <p:cNvSpPr txBox="1"/>
           <p:nvPr/>
         </p:nvSpPr>
@@ -11686,14 +14117,14 @@
                 </a:solidFill>
                 <a:latin typeface="Calibri"/>
               </a:rPr>
-              <a:t>647 m³    27 %</a:t>
-            </a:r>
-          </a:p>
-        </p:txBody>
-      </p:sp>
-      <p:sp>
-        <p:nvSpPr>
-          <p:cNvPr id="24" name="Rounded Rectangle 23"/>
+              <a:t>1.049 m³    21 %</a:t>
+            </a:r>
+          </a:p>
+        </p:txBody>
+      </p:sp>
+      <p:sp>
+        <p:nvSpPr>
+          <p:cNvPr id="25" name="Rounded Rectangle 24"/>
           <p:cNvSpPr/>
           <p:nvPr/>
         </p:nvSpPr>
@@ -11740,7 +14171,7 @@
       </p:sp>
       <p:sp>
         <p:nvSpPr>
-          <p:cNvPr id="25" name="TextBox 24"/>
+          <p:cNvPr id="26" name="TextBox 25"/>
           <p:cNvSpPr txBox="1"/>
           <p:nvPr/>
         </p:nvSpPr>
@@ -11772,14 +14203,14 @@
                 </a:solidFill>
                 <a:latin typeface="Calibri"/>
               </a:rPr>
-              <a:t>Recepción 29/10/2025 / relocalizado 16/01/2026  ·  Capacitación 20/11/2025  ·  Tamara Martínez  ·  Tomás Saba  ·  Sebastián Araneda</a:t>
-            </a:r>
-          </a:p>
-        </p:txBody>
-      </p:sp>
-      <p:sp>
-        <p:nvSpPr>
-          <p:cNvPr id="26" name="TextBox 25"/>
+              <a:t>Recepción 18/11/2025  ·  Capacitación 11/12/2025  ·  Aliro Cortés  ·  Tomás Saba  ·  Sebastián Araneda</a:t>
+            </a:r>
+          </a:p>
+        </p:txBody>
+      </p:sp>
+      <p:sp>
+        <p:nvSpPr>
+          <p:cNvPr id="27" name="TextBox 26"/>
           <p:cNvSpPr txBox="1"/>
           <p:nvPr/>
         </p:nvSpPr>
@@ -11811,7 +14242,7 @@
                 </a:solidFill>
                 <a:latin typeface="Calibri"/>
               </a:rPr>
-              <a:t>Mayo 1.015   ·   Junio 2.116   ·   Julio 2.371   ·   Agosto 1–17: 1.217   ·   proy. ago 2.218 m³.</a:t>
+              <a:t>Mayo 1.565   ·   Junio 1.762   ·   Julio 5.116   ·   Agosto 1–17: 2.686   ·   proy. ago 4.899 m³.</a:t>
             </a:r>
           </a:p>
           <a:p>
@@ -11827,7 +14258,7 @@
                 </a:solidFill>
                 <a:latin typeface="Calibri"/>
               </a:rPr>
-              <a:t>Matriz 1° piso y Anillo Plaza. Relocalizado en enero 2026.</a:t>
+              <a:t>San Ignacio 500 es el mayor volumen; 300 queda en monitoreo.</a:t>
             </a:r>
           </a:p>
         </p:txBody>
@@ -11994,7 +14425,7 @@
                 </a:solidFill>
                 <a:latin typeface="Calibri"/>
               </a:rPr>
-              <a:t>CUR  ·  Equipos y consumo</a:t>
+              <a:t>AEB  ·  Equipos y consumo</a:t>
             </a:r>
           </a:p>
         </p:txBody>
@@ -12033,7 +14464,7 @@
                 </a:solidFill>
                 <a:latin typeface="Calibri"/>
               </a:rPr>
-              <a:t>Arauco Curauma   |   2 puntos WES   |   01/05/2026 – 17/08/2026</a:t>
+              <a:t>Arauco El Bosque   |   2 puntos WES   |   01/05/2026 – 17/08/2026</a:t>
             </a:r>
           </a:p>
         </p:txBody>
@@ -12059,7 +14490,7 @@
           </a:solidFill>
           <a:ln w="6350">
             <a:solidFill>
-              <a:srgbClr val="5A8C6E"/>
+              <a:srgbClr val="C45C26"/>
             </a:solidFill>
           </a:ln>
         </p:spPr>
@@ -12119,7 +14550,7 @@
                 </a:solidFill>
                 <a:latin typeface="Calibri"/>
               </a:rPr>
-              <a:t>000025-38</a:t>
+              <a:t>000025-11</a:t>
             </a:r>
           </a:p>
         </p:txBody>
@@ -12158,7 +14589,7 @@
                 </a:solidFill>
                 <a:latin typeface="Calibri"/>
               </a:rPr>
-              <a:t>Anillo Norte</a:t>
+              <a:t>Matriz 1° piso</a:t>
             </a:r>
           </a:p>
         </p:txBody>
@@ -12184,7 +14615,7 @@
           </a:solidFill>
           <a:ln w="6350">
             <a:solidFill>
-              <a:srgbClr val="7BA3C9"/>
+              <a:srgbClr val="C9A227"/>
             </a:solidFill>
           </a:ln>
         </p:spPr>
@@ -12244,7 +14675,7 @@
                 </a:solidFill>
                 <a:latin typeface="Calibri"/>
               </a:rPr>
-              <a:t>000025-37</a:t>
+              <a:t>000025-12</a:t>
             </a:r>
           </a:p>
         </p:txBody>
@@ -12283,7 +14714,7 @@
                 </a:solidFill>
                 <a:latin typeface="Calibri"/>
               </a:rPr>
-              <a:t>Anillo Sur</a:t>
+              <a:t>Anillo Plaza</a:t>
             </a:r>
           </a:p>
         </p:txBody>
@@ -12335,7 +14766,7 @@
       </p:sp>
       <p:pic>
         <p:nvPicPr>
-          <p:cNvPr id="14" name="Picture 13" descr="cur_mensual_may_ago.png"/>
+          <p:cNvPr id="14" name="Picture 13" descr="aeb_mensual_may_ago.png"/>
           <p:cNvPicPr>
             <a:picLocks noChangeAspect="1"/>
           </p:cNvPicPr>
@@ -12477,7 +14908,7 @@
                 </a:solidFill>
                 <a:latin typeface="Calibri"/>
               </a:rPr>
-              <a:t>El recinto sumó 618 m³</a:t>
+              <a:t>El recinto sumó 2.371 m³</a:t>
             </a:r>
           </a:p>
         </p:txBody>
@@ -12503,7 +14934,7 @@
           </a:solidFill>
           <a:ln w="6350">
             <a:solidFill>
-              <a:srgbClr val="7BA3C9"/>
+              <a:srgbClr val="C45C26"/>
             </a:solidFill>
           </a:ln>
         </p:spPr>
@@ -12559,11 +14990,11 @@
             <a:r>
               <a:rPr sz="1300" b="1">
                 <a:solidFill>
-                  <a:srgbClr val="7BA3C9"/>
-                </a:solidFill>
-                <a:latin typeface="Calibri"/>
-              </a:rPr>
-              <a:t>Anillo Sur</a:t>
+                  <a:srgbClr val="C45C26"/>
+                </a:solidFill>
+                <a:latin typeface="Calibri"/>
+              </a:rPr>
+              <a:t>Matriz 1° piso</a:t>
             </a:r>
           </a:p>
         </p:txBody>
@@ -12602,7 +15033,7 @@
                 </a:solidFill>
                 <a:latin typeface="Calibri"/>
               </a:rPr>
-              <a:t>332 m³    54 %</a:t>
+              <a:t>1.724 m³    73 %</a:t>
             </a:r>
           </a:p>
         </p:txBody>
@@ -12628,7 +15059,7 @@
           </a:solidFill>
           <a:ln w="6350">
             <a:solidFill>
-              <a:srgbClr val="5A8C6E"/>
+              <a:srgbClr val="C9A227"/>
             </a:solidFill>
           </a:ln>
         </p:spPr>
@@ -12684,11 +15115,11 @@
             <a:r>
               <a:rPr sz="1300" b="1">
                 <a:solidFill>
-                  <a:srgbClr val="5A8C6E"/>
-                </a:solidFill>
-                <a:latin typeface="Calibri"/>
-              </a:rPr>
-              <a:t>Anillo Norte</a:t>
+                  <a:srgbClr val="C9A227"/>
+                </a:solidFill>
+                <a:latin typeface="Calibri"/>
+              </a:rPr>
+              <a:t>Anillo Plaza</a:t>
             </a:r>
           </a:p>
         </p:txBody>
@@ -12727,7 +15158,7 @@
                 </a:solidFill>
                 <a:latin typeface="Calibri"/>
               </a:rPr>
-              <a:t>287 m³    46 %</a:t>
+              <a:t>647 m³    27 %</a:t>
             </a:r>
           </a:p>
         </p:txBody>
@@ -12813,7 +15244,7 @@
                 </a:solidFill>
                 <a:latin typeface="Calibri"/>
               </a:rPr>
-              <a:t>Recepción 29/04/2026 (Anillo Norte / Anillo Sur)  ·  Capacitación 12/12/2025  ·  Joceline Lazo  ·  Constanza Vilches</a:t>
+              <a:t>Recepción 29/10/2025 / relocalizado 16/01/2026  ·  Capacitación 20/11/2025  ·  Tamara Martínez  ·  Tomás Saba  ·  Sebastián Araneda</a:t>
             </a:r>
           </a:p>
         </p:txBody>
@@ -12852,7 +15283,7 @@
                 </a:solidFill>
                 <a:latin typeface="Calibri"/>
               </a:rPr>
-              <a:t>Junio 664   ·   Julio 618   ·   Agosto 1–17: 366   ·   proy. ago 667 m³.</a:t>
+              <a:t>Mayo 1.015   ·   Junio 2.116   ·   Julio 2.371   ·   Agosto 1–17: 1.217   ·   proy. ago 2.218 m³.</a:t>
             </a:r>
           </a:p>
           <a:p>
@@ -12868,7 +15299,7 @@
                 </a:solidFill>
                 <a:latin typeface="Calibri"/>
               </a:rPr>
-              <a:t>Cambio de monitoreo: se dejó Baños y Matriz Principal. Anillo Norte y Sur con lectura correcta desde el 19/05 (mayo no se grafica).</a:t>
+              <a:t>Matriz 1° piso y Anillo Plaza. Relocalizado en enero 2026.</a:t>
             </a:r>
           </a:p>
         </p:txBody>
@@ -13035,7 +15466,7 @@
                 </a:solidFill>
                 <a:latin typeface="Calibri"/>
               </a:rPr>
-              <a:t>PAK  ·  Equipos y consumo</a:t>
+              <a:t>CUR  ·  Equipos y consumo</a:t>
             </a:r>
           </a:p>
         </p:txBody>
@@ -13074,7 +15505,7 @@
                 </a:solidFill>
                 <a:latin typeface="Calibri"/>
               </a:rPr>
-              <a:t>Parque Arauco Kennedy   |   10 puntos WES   |   julio = cabecera (sin 27, 35 y 36)   |   01/05/2026 – 17/08/2026</a:t>
+              <a:t>Arauco Curauma   |   2 puntos WES   |   01/05/2026 – 17/08/2026</a:t>
             </a:r>
           </a:p>
         </p:txBody>
@@ -13088,7 +15519,7 @@
         <p:spPr>
           <a:xfrm>
             <a:off x="201168" y="1024128"/>
-            <a:ext cx="2286000" cy="621792"/>
+            <a:ext cx="5861304" cy="658368"/>
           </a:xfrm>
           <a:prstGeom prst="roundRect">
             <a:avLst>
@@ -13100,7 +15531,7 @@
           </a:solidFill>
           <a:ln w="6350">
             <a:solidFill>
-              <a:srgbClr val="8C5A5A"/>
+              <a:srgbClr val="5A8C6E"/>
             </a:solidFill>
           </a:ln>
         </p:spPr>
@@ -13135,32 +15566,32 @@
         <p:spPr>
           <a:xfrm>
             <a:off x="274320" y="1060704"/>
-            <a:ext cx="2157984" cy="146304"/>
-          </a:xfrm>
-          <a:prstGeom prst="rect">
-            <a:avLst/>
-          </a:prstGeom>
-          <a:noFill/>
-        </p:spPr>
-        <p:txBody>
-          <a:bodyPr wrap="square">
-            <a:spAutoFit/>
-          </a:bodyPr>
-          <a:lstStyle/>
-          <a:p>
-            <a:pPr algn="l">
-              <a:spcAft>
-                <a:spcPts val="300"/>
-              </a:spcAft>
-            </a:pPr>
-            <a:r>
-              <a:rPr sz="900" b="1">
+            <a:ext cx="5733288" cy="146304"/>
+          </a:xfrm>
+          <a:prstGeom prst="rect">
+            <a:avLst/>
+          </a:prstGeom>
+          <a:noFill/>
+        </p:spPr>
+        <p:txBody>
+          <a:bodyPr wrap="square">
+            <a:spAutoFit/>
+          </a:bodyPr>
+          <a:lstStyle/>
+          <a:p>
+            <a:pPr algn="l">
+              <a:spcAft>
+                <a:spcPts val="300"/>
+              </a:spcAft>
+            </a:pPr>
+            <a:r>
+              <a:rPr sz="1000" b="1">
                 <a:solidFill>
                   <a:srgbClr val="C9A227"/>
                 </a:solidFill>
                 <a:latin typeface="Calibri"/>
               </a:rPr>
-              <a:t>000025-20</a:t>
+              <a:t>000025-38</a:t>
             </a:r>
           </a:p>
         </p:txBody>
@@ -13173,33 +15604,33 @@
         </p:nvSpPr>
         <p:spPr>
           <a:xfrm>
-            <a:off x="274320" y="1225296"/>
-            <a:ext cx="2157984" cy="201168"/>
-          </a:xfrm>
-          <a:prstGeom prst="rect">
-            <a:avLst/>
-          </a:prstGeom>
-          <a:noFill/>
-        </p:spPr>
-        <p:txBody>
-          <a:bodyPr wrap="square">
-            <a:spAutoFit/>
-          </a:bodyPr>
-          <a:lstStyle/>
-          <a:p>
-            <a:pPr algn="l">
-              <a:spcAft>
-                <a:spcPts val="300"/>
-              </a:spcAft>
-            </a:pPr>
-            <a:r>
-              <a:rPr sz="1100" b="1">
+            <a:off x="274320" y="1243584"/>
+            <a:ext cx="5733288" cy="201168"/>
+          </a:xfrm>
+          <a:prstGeom prst="rect">
+            <a:avLst/>
+          </a:prstGeom>
+          <a:noFill/>
+        </p:spPr>
+        <p:txBody>
+          <a:bodyPr wrap="square">
+            <a:spAutoFit/>
+          </a:bodyPr>
+          <a:lstStyle/>
+          <a:p>
+            <a:pPr algn="l">
+              <a:spcAft>
+                <a:spcPts val="300"/>
+              </a:spcAft>
+            </a:pPr>
+            <a:r>
+              <a:rPr sz="1200" b="1">
                 <a:solidFill>
                   <a:srgbClr val="0D3B66"/>
                 </a:solidFill>
                 <a:latin typeface="Calibri"/>
               </a:rPr>
-              <a:t>Matriz Andén</a:t>
+              <a:t>Anillo Norte</a:t>
             </a:r>
           </a:p>
         </p:txBody>
@@ -13212,8 +15643,8 @@
         </p:nvSpPr>
         <p:spPr>
           <a:xfrm>
-            <a:off x="2578608" y="1024128"/>
-            <a:ext cx="2286000" cy="621792"/>
+            <a:off x="6135624" y="1024128"/>
+            <a:ext cx="5861304" cy="658368"/>
           </a:xfrm>
           <a:prstGeom prst="roundRect">
             <a:avLst>
@@ -13225,7 +15656,7 @@
           </a:solidFill>
           <a:ln w="6350">
             <a:solidFill>
-              <a:srgbClr val="46648C"/>
+              <a:srgbClr val="7BA3C9"/>
             </a:solidFill>
           </a:ln>
         </p:spPr>
@@ -13259,33 +15690,33 @@
         </p:nvSpPr>
         <p:spPr>
           <a:xfrm>
-            <a:off x="2651760" y="1060704"/>
-            <a:ext cx="2157984" cy="146304"/>
-          </a:xfrm>
-          <a:prstGeom prst="rect">
-            <a:avLst/>
-          </a:prstGeom>
-          <a:noFill/>
-        </p:spPr>
-        <p:txBody>
-          <a:bodyPr wrap="square">
-            <a:spAutoFit/>
-          </a:bodyPr>
-          <a:lstStyle/>
-          <a:p>
-            <a:pPr algn="l">
-              <a:spcAft>
-                <a:spcPts val="300"/>
-              </a:spcAft>
-            </a:pPr>
-            <a:r>
-              <a:rPr sz="900" b="1">
+            <a:off x="6208776" y="1060704"/>
+            <a:ext cx="5733288" cy="146304"/>
+          </a:xfrm>
+          <a:prstGeom prst="rect">
+            <a:avLst/>
+          </a:prstGeom>
+          <a:noFill/>
+        </p:spPr>
+        <p:txBody>
+          <a:bodyPr wrap="square">
+            <a:spAutoFit/>
+          </a:bodyPr>
+          <a:lstStyle/>
+          <a:p>
+            <a:pPr algn="l">
+              <a:spcAft>
+                <a:spcPts val="300"/>
+              </a:spcAft>
+            </a:pPr>
+            <a:r>
+              <a:rPr sz="1000" b="1">
                 <a:solidFill>
                   <a:srgbClr val="C9A227"/>
                 </a:solidFill>
                 <a:latin typeface="Calibri"/>
               </a:rPr>
-              <a:t>000025-21</a:t>
+              <a:t>000025-37</a:t>
             </a:r>
           </a:p>
         </p:txBody>
@@ -13298,33 +15729,33 @@
         </p:nvSpPr>
         <p:spPr>
           <a:xfrm>
-            <a:off x="2651760" y="1225296"/>
-            <a:ext cx="2157984" cy="201168"/>
-          </a:xfrm>
-          <a:prstGeom prst="rect">
-            <a:avLst/>
-          </a:prstGeom>
-          <a:noFill/>
-        </p:spPr>
-        <p:txBody>
-          <a:bodyPr wrap="square">
-            <a:spAutoFit/>
-          </a:bodyPr>
-          <a:lstStyle/>
-          <a:p>
-            <a:pPr algn="l">
-              <a:spcAft>
-                <a:spcPts val="300"/>
-              </a:spcAft>
-            </a:pPr>
-            <a:r>
-              <a:rPr sz="1100" b="1">
+            <a:off x="6208776" y="1243584"/>
+            <a:ext cx="5733288" cy="201168"/>
+          </a:xfrm>
+          <a:prstGeom prst="rect">
+            <a:avLst/>
+          </a:prstGeom>
+          <a:noFill/>
+        </p:spPr>
+        <p:txBody>
+          <a:bodyPr wrap="square">
+            <a:spAutoFit/>
+          </a:bodyPr>
+          <a:lstStyle/>
+          <a:p>
+            <a:pPr algn="l">
+              <a:spcAft>
+                <a:spcPts val="300"/>
+              </a:spcAft>
+            </a:pPr>
+            <a:r>
+              <a:rPr sz="1200" b="1">
                 <a:solidFill>
                   <a:srgbClr val="0D3B66"/>
                 </a:solidFill>
                 <a:latin typeface="Calibri"/>
               </a:rPr>
-              <a:t>Locales Gast.</a:t>
+              <a:t>Anillo Sur</a:t>
             </a:r>
           </a:p>
         </p:txBody>
@@ -13337,8 +15768,8 @@
         </p:nvSpPr>
         <p:spPr>
           <a:xfrm>
-            <a:off x="4956048" y="1024128"/>
-            <a:ext cx="2286000" cy="621792"/>
+            <a:off x="201168" y="1792224"/>
+            <a:ext cx="7973568" cy="3822191"/>
           </a:xfrm>
           <a:prstGeom prst="roundRect">
             <a:avLst>
@@ -13348,10 +15779,8 @@
           <a:solidFill>
             <a:srgbClr val="F5F7FA"/>
           </a:solidFill>
-          <a:ln w="6350">
-            <a:solidFill>
-              <a:srgbClr val="A0783C"/>
-            </a:solidFill>
+          <a:ln>
+            <a:noFill/>
           </a:ln>
         </p:spPr>
         <p:style>
@@ -13376,133 +15805,40 @@
           </a:p>
         </p:txBody>
       </p:sp>
-      <p:sp>
-        <p:nvSpPr>
-          <p:cNvPr id="14" name="TextBox 13"/>
-          <p:cNvSpPr txBox="1"/>
-          <p:nvPr/>
-        </p:nvSpPr>
-        <p:spPr>
-          <a:xfrm>
-            <a:off x="5029200" y="1060704"/>
-            <a:ext cx="2157984" cy="146304"/>
-          </a:xfrm>
-          <a:prstGeom prst="rect">
-            <a:avLst/>
-          </a:prstGeom>
-          <a:noFill/>
-        </p:spPr>
-        <p:txBody>
-          <a:bodyPr wrap="square">
-            <a:spAutoFit/>
-          </a:bodyPr>
-          <a:lstStyle/>
-          <a:p>
-            <a:pPr algn="l">
-              <a:spcAft>
-                <a:spcPts val="300"/>
-              </a:spcAft>
-            </a:pPr>
-            <a:r>
-              <a:rPr sz="900" b="1">
-                <a:solidFill>
-                  <a:srgbClr val="C9A227"/>
-                </a:solidFill>
-                <a:latin typeface="Calibri"/>
-              </a:rPr>
-              <a:t>000025-22</a:t>
-            </a:r>
-          </a:p>
-        </p:txBody>
-      </p:sp>
-      <p:sp>
-        <p:nvSpPr>
-          <p:cNvPr id="15" name="TextBox 14"/>
-          <p:cNvSpPr txBox="1"/>
-          <p:nvPr/>
-        </p:nvSpPr>
-        <p:spPr>
-          <a:xfrm>
-            <a:off x="5029200" y="1225296"/>
-            <a:ext cx="2157984" cy="201168"/>
-          </a:xfrm>
-          <a:prstGeom prst="rect">
-            <a:avLst/>
-          </a:prstGeom>
-          <a:noFill/>
-        </p:spPr>
-        <p:txBody>
-          <a:bodyPr wrap="square">
-            <a:spAutoFit/>
-          </a:bodyPr>
-          <a:lstStyle/>
-          <a:p>
-            <a:pPr algn="l">
-              <a:spcAft>
-                <a:spcPts val="300"/>
-              </a:spcAft>
-            </a:pPr>
-            <a:r>
-              <a:rPr sz="1100" b="1">
-                <a:solidFill>
-                  <a:srgbClr val="0D3B66"/>
-                </a:solidFill>
-                <a:latin typeface="Calibri"/>
-              </a:rPr>
-              <a:t>Sandía Antigua</a:t>
-            </a:r>
-          </a:p>
-        </p:txBody>
-      </p:sp>
-      <p:sp>
-        <p:nvSpPr>
-          <p:cNvPr id="16" name="TextBox 15"/>
-          <p:cNvSpPr txBox="1"/>
-          <p:nvPr/>
-        </p:nvSpPr>
-        <p:spPr>
-          <a:xfrm>
-            <a:off x="5029200" y="1444752"/>
-            <a:ext cx="2157984" cy="164592"/>
-          </a:xfrm>
-          <a:prstGeom prst="rect">
-            <a:avLst/>
-          </a:prstGeom>
-          <a:noFill/>
-        </p:spPr>
-        <p:txBody>
-          <a:bodyPr wrap="square">
-            <a:spAutoFit/>
-          </a:bodyPr>
-          <a:lstStyle/>
-          <a:p>
-            <a:pPr algn="l">
-              <a:spcAft>
-                <a:spcPts val="300"/>
-              </a:spcAft>
-            </a:pPr>
-            <a:r>
-              <a:rPr sz="800" b="0">
-                <a:solidFill>
-                  <a:srgbClr val="5A5A5A"/>
-                </a:solidFill>
-                <a:latin typeface="Calibri"/>
-              </a:rPr>
-              <a:t>alimenta 27</a:t>
-            </a:r>
-          </a:p>
-        </p:txBody>
-      </p:sp>
-      <p:sp>
-        <p:nvSpPr>
-          <p:cNvPr id="17" name="Rounded Rectangle 16"/>
+      <p:pic>
+        <p:nvPicPr>
+          <p:cNvPr id="14" name="Picture 13" descr="cur_mensual_may_ago.png"/>
+          <p:cNvPicPr>
+            <a:picLocks noChangeAspect="1"/>
+          </p:cNvPicPr>
+          <p:nvPr/>
+        </p:nvPicPr>
+        <p:blipFill>
+          <a:blip r:embed="rId3"/>
+          <a:stretch>
+            <a:fillRect/>
+          </a:stretch>
+        </p:blipFill>
+        <p:spPr>
+          <a:xfrm>
+            <a:off x="274320" y="2031551"/>
+            <a:ext cx="7827264" cy="3343536"/>
+          </a:xfrm>
+          <a:prstGeom prst="rect">
+            <a:avLst/>
+          </a:prstGeom>
+        </p:spPr>
+      </p:pic>
+      <p:sp>
+        <p:nvSpPr>
+          <p:cNvPr id="15" name="Rounded Rectangle 14"/>
           <p:cNvSpPr/>
           <p:nvPr/>
         </p:nvSpPr>
         <p:spPr>
           <a:xfrm>
-            <a:off x="7333488" y="1024128"/>
-            <a:ext cx="2286000" cy="621792"/>
+            <a:off x="8302752" y="1792224"/>
+            <a:ext cx="3675887" cy="3822191"/>
           </a:xfrm>
           <a:prstGeom prst="roundRect">
             <a:avLst>
@@ -13510,7 +15846,7 @@
             </a:avLst>
           </a:prstGeom>
           <a:solidFill>
-            <a:srgbClr val="F5F7FA"/>
+            <a:srgbClr val="FFFFFF"/>
           </a:solidFill>
           <a:ln w="6350">
             <a:solidFill>
@@ -13542,53 +15878,14 @@
       </p:sp>
       <p:sp>
         <p:nvSpPr>
-          <p:cNvPr id="18" name="TextBox 17"/>
-          <p:cNvSpPr txBox="1"/>
-          <p:nvPr/>
-        </p:nvSpPr>
-        <p:spPr>
-          <a:xfrm>
-            <a:off x="7406640" y="1060704"/>
-            <a:ext cx="2157984" cy="146304"/>
-          </a:xfrm>
-          <a:prstGeom prst="rect">
-            <a:avLst/>
-          </a:prstGeom>
-          <a:noFill/>
-        </p:spPr>
-        <p:txBody>
-          <a:bodyPr wrap="square">
-            <a:spAutoFit/>
-          </a:bodyPr>
-          <a:lstStyle/>
-          <a:p>
-            <a:pPr algn="l">
-              <a:spcAft>
-                <a:spcPts val="300"/>
-              </a:spcAft>
-            </a:pPr>
-            <a:r>
-              <a:rPr sz="900" b="1">
-                <a:solidFill>
-                  <a:srgbClr val="C9A227"/>
-                </a:solidFill>
-                <a:latin typeface="Calibri"/>
-              </a:rPr>
-              <a:t>000025-28</a:t>
-            </a:r>
-          </a:p>
-        </p:txBody>
-      </p:sp>
-      <p:sp>
-        <p:nvSpPr>
-          <p:cNvPr id="19" name="TextBox 18"/>
-          <p:cNvSpPr txBox="1"/>
-          <p:nvPr/>
-        </p:nvSpPr>
-        <p:spPr>
-          <a:xfrm>
-            <a:off x="7406640" y="1225296"/>
-            <a:ext cx="2157984" cy="201168"/>
+          <p:cNvPr id="16" name="TextBox 15"/>
+          <p:cNvSpPr txBox="1"/>
+          <p:nvPr/>
+        </p:nvSpPr>
+        <p:spPr>
+          <a:xfrm>
+            <a:off x="8430768" y="1837943"/>
+            <a:ext cx="3419856" cy="164592"/>
           </a:xfrm>
           <a:prstGeom prst="rect">
             <a:avLst/>
@@ -13609,64 +15906,64 @@
             <a:r>
               <a:rPr sz="1100" b="1">
                 <a:solidFill>
-                  <a:srgbClr val="0D3B66"/>
-                </a:solidFill>
-                <a:latin typeface="Calibri"/>
-              </a:rPr>
-              <a:t>Sandía Nueva</a:t>
-            </a:r>
-          </a:p>
-        </p:txBody>
-      </p:sp>
-      <p:sp>
-        <p:nvSpPr>
-          <p:cNvPr id="20" name="TextBox 19"/>
-          <p:cNvSpPr txBox="1"/>
-          <p:nvPr/>
-        </p:nvSpPr>
-        <p:spPr>
-          <a:xfrm>
-            <a:off x="7406640" y="1444752"/>
-            <a:ext cx="2157984" cy="164592"/>
-          </a:xfrm>
-          <a:prstGeom prst="rect">
-            <a:avLst/>
-          </a:prstGeom>
-          <a:noFill/>
-        </p:spPr>
-        <p:txBody>
-          <a:bodyPr wrap="square">
-            <a:spAutoFit/>
-          </a:bodyPr>
-          <a:lstStyle/>
-          <a:p>
-            <a:pPr algn="l">
-              <a:spcAft>
-                <a:spcPts val="300"/>
-              </a:spcAft>
-            </a:pPr>
-            <a:r>
-              <a:rPr sz="800" b="0">
+                  <a:srgbClr val="1F77B4"/>
+                </a:solidFill>
+                <a:latin typeface="Calibri"/>
+              </a:rPr>
+              <a:t>JULIO · último mes cerrado</a:t>
+            </a:r>
+          </a:p>
+        </p:txBody>
+      </p:sp>
+      <p:sp>
+        <p:nvSpPr>
+          <p:cNvPr id="17" name="TextBox 16"/>
+          <p:cNvSpPr txBox="1"/>
+          <p:nvPr/>
+        </p:nvSpPr>
+        <p:spPr>
+          <a:xfrm>
+            <a:off x="8430768" y="2002536"/>
+            <a:ext cx="3419856" cy="201168"/>
+          </a:xfrm>
+          <a:prstGeom prst="rect">
+            <a:avLst/>
+          </a:prstGeom>
+          <a:noFill/>
+        </p:spPr>
+        <p:txBody>
+          <a:bodyPr wrap="square">
+            <a:spAutoFit/>
+          </a:bodyPr>
+          <a:lstStyle/>
+          <a:p>
+            <a:pPr algn="l">
+              <a:spcAft>
+                <a:spcPts val="300"/>
+              </a:spcAft>
+            </a:pPr>
+            <a:r>
+              <a:rPr sz="1200" b="0">
                 <a:solidFill>
                   <a:srgbClr val="5A5A5A"/>
                 </a:solidFill>
                 <a:latin typeface="Calibri"/>
               </a:rPr>
-              <a:t>alimenta 27</a:t>
-            </a:r>
-          </a:p>
-        </p:txBody>
-      </p:sp>
-      <p:sp>
-        <p:nvSpPr>
-          <p:cNvPr id="21" name="Rounded Rectangle 20"/>
+              <a:t>El recinto sumó 618 m³</a:t>
+            </a:r>
+          </a:p>
+        </p:txBody>
+      </p:sp>
+      <p:sp>
+        <p:nvSpPr>
+          <p:cNvPr id="18" name="Rounded Rectangle 17"/>
           <p:cNvSpPr/>
           <p:nvPr/>
         </p:nvSpPr>
         <p:spPr>
           <a:xfrm>
-            <a:off x="9710928" y="1024128"/>
-            <a:ext cx="2286000" cy="621792"/>
+            <a:off x="8430768" y="2212848"/>
+            <a:ext cx="3419856" cy="768096"/>
           </a:xfrm>
           <a:prstGeom prst="roundRect">
             <a:avLst>
@@ -13678,7 +15975,7 @@
           </a:solidFill>
           <a:ln w="6350">
             <a:solidFill>
-              <a:srgbClr val="C45C26"/>
+              <a:srgbClr val="7BA3C9"/>
             </a:solidFill>
           </a:ln>
         </p:spPr>
@@ -13706,92 +16003,92 @@
       </p:sp>
       <p:sp>
         <p:nvSpPr>
-          <p:cNvPr id="22" name="TextBox 21"/>
-          <p:cNvSpPr txBox="1"/>
-          <p:nvPr/>
-        </p:nvSpPr>
-        <p:spPr>
-          <a:xfrm>
-            <a:off x="9784080" y="1060704"/>
-            <a:ext cx="2157984" cy="146304"/>
-          </a:xfrm>
-          <a:prstGeom prst="rect">
-            <a:avLst/>
-          </a:prstGeom>
-          <a:noFill/>
-        </p:spPr>
-        <p:txBody>
-          <a:bodyPr wrap="square">
-            <a:spAutoFit/>
-          </a:bodyPr>
-          <a:lstStyle/>
-          <a:p>
-            <a:pPr algn="l">
-              <a:spcAft>
-                <a:spcPts val="300"/>
-              </a:spcAft>
-            </a:pPr>
-            <a:r>
-              <a:rPr sz="900" b="1">
-                <a:solidFill>
-                  <a:srgbClr val="C9A227"/>
-                </a:solidFill>
-                <a:latin typeface="Calibri"/>
-              </a:rPr>
-              <a:t>000025-29</a:t>
-            </a:r>
-          </a:p>
-        </p:txBody>
-      </p:sp>
-      <p:sp>
-        <p:nvSpPr>
-          <p:cNvPr id="23" name="TextBox 22"/>
-          <p:cNvSpPr txBox="1"/>
-          <p:nvPr/>
-        </p:nvSpPr>
-        <p:spPr>
-          <a:xfrm>
-            <a:off x="9784080" y="1225296"/>
-            <a:ext cx="2157984" cy="201168"/>
-          </a:xfrm>
-          <a:prstGeom prst="rect">
-            <a:avLst/>
-          </a:prstGeom>
-          <a:noFill/>
-        </p:spPr>
-        <p:txBody>
-          <a:bodyPr wrap="square">
-            <a:spAutoFit/>
-          </a:bodyPr>
-          <a:lstStyle/>
-          <a:p>
-            <a:pPr algn="l">
-              <a:spcAft>
-                <a:spcPts val="300"/>
-              </a:spcAft>
-            </a:pPr>
-            <a:r>
-              <a:rPr sz="1100" b="1">
+          <p:cNvPr id="19" name="TextBox 18"/>
+          <p:cNvSpPr txBox="1"/>
+          <p:nvPr/>
+        </p:nvSpPr>
+        <p:spPr>
+          <a:xfrm>
+            <a:off x="8540496" y="2240279"/>
+            <a:ext cx="3200400" cy="164592"/>
+          </a:xfrm>
+          <a:prstGeom prst="rect">
+            <a:avLst/>
+          </a:prstGeom>
+          <a:noFill/>
+        </p:spPr>
+        <p:txBody>
+          <a:bodyPr wrap="square">
+            <a:spAutoFit/>
+          </a:bodyPr>
+          <a:lstStyle/>
+          <a:p>
+            <a:pPr algn="l">
+              <a:spcAft>
+                <a:spcPts val="300"/>
+              </a:spcAft>
+            </a:pPr>
+            <a:r>
+              <a:rPr sz="1300" b="1">
+                <a:solidFill>
+                  <a:srgbClr val="7BA3C9"/>
+                </a:solidFill>
+                <a:latin typeface="Calibri"/>
+              </a:rPr>
+              <a:t>Anillo Sur</a:t>
+            </a:r>
+          </a:p>
+        </p:txBody>
+      </p:sp>
+      <p:sp>
+        <p:nvSpPr>
+          <p:cNvPr id="20" name="TextBox 19"/>
+          <p:cNvSpPr txBox="1"/>
+          <p:nvPr/>
+        </p:nvSpPr>
+        <p:spPr>
+          <a:xfrm>
+            <a:off x="8540496" y="2535448"/>
+            <a:ext cx="3200400" cy="237744"/>
+          </a:xfrm>
+          <a:prstGeom prst="rect">
+            <a:avLst/>
+          </a:prstGeom>
+          <a:noFill/>
+        </p:spPr>
+        <p:txBody>
+          <a:bodyPr wrap="square">
+            <a:spAutoFit/>
+          </a:bodyPr>
+          <a:lstStyle/>
+          <a:p>
+            <a:pPr algn="l">
+              <a:spcAft>
+                <a:spcPts val="300"/>
+              </a:spcAft>
+            </a:pPr>
+            <a:r>
+              <a:rPr sz="1600" b="1">
                 <a:solidFill>
                   <a:srgbClr val="0D3B66"/>
                 </a:solidFill>
                 <a:latin typeface="Calibri"/>
               </a:rPr>
-              <a:t>Restaurante</a:t>
-            </a:r>
-          </a:p>
-        </p:txBody>
-      </p:sp>
-      <p:sp>
-        <p:nvSpPr>
-          <p:cNvPr id="24" name="Rounded Rectangle 23"/>
+              <a:t>332 m³    54 %</a:t>
+            </a:r>
+          </a:p>
+        </p:txBody>
+      </p:sp>
+      <p:sp>
+        <p:nvSpPr>
+          <p:cNvPr id="21" name="Rounded Rectangle 20"/>
           <p:cNvSpPr/>
           <p:nvPr/>
         </p:nvSpPr>
         <p:spPr>
           <a:xfrm>
-            <a:off x="201168" y="1719072"/>
-            <a:ext cx="2286000" cy="621792"/>
+            <a:off x="8430768" y="3877056"/>
+            <a:ext cx="3419856" cy="768096"/>
           </a:xfrm>
           <a:prstGeom prst="roundRect">
             <a:avLst>
@@ -13803,7 +16100,7 @@
           </a:solidFill>
           <a:ln w="6350">
             <a:solidFill>
-              <a:srgbClr val="508282"/>
+              <a:srgbClr val="5A8C6E"/>
             </a:solidFill>
           </a:ln>
         </p:spPr>
@@ -13831,381 +16128,92 @@
       </p:sp>
       <p:sp>
         <p:nvSpPr>
-          <p:cNvPr id="25" name="TextBox 24"/>
-          <p:cNvSpPr txBox="1"/>
-          <p:nvPr/>
-        </p:nvSpPr>
-        <p:spPr>
-          <a:xfrm>
-            <a:off x="274320" y="1755648"/>
-            <a:ext cx="2157984" cy="146304"/>
-          </a:xfrm>
-          <a:prstGeom prst="rect">
-            <a:avLst/>
-          </a:prstGeom>
-          <a:noFill/>
-        </p:spPr>
-        <p:txBody>
-          <a:bodyPr wrap="square">
-            <a:spAutoFit/>
-          </a:bodyPr>
-          <a:lstStyle/>
-          <a:p>
-            <a:pPr algn="l">
-              <a:spcAft>
-                <a:spcPts val="300"/>
-              </a:spcAft>
-            </a:pPr>
-            <a:r>
-              <a:rPr sz="900" b="1">
-                <a:solidFill>
-                  <a:srgbClr val="C9A227"/>
-                </a:solidFill>
-                <a:latin typeface="Calibri"/>
-              </a:rPr>
-              <a:t>000025-23</a:t>
-            </a:r>
-          </a:p>
-        </p:txBody>
-      </p:sp>
-      <p:sp>
-        <p:nvSpPr>
-          <p:cNvPr id="26" name="TextBox 25"/>
-          <p:cNvSpPr txBox="1"/>
-          <p:nvPr/>
-        </p:nvSpPr>
-        <p:spPr>
-          <a:xfrm>
-            <a:off x="274320" y="1920240"/>
-            <a:ext cx="2157984" cy="201168"/>
-          </a:xfrm>
-          <a:prstGeom prst="rect">
-            <a:avLst/>
-          </a:prstGeom>
-          <a:noFill/>
-        </p:spPr>
-        <p:txBody>
-          <a:bodyPr wrap="square">
-            <a:spAutoFit/>
-          </a:bodyPr>
-          <a:lstStyle/>
-          <a:p>
-            <a:pPr algn="l">
-              <a:spcAft>
-                <a:spcPts val="300"/>
-              </a:spcAft>
-            </a:pPr>
-            <a:r>
-              <a:rPr sz="1100" b="1">
+          <p:cNvPr id="22" name="TextBox 21"/>
+          <p:cNvSpPr txBox="1"/>
+          <p:nvPr/>
+        </p:nvSpPr>
+        <p:spPr>
+          <a:xfrm>
+            <a:off x="8540496" y="3904488"/>
+            <a:ext cx="3200400" cy="164592"/>
+          </a:xfrm>
+          <a:prstGeom prst="rect">
+            <a:avLst/>
+          </a:prstGeom>
+          <a:noFill/>
+        </p:spPr>
+        <p:txBody>
+          <a:bodyPr wrap="square">
+            <a:spAutoFit/>
+          </a:bodyPr>
+          <a:lstStyle/>
+          <a:p>
+            <a:pPr algn="l">
+              <a:spcAft>
+                <a:spcPts val="300"/>
+              </a:spcAft>
+            </a:pPr>
+            <a:r>
+              <a:rPr sz="1300" b="1">
+                <a:solidFill>
+                  <a:srgbClr val="5A8C6E"/>
+                </a:solidFill>
+                <a:latin typeface="Calibri"/>
+              </a:rPr>
+              <a:t>Anillo Norte</a:t>
+            </a:r>
+          </a:p>
+        </p:txBody>
+      </p:sp>
+      <p:sp>
+        <p:nvSpPr>
+          <p:cNvPr id="23" name="TextBox 22"/>
+          <p:cNvSpPr txBox="1"/>
+          <p:nvPr/>
+        </p:nvSpPr>
+        <p:spPr>
+          <a:xfrm>
+            <a:off x="8540496" y="4199656"/>
+            <a:ext cx="3200400" cy="237744"/>
+          </a:xfrm>
+          <a:prstGeom prst="rect">
+            <a:avLst/>
+          </a:prstGeom>
+          <a:noFill/>
+        </p:spPr>
+        <p:txBody>
+          <a:bodyPr wrap="square">
+            <a:spAutoFit/>
+          </a:bodyPr>
+          <a:lstStyle/>
+          <a:p>
+            <a:pPr algn="l">
+              <a:spcAft>
+                <a:spcPts val="300"/>
+              </a:spcAft>
+            </a:pPr>
+            <a:r>
+              <a:rPr sz="1600" b="1">
                 <a:solidFill>
                   <a:srgbClr val="0D3B66"/>
                 </a:solidFill>
                 <a:latin typeface="Calibri"/>
               </a:rPr>
-              <a:t>Pileta</a:t>
-            </a:r>
-          </a:p>
-        </p:txBody>
-      </p:sp>
-      <p:sp>
-        <p:nvSpPr>
-          <p:cNvPr id="27" name="Rounded Rectangle 26"/>
+              <a:t>287 m³    46 %</a:t>
+            </a:r>
+          </a:p>
+        </p:txBody>
+      </p:sp>
+      <p:sp>
+        <p:nvSpPr>
+          <p:cNvPr id="24" name="Rounded Rectangle 23"/>
           <p:cNvSpPr/>
           <p:nvPr/>
         </p:nvSpPr>
         <p:spPr>
           <a:xfrm>
-            <a:off x="2578608" y="1719072"/>
-            <a:ext cx="2286000" cy="621792"/>
-          </a:xfrm>
-          <a:prstGeom prst="roundRect">
-            <a:avLst>
-              <a:gd name="adj" fmla="val 8000"/>
-            </a:avLst>
-          </a:prstGeom>
-          <a:solidFill>
-            <a:srgbClr val="F5F7FA"/>
-          </a:solidFill>
-          <a:ln w="6350">
-            <a:solidFill>
-              <a:srgbClr val="0D3B66"/>
-            </a:solidFill>
-          </a:ln>
-        </p:spPr>
-        <p:style>
-          <a:lnRef idx="1">
-            <a:schemeClr val="accent1"/>
-          </a:lnRef>
-          <a:fillRef idx="3">
-            <a:schemeClr val="accent1"/>
-          </a:fillRef>
-          <a:effectRef idx="2">
-            <a:schemeClr val="accent1"/>
-          </a:effectRef>
-          <a:fontRef idx="minor">
-            <a:schemeClr val="lt1"/>
-          </a:fontRef>
-        </p:style>
-        <p:txBody>
-          <a:bodyPr rtlCol="0" anchor="ctr"/>
-          <a:lstStyle/>
-          <a:p>
-            <a:pPr algn="ctr"/>
-          </a:p>
-        </p:txBody>
-      </p:sp>
-      <p:sp>
-        <p:nvSpPr>
-          <p:cNvPr id="28" name="TextBox 27"/>
-          <p:cNvSpPr txBox="1"/>
-          <p:nvPr/>
-        </p:nvSpPr>
-        <p:spPr>
-          <a:xfrm>
-            <a:off x="2651760" y="1755648"/>
-            <a:ext cx="2157984" cy="146304"/>
-          </a:xfrm>
-          <a:prstGeom prst="rect">
-            <a:avLst/>
-          </a:prstGeom>
-          <a:noFill/>
-        </p:spPr>
-        <p:txBody>
-          <a:bodyPr wrap="square">
-            <a:spAutoFit/>
-          </a:bodyPr>
-          <a:lstStyle/>
-          <a:p>
-            <a:pPr algn="l">
-              <a:spcAft>
-                <a:spcPts val="300"/>
-              </a:spcAft>
-            </a:pPr>
-            <a:r>
-              <a:rPr sz="900" b="1">
-                <a:solidFill>
-                  <a:srgbClr val="C9A227"/>
-                </a:solidFill>
-                <a:latin typeface="Calibri"/>
-              </a:rPr>
-              <a:t>000025-24</a:t>
-            </a:r>
-          </a:p>
-        </p:txBody>
-      </p:sp>
-      <p:sp>
-        <p:nvSpPr>
-          <p:cNvPr id="29" name="TextBox 28"/>
-          <p:cNvSpPr txBox="1"/>
-          <p:nvPr/>
-        </p:nvSpPr>
-        <p:spPr>
-          <a:xfrm>
-            <a:off x="2651760" y="1920240"/>
-            <a:ext cx="2157984" cy="201168"/>
-          </a:xfrm>
-          <a:prstGeom prst="rect">
-            <a:avLst/>
-          </a:prstGeom>
-          <a:noFill/>
-        </p:spPr>
-        <p:txBody>
-          <a:bodyPr wrap="square">
-            <a:spAutoFit/>
-          </a:bodyPr>
-          <a:lstStyle/>
-          <a:p>
-            <a:pPr algn="l">
-              <a:spcAft>
-                <a:spcPts val="300"/>
-              </a:spcAft>
-            </a:pPr>
-            <a:r>
-              <a:rPr sz="1100" b="1">
-                <a:solidFill>
-                  <a:srgbClr val="0D3B66"/>
-                </a:solidFill>
-                <a:latin typeface="Calibri"/>
-              </a:rPr>
-              <a:t>Cascada</a:t>
-            </a:r>
-          </a:p>
-        </p:txBody>
-      </p:sp>
-      <p:sp>
-        <p:nvSpPr>
-          <p:cNvPr id="30" name="Rounded Rectangle 29"/>
-          <p:cNvSpPr/>
-          <p:nvPr/>
-        </p:nvSpPr>
-        <p:spPr>
-          <a:xfrm>
-            <a:off x="4956048" y="1719072"/>
-            <a:ext cx="2286000" cy="621792"/>
-          </a:xfrm>
-          <a:prstGeom prst="roundRect">
-            <a:avLst>
-              <a:gd name="adj" fmla="val 8000"/>
-            </a:avLst>
-          </a:prstGeom>
-          <a:solidFill>
-            <a:srgbClr val="FFF9EB"/>
-          </a:solidFill>
-          <a:ln w="6350">
-            <a:solidFill>
-              <a:srgbClr val="C45C26"/>
-            </a:solidFill>
-          </a:ln>
-        </p:spPr>
-        <p:style>
-          <a:lnRef idx="1">
-            <a:schemeClr val="accent1"/>
-          </a:lnRef>
-          <a:fillRef idx="3">
-            <a:schemeClr val="accent1"/>
-          </a:fillRef>
-          <a:effectRef idx="2">
-            <a:schemeClr val="accent1"/>
-          </a:effectRef>
-          <a:fontRef idx="minor">
-            <a:schemeClr val="lt1"/>
-          </a:fontRef>
-        </p:style>
-        <p:txBody>
-          <a:bodyPr rtlCol="0" anchor="ctr"/>
-          <a:lstStyle/>
-          <a:p>
-            <a:pPr algn="ctr"/>
-          </a:p>
-        </p:txBody>
-      </p:sp>
-      <p:sp>
-        <p:nvSpPr>
-          <p:cNvPr id="31" name="TextBox 30"/>
-          <p:cNvSpPr txBox="1"/>
-          <p:nvPr/>
-        </p:nvSpPr>
-        <p:spPr>
-          <a:xfrm>
-            <a:off x="5029200" y="1755648"/>
-            <a:ext cx="2157984" cy="146304"/>
-          </a:xfrm>
-          <a:prstGeom prst="rect">
-            <a:avLst/>
-          </a:prstGeom>
-          <a:noFill/>
-        </p:spPr>
-        <p:txBody>
-          <a:bodyPr wrap="square">
-            <a:spAutoFit/>
-          </a:bodyPr>
-          <a:lstStyle/>
-          <a:p>
-            <a:pPr algn="l">
-              <a:spcAft>
-                <a:spcPts val="300"/>
-              </a:spcAft>
-            </a:pPr>
-            <a:r>
-              <a:rPr sz="900" b="1">
-                <a:solidFill>
-                  <a:srgbClr val="C9A227"/>
-                </a:solidFill>
-                <a:latin typeface="Calibri"/>
-              </a:rPr>
-              <a:t>000025-27</a:t>
-            </a:r>
-          </a:p>
-        </p:txBody>
-      </p:sp>
-      <p:sp>
-        <p:nvSpPr>
-          <p:cNvPr id="32" name="TextBox 31"/>
-          <p:cNvSpPr txBox="1"/>
-          <p:nvPr/>
-        </p:nvSpPr>
-        <p:spPr>
-          <a:xfrm>
-            <a:off x="5029200" y="1920240"/>
-            <a:ext cx="2157984" cy="201168"/>
-          </a:xfrm>
-          <a:prstGeom prst="rect">
-            <a:avLst/>
-          </a:prstGeom>
-          <a:noFill/>
-        </p:spPr>
-        <p:txBody>
-          <a:bodyPr wrap="square">
-            <a:spAutoFit/>
-          </a:bodyPr>
-          <a:lstStyle/>
-          <a:p>
-            <a:pPr algn="l">
-              <a:spcAft>
-                <a:spcPts val="300"/>
-              </a:spcAft>
-            </a:pPr>
-            <a:r>
-              <a:rPr sz="1100" b="1">
-                <a:solidFill>
-                  <a:srgbClr val="0D3B66"/>
-                </a:solidFill>
-                <a:latin typeface="Calibri"/>
-              </a:rPr>
-              <a:t>Distrito Lujo</a:t>
-            </a:r>
-          </a:p>
-        </p:txBody>
-      </p:sp>
-      <p:sp>
-        <p:nvSpPr>
-          <p:cNvPr id="33" name="TextBox 32"/>
-          <p:cNvSpPr txBox="1"/>
-          <p:nvPr/>
-        </p:nvSpPr>
-        <p:spPr>
-          <a:xfrm>
-            <a:off x="5029200" y="2139696"/>
-            <a:ext cx="2157984" cy="164592"/>
-          </a:xfrm>
-          <a:prstGeom prst="rect">
-            <a:avLst/>
-          </a:prstGeom>
-          <a:noFill/>
-        </p:spPr>
-        <p:txBody>
-          <a:bodyPr wrap="square">
-            <a:spAutoFit/>
-          </a:bodyPr>
-          <a:lstStyle/>
-          <a:p>
-            <a:pPr algn="l">
-              <a:spcAft>
-                <a:spcPts val="300"/>
-              </a:spcAft>
-            </a:pPr>
-            <a:r>
-              <a:rPr sz="800" b="0">
-                <a:solidFill>
-                  <a:srgbClr val="5A5A5A"/>
-                </a:solidFill>
-                <a:latin typeface="Calibri"/>
-              </a:rPr>
-              <a:t>cadena · no suma</a:t>
-            </a:r>
-          </a:p>
-        </p:txBody>
-      </p:sp>
-      <p:sp>
-        <p:nvSpPr>
-          <p:cNvPr id="34" name="Rounded Rectangle 33"/>
-          <p:cNvSpPr/>
-          <p:nvPr/>
-        </p:nvSpPr>
-        <p:spPr>
-          <a:xfrm>
-            <a:off x="7333488" y="1719072"/>
-            <a:ext cx="2286000" cy="621792"/>
+            <a:off x="201168" y="5705856"/>
+            <a:ext cx="11795760" cy="438912"/>
           </a:xfrm>
           <a:prstGeom prst="roundRect">
             <a:avLst>
@@ -14245,1404 +16253,7 @@
       </p:sp>
       <p:sp>
         <p:nvSpPr>
-          <p:cNvPr id="35" name="TextBox 34"/>
-          <p:cNvSpPr txBox="1"/>
-          <p:nvPr/>
-        </p:nvSpPr>
-        <p:spPr>
-          <a:xfrm>
-            <a:off x="7406640" y="1755648"/>
-            <a:ext cx="2157984" cy="146304"/>
-          </a:xfrm>
-          <a:prstGeom prst="rect">
-            <a:avLst/>
-          </a:prstGeom>
-          <a:noFill/>
-        </p:spPr>
-        <p:txBody>
-          <a:bodyPr wrap="square">
-            <a:spAutoFit/>
-          </a:bodyPr>
-          <a:lstStyle/>
-          <a:p>
-            <a:pPr algn="l">
-              <a:spcAft>
-                <a:spcPts val="300"/>
-              </a:spcAft>
-            </a:pPr>
-            <a:r>
-              <a:rPr sz="900" b="1">
-                <a:solidFill>
-                  <a:srgbClr val="C9A227"/>
-                </a:solidFill>
-                <a:latin typeface="Calibri"/>
-              </a:rPr>
-              <a:t>000025-35</a:t>
-            </a:r>
-          </a:p>
-        </p:txBody>
-      </p:sp>
-      <p:sp>
-        <p:nvSpPr>
-          <p:cNvPr id="36" name="TextBox 35"/>
-          <p:cNvSpPr txBox="1"/>
-          <p:nvPr/>
-        </p:nvSpPr>
-        <p:spPr>
-          <a:xfrm>
-            <a:off x="7406640" y="1920240"/>
-            <a:ext cx="2157984" cy="201168"/>
-          </a:xfrm>
-          <a:prstGeom prst="rect">
-            <a:avLst/>
-          </a:prstGeom>
-          <a:noFill/>
-        </p:spPr>
-        <p:txBody>
-          <a:bodyPr wrap="square">
-            <a:spAutoFit/>
-          </a:bodyPr>
-          <a:lstStyle/>
-          <a:p>
-            <a:pPr algn="l">
-              <a:spcAft>
-                <a:spcPts val="300"/>
-              </a:spcAft>
-            </a:pPr>
-            <a:r>
-              <a:rPr sz="1100" b="1">
-                <a:solidFill>
-                  <a:srgbClr val="0D3B66"/>
-                </a:solidFill>
-                <a:latin typeface="Calibri"/>
-              </a:rPr>
-              <a:t>Bazar Gourmet</a:t>
-            </a:r>
-          </a:p>
-        </p:txBody>
-      </p:sp>
-      <p:sp>
-        <p:nvSpPr>
-          <p:cNvPr id="37" name="TextBox 36"/>
-          <p:cNvSpPr txBox="1"/>
-          <p:nvPr/>
-        </p:nvSpPr>
-        <p:spPr>
-          <a:xfrm>
-            <a:off x="7406640" y="2139696"/>
-            <a:ext cx="2157984" cy="164592"/>
-          </a:xfrm>
-          <a:prstGeom prst="rect">
-            <a:avLst/>
-          </a:prstGeom>
-          <a:noFill/>
-        </p:spPr>
-        <p:txBody>
-          <a:bodyPr wrap="square">
-            <a:spAutoFit/>
-          </a:bodyPr>
-          <a:lstStyle/>
-          <a:p>
-            <a:pPr algn="l">
-              <a:spcAft>
-                <a:spcPts val="300"/>
-              </a:spcAft>
-            </a:pPr>
-            <a:r>
-              <a:rPr sz="800" b="0">
-                <a:solidFill>
-                  <a:srgbClr val="5A5A5A"/>
-                </a:solidFill>
-                <a:latin typeface="Calibri"/>
-              </a:rPr>
-              <a:t>sale de 27</a:t>
-            </a:r>
-          </a:p>
-        </p:txBody>
-      </p:sp>
-      <p:sp>
-        <p:nvSpPr>
-          <p:cNvPr id="38" name="Rounded Rectangle 37"/>
-          <p:cNvSpPr/>
-          <p:nvPr/>
-        </p:nvSpPr>
-        <p:spPr>
-          <a:xfrm>
-            <a:off x="9710928" y="1719072"/>
-            <a:ext cx="2286000" cy="621792"/>
-          </a:xfrm>
-          <a:prstGeom prst="roundRect">
-            <a:avLst>
-              <a:gd name="adj" fmla="val 8000"/>
-            </a:avLst>
-          </a:prstGeom>
-          <a:solidFill>
-            <a:srgbClr val="FFF9EB"/>
-          </a:solidFill>
-          <a:ln w="6350">
-            <a:solidFill>
-              <a:srgbClr val="5A8C6E"/>
-            </a:solidFill>
-          </a:ln>
-        </p:spPr>
-        <p:style>
-          <a:lnRef idx="1">
-            <a:schemeClr val="accent1"/>
-          </a:lnRef>
-          <a:fillRef idx="3">
-            <a:schemeClr val="accent1"/>
-          </a:fillRef>
-          <a:effectRef idx="2">
-            <a:schemeClr val="accent1"/>
-          </a:effectRef>
-          <a:fontRef idx="minor">
-            <a:schemeClr val="lt1"/>
-          </a:fontRef>
-        </p:style>
-        <p:txBody>
-          <a:bodyPr rtlCol="0" anchor="ctr"/>
-          <a:lstStyle/>
-          <a:p>
-            <a:pPr algn="ctr"/>
-          </a:p>
-        </p:txBody>
-      </p:sp>
-      <p:sp>
-        <p:nvSpPr>
-          <p:cNvPr id="39" name="TextBox 38"/>
-          <p:cNvSpPr txBox="1"/>
-          <p:nvPr/>
-        </p:nvSpPr>
-        <p:spPr>
-          <a:xfrm>
-            <a:off x="9784080" y="1755648"/>
-            <a:ext cx="2157984" cy="146304"/>
-          </a:xfrm>
-          <a:prstGeom prst="rect">
-            <a:avLst/>
-          </a:prstGeom>
-          <a:noFill/>
-        </p:spPr>
-        <p:txBody>
-          <a:bodyPr wrap="square">
-            <a:spAutoFit/>
-          </a:bodyPr>
-          <a:lstStyle/>
-          <a:p>
-            <a:pPr algn="l">
-              <a:spcAft>
-                <a:spcPts val="300"/>
-              </a:spcAft>
-            </a:pPr>
-            <a:r>
-              <a:rPr sz="900" b="1">
-                <a:solidFill>
-                  <a:srgbClr val="C9A227"/>
-                </a:solidFill>
-                <a:latin typeface="Calibri"/>
-              </a:rPr>
-              <a:t>000025-36</a:t>
-            </a:r>
-          </a:p>
-        </p:txBody>
-      </p:sp>
-      <p:sp>
-        <p:nvSpPr>
-          <p:cNvPr id="40" name="TextBox 39"/>
-          <p:cNvSpPr txBox="1"/>
-          <p:nvPr/>
-        </p:nvSpPr>
-        <p:spPr>
-          <a:xfrm>
-            <a:off x="9784080" y="1920240"/>
-            <a:ext cx="2157984" cy="201168"/>
-          </a:xfrm>
-          <a:prstGeom prst="rect">
-            <a:avLst/>
-          </a:prstGeom>
-          <a:noFill/>
-        </p:spPr>
-        <p:txBody>
-          <a:bodyPr wrap="square">
-            <a:spAutoFit/>
-          </a:bodyPr>
-          <a:lstStyle/>
-          <a:p>
-            <a:pPr algn="l">
-              <a:spcAft>
-                <a:spcPts val="300"/>
-              </a:spcAft>
-            </a:pPr>
-            <a:r>
-              <a:rPr sz="1100" b="1">
-                <a:solidFill>
-                  <a:srgbClr val="0D3B66"/>
-                </a:solidFill>
-                <a:latin typeface="Calibri"/>
-              </a:rPr>
-              <a:t>DL Kennedy</a:t>
-            </a:r>
-          </a:p>
-        </p:txBody>
-      </p:sp>
-      <p:sp>
-        <p:nvSpPr>
-          <p:cNvPr id="41" name="TextBox 40"/>
-          <p:cNvSpPr txBox="1"/>
-          <p:nvPr/>
-        </p:nvSpPr>
-        <p:spPr>
-          <a:xfrm>
-            <a:off x="9784080" y="2139696"/>
-            <a:ext cx="2157984" cy="164592"/>
-          </a:xfrm>
-          <a:prstGeom prst="rect">
-            <a:avLst/>
-          </a:prstGeom>
-          <a:noFill/>
-        </p:spPr>
-        <p:txBody>
-          <a:bodyPr wrap="square">
-            <a:spAutoFit/>
-          </a:bodyPr>
-          <a:lstStyle/>
-          <a:p>
-            <a:pPr algn="l">
-              <a:spcAft>
-                <a:spcPts val="300"/>
-              </a:spcAft>
-            </a:pPr>
-            <a:r>
-              <a:rPr sz="800" b="0">
-                <a:solidFill>
-                  <a:srgbClr val="5A5A5A"/>
-                </a:solidFill>
-                <a:latin typeface="Calibri"/>
-              </a:rPr>
-              <a:t>sale de 27</a:t>
-            </a:r>
-          </a:p>
-        </p:txBody>
-      </p:sp>
-      <p:sp>
-        <p:nvSpPr>
-          <p:cNvPr id="42" name="Rounded Rectangle 41"/>
-          <p:cNvSpPr/>
-          <p:nvPr/>
-        </p:nvSpPr>
-        <p:spPr>
-          <a:xfrm>
-            <a:off x="201168" y="2432304"/>
-            <a:ext cx="7973568" cy="3182111"/>
-          </a:xfrm>
-          <a:prstGeom prst="roundRect">
-            <a:avLst>
-              <a:gd name="adj" fmla="val 8000"/>
-            </a:avLst>
-          </a:prstGeom>
-          <a:solidFill>
-            <a:srgbClr val="F5F7FA"/>
-          </a:solidFill>
-          <a:ln>
-            <a:noFill/>
-          </a:ln>
-        </p:spPr>
-        <p:style>
-          <a:lnRef idx="1">
-            <a:schemeClr val="accent1"/>
-          </a:lnRef>
-          <a:fillRef idx="3">
-            <a:schemeClr val="accent1"/>
-          </a:fillRef>
-          <a:effectRef idx="2">
-            <a:schemeClr val="accent1"/>
-          </a:effectRef>
-          <a:fontRef idx="minor">
-            <a:schemeClr val="lt1"/>
-          </a:fontRef>
-        </p:style>
-        <p:txBody>
-          <a:bodyPr rtlCol="0" anchor="ctr"/>
-          <a:lstStyle/>
-          <a:p>
-            <a:pPr algn="ctr"/>
-          </a:p>
-        </p:txBody>
-      </p:sp>
-      <p:pic>
-        <p:nvPicPr>
-          <p:cNvPr id="43" name="Picture 42" descr="pak_mensual_may_ago.png"/>
-          <p:cNvPicPr>
-            <a:picLocks noChangeAspect="1"/>
-          </p:cNvPicPr>
-          <p:nvPr/>
-        </p:nvPicPr>
-        <p:blipFill>
-          <a:blip r:embed="rId3"/>
-          <a:stretch>
-            <a:fillRect/>
-          </a:stretch>
-        </p:blipFill>
-        <p:spPr>
-          <a:xfrm>
-            <a:off x="605863" y="2487168"/>
-            <a:ext cx="7164176" cy="3072383"/>
-          </a:xfrm>
-          <a:prstGeom prst="rect">
-            <a:avLst/>
-          </a:prstGeom>
-        </p:spPr>
-      </p:pic>
-      <p:sp>
-        <p:nvSpPr>
-          <p:cNvPr id="44" name="Rounded Rectangle 43"/>
-          <p:cNvSpPr/>
-          <p:nvPr/>
-        </p:nvSpPr>
-        <p:spPr>
-          <a:xfrm>
-            <a:off x="8302752" y="2432304"/>
-            <a:ext cx="3675887" cy="3182111"/>
-          </a:xfrm>
-          <a:prstGeom prst="roundRect">
-            <a:avLst>
-              <a:gd name="adj" fmla="val 8000"/>
-            </a:avLst>
-          </a:prstGeom>
-          <a:solidFill>
-            <a:srgbClr val="FFFFFF"/>
-          </a:solidFill>
-          <a:ln w="6350">
-            <a:solidFill>
-              <a:srgbClr val="1F77B4"/>
-            </a:solidFill>
-          </a:ln>
-        </p:spPr>
-        <p:style>
-          <a:lnRef idx="1">
-            <a:schemeClr val="accent1"/>
-          </a:lnRef>
-          <a:fillRef idx="3">
-            <a:schemeClr val="accent1"/>
-          </a:fillRef>
-          <a:effectRef idx="2">
-            <a:schemeClr val="accent1"/>
-          </a:effectRef>
-          <a:fontRef idx="minor">
-            <a:schemeClr val="lt1"/>
-          </a:fontRef>
-        </p:style>
-        <p:txBody>
-          <a:bodyPr rtlCol="0" anchor="ctr"/>
-          <a:lstStyle/>
-          <a:p>
-            <a:pPr algn="ctr"/>
-          </a:p>
-        </p:txBody>
-      </p:sp>
-      <p:sp>
-        <p:nvSpPr>
-          <p:cNvPr id="45" name="TextBox 44"/>
-          <p:cNvSpPr txBox="1"/>
-          <p:nvPr/>
-        </p:nvSpPr>
-        <p:spPr>
-          <a:xfrm>
-            <a:off x="8430768" y="2478024"/>
-            <a:ext cx="3419856" cy="164592"/>
-          </a:xfrm>
-          <a:prstGeom prst="rect">
-            <a:avLst/>
-          </a:prstGeom>
-          <a:noFill/>
-        </p:spPr>
-        <p:txBody>
-          <a:bodyPr wrap="square">
-            <a:spAutoFit/>
-          </a:bodyPr>
-          <a:lstStyle/>
-          <a:p>
-            <a:pPr algn="l">
-              <a:spcAft>
-                <a:spcPts val="300"/>
-              </a:spcAft>
-            </a:pPr>
-            <a:r>
-              <a:rPr sz="1100" b="1">
-                <a:solidFill>
-                  <a:srgbClr val="1F77B4"/>
-                </a:solidFill>
-                <a:latin typeface="Calibri"/>
-              </a:rPr>
-              <a:t>JULIO · cabecera</a:t>
-            </a:r>
-          </a:p>
-        </p:txBody>
-      </p:sp>
-      <p:sp>
-        <p:nvSpPr>
-          <p:cNvPr id="46" name="TextBox 45"/>
-          <p:cNvSpPr txBox="1"/>
-          <p:nvPr/>
-        </p:nvSpPr>
-        <p:spPr>
-          <a:xfrm>
-            <a:off x="8430768" y="2642616"/>
-            <a:ext cx="3419856" cy="201168"/>
-          </a:xfrm>
-          <a:prstGeom prst="rect">
-            <a:avLst/>
-          </a:prstGeom>
-          <a:noFill/>
-        </p:spPr>
-        <p:txBody>
-          <a:bodyPr wrap="square">
-            <a:spAutoFit/>
-          </a:bodyPr>
-          <a:lstStyle/>
-          <a:p>
-            <a:pPr algn="l">
-              <a:spcAft>
-                <a:spcPts val="300"/>
-              </a:spcAft>
-            </a:pPr>
-            <a:r>
-              <a:rPr sz="1200" b="0">
-                <a:solidFill>
-                  <a:srgbClr val="5A5A5A"/>
-                </a:solidFill>
-                <a:latin typeface="Calibri"/>
-              </a:rPr>
-              <a:t>El recinto sumó 31.239 m³</a:t>
-            </a:r>
-          </a:p>
-        </p:txBody>
-      </p:sp>
-      <p:sp>
-        <p:nvSpPr>
-          <p:cNvPr id="47" name="Rounded Rectangle 46"/>
-          <p:cNvSpPr/>
-          <p:nvPr/>
-        </p:nvSpPr>
-        <p:spPr>
-          <a:xfrm>
-            <a:off x="8430768" y="2852928"/>
-            <a:ext cx="3419856" cy="347471"/>
-          </a:xfrm>
-          <a:prstGeom prst="roundRect">
-            <a:avLst>
-              <a:gd name="adj" fmla="val 8000"/>
-            </a:avLst>
-          </a:prstGeom>
-          <a:solidFill>
-            <a:srgbClr val="F5F7FA"/>
-          </a:solidFill>
-          <a:ln w="6350">
-            <a:solidFill>
-              <a:srgbClr val="A0783C"/>
-            </a:solidFill>
-          </a:ln>
-        </p:spPr>
-        <p:style>
-          <a:lnRef idx="1">
-            <a:schemeClr val="accent1"/>
-          </a:lnRef>
-          <a:fillRef idx="3">
-            <a:schemeClr val="accent1"/>
-          </a:fillRef>
-          <a:effectRef idx="2">
-            <a:schemeClr val="accent1"/>
-          </a:effectRef>
-          <a:fontRef idx="minor">
-            <a:schemeClr val="lt1"/>
-          </a:fontRef>
-        </p:style>
-        <p:txBody>
-          <a:bodyPr rtlCol="0" anchor="ctr"/>
-          <a:lstStyle/>
-          <a:p>
-            <a:pPr algn="ctr"/>
-          </a:p>
-        </p:txBody>
-      </p:sp>
-      <p:sp>
-        <p:nvSpPr>
-          <p:cNvPr id="48" name="TextBox 47"/>
-          <p:cNvSpPr txBox="1"/>
-          <p:nvPr/>
-        </p:nvSpPr>
-        <p:spPr>
-          <a:xfrm>
-            <a:off x="8540496" y="2880360"/>
-            <a:ext cx="3200400" cy="145938"/>
-          </a:xfrm>
-          <a:prstGeom prst="rect">
-            <a:avLst/>
-          </a:prstGeom>
-          <a:noFill/>
-        </p:spPr>
-        <p:txBody>
-          <a:bodyPr wrap="square">
-            <a:spAutoFit/>
-          </a:bodyPr>
-          <a:lstStyle/>
-          <a:p>
-            <a:pPr algn="l">
-              <a:spcAft>
-                <a:spcPts val="300"/>
-              </a:spcAft>
-            </a:pPr>
-            <a:r>
-              <a:rPr sz="1000" b="1">
-                <a:solidFill>
-                  <a:srgbClr val="A0783C"/>
-                </a:solidFill>
-                <a:latin typeface="Calibri"/>
-              </a:rPr>
-              <a:t>Sandía Antigua</a:t>
-            </a:r>
-          </a:p>
-        </p:txBody>
-      </p:sp>
-      <p:sp>
-        <p:nvSpPr>
-          <p:cNvPr id="49" name="TextBox 48"/>
-          <p:cNvSpPr txBox="1"/>
-          <p:nvPr/>
-        </p:nvSpPr>
-        <p:spPr>
-          <a:xfrm>
-            <a:off x="8540496" y="2998866"/>
-            <a:ext cx="3200400" cy="180685"/>
-          </a:xfrm>
-          <a:prstGeom prst="rect">
-            <a:avLst/>
-          </a:prstGeom>
-          <a:noFill/>
-        </p:spPr>
-        <p:txBody>
-          <a:bodyPr wrap="square">
-            <a:spAutoFit/>
-          </a:bodyPr>
-          <a:lstStyle/>
-          <a:p>
-            <a:pPr algn="l">
-              <a:spcAft>
-                <a:spcPts val="300"/>
-              </a:spcAft>
-            </a:pPr>
-            <a:r>
-              <a:rPr sz="1200" b="1">
-                <a:solidFill>
-                  <a:srgbClr val="0D3B66"/>
-                </a:solidFill>
-                <a:latin typeface="Calibri"/>
-              </a:rPr>
-              <a:t>13.661 m³    43,7 %</a:t>
-            </a:r>
-          </a:p>
-        </p:txBody>
-      </p:sp>
-      <p:sp>
-        <p:nvSpPr>
-          <p:cNvPr id="50" name="Rounded Rectangle 49"/>
-          <p:cNvSpPr/>
-          <p:nvPr/>
-        </p:nvSpPr>
-        <p:spPr>
-          <a:xfrm>
-            <a:off x="8430768" y="3236976"/>
-            <a:ext cx="3419856" cy="347471"/>
-          </a:xfrm>
-          <a:prstGeom prst="roundRect">
-            <a:avLst>
-              <a:gd name="adj" fmla="val 8000"/>
-            </a:avLst>
-          </a:prstGeom>
-          <a:solidFill>
-            <a:srgbClr val="F5F7FA"/>
-          </a:solidFill>
-          <a:ln w="6350">
-            <a:solidFill>
-              <a:srgbClr val="1F77B4"/>
-            </a:solidFill>
-          </a:ln>
-        </p:spPr>
-        <p:style>
-          <a:lnRef idx="1">
-            <a:schemeClr val="accent1"/>
-          </a:lnRef>
-          <a:fillRef idx="3">
-            <a:schemeClr val="accent1"/>
-          </a:fillRef>
-          <a:effectRef idx="2">
-            <a:schemeClr val="accent1"/>
-          </a:effectRef>
-          <a:fontRef idx="minor">
-            <a:schemeClr val="lt1"/>
-          </a:fontRef>
-        </p:style>
-        <p:txBody>
-          <a:bodyPr rtlCol="0" anchor="ctr"/>
-          <a:lstStyle/>
-          <a:p>
-            <a:pPr algn="ctr"/>
-          </a:p>
-        </p:txBody>
-      </p:sp>
-      <p:sp>
-        <p:nvSpPr>
-          <p:cNvPr id="51" name="TextBox 50"/>
-          <p:cNvSpPr txBox="1"/>
-          <p:nvPr/>
-        </p:nvSpPr>
-        <p:spPr>
-          <a:xfrm>
-            <a:off x="8540496" y="3264408"/>
-            <a:ext cx="3200400" cy="145938"/>
-          </a:xfrm>
-          <a:prstGeom prst="rect">
-            <a:avLst/>
-          </a:prstGeom>
-          <a:noFill/>
-        </p:spPr>
-        <p:txBody>
-          <a:bodyPr wrap="square">
-            <a:spAutoFit/>
-          </a:bodyPr>
-          <a:lstStyle/>
-          <a:p>
-            <a:pPr algn="l">
-              <a:spcAft>
-                <a:spcPts val="300"/>
-              </a:spcAft>
-            </a:pPr>
-            <a:r>
-              <a:rPr sz="1000" b="1">
-                <a:solidFill>
-                  <a:srgbClr val="1F77B4"/>
-                </a:solidFill>
-                <a:latin typeface="Calibri"/>
-              </a:rPr>
-              <a:t>Sandía Nueva</a:t>
-            </a:r>
-          </a:p>
-        </p:txBody>
-      </p:sp>
-      <p:sp>
-        <p:nvSpPr>
-          <p:cNvPr id="52" name="TextBox 51"/>
-          <p:cNvSpPr txBox="1"/>
-          <p:nvPr/>
-        </p:nvSpPr>
-        <p:spPr>
-          <a:xfrm>
-            <a:off x="8540496" y="3382914"/>
-            <a:ext cx="3200400" cy="180685"/>
-          </a:xfrm>
-          <a:prstGeom prst="rect">
-            <a:avLst/>
-          </a:prstGeom>
-          <a:noFill/>
-        </p:spPr>
-        <p:txBody>
-          <a:bodyPr wrap="square">
-            <a:spAutoFit/>
-          </a:bodyPr>
-          <a:lstStyle/>
-          <a:p>
-            <a:pPr algn="l">
-              <a:spcAft>
-                <a:spcPts val="300"/>
-              </a:spcAft>
-            </a:pPr>
-            <a:r>
-              <a:rPr sz="1200" b="1">
-                <a:solidFill>
-                  <a:srgbClr val="0D3B66"/>
-                </a:solidFill>
-                <a:latin typeface="Calibri"/>
-              </a:rPr>
-              <a:t>9.619 m³    30,8 %</a:t>
-            </a:r>
-          </a:p>
-        </p:txBody>
-      </p:sp>
-      <p:sp>
-        <p:nvSpPr>
-          <p:cNvPr id="53" name="Rounded Rectangle 52"/>
-          <p:cNvSpPr/>
-          <p:nvPr/>
-        </p:nvSpPr>
-        <p:spPr>
-          <a:xfrm>
-            <a:off x="8430768" y="3621024"/>
-            <a:ext cx="3419856" cy="347471"/>
-          </a:xfrm>
-          <a:prstGeom prst="roundRect">
-            <a:avLst>
-              <a:gd name="adj" fmla="val 8000"/>
-            </a:avLst>
-          </a:prstGeom>
-          <a:solidFill>
-            <a:srgbClr val="F5F7FA"/>
-          </a:solidFill>
-          <a:ln w="6350">
-            <a:solidFill>
-              <a:srgbClr val="46648C"/>
-            </a:solidFill>
-          </a:ln>
-        </p:spPr>
-        <p:style>
-          <a:lnRef idx="1">
-            <a:schemeClr val="accent1"/>
-          </a:lnRef>
-          <a:fillRef idx="3">
-            <a:schemeClr val="accent1"/>
-          </a:fillRef>
-          <a:effectRef idx="2">
-            <a:schemeClr val="accent1"/>
-          </a:effectRef>
-          <a:fontRef idx="minor">
-            <a:schemeClr val="lt1"/>
-          </a:fontRef>
-        </p:style>
-        <p:txBody>
-          <a:bodyPr rtlCol="0" anchor="ctr"/>
-          <a:lstStyle/>
-          <a:p>
-            <a:pPr algn="ctr"/>
-          </a:p>
-        </p:txBody>
-      </p:sp>
-      <p:sp>
-        <p:nvSpPr>
-          <p:cNvPr id="54" name="TextBox 53"/>
-          <p:cNvSpPr txBox="1"/>
-          <p:nvPr/>
-        </p:nvSpPr>
-        <p:spPr>
-          <a:xfrm>
-            <a:off x="8540496" y="3648456"/>
-            <a:ext cx="3200400" cy="145938"/>
-          </a:xfrm>
-          <a:prstGeom prst="rect">
-            <a:avLst/>
-          </a:prstGeom>
-          <a:noFill/>
-        </p:spPr>
-        <p:txBody>
-          <a:bodyPr wrap="square">
-            <a:spAutoFit/>
-          </a:bodyPr>
-          <a:lstStyle/>
-          <a:p>
-            <a:pPr algn="l">
-              <a:spcAft>
-                <a:spcPts val="300"/>
-              </a:spcAft>
-            </a:pPr>
-            <a:r>
-              <a:rPr sz="1000" b="1">
-                <a:solidFill>
-                  <a:srgbClr val="46648C"/>
-                </a:solidFill>
-                <a:latin typeface="Calibri"/>
-              </a:rPr>
-              <a:t>Locales Gast.</a:t>
-            </a:r>
-          </a:p>
-        </p:txBody>
-      </p:sp>
-      <p:sp>
-        <p:nvSpPr>
-          <p:cNvPr id="55" name="TextBox 54"/>
-          <p:cNvSpPr txBox="1"/>
-          <p:nvPr/>
-        </p:nvSpPr>
-        <p:spPr>
-          <a:xfrm>
-            <a:off x="8540496" y="3766962"/>
-            <a:ext cx="3200400" cy="180685"/>
-          </a:xfrm>
-          <a:prstGeom prst="rect">
-            <a:avLst/>
-          </a:prstGeom>
-          <a:noFill/>
-        </p:spPr>
-        <p:txBody>
-          <a:bodyPr wrap="square">
-            <a:spAutoFit/>
-          </a:bodyPr>
-          <a:lstStyle/>
-          <a:p>
-            <a:pPr algn="l">
-              <a:spcAft>
-                <a:spcPts val="300"/>
-              </a:spcAft>
-            </a:pPr>
-            <a:r>
-              <a:rPr sz="1200" b="1">
-                <a:solidFill>
-                  <a:srgbClr val="0D3B66"/>
-                </a:solidFill>
-                <a:latin typeface="Calibri"/>
-              </a:rPr>
-              <a:t>4.583 m³    14,7 %</a:t>
-            </a:r>
-          </a:p>
-        </p:txBody>
-      </p:sp>
-      <p:sp>
-        <p:nvSpPr>
-          <p:cNvPr id="56" name="Rounded Rectangle 55"/>
-          <p:cNvSpPr/>
-          <p:nvPr/>
-        </p:nvSpPr>
-        <p:spPr>
-          <a:xfrm>
-            <a:off x="8430768" y="4005072"/>
-            <a:ext cx="3419856" cy="347471"/>
-          </a:xfrm>
-          <a:prstGeom prst="roundRect">
-            <a:avLst>
-              <a:gd name="adj" fmla="val 8000"/>
-            </a:avLst>
-          </a:prstGeom>
-          <a:solidFill>
-            <a:srgbClr val="F5F7FA"/>
-          </a:solidFill>
-          <a:ln w="6350">
-            <a:solidFill>
-              <a:srgbClr val="8C5A5A"/>
-            </a:solidFill>
-          </a:ln>
-        </p:spPr>
-        <p:style>
-          <a:lnRef idx="1">
-            <a:schemeClr val="accent1"/>
-          </a:lnRef>
-          <a:fillRef idx="3">
-            <a:schemeClr val="accent1"/>
-          </a:fillRef>
-          <a:effectRef idx="2">
-            <a:schemeClr val="accent1"/>
-          </a:effectRef>
-          <a:fontRef idx="minor">
-            <a:schemeClr val="lt1"/>
-          </a:fontRef>
-        </p:style>
-        <p:txBody>
-          <a:bodyPr rtlCol="0" anchor="ctr"/>
-          <a:lstStyle/>
-          <a:p>
-            <a:pPr algn="ctr"/>
-          </a:p>
-        </p:txBody>
-      </p:sp>
-      <p:sp>
-        <p:nvSpPr>
-          <p:cNvPr id="57" name="TextBox 56"/>
-          <p:cNvSpPr txBox="1"/>
-          <p:nvPr/>
-        </p:nvSpPr>
-        <p:spPr>
-          <a:xfrm>
-            <a:off x="8540496" y="4032504"/>
-            <a:ext cx="3200400" cy="145938"/>
-          </a:xfrm>
-          <a:prstGeom prst="rect">
-            <a:avLst/>
-          </a:prstGeom>
-          <a:noFill/>
-        </p:spPr>
-        <p:txBody>
-          <a:bodyPr wrap="square">
-            <a:spAutoFit/>
-          </a:bodyPr>
-          <a:lstStyle/>
-          <a:p>
-            <a:pPr algn="l">
-              <a:spcAft>
-                <a:spcPts val="300"/>
-              </a:spcAft>
-            </a:pPr>
-            <a:r>
-              <a:rPr sz="1000" b="1">
-                <a:solidFill>
-                  <a:srgbClr val="8C5A5A"/>
-                </a:solidFill>
-                <a:latin typeface="Calibri"/>
-              </a:rPr>
-              <a:t>Matriz Andén</a:t>
-            </a:r>
-          </a:p>
-        </p:txBody>
-      </p:sp>
-      <p:sp>
-        <p:nvSpPr>
-          <p:cNvPr id="58" name="TextBox 57"/>
-          <p:cNvSpPr txBox="1"/>
-          <p:nvPr/>
-        </p:nvSpPr>
-        <p:spPr>
-          <a:xfrm>
-            <a:off x="8540496" y="4151010"/>
-            <a:ext cx="3200400" cy="180685"/>
-          </a:xfrm>
-          <a:prstGeom prst="rect">
-            <a:avLst/>
-          </a:prstGeom>
-          <a:noFill/>
-        </p:spPr>
-        <p:txBody>
-          <a:bodyPr wrap="square">
-            <a:spAutoFit/>
-          </a:bodyPr>
-          <a:lstStyle/>
-          <a:p>
-            <a:pPr algn="l">
-              <a:spcAft>
-                <a:spcPts val="300"/>
-              </a:spcAft>
-            </a:pPr>
-            <a:r>
-              <a:rPr sz="1200" b="1">
-                <a:solidFill>
-                  <a:srgbClr val="0D3B66"/>
-                </a:solidFill>
-                <a:latin typeface="Calibri"/>
-              </a:rPr>
-              <a:t>3.086 m³    9,9 %</a:t>
-            </a:r>
-          </a:p>
-        </p:txBody>
-      </p:sp>
-      <p:sp>
-        <p:nvSpPr>
-          <p:cNvPr id="59" name="Rounded Rectangle 58"/>
-          <p:cNvSpPr/>
-          <p:nvPr/>
-        </p:nvSpPr>
-        <p:spPr>
-          <a:xfrm>
-            <a:off x="8430768" y="4389120"/>
-            <a:ext cx="3419856" cy="347471"/>
-          </a:xfrm>
-          <a:prstGeom prst="roundRect">
-            <a:avLst>
-              <a:gd name="adj" fmla="val 8000"/>
-            </a:avLst>
-          </a:prstGeom>
-          <a:solidFill>
-            <a:srgbClr val="F5F7FA"/>
-          </a:solidFill>
-          <a:ln w="6350">
-            <a:solidFill>
-              <a:srgbClr val="508282"/>
-            </a:solidFill>
-          </a:ln>
-        </p:spPr>
-        <p:style>
-          <a:lnRef idx="1">
-            <a:schemeClr val="accent1"/>
-          </a:lnRef>
-          <a:fillRef idx="3">
-            <a:schemeClr val="accent1"/>
-          </a:fillRef>
-          <a:effectRef idx="2">
-            <a:schemeClr val="accent1"/>
-          </a:effectRef>
-          <a:fontRef idx="minor">
-            <a:schemeClr val="lt1"/>
-          </a:fontRef>
-        </p:style>
-        <p:txBody>
-          <a:bodyPr rtlCol="0" anchor="ctr"/>
-          <a:lstStyle/>
-          <a:p>
-            <a:pPr algn="ctr"/>
-          </a:p>
-        </p:txBody>
-      </p:sp>
-      <p:sp>
-        <p:nvSpPr>
-          <p:cNvPr id="60" name="TextBox 59"/>
-          <p:cNvSpPr txBox="1"/>
-          <p:nvPr/>
-        </p:nvSpPr>
-        <p:spPr>
-          <a:xfrm>
-            <a:off x="8540496" y="4416552"/>
-            <a:ext cx="3200400" cy="145938"/>
-          </a:xfrm>
-          <a:prstGeom prst="rect">
-            <a:avLst/>
-          </a:prstGeom>
-          <a:noFill/>
-        </p:spPr>
-        <p:txBody>
-          <a:bodyPr wrap="square">
-            <a:spAutoFit/>
-          </a:bodyPr>
-          <a:lstStyle/>
-          <a:p>
-            <a:pPr algn="l">
-              <a:spcAft>
-                <a:spcPts val="300"/>
-              </a:spcAft>
-            </a:pPr>
-            <a:r>
-              <a:rPr sz="1000" b="1">
-                <a:solidFill>
-                  <a:srgbClr val="508282"/>
-                </a:solidFill>
-                <a:latin typeface="Calibri"/>
-              </a:rPr>
-              <a:t>Pileta</a:t>
-            </a:r>
-          </a:p>
-        </p:txBody>
-      </p:sp>
-      <p:sp>
-        <p:nvSpPr>
-          <p:cNvPr id="61" name="TextBox 60"/>
-          <p:cNvSpPr txBox="1"/>
-          <p:nvPr/>
-        </p:nvSpPr>
-        <p:spPr>
-          <a:xfrm>
-            <a:off x="8540496" y="4535058"/>
-            <a:ext cx="3200400" cy="180685"/>
-          </a:xfrm>
-          <a:prstGeom prst="rect">
-            <a:avLst/>
-          </a:prstGeom>
-          <a:noFill/>
-        </p:spPr>
-        <p:txBody>
-          <a:bodyPr wrap="square">
-            <a:spAutoFit/>
-          </a:bodyPr>
-          <a:lstStyle/>
-          <a:p>
-            <a:pPr algn="l">
-              <a:spcAft>
-                <a:spcPts val="300"/>
-              </a:spcAft>
-            </a:pPr>
-            <a:r>
-              <a:rPr sz="1200" b="1">
-                <a:solidFill>
-                  <a:srgbClr val="0D3B66"/>
-                </a:solidFill>
-                <a:latin typeface="Calibri"/>
-              </a:rPr>
-              <a:t>172 m³    0,5 %</a:t>
-            </a:r>
-          </a:p>
-        </p:txBody>
-      </p:sp>
-      <p:sp>
-        <p:nvSpPr>
-          <p:cNvPr id="62" name="Rounded Rectangle 61"/>
-          <p:cNvSpPr/>
-          <p:nvPr/>
-        </p:nvSpPr>
-        <p:spPr>
-          <a:xfrm>
-            <a:off x="8430768" y="4773168"/>
-            <a:ext cx="3419856" cy="347471"/>
-          </a:xfrm>
-          <a:prstGeom prst="roundRect">
-            <a:avLst>
-              <a:gd name="adj" fmla="val 8000"/>
-            </a:avLst>
-          </a:prstGeom>
-          <a:solidFill>
-            <a:srgbClr val="F5F7FA"/>
-          </a:solidFill>
-          <a:ln w="6350">
-            <a:solidFill>
-              <a:srgbClr val="C45C26"/>
-            </a:solidFill>
-          </a:ln>
-        </p:spPr>
-        <p:style>
-          <a:lnRef idx="1">
-            <a:schemeClr val="accent1"/>
-          </a:lnRef>
-          <a:fillRef idx="3">
-            <a:schemeClr val="accent1"/>
-          </a:fillRef>
-          <a:effectRef idx="2">
-            <a:schemeClr val="accent1"/>
-          </a:effectRef>
-          <a:fontRef idx="minor">
-            <a:schemeClr val="lt1"/>
-          </a:fontRef>
-        </p:style>
-        <p:txBody>
-          <a:bodyPr rtlCol="0" anchor="ctr"/>
-          <a:lstStyle/>
-          <a:p>
-            <a:pPr algn="ctr"/>
-          </a:p>
-        </p:txBody>
-      </p:sp>
-      <p:sp>
-        <p:nvSpPr>
-          <p:cNvPr id="63" name="TextBox 62"/>
-          <p:cNvSpPr txBox="1"/>
-          <p:nvPr/>
-        </p:nvSpPr>
-        <p:spPr>
-          <a:xfrm>
-            <a:off x="8540496" y="4800600"/>
-            <a:ext cx="3200400" cy="145938"/>
-          </a:xfrm>
-          <a:prstGeom prst="rect">
-            <a:avLst/>
-          </a:prstGeom>
-          <a:noFill/>
-        </p:spPr>
-        <p:txBody>
-          <a:bodyPr wrap="square">
-            <a:spAutoFit/>
-          </a:bodyPr>
-          <a:lstStyle/>
-          <a:p>
-            <a:pPr algn="l">
-              <a:spcAft>
-                <a:spcPts val="300"/>
-              </a:spcAft>
-            </a:pPr>
-            <a:r>
-              <a:rPr sz="1000" b="1">
-                <a:solidFill>
-                  <a:srgbClr val="C45C26"/>
-                </a:solidFill>
-                <a:latin typeface="Calibri"/>
-              </a:rPr>
-              <a:t>Restaurante</a:t>
-            </a:r>
-          </a:p>
-        </p:txBody>
-      </p:sp>
-      <p:sp>
-        <p:nvSpPr>
-          <p:cNvPr id="64" name="TextBox 63"/>
-          <p:cNvSpPr txBox="1"/>
-          <p:nvPr/>
-        </p:nvSpPr>
-        <p:spPr>
-          <a:xfrm>
-            <a:off x="8540496" y="4919106"/>
-            <a:ext cx="3200400" cy="180685"/>
-          </a:xfrm>
-          <a:prstGeom prst="rect">
-            <a:avLst/>
-          </a:prstGeom>
-          <a:noFill/>
-        </p:spPr>
-        <p:txBody>
-          <a:bodyPr wrap="square">
-            <a:spAutoFit/>
-          </a:bodyPr>
-          <a:lstStyle/>
-          <a:p>
-            <a:pPr algn="l">
-              <a:spcAft>
-                <a:spcPts val="300"/>
-              </a:spcAft>
-            </a:pPr>
-            <a:r>
-              <a:rPr sz="1200" b="1">
-                <a:solidFill>
-                  <a:srgbClr val="0D3B66"/>
-                </a:solidFill>
-                <a:latin typeface="Calibri"/>
-              </a:rPr>
-              <a:t>98 m³    0,3 %</a:t>
-            </a:r>
-          </a:p>
-        </p:txBody>
-      </p:sp>
-      <p:sp>
-        <p:nvSpPr>
-          <p:cNvPr id="65" name="Rounded Rectangle 64"/>
-          <p:cNvSpPr/>
-          <p:nvPr/>
-        </p:nvSpPr>
-        <p:spPr>
-          <a:xfrm>
-            <a:off x="8430768" y="5157216"/>
-            <a:ext cx="3419856" cy="347471"/>
-          </a:xfrm>
-          <a:prstGeom prst="roundRect">
-            <a:avLst>
-              <a:gd name="adj" fmla="val 8000"/>
-            </a:avLst>
-          </a:prstGeom>
-          <a:solidFill>
-            <a:srgbClr val="F5F7FA"/>
-          </a:solidFill>
-          <a:ln w="6350">
-            <a:solidFill>
-              <a:srgbClr val="0D3B66"/>
-            </a:solidFill>
-          </a:ln>
-        </p:spPr>
-        <p:style>
-          <a:lnRef idx="1">
-            <a:schemeClr val="accent1"/>
-          </a:lnRef>
-          <a:fillRef idx="3">
-            <a:schemeClr val="accent1"/>
-          </a:fillRef>
-          <a:effectRef idx="2">
-            <a:schemeClr val="accent1"/>
-          </a:effectRef>
-          <a:fontRef idx="minor">
-            <a:schemeClr val="lt1"/>
-          </a:fontRef>
-        </p:style>
-        <p:txBody>
-          <a:bodyPr rtlCol="0" anchor="ctr"/>
-          <a:lstStyle/>
-          <a:p>
-            <a:pPr algn="ctr"/>
-          </a:p>
-        </p:txBody>
-      </p:sp>
-      <p:sp>
-        <p:nvSpPr>
-          <p:cNvPr id="66" name="TextBox 65"/>
-          <p:cNvSpPr txBox="1"/>
-          <p:nvPr/>
-        </p:nvSpPr>
-        <p:spPr>
-          <a:xfrm>
-            <a:off x="8540496" y="5184648"/>
-            <a:ext cx="3200400" cy="145938"/>
-          </a:xfrm>
-          <a:prstGeom prst="rect">
-            <a:avLst/>
-          </a:prstGeom>
-          <a:noFill/>
-        </p:spPr>
-        <p:txBody>
-          <a:bodyPr wrap="square">
-            <a:spAutoFit/>
-          </a:bodyPr>
-          <a:lstStyle/>
-          <a:p>
-            <a:pPr algn="l">
-              <a:spcAft>
-                <a:spcPts val="300"/>
-              </a:spcAft>
-            </a:pPr>
-            <a:r>
-              <a:rPr sz="1000" b="1">
-                <a:solidFill>
-                  <a:srgbClr val="0D3B66"/>
-                </a:solidFill>
-                <a:latin typeface="Calibri"/>
-              </a:rPr>
-              <a:t>Cascada</a:t>
-            </a:r>
-          </a:p>
-        </p:txBody>
-      </p:sp>
-      <p:sp>
-        <p:nvSpPr>
-          <p:cNvPr id="67" name="TextBox 66"/>
-          <p:cNvSpPr txBox="1"/>
-          <p:nvPr/>
-        </p:nvSpPr>
-        <p:spPr>
-          <a:xfrm>
-            <a:off x="8540496" y="5303154"/>
-            <a:ext cx="3200400" cy="180685"/>
-          </a:xfrm>
-          <a:prstGeom prst="rect">
-            <a:avLst/>
-          </a:prstGeom>
-          <a:noFill/>
-        </p:spPr>
-        <p:txBody>
-          <a:bodyPr wrap="square">
-            <a:spAutoFit/>
-          </a:bodyPr>
-          <a:lstStyle/>
-          <a:p>
-            <a:pPr algn="l">
-              <a:spcAft>
-                <a:spcPts val="300"/>
-              </a:spcAft>
-            </a:pPr>
-            <a:r>
-              <a:rPr sz="1200" b="1">
-                <a:solidFill>
-                  <a:srgbClr val="0D3B66"/>
-                </a:solidFill>
-                <a:latin typeface="Calibri"/>
-              </a:rPr>
-              <a:t>20 m³    &lt;0,1 %</a:t>
-            </a:r>
-          </a:p>
-        </p:txBody>
-      </p:sp>
-      <p:sp>
-        <p:nvSpPr>
-          <p:cNvPr id="68" name="Rounded Rectangle 67"/>
-          <p:cNvSpPr/>
-          <p:nvPr/>
-        </p:nvSpPr>
-        <p:spPr>
-          <a:xfrm>
-            <a:off x="201168" y="5705856"/>
-            <a:ext cx="11795760" cy="438912"/>
-          </a:xfrm>
-          <a:prstGeom prst="roundRect">
-            <a:avLst>
-              <a:gd name="adj" fmla="val 8000"/>
-            </a:avLst>
-          </a:prstGeom>
-          <a:solidFill>
-            <a:srgbClr val="FFF9EB"/>
-          </a:solidFill>
-          <a:ln w="6350">
-            <a:solidFill>
-              <a:srgbClr val="C9A227"/>
-            </a:solidFill>
-          </a:ln>
-        </p:spPr>
-        <p:style>
-          <a:lnRef idx="1">
-            <a:schemeClr val="accent1"/>
-          </a:lnRef>
-          <a:fillRef idx="3">
-            <a:schemeClr val="accent1"/>
-          </a:fillRef>
-          <a:effectRef idx="2">
-            <a:schemeClr val="accent1"/>
-          </a:effectRef>
-          <a:fontRef idx="minor">
-            <a:schemeClr val="lt1"/>
-          </a:fontRef>
-        </p:style>
-        <p:txBody>
-          <a:bodyPr rtlCol="0" anchor="ctr"/>
-          <a:lstStyle/>
-          <a:p>
-            <a:pPr algn="ctr"/>
-          </a:p>
-        </p:txBody>
-      </p:sp>
-      <p:sp>
-        <p:nvSpPr>
-          <p:cNvPr id="69" name="TextBox 68"/>
+          <p:cNvPr id="25" name="TextBox 24"/>
           <p:cNvSpPr txBox="1"/>
           <p:nvPr/>
         </p:nvSpPr>
@@ -15674,14 +16285,14 @@
                 </a:solidFill>
                 <a:latin typeface="Calibri"/>
               </a:rPr>
-              <a:t>Recepción 12/12/2025  ·  Capacitación 17/12/2025  ·  Francisco Jeldres  ·  Paula Azolas  ·  Mantención: C. Naranjo, M. Jara, R. Moreno, R. Díaz, J. Gutiérrez, H. Fierro</a:t>
-            </a:r>
-          </a:p>
-        </p:txBody>
-      </p:sp>
-      <p:sp>
-        <p:nvSpPr>
-          <p:cNvPr id="70" name="TextBox 69"/>
+              <a:t>Recepción 29/04/2026 (Anillo Norte / Anillo Sur)  ·  Capacitación 12/12/2025  ·  Joceline Lazo  ·  Constanza Vilches</a:t>
+            </a:r>
+          </a:p>
+        </p:txBody>
+      </p:sp>
+      <p:sp>
+        <p:nvSpPr>
+          <p:cNvPr id="26" name="TextBox 25"/>
           <p:cNvSpPr txBox="1"/>
           <p:nvPr/>
         </p:nvSpPr>
@@ -15713,7 +16324,7 @@
                 </a:solidFill>
                 <a:latin typeface="Calibri"/>
               </a:rPr>
-              <a:t>Mayo 26.357   ·   Junio 20.927   ·   Julio 31.239   ·   Agosto 1–17: 21.494   ·   proy. ago 39.195 m³.</a:t>
+              <a:t>Junio 664   ·   Julio 618   ·   Agosto 1–17: 366   ·   proy. ago 667 m³.</a:t>
             </a:r>
           </a:p>
           <a:p>
@@ -15729,7 +16340,7 @@
                 </a:solidFill>
                 <a:latin typeface="Calibri"/>
               </a:rPr>
-              <a:t>Julio = cabecera (7 puntos). 27, 35 y 36 no se suman: cadena Sandía → DL (lámina 2).</a:t>
+              <a:t>Cambio de monitoreo: se dejó Baños y Matriz Principal. Anillo Norte y Sur con lectura correcta desde el 19/05 (mayo no se grafica).</a:t>
             </a:r>
           </a:p>
         </p:txBody>

--- a/reports/Parque_Arauco/TMP_7MALLS/entrega_diego_anibal/Recorrido_ejecutivo_PA_MAE_20260817.pptx
+++ b/reports/Parque_Arauco/TMP_7MALLS/entrega_diego_anibal/Recorrido_ejecutivo_PA_MAE_20260817.pptx
@@ -11694,7 +11694,7 @@
                 </a:solidFill>
                 <a:latin typeface="Calibri"/>
               </a:rPr>
-              <a:t>Mayor consumo del recinto  ·  noche  ·  umbral  ·  Placa vs Falabella desde el 11/08</a:t>
+              <a:t>Cuando se inyecta Falabella, se corta Placa y el mall sale por Falabella</a:t>
             </a:r>
           </a:p>
         </p:txBody>
@@ -11708,7 +11708,7 @@
         <p:spPr>
           <a:xfrm>
             <a:off x="201168" y="987552"/>
-            <a:ext cx="11777472" cy="713232"/>
+            <a:ext cx="11777472" cy="658368"/>
           </a:xfrm>
           <a:prstGeom prst="roundRect">
             <a:avLst>
@@ -11755,32 +11755,32 @@
         <p:spPr>
           <a:xfrm>
             <a:off x="365760" y="1042415"/>
-            <a:ext cx="11475720" cy="603504"/>
-          </a:xfrm>
-          <a:prstGeom prst="rect">
-            <a:avLst/>
-          </a:prstGeom>
-          <a:noFill/>
-        </p:spPr>
-        <p:txBody>
-          <a:bodyPr wrap="square">
-            <a:spAutoFit/>
-          </a:bodyPr>
-          <a:lstStyle/>
-          <a:p>
-            <a:pPr algn="l">
-              <a:spcAft>
-                <a:spcPts val="300"/>
-              </a:spcAft>
-            </a:pPr>
-            <a:r>
-              <a:rPr sz="1300" b="0">
+            <a:ext cx="11475720" cy="548640"/>
+          </a:xfrm>
+          <a:prstGeom prst="rect">
+            <a:avLst/>
+          </a:prstGeom>
+          <a:noFill/>
+        </p:spPr>
+        <p:txBody>
+          <a:bodyPr wrap="square">
+            <a:spAutoFit/>
+          </a:bodyPr>
+          <a:lstStyle/>
+          <a:p>
+            <a:pPr algn="l">
+              <a:spcAft>
+                <a:spcPts val="300"/>
+              </a:spcAft>
+            </a:pPr>
+            <a:r>
+              <a:rPr sz="1400" b="0">
                 <a:solidFill>
                   <a:srgbClr val="0D3B66"/>
                 </a:solidFill>
                 <a:latin typeface="Calibri"/>
               </a:rPr>
-              <a:t>Placa Bancaria se lleva 68 % de julio (7.084 m³). Pasillo Técnico (26 m³) y ARROW (0,5 m³) son residuales. Propuesta: reubicar esos dos puntos para subdividir Placa y ver qué zona alimenta el volumen. En julio hubo madrugadas altas (hasta 65 m³); en agosto la noche queda ~0. Si esas noches vuelven, un control on/off en Placa tiene sentido. Hoy el mayor valor es partir el caudal diurno.</a:t>
+              <a:t>Placa Bancaria se lleva 68 % de julio (7.084 m³). Pasillo Técnico (26 m³) y ARROW (0,5 m³) casi no miden: son los puntos para reubicar y partir la línea.</a:t>
             </a:r>
           </a:p>
         </p:txBody>
@@ -11793,8 +11793,8 @@
         </p:nvSpPr>
         <p:spPr>
           <a:xfrm>
-            <a:off x="201168" y="1792224"/>
-            <a:ext cx="5833872" cy="3749039"/>
+            <a:off x="201168" y="1737360"/>
+            <a:ext cx="5833872" cy="3803904"/>
           </a:xfrm>
           <a:prstGeom prst="roundRect">
             <a:avLst>
@@ -11838,7 +11838,7 @@
         </p:nvSpPr>
         <p:spPr>
           <a:xfrm>
-            <a:off x="329184" y="1828800"/>
+            <a:off x="329184" y="1773936"/>
             <a:ext cx="5577840" cy="201168"/>
           </a:xfrm>
           <a:prstGeom prst="rect">
@@ -11864,7 +11864,7 @@
                 </a:solidFill>
                 <a:latin typeface="Calibri"/>
               </a:rPr>
-              <a:t>NOCHES DE PLACA — m³ 00:00–06:00 (jul–ago)</a:t>
+              <a:t>NOCHE 00–06  ·  mall cerrado</a:t>
             </a:r>
           </a:p>
         </p:txBody>
@@ -11885,7 +11885,7 @@
         </p:blipFill>
         <p:spPr>
           <a:xfrm>
-            <a:off x="292608" y="2489736"/>
+            <a:off x="292608" y="2462304"/>
             <a:ext cx="5650992" cy="2518606"/>
           </a:xfrm>
           <a:prstGeom prst="rect">
@@ -11901,8 +11901,8 @@
         </p:nvSpPr>
         <p:spPr>
           <a:xfrm>
-            <a:off x="6163056" y="1792224"/>
-            <a:ext cx="5815584" cy="3749039"/>
+            <a:off x="6163056" y="1737360"/>
+            <a:ext cx="5815584" cy="3803904"/>
           </a:xfrm>
           <a:prstGeom prst="roundRect">
             <a:avLst>
@@ -11946,7 +11946,7 @@
         </p:nvSpPr>
         <p:spPr>
           <a:xfrm>
-            <a:off x="6291072" y="1828800"/>
+            <a:off x="6291072" y="1773936"/>
             <a:ext cx="5559552" cy="201168"/>
           </a:xfrm>
           <a:prstGeom prst="rect">
@@ -11972,7 +11972,7 @@
                 </a:solidFill>
                 <a:latin typeface="Calibri"/>
               </a:rPr>
-              <a:t>PLACA vs FALABELLA — m³/día desde el 11/08</a:t>
+              <a:t>DESDE EL 15/08 EL MALL SALE POR FALABELLA</a:t>
             </a:r>
           </a:p>
         </p:txBody>
@@ -11993,7 +11993,7 @@
         </p:blipFill>
         <p:spPr>
           <a:xfrm>
-            <a:off x="6254496" y="2493811"/>
+            <a:off x="6254496" y="2466379"/>
             <a:ext cx="5632704" cy="2510456"/>
           </a:xfrm>
           <a:prstGeom prst="rect">
@@ -12056,49 +12056,49 @@
         </p:nvSpPr>
         <p:spPr>
           <a:xfrm>
-            <a:off x="365760" y="5669280"/>
-            <a:ext cx="11475720" cy="969264"/>
-          </a:xfrm>
-          <a:prstGeom prst="rect">
-            <a:avLst/>
-          </a:prstGeom>
-          <a:noFill/>
-        </p:spPr>
-        <p:txBody>
-          <a:bodyPr wrap="square">
-            <a:spAutoFit/>
-          </a:bodyPr>
-          <a:lstStyle/>
-          <a:p>
-            <a:pPr algn="l">
-              <a:spcAft>
-                <a:spcPts val="300"/>
-              </a:spcAft>
-            </a:pPr>
-            <a:r>
-              <a:rPr sz="1200" b="0">
+            <a:off x="365760" y="5687568"/>
+            <a:ext cx="11475720" cy="950976"/>
+          </a:xfrm>
+          <a:prstGeom prst="rect">
+            <a:avLst/>
+          </a:prstGeom>
+          <a:noFill/>
+        </p:spPr>
+        <p:txBody>
+          <a:bodyPr wrap="square">
+            <a:spAutoFit/>
+          </a:bodyPr>
+          <a:lstStyle/>
+          <a:p>
+            <a:pPr algn="l">
+              <a:spcAft>
+                <a:spcPts val="300"/>
+              </a:spcAft>
+            </a:pPr>
+            <a:r>
+              <a:rPr sz="1400" b="0">
                 <a:solidFill>
                   <a:srgbClr val="0D3B66"/>
                 </a:solidFill>
                 <a:latin typeface="Calibri"/>
               </a:rPr>
-              <a:t>Umbral a cargar: diario Placa 155 m³/día (agosto operativo × 1,25; atrapa un salto tipo junio ~410). Nocturno 15 m³ en 00–06 (julio–ago mediana 1,5 m³; el 10/08 = 0 m³). Eso marca noches tipo 3/07 o 13/07 (48–65 m³) sin spamear agosto, ya ~0. Falabella aún sin umbral fijo (2–3 semanas de baseline; sus noches desde el 12/08 sí entran al análisis).</a:t>
-            </a:r>
-          </a:p>
-          <a:p>
-            <a:pPr algn="l">
-              <a:spcAft>
-                <a:spcPts val="300"/>
-              </a:spcAft>
-            </a:pPr>
-            <a:r>
-              <a:rPr sz="1200" b="1">
+              <a:t>Desde el 15/08 Placa se fue a 0. Ya pasó: se inyecta Falabella, se corta Placa y el mall sale por Falabella.</a:t>
+            </a:r>
+          </a:p>
+          <a:p>
+            <a:pPr algn="l">
+              <a:spcAft>
+                <a:spcPts val="300"/>
+              </a:spcAft>
+            </a:pPr>
+            <a:r>
+              <a:rPr sz="1400" b="1">
                 <a:solidFill>
                   <a:srgbClr val="0D3B66"/>
                 </a:solidFill>
                 <a:latin typeface="Calibri"/>
               </a:rPr>
-              <a:t>11–14/08: Placa 105 m³/día vs Falabella 43 m³/día (Placa ~2,5 veces Falabella). 15–17/08 Placa suma 1 m³ y Falabella 327 m³: validar en terreno si Placa se cortó o dejó de medir. Prioridad: reubicar Pasillo Técnico y ARROW para subdividir Placa.</a:t>
+              <a:t>Umbrales: Placa 290 m³/día (julio andaba en 229). Falabella 140 m³/día (ahora ~112). Noche 15 m³: el mall está cerrado y esa madrugada es alta. Siguiente paso: subdividir la línea de Falabella para ver hacia dónde va el consumo de noche.</a:t>
             </a:r>
           </a:p>
         </p:txBody>

--- a/reports/Parque_Arauco/TMP_7MALLS/entrega_diego_anibal/Recorrido_ejecutivo_PA_MAE_20260817.pptx
+++ b/reports/Parque_Arauco/TMP_7MALLS/entrega_diego_anibal/Recorrido_ejecutivo_PA_MAE_20260817.pptx
@@ -16,6 +16,7 @@
     <p:sldId id="264" r:id="rId15"/>
     <p:sldId id="265" r:id="rId16"/>
     <p:sldId id="266" r:id="rId17"/>
+    <p:sldId id="267" r:id="rId18"/>
   </p:sldIdLst>
   <p:sldSz cx="12191695" cy="6858000" type="screen4x3"/>
   <p:notesSz cx="6858000" cy="9144000"/>
@@ -3309,7 +3310,7 @@
                 </a:solidFill>
                 <a:latin typeface="Calibri"/>
               </a:rPr>
-              <a:t>Lámina 2: MAE hallazgos  ·  MAM Placa Bancaria  ·  PAK cadena Sandía / DL</a:t>
+              <a:t>Lámina 2: MAE  ·  MAM Placa  ·  MAQ Matriz  ·  PAK cadena</a:t>
             </a:r>
           </a:p>
         </p:txBody>
@@ -3476,7 +3477,7 @@
                 </a:solidFill>
                 <a:latin typeface="Calibri"/>
               </a:rPr>
-              <a:t>PAK  ·  Equipos y consumo</a:t>
+              <a:t>CUR  ·  Equipos y consumo</a:t>
             </a:r>
           </a:p>
         </p:txBody>
@@ -3515,7 +3516,7 @@
                 </a:solidFill>
                 <a:latin typeface="Calibri"/>
               </a:rPr>
-              <a:t>Parque Arauco Kennedy   |   10 puntos WES   |   julio = cabecera (sin 27, 35 y 36)   |   01/05/2026 – 17/08/2026</a:t>
+              <a:t>Arauco Curauma   |   2 puntos WES   |   01/05/2026 – 17/08/2026</a:t>
             </a:r>
           </a:p>
         </p:txBody>
@@ -3529,7 +3530,7 @@
         <p:spPr>
           <a:xfrm>
             <a:off x="201168" y="1024128"/>
-            <a:ext cx="2286000" cy="621792"/>
+            <a:ext cx="5861304" cy="658368"/>
           </a:xfrm>
           <a:prstGeom prst="roundRect">
             <a:avLst>
@@ -3541,7 +3542,7 @@
           </a:solidFill>
           <a:ln w="6350">
             <a:solidFill>
-              <a:srgbClr val="8C5A5A"/>
+              <a:srgbClr val="C9A227"/>
             </a:solidFill>
           </a:ln>
         </p:spPr>
@@ -3576,32 +3577,32 @@
         <p:spPr>
           <a:xfrm>
             <a:off x="274320" y="1060704"/>
-            <a:ext cx="2157984" cy="146304"/>
-          </a:xfrm>
-          <a:prstGeom prst="rect">
-            <a:avLst/>
-          </a:prstGeom>
-          <a:noFill/>
-        </p:spPr>
-        <p:txBody>
-          <a:bodyPr wrap="square">
-            <a:spAutoFit/>
-          </a:bodyPr>
-          <a:lstStyle/>
-          <a:p>
-            <a:pPr algn="l">
-              <a:spcAft>
-                <a:spcPts val="300"/>
-              </a:spcAft>
-            </a:pPr>
-            <a:r>
-              <a:rPr sz="900" b="1">
+            <a:ext cx="5733288" cy="146304"/>
+          </a:xfrm>
+          <a:prstGeom prst="rect">
+            <a:avLst/>
+          </a:prstGeom>
+          <a:noFill/>
+        </p:spPr>
+        <p:txBody>
+          <a:bodyPr wrap="square">
+            <a:spAutoFit/>
+          </a:bodyPr>
+          <a:lstStyle/>
+          <a:p>
+            <a:pPr algn="l">
+              <a:spcAft>
+                <a:spcPts val="300"/>
+              </a:spcAft>
+            </a:pPr>
+            <a:r>
+              <a:rPr sz="1000" b="1">
                 <a:solidFill>
                   <a:srgbClr val="C9A227"/>
                 </a:solidFill>
                 <a:latin typeface="Calibri"/>
               </a:rPr>
-              <a:t>000025-20</a:t>
+              <a:t>000025-38</a:t>
             </a:r>
           </a:p>
         </p:txBody>
@@ -3614,33 +3615,33 @@
         </p:nvSpPr>
         <p:spPr>
           <a:xfrm>
-            <a:off x="274320" y="1225296"/>
-            <a:ext cx="2157984" cy="201168"/>
-          </a:xfrm>
-          <a:prstGeom prst="rect">
-            <a:avLst/>
-          </a:prstGeom>
-          <a:noFill/>
-        </p:spPr>
-        <p:txBody>
-          <a:bodyPr wrap="square">
-            <a:spAutoFit/>
-          </a:bodyPr>
-          <a:lstStyle/>
-          <a:p>
-            <a:pPr algn="l">
-              <a:spcAft>
-                <a:spcPts val="300"/>
-              </a:spcAft>
-            </a:pPr>
-            <a:r>
-              <a:rPr sz="1100" b="1">
+            <a:off x="274320" y="1243584"/>
+            <a:ext cx="5733288" cy="201168"/>
+          </a:xfrm>
+          <a:prstGeom prst="rect">
+            <a:avLst/>
+          </a:prstGeom>
+          <a:noFill/>
+        </p:spPr>
+        <p:txBody>
+          <a:bodyPr wrap="square">
+            <a:spAutoFit/>
+          </a:bodyPr>
+          <a:lstStyle/>
+          <a:p>
+            <a:pPr algn="l">
+              <a:spcAft>
+                <a:spcPts val="300"/>
+              </a:spcAft>
+            </a:pPr>
+            <a:r>
+              <a:rPr sz="1200" b="1">
                 <a:solidFill>
                   <a:srgbClr val="0D3B66"/>
                 </a:solidFill>
                 <a:latin typeface="Calibri"/>
               </a:rPr>
-              <a:t>Matriz Andén</a:t>
+              <a:t>Anillo Norte</a:t>
             </a:r>
           </a:p>
         </p:txBody>
@@ -3653,461 +3654,8 @@
         </p:nvSpPr>
         <p:spPr>
           <a:xfrm>
-            <a:off x="2578608" y="1024128"/>
-            <a:ext cx="2286000" cy="621792"/>
-          </a:xfrm>
-          <a:prstGeom prst="roundRect">
-            <a:avLst>
-              <a:gd name="adj" fmla="val 8000"/>
-            </a:avLst>
-          </a:prstGeom>
-          <a:solidFill>
-            <a:srgbClr val="F5F7FA"/>
-          </a:solidFill>
-          <a:ln w="6350">
-            <a:solidFill>
-              <a:srgbClr val="46648C"/>
-            </a:solidFill>
-          </a:ln>
-        </p:spPr>
-        <p:style>
-          <a:lnRef idx="1">
-            <a:schemeClr val="accent1"/>
-          </a:lnRef>
-          <a:fillRef idx="3">
-            <a:schemeClr val="accent1"/>
-          </a:fillRef>
-          <a:effectRef idx="2">
-            <a:schemeClr val="accent1"/>
-          </a:effectRef>
-          <a:fontRef idx="minor">
-            <a:schemeClr val="lt1"/>
-          </a:fontRef>
-        </p:style>
-        <p:txBody>
-          <a:bodyPr rtlCol="0" anchor="ctr"/>
-          <a:lstStyle/>
-          <a:p>
-            <a:pPr algn="ctr"/>
-          </a:p>
-        </p:txBody>
-      </p:sp>
-      <p:sp>
-        <p:nvSpPr>
-          <p:cNvPr id="11" name="TextBox 10"/>
-          <p:cNvSpPr txBox="1"/>
-          <p:nvPr/>
-        </p:nvSpPr>
-        <p:spPr>
-          <a:xfrm>
-            <a:off x="2651760" y="1060704"/>
-            <a:ext cx="2157984" cy="146304"/>
-          </a:xfrm>
-          <a:prstGeom prst="rect">
-            <a:avLst/>
-          </a:prstGeom>
-          <a:noFill/>
-        </p:spPr>
-        <p:txBody>
-          <a:bodyPr wrap="square">
-            <a:spAutoFit/>
-          </a:bodyPr>
-          <a:lstStyle/>
-          <a:p>
-            <a:pPr algn="l">
-              <a:spcAft>
-                <a:spcPts val="300"/>
-              </a:spcAft>
-            </a:pPr>
-            <a:r>
-              <a:rPr sz="900" b="1">
-                <a:solidFill>
-                  <a:srgbClr val="C9A227"/>
-                </a:solidFill>
-                <a:latin typeface="Calibri"/>
-              </a:rPr>
-              <a:t>000025-21</a:t>
-            </a:r>
-          </a:p>
-        </p:txBody>
-      </p:sp>
-      <p:sp>
-        <p:nvSpPr>
-          <p:cNvPr id="12" name="TextBox 11"/>
-          <p:cNvSpPr txBox="1"/>
-          <p:nvPr/>
-        </p:nvSpPr>
-        <p:spPr>
-          <a:xfrm>
-            <a:off x="2651760" y="1225296"/>
-            <a:ext cx="2157984" cy="201168"/>
-          </a:xfrm>
-          <a:prstGeom prst="rect">
-            <a:avLst/>
-          </a:prstGeom>
-          <a:noFill/>
-        </p:spPr>
-        <p:txBody>
-          <a:bodyPr wrap="square">
-            <a:spAutoFit/>
-          </a:bodyPr>
-          <a:lstStyle/>
-          <a:p>
-            <a:pPr algn="l">
-              <a:spcAft>
-                <a:spcPts val="300"/>
-              </a:spcAft>
-            </a:pPr>
-            <a:r>
-              <a:rPr sz="1100" b="1">
-                <a:solidFill>
-                  <a:srgbClr val="0D3B66"/>
-                </a:solidFill>
-                <a:latin typeface="Calibri"/>
-              </a:rPr>
-              <a:t>Locales Gast.</a:t>
-            </a:r>
-          </a:p>
-        </p:txBody>
-      </p:sp>
-      <p:sp>
-        <p:nvSpPr>
-          <p:cNvPr id="13" name="Rounded Rectangle 12"/>
-          <p:cNvSpPr/>
-          <p:nvPr/>
-        </p:nvSpPr>
-        <p:spPr>
-          <a:xfrm>
-            <a:off x="4956048" y="1024128"/>
-            <a:ext cx="2286000" cy="621792"/>
-          </a:xfrm>
-          <a:prstGeom prst="roundRect">
-            <a:avLst>
-              <a:gd name="adj" fmla="val 8000"/>
-            </a:avLst>
-          </a:prstGeom>
-          <a:solidFill>
-            <a:srgbClr val="F5F7FA"/>
-          </a:solidFill>
-          <a:ln w="6350">
-            <a:solidFill>
-              <a:srgbClr val="A0783C"/>
-            </a:solidFill>
-          </a:ln>
-        </p:spPr>
-        <p:style>
-          <a:lnRef idx="1">
-            <a:schemeClr val="accent1"/>
-          </a:lnRef>
-          <a:fillRef idx="3">
-            <a:schemeClr val="accent1"/>
-          </a:fillRef>
-          <a:effectRef idx="2">
-            <a:schemeClr val="accent1"/>
-          </a:effectRef>
-          <a:fontRef idx="minor">
-            <a:schemeClr val="lt1"/>
-          </a:fontRef>
-        </p:style>
-        <p:txBody>
-          <a:bodyPr rtlCol="0" anchor="ctr"/>
-          <a:lstStyle/>
-          <a:p>
-            <a:pPr algn="ctr"/>
-          </a:p>
-        </p:txBody>
-      </p:sp>
-      <p:sp>
-        <p:nvSpPr>
-          <p:cNvPr id="14" name="TextBox 13"/>
-          <p:cNvSpPr txBox="1"/>
-          <p:nvPr/>
-        </p:nvSpPr>
-        <p:spPr>
-          <a:xfrm>
-            <a:off x="5029200" y="1060704"/>
-            <a:ext cx="2157984" cy="146304"/>
-          </a:xfrm>
-          <a:prstGeom prst="rect">
-            <a:avLst/>
-          </a:prstGeom>
-          <a:noFill/>
-        </p:spPr>
-        <p:txBody>
-          <a:bodyPr wrap="square">
-            <a:spAutoFit/>
-          </a:bodyPr>
-          <a:lstStyle/>
-          <a:p>
-            <a:pPr algn="l">
-              <a:spcAft>
-                <a:spcPts val="300"/>
-              </a:spcAft>
-            </a:pPr>
-            <a:r>
-              <a:rPr sz="900" b="1">
-                <a:solidFill>
-                  <a:srgbClr val="C9A227"/>
-                </a:solidFill>
-                <a:latin typeface="Calibri"/>
-              </a:rPr>
-              <a:t>000025-22</a:t>
-            </a:r>
-          </a:p>
-        </p:txBody>
-      </p:sp>
-      <p:sp>
-        <p:nvSpPr>
-          <p:cNvPr id="15" name="TextBox 14"/>
-          <p:cNvSpPr txBox="1"/>
-          <p:nvPr/>
-        </p:nvSpPr>
-        <p:spPr>
-          <a:xfrm>
-            <a:off x="5029200" y="1225296"/>
-            <a:ext cx="2157984" cy="201168"/>
-          </a:xfrm>
-          <a:prstGeom prst="rect">
-            <a:avLst/>
-          </a:prstGeom>
-          <a:noFill/>
-        </p:spPr>
-        <p:txBody>
-          <a:bodyPr wrap="square">
-            <a:spAutoFit/>
-          </a:bodyPr>
-          <a:lstStyle/>
-          <a:p>
-            <a:pPr algn="l">
-              <a:spcAft>
-                <a:spcPts val="300"/>
-              </a:spcAft>
-            </a:pPr>
-            <a:r>
-              <a:rPr sz="1100" b="1">
-                <a:solidFill>
-                  <a:srgbClr val="0D3B66"/>
-                </a:solidFill>
-                <a:latin typeface="Calibri"/>
-              </a:rPr>
-              <a:t>Sandía Antigua</a:t>
-            </a:r>
-          </a:p>
-        </p:txBody>
-      </p:sp>
-      <p:sp>
-        <p:nvSpPr>
-          <p:cNvPr id="16" name="TextBox 15"/>
-          <p:cNvSpPr txBox="1"/>
-          <p:nvPr/>
-        </p:nvSpPr>
-        <p:spPr>
-          <a:xfrm>
-            <a:off x="5029200" y="1444752"/>
-            <a:ext cx="2157984" cy="164592"/>
-          </a:xfrm>
-          <a:prstGeom prst="rect">
-            <a:avLst/>
-          </a:prstGeom>
-          <a:noFill/>
-        </p:spPr>
-        <p:txBody>
-          <a:bodyPr wrap="square">
-            <a:spAutoFit/>
-          </a:bodyPr>
-          <a:lstStyle/>
-          <a:p>
-            <a:pPr algn="l">
-              <a:spcAft>
-                <a:spcPts val="300"/>
-              </a:spcAft>
-            </a:pPr>
-            <a:r>
-              <a:rPr sz="800" b="0">
-                <a:solidFill>
-                  <a:srgbClr val="5A5A5A"/>
-                </a:solidFill>
-                <a:latin typeface="Calibri"/>
-              </a:rPr>
-              <a:t>alimenta 27</a:t>
-            </a:r>
-          </a:p>
-        </p:txBody>
-      </p:sp>
-      <p:sp>
-        <p:nvSpPr>
-          <p:cNvPr id="17" name="Rounded Rectangle 16"/>
-          <p:cNvSpPr/>
-          <p:nvPr/>
-        </p:nvSpPr>
-        <p:spPr>
-          <a:xfrm>
-            <a:off x="7333488" y="1024128"/>
-            <a:ext cx="2286000" cy="621792"/>
-          </a:xfrm>
-          <a:prstGeom prst="roundRect">
-            <a:avLst>
-              <a:gd name="adj" fmla="val 8000"/>
-            </a:avLst>
-          </a:prstGeom>
-          <a:solidFill>
-            <a:srgbClr val="F5F7FA"/>
-          </a:solidFill>
-          <a:ln w="6350">
-            <a:solidFill>
-              <a:srgbClr val="1F77B4"/>
-            </a:solidFill>
-          </a:ln>
-        </p:spPr>
-        <p:style>
-          <a:lnRef idx="1">
-            <a:schemeClr val="accent1"/>
-          </a:lnRef>
-          <a:fillRef idx="3">
-            <a:schemeClr val="accent1"/>
-          </a:fillRef>
-          <a:effectRef idx="2">
-            <a:schemeClr val="accent1"/>
-          </a:effectRef>
-          <a:fontRef idx="minor">
-            <a:schemeClr val="lt1"/>
-          </a:fontRef>
-        </p:style>
-        <p:txBody>
-          <a:bodyPr rtlCol="0" anchor="ctr"/>
-          <a:lstStyle/>
-          <a:p>
-            <a:pPr algn="ctr"/>
-          </a:p>
-        </p:txBody>
-      </p:sp>
-      <p:sp>
-        <p:nvSpPr>
-          <p:cNvPr id="18" name="TextBox 17"/>
-          <p:cNvSpPr txBox="1"/>
-          <p:nvPr/>
-        </p:nvSpPr>
-        <p:spPr>
-          <a:xfrm>
-            <a:off x="7406640" y="1060704"/>
-            <a:ext cx="2157984" cy="146304"/>
-          </a:xfrm>
-          <a:prstGeom prst="rect">
-            <a:avLst/>
-          </a:prstGeom>
-          <a:noFill/>
-        </p:spPr>
-        <p:txBody>
-          <a:bodyPr wrap="square">
-            <a:spAutoFit/>
-          </a:bodyPr>
-          <a:lstStyle/>
-          <a:p>
-            <a:pPr algn="l">
-              <a:spcAft>
-                <a:spcPts val="300"/>
-              </a:spcAft>
-            </a:pPr>
-            <a:r>
-              <a:rPr sz="900" b="1">
-                <a:solidFill>
-                  <a:srgbClr val="C9A227"/>
-                </a:solidFill>
-                <a:latin typeface="Calibri"/>
-              </a:rPr>
-              <a:t>000025-28</a:t>
-            </a:r>
-          </a:p>
-        </p:txBody>
-      </p:sp>
-      <p:sp>
-        <p:nvSpPr>
-          <p:cNvPr id="19" name="TextBox 18"/>
-          <p:cNvSpPr txBox="1"/>
-          <p:nvPr/>
-        </p:nvSpPr>
-        <p:spPr>
-          <a:xfrm>
-            <a:off x="7406640" y="1225296"/>
-            <a:ext cx="2157984" cy="201168"/>
-          </a:xfrm>
-          <a:prstGeom prst="rect">
-            <a:avLst/>
-          </a:prstGeom>
-          <a:noFill/>
-        </p:spPr>
-        <p:txBody>
-          <a:bodyPr wrap="square">
-            <a:spAutoFit/>
-          </a:bodyPr>
-          <a:lstStyle/>
-          <a:p>
-            <a:pPr algn="l">
-              <a:spcAft>
-                <a:spcPts val="300"/>
-              </a:spcAft>
-            </a:pPr>
-            <a:r>
-              <a:rPr sz="1100" b="1">
-                <a:solidFill>
-                  <a:srgbClr val="0D3B66"/>
-                </a:solidFill>
-                <a:latin typeface="Calibri"/>
-              </a:rPr>
-              <a:t>Sandía Nueva</a:t>
-            </a:r>
-          </a:p>
-        </p:txBody>
-      </p:sp>
-      <p:sp>
-        <p:nvSpPr>
-          <p:cNvPr id="20" name="TextBox 19"/>
-          <p:cNvSpPr txBox="1"/>
-          <p:nvPr/>
-        </p:nvSpPr>
-        <p:spPr>
-          <a:xfrm>
-            <a:off x="7406640" y="1444752"/>
-            <a:ext cx="2157984" cy="164592"/>
-          </a:xfrm>
-          <a:prstGeom prst="rect">
-            <a:avLst/>
-          </a:prstGeom>
-          <a:noFill/>
-        </p:spPr>
-        <p:txBody>
-          <a:bodyPr wrap="square">
-            <a:spAutoFit/>
-          </a:bodyPr>
-          <a:lstStyle/>
-          <a:p>
-            <a:pPr algn="l">
-              <a:spcAft>
-                <a:spcPts val="300"/>
-              </a:spcAft>
-            </a:pPr>
-            <a:r>
-              <a:rPr sz="800" b="0">
-                <a:solidFill>
-                  <a:srgbClr val="5A5A5A"/>
-                </a:solidFill>
-                <a:latin typeface="Calibri"/>
-              </a:rPr>
-              <a:t>alimenta 27</a:t>
-            </a:r>
-          </a:p>
-        </p:txBody>
-      </p:sp>
-      <p:sp>
-        <p:nvSpPr>
-          <p:cNvPr id="21" name="Rounded Rectangle 20"/>
-          <p:cNvSpPr/>
-          <p:nvPr/>
-        </p:nvSpPr>
-        <p:spPr>
-          <a:xfrm>
-            <a:off x="9710928" y="1024128"/>
-            <a:ext cx="2286000" cy="621792"/>
+            <a:off x="6135624" y="1024128"/>
+            <a:ext cx="5861304" cy="658368"/>
           </a:xfrm>
           <a:prstGeom prst="roundRect">
             <a:avLst>
@@ -4147,92 +3695,92 @@
       </p:sp>
       <p:sp>
         <p:nvSpPr>
-          <p:cNvPr id="22" name="TextBox 21"/>
-          <p:cNvSpPr txBox="1"/>
-          <p:nvPr/>
-        </p:nvSpPr>
-        <p:spPr>
-          <a:xfrm>
-            <a:off x="9784080" y="1060704"/>
-            <a:ext cx="2157984" cy="146304"/>
-          </a:xfrm>
-          <a:prstGeom prst="rect">
-            <a:avLst/>
-          </a:prstGeom>
-          <a:noFill/>
-        </p:spPr>
-        <p:txBody>
-          <a:bodyPr wrap="square">
-            <a:spAutoFit/>
-          </a:bodyPr>
-          <a:lstStyle/>
-          <a:p>
-            <a:pPr algn="l">
-              <a:spcAft>
-                <a:spcPts val="300"/>
-              </a:spcAft>
-            </a:pPr>
-            <a:r>
-              <a:rPr sz="900" b="1">
+          <p:cNvPr id="11" name="TextBox 10"/>
+          <p:cNvSpPr txBox="1"/>
+          <p:nvPr/>
+        </p:nvSpPr>
+        <p:spPr>
+          <a:xfrm>
+            <a:off x="6208776" y="1060704"/>
+            <a:ext cx="5733288" cy="146304"/>
+          </a:xfrm>
+          <a:prstGeom prst="rect">
+            <a:avLst/>
+          </a:prstGeom>
+          <a:noFill/>
+        </p:spPr>
+        <p:txBody>
+          <a:bodyPr wrap="square">
+            <a:spAutoFit/>
+          </a:bodyPr>
+          <a:lstStyle/>
+          <a:p>
+            <a:pPr algn="l">
+              <a:spcAft>
+                <a:spcPts val="300"/>
+              </a:spcAft>
+            </a:pPr>
+            <a:r>
+              <a:rPr sz="1000" b="1">
                 <a:solidFill>
                   <a:srgbClr val="C9A227"/>
                 </a:solidFill>
                 <a:latin typeface="Calibri"/>
               </a:rPr>
-              <a:t>000025-29</a:t>
-            </a:r>
-          </a:p>
-        </p:txBody>
-      </p:sp>
-      <p:sp>
-        <p:nvSpPr>
-          <p:cNvPr id="23" name="TextBox 22"/>
-          <p:cNvSpPr txBox="1"/>
-          <p:nvPr/>
-        </p:nvSpPr>
-        <p:spPr>
-          <a:xfrm>
-            <a:off x="9784080" y="1225296"/>
-            <a:ext cx="2157984" cy="201168"/>
-          </a:xfrm>
-          <a:prstGeom prst="rect">
-            <a:avLst/>
-          </a:prstGeom>
-          <a:noFill/>
-        </p:spPr>
-        <p:txBody>
-          <a:bodyPr wrap="square">
-            <a:spAutoFit/>
-          </a:bodyPr>
-          <a:lstStyle/>
-          <a:p>
-            <a:pPr algn="l">
-              <a:spcAft>
-                <a:spcPts val="300"/>
-              </a:spcAft>
-            </a:pPr>
-            <a:r>
-              <a:rPr sz="1100" b="1">
+              <a:t>000025-37</a:t>
+            </a:r>
+          </a:p>
+        </p:txBody>
+      </p:sp>
+      <p:sp>
+        <p:nvSpPr>
+          <p:cNvPr id="12" name="TextBox 11"/>
+          <p:cNvSpPr txBox="1"/>
+          <p:nvPr/>
+        </p:nvSpPr>
+        <p:spPr>
+          <a:xfrm>
+            <a:off x="6208776" y="1243584"/>
+            <a:ext cx="5733288" cy="201168"/>
+          </a:xfrm>
+          <a:prstGeom prst="rect">
+            <a:avLst/>
+          </a:prstGeom>
+          <a:noFill/>
+        </p:spPr>
+        <p:txBody>
+          <a:bodyPr wrap="square">
+            <a:spAutoFit/>
+          </a:bodyPr>
+          <a:lstStyle/>
+          <a:p>
+            <a:pPr algn="l">
+              <a:spcAft>
+                <a:spcPts val="300"/>
+              </a:spcAft>
+            </a:pPr>
+            <a:r>
+              <a:rPr sz="1200" b="1">
                 <a:solidFill>
                   <a:srgbClr val="0D3B66"/>
                 </a:solidFill>
                 <a:latin typeface="Calibri"/>
               </a:rPr>
-              <a:t>Restaurante</a:t>
-            </a:r>
-          </a:p>
-        </p:txBody>
-      </p:sp>
-      <p:sp>
-        <p:nvSpPr>
-          <p:cNvPr id="24" name="Rounded Rectangle 23"/>
+              <a:t>Anillo Sur</a:t>
+            </a:r>
+          </a:p>
+        </p:txBody>
+      </p:sp>
+      <p:sp>
+        <p:nvSpPr>
+          <p:cNvPr id="13" name="Rounded Rectangle 12"/>
           <p:cNvSpPr/>
           <p:nvPr/>
         </p:nvSpPr>
         <p:spPr>
           <a:xfrm>
-            <a:off x="201168" y="1719072"/>
-            <a:ext cx="2286000" cy="621792"/>
+            <a:off x="201168" y="1792224"/>
+            <a:ext cx="7973568" cy="3822191"/>
           </a:xfrm>
           <a:prstGeom prst="roundRect">
             <a:avLst>
@@ -4242,10 +3790,8 @@
           <a:solidFill>
             <a:srgbClr val="F5F7FA"/>
           </a:solidFill>
-          <a:ln w="6350">
-            <a:solidFill>
-              <a:srgbClr val="508282"/>
-            </a:solidFill>
+          <a:ln>
+            <a:noFill/>
           </a:ln>
         </p:spPr>
         <p:style>
@@ -4270,94 +3816,40 @@
           </a:p>
         </p:txBody>
       </p:sp>
-      <p:sp>
-        <p:nvSpPr>
-          <p:cNvPr id="25" name="TextBox 24"/>
-          <p:cNvSpPr txBox="1"/>
-          <p:nvPr/>
-        </p:nvSpPr>
-        <p:spPr>
-          <a:xfrm>
-            <a:off x="274320" y="1755648"/>
-            <a:ext cx="2157984" cy="146304"/>
-          </a:xfrm>
-          <a:prstGeom prst="rect">
-            <a:avLst/>
-          </a:prstGeom>
-          <a:noFill/>
-        </p:spPr>
-        <p:txBody>
-          <a:bodyPr wrap="square">
-            <a:spAutoFit/>
-          </a:bodyPr>
-          <a:lstStyle/>
-          <a:p>
-            <a:pPr algn="l">
-              <a:spcAft>
-                <a:spcPts val="300"/>
-              </a:spcAft>
-            </a:pPr>
-            <a:r>
-              <a:rPr sz="900" b="1">
-                <a:solidFill>
-                  <a:srgbClr val="C9A227"/>
-                </a:solidFill>
-                <a:latin typeface="Calibri"/>
-              </a:rPr>
-              <a:t>000025-23</a:t>
-            </a:r>
-          </a:p>
-        </p:txBody>
-      </p:sp>
-      <p:sp>
-        <p:nvSpPr>
-          <p:cNvPr id="26" name="TextBox 25"/>
-          <p:cNvSpPr txBox="1"/>
-          <p:nvPr/>
-        </p:nvSpPr>
-        <p:spPr>
-          <a:xfrm>
-            <a:off x="274320" y="1920240"/>
-            <a:ext cx="2157984" cy="201168"/>
-          </a:xfrm>
-          <a:prstGeom prst="rect">
-            <a:avLst/>
-          </a:prstGeom>
-          <a:noFill/>
-        </p:spPr>
-        <p:txBody>
-          <a:bodyPr wrap="square">
-            <a:spAutoFit/>
-          </a:bodyPr>
-          <a:lstStyle/>
-          <a:p>
-            <a:pPr algn="l">
-              <a:spcAft>
-                <a:spcPts val="300"/>
-              </a:spcAft>
-            </a:pPr>
-            <a:r>
-              <a:rPr sz="1100" b="1">
-                <a:solidFill>
-                  <a:srgbClr val="0D3B66"/>
-                </a:solidFill>
-                <a:latin typeface="Calibri"/>
-              </a:rPr>
-              <a:t>Pileta</a:t>
-            </a:r>
-          </a:p>
-        </p:txBody>
-      </p:sp>
-      <p:sp>
-        <p:nvSpPr>
-          <p:cNvPr id="27" name="Rounded Rectangle 26"/>
+      <p:pic>
+        <p:nvPicPr>
+          <p:cNvPr id="14" name="Picture 13" descr="cur_mensual_may_ago.png"/>
+          <p:cNvPicPr>
+            <a:picLocks noChangeAspect="1"/>
+          </p:cNvPicPr>
+          <p:nvPr/>
+        </p:nvPicPr>
+        <p:blipFill>
+          <a:blip r:embed="rId3"/>
+          <a:stretch>
+            <a:fillRect/>
+          </a:stretch>
+        </p:blipFill>
+        <p:spPr>
+          <a:xfrm>
+            <a:off x="274320" y="2031551"/>
+            <a:ext cx="7827264" cy="3343536"/>
+          </a:xfrm>
+          <a:prstGeom prst="rect">
+            <a:avLst/>
+          </a:prstGeom>
+        </p:spPr>
+      </p:pic>
+      <p:sp>
+        <p:nvSpPr>
+          <p:cNvPr id="15" name="Rounded Rectangle 14"/>
           <p:cNvSpPr/>
           <p:nvPr/>
         </p:nvSpPr>
         <p:spPr>
           <a:xfrm>
-            <a:off x="2578608" y="1719072"/>
-            <a:ext cx="2286000" cy="621792"/>
+            <a:off x="8302752" y="1792224"/>
+            <a:ext cx="3675887" cy="3822191"/>
           </a:xfrm>
           <a:prstGeom prst="roundRect">
             <a:avLst>
@@ -4365,11 +3857,11 @@
             </a:avLst>
           </a:prstGeom>
           <a:solidFill>
-            <a:srgbClr val="F5F7FA"/>
+            <a:srgbClr val="FFFFFF"/>
           </a:solidFill>
           <a:ln w="6350">
             <a:solidFill>
-              <a:srgbClr val="0D3B66"/>
+              <a:srgbClr val="1F77B4"/>
             </a:solidFill>
           </a:ln>
         </p:spPr>
@@ -4397,53 +3889,14 @@
       </p:sp>
       <p:sp>
         <p:nvSpPr>
-          <p:cNvPr id="28" name="TextBox 27"/>
-          <p:cNvSpPr txBox="1"/>
-          <p:nvPr/>
-        </p:nvSpPr>
-        <p:spPr>
-          <a:xfrm>
-            <a:off x="2651760" y="1755648"/>
-            <a:ext cx="2157984" cy="146304"/>
-          </a:xfrm>
-          <a:prstGeom prst="rect">
-            <a:avLst/>
-          </a:prstGeom>
-          <a:noFill/>
-        </p:spPr>
-        <p:txBody>
-          <a:bodyPr wrap="square">
-            <a:spAutoFit/>
-          </a:bodyPr>
-          <a:lstStyle/>
-          <a:p>
-            <a:pPr algn="l">
-              <a:spcAft>
-                <a:spcPts val="300"/>
-              </a:spcAft>
-            </a:pPr>
-            <a:r>
-              <a:rPr sz="900" b="1">
-                <a:solidFill>
-                  <a:srgbClr val="C9A227"/>
-                </a:solidFill>
-                <a:latin typeface="Calibri"/>
-              </a:rPr>
-              <a:t>000025-24</a:t>
-            </a:r>
-          </a:p>
-        </p:txBody>
-      </p:sp>
-      <p:sp>
-        <p:nvSpPr>
-          <p:cNvPr id="29" name="TextBox 28"/>
-          <p:cNvSpPr txBox="1"/>
-          <p:nvPr/>
-        </p:nvSpPr>
-        <p:spPr>
-          <a:xfrm>
-            <a:off x="2651760" y="1920240"/>
-            <a:ext cx="2157984" cy="201168"/>
+          <p:cNvPr id="16" name="TextBox 15"/>
+          <p:cNvSpPr txBox="1"/>
+          <p:nvPr/>
+        </p:nvSpPr>
+        <p:spPr>
+          <a:xfrm>
+            <a:off x="8430768" y="1837943"/>
+            <a:ext cx="3419856" cy="164592"/>
           </a:xfrm>
           <a:prstGeom prst="rect">
             <a:avLst/>
@@ -4464,25 +3917,64 @@
             <a:r>
               <a:rPr sz="1100" b="1">
                 <a:solidFill>
-                  <a:srgbClr val="0D3B66"/>
-                </a:solidFill>
-                <a:latin typeface="Calibri"/>
-              </a:rPr>
-              <a:t>Cascada</a:t>
-            </a:r>
-          </a:p>
-        </p:txBody>
-      </p:sp>
-      <p:sp>
-        <p:nvSpPr>
-          <p:cNvPr id="30" name="Rounded Rectangle 29"/>
+                  <a:srgbClr val="1F77B4"/>
+                </a:solidFill>
+                <a:latin typeface="Calibri"/>
+              </a:rPr>
+              <a:t>JULIO · último mes cerrado</a:t>
+            </a:r>
+          </a:p>
+        </p:txBody>
+      </p:sp>
+      <p:sp>
+        <p:nvSpPr>
+          <p:cNvPr id="17" name="TextBox 16"/>
+          <p:cNvSpPr txBox="1"/>
+          <p:nvPr/>
+        </p:nvSpPr>
+        <p:spPr>
+          <a:xfrm>
+            <a:off x="8430768" y="2002536"/>
+            <a:ext cx="3419856" cy="201168"/>
+          </a:xfrm>
+          <a:prstGeom prst="rect">
+            <a:avLst/>
+          </a:prstGeom>
+          <a:noFill/>
+        </p:spPr>
+        <p:txBody>
+          <a:bodyPr wrap="square">
+            <a:spAutoFit/>
+          </a:bodyPr>
+          <a:lstStyle/>
+          <a:p>
+            <a:pPr algn="l">
+              <a:spcAft>
+                <a:spcPts val="300"/>
+              </a:spcAft>
+            </a:pPr>
+            <a:r>
+              <a:rPr sz="1200" b="0">
+                <a:solidFill>
+                  <a:srgbClr val="5A5A5A"/>
+                </a:solidFill>
+                <a:latin typeface="Calibri"/>
+              </a:rPr>
+              <a:t>El recinto sumó 618 m³</a:t>
+            </a:r>
+          </a:p>
+        </p:txBody>
+      </p:sp>
+      <p:sp>
+        <p:nvSpPr>
+          <p:cNvPr id="18" name="Rounded Rectangle 17"/>
           <p:cNvSpPr/>
           <p:nvPr/>
         </p:nvSpPr>
         <p:spPr>
           <a:xfrm>
-            <a:off x="4956048" y="1719072"/>
-            <a:ext cx="2286000" cy="621792"/>
+            <a:off x="8430768" y="2212848"/>
+            <a:ext cx="3419856" cy="768096"/>
           </a:xfrm>
           <a:prstGeom prst="roundRect">
             <a:avLst>
@@ -4490,7 +3982,7 @@
             </a:avLst>
           </a:prstGeom>
           <a:solidFill>
-            <a:srgbClr val="FFF9EB"/>
+            <a:srgbClr val="F5F7FA"/>
           </a:solidFill>
           <a:ln w="6350">
             <a:solidFill>
@@ -4522,131 +4014,217 @@
       </p:sp>
       <p:sp>
         <p:nvSpPr>
-          <p:cNvPr id="31" name="TextBox 30"/>
-          <p:cNvSpPr txBox="1"/>
-          <p:nvPr/>
-        </p:nvSpPr>
-        <p:spPr>
-          <a:xfrm>
-            <a:off x="5029200" y="1755648"/>
-            <a:ext cx="2157984" cy="146304"/>
-          </a:xfrm>
-          <a:prstGeom prst="rect">
-            <a:avLst/>
-          </a:prstGeom>
-          <a:noFill/>
-        </p:spPr>
-        <p:txBody>
-          <a:bodyPr wrap="square">
-            <a:spAutoFit/>
-          </a:bodyPr>
-          <a:lstStyle/>
-          <a:p>
-            <a:pPr algn="l">
-              <a:spcAft>
-                <a:spcPts val="300"/>
-              </a:spcAft>
-            </a:pPr>
-            <a:r>
-              <a:rPr sz="900" b="1">
+          <p:cNvPr id="19" name="TextBox 18"/>
+          <p:cNvSpPr txBox="1"/>
+          <p:nvPr/>
+        </p:nvSpPr>
+        <p:spPr>
+          <a:xfrm>
+            <a:off x="8540496" y="2240279"/>
+            <a:ext cx="3200400" cy="164592"/>
+          </a:xfrm>
+          <a:prstGeom prst="rect">
+            <a:avLst/>
+          </a:prstGeom>
+          <a:noFill/>
+        </p:spPr>
+        <p:txBody>
+          <a:bodyPr wrap="square">
+            <a:spAutoFit/>
+          </a:bodyPr>
+          <a:lstStyle/>
+          <a:p>
+            <a:pPr algn="l">
+              <a:spcAft>
+                <a:spcPts val="300"/>
+              </a:spcAft>
+            </a:pPr>
+            <a:r>
+              <a:rPr sz="1300" b="1">
+                <a:solidFill>
+                  <a:srgbClr val="C45C26"/>
+                </a:solidFill>
+                <a:latin typeface="Calibri"/>
+              </a:rPr>
+              <a:t>Anillo Sur</a:t>
+            </a:r>
+          </a:p>
+        </p:txBody>
+      </p:sp>
+      <p:sp>
+        <p:nvSpPr>
+          <p:cNvPr id="20" name="TextBox 19"/>
+          <p:cNvSpPr txBox="1"/>
+          <p:nvPr/>
+        </p:nvSpPr>
+        <p:spPr>
+          <a:xfrm>
+            <a:off x="8540496" y="2535448"/>
+            <a:ext cx="3200400" cy="237744"/>
+          </a:xfrm>
+          <a:prstGeom prst="rect">
+            <a:avLst/>
+          </a:prstGeom>
+          <a:noFill/>
+        </p:spPr>
+        <p:txBody>
+          <a:bodyPr wrap="square">
+            <a:spAutoFit/>
+          </a:bodyPr>
+          <a:lstStyle/>
+          <a:p>
+            <a:pPr algn="l">
+              <a:spcAft>
+                <a:spcPts val="300"/>
+              </a:spcAft>
+            </a:pPr>
+            <a:r>
+              <a:rPr sz="1600" b="1">
+                <a:solidFill>
+                  <a:srgbClr val="0D3B66"/>
+                </a:solidFill>
+                <a:latin typeface="Calibri"/>
+              </a:rPr>
+              <a:t>332 m³    54 %</a:t>
+            </a:r>
+          </a:p>
+        </p:txBody>
+      </p:sp>
+      <p:sp>
+        <p:nvSpPr>
+          <p:cNvPr id="21" name="Rounded Rectangle 20"/>
+          <p:cNvSpPr/>
+          <p:nvPr/>
+        </p:nvSpPr>
+        <p:spPr>
+          <a:xfrm>
+            <a:off x="8430768" y="3877056"/>
+            <a:ext cx="3419856" cy="768096"/>
+          </a:xfrm>
+          <a:prstGeom prst="roundRect">
+            <a:avLst>
+              <a:gd name="adj" fmla="val 8000"/>
+            </a:avLst>
+          </a:prstGeom>
+          <a:solidFill>
+            <a:srgbClr val="F5F7FA"/>
+          </a:solidFill>
+          <a:ln w="6350">
+            <a:solidFill>
+              <a:srgbClr val="C9A227"/>
+            </a:solidFill>
+          </a:ln>
+        </p:spPr>
+        <p:style>
+          <a:lnRef idx="1">
+            <a:schemeClr val="accent1"/>
+          </a:lnRef>
+          <a:fillRef idx="3">
+            <a:schemeClr val="accent1"/>
+          </a:fillRef>
+          <a:effectRef idx="2">
+            <a:schemeClr val="accent1"/>
+          </a:effectRef>
+          <a:fontRef idx="minor">
+            <a:schemeClr val="lt1"/>
+          </a:fontRef>
+        </p:style>
+        <p:txBody>
+          <a:bodyPr rtlCol="0" anchor="ctr"/>
+          <a:lstStyle/>
+          <a:p>
+            <a:pPr algn="ctr"/>
+          </a:p>
+        </p:txBody>
+      </p:sp>
+      <p:sp>
+        <p:nvSpPr>
+          <p:cNvPr id="22" name="TextBox 21"/>
+          <p:cNvSpPr txBox="1"/>
+          <p:nvPr/>
+        </p:nvSpPr>
+        <p:spPr>
+          <a:xfrm>
+            <a:off x="8540496" y="3904488"/>
+            <a:ext cx="3200400" cy="164592"/>
+          </a:xfrm>
+          <a:prstGeom prst="rect">
+            <a:avLst/>
+          </a:prstGeom>
+          <a:noFill/>
+        </p:spPr>
+        <p:txBody>
+          <a:bodyPr wrap="square">
+            <a:spAutoFit/>
+          </a:bodyPr>
+          <a:lstStyle/>
+          <a:p>
+            <a:pPr algn="l">
+              <a:spcAft>
+                <a:spcPts val="300"/>
+              </a:spcAft>
+            </a:pPr>
+            <a:r>
+              <a:rPr sz="1300" b="1">
                 <a:solidFill>
                   <a:srgbClr val="C9A227"/>
                 </a:solidFill>
                 <a:latin typeface="Calibri"/>
               </a:rPr>
-              <a:t>000025-27</a:t>
-            </a:r>
-          </a:p>
-        </p:txBody>
-      </p:sp>
-      <p:sp>
-        <p:nvSpPr>
-          <p:cNvPr id="32" name="TextBox 31"/>
-          <p:cNvSpPr txBox="1"/>
-          <p:nvPr/>
-        </p:nvSpPr>
-        <p:spPr>
-          <a:xfrm>
-            <a:off x="5029200" y="1920240"/>
-            <a:ext cx="2157984" cy="201168"/>
-          </a:xfrm>
-          <a:prstGeom prst="rect">
-            <a:avLst/>
-          </a:prstGeom>
-          <a:noFill/>
-        </p:spPr>
-        <p:txBody>
-          <a:bodyPr wrap="square">
-            <a:spAutoFit/>
-          </a:bodyPr>
-          <a:lstStyle/>
-          <a:p>
-            <a:pPr algn="l">
-              <a:spcAft>
-                <a:spcPts val="300"/>
-              </a:spcAft>
-            </a:pPr>
-            <a:r>
-              <a:rPr sz="1100" b="1">
+              <a:t>Anillo Norte</a:t>
+            </a:r>
+          </a:p>
+        </p:txBody>
+      </p:sp>
+      <p:sp>
+        <p:nvSpPr>
+          <p:cNvPr id="23" name="TextBox 22"/>
+          <p:cNvSpPr txBox="1"/>
+          <p:nvPr/>
+        </p:nvSpPr>
+        <p:spPr>
+          <a:xfrm>
+            <a:off x="8540496" y="4199656"/>
+            <a:ext cx="3200400" cy="237744"/>
+          </a:xfrm>
+          <a:prstGeom prst="rect">
+            <a:avLst/>
+          </a:prstGeom>
+          <a:noFill/>
+        </p:spPr>
+        <p:txBody>
+          <a:bodyPr wrap="square">
+            <a:spAutoFit/>
+          </a:bodyPr>
+          <a:lstStyle/>
+          <a:p>
+            <a:pPr algn="l">
+              <a:spcAft>
+                <a:spcPts val="300"/>
+              </a:spcAft>
+            </a:pPr>
+            <a:r>
+              <a:rPr sz="1600" b="1">
                 <a:solidFill>
                   <a:srgbClr val="0D3B66"/>
                 </a:solidFill>
                 <a:latin typeface="Calibri"/>
               </a:rPr>
-              <a:t>Distrito Lujo</a:t>
-            </a:r>
-          </a:p>
-        </p:txBody>
-      </p:sp>
-      <p:sp>
-        <p:nvSpPr>
-          <p:cNvPr id="33" name="TextBox 32"/>
-          <p:cNvSpPr txBox="1"/>
-          <p:nvPr/>
-        </p:nvSpPr>
-        <p:spPr>
-          <a:xfrm>
-            <a:off x="5029200" y="2139696"/>
-            <a:ext cx="2157984" cy="164592"/>
-          </a:xfrm>
-          <a:prstGeom prst="rect">
-            <a:avLst/>
-          </a:prstGeom>
-          <a:noFill/>
-        </p:spPr>
-        <p:txBody>
-          <a:bodyPr wrap="square">
-            <a:spAutoFit/>
-          </a:bodyPr>
-          <a:lstStyle/>
-          <a:p>
-            <a:pPr algn="l">
-              <a:spcAft>
-                <a:spcPts val="300"/>
-              </a:spcAft>
-            </a:pPr>
-            <a:r>
-              <a:rPr sz="800" b="0">
-                <a:solidFill>
-                  <a:srgbClr val="5A5A5A"/>
-                </a:solidFill>
-                <a:latin typeface="Calibri"/>
-              </a:rPr>
-              <a:t>cadena · no suma</a:t>
-            </a:r>
-          </a:p>
-        </p:txBody>
-      </p:sp>
-      <p:sp>
-        <p:nvSpPr>
-          <p:cNvPr id="34" name="Rounded Rectangle 33"/>
+              <a:t>287 m³    46 %</a:t>
+            </a:r>
+          </a:p>
+        </p:txBody>
+      </p:sp>
+      <p:sp>
+        <p:nvSpPr>
+          <p:cNvPr id="24" name="Rounded Rectangle 23"/>
           <p:cNvSpPr/>
           <p:nvPr/>
         </p:nvSpPr>
         <p:spPr>
           <a:xfrm>
-            <a:off x="7333488" y="1719072"/>
-            <a:ext cx="2286000" cy="621792"/>
+            <a:off x="201168" y="5705856"/>
+            <a:ext cx="11795760" cy="438912"/>
           </a:xfrm>
           <a:prstGeom prst="roundRect">
             <a:avLst>
@@ -4686,1404 +4264,7 @@
       </p:sp>
       <p:sp>
         <p:nvSpPr>
-          <p:cNvPr id="35" name="TextBox 34"/>
-          <p:cNvSpPr txBox="1"/>
-          <p:nvPr/>
-        </p:nvSpPr>
-        <p:spPr>
-          <a:xfrm>
-            <a:off x="7406640" y="1755648"/>
-            <a:ext cx="2157984" cy="146304"/>
-          </a:xfrm>
-          <a:prstGeom prst="rect">
-            <a:avLst/>
-          </a:prstGeom>
-          <a:noFill/>
-        </p:spPr>
-        <p:txBody>
-          <a:bodyPr wrap="square">
-            <a:spAutoFit/>
-          </a:bodyPr>
-          <a:lstStyle/>
-          <a:p>
-            <a:pPr algn="l">
-              <a:spcAft>
-                <a:spcPts val="300"/>
-              </a:spcAft>
-            </a:pPr>
-            <a:r>
-              <a:rPr sz="900" b="1">
-                <a:solidFill>
-                  <a:srgbClr val="C9A227"/>
-                </a:solidFill>
-                <a:latin typeface="Calibri"/>
-              </a:rPr>
-              <a:t>000025-35</a:t>
-            </a:r>
-          </a:p>
-        </p:txBody>
-      </p:sp>
-      <p:sp>
-        <p:nvSpPr>
-          <p:cNvPr id="36" name="TextBox 35"/>
-          <p:cNvSpPr txBox="1"/>
-          <p:nvPr/>
-        </p:nvSpPr>
-        <p:spPr>
-          <a:xfrm>
-            <a:off x="7406640" y="1920240"/>
-            <a:ext cx="2157984" cy="201168"/>
-          </a:xfrm>
-          <a:prstGeom prst="rect">
-            <a:avLst/>
-          </a:prstGeom>
-          <a:noFill/>
-        </p:spPr>
-        <p:txBody>
-          <a:bodyPr wrap="square">
-            <a:spAutoFit/>
-          </a:bodyPr>
-          <a:lstStyle/>
-          <a:p>
-            <a:pPr algn="l">
-              <a:spcAft>
-                <a:spcPts val="300"/>
-              </a:spcAft>
-            </a:pPr>
-            <a:r>
-              <a:rPr sz="1100" b="1">
-                <a:solidFill>
-                  <a:srgbClr val="0D3B66"/>
-                </a:solidFill>
-                <a:latin typeface="Calibri"/>
-              </a:rPr>
-              <a:t>Bazar Gourmet</a:t>
-            </a:r>
-          </a:p>
-        </p:txBody>
-      </p:sp>
-      <p:sp>
-        <p:nvSpPr>
-          <p:cNvPr id="37" name="TextBox 36"/>
-          <p:cNvSpPr txBox="1"/>
-          <p:nvPr/>
-        </p:nvSpPr>
-        <p:spPr>
-          <a:xfrm>
-            <a:off x="7406640" y="2139696"/>
-            <a:ext cx="2157984" cy="164592"/>
-          </a:xfrm>
-          <a:prstGeom prst="rect">
-            <a:avLst/>
-          </a:prstGeom>
-          <a:noFill/>
-        </p:spPr>
-        <p:txBody>
-          <a:bodyPr wrap="square">
-            <a:spAutoFit/>
-          </a:bodyPr>
-          <a:lstStyle/>
-          <a:p>
-            <a:pPr algn="l">
-              <a:spcAft>
-                <a:spcPts val="300"/>
-              </a:spcAft>
-            </a:pPr>
-            <a:r>
-              <a:rPr sz="800" b="0">
-                <a:solidFill>
-                  <a:srgbClr val="5A5A5A"/>
-                </a:solidFill>
-                <a:latin typeface="Calibri"/>
-              </a:rPr>
-              <a:t>sale de 27</a:t>
-            </a:r>
-          </a:p>
-        </p:txBody>
-      </p:sp>
-      <p:sp>
-        <p:nvSpPr>
-          <p:cNvPr id="38" name="Rounded Rectangle 37"/>
-          <p:cNvSpPr/>
-          <p:nvPr/>
-        </p:nvSpPr>
-        <p:spPr>
-          <a:xfrm>
-            <a:off x="9710928" y="1719072"/>
-            <a:ext cx="2286000" cy="621792"/>
-          </a:xfrm>
-          <a:prstGeom prst="roundRect">
-            <a:avLst>
-              <a:gd name="adj" fmla="val 8000"/>
-            </a:avLst>
-          </a:prstGeom>
-          <a:solidFill>
-            <a:srgbClr val="FFF9EB"/>
-          </a:solidFill>
-          <a:ln w="6350">
-            <a:solidFill>
-              <a:srgbClr val="5A8C6E"/>
-            </a:solidFill>
-          </a:ln>
-        </p:spPr>
-        <p:style>
-          <a:lnRef idx="1">
-            <a:schemeClr val="accent1"/>
-          </a:lnRef>
-          <a:fillRef idx="3">
-            <a:schemeClr val="accent1"/>
-          </a:fillRef>
-          <a:effectRef idx="2">
-            <a:schemeClr val="accent1"/>
-          </a:effectRef>
-          <a:fontRef idx="minor">
-            <a:schemeClr val="lt1"/>
-          </a:fontRef>
-        </p:style>
-        <p:txBody>
-          <a:bodyPr rtlCol="0" anchor="ctr"/>
-          <a:lstStyle/>
-          <a:p>
-            <a:pPr algn="ctr"/>
-          </a:p>
-        </p:txBody>
-      </p:sp>
-      <p:sp>
-        <p:nvSpPr>
-          <p:cNvPr id="39" name="TextBox 38"/>
-          <p:cNvSpPr txBox="1"/>
-          <p:nvPr/>
-        </p:nvSpPr>
-        <p:spPr>
-          <a:xfrm>
-            <a:off x="9784080" y="1755648"/>
-            <a:ext cx="2157984" cy="146304"/>
-          </a:xfrm>
-          <a:prstGeom prst="rect">
-            <a:avLst/>
-          </a:prstGeom>
-          <a:noFill/>
-        </p:spPr>
-        <p:txBody>
-          <a:bodyPr wrap="square">
-            <a:spAutoFit/>
-          </a:bodyPr>
-          <a:lstStyle/>
-          <a:p>
-            <a:pPr algn="l">
-              <a:spcAft>
-                <a:spcPts val="300"/>
-              </a:spcAft>
-            </a:pPr>
-            <a:r>
-              <a:rPr sz="900" b="1">
-                <a:solidFill>
-                  <a:srgbClr val="C9A227"/>
-                </a:solidFill>
-                <a:latin typeface="Calibri"/>
-              </a:rPr>
-              <a:t>000025-36</a:t>
-            </a:r>
-          </a:p>
-        </p:txBody>
-      </p:sp>
-      <p:sp>
-        <p:nvSpPr>
-          <p:cNvPr id="40" name="TextBox 39"/>
-          <p:cNvSpPr txBox="1"/>
-          <p:nvPr/>
-        </p:nvSpPr>
-        <p:spPr>
-          <a:xfrm>
-            <a:off x="9784080" y="1920240"/>
-            <a:ext cx="2157984" cy="201168"/>
-          </a:xfrm>
-          <a:prstGeom prst="rect">
-            <a:avLst/>
-          </a:prstGeom>
-          <a:noFill/>
-        </p:spPr>
-        <p:txBody>
-          <a:bodyPr wrap="square">
-            <a:spAutoFit/>
-          </a:bodyPr>
-          <a:lstStyle/>
-          <a:p>
-            <a:pPr algn="l">
-              <a:spcAft>
-                <a:spcPts val="300"/>
-              </a:spcAft>
-            </a:pPr>
-            <a:r>
-              <a:rPr sz="1100" b="1">
-                <a:solidFill>
-                  <a:srgbClr val="0D3B66"/>
-                </a:solidFill>
-                <a:latin typeface="Calibri"/>
-              </a:rPr>
-              <a:t>DL Kennedy</a:t>
-            </a:r>
-          </a:p>
-        </p:txBody>
-      </p:sp>
-      <p:sp>
-        <p:nvSpPr>
-          <p:cNvPr id="41" name="TextBox 40"/>
-          <p:cNvSpPr txBox="1"/>
-          <p:nvPr/>
-        </p:nvSpPr>
-        <p:spPr>
-          <a:xfrm>
-            <a:off x="9784080" y="2139696"/>
-            <a:ext cx="2157984" cy="164592"/>
-          </a:xfrm>
-          <a:prstGeom prst="rect">
-            <a:avLst/>
-          </a:prstGeom>
-          <a:noFill/>
-        </p:spPr>
-        <p:txBody>
-          <a:bodyPr wrap="square">
-            <a:spAutoFit/>
-          </a:bodyPr>
-          <a:lstStyle/>
-          <a:p>
-            <a:pPr algn="l">
-              <a:spcAft>
-                <a:spcPts val="300"/>
-              </a:spcAft>
-            </a:pPr>
-            <a:r>
-              <a:rPr sz="800" b="0">
-                <a:solidFill>
-                  <a:srgbClr val="5A5A5A"/>
-                </a:solidFill>
-                <a:latin typeface="Calibri"/>
-              </a:rPr>
-              <a:t>sale de 27</a:t>
-            </a:r>
-          </a:p>
-        </p:txBody>
-      </p:sp>
-      <p:sp>
-        <p:nvSpPr>
-          <p:cNvPr id="42" name="Rounded Rectangle 41"/>
-          <p:cNvSpPr/>
-          <p:nvPr/>
-        </p:nvSpPr>
-        <p:spPr>
-          <a:xfrm>
-            <a:off x="201168" y="2432304"/>
-            <a:ext cx="7973568" cy="3182111"/>
-          </a:xfrm>
-          <a:prstGeom prst="roundRect">
-            <a:avLst>
-              <a:gd name="adj" fmla="val 8000"/>
-            </a:avLst>
-          </a:prstGeom>
-          <a:solidFill>
-            <a:srgbClr val="F5F7FA"/>
-          </a:solidFill>
-          <a:ln>
-            <a:noFill/>
-          </a:ln>
-        </p:spPr>
-        <p:style>
-          <a:lnRef idx="1">
-            <a:schemeClr val="accent1"/>
-          </a:lnRef>
-          <a:fillRef idx="3">
-            <a:schemeClr val="accent1"/>
-          </a:fillRef>
-          <a:effectRef idx="2">
-            <a:schemeClr val="accent1"/>
-          </a:effectRef>
-          <a:fontRef idx="minor">
-            <a:schemeClr val="lt1"/>
-          </a:fontRef>
-        </p:style>
-        <p:txBody>
-          <a:bodyPr rtlCol="0" anchor="ctr"/>
-          <a:lstStyle/>
-          <a:p>
-            <a:pPr algn="ctr"/>
-          </a:p>
-        </p:txBody>
-      </p:sp>
-      <p:pic>
-        <p:nvPicPr>
-          <p:cNvPr id="43" name="Picture 42" descr="pak_mensual_may_ago.png"/>
-          <p:cNvPicPr>
-            <a:picLocks noChangeAspect="1"/>
-          </p:cNvPicPr>
-          <p:nvPr/>
-        </p:nvPicPr>
-        <p:blipFill>
-          <a:blip r:embed="rId3"/>
-          <a:stretch>
-            <a:fillRect/>
-          </a:stretch>
-        </p:blipFill>
-        <p:spPr>
-          <a:xfrm>
-            <a:off x="605863" y="2487168"/>
-            <a:ext cx="7164176" cy="3072383"/>
-          </a:xfrm>
-          <a:prstGeom prst="rect">
-            <a:avLst/>
-          </a:prstGeom>
-        </p:spPr>
-      </p:pic>
-      <p:sp>
-        <p:nvSpPr>
-          <p:cNvPr id="44" name="Rounded Rectangle 43"/>
-          <p:cNvSpPr/>
-          <p:nvPr/>
-        </p:nvSpPr>
-        <p:spPr>
-          <a:xfrm>
-            <a:off x="8302752" y="2432304"/>
-            <a:ext cx="3675887" cy="3182111"/>
-          </a:xfrm>
-          <a:prstGeom prst="roundRect">
-            <a:avLst>
-              <a:gd name="adj" fmla="val 8000"/>
-            </a:avLst>
-          </a:prstGeom>
-          <a:solidFill>
-            <a:srgbClr val="FFFFFF"/>
-          </a:solidFill>
-          <a:ln w="6350">
-            <a:solidFill>
-              <a:srgbClr val="1F77B4"/>
-            </a:solidFill>
-          </a:ln>
-        </p:spPr>
-        <p:style>
-          <a:lnRef idx="1">
-            <a:schemeClr val="accent1"/>
-          </a:lnRef>
-          <a:fillRef idx="3">
-            <a:schemeClr val="accent1"/>
-          </a:fillRef>
-          <a:effectRef idx="2">
-            <a:schemeClr val="accent1"/>
-          </a:effectRef>
-          <a:fontRef idx="minor">
-            <a:schemeClr val="lt1"/>
-          </a:fontRef>
-        </p:style>
-        <p:txBody>
-          <a:bodyPr rtlCol="0" anchor="ctr"/>
-          <a:lstStyle/>
-          <a:p>
-            <a:pPr algn="ctr"/>
-          </a:p>
-        </p:txBody>
-      </p:sp>
-      <p:sp>
-        <p:nvSpPr>
-          <p:cNvPr id="45" name="TextBox 44"/>
-          <p:cNvSpPr txBox="1"/>
-          <p:nvPr/>
-        </p:nvSpPr>
-        <p:spPr>
-          <a:xfrm>
-            <a:off x="8430768" y="2478024"/>
-            <a:ext cx="3419856" cy="164592"/>
-          </a:xfrm>
-          <a:prstGeom prst="rect">
-            <a:avLst/>
-          </a:prstGeom>
-          <a:noFill/>
-        </p:spPr>
-        <p:txBody>
-          <a:bodyPr wrap="square">
-            <a:spAutoFit/>
-          </a:bodyPr>
-          <a:lstStyle/>
-          <a:p>
-            <a:pPr algn="l">
-              <a:spcAft>
-                <a:spcPts val="300"/>
-              </a:spcAft>
-            </a:pPr>
-            <a:r>
-              <a:rPr sz="1100" b="1">
-                <a:solidFill>
-                  <a:srgbClr val="1F77B4"/>
-                </a:solidFill>
-                <a:latin typeface="Calibri"/>
-              </a:rPr>
-              <a:t>JULIO · cabecera</a:t>
-            </a:r>
-          </a:p>
-        </p:txBody>
-      </p:sp>
-      <p:sp>
-        <p:nvSpPr>
-          <p:cNvPr id="46" name="TextBox 45"/>
-          <p:cNvSpPr txBox="1"/>
-          <p:nvPr/>
-        </p:nvSpPr>
-        <p:spPr>
-          <a:xfrm>
-            <a:off x="8430768" y="2642616"/>
-            <a:ext cx="3419856" cy="201168"/>
-          </a:xfrm>
-          <a:prstGeom prst="rect">
-            <a:avLst/>
-          </a:prstGeom>
-          <a:noFill/>
-        </p:spPr>
-        <p:txBody>
-          <a:bodyPr wrap="square">
-            <a:spAutoFit/>
-          </a:bodyPr>
-          <a:lstStyle/>
-          <a:p>
-            <a:pPr algn="l">
-              <a:spcAft>
-                <a:spcPts val="300"/>
-              </a:spcAft>
-            </a:pPr>
-            <a:r>
-              <a:rPr sz="1200" b="0">
-                <a:solidFill>
-                  <a:srgbClr val="5A5A5A"/>
-                </a:solidFill>
-                <a:latin typeface="Calibri"/>
-              </a:rPr>
-              <a:t>El recinto sumó 31.239 m³</a:t>
-            </a:r>
-          </a:p>
-        </p:txBody>
-      </p:sp>
-      <p:sp>
-        <p:nvSpPr>
-          <p:cNvPr id="47" name="Rounded Rectangle 46"/>
-          <p:cNvSpPr/>
-          <p:nvPr/>
-        </p:nvSpPr>
-        <p:spPr>
-          <a:xfrm>
-            <a:off x="8430768" y="2852928"/>
-            <a:ext cx="3419856" cy="347471"/>
-          </a:xfrm>
-          <a:prstGeom prst="roundRect">
-            <a:avLst>
-              <a:gd name="adj" fmla="val 8000"/>
-            </a:avLst>
-          </a:prstGeom>
-          <a:solidFill>
-            <a:srgbClr val="F5F7FA"/>
-          </a:solidFill>
-          <a:ln w="6350">
-            <a:solidFill>
-              <a:srgbClr val="A0783C"/>
-            </a:solidFill>
-          </a:ln>
-        </p:spPr>
-        <p:style>
-          <a:lnRef idx="1">
-            <a:schemeClr val="accent1"/>
-          </a:lnRef>
-          <a:fillRef idx="3">
-            <a:schemeClr val="accent1"/>
-          </a:fillRef>
-          <a:effectRef idx="2">
-            <a:schemeClr val="accent1"/>
-          </a:effectRef>
-          <a:fontRef idx="minor">
-            <a:schemeClr val="lt1"/>
-          </a:fontRef>
-        </p:style>
-        <p:txBody>
-          <a:bodyPr rtlCol="0" anchor="ctr"/>
-          <a:lstStyle/>
-          <a:p>
-            <a:pPr algn="ctr"/>
-          </a:p>
-        </p:txBody>
-      </p:sp>
-      <p:sp>
-        <p:nvSpPr>
-          <p:cNvPr id="48" name="TextBox 47"/>
-          <p:cNvSpPr txBox="1"/>
-          <p:nvPr/>
-        </p:nvSpPr>
-        <p:spPr>
-          <a:xfrm>
-            <a:off x="8540496" y="2880360"/>
-            <a:ext cx="3200400" cy="145938"/>
-          </a:xfrm>
-          <a:prstGeom prst="rect">
-            <a:avLst/>
-          </a:prstGeom>
-          <a:noFill/>
-        </p:spPr>
-        <p:txBody>
-          <a:bodyPr wrap="square">
-            <a:spAutoFit/>
-          </a:bodyPr>
-          <a:lstStyle/>
-          <a:p>
-            <a:pPr algn="l">
-              <a:spcAft>
-                <a:spcPts val="300"/>
-              </a:spcAft>
-            </a:pPr>
-            <a:r>
-              <a:rPr sz="1000" b="1">
-                <a:solidFill>
-                  <a:srgbClr val="A0783C"/>
-                </a:solidFill>
-                <a:latin typeface="Calibri"/>
-              </a:rPr>
-              <a:t>Sandía Antigua</a:t>
-            </a:r>
-          </a:p>
-        </p:txBody>
-      </p:sp>
-      <p:sp>
-        <p:nvSpPr>
-          <p:cNvPr id="49" name="TextBox 48"/>
-          <p:cNvSpPr txBox="1"/>
-          <p:nvPr/>
-        </p:nvSpPr>
-        <p:spPr>
-          <a:xfrm>
-            <a:off x="8540496" y="2998866"/>
-            <a:ext cx="3200400" cy="180685"/>
-          </a:xfrm>
-          <a:prstGeom prst="rect">
-            <a:avLst/>
-          </a:prstGeom>
-          <a:noFill/>
-        </p:spPr>
-        <p:txBody>
-          <a:bodyPr wrap="square">
-            <a:spAutoFit/>
-          </a:bodyPr>
-          <a:lstStyle/>
-          <a:p>
-            <a:pPr algn="l">
-              <a:spcAft>
-                <a:spcPts val="300"/>
-              </a:spcAft>
-            </a:pPr>
-            <a:r>
-              <a:rPr sz="1200" b="1">
-                <a:solidFill>
-                  <a:srgbClr val="0D3B66"/>
-                </a:solidFill>
-                <a:latin typeface="Calibri"/>
-              </a:rPr>
-              <a:t>13.661 m³    43,7 %</a:t>
-            </a:r>
-          </a:p>
-        </p:txBody>
-      </p:sp>
-      <p:sp>
-        <p:nvSpPr>
-          <p:cNvPr id="50" name="Rounded Rectangle 49"/>
-          <p:cNvSpPr/>
-          <p:nvPr/>
-        </p:nvSpPr>
-        <p:spPr>
-          <a:xfrm>
-            <a:off x="8430768" y="3236976"/>
-            <a:ext cx="3419856" cy="347471"/>
-          </a:xfrm>
-          <a:prstGeom prst="roundRect">
-            <a:avLst>
-              <a:gd name="adj" fmla="val 8000"/>
-            </a:avLst>
-          </a:prstGeom>
-          <a:solidFill>
-            <a:srgbClr val="F5F7FA"/>
-          </a:solidFill>
-          <a:ln w="6350">
-            <a:solidFill>
-              <a:srgbClr val="1F77B4"/>
-            </a:solidFill>
-          </a:ln>
-        </p:spPr>
-        <p:style>
-          <a:lnRef idx="1">
-            <a:schemeClr val="accent1"/>
-          </a:lnRef>
-          <a:fillRef idx="3">
-            <a:schemeClr val="accent1"/>
-          </a:fillRef>
-          <a:effectRef idx="2">
-            <a:schemeClr val="accent1"/>
-          </a:effectRef>
-          <a:fontRef idx="minor">
-            <a:schemeClr val="lt1"/>
-          </a:fontRef>
-        </p:style>
-        <p:txBody>
-          <a:bodyPr rtlCol="0" anchor="ctr"/>
-          <a:lstStyle/>
-          <a:p>
-            <a:pPr algn="ctr"/>
-          </a:p>
-        </p:txBody>
-      </p:sp>
-      <p:sp>
-        <p:nvSpPr>
-          <p:cNvPr id="51" name="TextBox 50"/>
-          <p:cNvSpPr txBox="1"/>
-          <p:nvPr/>
-        </p:nvSpPr>
-        <p:spPr>
-          <a:xfrm>
-            <a:off x="8540496" y="3264408"/>
-            <a:ext cx="3200400" cy="145938"/>
-          </a:xfrm>
-          <a:prstGeom prst="rect">
-            <a:avLst/>
-          </a:prstGeom>
-          <a:noFill/>
-        </p:spPr>
-        <p:txBody>
-          <a:bodyPr wrap="square">
-            <a:spAutoFit/>
-          </a:bodyPr>
-          <a:lstStyle/>
-          <a:p>
-            <a:pPr algn="l">
-              <a:spcAft>
-                <a:spcPts val="300"/>
-              </a:spcAft>
-            </a:pPr>
-            <a:r>
-              <a:rPr sz="1000" b="1">
-                <a:solidFill>
-                  <a:srgbClr val="1F77B4"/>
-                </a:solidFill>
-                <a:latin typeface="Calibri"/>
-              </a:rPr>
-              <a:t>Sandía Nueva</a:t>
-            </a:r>
-          </a:p>
-        </p:txBody>
-      </p:sp>
-      <p:sp>
-        <p:nvSpPr>
-          <p:cNvPr id="52" name="TextBox 51"/>
-          <p:cNvSpPr txBox="1"/>
-          <p:nvPr/>
-        </p:nvSpPr>
-        <p:spPr>
-          <a:xfrm>
-            <a:off x="8540496" y="3382914"/>
-            <a:ext cx="3200400" cy="180685"/>
-          </a:xfrm>
-          <a:prstGeom prst="rect">
-            <a:avLst/>
-          </a:prstGeom>
-          <a:noFill/>
-        </p:spPr>
-        <p:txBody>
-          <a:bodyPr wrap="square">
-            <a:spAutoFit/>
-          </a:bodyPr>
-          <a:lstStyle/>
-          <a:p>
-            <a:pPr algn="l">
-              <a:spcAft>
-                <a:spcPts val="300"/>
-              </a:spcAft>
-            </a:pPr>
-            <a:r>
-              <a:rPr sz="1200" b="1">
-                <a:solidFill>
-                  <a:srgbClr val="0D3B66"/>
-                </a:solidFill>
-                <a:latin typeface="Calibri"/>
-              </a:rPr>
-              <a:t>9.619 m³    30,8 %</a:t>
-            </a:r>
-          </a:p>
-        </p:txBody>
-      </p:sp>
-      <p:sp>
-        <p:nvSpPr>
-          <p:cNvPr id="53" name="Rounded Rectangle 52"/>
-          <p:cNvSpPr/>
-          <p:nvPr/>
-        </p:nvSpPr>
-        <p:spPr>
-          <a:xfrm>
-            <a:off x="8430768" y="3621024"/>
-            <a:ext cx="3419856" cy="347471"/>
-          </a:xfrm>
-          <a:prstGeom prst="roundRect">
-            <a:avLst>
-              <a:gd name="adj" fmla="val 8000"/>
-            </a:avLst>
-          </a:prstGeom>
-          <a:solidFill>
-            <a:srgbClr val="F5F7FA"/>
-          </a:solidFill>
-          <a:ln w="6350">
-            <a:solidFill>
-              <a:srgbClr val="46648C"/>
-            </a:solidFill>
-          </a:ln>
-        </p:spPr>
-        <p:style>
-          <a:lnRef idx="1">
-            <a:schemeClr val="accent1"/>
-          </a:lnRef>
-          <a:fillRef idx="3">
-            <a:schemeClr val="accent1"/>
-          </a:fillRef>
-          <a:effectRef idx="2">
-            <a:schemeClr val="accent1"/>
-          </a:effectRef>
-          <a:fontRef idx="minor">
-            <a:schemeClr val="lt1"/>
-          </a:fontRef>
-        </p:style>
-        <p:txBody>
-          <a:bodyPr rtlCol="0" anchor="ctr"/>
-          <a:lstStyle/>
-          <a:p>
-            <a:pPr algn="ctr"/>
-          </a:p>
-        </p:txBody>
-      </p:sp>
-      <p:sp>
-        <p:nvSpPr>
-          <p:cNvPr id="54" name="TextBox 53"/>
-          <p:cNvSpPr txBox="1"/>
-          <p:nvPr/>
-        </p:nvSpPr>
-        <p:spPr>
-          <a:xfrm>
-            <a:off x="8540496" y="3648456"/>
-            <a:ext cx="3200400" cy="145938"/>
-          </a:xfrm>
-          <a:prstGeom prst="rect">
-            <a:avLst/>
-          </a:prstGeom>
-          <a:noFill/>
-        </p:spPr>
-        <p:txBody>
-          <a:bodyPr wrap="square">
-            <a:spAutoFit/>
-          </a:bodyPr>
-          <a:lstStyle/>
-          <a:p>
-            <a:pPr algn="l">
-              <a:spcAft>
-                <a:spcPts val="300"/>
-              </a:spcAft>
-            </a:pPr>
-            <a:r>
-              <a:rPr sz="1000" b="1">
-                <a:solidFill>
-                  <a:srgbClr val="46648C"/>
-                </a:solidFill>
-                <a:latin typeface="Calibri"/>
-              </a:rPr>
-              <a:t>Locales Gast.</a:t>
-            </a:r>
-          </a:p>
-        </p:txBody>
-      </p:sp>
-      <p:sp>
-        <p:nvSpPr>
-          <p:cNvPr id="55" name="TextBox 54"/>
-          <p:cNvSpPr txBox="1"/>
-          <p:nvPr/>
-        </p:nvSpPr>
-        <p:spPr>
-          <a:xfrm>
-            <a:off x="8540496" y="3766962"/>
-            <a:ext cx="3200400" cy="180685"/>
-          </a:xfrm>
-          <a:prstGeom prst="rect">
-            <a:avLst/>
-          </a:prstGeom>
-          <a:noFill/>
-        </p:spPr>
-        <p:txBody>
-          <a:bodyPr wrap="square">
-            <a:spAutoFit/>
-          </a:bodyPr>
-          <a:lstStyle/>
-          <a:p>
-            <a:pPr algn="l">
-              <a:spcAft>
-                <a:spcPts val="300"/>
-              </a:spcAft>
-            </a:pPr>
-            <a:r>
-              <a:rPr sz="1200" b="1">
-                <a:solidFill>
-                  <a:srgbClr val="0D3B66"/>
-                </a:solidFill>
-                <a:latin typeface="Calibri"/>
-              </a:rPr>
-              <a:t>4.583 m³    14,7 %</a:t>
-            </a:r>
-          </a:p>
-        </p:txBody>
-      </p:sp>
-      <p:sp>
-        <p:nvSpPr>
-          <p:cNvPr id="56" name="Rounded Rectangle 55"/>
-          <p:cNvSpPr/>
-          <p:nvPr/>
-        </p:nvSpPr>
-        <p:spPr>
-          <a:xfrm>
-            <a:off x="8430768" y="4005072"/>
-            <a:ext cx="3419856" cy="347471"/>
-          </a:xfrm>
-          <a:prstGeom prst="roundRect">
-            <a:avLst>
-              <a:gd name="adj" fmla="val 8000"/>
-            </a:avLst>
-          </a:prstGeom>
-          <a:solidFill>
-            <a:srgbClr val="F5F7FA"/>
-          </a:solidFill>
-          <a:ln w="6350">
-            <a:solidFill>
-              <a:srgbClr val="8C5A5A"/>
-            </a:solidFill>
-          </a:ln>
-        </p:spPr>
-        <p:style>
-          <a:lnRef idx="1">
-            <a:schemeClr val="accent1"/>
-          </a:lnRef>
-          <a:fillRef idx="3">
-            <a:schemeClr val="accent1"/>
-          </a:fillRef>
-          <a:effectRef idx="2">
-            <a:schemeClr val="accent1"/>
-          </a:effectRef>
-          <a:fontRef idx="minor">
-            <a:schemeClr val="lt1"/>
-          </a:fontRef>
-        </p:style>
-        <p:txBody>
-          <a:bodyPr rtlCol="0" anchor="ctr"/>
-          <a:lstStyle/>
-          <a:p>
-            <a:pPr algn="ctr"/>
-          </a:p>
-        </p:txBody>
-      </p:sp>
-      <p:sp>
-        <p:nvSpPr>
-          <p:cNvPr id="57" name="TextBox 56"/>
-          <p:cNvSpPr txBox="1"/>
-          <p:nvPr/>
-        </p:nvSpPr>
-        <p:spPr>
-          <a:xfrm>
-            <a:off x="8540496" y="4032504"/>
-            <a:ext cx="3200400" cy="145938"/>
-          </a:xfrm>
-          <a:prstGeom prst="rect">
-            <a:avLst/>
-          </a:prstGeom>
-          <a:noFill/>
-        </p:spPr>
-        <p:txBody>
-          <a:bodyPr wrap="square">
-            <a:spAutoFit/>
-          </a:bodyPr>
-          <a:lstStyle/>
-          <a:p>
-            <a:pPr algn="l">
-              <a:spcAft>
-                <a:spcPts val="300"/>
-              </a:spcAft>
-            </a:pPr>
-            <a:r>
-              <a:rPr sz="1000" b="1">
-                <a:solidFill>
-                  <a:srgbClr val="8C5A5A"/>
-                </a:solidFill>
-                <a:latin typeface="Calibri"/>
-              </a:rPr>
-              <a:t>Matriz Andén</a:t>
-            </a:r>
-          </a:p>
-        </p:txBody>
-      </p:sp>
-      <p:sp>
-        <p:nvSpPr>
-          <p:cNvPr id="58" name="TextBox 57"/>
-          <p:cNvSpPr txBox="1"/>
-          <p:nvPr/>
-        </p:nvSpPr>
-        <p:spPr>
-          <a:xfrm>
-            <a:off x="8540496" y="4151010"/>
-            <a:ext cx="3200400" cy="180685"/>
-          </a:xfrm>
-          <a:prstGeom prst="rect">
-            <a:avLst/>
-          </a:prstGeom>
-          <a:noFill/>
-        </p:spPr>
-        <p:txBody>
-          <a:bodyPr wrap="square">
-            <a:spAutoFit/>
-          </a:bodyPr>
-          <a:lstStyle/>
-          <a:p>
-            <a:pPr algn="l">
-              <a:spcAft>
-                <a:spcPts val="300"/>
-              </a:spcAft>
-            </a:pPr>
-            <a:r>
-              <a:rPr sz="1200" b="1">
-                <a:solidFill>
-                  <a:srgbClr val="0D3B66"/>
-                </a:solidFill>
-                <a:latin typeface="Calibri"/>
-              </a:rPr>
-              <a:t>3.086 m³    9,9 %</a:t>
-            </a:r>
-          </a:p>
-        </p:txBody>
-      </p:sp>
-      <p:sp>
-        <p:nvSpPr>
-          <p:cNvPr id="59" name="Rounded Rectangle 58"/>
-          <p:cNvSpPr/>
-          <p:nvPr/>
-        </p:nvSpPr>
-        <p:spPr>
-          <a:xfrm>
-            <a:off x="8430768" y="4389120"/>
-            <a:ext cx="3419856" cy="347471"/>
-          </a:xfrm>
-          <a:prstGeom prst="roundRect">
-            <a:avLst>
-              <a:gd name="adj" fmla="val 8000"/>
-            </a:avLst>
-          </a:prstGeom>
-          <a:solidFill>
-            <a:srgbClr val="F5F7FA"/>
-          </a:solidFill>
-          <a:ln w="6350">
-            <a:solidFill>
-              <a:srgbClr val="508282"/>
-            </a:solidFill>
-          </a:ln>
-        </p:spPr>
-        <p:style>
-          <a:lnRef idx="1">
-            <a:schemeClr val="accent1"/>
-          </a:lnRef>
-          <a:fillRef idx="3">
-            <a:schemeClr val="accent1"/>
-          </a:fillRef>
-          <a:effectRef idx="2">
-            <a:schemeClr val="accent1"/>
-          </a:effectRef>
-          <a:fontRef idx="minor">
-            <a:schemeClr val="lt1"/>
-          </a:fontRef>
-        </p:style>
-        <p:txBody>
-          <a:bodyPr rtlCol="0" anchor="ctr"/>
-          <a:lstStyle/>
-          <a:p>
-            <a:pPr algn="ctr"/>
-          </a:p>
-        </p:txBody>
-      </p:sp>
-      <p:sp>
-        <p:nvSpPr>
-          <p:cNvPr id="60" name="TextBox 59"/>
-          <p:cNvSpPr txBox="1"/>
-          <p:nvPr/>
-        </p:nvSpPr>
-        <p:spPr>
-          <a:xfrm>
-            <a:off x="8540496" y="4416552"/>
-            <a:ext cx="3200400" cy="145938"/>
-          </a:xfrm>
-          <a:prstGeom prst="rect">
-            <a:avLst/>
-          </a:prstGeom>
-          <a:noFill/>
-        </p:spPr>
-        <p:txBody>
-          <a:bodyPr wrap="square">
-            <a:spAutoFit/>
-          </a:bodyPr>
-          <a:lstStyle/>
-          <a:p>
-            <a:pPr algn="l">
-              <a:spcAft>
-                <a:spcPts val="300"/>
-              </a:spcAft>
-            </a:pPr>
-            <a:r>
-              <a:rPr sz="1000" b="1">
-                <a:solidFill>
-                  <a:srgbClr val="508282"/>
-                </a:solidFill>
-                <a:latin typeface="Calibri"/>
-              </a:rPr>
-              <a:t>Pileta</a:t>
-            </a:r>
-          </a:p>
-        </p:txBody>
-      </p:sp>
-      <p:sp>
-        <p:nvSpPr>
-          <p:cNvPr id="61" name="TextBox 60"/>
-          <p:cNvSpPr txBox="1"/>
-          <p:nvPr/>
-        </p:nvSpPr>
-        <p:spPr>
-          <a:xfrm>
-            <a:off x="8540496" y="4535058"/>
-            <a:ext cx="3200400" cy="180685"/>
-          </a:xfrm>
-          <a:prstGeom prst="rect">
-            <a:avLst/>
-          </a:prstGeom>
-          <a:noFill/>
-        </p:spPr>
-        <p:txBody>
-          <a:bodyPr wrap="square">
-            <a:spAutoFit/>
-          </a:bodyPr>
-          <a:lstStyle/>
-          <a:p>
-            <a:pPr algn="l">
-              <a:spcAft>
-                <a:spcPts val="300"/>
-              </a:spcAft>
-            </a:pPr>
-            <a:r>
-              <a:rPr sz="1200" b="1">
-                <a:solidFill>
-                  <a:srgbClr val="0D3B66"/>
-                </a:solidFill>
-                <a:latin typeface="Calibri"/>
-              </a:rPr>
-              <a:t>172 m³    0,5 %</a:t>
-            </a:r>
-          </a:p>
-        </p:txBody>
-      </p:sp>
-      <p:sp>
-        <p:nvSpPr>
-          <p:cNvPr id="62" name="Rounded Rectangle 61"/>
-          <p:cNvSpPr/>
-          <p:nvPr/>
-        </p:nvSpPr>
-        <p:spPr>
-          <a:xfrm>
-            <a:off x="8430768" y="4773168"/>
-            <a:ext cx="3419856" cy="347471"/>
-          </a:xfrm>
-          <a:prstGeom prst="roundRect">
-            <a:avLst>
-              <a:gd name="adj" fmla="val 8000"/>
-            </a:avLst>
-          </a:prstGeom>
-          <a:solidFill>
-            <a:srgbClr val="F5F7FA"/>
-          </a:solidFill>
-          <a:ln w="6350">
-            <a:solidFill>
-              <a:srgbClr val="C45C26"/>
-            </a:solidFill>
-          </a:ln>
-        </p:spPr>
-        <p:style>
-          <a:lnRef idx="1">
-            <a:schemeClr val="accent1"/>
-          </a:lnRef>
-          <a:fillRef idx="3">
-            <a:schemeClr val="accent1"/>
-          </a:fillRef>
-          <a:effectRef idx="2">
-            <a:schemeClr val="accent1"/>
-          </a:effectRef>
-          <a:fontRef idx="minor">
-            <a:schemeClr val="lt1"/>
-          </a:fontRef>
-        </p:style>
-        <p:txBody>
-          <a:bodyPr rtlCol="0" anchor="ctr"/>
-          <a:lstStyle/>
-          <a:p>
-            <a:pPr algn="ctr"/>
-          </a:p>
-        </p:txBody>
-      </p:sp>
-      <p:sp>
-        <p:nvSpPr>
-          <p:cNvPr id="63" name="TextBox 62"/>
-          <p:cNvSpPr txBox="1"/>
-          <p:nvPr/>
-        </p:nvSpPr>
-        <p:spPr>
-          <a:xfrm>
-            <a:off x="8540496" y="4800600"/>
-            <a:ext cx="3200400" cy="145938"/>
-          </a:xfrm>
-          <a:prstGeom prst="rect">
-            <a:avLst/>
-          </a:prstGeom>
-          <a:noFill/>
-        </p:spPr>
-        <p:txBody>
-          <a:bodyPr wrap="square">
-            <a:spAutoFit/>
-          </a:bodyPr>
-          <a:lstStyle/>
-          <a:p>
-            <a:pPr algn="l">
-              <a:spcAft>
-                <a:spcPts val="300"/>
-              </a:spcAft>
-            </a:pPr>
-            <a:r>
-              <a:rPr sz="1000" b="1">
-                <a:solidFill>
-                  <a:srgbClr val="C45C26"/>
-                </a:solidFill>
-                <a:latin typeface="Calibri"/>
-              </a:rPr>
-              <a:t>Restaurante</a:t>
-            </a:r>
-          </a:p>
-        </p:txBody>
-      </p:sp>
-      <p:sp>
-        <p:nvSpPr>
-          <p:cNvPr id="64" name="TextBox 63"/>
-          <p:cNvSpPr txBox="1"/>
-          <p:nvPr/>
-        </p:nvSpPr>
-        <p:spPr>
-          <a:xfrm>
-            <a:off x="8540496" y="4919106"/>
-            <a:ext cx="3200400" cy="180685"/>
-          </a:xfrm>
-          <a:prstGeom prst="rect">
-            <a:avLst/>
-          </a:prstGeom>
-          <a:noFill/>
-        </p:spPr>
-        <p:txBody>
-          <a:bodyPr wrap="square">
-            <a:spAutoFit/>
-          </a:bodyPr>
-          <a:lstStyle/>
-          <a:p>
-            <a:pPr algn="l">
-              <a:spcAft>
-                <a:spcPts val="300"/>
-              </a:spcAft>
-            </a:pPr>
-            <a:r>
-              <a:rPr sz="1200" b="1">
-                <a:solidFill>
-                  <a:srgbClr val="0D3B66"/>
-                </a:solidFill>
-                <a:latin typeface="Calibri"/>
-              </a:rPr>
-              <a:t>98 m³    0,3 %</a:t>
-            </a:r>
-          </a:p>
-        </p:txBody>
-      </p:sp>
-      <p:sp>
-        <p:nvSpPr>
-          <p:cNvPr id="65" name="Rounded Rectangle 64"/>
-          <p:cNvSpPr/>
-          <p:nvPr/>
-        </p:nvSpPr>
-        <p:spPr>
-          <a:xfrm>
-            <a:off x="8430768" y="5157216"/>
-            <a:ext cx="3419856" cy="347471"/>
-          </a:xfrm>
-          <a:prstGeom prst="roundRect">
-            <a:avLst>
-              <a:gd name="adj" fmla="val 8000"/>
-            </a:avLst>
-          </a:prstGeom>
-          <a:solidFill>
-            <a:srgbClr val="F5F7FA"/>
-          </a:solidFill>
-          <a:ln w="6350">
-            <a:solidFill>
-              <a:srgbClr val="0D3B66"/>
-            </a:solidFill>
-          </a:ln>
-        </p:spPr>
-        <p:style>
-          <a:lnRef idx="1">
-            <a:schemeClr val="accent1"/>
-          </a:lnRef>
-          <a:fillRef idx="3">
-            <a:schemeClr val="accent1"/>
-          </a:fillRef>
-          <a:effectRef idx="2">
-            <a:schemeClr val="accent1"/>
-          </a:effectRef>
-          <a:fontRef idx="minor">
-            <a:schemeClr val="lt1"/>
-          </a:fontRef>
-        </p:style>
-        <p:txBody>
-          <a:bodyPr rtlCol="0" anchor="ctr"/>
-          <a:lstStyle/>
-          <a:p>
-            <a:pPr algn="ctr"/>
-          </a:p>
-        </p:txBody>
-      </p:sp>
-      <p:sp>
-        <p:nvSpPr>
-          <p:cNvPr id="66" name="TextBox 65"/>
-          <p:cNvSpPr txBox="1"/>
-          <p:nvPr/>
-        </p:nvSpPr>
-        <p:spPr>
-          <a:xfrm>
-            <a:off x="8540496" y="5184648"/>
-            <a:ext cx="3200400" cy="145938"/>
-          </a:xfrm>
-          <a:prstGeom prst="rect">
-            <a:avLst/>
-          </a:prstGeom>
-          <a:noFill/>
-        </p:spPr>
-        <p:txBody>
-          <a:bodyPr wrap="square">
-            <a:spAutoFit/>
-          </a:bodyPr>
-          <a:lstStyle/>
-          <a:p>
-            <a:pPr algn="l">
-              <a:spcAft>
-                <a:spcPts val="300"/>
-              </a:spcAft>
-            </a:pPr>
-            <a:r>
-              <a:rPr sz="1000" b="1">
-                <a:solidFill>
-                  <a:srgbClr val="0D3B66"/>
-                </a:solidFill>
-                <a:latin typeface="Calibri"/>
-              </a:rPr>
-              <a:t>Cascada</a:t>
-            </a:r>
-          </a:p>
-        </p:txBody>
-      </p:sp>
-      <p:sp>
-        <p:nvSpPr>
-          <p:cNvPr id="67" name="TextBox 66"/>
-          <p:cNvSpPr txBox="1"/>
-          <p:nvPr/>
-        </p:nvSpPr>
-        <p:spPr>
-          <a:xfrm>
-            <a:off x="8540496" y="5303154"/>
-            <a:ext cx="3200400" cy="180685"/>
-          </a:xfrm>
-          <a:prstGeom prst="rect">
-            <a:avLst/>
-          </a:prstGeom>
-          <a:noFill/>
-        </p:spPr>
-        <p:txBody>
-          <a:bodyPr wrap="square">
-            <a:spAutoFit/>
-          </a:bodyPr>
-          <a:lstStyle/>
-          <a:p>
-            <a:pPr algn="l">
-              <a:spcAft>
-                <a:spcPts val="300"/>
-              </a:spcAft>
-            </a:pPr>
-            <a:r>
-              <a:rPr sz="1200" b="1">
-                <a:solidFill>
-                  <a:srgbClr val="0D3B66"/>
-                </a:solidFill>
-                <a:latin typeface="Calibri"/>
-              </a:rPr>
-              <a:t>20 m³    &lt;0,1 %</a:t>
-            </a:r>
-          </a:p>
-        </p:txBody>
-      </p:sp>
-      <p:sp>
-        <p:nvSpPr>
-          <p:cNvPr id="68" name="Rounded Rectangle 67"/>
-          <p:cNvSpPr/>
-          <p:nvPr/>
-        </p:nvSpPr>
-        <p:spPr>
-          <a:xfrm>
-            <a:off x="201168" y="5705856"/>
-            <a:ext cx="11795760" cy="438912"/>
-          </a:xfrm>
-          <a:prstGeom prst="roundRect">
-            <a:avLst>
-              <a:gd name="adj" fmla="val 8000"/>
-            </a:avLst>
-          </a:prstGeom>
-          <a:solidFill>
-            <a:srgbClr val="FFF9EB"/>
-          </a:solidFill>
-          <a:ln w="6350">
-            <a:solidFill>
-              <a:srgbClr val="C9A227"/>
-            </a:solidFill>
-          </a:ln>
-        </p:spPr>
-        <p:style>
-          <a:lnRef idx="1">
-            <a:schemeClr val="accent1"/>
-          </a:lnRef>
-          <a:fillRef idx="3">
-            <a:schemeClr val="accent1"/>
-          </a:fillRef>
-          <a:effectRef idx="2">
-            <a:schemeClr val="accent1"/>
-          </a:effectRef>
-          <a:fontRef idx="minor">
-            <a:schemeClr val="lt1"/>
-          </a:fontRef>
-        </p:style>
-        <p:txBody>
-          <a:bodyPr rtlCol="0" anchor="ctr"/>
-          <a:lstStyle/>
-          <a:p>
-            <a:pPr algn="ctr"/>
-          </a:p>
-        </p:txBody>
-      </p:sp>
-      <p:sp>
-        <p:nvSpPr>
-          <p:cNvPr id="69" name="TextBox 68"/>
+          <p:cNvPr id="25" name="TextBox 24"/>
           <p:cNvSpPr txBox="1"/>
           <p:nvPr/>
         </p:nvSpPr>
@@ -6115,14 +4296,14 @@
                 </a:solidFill>
                 <a:latin typeface="Calibri"/>
               </a:rPr>
-              <a:t>Recepción 12/12/2025  ·  Capacitación 17/12/2025  ·  Francisco Jeldres  ·  Paula Azolas  ·  Mantención: C. Naranjo, M. Jara, R. Moreno, R. Díaz, J. Gutiérrez, H. Fierro</a:t>
-            </a:r>
-          </a:p>
-        </p:txBody>
-      </p:sp>
-      <p:sp>
-        <p:nvSpPr>
-          <p:cNvPr id="70" name="TextBox 69"/>
+              <a:t>Recepción 29/04/2026 (Anillo Norte / Anillo Sur)  ·  Capacitación 12/12/2025  ·  Joceline Lazo  ·  Constanza Vilches</a:t>
+            </a:r>
+          </a:p>
+        </p:txBody>
+      </p:sp>
+      <p:sp>
+        <p:nvSpPr>
+          <p:cNvPr id="26" name="TextBox 25"/>
           <p:cNvSpPr txBox="1"/>
           <p:nvPr/>
         </p:nvSpPr>
@@ -6154,7 +4335,7 @@
                 </a:solidFill>
                 <a:latin typeface="Calibri"/>
               </a:rPr>
-              <a:t>Mayo 26.357   ·   Junio 20.927   ·   Julio 31.239   ·   Agosto 1–17: 21.494   ·   proy. ago 39.195 m³.</a:t>
+              <a:t>Junio 664   ·   Julio 618   ·   Agosto 1–17: 366   ·   proy. ago 667 m³.</a:t>
             </a:r>
           </a:p>
           <a:p>
@@ -6170,7 +4351,7 @@
                 </a:solidFill>
                 <a:latin typeface="Calibri"/>
               </a:rPr>
-              <a:t>Julio = cabecera (7 puntos). 27, 35 y 36 no se suman: cadena Sandía → DL (lámina 2).</a:t>
+              <a:t>Cambio de monitoreo: se dejó Baños y Matriz Principal. Anillo Norte y Sur con lectura correcta desde el 19/05 (mayo no se grafica).</a:t>
             </a:r>
           </a:p>
         </p:txBody>
@@ -6337,7 +4518,7 @@
                 </a:solidFill>
                 <a:latin typeface="Calibri"/>
               </a:rPr>
-              <a:t>PAK  ·  2. Cadena Sandía / Distrito de Lujo</a:t>
+              <a:t>PAK  ·  Equipos y consumo</a:t>
             </a:r>
           </a:p>
         </p:txBody>
@@ -6376,7 +4557,7 @@
                 </a:solidFill>
                 <a:latin typeface="Calibri"/>
               </a:rPr>
-              <a:t>Sandía Antigua y Sandía Nueva alimentan Distrito de Lujo  ·  se divide en Bazar Gourmet y DL Kennedy</a:t>
+              <a:t>Parque Arauco Kennedy   |   10 puntos WES   |   julio = cabecera (sin 27, 35 y 36)   |   01/05/2026 – 17/08/2026</a:t>
             </a:r>
           </a:p>
         </p:txBody>
@@ -6389,8 +4570,1125 @@
         </p:nvSpPr>
         <p:spPr>
           <a:xfrm>
-            <a:off x="201168" y="987552"/>
-            <a:ext cx="11777472" cy="512064"/>
+            <a:off x="201168" y="1024128"/>
+            <a:ext cx="2286000" cy="621792"/>
+          </a:xfrm>
+          <a:prstGeom prst="roundRect">
+            <a:avLst>
+              <a:gd name="adj" fmla="val 8000"/>
+            </a:avLst>
+          </a:prstGeom>
+          <a:solidFill>
+            <a:srgbClr val="F5F7FA"/>
+          </a:solidFill>
+          <a:ln w="6350">
+            <a:solidFill>
+              <a:srgbClr val="7BA3C9"/>
+            </a:solidFill>
+          </a:ln>
+        </p:spPr>
+        <p:style>
+          <a:lnRef idx="1">
+            <a:schemeClr val="accent1"/>
+          </a:lnRef>
+          <a:fillRef idx="3">
+            <a:schemeClr val="accent1"/>
+          </a:fillRef>
+          <a:effectRef idx="2">
+            <a:schemeClr val="accent1"/>
+          </a:effectRef>
+          <a:fontRef idx="minor">
+            <a:schemeClr val="lt1"/>
+          </a:fontRef>
+        </p:style>
+        <p:txBody>
+          <a:bodyPr rtlCol="0" anchor="ctr"/>
+          <a:lstStyle/>
+          <a:p>
+            <a:pPr algn="ctr"/>
+          </a:p>
+        </p:txBody>
+      </p:sp>
+      <p:sp>
+        <p:nvSpPr>
+          <p:cNvPr id="8" name="TextBox 7"/>
+          <p:cNvSpPr txBox="1"/>
+          <p:nvPr/>
+        </p:nvSpPr>
+        <p:spPr>
+          <a:xfrm>
+            <a:off x="274320" y="1060704"/>
+            <a:ext cx="2157984" cy="146304"/>
+          </a:xfrm>
+          <a:prstGeom prst="rect">
+            <a:avLst/>
+          </a:prstGeom>
+          <a:noFill/>
+        </p:spPr>
+        <p:txBody>
+          <a:bodyPr wrap="square">
+            <a:spAutoFit/>
+          </a:bodyPr>
+          <a:lstStyle/>
+          <a:p>
+            <a:pPr algn="l">
+              <a:spcAft>
+                <a:spcPts val="300"/>
+              </a:spcAft>
+            </a:pPr>
+            <a:r>
+              <a:rPr sz="900" b="1">
+                <a:solidFill>
+                  <a:srgbClr val="C9A227"/>
+                </a:solidFill>
+                <a:latin typeface="Calibri"/>
+              </a:rPr>
+              <a:t>000025-20</a:t>
+            </a:r>
+          </a:p>
+        </p:txBody>
+      </p:sp>
+      <p:sp>
+        <p:nvSpPr>
+          <p:cNvPr id="9" name="TextBox 8"/>
+          <p:cNvSpPr txBox="1"/>
+          <p:nvPr/>
+        </p:nvSpPr>
+        <p:spPr>
+          <a:xfrm>
+            <a:off x="274320" y="1225296"/>
+            <a:ext cx="2157984" cy="201168"/>
+          </a:xfrm>
+          <a:prstGeom prst="rect">
+            <a:avLst/>
+          </a:prstGeom>
+          <a:noFill/>
+        </p:spPr>
+        <p:txBody>
+          <a:bodyPr wrap="square">
+            <a:spAutoFit/>
+          </a:bodyPr>
+          <a:lstStyle/>
+          <a:p>
+            <a:pPr algn="l">
+              <a:spcAft>
+                <a:spcPts val="300"/>
+              </a:spcAft>
+            </a:pPr>
+            <a:r>
+              <a:rPr sz="1100" b="1">
+                <a:solidFill>
+                  <a:srgbClr val="0D3B66"/>
+                </a:solidFill>
+                <a:latin typeface="Calibri"/>
+              </a:rPr>
+              <a:t>Matriz Andén</a:t>
+            </a:r>
+          </a:p>
+        </p:txBody>
+      </p:sp>
+      <p:sp>
+        <p:nvSpPr>
+          <p:cNvPr id="10" name="Rounded Rectangle 9"/>
+          <p:cNvSpPr/>
+          <p:nvPr/>
+        </p:nvSpPr>
+        <p:spPr>
+          <a:xfrm>
+            <a:off x="2578608" y="1024128"/>
+            <a:ext cx="2286000" cy="621792"/>
+          </a:xfrm>
+          <a:prstGeom prst="roundRect">
+            <a:avLst>
+              <a:gd name="adj" fmla="val 8000"/>
+            </a:avLst>
+          </a:prstGeom>
+          <a:solidFill>
+            <a:srgbClr val="F5F7FA"/>
+          </a:solidFill>
+          <a:ln w="6350">
+            <a:solidFill>
+              <a:srgbClr val="5A8C6E"/>
+            </a:solidFill>
+          </a:ln>
+        </p:spPr>
+        <p:style>
+          <a:lnRef idx="1">
+            <a:schemeClr val="accent1"/>
+          </a:lnRef>
+          <a:fillRef idx="3">
+            <a:schemeClr val="accent1"/>
+          </a:fillRef>
+          <a:effectRef idx="2">
+            <a:schemeClr val="accent1"/>
+          </a:effectRef>
+          <a:fontRef idx="minor">
+            <a:schemeClr val="lt1"/>
+          </a:fontRef>
+        </p:style>
+        <p:txBody>
+          <a:bodyPr rtlCol="0" anchor="ctr"/>
+          <a:lstStyle/>
+          <a:p>
+            <a:pPr algn="ctr"/>
+          </a:p>
+        </p:txBody>
+      </p:sp>
+      <p:sp>
+        <p:nvSpPr>
+          <p:cNvPr id="11" name="TextBox 10"/>
+          <p:cNvSpPr txBox="1"/>
+          <p:nvPr/>
+        </p:nvSpPr>
+        <p:spPr>
+          <a:xfrm>
+            <a:off x="2651760" y="1060704"/>
+            <a:ext cx="2157984" cy="146304"/>
+          </a:xfrm>
+          <a:prstGeom prst="rect">
+            <a:avLst/>
+          </a:prstGeom>
+          <a:noFill/>
+        </p:spPr>
+        <p:txBody>
+          <a:bodyPr wrap="square">
+            <a:spAutoFit/>
+          </a:bodyPr>
+          <a:lstStyle/>
+          <a:p>
+            <a:pPr algn="l">
+              <a:spcAft>
+                <a:spcPts val="300"/>
+              </a:spcAft>
+            </a:pPr>
+            <a:r>
+              <a:rPr sz="900" b="1">
+                <a:solidFill>
+                  <a:srgbClr val="C9A227"/>
+                </a:solidFill>
+                <a:latin typeface="Calibri"/>
+              </a:rPr>
+              <a:t>000025-21</a:t>
+            </a:r>
+          </a:p>
+        </p:txBody>
+      </p:sp>
+      <p:sp>
+        <p:nvSpPr>
+          <p:cNvPr id="12" name="TextBox 11"/>
+          <p:cNvSpPr txBox="1"/>
+          <p:nvPr/>
+        </p:nvSpPr>
+        <p:spPr>
+          <a:xfrm>
+            <a:off x="2651760" y="1225296"/>
+            <a:ext cx="2157984" cy="201168"/>
+          </a:xfrm>
+          <a:prstGeom prst="rect">
+            <a:avLst/>
+          </a:prstGeom>
+          <a:noFill/>
+        </p:spPr>
+        <p:txBody>
+          <a:bodyPr wrap="square">
+            <a:spAutoFit/>
+          </a:bodyPr>
+          <a:lstStyle/>
+          <a:p>
+            <a:pPr algn="l">
+              <a:spcAft>
+                <a:spcPts val="300"/>
+              </a:spcAft>
+            </a:pPr>
+            <a:r>
+              <a:rPr sz="1100" b="1">
+                <a:solidFill>
+                  <a:srgbClr val="0D3B66"/>
+                </a:solidFill>
+                <a:latin typeface="Calibri"/>
+              </a:rPr>
+              <a:t>Locales Gast.</a:t>
+            </a:r>
+          </a:p>
+        </p:txBody>
+      </p:sp>
+      <p:sp>
+        <p:nvSpPr>
+          <p:cNvPr id="13" name="Rounded Rectangle 12"/>
+          <p:cNvSpPr/>
+          <p:nvPr/>
+        </p:nvSpPr>
+        <p:spPr>
+          <a:xfrm>
+            <a:off x="4956048" y="1024128"/>
+            <a:ext cx="2286000" cy="621792"/>
+          </a:xfrm>
+          <a:prstGeom prst="roundRect">
+            <a:avLst>
+              <a:gd name="adj" fmla="val 8000"/>
+            </a:avLst>
+          </a:prstGeom>
+          <a:solidFill>
+            <a:srgbClr val="F5F7FA"/>
+          </a:solidFill>
+          <a:ln w="6350">
+            <a:solidFill>
+              <a:srgbClr val="8C5A5A"/>
+            </a:solidFill>
+          </a:ln>
+        </p:spPr>
+        <p:style>
+          <a:lnRef idx="1">
+            <a:schemeClr val="accent1"/>
+          </a:lnRef>
+          <a:fillRef idx="3">
+            <a:schemeClr val="accent1"/>
+          </a:fillRef>
+          <a:effectRef idx="2">
+            <a:schemeClr val="accent1"/>
+          </a:effectRef>
+          <a:fontRef idx="minor">
+            <a:schemeClr val="lt1"/>
+          </a:fontRef>
+        </p:style>
+        <p:txBody>
+          <a:bodyPr rtlCol="0" anchor="ctr"/>
+          <a:lstStyle/>
+          <a:p>
+            <a:pPr algn="ctr"/>
+          </a:p>
+        </p:txBody>
+      </p:sp>
+      <p:sp>
+        <p:nvSpPr>
+          <p:cNvPr id="14" name="TextBox 13"/>
+          <p:cNvSpPr txBox="1"/>
+          <p:nvPr/>
+        </p:nvSpPr>
+        <p:spPr>
+          <a:xfrm>
+            <a:off x="5029200" y="1060704"/>
+            <a:ext cx="2157984" cy="146304"/>
+          </a:xfrm>
+          <a:prstGeom prst="rect">
+            <a:avLst/>
+          </a:prstGeom>
+          <a:noFill/>
+        </p:spPr>
+        <p:txBody>
+          <a:bodyPr wrap="square">
+            <a:spAutoFit/>
+          </a:bodyPr>
+          <a:lstStyle/>
+          <a:p>
+            <a:pPr algn="l">
+              <a:spcAft>
+                <a:spcPts val="300"/>
+              </a:spcAft>
+            </a:pPr>
+            <a:r>
+              <a:rPr sz="900" b="1">
+                <a:solidFill>
+                  <a:srgbClr val="C9A227"/>
+                </a:solidFill>
+                <a:latin typeface="Calibri"/>
+              </a:rPr>
+              <a:t>000025-22</a:t>
+            </a:r>
+          </a:p>
+        </p:txBody>
+      </p:sp>
+      <p:sp>
+        <p:nvSpPr>
+          <p:cNvPr id="15" name="TextBox 14"/>
+          <p:cNvSpPr txBox="1"/>
+          <p:nvPr/>
+        </p:nvSpPr>
+        <p:spPr>
+          <a:xfrm>
+            <a:off x="5029200" y="1225296"/>
+            <a:ext cx="2157984" cy="201168"/>
+          </a:xfrm>
+          <a:prstGeom prst="rect">
+            <a:avLst/>
+          </a:prstGeom>
+          <a:noFill/>
+        </p:spPr>
+        <p:txBody>
+          <a:bodyPr wrap="square">
+            <a:spAutoFit/>
+          </a:bodyPr>
+          <a:lstStyle/>
+          <a:p>
+            <a:pPr algn="l">
+              <a:spcAft>
+                <a:spcPts val="300"/>
+              </a:spcAft>
+            </a:pPr>
+            <a:r>
+              <a:rPr sz="1100" b="1">
+                <a:solidFill>
+                  <a:srgbClr val="0D3B66"/>
+                </a:solidFill>
+                <a:latin typeface="Calibri"/>
+              </a:rPr>
+              <a:t>Sandía Antigua</a:t>
+            </a:r>
+          </a:p>
+        </p:txBody>
+      </p:sp>
+      <p:sp>
+        <p:nvSpPr>
+          <p:cNvPr id="16" name="TextBox 15"/>
+          <p:cNvSpPr txBox="1"/>
+          <p:nvPr/>
+        </p:nvSpPr>
+        <p:spPr>
+          <a:xfrm>
+            <a:off x="5029200" y="1444752"/>
+            <a:ext cx="2157984" cy="164592"/>
+          </a:xfrm>
+          <a:prstGeom prst="rect">
+            <a:avLst/>
+          </a:prstGeom>
+          <a:noFill/>
+        </p:spPr>
+        <p:txBody>
+          <a:bodyPr wrap="square">
+            <a:spAutoFit/>
+          </a:bodyPr>
+          <a:lstStyle/>
+          <a:p>
+            <a:pPr algn="l">
+              <a:spcAft>
+                <a:spcPts val="300"/>
+              </a:spcAft>
+            </a:pPr>
+            <a:r>
+              <a:rPr sz="800" b="0">
+                <a:solidFill>
+                  <a:srgbClr val="5A5A5A"/>
+                </a:solidFill>
+                <a:latin typeface="Calibri"/>
+              </a:rPr>
+              <a:t>alimenta 27</a:t>
+            </a:r>
+          </a:p>
+        </p:txBody>
+      </p:sp>
+      <p:sp>
+        <p:nvSpPr>
+          <p:cNvPr id="17" name="Rounded Rectangle 16"/>
+          <p:cNvSpPr/>
+          <p:nvPr/>
+        </p:nvSpPr>
+        <p:spPr>
+          <a:xfrm>
+            <a:off x="7333488" y="1024128"/>
+            <a:ext cx="2286000" cy="621792"/>
+          </a:xfrm>
+          <a:prstGeom prst="roundRect">
+            <a:avLst>
+              <a:gd name="adj" fmla="val 8000"/>
+            </a:avLst>
+          </a:prstGeom>
+          <a:solidFill>
+            <a:srgbClr val="F5F7FA"/>
+          </a:solidFill>
+          <a:ln w="6350">
+            <a:solidFill>
+              <a:srgbClr val="508282"/>
+            </a:solidFill>
+          </a:ln>
+        </p:spPr>
+        <p:style>
+          <a:lnRef idx="1">
+            <a:schemeClr val="accent1"/>
+          </a:lnRef>
+          <a:fillRef idx="3">
+            <a:schemeClr val="accent1"/>
+          </a:fillRef>
+          <a:effectRef idx="2">
+            <a:schemeClr val="accent1"/>
+          </a:effectRef>
+          <a:fontRef idx="minor">
+            <a:schemeClr val="lt1"/>
+          </a:fontRef>
+        </p:style>
+        <p:txBody>
+          <a:bodyPr rtlCol="0" anchor="ctr"/>
+          <a:lstStyle/>
+          <a:p>
+            <a:pPr algn="ctr"/>
+          </a:p>
+        </p:txBody>
+      </p:sp>
+      <p:sp>
+        <p:nvSpPr>
+          <p:cNvPr id="18" name="TextBox 17"/>
+          <p:cNvSpPr txBox="1"/>
+          <p:nvPr/>
+        </p:nvSpPr>
+        <p:spPr>
+          <a:xfrm>
+            <a:off x="7406640" y="1060704"/>
+            <a:ext cx="2157984" cy="146304"/>
+          </a:xfrm>
+          <a:prstGeom prst="rect">
+            <a:avLst/>
+          </a:prstGeom>
+          <a:noFill/>
+        </p:spPr>
+        <p:txBody>
+          <a:bodyPr wrap="square">
+            <a:spAutoFit/>
+          </a:bodyPr>
+          <a:lstStyle/>
+          <a:p>
+            <a:pPr algn="l">
+              <a:spcAft>
+                <a:spcPts val="300"/>
+              </a:spcAft>
+            </a:pPr>
+            <a:r>
+              <a:rPr sz="900" b="1">
+                <a:solidFill>
+                  <a:srgbClr val="C9A227"/>
+                </a:solidFill>
+                <a:latin typeface="Calibri"/>
+              </a:rPr>
+              <a:t>000025-28</a:t>
+            </a:r>
+          </a:p>
+        </p:txBody>
+      </p:sp>
+      <p:sp>
+        <p:nvSpPr>
+          <p:cNvPr id="19" name="TextBox 18"/>
+          <p:cNvSpPr txBox="1"/>
+          <p:nvPr/>
+        </p:nvSpPr>
+        <p:spPr>
+          <a:xfrm>
+            <a:off x="7406640" y="1225296"/>
+            <a:ext cx="2157984" cy="201168"/>
+          </a:xfrm>
+          <a:prstGeom prst="rect">
+            <a:avLst/>
+          </a:prstGeom>
+          <a:noFill/>
+        </p:spPr>
+        <p:txBody>
+          <a:bodyPr wrap="square">
+            <a:spAutoFit/>
+          </a:bodyPr>
+          <a:lstStyle/>
+          <a:p>
+            <a:pPr algn="l">
+              <a:spcAft>
+                <a:spcPts val="300"/>
+              </a:spcAft>
+            </a:pPr>
+            <a:r>
+              <a:rPr sz="1100" b="1">
+                <a:solidFill>
+                  <a:srgbClr val="0D3B66"/>
+                </a:solidFill>
+                <a:latin typeface="Calibri"/>
+              </a:rPr>
+              <a:t>Sandía Nueva</a:t>
+            </a:r>
+          </a:p>
+        </p:txBody>
+      </p:sp>
+      <p:sp>
+        <p:nvSpPr>
+          <p:cNvPr id="20" name="TextBox 19"/>
+          <p:cNvSpPr txBox="1"/>
+          <p:nvPr/>
+        </p:nvSpPr>
+        <p:spPr>
+          <a:xfrm>
+            <a:off x="7406640" y="1444752"/>
+            <a:ext cx="2157984" cy="164592"/>
+          </a:xfrm>
+          <a:prstGeom prst="rect">
+            <a:avLst/>
+          </a:prstGeom>
+          <a:noFill/>
+        </p:spPr>
+        <p:txBody>
+          <a:bodyPr wrap="square">
+            <a:spAutoFit/>
+          </a:bodyPr>
+          <a:lstStyle/>
+          <a:p>
+            <a:pPr algn="l">
+              <a:spcAft>
+                <a:spcPts val="300"/>
+              </a:spcAft>
+            </a:pPr>
+            <a:r>
+              <a:rPr sz="800" b="0">
+                <a:solidFill>
+                  <a:srgbClr val="5A5A5A"/>
+                </a:solidFill>
+                <a:latin typeface="Calibri"/>
+              </a:rPr>
+              <a:t>alimenta 27</a:t>
+            </a:r>
+          </a:p>
+        </p:txBody>
+      </p:sp>
+      <p:sp>
+        <p:nvSpPr>
+          <p:cNvPr id="21" name="Rounded Rectangle 20"/>
+          <p:cNvSpPr/>
+          <p:nvPr/>
+        </p:nvSpPr>
+        <p:spPr>
+          <a:xfrm>
+            <a:off x="9710928" y="1024128"/>
+            <a:ext cx="2286000" cy="621792"/>
+          </a:xfrm>
+          <a:prstGeom prst="roundRect">
+            <a:avLst>
+              <a:gd name="adj" fmla="val 8000"/>
+            </a:avLst>
+          </a:prstGeom>
+          <a:solidFill>
+            <a:srgbClr val="F5F7FA"/>
+          </a:solidFill>
+          <a:ln w="6350">
+            <a:solidFill>
+              <a:srgbClr val="0D3B66"/>
+            </a:solidFill>
+          </a:ln>
+        </p:spPr>
+        <p:style>
+          <a:lnRef idx="1">
+            <a:schemeClr val="accent1"/>
+          </a:lnRef>
+          <a:fillRef idx="3">
+            <a:schemeClr val="accent1"/>
+          </a:fillRef>
+          <a:effectRef idx="2">
+            <a:schemeClr val="accent1"/>
+          </a:effectRef>
+          <a:fontRef idx="minor">
+            <a:schemeClr val="lt1"/>
+          </a:fontRef>
+        </p:style>
+        <p:txBody>
+          <a:bodyPr rtlCol="0" anchor="ctr"/>
+          <a:lstStyle/>
+          <a:p>
+            <a:pPr algn="ctr"/>
+          </a:p>
+        </p:txBody>
+      </p:sp>
+      <p:sp>
+        <p:nvSpPr>
+          <p:cNvPr id="22" name="TextBox 21"/>
+          <p:cNvSpPr txBox="1"/>
+          <p:nvPr/>
+        </p:nvSpPr>
+        <p:spPr>
+          <a:xfrm>
+            <a:off x="9784080" y="1060704"/>
+            <a:ext cx="2157984" cy="146304"/>
+          </a:xfrm>
+          <a:prstGeom prst="rect">
+            <a:avLst/>
+          </a:prstGeom>
+          <a:noFill/>
+        </p:spPr>
+        <p:txBody>
+          <a:bodyPr wrap="square">
+            <a:spAutoFit/>
+          </a:bodyPr>
+          <a:lstStyle/>
+          <a:p>
+            <a:pPr algn="l">
+              <a:spcAft>
+                <a:spcPts val="300"/>
+              </a:spcAft>
+            </a:pPr>
+            <a:r>
+              <a:rPr sz="900" b="1">
+                <a:solidFill>
+                  <a:srgbClr val="C9A227"/>
+                </a:solidFill>
+                <a:latin typeface="Calibri"/>
+              </a:rPr>
+              <a:t>000025-29</a:t>
+            </a:r>
+          </a:p>
+        </p:txBody>
+      </p:sp>
+      <p:sp>
+        <p:nvSpPr>
+          <p:cNvPr id="23" name="TextBox 22"/>
+          <p:cNvSpPr txBox="1"/>
+          <p:nvPr/>
+        </p:nvSpPr>
+        <p:spPr>
+          <a:xfrm>
+            <a:off x="9784080" y="1225296"/>
+            <a:ext cx="2157984" cy="201168"/>
+          </a:xfrm>
+          <a:prstGeom prst="rect">
+            <a:avLst/>
+          </a:prstGeom>
+          <a:noFill/>
+        </p:spPr>
+        <p:txBody>
+          <a:bodyPr wrap="square">
+            <a:spAutoFit/>
+          </a:bodyPr>
+          <a:lstStyle/>
+          <a:p>
+            <a:pPr algn="l">
+              <a:spcAft>
+                <a:spcPts val="300"/>
+              </a:spcAft>
+            </a:pPr>
+            <a:r>
+              <a:rPr sz="1100" b="1">
+                <a:solidFill>
+                  <a:srgbClr val="0D3B66"/>
+                </a:solidFill>
+                <a:latin typeface="Calibri"/>
+              </a:rPr>
+              <a:t>Restaurante</a:t>
+            </a:r>
+          </a:p>
+        </p:txBody>
+      </p:sp>
+      <p:sp>
+        <p:nvSpPr>
+          <p:cNvPr id="24" name="Rounded Rectangle 23"/>
+          <p:cNvSpPr/>
+          <p:nvPr/>
+        </p:nvSpPr>
+        <p:spPr>
+          <a:xfrm>
+            <a:off x="201168" y="1719072"/>
+            <a:ext cx="2286000" cy="621792"/>
+          </a:xfrm>
+          <a:prstGeom prst="roundRect">
+            <a:avLst>
+              <a:gd name="adj" fmla="val 8000"/>
+            </a:avLst>
+          </a:prstGeom>
+          <a:solidFill>
+            <a:srgbClr val="F5F7FA"/>
+          </a:solidFill>
+          <a:ln w="6350">
+            <a:solidFill>
+              <a:srgbClr val="46648C"/>
+            </a:solidFill>
+          </a:ln>
+        </p:spPr>
+        <p:style>
+          <a:lnRef idx="1">
+            <a:schemeClr val="accent1"/>
+          </a:lnRef>
+          <a:fillRef idx="3">
+            <a:schemeClr val="accent1"/>
+          </a:fillRef>
+          <a:effectRef idx="2">
+            <a:schemeClr val="accent1"/>
+          </a:effectRef>
+          <a:fontRef idx="minor">
+            <a:schemeClr val="lt1"/>
+          </a:fontRef>
+        </p:style>
+        <p:txBody>
+          <a:bodyPr rtlCol="0" anchor="ctr"/>
+          <a:lstStyle/>
+          <a:p>
+            <a:pPr algn="ctr"/>
+          </a:p>
+        </p:txBody>
+      </p:sp>
+      <p:sp>
+        <p:nvSpPr>
+          <p:cNvPr id="25" name="TextBox 24"/>
+          <p:cNvSpPr txBox="1"/>
+          <p:nvPr/>
+        </p:nvSpPr>
+        <p:spPr>
+          <a:xfrm>
+            <a:off x="274320" y="1755648"/>
+            <a:ext cx="2157984" cy="146304"/>
+          </a:xfrm>
+          <a:prstGeom prst="rect">
+            <a:avLst/>
+          </a:prstGeom>
+          <a:noFill/>
+        </p:spPr>
+        <p:txBody>
+          <a:bodyPr wrap="square">
+            <a:spAutoFit/>
+          </a:bodyPr>
+          <a:lstStyle/>
+          <a:p>
+            <a:pPr algn="l">
+              <a:spcAft>
+                <a:spcPts val="300"/>
+              </a:spcAft>
+            </a:pPr>
+            <a:r>
+              <a:rPr sz="900" b="1">
+                <a:solidFill>
+                  <a:srgbClr val="C9A227"/>
+                </a:solidFill>
+                <a:latin typeface="Calibri"/>
+              </a:rPr>
+              <a:t>000025-23</a:t>
+            </a:r>
+          </a:p>
+        </p:txBody>
+      </p:sp>
+      <p:sp>
+        <p:nvSpPr>
+          <p:cNvPr id="26" name="TextBox 25"/>
+          <p:cNvSpPr txBox="1"/>
+          <p:nvPr/>
+        </p:nvSpPr>
+        <p:spPr>
+          <a:xfrm>
+            <a:off x="274320" y="1920240"/>
+            <a:ext cx="2157984" cy="201168"/>
+          </a:xfrm>
+          <a:prstGeom prst="rect">
+            <a:avLst/>
+          </a:prstGeom>
+          <a:noFill/>
+        </p:spPr>
+        <p:txBody>
+          <a:bodyPr wrap="square">
+            <a:spAutoFit/>
+          </a:bodyPr>
+          <a:lstStyle/>
+          <a:p>
+            <a:pPr algn="l">
+              <a:spcAft>
+                <a:spcPts val="300"/>
+              </a:spcAft>
+            </a:pPr>
+            <a:r>
+              <a:rPr sz="1100" b="1">
+                <a:solidFill>
+                  <a:srgbClr val="0D3B66"/>
+                </a:solidFill>
+                <a:latin typeface="Calibri"/>
+              </a:rPr>
+              <a:t>Pileta</a:t>
+            </a:r>
+          </a:p>
+        </p:txBody>
+      </p:sp>
+      <p:sp>
+        <p:nvSpPr>
+          <p:cNvPr id="27" name="Rounded Rectangle 26"/>
+          <p:cNvSpPr/>
+          <p:nvPr/>
+        </p:nvSpPr>
+        <p:spPr>
+          <a:xfrm>
+            <a:off x="2578608" y="1719072"/>
+            <a:ext cx="2286000" cy="621792"/>
+          </a:xfrm>
+          <a:prstGeom prst="roundRect">
+            <a:avLst>
+              <a:gd name="adj" fmla="val 8000"/>
+            </a:avLst>
+          </a:prstGeom>
+          <a:solidFill>
+            <a:srgbClr val="F5F7FA"/>
+          </a:solidFill>
+          <a:ln w="6350">
+            <a:solidFill>
+              <a:srgbClr val="A0783C"/>
+            </a:solidFill>
+          </a:ln>
+        </p:spPr>
+        <p:style>
+          <a:lnRef idx="1">
+            <a:schemeClr val="accent1"/>
+          </a:lnRef>
+          <a:fillRef idx="3">
+            <a:schemeClr val="accent1"/>
+          </a:fillRef>
+          <a:effectRef idx="2">
+            <a:schemeClr val="accent1"/>
+          </a:effectRef>
+          <a:fontRef idx="minor">
+            <a:schemeClr val="lt1"/>
+          </a:fontRef>
+        </p:style>
+        <p:txBody>
+          <a:bodyPr rtlCol="0" anchor="ctr"/>
+          <a:lstStyle/>
+          <a:p>
+            <a:pPr algn="ctr"/>
+          </a:p>
+        </p:txBody>
+      </p:sp>
+      <p:sp>
+        <p:nvSpPr>
+          <p:cNvPr id="28" name="TextBox 27"/>
+          <p:cNvSpPr txBox="1"/>
+          <p:nvPr/>
+        </p:nvSpPr>
+        <p:spPr>
+          <a:xfrm>
+            <a:off x="2651760" y="1755648"/>
+            <a:ext cx="2157984" cy="146304"/>
+          </a:xfrm>
+          <a:prstGeom prst="rect">
+            <a:avLst/>
+          </a:prstGeom>
+          <a:noFill/>
+        </p:spPr>
+        <p:txBody>
+          <a:bodyPr wrap="square">
+            <a:spAutoFit/>
+          </a:bodyPr>
+          <a:lstStyle/>
+          <a:p>
+            <a:pPr algn="l">
+              <a:spcAft>
+                <a:spcPts val="300"/>
+              </a:spcAft>
+            </a:pPr>
+            <a:r>
+              <a:rPr sz="900" b="1">
+                <a:solidFill>
+                  <a:srgbClr val="C9A227"/>
+                </a:solidFill>
+                <a:latin typeface="Calibri"/>
+              </a:rPr>
+              <a:t>000025-24</a:t>
+            </a:r>
+          </a:p>
+        </p:txBody>
+      </p:sp>
+      <p:sp>
+        <p:nvSpPr>
+          <p:cNvPr id="29" name="TextBox 28"/>
+          <p:cNvSpPr txBox="1"/>
+          <p:nvPr/>
+        </p:nvSpPr>
+        <p:spPr>
+          <a:xfrm>
+            <a:off x="2651760" y="1920240"/>
+            <a:ext cx="2157984" cy="201168"/>
+          </a:xfrm>
+          <a:prstGeom prst="rect">
+            <a:avLst/>
+          </a:prstGeom>
+          <a:noFill/>
+        </p:spPr>
+        <p:txBody>
+          <a:bodyPr wrap="square">
+            <a:spAutoFit/>
+          </a:bodyPr>
+          <a:lstStyle/>
+          <a:p>
+            <a:pPr algn="l">
+              <a:spcAft>
+                <a:spcPts val="300"/>
+              </a:spcAft>
+            </a:pPr>
+            <a:r>
+              <a:rPr sz="1100" b="1">
+                <a:solidFill>
+                  <a:srgbClr val="0D3B66"/>
+                </a:solidFill>
+                <a:latin typeface="Calibri"/>
+              </a:rPr>
+              <a:t>Cascada</a:t>
+            </a:r>
+          </a:p>
+        </p:txBody>
+      </p:sp>
+      <p:sp>
+        <p:nvSpPr>
+          <p:cNvPr id="30" name="Rounded Rectangle 29"/>
+          <p:cNvSpPr/>
+          <p:nvPr/>
+        </p:nvSpPr>
+        <p:spPr>
+          <a:xfrm>
+            <a:off x="4956048" y="1719072"/>
+            <a:ext cx="2286000" cy="621792"/>
+          </a:xfrm>
+          <a:prstGeom prst="roundRect">
+            <a:avLst>
+              <a:gd name="adj" fmla="val 8000"/>
+            </a:avLst>
+          </a:prstGeom>
+          <a:solidFill>
+            <a:srgbClr val="FFF9EB"/>
+          </a:solidFill>
+          <a:ln w="6350">
+            <a:solidFill>
+              <a:srgbClr val="C45C26"/>
+            </a:solidFill>
+          </a:ln>
+        </p:spPr>
+        <p:style>
+          <a:lnRef idx="1">
+            <a:schemeClr val="accent1"/>
+          </a:lnRef>
+          <a:fillRef idx="3">
+            <a:schemeClr val="accent1"/>
+          </a:fillRef>
+          <a:effectRef idx="2">
+            <a:schemeClr val="accent1"/>
+          </a:effectRef>
+          <a:fontRef idx="minor">
+            <a:schemeClr val="lt1"/>
+          </a:fontRef>
+        </p:style>
+        <p:txBody>
+          <a:bodyPr rtlCol="0" anchor="ctr"/>
+          <a:lstStyle/>
+          <a:p>
+            <a:pPr algn="ctr"/>
+          </a:p>
+        </p:txBody>
+      </p:sp>
+      <p:sp>
+        <p:nvSpPr>
+          <p:cNvPr id="31" name="TextBox 30"/>
+          <p:cNvSpPr txBox="1"/>
+          <p:nvPr/>
+        </p:nvSpPr>
+        <p:spPr>
+          <a:xfrm>
+            <a:off x="5029200" y="1755648"/>
+            <a:ext cx="2157984" cy="146304"/>
+          </a:xfrm>
+          <a:prstGeom prst="rect">
+            <a:avLst/>
+          </a:prstGeom>
+          <a:noFill/>
+        </p:spPr>
+        <p:txBody>
+          <a:bodyPr wrap="square">
+            <a:spAutoFit/>
+          </a:bodyPr>
+          <a:lstStyle/>
+          <a:p>
+            <a:pPr algn="l">
+              <a:spcAft>
+                <a:spcPts val="300"/>
+              </a:spcAft>
+            </a:pPr>
+            <a:r>
+              <a:rPr sz="900" b="1">
+                <a:solidFill>
+                  <a:srgbClr val="C9A227"/>
+                </a:solidFill>
+                <a:latin typeface="Calibri"/>
+              </a:rPr>
+              <a:t>000025-27</a:t>
+            </a:r>
+          </a:p>
+        </p:txBody>
+      </p:sp>
+      <p:sp>
+        <p:nvSpPr>
+          <p:cNvPr id="32" name="TextBox 31"/>
+          <p:cNvSpPr txBox="1"/>
+          <p:nvPr/>
+        </p:nvSpPr>
+        <p:spPr>
+          <a:xfrm>
+            <a:off x="5029200" y="1920240"/>
+            <a:ext cx="2157984" cy="201168"/>
+          </a:xfrm>
+          <a:prstGeom prst="rect">
+            <a:avLst/>
+          </a:prstGeom>
+          <a:noFill/>
+        </p:spPr>
+        <p:txBody>
+          <a:bodyPr wrap="square">
+            <a:spAutoFit/>
+          </a:bodyPr>
+          <a:lstStyle/>
+          <a:p>
+            <a:pPr algn="l">
+              <a:spcAft>
+                <a:spcPts val="300"/>
+              </a:spcAft>
+            </a:pPr>
+            <a:r>
+              <a:rPr sz="1100" b="1">
+                <a:solidFill>
+                  <a:srgbClr val="0D3B66"/>
+                </a:solidFill>
+                <a:latin typeface="Calibri"/>
+              </a:rPr>
+              <a:t>Distrito Lujo</a:t>
+            </a:r>
+          </a:p>
+        </p:txBody>
+      </p:sp>
+      <p:sp>
+        <p:nvSpPr>
+          <p:cNvPr id="33" name="TextBox 32"/>
+          <p:cNvSpPr txBox="1"/>
+          <p:nvPr/>
+        </p:nvSpPr>
+        <p:spPr>
+          <a:xfrm>
+            <a:off x="5029200" y="2139696"/>
+            <a:ext cx="2157984" cy="164592"/>
+          </a:xfrm>
+          <a:prstGeom prst="rect">
+            <a:avLst/>
+          </a:prstGeom>
+          <a:noFill/>
+        </p:spPr>
+        <p:txBody>
+          <a:bodyPr wrap="square">
+            <a:spAutoFit/>
+          </a:bodyPr>
+          <a:lstStyle/>
+          <a:p>
+            <a:pPr algn="l">
+              <a:spcAft>
+                <a:spcPts val="300"/>
+              </a:spcAft>
+            </a:pPr>
+            <a:r>
+              <a:rPr sz="800" b="0">
+                <a:solidFill>
+                  <a:srgbClr val="5A5A5A"/>
+                </a:solidFill>
+                <a:latin typeface="Calibri"/>
+              </a:rPr>
+              <a:t>cadena · no suma</a:t>
+            </a:r>
+          </a:p>
+        </p:txBody>
+      </p:sp>
+      <p:sp>
+        <p:nvSpPr>
+          <p:cNvPr id="34" name="Rounded Rectangle 33"/>
+          <p:cNvSpPr/>
+          <p:nvPr/>
+        </p:nvSpPr>
+        <p:spPr>
+          <a:xfrm>
+            <a:off x="7333488" y="1719072"/>
+            <a:ext cx="2286000" cy="621792"/>
           </a:xfrm>
           <a:prstGeom prst="roundRect">
             <a:avLst>
@@ -6430,53 +5728,1239 @@
       </p:sp>
       <p:sp>
         <p:nvSpPr>
-          <p:cNvPr id="8" name="TextBox 7"/>
-          <p:cNvSpPr txBox="1"/>
-          <p:nvPr/>
-        </p:nvSpPr>
-        <p:spPr>
-          <a:xfrm>
-            <a:off x="365760" y="1042415"/>
-            <a:ext cx="11475720" cy="402336"/>
-          </a:xfrm>
-          <a:prstGeom prst="rect">
-            <a:avLst/>
-          </a:prstGeom>
-          <a:noFill/>
-        </p:spPr>
-        <p:txBody>
-          <a:bodyPr wrap="square">
-            <a:spAutoFit/>
-          </a:bodyPr>
-          <a:lstStyle/>
-          <a:p>
-            <a:pPr algn="l">
-              <a:spcAft>
-                <a:spcPts val="300"/>
-              </a:spcAft>
-            </a:pPr>
-            <a:r>
-              <a:rPr sz="1300" b="0">
+          <p:cNvPr id="35" name="TextBox 34"/>
+          <p:cNvSpPr txBox="1"/>
+          <p:nvPr/>
+        </p:nvSpPr>
+        <p:spPr>
+          <a:xfrm>
+            <a:off x="7406640" y="1755648"/>
+            <a:ext cx="2157984" cy="146304"/>
+          </a:xfrm>
+          <a:prstGeom prst="rect">
+            <a:avLst/>
+          </a:prstGeom>
+          <a:noFill/>
+        </p:spPr>
+        <p:txBody>
+          <a:bodyPr wrap="square">
+            <a:spAutoFit/>
+          </a:bodyPr>
+          <a:lstStyle/>
+          <a:p>
+            <a:pPr algn="l">
+              <a:spcAft>
+                <a:spcPts val="300"/>
+              </a:spcAft>
+            </a:pPr>
+            <a:r>
+              <a:rPr sz="900" b="1">
+                <a:solidFill>
+                  <a:srgbClr val="C9A227"/>
+                </a:solidFill>
+                <a:latin typeface="Calibri"/>
+              </a:rPr>
+              <a:t>000025-35</a:t>
+            </a:r>
+          </a:p>
+        </p:txBody>
+      </p:sp>
+      <p:sp>
+        <p:nvSpPr>
+          <p:cNvPr id="36" name="TextBox 35"/>
+          <p:cNvSpPr txBox="1"/>
+          <p:nvPr/>
+        </p:nvSpPr>
+        <p:spPr>
+          <a:xfrm>
+            <a:off x="7406640" y="1920240"/>
+            <a:ext cx="2157984" cy="201168"/>
+          </a:xfrm>
+          <a:prstGeom prst="rect">
+            <a:avLst/>
+          </a:prstGeom>
+          <a:noFill/>
+        </p:spPr>
+        <p:txBody>
+          <a:bodyPr wrap="square">
+            <a:spAutoFit/>
+          </a:bodyPr>
+          <a:lstStyle/>
+          <a:p>
+            <a:pPr algn="l">
+              <a:spcAft>
+                <a:spcPts val="300"/>
+              </a:spcAft>
+            </a:pPr>
+            <a:r>
+              <a:rPr sz="1100" b="1">
                 <a:solidFill>
                   <a:srgbClr val="0D3B66"/>
                 </a:solidFill>
                 <a:latin typeface="Calibri"/>
               </a:rPr>
-              <a:t>Sandía Antigua y Sandía Nueva alimentan Distrito de Lujo. Desde ahí el caudal se divide en Bazar Gourmet y DL Kennedy. Por eso esos tres puntos no se suman a la cabecera: sería doble conteo.</a:t>
-            </a:r>
-          </a:p>
-        </p:txBody>
-      </p:sp>
-      <p:sp>
-        <p:nvSpPr>
-          <p:cNvPr id="9" name="Rounded Rectangle 8"/>
+              <a:t>Bazar Gourmet</a:t>
+            </a:r>
+          </a:p>
+        </p:txBody>
+      </p:sp>
+      <p:sp>
+        <p:nvSpPr>
+          <p:cNvPr id="37" name="TextBox 36"/>
+          <p:cNvSpPr txBox="1"/>
+          <p:nvPr/>
+        </p:nvSpPr>
+        <p:spPr>
+          <a:xfrm>
+            <a:off x="7406640" y="2139696"/>
+            <a:ext cx="2157984" cy="164592"/>
+          </a:xfrm>
+          <a:prstGeom prst="rect">
+            <a:avLst/>
+          </a:prstGeom>
+          <a:noFill/>
+        </p:spPr>
+        <p:txBody>
+          <a:bodyPr wrap="square">
+            <a:spAutoFit/>
+          </a:bodyPr>
+          <a:lstStyle/>
+          <a:p>
+            <a:pPr algn="l">
+              <a:spcAft>
+                <a:spcPts val="300"/>
+              </a:spcAft>
+            </a:pPr>
+            <a:r>
+              <a:rPr sz="800" b="0">
+                <a:solidFill>
+                  <a:srgbClr val="5A5A5A"/>
+                </a:solidFill>
+                <a:latin typeface="Calibri"/>
+              </a:rPr>
+              <a:t>sale de 27</a:t>
+            </a:r>
+          </a:p>
+        </p:txBody>
+      </p:sp>
+      <p:sp>
+        <p:nvSpPr>
+          <p:cNvPr id="38" name="Rounded Rectangle 37"/>
           <p:cNvSpPr/>
           <p:nvPr/>
         </p:nvSpPr>
         <p:spPr>
           <a:xfrm>
-            <a:off x="201168" y="1591056"/>
-            <a:ext cx="1938528" cy="457200"/>
+            <a:off x="9710928" y="1719072"/>
+            <a:ext cx="2286000" cy="621792"/>
+          </a:xfrm>
+          <a:prstGeom prst="roundRect">
+            <a:avLst>
+              <a:gd name="adj" fmla="val 8000"/>
+            </a:avLst>
+          </a:prstGeom>
+          <a:solidFill>
+            <a:srgbClr val="FFF9EB"/>
+          </a:solidFill>
+          <a:ln w="6350">
+            <a:solidFill>
+              <a:srgbClr val="5A8C6E"/>
+            </a:solidFill>
+          </a:ln>
+        </p:spPr>
+        <p:style>
+          <a:lnRef idx="1">
+            <a:schemeClr val="accent1"/>
+          </a:lnRef>
+          <a:fillRef idx="3">
+            <a:schemeClr val="accent1"/>
+          </a:fillRef>
+          <a:effectRef idx="2">
+            <a:schemeClr val="accent1"/>
+          </a:effectRef>
+          <a:fontRef idx="minor">
+            <a:schemeClr val="lt1"/>
+          </a:fontRef>
+        </p:style>
+        <p:txBody>
+          <a:bodyPr rtlCol="0" anchor="ctr"/>
+          <a:lstStyle/>
+          <a:p>
+            <a:pPr algn="ctr"/>
+          </a:p>
+        </p:txBody>
+      </p:sp>
+      <p:sp>
+        <p:nvSpPr>
+          <p:cNvPr id="39" name="TextBox 38"/>
+          <p:cNvSpPr txBox="1"/>
+          <p:nvPr/>
+        </p:nvSpPr>
+        <p:spPr>
+          <a:xfrm>
+            <a:off x="9784080" y="1755648"/>
+            <a:ext cx="2157984" cy="146304"/>
+          </a:xfrm>
+          <a:prstGeom prst="rect">
+            <a:avLst/>
+          </a:prstGeom>
+          <a:noFill/>
+        </p:spPr>
+        <p:txBody>
+          <a:bodyPr wrap="square">
+            <a:spAutoFit/>
+          </a:bodyPr>
+          <a:lstStyle/>
+          <a:p>
+            <a:pPr algn="l">
+              <a:spcAft>
+                <a:spcPts val="300"/>
+              </a:spcAft>
+            </a:pPr>
+            <a:r>
+              <a:rPr sz="900" b="1">
+                <a:solidFill>
+                  <a:srgbClr val="C9A227"/>
+                </a:solidFill>
+                <a:latin typeface="Calibri"/>
+              </a:rPr>
+              <a:t>000025-36</a:t>
+            </a:r>
+          </a:p>
+        </p:txBody>
+      </p:sp>
+      <p:sp>
+        <p:nvSpPr>
+          <p:cNvPr id="40" name="TextBox 39"/>
+          <p:cNvSpPr txBox="1"/>
+          <p:nvPr/>
+        </p:nvSpPr>
+        <p:spPr>
+          <a:xfrm>
+            <a:off x="9784080" y="1920240"/>
+            <a:ext cx="2157984" cy="201168"/>
+          </a:xfrm>
+          <a:prstGeom prst="rect">
+            <a:avLst/>
+          </a:prstGeom>
+          <a:noFill/>
+        </p:spPr>
+        <p:txBody>
+          <a:bodyPr wrap="square">
+            <a:spAutoFit/>
+          </a:bodyPr>
+          <a:lstStyle/>
+          <a:p>
+            <a:pPr algn="l">
+              <a:spcAft>
+                <a:spcPts val="300"/>
+              </a:spcAft>
+            </a:pPr>
+            <a:r>
+              <a:rPr sz="1100" b="1">
+                <a:solidFill>
+                  <a:srgbClr val="0D3B66"/>
+                </a:solidFill>
+                <a:latin typeface="Calibri"/>
+              </a:rPr>
+              <a:t>DL Kennedy</a:t>
+            </a:r>
+          </a:p>
+        </p:txBody>
+      </p:sp>
+      <p:sp>
+        <p:nvSpPr>
+          <p:cNvPr id="41" name="TextBox 40"/>
+          <p:cNvSpPr txBox="1"/>
+          <p:nvPr/>
+        </p:nvSpPr>
+        <p:spPr>
+          <a:xfrm>
+            <a:off x="9784080" y="2139696"/>
+            <a:ext cx="2157984" cy="164592"/>
+          </a:xfrm>
+          <a:prstGeom prst="rect">
+            <a:avLst/>
+          </a:prstGeom>
+          <a:noFill/>
+        </p:spPr>
+        <p:txBody>
+          <a:bodyPr wrap="square">
+            <a:spAutoFit/>
+          </a:bodyPr>
+          <a:lstStyle/>
+          <a:p>
+            <a:pPr algn="l">
+              <a:spcAft>
+                <a:spcPts val="300"/>
+              </a:spcAft>
+            </a:pPr>
+            <a:r>
+              <a:rPr sz="800" b="0">
+                <a:solidFill>
+                  <a:srgbClr val="5A5A5A"/>
+                </a:solidFill>
+                <a:latin typeface="Calibri"/>
+              </a:rPr>
+              <a:t>sale de 27</a:t>
+            </a:r>
+          </a:p>
+        </p:txBody>
+      </p:sp>
+      <p:sp>
+        <p:nvSpPr>
+          <p:cNvPr id="42" name="Rounded Rectangle 41"/>
+          <p:cNvSpPr/>
+          <p:nvPr/>
+        </p:nvSpPr>
+        <p:spPr>
+          <a:xfrm>
+            <a:off x="201168" y="2432304"/>
+            <a:ext cx="7973568" cy="3182111"/>
+          </a:xfrm>
+          <a:prstGeom prst="roundRect">
+            <a:avLst>
+              <a:gd name="adj" fmla="val 8000"/>
+            </a:avLst>
+          </a:prstGeom>
+          <a:solidFill>
+            <a:srgbClr val="F5F7FA"/>
+          </a:solidFill>
+          <a:ln>
+            <a:noFill/>
+          </a:ln>
+        </p:spPr>
+        <p:style>
+          <a:lnRef idx="1">
+            <a:schemeClr val="accent1"/>
+          </a:lnRef>
+          <a:fillRef idx="3">
+            <a:schemeClr val="accent1"/>
+          </a:fillRef>
+          <a:effectRef idx="2">
+            <a:schemeClr val="accent1"/>
+          </a:effectRef>
+          <a:fontRef idx="minor">
+            <a:schemeClr val="lt1"/>
+          </a:fontRef>
+        </p:style>
+        <p:txBody>
+          <a:bodyPr rtlCol="0" anchor="ctr"/>
+          <a:lstStyle/>
+          <a:p>
+            <a:pPr algn="ctr"/>
+          </a:p>
+        </p:txBody>
+      </p:sp>
+      <p:pic>
+        <p:nvPicPr>
+          <p:cNvPr id="43" name="Picture 42" descr="pak_mensual_may_ago.png"/>
+          <p:cNvPicPr>
+            <a:picLocks noChangeAspect="1"/>
+          </p:cNvPicPr>
+          <p:nvPr/>
+        </p:nvPicPr>
+        <p:blipFill>
+          <a:blip r:embed="rId3"/>
+          <a:stretch>
+            <a:fillRect/>
+          </a:stretch>
+        </p:blipFill>
+        <p:spPr>
+          <a:xfrm>
+            <a:off x="605863" y="2487168"/>
+            <a:ext cx="7164176" cy="3072383"/>
+          </a:xfrm>
+          <a:prstGeom prst="rect">
+            <a:avLst/>
+          </a:prstGeom>
+        </p:spPr>
+      </p:pic>
+      <p:sp>
+        <p:nvSpPr>
+          <p:cNvPr id="44" name="Rounded Rectangle 43"/>
+          <p:cNvSpPr/>
+          <p:nvPr/>
+        </p:nvSpPr>
+        <p:spPr>
+          <a:xfrm>
+            <a:off x="8302752" y="2432304"/>
+            <a:ext cx="3675887" cy="3182111"/>
+          </a:xfrm>
+          <a:prstGeom prst="roundRect">
+            <a:avLst>
+              <a:gd name="adj" fmla="val 8000"/>
+            </a:avLst>
+          </a:prstGeom>
+          <a:solidFill>
+            <a:srgbClr val="FFFFFF"/>
+          </a:solidFill>
+          <a:ln w="6350">
+            <a:solidFill>
+              <a:srgbClr val="1F77B4"/>
+            </a:solidFill>
+          </a:ln>
+        </p:spPr>
+        <p:style>
+          <a:lnRef idx="1">
+            <a:schemeClr val="accent1"/>
+          </a:lnRef>
+          <a:fillRef idx="3">
+            <a:schemeClr val="accent1"/>
+          </a:fillRef>
+          <a:effectRef idx="2">
+            <a:schemeClr val="accent1"/>
+          </a:effectRef>
+          <a:fontRef idx="minor">
+            <a:schemeClr val="lt1"/>
+          </a:fontRef>
+        </p:style>
+        <p:txBody>
+          <a:bodyPr rtlCol="0" anchor="ctr"/>
+          <a:lstStyle/>
+          <a:p>
+            <a:pPr algn="ctr"/>
+          </a:p>
+        </p:txBody>
+      </p:sp>
+      <p:sp>
+        <p:nvSpPr>
+          <p:cNvPr id="45" name="TextBox 44"/>
+          <p:cNvSpPr txBox="1"/>
+          <p:nvPr/>
+        </p:nvSpPr>
+        <p:spPr>
+          <a:xfrm>
+            <a:off x="8430768" y="2478024"/>
+            <a:ext cx="3419856" cy="164592"/>
+          </a:xfrm>
+          <a:prstGeom prst="rect">
+            <a:avLst/>
+          </a:prstGeom>
+          <a:noFill/>
+        </p:spPr>
+        <p:txBody>
+          <a:bodyPr wrap="square">
+            <a:spAutoFit/>
+          </a:bodyPr>
+          <a:lstStyle/>
+          <a:p>
+            <a:pPr algn="l">
+              <a:spcAft>
+                <a:spcPts val="300"/>
+              </a:spcAft>
+            </a:pPr>
+            <a:r>
+              <a:rPr sz="1100" b="1">
+                <a:solidFill>
+                  <a:srgbClr val="1F77B4"/>
+                </a:solidFill>
+                <a:latin typeface="Calibri"/>
+              </a:rPr>
+              <a:t>JULIO · cabecera</a:t>
+            </a:r>
+          </a:p>
+        </p:txBody>
+      </p:sp>
+      <p:sp>
+        <p:nvSpPr>
+          <p:cNvPr id="46" name="TextBox 45"/>
+          <p:cNvSpPr txBox="1"/>
+          <p:nvPr/>
+        </p:nvSpPr>
+        <p:spPr>
+          <a:xfrm>
+            <a:off x="8430768" y="2642616"/>
+            <a:ext cx="3419856" cy="201168"/>
+          </a:xfrm>
+          <a:prstGeom prst="rect">
+            <a:avLst/>
+          </a:prstGeom>
+          <a:noFill/>
+        </p:spPr>
+        <p:txBody>
+          <a:bodyPr wrap="square">
+            <a:spAutoFit/>
+          </a:bodyPr>
+          <a:lstStyle/>
+          <a:p>
+            <a:pPr algn="l">
+              <a:spcAft>
+                <a:spcPts val="300"/>
+              </a:spcAft>
+            </a:pPr>
+            <a:r>
+              <a:rPr sz="1200" b="0">
+                <a:solidFill>
+                  <a:srgbClr val="5A5A5A"/>
+                </a:solidFill>
+                <a:latin typeface="Calibri"/>
+              </a:rPr>
+              <a:t>El recinto sumó 31.239 m³</a:t>
+            </a:r>
+          </a:p>
+        </p:txBody>
+      </p:sp>
+      <p:sp>
+        <p:nvSpPr>
+          <p:cNvPr id="47" name="Rounded Rectangle 46"/>
+          <p:cNvSpPr/>
+          <p:nvPr/>
+        </p:nvSpPr>
+        <p:spPr>
+          <a:xfrm>
+            <a:off x="8430768" y="2852928"/>
+            <a:ext cx="3419856" cy="347471"/>
+          </a:xfrm>
+          <a:prstGeom prst="roundRect">
+            <a:avLst>
+              <a:gd name="adj" fmla="val 8000"/>
+            </a:avLst>
+          </a:prstGeom>
+          <a:solidFill>
+            <a:srgbClr val="F5F7FA"/>
+          </a:solidFill>
+          <a:ln w="6350">
+            <a:solidFill>
+              <a:srgbClr val="8C5A5A"/>
+            </a:solidFill>
+          </a:ln>
+        </p:spPr>
+        <p:style>
+          <a:lnRef idx="1">
+            <a:schemeClr val="accent1"/>
+          </a:lnRef>
+          <a:fillRef idx="3">
+            <a:schemeClr val="accent1"/>
+          </a:fillRef>
+          <a:effectRef idx="2">
+            <a:schemeClr val="accent1"/>
+          </a:effectRef>
+          <a:fontRef idx="minor">
+            <a:schemeClr val="lt1"/>
+          </a:fontRef>
+        </p:style>
+        <p:txBody>
+          <a:bodyPr rtlCol="0" anchor="ctr"/>
+          <a:lstStyle/>
+          <a:p>
+            <a:pPr algn="ctr"/>
+          </a:p>
+        </p:txBody>
+      </p:sp>
+      <p:sp>
+        <p:nvSpPr>
+          <p:cNvPr id="48" name="TextBox 47"/>
+          <p:cNvSpPr txBox="1"/>
+          <p:nvPr/>
+        </p:nvSpPr>
+        <p:spPr>
+          <a:xfrm>
+            <a:off x="8540496" y="2880360"/>
+            <a:ext cx="3200400" cy="145938"/>
+          </a:xfrm>
+          <a:prstGeom prst="rect">
+            <a:avLst/>
+          </a:prstGeom>
+          <a:noFill/>
+        </p:spPr>
+        <p:txBody>
+          <a:bodyPr wrap="square">
+            <a:spAutoFit/>
+          </a:bodyPr>
+          <a:lstStyle/>
+          <a:p>
+            <a:pPr algn="l">
+              <a:spcAft>
+                <a:spcPts val="300"/>
+              </a:spcAft>
+            </a:pPr>
+            <a:r>
+              <a:rPr sz="1000" b="1">
+                <a:solidFill>
+                  <a:srgbClr val="8C5A5A"/>
+                </a:solidFill>
+                <a:latin typeface="Calibri"/>
+              </a:rPr>
+              <a:t>Sandía Antigua</a:t>
+            </a:r>
+          </a:p>
+        </p:txBody>
+      </p:sp>
+      <p:sp>
+        <p:nvSpPr>
+          <p:cNvPr id="49" name="TextBox 48"/>
+          <p:cNvSpPr txBox="1"/>
+          <p:nvPr/>
+        </p:nvSpPr>
+        <p:spPr>
+          <a:xfrm>
+            <a:off x="8540496" y="2998866"/>
+            <a:ext cx="3200400" cy="180685"/>
+          </a:xfrm>
+          <a:prstGeom prst="rect">
+            <a:avLst/>
+          </a:prstGeom>
+          <a:noFill/>
+        </p:spPr>
+        <p:txBody>
+          <a:bodyPr wrap="square">
+            <a:spAutoFit/>
+          </a:bodyPr>
+          <a:lstStyle/>
+          <a:p>
+            <a:pPr algn="l">
+              <a:spcAft>
+                <a:spcPts val="300"/>
+              </a:spcAft>
+            </a:pPr>
+            <a:r>
+              <a:rPr sz="1200" b="1">
+                <a:solidFill>
+                  <a:srgbClr val="0D3B66"/>
+                </a:solidFill>
+                <a:latin typeface="Calibri"/>
+              </a:rPr>
+              <a:t>13.661 m³    43,7 %</a:t>
+            </a:r>
+          </a:p>
+        </p:txBody>
+      </p:sp>
+      <p:sp>
+        <p:nvSpPr>
+          <p:cNvPr id="50" name="Rounded Rectangle 49"/>
+          <p:cNvSpPr/>
+          <p:nvPr/>
+        </p:nvSpPr>
+        <p:spPr>
+          <a:xfrm>
+            <a:off x="8430768" y="3236976"/>
+            <a:ext cx="3419856" cy="347471"/>
+          </a:xfrm>
+          <a:prstGeom prst="roundRect">
+            <a:avLst>
+              <a:gd name="adj" fmla="val 8000"/>
+            </a:avLst>
+          </a:prstGeom>
+          <a:solidFill>
+            <a:srgbClr val="F5F7FA"/>
+          </a:solidFill>
+          <a:ln w="6350">
+            <a:solidFill>
+              <a:srgbClr val="508282"/>
+            </a:solidFill>
+          </a:ln>
+        </p:spPr>
+        <p:style>
+          <a:lnRef idx="1">
+            <a:schemeClr val="accent1"/>
+          </a:lnRef>
+          <a:fillRef idx="3">
+            <a:schemeClr val="accent1"/>
+          </a:fillRef>
+          <a:effectRef idx="2">
+            <a:schemeClr val="accent1"/>
+          </a:effectRef>
+          <a:fontRef idx="minor">
+            <a:schemeClr val="lt1"/>
+          </a:fontRef>
+        </p:style>
+        <p:txBody>
+          <a:bodyPr rtlCol="0" anchor="ctr"/>
+          <a:lstStyle/>
+          <a:p>
+            <a:pPr algn="ctr"/>
+          </a:p>
+        </p:txBody>
+      </p:sp>
+      <p:sp>
+        <p:nvSpPr>
+          <p:cNvPr id="51" name="TextBox 50"/>
+          <p:cNvSpPr txBox="1"/>
+          <p:nvPr/>
+        </p:nvSpPr>
+        <p:spPr>
+          <a:xfrm>
+            <a:off x="8540496" y="3264408"/>
+            <a:ext cx="3200400" cy="145938"/>
+          </a:xfrm>
+          <a:prstGeom prst="rect">
+            <a:avLst/>
+          </a:prstGeom>
+          <a:noFill/>
+        </p:spPr>
+        <p:txBody>
+          <a:bodyPr wrap="square">
+            <a:spAutoFit/>
+          </a:bodyPr>
+          <a:lstStyle/>
+          <a:p>
+            <a:pPr algn="l">
+              <a:spcAft>
+                <a:spcPts val="300"/>
+              </a:spcAft>
+            </a:pPr>
+            <a:r>
+              <a:rPr sz="1000" b="1">
+                <a:solidFill>
+                  <a:srgbClr val="508282"/>
+                </a:solidFill>
+                <a:latin typeface="Calibri"/>
+              </a:rPr>
+              <a:t>Sandía Nueva</a:t>
+            </a:r>
+          </a:p>
+        </p:txBody>
+      </p:sp>
+      <p:sp>
+        <p:nvSpPr>
+          <p:cNvPr id="52" name="TextBox 51"/>
+          <p:cNvSpPr txBox="1"/>
+          <p:nvPr/>
+        </p:nvSpPr>
+        <p:spPr>
+          <a:xfrm>
+            <a:off x="8540496" y="3382914"/>
+            <a:ext cx="3200400" cy="180685"/>
+          </a:xfrm>
+          <a:prstGeom prst="rect">
+            <a:avLst/>
+          </a:prstGeom>
+          <a:noFill/>
+        </p:spPr>
+        <p:txBody>
+          <a:bodyPr wrap="square">
+            <a:spAutoFit/>
+          </a:bodyPr>
+          <a:lstStyle/>
+          <a:p>
+            <a:pPr algn="l">
+              <a:spcAft>
+                <a:spcPts val="300"/>
+              </a:spcAft>
+            </a:pPr>
+            <a:r>
+              <a:rPr sz="1200" b="1">
+                <a:solidFill>
+                  <a:srgbClr val="0D3B66"/>
+                </a:solidFill>
+                <a:latin typeface="Calibri"/>
+              </a:rPr>
+              <a:t>9.619 m³    30,8 %</a:t>
+            </a:r>
+          </a:p>
+        </p:txBody>
+      </p:sp>
+      <p:sp>
+        <p:nvSpPr>
+          <p:cNvPr id="53" name="Rounded Rectangle 52"/>
+          <p:cNvSpPr/>
+          <p:nvPr/>
+        </p:nvSpPr>
+        <p:spPr>
+          <a:xfrm>
+            <a:off x="8430768" y="3621024"/>
+            <a:ext cx="3419856" cy="347471"/>
+          </a:xfrm>
+          <a:prstGeom prst="roundRect">
+            <a:avLst>
+              <a:gd name="adj" fmla="val 8000"/>
+            </a:avLst>
+          </a:prstGeom>
+          <a:solidFill>
+            <a:srgbClr val="F5F7FA"/>
+          </a:solidFill>
+          <a:ln w="6350">
+            <a:solidFill>
+              <a:srgbClr val="5A8C6E"/>
+            </a:solidFill>
+          </a:ln>
+        </p:spPr>
+        <p:style>
+          <a:lnRef idx="1">
+            <a:schemeClr val="accent1"/>
+          </a:lnRef>
+          <a:fillRef idx="3">
+            <a:schemeClr val="accent1"/>
+          </a:fillRef>
+          <a:effectRef idx="2">
+            <a:schemeClr val="accent1"/>
+          </a:effectRef>
+          <a:fontRef idx="minor">
+            <a:schemeClr val="lt1"/>
+          </a:fontRef>
+        </p:style>
+        <p:txBody>
+          <a:bodyPr rtlCol="0" anchor="ctr"/>
+          <a:lstStyle/>
+          <a:p>
+            <a:pPr algn="ctr"/>
+          </a:p>
+        </p:txBody>
+      </p:sp>
+      <p:sp>
+        <p:nvSpPr>
+          <p:cNvPr id="54" name="TextBox 53"/>
+          <p:cNvSpPr txBox="1"/>
+          <p:nvPr/>
+        </p:nvSpPr>
+        <p:spPr>
+          <a:xfrm>
+            <a:off x="8540496" y="3648456"/>
+            <a:ext cx="3200400" cy="145938"/>
+          </a:xfrm>
+          <a:prstGeom prst="rect">
+            <a:avLst/>
+          </a:prstGeom>
+          <a:noFill/>
+        </p:spPr>
+        <p:txBody>
+          <a:bodyPr wrap="square">
+            <a:spAutoFit/>
+          </a:bodyPr>
+          <a:lstStyle/>
+          <a:p>
+            <a:pPr algn="l">
+              <a:spcAft>
+                <a:spcPts val="300"/>
+              </a:spcAft>
+            </a:pPr>
+            <a:r>
+              <a:rPr sz="1000" b="1">
+                <a:solidFill>
+                  <a:srgbClr val="5A8C6E"/>
+                </a:solidFill>
+                <a:latin typeface="Calibri"/>
+              </a:rPr>
+              <a:t>Locales Gast.</a:t>
+            </a:r>
+          </a:p>
+        </p:txBody>
+      </p:sp>
+      <p:sp>
+        <p:nvSpPr>
+          <p:cNvPr id="55" name="TextBox 54"/>
+          <p:cNvSpPr txBox="1"/>
+          <p:nvPr/>
+        </p:nvSpPr>
+        <p:spPr>
+          <a:xfrm>
+            <a:off x="8540496" y="3766962"/>
+            <a:ext cx="3200400" cy="180685"/>
+          </a:xfrm>
+          <a:prstGeom prst="rect">
+            <a:avLst/>
+          </a:prstGeom>
+          <a:noFill/>
+        </p:spPr>
+        <p:txBody>
+          <a:bodyPr wrap="square">
+            <a:spAutoFit/>
+          </a:bodyPr>
+          <a:lstStyle/>
+          <a:p>
+            <a:pPr algn="l">
+              <a:spcAft>
+                <a:spcPts val="300"/>
+              </a:spcAft>
+            </a:pPr>
+            <a:r>
+              <a:rPr sz="1200" b="1">
+                <a:solidFill>
+                  <a:srgbClr val="0D3B66"/>
+                </a:solidFill>
+                <a:latin typeface="Calibri"/>
+              </a:rPr>
+              <a:t>4.583 m³    14,7 %</a:t>
+            </a:r>
+          </a:p>
+        </p:txBody>
+      </p:sp>
+      <p:sp>
+        <p:nvSpPr>
+          <p:cNvPr id="56" name="Rounded Rectangle 55"/>
+          <p:cNvSpPr/>
+          <p:nvPr/>
+        </p:nvSpPr>
+        <p:spPr>
+          <a:xfrm>
+            <a:off x="8430768" y="4005072"/>
+            <a:ext cx="3419856" cy="347471"/>
+          </a:xfrm>
+          <a:prstGeom prst="roundRect">
+            <a:avLst>
+              <a:gd name="adj" fmla="val 8000"/>
+            </a:avLst>
+          </a:prstGeom>
+          <a:solidFill>
+            <a:srgbClr val="F5F7FA"/>
+          </a:solidFill>
+          <a:ln w="6350">
+            <a:solidFill>
+              <a:srgbClr val="7BA3C9"/>
+            </a:solidFill>
+          </a:ln>
+        </p:spPr>
+        <p:style>
+          <a:lnRef idx="1">
+            <a:schemeClr val="accent1"/>
+          </a:lnRef>
+          <a:fillRef idx="3">
+            <a:schemeClr val="accent1"/>
+          </a:fillRef>
+          <a:effectRef idx="2">
+            <a:schemeClr val="accent1"/>
+          </a:effectRef>
+          <a:fontRef idx="minor">
+            <a:schemeClr val="lt1"/>
+          </a:fontRef>
+        </p:style>
+        <p:txBody>
+          <a:bodyPr rtlCol="0" anchor="ctr"/>
+          <a:lstStyle/>
+          <a:p>
+            <a:pPr algn="ctr"/>
+          </a:p>
+        </p:txBody>
+      </p:sp>
+      <p:sp>
+        <p:nvSpPr>
+          <p:cNvPr id="57" name="TextBox 56"/>
+          <p:cNvSpPr txBox="1"/>
+          <p:nvPr/>
+        </p:nvSpPr>
+        <p:spPr>
+          <a:xfrm>
+            <a:off x="8540496" y="4032504"/>
+            <a:ext cx="3200400" cy="145938"/>
+          </a:xfrm>
+          <a:prstGeom prst="rect">
+            <a:avLst/>
+          </a:prstGeom>
+          <a:noFill/>
+        </p:spPr>
+        <p:txBody>
+          <a:bodyPr wrap="square">
+            <a:spAutoFit/>
+          </a:bodyPr>
+          <a:lstStyle/>
+          <a:p>
+            <a:pPr algn="l">
+              <a:spcAft>
+                <a:spcPts val="300"/>
+              </a:spcAft>
+            </a:pPr>
+            <a:r>
+              <a:rPr sz="1000" b="1">
+                <a:solidFill>
+                  <a:srgbClr val="7BA3C9"/>
+                </a:solidFill>
+                <a:latin typeface="Calibri"/>
+              </a:rPr>
+              <a:t>Matriz Andén</a:t>
+            </a:r>
+          </a:p>
+        </p:txBody>
+      </p:sp>
+      <p:sp>
+        <p:nvSpPr>
+          <p:cNvPr id="58" name="TextBox 57"/>
+          <p:cNvSpPr txBox="1"/>
+          <p:nvPr/>
+        </p:nvSpPr>
+        <p:spPr>
+          <a:xfrm>
+            <a:off x="8540496" y="4151010"/>
+            <a:ext cx="3200400" cy="180685"/>
+          </a:xfrm>
+          <a:prstGeom prst="rect">
+            <a:avLst/>
+          </a:prstGeom>
+          <a:noFill/>
+        </p:spPr>
+        <p:txBody>
+          <a:bodyPr wrap="square">
+            <a:spAutoFit/>
+          </a:bodyPr>
+          <a:lstStyle/>
+          <a:p>
+            <a:pPr algn="l">
+              <a:spcAft>
+                <a:spcPts val="300"/>
+              </a:spcAft>
+            </a:pPr>
+            <a:r>
+              <a:rPr sz="1200" b="1">
+                <a:solidFill>
+                  <a:srgbClr val="0D3B66"/>
+                </a:solidFill>
+                <a:latin typeface="Calibri"/>
+              </a:rPr>
+              <a:t>3.086 m³    9,9 %</a:t>
+            </a:r>
+          </a:p>
+        </p:txBody>
+      </p:sp>
+      <p:sp>
+        <p:nvSpPr>
+          <p:cNvPr id="59" name="Rounded Rectangle 58"/>
+          <p:cNvSpPr/>
+          <p:nvPr/>
+        </p:nvSpPr>
+        <p:spPr>
+          <a:xfrm>
+            <a:off x="8430768" y="4389120"/>
+            <a:ext cx="3419856" cy="347471"/>
+          </a:xfrm>
+          <a:prstGeom prst="roundRect">
+            <a:avLst>
+              <a:gd name="adj" fmla="val 8000"/>
+            </a:avLst>
+          </a:prstGeom>
+          <a:solidFill>
+            <a:srgbClr val="F5F7FA"/>
+          </a:solidFill>
+          <a:ln w="6350">
+            <a:solidFill>
+              <a:srgbClr val="46648C"/>
+            </a:solidFill>
+          </a:ln>
+        </p:spPr>
+        <p:style>
+          <a:lnRef idx="1">
+            <a:schemeClr val="accent1"/>
+          </a:lnRef>
+          <a:fillRef idx="3">
+            <a:schemeClr val="accent1"/>
+          </a:fillRef>
+          <a:effectRef idx="2">
+            <a:schemeClr val="accent1"/>
+          </a:effectRef>
+          <a:fontRef idx="minor">
+            <a:schemeClr val="lt1"/>
+          </a:fontRef>
+        </p:style>
+        <p:txBody>
+          <a:bodyPr rtlCol="0" anchor="ctr"/>
+          <a:lstStyle/>
+          <a:p>
+            <a:pPr algn="ctr"/>
+          </a:p>
+        </p:txBody>
+      </p:sp>
+      <p:sp>
+        <p:nvSpPr>
+          <p:cNvPr id="60" name="TextBox 59"/>
+          <p:cNvSpPr txBox="1"/>
+          <p:nvPr/>
+        </p:nvSpPr>
+        <p:spPr>
+          <a:xfrm>
+            <a:off x="8540496" y="4416552"/>
+            <a:ext cx="3200400" cy="145938"/>
+          </a:xfrm>
+          <a:prstGeom prst="rect">
+            <a:avLst/>
+          </a:prstGeom>
+          <a:noFill/>
+        </p:spPr>
+        <p:txBody>
+          <a:bodyPr wrap="square">
+            <a:spAutoFit/>
+          </a:bodyPr>
+          <a:lstStyle/>
+          <a:p>
+            <a:pPr algn="l">
+              <a:spcAft>
+                <a:spcPts val="300"/>
+              </a:spcAft>
+            </a:pPr>
+            <a:r>
+              <a:rPr sz="1000" b="1">
+                <a:solidFill>
+                  <a:srgbClr val="46648C"/>
+                </a:solidFill>
+                <a:latin typeface="Calibri"/>
+              </a:rPr>
+              <a:t>Pileta</a:t>
+            </a:r>
+          </a:p>
+        </p:txBody>
+      </p:sp>
+      <p:sp>
+        <p:nvSpPr>
+          <p:cNvPr id="61" name="TextBox 60"/>
+          <p:cNvSpPr txBox="1"/>
+          <p:nvPr/>
+        </p:nvSpPr>
+        <p:spPr>
+          <a:xfrm>
+            <a:off x="8540496" y="4535058"/>
+            <a:ext cx="3200400" cy="180685"/>
+          </a:xfrm>
+          <a:prstGeom prst="rect">
+            <a:avLst/>
+          </a:prstGeom>
+          <a:noFill/>
+        </p:spPr>
+        <p:txBody>
+          <a:bodyPr wrap="square">
+            <a:spAutoFit/>
+          </a:bodyPr>
+          <a:lstStyle/>
+          <a:p>
+            <a:pPr algn="l">
+              <a:spcAft>
+                <a:spcPts val="300"/>
+              </a:spcAft>
+            </a:pPr>
+            <a:r>
+              <a:rPr sz="1200" b="1">
+                <a:solidFill>
+                  <a:srgbClr val="0D3B66"/>
+                </a:solidFill>
+                <a:latin typeface="Calibri"/>
+              </a:rPr>
+              <a:t>172 m³    0,5 %</a:t>
+            </a:r>
+          </a:p>
+        </p:txBody>
+      </p:sp>
+      <p:sp>
+        <p:nvSpPr>
+          <p:cNvPr id="62" name="Rounded Rectangle 61"/>
+          <p:cNvSpPr/>
+          <p:nvPr/>
+        </p:nvSpPr>
+        <p:spPr>
+          <a:xfrm>
+            <a:off x="8430768" y="4773168"/>
+            <a:ext cx="3419856" cy="347471"/>
+          </a:xfrm>
+          <a:prstGeom prst="roundRect">
+            <a:avLst>
+              <a:gd name="adj" fmla="val 8000"/>
+            </a:avLst>
+          </a:prstGeom>
+          <a:solidFill>
+            <a:srgbClr val="F5F7FA"/>
+          </a:solidFill>
+          <a:ln w="6350">
+            <a:solidFill>
+              <a:srgbClr val="0D3B66"/>
+            </a:solidFill>
+          </a:ln>
+        </p:spPr>
+        <p:style>
+          <a:lnRef idx="1">
+            <a:schemeClr val="accent1"/>
+          </a:lnRef>
+          <a:fillRef idx="3">
+            <a:schemeClr val="accent1"/>
+          </a:fillRef>
+          <a:effectRef idx="2">
+            <a:schemeClr val="accent1"/>
+          </a:effectRef>
+          <a:fontRef idx="minor">
+            <a:schemeClr val="lt1"/>
+          </a:fontRef>
+        </p:style>
+        <p:txBody>
+          <a:bodyPr rtlCol="0" anchor="ctr"/>
+          <a:lstStyle/>
+          <a:p>
+            <a:pPr algn="ctr"/>
+          </a:p>
+        </p:txBody>
+      </p:sp>
+      <p:sp>
+        <p:nvSpPr>
+          <p:cNvPr id="63" name="TextBox 62"/>
+          <p:cNvSpPr txBox="1"/>
+          <p:nvPr/>
+        </p:nvSpPr>
+        <p:spPr>
+          <a:xfrm>
+            <a:off x="8540496" y="4800600"/>
+            <a:ext cx="3200400" cy="145938"/>
+          </a:xfrm>
+          <a:prstGeom prst="rect">
+            <a:avLst/>
+          </a:prstGeom>
+          <a:noFill/>
+        </p:spPr>
+        <p:txBody>
+          <a:bodyPr wrap="square">
+            <a:spAutoFit/>
+          </a:bodyPr>
+          <a:lstStyle/>
+          <a:p>
+            <a:pPr algn="l">
+              <a:spcAft>
+                <a:spcPts val="300"/>
+              </a:spcAft>
+            </a:pPr>
+            <a:r>
+              <a:rPr sz="1000" b="1">
+                <a:solidFill>
+                  <a:srgbClr val="0D3B66"/>
+                </a:solidFill>
+                <a:latin typeface="Calibri"/>
+              </a:rPr>
+              <a:t>Restaurante</a:t>
+            </a:r>
+          </a:p>
+        </p:txBody>
+      </p:sp>
+      <p:sp>
+        <p:nvSpPr>
+          <p:cNvPr id="64" name="TextBox 63"/>
+          <p:cNvSpPr txBox="1"/>
+          <p:nvPr/>
+        </p:nvSpPr>
+        <p:spPr>
+          <a:xfrm>
+            <a:off x="8540496" y="4919106"/>
+            <a:ext cx="3200400" cy="180685"/>
+          </a:xfrm>
+          <a:prstGeom prst="rect">
+            <a:avLst/>
+          </a:prstGeom>
+          <a:noFill/>
+        </p:spPr>
+        <p:txBody>
+          <a:bodyPr wrap="square">
+            <a:spAutoFit/>
+          </a:bodyPr>
+          <a:lstStyle/>
+          <a:p>
+            <a:pPr algn="l">
+              <a:spcAft>
+                <a:spcPts val="300"/>
+              </a:spcAft>
+            </a:pPr>
+            <a:r>
+              <a:rPr sz="1200" b="1">
+                <a:solidFill>
+                  <a:srgbClr val="0D3B66"/>
+                </a:solidFill>
+                <a:latin typeface="Calibri"/>
+              </a:rPr>
+              <a:t>98 m³    0,3 %</a:t>
+            </a:r>
+          </a:p>
+        </p:txBody>
+      </p:sp>
+      <p:sp>
+        <p:nvSpPr>
+          <p:cNvPr id="65" name="Rounded Rectangle 64"/>
+          <p:cNvSpPr/>
+          <p:nvPr/>
+        </p:nvSpPr>
+        <p:spPr>
+          <a:xfrm>
+            <a:off x="8430768" y="5157216"/>
+            <a:ext cx="3419856" cy="347471"/>
           </a:xfrm>
           <a:prstGeom prst="roundRect">
             <a:avLst>
@@ -6516,27 +7000,66 @@
       </p:sp>
       <p:sp>
         <p:nvSpPr>
-          <p:cNvPr id="10" name="TextBox 9"/>
-          <p:cNvSpPr txBox="1"/>
-          <p:nvPr/>
-        </p:nvSpPr>
-        <p:spPr>
-          <a:xfrm>
-            <a:off x="274320" y="1700784"/>
-            <a:ext cx="1792224" cy="256032"/>
-          </a:xfrm>
-          <a:prstGeom prst="rect">
-            <a:avLst/>
-          </a:prstGeom>
-          <a:noFill/>
-        </p:spPr>
-        <p:txBody>
-          <a:bodyPr wrap="square">
-            <a:spAutoFit/>
-          </a:bodyPr>
-          <a:lstStyle/>
-          <a:p>
-            <a:pPr algn="ctr">
+          <p:cNvPr id="66" name="TextBox 65"/>
+          <p:cNvSpPr txBox="1"/>
+          <p:nvPr/>
+        </p:nvSpPr>
+        <p:spPr>
+          <a:xfrm>
+            <a:off x="8540496" y="5184648"/>
+            <a:ext cx="3200400" cy="145938"/>
+          </a:xfrm>
+          <a:prstGeom prst="rect">
+            <a:avLst/>
+          </a:prstGeom>
+          <a:noFill/>
+        </p:spPr>
+        <p:txBody>
+          <a:bodyPr wrap="square">
+            <a:spAutoFit/>
+          </a:bodyPr>
+          <a:lstStyle/>
+          <a:p>
+            <a:pPr algn="l">
+              <a:spcAft>
+                <a:spcPts val="300"/>
+              </a:spcAft>
+            </a:pPr>
+            <a:r>
+              <a:rPr sz="1000" b="1">
+                <a:solidFill>
+                  <a:srgbClr val="A0783C"/>
+                </a:solidFill>
+                <a:latin typeface="Calibri"/>
+              </a:rPr>
+              <a:t>Cascada</a:t>
+            </a:r>
+          </a:p>
+        </p:txBody>
+      </p:sp>
+      <p:sp>
+        <p:nvSpPr>
+          <p:cNvPr id="67" name="TextBox 66"/>
+          <p:cNvSpPr txBox="1"/>
+          <p:nvPr/>
+        </p:nvSpPr>
+        <p:spPr>
+          <a:xfrm>
+            <a:off x="8540496" y="5303154"/>
+            <a:ext cx="3200400" cy="180685"/>
+          </a:xfrm>
+          <a:prstGeom prst="rect">
+            <a:avLst/>
+          </a:prstGeom>
+          <a:noFill/>
+        </p:spPr>
+        <p:txBody>
+          <a:bodyPr wrap="square">
+            <a:spAutoFit/>
+          </a:bodyPr>
+          <a:lstStyle/>
+          <a:p>
+            <a:pPr algn="l">
               <a:spcAft>
                 <a:spcPts val="300"/>
               </a:spcAft>
@@ -6548,20 +7071,453 @@
                 </a:solidFill>
                 <a:latin typeface="Calibri"/>
               </a:rPr>
-              <a:t>Sandía Antigua</a:t>
-            </a:r>
-          </a:p>
-        </p:txBody>
-      </p:sp>
-      <p:sp>
-        <p:nvSpPr>
-          <p:cNvPr id="11" name="Rounded Rectangle 10"/>
+              <a:t>20 m³    &lt;0,1 %</a:t>
+            </a:r>
+          </a:p>
+        </p:txBody>
+      </p:sp>
+      <p:sp>
+        <p:nvSpPr>
+          <p:cNvPr id="68" name="Rounded Rectangle 67"/>
           <p:cNvSpPr/>
           <p:nvPr/>
         </p:nvSpPr>
         <p:spPr>
           <a:xfrm>
-            <a:off x="2468880" y="1591056"/>
+            <a:off x="201168" y="5705856"/>
+            <a:ext cx="11795760" cy="438912"/>
+          </a:xfrm>
+          <a:prstGeom prst="roundRect">
+            <a:avLst>
+              <a:gd name="adj" fmla="val 8000"/>
+            </a:avLst>
+          </a:prstGeom>
+          <a:solidFill>
+            <a:srgbClr val="FFF9EB"/>
+          </a:solidFill>
+          <a:ln w="6350">
+            <a:solidFill>
+              <a:srgbClr val="C9A227"/>
+            </a:solidFill>
+          </a:ln>
+        </p:spPr>
+        <p:style>
+          <a:lnRef idx="1">
+            <a:schemeClr val="accent1"/>
+          </a:lnRef>
+          <a:fillRef idx="3">
+            <a:schemeClr val="accent1"/>
+          </a:fillRef>
+          <a:effectRef idx="2">
+            <a:schemeClr val="accent1"/>
+          </a:effectRef>
+          <a:fontRef idx="minor">
+            <a:schemeClr val="lt1"/>
+          </a:fontRef>
+        </p:style>
+        <p:txBody>
+          <a:bodyPr rtlCol="0" anchor="ctr"/>
+          <a:lstStyle/>
+          <a:p>
+            <a:pPr algn="ctr"/>
+          </a:p>
+        </p:txBody>
+      </p:sp>
+      <p:sp>
+        <p:nvSpPr>
+          <p:cNvPr id="69" name="TextBox 68"/>
+          <p:cNvSpPr txBox="1"/>
+          <p:nvPr/>
+        </p:nvSpPr>
+        <p:spPr>
+          <a:xfrm>
+            <a:off x="329184" y="5779008"/>
+            <a:ext cx="11539728" cy="310896"/>
+          </a:xfrm>
+          <a:prstGeom prst="rect">
+            <a:avLst/>
+          </a:prstGeom>
+          <a:noFill/>
+        </p:spPr>
+        <p:txBody>
+          <a:bodyPr wrap="square">
+            <a:spAutoFit/>
+          </a:bodyPr>
+          <a:lstStyle/>
+          <a:p>
+            <a:pPr algn="l">
+              <a:spcAft>
+                <a:spcPts val="300"/>
+              </a:spcAft>
+            </a:pPr>
+            <a:r>
+              <a:rPr sz="1100" b="0">
+                <a:solidFill>
+                  <a:srgbClr val="0D3B66"/>
+                </a:solidFill>
+                <a:latin typeface="Calibri"/>
+              </a:rPr>
+              <a:t>Recepción 12/12/2025  ·  Capacitación 17/12/2025  ·  Francisco Jeldres  ·  Paula Azolas  ·  Mantención: C. Naranjo, M. Jara, R. Moreno, R. Díaz, J. Gutiérrez, H. Fierro</a:t>
+            </a:r>
+          </a:p>
+        </p:txBody>
+      </p:sp>
+      <p:sp>
+        <p:nvSpPr>
+          <p:cNvPr id="70" name="TextBox 69"/>
+          <p:cNvSpPr txBox="1"/>
+          <p:nvPr/>
+        </p:nvSpPr>
+        <p:spPr>
+          <a:xfrm>
+            <a:off x="256032" y="6181344"/>
+            <a:ext cx="11704320" cy="566928"/>
+          </a:xfrm>
+          <a:prstGeom prst="rect">
+            <a:avLst/>
+          </a:prstGeom>
+          <a:noFill/>
+        </p:spPr>
+        <p:txBody>
+          <a:bodyPr wrap="square">
+            <a:spAutoFit/>
+          </a:bodyPr>
+          <a:lstStyle/>
+          <a:p>
+            <a:pPr algn="l">
+              <a:spcAft>
+                <a:spcPts val="300"/>
+              </a:spcAft>
+            </a:pPr>
+            <a:r>
+              <a:rPr sz="1200" b="0">
+                <a:solidFill>
+                  <a:srgbClr val="0D3B66"/>
+                </a:solidFill>
+                <a:latin typeface="Calibri"/>
+              </a:rPr>
+              <a:t>Mayo 26.357   ·   Junio 20.927   ·   Julio 31.239   ·   Agosto 1–17: 21.494   ·   proy. ago 39.195 m³.</a:t>
+            </a:r>
+          </a:p>
+          <a:p>
+            <a:pPr algn="l">
+              <a:spcAft>
+                <a:spcPts val="300"/>
+              </a:spcAft>
+            </a:pPr>
+            <a:r>
+              <a:rPr sz="1100" b="0">
+                <a:solidFill>
+                  <a:srgbClr val="5A5A5A"/>
+                </a:solidFill>
+                <a:latin typeface="Calibri"/>
+              </a:rPr>
+              <a:t>Julio = cabecera (7 puntos). 27, 35 y 36 no se suman: cadena Sandía → DL (lámina 2).</a:t>
+            </a:r>
+          </a:p>
+        </p:txBody>
+      </p:sp>
+    </p:spTree>
+  </p:cSld>
+  <p:clrMapOvr>
+    <a:masterClrMapping/>
+  </p:clrMapOvr>
+</p:sld>
+</file>
+
+<file path=ppt/slides/slide12.xml><?xml version="1.0" encoding="utf-8"?>
+<p:sld xmlns:a="http://schemas.openxmlformats.org/drawingml/2006/main" xmlns:p="http://schemas.openxmlformats.org/presentationml/2006/main" xmlns:r="http://schemas.openxmlformats.org/officeDocument/2006/relationships">
+  <p:cSld>
+    <p:spTree>
+      <p:nvGrpSpPr>
+        <p:cNvPr id="1" name=""/>
+        <p:cNvGrpSpPr/>
+        <p:nvPr/>
+      </p:nvGrpSpPr>
+      <p:grpSpPr/>
+      <p:sp>
+        <p:nvSpPr>
+          <p:cNvPr id="2" name="Rectangle 1"/>
+          <p:cNvSpPr/>
+          <p:nvPr/>
+        </p:nvSpPr>
+        <p:spPr>
+          <a:xfrm>
+            <a:off x="0" y="0"/>
+            <a:ext cx="12191695" cy="841248"/>
+          </a:xfrm>
+          <a:prstGeom prst="rect">
+            <a:avLst/>
+          </a:prstGeom>
+          <a:solidFill>
+            <a:srgbClr val="0D3B66"/>
+          </a:solidFill>
+          <a:ln>
+            <a:noFill/>
+          </a:ln>
+        </p:spPr>
+        <p:style>
+          <a:lnRef idx="1">
+            <a:schemeClr val="accent1"/>
+          </a:lnRef>
+          <a:fillRef idx="3">
+            <a:schemeClr val="accent1"/>
+          </a:fillRef>
+          <a:effectRef idx="2">
+            <a:schemeClr val="accent1"/>
+          </a:effectRef>
+          <a:fontRef idx="minor">
+            <a:schemeClr val="lt1"/>
+          </a:fontRef>
+        </p:style>
+        <p:txBody>
+          <a:bodyPr rtlCol="0" anchor="ctr"/>
+          <a:lstStyle/>
+          <a:p>
+            <a:pPr algn="ctr"/>
+          </a:p>
+        </p:txBody>
+      </p:sp>
+      <p:sp>
+        <p:nvSpPr>
+          <p:cNvPr id="3" name="Rectangle 2"/>
+          <p:cNvSpPr/>
+          <p:nvPr/>
+        </p:nvSpPr>
+        <p:spPr>
+          <a:xfrm>
+            <a:off x="0" y="841248"/>
+            <a:ext cx="12191695" cy="54864"/>
+          </a:xfrm>
+          <a:prstGeom prst="rect">
+            <a:avLst/>
+          </a:prstGeom>
+          <a:solidFill>
+            <a:srgbClr val="C9A227"/>
+          </a:solidFill>
+          <a:ln>
+            <a:noFill/>
+          </a:ln>
+        </p:spPr>
+        <p:style>
+          <a:lnRef idx="1">
+            <a:schemeClr val="accent1"/>
+          </a:lnRef>
+          <a:fillRef idx="3">
+            <a:schemeClr val="accent1"/>
+          </a:fillRef>
+          <a:effectRef idx="2">
+            <a:schemeClr val="accent1"/>
+          </a:effectRef>
+          <a:fontRef idx="minor">
+            <a:schemeClr val="lt1"/>
+          </a:fontRef>
+        </p:style>
+        <p:txBody>
+          <a:bodyPr rtlCol="0" anchor="ctr"/>
+          <a:lstStyle/>
+          <a:p>
+            <a:pPr algn="ctr"/>
+          </a:p>
+        </p:txBody>
+      </p:sp>
+      <p:pic>
+        <p:nvPicPr>
+          <p:cNvPr id="4" name="Picture 3" descr="logo wes.bmp"/>
+          <p:cNvPicPr>
+            <a:picLocks noChangeAspect="1"/>
+          </p:cNvPicPr>
+          <p:nvPr/>
+        </p:nvPicPr>
+        <p:blipFill>
+          <a:blip r:embed="rId2"/>
+          <a:stretch>
+            <a:fillRect/>
+          </a:stretch>
+        </p:blipFill>
+        <p:spPr>
+          <a:xfrm>
+            <a:off x="10835640" y="146304"/>
+            <a:ext cx="1143000" cy="253401"/>
+          </a:xfrm>
+          <a:prstGeom prst="rect">
+            <a:avLst/>
+          </a:prstGeom>
+        </p:spPr>
+      </p:pic>
+      <p:sp>
+        <p:nvSpPr>
+          <p:cNvPr id="5" name="TextBox 4"/>
+          <p:cNvSpPr txBox="1"/>
+          <p:nvPr/>
+        </p:nvSpPr>
+        <p:spPr>
+          <a:xfrm>
+            <a:off x="256032" y="109728"/>
+            <a:ext cx="10607040" cy="384048"/>
+          </a:xfrm>
+          <a:prstGeom prst="rect">
+            <a:avLst/>
+          </a:prstGeom>
+          <a:noFill/>
+        </p:spPr>
+        <p:txBody>
+          <a:bodyPr wrap="square">
+            <a:spAutoFit/>
+          </a:bodyPr>
+          <a:lstStyle/>
+          <a:p>
+            <a:pPr algn="l">
+              <a:spcAft>
+                <a:spcPts val="300"/>
+              </a:spcAft>
+            </a:pPr>
+            <a:r>
+              <a:rPr sz="2000" b="1">
+                <a:solidFill>
+                  <a:srgbClr val="FFFFFF"/>
+                </a:solidFill>
+                <a:latin typeface="Calibri"/>
+              </a:rPr>
+              <a:t>PAK  ·  2. Cadena Sandía / Distrito de Lujo</a:t>
+            </a:r>
+          </a:p>
+        </p:txBody>
+      </p:sp>
+      <p:sp>
+        <p:nvSpPr>
+          <p:cNvPr id="6" name="TextBox 5"/>
+          <p:cNvSpPr txBox="1"/>
+          <p:nvPr/>
+        </p:nvSpPr>
+        <p:spPr>
+          <a:xfrm>
+            <a:off x="256032" y="457200"/>
+            <a:ext cx="10607040" cy="329184"/>
+          </a:xfrm>
+          <a:prstGeom prst="rect">
+            <a:avLst/>
+          </a:prstGeom>
+          <a:noFill/>
+        </p:spPr>
+        <p:txBody>
+          <a:bodyPr wrap="square">
+            <a:spAutoFit/>
+          </a:bodyPr>
+          <a:lstStyle/>
+          <a:p>
+            <a:pPr algn="l">
+              <a:spcAft>
+                <a:spcPts val="300"/>
+              </a:spcAft>
+            </a:pPr>
+            <a:r>
+              <a:rPr sz="1100" b="0">
+                <a:solidFill>
+                  <a:srgbClr val="DCE6F0"/>
+                </a:solidFill>
+                <a:latin typeface="Calibri"/>
+              </a:rPr>
+              <a:t>Sandía Antigua y Sandía Nueva alimentan Distrito de Lujo  ·  se divide en Bazar Gourmet y DL Kennedy</a:t>
+            </a:r>
+          </a:p>
+        </p:txBody>
+      </p:sp>
+      <p:sp>
+        <p:nvSpPr>
+          <p:cNvPr id="7" name="Rounded Rectangle 6"/>
+          <p:cNvSpPr/>
+          <p:nvPr/>
+        </p:nvSpPr>
+        <p:spPr>
+          <a:xfrm>
+            <a:off x="201168" y="987552"/>
+            <a:ext cx="11777472" cy="512064"/>
+          </a:xfrm>
+          <a:prstGeom prst="roundRect">
+            <a:avLst>
+              <a:gd name="adj" fmla="val 8000"/>
+            </a:avLst>
+          </a:prstGeom>
+          <a:solidFill>
+            <a:srgbClr val="FFF9EB"/>
+          </a:solidFill>
+          <a:ln w="6350">
+            <a:solidFill>
+              <a:srgbClr val="C9A227"/>
+            </a:solidFill>
+          </a:ln>
+        </p:spPr>
+        <p:style>
+          <a:lnRef idx="1">
+            <a:schemeClr val="accent1"/>
+          </a:lnRef>
+          <a:fillRef idx="3">
+            <a:schemeClr val="accent1"/>
+          </a:fillRef>
+          <a:effectRef idx="2">
+            <a:schemeClr val="accent1"/>
+          </a:effectRef>
+          <a:fontRef idx="minor">
+            <a:schemeClr val="lt1"/>
+          </a:fontRef>
+        </p:style>
+        <p:txBody>
+          <a:bodyPr rtlCol="0" anchor="ctr"/>
+          <a:lstStyle/>
+          <a:p>
+            <a:pPr algn="ctr"/>
+          </a:p>
+        </p:txBody>
+      </p:sp>
+      <p:sp>
+        <p:nvSpPr>
+          <p:cNvPr id="8" name="TextBox 7"/>
+          <p:cNvSpPr txBox="1"/>
+          <p:nvPr/>
+        </p:nvSpPr>
+        <p:spPr>
+          <a:xfrm>
+            <a:off x="365760" y="1042415"/>
+            <a:ext cx="11475720" cy="402336"/>
+          </a:xfrm>
+          <a:prstGeom prst="rect">
+            <a:avLst/>
+          </a:prstGeom>
+          <a:noFill/>
+        </p:spPr>
+        <p:txBody>
+          <a:bodyPr wrap="square">
+            <a:spAutoFit/>
+          </a:bodyPr>
+          <a:lstStyle/>
+          <a:p>
+            <a:pPr algn="l">
+              <a:spcAft>
+                <a:spcPts val="300"/>
+              </a:spcAft>
+            </a:pPr>
+            <a:r>
+              <a:rPr sz="1300" b="0">
+                <a:solidFill>
+                  <a:srgbClr val="0D3B66"/>
+                </a:solidFill>
+                <a:latin typeface="Calibri"/>
+              </a:rPr>
+              <a:t>Sandía Antigua y Sandía Nueva alimentan Distrito de Lujo. Desde ahí el caudal se divide en Bazar Gourmet y DL Kennedy. Por eso esos tres puntos no se suman a la cabecera: sería doble conteo.</a:t>
+            </a:r>
+          </a:p>
+        </p:txBody>
+      </p:sp>
+      <p:sp>
+        <p:nvSpPr>
+          <p:cNvPr id="9" name="Rounded Rectangle 8"/>
+          <p:cNvSpPr/>
+          <p:nvPr/>
+        </p:nvSpPr>
+        <p:spPr>
+          <a:xfrm>
+            <a:off x="201168" y="1591056"/>
             <a:ext cx="1938528" cy="457200"/>
           </a:xfrm>
           <a:prstGeom prst="roundRect">
@@ -6574,7 +7530,93 @@
           </a:solidFill>
           <a:ln w="6350">
             <a:solidFill>
-              <a:srgbClr val="1F77B4"/>
+              <a:srgbClr val="8C5A5A"/>
+            </a:solidFill>
+          </a:ln>
+        </p:spPr>
+        <p:style>
+          <a:lnRef idx="1">
+            <a:schemeClr val="accent1"/>
+          </a:lnRef>
+          <a:fillRef idx="3">
+            <a:schemeClr val="accent1"/>
+          </a:fillRef>
+          <a:effectRef idx="2">
+            <a:schemeClr val="accent1"/>
+          </a:effectRef>
+          <a:fontRef idx="minor">
+            <a:schemeClr val="lt1"/>
+          </a:fontRef>
+        </p:style>
+        <p:txBody>
+          <a:bodyPr rtlCol="0" anchor="ctr"/>
+          <a:lstStyle/>
+          <a:p>
+            <a:pPr algn="ctr"/>
+          </a:p>
+        </p:txBody>
+      </p:sp>
+      <p:sp>
+        <p:nvSpPr>
+          <p:cNvPr id="10" name="TextBox 9"/>
+          <p:cNvSpPr txBox="1"/>
+          <p:nvPr/>
+        </p:nvSpPr>
+        <p:spPr>
+          <a:xfrm>
+            <a:off x="274320" y="1700784"/>
+            <a:ext cx="1792224" cy="256032"/>
+          </a:xfrm>
+          <a:prstGeom prst="rect">
+            <a:avLst/>
+          </a:prstGeom>
+          <a:noFill/>
+        </p:spPr>
+        <p:txBody>
+          <a:bodyPr wrap="square">
+            <a:spAutoFit/>
+          </a:bodyPr>
+          <a:lstStyle/>
+          <a:p>
+            <a:pPr algn="ctr">
+              <a:spcAft>
+                <a:spcPts val="300"/>
+              </a:spcAft>
+            </a:pPr>
+            <a:r>
+              <a:rPr sz="1200" b="1">
+                <a:solidFill>
+                  <a:srgbClr val="0D3B66"/>
+                </a:solidFill>
+                <a:latin typeface="Calibri"/>
+              </a:rPr>
+              <a:t>Sandía Antigua</a:t>
+            </a:r>
+          </a:p>
+        </p:txBody>
+      </p:sp>
+      <p:sp>
+        <p:nvSpPr>
+          <p:cNvPr id="11" name="Rounded Rectangle 10"/>
+          <p:cNvSpPr/>
+          <p:nvPr/>
+        </p:nvSpPr>
+        <p:spPr>
+          <a:xfrm>
+            <a:off x="2468880" y="1591056"/>
+            <a:ext cx="1938528" cy="457200"/>
+          </a:xfrm>
+          <a:prstGeom prst="roundRect">
+            <a:avLst>
+              <a:gd name="adj" fmla="val 8000"/>
+            </a:avLst>
+          </a:prstGeom>
+          <a:solidFill>
+            <a:srgbClr val="F5F7FA"/>
+          </a:solidFill>
+          <a:ln w="6350">
+            <a:solidFill>
+              <a:srgbClr val="508282"/>
             </a:solidFill>
           </a:ln>
         </p:spPr>
@@ -12455,7 +13497,7 @@
           </a:solidFill>
           <a:ln w="6350">
             <a:solidFill>
-              <a:srgbClr val="1F77B4"/>
+              <a:srgbClr val="7BA3C9"/>
             </a:solidFill>
           </a:ln>
         </p:spPr>
@@ -12938,7 +13980,7 @@
           </a:solidFill>
           <a:ln w="6350">
             <a:solidFill>
-              <a:srgbClr val="1F77B4"/>
+              <a:srgbClr val="7BA3C9"/>
             </a:solidFill>
           </a:ln>
         </p:spPr>
@@ -12994,7 +14036,7 @@
             <a:r>
               <a:rPr sz="1300" b="1">
                 <a:solidFill>
-                  <a:srgbClr val="1F77B4"/>
+                  <a:srgbClr val="7BA3C9"/>
                 </a:solidFill>
                 <a:latin typeface="Calibri"/>
               </a:rPr>
@@ -13178,7 +14220,7 @@
                 </a:solidFill>
                 <a:latin typeface="Calibri"/>
               </a:rPr>
-              <a:t>Matriz Principal concentra el recinto; Baños es consumo de uso hábil.</a:t>
+              <a:t>Matriz concentra el recinto. Lámina 2: alza desde junio, umbral y control de noche.</a:t>
             </a:r>
           </a:p>
         </p:txBody>
@@ -13345,7 +14387,7 @@
                 </a:solidFill>
                 <a:latin typeface="Calibri"/>
               </a:rPr>
-              <a:t>BOM  ·  Equipos y consumo</a:t>
+              <a:t>MAQ  ·  2. Matriz Principal</a:t>
             </a:r>
           </a:p>
         </p:txBody>
@@ -13384,7 +14426,7 @@
                 </a:solidFill>
                 <a:latin typeface="Calibri"/>
               </a:rPr>
-              <a:t>Buenaventura (San Ignacio)   |   2 puntos WES   |   01/05/2026 – 17/08/2026</a:t>
+              <a:t>Alza desde junio  ·  umbrales  ·  la noche pide un control</a:t>
             </a:r>
           </a:p>
         </p:txBody>
@@ -13397,741 +14439,8 @@
         </p:nvSpPr>
         <p:spPr>
           <a:xfrm>
-            <a:off x="201168" y="1024128"/>
-            <a:ext cx="5861304" cy="658368"/>
-          </a:xfrm>
-          <a:prstGeom prst="roundRect">
-            <a:avLst>
-              <a:gd name="adj" fmla="val 8000"/>
-            </a:avLst>
-          </a:prstGeom>
-          <a:solidFill>
-            <a:srgbClr val="F5F7FA"/>
-          </a:solidFill>
-          <a:ln w="6350">
-            <a:solidFill>
-              <a:srgbClr val="0D3B66"/>
-            </a:solidFill>
-          </a:ln>
-        </p:spPr>
-        <p:style>
-          <a:lnRef idx="1">
-            <a:schemeClr val="accent1"/>
-          </a:lnRef>
-          <a:fillRef idx="3">
-            <a:schemeClr val="accent1"/>
-          </a:fillRef>
-          <a:effectRef idx="2">
-            <a:schemeClr val="accent1"/>
-          </a:effectRef>
-          <a:fontRef idx="minor">
-            <a:schemeClr val="lt1"/>
-          </a:fontRef>
-        </p:style>
-        <p:txBody>
-          <a:bodyPr rtlCol="0" anchor="ctr"/>
-          <a:lstStyle/>
-          <a:p>
-            <a:pPr algn="ctr"/>
-          </a:p>
-        </p:txBody>
-      </p:sp>
-      <p:sp>
-        <p:nvSpPr>
-          <p:cNvPr id="8" name="TextBox 7"/>
-          <p:cNvSpPr txBox="1"/>
-          <p:nvPr/>
-        </p:nvSpPr>
-        <p:spPr>
-          <a:xfrm>
-            <a:off x="274320" y="1060704"/>
-            <a:ext cx="5733288" cy="146304"/>
-          </a:xfrm>
-          <a:prstGeom prst="rect">
-            <a:avLst/>
-          </a:prstGeom>
-          <a:noFill/>
-        </p:spPr>
-        <p:txBody>
-          <a:bodyPr wrap="square">
-            <a:spAutoFit/>
-          </a:bodyPr>
-          <a:lstStyle/>
-          <a:p>
-            <a:pPr algn="l">
-              <a:spcAft>
-                <a:spcPts val="300"/>
-              </a:spcAft>
-            </a:pPr>
-            <a:r>
-              <a:rPr sz="1000" b="1">
-                <a:solidFill>
-                  <a:srgbClr val="C9A227"/>
-                </a:solidFill>
-                <a:latin typeface="Calibri"/>
-              </a:rPr>
-              <a:t>000025-18</a:t>
-            </a:r>
-          </a:p>
-        </p:txBody>
-      </p:sp>
-      <p:sp>
-        <p:nvSpPr>
-          <p:cNvPr id="9" name="TextBox 8"/>
-          <p:cNvSpPr txBox="1"/>
-          <p:nvPr/>
-        </p:nvSpPr>
-        <p:spPr>
-          <a:xfrm>
-            <a:off x="274320" y="1243584"/>
-            <a:ext cx="5733288" cy="201168"/>
-          </a:xfrm>
-          <a:prstGeom prst="rect">
-            <a:avLst/>
-          </a:prstGeom>
-          <a:noFill/>
-        </p:spPr>
-        <p:txBody>
-          <a:bodyPr wrap="square">
-            <a:spAutoFit/>
-          </a:bodyPr>
-          <a:lstStyle/>
-          <a:p>
-            <a:pPr algn="l">
-              <a:spcAft>
-                <a:spcPts val="300"/>
-              </a:spcAft>
-            </a:pPr>
-            <a:r>
-              <a:rPr sz="1200" b="1">
-                <a:solidFill>
-                  <a:srgbClr val="0D3B66"/>
-                </a:solidFill>
-                <a:latin typeface="Calibri"/>
-              </a:rPr>
-              <a:t>San Ignacio 500</a:t>
-            </a:r>
-          </a:p>
-        </p:txBody>
-      </p:sp>
-      <p:sp>
-        <p:nvSpPr>
-          <p:cNvPr id="10" name="Rounded Rectangle 9"/>
-          <p:cNvSpPr/>
-          <p:nvPr/>
-        </p:nvSpPr>
-        <p:spPr>
-          <a:xfrm>
-            <a:off x="6135624" y="1024128"/>
-            <a:ext cx="5861304" cy="658368"/>
-          </a:xfrm>
-          <a:prstGeom prst="roundRect">
-            <a:avLst>
-              <a:gd name="adj" fmla="val 8000"/>
-            </a:avLst>
-          </a:prstGeom>
-          <a:solidFill>
-            <a:srgbClr val="F5F7FA"/>
-          </a:solidFill>
-          <a:ln w="6350">
-            <a:solidFill>
-              <a:srgbClr val="C45C26"/>
-            </a:solidFill>
-          </a:ln>
-        </p:spPr>
-        <p:style>
-          <a:lnRef idx="1">
-            <a:schemeClr val="accent1"/>
-          </a:lnRef>
-          <a:fillRef idx="3">
-            <a:schemeClr val="accent1"/>
-          </a:fillRef>
-          <a:effectRef idx="2">
-            <a:schemeClr val="accent1"/>
-          </a:effectRef>
-          <a:fontRef idx="minor">
-            <a:schemeClr val="lt1"/>
-          </a:fontRef>
-        </p:style>
-        <p:txBody>
-          <a:bodyPr rtlCol="0" anchor="ctr"/>
-          <a:lstStyle/>
-          <a:p>
-            <a:pPr algn="ctr"/>
-          </a:p>
-        </p:txBody>
-      </p:sp>
-      <p:sp>
-        <p:nvSpPr>
-          <p:cNvPr id="11" name="TextBox 10"/>
-          <p:cNvSpPr txBox="1"/>
-          <p:nvPr/>
-        </p:nvSpPr>
-        <p:spPr>
-          <a:xfrm>
-            <a:off x="6208776" y="1060704"/>
-            <a:ext cx="5733288" cy="146304"/>
-          </a:xfrm>
-          <a:prstGeom prst="rect">
-            <a:avLst/>
-          </a:prstGeom>
-          <a:noFill/>
-        </p:spPr>
-        <p:txBody>
-          <a:bodyPr wrap="square">
-            <a:spAutoFit/>
-          </a:bodyPr>
-          <a:lstStyle/>
-          <a:p>
-            <a:pPr algn="l">
-              <a:spcAft>
-                <a:spcPts val="300"/>
-              </a:spcAft>
-            </a:pPr>
-            <a:r>
-              <a:rPr sz="1000" b="1">
-                <a:solidFill>
-                  <a:srgbClr val="C9A227"/>
-                </a:solidFill>
-                <a:latin typeface="Calibri"/>
-              </a:rPr>
-              <a:t>000025-17</a:t>
-            </a:r>
-          </a:p>
-        </p:txBody>
-      </p:sp>
-      <p:sp>
-        <p:nvSpPr>
-          <p:cNvPr id="12" name="TextBox 11"/>
-          <p:cNvSpPr txBox="1"/>
-          <p:nvPr/>
-        </p:nvSpPr>
-        <p:spPr>
-          <a:xfrm>
-            <a:off x="6208776" y="1243584"/>
-            <a:ext cx="5733288" cy="201168"/>
-          </a:xfrm>
-          <a:prstGeom prst="rect">
-            <a:avLst/>
-          </a:prstGeom>
-          <a:noFill/>
-        </p:spPr>
-        <p:txBody>
-          <a:bodyPr wrap="square">
-            <a:spAutoFit/>
-          </a:bodyPr>
-          <a:lstStyle/>
-          <a:p>
-            <a:pPr algn="l">
-              <a:spcAft>
-                <a:spcPts val="300"/>
-              </a:spcAft>
-            </a:pPr>
-            <a:r>
-              <a:rPr sz="1200" b="1">
-                <a:solidFill>
-                  <a:srgbClr val="0D3B66"/>
-                </a:solidFill>
-                <a:latin typeface="Calibri"/>
-              </a:rPr>
-              <a:t>San Ignacio 300</a:t>
-            </a:r>
-          </a:p>
-        </p:txBody>
-      </p:sp>
-      <p:sp>
-        <p:nvSpPr>
-          <p:cNvPr id="13" name="TextBox 12"/>
-          <p:cNvSpPr txBox="1"/>
-          <p:nvPr/>
-        </p:nvSpPr>
-        <p:spPr>
-          <a:xfrm>
-            <a:off x="6208776" y="1481328"/>
-            <a:ext cx="5733288" cy="164592"/>
-          </a:xfrm>
-          <a:prstGeom prst="rect">
-            <a:avLst/>
-          </a:prstGeom>
-          <a:noFill/>
-        </p:spPr>
-        <p:txBody>
-          <a:bodyPr wrap="square">
-            <a:spAutoFit/>
-          </a:bodyPr>
-          <a:lstStyle/>
-          <a:p>
-            <a:pPr algn="l">
-              <a:spcAft>
-                <a:spcPts val="300"/>
-              </a:spcAft>
-            </a:pPr>
-            <a:r>
-              <a:rPr sz="1000" b="0">
-                <a:solidFill>
-                  <a:srgbClr val="5A5A5A"/>
-                </a:solidFill>
-                <a:latin typeface="Calibri"/>
-              </a:rPr>
-              <a:t>monitoreo</a:t>
-            </a:r>
-          </a:p>
-        </p:txBody>
-      </p:sp>
-      <p:sp>
-        <p:nvSpPr>
-          <p:cNvPr id="14" name="Rounded Rectangle 13"/>
-          <p:cNvSpPr/>
-          <p:nvPr/>
-        </p:nvSpPr>
-        <p:spPr>
-          <a:xfrm>
-            <a:off x="201168" y="1792224"/>
-            <a:ext cx="7973568" cy="3822191"/>
-          </a:xfrm>
-          <a:prstGeom prst="roundRect">
-            <a:avLst>
-              <a:gd name="adj" fmla="val 8000"/>
-            </a:avLst>
-          </a:prstGeom>
-          <a:solidFill>
-            <a:srgbClr val="F5F7FA"/>
-          </a:solidFill>
-          <a:ln>
-            <a:noFill/>
-          </a:ln>
-        </p:spPr>
-        <p:style>
-          <a:lnRef idx="1">
-            <a:schemeClr val="accent1"/>
-          </a:lnRef>
-          <a:fillRef idx="3">
-            <a:schemeClr val="accent1"/>
-          </a:fillRef>
-          <a:effectRef idx="2">
-            <a:schemeClr val="accent1"/>
-          </a:effectRef>
-          <a:fontRef idx="minor">
-            <a:schemeClr val="lt1"/>
-          </a:fontRef>
-        </p:style>
-        <p:txBody>
-          <a:bodyPr rtlCol="0" anchor="ctr"/>
-          <a:lstStyle/>
-          <a:p>
-            <a:pPr algn="ctr"/>
-          </a:p>
-        </p:txBody>
-      </p:sp>
-      <p:pic>
-        <p:nvPicPr>
-          <p:cNvPr id="15" name="Picture 14" descr="bom_mensual_may_ago.png"/>
-          <p:cNvPicPr>
-            <a:picLocks noChangeAspect="1"/>
-          </p:cNvPicPr>
-          <p:nvPr/>
-        </p:nvPicPr>
-        <p:blipFill>
-          <a:blip r:embed="rId3"/>
-          <a:stretch>
-            <a:fillRect/>
-          </a:stretch>
-        </p:blipFill>
-        <p:spPr>
-          <a:xfrm>
-            <a:off x="274320" y="2031551"/>
-            <a:ext cx="7827264" cy="3343536"/>
-          </a:xfrm>
-          <a:prstGeom prst="rect">
-            <a:avLst/>
-          </a:prstGeom>
-        </p:spPr>
-      </p:pic>
-      <p:sp>
-        <p:nvSpPr>
-          <p:cNvPr id="16" name="Rounded Rectangle 15"/>
-          <p:cNvSpPr/>
-          <p:nvPr/>
-        </p:nvSpPr>
-        <p:spPr>
-          <a:xfrm>
-            <a:off x="8302752" y="1792224"/>
-            <a:ext cx="3675887" cy="3822191"/>
-          </a:xfrm>
-          <a:prstGeom prst="roundRect">
-            <a:avLst>
-              <a:gd name="adj" fmla="val 8000"/>
-            </a:avLst>
-          </a:prstGeom>
-          <a:solidFill>
-            <a:srgbClr val="FFFFFF"/>
-          </a:solidFill>
-          <a:ln w="6350">
-            <a:solidFill>
-              <a:srgbClr val="1F77B4"/>
-            </a:solidFill>
-          </a:ln>
-        </p:spPr>
-        <p:style>
-          <a:lnRef idx="1">
-            <a:schemeClr val="accent1"/>
-          </a:lnRef>
-          <a:fillRef idx="3">
-            <a:schemeClr val="accent1"/>
-          </a:fillRef>
-          <a:effectRef idx="2">
-            <a:schemeClr val="accent1"/>
-          </a:effectRef>
-          <a:fontRef idx="minor">
-            <a:schemeClr val="lt1"/>
-          </a:fontRef>
-        </p:style>
-        <p:txBody>
-          <a:bodyPr rtlCol="0" anchor="ctr"/>
-          <a:lstStyle/>
-          <a:p>
-            <a:pPr algn="ctr"/>
-          </a:p>
-        </p:txBody>
-      </p:sp>
-      <p:sp>
-        <p:nvSpPr>
-          <p:cNvPr id="17" name="TextBox 16"/>
-          <p:cNvSpPr txBox="1"/>
-          <p:nvPr/>
-        </p:nvSpPr>
-        <p:spPr>
-          <a:xfrm>
-            <a:off x="8430768" y="1837943"/>
-            <a:ext cx="3419856" cy="164592"/>
-          </a:xfrm>
-          <a:prstGeom prst="rect">
-            <a:avLst/>
-          </a:prstGeom>
-          <a:noFill/>
-        </p:spPr>
-        <p:txBody>
-          <a:bodyPr wrap="square">
-            <a:spAutoFit/>
-          </a:bodyPr>
-          <a:lstStyle/>
-          <a:p>
-            <a:pPr algn="l">
-              <a:spcAft>
-                <a:spcPts val="300"/>
-              </a:spcAft>
-            </a:pPr>
-            <a:r>
-              <a:rPr sz="1100" b="1">
-                <a:solidFill>
-                  <a:srgbClr val="1F77B4"/>
-                </a:solidFill>
-                <a:latin typeface="Calibri"/>
-              </a:rPr>
-              <a:t>JULIO · último mes cerrado</a:t>
-            </a:r>
-          </a:p>
-        </p:txBody>
-      </p:sp>
-      <p:sp>
-        <p:nvSpPr>
-          <p:cNvPr id="18" name="TextBox 17"/>
-          <p:cNvSpPr txBox="1"/>
-          <p:nvPr/>
-        </p:nvSpPr>
-        <p:spPr>
-          <a:xfrm>
-            <a:off x="8430768" y="2002536"/>
-            <a:ext cx="3419856" cy="201168"/>
-          </a:xfrm>
-          <a:prstGeom prst="rect">
-            <a:avLst/>
-          </a:prstGeom>
-          <a:noFill/>
-        </p:spPr>
-        <p:txBody>
-          <a:bodyPr wrap="square">
-            <a:spAutoFit/>
-          </a:bodyPr>
-          <a:lstStyle/>
-          <a:p>
-            <a:pPr algn="l">
-              <a:spcAft>
-                <a:spcPts val="300"/>
-              </a:spcAft>
-            </a:pPr>
-            <a:r>
-              <a:rPr sz="1200" b="0">
-                <a:solidFill>
-                  <a:srgbClr val="5A5A5A"/>
-                </a:solidFill>
-                <a:latin typeface="Calibri"/>
-              </a:rPr>
-              <a:t>El recinto sumó 5.116 m³</a:t>
-            </a:r>
-          </a:p>
-        </p:txBody>
-      </p:sp>
-      <p:sp>
-        <p:nvSpPr>
-          <p:cNvPr id="19" name="Rounded Rectangle 18"/>
-          <p:cNvSpPr/>
-          <p:nvPr/>
-        </p:nvSpPr>
-        <p:spPr>
-          <a:xfrm>
-            <a:off x="8430768" y="2212848"/>
-            <a:ext cx="3419856" cy="768096"/>
-          </a:xfrm>
-          <a:prstGeom prst="roundRect">
-            <a:avLst>
-              <a:gd name="adj" fmla="val 8000"/>
-            </a:avLst>
-          </a:prstGeom>
-          <a:solidFill>
-            <a:srgbClr val="F5F7FA"/>
-          </a:solidFill>
-          <a:ln w="6350">
-            <a:solidFill>
-              <a:srgbClr val="0D3B66"/>
-            </a:solidFill>
-          </a:ln>
-        </p:spPr>
-        <p:style>
-          <a:lnRef idx="1">
-            <a:schemeClr val="accent1"/>
-          </a:lnRef>
-          <a:fillRef idx="3">
-            <a:schemeClr val="accent1"/>
-          </a:fillRef>
-          <a:effectRef idx="2">
-            <a:schemeClr val="accent1"/>
-          </a:effectRef>
-          <a:fontRef idx="minor">
-            <a:schemeClr val="lt1"/>
-          </a:fontRef>
-        </p:style>
-        <p:txBody>
-          <a:bodyPr rtlCol="0" anchor="ctr"/>
-          <a:lstStyle/>
-          <a:p>
-            <a:pPr algn="ctr"/>
-          </a:p>
-        </p:txBody>
-      </p:sp>
-      <p:sp>
-        <p:nvSpPr>
-          <p:cNvPr id="20" name="TextBox 19"/>
-          <p:cNvSpPr txBox="1"/>
-          <p:nvPr/>
-        </p:nvSpPr>
-        <p:spPr>
-          <a:xfrm>
-            <a:off x="8540496" y="2240279"/>
-            <a:ext cx="3200400" cy="164592"/>
-          </a:xfrm>
-          <a:prstGeom prst="rect">
-            <a:avLst/>
-          </a:prstGeom>
-          <a:noFill/>
-        </p:spPr>
-        <p:txBody>
-          <a:bodyPr wrap="square">
-            <a:spAutoFit/>
-          </a:bodyPr>
-          <a:lstStyle/>
-          <a:p>
-            <a:pPr algn="l">
-              <a:spcAft>
-                <a:spcPts val="300"/>
-              </a:spcAft>
-            </a:pPr>
-            <a:r>
-              <a:rPr sz="1300" b="1">
-                <a:solidFill>
-                  <a:srgbClr val="0D3B66"/>
-                </a:solidFill>
-                <a:latin typeface="Calibri"/>
-              </a:rPr>
-              <a:t>San Ignacio 500</a:t>
-            </a:r>
-          </a:p>
-        </p:txBody>
-      </p:sp>
-      <p:sp>
-        <p:nvSpPr>
-          <p:cNvPr id="21" name="TextBox 20"/>
-          <p:cNvSpPr txBox="1"/>
-          <p:nvPr/>
-        </p:nvSpPr>
-        <p:spPr>
-          <a:xfrm>
-            <a:off x="8540496" y="2535448"/>
-            <a:ext cx="3200400" cy="237744"/>
-          </a:xfrm>
-          <a:prstGeom prst="rect">
-            <a:avLst/>
-          </a:prstGeom>
-          <a:noFill/>
-        </p:spPr>
-        <p:txBody>
-          <a:bodyPr wrap="square">
-            <a:spAutoFit/>
-          </a:bodyPr>
-          <a:lstStyle/>
-          <a:p>
-            <a:pPr algn="l">
-              <a:spcAft>
-                <a:spcPts val="300"/>
-              </a:spcAft>
-            </a:pPr>
-            <a:r>
-              <a:rPr sz="1600" b="1">
-                <a:solidFill>
-                  <a:srgbClr val="0D3B66"/>
-                </a:solidFill>
-                <a:latin typeface="Calibri"/>
-              </a:rPr>
-              <a:t>4.067 m³    79 %</a:t>
-            </a:r>
-          </a:p>
-        </p:txBody>
-      </p:sp>
-      <p:sp>
-        <p:nvSpPr>
-          <p:cNvPr id="22" name="Rounded Rectangle 21"/>
-          <p:cNvSpPr/>
-          <p:nvPr/>
-        </p:nvSpPr>
-        <p:spPr>
-          <a:xfrm>
-            <a:off x="8430768" y="3877056"/>
-            <a:ext cx="3419856" cy="768096"/>
-          </a:xfrm>
-          <a:prstGeom prst="roundRect">
-            <a:avLst>
-              <a:gd name="adj" fmla="val 8000"/>
-            </a:avLst>
-          </a:prstGeom>
-          <a:solidFill>
-            <a:srgbClr val="F5F7FA"/>
-          </a:solidFill>
-          <a:ln w="6350">
-            <a:solidFill>
-              <a:srgbClr val="C45C26"/>
-            </a:solidFill>
-          </a:ln>
-        </p:spPr>
-        <p:style>
-          <a:lnRef idx="1">
-            <a:schemeClr val="accent1"/>
-          </a:lnRef>
-          <a:fillRef idx="3">
-            <a:schemeClr val="accent1"/>
-          </a:fillRef>
-          <a:effectRef idx="2">
-            <a:schemeClr val="accent1"/>
-          </a:effectRef>
-          <a:fontRef idx="minor">
-            <a:schemeClr val="lt1"/>
-          </a:fontRef>
-        </p:style>
-        <p:txBody>
-          <a:bodyPr rtlCol="0" anchor="ctr"/>
-          <a:lstStyle/>
-          <a:p>
-            <a:pPr algn="ctr"/>
-          </a:p>
-        </p:txBody>
-      </p:sp>
-      <p:sp>
-        <p:nvSpPr>
-          <p:cNvPr id="23" name="TextBox 22"/>
-          <p:cNvSpPr txBox="1"/>
-          <p:nvPr/>
-        </p:nvSpPr>
-        <p:spPr>
-          <a:xfrm>
-            <a:off x="8540496" y="3904488"/>
-            <a:ext cx="3200400" cy="164592"/>
-          </a:xfrm>
-          <a:prstGeom prst="rect">
-            <a:avLst/>
-          </a:prstGeom>
-          <a:noFill/>
-        </p:spPr>
-        <p:txBody>
-          <a:bodyPr wrap="square">
-            <a:spAutoFit/>
-          </a:bodyPr>
-          <a:lstStyle/>
-          <a:p>
-            <a:pPr algn="l">
-              <a:spcAft>
-                <a:spcPts val="300"/>
-              </a:spcAft>
-            </a:pPr>
-            <a:r>
-              <a:rPr sz="1300" b="1">
-                <a:solidFill>
-                  <a:srgbClr val="C45C26"/>
-                </a:solidFill>
-                <a:latin typeface="Calibri"/>
-              </a:rPr>
-              <a:t>San Ignacio 300</a:t>
-            </a:r>
-          </a:p>
-        </p:txBody>
-      </p:sp>
-      <p:sp>
-        <p:nvSpPr>
-          <p:cNvPr id="24" name="TextBox 23"/>
-          <p:cNvSpPr txBox="1"/>
-          <p:nvPr/>
-        </p:nvSpPr>
-        <p:spPr>
-          <a:xfrm>
-            <a:off x="8540496" y="4199656"/>
-            <a:ext cx="3200400" cy="237744"/>
-          </a:xfrm>
-          <a:prstGeom prst="rect">
-            <a:avLst/>
-          </a:prstGeom>
-          <a:noFill/>
-        </p:spPr>
-        <p:txBody>
-          <a:bodyPr wrap="square">
-            <a:spAutoFit/>
-          </a:bodyPr>
-          <a:lstStyle/>
-          <a:p>
-            <a:pPr algn="l">
-              <a:spcAft>
-                <a:spcPts val="300"/>
-              </a:spcAft>
-            </a:pPr>
-            <a:r>
-              <a:rPr sz="1600" b="1">
-                <a:solidFill>
-                  <a:srgbClr val="0D3B66"/>
-                </a:solidFill>
-                <a:latin typeface="Calibri"/>
-              </a:rPr>
-              <a:t>1.049 m³    21 %</a:t>
-            </a:r>
-          </a:p>
-        </p:txBody>
-      </p:sp>
-      <p:sp>
-        <p:nvSpPr>
-          <p:cNvPr id="25" name="Rounded Rectangle 24"/>
-          <p:cNvSpPr/>
-          <p:nvPr/>
-        </p:nvSpPr>
-        <p:spPr>
-          <a:xfrm>
-            <a:off x="201168" y="5705856"/>
-            <a:ext cx="11795760" cy="438912"/>
+            <a:off x="201168" y="987552"/>
+            <a:ext cx="11777472" cy="658368"/>
           </a:xfrm>
           <a:prstGeom prst="roundRect">
             <a:avLst>
@@ -14171,94 +14480,357 @@
       </p:sp>
       <p:sp>
         <p:nvSpPr>
-          <p:cNvPr id="26" name="TextBox 25"/>
-          <p:cNvSpPr txBox="1"/>
-          <p:nvPr/>
-        </p:nvSpPr>
-        <p:spPr>
-          <a:xfrm>
-            <a:off x="329184" y="5779008"/>
-            <a:ext cx="11539728" cy="310896"/>
-          </a:xfrm>
-          <a:prstGeom prst="rect">
-            <a:avLst/>
-          </a:prstGeom>
-          <a:noFill/>
-        </p:spPr>
-        <p:txBody>
-          <a:bodyPr wrap="square">
-            <a:spAutoFit/>
-          </a:bodyPr>
-          <a:lstStyle/>
-          <a:p>
-            <a:pPr algn="l">
-              <a:spcAft>
-                <a:spcPts val="300"/>
-              </a:spcAft>
-            </a:pPr>
-            <a:r>
-              <a:rPr sz="1100" b="0">
+          <p:cNvPr id="8" name="TextBox 7"/>
+          <p:cNvSpPr txBox="1"/>
+          <p:nvPr/>
+        </p:nvSpPr>
+        <p:spPr>
+          <a:xfrm>
+            <a:off x="365760" y="1042415"/>
+            <a:ext cx="11475720" cy="548640"/>
+          </a:xfrm>
+          <a:prstGeom prst="rect">
+            <a:avLst/>
+          </a:prstGeom>
+          <a:noFill/>
+        </p:spPr>
+        <p:txBody>
+          <a:bodyPr wrap="square">
+            <a:spAutoFit/>
+          </a:bodyPr>
+          <a:lstStyle/>
+          <a:p>
+            <a:pPr algn="l">
+              <a:spcAft>
+                <a:spcPts val="300"/>
+              </a:spcAft>
+            </a:pPr>
+            <a:r>
+              <a:rPr sz="1400" b="0">
                 <a:solidFill>
                   <a:srgbClr val="0D3B66"/>
                 </a:solidFill>
                 <a:latin typeface="Calibri"/>
               </a:rPr>
-              <a:t>Recepción 18/11/2025  ·  Capacitación 11/12/2025  ·  Aliro Cortés  ·  Tomás Saba  ·  Sebastián Araneda</a:t>
-            </a:r>
-          </a:p>
-        </p:txBody>
-      </p:sp>
-      <p:sp>
-        <p:nvSpPr>
-          <p:cNvPr id="27" name="TextBox 26"/>
-          <p:cNvSpPr txBox="1"/>
-          <p:nvPr/>
-        </p:nvSpPr>
-        <p:spPr>
-          <a:xfrm>
-            <a:off x="256032" y="6181344"/>
-            <a:ext cx="11704320" cy="566928"/>
-          </a:xfrm>
-          <a:prstGeom prst="rect">
-            <a:avLst/>
-          </a:prstGeom>
-          <a:noFill/>
-        </p:spPr>
-        <p:txBody>
-          <a:bodyPr wrap="square">
-            <a:spAutoFit/>
-          </a:bodyPr>
-          <a:lstStyle/>
-          <a:p>
-            <a:pPr algn="l">
-              <a:spcAft>
-                <a:spcPts val="300"/>
-              </a:spcAft>
-            </a:pPr>
-            <a:r>
-              <a:rPr sz="1200" b="0">
+              <a:t>Matriz Principal se lleva 99 % de julio. Desde el 22/06 el día se duplicó (junio 131 → julio 193 → agosto 202 m³/día) y se quedó arriba. Baños es uso hábil: no es el problema.</a:t>
+            </a:r>
+          </a:p>
+        </p:txBody>
+      </p:sp>
+      <p:sp>
+        <p:nvSpPr>
+          <p:cNvPr id="9" name="Rounded Rectangle 8"/>
+          <p:cNvSpPr/>
+          <p:nvPr/>
+        </p:nvSpPr>
+        <p:spPr>
+          <a:xfrm>
+            <a:off x="201168" y="1737360"/>
+            <a:ext cx="5833872" cy="3803904"/>
+          </a:xfrm>
+          <a:prstGeom prst="roundRect">
+            <a:avLst>
+              <a:gd name="adj" fmla="val 8000"/>
+            </a:avLst>
+          </a:prstGeom>
+          <a:solidFill>
+            <a:srgbClr val="F5F7FA"/>
+          </a:solidFill>
+          <a:ln>
+            <a:noFill/>
+          </a:ln>
+        </p:spPr>
+        <p:style>
+          <a:lnRef idx="1">
+            <a:schemeClr val="accent1"/>
+          </a:lnRef>
+          <a:fillRef idx="3">
+            <a:schemeClr val="accent1"/>
+          </a:fillRef>
+          <a:effectRef idx="2">
+            <a:schemeClr val="accent1"/>
+          </a:effectRef>
+          <a:fontRef idx="minor">
+            <a:schemeClr val="lt1"/>
+          </a:fontRef>
+        </p:style>
+        <p:txBody>
+          <a:bodyPr rtlCol="0" anchor="ctr"/>
+          <a:lstStyle/>
+          <a:p>
+            <a:pPr algn="ctr"/>
+          </a:p>
+        </p:txBody>
+      </p:sp>
+      <p:sp>
+        <p:nvSpPr>
+          <p:cNvPr id="10" name="TextBox 9"/>
+          <p:cNvSpPr txBox="1"/>
+          <p:nvPr/>
+        </p:nvSpPr>
+        <p:spPr>
+          <a:xfrm>
+            <a:off x="329184" y="1773936"/>
+            <a:ext cx="5577840" cy="201168"/>
+          </a:xfrm>
+          <a:prstGeom prst="rect">
+            <a:avLst/>
+          </a:prstGeom>
+          <a:noFill/>
+        </p:spPr>
+        <p:txBody>
+          <a:bodyPr wrap="square">
+            <a:spAutoFit/>
+          </a:bodyPr>
+          <a:lstStyle/>
+          <a:p>
+            <a:pPr algn="l">
+              <a:spcAft>
+                <a:spcPts val="300"/>
+              </a:spcAft>
+            </a:pPr>
+            <a:r>
+              <a:rPr sz="1100" b="1">
+                <a:solidFill>
+                  <a:srgbClr val="1F77B4"/>
+                </a:solidFill>
+                <a:latin typeface="Calibri"/>
+              </a:rPr>
+              <a:t>DÍA · el alza desde junio se sostiene</a:t>
+            </a:r>
+          </a:p>
+        </p:txBody>
+      </p:sp>
+      <p:pic>
+        <p:nvPicPr>
+          <p:cNvPr id="11" name="Picture 10" descr="maq_matriz_diario_jun_ago.png"/>
+          <p:cNvPicPr>
+            <a:picLocks noChangeAspect="1"/>
+          </p:cNvPicPr>
+          <p:nvPr/>
+        </p:nvPicPr>
+        <p:blipFill>
+          <a:blip r:embed="rId3"/>
+          <a:stretch>
+            <a:fillRect/>
+          </a:stretch>
+        </p:blipFill>
+        <p:spPr>
+          <a:xfrm>
+            <a:off x="292608" y="2467595"/>
+            <a:ext cx="5650992" cy="2508024"/>
+          </a:xfrm>
+          <a:prstGeom prst="rect">
+            <a:avLst/>
+          </a:prstGeom>
+        </p:spPr>
+      </p:pic>
+      <p:sp>
+        <p:nvSpPr>
+          <p:cNvPr id="12" name="Rounded Rectangle 11"/>
+          <p:cNvSpPr/>
+          <p:nvPr/>
+        </p:nvSpPr>
+        <p:spPr>
+          <a:xfrm>
+            <a:off x="6163056" y="1737360"/>
+            <a:ext cx="5815584" cy="3803904"/>
+          </a:xfrm>
+          <a:prstGeom prst="roundRect">
+            <a:avLst>
+              <a:gd name="adj" fmla="val 8000"/>
+            </a:avLst>
+          </a:prstGeom>
+          <a:solidFill>
+            <a:srgbClr val="F5F7FA"/>
+          </a:solidFill>
+          <a:ln>
+            <a:noFill/>
+          </a:ln>
+        </p:spPr>
+        <p:style>
+          <a:lnRef idx="1">
+            <a:schemeClr val="accent1"/>
+          </a:lnRef>
+          <a:fillRef idx="3">
+            <a:schemeClr val="accent1"/>
+          </a:fillRef>
+          <a:effectRef idx="2">
+            <a:schemeClr val="accent1"/>
+          </a:effectRef>
+          <a:fontRef idx="minor">
+            <a:schemeClr val="lt1"/>
+          </a:fontRef>
+        </p:style>
+        <p:txBody>
+          <a:bodyPr rtlCol="0" anchor="ctr"/>
+          <a:lstStyle/>
+          <a:p>
+            <a:pPr algn="ctr"/>
+          </a:p>
+        </p:txBody>
+      </p:sp>
+      <p:sp>
+        <p:nvSpPr>
+          <p:cNvPr id="13" name="TextBox 12"/>
+          <p:cNvSpPr txBox="1"/>
+          <p:nvPr/>
+        </p:nvSpPr>
+        <p:spPr>
+          <a:xfrm>
+            <a:off x="6291072" y="1773936"/>
+            <a:ext cx="5559552" cy="201168"/>
+          </a:xfrm>
+          <a:prstGeom prst="rect">
+            <a:avLst/>
+          </a:prstGeom>
+          <a:noFill/>
+        </p:spPr>
+        <p:txBody>
+          <a:bodyPr wrap="square">
+            <a:spAutoFit/>
+          </a:bodyPr>
+          <a:lstStyle/>
+          <a:p>
+            <a:pPr algn="l">
+              <a:spcAft>
+                <a:spcPts val="300"/>
+              </a:spcAft>
+            </a:pPr>
+            <a:r>
+              <a:rPr sz="1100" b="1">
+                <a:solidFill>
+                  <a:srgbClr val="1F77B4"/>
+                </a:solidFill>
+                <a:latin typeface="Calibri"/>
+              </a:rPr>
+              <a:t>NOCHE 00–06  ·  mall cerrado</a:t>
+            </a:r>
+          </a:p>
+        </p:txBody>
+      </p:sp>
+      <p:pic>
+        <p:nvPicPr>
+          <p:cNvPr id="14" name="Picture 13" descr="maq_matriz_noches_jul_ago.png"/>
+          <p:cNvPicPr>
+            <a:picLocks noChangeAspect="1"/>
+          </p:cNvPicPr>
+          <p:nvPr/>
+        </p:nvPicPr>
+        <p:blipFill>
+          <a:blip r:embed="rId4"/>
+          <a:stretch>
+            <a:fillRect/>
+          </a:stretch>
+        </p:blipFill>
+        <p:spPr>
+          <a:xfrm>
+            <a:off x="6254496" y="2466379"/>
+            <a:ext cx="5632704" cy="2510456"/>
+          </a:xfrm>
+          <a:prstGeom prst="rect">
+            <a:avLst/>
+          </a:prstGeom>
+        </p:spPr>
+      </p:pic>
+      <p:sp>
+        <p:nvSpPr>
+          <p:cNvPr id="15" name="Rounded Rectangle 14"/>
+          <p:cNvSpPr/>
+          <p:nvPr/>
+        </p:nvSpPr>
+        <p:spPr>
+          <a:xfrm>
+            <a:off x="201168" y="5632704"/>
+            <a:ext cx="11777472" cy="1060704"/>
+          </a:xfrm>
+          <a:prstGeom prst="roundRect">
+            <a:avLst>
+              <a:gd name="adj" fmla="val 8000"/>
+            </a:avLst>
+          </a:prstGeom>
+          <a:solidFill>
+            <a:srgbClr val="FFF9EB"/>
+          </a:solidFill>
+          <a:ln w="6350">
+            <a:solidFill>
+              <a:srgbClr val="C9A227"/>
+            </a:solidFill>
+          </a:ln>
+        </p:spPr>
+        <p:style>
+          <a:lnRef idx="1">
+            <a:schemeClr val="accent1"/>
+          </a:lnRef>
+          <a:fillRef idx="3">
+            <a:schemeClr val="accent1"/>
+          </a:fillRef>
+          <a:effectRef idx="2">
+            <a:schemeClr val="accent1"/>
+          </a:effectRef>
+          <a:fontRef idx="minor">
+            <a:schemeClr val="lt1"/>
+          </a:fontRef>
+        </p:style>
+        <p:txBody>
+          <a:bodyPr rtlCol="0" anchor="ctr"/>
+          <a:lstStyle/>
+          <a:p>
+            <a:pPr algn="ctr"/>
+          </a:p>
+        </p:txBody>
+      </p:sp>
+      <p:sp>
+        <p:nvSpPr>
+          <p:cNvPr id="16" name="TextBox 15"/>
+          <p:cNvSpPr txBox="1"/>
+          <p:nvPr/>
+        </p:nvSpPr>
+        <p:spPr>
+          <a:xfrm>
+            <a:off x="365760" y="5687568"/>
+            <a:ext cx="11475720" cy="950976"/>
+          </a:xfrm>
+          <a:prstGeom prst="rect">
+            <a:avLst/>
+          </a:prstGeom>
+          <a:noFill/>
+        </p:spPr>
+        <p:txBody>
+          <a:bodyPr wrap="square">
+            <a:spAutoFit/>
+          </a:bodyPr>
+          <a:lstStyle/>
+          <a:p>
+            <a:pPr algn="l">
+              <a:spcAft>
+                <a:spcPts val="300"/>
+              </a:spcAft>
+            </a:pPr>
+            <a:r>
+              <a:rPr sz="1400" b="0">
                 <a:solidFill>
                   <a:srgbClr val="0D3B66"/>
                 </a:solidFill>
                 <a:latin typeface="Calibri"/>
               </a:rPr>
-              <a:t>Mayo 1.565   ·   Junio 1.762   ·   Julio 5.116   ·   Agosto 1–17: 2.686   ·   proy. ago 4.899 m³.</a:t>
-            </a:r>
-          </a:p>
-          <a:p>
-            <a:pPr algn="l">
-              <a:spcAft>
-                <a:spcPts val="300"/>
-              </a:spcAft>
-            </a:pPr>
-            <a:r>
-              <a:rPr sz="1100" b="0">
-                <a:solidFill>
-                  <a:srgbClr val="5A5A5A"/>
-                </a:solidFill>
-                <a:latin typeface="Calibri"/>
-              </a:rPr>
-              <a:t>San Ignacio 500 es el mayor volumen; 300 queda en monitoreo.</a:t>
+              <a:t>Umbrales: diario 240 m³/día (julio ~193). Noche 15 m³: el mall está cerrado y hoy la madrugada anda en 22 m³.</a:t>
+            </a:r>
+          </a:p>
+          <a:p>
+            <a:pPr algn="l">
+              <a:spcAft>
+                <a:spcPts val="300"/>
+              </a:spcAft>
+            </a:pPr>
+            <a:r>
+              <a:rPr sz="1400" b="1">
+                <a:solidFill>
+                  <a:srgbClr val="0D3B66"/>
+                </a:solidFill>
+                <a:latin typeface="Calibri"/>
+              </a:rPr>
+              <a:t>Buena medida: poner un control on/off de madrugada en Matriz. La gráfica de la derecha lo muestra: ~22 m³/noche, unos 659 m³/mes si se corta el caudal inhábil.</a:t>
             </a:r>
           </a:p>
         </p:txBody>
@@ -14425,7 +14997,7 @@
                 </a:solidFill>
                 <a:latin typeface="Calibri"/>
               </a:rPr>
-              <a:t>AEB  ·  Equipos y consumo</a:t>
+              <a:t>BOM  ·  Equipos y consumo</a:t>
             </a:r>
           </a:p>
         </p:txBody>
@@ -14464,7 +15036,7 @@
                 </a:solidFill>
                 <a:latin typeface="Calibri"/>
               </a:rPr>
-              <a:t>Arauco El Bosque   |   2 puntos WES   |   01/05/2026 – 17/08/2026</a:t>
+              <a:t>Buenaventura (San Ignacio)   |   2 puntos WES   |   01/05/2026 – 17/08/2026</a:t>
             </a:r>
           </a:p>
         </p:txBody>
@@ -14478,6 +15050,131 @@
         <p:spPr>
           <a:xfrm>
             <a:off x="201168" y="1024128"/>
+            <a:ext cx="5861304" cy="658368"/>
+          </a:xfrm>
+          <a:prstGeom prst="roundRect">
+            <a:avLst>
+              <a:gd name="adj" fmla="val 8000"/>
+            </a:avLst>
+          </a:prstGeom>
+          <a:solidFill>
+            <a:srgbClr val="F5F7FA"/>
+          </a:solidFill>
+          <a:ln w="6350">
+            <a:solidFill>
+              <a:srgbClr val="0D3B66"/>
+            </a:solidFill>
+          </a:ln>
+        </p:spPr>
+        <p:style>
+          <a:lnRef idx="1">
+            <a:schemeClr val="accent1"/>
+          </a:lnRef>
+          <a:fillRef idx="3">
+            <a:schemeClr val="accent1"/>
+          </a:fillRef>
+          <a:effectRef idx="2">
+            <a:schemeClr val="accent1"/>
+          </a:effectRef>
+          <a:fontRef idx="minor">
+            <a:schemeClr val="lt1"/>
+          </a:fontRef>
+        </p:style>
+        <p:txBody>
+          <a:bodyPr rtlCol="0" anchor="ctr"/>
+          <a:lstStyle/>
+          <a:p>
+            <a:pPr algn="ctr"/>
+          </a:p>
+        </p:txBody>
+      </p:sp>
+      <p:sp>
+        <p:nvSpPr>
+          <p:cNvPr id="8" name="TextBox 7"/>
+          <p:cNvSpPr txBox="1"/>
+          <p:nvPr/>
+        </p:nvSpPr>
+        <p:spPr>
+          <a:xfrm>
+            <a:off x="274320" y="1060704"/>
+            <a:ext cx="5733288" cy="146304"/>
+          </a:xfrm>
+          <a:prstGeom prst="rect">
+            <a:avLst/>
+          </a:prstGeom>
+          <a:noFill/>
+        </p:spPr>
+        <p:txBody>
+          <a:bodyPr wrap="square">
+            <a:spAutoFit/>
+          </a:bodyPr>
+          <a:lstStyle/>
+          <a:p>
+            <a:pPr algn="l">
+              <a:spcAft>
+                <a:spcPts val="300"/>
+              </a:spcAft>
+            </a:pPr>
+            <a:r>
+              <a:rPr sz="1000" b="1">
+                <a:solidFill>
+                  <a:srgbClr val="C9A227"/>
+                </a:solidFill>
+                <a:latin typeface="Calibri"/>
+              </a:rPr>
+              <a:t>000025-18</a:t>
+            </a:r>
+          </a:p>
+        </p:txBody>
+      </p:sp>
+      <p:sp>
+        <p:nvSpPr>
+          <p:cNvPr id="9" name="TextBox 8"/>
+          <p:cNvSpPr txBox="1"/>
+          <p:nvPr/>
+        </p:nvSpPr>
+        <p:spPr>
+          <a:xfrm>
+            <a:off x="274320" y="1243584"/>
+            <a:ext cx="5733288" cy="201168"/>
+          </a:xfrm>
+          <a:prstGeom prst="rect">
+            <a:avLst/>
+          </a:prstGeom>
+          <a:noFill/>
+        </p:spPr>
+        <p:txBody>
+          <a:bodyPr wrap="square">
+            <a:spAutoFit/>
+          </a:bodyPr>
+          <a:lstStyle/>
+          <a:p>
+            <a:pPr algn="l">
+              <a:spcAft>
+                <a:spcPts val="300"/>
+              </a:spcAft>
+            </a:pPr>
+            <a:r>
+              <a:rPr sz="1200" b="1">
+                <a:solidFill>
+                  <a:srgbClr val="0D3B66"/>
+                </a:solidFill>
+                <a:latin typeface="Calibri"/>
+              </a:rPr>
+              <a:t>San Ignacio 500</a:t>
+            </a:r>
+          </a:p>
+        </p:txBody>
+      </p:sp>
+      <p:sp>
+        <p:nvSpPr>
+          <p:cNvPr id="10" name="Rounded Rectangle 9"/>
+          <p:cNvSpPr/>
+          <p:nvPr/>
+        </p:nvSpPr>
+        <p:spPr>
+          <a:xfrm>
+            <a:off x="6135624" y="1024128"/>
             <a:ext cx="5861304" cy="658368"/>
           </a:xfrm>
           <a:prstGeom prst="roundRect">
@@ -14518,131 +15215,6 @@
       </p:sp>
       <p:sp>
         <p:nvSpPr>
-          <p:cNvPr id="8" name="TextBox 7"/>
-          <p:cNvSpPr txBox="1"/>
-          <p:nvPr/>
-        </p:nvSpPr>
-        <p:spPr>
-          <a:xfrm>
-            <a:off x="274320" y="1060704"/>
-            <a:ext cx="5733288" cy="146304"/>
-          </a:xfrm>
-          <a:prstGeom prst="rect">
-            <a:avLst/>
-          </a:prstGeom>
-          <a:noFill/>
-        </p:spPr>
-        <p:txBody>
-          <a:bodyPr wrap="square">
-            <a:spAutoFit/>
-          </a:bodyPr>
-          <a:lstStyle/>
-          <a:p>
-            <a:pPr algn="l">
-              <a:spcAft>
-                <a:spcPts val="300"/>
-              </a:spcAft>
-            </a:pPr>
-            <a:r>
-              <a:rPr sz="1000" b="1">
-                <a:solidFill>
-                  <a:srgbClr val="C9A227"/>
-                </a:solidFill>
-                <a:latin typeface="Calibri"/>
-              </a:rPr>
-              <a:t>000025-11</a:t>
-            </a:r>
-          </a:p>
-        </p:txBody>
-      </p:sp>
-      <p:sp>
-        <p:nvSpPr>
-          <p:cNvPr id="9" name="TextBox 8"/>
-          <p:cNvSpPr txBox="1"/>
-          <p:nvPr/>
-        </p:nvSpPr>
-        <p:spPr>
-          <a:xfrm>
-            <a:off x="274320" y="1243584"/>
-            <a:ext cx="5733288" cy="201168"/>
-          </a:xfrm>
-          <a:prstGeom prst="rect">
-            <a:avLst/>
-          </a:prstGeom>
-          <a:noFill/>
-        </p:spPr>
-        <p:txBody>
-          <a:bodyPr wrap="square">
-            <a:spAutoFit/>
-          </a:bodyPr>
-          <a:lstStyle/>
-          <a:p>
-            <a:pPr algn="l">
-              <a:spcAft>
-                <a:spcPts val="300"/>
-              </a:spcAft>
-            </a:pPr>
-            <a:r>
-              <a:rPr sz="1200" b="1">
-                <a:solidFill>
-                  <a:srgbClr val="0D3B66"/>
-                </a:solidFill>
-                <a:latin typeface="Calibri"/>
-              </a:rPr>
-              <a:t>Matriz 1° piso</a:t>
-            </a:r>
-          </a:p>
-        </p:txBody>
-      </p:sp>
-      <p:sp>
-        <p:nvSpPr>
-          <p:cNvPr id="10" name="Rounded Rectangle 9"/>
-          <p:cNvSpPr/>
-          <p:nvPr/>
-        </p:nvSpPr>
-        <p:spPr>
-          <a:xfrm>
-            <a:off x="6135624" y="1024128"/>
-            <a:ext cx="5861304" cy="658368"/>
-          </a:xfrm>
-          <a:prstGeom prst="roundRect">
-            <a:avLst>
-              <a:gd name="adj" fmla="val 8000"/>
-            </a:avLst>
-          </a:prstGeom>
-          <a:solidFill>
-            <a:srgbClr val="F5F7FA"/>
-          </a:solidFill>
-          <a:ln w="6350">
-            <a:solidFill>
-              <a:srgbClr val="C9A227"/>
-            </a:solidFill>
-          </a:ln>
-        </p:spPr>
-        <p:style>
-          <a:lnRef idx="1">
-            <a:schemeClr val="accent1"/>
-          </a:lnRef>
-          <a:fillRef idx="3">
-            <a:schemeClr val="accent1"/>
-          </a:fillRef>
-          <a:effectRef idx="2">
-            <a:schemeClr val="accent1"/>
-          </a:effectRef>
-          <a:fontRef idx="minor">
-            <a:schemeClr val="lt1"/>
-          </a:fontRef>
-        </p:style>
-        <p:txBody>
-          <a:bodyPr rtlCol="0" anchor="ctr"/>
-          <a:lstStyle/>
-          <a:p>
-            <a:pPr algn="ctr"/>
-          </a:p>
-        </p:txBody>
-      </p:sp>
-      <p:sp>
-        <p:nvSpPr>
           <p:cNvPr id="11" name="TextBox 10"/>
           <p:cNvSpPr txBox="1"/>
           <p:nvPr/>
@@ -14675,7 +15247,7 @@
                 </a:solidFill>
                 <a:latin typeface="Calibri"/>
               </a:rPr>
-              <a:t>000025-12</a:t>
+              <a:t>000025-17</a:t>
             </a:r>
           </a:p>
         </p:txBody>
@@ -14714,14 +15286,53 @@
                 </a:solidFill>
                 <a:latin typeface="Calibri"/>
               </a:rPr>
-              <a:t>Anillo Plaza</a:t>
-            </a:r>
-          </a:p>
-        </p:txBody>
-      </p:sp>
-      <p:sp>
-        <p:nvSpPr>
-          <p:cNvPr id="13" name="Rounded Rectangle 12"/>
+              <a:t>San Ignacio 300</a:t>
+            </a:r>
+          </a:p>
+        </p:txBody>
+      </p:sp>
+      <p:sp>
+        <p:nvSpPr>
+          <p:cNvPr id="13" name="TextBox 12"/>
+          <p:cNvSpPr txBox="1"/>
+          <p:nvPr/>
+        </p:nvSpPr>
+        <p:spPr>
+          <a:xfrm>
+            <a:off x="6208776" y="1481328"/>
+            <a:ext cx="5733288" cy="164592"/>
+          </a:xfrm>
+          <a:prstGeom prst="rect">
+            <a:avLst/>
+          </a:prstGeom>
+          <a:noFill/>
+        </p:spPr>
+        <p:txBody>
+          <a:bodyPr wrap="square">
+            <a:spAutoFit/>
+          </a:bodyPr>
+          <a:lstStyle/>
+          <a:p>
+            <a:pPr algn="l">
+              <a:spcAft>
+                <a:spcPts val="300"/>
+              </a:spcAft>
+            </a:pPr>
+            <a:r>
+              <a:rPr sz="1000" b="0">
+                <a:solidFill>
+                  <a:srgbClr val="5A5A5A"/>
+                </a:solidFill>
+                <a:latin typeface="Calibri"/>
+              </a:rPr>
+              <a:t>monitoreo</a:t>
+            </a:r>
+          </a:p>
+        </p:txBody>
+      </p:sp>
+      <p:sp>
+        <p:nvSpPr>
+          <p:cNvPr id="14" name="Rounded Rectangle 13"/>
           <p:cNvSpPr/>
           <p:nvPr/>
         </p:nvSpPr>
@@ -14766,7 +15377,7 @@
       </p:sp>
       <p:pic>
         <p:nvPicPr>
-          <p:cNvPr id="14" name="Picture 13" descr="aeb_mensual_may_ago.png"/>
+          <p:cNvPr id="15" name="Picture 14" descr="bom_mensual_may_ago.png"/>
           <p:cNvPicPr>
             <a:picLocks noChangeAspect="1"/>
           </p:cNvPicPr>
@@ -14790,7 +15401,7 @@
       </p:pic>
       <p:sp>
         <p:nvSpPr>
-          <p:cNvPr id="15" name="Rounded Rectangle 14"/>
+          <p:cNvPr id="16" name="Rounded Rectangle 15"/>
           <p:cNvSpPr/>
           <p:nvPr/>
         </p:nvSpPr>
@@ -14837,7 +15448,7 @@
       </p:sp>
       <p:sp>
         <p:nvSpPr>
-          <p:cNvPr id="16" name="TextBox 15"/>
+          <p:cNvPr id="17" name="TextBox 16"/>
           <p:cNvSpPr txBox="1"/>
           <p:nvPr/>
         </p:nvSpPr>
@@ -14876,7 +15487,7 @@
       </p:sp>
       <p:sp>
         <p:nvSpPr>
-          <p:cNvPr id="17" name="TextBox 16"/>
+          <p:cNvPr id="18" name="TextBox 17"/>
           <p:cNvSpPr txBox="1"/>
           <p:nvPr/>
         </p:nvSpPr>
@@ -14908,20 +15519,145 @@
                 </a:solidFill>
                 <a:latin typeface="Calibri"/>
               </a:rPr>
-              <a:t>El recinto sumó 2.371 m³</a:t>
-            </a:r>
-          </a:p>
-        </p:txBody>
-      </p:sp>
-      <p:sp>
-        <p:nvSpPr>
-          <p:cNvPr id="18" name="Rounded Rectangle 17"/>
+              <a:t>El recinto sumó 5.116 m³</a:t>
+            </a:r>
+          </a:p>
+        </p:txBody>
+      </p:sp>
+      <p:sp>
+        <p:nvSpPr>
+          <p:cNvPr id="19" name="Rounded Rectangle 18"/>
           <p:cNvSpPr/>
           <p:nvPr/>
         </p:nvSpPr>
         <p:spPr>
           <a:xfrm>
             <a:off x="8430768" y="2212848"/>
+            <a:ext cx="3419856" cy="768096"/>
+          </a:xfrm>
+          <a:prstGeom prst="roundRect">
+            <a:avLst>
+              <a:gd name="adj" fmla="val 8000"/>
+            </a:avLst>
+          </a:prstGeom>
+          <a:solidFill>
+            <a:srgbClr val="F5F7FA"/>
+          </a:solidFill>
+          <a:ln w="6350">
+            <a:solidFill>
+              <a:srgbClr val="0D3B66"/>
+            </a:solidFill>
+          </a:ln>
+        </p:spPr>
+        <p:style>
+          <a:lnRef idx="1">
+            <a:schemeClr val="accent1"/>
+          </a:lnRef>
+          <a:fillRef idx="3">
+            <a:schemeClr val="accent1"/>
+          </a:fillRef>
+          <a:effectRef idx="2">
+            <a:schemeClr val="accent1"/>
+          </a:effectRef>
+          <a:fontRef idx="minor">
+            <a:schemeClr val="lt1"/>
+          </a:fontRef>
+        </p:style>
+        <p:txBody>
+          <a:bodyPr rtlCol="0" anchor="ctr"/>
+          <a:lstStyle/>
+          <a:p>
+            <a:pPr algn="ctr"/>
+          </a:p>
+        </p:txBody>
+      </p:sp>
+      <p:sp>
+        <p:nvSpPr>
+          <p:cNvPr id="20" name="TextBox 19"/>
+          <p:cNvSpPr txBox="1"/>
+          <p:nvPr/>
+        </p:nvSpPr>
+        <p:spPr>
+          <a:xfrm>
+            <a:off x="8540496" y="2240279"/>
+            <a:ext cx="3200400" cy="164592"/>
+          </a:xfrm>
+          <a:prstGeom prst="rect">
+            <a:avLst/>
+          </a:prstGeom>
+          <a:noFill/>
+        </p:spPr>
+        <p:txBody>
+          <a:bodyPr wrap="square">
+            <a:spAutoFit/>
+          </a:bodyPr>
+          <a:lstStyle/>
+          <a:p>
+            <a:pPr algn="l">
+              <a:spcAft>
+                <a:spcPts val="300"/>
+              </a:spcAft>
+            </a:pPr>
+            <a:r>
+              <a:rPr sz="1300" b="1">
+                <a:solidFill>
+                  <a:srgbClr val="0D3B66"/>
+                </a:solidFill>
+                <a:latin typeface="Calibri"/>
+              </a:rPr>
+              <a:t>San Ignacio 500</a:t>
+            </a:r>
+          </a:p>
+        </p:txBody>
+      </p:sp>
+      <p:sp>
+        <p:nvSpPr>
+          <p:cNvPr id="21" name="TextBox 20"/>
+          <p:cNvSpPr txBox="1"/>
+          <p:nvPr/>
+        </p:nvSpPr>
+        <p:spPr>
+          <a:xfrm>
+            <a:off x="8540496" y="2535448"/>
+            <a:ext cx="3200400" cy="237744"/>
+          </a:xfrm>
+          <a:prstGeom prst="rect">
+            <a:avLst/>
+          </a:prstGeom>
+          <a:noFill/>
+        </p:spPr>
+        <p:txBody>
+          <a:bodyPr wrap="square">
+            <a:spAutoFit/>
+          </a:bodyPr>
+          <a:lstStyle/>
+          <a:p>
+            <a:pPr algn="l">
+              <a:spcAft>
+                <a:spcPts val="300"/>
+              </a:spcAft>
+            </a:pPr>
+            <a:r>
+              <a:rPr sz="1600" b="1">
+                <a:solidFill>
+                  <a:srgbClr val="0D3B66"/>
+                </a:solidFill>
+                <a:latin typeface="Calibri"/>
+              </a:rPr>
+              <a:t>4.067 m³    79 %</a:t>
+            </a:r>
+          </a:p>
+        </p:txBody>
+      </p:sp>
+      <p:sp>
+        <p:nvSpPr>
+          <p:cNvPr id="22" name="Rounded Rectangle 21"/>
+          <p:cNvSpPr/>
+          <p:nvPr/>
+        </p:nvSpPr>
+        <p:spPr>
+          <a:xfrm>
+            <a:off x="8430768" y="3877056"/>
             <a:ext cx="3419856" cy="768096"/>
           </a:xfrm>
           <a:prstGeom prst="roundRect">
@@ -14962,132 +15698,7 @@
       </p:sp>
       <p:sp>
         <p:nvSpPr>
-          <p:cNvPr id="19" name="TextBox 18"/>
-          <p:cNvSpPr txBox="1"/>
-          <p:nvPr/>
-        </p:nvSpPr>
-        <p:spPr>
-          <a:xfrm>
-            <a:off x="8540496" y="2240279"/>
-            <a:ext cx="3200400" cy="164592"/>
-          </a:xfrm>
-          <a:prstGeom prst="rect">
-            <a:avLst/>
-          </a:prstGeom>
-          <a:noFill/>
-        </p:spPr>
-        <p:txBody>
-          <a:bodyPr wrap="square">
-            <a:spAutoFit/>
-          </a:bodyPr>
-          <a:lstStyle/>
-          <a:p>
-            <a:pPr algn="l">
-              <a:spcAft>
-                <a:spcPts val="300"/>
-              </a:spcAft>
-            </a:pPr>
-            <a:r>
-              <a:rPr sz="1300" b="1">
-                <a:solidFill>
-                  <a:srgbClr val="C45C26"/>
-                </a:solidFill>
-                <a:latin typeface="Calibri"/>
-              </a:rPr>
-              <a:t>Matriz 1° piso</a:t>
-            </a:r>
-          </a:p>
-        </p:txBody>
-      </p:sp>
-      <p:sp>
-        <p:nvSpPr>
-          <p:cNvPr id="20" name="TextBox 19"/>
-          <p:cNvSpPr txBox="1"/>
-          <p:nvPr/>
-        </p:nvSpPr>
-        <p:spPr>
-          <a:xfrm>
-            <a:off x="8540496" y="2535448"/>
-            <a:ext cx="3200400" cy="237744"/>
-          </a:xfrm>
-          <a:prstGeom prst="rect">
-            <a:avLst/>
-          </a:prstGeom>
-          <a:noFill/>
-        </p:spPr>
-        <p:txBody>
-          <a:bodyPr wrap="square">
-            <a:spAutoFit/>
-          </a:bodyPr>
-          <a:lstStyle/>
-          <a:p>
-            <a:pPr algn="l">
-              <a:spcAft>
-                <a:spcPts val="300"/>
-              </a:spcAft>
-            </a:pPr>
-            <a:r>
-              <a:rPr sz="1600" b="1">
-                <a:solidFill>
-                  <a:srgbClr val="0D3B66"/>
-                </a:solidFill>
-                <a:latin typeface="Calibri"/>
-              </a:rPr>
-              <a:t>1.724 m³    73 %</a:t>
-            </a:r>
-          </a:p>
-        </p:txBody>
-      </p:sp>
-      <p:sp>
-        <p:nvSpPr>
-          <p:cNvPr id="21" name="Rounded Rectangle 20"/>
-          <p:cNvSpPr/>
-          <p:nvPr/>
-        </p:nvSpPr>
-        <p:spPr>
-          <a:xfrm>
-            <a:off x="8430768" y="3877056"/>
-            <a:ext cx="3419856" cy="768096"/>
-          </a:xfrm>
-          <a:prstGeom prst="roundRect">
-            <a:avLst>
-              <a:gd name="adj" fmla="val 8000"/>
-            </a:avLst>
-          </a:prstGeom>
-          <a:solidFill>
-            <a:srgbClr val="F5F7FA"/>
-          </a:solidFill>
-          <a:ln w="6350">
-            <a:solidFill>
-              <a:srgbClr val="C9A227"/>
-            </a:solidFill>
-          </a:ln>
-        </p:spPr>
-        <p:style>
-          <a:lnRef idx="1">
-            <a:schemeClr val="accent1"/>
-          </a:lnRef>
-          <a:fillRef idx="3">
-            <a:schemeClr val="accent1"/>
-          </a:fillRef>
-          <a:effectRef idx="2">
-            <a:schemeClr val="accent1"/>
-          </a:effectRef>
-          <a:fontRef idx="minor">
-            <a:schemeClr val="lt1"/>
-          </a:fontRef>
-        </p:style>
-        <p:txBody>
-          <a:bodyPr rtlCol="0" anchor="ctr"/>
-          <a:lstStyle/>
-          <a:p>
-            <a:pPr algn="ctr"/>
-          </a:p>
-        </p:txBody>
-      </p:sp>
-      <p:sp>
-        <p:nvSpPr>
-          <p:cNvPr id="22" name="TextBox 21"/>
+          <p:cNvPr id="23" name="TextBox 22"/>
           <p:cNvSpPr txBox="1"/>
           <p:nvPr/>
         </p:nvSpPr>
@@ -15115,18 +15726,18 @@
             <a:r>
               <a:rPr sz="1300" b="1">
                 <a:solidFill>
-                  <a:srgbClr val="C9A227"/>
-                </a:solidFill>
-                <a:latin typeface="Calibri"/>
-              </a:rPr>
-              <a:t>Anillo Plaza</a:t>
-            </a:r>
-          </a:p>
-        </p:txBody>
-      </p:sp>
-      <p:sp>
-        <p:nvSpPr>
-          <p:cNvPr id="23" name="TextBox 22"/>
+                  <a:srgbClr val="C45C26"/>
+                </a:solidFill>
+                <a:latin typeface="Calibri"/>
+              </a:rPr>
+              <a:t>San Ignacio 300</a:t>
+            </a:r>
+          </a:p>
+        </p:txBody>
+      </p:sp>
+      <p:sp>
+        <p:nvSpPr>
+          <p:cNvPr id="24" name="TextBox 23"/>
           <p:cNvSpPr txBox="1"/>
           <p:nvPr/>
         </p:nvSpPr>
@@ -15158,14 +15769,14 @@
                 </a:solidFill>
                 <a:latin typeface="Calibri"/>
               </a:rPr>
-              <a:t>647 m³    27 %</a:t>
-            </a:r>
-          </a:p>
-        </p:txBody>
-      </p:sp>
-      <p:sp>
-        <p:nvSpPr>
-          <p:cNvPr id="24" name="Rounded Rectangle 23"/>
+              <a:t>1.049 m³    21 %</a:t>
+            </a:r>
+          </a:p>
+        </p:txBody>
+      </p:sp>
+      <p:sp>
+        <p:nvSpPr>
+          <p:cNvPr id="25" name="Rounded Rectangle 24"/>
           <p:cNvSpPr/>
           <p:nvPr/>
         </p:nvSpPr>
@@ -15212,7 +15823,7 @@
       </p:sp>
       <p:sp>
         <p:nvSpPr>
-          <p:cNvPr id="25" name="TextBox 24"/>
+          <p:cNvPr id="26" name="TextBox 25"/>
           <p:cNvSpPr txBox="1"/>
           <p:nvPr/>
         </p:nvSpPr>
@@ -15244,14 +15855,14 @@
                 </a:solidFill>
                 <a:latin typeface="Calibri"/>
               </a:rPr>
-              <a:t>Recepción 29/10/2025 / relocalizado 16/01/2026  ·  Capacitación 20/11/2025  ·  Tamara Martínez  ·  Tomás Saba  ·  Sebastián Araneda</a:t>
-            </a:r>
-          </a:p>
-        </p:txBody>
-      </p:sp>
-      <p:sp>
-        <p:nvSpPr>
-          <p:cNvPr id="26" name="TextBox 25"/>
+              <a:t>Recepción 18/11/2025  ·  Capacitación 11/12/2025  ·  Aliro Cortés  ·  Tomás Saba  ·  Sebastián Araneda</a:t>
+            </a:r>
+          </a:p>
+        </p:txBody>
+      </p:sp>
+      <p:sp>
+        <p:nvSpPr>
+          <p:cNvPr id="27" name="TextBox 26"/>
           <p:cNvSpPr txBox="1"/>
           <p:nvPr/>
         </p:nvSpPr>
@@ -15283,7 +15894,7 @@
                 </a:solidFill>
                 <a:latin typeface="Calibri"/>
               </a:rPr>
-              <a:t>Mayo 1.015   ·   Junio 2.116   ·   Julio 2.371   ·   Agosto 1–17: 1.217   ·   proy. ago 2.218 m³.</a:t>
+              <a:t>Mayo 1.565   ·   Junio 1.762   ·   Julio 5.116   ·   Agosto 1–17: 2.686   ·   proy. ago 4.899 m³.</a:t>
             </a:r>
           </a:p>
           <a:p>
@@ -15299,7 +15910,7 @@
                 </a:solidFill>
                 <a:latin typeface="Calibri"/>
               </a:rPr>
-              <a:t>Matriz 1° piso y Anillo Plaza. Relocalizado en enero 2026.</a:t>
+              <a:t>San Ignacio 500 es el mayor volumen; 300 queda en monitoreo.</a:t>
             </a:r>
           </a:p>
         </p:txBody>
@@ -15466,7 +16077,7 @@
                 </a:solidFill>
                 <a:latin typeface="Calibri"/>
               </a:rPr>
-              <a:t>CUR  ·  Equipos y consumo</a:t>
+              <a:t>AEB  ·  Equipos y consumo</a:t>
             </a:r>
           </a:p>
         </p:txBody>
@@ -15505,7 +16116,7 @@
                 </a:solidFill>
                 <a:latin typeface="Calibri"/>
               </a:rPr>
-              <a:t>Arauco Curauma   |   2 puntos WES   |   01/05/2026 – 17/08/2026</a:t>
+              <a:t>Arauco El Bosque   |   2 puntos WES   |   01/05/2026 – 17/08/2026</a:t>
             </a:r>
           </a:p>
         </p:txBody>
@@ -15531,7 +16142,7 @@
           </a:solidFill>
           <a:ln w="6350">
             <a:solidFill>
-              <a:srgbClr val="5A8C6E"/>
+              <a:srgbClr val="0D3B66"/>
             </a:solidFill>
           </a:ln>
         </p:spPr>
@@ -15591,7 +16202,7 @@
                 </a:solidFill>
                 <a:latin typeface="Calibri"/>
               </a:rPr>
-              <a:t>000025-38</a:t>
+              <a:t>000025-11</a:t>
             </a:r>
           </a:p>
         </p:txBody>
@@ -15630,7 +16241,7 @@
                 </a:solidFill>
                 <a:latin typeface="Calibri"/>
               </a:rPr>
-              <a:t>Anillo Norte</a:t>
+              <a:t>Matriz 1° piso</a:t>
             </a:r>
           </a:p>
         </p:txBody>
@@ -15656,7 +16267,7 @@
           </a:solidFill>
           <a:ln w="6350">
             <a:solidFill>
-              <a:srgbClr val="7BA3C9"/>
+              <a:srgbClr val="1F77B4"/>
             </a:solidFill>
           </a:ln>
         </p:spPr>
@@ -15716,7 +16327,7 @@
                 </a:solidFill>
                 <a:latin typeface="Calibri"/>
               </a:rPr>
-              <a:t>000025-37</a:t>
+              <a:t>000025-12</a:t>
             </a:r>
           </a:p>
         </p:txBody>
@@ -15755,7 +16366,7 @@
                 </a:solidFill>
                 <a:latin typeface="Calibri"/>
               </a:rPr>
-              <a:t>Anillo Sur</a:t>
+              <a:t>Anillo Plaza</a:t>
             </a:r>
           </a:p>
         </p:txBody>
@@ -15807,7 +16418,7 @@
       </p:sp>
       <p:pic>
         <p:nvPicPr>
-          <p:cNvPr id="14" name="Picture 13" descr="cur_mensual_may_ago.png"/>
+          <p:cNvPr id="14" name="Picture 13" descr="aeb_mensual_may_ago.png"/>
           <p:cNvPicPr>
             <a:picLocks noChangeAspect="1"/>
           </p:cNvPicPr>
@@ -15949,7 +16560,7 @@
                 </a:solidFill>
                 <a:latin typeface="Calibri"/>
               </a:rPr>
-              <a:t>El recinto sumó 618 m³</a:t>
+              <a:t>El recinto sumó 2.371 m³</a:t>
             </a:r>
           </a:p>
         </p:txBody>
@@ -15975,7 +16586,7 @@
           </a:solidFill>
           <a:ln w="6350">
             <a:solidFill>
-              <a:srgbClr val="7BA3C9"/>
+              <a:srgbClr val="0D3B66"/>
             </a:solidFill>
           </a:ln>
         </p:spPr>
@@ -16031,11 +16642,11 @@
             <a:r>
               <a:rPr sz="1300" b="1">
                 <a:solidFill>
-                  <a:srgbClr val="7BA3C9"/>
-                </a:solidFill>
-                <a:latin typeface="Calibri"/>
-              </a:rPr>
-              <a:t>Anillo Sur</a:t>
+                  <a:srgbClr val="0D3B66"/>
+                </a:solidFill>
+                <a:latin typeface="Calibri"/>
+              </a:rPr>
+              <a:t>Matriz 1° piso</a:t>
             </a:r>
           </a:p>
         </p:txBody>
@@ -16074,7 +16685,7 @@
                 </a:solidFill>
                 <a:latin typeface="Calibri"/>
               </a:rPr>
-              <a:t>332 m³    54 %</a:t>
+              <a:t>1.724 m³    73 %</a:t>
             </a:r>
           </a:p>
         </p:txBody>
@@ -16100,7 +16711,7 @@
           </a:solidFill>
           <a:ln w="6350">
             <a:solidFill>
-              <a:srgbClr val="5A8C6E"/>
+              <a:srgbClr val="1F77B4"/>
             </a:solidFill>
           </a:ln>
         </p:spPr>
@@ -16156,11 +16767,11 @@
             <a:r>
               <a:rPr sz="1300" b="1">
                 <a:solidFill>
-                  <a:srgbClr val="5A8C6E"/>
-                </a:solidFill>
-                <a:latin typeface="Calibri"/>
-              </a:rPr>
-              <a:t>Anillo Norte</a:t>
+                  <a:srgbClr val="1F77B4"/>
+                </a:solidFill>
+                <a:latin typeface="Calibri"/>
+              </a:rPr>
+              <a:t>Anillo Plaza</a:t>
             </a:r>
           </a:p>
         </p:txBody>
@@ -16199,7 +16810,7 @@
                 </a:solidFill>
                 <a:latin typeface="Calibri"/>
               </a:rPr>
-              <a:t>287 m³    46 %</a:t>
+              <a:t>647 m³    27 %</a:t>
             </a:r>
           </a:p>
         </p:txBody>
@@ -16285,7 +16896,7 @@
                 </a:solidFill>
                 <a:latin typeface="Calibri"/>
               </a:rPr>
-              <a:t>Recepción 29/04/2026 (Anillo Norte / Anillo Sur)  ·  Capacitación 12/12/2025  ·  Joceline Lazo  ·  Constanza Vilches</a:t>
+              <a:t>Recepción 29/10/2025 / relocalizado 16/01/2026  ·  Capacitación 20/11/2025  ·  Tamara Martínez  ·  Tomás Saba  ·  Sebastián Araneda</a:t>
             </a:r>
           </a:p>
         </p:txBody>
@@ -16324,7 +16935,7 @@
                 </a:solidFill>
                 <a:latin typeface="Calibri"/>
               </a:rPr>
-              <a:t>Junio 664   ·   Julio 618   ·   Agosto 1–17: 366   ·   proy. ago 667 m³.</a:t>
+              <a:t>Mayo 1.015   ·   Junio 2.116   ·   Julio 2.371   ·   Agosto 1–17: 1.217   ·   proy. ago 2.218 m³.</a:t>
             </a:r>
           </a:p>
           <a:p>
@@ -16340,7 +16951,7 @@
                 </a:solidFill>
                 <a:latin typeface="Calibri"/>
               </a:rPr>
-              <a:t>Cambio de monitoreo: se dejó Baños y Matriz Principal. Anillo Norte y Sur con lectura correcta desde el 19/05 (mayo no se grafica).</a:t>
+              <a:t>Matriz 1° piso y Anillo Plaza. Relocalizado en enero 2026.</a:t>
             </a:r>
           </a:p>
         </p:txBody>

--- a/reports/Parque_Arauco/TMP_7MALLS/entrega_diego_anibal/Recorrido_ejecutivo_PA_MAE_20260817.pptx
+++ b/reports/Parque_Arauco/TMP_7MALLS/entrega_diego_anibal/Recorrido_ejecutivo_PA_MAE_20260817.pptx
@@ -17,6 +17,7 @@
     <p:sldId id="265" r:id="rId16"/>
     <p:sldId id="266" r:id="rId17"/>
     <p:sldId id="267" r:id="rId18"/>
+    <p:sldId id="268" r:id="rId19"/>
   </p:sldIdLst>
   <p:sldSz cx="12191695" cy="6858000" type="screen4x3"/>
   <p:notesSz cx="6858000" cy="9144000"/>
@@ -3310,7 +3311,7 @@
                 </a:solidFill>
                 <a:latin typeface="Calibri"/>
               </a:rPr>
-              <a:t>Lámina 2: MAE  ·  MAM Placa  ·  MAQ Matriz  ·  PAK cadena</a:t>
+              <a:t>Lámina 2: MAE  ·  MAM Placa  ·  MAQ Matriz  ·  BOM SI500  ·  PAK cadena</a:t>
             </a:r>
           </a:p>
         </p:txBody>
@@ -3477,7 +3478,7 @@
                 </a:solidFill>
                 <a:latin typeface="Calibri"/>
               </a:rPr>
-              <a:t>CUR  ·  Equipos y consumo</a:t>
+              <a:t>AEB  ·  Equipos y consumo</a:t>
             </a:r>
           </a:p>
         </p:txBody>
@@ -3516,7 +3517,7 @@
                 </a:solidFill>
                 <a:latin typeface="Calibri"/>
               </a:rPr>
-              <a:t>Arauco Curauma   |   2 puntos WES   |   01/05/2026 – 17/08/2026</a:t>
+              <a:t>Arauco El Bosque   |   2 puntos WES   |   01/05/2026 – 17/08/2026</a:t>
             </a:r>
           </a:p>
         </p:txBody>
@@ -3542,7 +3543,7 @@
           </a:solidFill>
           <a:ln w="6350">
             <a:solidFill>
-              <a:srgbClr val="C9A227"/>
+              <a:srgbClr val="0D3B66"/>
             </a:solidFill>
           </a:ln>
         </p:spPr>
@@ -3602,7 +3603,7 @@
                 </a:solidFill>
                 <a:latin typeface="Calibri"/>
               </a:rPr>
-              <a:t>000025-38</a:t>
+              <a:t>000025-11</a:t>
             </a:r>
           </a:p>
         </p:txBody>
@@ -3641,7 +3642,7 @@
                 </a:solidFill>
                 <a:latin typeface="Calibri"/>
               </a:rPr>
-              <a:t>Anillo Norte</a:t>
+              <a:t>Matriz 1° piso</a:t>
             </a:r>
           </a:p>
         </p:txBody>
@@ -3667,7 +3668,7 @@
           </a:solidFill>
           <a:ln w="6350">
             <a:solidFill>
-              <a:srgbClr val="C45C26"/>
+              <a:srgbClr val="1F77B4"/>
             </a:solidFill>
           </a:ln>
         </p:spPr>
@@ -3727,7 +3728,7 @@
                 </a:solidFill>
                 <a:latin typeface="Calibri"/>
               </a:rPr>
-              <a:t>000025-37</a:t>
+              <a:t>000025-12</a:t>
             </a:r>
           </a:p>
         </p:txBody>
@@ -3766,7 +3767,7 @@
                 </a:solidFill>
                 <a:latin typeface="Calibri"/>
               </a:rPr>
-              <a:t>Anillo Sur</a:t>
+              <a:t>Anillo Plaza</a:t>
             </a:r>
           </a:p>
         </p:txBody>
@@ -3818,7 +3819,7 @@
       </p:sp>
       <p:pic>
         <p:nvPicPr>
-          <p:cNvPr id="14" name="Picture 13" descr="cur_mensual_may_ago.png"/>
+          <p:cNvPr id="14" name="Picture 13" descr="aeb_mensual_may_ago.png"/>
           <p:cNvPicPr>
             <a:picLocks noChangeAspect="1"/>
           </p:cNvPicPr>
@@ -3960,7 +3961,7 @@
                 </a:solidFill>
                 <a:latin typeface="Calibri"/>
               </a:rPr>
-              <a:t>El recinto sumó 618 m³</a:t>
+              <a:t>El recinto sumó 2.371 m³</a:t>
             </a:r>
           </a:p>
         </p:txBody>
@@ -3986,7 +3987,7 @@
           </a:solidFill>
           <a:ln w="6350">
             <a:solidFill>
-              <a:srgbClr val="C45C26"/>
+              <a:srgbClr val="0D3B66"/>
             </a:solidFill>
           </a:ln>
         </p:spPr>
@@ -4042,11 +4043,11 @@
             <a:r>
               <a:rPr sz="1300" b="1">
                 <a:solidFill>
-                  <a:srgbClr val="C45C26"/>
-                </a:solidFill>
-                <a:latin typeface="Calibri"/>
-              </a:rPr>
-              <a:t>Anillo Sur</a:t>
+                  <a:srgbClr val="0D3B66"/>
+                </a:solidFill>
+                <a:latin typeface="Calibri"/>
+              </a:rPr>
+              <a:t>Matriz 1° piso</a:t>
             </a:r>
           </a:p>
         </p:txBody>
@@ -4085,7 +4086,7 @@
                 </a:solidFill>
                 <a:latin typeface="Calibri"/>
               </a:rPr>
-              <a:t>332 m³    54 %</a:t>
+              <a:t>1.724 m³    73 %</a:t>
             </a:r>
           </a:p>
         </p:txBody>
@@ -4111,7 +4112,7 @@
           </a:solidFill>
           <a:ln w="6350">
             <a:solidFill>
-              <a:srgbClr val="C9A227"/>
+              <a:srgbClr val="1F77B4"/>
             </a:solidFill>
           </a:ln>
         </p:spPr>
@@ -4167,11 +4168,11 @@
             <a:r>
               <a:rPr sz="1300" b="1">
                 <a:solidFill>
-                  <a:srgbClr val="C9A227"/>
-                </a:solidFill>
-                <a:latin typeface="Calibri"/>
-              </a:rPr>
-              <a:t>Anillo Norte</a:t>
+                  <a:srgbClr val="1F77B4"/>
+                </a:solidFill>
+                <a:latin typeface="Calibri"/>
+              </a:rPr>
+              <a:t>Anillo Plaza</a:t>
             </a:r>
           </a:p>
         </p:txBody>
@@ -4210,7 +4211,7 @@
                 </a:solidFill>
                 <a:latin typeface="Calibri"/>
               </a:rPr>
-              <a:t>287 m³    46 %</a:t>
+              <a:t>647 m³    27 %</a:t>
             </a:r>
           </a:p>
         </p:txBody>
@@ -4296,7 +4297,7 @@
                 </a:solidFill>
                 <a:latin typeface="Calibri"/>
               </a:rPr>
-              <a:t>Recepción 29/04/2026 (Anillo Norte / Anillo Sur)  ·  Capacitación 12/12/2025  ·  Joceline Lazo  ·  Constanza Vilches</a:t>
+              <a:t>Recepción 29/10/2025 / relocalizado 16/01/2026  ·  Capacitación 20/11/2025  ·  Tamara Martínez  ·  Tomás Saba  ·  Sebastián Araneda</a:t>
             </a:r>
           </a:p>
         </p:txBody>
@@ -4335,7 +4336,7 @@
                 </a:solidFill>
                 <a:latin typeface="Calibri"/>
               </a:rPr>
-              <a:t>Junio 664   ·   Julio 618   ·   Agosto 1–17: 366   ·   proy. ago 667 m³.</a:t>
+              <a:t>Mayo 1.015   ·   Junio 2.116   ·   Julio 2.371   ·   Agosto 1–17: 1.217   ·   proy. ago 2.218 m³.</a:t>
             </a:r>
           </a:p>
           <a:p>
@@ -4351,7 +4352,7 @@
                 </a:solidFill>
                 <a:latin typeface="Calibri"/>
               </a:rPr>
-              <a:t>Cambio de monitoreo: se dejó Baños y Matriz Principal. Anillo Norte y Sur con lectura correcta desde el 19/05 (mayo no se grafica).</a:t>
+              <a:t>Matriz 1° piso y Anillo Plaza. Relocalizado en enero 2026.</a:t>
             </a:r>
           </a:p>
         </p:txBody>
@@ -4518,7 +4519,7 @@
                 </a:solidFill>
                 <a:latin typeface="Calibri"/>
               </a:rPr>
-              <a:t>PAK  ·  Equipos y consumo</a:t>
+              <a:t>CUR  ·  Equipos y consumo</a:t>
             </a:r>
           </a:p>
         </p:txBody>
@@ -4557,7 +4558,7 @@
                 </a:solidFill>
                 <a:latin typeface="Calibri"/>
               </a:rPr>
-              <a:t>Parque Arauco Kennedy   |   10 puntos WES   |   julio = cabecera (sin 27, 35 y 36)   |   01/05/2026 – 17/08/2026</a:t>
+              <a:t>Arauco Curauma   |   2 puntos WES   |   01/05/2026 – 17/08/2026</a:t>
             </a:r>
           </a:p>
         </p:txBody>
@@ -4571,7 +4572,7 @@
         <p:spPr>
           <a:xfrm>
             <a:off x="201168" y="1024128"/>
-            <a:ext cx="2286000" cy="621792"/>
+            <a:ext cx="5861304" cy="658368"/>
           </a:xfrm>
           <a:prstGeom prst="roundRect">
             <a:avLst>
@@ -4583,7 +4584,7 @@
           </a:solidFill>
           <a:ln w="6350">
             <a:solidFill>
-              <a:srgbClr val="7BA3C9"/>
+              <a:srgbClr val="C9A227"/>
             </a:solidFill>
           </a:ln>
         </p:spPr>
@@ -4618,32 +4619,32 @@
         <p:spPr>
           <a:xfrm>
             <a:off x="274320" y="1060704"/>
-            <a:ext cx="2157984" cy="146304"/>
-          </a:xfrm>
-          <a:prstGeom prst="rect">
-            <a:avLst/>
-          </a:prstGeom>
-          <a:noFill/>
-        </p:spPr>
-        <p:txBody>
-          <a:bodyPr wrap="square">
-            <a:spAutoFit/>
-          </a:bodyPr>
-          <a:lstStyle/>
-          <a:p>
-            <a:pPr algn="l">
-              <a:spcAft>
-                <a:spcPts val="300"/>
-              </a:spcAft>
-            </a:pPr>
-            <a:r>
-              <a:rPr sz="900" b="1">
+            <a:ext cx="5733288" cy="146304"/>
+          </a:xfrm>
+          <a:prstGeom prst="rect">
+            <a:avLst/>
+          </a:prstGeom>
+          <a:noFill/>
+        </p:spPr>
+        <p:txBody>
+          <a:bodyPr wrap="square">
+            <a:spAutoFit/>
+          </a:bodyPr>
+          <a:lstStyle/>
+          <a:p>
+            <a:pPr algn="l">
+              <a:spcAft>
+                <a:spcPts val="300"/>
+              </a:spcAft>
+            </a:pPr>
+            <a:r>
+              <a:rPr sz="1000" b="1">
                 <a:solidFill>
                   <a:srgbClr val="C9A227"/>
                 </a:solidFill>
                 <a:latin typeface="Calibri"/>
               </a:rPr>
-              <a:t>000025-20</a:t>
+              <a:t>000025-38</a:t>
             </a:r>
           </a:p>
         </p:txBody>
@@ -4656,33 +4657,33 @@
         </p:nvSpPr>
         <p:spPr>
           <a:xfrm>
-            <a:off x="274320" y="1225296"/>
-            <a:ext cx="2157984" cy="201168"/>
-          </a:xfrm>
-          <a:prstGeom prst="rect">
-            <a:avLst/>
-          </a:prstGeom>
-          <a:noFill/>
-        </p:spPr>
-        <p:txBody>
-          <a:bodyPr wrap="square">
-            <a:spAutoFit/>
-          </a:bodyPr>
-          <a:lstStyle/>
-          <a:p>
-            <a:pPr algn="l">
-              <a:spcAft>
-                <a:spcPts val="300"/>
-              </a:spcAft>
-            </a:pPr>
-            <a:r>
-              <a:rPr sz="1100" b="1">
+            <a:off x="274320" y="1243584"/>
+            <a:ext cx="5733288" cy="201168"/>
+          </a:xfrm>
+          <a:prstGeom prst="rect">
+            <a:avLst/>
+          </a:prstGeom>
+          <a:noFill/>
+        </p:spPr>
+        <p:txBody>
+          <a:bodyPr wrap="square">
+            <a:spAutoFit/>
+          </a:bodyPr>
+          <a:lstStyle/>
+          <a:p>
+            <a:pPr algn="l">
+              <a:spcAft>
+                <a:spcPts val="300"/>
+              </a:spcAft>
+            </a:pPr>
+            <a:r>
+              <a:rPr sz="1200" b="1">
                 <a:solidFill>
                   <a:srgbClr val="0D3B66"/>
                 </a:solidFill>
                 <a:latin typeface="Calibri"/>
               </a:rPr>
-              <a:t>Matriz Andén</a:t>
+              <a:t>Anillo Norte</a:t>
             </a:r>
           </a:p>
         </p:txBody>
@@ -4695,8 +4696,8 @@
         </p:nvSpPr>
         <p:spPr>
           <a:xfrm>
-            <a:off x="2578608" y="1024128"/>
-            <a:ext cx="2286000" cy="621792"/>
+            <a:off x="6135624" y="1024128"/>
+            <a:ext cx="5861304" cy="658368"/>
           </a:xfrm>
           <a:prstGeom prst="roundRect">
             <a:avLst>
@@ -4705,834 +4706,6 @@
           </a:prstGeom>
           <a:solidFill>
             <a:srgbClr val="F5F7FA"/>
-          </a:solidFill>
-          <a:ln w="6350">
-            <a:solidFill>
-              <a:srgbClr val="5A8C6E"/>
-            </a:solidFill>
-          </a:ln>
-        </p:spPr>
-        <p:style>
-          <a:lnRef idx="1">
-            <a:schemeClr val="accent1"/>
-          </a:lnRef>
-          <a:fillRef idx="3">
-            <a:schemeClr val="accent1"/>
-          </a:fillRef>
-          <a:effectRef idx="2">
-            <a:schemeClr val="accent1"/>
-          </a:effectRef>
-          <a:fontRef idx="minor">
-            <a:schemeClr val="lt1"/>
-          </a:fontRef>
-        </p:style>
-        <p:txBody>
-          <a:bodyPr rtlCol="0" anchor="ctr"/>
-          <a:lstStyle/>
-          <a:p>
-            <a:pPr algn="ctr"/>
-          </a:p>
-        </p:txBody>
-      </p:sp>
-      <p:sp>
-        <p:nvSpPr>
-          <p:cNvPr id="11" name="TextBox 10"/>
-          <p:cNvSpPr txBox="1"/>
-          <p:nvPr/>
-        </p:nvSpPr>
-        <p:spPr>
-          <a:xfrm>
-            <a:off x="2651760" y="1060704"/>
-            <a:ext cx="2157984" cy="146304"/>
-          </a:xfrm>
-          <a:prstGeom prst="rect">
-            <a:avLst/>
-          </a:prstGeom>
-          <a:noFill/>
-        </p:spPr>
-        <p:txBody>
-          <a:bodyPr wrap="square">
-            <a:spAutoFit/>
-          </a:bodyPr>
-          <a:lstStyle/>
-          <a:p>
-            <a:pPr algn="l">
-              <a:spcAft>
-                <a:spcPts val="300"/>
-              </a:spcAft>
-            </a:pPr>
-            <a:r>
-              <a:rPr sz="900" b="1">
-                <a:solidFill>
-                  <a:srgbClr val="C9A227"/>
-                </a:solidFill>
-                <a:latin typeface="Calibri"/>
-              </a:rPr>
-              <a:t>000025-21</a:t>
-            </a:r>
-          </a:p>
-        </p:txBody>
-      </p:sp>
-      <p:sp>
-        <p:nvSpPr>
-          <p:cNvPr id="12" name="TextBox 11"/>
-          <p:cNvSpPr txBox="1"/>
-          <p:nvPr/>
-        </p:nvSpPr>
-        <p:spPr>
-          <a:xfrm>
-            <a:off x="2651760" y="1225296"/>
-            <a:ext cx="2157984" cy="201168"/>
-          </a:xfrm>
-          <a:prstGeom prst="rect">
-            <a:avLst/>
-          </a:prstGeom>
-          <a:noFill/>
-        </p:spPr>
-        <p:txBody>
-          <a:bodyPr wrap="square">
-            <a:spAutoFit/>
-          </a:bodyPr>
-          <a:lstStyle/>
-          <a:p>
-            <a:pPr algn="l">
-              <a:spcAft>
-                <a:spcPts val="300"/>
-              </a:spcAft>
-            </a:pPr>
-            <a:r>
-              <a:rPr sz="1100" b="1">
-                <a:solidFill>
-                  <a:srgbClr val="0D3B66"/>
-                </a:solidFill>
-                <a:latin typeface="Calibri"/>
-              </a:rPr>
-              <a:t>Locales Gast.</a:t>
-            </a:r>
-          </a:p>
-        </p:txBody>
-      </p:sp>
-      <p:sp>
-        <p:nvSpPr>
-          <p:cNvPr id="13" name="Rounded Rectangle 12"/>
-          <p:cNvSpPr/>
-          <p:nvPr/>
-        </p:nvSpPr>
-        <p:spPr>
-          <a:xfrm>
-            <a:off x="4956048" y="1024128"/>
-            <a:ext cx="2286000" cy="621792"/>
-          </a:xfrm>
-          <a:prstGeom prst="roundRect">
-            <a:avLst>
-              <a:gd name="adj" fmla="val 8000"/>
-            </a:avLst>
-          </a:prstGeom>
-          <a:solidFill>
-            <a:srgbClr val="F5F7FA"/>
-          </a:solidFill>
-          <a:ln w="6350">
-            <a:solidFill>
-              <a:srgbClr val="8C5A5A"/>
-            </a:solidFill>
-          </a:ln>
-        </p:spPr>
-        <p:style>
-          <a:lnRef idx="1">
-            <a:schemeClr val="accent1"/>
-          </a:lnRef>
-          <a:fillRef idx="3">
-            <a:schemeClr val="accent1"/>
-          </a:fillRef>
-          <a:effectRef idx="2">
-            <a:schemeClr val="accent1"/>
-          </a:effectRef>
-          <a:fontRef idx="minor">
-            <a:schemeClr val="lt1"/>
-          </a:fontRef>
-        </p:style>
-        <p:txBody>
-          <a:bodyPr rtlCol="0" anchor="ctr"/>
-          <a:lstStyle/>
-          <a:p>
-            <a:pPr algn="ctr"/>
-          </a:p>
-        </p:txBody>
-      </p:sp>
-      <p:sp>
-        <p:nvSpPr>
-          <p:cNvPr id="14" name="TextBox 13"/>
-          <p:cNvSpPr txBox="1"/>
-          <p:nvPr/>
-        </p:nvSpPr>
-        <p:spPr>
-          <a:xfrm>
-            <a:off x="5029200" y="1060704"/>
-            <a:ext cx="2157984" cy="146304"/>
-          </a:xfrm>
-          <a:prstGeom prst="rect">
-            <a:avLst/>
-          </a:prstGeom>
-          <a:noFill/>
-        </p:spPr>
-        <p:txBody>
-          <a:bodyPr wrap="square">
-            <a:spAutoFit/>
-          </a:bodyPr>
-          <a:lstStyle/>
-          <a:p>
-            <a:pPr algn="l">
-              <a:spcAft>
-                <a:spcPts val="300"/>
-              </a:spcAft>
-            </a:pPr>
-            <a:r>
-              <a:rPr sz="900" b="1">
-                <a:solidFill>
-                  <a:srgbClr val="C9A227"/>
-                </a:solidFill>
-                <a:latin typeface="Calibri"/>
-              </a:rPr>
-              <a:t>000025-22</a:t>
-            </a:r>
-          </a:p>
-        </p:txBody>
-      </p:sp>
-      <p:sp>
-        <p:nvSpPr>
-          <p:cNvPr id="15" name="TextBox 14"/>
-          <p:cNvSpPr txBox="1"/>
-          <p:nvPr/>
-        </p:nvSpPr>
-        <p:spPr>
-          <a:xfrm>
-            <a:off x="5029200" y="1225296"/>
-            <a:ext cx="2157984" cy="201168"/>
-          </a:xfrm>
-          <a:prstGeom prst="rect">
-            <a:avLst/>
-          </a:prstGeom>
-          <a:noFill/>
-        </p:spPr>
-        <p:txBody>
-          <a:bodyPr wrap="square">
-            <a:spAutoFit/>
-          </a:bodyPr>
-          <a:lstStyle/>
-          <a:p>
-            <a:pPr algn="l">
-              <a:spcAft>
-                <a:spcPts val="300"/>
-              </a:spcAft>
-            </a:pPr>
-            <a:r>
-              <a:rPr sz="1100" b="1">
-                <a:solidFill>
-                  <a:srgbClr val="0D3B66"/>
-                </a:solidFill>
-                <a:latin typeface="Calibri"/>
-              </a:rPr>
-              <a:t>Sandía Antigua</a:t>
-            </a:r>
-          </a:p>
-        </p:txBody>
-      </p:sp>
-      <p:sp>
-        <p:nvSpPr>
-          <p:cNvPr id="16" name="TextBox 15"/>
-          <p:cNvSpPr txBox="1"/>
-          <p:nvPr/>
-        </p:nvSpPr>
-        <p:spPr>
-          <a:xfrm>
-            <a:off x="5029200" y="1444752"/>
-            <a:ext cx="2157984" cy="164592"/>
-          </a:xfrm>
-          <a:prstGeom prst="rect">
-            <a:avLst/>
-          </a:prstGeom>
-          <a:noFill/>
-        </p:spPr>
-        <p:txBody>
-          <a:bodyPr wrap="square">
-            <a:spAutoFit/>
-          </a:bodyPr>
-          <a:lstStyle/>
-          <a:p>
-            <a:pPr algn="l">
-              <a:spcAft>
-                <a:spcPts val="300"/>
-              </a:spcAft>
-            </a:pPr>
-            <a:r>
-              <a:rPr sz="800" b="0">
-                <a:solidFill>
-                  <a:srgbClr val="5A5A5A"/>
-                </a:solidFill>
-                <a:latin typeface="Calibri"/>
-              </a:rPr>
-              <a:t>alimenta 27</a:t>
-            </a:r>
-          </a:p>
-        </p:txBody>
-      </p:sp>
-      <p:sp>
-        <p:nvSpPr>
-          <p:cNvPr id="17" name="Rounded Rectangle 16"/>
-          <p:cNvSpPr/>
-          <p:nvPr/>
-        </p:nvSpPr>
-        <p:spPr>
-          <a:xfrm>
-            <a:off x="7333488" y="1024128"/>
-            <a:ext cx="2286000" cy="621792"/>
-          </a:xfrm>
-          <a:prstGeom prst="roundRect">
-            <a:avLst>
-              <a:gd name="adj" fmla="val 8000"/>
-            </a:avLst>
-          </a:prstGeom>
-          <a:solidFill>
-            <a:srgbClr val="F5F7FA"/>
-          </a:solidFill>
-          <a:ln w="6350">
-            <a:solidFill>
-              <a:srgbClr val="508282"/>
-            </a:solidFill>
-          </a:ln>
-        </p:spPr>
-        <p:style>
-          <a:lnRef idx="1">
-            <a:schemeClr val="accent1"/>
-          </a:lnRef>
-          <a:fillRef idx="3">
-            <a:schemeClr val="accent1"/>
-          </a:fillRef>
-          <a:effectRef idx="2">
-            <a:schemeClr val="accent1"/>
-          </a:effectRef>
-          <a:fontRef idx="minor">
-            <a:schemeClr val="lt1"/>
-          </a:fontRef>
-        </p:style>
-        <p:txBody>
-          <a:bodyPr rtlCol="0" anchor="ctr"/>
-          <a:lstStyle/>
-          <a:p>
-            <a:pPr algn="ctr"/>
-          </a:p>
-        </p:txBody>
-      </p:sp>
-      <p:sp>
-        <p:nvSpPr>
-          <p:cNvPr id="18" name="TextBox 17"/>
-          <p:cNvSpPr txBox="1"/>
-          <p:nvPr/>
-        </p:nvSpPr>
-        <p:spPr>
-          <a:xfrm>
-            <a:off x="7406640" y="1060704"/>
-            <a:ext cx="2157984" cy="146304"/>
-          </a:xfrm>
-          <a:prstGeom prst="rect">
-            <a:avLst/>
-          </a:prstGeom>
-          <a:noFill/>
-        </p:spPr>
-        <p:txBody>
-          <a:bodyPr wrap="square">
-            <a:spAutoFit/>
-          </a:bodyPr>
-          <a:lstStyle/>
-          <a:p>
-            <a:pPr algn="l">
-              <a:spcAft>
-                <a:spcPts val="300"/>
-              </a:spcAft>
-            </a:pPr>
-            <a:r>
-              <a:rPr sz="900" b="1">
-                <a:solidFill>
-                  <a:srgbClr val="C9A227"/>
-                </a:solidFill>
-                <a:latin typeface="Calibri"/>
-              </a:rPr>
-              <a:t>000025-28</a:t>
-            </a:r>
-          </a:p>
-        </p:txBody>
-      </p:sp>
-      <p:sp>
-        <p:nvSpPr>
-          <p:cNvPr id="19" name="TextBox 18"/>
-          <p:cNvSpPr txBox="1"/>
-          <p:nvPr/>
-        </p:nvSpPr>
-        <p:spPr>
-          <a:xfrm>
-            <a:off x="7406640" y="1225296"/>
-            <a:ext cx="2157984" cy="201168"/>
-          </a:xfrm>
-          <a:prstGeom prst="rect">
-            <a:avLst/>
-          </a:prstGeom>
-          <a:noFill/>
-        </p:spPr>
-        <p:txBody>
-          <a:bodyPr wrap="square">
-            <a:spAutoFit/>
-          </a:bodyPr>
-          <a:lstStyle/>
-          <a:p>
-            <a:pPr algn="l">
-              <a:spcAft>
-                <a:spcPts val="300"/>
-              </a:spcAft>
-            </a:pPr>
-            <a:r>
-              <a:rPr sz="1100" b="1">
-                <a:solidFill>
-                  <a:srgbClr val="0D3B66"/>
-                </a:solidFill>
-                <a:latin typeface="Calibri"/>
-              </a:rPr>
-              <a:t>Sandía Nueva</a:t>
-            </a:r>
-          </a:p>
-        </p:txBody>
-      </p:sp>
-      <p:sp>
-        <p:nvSpPr>
-          <p:cNvPr id="20" name="TextBox 19"/>
-          <p:cNvSpPr txBox="1"/>
-          <p:nvPr/>
-        </p:nvSpPr>
-        <p:spPr>
-          <a:xfrm>
-            <a:off x="7406640" y="1444752"/>
-            <a:ext cx="2157984" cy="164592"/>
-          </a:xfrm>
-          <a:prstGeom prst="rect">
-            <a:avLst/>
-          </a:prstGeom>
-          <a:noFill/>
-        </p:spPr>
-        <p:txBody>
-          <a:bodyPr wrap="square">
-            <a:spAutoFit/>
-          </a:bodyPr>
-          <a:lstStyle/>
-          <a:p>
-            <a:pPr algn="l">
-              <a:spcAft>
-                <a:spcPts val="300"/>
-              </a:spcAft>
-            </a:pPr>
-            <a:r>
-              <a:rPr sz="800" b="0">
-                <a:solidFill>
-                  <a:srgbClr val="5A5A5A"/>
-                </a:solidFill>
-                <a:latin typeface="Calibri"/>
-              </a:rPr>
-              <a:t>alimenta 27</a:t>
-            </a:r>
-          </a:p>
-        </p:txBody>
-      </p:sp>
-      <p:sp>
-        <p:nvSpPr>
-          <p:cNvPr id="21" name="Rounded Rectangle 20"/>
-          <p:cNvSpPr/>
-          <p:nvPr/>
-        </p:nvSpPr>
-        <p:spPr>
-          <a:xfrm>
-            <a:off x="9710928" y="1024128"/>
-            <a:ext cx="2286000" cy="621792"/>
-          </a:xfrm>
-          <a:prstGeom prst="roundRect">
-            <a:avLst>
-              <a:gd name="adj" fmla="val 8000"/>
-            </a:avLst>
-          </a:prstGeom>
-          <a:solidFill>
-            <a:srgbClr val="F5F7FA"/>
-          </a:solidFill>
-          <a:ln w="6350">
-            <a:solidFill>
-              <a:srgbClr val="0D3B66"/>
-            </a:solidFill>
-          </a:ln>
-        </p:spPr>
-        <p:style>
-          <a:lnRef idx="1">
-            <a:schemeClr val="accent1"/>
-          </a:lnRef>
-          <a:fillRef idx="3">
-            <a:schemeClr val="accent1"/>
-          </a:fillRef>
-          <a:effectRef idx="2">
-            <a:schemeClr val="accent1"/>
-          </a:effectRef>
-          <a:fontRef idx="minor">
-            <a:schemeClr val="lt1"/>
-          </a:fontRef>
-        </p:style>
-        <p:txBody>
-          <a:bodyPr rtlCol="0" anchor="ctr"/>
-          <a:lstStyle/>
-          <a:p>
-            <a:pPr algn="ctr"/>
-          </a:p>
-        </p:txBody>
-      </p:sp>
-      <p:sp>
-        <p:nvSpPr>
-          <p:cNvPr id="22" name="TextBox 21"/>
-          <p:cNvSpPr txBox="1"/>
-          <p:nvPr/>
-        </p:nvSpPr>
-        <p:spPr>
-          <a:xfrm>
-            <a:off x="9784080" y="1060704"/>
-            <a:ext cx="2157984" cy="146304"/>
-          </a:xfrm>
-          <a:prstGeom prst="rect">
-            <a:avLst/>
-          </a:prstGeom>
-          <a:noFill/>
-        </p:spPr>
-        <p:txBody>
-          <a:bodyPr wrap="square">
-            <a:spAutoFit/>
-          </a:bodyPr>
-          <a:lstStyle/>
-          <a:p>
-            <a:pPr algn="l">
-              <a:spcAft>
-                <a:spcPts val="300"/>
-              </a:spcAft>
-            </a:pPr>
-            <a:r>
-              <a:rPr sz="900" b="1">
-                <a:solidFill>
-                  <a:srgbClr val="C9A227"/>
-                </a:solidFill>
-                <a:latin typeface="Calibri"/>
-              </a:rPr>
-              <a:t>000025-29</a:t>
-            </a:r>
-          </a:p>
-        </p:txBody>
-      </p:sp>
-      <p:sp>
-        <p:nvSpPr>
-          <p:cNvPr id="23" name="TextBox 22"/>
-          <p:cNvSpPr txBox="1"/>
-          <p:nvPr/>
-        </p:nvSpPr>
-        <p:spPr>
-          <a:xfrm>
-            <a:off x="9784080" y="1225296"/>
-            <a:ext cx="2157984" cy="201168"/>
-          </a:xfrm>
-          <a:prstGeom prst="rect">
-            <a:avLst/>
-          </a:prstGeom>
-          <a:noFill/>
-        </p:spPr>
-        <p:txBody>
-          <a:bodyPr wrap="square">
-            <a:spAutoFit/>
-          </a:bodyPr>
-          <a:lstStyle/>
-          <a:p>
-            <a:pPr algn="l">
-              <a:spcAft>
-                <a:spcPts val="300"/>
-              </a:spcAft>
-            </a:pPr>
-            <a:r>
-              <a:rPr sz="1100" b="1">
-                <a:solidFill>
-                  <a:srgbClr val="0D3B66"/>
-                </a:solidFill>
-                <a:latin typeface="Calibri"/>
-              </a:rPr>
-              <a:t>Restaurante</a:t>
-            </a:r>
-          </a:p>
-        </p:txBody>
-      </p:sp>
-      <p:sp>
-        <p:nvSpPr>
-          <p:cNvPr id="24" name="Rounded Rectangle 23"/>
-          <p:cNvSpPr/>
-          <p:nvPr/>
-        </p:nvSpPr>
-        <p:spPr>
-          <a:xfrm>
-            <a:off x="201168" y="1719072"/>
-            <a:ext cx="2286000" cy="621792"/>
-          </a:xfrm>
-          <a:prstGeom prst="roundRect">
-            <a:avLst>
-              <a:gd name="adj" fmla="val 8000"/>
-            </a:avLst>
-          </a:prstGeom>
-          <a:solidFill>
-            <a:srgbClr val="F5F7FA"/>
-          </a:solidFill>
-          <a:ln w="6350">
-            <a:solidFill>
-              <a:srgbClr val="46648C"/>
-            </a:solidFill>
-          </a:ln>
-        </p:spPr>
-        <p:style>
-          <a:lnRef idx="1">
-            <a:schemeClr val="accent1"/>
-          </a:lnRef>
-          <a:fillRef idx="3">
-            <a:schemeClr val="accent1"/>
-          </a:fillRef>
-          <a:effectRef idx="2">
-            <a:schemeClr val="accent1"/>
-          </a:effectRef>
-          <a:fontRef idx="minor">
-            <a:schemeClr val="lt1"/>
-          </a:fontRef>
-        </p:style>
-        <p:txBody>
-          <a:bodyPr rtlCol="0" anchor="ctr"/>
-          <a:lstStyle/>
-          <a:p>
-            <a:pPr algn="ctr"/>
-          </a:p>
-        </p:txBody>
-      </p:sp>
-      <p:sp>
-        <p:nvSpPr>
-          <p:cNvPr id="25" name="TextBox 24"/>
-          <p:cNvSpPr txBox="1"/>
-          <p:nvPr/>
-        </p:nvSpPr>
-        <p:spPr>
-          <a:xfrm>
-            <a:off x="274320" y="1755648"/>
-            <a:ext cx="2157984" cy="146304"/>
-          </a:xfrm>
-          <a:prstGeom prst="rect">
-            <a:avLst/>
-          </a:prstGeom>
-          <a:noFill/>
-        </p:spPr>
-        <p:txBody>
-          <a:bodyPr wrap="square">
-            <a:spAutoFit/>
-          </a:bodyPr>
-          <a:lstStyle/>
-          <a:p>
-            <a:pPr algn="l">
-              <a:spcAft>
-                <a:spcPts val="300"/>
-              </a:spcAft>
-            </a:pPr>
-            <a:r>
-              <a:rPr sz="900" b="1">
-                <a:solidFill>
-                  <a:srgbClr val="C9A227"/>
-                </a:solidFill>
-                <a:latin typeface="Calibri"/>
-              </a:rPr>
-              <a:t>000025-23</a:t>
-            </a:r>
-          </a:p>
-        </p:txBody>
-      </p:sp>
-      <p:sp>
-        <p:nvSpPr>
-          <p:cNvPr id="26" name="TextBox 25"/>
-          <p:cNvSpPr txBox="1"/>
-          <p:nvPr/>
-        </p:nvSpPr>
-        <p:spPr>
-          <a:xfrm>
-            <a:off x="274320" y="1920240"/>
-            <a:ext cx="2157984" cy="201168"/>
-          </a:xfrm>
-          <a:prstGeom prst="rect">
-            <a:avLst/>
-          </a:prstGeom>
-          <a:noFill/>
-        </p:spPr>
-        <p:txBody>
-          <a:bodyPr wrap="square">
-            <a:spAutoFit/>
-          </a:bodyPr>
-          <a:lstStyle/>
-          <a:p>
-            <a:pPr algn="l">
-              <a:spcAft>
-                <a:spcPts val="300"/>
-              </a:spcAft>
-            </a:pPr>
-            <a:r>
-              <a:rPr sz="1100" b="1">
-                <a:solidFill>
-                  <a:srgbClr val="0D3B66"/>
-                </a:solidFill>
-                <a:latin typeface="Calibri"/>
-              </a:rPr>
-              <a:t>Pileta</a:t>
-            </a:r>
-          </a:p>
-        </p:txBody>
-      </p:sp>
-      <p:sp>
-        <p:nvSpPr>
-          <p:cNvPr id="27" name="Rounded Rectangle 26"/>
-          <p:cNvSpPr/>
-          <p:nvPr/>
-        </p:nvSpPr>
-        <p:spPr>
-          <a:xfrm>
-            <a:off x="2578608" y="1719072"/>
-            <a:ext cx="2286000" cy="621792"/>
-          </a:xfrm>
-          <a:prstGeom prst="roundRect">
-            <a:avLst>
-              <a:gd name="adj" fmla="val 8000"/>
-            </a:avLst>
-          </a:prstGeom>
-          <a:solidFill>
-            <a:srgbClr val="F5F7FA"/>
-          </a:solidFill>
-          <a:ln w="6350">
-            <a:solidFill>
-              <a:srgbClr val="A0783C"/>
-            </a:solidFill>
-          </a:ln>
-        </p:spPr>
-        <p:style>
-          <a:lnRef idx="1">
-            <a:schemeClr val="accent1"/>
-          </a:lnRef>
-          <a:fillRef idx="3">
-            <a:schemeClr val="accent1"/>
-          </a:fillRef>
-          <a:effectRef idx="2">
-            <a:schemeClr val="accent1"/>
-          </a:effectRef>
-          <a:fontRef idx="minor">
-            <a:schemeClr val="lt1"/>
-          </a:fontRef>
-        </p:style>
-        <p:txBody>
-          <a:bodyPr rtlCol="0" anchor="ctr"/>
-          <a:lstStyle/>
-          <a:p>
-            <a:pPr algn="ctr"/>
-          </a:p>
-        </p:txBody>
-      </p:sp>
-      <p:sp>
-        <p:nvSpPr>
-          <p:cNvPr id="28" name="TextBox 27"/>
-          <p:cNvSpPr txBox="1"/>
-          <p:nvPr/>
-        </p:nvSpPr>
-        <p:spPr>
-          <a:xfrm>
-            <a:off x="2651760" y="1755648"/>
-            <a:ext cx="2157984" cy="146304"/>
-          </a:xfrm>
-          <a:prstGeom prst="rect">
-            <a:avLst/>
-          </a:prstGeom>
-          <a:noFill/>
-        </p:spPr>
-        <p:txBody>
-          <a:bodyPr wrap="square">
-            <a:spAutoFit/>
-          </a:bodyPr>
-          <a:lstStyle/>
-          <a:p>
-            <a:pPr algn="l">
-              <a:spcAft>
-                <a:spcPts val="300"/>
-              </a:spcAft>
-            </a:pPr>
-            <a:r>
-              <a:rPr sz="900" b="1">
-                <a:solidFill>
-                  <a:srgbClr val="C9A227"/>
-                </a:solidFill>
-                <a:latin typeface="Calibri"/>
-              </a:rPr>
-              <a:t>000025-24</a:t>
-            </a:r>
-          </a:p>
-        </p:txBody>
-      </p:sp>
-      <p:sp>
-        <p:nvSpPr>
-          <p:cNvPr id="29" name="TextBox 28"/>
-          <p:cNvSpPr txBox="1"/>
-          <p:nvPr/>
-        </p:nvSpPr>
-        <p:spPr>
-          <a:xfrm>
-            <a:off x="2651760" y="1920240"/>
-            <a:ext cx="2157984" cy="201168"/>
-          </a:xfrm>
-          <a:prstGeom prst="rect">
-            <a:avLst/>
-          </a:prstGeom>
-          <a:noFill/>
-        </p:spPr>
-        <p:txBody>
-          <a:bodyPr wrap="square">
-            <a:spAutoFit/>
-          </a:bodyPr>
-          <a:lstStyle/>
-          <a:p>
-            <a:pPr algn="l">
-              <a:spcAft>
-                <a:spcPts val="300"/>
-              </a:spcAft>
-            </a:pPr>
-            <a:r>
-              <a:rPr sz="1100" b="1">
-                <a:solidFill>
-                  <a:srgbClr val="0D3B66"/>
-                </a:solidFill>
-                <a:latin typeface="Calibri"/>
-              </a:rPr>
-              <a:t>Cascada</a:t>
-            </a:r>
-          </a:p>
-        </p:txBody>
-      </p:sp>
-      <p:sp>
-        <p:nvSpPr>
-          <p:cNvPr id="30" name="Rounded Rectangle 29"/>
-          <p:cNvSpPr/>
-          <p:nvPr/>
-        </p:nvSpPr>
-        <p:spPr>
-          <a:xfrm>
-            <a:off x="4956048" y="1719072"/>
-            <a:ext cx="2286000" cy="621792"/>
-          </a:xfrm>
-          <a:prstGeom prst="roundRect">
-            <a:avLst>
-              <a:gd name="adj" fmla="val 8000"/>
-            </a:avLst>
-          </a:prstGeom>
-          <a:solidFill>
-            <a:srgbClr val="FFF9EB"/>
           </a:solidFill>
           <a:ln w="6350">
             <a:solidFill>
@@ -5564,53 +4737,208 @@
       </p:sp>
       <p:sp>
         <p:nvSpPr>
-          <p:cNvPr id="31" name="TextBox 30"/>
-          <p:cNvSpPr txBox="1"/>
-          <p:nvPr/>
-        </p:nvSpPr>
-        <p:spPr>
-          <a:xfrm>
-            <a:off x="5029200" y="1755648"/>
-            <a:ext cx="2157984" cy="146304"/>
-          </a:xfrm>
-          <a:prstGeom prst="rect">
-            <a:avLst/>
-          </a:prstGeom>
-          <a:noFill/>
-        </p:spPr>
-        <p:txBody>
-          <a:bodyPr wrap="square">
-            <a:spAutoFit/>
-          </a:bodyPr>
-          <a:lstStyle/>
-          <a:p>
-            <a:pPr algn="l">
-              <a:spcAft>
-                <a:spcPts val="300"/>
-              </a:spcAft>
-            </a:pPr>
-            <a:r>
-              <a:rPr sz="900" b="1">
+          <p:cNvPr id="11" name="TextBox 10"/>
+          <p:cNvSpPr txBox="1"/>
+          <p:nvPr/>
+        </p:nvSpPr>
+        <p:spPr>
+          <a:xfrm>
+            <a:off x="6208776" y="1060704"/>
+            <a:ext cx="5733288" cy="146304"/>
+          </a:xfrm>
+          <a:prstGeom prst="rect">
+            <a:avLst/>
+          </a:prstGeom>
+          <a:noFill/>
+        </p:spPr>
+        <p:txBody>
+          <a:bodyPr wrap="square">
+            <a:spAutoFit/>
+          </a:bodyPr>
+          <a:lstStyle/>
+          <a:p>
+            <a:pPr algn="l">
+              <a:spcAft>
+                <a:spcPts val="300"/>
+              </a:spcAft>
+            </a:pPr>
+            <a:r>
+              <a:rPr sz="1000" b="1">
                 <a:solidFill>
                   <a:srgbClr val="C9A227"/>
                 </a:solidFill>
                 <a:latin typeface="Calibri"/>
               </a:rPr>
-              <a:t>000025-27</a:t>
-            </a:r>
-          </a:p>
-        </p:txBody>
-      </p:sp>
-      <p:sp>
-        <p:nvSpPr>
-          <p:cNvPr id="32" name="TextBox 31"/>
-          <p:cNvSpPr txBox="1"/>
-          <p:nvPr/>
-        </p:nvSpPr>
-        <p:spPr>
-          <a:xfrm>
-            <a:off x="5029200" y="1920240"/>
-            <a:ext cx="2157984" cy="201168"/>
+              <a:t>000025-37</a:t>
+            </a:r>
+          </a:p>
+        </p:txBody>
+      </p:sp>
+      <p:sp>
+        <p:nvSpPr>
+          <p:cNvPr id="12" name="TextBox 11"/>
+          <p:cNvSpPr txBox="1"/>
+          <p:nvPr/>
+        </p:nvSpPr>
+        <p:spPr>
+          <a:xfrm>
+            <a:off x="6208776" y="1243584"/>
+            <a:ext cx="5733288" cy="201168"/>
+          </a:xfrm>
+          <a:prstGeom prst="rect">
+            <a:avLst/>
+          </a:prstGeom>
+          <a:noFill/>
+        </p:spPr>
+        <p:txBody>
+          <a:bodyPr wrap="square">
+            <a:spAutoFit/>
+          </a:bodyPr>
+          <a:lstStyle/>
+          <a:p>
+            <a:pPr algn="l">
+              <a:spcAft>
+                <a:spcPts val="300"/>
+              </a:spcAft>
+            </a:pPr>
+            <a:r>
+              <a:rPr sz="1200" b="1">
+                <a:solidFill>
+                  <a:srgbClr val="0D3B66"/>
+                </a:solidFill>
+                <a:latin typeface="Calibri"/>
+              </a:rPr>
+              <a:t>Anillo Sur</a:t>
+            </a:r>
+          </a:p>
+        </p:txBody>
+      </p:sp>
+      <p:sp>
+        <p:nvSpPr>
+          <p:cNvPr id="13" name="Rounded Rectangle 12"/>
+          <p:cNvSpPr/>
+          <p:nvPr/>
+        </p:nvSpPr>
+        <p:spPr>
+          <a:xfrm>
+            <a:off x="201168" y="1792224"/>
+            <a:ext cx="7973568" cy="3822191"/>
+          </a:xfrm>
+          <a:prstGeom prst="roundRect">
+            <a:avLst>
+              <a:gd name="adj" fmla="val 8000"/>
+            </a:avLst>
+          </a:prstGeom>
+          <a:solidFill>
+            <a:srgbClr val="F5F7FA"/>
+          </a:solidFill>
+          <a:ln>
+            <a:noFill/>
+          </a:ln>
+        </p:spPr>
+        <p:style>
+          <a:lnRef idx="1">
+            <a:schemeClr val="accent1"/>
+          </a:lnRef>
+          <a:fillRef idx="3">
+            <a:schemeClr val="accent1"/>
+          </a:fillRef>
+          <a:effectRef idx="2">
+            <a:schemeClr val="accent1"/>
+          </a:effectRef>
+          <a:fontRef idx="minor">
+            <a:schemeClr val="lt1"/>
+          </a:fontRef>
+        </p:style>
+        <p:txBody>
+          <a:bodyPr rtlCol="0" anchor="ctr"/>
+          <a:lstStyle/>
+          <a:p>
+            <a:pPr algn="ctr"/>
+          </a:p>
+        </p:txBody>
+      </p:sp>
+      <p:pic>
+        <p:nvPicPr>
+          <p:cNvPr id="14" name="Picture 13" descr="cur_mensual_may_ago.png"/>
+          <p:cNvPicPr>
+            <a:picLocks noChangeAspect="1"/>
+          </p:cNvPicPr>
+          <p:nvPr/>
+        </p:nvPicPr>
+        <p:blipFill>
+          <a:blip r:embed="rId3"/>
+          <a:stretch>
+            <a:fillRect/>
+          </a:stretch>
+        </p:blipFill>
+        <p:spPr>
+          <a:xfrm>
+            <a:off x="274320" y="2031551"/>
+            <a:ext cx="7827264" cy="3343536"/>
+          </a:xfrm>
+          <a:prstGeom prst="rect">
+            <a:avLst/>
+          </a:prstGeom>
+        </p:spPr>
+      </p:pic>
+      <p:sp>
+        <p:nvSpPr>
+          <p:cNvPr id="15" name="Rounded Rectangle 14"/>
+          <p:cNvSpPr/>
+          <p:nvPr/>
+        </p:nvSpPr>
+        <p:spPr>
+          <a:xfrm>
+            <a:off x="8302752" y="1792224"/>
+            <a:ext cx="3675887" cy="3822191"/>
+          </a:xfrm>
+          <a:prstGeom prst="roundRect">
+            <a:avLst>
+              <a:gd name="adj" fmla="val 8000"/>
+            </a:avLst>
+          </a:prstGeom>
+          <a:solidFill>
+            <a:srgbClr val="FFFFFF"/>
+          </a:solidFill>
+          <a:ln w="6350">
+            <a:solidFill>
+              <a:srgbClr val="1F77B4"/>
+            </a:solidFill>
+          </a:ln>
+        </p:spPr>
+        <p:style>
+          <a:lnRef idx="1">
+            <a:schemeClr val="accent1"/>
+          </a:lnRef>
+          <a:fillRef idx="3">
+            <a:schemeClr val="accent1"/>
+          </a:fillRef>
+          <a:effectRef idx="2">
+            <a:schemeClr val="accent1"/>
+          </a:effectRef>
+          <a:fontRef idx="minor">
+            <a:schemeClr val="lt1"/>
+          </a:fontRef>
+        </p:style>
+        <p:txBody>
+          <a:bodyPr rtlCol="0" anchor="ctr"/>
+          <a:lstStyle/>
+          <a:p>
+            <a:pPr algn="ctr"/>
+          </a:p>
+        </p:txBody>
+      </p:sp>
+      <p:sp>
+        <p:nvSpPr>
+          <p:cNvPr id="16" name="TextBox 15"/>
+          <p:cNvSpPr txBox="1"/>
+          <p:nvPr/>
+        </p:nvSpPr>
+        <p:spPr>
+          <a:xfrm>
+            <a:off x="8430768" y="1837943"/>
+            <a:ext cx="3419856" cy="164592"/>
           </a:xfrm>
           <a:prstGeom prst="rect">
             <a:avLst/>
@@ -5631,64 +4959,314 @@
             <a:r>
               <a:rPr sz="1100" b="1">
                 <a:solidFill>
+                  <a:srgbClr val="1F77B4"/>
+                </a:solidFill>
+                <a:latin typeface="Calibri"/>
+              </a:rPr>
+              <a:t>JULIO · último mes cerrado</a:t>
+            </a:r>
+          </a:p>
+        </p:txBody>
+      </p:sp>
+      <p:sp>
+        <p:nvSpPr>
+          <p:cNvPr id="17" name="TextBox 16"/>
+          <p:cNvSpPr txBox="1"/>
+          <p:nvPr/>
+        </p:nvSpPr>
+        <p:spPr>
+          <a:xfrm>
+            <a:off x="8430768" y="2002536"/>
+            <a:ext cx="3419856" cy="201168"/>
+          </a:xfrm>
+          <a:prstGeom prst="rect">
+            <a:avLst/>
+          </a:prstGeom>
+          <a:noFill/>
+        </p:spPr>
+        <p:txBody>
+          <a:bodyPr wrap="square">
+            <a:spAutoFit/>
+          </a:bodyPr>
+          <a:lstStyle/>
+          <a:p>
+            <a:pPr algn="l">
+              <a:spcAft>
+                <a:spcPts val="300"/>
+              </a:spcAft>
+            </a:pPr>
+            <a:r>
+              <a:rPr sz="1200" b="0">
+                <a:solidFill>
+                  <a:srgbClr val="5A5A5A"/>
+                </a:solidFill>
+                <a:latin typeface="Calibri"/>
+              </a:rPr>
+              <a:t>El recinto sumó 618 m³</a:t>
+            </a:r>
+          </a:p>
+        </p:txBody>
+      </p:sp>
+      <p:sp>
+        <p:nvSpPr>
+          <p:cNvPr id="18" name="Rounded Rectangle 17"/>
+          <p:cNvSpPr/>
+          <p:nvPr/>
+        </p:nvSpPr>
+        <p:spPr>
+          <a:xfrm>
+            <a:off x="8430768" y="2212848"/>
+            <a:ext cx="3419856" cy="768096"/>
+          </a:xfrm>
+          <a:prstGeom prst="roundRect">
+            <a:avLst>
+              <a:gd name="adj" fmla="val 8000"/>
+            </a:avLst>
+          </a:prstGeom>
+          <a:solidFill>
+            <a:srgbClr val="F5F7FA"/>
+          </a:solidFill>
+          <a:ln w="6350">
+            <a:solidFill>
+              <a:srgbClr val="C45C26"/>
+            </a:solidFill>
+          </a:ln>
+        </p:spPr>
+        <p:style>
+          <a:lnRef idx="1">
+            <a:schemeClr val="accent1"/>
+          </a:lnRef>
+          <a:fillRef idx="3">
+            <a:schemeClr val="accent1"/>
+          </a:fillRef>
+          <a:effectRef idx="2">
+            <a:schemeClr val="accent1"/>
+          </a:effectRef>
+          <a:fontRef idx="minor">
+            <a:schemeClr val="lt1"/>
+          </a:fontRef>
+        </p:style>
+        <p:txBody>
+          <a:bodyPr rtlCol="0" anchor="ctr"/>
+          <a:lstStyle/>
+          <a:p>
+            <a:pPr algn="ctr"/>
+          </a:p>
+        </p:txBody>
+      </p:sp>
+      <p:sp>
+        <p:nvSpPr>
+          <p:cNvPr id="19" name="TextBox 18"/>
+          <p:cNvSpPr txBox="1"/>
+          <p:nvPr/>
+        </p:nvSpPr>
+        <p:spPr>
+          <a:xfrm>
+            <a:off x="8540496" y="2240279"/>
+            <a:ext cx="3200400" cy="164592"/>
+          </a:xfrm>
+          <a:prstGeom prst="rect">
+            <a:avLst/>
+          </a:prstGeom>
+          <a:noFill/>
+        </p:spPr>
+        <p:txBody>
+          <a:bodyPr wrap="square">
+            <a:spAutoFit/>
+          </a:bodyPr>
+          <a:lstStyle/>
+          <a:p>
+            <a:pPr algn="l">
+              <a:spcAft>
+                <a:spcPts val="300"/>
+              </a:spcAft>
+            </a:pPr>
+            <a:r>
+              <a:rPr sz="1300" b="1">
+                <a:solidFill>
+                  <a:srgbClr val="C45C26"/>
+                </a:solidFill>
+                <a:latin typeface="Calibri"/>
+              </a:rPr>
+              <a:t>Anillo Sur</a:t>
+            </a:r>
+          </a:p>
+        </p:txBody>
+      </p:sp>
+      <p:sp>
+        <p:nvSpPr>
+          <p:cNvPr id="20" name="TextBox 19"/>
+          <p:cNvSpPr txBox="1"/>
+          <p:nvPr/>
+        </p:nvSpPr>
+        <p:spPr>
+          <a:xfrm>
+            <a:off x="8540496" y="2535448"/>
+            <a:ext cx="3200400" cy="237744"/>
+          </a:xfrm>
+          <a:prstGeom prst="rect">
+            <a:avLst/>
+          </a:prstGeom>
+          <a:noFill/>
+        </p:spPr>
+        <p:txBody>
+          <a:bodyPr wrap="square">
+            <a:spAutoFit/>
+          </a:bodyPr>
+          <a:lstStyle/>
+          <a:p>
+            <a:pPr algn="l">
+              <a:spcAft>
+                <a:spcPts val="300"/>
+              </a:spcAft>
+            </a:pPr>
+            <a:r>
+              <a:rPr sz="1600" b="1">
+                <a:solidFill>
                   <a:srgbClr val="0D3B66"/>
                 </a:solidFill>
                 <a:latin typeface="Calibri"/>
               </a:rPr>
-              <a:t>Distrito Lujo</a:t>
-            </a:r>
-          </a:p>
-        </p:txBody>
-      </p:sp>
-      <p:sp>
-        <p:nvSpPr>
-          <p:cNvPr id="33" name="TextBox 32"/>
-          <p:cNvSpPr txBox="1"/>
-          <p:nvPr/>
-        </p:nvSpPr>
-        <p:spPr>
-          <a:xfrm>
-            <a:off x="5029200" y="2139696"/>
-            <a:ext cx="2157984" cy="164592"/>
-          </a:xfrm>
-          <a:prstGeom prst="rect">
-            <a:avLst/>
-          </a:prstGeom>
-          <a:noFill/>
-        </p:spPr>
-        <p:txBody>
-          <a:bodyPr wrap="square">
-            <a:spAutoFit/>
-          </a:bodyPr>
-          <a:lstStyle/>
-          <a:p>
-            <a:pPr algn="l">
-              <a:spcAft>
-                <a:spcPts val="300"/>
-              </a:spcAft>
-            </a:pPr>
-            <a:r>
-              <a:rPr sz="800" b="0">
-                <a:solidFill>
-                  <a:srgbClr val="5A5A5A"/>
-                </a:solidFill>
-                <a:latin typeface="Calibri"/>
-              </a:rPr>
-              <a:t>cadena · no suma</a:t>
-            </a:r>
-          </a:p>
-        </p:txBody>
-      </p:sp>
-      <p:sp>
-        <p:nvSpPr>
-          <p:cNvPr id="34" name="Rounded Rectangle 33"/>
+              <a:t>332 m³    54 %</a:t>
+            </a:r>
+          </a:p>
+        </p:txBody>
+      </p:sp>
+      <p:sp>
+        <p:nvSpPr>
+          <p:cNvPr id="21" name="Rounded Rectangle 20"/>
           <p:cNvSpPr/>
           <p:nvPr/>
         </p:nvSpPr>
         <p:spPr>
           <a:xfrm>
-            <a:off x="7333488" y="1719072"/>
-            <a:ext cx="2286000" cy="621792"/>
+            <a:off x="8430768" y="3877056"/>
+            <a:ext cx="3419856" cy="768096"/>
+          </a:xfrm>
+          <a:prstGeom prst="roundRect">
+            <a:avLst>
+              <a:gd name="adj" fmla="val 8000"/>
+            </a:avLst>
+          </a:prstGeom>
+          <a:solidFill>
+            <a:srgbClr val="F5F7FA"/>
+          </a:solidFill>
+          <a:ln w="6350">
+            <a:solidFill>
+              <a:srgbClr val="C9A227"/>
+            </a:solidFill>
+          </a:ln>
+        </p:spPr>
+        <p:style>
+          <a:lnRef idx="1">
+            <a:schemeClr val="accent1"/>
+          </a:lnRef>
+          <a:fillRef idx="3">
+            <a:schemeClr val="accent1"/>
+          </a:fillRef>
+          <a:effectRef idx="2">
+            <a:schemeClr val="accent1"/>
+          </a:effectRef>
+          <a:fontRef idx="minor">
+            <a:schemeClr val="lt1"/>
+          </a:fontRef>
+        </p:style>
+        <p:txBody>
+          <a:bodyPr rtlCol="0" anchor="ctr"/>
+          <a:lstStyle/>
+          <a:p>
+            <a:pPr algn="ctr"/>
+          </a:p>
+        </p:txBody>
+      </p:sp>
+      <p:sp>
+        <p:nvSpPr>
+          <p:cNvPr id="22" name="TextBox 21"/>
+          <p:cNvSpPr txBox="1"/>
+          <p:nvPr/>
+        </p:nvSpPr>
+        <p:spPr>
+          <a:xfrm>
+            <a:off x="8540496" y="3904488"/>
+            <a:ext cx="3200400" cy="164592"/>
+          </a:xfrm>
+          <a:prstGeom prst="rect">
+            <a:avLst/>
+          </a:prstGeom>
+          <a:noFill/>
+        </p:spPr>
+        <p:txBody>
+          <a:bodyPr wrap="square">
+            <a:spAutoFit/>
+          </a:bodyPr>
+          <a:lstStyle/>
+          <a:p>
+            <a:pPr algn="l">
+              <a:spcAft>
+                <a:spcPts val="300"/>
+              </a:spcAft>
+            </a:pPr>
+            <a:r>
+              <a:rPr sz="1300" b="1">
+                <a:solidFill>
+                  <a:srgbClr val="C9A227"/>
+                </a:solidFill>
+                <a:latin typeface="Calibri"/>
+              </a:rPr>
+              <a:t>Anillo Norte</a:t>
+            </a:r>
+          </a:p>
+        </p:txBody>
+      </p:sp>
+      <p:sp>
+        <p:nvSpPr>
+          <p:cNvPr id="23" name="TextBox 22"/>
+          <p:cNvSpPr txBox="1"/>
+          <p:nvPr/>
+        </p:nvSpPr>
+        <p:spPr>
+          <a:xfrm>
+            <a:off x="8540496" y="4199656"/>
+            <a:ext cx="3200400" cy="237744"/>
+          </a:xfrm>
+          <a:prstGeom prst="rect">
+            <a:avLst/>
+          </a:prstGeom>
+          <a:noFill/>
+        </p:spPr>
+        <p:txBody>
+          <a:bodyPr wrap="square">
+            <a:spAutoFit/>
+          </a:bodyPr>
+          <a:lstStyle/>
+          <a:p>
+            <a:pPr algn="l">
+              <a:spcAft>
+                <a:spcPts val="300"/>
+              </a:spcAft>
+            </a:pPr>
+            <a:r>
+              <a:rPr sz="1600" b="1">
+                <a:solidFill>
+                  <a:srgbClr val="0D3B66"/>
+                </a:solidFill>
+                <a:latin typeface="Calibri"/>
+              </a:rPr>
+              <a:t>287 m³    46 %</a:t>
+            </a:r>
+          </a:p>
+        </p:txBody>
+      </p:sp>
+      <p:sp>
+        <p:nvSpPr>
+          <p:cNvPr id="24" name="Rounded Rectangle 23"/>
+          <p:cNvSpPr/>
+          <p:nvPr/>
+        </p:nvSpPr>
+        <p:spPr>
+          <a:xfrm>
+            <a:off x="201168" y="5705856"/>
+            <a:ext cx="11795760" cy="438912"/>
           </a:xfrm>
           <a:prstGeom prst="roundRect">
             <a:avLst>
@@ -5728,1404 +5306,7 @@
       </p:sp>
       <p:sp>
         <p:nvSpPr>
-          <p:cNvPr id="35" name="TextBox 34"/>
-          <p:cNvSpPr txBox="1"/>
-          <p:nvPr/>
-        </p:nvSpPr>
-        <p:spPr>
-          <a:xfrm>
-            <a:off x="7406640" y="1755648"/>
-            <a:ext cx="2157984" cy="146304"/>
-          </a:xfrm>
-          <a:prstGeom prst="rect">
-            <a:avLst/>
-          </a:prstGeom>
-          <a:noFill/>
-        </p:spPr>
-        <p:txBody>
-          <a:bodyPr wrap="square">
-            <a:spAutoFit/>
-          </a:bodyPr>
-          <a:lstStyle/>
-          <a:p>
-            <a:pPr algn="l">
-              <a:spcAft>
-                <a:spcPts val="300"/>
-              </a:spcAft>
-            </a:pPr>
-            <a:r>
-              <a:rPr sz="900" b="1">
-                <a:solidFill>
-                  <a:srgbClr val="C9A227"/>
-                </a:solidFill>
-                <a:latin typeface="Calibri"/>
-              </a:rPr>
-              <a:t>000025-35</a:t>
-            </a:r>
-          </a:p>
-        </p:txBody>
-      </p:sp>
-      <p:sp>
-        <p:nvSpPr>
-          <p:cNvPr id="36" name="TextBox 35"/>
-          <p:cNvSpPr txBox="1"/>
-          <p:nvPr/>
-        </p:nvSpPr>
-        <p:spPr>
-          <a:xfrm>
-            <a:off x="7406640" y="1920240"/>
-            <a:ext cx="2157984" cy="201168"/>
-          </a:xfrm>
-          <a:prstGeom prst="rect">
-            <a:avLst/>
-          </a:prstGeom>
-          <a:noFill/>
-        </p:spPr>
-        <p:txBody>
-          <a:bodyPr wrap="square">
-            <a:spAutoFit/>
-          </a:bodyPr>
-          <a:lstStyle/>
-          <a:p>
-            <a:pPr algn="l">
-              <a:spcAft>
-                <a:spcPts val="300"/>
-              </a:spcAft>
-            </a:pPr>
-            <a:r>
-              <a:rPr sz="1100" b="1">
-                <a:solidFill>
-                  <a:srgbClr val="0D3B66"/>
-                </a:solidFill>
-                <a:latin typeface="Calibri"/>
-              </a:rPr>
-              <a:t>Bazar Gourmet</a:t>
-            </a:r>
-          </a:p>
-        </p:txBody>
-      </p:sp>
-      <p:sp>
-        <p:nvSpPr>
-          <p:cNvPr id="37" name="TextBox 36"/>
-          <p:cNvSpPr txBox="1"/>
-          <p:nvPr/>
-        </p:nvSpPr>
-        <p:spPr>
-          <a:xfrm>
-            <a:off x="7406640" y="2139696"/>
-            <a:ext cx="2157984" cy="164592"/>
-          </a:xfrm>
-          <a:prstGeom prst="rect">
-            <a:avLst/>
-          </a:prstGeom>
-          <a:noFill/>
-        </p:spPr>
-        <p:txBody>
-          <a:bodyPr wrap="square">
-            <a:spAutoFit/>
-          </a:bodyPr>
-          <a:lstStyle/>
-          <a:p>
-            <a:pPr algn="l">
-              <a:spcAft>
-                <a:spcPts val="300"/>
-              </a:spcAft>
-            </a:pPr>
-            <a:r>
-              <a:rPr sz="800" b="0">
-                <a:solidFill>
-                  <a:srgbClr val="5A5A5A"/>
-                </a:solidFill>
-                <a:latin typeface="Calibri"/>
-              </a:rPr>
-              <a:t>sale de 27</a:t>
-            </a:r>
-          </a:p>
-        </p:txBody>
-      </p:sp>
-      <p:sp>
-        <p:nvSpPr>
-          <p:cNvPr id="38" name="Rounded Rectangle 37"/>
-          <p:cNvSpPr/>
-          <p:nvPr/>
-        </p:nvSpPr>
-        <p:spPr>
-          <a:xfrm>
-            <a:off x="9710928" y="1719072"/>
-            <a:ext cx="2286000" cy="621792"/>
-          </a:xfrm>
-          <a:prstGeom prst="roundRect">
-            <a:avLst>
-              <a:gd name="adj" fmla="val 8000"/>
-            </a:avLst>
-          </a:prstGeom>
-          <a:solidFill>
-            <a:srgbClr val="FFF9EB"/>
-          </a:solidFill>
-          <a:ln w="6350">
-            <a:solidFill>
-              <a:srgbClr val="5A8C6E"/>
-            </a:solidFill>
-          </a:ln>
-        </p:spPr>
-        <p:style>
-          <a:lnRef idx="1">
-            <a:schemeClr val="accent1"/>
-          </a:lnRef>
-          <a:fillRef idx="3">
-            <a:schemeClr val="accent1"/>
-          </a:fillRef>
-          <a:effectRef idx="2">
-            <a:schemeClr val="accent1"/>
-          </a:effectRef>
-          <a:fontRef idx="minor">
-            <a:schemeClr val="lt1"/>
-          </a:fontRef>
-        </p:style>
-        <p:txBody>
-          <a:bodyPr rtlCol="0" anchor="ctr"/>
-          <a:lstStyle/>
-          <a:p>
-            <a:pPr algn="ctr"/>
-          </a:p>
-        </p:txBody>
-      </p:sp>
-      <p:sp>
-        <p:nvSpPr>
-          <p:cNvPr id="39" name="TextBox 38"/>
-          <p:cNvSpPr txBox="1"/>
-          <p:nvPr/>
-        </p:nvSpPr>
-        <p:spPr>
-          <a:xfrm>
-            <a:off x="9784080" y="1755648"/>
-            <a:ext cx="2157984" cy="146304"/>
-          </a:xfrm>
-          <a:prstGeom prst="rect">
-            <a:avLst/>
-          </a:prstGeom>
-          <a:noFill/>
-        </p:spPr>
-        <p:txBody>
-          <a:bodyPr wrap="square">
-            <a:spAutoFit/>
-          </a:bodyPr>
-          <a:lstStyle/>
-          <a:p>
-            <a:pPr algn="l">
-              <a:spcAft>
-                <a:spcPts val="300"/>
-              </a:spcAft>
-            </a:pPr>
-            <a:r>
-              <a:rPr sz="900" b="1">
-                <a:solidFill>
-                  <a:srgbClr val="C9A227"/>
-                </a:solidFill>
-                <a:latin typeface="Calibri"/>
-              </a:rPr>
-              <a:t>000025-36</a:t>
-            </a:r>
-          </a:p>
-        </p:txBody>
-      </p:sp>
-      <p:sp>
-        <p:nvSpPr>
-          <p:cNvPr id="40" name="TextBox 39"/>
-          <p:cNvSpPr txBox="1"/>
-          <p:nvPr/>
-        </p:nvSpPr>
-        <p:spPr>
-          <a:xfrm>
-            <a:off x="9784080" y="1920240"/>
-            <a:ext cx="2157984" cy="201168"/>
-          </a:xfrm>
-          <a:prstGeom prst="rect">
-            <a:avLst/>
-          </a:prstGeom>
-          <a:noFill/>
-        </p:spPr>
-        <p:txBody>
-          <a:bodyPr wrap="square">
-            <a:spAutoFit/>
-          </a:bodyPr>
-          <a:lstStyle/>
-          <a:p>
-            <a:pPr algn="l">
-              <a:spcAft>
-                <a:spcPts val="300"/>
-              </a:spcAft>
-            </a:pPr>
-            <a:r>
-              <a:rPr sz="1100" b="1">
-                <a:solidFill>
-                  <a:srgbClr val="0D3B66"/>
-                </a:solidFill>
-                <a:latin typeface="Calibri"/>
-              </a:rPr>
-              <a:t>DL Kennedy</a:t>
-            </a:r>
-          </a:p>
-        </p:txBody>
-      </p:sp>
-      <p:sp>
-        <p:nvSpPr>
-          <p:cNvPr id="41" name="TextBox 40"/>
-          <p:cNvSpPr txBox="1"/>
-          <p:nvPr/>
-        </p:nvSpPr>
-        <p:spPr>
-          <a:xfrm>
-            <a:off x="9784080" y="2139696"/>
-            <a:ext cx="2157984" cy="164592"/>
-          </a:xfrm>
-          <a:prstGeom prst="rect">
-            <a:avLst/>
-          </a:prstGeom>
-          <a:noFill/>
-        </p:spPr>
-        <p:txBody>
-          <a:bodyPr wrap="square">
-            <a:spAutoFit/>
-          </a:bodyPr>
-          <a:lstStyle/>
-          <a:p>
-            <a:pPr algn="l">
-              <a:spcAft>
-                <a:spcPts val="300"/>
-              </a:spcAft>
-            </a:pPr>
-            <a:r>
-              <a:rPr sz="800" b="0">
-                <a:solidFill>
-                  <a:srgbClr val="5A5A5A"/>
-                </a:solidFill>
-                <a:latin typeface="Calibri"/>
-              </a:rPr>
-              <a:t>sale de 27</a:t>
-            </a:r>
-          </a:p>
-        </p:txBody>
-      </p:sp>
-      <p:sp>
-        <p:nvSpPr>
-          <p:cNvPr id="42" name="Rounded Rectangle 41"/>
-          <p:cNvSpPr/>
-          <p:nvPr/>
-        </p:nvSpPr>
-        <p:spPr>
-          <a:xfrm>
-            <a:off x="201168" y="2432304"/>
-            <a:ext cx="7973568" cy="3182111"/>
-          </a:xfrm>
-          <a:prstGeom prst="roundRect">
-            <a:avLst>
-              <a:gd name="adj" fmla="val 8000"/>
-            </a:avLst>
-          </a:prstGeom>
-          <a:solidFill>
-            <a:srgbClr val="F5F7FA"/>
-          </a:solidFill>
-          <a:ln>
-            <a:noFill/>
-          </a:ln>
-        </p:spPr>
-        <p:style>
-          <a:lnRef idx="1">
-            <a:schemeClr val="accent1"/>
-          </a:lnRef>
-          <a:fillRef idx="3">
-            <a:schemeClr val="accent1"/>
-          </a:fillRef>
-          <a:effectRef idx="2">
-            <a:schemeClr val="accent1"/>
-          </a:effectRef>
-          <a:fontRef idx="minor">
-            <a:schemeClr val="lt1"/>
-          </a:fontRef>
-        </p:style>
-        <p:txBody>
-          <a:bodyPr rtlCol="0" anchor="ctr"/>
-          <a:lstStyle/>
-          <a:p>
-            <a:pPr algn="ctr"/>
-          </a:p>
-        </p:txBody>
-      </p:sp>
-      <p:pic>
-        <p:nvPicPr>
-          <p:cNvPr id="43" name="Picture 42" descr="pak_mensual_may_ago.png"/>
-          <p:cNvPicPr>
-            <a:picLocks noChangeAspect="1"/>
-          </p:cNvPicPr>
-          <p:nvPr/>
-        </p:nvPicPr>
-        <p:blipFill>
-          <a:blip r:embed="rId3"/>
-          <a:stretch>
-            <a:fillRect/>
-          </a:stretch>
-        </p:blipFill>
-        <p:spPr>
-          <a:xfrm>
-            <a:off x="605863" y="2487168"/>
-            <a:ext cx="7164176" cy="3072383"/>
-          </a:xfrm>
-          <a:prstGeom prst="rect">
-            <a:avLst/>
-          </a:prstGeom>
-        </p:spPr>
-      </p:pic>
-      <p:sp>
-        <p:nvSpPr>
-          <p:cNvPr id="44" name="Rounded Rectangle 43"/>
-          <p:cNvSpPr/>
-          <p:nvPr/>
-        </p:nvSpPr>
-        <p:spPr>
-          <a:xfrm>
-            <a:off x="8302752" y="2432304"/>
-            <a:ext cx="3675887" cy="3182111"/>
-          </a:xfrm>
-          <a:prstGeom prst="roundRect">
-            <a:avLst>
-              <a:gd name="adj" fmla="val 8000"/>
-            </a:avLst>
-          </a:prstGeom>
-          <a:solidFill>
-            <a:srgbClr val="FFFFFF"/>
-          </a:solidFill>
-          <a:ln w="6350">
-            <a:solidFill>
-              <a:srgbClr val="1F77B4"/>
-            </a:solidFill>
-          </a:ln>
-        </p:spPr>
-        <p:style>
-          <a:lnRef idx="1">
-            <a:schemeClr val="accent1"/>
-          </a:lnRef>
-          <a:fillRef idx="3">
-            <a:schemeClr val="accent1"/>
-          </a:fillRef>
-          <a:effectRef idx="2">
-            <a:schemeClr val="accent1"/>
-          </a:effectRef>
-          <a:fontRef idx="minor">
-            <a:schemeClr val="lt1"/>
-          </a:fontRef>
-        </p:style>
-        <p:txBody>
-          <a:bodyPr rtlCol="0" anchor="ctr"/>
-          <a:lstStyle/>
-          <a:p>
-            <a:pPr algn="ctr"/>
-          </a:p>
-        </p:txBody>
-      </p:sp>
-      <p:sp>
-        <p:nvSpPr>
-          <p:cNvPr id="45" name="TextBox 44"/>
-          <p:cNvSpPr txBox="1"/>
-          <p:nvPr/>
-        </p:nvSpPr>
-        <p:spPr>
-          <a:xfrm>
-            <a:off x="8430768" y="2478024"/>
-            <a:ext cx="3419856" cy="164592"/>
-          </a:xfrm>
-          <a:prstGeom prst="rect">
-            <a:avLst/>
-          </a:prstGeom>
-          <a:noFill/>
-        </p:spPr>
-        <p:txBody>
-          <a:bodyPr wrap="square">
-            <a:spAutoFit/>
-          </a:bodyPr>
-          <a:lstStyle/>
-          <a:p>
-            <a:pPr algn="l">
-              <a:spcAft>
-                <a:spcPts val="300"/>
-              </a:spcAft>
-            </a:pPr>
-            <a:r>
-              <a:rPr sz="1100" b="1">
-                <a:solidFill>
-                  <a:srgbClr val="1F77B4"/>
-                </a:solidFill>
-                <a:latin typeface="Calibri"/>
-              </a:rPr>
-              <a:t>JULIO · cabecera</a:t>
-            </a:r>
-          </a:p>
-        </p:txBody>
-      </p:sp>
-      <p:sp>
-        <p:nvSpPr>
-          <p:cNvPr id="46" name="TextBox 45"/>
-          <p:cNvSpPr txBox="1"/>
-          <p:nvPr/>
-        </p:nvSpPr>
-        <p:spPr>
-          <a:xfrm>
-            <a:off x="8430768" y="2642616"/>
-            <a:ext cx="3419856" cy="201168"/>
-          </a:xfrm>
-          <a:prstGeom prst="rect">
-            <a:avLst/>
-          </a:prstGeom>
-          <a:noFill/>
-        </p:spPr>
-        <p:txBody>
-          <a:bodyPr wrap="square">
-            <a:spAutoFit/>
-          </a:bodyPr>
-          <a:lstStyle/>
-          <a:p>
-            <a:pPr algn="l">
-              <a:spcAft>
-                <a:spcPts val="300"/>
-              </a:spcAft>
-            </a:pPr>
-            <a:r>
-              <a:rPr sz="1200" b="0">
-                <a:solidFill>
-                  <a:srgbClr val="5A5A5A"/>
-                </a:solidFill>
-                <a:latin typeface="Calibri"/>
-              </a:rPr>
-              <a:t>El recinto sumó 31.239 m³</a:t>
-            </a:r>
-          </a:p>
-        </p:txBody>
-      </p:sp>
-      <p:sp>
-        <p:nvSpPr>
-          <p:cNvPr id="47" name="Rounded Rectangle 46"/>
-          <p:cNvSpPr/>
-          <p:nvPr/>
-        </p:nvSpPr>
-        <p:spPr>
-          <a:xfrm>
-            <a:off x="8430768" y="2852928"/>
-            <a:ext cx="3419856" cy="347471"/>
-          </a:xfrm>
-          <a:prstGeom prst="roundRect">
-            <a:avLst>
-              <a:gd name="adj" fmla="val 8000"/>
-            </a:avLst>
-          </a:prstGeom>
-          <a:solidFill>
-            <a:srgbClr val="F5F7FA"/>
-          </a:solidFill>
-          <a:ln w="6350">
-            <a:solidFill>
-              <a:srgbClr val="8C5A5A"/>
-            </a:solidFill>
-          </a:ln>
-        </p:spPr>
-        <p:style>
-          <a:lnRef idx="1">
-            <a:schemeClr val="accent1"/>
-          </a:lnRef>
-          <a:fillRef idx="3">
-            <a:schemeClr val="accent1"/>
-          </a:fillRef>
-          <a:effectRef idx="2">
-            <a:schemeClr val="accent1"/>
-          </a:effectRef>
-          <a:fontRef idx="minor">
-            <a:schemeClr val="lt1"/>
-          </a:fontRef>
-        </p:style>
-        <p:txBody>
-          <a:bodyPr rtlCol="0" anchor="ctr"/>
-          <a:lstStyle/>
-          <a:p>
-            <a:pPr algn="ctr"/>
-          </a:p>
-        </p:txBody>
-      </p:sp>
-      <p:sp>
-        <p:nvSpPr>
-          <p:cNvPr id="48" name="TextBox 47"/>
-          <p:cNvSpPr txBox="1"/>
-          <p:nvPr/>
-        </p:nvSpPr>
-        <p:spPr>
-          <a:xfrm>
-            <a:off x="8540496" y="2880360"/>
-            <a:ext cx="3200400" cy="145938"/>
-          </a:xfrm>
-          <a:prstGeom prst="rect">
-            <a:avLst/>
-          </a:prstGeom>
-          <a:noFill/>
-        </p:spPr>
-        <p:txBody>
-          <a:bodyPr wrap="square">
-            <a:spAutoFit/>
-          </a:bodyPr>
-          <a:lstStyle/>
-          <a:p>
-            <a:pPr algn="l">
-              <a:spcAft>
-                <a:spcPts val="300"/>
-              </a:spcAft>
-            </a:pPr>
-            <a:r>
-              <a:rPr sz="1000" b="1">
-                <a:solidFill>
-                  <a:srgbClr val="8C5A5A"/>
-                </a:solidFill>
-                <a:latin typeface="Calibri"/>
-              </a:rPr>
-              <a:t>Sandía Antigua</a:t>
-            </a:r>
-          </a:p>
-        </p:txBody>
-      </p:sp>
-      <p:sp>
-        <p:nvSpPr>
-          <p:cNvPr id="49" name="TextBox 48"/>
-          <p:cNvSpPr txBox="1"/>
-          <p:nvPr/>
-        </p:nvSpPr>
-        <p:spPr>
-          <a:xfrm>
-            <a:off x="8540496" y="2998866"/>
-            <a:ext cx="3200400" cy="180685"/>
-          </a:xfrm>
-          <a:prstGeom prst="rect">
-            <a:avLst/>
-          </a:prstGeom>
-          <a:noFill/>
-        </p:spPr>
-        <p:txBody>
-          <a:bodyPr wrap="square">
-            <a:spAutoFit/>
-          </a:bodyPr>
-          <a:lstStyle/>
-          <a:p>
-            <a:pPr algn="l">
-              <a:spcAft>
-                <a:spcPts val="300"/>
-              </a:spcAft>
-            </a:pPr>
-            <a:r>
-              <a:rPr sz="1200" b="1">
-                <a:solidFill>
-                  <a:srgbClr val="0D3B66"/>
-                </a:solidFill>
-                <a:latin typeface="Calibri"/>
-              </a:rPr>
-              <a:t>13.661 m³    43,7 %</a:t>
-            </a:r>
-          </a:p>
-        </p:txBody>
-      </p:sp>
-      <p:sp>
-        <p:nvSpPr>
-          <p:cNvPr id="50" name="Rounded Rectangle 49"/>
-          <p:cNvSpPr/>
-          <p:nvPr/>
-        </p:nvSpPr>
-        <p:spPr>
-          <a:xfrm>
-            <a:off x="8430768" y="3236976"/>
-            <a:ext cx="3419856" cy="347471"/>
-          </a:xfrm>
-          <a:prstGeom prst="roundRect">
-            <a:avLst>
-              <a:gd name="adj" fmla="val 8000"/>
-            </a:avLst>
-          </a:prstGeom>
-          <a:solidFill>
-            <a:srgbClr val="F5F7FA"/>
-          </a:solidFill>
-          <a:ln w="6350">
-            <a:solidFill>
-              <a:srgbClr val="508282"/>
-            </a:solidFill>
-          </a:ln>
-        </p:spPr>
-        <p:style>
-          <a:lnRef idx="1">
-            <a:schemeClr val="accent1"/>
-          </a:lnRef>
-          <a:fillRef idx="3">
-            <a:schemeClr val="accent1"/>
-          </a:fillRef>
-          <a:effectRef idx="2">
-            <a:schemeClr val="accent1"/>
-          </a:effectRef>
-          <a:fontRef idx="minor">
-            <a:schemeClr val="lt1"/>
-          </a:fontRef>
-        </p:style>
-        <p:txBody>
-          <a:bodyPr rtlCol="0" anchor="ctr"/>
-          <a:lstStyle/>
-          <a:p>
-            <a:pPr algn="ctr"/>
-          </a:p>
-        </p:txBody>
-      </p:sp>
-      <p:sp>
-        <p:nvSpPr>
-          <p:cNvPr id="51" name="TextBox 50"/>
-          <p:cNvSpPr txBox="1"/>
-          <p:nvPr/>
-        </p:nvSpPr>
-        <p:spPr>
-          <a:xfrm>
-            <a:off x="8540496" y="3264408"/>
-            <a:ext cx="3200400" cy="145938"/>
-          </a:xfrm>
-          <a:prstGeom prst="rect">
-            <a:avLst/>
-          </a:prstGeom>
-          <a:noFill/>
-        </p:spPr>
-        <p:txBody>
-          <a:bodyPr wrap="square">
-            <a:spAutoFit/>
-          </a:bodyPr>
-          <a:lstStyle/>
-          <a:p>
-            <a:pPr algn="l">
-              <a:spcAft>
-                <a:spcPts val="300"/>
-              </a:spcAft>
-            </a:pPr>
-            <a:r>
-              <a:rPr sz="1000" b="1">
-                <a:solidFill>
-                  <a:srgbClr val="508282"/>
-                </a:solidFill>
-                <a:latin typeface="Calibri"/>
-              </a:rPr>
-              <a:t>Sandía Nueva</a:t>
-            </a:r>
-          </a:p>
-        </p:txBody>
-      </p:sp>
-      <p:sp>
-        <p:nvSpPr>
-          <p:cNvPr id="52" name="TextBox 51"/>
-          <p:cNvSpPr txBox="1"/>
-          <p:nvPr/>
-        </p:nvSpPr>
-        <p:spPr>
-          <a:xfrm>
-            <a:off x="8540496" y="3382914"/>
-            <a:ext cx="3200400" cy="180685"/>
-          </a:xfrm>
-          <a:prstGeom prst="rect">
-            <a:avLst/>
-          </a:prstGeom>
-          <a:noFill/>
-        </p:spPr>
-        <p:txBody>
-          <a:bodyPr wrap="square">
-            <a:spAutoFit/>
-          </a:bodyPr>
-          <a:lstStyle/>
-          <a:p>
-            <a:pPr algn="l">
-              <a:spcAft>
-                <a:spcPts val="300"/>
-              </a:spcAft>
-            </a:pPr>
-            <a:r>
-              <a:rPr sz="1200" b="1">
-                <a:solidFill>
-                  <a:srgbClr val="0D3B66"/>
-                </a:solidFill>
-                <a:latin typeface="Calibri"/>
-              </a:rPr>
-              <a:t>9.619 m³    30,8 %</a:t>
-            </a:r>
-          </a:p>
-        </p:txBody>
-      </p:sp>
-      <p:sp>
-        <p:nvSpPr>
-          <p:cNvPr id="53" name="Rounded Rectangle 52"/>
-          <p:cNvSpPr/>
-          <p:nvPr/>
-        </p:nvSpPr>
-        <p:spPr>
-          <a:xfrm>
-            <a:off x="8430768" y="3621024"/>
-            <a:ext cx="3419856" cy="347471"/>
-          </a:xfrm>
-          <a:prstGeom prst="roundRect">
-            <a:avLst>
-              <a:gd name="adj" fmla="val 8000"/>
-            </a:avLst>
-          </a:prstGeom>
-          <a:solidFill>
-            <a:srgbClr val="F5F7FA"/>
-          </a:solidFill>
-          <a:ln w="6350">
-            <a:solidFill>
-              <a:srgbClr val="5A8C6E"/>
-            </a:solidFill>
-          </a:ln>
-        </p:spPr>
-        <p:style>
-          <a:lnRef idx="1">
-            <a:schemeClr val="accent1"/>
-          </a:lnRef>
-          <a:fillRef idx="3">
-            <a:schemeClr val="accent1"/>
-          </a:fillRef>
-          <a:effectRef idx="2">
-            <a:schemeClr val="accent1"/>
-          </a:effectRef>
-          <a:fontRef idx="minor">
-            <a:schemeClr val="lt1"/>
-          </a:fontRef>
-        </p:style>
-        <p:txBody>
-          <a:bodyPr rtlCol="0" anchor="ctr"/>
-          <a:lstStyle/>
-          <a:p>
-            <a:pPr algn="ctr"/>
-          </a:p>
-        </p:txBody>
-      </p:sp>
-      <p:sp>
-        <p:nvSpPr>
-          <p:cNvPr id="54" name="TextBox 53"/>
-          <p:cNvSpPr txBox="1"/>
-          <p:nvPr/>
-        </p:nvSpPr>
-        <p:spPr>
-          <a:xfrm>
-            <a:off x="8540496" y="3648456"/>
-            <a:ext cx="3200400" cy="145938"/>
-          </a:xfrm>
-          <a:prstGeom prst="rect">
-            <a:avLst/>
-          </a:prstGeom>
-          <a:noFill/>
-        </p:spPr>
-        <p:txBody>
-          <a:bodyPr wrap="square">
-            <a:spAutoFit/>
-          </a:bodyPr>
-          <a:lstStyle/>
-          <a:p>
-            <a:pPr algn="l">
-              <a:spcAft>
-                <a:spcPts val="300"/>
-              </a:spcAft>
-            </a:pPr>
-            <a:r>
-              <a:rPr sz="1000" b="1">
-                <a:solidFill>
-                  <a:srgbClr val="5A8C6E"/>
-                </a:solidFill>
-                <a:latin typeface="Calibri"/>
-              </a:rPr>
-              <a:t>Locales Gast.</a:t>
-            </a:r>
-          </a:p>
-        </p:txBody>
-      </p:sp>
-      <p:sp>
-        <p:nvSpPr>
-          <p:cNvPr id="55" name="TextBox 54"/>
-          <p:cNvSpPr txBox="1"/>
-          <p:nvPr/>
-        </p:nvSpPr>
-        <p:spPr>
-          <a:xfrm>
-            <a:off x="8540496" y="3766962"/>
-            <a:ext cx="3200400" cy="180685"/>
-          </a:xfrm>
-          <a:prstGeom prst="rect">
-            <a:avLst/>
-          </a:prstGeom>
-          <a:noFill/>
-        </p:spPr>
-        <p:txBody>
-          <a:bodyPr wrap="square">
-            <a:spAutoFit/>
-          </a:bodyPr>
-          <a:lstStyle/>
-          <a:p>
-            <a:pPr algn="l">
-              <a:spcAft>
-                <a:spcPts val="300"/>
-              </a:spcAft>
-            </a:pPr>
-            <a:r>
-              <a:rPr sz="1200" b="1">
-                <a:solidFill>
-                  <a:srgbClr val="0D3B66"/>
-                </a:solidFill>
-                <a:latin typeface="Calibri"/>
-              </a:rPr>
-              <a:t>4.583 m³    14,7 %</a:t>
-            </a:r>
-          </a:p>
-        </p:txBody>
-      </p:sp>
-      <p:sp>
-        <p:nvSpPr>
-          <p:cNvPr id="56" name="Rounded Rectangle 55"/>
-          <p:cNvSpPr/>
-          <p:nvPr/>
-        </p:nvSpPr>
-        <p:spPr>
-          <a:xfrm>
-            <a:off x="8430768" y="4005072"/>
-            <a:ext cx="3419856" cy="347471"/>
-          </a:xfrm>
-          <a:prstGeom prst="roundRect">
-            <a:avLst>
-              <a:gd name="adj" fmla="val 8000"/>
-            </a:avLst>
-          </a:prstGeom>
-          <a:solidFill>
-            <a:srgbClr val="F5F7FA"/>
-          </a:solidFill>
-          <a:ln w="6350">
-            <a:solidFill>
-              <a:srgbClr val="7BA3C9"/>
-            </a:solidFill>
-          </a:ln>
-        </p:spPr>
-        <p:style>
-          <a:lnRef idx="1">
-            <a:schemeClr val="accent1"/>
-          </a:lnRef>
-          <a:fillRef idx="3">
-            <a:schemeClr val="accent1"/>
-          </a:fillRef>
-          <a:effectRef idx="2">
-            <a:schemeClr val="accent1"/>
-          </a:effectRef>
-          <a:fontRef idx="minor">
-            <a:schemeClr val="lt1"/>
-          </a:fontRef>
-        </p:style>
-        <p:txBody>
-          <a:bodyPr rtlCol="0" anchor="ctr"/>
-          <a:lstStyle/>
-          <a:p>
-            <a:pPr algn="ctr"/>
-          </a:p>
-        </p:txBody>
-      </p:sp>
-      <p:sp>
-        <p:nvSpPr>
-          <p:cNvPr id="57" name="TextBox 56"/>
-          <p:cNvSpPr txBox="1"/>
-          <p:nvPr/>
-        </p:nvSpPr>
-        <p:spPr>
-          <a:xfrm>
-            <a:off x="8540496" y="4032504"/>
-            <a:ext cx="3200400" cy="145938"/>
-          </a:xfrm>
-          <a:prstGeom prst="rect">
-            <a:avLst/>
-          </a:prstGeom>
-          <a:noFill/>
-        </p:spPr>
-        <p:txBody>
-          <a:bodyPr wrap="square">
-            <a:spAutoFit/>
-          </a:bodyPr>
-          <a:lstStyle/>
-          <a:p>
-            <a:pPr algn="l">
-              <a:spcAft>
-                <a:spcPts val="300"/>
-              </a:spcAft>
-            </a:pPr>
-            <a:r>
-              <a:rPr sz="1000" b="1">
-                <a:solidFill>
-                  <a:srgbClr val="7BA3C9"/>
-                </a:solidFill>
-                <a:latin typeface="Calibri"/>
-              </a:rPr>
-              <a:t>Matriz Andén</a:t>
-            </a:r>
-          </a:p>
-        </p:txBody>
-      </p:sp>
-      <p:sp>
-        <p:nvSpPr>
-          <p:cNvPr id="58" name="TextBox 57"/>
-          <p:cNvSpPr txBox="1"/>
-          <p:nvPr/>
-        </p:nvSpPr>
-        <p:spPr>
-          <a:xfrm>
-            <a:off x="8540496" y="4151010"/>
-            <a:ext cx="3200400" cy="180685"/>
-          </a:xfrm>
-          <a:prstGeom prst="rect">
-            <a:avLst/>
-          </a:prstGeom>
-          <a:noFill/>
-        </p:spPr>
-        <p:txBody>
-          <a:bodyPr wrap="square">
-            <a:spAutoFit/>
-          </a:bodyPr>
-          <a:lstStyle/>
-          <a:p>
-            <a:pPr algn="l">
-              <a:spcAft>
-                <a:spcPts val="300"/>
-              </a:spcAft>
-            </a:pPr>
-            <a:r>
-              <a:rPr sz="1200" b="1">
-                <a:solidFill>
-                  <a:srgbClr val="0D3B66"/>
-                </a:solidFill>
-                <a:latin typeface="Calibri"/>
-              </a:rPr>
-              <a:t>3.086 m³    9,9 %</a:t>
-            </a:r>
-          </a:p>
-        </p:txBody>
-      </p:sp>
-      <p:sp>
-        <p:nvSpPr>
-          <p:cNvPr id="59" name="Rounded Rectangle 58"/>
-          <p:cNvSpPr/>
-          <p:nvPr/>
-        </p:nvSpPr>
-        <p:spPr>
-          <a:xfrm>
-            <a:off x="8430768" y="4389120"/>
-            <a:ext cx="3419856" cy="347471"/>
-          </a:xfrm>
-          <a:prstGeom prst="roundRect">
-            <a:avLst>
-              <a:gd name="adj" fmla="val 8000"/>
-            </a:avLst>
-          </a:prstGeom>
-          <a:solidFill>
-            <a:srgbClr val="F5F7FA"/>
-          </a:solidFill>
-          <a:ln w="6350">
-            <a:solidFill>
-              <a:srgbClr val="46648C"/>
-            </a:solidFill>
-          </a:ln>
-        </p:spPr>
-        <p:style>
-          <a:lnRef idx="1">
-            <a:schemeClr val="accent1"/>
-          </a:lnRef>
-          <a:fillRef idx="3">
-            <a:schemeClr val="accent1"/>
-          </a:fillRef>
-          <a:effectRef idx="2">
-            <a:schemeClr val="accent1"/>
-          </a:effectRef>
-          <a:fontRef idx="minor">
-            <a:schemeClr val="lt1"/>
-          </a:fontRef>
-        </p:style>
-        <p:txBody>
-          <a:bodyPr rtlCol="0" anchor="ctr"/>
-          <a:lstStyle/>
-          <a:p>
-            <a:pPr algn="ctr"/>
-          </a:p>
-        </p:txBody>
-      </p:sp>
-      <p:sp>
-        <p:nvSpPr>
-          <p:cNvPr id="60" name="TextBox 59"/>
-          <p:cNvSpPr txBox="1"/>
-          <p:nvPr/>
-        </p:nvSpPr>
-        <p:spPr>
-          <a:xfrm>
-            <a:off x="8540496" y="4416552"/>
-            <a:ext cx="3200400" cy="145938"/>
-          </a:xfrm>
-          <a:prstGeom prst="rect">
-            <a:avLst/>
-          </a:prstGeom>
-          <a:noFill/>
-        </p:spPr>
-        <p:txBody>
-          <a:bodyPr wrap="square">
-            <a:spAutoFit/>
-          </a:bodyPr>
-          <a:lstStyle/>
-          <a:p>
-            <a:pPr algn="l">
-              <a:spcAft>
-                <a:spcPts val="300"/>
-              </a:spcAft>
-            </a:pPr>
-            <a:r>
-              <a:rPr sz="1000" b="1">
-                <a:solidFill>
-                  <a:srgbClr val="46648C"/>
-                </a:solidFill>
-                <a:latin typeface="Calibri"/>
-              </a:rPr>
-              <a:t>Pileta</a:t>
-            </a:r>
-          </a:p>
-        </p:txBody>
-      </p:sp>
-      <p:sp>
-        <p:nvSpPr>
-          <p:cNvPr id="61" name="TextBox 60"/>
-          <p:cNvSpPr txBox="1"/>
-          <p:nvPr/>
-        </p:nvSpPr>
-        <p:spPr>
-          <a:xfrm>
-            <a:off x="8540496" y="4535058"/>
-            <a:ext cx="3200400" cy="180685"/>
-          </a:xfrm>
-          <a:prstGeom prst="rect">
-            <a:avLst/>
-          </a:prstGeom>
-          <a:noFill/>
-        </p:spPr>
-        <p:txBody>
-          <a:bodyPr wrap="square">
-            <a:spAutoFit/>
-          </a:bodyPr>
-          <a:lstStyle/>
-          <a:p>
-            <a:pPr algn="l">
-              <a:spcAft>
-                <a:spcPts val="300"/>
-              </a:spcAft>
-            </a:pPr>
-            <a:r>
-              <a:rPr sz="1200" b="1">
-                <a:solidFill>
-                  <a:srgbClr val="0D3B66"/>
-                </a:solidFill>
-                <a:latin typeface="Calibri"/>
-              </a:rPr>
-              <a:t>172 m³    0,5 %</a:t>
-            </a:r>
-          </a:p>
-        </p:txBody>
-      </p:sp>
-      <p:sp>
-        <p:nvSpPr>
-          <p:cNvPr id="62" name="Rounded Rectangle 61"/>
-          <p:cNvSpPr/>
-          <p:nvPr/>
-        </p:nvSpPr>
-        <p:spPr>
-          <a:xfrm>
-            <a:off x="8430768" y="4773168"/>
-            <a:ext cx="3419856" cy="347471"/>
-          </a:xfrm>
-          <a:prstGeom prst="roundRect">
-            <a:avLst>
-              <a:gd name="adj" fmla="val 8000"/>
-            </a:avLst>
-          </a:prstGeom>
-          <a:solidFill>
-            <a:srgbClr val="F5F7FA"/>
-          </a:solidFill>
-          <a:ln w="6350">
-            <a:solidFill>
-              <a:srgbClr val="0D3B66"/>
-            </a:solidFill>
-          </a:ln>
-        </p:spPr>
-        <p:style>
-          <a:lnRef idx="1">
-            <a:schemeClr val="accent1"/>
-          </a:lnRef>
-          <a:fillRef idx="3">
-            <a:schemeClr val="accent1"/>
-          </a:fillRef>
-          <a:effectRef idx="2">
-            <a:schemeClr val="accent1"/>
-          </a:effectRef>
-          <a:fontRef idx="minor">
-            <a:schemeClr val="lt1"/>
-          </a:fontRef>
-        </p:style>
-        <p:txBody>
-          <a:bodyPr rtlCol="0" anchor="ctr"/>
-          <a:lstStyle/>
-          <a:p>
-            <a:pPr algn="ctr"/>
-          </a:p>
-        </p:txBody>
-      </p:sp>
-      <p:sp>
-        <p:nvSpPr>
-          <p:cNvPr id="63" name="TextBox 62"/>
-          <p:cNvSpPr txBox="1"/>
-          <p:nvPr/>
-        </p:nvSpPr>
-        <p:spPr>
-          <a:xfrm>
-            <a:off x="8540496" y="4800600"/>
-            <a:ext cx="3200400" cy="145938"/>
-          </a:xfrm>
-          <a:prstGeom prst="rect">
-            <a:avLst/>
-          </a:prstGeom>
-          <a:noFill/>
-        </p:spPr>
-        <p:txBody>
-          <a:bodyPr wrap="square">
-            <a:spAutoFit/>
-          </a:bodyPr>
-          <a:lstStyle/>
-          <a:p>
-            <a:pPr algn="l">
-              <a:spcAft>
-                <a:spcPts val="300"/>
-              </a:spcAft>
-            </a:pPr>
-            <a:r>
-              <a:rPr sz="1000" b="1">
-                <a:solidFill>
-                  <a:srgbClr val="0D3B66"/>
-                </a:solidFill>
-                <a:latin typeface="Calibri"/>
-              </a:rPr>
-              <a:t>Restaurante</a:t>
-            </a:r>
-          </a:p>
-        </p:txBody>
-      </p:sp>
-      <p:sp>
-        <p:nvSpPr>
-          <p:cNvPr id="64" name="TextBox 63"/>
-          <p:cNvSpPr txBox="1"/>
-          <p:nvPr/>
-        </p:nvSpPr>
-        <p:spPr>
-          <a:xfrm>
-            <a:off x="8540496" y="4919106"/>
-            <a:ext cx="3200400" cy="180685"/>
-          </a:xfrm>
-          <a:prstGeom prst="rect">
-            <a:avLst/>
-          </a:prstGeom>
-          <a:noFill/>
-        </p:spPr>
-        <p:txBody>
-          <a:bodyPr wrap="square">
-            <a:spAutoFit/>
-          </a:bodyPr>
-          <a:lstStyle/>
-          <a:p>
-            <a:pPr algn="l">
-              <a:spcAft>
-                <a:spcPts val="300"/>
-              </a:spcAft>
-            </a:pPr>
-            <a:r>
-              <a:rPr sz="1200" b="1">
-                <a:solidFill>
-                  <a:srgbClr val="0D3B66"/>
-                </a:solidFill>
-                <a:latin typeface="Calibri"/>
-              </a:rPr>
-              <a:t>98 m³    0,3 %</a:t>
-            </a:r>
-          </a:p>
-        </p:txBody>
-      </p:sp>
-      <p:sp>
-        <p:nvSpPr>
-          <p:cNvPr id="65" name="Rounded Rectangle 64"/>
-          <p:cNvSpPr/>
-          <p:nvPr/>
-        </p:nvSpPr>
-        <p:spPr>
-          <a:xfrm>
-            <a:off x="8430768" y="5157216"/>
-            <a:ext cx="3419856" cy="347471"/>
-          </a:xfrm>
-          <a:prstGeom prst="roundRect">
-            <a:avLst>
-              <a:gd name="adj" fmla="val 8000"/>
-            </a:avLst>
-          </a:prstGeom>
-          <a:solidFill>
-            <a:srgbClr val="F5F7FA"/>
-          </a:solidFill>
-          <a:ln w="6350">
-            <a:solidFill>
-              <a:srgbClr val="A0783C"/>
-            </a:solidFill>
-          </a:ln>
-        </p:spPr>
-        <p:style>
-          <a:lnRef idx="1">
-            <a:schemeClr val="accent1"/>
-          </a:lnRef>
-          <a:fillRef idx="3">
-            <a:schemeClr val="accent1"/>
-          </a:fillRef>
-          <a:effectRef idx="2">
-            <a:schemeClr val="accent1"/>
-          </a:effectRef>
-          <a:fontRef idx="minor">
-            <a:schemeClr val="lt1"/>
-          </a:fontRef>
-        </p:style>
-        <p:txBody>
-          <a:bodyPr rtlCol="0" anchor="ctr"/>
-          <a:lstStyle/>
-          <a:p>
-            <a:pPr algn="ctr"/>
-          </a:p>
-        </p:txBody>
-      </p:sp>
-      <p:sp>
-        <p:nvSpPr>
-          <p:cNvPr id="66" name="TextBox 65"/>
-          <p:cNvSpPr txBox="1"/>
-          <p:nvPr/>
-        </p:nvSpPr>
-        <p:spPr>
-          <a:xfrm>
-            <a:off x="8540496" y="5184648"/>
-            <a:ext cx="3200400" cy="145938"/>
-          </a:xfrm>
-          <a:prstGeom prst="rect">
-            <a:avLst/>
-          </a:prstGeom>
-          <a:noFill/>
-        </p:spPr>
-        <p:txBody>
-          <a:bodyPr wrap="square">
-            <a:spAutoFit/>
-          </a:bodyPr>
-          <a:lstStyle/>
-          <a:p>
-            <a:pPr algn="l">
-              <a:spcAft>
-                <a:spcPts val="300"/>
-              </a:spcAft>
-            </a:pPr>
-            <a:r>
-              <a:rPr sz="1000" b="1">
-                <a:solidFill>
-                  <a:srgbClr val="A0783C"/>
-                </a:solidFill>
-                <a:latin typeface="Calibri"/>
-              </a:rPr>
-              <a:t>Cascada</a:t>
-            </a:r>
-          </a:p>
-        </p:txBody>
-      </p:sp>
-      <p:sp>
-        <p:nvSpPr>
-          <p:cNvPr id="67" name="TextBox 66"/>
-          <p:cNvSpPr txBox="1"/>
-          <p:nvPr/>
-        </p:nvSpPr>
-        <p:spPr>
-          <a:xfrm>
-            <a:off x="8540496" y="5303154"/>
-            <a:ext cx="3200400" cy="180685"/>
-          </a:xfrm>
-          <a:prstGeom prst="rect">
-            <a:avLst/>
-          </a:prstGeom>
-          <a:noFill/>
-        </p:spPr>
-        <p:txBody>
-          <a:bodyPr wrap="square">
-            <a:spAutoFit/>
-          </a:bodyPr>
-          <a:lstStyle/>
-          <a:p>
-            <a:pPr algn="l">
-              <a:spcAft>
-                <a:spcPts val="300"/>
-              </a:spcAft>
-            </a:pPr>
-            <a:r>
-              <a:rPr sz="1200" b="1">
-                <a:solidFill>
-                  <a:srgbClr val="0D3B66"/>
-                </a:solidFill>
-                <a:latin typeface="Calibri"/>
-              </a:rPr>
-              <a:t>20 m³    &lt;0,1 %</a:t>
-            </a:r>
-          </a:p>
-        </p:txBody>
-      </p:sp>
-      <p:sp>
-        <p:nvSpPr>
-          <p:cNvPr id="68" name="Rounded Rectangle 67"/>
-          <p:cNvSpPr/>
-          <p:nvPr/>
-        </p:nvSpPr>
-        <p:spPr>
-          <a:xfrm>
-            <a:off x="201168" y="5705856"/>
-            <a:ext cx="11795760" cy="438912"/>
-          </a:xfrm>
-          <a:prstGeom prst="roundRect">
-            <a:avLst>
-              <a:gd name="adj" fmla="val 8000"/>
-            </a:avLst>
-          </a:prstGeom>
-          <a:solidFill>
-            <a:srgbClr val="FFF9EB"/>
-          </a:solidFill>
-          <a:ln w="6350">
-            <a:solidFill>
-              <a:srgbClr val="C9A227"/>
-            </a:solidFill>
-          </a:ln>
-        </p:spPr>
-        <p:style>
-          <a:lnRef idx="1">
-            <a:schemeClr val="accent1"/>
-          </a:lnRef>
-          <a:fillRef idx="3">
-            <a:schemeClr val="accent1"/>
-          </a:fillRef>
-          <a:effectRef idx="2">
-            <a:schemeClr val="accent1"/>
-          </a:effectRef>
-          <a:fontRef idx="minor">
-            <a:schemeClr val="lt1"/>
-          </a:fontRef>
-        </p:style>
-        <p:txBody>
-          <a:bodyPr rtlCol="0" anchor="ctr"/>
-          <a:lstStyle/>
-          <a:p>
-            <a:pPr algn="ctr"/>
-          </a:p>
-        </p:txBody>
-      </p:sp>
-      <p:sp>
-        <p:nvSpPr>
-          <p:cNvPr id="69" name="TextBox 68"/>
+          <p:cNvPr id="25" name="TextBox 24"/>
           <p:cNvSpPr txBox="1"/>
           <p:nvPr/>
         </p:nvSpPr>
@@ -7157,14 +5338,14 @@
                 </a:solidFill>
                 <a:latin typeface="Calibri"/>
               </a:rPr>
-              <a:t>Recepción 12/12/2025  ·  Capacitación 17/12/2025  ·  Francisco Jeldres  ·  Paula Azolas  ·  Mantención: C. Naranjo, M. Jara, R. Moreno, R. Díaz, J. Gutiérrez, H. Fierro</a:t>
-            </a:r>
-          </a:p>
-        </p:txBody>
-      </p:sp>
-      <p:sp>
-        <p:nvSpPr>
-          <p:cNvPr id="70" name="TextBox 69"/>
+              <a:t>Recepción 29/04/2026 (Anillo Norte / Anillo Sur)  ·  Capacitación 12/12/2025  ·  Joceline Lazo  ·  Constanza Vilches</a:t>
+            </a:r>
+          </a:p>
+        </p:txBody>
+      </p:sp>
+      <p:sp>
+        <p:nvSpPr>
+          <p:cNvPr id="26" name="TextBox 25"/>
           <p:cNvSpPr txBox="1"/>
           <p:nvPr/>
         </p:nvSpPr>
@@ -7196,7 +5377,7 @@
                 </a:solidFill>
                 <a:latin typeface="Calibri"/>
               </a:rPr>
-              <a:t>Mayo 26.357   ·   Junio 20.927   ·   Julio 31.239   ·   Agosto 1–17: 21.494   ·   proy. ago 39.195 m³.</a:t>
+              <a:t>Junio 664   ·   Julio 618   ·   Agosto 1–17: 366   ·   proy. ago 667 m³.</a:t>
             </a:r>
           </a:p>
           <a:p>
@@ -7212,7 +5393,7 @@
                 </a:solidFill>
                 <a:latin typeface="Calibri"/>
               </a:rPr>
-              <a:t>Julio = cabecera (7 puntos). 27, 35 y 36 no se suman: cadena Sandía → DL (lámina 2).</a:t>
+              <a:t>Cambio de monitoreo: se dejó Baños y Matriz Principal. Anillo Norte y Sur con lectura correcta desde el 19/05 (mayo no se grafica).</a:t>
             </a:r>
           </a:p>
         </p:txBody>
@@ -7379,6 +5560,2867 @@
                 </a:solidFill>
                 <a:latin typeface="Calibri"/>
               </a:rPr>
+              <a:t>PAK  ·  Equipos y consumo</a:t>
+            </a:r>
+          </a:p>
+        </p:txBody>
+      </p:sp>
+      <p:sp>
+        <p:nvSpPr>
+          <p:cNvPr id="6" name="TextBox 5"/>
+          <p:cNvSpPr txBox="1"/>
+          <p:nvPr/>
+        </p:nvSpPr>
+        <p:spPr>
+          <a:xfrm>
+            <a:off x="256032" y="457200"/>
+            <a:ext cx="10607040" cy="329184"/>
+          </a:xfrm>
+          <a:prstGeom prst="rect">
+            <a:avLst/>
+          </a:prstGeom>
+          <a:noFill/>
+        </p:spPr>
+        <p:txBody>
+          <a:bodyPr wrap="square">
+            <a:spAutoFit/>
+          </a:bodyPr>
+          <a:lstStyle/>
+          <a:p>
+            <a:pPr algn="l">
+              <a:spcAft>
+                <a:spcPts val="300"/>
+              </a:spcAft>
+            </a:pPr>
+            <a:r>
+              <a:rPr sz="1100" b="0">
+                <a:solidFill>
+                  <a:srgbClr val="DCE6F0"/>
+                </a:solidFill>
+                <a:latin typeface="Calibri"/>
+              </a:rPr>
+              <a:t>Parque Arauco Kennedy   |   10 puntos WES   |   julio = cabecera (sin 27, 35 y 36)   |   01/05/2026 – 17/08/2026</a:t>
+            </a:r>
+          </a:p>
+        </p:txBody>
+      </p:sp>
+      <p:sp>
+        <p:nvSpPr>
+          <p:cNvPr id="7" name="Rounded Rectangle 6"/>
+          <p:cNvSpPr/>
+          <p:nvPr/>
+        </p:nvSpPr>
+        <p:spPr>
+          <a:xfrm>
+            <a:off x="201168" y="1024128"/>
+            <a:ext cx="2286000" cy="621792"/>
+          </a:xfrm>
+          <a:prstGeom prst="roundRect">
+            <a:avLst>
+              <a:gd name="adj" fmla="val 8000"/>
+            </a:avLst>
+          </a:prstGeom>
+          <a:solidFill>
+            <a:srgbClr val="F5F7FA"/>
+          </a:solidFill>
+          <a:ln w="6350">
+            <a:solidFill>
+              <a:srgbClr val="7BA3C9"/>
+            </a:solidFill>
+          </a:ln>
+        </p:spPr>
+        <p:style>
+          <a:lnRef idx="1">
+            <a:schemeClr val="accent1"/>
+          </a:lnRef>
+          <a:fillRef idx="3">
+            <a:schemeClr val="accent1"/>
+          </a:fillRef>
+          <a:effectRef idx="2">
+            <a:schemeClr val="accent1"/>
+          </a:effectRef>
+          <a:fontRef idx="minor">
+            <a:schemeClr val="lt1"/>
+          </a:fontRef>
+        </p:style>
+        <p:txBody>
+          <a:bodyPr rtlCol="0" anchor="ctr"/>
+          <a:lstStyle/>
+          <a:p>
+            <a:pPr algn="ctr"/>
+          </a:p>
+        </p:txBody>
+      </p:sp>
+      <p:sp>
+        <p:nvSpPr>
+          <p:cNvPr id="8" name="TextBox 7"/>
+          <p:cNvSpPr txBox="1"/>
+          <p:nvPr/>
+        </p:nvSpPr>
+        <p:spPr>
+          <a:xfrm>
+            <a:off x="274320" y="1060704"/>
+            <a:ext cx="2157984" cy="146304"/>
+          </a:xfrm>
+          <a:prstGeom prst="rect">
+            <a:avLst/>
+          </a:prstGeom>
+          <a:noFill/>
+        </p:spPr>
+        <p:txBody>
+          <a:bodyPr wrap="square">
+            <a:spAutoFit/>
+          </a:bodyPr>
+          <a:lstStyle/>
+          <a:p>
+            <a:pPr algn="l">
+              <a:spcAft>
+                <a:spcPts val="300"/>
+              </a:spcAft>
+            </a:pPr>
+            <a:r>
+              <a:rPr sz="900" b="1">
+                <a:solidFill>
+                  <a:srgbClr val="C9A227"/>
+                </a:solidFill>
+                <a:latin typeface="Calibri"/>
+              </a:rPr>
+              <a:t>000025-20</a:t>
+            </a:r>
+          </a:p>
+        </p:txBody>
+      </p:sp>
+      <p:sp>
+        <p:nvSpPr>
+          <p:cNvPr id="9" name="TextBox 8"/>
+          <p:cNvSpPr txBox="1"/>
+          <p:nvPr/>
+        </p:nvSpPr>
+        <p:spPr>
+          <a:xfrm>
+            <a:off x="274320" y="1225296"/>
+            <a:ext cx="2157984" cy="201168"/>
+          </a:xfrm>
+          <a:prstGeom prst="rect">
+            <a:avLst/>
+          </a:prstGeom>
+          <a:noFill/>
+        </p:spPr>
+        <p:txBody>
+          <a:bodyPr wrap="square">
+            <a:spAutoFit/>
+          </a:bodyPr>
+          <a:lstStyle/>
+          <a:p>
+            <a:pPr algn="l">
+              <a:spcAft>
+                <a:spcPts val="300"/>
+              </a:spcAft>
+            </a:pPr>
+            <a:r>
+              <a:rPr sz="1100" b="1">
+                <a:solidFill>
+                  <a:srgbClr val="0D3B66"/>
+                </a:solidFill>
+                <a:latin typeface="Calibri"/>
+              </a:rPr>
+              <a:t>Matriz Andén</a:t>
+            </a:r>
+          </a:p>
+        </p:txBody>
+      </p:sp>
+      <p:sp>
+        <p:nvSpPr>
+          <p:cNvPr id="10" name="Rounded Rectangle 9"/>
+          <p:cNvSpPr/>
+          <p:nvPr/>
+        </p:nvSpPr>
+        <p:spPr>
+          <a:xfrm>
+            <a:off x="2578608" y="1024128"/>
+            <a:ext cx="2286000" cy="621792"/>
+          </a:xfrm>
+          <a:prstGeom prst="roundRect">
+            <a:avLst>
+              <a:gd name="adj" fmla="val 8000"/>
+            </a:avLst>
+          </a:prstGeom>
+          <a:solidFill>
+            <a:srgbClr val="F5F7FA"/>
+          </a:solidFill>
+          <a:ln w="6350">
+            <a:solidFill>
+              <a:srgbClr val="5A8C6E"/>
+            </a:solidFill>
+          </a:ln>
+        </p:spPr>
+        <p:style>
+          <a:lnRef idx="1">
+            <a:schemeClr val="accent1"/>
+          </a:lnRef>
+          <a:fillRef idx="3">
+            <a:schemeClr val="accent1"/>
+          </a:fillRef>
+          <a:effectRef idx="2">
+            <a:schemeClr val="accent1"/>
+          </a:effectRef>
+          <a:fontRef idx="minor">
+            <a:schemeClr val="lt1"/>
+          </a:fontRef>
+        </p:style>
+        <p:txBody>
+          <a:bodyPr rtlCol="0" anchor="ctr"/>
+          <a:lstStyle/>
+          <a:p>
+            <a:pPr algn="ctr"/>
+          </a:p>
+        </p:txBody>
+      </p:sp>
+      <p:sp>
+        <p:nvSpPr>
+          <p:cNvPr id="11" name="TextBox 10"/>
+          <p:cNvSpPr txBox="1"/>
+          <p:nvPr/>
+        </p:nvSpPr>
+        <p:spPr>
+          <a:xfrm>
+            <a:off x="2651760" y="1060704"/>
+            <a:ext cx="2157984" cy="146304"/>
+          </a:xfrm>
+          <a:prstGeom prst="rect">
+            <a:avLst/>
+          </a:prstGeom>
+          <a:noFill/>
+        </p:spPr>
+        <p:txBody>
+          <a:bodyPr wrap="square">
+            <a:spAutoFit/>
+          </a:bodyPr>
+          <a:lstStyle/>
+          <a:p>
+            <a:pPr algn="l">
+              <a:spcAft>
+                <a:spcPts val="300"/>
+              </a:spcAft>
+            </a:pPr>
+            <a:r>
+              <a:rPr sz="900" b="1">
+                <a:solidFill>
+                  <a:srgbClr val="C9A227"/>
+                </a:solidFill>
+                <a:latin typeface="Calibri"/>
+              </a:rPr>
+              <a:t>000025-21</a:t>
+            </a:r>
+          </a:p>
+        </p:txBody>
+      </p:sp>
+      <p:sp>
+        <p:nvSpPr>
+          <p:cNvPr id="12" name="TextBox 11"/>
+          <p:cNvSpPr txBox="1"/>
+          <p:nvPr/>
+        </p:nvSpPr>
+        <p:spPr>
+          <a:xfrm>
+            <a:off x="2651760" y="1225296"/>
+            <a:ext cx="2157984" cy="201168"/>
+          </a:xfrm>
+          <a:prstGeom prst="rect">
+            <a:avLst/>
+          </a:prstGeom>
+          <a:noFill/>
+        </p:spPr>
+        <p:txBody>
+          <a:bodyPr wrap="square">
+            <a:spAutoFit/>
+          </a:bodyPr>
+          <a:lstStyle/>
+          <a:p>
+            <a:pPr algn="l">
+              <a:spcAft>
+                <a:spcPts val="300"/>
+              </a:spcAft>
+            </a:pPr>
+            <a:r>
+              <a:rPr sz="1100" b="1">
+                <a:solidFill>
+                  <a:srgbClr val="0D3B66"/>
+                </a:solidFill>
+                <a:latin typeface="Calibri"/>
+              </a:rPr>
+              <a:t>Locales Gast.</a:t>
+            </a:r>
+          </a:p>
+        </p:txBody>
+      </p:sp>
+      <p:sp>
+        <p:nvSpPr>
+          <p:cNvPr id="13" name="Rounded Rectangle 12"/>
+          <p:cNvSpPr/>
+          <p:nvPr/>
+        </p:nvSpPr>
+        <p:spPr>
+          <a:xfrm>
+            <a:off x="4956048" y="1024128"/>
+            <a:ext cx="2286000" cy="621792"/>
+          </a:xfrm>
+          <a:prstGeom prst="roundRect">
+            <a:avLst>
+              <a:gd name="adj" fmla="val 8000"/>
+            </a:avLst>
+          </a:prstGeom>
+          <a:solidFill>
+            <a:srgbClr val="F5F7FA"/>
+          </a:solidFill>
+          <a:ln w="6350">
+            <a:solidFill>
+              <a:srgbClr val="8C5A5A"/>
+            </a:solidFill>
+          </a:ln>
+        </p:spPr>
+        <p:style>
+          <a:lnRef idx="1">
+            <a:schemeClr val="accent1"/>
+          </a:lnRef>
+          <a:fillRef idx="3">
+            <a:schemeClr val="accent1"/>
+          </a:fillRef>
+          <a:effectRef idx="2">
+            <a:schemeClr val="accent1"/>
+          </a:effectRef>
+          <a:fontRef idx="minor">
+            <a:schemeClr val="lt1"/>
+          </a:fontRef>
+        </p:style>
+        <p:txBody>
+          <a:bodyPr rtlCol="0" anchor="ctr"/>
+          <a:lstStyle/>
+          <a:p>
+            <a:pPr algn="ctr"/>
+          </a:p>
+        </p:txBody>
+      </p:sp>
+      <p:sp>
+        <p:nvSpPr>
+          <p:cNvPr id="14" name="TextBox 13"/>
+          <p:cNvSpPr txBox="1"/>
+          <p:nvPr/>
+        </p:nvSpPr>
+        <p:spPr>
+          <a:xfrm>
+            <a:off x="5029200" y="1060704"/>
+            <a:ext cx="2157984" cy="146304"/>
+          </a:xfrm>
+          <a:prstGeom prst="rect">
+            <a:avLst/>
+          </a:prstGeom>
+          <a:noFill/>
+        </p:spPr>
+        <p:txBody>
+          <a:bodyPr wrap="square">
+            <a:spAutoFit/>
+          </a:bodyPr>
+          <a:lstStyle/>
+          <a:p>
+            <a:pPr algn="l">
+              <a:spcAft>
+                <a:spcPts val="300"/>
+              </a:spcAft>
+            </a:pPr>
+            <a:r>
+              <a:rPr sz="900" b="1">
+                <a:solidFill>
+                  <a:srgbClr val="C9A227"/>
+                </a:solidFill>
+                <a:latin typeface="Calibri"/>
+              </a:rPr>
+              <a:t>000025-22</a:t>
+            </a:r>
+          </a:p>
+        </p:txBody>
+      </p:sp>
+      <p:sp>
+        <p:nvSpPr>
+          <p:cNvPr id="15" name="TextBox 14"/>
+          <p:cNvSpPr txBox="1"/>
+          <p:nvPr/>
+        </p:nvSpPr>
+        <p:spPr>
+          <a:xfrm>
+            <a:off x="5029200" y="1225296"/>
+            <a:ext cx="2157984" cy="201168"/>
+          </a:xfrm>
+          <a:prstGeom prst="rect">
+            <a:avLst/>
+          </a:prstGeom>
+          <a:noFill/>
+        </p:spPr>
+        <p:txBody>
+          <a:bodyPr wrap="square">
+            <a:spAutoFit/>
+          </a:bodyPr>
+          <a:lstStyle/>
+          <a:p>
+            <a:pPr algn="l">
+              <a:spcAft>
+                <a:spcPts val="300"/>
+              </a:spcAft>
+            </a:pPr>
+            <a:r>
+              <a:rPr sz="1100" b="1">
+                <a:solidFill>
+                  <a:srgbClr val="0D3B66"/>
+                </a:solidFill>
+                <a:latin typeface="Calibri"/>
+              </a:rPr>
+              <a:t>Sandía Antigua</a:t>
+            </a:r>
+          </a:p>
+        </p:txBody>
+      </p:sp>
+      <p:sp>
+        <p:nvSpPr>
+          <p:cNvPr id="16" name="TextBox 15"/>
+          <p:cNvSpPr txBox="1"/>
+          <p:nvPr/>
+        </p:nvSpPr>
+        <p:spPr>
+          <a:xfrm>
+            <a:off x="5029200" y="1444752"/>
+            <a:ext cx="2157984" cy="164592"/>
+          </a:xfrm>
+          <a:prstGeom prst="rect">
+            <a:avLst/>
+          </a:prstGeom>
+          <a:noFill/>
+        </p:spPr>
+        <p:txBody>
+          <a:bodyPr wrap="square">
+            <a:spAutoFit/>
+          </a:bodyPr>
+          <a:lstStyle/>
+          <a:p>
+            <a:pPr algn="l">
+              <a:spcAft>
+                <a:spcPts val="300"/>
+              </a:spcAft>
+            </a:pPr>
+            <a:r>
+              <a:rPr sz="800" b="0">
+                <a:solidFill>
+                  <a:srgbClr val="5A5A5A"/>
+                </a:solidFill>
+                <a:latin typeface="Calibri"/>
+              </a:rPr>
+              <a:t>alimenta 27</a:t>
+            </a:r>
+          </a:p>
+        </p:txBody>
+      </p:sp>
+      <p:sp>
+        <p:nvSpPr>
+          <p:cNvPr id="17" name="Rounded Rectangle 16"/>
+          <p:cNvSpPr/>
+          <p:nvPr/>
+        </p:nvSpPr>
+        <p:spPr>
+          <a:xfrm>
+            <a:off x="7333488" y="1024128"/>
+            <a:ext cx="2286000" cy="621792"/>
+          </a:xfrm>
+          <a:prstGeom prst="roundRect">
+            <a:avLst>
+              <a:gd name="adj" fmla="val 8000"/>
+            </a:avLst>
+          </a:prstGeom>
+          <a:solidFill>
+            <a:srgbClr val="F5F7FA"/>
+          </a:solidFill>
+          <a:ln w="6350">
+            <a:solidFill>
+              <a:srgbClr val="508282"/>
+            </a:solidFill>
+          </a:ln>
+        </p:spPr>
+        <p:style>
+          <a:lnRef idx="1">
+            <a:schemeClr val="accent1"/>
+          </a:lnRef>
+          <a:fillRef idx="3">
+            <a:schemeClr val="accent1"/>
+          </a:fillRef>
+          <a:effectRef idx="2">
+            <a:schemeClr val="accent1"/>
+          </a:effectRef>
+          <a:fontRef idx="minor">
+            <a:schemeClr val="lt1"/>
+          </a:fontRef>
+        </p:style>
+        <p:txBody>
+          <a:bodyPr rtlCol="0" anchor="ctr"/>
+          <a:lstStyle/>
+          <a:p>
+            <a:pPr algn="ctr"/>
+          </a:p>
+        </p:txBody>
+      </p:sp>
+      <p:sp>
+        <p:nvSpPr>
+          <p:cNvPr id="18" name="TextBox 17"/>
+          <p:cNvSpPr txBox="1"/>
+          <p:nvPr/>
+        </p:nvSpPr>
+        <p:spPr>
+          <a:xfrm>
+            <a:off x="7406640" y="1060704"/>
+            <a:ext cx="2157984" cy="146304"/>
+          </a:xfrm>
+          <a:prstGeom prst="rect">
+            <a:avLst/>
+          </a:prstGeom>
+          <a:noFill/>
+        </p:spPr>
+        <p:txBody>
+          <a:bodyPr wrap="square">
+            <a:spAutoFit/>
+          </a:bodyPr>
+          <a:lstStyle/>
+          <a:p>
+            <a:pPr algn="l">
+              <a:spcAft>
+                <a:spcPts val="300"/>
+              </a:spcAft>
+            </a:pPr>
+            <a:r>
+              <a:rPr sz="900" b="1">
+                <a:solidFill>
+                  <a:srgbClr val="C9A227"/>
+                </a:solidFill>
+                <a:latin typeface="Calibri"/>
+              </a:rPr>
+              <a:t>000025-28</a:t>
+            </a:r>
+          </a:p>
+        </p:txBody>
+      </p:sp>
+      <p:sp>
+        <p:nvSpPr>
+          <p:cNvPr id="19" name="TextBox 18"/>
+          <p:cNvSpPr txBox="1"/>
+          <p:nvPr/>
+        </p:nvSpPr>
+        <p:spPr>
+          <a:xfrm>
+            <a:off x="7406640" y="1225296"/>
+            <a:ext cx="2157984" cy="201168"/>
+          </a:xfrm>
+          <a:prstGeom prst="rect">
+            <a:avLst/>
+          </a:prstGeom>
+          <a:noFill/>
+        </p:spPr>
+        <p:txBody>
+          <a:bodyPr wrap="square">
+            <a:spAutoFit/>
+          </a:bodyPr>
+          <a:lstStyle/>
+          <a:p>
+            <a:pPr algn="l">
+              <a:spcAft>
+                <a:spcPts val="300"/>
+              </a:spcAft>
+            </a:pPr>
+            <a:r>
+              <a:rPr sz="1100" b="1">
+                <a:solidFill>
+                  <a:srgbClr val="0D3B66"/>
+                </a:solidFill>
+                <a:latin typeface="Calibri"/>
+              </a:rPr>
+              <a:t>Sandía Nueva</a:t>
+            </a:r>
+          </a:p>
+        </p:txBody>
+      </p:sp>
+      <p:sp>
+        <p:nvSpPr>
+          <p:cNvPr id="20" name="TextBox 19"/>
+          <p:cNvSpPr txBox="1"/>
+          <p:nvPr/>
+        </p:nvSpPr>
+        <p:spPr>
+          <a:xfrm>
+            <a:off x="7406640" y="1444752"/>
+            <a:ext cx="2157984" cy="164592"/>
+          </a:xfrm>
+          <a:prstGeom prst="rect">
+            <a:avLst/>
+          </a:prstGeom>
+          <a:noFill/>
+        </p:spPr>
+        <p:txBody>
+          <a:bodyPr wrap="square">
+            <a:spAutoFit/>
+          </a:bodyPr>
+          <a:lstStyle/>
+          <a:p>
+            <a:pPr algn="l">
+              <a:spcAft>
+                <a:spcPts val="300"/>
+              </a:spcAft>
+            </a:pPr>
+            <a:r>
+              <a:rPr sz="800" b="0">
+                <a:solidFill>
+                  <a:srgbClr val="5A5A5A"/>
+                </a:solidFill>
+                <a:latin typeface="Calibri"/>
+              </a:rPr>
+              <a:t>alimenta 27</a:t>
+            </a:r>
+          </a:p>
+        </p:txBody>
+      </p:sp>
+      <p:sp>
+        <p:nvSpPr>
+          <p:cNvPr id="21" name="Rounded Rectangle 20"/>
+          <p:cNvSpPr/>
+          <p:nvPr/>
+        </p:nvSpPr>
+        <p:spPr>
+          <a:xfrm>
+            <a:off x="9710928" y="1024128"/>
+            <a:ext cx="2286000" cy="621792"/>
+          </a:xfrm>
+          <a:prstGeom prst="roundRect">
+            <a:avLst>
+              <a:gd name="adj" fmla="val 8000"/>
+            </a:avLst>
+          </a:prstGeom>
+          <a:solidFill>
+            <a:srgbClr val="F5F7FA"/>
+          </a:solidFill>
+          <a:ln w="6350">
+            <a:solidFill>
+              <a:srgbClr val="0D3B66"/>
+            </a:solidFill>
+          </a:ln>
+        </p:spPr>
+        <p:style>
+          <a:lnRef idx="1">
+            <a:schemeClr val="accent1"/>
+          </a:lnRef>
+          <a:fillRef idx="3">
+            <a:schemeClr val="accent1"/>
+          </a:fillRef>
+          <a:effectRef idx="2">
+            <a:schemeClr val="accent1"/>
+          </a:effectRef>
+          <a:fontRef idx="minor">
+            <a:schemeClr val="lt1"/>
+          </a:fontRef>
+        </p:style>
+        <p:txBody>
+          <a:bodyPr rtlCol="0" anchor="ctr"/>
+          <a:lstStyle/>
+          <a:p>
+            <a:pPr algn="ctr"/>
+          </a:p>
+        </p:txBody>
+      </p:sp>
+      <p:sp>
+        <p:nvSpPr>
+          <p:cNvPr id="22" name="TextBox 21"/>
+          <p:cNvSpPr txBox="1"/>
+          <p:nvPr/>
+        </p:nvSpPr>
+        <p:spPr>
+          <a:xfrm>
+            <a:off x="9784080" y="1060704"/>
+            <a:ext cx="2157984" cy="146304"/>
+          </a:xfrm>
+          <a:prstGeom prst="rect">
+            <a:avLst/>
+          </a:prstGeom>
+          <a:noFill/>
+        </p:spPr>
+        <p:txBody>
+          <a:bodyPr wrap="square">
+            <a:spAutoFit/>
+          </a:bodyPr>
+          <a:lstStyle/>
+          <a:p>
+            <a:pPr algn="l">
+              <a:spcAft>
+                <a:spcPts val="300"/>
+              </a:spcAft>
+            </a:pPr>
+            <a:r>
+              <a:rPr sz="900" b="1">
+                <a:solidFill>
+                  <a:srgbClr val="C9A227"/>
+                </a:solidFill>
+                <a:latin typeface="Calibri"/>
+              </a:rPr>
+              <a:t>000025-29</a:t>
+            </a:r>
+          </a:p>
+        </p:txBody>
+      </p:sp>
+      <p:sp>
+        <p:nvSpPr>
+          <p:cNvPr id="23" name="TextBox 22"/>
+          <p:cNvSpPr txBox="1"/>
+          <p:nvPr/>
+        </p:nvSpPr>
+        <p:spPr>
+          <a:xfrm>
+            <a:off x="9784080" y="1225296"/>
+            <a:ext cx="2157984" cy="201168"/>
+          </a:xfrm>
+          <a:prstGeom prst="rect">
+            <a:avLst/>
+          </a:prstGeom>
+          <a:noFill/>
+        </p:spPr>
+        <p:txBody>
+          <a:bodyPr wrap="square">
+            <a:spAutoFit/>
+          </a:bodyPr>
+          <a:lstStyle/>
+          <a:p>
+            <a:pPr algn="l">
+              <a:spcAft>
+                <a:spcPts val="300"/>
+              </a:spcAft>
+            </a:pPr>
+            <a:r>
+              <a:rPr sz="1100" b="1">
+                <a:solidFill>
+                  <a:srgbClr val="0D3B66"/>
+                </a:solidFill>
+                <a:latin typeface="Calibri"/>
+              </a:rPr>
+              <a:t>Restaurante</a:t>
+            </a:r>
+          </a:p>
+        </p:txBody>
+      </p:sp>
+      <p:sp>
+        <p:nvSpPr>
+          <p:cNvPr id="24" name="Rounded Rectangle 23"/>
+          <p:cNvSpPr/>
+          <p:nvPr/>
+        </p:nvSpPr>
+        <p:spPr>
+          <a:xfrm>
+            <a:off x="201168" y="1719072"/>
+            <a:ext cx="2286000" cy="621792"/>
+          </a:xfrm>
+          <a:prstGeom prst="roundRect">
+            <a:avLst>
+              <a:gd name="adj" fmla="val 8000"/>
+            </a:avLst>
+          </a:prstGeom>
+          <a:solidFill>
+            <a:srgbClr val="F5F7FA"/>
+          </a:solidFill>
+          <a:ln w="6350">
+            <a:solidFill>
+              <a:srgbClr val="46648C"/>
+            </a:solidFill>
+          </a:ln>
+        </p:spPr>
+        <p:style>
+          <a:lnRef idx="1">
+            <a:schemeClr val="accent1"/>
+          </a:lnRef>
+          <a:fillRef idx="3">
+            <a:schemeClr val="accent1"/>
+          </a:fillRef>
+          <a:effectRef idx="2">
+            <a:schemeClr val="accent1"/>
+          </a:effectRef>
+          <a:fontRef idx="minor">
+            <a:schemeClr val="lt1"/>
+          </a:fontRef>
+        </p:style>
+        <p:txBody>
+          <a:bodyPr rtlCol="0" anchor="ctr"/>
+          <a:lstStyle/>
+          <a:p>
+            <a:pPr algn="ctr"/>
+          </a:p>
+        </p:txBody>
+      </p:sp>
+      <p:sp>
+        <p:nvSpPr>
+          <p:cNvPr id="25" name="TextBox 24"/>
+          <p:cNvSpPr txBox="1"/>
+          <p:nvPr/>
+        </p:nvSpPr>
+        <p:spPr>
+          <a:xfrm>
+            <a:off x="274320" y="1755648"/>
+            <a:ext cx="2157984" cy="146304"/>
+          </a:xfrm>
+          <a:prstGeom prst="rect">
+            <a:avLst/>
+          </a:prstGeom>
+          <a:noFill/>
+        </p:spPr>
+        <p:txBody>
+          <a:bodyPr wrap="square">
+            <a:spAutoFit/>
+          </a:bodyPr>
+          <a:lstStyle/>
+          <a:p>
+            <a:pPr algn="l">
+              <a:spcAft>
+                <a:spcPts val="300"/>
+              </a:spcAft>
+            </a:pPr>
+            <a:r>
+              <a:rPr sz="900" b="1">
+                <a:solidFill>
+                  <a:srgbClr val="C9A227"/>
+                </a:solidFill>
+                <a:latin typeface="Calibri"/>
+              </a:rPr>
+              <a:t>000025-23</a:t>
+            </a:r>
+          </a:p>
+        </p:txBody>
+      </p:sp>
+      <p:sp>
+        <p:nvSpPr>
+          <p:cNvPr id="26" name="TextBox 25"/>
+          <p:cNvSpPr txBox="1"/>
+          <p:nvPr/>
+        </p:nvSpPr>
+        <p:spPr>
+          <a:xfrm>
+            <a:off x="274320" y="1920240"/>
+            <a:ext cx="2157984" cy="201168"/>
+          </a:xfrm>
+          <a:prstGeom prst="rect">
+            <a:avLst/>
+          </a:prstGeom>
+          <a:noFill/>
+        </p:spPr>
+        <p:txBody>
+          <a:bodyPr wrap="square">
+            <a:spAutoFit/>
+          </a:bodyPr>
+          <a:lstStyle/>
+          <a:p>
+            <a:pPr algn="l">
+              <a:spcAft>
+                <a:spcPts val="300"/>
+              </a:spcAft>
+            </a:pPr>
+            <a:r>
+              <a:rPr sz="1100" b="1">
+                <a:solidFill>
+                  <a:srgbClr val="0D3B66"/>
+                </a:solidFill>
+                <a:latin typeface="Calibri"/>
+              </a:rPr>
+              <a:t>Pileta</a:t>
+            </a:r>
+          </a:p>
+        </p:txBody>
+      </p:sp>
+      <p:sp>
+        <p:nvSpPr>
+          <p:cNvPr id="27" name="Rounded Rectangle 26"/>
+          <p:cNvSpPr/>
+          <p:nvPr/>
+        </p:nvSpPr>
+        <p:spPr>
+          <a:xfrm>
+            <a:off x="2578608" y="1719072"/>
+            <a:ext cx="2286000" cy="621792"/>
+          </a:xfrm>
+          <a:prstGeom prst="roundRect">
+            <a:avLst>
+              <a:gd name="adj" fmla="val 8000"/>
+            </a:avLst>
+          </a:prstGeom>
+          <a:solidFill>
+            <a:srgbClr val="F5F7FA"/>
+          </a:solidFill>
+          <a:ln w="6350">
+            <a:solidFill>
+              <a:srgbClr val="A0783C"/>
+            </a:solidFill>
+          </a:ln>
+        </p:spPr>
+        <p:style>
+          <a:lnRef idx="1">
+            <a:schemeClr val="accent1"/>
+          </a:lnRef>
+          <a:fillRef idx="3">
+            <a:schemeClr val="accent1"/>
+          </a:fillRef>
+          <a:effectRef idx="2">
+            <a:schemeClr val="accent1"/>
+          </a:effectRef>
+          <a:fontRef idx="minor">
+            <a:schemeClr val="lt1"/>
+          </a:fontRef>
+        </p:style>
+        <p:txBody>
+          <a:bodyPr rtlCol="0" anchor="ctr"/>
+          <a:lstStyle/>
+          <a:p>
+            <a:pPr algn="ctr"/>
+          </a:p>
+        </p:txBody>
+      </p:sp>
+      <p:sp>
+        <p:nvSpPr>
+          <p:cNvPr id="28" name="TextBox 27"/>
+          <p:cNvSpPr txBox="1"/>
+          <p:nvPr/>
+        </p:nvSpPr>
+        <p:spPr>
+          <a:xfrm>
+            <a:off x="2651760" y="1755648"/>
+            <a:ext cx="2157984" cy="146304"/>
+          </a:xfrm>
+          <a:prstGeom prst="rect">
+            <a:avLst/>
+          </a:prstGeom>
+          <a:noFill/>
+        </p:spPr>
+        <p:txBody>
+          <a:bodyPr wrap="square">
+            <a:spAutoFit/>
+          </a:bodyPr>
+          <a:lstStyle/>
+          <a:p>
+            <a:pPr algn="l">
+              <a:spcAft>
+                <a:spcPts val="300"/>
+              </a:spcAft>
+            </a:pPr>
+            <a:r>
+              <a:rPr sz="900" b="1">
+                <a:solidFill>
+                  <a:srgbClr val="C9A227"/>
+                </a:solidFill>
+                <a:latin typeface="Calibri"/>
+              </a:rPr>
+              <a:t>000025-24</a:t>
+            </a:r>
+          </a:p>
+        </p:txBody>
+      </p:sp>
+      <p:sp>
+        <p:nvSpPr>
+          <p:cNvPr id="29" name="TextBox 28"/>
+          <p:cNvSpPr txBox="1"/>
+          <p:nvPr/>
+        </p:nvSpPr>
+        <p:spPr>
+          <a:xfrm>
+            <a:off x="2651760" y="1920240"/>
+            <a:ext cx="2157984" cy="201168"/>
+          </a:xfrm>
+          <a:prstGeom prst="rect">
+            <a:avLst/>
+          </a:prstGeom>
+          <a:noFill/>
+        </p:spPr>
+        <p:txBody>
+          <a:bodyPr wrap="square">
+            <a:spAutoFit/>
+          </a:bodyPr>
+          <a:lstStyle/>
+          <a:p>
+            <a:pPr algn="l">
+              <a:spcAft>
+                <a:spcPts val="300"/>
+              </a:spcAft>
+            </a:pPr>
+            <a:r>
+              <a:rPr sz="1100" b="1">
+                <a:solidFill>
+                  <a:srgbClr val="0D3B66"/>
+                </a:solidFill>
+                <a:latin typeface="Calibri"/>
+              </a:rPr>
+              <a:t>Cascada</a:t>
+            </a:r>
+          </a:p>
+        </p:txBody>
+      </p:sp>
+      <p:sp>
+        <p:nvSpPr>
+          <p:cNvPr id="30" name="Rounded Rectangle 29"/>
+          <p:cNvSpPr/>
+          <p:nvPr/>
+        </p:nvSpPr>
+        <p:spPr>
+          <a:xfrm>
+            <a:off x="4956048" y="1719072"/>
+            <a:ext cx="2286000" cy="621792"/>
+          </a:xfrm>
+          <a:prstGeom prst="roundRect">
+            <a:avLst>
+              <a:gd name="adj" fmla="val 8000"/>
+            </a:avLst>
+          </a:prstGeom>
+          <a:solidFill>
+            <a:srgbClr val="FFF9EB"/>
+          </a:solidFill>
+          <a:ln w="6350">
+            <a:solidFill>
+              <a:srgbClr val="C45C26"/>
+            </a:solidFill>
+          </a:ln>
+        </p:spPr>
+        <p:style>
+          <a:lnRef idx="1">
+            <a:schemeClr val="accent1"/>
+          </a:lnRef>
+          <a:fillRef idx="3">
+            <a:schemeClr val="accent1"/>
+          </a:fillRef>
+          <a:effectRef idx="2">
+            <a:schemeClr val="accent1"/>
+          </a:effectRef>
+          <a:fontRef idx="minor">
+            <a:schemeClr val="lt1"/>
+          </a:fontRef>
+        </p:style>
+        <p:txBody>
+          <a:bodyPr rtlCol="0" anchor="ctr"/>
+          <a:lstStyle/>
+          <a:p>
+            <a:pPr algn="ctr"/>
+          </a:p>
+        </p:txBody>
+      </p:sp>
+      <p:sp>
+        <p:nvSpPr>
+          <p:cNvPr id="31" name="TextBox 30"/>
+          <p:cNvSpPr txBox="1"/>
+          <p:nvPr/>
+        </p:nvSpPr>
+        <p:spPr>
+          <a:xfrm>
+            <a:off x="5029200" y="1755648"/>
+            <a:ext cx="2157984" cy="146304"/>
+          </a:xfrm>
+          <a:prstGeom prst="rect">
+            <a:avLst/>
+          </a:prstGeom>
+          <a:noFill/>
+        </p:spPr>
+        <p:txBody>
+          <a:bodyPr wrap="square">
+            <a:spAutoFit/>
+          </a:bodyPr>
+          <a:lstStyle/>
+          <a:p>
+            <a:pPr algn="l">
+              <a:spcAft>
+                <a:spcPts val="300"/>
+              </a:spcAft>
+            </a:pPr>
+            <a:r>
+              <a:rPr sz="900" b="1">
+                <a:solidFill>
+                  <a:srgbClr val="C9A227"/>
+                </a:solidFill>
+                <a:latin typeface="Calibri"/>
+              </a:rPr>
+              <a:t>000025-27</a:t>
+            </a:r>
+          </a:p>
+        </p:txBody>
+      </p:sp>
+      <p:sp>
+        <p:nvSpPr>
+          <p:cNvPr id="32" name="TextBox 31"/>
+          <p:cNvSpPr txBox="1"/>
+          <p:nvPr/>
+        </p:nvSpPr>
+        <p:spPr>
+          <a:xfrm>
+            <a:off x="5029200" y="1920240"/>
+            <a:ext cx="2157984" cy="201168"/>
+          </a:xfrm>
+          <a:prstGeom prst="rect">
+            <a:avLst/>
+          </a:prstGeom>
+          <a:noFill/>
+        </p:spPr>
+        <p:txBody>
+          <a:bodyPr wrap="square">
+            <a:spAutoFit/>
+          </a:bodyPr>
+          <a:lstStyle/>
+          <a:p>
+            <a:pPr algn="l">
+              <a:spcAft>
+                <a:spcPts val="300"/>
+              </a:spcAft>
+            </a:pPr>
+            <a:r>
+              <a:rPr sz="1100" b="1">
+                <a:solidFill>
+                  <a:srgbClr val="0D3B66"/>
+                </a:solidFill>
+                <a:latin typeface="Calibri"/>
+              </a:rPr>
+              <a:t>Distrito Lujo</a:t>
+            </a:r>
+          </a:p>
+        </p:txBody>
+      </p:sp>
+      <p:sp>
+        <p:nvSpPr>
+          <p:cNvPr id="33" name="TextBox 32"/>
+          <p:cNvSpPr txBox="1"/>
+          <p:nvPr/>
+        </p:nvSpPr>
+        <p:spPr>
+          <a:xfrm>
+            <a:off x="5029200" y="2139696"/>
+            <a:ext cx="2157984" cy="164592"/>
+          </a:xfrm>
+          <a:prstGeom prst="rect">
+            <a:avLst/>
+          </a:prstGeom>
+          <a:noFill/>
+        </p:spPr>
+        <p:txBody>
+          <a:bodyPr wrap="square">
+            <a:spAutoFit/>
+          </a:bodyPr>
+          <a:lstStyle/>
+          <a:p>
+            <a:pPr algn="l">
+              <a:spcAft>
+                <a:spcPts val="300"/>
+              </a:spcAft>
+            </a:pPr>
+            <a:r>
+              <a:rPr sz="800" b="0">
+                <a:solidFill>
+                  <a:srgbClr val="5A5A5A"/>
+                </a:solidFill>
+                <a:latin typeface="Calibri"/>
+              </a:rPr>
+              <a:t>cadena · no suma</a:t>
+            </a:r>
+          </a:p>
+        </p:txBody>
+      </p:sp>
+      <p:sp>
+        <p:nvSpPr>
+          <p:cNvPr id="34" name="Rounded Rectangle 33"/>
+          <p:cNvSpPr/>
+          <p:nvPr/>
+        </p:nvSpPr>
+        <p:spPr>
+          <a:xfrm>
+            <a:off x="7333488" y="1719072"/>
+            <a:ext cx="2286000" cy="621792"/>
+          </a:xfrm>
+          <a:prstGeom prst="roundRect">
+            <a:avLst>
+              <a:gd name="adj" fmla="val 8000"/>
+            </a:avLst>
+          </a:prstGeom>
+          <a:solidFill>
+            <a:srgbClr val="FFF9EB"/>
+          </a:solidFill>
+          <a:ln w="6350">
+            <a:solidFill>
+              <a:srgbClr val="C9A227"/>
+            </a:solidFill>
+          </a:ln>
+        </p:spPr>
+        <p:style>
+          <a:lnRef idx="1">
+            <a:schemeClr val="accent1"/>
+          </a:lnRef>
+          <a:fillRef idx="3">
+            <a:schemeClr val="accent1"/>
+          </a:fillRef>
+          <a:effectRef idx="2">
+            <a:schemeClr val="accent1"/>
+          </a:effectRef>
+          <a:fontRef idx="minor">
+            <a:schemeClr val="lt1"/>
+          </a:fontRef>
+        </p:style>
+        <p:txBody>
+          <a:bodyPr rtlCol="0" anchor="ctr"/>
+          <a:lstStyle/>
+          <a:p>
+            <a:pPr algn="ctr"/>
+          </a:p>
+        </p:txBody>
+      </p:sp>
+      <p:sp>
+        <p:nvSpPr>
+          <p:cNvPr id="35" name="TextBox 34"/>
+          <p:cNvSpPr txBox="1"/>
+          <p:nvPr/>
+        </p:nvSpPr>
+        <p:spPr>
+          <a:xfrm>
+            <a:off x="7406640" y="1755648"/>
+            <a:ext cx="2157984" cy="146304"/>
+          </a:xfrm>
+          <a:prstGeom prst="rect">
+            <a:avLst/>
+          </a:prstGeom>
+          <a:noFill/>
+        </p:spPr>
+        <p:txBody>
+          <a:bodyPr wrap="square">
+            <a:spAutoFit/>
+          </a:bodyPr>
+          <a:lstStyle/>
+          <a:p>
+            <a:pPr algn="l">
+              <a:spcAft>
+                <a:spcPts val="300"/>
+              </a:spcAft>
+            </a:pPr>
+            <a:r>
+              <a:rPr sz="900" b="1">
+                <a:solidFill>
+                  <a:srgbClr val="C9A227"/>
+                </a:solidFill>
+                <a:latin typeface="Calibri"/>
+              </a:rPr>
+              <a:t>000025-35</a:t>
+            </a:r>
+          </a:p>
+        </p:txBody>
+      </p:sp>
+      <p:sp>
+        <p:nvSpPr>
+          <p:cNvPr id="36" name="TextBox 35"/>
+          <p:cNvSpPr txBox="1"/>
+          <p:nvPr/>
+        </p:nvSpPr>
+        <p:spPr>
+          <a:xfrm>
+            <a:off x="7406640" y="1920240"/>
+            <a:ext cx="2157984" cy="201168"/>
+          </a:xfrm>
+          <a:prstGeom prst="rect">
+            <a:avLst/>
+          </a:prstGeom>
+          <a:noFill/>
+        </p:spPr>
+        <p:txBody>
+          <a:bodyPr wrap="square">
+            <a:spAutoFit/>
+          </a:bodyPr>
+          <a:lstStyle/>
+          <a:p>
+            <a:pPr algn="l">
+              <a:spcAft>
+                <a:spcPts val="300"/>
+              </a:spcAft>
+            </a:pPr>
+            <a:r>
+              <a:rPr sz="1100" b="1">
+                <a:solidFill>
+                  <a:srgbClr val="0D3B66"/>
+                </a:solidFill>
+                <a:latin typeface="Calibri"/>
+              </a:rPr>
+              <a:t>Bazar Gourmet</a:t>
+            </a:r>
+          </a:p>
+        </p:txBody>
+      </p:sp>
+      <p:sp>
+        <p:nvSpPr>
+          <p:cNvPr id="37" name="TextBox 36"/>
+          <p:cNvSpPr txBox="1"/>
+          <p:nvPr/>
+        </p:nvSpPr>
+        <p:spPr>
+          <a:xfrm>
+            <a:off x="7406640" y="2139696"/>
+            <a:ext cx="2157984" cy="164592"/>
+          </a:xfrm>
+          <a:prstGeom prst="rect">
+            <a:avLst/>
+          </a:prstGeom>
+          <a:noFill/>
+        </p:spPr>
+        <p:txBody>
+          <a:bodyPr wrap="square">
+            <a:spAutoFit/>
+          </a:bodyPr>
+          <a:lstStyle/>
+          <a:p>
+            <a:pPr algn="l">
+              <a:spcAft>
+                <a:spcPts val="300"/>
+              </a:spcAft>
+            </a:pPr>
+            <a:r>
+              <a:rPr sz="800" b="0">
+                <a:solidFill>
+                  <a:srgbClr val="5A5A5A"/>
+                </a:solidFill>
+                <a:latin typeface="Calibri"/>
+              </a:rPr>
+              <a:t>sale de 27</a:t>
+            </a:r>
+          </a:p>
+        </p:txBody>
+      </p:sp>
+      <p:sp>
+        <p:nvSpPr>
+          <p:cNvPr id="38" name="Rounded Rectangle 37"/>
+          <p:cNvSpPr/>
+          <p:nvPr/>
+        </p:nvSpPr>
+        <p:spPr>
+          <a:xfrm>
+            <a:off x="9710928" y="1719072"/>
+            <a:ext cx="2286000" cy="621792"/>
+          </a:xfrm>
+          <a:prstGeom prst="roundRect">
+            <a:avLst>
+              <a:gd name="adj" fmla="val 8000"/>
+            </a:avLst>
+          </a:prstGeom>
+          <a:solidFill>
+            <a:srgbClr val="FFF9EB"/>
+          </a:solidFill>
+          <a:ln w="6350">
+            <a:solidFill>
+              <a:srgbClr val="5A8C6E"/>
+            </a:solidFill>
+          </a:ln>
+        </p:spPr>
+        <p:style>
+          <a:lnRef idx="1">
+            <a:schemeClr val="accent1"/>
+          </a:lnRef>
+          <a:fillRef idx="3">
+            <a:schemeClr val="accent1"/>
+          </a:fillRef>
+          <a:effectRef idx="2">
+            <a:schemeClr val="accent1"/>
+          </a:effectRef>
+          <a:fontRef idx="minor">
+            <a:schemeClr val="lt1"/>
+          </a:fontRef>
+        </p:style>
+        <p:txBody>
+          <a:bodyPr rtlCol="0" anchor="ctr"/>
+          <a:lstStyle/>
+          <a:p>
+            <a:pPr algn="ctr"/>
+          </a:p>
+        </p:txBody>
+      </p:sp>
+      <p:sp>
+        <p:nvSpPr>
+          <p:cNvPr id="39" name="TextBox 38"/>
+          <p:cNvSpPr txBox="1"/>
+          <p:nvPr/>
+        </p:nvSpPr>
+        <p:spPr>
+          <a:xfrm>
+            <a:off x="9784080" y="1755648"/>
+            <a:ext cx="2157984" cy="146304"/>
+          </a:xfrm>
+          <a:prstGeom prst="rect">
+            <a:avLst/>
+          </a:prstGeom>
+          <a:noFill/>
+        </p:spPr>
+        <p:txBody>
+          <a:bodyPr wrap="square">
+            <a:spAutoFit/>
+          </a:bodyPr>
+          <a:lstStyle/>
+          <a:p>
+            <a:pPr algn="l">
+              <a:spcAft>
+                <a:spcPts val="300"/>
+              </a:spcAft>
+            </a:pPr>
+            <a:r>
+              <a:rPr sz="900" b="1">
+                <a:solidFill>
+                  <a:srgbClr val="C9A227"/>
+                </a:solidFill>
+                <a:latin typeface="Calibri"/>
+              </a:rPr>
+              <a:t>000025-36</a:t>
+            </a:r>
+          </a:p>
+        </p:txBody>
+      </p:sp>
+      <p:sp>
+        <p:nvSpPr>
+          <p:cNvPr id="40" name="TextBox 39"/>
+          <p:cNvSpPr txBox="1"/>
+          <p:nvPr/>
+        </p:nvSpPr>
+        <p:spPr>
+          <a:xfrm>
+            <a:off x="9784080" y="1920240"/>
+            <a:ext cx="2157984" cy="201168"/>
+          </a:xfrm>
+          <a:prstGeom prst="rect">
+            <a:avLst/>
+          </a:prstGeom>
+          <a:noFill/>
+        </p:spPr>
+        <p:txBody>
+          <a:bodyPr wrap="square">
+            <a:spAutoFit/>
+          </a:bodyPr>
+          <a:lstStyle/>
+          <a:p>
+            <a:pPr algn="l">
+              <a:spcAft>
+                <a:spcPts val="300"/>
+              </a:spcAft>
+            </a:pPr>
+            <a:r>
+              <a:rPr sz="1100" b="1">
+                <a:solidFill>
+                  <a:srgbClr val="0D3B66"/>
+                </a:solidFill>
+                <a:latin typeface="Calibri"/>
+              </a:rPr>
+              <a:t>DL Kennedy</a:t>
+            </a:r>
+          </a:p>
+        </p:txBody>
+      </p:sp>
+      <p:sp>
+        <p:nvSpPr>
+          <p:cNvPr id="41" name="TextBox 40"/>
+          <p:cNvSpPr txBox="1"/>
+          <p:nvPr/>
+        </p:nvSpPr>
+        <p:spPr>
+          <a:xfrm>
+            <a:off x="9784080" y="2139696"/>
+            <a:ext cx="2157984" cy="164592"/>
+          </a:xfrm>
+          <a:prstGeom prst="rect">
+            <a:avLst/>
+          </a:prstGeom>
+          <a:noFill/>
+        </p:spPr>
+        <p:txBody>
+          <a:bodyPr wrap="square">
+            <a:spAutoFit/>
+          </a:bodyPr>
+          <a:lstStyle/>
+          <a:p>
+            <a:pPr algn="l">
+              <a:spcAft>
+                <a:spcPts val="300"/>
+              </a:spcAft>
+            </a:pPr>
+            <a:r>
+              <a:rPr sz="800" b="0">
+                <a:solidFill>
+                  <a:srgbClr val="5A5A5A"/>
+                </a:solidFill>
+                <a:latin typeface="Calibri"/>
+              </a:rPr>
+              <a:t>sale de 27</a:t>
+            </a:r>
+          </a:p>
+        </p:txBody>
+      </p:sp>
+      <p:sp>
+        <p:nvSpPr>
+          <p:cNvPr id="42" name="Rounded Rectangle 41"/>
+          <p:cNvSpPr/>
+          <p:nvPr/>
+        </p:nvSpPr>
+        <p:spPr>
+          <a:xfrm>
+            <a:off x="201168" y="2432304"/>
+            <a:ext cx="7973568" cy="3182111"/>
+          </a:xfrm>
+          <a:prstGeom prst="roundRect">
+            <a:avLst>
+              <a:gd name="adj" fmla="val 8000"/>
+            </a:avLst>
+          </a:prstGeom>
+          <a:solidFill>
+            <a:srgbClr val="F5F7FA"/>
+          </a:solidFill>
+          <a:ln>
+            <a:noFill/>
+          </a:ln>
+        </p:spPr>
+        <p:style>
+          <a:lnRef idx="1">
+            <a:schemeClr val="accent1"/>
+          </a:lnRef>
+          <a:fillRef idx="3">
+            <a:schemeClr val="accent1"/>
+          </a:fillRef>
+          <a:effectRef idx="2">
+            <a:schemeClr val="accent1"/>
+          </a:effectRef>
+          <a:fontRef idx="minor">
+            <a:schemeClr val="lt1"/>
+          </a:fontRef>
+        </p:style>
+        <p:txBody>
+          <a:bodyPr rtlCol="0" anchor="ctr"/>
+          <a:lstStyle/>
+          <a:p>
+            <a:pPr algn="ctr"/>
+          </a:p>
+        </p:txBody>
+      </p:sp>
+      <p:pic>
+        <p:nvPicPr>
+          <p:cNvPr id="43" name="Picture 42" descr="pak_mensual_may_ago.png"/>
+          <p:cNvPicPr>
+            <a:picLocks noChangeAspect="1"/>
+          </p:cNvPicPr>
+          <p:nvPr/>
+        </p:nvPicPr>
+        <p:blipFill>
+          <a:blip r:embed="rId3"/>
+          <a:stretch>
+            <a:fillRect/>
+          </a:stretch>
+        </p:blipFill>
+        <p:spPr>
+          <a:xfrm>
+            <a:off x="605863" y="2487168"/>
+            <a:ext cx="7164176" cy="3072383"/>
+          </a:xfrm>
+          <a:prstGeom prst="rect">
+            <a:avLst/>
+          </a:prstGeom>
+        </p:spPr>
+      </p:pic>
+      <p:sp>
+        <p:nvSpPr>
+          <p:cNvPr id="44" name="Rounded Rectangle 43"/>
+          <p:cNvSpPr/>
+          <p:nvPr/>
+        </p:nvSpPr>
+        <p:spPr>
+          <a:xfrm>
+            <a:off x="8302752" y="2432304"/>
+            <a:ext cx="3675887" cy="3182111"/>
+          </a:xfrm>
+          <a:prstGeom prst="roundRect">
+            <a:avLst>
+              <a:gd name="adj" fmla="val 8000"/>
+            </a:avLst>
+          </a:prstGeom>
+          <a:solidFill>
+            <a:srgbClr val="FFFFFF"/>
+          </a:solidFill>
+          <a:ln w="6350">
+            <a:solidFill>
+              <a:srgbClr val="1F77B4"/>
+            </a:solidFill>
+          </a:ln>
+        </p:spPr>
+        <p:style>
+          <a:lnRef idx="1">
+            <a:schemeClr val="accent1"/>
+          </a:lnRef>
+          <a:fillRef idx="3">
+            <a:schemeClr val="accent1"/>
+          </a:fillRef>
+          <a:effectRef idx="2">
+            <a:schemeClr val="accent1"/>
+          </a:effectRef>
+          <a:fontRef idx="minor">
+            <a:schemeClr val="lt1"/>
+          </a:fontRef>
+        </p:style>
+        <p:txBody>
+          <a:bodyPr rtlCol="0" anchor="ctr"/>
+          <a:lstStyle/>
+          <a:p>
+            <a:pPr algn="ctr"/>
+          </a:p>
+        </p:txBody>
+      </p:sp>
+      <p:sp>
+        <p:nvSpPr>
+          <p:cNvPr id="45" name="TextBox 44"/>
+          <p:cNvSpPr txBox="1"/>
+          <p:nvPr/>
+        </p:nvSpPr>
+        <p:spPr>
+          <a:xfrm>
+            <a:off x="8430768" y="2478024"/>
+            <a:ext cx="3419856" cy="164592"/>
+          </a:xfrm>
+          <a:prstGeom prst="rect">
+            <a:avLst/>
+          </a:prstGeom>
+          <a:noFill/>
+        </p:spPr>
+        <p:txBody>
+          <a:bodyPr wrap="square">
+            <a:spAutoFit/>
+          </a:bodyPr>
+          <a:lstStyle/>
+          <a:p>
+            <a:pPr algn="l">
+              <a:spcAft>
+                <a:spcPts val="300"/>
+              </a:spcAft>
+            </a:pPr>
+            <a:r>
+              <a:rPr sz="1100" b="1">
+                <a:solidFill>
+                  <a:srgbClr val="1F77B4"/>
+                </a:solidFill>
+                <a:latin typeface="Calibri"/>
+              </a:rPr>
+              <a:t>JULIO · cabecera</a:t>
+            </a:r>
+          </a:p>
+        </p:txBody>
+      </p:sp>
+      <p:sp>
+        <p:nvSpPr>
+          <p:cNvPr id="46" name="TextBox 45"/>
+          <p:cNvSpPr txBox="1"/>
+          <p:nvPr/>
+        </p:nvSpPr>
+        <p:spPr>
+          <a:xfrm>
+            <a:off x="8430768" y="2642616"/>
+            <a:ext cx="3419856" cy="201168"/>
+          </a:xfrm>
+          <a:prstGeom prst="rect">
+            <a:avLst/>
+          </a:prstGeom>
+          <a:noFill/>
+        </p:spPr>
+        <p:txBody>
+          <a:bodyPr wrap="square">
+            <a:spAutoFit/>
+          </a:bodyPr>
+          <a:lstStyle/>
+          <a:p>
+            <a:pPr algn="l">
+              <a:spcAft>
+                <a:spcPts val="300"/>
+              </a:spcAft>
+            </a:pPr>
+            <a:r>
+              <a:rPr sz="1200" b="0">
+                <a:solidFill>
+                  <a:srgbClr val="5A5A5A"/>
+                </a:solidFill>
+                <a:latin typeface="Calibri"/>
+              </a:rPr>
+              <a:t>El recinto sumó 31.239 m³</a:t>
+            </a:r>
+          </a:p>
+        </p:txBody>
+      </p:sp>
+      <p:sp>
+        <p:nvSpPr>
+          <p:cNvPr id="47" name="Rounded Rectangle 46"/>
+          <p:cNvSpPr/>
+          <p:nvPr/>
+        </p:nvSpPr>
+        <p:spPr>
+          <a:xfrm>
+            <a:off x="8430768" y="2852928"/>
+            <a:ext cx="3419856" cy="347471"/>
+          </a:xfrm>
+          <a:prstGeom prst="roundRect">
+            <a:avLst>
+              <a:gd name="adj" fmla="val 8000"/>
+            </a:avLst>
+          </a:prstGeom>
+          <a:solidFill>
+            <a:srgbClr val="F5F7FA"/>
+          </a:solidFill>
+          <a:ln w="6350">
+            <a:solidFill>
+              <a:srgbClr val="8C5A5A"/>
+            </a:solidFill>
+          </a:ln>
+        </p:spPr>
+        <p:style>
+          <a:lnRef idx="1">
+            <a:schemeClr val="accent1"/>
+          </a:lnRef>
+          <a:fillRef idx="3">
+            <a:schemeClr val="accent1"/>
+          </a:fillRef>
+          <a:effectRef idx="2">
+            <a:schemeClr val="accent1"/>
+          </a:effectRef>
+          <a:fontRef idx="minor">
+            <a:schemeClr val="lt1"/>
+          </a:fontRef>
+        </p:style>
+        <p:txBody>
+          <a:bodyPr rtlCol="0" anchor="ctr"/>
+          <a:lstStyle/>
+          <a:p>
+            <a:pPr algn="ctr"/>
+          </a:p>
+        </p:txBody>
+      </p:sp>
+      <p:sp>
+        <p:nvSpPr>
+          <p:cNvPr id="48" name="TextBox 47"/>
+          <p:cNvSpPr txBox="1"/>
+          <p:nvPr/>
+        </p:nvSpPr>
+        <p:spPr>
+          <a:xfrm>
+            <a:off x="8540496" y="2880360"/>
+            <a:ext cx="3200400" cy="145938"/>
+          </a:xfrm>
+          <a:prstGeom prst="rect">
+            <a:avLst/>
+          </a:prstGeom>
+          <a:noFill/>
+        </p:spPr>
+        <p:txBody>
+          <a:bodyPr wrap="square">
+            <a:spAutoFit/>
+          </a:bodyPr>
+          <a:lstStyle/>
+          <a:p>
+            <a:pPr algn="l">
+              <a:spcAft>
+                <a:spcPts val="300"/>
+              </a:spcAft>
+            </a:pPr>
+            <a:r>
+              <a:rPr sz="1000" b="1">
+                <a:solidFill>
+                  <a:srgbClr val="8C5A5A"/>
+                </a:solidFill>
+                <a:latin typeface="Calibri"/>
+              </a:rPr>
+              <a:t>Sandía Antigua</a:t>
+            </a:r>
+          </a:p>
+        </p:txBody>
+      </p:sp>
+      <p:sp>
+        <p:nvSpPr>
+          <p:cNvPr id="49" name="TextBox 48"/>
+          <p:cNvSpPr txBox="1"/>
+          <p:nvPr/>
+        </p:nvSpPr>
+        <p:spPr>
+          <a:xfrm>
+            <a:off x="8540496" y="2998866"/>
+            <a:ext cx="3200400" cy="180685"/>
+          </a:xfrm>
+          <a:prstGeom prst="rect">
+            <a:avLst/>
+          </a:prstGeom>
+          <a:noFill/>
+        </p:spPr>
+        <p:txBody>
+          <a:bodyPr wrap="square">
+            <a:spAutoFit/>
+          </a:bodyPr>
+          <a:lstStyle/>
+          <a:p>
+            <a:pPr algn="l">
+              <a:spcAft>
+                <a:spcPts val="300"/>
+              </a:spcAft>
+            </a:pPr>
+            <a:r>
+              <a:rPr sz="1200" b="1">
+                <a:solidFill>
+                  <a:srgbClr val="0D3B66"/>
+                </a:solidFill>
+                <a:latin typeface="Calibri"/>
+              </a:rPr>
+              <a:t>13.661 m³    43,7 %</a:t>
+            </a:r>
+          </a:p>
+        </p:txBody>
+      </p:sp>
+      <p:sp>
+        <p:nvSpPr>
+          <p:cNvPr id="50" name="Rounded Rectangle 49"/>
+          <p:cNvSpPr/>
+          <p:nvPr/>
+        </p:nvSpPr>
+        <p:spPr>
+          <a:xfrm>
+            <a:off x="8430768" y="3236976"/>
+            <a:ext cx="3419856" cy="347471"/>
+          </a:xfrm>
+          <a:prstGeom prst="roundRect">
+            <a:avLst>
+              <a:gd name="adj" fmla="val 8000"/>
+            </a:avLst>
+          </a:prstGeom>
+          <a:solidFill>
+            <a:srgbClr val="F5F7FA"/>
+          </a:solidFill>
+          <a:ln w="6350">
+            <a:solidFill>
+              <a:srgbClr val="508282"/>
+            </a:solidFill>
+          </a:ln>
+        </p:spPr>
+        <p:style>
+          <a:lnRef idx="1">
+            <a:schemeClr val="accent1"/>
+          </a:lnRef>
+          <a:fillRef idx="3">
+            <a:schemeClr val="accent1"/>
+          </a:fillRef>
+          <a:effectRef idx="2">
+            <a:schemeClr val="accent1"/>
+          </a:effectRef>
+          <a:fontRef idx="minor">
+            <a:schemeClr val="lt1"/>
+          </a:fontRef>
+        </p:style>
+        <p:txBody>
+          <a:bodyPr rtlCol="0" anchor="ctr"/>
+          <a:lstStyle/>
+          <a:p>
+            <a:pPr algn="ctr"/>
+          </a:p>
+        </p:txBody>
+      </p:sp>
+      <p:sp>
+        <p:nvSpPr>
+          <p:cNvPr id="51" name="TextBox 50"/>
+          <p:cNvSpPr txBox="1"/>
+          <p:nvPr/>
+        </p:nvSpPr>
+        <p:spPr>
+          <a:xfrm>
+            <a:off x="8540496" y="3264408"/>
+            <a:ext cx="3200400" cy="145938"/>
+          </a:xfrm>
+          <a:prstGeom prst="rect">
+            <a:avLst/>
+          </a:prstGeom>
+          <a:noFill/>
+        </p:spPr>
+        <p:txBody>
+          <a:bodyPr wrap="square">
+            <a:spAutoFit/>
+          </a:bodyPr>
+          <a:lstStyle/>
+          <a:p>
+            <a:pPr algn="l">
+              <a:spcAft>
+                <a:spcPts val="300"/>
+              </a:spcAft>
+            </a:pPr>
+            <a:r>
+              <a:rPr sz="1000" b="1">
+                <a:solidFill>
+                  <a:srgbClr val="508282"/>
+                </a:solidFill>
+                <a:latin typeface="Calibri"/>
+              </a:rPr>
+              <a:t>Sandía Nueva</a:t>
+            </a:r>
+          </a:p>
+        </p:txBody>
+      </p:sp>
+      <p:sp>
+        <p:nvSpPr>
+          <p:cNvPr id="52" name="TextBox 51"/>
+          <p:cNvSpPr txBox="1"/>
+          <p:nvPr/>
+        </p:nvSpPr>
+        <p:spPr>
+          <a:xfrm>
+            <a:off x="8540496" y="3382914"/>
+            <a:ext cx="3200400" cy="180685"/>
+          </a:xfrm>
+          <a:prstGeom prst="rect">
+            <a:avLst/>
+          </a:prstGeom>
+          <a:noFill/>
+        </p:spPr>
+        <p:txBody>
+          <a:bodyPr wrap="square">
+            <a:spAutoFit/>
+          </a:bodyPr>
+          <a:lstStyle/>
+          <a:p>
+            <a:pPr algn="l">
+              <a:spcAft>
+                <a:spcPts val="300"/>
+              </a:spcAft>
+            </a:pPr>
+            <a:r>
+              <a:rPr sz="1200" b="1">
+                <a:solidFill>
+                  <a:srgbClr val="0D3B66"/>
+                </a:solidFill>
+                <a:latin typeface="Calibri"/>
+              </a:rPr>
+              <a:t>9.619 m³    30,8 %</a:t>
+            </a:r>
+          </a:p>
+        </p:txBody>
+      </p:sp>
+      <p:sp>
+        <p:nvSpPr>
+          <p:cNvPr id="53" name="Rounded Rectangle 52"/>
+          <p:cNvSpPr/>
+          <p:nvPr/>
+        </p:nvSpPr>
+        <p:spPr>
+          <a:xfrm>
+            <a:off x="8430768" y="3621024"/>
+            <a:ext cx="3419856" cy="347471"/>
+          </a:xfrm>
+          <a:prstGeom prst="roundRect">
+            <a:avLst>
+              <a:gd name="adj" fmla="val 8000"/>
+            </a:avLst>
+          </a:prstGeom>
+          <a:solidFill>
+            <a:srgbClr val="F5F7FA"/>
+          </a:solidFill>
+          <a:ln w="6350">
+            <a:solidFill>
+              <a:srgbClr val="5A8C6E"/>
+            </a:solidFill>
+          </a:ln>
+        </p:spPr>
+        <p:style>
+          <a:lnRef idx="1">
+            <a:schemeClr val="accent1"/>
+          </a:lnRef>
+          <a:fillRef idx="3">
+            <a:schemeClr val="accent1"/>
+          </a:fillRef>
+          <a:effectRef idx="2">
+            <a:schemeClr val="accent1"/>
+          </a:effectRef>
+          <a:fontRef idx="minor">
+            <a:schemeClr val="lt1"/>
+          </a:fontRef>
+        </p:style>
+        <p:txBody>
+          <a:bodyPr rtlCol="0" anchor="ctr"/>
+          <a:lstStyle/>
+          <a:p>
+            <a:pPr algn="ctr"/>
+          </a:p>
+        </p:txBody>
+      </p:sp>
+      <p:sp>
+        <p:nvSpPr>
+          <p:cNvPr id="54" name="TextBox 53"/>
+          <p:cNvSpPr txBox="1"/>
+          <p:nvPr/>
+        </p:nvSpPr>
+        <p:spPr>
+          <a:xfrm>
+            <a:off x="8540496" y="3648456"/>
+            <a:ext cx="3200400" cy="145938"/>
+          </a:xfrm>
+          <a:prstGeom prst="rect">
+            <a:avLst/>
+          </a:prstGeom>
+          <a:noFill/>
+        </p:spPr>
+        <p:txBody>
+          <a:bodyPr wrap="square">
+            <a:spAutoFit/>
+          </a:bodyPr>
+          <a:lstStyle/>
+          <a:p>
+            <a:pPr algn="l">
+              <a:spcAft>
+                <a:spcPts val="300"/>
+              </a:spcAft>
+            </a:pPr>
+            <a:r>
+              <a:rPr sz="1000" b="1">
+                <a:solidFill>
+                  <a:srgbClr val="5A8C6E"/>
+                </a:solidFill>
+                <a:latin typeface="Calibri"/>
+              </a:rPr>
+              <a:t>Locales Gast.</a:t>
+            </a:r>
+          </a:p>
+        </p:txBody>
+      </p:sp>
+      <p:sp>
+        <p:nvSpPr>
+          <p:cNvPr id="55" name="TextBox 54"/>
+          <p:cNvSpPr txBox="1"/>
+          <p:nvPr/>
+        </p:nvSpPr>
+        <p:spPr>
+          <a:xfrm>
+            <a:off x="8540496" y="3766962"/>
+            <a:ext cx="3200400" cy="180685"/>
+          </a:xfrm>
+          <a:prstGeom prst="rect">
+            <a:avLst/>
+          </a:prstGeom>
+          <a:noFill/>
+        </p:spPr>
+        <p:txBody>
+          <a:bodyPr wrap="square">
+            <a:spAutoFit/>
+          </a:bodyPr>
+          <a:lstStyle/>
+          <a:p>
+            <a:pPr algn="l">
+              <a:spcAft>
+                <a:spcPts val="300"/>
+              </a:spcAft>
+            </a:pPr>
+            <a:r>
+              <a:rPr sz="1200" b="1">
+                <a:solidFill>
+                  <a:srgbClr val="0D3B66"/>
+                </a:solidFill>
+                <a:latin typeface="Calibri"/>
+              </a:rPr>
+              <a:t>4.583 m³    14,7 %</a:t>
+            </a:r>
+          </a:p>
+        </p:txBody>
+      </p:sp>
+      <p:sp>
+        <p:nvSpPr>
+          <p:cNvPr id="56" name="Rounded Rectangle 55"/>
+          <p:cNvSpPr/>
+          <p:nvPr/>
+        </p:nvSpPr>
+        <p:spPr>
+          <a:xfrm>
+            <a:off x="8430768" y="4005072"/>
+            <a:ext cx="3419856" cy="347471"/>
+          </a:xfrm>
+          <a:prstGeom prst="roundRect">
+            <a:avLst>
+              <a:gd name="adj" fmla="val 8000"/>
+            </a:avLst>
+          </a:prstGeom>
+          <a:solidFill>
+            <a:srgbClr val="F5F7FA"/>
+          </a:solidFill>
+          <a:ln w="6350">
+            <a:solidFill>
+              <a:srgbClr val="7BA3C9"/>
+            </a:solidFill>
+          </a:ln>
+        </p:spPr>
+        <p:style>
+          <a:lnRef idx="1">
+            <a:schemeClr val="accent1"/>
+          </a:lnRef>
+          <a:fillRef idx="3">
+            <a:schemeClr val="accent1"/>
+          </a:fillRef>
+          <a:effectRef idx="2">
+            <a:schemeClr val="accent1"/>
+          </a:effectRef>
+          <a:fontRef idx="minor">
+            <a:schemeClr val="lt1"/>
+          </a:fontRef>
+        </p:style>
+        <p:txBody>
+          <a:bodyPr rtlCol="0" anchor="ctr"/>
+          <a:lstStyle/>
+          <a:p>
+            <a:pPr algn="ctr"/>
+          </a:p>
+        </p:txBody>
+      </p:sp>
+      <p:sp>
+        <p:nvSpPr>
+          <p:cNvPr id="57" name="TextBox 56"/>
+          <p:cNvSpPr txBox="1"/>
+          <p:nvPr/>
+        </p:nvSpPr>
+        <p:spPr>
+          <a:xfrm>
+            <a:off x="8540496" y="4032504"/>
+            <a:ext cx="3200400" cy="145938"/>
+          </a:xfrm>
+          <a:prstGeom prst="rect">
+            <a:avLst/>
+          </a:prstGeom>
+          <a:noFill/>
+        </p:spPr>
+        <p:txBody>
+          <a:bodyPr wrap="square">
+            <a:spAutoFit/>
+          </a:bodyPr>
+          <a:lstStyle/>
+          <a:p>
+            <a:pPr algn="l">
+              <a:spcAft>
+                <a:spcPts val="300"/>
+              </a:spcAft>
+            </a:pPr>
+            <a:r>
+              <a:rPr sz="1000" b="1">
+                <a:solidFill>
+                  <a:srgbClr val="7BA3C9"/>
+                </a:solidFill>
+                <a:latin typeface="Calibri"/>
+              </a:rPr>
+              <a:t>Matriz Andén</a:t>
+            </a:r>
+          </a:p>
+        </p:txBody>
+      </p:sp>
+      <p:sp>
+        <p:nvSpPr>
+          <p:cNvPr id="58" name="TextBox 57"/>
+          <p:cNvSpPr txBox="1"/>
+          <p:nvPr/>
+        </p:nvSpPr>
+        <p:spPr>
+          <a:xfrm>
+            <a:off x="8540496" y="4151010"/>
+            <a:ext cx="3200400" cy="180685"/>
+          </a:xfrm>
+          <a:prstGeom prst="rect">
+            <a:avLst/>
+          </a:prstGeom>
+          <a:noFill/>
+        </p:spPr>
+        <p:txBody>
+          <a:bodyPr wrap="square">
+            <a:spAutoFit/>
+          </a:bodyPr>
+          <a:lstStyle/>
+          <a:p>
+            <a:pPr algn="l">
+              <a:spcAft>
+                <a:spcPts val="300"/>
+              </a:spcAft>
+            </a:pPr>
+            <a:r>
+              <a:rPr sz="1200" b="1">
+                <a:solidFill>
+                  <a:srgbClr val="0D3B66"/>
+                </a:solidFill>
+                <a:latin typeface="Calibri"/>
+              </a:rPr>
+              <a:t>3.086 m³    9,9 %</a:t>
+            </a:r>
+          </a:p>
+        </p:txBody>
+      </p:sp>
+      <p:sp>
+        <p:nvSpPr>
+          <p:cNvPr id="59" name="Rounded Rectangle 58"/>
+          <p:cNvSpPr/>
+          <p:nvPr/>
+        </p:nvSpPr>
+        <p:spPr>
+          <a:xfrm>
+            <a:off x="8430768" y="4389120"/>
+            <a:ext cx="3419856" cy="347471"/>
+          </a:xfrm>
+          <a:prstGeom prst="roundRect">
+            <a:avLst>
+              <a:gd name="adj" fmla="val 8000"/>
+            </a:avLst>
+          </a:prstGeom>
+          <a:solidFill>
+            <a:srgbClr val="F5F7FA"/>
+          </a:solidFill>
+          <a:ln w="6350">
+            <a:solidFill>
+              <a:srgbClr val="46648C"/>
+            </a:solidFill>
+          </a:ln>
+        </p:spPr>
+        <p:style>
+          <a:lnRef idx="1">
+            <a:schemeClr val="accent1"/>
+          </a:lnRef>
+          <a:fillRef idx="3">
+            <a:schemeClr val="accent1"/>
+          </a:fillRef>
+          <a:effectRef idx="2">
+            <a:schemeClr val="accent1"/>
+          </a:effectRef>
+          <a:fontRef idx="minor">
+            <a:schemeClr val="lt1"/>
+          </a:fontRef>
+        </p:style>
+        <p:txBody>
+          <a:bodyPr rtlCol="0" anchor="ctr"/>
+          <a:lstStyle/>
+          <a:p>
+            <a:pPr algn="ctr"/>
+          </a:p>
+        </p:txBody>
+      </p:sp>
+      <p:sp>
+        <p:nvSpPr>
+          <p:cNvPr id="60" name="TextBox 59"/>
+          <p:cNvSpPr txBox="1"/>
+          <p:nvPr/>
+        </p:nvSpPr>
+        <p:spPr>
+          <a:xfrm>
+            <a:off x="8540496" y="4416552"/>
+            <a:ext cx="3200400" cy="145938"/>
+          </a:xfrm>
+          <a:prstGeom prst="rect">
+            <a:avLst/>
+          </a:prstGeom>
+          <a:noFill/>
+        </p:spPr>
+        <p:txBody>
+          <a:bodyPr wrap="square">
+            <a:spAutoFit/>
+          </a:bodyPr>
+          <a:lstStyle/>
+          <a:p>
+            <a:pPr algn="l">
+              <a:spcAft>
+                <a:spcPts val="300"/>
+              </a:spcAft>
+            </a:pPr>
+            <a:r>
+              <a:rPr sz="1000" b="1">
+                <a:solidFill>
+                  <a:srgbClr val="46648C"/>
+                </a:solidFill>
+                <a:latin typeface="Calibri"/>
+              </a:rPr>
+              <a:t>Pileta</a:t>
+            </a:r>
+          </a:p>
+        </p:txBody>
+      </p:sp>
+      <p:sp>
+        <p:nvSpPr>
+          <p:cNvPr id="61" name="TextBox 60"/>
+          <p:cNvSpPr txBox="1"/>
+          <p:nvPr/>
+        </p:nvSpPr>
+        <p:spPr>
+          <a:xfrm>
+            <a:off x="8540496" y="4535058"/>
+            <a:ext cx="3200400" cy="180685"/>
+          </a:xfrm>
+          <a:prstGeom prst="rect">
+            <a:avLst/>
+          </a:prstGeom>
+          <a:noFill/>
+        </p:spPr>
+        <p:txBody>
+          <a:bodyPr wrap="square">
+            <a:spAutoFit/>
+          </a:bodyPr>
+          <a:lstStyle/>
+          <a:p>
+            <a:pPr algn="l">
+              <a:spcAft>
+                <a:spcPts val="300"/>
+              </a:spcAft>
+            </a:pPr>
+            <a:r>
+              <a:rPr sz="1200" b="1">
+                <a:solidFill>
+                  <a:srgbClr val="0D3B66"/>
+                </a:solidFill>
+                <a:latin typeface="Calibri"/>
+              </a:rPr>
+              <a:t>172 m³    0,5 %</a:t>
+            </a:r>
+          </a:p>
+        </p:txBody>
+      </p:sp>
+      <p:sp>
+        <p:nvSpPr>
+          <p:cNvPr id="62" name="Rounded Rectangle 61"/>
+          <p:cNvSpPr/>
+          <p:nvPr/>
+        </p:nvSpPr>
+        <p:spPr>
+          <a:xfrm>
+            <a:off x="8430768" y="4773168"/>
+            <a:ext cx="3419856" cy="347471"/>
+          </a:xfrm>
+          <a:prstGeom prst="roundRect">
+            <a:avLst>
+              <a:gd name="adj" fmla="val 8000"/>
+            </a:avLst>
+          </a:prstGeom>
+          <a:solidFill>
+            <a:srgbClr val="F5F7FA"/>
+          </a:solidFill>
+          <a:ln w="6350">
+            <a:solidFill>
+              <a:srgbClr val="0D3B66"/>
+            </a:solidFill>
+          </a:ln>
+        </p:spPr>
+        <p:style>
+          <a:lnRef idx="1">
+            <a:schemeClr val="accent1"/>
+          </a:lnRef>
+          <a:fillRef idx="3">
+            <a:schemeClr val="accent1"/>
+          </a:fillRef>
+          <a:effectRef idx="2">
+            <a:schemeClr val="accent1"/>
+          </a:effectRef>
+          <a:fontRef idx="minor">
+            <a:schemeClr val="lt1"/>
+          </a:fontRef>
+        </p:style>
+        <p:txBody>
+          <a:bodyPr rtlCol="0" anchor="ctr"/>
+          <a:lstStyle/>
+          <a:p>
+            <a:pPr algn="ctr"/>
+          </a:p>
+        </p:txBody>
+      </p:sp>
+      <p:sp>
+        <p:nvSpPr>
+          <p:cNvPr id="63" name="TextBox 62"/>
+          <p:cNvSpPr txBox="1"/>
+          <p:nvPr/>
+        </p:nvSpPr>
+        <p:spPr>
+          <a:xfrm>
+            <a:off x="8540496" y="4800600"/>
+            <a:ext cx="3200400" cy="145938"/>
+          </a:xfrm>
+          <a:prstGeom prst="rect">
+            <a:avLst/>
+          </a:prstGeom>
+          <a:noFill/>
+        </p:spPr>
+        <p:txBody>
+          <a:bodyPr wrap="square">
+            <a:spAutoFit/>
+          </a:bodyPr>
+          <a:lstStyle/>
+          <a:p>
+            <a:pPr algn="l">
+              <a:spcAft>
+                <a:spcPts val="300"/>
+              </a:spcAft>
+            </a:pPr>
+            <a:r>
+              <a:rPr sz="1000" b="1">
+                <a:solidFill>
+                  <a:srgbClr val="0D3B66"/>
+                </a:solidFill>
+                <a:latin typeface="Calibri"/>
+              </a:rPr>
+              <a:t>Restaurante</a:t>
+            </a:r>
+          </a:p>
+        </p:txBody>
+      </p:sp>
+      <p:sp>
+        <p:nvSpPr>
+          <p:cNvPr id="64" name="TextBox 63"/>
+          <p:cNvSpPr txBox="1"/>
+          <p:nvPr/>
+        </p:nvSpPr>
+        <p:spPr>
+          <a:xfrm>
+            <a:off x="8540496" y="4919106"/>
+            <a:ext cx="3200400" cy="180685"/>
+          </a:xfrm>
+          <a:prstGeom prst="rect">
+            <a:avLst/>
+          </a:prstGeom>
+          <a:noFill/>
+        </p:spPr>
+        <p:txBody>
+          <a:bodyPr wrap="square">
+            <a:spAutoFit/>
+          </a:bodyPr>
+          <a:lstStyle/>
+          <a:p>
+            <a:pPr algn="l">
+              <a:spcAft>
+                <a:spcPts val="300"/>
+              </a:spcAft>
+            </a:pPr>
+            <a:r>
+              <a:rPr sz="1200" b="1">
+                <a:solidFill>
+                  <a:srgbClr val="0D3B66"/>
+                </a:solidFill>
+                <a:latin typeface="Calibri"/>
+              </a:rPr>
+              <a:t>98 m³    0,3 %</a:t>
+            </a:r>
+          </a:p>
+        </p:txBody>
+      </p:sp>
+      <p:sp>
+        <p:nvSpPr>
+          <p:cNvPr id="65" name="Rounded Rectangle 64"/>
+          <p:cNvSpPr/>
+          <p:nvPr/>
+        </p:nvSpPr>
+        <p:spPr>
+          <a:xfrm>
+            <a:off x="8430768" y="5157216"/>
+            <a:ext cx="3419856" cy="347471"/>
+          </a:xfrm>
+          <a:prstGeom prst="roundRect">
+            <a:avLst>
+              <a:gd name="adj" fmla="val 8000"/>
+            </a:avLst>
+          </a:prstGeom>
+          <a:solidFill>
+            <a:srgbClr val="F5F7FA"/>
+          </a:solidFill>
+          <a:ln w="6350">
+            <a:solidFill>
+              <a:srgbClr val="A0783C"/>
+            </a:solidFill>
+          </a:ln>
+        </p:spPr>
+        <p:style>
+          <a:lnRef idx="1">
+            <a:schemeClr val="accent1"/>
+          </a:lnRef>
+          <a:fillRef idx="3">
+            <a:schemeClr val="accent1"/>
+          </a:fillRef>
+          <a:effectRef idx="2">
+            <a:schemeClr val="accent1"/>
+          </a:effectRef>
+          <a:fontRef idx="minor">
+            <a:schemeClr val="lt1"/>
+          </a:fontRef>
+        </p:style>
+        <p:txBody>
+          <a:bodyPr rtlCol="0" anchor="ctr"/>
+          <a:lstStyle/>
+          <a:p>
+            <a:pPr algn="ctr"/>
+          </a:p>
+        </p:txBody>
+      </p:sp>
+      <p:sp>
+        <p:nvSpPr>
+          <p:cNvPr id="66" name="TextBox 65"/>
+          <p:cNvSpPr txBox="1"/>
+          <p:nvPr/>
+        </p:nvSpPr>
+        <p:spPr>
+          <a:xfrm>
+            <a:off x="8540496" y="5184648"/>
+            <a:ext cx="3200400" cy="145938"/>
+          </a:xfrm>
+          <a:prstGeom prst="rect">
+            <a:avLst/>
+          </a:prstGeom>
+          <a:noFill/>
+        </p:spPr>
+        <p:txBody>
+          <a:bodyPr wrap="square">
+            <a:spAutoFit/>
+          </a:bodyPr>
+          <a:lstStyle/>
+          <a:p>
+            <a:pPr algn="l">
+              <a:spcAft>
+                <a:spcPts val="300"/>
+              </a:spcAft>
+            </a:pPr>
+            <a:r>
+              <a:rPr sz="1000" b="1">
+                <a:solidFill>
+                  <a:srgbClr val="A0783C"/>
+                </a:solidFill>
+                <a:latin typeface="Calibri"/>
+              </a:rPr>
+              <a:t>Cascada</a:t>
+            </a:r>
+          </a:p>
+        </p:txBody>
+      </p:sp>
+      <p:sp>
+        <p:nvSpPr>
+          <p:cNvPr id="67" name="TextBox 66"/>
+          <p:cNvSpPr txBox="1"/>
+          <p:nvPr/>
+        </p:nvSpPr>
+        <p:spPr>
+          <a:xfrm>
+            <a:off x="8540496" y="5303154"/>
+            <a:ext cx="3200400" cy="180685"/>
+          </a:xfrm>
+          <a:prstGeom prst="rect">
+            <a:avLst/>
+          </a:prstGeom>
+          <a:noFill/>
+        </p:spPr>
+        <p:txBody>
+          <a:bodyPr wrap="square">
+            <a:spAutoFit/>
+          </a:bodyPr>
+          <a:lstStyle/>
+          <a:p>
+            <a:pPr algn="l">
+              <a:spcAft>
+                <a:spcPts val="300"/>
+              </a:spcAft>
+            </a:pPr>
+            <a:r>
+              <a:rPr sz="1200" b="1">
+                <a:solidFill>
+                  <a:srgbClr val="0D3B66"/>
+                </a:solidFill>
+                <a:latin typeface="Calibri"/>
+              </a:rPr>
+              <a:t>20 m³    &lt;0,1 %</a:t>
+            </a:r>
+          </a:p>
+        </p:txBody>
+      </p:sp>
+      <p:sp>
+        <p:nvSpPr>
+          <p:cNvPr id="68" name="Rounded Rectangle 67"/>
+          <p:cNvSpPr/>
+          <p:nvPr/>
+        </p:nvSpPr>
+        <p:spPr>
+          <a:xfrm>
+            <a:off x="201168" y="5705856"/>
+            <a:ext cx="11795760" cy="438912"/>
+          </a:xfrm>
+          <a:prstGeom prst="roundRect">
+            <a:avLst>
+              <a:gd name="adj" fmla="val 8000"/>
+            </a:avLst>
+          </a:prstGeom>
+          <a:solidFill>
+            <a:srgbClr val="FFF9EB"/>
+          </a:solidFill>
+          <a:ln w="6350">
+            <a:solidFill>
+              <a:srgbClr val="C9A227"/>
+            </a:solidFill>
+          </a:ln>
+        </p:spPr>
+        <p:style>
+          <a:lnRef idx="1">
+            <a:schemeClr val="accent1"/>
+          </a:lnRef>
+          <a:fillRef idx="3">
+            <a:schemeClr val="accent1"/>
+          </a:fillRef>
+          <a:effectRef idx="2">
+            <a:schemeClr val="accent1"/>
+          </a:effectRef>
+          <a:fontRef idx="minor">
+            <a:schemeClr val="lt1"/>
+          </a:fontRef>
+        </p:style>
+        <p:txBody>
+          <a:bodyPr rtlCol="0" anchor="ctr"/>
+          <a:lstStyle/>
+          <a:p>
+            <a:pPr algn="ctr"/>
+          </a:p>
+        </p:txBody>
+      </p:sp>
+      <p:sp>
+        <p:nvSpPr>
+          <p:cNvPr id="69" name="TextBox 68"/>
+          <p:cNvSpPr txBox="1"/>
+          <p:nvPr/>
+        </p:nvSpPr>
+        <p:spPr>
+          <a:xfrm>
+            <a:off x="329184" y="5779008"/>
+            <a:ext cx="11539728" cy="310896"/>
+          </a:xfrm>
+          <a:prstGeom prst="rect">
+            <a:avLst/>
+          </a:prstGeom>
+          <a:noFill/>
+        </p:spPr>
+        <p:txBody>
+          <a:bodyPr wrap="square">
+            <a:spAutoFit/>
+          </a:bodyPr>
+          <a:lstStyle/>
+          <a:p>
+            <a:pPr algn="l">
+              <a:spcAft>
+                <a:spcPts val="300"/>
+              </a:spcAft>
+            </a:pPr>
+            <a:r>
+              <a:rPr sz="1100" b="0">
+                <a:solidFill>
+                  <a:srgbClr val="0D3B66"/>
+                </a:solidFill>
+                <a:latin typeface="Calibri"/>
+              </a:rPr>
+              <a:t>Recepción 12/12/2025  ·  Capacitación 17/12/2025  ·  Francisco Jeldres  ·  Paula Azolas  ·  Mantención: C. Naranjo, M. Jara, R. Moreno, R. Díaz, J. Gutiérrez, H. Fierro</a:t>
+            </a:r>
+          </a:p>
+        </p:txBody>
+      </p:sp>
+      <p:sp>
+        <p:nvSpPr>
+          <p:cNvPr id="70" name="TextBox 69"/>
+          <p:cNvSpPr txBox="1"/>
+          <p:nvPr/>
+        </p:nvSpPr>
+        <p:spPr>
+          <a:xfrm>
+            <a:off x="256032" y="6181344"/>
+            <a:ext cx="11704320" cy="566928"/>
+          </a:xfrm>
+          <a:prstGeom prst="rect">
+            <a:avLst/>
+          </a:prstGeom>
+          <a:noFill/>
+        </p:spPr>
+        <p:txBody>
+          <a:bodyPr wrap="square">
+            <a:spAutoFit/>
+          </a:bodyPr>
+          <a:lstStyle/>
+          <a:p>
+            <a:pPr algn="l">
+              <a:spcAft>
+                <a:spcPts val="300"/>
+              </a:spcAft>
+            </a:pPr>
+            <a:r>
+              <a:rPr sz="1200" b="0">
+                <a:solidFill>
+                  <a:srgbClr val="0D3B66"/>
+                </a:solidFill>
+                <a:latin typeface="Calibri"/>
+              </a:rPr>
+              <a:t>Mayo 26.357   ·   Junio 20.927   ·   Julio 31.239   ·   Agosto 1–17: 21.494   ·   proy. ago 39.195 m³.</a:t>
+            </a:r>
+          </a:p>
+          <a:p>
+            <a:pPr algn="l">
+              <a:spcAft>
+                <a:spcPts val="300"/>
+              </a:spcAft>
+            </a:pPr>
+            <a:r>
+              <a:rPr sz="1100" b="0">
+                <a:solidFill>
+                  <a:srgbClr val="5A5A5A"/>
+                </a:solidFill>
+                <a:latin typeface="Calibri"/>
+              </a:rPr>
+              <a:t>Julio = cabecera (7 puntos). 27, 35 y 36 no se suman: cadena Sandía → DL (lámina 2).</a:t>
+            </a:r>
+          </a:p>
+        </p:txBody>
+      </p:sp>
+    </p:spTree>
+  </p:cSld>
+  <p:clrMapOvr>
+    <a:masterClrMapping/>
+  </p:clrMapOvr>
+</p:sld>
+</file>
+
+<file path=ppt/slides/slide13.xml><?xml version="1.0" encoding="utf-8"?>
+<p:sld xmlns:a="http://schemas.openxmlformats.org/drawingml/2006/main" xmlns:p="http://schemas.openxmlformats.org/presentationml/2006/main" xmlns:r="http://schemas.openxmlformats.org/officeDocument/2006/relationships">
+  <p:cSld>
+    <p:spTree>
+      <p:nvGrpSpPr>
+        <p:cNvPr id="1" name=""/>
+        <p:cNvGrpSpPr/>
+        <p:nvPr/>
+      </p:nvGrpSpPr>
+      <p:grpSpPr/>
+      <p:sp>
+        <p:nvSpPr>
+          <p:cNvPr id="2" name="Rectangle 1"/>
+          <p:cNvSpPr/>
+          <p:nvPr/>
+        </p:nvSpPr>
+        <p:spPr>
+          <a:xfrm>
+            <a:off x="0" y="0"/>
+            <a:ext cx="12191695" cy="841248"/>
+          </a:xfrm>
+          <a:prstGeom prst="rect">
+            <a:avLst/>
+          </a:prstGeom>
+          <a:solidFill>
+            <a:srgbClr val="0D3B66"/>
+          </a:solidFill>
+          <a:ln>
+            <a:noFill/>
+          </a:ln>
+        </p:spPr>
+        <p:style>
+          <a:lnRef idx="1">
+            <a:schemeClr val="accent1"/>
+          </a:lnRef>
+          <a:fillRef idx="3">
+            <a:schemeClr val="accent1"/>
+          </a:fillRef>
+          <a:effectRef idx="2">
+            <a:schemeClr val="accent1"/>
+          </a:effectRef>
+          <a:fontRef idx="minor">
+            <a:schemeClr val="lt1"/>
+          </a:fontRef>
+        </p:style>
+        <p:txBody>
+          <a:bodyPr rtlCol="0" anchor="ctr"/>
+          <a:lstStyle/>
+          <a:p>
+            <a:pPr algn="ctr"/>
+          </a:p>
+        </p:txBody>
+      </p:sp>
+      <p:sp>
+        <p:nvSpPr>
+          <p:cNvPr id="3" name="Rectangle 2"/>
+          <p:cNvSpPr/>
+          <p:nvPr/>
+        </p:nvSpPr>
+        <p:spPr>
+          <a:xfrm>
+            <a:off x="0" y="841248"/>
+            <a:ext cx="12191695" cy="54864"/>
+          </a:xfrm>
+          <a:prstGeom prst="rect">
+            <a:avLst/>
+          </a:prstGeom>
+          <a:solidFill>
+            <a:srgbClr val="C9A227"/>
+          </a:solidFill>
+          <a:ln>
+            <a:noFill/>
+          </a:ln>
+        </p:spPr>
+        <p:style>
+          <a:lnRef idx="1">
+            <a:schemeClr val="accent1"/>
+          </a:lnRef>
+          <a:fillRef idx="3">
+            <a:schemeClr val="accent1"/>
+          </a:fillRef>
+          <a:effectRef idx="2">
+            <a:schemeClr val="accent1"/>
+          </a:effectRef>
+          <a:fontRef idx="minor">
+            <a:schemeClr val="lt1"/>
+          </a:fontRef>
+        </p:style>
+        <p:txBody>
+          <a:bodyPr rtlCol="0" anchor="ctr"/>
+          <a:lstStyle/>
+          <a:p>
+            <a:pPr algn="ctr"/>
+          </a:p>
+        </p:txBody>
+      </p:sp>
+      <p:pic>
+        <p:nvPicPr>
+          <p:cNvPr id="4" name="Picture 3" descr="logo wes.bmp"/>
+          <p:cNvPicPr>
+            <a:picLocks noChangeAspect="1"/>
+          </p:cNvPicPr>
+          <p:nvPr/>
+        </p:nvPicPr>
+        <p:blipFill>
+          <a:blip r:embed="rId2"/>
+          <a:stretch>
+            <a:fillRect/>
+          </a:stretch>
+        </p:blipFill>
+        <p:spPr>
+          <a:xfrm>
+            <a:off x="10835640" y="146304"/>
+            <a:ext cx="1143000" cy="253401"/>
+          </a:xfrm>
+          <a:prstGeom prst="rect">
+            <a:avLst/>
+          </a:prstGeom>
+        </p:spPr>
+      </p:pic>
+      <p:sp>
+        <p:nvSpPr>
+          <p:cNvPr id="5" name="TextBox 4"/>
+          <p:cNvSpPr txBox="1"/>
+          <p:nvPr/>
+        </p:nvSpPr>
+        <p:spPr>
+          <a:xfrm>
+            <a:off x="256032" y="109728"/>
+            <a:ext cx="10607040" cy="384048"/>
+          </a:xfrm>
+          <a:prstGeom prst="rect">
+            <a:avLst/>
+          </a:prstGeom>
+          <a:noFill/>
+        </p:spPr>
+        <p:txBody>
+          <a:bodyPr wrap="square">
+            <a:spAutoFit/>
+          </a:bodyPr>
+          <a:lstStyle/>
+          <a:p>
+            <a:pPr algn="l">
+              <a:spcAft>
+                <a:spcPts val="300"/>
+              </a:spcAft>
+            </a:pPr>
+            <a:r>
+              <a:rPr sz="2000" b="1">
+                <a:solidFill>
+                  <a:srgbClr val="FFFFFF"/>
+                </a:solidFill>
+                <a:latin typeface="Calibri"/>
+              </a:rPr>
               <a:t>PAK  ·  2. Cadena Sandía / Distrito de Lujo</a:t>
             </a:r>
           </a:p>
@@ -15910,7 +16952,7 @@
                 </a:solidFill>
                 <a:latin typeface="Calibri"/>
               </a:rPr>
-              <a:t>San Ignacio 500 es el mayor volumen; 300 queda en monitoreo.</a:t>
+              <a:t>San Ignacio 500 es el mayor volumen. Lámina 2: control nocturno desde 17/07, ahorro y umbral.</a:t>
             </a:r>
           </a:p>
         </p:txBody>
@@ -16077,7 +17119,7 @@
                 </a:solidFill>
                 <a:latin typeface="Calibri"/>
               </a:rPr>
-              <a:t>AEB  ·  Equipos y consumo</a:t>
+              <a:t>BOM  ·  2. San Ignacio 500</a:t>
             </a:r>
           </a:p>
         </p:txBody>
@@ -16116,7 +17158,7 @@
                 </a:solidFill>
                 <a:latin typeface="Calibri"/>
               </a:rPr>
-              <a:t>Arauco El Bosque   |   2 puntos WES   |   01/05/2026 – 17/08/2026</a:t>
+              <a:t>Control nocturno operativo  ·  ahorro  ·  umbral</a:t>
             </a:r>
           </a:p>
         </p:txBody>
@@ -16129,702 +17171,8 @@
         </p:nvSpPr>
         <p:spPr>
           <a:xfrm>
-            <a:off x="201168" y="1024128"/>
-            <a:ext cx="5861304" cy="658368"/>
-          </a:xfrm>
-          <a:prstGeom prst="roundRect">
-            <a:avLst>
-              <a:gd name="adj" fmla="val 8000"/>
-            </a:avLst>
-          </a:prstGeom>
-          <a:solidFill>
-            <a:srgbClr val="F5F7FA"/>
-          </a:solidFill>
-          <a:ln w="6350">
-            <a:solidFill>
-              <a:srgbClr val="0D3B66"/>
-            </a:solidFill>
-          </a:ln>
-        </p:spPr>
-        <p:style>
-          <a:lnRef idx="1">
-            <a:schemeClr val="accent1"/>
-          </a:lnRef>
-          <a:fillRef idx="3">
-            <a:schemeClr val="accent1"/>
-          </a:fillRef>
-          <a:effectRef idx="2">
-            <a:schemeClr val="accent1"/>
-          </a:effectRef>
-          <a:fontRef idx="minor">
-            <a:schemeClr val="lt1"/>
-          </a:fontRef>
-        </p:style>
-        <p:txBody>
-          <a:bodyPr rtlCol="0" anchor="ctr"/>
-          <a:lstStyle/>
-          <a:p>
-            <a:pPr algn="ctr"/>
-          </a:p>
-        </p:txBody>
-      </p:sp>
-      <p:sp>
-        <p:nvSpPr>
-          <p:cNvPr id="8" name="TextBox 7"/>
-          <p:cNvSpPr txBox="1"/>
-          <p:nvPr/>
-        </p:nvSpPr>
-        <p:spPr>
-          <a:xfrm>
-            <a:off x="274320" y="1060704"/>
-            <a:ext cx="5733288" cy="146304"/>
-          </a:xfrm>
-          <a:prstGeom prst="rect">
-            <a:avLst/>
-          </a:prstGeom>
-          <a:noFill/>
-        </p:spPr>
-        <p:txBody>
-          <a:bodyPr wrap="square">
-            <a:spAutoFit/>
-          </a:bodyPr>
-          <a:lstStyle/>
-          <a:p>
-            <a:pPr algn="l">
-              <a:spcAft>
-                <a:spcPts val="300"/>
-              </a:spcAft>
-            </a:pPr>
-            <a:r>
-              <a:rPr sz="1000" b="1">
-                <a:solidFill>
-                  <a:srgbClr val="C9A227"/>
-                </a:solidFill>
-                <a:latin typeface="Calibri"/>
-              </a:rPr>
-              <a:t>000025-11</a:t>
-            </a:r>
-          </a:p>
-        </p:txBody>
-      </p:sp>
-      <p:sp>
-        <p:nvSpPr>
-          <p:cNvPr id="9" name="TextBox 8"/>
-          <p:cNvSpPr txBox="1"/>
-          <p:nvPr/>
-        </p:nvSpPr>
-        <p:spPr>
-          <a:xfrm>
-            <a:off x="274320" y="1243584"/>
-            <a:ext cx="5733288" cy="201168"/>
-          </a:xfrm>
-          <a:prstGeom prst="rect">
-            <a:avLst/>
-          </a:prstGeom>
-          <a:noFill/>
-        </p:spPr>
-        <p:txBody>
-          <a:bodyPr wrap="square">
-            <a:spAutoFit/>
-          </a:bodyPr>
-          <a:lstStyle/>
-          <a:p>
-            <a:pPr algn="l">
-              <a:spcAft>
-                <a:spcPts val="300"/>
-              </a:spcAft>
-            </a:pPr>
-            <a:r>
-              <a:rPr sz="1200" b="1">
-                <a:solidFill>
-                  <a:srgbClr val="0D3B66"/>
-                </a:solidFill>
-                <a:latin typeface="Calibri"/>
-              </a:rPr>
-              <a:t>Matriz 1° piso</a:t>
-            </a:r>
-          </a:p>
-        </p:txBody>
-      </p:sp>
-      <p:sp>
-        <p:nvSpPr>
-          <p:cNvPr id="10" name="Rounded Rectangle 9"/>
-          <p:cNvSpPr/>
-          <p:nvPr/>
-        </p:nvSpPr>
-        <p:spPr>
-          <a:xfrm>
-            <a:off x="6135624" y="1024128"/>
-            <a:ext cx="5861304" cy="658368"/>
-          </a:xfrm>
-          <a:prstGeom prst="roundRect">
-            <a:avLst>
-              <a:gd name="adj" fmla="val 8000"/>
-            </a:avLst>
-          </a:prstGeom>
-          <a:solidFill>
-            <a:srgbClr val="F5F7FA"/>
-          </a:solidFill>
-          <a:ln w="6350">
-            <a:solidFill>
-              <a:srgbClr val="1F77B4"/>
-            </a:solidFill>
-          </a:ln>
-        </p:spPr>
-        <p:style>
-          <a:lnRef idx="1">
-            <a:schemeClr val="accent1"/>
-          </a:lnRef>
-          <a:fillRef idx="3">
-            <a:schemeClr val="accent1"/>
-          </a:fillRef>
-          <a:effectRef idx="2">
-            <a:schemeClr val="accent1"/>
-          </a:effectRef>
-          <a:fontRef idx="minor">
-            <a:schemeClr val="lt1"/>
-          </a:fontRef>
-        </p:style>
-        <p:txBody>
-          <a:bodyPr rtlCol="0" anchor="ctr"/>
-          <a:lstStyle/>
-          <a:p>
-            <a:pPr algn="ctr"/>
-          </a:p>
-        </p:txBody>
-      </p:sp>
-      <p:sp>
-        <p:nvSpPr>
-          <p:cNvPr id="11" name="TextBox 10"/>
-          <p:cNvSpPr txBox="1"/>
-          <p:nvPr/>
-        </p:nvSpPr>
-        <p:spPr>
-          <a:xfrm>
-            <a:off x="6208776" y="1060704"/>
-            <a:ext cx="5733288" cy="146304"/>
-          </a:xfrm>
-          <a:prstGeom prst="rect">
-            <a:avLst/>
-          </a:prstGeom>
-          <a:noFill/>
-        </p:spPr>
-        <p:txBody>
-          <a:bodyPr wrap="square">
-            <a:spAutoFit/>
-          </a:bodyPr>
-          <a:lstStyle/>
-          <a:p>
-            <a:pPr algn="l">
-              <a:spcAft>
-                <a:spcPts val="300"/>
-              </a:spcAft>
-            </a:pPr>
-            <a:r>
-              <a:rPr sz="1000" b="1">
-                <a:solidFill>
-                  <a:srgbClr val="C9A227"/>
-                </a:solidFill>
-                <a:latin typeface="Calibri"/>
-              </a:rPr>
-              <a:t>000025-12</a:t>
-            </a:r>
-          </a:p>
-        </p:txBody>
-      </p:sp>
-      <p:sp>
-        <p:nvSpPr>
-          <p:cNvPr id="12" name="TextBox 11"/>
-          <p:cNvSpPr txBox="1"/>
-          <p:nvPr/>
-        </p:nvSpPr>
-        <p:spPr>
-          <a:xfrm>
-            <a:off x="6208776" y="1243584"/>
-            <a:ext cx="5733288" cy="201168"/>
-          </a:xfrm>
-          <a:prstGeom prst="rect">
-            <a:avLst/>
-          </a:prstGeom>
-          <a:noFill/>
-        </p:spPr>
-        <p:txBody>
-          <a:bodyPr wrap="square">
-            <a:spAutoFit/>
-          </a:bodyPr>
-          <a:lstStyle/>
-          <a:p>
-            <a:pPr algn="l">
-              <a:spcAft>
-                <a:spcPts val="300"/>
-              </a:spcAft>
-            </a:pPr>
-            <a:r>
-              <a:rPr sz="1200" b="1">
-                <a:solidFill>
-                  <a:srgbClr val="0D3B66"/>
-                </a:solidFill>
-                <a:latin typeface="Calibri"/>
-              </a:rPr>
-              <a:t>Anillo Plaza</a:t>
-            </a:r>
-          </a:p>
-        </p:txBody>
-      </p:sp>
-      <p:sp>
-        <p:nvSpPr>
-          <p:cNvPr id="13" name="Rounded Rectangle 12"/>
-          <p:cNvSpPr/>
-          <p:nvPr/>
-        </p:nvSpPr>
-        <p:spPr>
-          <a:xfrm>
-            <a:off x="201168" y="1792224"/>
-            <a:ext cx="7973568" cy="3822191"/>
-          </a:xfrm>
-          <a:prstGeom prst="roundRect">
-            <a:avLst>
-              <a:gd name="adj" fmla="val 8000"/>
-            </a:avLst>
-          </a:prstGeom>
-          <a:solidFill>
-            <a:srgbClr val="F5F7FA"/>
-          </a:solidFill>
-          <a:ln>
-            <a:noFill/>
-          </a:ln>
-        </p:spPr>
-        <p:style>
-          <a:lnRef idx="1">
-            <a:schemeClr val="accent1"/>
-          </a:lnRef>
-          <a:fillRef idx="3">
-            <a:schemeClr val="accent1"/>
-          </a:fillRef>
-          <a:effectRef idx="2">
-            <a:schemeClr val="accent1"/>
-          </a:effectRef>
-          <a:fontRef idx="minor">
-            <a:schemeClr val="lt1"/>
-          </a:fontRef>
-        </p:style>
-        <p:txBody>
-          <a:bodyPr rtlCol="0" anchor="ctr"/>
-          <a:lstStyle/>
-          <a:p>
-            <a:pPr algn="ctr"/>
-          </a:p>
-        </p:txBody>
-      </p:sp>
-      <p:pic>
-        <p:nvPicPr>
-          <p:cNvPr id="14" name="Picture 13" descr="aeb_mensual_may_ago.png"/>
-          <p:cNvPicPr>
-            <a:picLocks noChangeAspect="1"/>
-          </p:cNvPicPr>
-          <p:nvPr/>
-        </p:nvPicPr>
-        <p:blipFill>
-          <a:blip r:embed="rId3"/>
-          <a:stretch>
-            <a:fillRect/>
-          </a:stretch>
-        </p:blipFill>
-        <p:spPr>
-          <a:xfrm>
-            <a:off x="274320" y="2031551"/>
-            <a:ext cx="7827264" cy="3343536"/>
-          </a:xfrm>
-          <a:prstGeom prst="rect">
-            <a:avLst/>
-          </a:prstGeom>
-        </p:spPr>
-      </p:pic>
-      <p:sp>
-        <p:nvSpPr>
-          <p:cNvPr id="15" name="Rounded Rectangle 14"/>
-          <p:cNvSpPr/>
-          <p:nvPr/>
-        </p:nvSpPr>
-        <p:spPr>
-          <a:xfrm>
-            <a:off x="8302752" y="1792224"/>
-            <a:ext cx="3675887" cy="3822191"/>
-          </a:xfrm>
-          <a:prstGeom prst="roundRect">
-            <a:avLst>
-              <a:gd name="adj" fmla="val 8000"/>
-            </a:avLst>
-          </a:prstGeom>
-          <a:solidFill>
-            <a:srgbClr val="FFFFFF"/>
-          </a:solidFill>
-          <a:ln w="6350">
-            <a:solidFill>
-              <a:srgbClr val="1F77B4"/>
-            </a:solidFill>
-          </a:ln>
-        </p:spPr>
-        <p:style>
-          <a:lnRef idx="1">
-            <a:schemeClr val="accent1"/>
-          </a:lnRef>
-          <a:fillRef idx="3">
-            <a:schemeClr val="accent1"/>
-          </a:fillRef>
-          <a:effectRef idx="2">
-            <a:schemeClr val="accent1"/>
-          </a:effectRef>
-          <a:fontRef idx="minor">
-            <a:schemeClr val="lt1"/>
-          </a:fontRef>
-        </p:style>
-        <p:txBody>
-          <a:bodyPr rtlCol="0" anchor="ctr"/>
-          <a:lstStyle/>
-          <a:p>
-            <a:pPr algn="ctr"/>
-          </a:p>
-        </p:txBody>
-      </p:sp>
-      <p:sp>
-        <p:nvSpPr>
-          <p:cNvPr id="16" name="TextBox 15"/>
-          <p:cNvSpPr txBox="1"/>
-          <p:nvPr/>
-        </p:nvSpPr>
-        <p:spPr>
-          <a:xfrm>
-            <a:off x="8430768" y="1837943"/>
-            <a:ext cx="3419856" cy="164592"/>
-          </a:xfrm>
-          <a:prstGeom prst="rect">
-            <a:avLst/>
-          </a:prstGeom>
-          <a:noFill/>
-        </p:spPr>
-        <p:txBody>
-          <a:bodyPr wrap="square">
-            <a:spAutoFit/>
-          </a:bodyPr>
-          <a:lstStyle/>
-          <a:p>
-            <a:pPr algn="l">
-              <a:spcAft>
-                <a:spcPts val="300"/>
-              </a:spcAft>
-            </a:pPr>
-            <a:r>
-              <a:rPr sz="1100" b="1">
-                <a:solidFill>
-                  <a:srgbClr val="1F77B4"/>
-                </a:solidFill>
-                <a:latin typeface="Calibri"/>
-              </a:rPr>
-              <a:t>JULIO · último mes cerrado</a:t>
-            </a:r>
-          </a:p>
-        </p:txBody>
-      </p:sp>
-      <p:sp>
-        <p:nvSpPr>
-          <p:cNvPr id="17" name="TextBox 16"/>
-          <p:cNvSpPr txBox="1"/>
-          <p:nvPr/>
-        </p:nvSpPr>
-        <p:spPr>
-          <a:xfrm>
-            <a:off x="8430768" y="2002536"/>
-            <a:ext cx="3419856" cy="201168"/>
-          </a:xfrm>
-          <a:prstGeom prst="rect">
-            <a:avLst/>
-          </a:prstGeom>
-          <a:noFill/>
-        </p:spPr>
-        <p:txBody>
-          <a:bodyPr wrap="square">
-            <a:spAutoFit/>
-          </a:bodyPr>
-          <a:lstStyle/>
-          <a:p>
-            <a:pPr algn="l">
-              <a:spcAft>
-                <a:spcPts val="300"/>
-              </a:spcAft>
-            </a:pPr>
-            <a:r>
-              <a:rPr sz="1200" b="0">
-                <a:solidFill>
-                  <a:srgbClr val="5A5A5A"/>
-                </a:solidFill>
-                <a:latin typeface="Calibri"/>
-              </a:rPr>
-              <a:t>El recinto sumó 2.371 m³</a:t>
-            </a:r>
-          </a:p>
-        </p:txBody>
-      </p:sp>
-      <p:sp>
-        <p:nvSpPr>
-          <p:cNvPr id="18" name="Rounded Rectangle 17"/>
-          <p:cNvSpPr/>
-          <p:nvPr/>
-        </p:nvSpPr>
-        <p:spPr>
-          <a:xfrm>
-            <a:off x="8430768" y="2212848"/>
-            <a:ext cx="3419856" cy="768096"/>
-          </a:xfrm>
-          <a:prstGeom prst="roundRect">
-            <a:avLst>
-              <a:gd name="adj" fmla="val 8000"/>
-            </a:avLst>
-          </a:prstGeom>
-          <a:solidFill>
-            <a:srgbClr val="F5F7FA"/>
-          </a:solidFill>
-          <a:ln w="6350">
-            <a:solidFill>
-              <a:srgbClr val="0D3B66"/>
-            </a:solidFill>
-          </a:ln>
-        </p:spPr>
-        <p:style>
-          <a:lnRef idx="1">
-            <a:schemeClr val="accent1"/>
-          </a:lnRef>
-          <a:fillRef idx="3">
-            <a:schemeClr val="accent1"/>
-          </a:fillRef>
-          <a:effectRef idx="2">
-            <a:schemeClr val="accent1"/>
-          </a:effectRef>
-          <a:fontRef idx="minor">
-            <a:schemeClr val="lt1"/>
-          </a:fontRef>
-        </p:style>
-        <p:txBody>
-          <a:bodyPr rtlCol="0" anchor="ctr"/>
-          <a:lstStyle/>
-          <a:p>
-            <a:pPr algn="ctr"/>
-          </a:p>
-        </p:txBody>
-      </p:sp>
-      <p:sp>
-        <p:nvSpPr>
-          <p:cNvPr id="19" name="TextBox 18"/>
-          <p:cNvSpPr txBox="1"/>
-          <p:nvPr/>
-        </p:nvSpPr>
-        <p:spPr>
-          <a:xfrm>
-            <a:off x="8540496" y="2240279"/>
-            <a:ext cx="3200400" cy="164592"/>
-          </a:xfrm>
-          <a:prstGeom prst="rect">
-            <a:avLst/>
-          </a:prstGeom>
-          <a:noFill/>
-        </p:spPr>
-        <p:txBody>
-          <a:bodyPr wrap="square">
-            <a:spAutoFit/>
-          </a:bodyPr>
-          <a:lstStyle/>
-          <a:p>
-            <a:pPr algn="l">
-              <a:spcAft>
-                <a:spcPts val="300"/>
-              </a:spcAft>
-            </a:pPr>
-            <a:r>
-              <a:rPr sz="1300" b="1">
-                <a:solidFill>
-                  <a:srgbClr val="0D3B66"/>
-                </a:solidFill>
-                <a:latin typeface="Calibri"/>
-              </a:rPr>
-              <a:t>Matriz 1° piso</a:t>
-            </a:r>
-          </a:p>
-        </p:txBody>
-      </p:sp>
-      <p:sp>
-        <p:nvSpPr>
-          <p:cNvPr id="20" name="TextBox 19"/>
-          <p:cNvSpPr txBox="1"/>
-          <p:nvPr/>
-        </p:nvSpPr>
-        <p:spPr>
-          <a:xfrm>
-            <a:off x="8540496" y="2535448"/>
-            <a:ext cx="3200400" cy="237744"/>
-          </a:xfrm>
-          <a:prstGeom prst="rect">
-            <a:avLst/>
-          </a:prstGeom>
-          <a:noFill/>
-        </p:spPr>
-        <p:txBody>
-          <a:bodyPr wrap="square">
-            <a:spAutoFit/>
-          </a:bodyPr>
-          <a:lstStyle/>
-          <a:p>
-            <a:pPr algn="l">
-              <a:spcAft>
-                <a:spcPts val="300"/>
-              </a:spcAft>
-            </a:pPr>
-            <a:r>
-              <a:rPr sz="1600" b="1">
-                <a:solidFill>
-                  <a:srgbClr val="0D3B66"/>
-                </a:solidFill>
-                <a:latin typeface="Calibri"/>
-              </a:rPr>
-              <a:t>1.724 m³    73 %</a:t>
-            </a:r>
-          </a:p>
-        </p:txBody>
-      </p:sp>
-      <p:sp>
-        <p:nvSpPr>
-          <p:cNvPr id="21" name="Rounded Rectangle 20"/>
-          <p:cNvSpPr/>
-          <p:nvPr/>
-        </p:nvSpPr>
-        <p:spPr>
-          <a:xfrm>
-            <a:off x="8430768" y="3877056"/>
-            <a:ext cx="3419856" cy="768096"/>
-          </a:xfrm>
-          <a:prstGeom prst="roundRect">
-            <a:avLst>
-              <a:gd name="adj" fmla="val 8000"/>
-            </a:avLst>
-          </a:prstGeom>
-          <a:solidFill>
-            <a:srgbClr val="F5F7FA"/>
-          </a:solidFill>
-          <a:ln w="6350">
-            <a:solidFill>
-              <a:srgbClr val="1F77B4"/>
-            </a:solidFill>
-          </a:ln>
-        </p:spPr>
-        <p:style>
-          <a:lnRef idx="1">
-            <a:schemeClr val="accent1"/>
-          </a:lnRef>
-          <a:fillRef idx="3">
-            <a:schemeClr val="accent1"/>
-          </a:fillRef>
-          <a:effectRef idx="2">
-            <a:schemeClr val="accent1"/>
-          </a:effectRef>
-          <a:fontRef idx="minor">
-            <a:schemeClr val="lt1"/>
-          </a:fontRef>
-        </p:style>
-        <p:txBody>
-          <a:bodyPr rtlCol="0" anchor="ctr"/>
-          <a:lstStyle/>
-          <a:p>
-            <a:pPr algn="ctr"/>
-          </a:p>
-        </p:txBody>
-      </p:sp>
-      <p:sp>
-        <p:nvSpPr>
-          <p:cNvPr id="22" name="TextBox 21"/>
-          <p:cNvSpPr txBox="1"/>
-          <p:nvPr/>
-        </p:nvSpPr>
-        <p:spPr>
-          <a:xfrm>
-            <a:off x="8540496" y="3904488"/>
-            <a:ext cx="3200400" cy="164592"/>
-          </a:xfrm>
-          <a:prstGeom prst="rect">
-            <a:avLst/>
-          </a:prstGeom>
-          <a:noFill/>
-        </p:spPr>
-        <p:txBody>
-          <a:bodyPr wrap="square">
-            <a:spAutoFit/>
-          </a:bodyPr>
-          <a:lstStyle/>
-          <a:p>
-            <a:pPr algn="l">
-              <a:spcAft>
-                <a:spcPts val="300"/>
-              </a:spcAft>
-            </a:pPr>
-            <a:r>
-              <a:rPr sz="1300" b="1">
-                <a:solidFill>
-                  <a:srgbClr val="1F77B4"/>
-                </a:solidFill>
-                <a:latin typeface="Calibri"/>
-              </a:rPr>
-              <a:t>Anillo Plaza</a:t>
-            </a:r>
-          </a:p>
-        </p:txBody>
-      </p:sp>
-      <p:sp>
-        <p:nvSpPr>
-          <p:cNvPr id="23" name="TextBox 22"/>
-          <p:cNvSpPr txBox="1"/>
-          <p:nvPr/>
-        </p:nvSpPr>
-        <p:spPr>
-          <a:xfrm>
-            <a:off x="8540496" y="4199656"/>
-            <a:ext cx="3200400" cy="237744"/>
-          </a:xfrm>
-          <a:prstGeom prst="rect">
-            <a:avLst/>
-          </a:prstGeom>
-          <a:noFill/>
-        </p:spPr>
-        <p:txBody>
-          <a:bodyPr wrap="square">
-            <a:spAutoFit/>
-          </a:bodyPr>
-          <a:lstStyle/>
-          <a:p>
-            <a:pPr algn="l">
-              <a:spcAft>
-                <a:spcPts val="300"/>
-              </a:spcAft>
-            </a:pPr>
-            <a:r>
-              <a:rPr sz="1600" b="1">
-                <a:solidFill>
-                  <a:srgbClr val="0D3B66"/>
-                </a:solidFill>
-                <a:latin typeface="Calibri"/>
-              </a:rPr>
-              <a:t>647 m³    27 %</a:t>
-            </a:r>
-          </a:p>
-        </p:txBody>
-      </p:sp>
-      <p:sp>
-        <p:nvSpPr>
-          <p:cNvPr id="24" name="Rounded Rectangle 23"/>
-          <p:cNvSpPr/>
-          <p:nvPr/>
-        </p:nvSpPr>
-        <p:spPr>
-          <a:xfrm>
-            <a:off x="201168" y="5705856"/>
-            <a:ext cx="11795760" cy="438912"/>
+            <a:off x="201168" y="987552"/>
+            <a:ext cx="11777472" cy="658368"/>
           </a:xfrm>
           <a:prstGeom prst="roundRect">
             <a:avLst>
@@ -16864,94 +17212,357 @@
       </p:sp>
       <p:sp>
         <p:nvSpPr>
-          <p:cNvPr id="25" name="TextBox 24"/>
-          <p:cNvSpPr txBox="1"/>
-          <p:nvPr/>
-        </p:nvSpPr>
-        <p:spPr>
-          <a:xfrm>
-            <a:off x="329184" y="5779008"/>
-            <a:ext cx="11539728" cy="310896"/>
-          </a:xfrm>
-          <a:prstGeom prst="rect">
-            <a:avLst/>
-          </a:prstGeom>
-          <a:noFill/>
-        </p:spPr>
-        <p:txBody>
-          <a:bodyPr wrap="square">
-            <a:spAutoFit/>
-          </a:bodyPr>
-          <a:lstStyle/>
-          <a:p>
-            <a:pPr algn="l">
-              <a:spcAft>
-                <a:spcPts val="300"/>
-              </a:spcAft>
-            </a:pPr>
-            <a:r>
-              <a:rPr sz="1100" b="0">
+          <p:cNvPr id="8" name="TextBox 7"/>
+          <p:cNvSpPr txBox="1"/>
+          <p:nvPr/>
+        </p:nvSpPr>
+        <p:spPr>
+          <a:xfrm>
+            <a:off x="365760" y="1042415"/>
+            <a:ext cx="11475720" cy="548640"/>
+          </a:xfrm>
+          <a:prstGeom prst="rect">
+            <a:avLst/>
+          </a:prstGeom>
+          <a:noFill/>
+        </p:spPr>
+        <p:txBody>
+          <a:bodyPr wrap="square">
+            <a:spAutoFit/>
+          </a:bodyPr>
+          <a:lstStyle/>
+          <a:p>
+            <a:pPr algn="l">
+              <a:spcAft>
+                <a:spcPts val="300"/>
+              </a:spcAft>
+            </a:pPr>
+            <a:r>
+              <a:rPr sz="1400" b="0">
                 <a:solidFill>
                   <a:srgbClr val="0D3B66"/>
                 </a:solidFill>
                 <a:latin typeface="Calibri"/>
               </a:rPr>
-              <a:t>Recepción 29/10/2025 / relocalizado 16/01/2026  ·  Capacitación 20/11/2025  ·  Tamara Martínez  ·  Tomás Saba  ·  Sebastián Araneda</a:t>
-            </a:r>
-          </a:p>
-        </p:txBody>
-      </p:sp>
-      <p:sp>
-        <p:nvSpPr>
-          <p:cNvPr id="26" name="TextBox 25"/>
-          <p:cNvSpPr txBox="1"/>
-          <p:nvPr/>
-        </p:nvSpPr>
-        <p:spPr>
-          <a:xfrm>
-            <a:off x="256032" y="6181344"/>
-            <a:ext cx="11704320" cy="566928"/>
-          </a:xfrm>
-          <a:prstGeom prst="rect">
-            <a:avLst/>
-          </a:prstGeom>
-          <a:noFill/>
-        </p:spPr>
-        <p:txBody>
-          <a:bodyPr wrap="square">
-            <a:spAutoFit/>
-          </a:bodyPr>
-          <a:lstStyle/>
-          <a:p>
-            <a:pPr algn="l">
-              <a:spcAft>
-                <a:spcPts val="300"/>
-              </a:spcAft>
-            </a:pPr>
-            <a:r>
-              <a:rPr sz="1200" b="0">
+              <a:t>San Ignacio 500 se lleva 79 % de julio. Control on/off operativo desde el 17/07: la madrugada pasó de 32 a 2 m³ (el 15/07 eran 36 m³) y se sostiene hasta hoy. San Ignacio 300 sigue sin control.</a:t>
+            </a:r>
+          </a:p>
+        </p:txBody>
+      </p:sp>
+      <p:sp>
+        <p:nvSpPr>
+          <p:cNvPr id="9" name="Rounded Rectangle 8"/>
+          <p:cNvSpPr/>
+          <p:nvPr/>
+        </p:nvSpPr>
+        <p:spPr>
+          <a:xfrm>
+            <a:off x="201168" y="1737360"/>
+            <a:ext cx="5833872" cy="3803904"/>
+          </a:xfrm>
+          <a:prstGeom prst="roundRect">
+            <a:avLst>
+              <a:gd name="adj" fmla="val 8000"/>
+            </a:avLst>
+          </a:prstGeom>
+          <a:solidFill>
+            <a:srgbClr val="F5F7FA"/>
+          </a:solidFill>
+          <a:ln>
+            <a:noFill/>
+          </a:ln>
+        </p:spPr>
+        <p:style>
+          <a:lnRef idx="1">
+            <a:schemeClr val="accent1"/>
+          </a:lnRef>
+          <a:fillRef idx="3">
+            <a:schemeClr val="accent1"/>
+          </a:fillRef>
+          <a:effectRef idx="2">
+            <a:schemeClr val="accent1"/>
+          </a:effectRef>
+          <a:fontRef idx="minor">
+            <a:schemeClr val="lt1"/>
+          </a:fontRef>
+        </p:style>
+        <p:txBody>
+          <a:bodyPr rtlCol="0" anchor="ctr"/>
+          <a:lstStyle/>
+          <a:p>
+            <a:pPr algn="ctr"/>
+          </a:p>
+        </p:txBody>
+      </p:sp>
+      <p:sp>
+        <p:nvSpPr>
+          <p:cNvPr id="10" name="TextBox 9"/>
+          <p:cNvSpPr txBox="1"/>
+          <p:nvPr/>
+        </p:nvSpPr>
+        <p:spPr>
+          <a:xfrm>
+            <a:off x="329184" y="1773936"/>
+            <a:ext cx="5577840" cy="201168"/>
+          </a:xfrm>
+          <a:prstGeom prst="rect">
+            <a:avLst/>
+          </a:prstGeom>
+          <a:noFill/>
+        </p:spPr>
+        <p:txBody>
+          <a:bodyPr wrap="square">
+            <a:spAutoFit/>
+          </a:bodyPr>
+          <a:lstStyle/>
+          <a:p>
+            <a:pPr algn="l">
+              <a:spcAft>
+                <a:spcPts val="300"/>
+              </a:spcAft>
+            </a:pPr>
+            <a:r>
+              <a:rPr sz="1100" b="1">
+                <a:solidFill>
+                  <a:srgbClr val="1F77B4"/>
+                </a:solidFill>
+                <a:latin typeface="Calibri"/>
+              </a:rPr>
+              <a:t>NOCHE 00–06  ·  el corte se ve y se sostiene</a:t>
+            </a:r>
+          </a:p>
+        </p:txBody>
+      </p:sp>
+      <p:pic>
+        <p:nvPicPr>
+          <p:cNvPr id="11" name="Picture 10" descr="bom_si500_noches_jul_ago.png"/>
+          <p:cNvPicPr>
+            <a:picLocks noChangeAspect="1"/>
+          </p:cNvPicPr>
+          <p:nvPr/>
+        </p:nvPicPr>
+        <p:blipFill>
+          <a:blip r:embed="rId3"/>
+          <a:stretch>
+            <a:fillRect/>
+          </a:stretch>
+        </p:blipFill>
+        <p:spPr>
+          <a:xfrm>
+            <a:off x="292608" y="2462304"/>
+            <a:ext cx="5650992" cy="2518606"/>
+          </a:xfrm>
+          <a:prstGeom prst="rect">
+            <a:avLst/>
+          </a:prstGeom>
+        </p:spPr>
+      </p:pic>
+      <p:sp>
+        <p:nvSpPr>
+          <p:cNvPr id="12" name="Rounded Rectangle 11"/>
+          <p:cNvSpPr/>
+          <p:nvPr/>
+        </p:nvSpPr>
+        <p:spPr>
+          <a:xfrm>
+            <a:off x="6163056" y="1737360"/>
+            <a:ext cx="5815584" cy="3803904"/>
+          </a:xfrm>
+          <a:prstGeom prst="roundRect">
+            <a:avLst>
+              <a:gd name="adj" fmla="val 8000"/>
+            </a:avLst>
+          </a:prstGeom>
+          <a:solidFill>
+            <a:srgbClr val="F5F7FA"/>
+          </a:solidFill>
+          <a:ln>
+            <a:noFill/>
+          </a:ln>
+        </p:spPr>
+        <p:style>
+          <a:lnRef idx="1">
+            <a:schemeClr val="accent1"/>
+          </a:lnRef>
+          <a:fillRef idx="3">
+            <a:schemeClr val="accent1"/>
+          </a:fillRef>
+          <a:effectRef idx="2">
+            <a:schemeClr val="accent1"/>
+          </a:effectRef>
+          <a:fontRef idx="minor">
+            <a:schemeClr val="lt1"/>
+          </a:fontRef>
+        </p:style>
+        <p:txBody>
+          <a:bodyPr rtlCol="0" anchor="ctr"/>
+          <a:lstStyle/>
+          <a:p>
+            <a:pPr algn="ctr"/>
+          </a:p>
+        </p:txBody>
+      </p:sp>
+      <p:sp>
+        <p:nvSpPr>
+          <p:cNvPr id="13" name="TextBox 12"/>
+          <p:cNvSpPr txBox="1"/>
+          <p:nvPr/>
+        </p:nvSpPr>
+        <p:spPr>
+          <a:xfrm>
+            <a:off x="6291072" y="1773936"/>
+            <a:ext cx="5559552" cy="201168"/>
+          </a:xfrm>
+          <a:prstGeom prst="rect">
+            <a:avLst/>
+          </a:prstGeom>
+          <a:noFill/>
+        </p:spPr>
+        <p:txBody>
+          <a:bodyPr wrap="square">
+            <a:spAutoFit/>
+          </a:bodyPr>
+          <a:lstStyle/>
+          <a:p>
+            <a:pPr algn="l">
+              <a:spcAft>
+                <a:spcPts val="300"/>
+              </a:spcAft>
+            </a:pPr>
+            <a:r>
+              <a:rPr sz="1100" b="1">
+                <a:solidFill>
+                  <a:srgbClr val="1F77B4"/>
+                </a:solidFill>
+                <a:latin typeface="Calibri"/>
+              </a:rPr>
+              <a:t>AHORRO  ·  noche típica antes vs con control</a:t>
+            </a:r>
+          </a:p>
+        </p:txBody>
+      </p:sp>
+      <p:pic>
+        <p:nvPicPr>
+          <p:cNvPr id="14" name="Picture 13" descr="bom_si500_ahorro.png"/>
+          <p:cNvPicPr>
+            <a:picLocks noChangeAspect="1"/>
+          </p:cNvPicPr>
+          <p:nvPr/>
+        </p:nvPicPr>
+        <p:blipFill>
+          <a:blip r:embed="rId4"/>
+          <a:stretch>
+            <a:fillRect/>
+          </a:stretch>
+        </p:blipFill>
+        <p:spPr>
+          <a:xfrm>
+            <a:off x="6254496" y="2467554"/>
+            <a:ext cx="5632704" cy="2508107"/>
+          </a:xfrm>
+          <a:prstGeom prst="rect">
+            <a:avLst/>
+          </a:prstGeom>
+        </p:spPr>
+      </p:pic>
+      <p:sp>
+        <p:nvSpPr>
+          <p:cNvPr id="15" name="Rounded Rectangle 14"/>
+          <p:cNvSpPr/>
+          <p:nvPr/>
+        </p:nvSpPr>
+        <p:spPr>
+          <a:xfrm>
+            <a:off x="201168" y="5632704"/>
+            <a:ext cx="11777472" cy="1060704"/>
+          </a:xfrm>
+          <a:prstGeom prst="roundRect">
+            <a:avLst>
+              <a:gd name="adj" fmla="val 8000"/>
+            </a:avLst>
+          </a:prstGeom>
+          <a:solidFill>
+            <a:srgbClr val="FFF9EB"/>
+          </a:solidFill>
+          <a:ln w="6350">
+            <a:solidFill>
+              <a:srgbClr val="C9A227"/>
+            </a:solidFill>
+          </a:ln>
+        </p:spPr>
+        <p:style>
+          <a:lnRef idx="1">
+            <a:schemeClr val="accent1"/>
+          </a:lnRef>
+          <a:fillRef idx="3">
+            <a:schemeClr val="accent1"/>
+          </a:fillRef>
+          <a:effectRef idx="2">
+            <a:schemeClr val="accent1"/>
+          </a:effectRef>
+          <a:fontRef idx="minor">
+            <a:schemeClr val="lt1"/>
+          </a:fontRef>
+        </p:style>
+        <p:txBody>
+          <a:bodyPr rtlCol="0" anchor="ctr"/>
+          <a:lstStyle/>
+          <a:p>
+            <a:pPr algn="ctr"/>
+          </a:p>
+        </p:txBody>
+      </p:sp>
+      <p:sp>
+        <p:nvSpPr>
+          <p:cNvPr id="16" name="TextBox 15"/>
+          <p:cNvSpPr txBox="1"/>
+          <p:nvPr/>
+        </p:nvSpPr>
+        <p:spPr>
+          <a:xfrm>
+            <a:off x="365760" y="5687568"/>
+            <a:ext cx="11475720" cy="950976"/>
+          </a:xfrm>
+          <a:prstGeom prst="rect">
+            <a:avLst/>
+          </a:prstGeom>
+          <a:noFill/>
+        </p:spPr>
+        <p:txBody>
+          <a:bodyPr wrap="square">
+            <a:spAutoFit/>
+          </a:bodyPr>
+          <a:lstStyle/>
+          <a:p>
+            <a:pPr algn="l">
+              <a:spcAft>
+                <a:spcPts val="300"/>
+              </a:spcAft>
+            </a:pPr>
+            <a:r>
+              <a:rPr sz="1300" b="0">
                 <a:solidFill>
                   <a:srgbClr val="0D3B66"/>
                 </a:solidFill>
                 <a:latin typeface="Calibri"/>
               </a:rPr>
-              <a:t>Mayo 1.015   ·   Junio 2.116   ·   Julio 2.371   ·   Agosto 1–17: 1.217   ·   proy. ago 2.218 m³.</a:t>
-            </a:r>
-          </a:p>
-          <a:p>
-            <a:pPr algn="l">
-              <a:spcAft>
-                <a:spcPts val="300"/>
-              </a:spcAft>
-            </a:pPr>
-            <a:r>
-              <a:rPr sz="1100" b="0">
-                <a:solidFill>
-                  <a:srgbClr val="5A5A5A"/>
-                </a:solidFill>
-                <a:latin typeface="Calibri"/>
-              </a:rPr>
-              <a:t>Matriz 1° piso y Anillo Plaza. Relocalizado en enero 2026.</a:t>
+              <a:t>Desde el 17/07 no hay noche alta: residual típico 2 m³ (máximo 4,4). No se lee como fuga. Umbrales a activar: San Ignacio 500 diario 145 m³/día (agosto ~115) y noche 8 m³ (avisa si el corte se cae). San Ignacio 300 noche 4 m³ (sin on/off).</a:t>
+            </a:r>
+          </a:p>
+          <a:p>
+            <a:pPr algn="l">
+              <a:spcAft>
+                <a:spcPts val="300"/>
+              </a:spcAft>
+            </a:pPr>
+            <a:r>
+              <a:rPr sz="1300" b="1">
+                <a:solidFill>
+                  <a:srgbClr val="0D3B66"/>
+                </a:solidFill>
+                <a:latin typeface="Calibri"/>
+              </a:rPr>
+              <a:t>Ahorro del corte 00–06: 29,7 m³/noche = $41.566/noche  ·  $1.246.980/mes. Acumulado 17/07–17/08 (32 noches): 950 m³ = $1.330.112 (tarifa $1.400/m³).</a:t>
             </a:r>
           </a:p>
         </p:txBody>

--- a/reports/Parque_Arauco/TMP_7MALLS/entrega_diego_anibal/Recorrido_ejecutivo_PA_MAE_20260817.pptx
+++ b/reports/Parque_Arauco/TMP_7MALLS/entrega_diego_anibal/Recorrido_ejecutivo_PA_MAE_20260817.pptx
@@ -17244,7 +17244,7 @@
                 </a:solidFill>
                 <a:latin typeface="Calibri"/>
               </a:rPr>
-              <a:t>San Ignacio 500 se lleva 79 % de julio. Control on/off operativo desde el 17/07: la madrugada pasó de 32 a 2 m³ (el 15/07 eran 36 m³) y se sostiene hasta hoy. San Ignacio 300 sigue sin control.</a:t>
+              <a:t>San Ignacio 500 se lleva 79 % de julio. Control on/off operativo desde el 17/07: la madrugada pasó de 32 a 2 m³ (el 15/07 eran 36 m³) y se sostiene hasta hoy.</a:t>
             </a:r>
           </a:p>
         </p:txBody>
@@ -17546,7 +17546,7 @@
                 </a:solidFill>
                 <a:latin typeface="Calibri"/>
               </a:rPr>
-              <a:t>Desde el 17/07 no hay noche alta: residual típico 2 m³ (máximo 4,4). No se lee como fuga. Umbrales a activar: San Ignacio 500 diario 145 m³/día (agosto ~115) y noche 8 m³ (avisa si el corte se cae). San Ignacio 300 noche 4 m³ (sin on/off).</a:t>
+              <a:t>Desde el 17/07 no hay noche alta: residual típico 2 m³ (máximo 4,4). No se lee como fuga. Umbrales a activar: San Ignacio 500 diario 145 m³/día (agosto ~115) y noche 8 m³ (avisa si el corte se cae). San Ignacio 300: alerta de umbral noche 4 m³.</a:t>
             </a:r>
           </a:p>
           <a:p>

--- a/reports/Parque_Arauco/TMP_7MALLS/entrega_diego_anibal/Recorrido_ejecutivo_PA_MAE_20260817.pptx
+++ b/reports/Parque_Arauco/TMP_7MALLS/entrega_diego_anibal/Recorrido_ejecutivo_PA_MAE_20260817.pptx
@@ -18,6 +18,7 @@
     <p:sldId id="266" r:id="rId17"/>
     <p:sldId id="267" r:id="rId18"/>
     <p:sldId id="268" r:id="rId19"/>
+    <p:sldId id="269" r:id="rId20"/>
   </p:sldIdLst>
   <p:sldSz cx="12191695" cy="6858000" type="screen4x3"/>
   <p:notesSz cx="6858000" cy="9144000"/>
@@ -3311,7 +3312,7 @@
                 </a:solidFill>
                 <a:latin typeface="Calibri"/>
               </a:rPr>
-              <a:t>Lámina 2: MAE  ·  MAM Placa  ·  MAQ Matriz  ·  BOM SI500  ·  PAK cadena</a:t>
+              <a:t>Lámina 2: MAE  ·  MAM Placa  ·  MAQ Matriz  ·  BOM SI500  ·  AEB Anillo  ·  PAK cadena</a:t>
             </a:r>
           </a:p>
         </p:txBody>
@@ -3649,7 +3650,46 @@
       </p:sp>
       <p:sp>
         <p:nvSpPr>
-          <p:cNvPr id="10" name="Rounded Rectangle 9"/>
+          <p:cNvPr id="10" name="TextBox 9"/>
+          <p:cNvSpPr txBox="1"/>
+          <p:nvPr/>
+        </p:nvSpPr>
+        <p:spPr>
+          <a:xfrm>
+            <a:off x="274320" y="1481328"/>
+            <a:ext cx="5733288" cy="164592"/>
+          </a:xfrm>
+          <a:prstGeom prst="rect">
+            <a:avLst/>
+          </a:prstGeom>
+          <a:noFill/>
+        </p:spPr>
+        <p:txBody>
+          <a:bodyPr wrap="square">
+            <a:spAutoFit/>
+          </a:bodyPr>
+          <a:lstStyle/>
+          <a:p>
+            <a:pPr algn="l">
+              <a:spcAft>
+                <a:spcPts val="300"/>
+              </a:spcAft>
+            </a:pPr>
+            <a:r>
+              <a:rPr sz="1000" b="0">
+                <a:solidFill>
+                  <a:srgbClr val="5A5A5A"/>
+                </a:solidFill>
+                <a:latin typeface="Calibri"/>
+              </a:rPr>
+              <a:t>activo 15/05</a:t>
+            </a:r>
+          </a:p>
+        </p:txBody>
+      </p:sp>
+      <p:sp>
+        <p:nvSpPr>
+          <p:cNvPr id="11" name="Rounded Rectangle 10"/>
           <p:cNvSpPr/>
           <p:nvPr/>
         </p:nvSpPr>
@@ -3668,7 +3708,7 @@
           </a:solidFill>
           <a:ln w="6350">
             <a:solidFill>
-              <a:srgbClr val="1F77B4"/>
+              <a:srgbClr val="C45C26"/>
             </a:solidFill>
           </a:ln>
         </p:spPr>
@@ -3696,7 +3736,7 @@
       </p:sp>
       <p:sp>
         <p:nvSpPr>
-          <p:cNvPr id="11" name="TextBox 10"/>
+          <p:cNvPr id="12" name="TextBox 11"/>
           <p:cNvSpPr txBox="1"/>
           <p:nvPr/>
         </p:nvSpPr>
@@ -3735,7 +3775,7 @@
       </p:sp>
       <p:sp>
         <p:nvSpPr>
-          <p:cNvPr id="12" name="TextBox 11"/>
+          <p:cNvPr id="13" name="TextBox 12"/>
           <p:cNvSpPr txBox="1"/>
           <p:nvPr/>
         </p:nvSpPr>
@@ -3774,7 +3814,7 @@
       </p:sp>
       <p:sp>
         <p:nvSpPr>
-          <p:cNvPr id="13" name="Rounded Rectangle 12"/>
+          <p:cNvPr id="14" name="Rounded Rectangle 13"/>
           <p:cNvSpPr/>
           <p:nvPr/>
         </p:nvSpPr>
@@ -3819,7 +3859,7 @@
       </p:sp>
       <p:pic>
         <p:nvPicPr>
-          <p:cNvPr id="14" name="Picture 13" descr="aeb_mensual_may_ago.png"/>
+          <p:cNvPr id="15" name="Picture 14" descr="aeb_mensual_may_ago.png"/>
           <p:cNvPicPr>
             <a:picLocks noChangeAspect="1"/>
           </p:cNvPicPr>
@@ -3843,7 +3883,7 @@
       </p:pic>
       <p:sp>
         <p:nvSpPr>
-          <p:cNvPr id="15" name="Rounded Rectangle 14"/>
+          <p:cNvPr id="16" name="Rounded Rectangle 15"/>
           <p:cNvSpPr/>
           <p:nvPr/>
         </p:nvSpPr>
@@ -3890,7 +3930,7 @@
       </p:sp>
       <p:sp>
         <p:nvSpPr>
-          <p:cNvPr id="16" name="TextBox 15"/>
+          <p:cNvPr id="17" name="TextBox 16"/>
           <p:cNvSpPr txBox="1"/>
           <p:nvPr/>
         </p:nvSpPr>
@@ -3929,7 +3969,7 @@
       </p:sp>
       <p:sp>
         <p:nvSpPr>
-          <p:cNvPr id="17" name="TextBox 16"/>
+          <p:cNvPr id="18" name="TextBox 17"/>
           <p:cNvSpPr txBox="1"/>
           <p:nvPr/>
         </p:nvSpPr>
@@ -3968,7 +4008,7 @@
       </p:sp>
       <p:sp>
         <p:nvSpPr>
-          <p:cNvPr id="18" name="Rounded Rectangle 17"/>
+          <p:cNvPr id="19" name="Rounded Rectangle 18"/>
           <p:cNvSpPr/>
           <p:nvPr/>
         </p:nvSpPr>
@@ -4015,7 +4055,7 @@
       </p:sp>
       <p:sp>
         <p:nvSpPr>
-          <p:cNvPr id="19" name="TextBox 18"/>
+          <p:cNvPr id="20" name="TextBox 19"/>
           <p:cNvSpPr txBox="1"/>
           <p:nvPr/>
         </p:nvSpPr>
@@ -4054,7 +4094,7 @@
       </p:sp>
       <p:sp>
         <p:nvSpPr>
-          <p:cNvPr id="20" name="TextBox 19"/>
+          <p:cNvPr id="21" name="TextBox 20"/>
           <p:cNvSpPr txBox="1"/>
           <p:nvPr/>
         </p:nvSpPr>
@@ -4093,7 +4133,7 @@
       </p:sp>
       <p:sp>
         <p:nvSpPr>
-          <p:cNvPr id="21" name="Rounded Rectangle 20"/>
+          <p:cNvPr id="22" name="Rounded Rectangle 21"/>
           <p:cNvSpPr/>
           <p:nvPr/>
         </p:nvSpPr>
@@ -4112,7 +4152,7 @@
           </a:solidFill>
           <a:ln w="6350">
             <a:solidFill>
-              <a:srgbClr val="1F77B4"/>
+              <a:srgbClr val="C45C26"/>
             </a:solidFill>
           </a:ln>
         </p:spPr>
@@ -4140,7 +4180,7 @@
       </p:sp>
       <p:sp>
         <p:nvSpPr>
-          <p:cNvPr id="22" name="TextBox 21"/>
+          <p:cNvPr id="23" name="TextBox 22"/>
           <p:cNvSpPr txBox="1"/>
           <p:nvPr/>
         </p:nvSpPr>
@@ -4168,7 +4208,7 @@
             <a:r>
               <a:rPr sz="1300" b="1">
                 <a:solidFill>
-                  <a:srgbClr val="1F77B4"/>
+                  <a:srgbClr val="C45C26"/>
                 </a:solidFill>
                 <a:latin typeface="Calibri"/>
               </a:rPr>
@@ -4179,7 +4219,7 @@
       </p:sp>
       <p:sp>
         <p:nvSpPr>
-          <p:cNvPr id="23" name="TextBox 22"/>
+          <p:cNvPr id="24" name="TextBox 23"/>
           <p:cNvSpPr txBox="1"/>
           <p:nvPr/>
         </p:nvSpPr>
@@ -4218,7 +4258,7 @@
       </p:sp>
       <p:sp>
         <p:nvSpPr>
-          <p:cNvPr id="24" name="Rounded Rectangle 23"/>
+          <p:cNvPr id="25" name="Rounded Rectangle 24"/>
           <p:cNvSpPr/>
           <p:nvPr/>
         </p:nvSpPr>
@@ -4265,7 +4305,7 @@
       </p:sp>
       <p:sp>
         <p:nvSpPr>
-          <p:cNvPr id="25" name="TextBox 24"/>
+          <p:cNvPr id="26" name="TextBox 25"/>
           <p:cNvSpPr txBox="1"/>
           <p:nvPr/>
         </p:nvSpPr>
@@ -4304,7 +4344,7 @@
       </p:sp>
       <p:sp>
         <p:nvSpPr>
-          <p:cNvPr id="26" name="TextBox 25"/>
+          <p:cNvPr id="27" name="TextBox 26"/>
           <p:cNvSpPr txBox="1"/>
           <p:nvPr/>
         </p:nvSpPr>
@@ -4352,7 +4392,7 @@
                 </a:solidFill>
                 <a:latin typeface="Calibri"/>
               </a:rPr>
-              <a:t>Matriz 1° piso y Anillo Plaza. Relocalizado en enero 2026.</a:t>
+              <a:t>Matriz 1° piso y Anillo Plaza. Matriz A.A. desactivada 15/05. Lámina 2: alza Anillo y umbrales.</a:t>
             </a:r>
           </a:p>
         </p:txBody>
@@ -4519,7 +4559,7 @@
                 </a:solidFill>
                 <a:latin typeface="Calibri"/>
               </a:rPr>
-              <a:t>CUR  ·  Equipos y consumo</a:t>
+              <a:t>AEB  ·  2. Anillo Plaza y Matriz</a:t>
             </a:r>
           </a:p>
         </p:txBody>
@@ -4558,7 +4598,7 @@
                 </a:solidFill>
                 <a:latin typeface="Calibri"/>
               </a:rPr>
-              <a:t>Arauco Curauma   |   2 puntos WES   |   01/05/2026 – 17/08/2026</a:t>
+              <a:t>Matriz A.A. desactivada 15/05  ·  alza Anillo  ·  umbrales</a:t>
             </a:r>
           </a:p>
         </p:txBody>
@@ -4571,702 +4611,8 @@
         </p:nvSpPr>
         <p:spPr>
           <a:xfrm>
-            <a:off x="201168" y="1024128"/>
-            <a:ext cx="5861304" cy="658368"/>
-          </a:xfrm>
-          <a:prstGeom prst="roundRect">
-            <a:avLst>
-              <a:gd name="adj" fmla="val 8000"/>
-            </a:avLst>
-          </a:prstGeom>
-          <a:solidFill>
-            <a:srgbClr val="F5F7FA"/>
-          </a:solidFill>
-          <a:ln w="6350">
-            <a:solidFill>
-              <a:srgbClr val="C9A227"/>
-            </a:solidFill>
-          </a:ln>
-        </p:spPr>
-        <p:style>
-          <a:lnRef idx="1">
-            <a:schemeClr val="accent1"/>
-          </a:lnRef>
-          <a:fillRef idx="3">
-            <a:schemeClr val="accent1"/>
-          </a:fillRef>
-          <a:effectRef idx="2">
-            <a:schemeClr val="accent1"/>
-          </a:effectRef>
-          <a:fontRef idx="minor">
-            <a:schemeClr val="lt1"/>
-          </a:fontRef>
-        </p:style>
-        <p:txBody>
-          <a:bodyPr rtlCol="0" anchor="ctr"/>
-          <a:lstStyle/>
-          <a:p>
-            <a:pPr algn="ctr"/>
-          </a:p>
-        </p:txBody>
-      </p:sp>
-      <p:sp>
-        <p:nvSpPr>
-          <p:cNvPr id="8" name="TextBox 7"/>
-          <p:cNvSpPr txBox="1"/>
-          <p:nvPr/>
-        </p:nvSpPr>
-        <p:spPr>
-          <a:xfrm>
-            <a:off x="274320" y="1060704"/>
-            <a:ext cx="5733288" cy="146304"/>
-          </a:xfrm>
-          <a:prstGeom prst="rect">
-            <a:avLst/>
-          </a:prstGeom>
-          <a:noFill/>
-        </p:spPr>
-        <p:txBody>
-          <a:bodyPr wrap="square">
-            <a:spAutoFit/>
-          </a:bodyPr>
-          <a:lstStyle/>
-          <a:p>
-            <a:pPr algn="l">
-              <a:spcAft>
-                <a:spcPts val="300"/>
-              </a:spcAft>
-            </a:pPr>
-            <a:r>
-              <a:rPr sz="1000" b="1">
-                <a:solidFill>
-                  <a:srgbClr val="C9A227"/>
-                </a:solidFill>
-                <a:latin typeface="Calibri"/>
-              </a:rPr>
-              <a:t>000025-38</a:t>
-            </a:r>
-          </a:p>
-        </p:txBody>
-      </p:sp>
-      <p:sp>
-        <p:nvSpPr>
-          <p:cNvPr id="9" name="TextBox 8"/>
-          <p:cNvSpPr txBox="1"/>
-          <p:nvPr/>
-        </p:nvSpPr>
-        <p:spPr>
-          <a:xfrm>
-            <a:off x="274320" y="1243584"/>
-            <a:ext cx="5733288" cy="201168"/>
-          </a:xfrm>
-          <a:prstGeom prst="rect">
-            <a:avLst/>
-          </a:prstGeom>
-          <a:noFill/>
-        </p:spPr>
-        <p:txBody>
-          <a:bodyPr wrap="square">
-            <a:spAutoFit/>
-          </a:bodyPr>
-          <a:lstStyle/>
-          <a:p>
-            <a:pPr algn="l">
-              <a:spcAft>
-                <a:spcPts val="300"/>
-              </a:spcAft>
-            </a:pPr>
-            <a:r>
-              <a:rPr sz="1200" b="1">
-                <a:solidFill>
-                  <a:srgbClr val="0D3B66"/>
-                </a:solidFill>
-                <a:latin typeface="Calibri"/>
-              </a:rPr>
-              <a:t>Anillo Norte</a:t>
-            </a:r>
-          </a:p>
-        </p:txBody>
-      </p:sp>
-      <p:sp>
-        <p:nvSpPr>
-          <p:cNvPr id="10" name="Rounded Rectangle 9"/>
-          <p:cNvSpPr/>
-          <p:nvPr/>
-        </p:nvSpPr>
-        <p:spPr>
-          <a:xfrm>
-            <a:off x="6135624" y="1024128"/>
-            <a:ext cx="5861304" cy="658368"/>
-          </a:xfrm>
-          <a:prstGeom prst="roundRect">
-            <a:avLst>
-              <a:gd name="adj" fmla="val 8000"/>
-            </a:avLst>
-          </a:prstGeom>
-          <a:solidFill>
-            <a:srgbClr val="F5F7FA"/>
-          </a:solidFill>
-          <a:ln w="6350">
-            <a:solidFill>
-              <a:srgbClr val="C45C26"/>
-            </a:solidFill>
-          </a:ln>
-        </p:spPr>
-        <p:style>
-          <a:lnRef idx="1">
-            <a:schemeClr val="accent1"/>
-          </a:lnRef>
-          <a:fillRef idx="3">
-            <a:schemeClr val="accent1"/>
-          </a:fillRef>
-          <a:effectRef idx="2">
-            <a:schemeClr val="accent1"/>
-          </a:effectRef>
-          <a:fontRef idx="minor">
-            <a:schemeClr val="lt1"/>
-          </a:fontRef>
-        </p:style>
-        <p:txBody>
-          <a:bodyPr rtlCol="0" anchor="ctr"/>
-          <a:lstStyle/>
-          <a:p>
-            <a:pPr algn="ctr"/>
-          </a:p>
-        </p:txBody>
-      </p:sp>
-      <p:sp>
-        <p:nvSpPr>
-          <p:cNvPr id="11" name="TextBox 10"/>
-          <p:cNvSpPr txBox="1"/>
-          <p:nvPr/>
-        </p:nvSpPr>
-        <p:spPr>
-          <a:xfrm>
-            <a:off x="6208776" y="1060704"/>
-            <a:ext cx="5733288" cy="146304"/>
-          </a:xfrm>
-          <a:prstGeom prst="rect">
-            <a:avLst/>
-          </a:prstGeom>
-          <a:noFill/>
-        </p:spPr>
-        <p:txBody>
-          <a:bodyPr wrap="square">
-            <a:spAutoFit/>
-          </a:bodyPr>
-          <a:lstStyle/>
-          <a:p>
-            <a:pPr algn="l">
-              <a:spcAft>
-                <a:spcPts val="300"/>
-              </a:spcAft>
-            </a:pPr>
-            <a:r>
-              <a:rPr sz="1000" b="1">
-                <a:solidFill>
-                  <a:srgbClr val="C9A227"/>
-                </a:solidFill>
-                <a:latin typeface="Calibri"/>
-              </a:rPr>
-              <a:t>000025-37</a:t>
-            </a:r>
-          </a:p>
-        </p:txBody>
-      </p:sp>
-      <p:sp>
-        <p:nvSpPr>
-          <p:cNvPr id="12" name="TextBox 11"/>
-          <p:cNvSpPr txBox="1"/>
-          <p:nvPr/>
-        </p:nvSpPr>
-        <p:spPr>
-          <a:xfrm>
-            <a:off x="6208776" y="1243584"/>
-            <a:ext cx="5733288" cy="201168"/>
-          </a:xfrm>
-          <a:prstGeom prst="rect">
-            <a:avLst/>
-          </a:prstGeom>
-          <a:noFill/>
-        </p:spPr>
-        <p:txBody>
-          <a:bodyPr wrap="square">
-            <a:spAutoFit/>
-          </a:bodyPr>
-          <a:lstStyle/>
-          <a:p>
-            <a:pPr algn="l">
-              <a:spcAft>
-                <a:spcPts val="300"/>
-              </a:spcAft>
-            </a:pPr>
-            <a:r>
-              <a:rPr sz="1200" b="1">
-                <a:solidFill>
-                  <a:srgbClr val="0D3B66"/>
-                </a:solidFill>
-                <a:latin typeface="Calibri"/>
-              </a:rPr>
-              <a:t>Anillo Sur</a:t>
-            </a:r>
-          </a:p>
-        </p:txBody>
-      </p:sp>
-      <p:sp>
-        <p:nvSpPr>
-          <p:cNvPr id="13" name="Rounded Rectangle 12"/>
-          <p:cNvSpPr/>
-          <p:nvPr/>
-        </p:nvSpPr>
-        <p:spPr>
-          <a:xfrm>
-            <a:off x="201168" y="1792224"/>
-            <a:ext cx="7973568" cy="3822191"/>
-          </a:xfrm>
-          <a:prstGeom prst="roundRect">
-            <a:avLst>
-              <a:gd name="adj" fmla="val 8000"/>
-            </a:avLst>
-          </a:prstGeom>
-          <a:solidFill>
-            <a:srgbClr val="F5F7FA"/>
-          </a:solidFill>
-          <a:ln>
-            <a:noFill/>
-          </a:ln>
-        </p:spPr>
-        <p:style>
-          <a:lnRef idx="1">
-            <a:schemeClr val="accent1"/>
-          </a:lnRef>
-          <a:fillRef idx="3">
-            <a:schemeClr val="accent1"/>
-          </a:fillRef>
-          <a:effectRef idx="2">
-            <a:schemeClr val="accent1"/>
-          </a:effectRef>
-          <a:fontRef idx="minor">
-            <a:schemeClr val="lt1"/>
-          </a:fontRef>
-        </p:style>
-        <p:txBody>
-          <a:bodyPr rtlCol="0" anchor="ctr"/>
-          <a:lstStyle/>
-          <a:p>
-            <a:pPr algn="ctr"/>
-          </a:p>
-        </p:txBody>
-      </p:sp>
-      <p:pic>
-        <p:nvPicPr>
-          <p:cNvPr id="14" name="Picture 13" descr="cur_mensual_may_ago.png"/>
-          <p:cNvPicPr>
-            <a:picLocks noChangeAspect="1"/>
-          </p:cNvPicPr>
-          <p:nvPr/>
-        </p:nvPicPr>
-        <p:blipFill>
-          <a:blip r:embed="rId3"/>
-          <a:stretch>
-            <a:fillRect/>
-          </a:stretch>
-        </p:blipFill>
-        <p:spPr>
-          <a:xfrm>
-            <a:off x="274320" y="2031551"/>
-            <a:ext cx="7827264" cy="3343536"/>
-          </a:xfrm>
-          <a:prstGeom prst="rect">
-            <a:avLst/>
-          </a:prstGeom>
-        </p:spPr>
-      </p:pic>
-      <p:sp>
-        <p:nvSpPr>
-          <p:cNvPr id="15" name="Rounded Rectangle 14"/>
-          <p:cNvSpPr/>
-          <p:nvPr/>
-        </p:nvSpPr>
-        <p:spPr>
-          <a:xfrm>
-            <a:off x="8302752" y="1792224"/>
-            <a:ext cx="3675887" cy="3822191"/>
-          </a:xfrm>
-          <a:prstGeom prst="roundRect">
-            <a:avLst>
-              <a:gd name="adj" fmla="val 8000"/>
-            </a:avLst>
-          </a:prstGeom>
-          <a:solidFill>
-            <a:srgbClr val="FFFFFF"/>
-          </a:solidFill>
-          <a:ln w="6350">
-            <a:solidFill>
-              <a:srgbClr val="1F77B4"/>
-            </a:solidFill>
-          </a:ln>
-        </p:spPr>
-        <p:style>
-          <a:lnRef idx="1">
-            <a:schemeClr val="accent1"/>
-          </a:lnRef>
-          <a:fillRef idx="3">
-            <a:schemeClr val="accent1"/>
-          </a:fillRef>
-          <a:effectRef idx="2">
-            <a:schemeClr val="accent1"/>
-          </a:effectRef>
-          <a:fontRef idx="minor">
-            <a:schemeClr val="lt1"/>
-          </a:fontRef>
-        </p:style>
-        <p:txBody>
-          <a:bodyPr rtlCol="0" anchor="ctr"/>
-          <a:lstStyle/>
-          <a:p>
-            <a:pPr algn="ctr"/>
-          </a:p>
-        </p:txBody>
-      </p:sp>
-      <p:sp>
-        <p:nvSpPr>
-          <p:cNvPr id="16" name="TextBox 15"/>
-          <p:cNvSpPr txBox="1"/>
-          <p:nvPr/>
-        </p:nvSpPr>
-        <p:spPr>
-          <a:xfrm>
-            <a:off x="8430768" y="1837943"/>
-            <a:ext cx="3419856" cy="164592"/>
-          </a:xfrm>
-          <a:prstGeom prst="rect">
-            <a:avLst/>
-          </a:prstGeom>
-          <a:noFill/>
-        </p:spPr>
-        <p:txBody>
-          <a:bodyPr wrap="square">
-            <a:spAutoFit/>
-          </a:bodyPr>
-          <a:lstStyle/>
-          <a:p>
-            <a:pPr algn="l">
-              <a:spcAft>
-                <a:spcPts val="300"/>
-              </a:spcAft>
-            </a:pPr>
-            <a:r>
-              <a:rPr sz="1100" b="1">
-                <a:solidFill>
-                  <a:srgbClr val="1F77B4"/>
-                </a:solidFill>
-                <a:latin typeface="Calibri"/>
-              </a:rPr>
-              <a:t>JULIO · último mes cerrado</a:t>
-            </a:r>
-          </a:p>
-        </p:txBody>
-      </p:sp>
-      <p:sp>
-        <p:nvSpPr>
-          <p:cNvPr id="17" name="TextBox 16"/>
-          <p:cNvSpPr txBox="1"/>
-          <p:nvPr/>
-        </p:nvSpPr>
-        <p:spPr>
-          <a:xfrm>
-            <a:off x="8430768" y="2002536"/>
-            <a:ext cx="3419856" cy="201168"/>
-          </a:xfrm>
-          <a:prstGeom prst="rect">
-            <a:avLst/>
-          </a:prstGeom>
-          <a:noFill/>
-        </p:spPr>
-        <p:txBody>
-          <a:bodyPr wrap="square">
-            <a:spAutoFit/>
-          </a:bodyPr>
-          <a:lstStyle/>
-          <a:p>
-            <a:pPr algn="l">
-              <a:spcAft>
-                <a:spcPts val="300"/>
-              </a:spcAft>
-            </a:pPr>
-            <a:r>
-              <a:rPr sz="1200" b="0">
-                <a:solidFill>
-                  <a:srgbClr val="5A5A5A"/>
-                </a:solidFill>
-                <a:latin typeface="Calibri"/>
-              </a:rPr>
-              <a:t>El recinto sumó 618 m³</a:t>
-            </a:r>
-          </a:p>
-        </p:txBody>
-      </p:sp>
-      <p:sp>
-        <p:nvSpPr>
-          <p:cNvPr id="18" name="Rounded Rectangle 17"/>
-          <p:cNvSpPr/>
-          <p:nvPr/>
-        </p:nvSpPr>
-        <p:spPr>
-          <a:xfrm>
-            <a:off x="8430768" y="2212848"/>
-            <a:ext cx="3419856" cy="768096"/>
-          </a:xfrm>
-          <a:prstGeom prst="roundRect">
-            <a:avLst>
-              <a:gd name="adj" fmla="val 8000"/>
-            </a:avLst>
-          </a:prstGeom>
-          <a:solidFill>
-            <a:srgbClr val="F5F7FA"/>
-          </a:solidFill>
-          <a:ln w="6350">
-            <a:solidFill>
-              <a:srgbClr val="C45C26"/>
-            </a:solidFill>
-          </a:ln>
-        </p:spPr>
-        <p:style>
-          <a:lnRef idx="1">
-            <a:schemeClr val="accent1"/>
-          </a:lnRef>
-          <a:fillRef idx="3">
-            <a:schemeClr val="accent1"/>
-          </a:fillRef>
-          <a:effectRef idx="2">
-            <a:schemeClr val="accent1"/>
-          </a:effectRef>
-          <a:fontRef idx="minor">
-            <a:schemeClr val="lt1"/>
-          </a:fontRef>
-        </p:style>
-        <p:txBody>
-          <a:bodyPr rtlCol="0" anchor="ctr"/>
-          <a:lstStyle/>
-          <a:p>
-            <a:pPr algn="ctr"/>
-          </a:p>
-        </p:txBody>
-      </p:sp>
-      <p:sp>
-        <p:nvSpPr>
-          <p:cNvPr id="19" name="TextBox 18"/>
-          <p:cNvSpPr txBox="1"/>
-          <p:nvPr/>
-        </p:nvSpPr>
-        <p:spPr>
-          <a:xfrm>
-            <a:off x="8540496" y="2240279"/>
-            <a:ext cx="3200400" cy="164592"/>
-          </a:xfrm>
-          <a:prstGeom prst="rect">
-            <a:avLst/>
-          </a:prstGeom>
-          <a:noFill/>
-        </p:spPr>
-        <p:txBody>
-          <a:bodyPr wrap="square">
-            <a:spAutoFit/>
-          </a:bodyPr>
-          <a:lstStyle/>
-          <a:p>
-            <a:pPr algn="l">
-              <a:spcAft>
-                <a:spcPts val="300"/>
-              </a:spcAft>
-            </a:pPr>
-            <a:r>
-              <a:rPr sz="1300" b="1">
-                <a:solidFill>
-                  <a:srgbClr val="C45C26"/>
-                </a:solidFill>
-                <a:latin typeface="Calibri"/>
-              </a:rPr>
-              <a:t>Anillo Sur</a:t>
-            </a:r>
-          </a:p>
-        </p:txBody>
-      </p:sp>
-      <p:sp>
-        <p:nvSpPr>
-          <p:cNvPr id="20" name="TextBox 19"/>
-          <p:cNvSpPr txBox="1"/>
-          <p:nvPr/>
-        </p:nvSpPr>
-        <p:spPr>
-          <a:xfrm>
-            <a:off x="8540496" y="2535448"/>
-            <a:ext cx="3200400" cy="237744"/>
-          </a:xfrm>
-          <a:prstGeom prst="rect">
-            <a:avLst/>
-          </a:prstGeom>
-          <a:noFill/>
-        </p:spPr>
-        <p:txBody>
-          <a:bodyPr wrap="square">
-            <a:spAutoFit/>
-          </a:bodyPr>
-          <a:lstStyle/>
-          <a:p>
-            <a:pPr algn="l">
-              <a:spcAft>
-                <a:spcPts val="300"/>
-              </a:spcAft>
-            </a:pPr>
-            <a:r>
-              <a:rPr sz="1600" b="1">
-                <a:solidFill>
-                  <a:srgbClr val="0D3B66"/>
-                </a:solidFill>
-                <a:latin typeface="Calibri"/>
-              </a:rPr>
-              <a:t>332 m³    54 %</a:t>
-            </a:r>
-          </a:p>
-        </p:txBody>
-      </p:sp>
-      <p:sp>
-        <p:nvSpPr>
-          <p:cNvPr id="21" name="Rounded Rectangle 20"/>
-          <p:cNvSpPr/>
-          <p:nvPr/>
-        </p:nvSpPr>
-        <p:spPr>
-          <a:xfrm>
-            <a:off x="8430768" y="3877056"/>
-            <a:ext cx="3419856" cy="768096"/>
-          </a:xfrm>
-          <a:prstGeom prst="roundRect">
-            <a:avLst>
-              <a:gd name="adj" fmla="val 8000"/>
-            </a:avLst>
-          </a:prstGeom>
-          <a:solidFill>
-            <a:srgbClr val="F5F7FA"/>
-          </a:solidFill>
-          <a:ln w="6350">
-            <a:solidFill>
-              <a:srgbClr val="C9A227"/>
-            </a:solidFill>
-          </a:ln>
-        </p:spPr>
-        <p:style>
-          <a:lnRef idx="1">
-            <a:schemeClr val="accent1"/>
-          </a:lnRef>
-          <a:fillRef idx="3">
-            <a:schemeClr val="accent1"/>
-          </a:fillRef>
-          <a:effectRef idx="2">
-            <a:schemeClr val="accent1"/>
-          </a:effectRef>
-          <a:fontRef idx="minor">
-            <a:schemeClr val="lt1"/>
-          </a:fontRef>
-        </p:style>
-        <p:txBody>
-          <a:bodyPr rtlCol="0" anchor="ctr"/>
-          <a:lstStyle/>
-          <a:p>
-            <a:pPr algn="ctr"/>
-          </a:p>
-        </p:txBody>
-      </p:sp>
-      <p:sp>
-        <p:nvSpPr>
-          <p:cNvPr id="22" name="TextBox 21"/>
-          <p:cNvSpPr txBox="1"/>
-          <p:nvPr/>
-        </p:nvSpPr>
-        <p:spPr>
-          <a:xfrm>
-            <a:off x="8540496" y="3904488"/>
-            <a:ext cx="3200400" cy="164592"/>
-          </a:xfrm>
-          <a:prstGeom prst="rect">
-            <a:avLst/>
-          </a:prstGeom>
-          <a:noFill/>
-        </p:spPr>
-        <p:txBody>
-          <a:bodyPr wrap="square">
-            <a:spAutoFit/>
-          </a:bodyPr>
-          <a:lstStyle/>
-          <a:p>
-            <a:pPr algn="l">
-              <a:spcAft>
-                <a:spcPts val="300"/>
-              </a:spcAft>
-            </a:pPr>
-            <a:r>
-              <a:rPr sz="1300" b="1">
-                <a:solidFill>
-                  <a:srgbClr val="C9A227"/>
-                </a:solidFill>
-                <a:latin typeface="Calibri"/>
-              </a:rPr>
-              <a:t>Anillo Norte</a:t>
-            </a:r>
-          </a:p>
-        </p:txBody>
-      </p:sp>
-      <p:sp>
-        <p:nvSpPr>
-          <p:cNvPr id="23" name="TextBox 22"/>
-          <p:cNvSpPr txBox="1"/>
-          <p:nvPr/>
-        </p:nvSpPr>
-        <p:spPr>
-          <a:xfrm>
-            <a:off x="8540496" y="4199656"/>
-            <a:ext cx="3200400" cy="237744"/>
-          </a:xfrm>
-          <a:prstGeom prst="rect">
-            <a:avLst/>
-          </a:prstGeom>
-          <a:noFill/>
-        </p:spPr>
-        <p:txBody>
-          <a:bodyPr wrap="square">
-            <a:spAutoFit/>
-          </a:bodyPr>
-          <a:lstStyle/>
-          <a:p>
-            <a:pPr algn="l">
-              <a:spcAft>
-                <a:spcPts val="300"/>
-              </a:spcAft>
-            </a:pPr>
-            <a:r>
-              <a:rPr sz="1600" b="1">
-                <a:solidFill>
-                  <a:srgbClr val="0D3B66"/>
-                </a:solidFill>
-                <a:latin typeface="Calibri"/>
-              </a:rPr>
-              <a:t>287 m³    46 %</a:t>
-            </a:r>
-          </a:p>
-        </p:txBody>
-      </p:sp>
-      <p:sp>
-        <p:nvSpPr>
-          <p:cNvPr id="24" name="Rounded Rectangle 23"/>
-          <p:cNvSpPr/>
-          <p:nvPr/>
-        </p:nvSpPr>
-        <p:spPr>
-          <a:xfrm>
-            <a:off x="201168" y="5705856"/>
-            <a:ext cx="11795760" cy="438912"/>
+            <a:off x="201168" y="987552"/>
+            <a:ext cx="11777472" cy="658368"/>
           </a:xfrm>
           <a:prstGeom prst="roundRect">
             <a:avLst>
@@ -5306,94 +4652,357 @@
       </p:sp>
       <p:sp>
         <p:nvSpPr>
-          <p:cNvPr id="25" name="TextBox 24"/>
-          <p:cNvSpPr txBox="1"/>
-          <p:nvPr/>
-        </p:nvSpPr>
-        <p:spPr>
-          <a:xfrm>
-            <a:off x="329184" y="5779008"/>
-            <a:ext cx="11539728" cy="310896"/>
-          </a:xfrm>
-          <a:prstGeom prst="rect">
-            <a:avLst/>
-          </a:prstGeom>
-          <a:noFill/>
-        </p:spPr>
-        <p:txBody>
-          <a:bodyPr wrap="square">
-            <a:spAutoFit/>
-          </a:bodyPr>
-          <a:lstStyle/>
-          <a:p>
-            <a:pPr algn="l">
-              <a:spcAft>
-                <a:spcPts val="300"/>
-              </a:spcAft>
-            </a:pPr>
-            <a:r>
-              <a:rPr sz="1100" b="0">
+          <p:cNvPr id="8" name="TextBox 7"/>
+          <p:cNvSpPr txBox="1"/>
+          <p:nvPr/>
+        </p:nvSpPr>
+        <p:spPr>
+          <a:xfrm>
+            <a:off x="365760" y="1042415"/>
+            <a:ext cx="11475720" cy="548640"/>
+          </a:xfrm>
+          <a:prstGeom prst="rect">
+            <a:avLst/>
+          </a:prstGeom>
+          <a:noFill/>
+        </p:spPr>
+        <p:txBody>
+          <a:bodyPr wrap="square">
+            <a:spAutoFit/>
+          </a:bodyPr>
+          <a:lstStyle/>
+          <a:p>
+            <a:pPr algn="l">
+              <a:spcAft>
+                <a:spcPts val="300"/>
+              </a:spcAft>
+            </a:pPr>
+            <a:r>
+              <a:rPr sz="1400" b="0">
                 <a:solidFill>
                   <a:srgbClr val="0D3B66"/>
                 </a:solidFill>
                 <a:latin typeface="Calibri"/>
               </a:rPr>
-              <a:t>Recepción 29/04/2026 (Anillo Norte / Anillo Sur)  ·  Capacitación 12/12/2025  ·  Joceline Lazo  ·  Constanza Vilches</a:t>
-            </a:r>
-          </a:p>
-        </p:txBody>
-      </p:sp>
-      <p:sp>
-        <p:nvSpPr>
-          <p:cNvPr id="26" name="TextBox 25"/>
-          <p:cNvSpPr txBox="1"/>
-          <p:nvPr/>
-        </p:nvSpPr>
-        <p:spPr>
-          <a:xfrm>
-            <a:off x="256032" y="6181344"/>
-            <a:ext cx="11704320" cy="566928"/>
-          </a:xfrm>
-          <a:prstGeom prst="rect">
-            <a:avLst/>
-          </a:prstGeom>
-          <a:noFill/>
-        </p:spPr>
-        <p:txBody>
-          <a:bodyPr wrap="square">
-            <a:spAutoFit/>
-          </a:bodyPr>
-          <a:lstStyle/>
-          <a:p>
-            <a:pPr algn="l">
-              <a:spcAft>
-                <a:spcPts val="300"/>
-              </a:spcAft>
-            </a:pPr>
-            <a:r>
-              <a:rPr sz="1200" b="0">
+              <a:t>Matriz A.A. se desactivó el 15/05: desde ese día el recinto se lee en Matriz 1° piso y Anillo Plaza. Anillo Plaza subió (mayo 7 → junio 15 → julio 21 m³/día; pico 58 el 09/07). Agosto 13: ¿hay un trabajo en curso?</a:t>
+            </a:r>
+          </a:p>
+        </p:txBody>
+      </p:sp>
+      <p:sp>
+        <p:nvSpPr>
+          <p:cNvPr id="9" name="Rounded Rectangle 8"/>
+          <p:cNvSpPr/>
+          <p:nvPr/>
+        </p:nvSpPr>
+        <p:spPr>
+          <a:xfrm>
+            <a:off x="201168" y="1737360"/>
+            <a:ext cx="5833872" cy="3803904"/>
+          </a:xfrm>
+          <a:prstGeom prst="roundRect">
+            <a:avLst>
+              <a:gd name="adj" fmla="val 8000"/>
+            </a:avLst>
+          </a:prstGeom>
+          <a:solidFill>
+            <a:srgbClr val="F5F7FA"/>
+          </a:solidFill>
+          <a:ln>
+            <a:noFill/>
+          </a:ln>
+        </p:spPr>
+        <p:style>
+          <a:lnRef idx="1">
+            <a:schemeClr val="accent1"/>
+          </a:lnRef>
+          <a:fillRef idx="3">
+            <a:schemeClr val="accent1"/>
+          </a:fillRef>
+          <a:effectRef idx="2">
+            <a:schemeClr val="accent1"/>
+          </a:effectRef>
+          <a:fontRef idx="minor">
+            <a:schemeClr val="lt1"/>
+          </a:fontRef>
+        </p:style>
+        <p:txBody>
+          <a:bodyPr rtlCol="0" anchor="ctr"/>
+          <a:lstStyle/>
+          <a:p>
+            <a:pPr algn="ctr"/>
+          </a:p>
+        </p:txBody>
+      </p:sp>
+      <p:sp>
+        <p:nvSpPr>
+          <p:cNvPr id="10" name="TextBox 9"/>
+          <p:cNvSpPr txBox="1"/>
+          <p:nvPr/>
+        </p:nvSpPr>
+        <p:spPr>
+          <a:xfrm>
+            <a:off x="329184" y="1773936"/>
+            <a:ext cx="5577840" cy="201168"/>
+          </a:xfrm>
+          <a:prstGeom prst="rect">
+            <a:avLst/>
+          </a:prstGeom>
+          <a:noFill/>
+        </p:spPr>
+        <p:txBody>
+          <a:bodyPr wrap="square">
+            <a:spAutoFit/>
+          </a:bodyPr>
+          <a:lstStyle/>
+          <a:p>
+            <a:pPr algn="l">
+              <a:spcAft>
+                <a:spcPts val="300"/>
+              </a:spcAft>
+            </a:pPr>
+            <a:r>
+              <a:rPr sz="1100" b="1">
+                <a:solidFill>
+                  <a:srgbClr val="1F77B4"/>
+                </a:solidFill>
+                <a:latin typeface="Calibri"/>
+              </a:rPr>
+              <a:t>ANILLO PLAZA  ·  promedio día vs noche</a:t>
+            </a:r>
+          </a:p>
+        </p:txBody>
+      </p:sp>
+      <p:pic>
+        <p:nvPicPr>
+          <p:cNvPr id="11" name="Picture 10" descr="aeb_anillo_dia_noche.png"/>
+          <p:cNvPicPr>
+            <a:picLocks noChangeAspect="1"/>
+          </p:cNvPicPr>
+          <p:nvPr/>
+        </p:nvPicPr>
+        <p:blipFill>
+          <a:blip r:embed="rId3"/>
+          <a:stretch>
+            <a:fillRect/>
+          </a:stretch>
+        </p:blipFill>
+        <p:spPr>
+          <a:xfrm>
+            <a:off x="292608" y="2462304"/>
+            <a:ext cx="5650992" cy="2518606"/>
+          </a:xfrm>
+          <a:prstGeom prst="rect">
+            <a:avLst/>
+          </a:prstGeom>
+        </p:spPr>
+      </p:pic>
+      <p:sp>
+        <p:nvSpPr>
+          <p:cNvPr id="12" name="Rounded Rectangle 11"/>
+          <p:cNvSpPr/>
+          <p:nvPr/>
+        </p:nvSpPr>
+        <p:spPr>
+          <a:xfrm>
+            <a:off x="6163056" y="1737360"/>
+            <a:ext cx="5815584" cy="3803904"/>
+          </a:xfrm>
+          <a:prstGeom prst="roundRect">
+            <a:avLst>
+              <a:gd name="adj" fmla="val 8000"/>
+            </a:avLst>
+          </a:prstGeom>
+          <a:solidFill>
+            <a:srgbClr val="F5F7FA"/>
+          </a:solidFill>
+          <a:ln>
+            <a:noFill/>
+          </a:ln>
+        </p:spPr>
+        <p:style>
+          <a:lnRef idx="1">
+            <a:schemeClr val="accent1"/>
+          </a:lnRef>
+          <a:fillRef idx="3">
+            <a:schemeClr val="accent1"/>
+          </a:fillRef>
+          <a:effectRef idx="2">
+            <a:schemeClr val="accent1"/>
+          </a:effectRef>
+          <a:fontRef idx="minor">
+            <a:schemeClr val="lt1"/>
+          </a:fontRef>
+        </p:style>
+        <p:txBody>
+          <a:bodyPr rtlCol="0" anchor="ctr"/>
+          <a:lstStyle/>
+          <a:p>
+            <a:pPr algn="ctr"/>
+          </a:p>
+        </p:txBody>
+      </p:sp>
+      <p:sp>
+        <p:nvSpPr>
+          <p:cNvPr id="13" name="TextBox 12"/>
+          <p:cNvSpPr txBox="1"/>
+          <p:nvPr/>
+        </p:nvSpPr>
+        <p:spPr>
+          <a:xfrm>
+            <a:off x="6291072" y="1773936"/>
+            <a:ext cx="5559552" cy="201168"/>
+          </a:xfrm>
+          <a:prstGeom prst="rect">
+            <a:avLst/>
+          </a:prstGeom>
+          <a:noFill/>
+        </p:spPr>
+        <p:txBody>
+          <a:bodyPr wrap="square">
+            <a:spAutoFit/>
+          </a:bodyPr>
+          <a:lstStyle/>
+          <a:p>
+            <a:pPr algn="l">
+              <a:spcAft>
+                <a:spcPts val="300"/>
+              </a:spcAft>
+            </a:pPr>
+            <a:r>
+              <a:rPr sz="1100" b="1">
+                <a:solidFill>
+                  <a:srgbClr val="1F77B4"/>
+                </a:solidFill>
+                <a:latin typeface="Calibri"/>
+              </a:rPr>
+              <a:t>MATRIZ 1° PISO  ·  promedio día vs noche</a:t>
+            </a:r>
+          </a:p>
+        </p:txBody>
+      </p:sp>
+      <p:pic>
+        <p:nvPicPr>
+          <p:cNvPr id="14" name="Picture 13" descr="aeb_matriz_dia_noche.png"/>
+          <p:cNvPicPr>
+            <a:picLocks noChangeAspect="1"/>
+          </p:cNvPicPr>
+          <p:nvPr/>
+        </p:nvPicPr>
+        <p:blipFill>
+          <a:blip r:embed="rId4"/>
+          <a:stretch>
+            <a:fillRect/>
+          </a:stretch>
+        </p:blipFill>
+        <p:spPr>
+          <a:xfrm>
+            <a:off x="6254496" y="2466379"/>
+            <a:ext cx="5632704" cy="2510456"/>
+          </a:xfrm>
+          <a:prstGeom prst="rect">
+            <a:avLst/>
+          </a:prstGeom>
+        </p:spPr>
+      </p:pic>
+      <p:sp>
+        <p:nvSpPr>
+          <p:cNvPr id="15" name="Rounded Rectangle 14"/>
+          <p:cNvSpPr/>
+          <p:nvPr/>
+        </p:nvSpPr>
+        <p:spPr>
+          <a:xfrm>
+            <a:off x="201168" y="5632704"/>
+            <a:ext cx="11777472" cy="1060704"/>
+          </a:xfrm>
+          <a:prstGeom prst="roundRect">
+            <a:avLst>
+              <a:gd name="adj" fmla="val 8000"/>
+            </a:avLst>
+          </a:prstGeom>
+          <a:solidFill>
+            <a:srgbClr val="FFF9EB"/>
+          </a:solidFill>
+          <a:ln w="6350">
+            <a:solidFill>
+              <a:srgbClr val="C9A227"/>
+            </a:solidFill>
+          </a:ln>
+        </p:spPr>
+        <p:style>
+          <a:lnRef idx="1">
+            <a:schemeClr val="accent1"/>
+          </a:lnRef>
+          <a:fillRef idx="3">
+            <a:schemeClr val="accent1"/>
+          </a:fillRef>
+          <a:effectRef idx="2">
+            <a:schemeClr val="accent1"/>
+          </a:effectRef>
+          <a:fontRef idx="minor">
+            <a:schemeClr val="lt1"/>
+          </a:fontRef>
+        </p:style>
+        <p:txBody>
+          <a:bodyPr rtlCol="0" anchor="ctr"/>
+          <a:lstStyle/>
+          <a:p>
+            <a:pPr algn="ctr"/>
+          </a:p>
+        </p:txBody>
+      </p:sp>
+      <p:sp>
+        <p:nvSpPr>
+          <p:cNvPr id="16" name="TextBox 15"/>
+          <p:cNvSpPr txBox="1"/>
+          <p:nvPr/>
+        </p:nvSpPr>
+        <p:spPr>
+          <a:xfrm>
+            <a:off x="365760" y="5687568"/>
+            <a:ext cx="11475720" cy="950976"/>
+          </a:xfrm>
+          <a:prstGeom prst="rect">
+            <a:avLst/>
+          </a:prstGeom>
+          <a:noFill/>
+        </p:spPr>
+        <p:txBody>
+          <a:bodyPr wrap="square">
+            <a:spAutoFit/>
+          </a:bodyPr>
+          <a:lstStyle/>
+          <a:p>
+            <a:pPr algn="l">
+              <a:spcAft>
+                <a:spcPts val="300"/>
+              </a:spcAft>
+            </a:pPr>
+            <a:r>
+              <a:rPr sz="1300" b="0">
                 <a:solidFill>
                   <a:srgbClr val="0D3B66"/>
                 </a:solidFill>
                 <a:latin typeface="Calibri"/>
               </a:rPr>
-              <a:t>Junio 664   ·   Julio 618   ·   Agosto 1–17: 366   ·   proy. ago 667 m³.</a:t>
-            </a:r>
-          </a:p>
-          <a:p>
-            <a:pPr algn="l">
-              <a:spcAft>
-                <a:spcPts val="300"/>
-              </a:spcAft>
-            </a:pPr>
-            <a:r>
-              <a:rPr sz="1100" b="0">
-                <a:solidFill>
-                  <a:srgbClr val="5A5A5A"/>
-                </a:solidFill>
-                <a:latin typeface="Calibri"/>
-              </a:rPr>
-              <a:t>Cambio de monitoreo: se dejó Baños y Matriz Principal. Anillo Norte y Sur con lectura correcta desde el 19/05 (mayo no se grafica).</a:t>
+              <a:t>Pregunta para el recinto: el alza de Anillo Plaza (mayo 7 → julio 21 m³/día) ¿se está trabajando? Agosto baja a 13 m³/día, pero sigue sobre mayo.</a:t>
+            </a:r>
+          </a:p>
+          <a:p>
+            <a:pPr algn="l">
+              <a:spcAft>
+                <a:spcPts val="300"/>
+              </a:spcAft>
+            </a:pPr>
+            <a:r>
+              <a:rPr sz="1300" b="1">
+                <a:solidFill>
+                  <a:srgbClr val="0D3B66"/>
+                </a:solidFill>
+                <a:latin typeface="Calibri"/>
+              </a:rPr>
+              <a:t>Umbrales a activar: Anillo Plaza diario 22 m³/día (julio 21; el 09/07 llegó a 58). Matriz 1° piso noche 3 m³ 00–06 (el día está estable; la madrugada es lo que hay que ver).</a:t>
             </a:r>
           </a:p>
         </p:txBody>
@@ -5560,7 +5169,7 @@
                 </a:solidFill>
                 <a:latin typeface="Calibri"/>
               </a:rPr>
-              <a:t>PAK  ·  Equipos y consumo</a:t>
+              <a:t>CUR  ·  Equipos y consumo</a:t>
             </a:r>
           </a:p>
         </p:txBody>
@@ -5599,7 +5208,7 @@
                 </a:solidFill>
                 <a:latin typeface="Calibri"/>
               </a:rPr>
-              <a:t>Parque Arauco Kennedy   |   10 puntos WES   |   julio = cabecera (sin 27, 35 y 36)   |   01/05/2026 – 17/08/2026</a:t>
+              <a:t>Arauco Curauma   |   2 puntos WES   |   01/05/2026 – 17/08/2026</a:t>
             </a:r>
           </a:p>
         </p:txBody>
@@ -5613,7 +5222,7 @@
         <p:spPr>
           <a:xfrm>
             <a:off x="201168" y="1024128"/>
-            <a:ext cx="2286000" cy="621792"/>
+            <a:ext cx="5861304" cy="658368"/>
           </a:xfrm>
           <a:prstGeom prst="roundRect">
             <a:avLst>
@@ -5625,7 +5234,7 @@
           </a:solidFill>
           <a:ln w="6350">
             <a:solidFill>
-              <a:srgbClr val="7BA3C9"/>
+              <a:srgbClr val="1F77B4"/>
             </a:solidFill>
           </a:ln>
         </p:spPr>
@@ -5660,32 +5269,32 @@
         <p:spPr>
           <a:xfrm>
             <a:off x="274320" y="1060704"/>
-            <a:ext cx="2157984" cy="146304"/>
-          </a:xfrm>
-          <a:prstGeom prst="rect">
-            <a:avLst/>
-          </a:prstGeom>
-          <a:noFill/>
-        </p:spPr>
-        <p:txBody>
-          <a:bodyPr wrap="square">
-            <a:spAutoFit/>
-          </a:bodyPr>
-          <a:lstStyle/>
-          <a:p>
-            <a:pPr algn="l">
-              <a:spcAft>
-                <a:spcPts val="300"/>
-              </a:spcAft>
-            </a:pPr>
-            <a:r>
-              <a:rPr sz="900" b="1">
+            <a:ext cx="5733288" cy="146304"/>
+          </a:xfrm>
+          <a:prstGeom prst="rect">
+            <a:avLst/>
+          </a:prstGeom>
+          <a:noFill/>
+        </p:spPr>
+        <p:txBody>
+          <a:bodyPr wrap="square">
+            <a:spAutoFit/>
+          </a:bodyPr>
+          <a:lstStyle/>
+          <a:p>
+            <a:pPr algn="l">
+              <a:spcAft>
+                <a:spcPts val="300"/>
+              </a:spcAft>
+            </a:pPr>
+            <a:r>
+              <a:rPr sz="1000" b="1">
                 <a:solidFill>
                   <a:srgbClr val="C9A227"/>
                 </a:solidFill>
                 <a:latin typeface="Calibri"/>
               </a:rPr>
-              <a:t>000025-20</a:t>
+              <a:t>000025-38</a:t>
             </a:r>
           </a:p>
         </p:txBody>
@@ -5698,33 +5307,33 @@
         </p:nvSpPr>
         <p:spPr>
           <a:xfrm>
-            <a:off x="274320" y="1225296"/>
-            <a:ext cx="2157984" cy="201168"/>
-          </a:xfrm>
-          <a:prstGeom prst="rect">
-            <a:avLst/>
-          </a:prstGeom>
-          <a:noFill/>
-        </p:spPr>
-        <p:txBody>
-          <a:bodyPr wrap="square">
-            <a:spAutoFit/>
-          </a:bodyPr>
-          <a:lstStyle/>
-          <a:p>
-            <a:pPr algn="l">
-              <a:spcAft>
-                <a:spcPts val="300"/>
-              </a:spcAft>
-            </a:pPr>
-            <a:r>
-              <a:rPr sz="1100" b="1">
+            <a:off x="274320" y="1243584"/>
+            <a:ext cx="5733288" cy="201168"/>
+          </a:xfrm>
+          <a:prstGeom prst="rect">
+            <a:avLst/>
+          </a:prstGeom>
+          <a:noFill/>
+        </p:spPr>
+        <p:txBody>
+          <a:bodyPr wrap="square">
+            <a:spAutoFit/>
+          </a:bodyPr>
+          <a:lstStyle/>
+          <a:p>
+            <a:pPr algn="l">
+              <a:spcAft>
+                <a:spcPts val="300"/>
+              </a:spcAft>
+            </a:pPr>
+            <a:r>
+              <a:rPr sz="1200" b="1">
                 <a:solidFill>
                   <a:srgbClr val="0D3B66"/>
                 </a:solidFill>
                 <a:latin typeface="Calibri"/>
               </a:rPr>
-              <a:t>Matriz Andén</a:t>
+              <a:t>Anillo Norte</a:t>
             </a:r>
           </a:p>
         </p:txBody>
@@ -5737,461 +5346,8 @@
         </p:nvSpPr>
         <p:spPr>
           <a:xfrm>
-            <a:off x="2578608" y="1024128"/>
-            <a:ext cx="2286000" cy="621792"/>
-          </a:xfrm>
-          <a:prstGeom prst="roundRect">
-            <a:avLst>
-              <a:gd name="adj" fmla="val 8000"/>
-            </a:avLst>
-          </a:prstGeom>
-          <a:solidFill>
-            <a:srgbClr val="F5F7FA"/>
-          </a:solidFill>
-          <a:ln w="6350">
-            <a:solidFill>
-              <a:srgbClr val="5A8C6E"/>
-            </a:solidFill>
-          </a:ln>
-        </p:spPr>
-        <p:style>
-          <a:lnRef idx="1">
-            <a:schemeClr val="accent1"/>
-          </a:lnRef>
-          <a:fillRef idx="3">
-            <a:schemeClr val="accent1"/>
-          </a:fillRef>
-          <a:effectRef idx="2">
-            <a:schemeClr val="accent1"/>
-          </a:effectRef>
-          <a:fontRef idx="minor">
-            <a:schemeClr val="lt1"/>
-          </a:fontRef>
-        </p:style>
-        <p:txBody>
-          <a:bodyPr rtlCol="0" anchor="ctr"/>
-          <a:lstStyle/>
-          <a:p>
-            <a:pPr algn="ctr"/>
-          </a:p>
-        </p:txBody>
-      </p:sp>
-      <p:sp>
-        <p:nvSpPr>
-          <p:cNvPr id="11" name="TextBox 10"/>
-          <p:cNvSpPr txBox="1"/>
-          <p:nvPr/>
-        </p:nvSpPr>
-        <p:spPr>
-          <a:xfrm>
-            <a:off x="2651760" y="1060704"/>
-            <a:ext cx="2157984" cy="146304"/>
-          </a:xfrm>
-          <a:prstGeom prst="rect">
-            <a:avLst/>
-          </a:prstGeom>
-          <a:noFill/>
-        </p:spPr>
-        <p:txBody>
-          <a:bodyPr wrap="square">
-            <a:spAutoFit/>
-          </a:bodyPr>
-          <a:lstStyle/>
-          <a:p>
-            <a:pPr algn="l">
-              <a:spcAft>
-                <a:spcPts val="300"/>
-              </a:spcAft>
-            </a:pPr>
-            <a:r>
-              <a:rPr sz="900" b="1">
-                <a:solidFill>
-                  <a:srgbClr val="C9A227"/>
-                </a:solidFill>
-                <a:latin typeface="Calibri"/>
-              </a:rPr>
-              <a:t>000025-21</a:t>
-            </a:r>
-          </a:p>
-        </p:txBody>
-      </p:sp>
-      <p:sp>
-        <p:nvSpPr>
-          <p:cNvPr id="12" name="TextBox 11"/>
-          <p:cNvSpPr txBox="1"/>
-          <p:nvPr/>
-        </p:nvSpPr>
-        <p:spPr>
-          <a:xfrm>
-            <a:off x="2651760" y="1225296"/>
-            <a:ext cx="2157984" cy="201168"/>
-          </a:xfrm>
-          <a:prstGeom prst="rect">
-            <a:avLst/>
-          </a:prstGeom>
-          <a:noFill/>
-        </p:spPr>
-        <p:txBody>
-          <a:bodyPr wrap="square">
-            <a:spAutoFit/>
-          </a:bodyPr>
-          <a:lstStyle/>
-          <a:p>
-            <a:pPr algn="l">
-              <a:spcAft>
-                <a:spcPts val="300"/>
-              </a:spcAft>
-            </a:pPr>
-            <a:r>
-              <a:rPr sz="1100" b="1">
-                <a:solidFill>
-                  <a:srgbClr val="0D3B66"/>
-                </a:solidFill>
-                <a:latin typeface="Calibri"/>
-              </a:rPr>
-              <a:t>Locales Gast.</a:t>
-            </a:r>
-          </a:p>
-        </p:txBody>
-      </p:sp>
-      <p:sp>
-        <p:nvSpPr>
-          <p:cNvPr id="13" name="Rounded Rectangle 12"/>
-          <p:cNvSpPr/>
-          <p:nvPr/>
-        </p:nvSpPr>
-        <p:spPr>
-          <a:xfrm>
-            <a:off x="4956048" y="1024128"/>
-            <a:ext cx="2286000" cy="621792"/>
-          </a:xfrm>
-          <a:prstGeom prst="roundRect">
-            <a:avLst>
-              <a:gd name="adj" fmla="val 8000"/>
-            </a:avLst>
-          </a:prstGeom>
-          <a:solidFill>
-            <a:srgbClr val="F5F7FA"/>
-          </a:solidFill>
-          <a:ln w="6350">
-            <a:solidFill>
-              <a:srgbClr val="8C5A5A"/>
-            </a:solidFill>
-          </a:ln>
-        </p:spPr>
-        <p:style>
-          <a:lnRef idx="1">
-            <a:schemeClr val="accent1"/>
-          </a:lnRef>
-          <a:fillRef idx="3">
-            <a:schemeClr val="accent1"/>
-          </a:fillRef>
-          <a:effectRef idx="2">
-            <a:schemeClr val="accent1"/>
-          </a:effectRef>
-          <a:fontRef idx="minor">
-            <a:schemeClr val="lt1"/>
-          </a:fontRef>
-        </p:style>
-        <p:txBody>
-          <a:bodyPr rtlCol="0" anchor="ctr"/>
-          <a:lstStyle/>
-          <a:p>
-            <a:pPr algn="ctr"/>
-          </a:p>
-        </p:txBody>
-      </p:sp>
-      <p:sp>
-        <p:nvSpPr>
-          <p:cNvPr id="14" name="TextBox 13"/>
-          <p:cNvSpPr txBox="1"/>
-          <p:nvPr/>
-        </p:nvSpPr>
-        <p:spPr>
-          <a:xfrm>
-            <a:off x="5029200" y="1060704"/>
-            <a:ext cx="2157984" cy="146304"/>
-          </a:xfrm>
-          <a:prstGeom prst="rect">
-            <a:avLst/>
-          </a:prstGeom>
-          <a:noFill/>
-        </p:spPr>
-        <p:txBody>
-          <a:bodyPr wrap="square">
-            <a:spAutoFit/>
-          </a:bodyPr>
-          <a:lstStyle/>
-          <a:p>
-            <a:pPr algn="l">
-              <a:spcAft>
-                <a:spcPts val="300"/>
-              </a:spcAft>
-            </a:pPr>
-            <a:r>
-              <a:rPr sz="900" b="1">
-                <a:solidFill>
-                  <a:srgbClr val="C9A227"/>
-                </a:solidFill>
-                <a:latin typeface="Calibri"/>
-              </a:rPr>
-              <a:t>000025-22</a:t>
-            </a:r>
-          </a:p>
-        </p:txBody>
-      </p:sp>
-      <p:sp>
-        <p:nvSpPr>
-          <p:cNvPr id="15" name="TextBox 14"/>
-          <p:cNvSpPr txBox="1"/>
-          <p:nvPr/>
-        </p:nvSpPr>
-        <p:spPr>
-          <a:xfrm>
-            <a:off x="5029200" y="1225296"/>
-            <a:ext cx="2157984" cy="201168"/>
-          </a:xfrm>
-          <a:prstGeom prst="rect">
-            <a:avLst/>
-          </a:prstGeom>
-          <a:noFill/>
-        </p:spPr>
-        <p:txBody>
-          <a:bodyPr wrap="square">
-            <a:spAutoFit/>
-          </a:bodyPr>
-          <a:lstStyle/>
-          <a:p>
-            <a:pPr algn="l">
-              <a:spcAft>
-                <a:spcPts val="300"/>
-              </a:spcAft>
-            </a:pPr>
-            <a:r>
-              <a:rPr sz="1100" b="1">
-                <a:solidFill>
-                  <a:srgbClr val="0D3B66"/>
-                </a:solidFill>
-                <a:latin typeface="Calibri"/>
-              </a:rPr>
-              <a:t>Sandía Antigua</a:t>
-            </a:r>
-          </a:p>
-        </p:txBody>
-      </p:sp>
-      <p:sp>
-        <p:nvSpPr>
-          <p:cNvPr id="16" name="TextBox 15"/>
-          <p:cNvSpPr txBox="1"/>
-          <p:nvPr/>
-        </p:nvSpPr>
-        <p:spPr>
-          <a:xfrm>
-            <a:off x="5029200" y="1444752"/>
-            <a:ext cx="2157984" cy="164592"/>
-          </a:xfrm>
-          <a:prstGeom prst="rect">
-            <a:avLst/>
-          </a:prstGeom>
-          <a:noFill/>
-        </p:spPr>
-        <p:txBody>
-          <a:bodyPr wrap="square">
-            <a:spAutoFit/>
-          </a:bodyPr>
-          <a:lstStyle/>
-          <a:p>
-            <a:pPr algn="l">
-              <a:spcAft>
-                <a:spcPts val="300"/>
-              </a:spcAft>
-            </a:pPr>
-            <a:r>
-              <a:rPr sz="800" b="0">
-                <a:solidFill>
-                  <a:srgbClr val="5A5A5A"/>
-                </a:solidFill>
-                <a:latin typeface="Calibri"/>
-              </a:rPr>
-              <a:t>alimenta 27</a:t>
-            </a:r>
-          </a:p>
-        </p:txBody>
-      </p:sp>
-      <p:sp>
-        <p:nvSpPr>
-          <p:cNvPr id="17" name="Rounded Rectangle 16"/>
-          <p:cNvSpPr/>
-          <p:nvPr/>
-        </p:nvSpPr>
-        <p:spPr>
-          <a:xfrm>
-            <a:off x="7333488" y="1024128"/>
-            <a:ext cx="2286000" cy="621792"/>
-          </a:xfrm>
-          <a:prstGeom prst="roundRect">
-            <a:avLst>
-              <a:gd name="adj" fmla="val 8000"/>
-            </a:avLst>
-          </a:prstGeom>
-          <a:solidFill>
-            <a:srgbClr val="F5F7FA"/>
-          </a:solidFill>
-          <a:ln w="6350">
-            <a:solidFill>
-              <a:srgbClr val="508282"/>
-            </a:solidFill>
-          </a:ln>
-        </p:spPr>
-        <p:style>
-          <a:lnRef idx="1">
-            <a:schemeClr val="accent1"/>
-          </a:lnRef>
-          <a:fillRef idx="3">
-            <a:schemeClr val="accent1"/>
-          </a:fillRef>
-          <a:effectRef idx="2">
-            <a:schemeClr val="accent1"/>
-          </a:effectRef>
-          <a:fontRef idx="minor">
-            <a:schemeClr val="lt1"/>
-          </a:fontRef>
-        </p:style>
-        <p:txBody>
-          <a:bodyPr rtlCol="0" anchor="ctr"/>
-          <a:lstStyle/>
-          <a:p>
-            <a:pPr algn="ctr"/>
-          </a:p>
-        </p:txBody>
-      </p:sp>
-      <p:sp>
-        <p:nvSpPr>
-          <p:cNvPr id="18" name="TextBox 17"/>
-          <p:cNvSpPr txBox="1"/>
-          <p:nvPr/>
-        </p:nvSpPr>
-        <p:spPr>
-          <a:xfrm>
-            <a:off x="7406640" y="1060704"/>
-            <a:ext cx="2157984" cy="146304"/>
-          </a:xfrm>
-          <a:prstGeom prst="rect">
-            <a:avLst/>
-          </a:prstGeom>
-          <a:noFill/>
-        </p:spPr>
-        <p:txBody>
-          <a:bodyPr wrap="square">
-            <a:spAutoFit/>
-          </a:bodyPr>
-          <a:lstStyle/>
-          <a:p>
-            <a:pPr algn="l">
-              <a:spcAft>
-                <a:spcPts val="300"/>
-              </a:spcAft>
-            </a:pPr>
-            <a:r>
-              <a:rPr sz="900" b="1">
-                <a:solidFill>
-                  <a:srgbClr val="C9A227"/>
-                </a:solidFill>
-                <a:latin typeface="Calibri"/>
-              </a:rPr>
-              <a:t>000025-28</a:t>
-            </a:r>
-          </a:p>
-        </p:txBody>
-      </p:sp>
-      <p:sp>
-        <p:nvSpPr>
-          <p:cNvPr id="19" name="TextBox 18"/>
-          <p:cNvSpPr txBox="1"/>
-          <p:nvPr/>
-        </p:nvSpPr>
-        <p:spPr>
-          <a:xfrm>
-            <a:off x="7406640" y="1225296"/>
-            <a:ext cx="2157984" cy="201168"/>
-          </a:xfrm>
-          <a:prstGeom prst="rect">
-            <a:avLst/>
-          </a:prstGeom>
-          <a:noFill/>
-        </p:spPr>
-        <p:txBody>
-          <a:bodyPr wrap="square">
-            <a:spAutoFit/>
-          </a:bodyPr>
-          <a:lstStyle/>
-          <a:p>
-            <a:pPr algn="l">
-              <a:spcAft>
-                <a:spcPts val="300"/>
-              </a:spcAft>
-            </a:pPr>
-            <a:r>
-              <a:rPr sz="1100" b="1">
-                <a:solidFill>
-                  <a:srgbClr val="0D3B66"/>
-                </a:solidFill>
-                <a:latin typeface="Calibri"/>
-              </a:rPr>
-              <a:t>Sandía Nueva</a:t>
-            </a:r>
-          </a:p>
-        </p:txBody>
-      </p:sp>
-      <p:sp>
-        <p:nvSpPr>
-          <p:cNvPr id="20" name="TextBox 19"/>
-          <p:cNvSpPr txBox="1"/>
-          <p:nvPr/>
-        </p:nvSpPr>
-        <p:spPr>
-          <a:xfrm>
-            <a:off x="7406640" y="1444752"/>
-            <a:ext cx="2157984" cy="164592"/>
-          </a:xfrm>
-          <a:prstGeom prst="rect">
-            <a:avLst/>
-          </a:prstGeom>
-          <a:noFill/>
-        </p:spPr>
-        <p:txBody>
-          <a:bodyPr wrap="square">
-            <a:spAutoFit/>
-          </a:bodyPr>
-          <a:lstStyle/>
-          <a:p>
-            <a:pPr algn="l">
-              <a:spcAft>
-                <a:spcPts val="300"/>
-              </a:spcAft>
-            </a:pPr>
-            <a:r>
-              <a:rPr sz="800" b="0">
-                <a:solidFill>
-                  <a:srgbClr val="5A5A5A"/>
-                </a:solidFill>
-                <a:latin typeface="Calibri"/>
-              </a:rPr>
-              <a:t>alimenta 27</a:t>
-            </a:r>
-          </a:p>
-        </p:txBody>
-      </p:sp>
-      <p:sp>
-        <p:nvSpPr>
-          <p:cNvPr id="21" name="Rounded Rectangle 20"/>
-          <p:cNvSpPr/>
-          <p:nvPr/>
-        </p:nvSpPr>
-        <p:spPr>
-          <a:xfrm>
-            <a:off x="9710928" y="1024128"/>
-            <a:ext cx="2286000" cy="621792"/>
+            <a:off x="6135624" y="1024128"/>
+            <a:ext cx="5861304" cy="658368"/>
           </a:xfrm>
           <a:prstGeom prst="roundRect">
             <a:avLst>
@@ -6231,53 +5387,208 @@
       </p:sp>
       <p:sp>
         <p:nvSpPr>
-          <p:cNvPr id="22" name="TextBox 21"/>
-          <p:cNvSpPr txBox="1"/>
-          <p:nvPr/>
-        </p:nvSpPr>
-        <p:spPr>
-          <a:xfrm>
-            <a:off x="9784080" y="1060704"/>
-            <a:ext cx="2157984" cy="146304"/>
-          </a:xfrm>
-          <a:prstGeom prst="rect">
-            <a:avLst/>
-          </a:prstGeom>
-          <a:noFill/>
-        </p:spPr>
-        <p:txBody>
-          <a:bodyPr wrap="square">
-            <a:spAutoFit/>
-          </a:bodyPr>
-          <a:lstStyle/>
-          <a:p>
-            <a:pPr algn="l">
-              <a:spcAft>
-                <a:spcPts val="300"/>
-              </a:spcAft>
-            </a:pPr>
-            <a:r>
-              <a:rPr sz="900" b="1">
+          <p:cNvPr id="11" name="TextBox 10"/>
+          <p:cNvSpPr txBox="1"/>
+          <p:nvPr/>
+        </p:nvSpPr>
+        <p:spPr>
+          <a:xfrm>
+            <a:off x="6208776" y="1060704"/>
+            <a:ext cx="5733288" cy="146304"/>
+          </a:xfrm>
+          <a:prstGeom prst="rect">
+            <a:avLst/>
+          </a:prstGeom>
+          <a:noFill/>
+        </p:spPr>
+        <p:txBody>
+          <a:bodyPr wrap="square">
+            <a:spAutoFit/>
+          </a:bodyPr>
+          <a:lstStyle/>
+          <a:p>
+            <a:pPr algn="l">
+              <a:spcAft>
+                <a:spcPts val="300"/>
+              </a:spcAft>
+            </a:pPr>
+            <a:r>
+              <a:rPr sz="1000" b="1">
                 <a:solidFill>
                   <a:srgbClr val="C9A227"/>
                 </a:solidFill>
                 <a:latin typeface="Calibri"/>
               </a:rPr>
-              <a:t>000025-29</a:t>
-            </a:r>
-          </a:p>
-        </p:txBody>
-      </p:sp>
-      <p:sp>
-        <p:nvSpPr>
-          <p:cNvPr id="23" name="TextBox 22"/>
-          <p:cNvSpPr txBox="1"/>
-          <p:nvPr/>
-        </p:nvSpPr>
-        <p:spPr>
-          <a:xfrm>
-            <a:off x="9784080" y="1225296"/>
-            <a:ext cx="2157984" cy="201168"/>
+              <a:t>000025-37</a:t>
+            </a:r>
+          </a:p>
+        </p:txBody>
+      </p:sp>
+      <p:sp>
+        <p:nvSpPr>
+          <p:cNvPr id="12" name="TextBox 11"/>
+          <p:cNvSpPr txBox="1"/>
+          <p:nvPr/>
+        </p:nvSpPr>
+        <p:spPr>
+          <a:xfrm>
+            <a:off x="6208776" y="1243584"/>
+            <a:ext cx="5733288" cy="201168"/>
+          </a:xfrm>
+          <a:prstGeom prst="rect">
+            <a:avLst/>
+          </a:prstGeom>
+          <a:noFill/>
+        </p:spPr>
+        <p:txBody>
+          <a:bodyPr wrap="square">
+            <a:spAutoFit/>
+          </a:bodyPr>
+          <a:lstStyle/>
+          <a:p>
+            <a:pPr algn="l">
+              <a:spcAft>
+                <a:spcPts val="300"/>
+              </a:spcAft>
+            </a:pPr>
+            <a:r>
+              <a:rPr sz="1200" b="1">
+                <a:solidFill>
+                  <a:srgbClr val="0D3B66"/>
+                </a:solidFill>
+                <a:latin typeface="Calibri"/>
+              </a:rPr>
+              <a:t>Anillo Sur</a:t>
+            </a:r>
+          </a:p>
+        </p:txBody>
+      </p:sp>
+      <p:sp>
+        <p:nvSpPr>
+          <p:cNvPr id="13" name="Rounded Rectangle 12"/>
+          <p:cNvSpPr/>
+          <p:nvPr/>
+        </p:nvSpPr>
+        <p:spPr>
+          <a:xfrm>
+            <a:off x="201168" y="1792224"/>
+            <a:ext cx="7973568" cy="3822191"/>
+          </a:xfrm>
+          <a:prstGeom prst="roundRect">
+            <a:avLst>
+              <a:gd name="adj" fmla="val 8000"/>
+            </a:avLst>
+          </a:prstGeom>
+          <a:solidFill>
+            <a:srgbClr val="F5F7FA"/>
+          </a:solidFill>
+          <a:ln>
+            <a:noFill/>
+          </a:ln>
+        </p:spPr>
+        <p:style>
+          <a:lnRef idx="1">
+            <a:schemeClr val="accent1"/>
+          </a:lnRef>
+          <a:fillRef idx="3">
+            <a:schemeClr val="accent1"/>
+          </a:fillRef>
+          <a:effectRef idx="2">
+            <a:schemeClr val="accent1"/>
+          </a:effectRef>
+          <a:fontRef idx="minor">
+            <a:schemeClr val="lt1"/>
+          </a:fontRef>
+        </p:style>
+        <p:txBody>
+          <a:bodyPr rtlCol="0" anchor="ctr"/>
+          <a:lstStyle/>
+          <a:p>
+            <a:pPr algn="ctr"/>
+          </a:p>
+        </p:txBody>
+      </p:sp>
+      <p:pic>
+        <p:nvPicPr>
+          <p:cNvPr id="14" name="Picture 13" descr="cur_mensual_may_ago.png"/>
+          <p:cNvPicPr>
+            <a:picLocks noChangeAspect="1"/>
+          </p:cNvPicPr>
+          <p:nvPr/>
+        </p:nvPicPr>
+        <p:blipFill>
+          <a:blip r:embed="rId3"/>
+          <a:stretch>
+            <a:fillRect/>
+          </a:stretch>
+        </p:blipFill>
+        <p:spPr>
+          <a:xfrm>
+            <a:off x="274320" y="2031551"/>
+            <a:ext cx="7827264" cy="3343536"/>
+          </a:xfrm>
+          <a:prstGeom prst="rect">
+            <a:avLst/>
+          </a:prstGeom>
+        </p:spPr>
+      </p:pic>
+      <p:sp>
+        <p:nvSpPr>
+          <p:cNvPr id="15" name="Rounded Rectangle 14"/>
+          <p:cNvSpPr/>
+          <p:nvPr/>
+        </p:nvSpPr>
+        <p:spPr>
+          <a:xfrm>
+            <a:off x="8302752" y="1792224"/>
+            <a:ext cx="3675887" cy="3822191"/>
+          </a:xfrm>
+          <a:prstGeom prst="roundRect">
+            <a:avLst>
+              <a:gd name="adj" fmla="val 8000"/>
+            </a:avLst>
+          </a:prstGeom>
+          <a:solidFill>
+            <a:srgbClr val="FFFFFF"/>
+          </a:solidFill>
+          <a:ln w="6350">
+            <a:solidFill>
+              <a:srgbClr val="1F77B4"/>
+            </a:solidFill>
+          </a:ln>
+        </p:spPr>
+        <p:style>
+          <a:lnRef idx="1">
+            <a:schemeClr val="accent1"/>
+          </a:lnRef>
+          <a:fillRef idx="3">
+            <a:schemeClr val="accent1"/>
+          </a:fillRef>
+          <a:effectRef idx="2">
+            <a:schemeClr val="accent1"/>
+          </a:effectRef>
+          <a:fontRef idx="minor">
+            <a:schemeClr val="lt1"/>
+          </a:fontRef>
+        </p:style>
+        <p:txBody>
+          <a:bodyPr rtlCol="0" anchor="ctr"/>
+          <a:lstStyle/>
+          <a:p>
+            <a:pPr algn="ctr"/>
+          </a:p>
+        </p:txBody>
+      </p:sp>
+      <p:sp>
+        <p:nvSpPr>
+          <p:cNvPr id="16" name="TextBox 15"/>
+          <p:cNvSpPr txBox="1"/>
+          <p:nvPr/>
+        </p:nvSpPr>
+        <p:spPr>
+          <a:xfrm>
+            <a:off x="8430768" y="1837943"/>
+            <a:ext cx="3419856" cy="164592"/>
           </a:xfrm>
           <a:prstGeom prst="rect">
             <a:avLst/>
@@ -6298,25 +5609,64 @@
             <a:r>
               <a:rPr sz="1100" b="1">
                 <a:solidFill>
-                  <a:srgbClr val="0D3B66"/>
-                </a:solidFill>
-                <a:latin typeface="Calibri"/>
-              </a:rPr>
-              <a:t>Restaurante</a:t>
-            </a:r>
-          </a:p>
-        </p:txBody>
-      </p:sp>
-      <p:sp>
-        <p:nvSpPr>
-          <p:cNvPr id="24" name="Rounded Rectangle 23"/>
+                  <a:srgbClr val="1F77B4"/>
+                </a:solidFill>
+                <a:latin typeface="Calibri"/>
+              </a:rPr>
+              <a:t>JULIO · último mes cerrado</a:t>
+            </a:r>
+          </a:p>
+        </p:txBody>
+      </p:sp>
+      <p:sp>
+        <p:nvSpPr>
+          <p:cNvPr id="17" name="TextBox 16"/>
+          <p:cNvSpPr txBox="1"/>
+          <p:nvPr/>
+        </p:nvSpPr>
+        <p:spPr>
+          <a:xfrm>
+            <a:off x="8430768" y="2002536"/>
+            <a:ext cx="3419856" cy="201168"/>
+          </a:xfrm>
+          <a:prstGeom prst="rect">
+            <a:avLst/>
+          </a:prstGeom>
+          <a:noFill/>
+        </p:spPr>
+        <p:txBody>
+          <a:bodyPr wrap="square">
+            <a:spAutoFit/>
+          </a:bodyPr>
+          <a:lstStyle/>
+          <a:p>
+            <a:pPr algn="l">
+              <a:spcAft>
+                <a:spcPts val="300"/>
+              </a:spcAft>
+            </a:pPr>
+            <a:r>
+              <a:rPr sz="1200" b="0">
+                <a:solidFill>
+                  <a:srgbClr val="5A5A5A"/>
+                </a:solidFill>
+                <a:latin typeface="Calibri"/>
+              </a:rPr>
+              <a:t>El recinto sumó 618 m³</a:t>
+            </a:r>
+          </a:p>
+        </p:txBody>
+      </p:sp>
+      <p:sp>
+        <p:nvSpPr>
+          <p:cNvPr id="18" name="Rounded Rectangle 17"/>
           <p:cNvSpPr/>
           <p:nvPr/>
         </p:nvSpPr>
         <p:spPr>
           <a:xfrm>
-            <a:off x="201168" y="1719072"/>
-            <a:ext cx="2286000" cy="621792"/>
+            <a:off x="8430768" y="2212848"/>
+            <a:ext cx="3419856" cy="768096"/>
           </a:xfrm>
           <a:prstGeom prst="roundRect">
             <a:avLst>
@@ -6328,7 +5678,7 @@
           </a:solidFill>
           <a:ln w="6350">
             <a:solidFill>
-              <a:srgbClr val="46648C"/>
+              <a:srgbClr val="0D3B66"/>
             </a:solidFill>
           </a:ln>
         </p:spPr>
@@ -6356,92 +5706,92 @@
       </p:sp>
       <p:sp>
         <p:nvSpPr>
-          <p:cNvPr id="25" name="TextBox 24"/>
-          <p:cNvSpPr txBox="1"/>
-          <p:nvPr/>
-        </p:nvSpPr>
-        <p:spPr>
-          <a:xfrm>
-            <a:off x="274320" y="1755648"/>
-            <a:ext cx="2157984" cy="146304"/>
-          </a:xfrm>
-          <a:prstGeom prst="rect">
-            <a:avLst/>
-          </a:prstGeom>
-          <a:noFill/>
-        </p:spPr>
-        <p:txBody>
-          <a:bodyPr wrap="square">
-            <a:spAutoFit/>
-          </a:bodyPr>
-          <a:lstStyle/>
-          <a:p>
-            <a:pPr algn="l">
-              <a:spcAft>
-                <a:spcPts val="300"/>
-              </a:spcAft>
-            </a:pPr>
-            <a:r>
-              <a:rPr sz="900" b="1">
-                <a:solidFill>
-                  <a:srgbClr val="C9A227"/>
-                </a:solidFill>
-                <a:latin typeface="Calibri"/>
-              </a:rPr>
-              <a:t>000025-23</a:t>
-            </a:r>
-          </a:p>
-        </p:txBody>
-      </p:sp>
-      <p:sp>
-        <p:nvSpPr>
-          <p:cNvPr id="26" name="TextBox 25"/>
-          <p:cNvSpPr txBox="1"/>
-          <p:nvPr/>
-        </p:nvSpPr>
-        <p:spPr>
-          <a:xfrm>
-            <a:off x="274320" y="1920240"/>
-            <a:ext cx="2157984" cy="201168"/>
-          </a:xfrm>
-          <a:prstGeom prst="rect">
-            <a:avLst/>
-          </a:prstGeom>
-          <a:noFill/>
-        </p:spPr>
-        <p:txBody>
-          <a:bodyPr wrap="square">
-            <a:spAutoFit/>
-          </a:bodyPr>
-          <a:lstStyle/>
-          <a:p>
-            <a:pPr algn="l">
-              <a:spcAft>
-                <a:spcPts val="300"/>
-              </a:spcAft>
-            </a:pPr>
-            <a:r>
-              <a:rPr sz="1100" b="1">
+          <p:cNvPr id="19" name="TextBox 18"/>
+          <p:cNvSpPr txBox="1"/>
+          <p:nvPr/>
+        </p:nvSpPr>
+        <p:spPr>
+          <a:xfrm>
+            <a:off x="8540496" y="2240279"/>
+            <a:ext cx="3200400" cy="164592"/>
+          </a:xfrm>
+          <a:prstGeom prst="rect">
+            <a:avLst/>
+          </a:prstGeom>
+          <a:noFill/>
+        </p:spPr>
+        <p:txBody>
+          <a:bodyPr wrap="square">
+            <a:spAutoFit/>
+          </a:bodyPr>
+          <a:lstStyle/>
+          <a:p>
+            <a:pPr algn="l">
+              <a:spcAft>
+                <a:spcPts val="300"/>
+              </a:spcAft>
+            </a:pPr>
+            <a:r>
+              <a:rPr sz="1300" b="1">
                 <a:solidFill>
                   <a:srgbClr val="0D3B66"/>
                 </a:solidFill>
                 <a:latin typeface="Calibri"/>
               </a:rPr>
-              <a:t>Pileta</a:t>
-            </a:r>
-          </a:p>
-        </p:txBody>
-      </p:sp>
-      <p:sp>
-        <p:nvSpPr>
-          <p:cNvPr id="27" name="Rounded Rectangle 26"/>
+              <a:t>Anillo Sur</a:t>
+            </a:r>
+          </a:p>
+        </p:txBody>
+      </p:sp>
+      <p:sp>
+        <p:nvSpPr>
+          <p:cNvPr id="20" name="TextBox 19"/>
+          <p:cNvSpPr txBox="1"/>
+          <p:nvPr/>
+        </p:nvSpPr>
+        <p:spPr>
+          <a:xfrm>
+            <a:off x="8540496" y="2535448"/>
+            <a:ext cx="3200400" cy="237744"/>
+          </a:xfrm>
+          <a:prstGeom prst="rect">
+            <a:avLst/>
+          </a:prstGeom>
+          <a:noFill/>
+        </p:spPr>
+        <p:txBody>
+          <a:bodyPr wrap="square">
+            <a:spAutoFit/>
+          </a:bodyPr>
+          <a:lstStyle/>
+          <a:p>
+            <a:pPr algn="l">
+              <a:spcAft>
+                <a:spcPts val="300"/>
+              </a:spcAft>
+            </a:pPr>
+            <a:r>
+              <a:rPr sz="1600" b="1">
+                <a:solidFill>
+                  <a:srgbClr val="0D3B66"/>
+                </a:solidFill>
+                <a:latin typeface="Calibri"/>
+              </a:rPr>
+              <a:t>332 m³    54 %</a:t>
+            </a:r>
+          </a:p>
+        </p:txBody>
+      </p:sp>
+      <p:sp>
+        <p:nvSpPr>
+          <p:cNvPr id="21" name="Rounded Rectangle 20"/>
           <p:cNvSpPr/>
           <p:nvPr/>
         </p:nvSpPr>
         <p:spPr>
           <a:xfrm>
-            <a:off x="2578608" y="1719072"/>
-            <a:ext cx="2286000" cy="621792"/>
+            <a:off x="8430768" y="3877056"/>
+            <a:ext cx="3419856" cy="768096"/>
           </a:xfrm>
           <a:prstGeom prst="roundRect">
             <a:avLst>
@@ -6453,7 +5803,7 @@
           </a:solidFill>
           <a:ln w="6350">
             <a:solidFill>
-              <a:srgbClr val="A0783C"/>
+              <a:srgbClr val="1F77B4"/>
             </a:solidFill>
           </a:ln>
         </p:spPr>
@@ -6481,256 +5831,92 @@
       </p:sp>
       <p:sp>
         <p:nvSpPr>
-          <p:cNvPr id="28" name="TextBox 27"/>
-          <p:cNvSpPr txBox="1"/>
-          <p:nvPr/>
-        </p:nvSpPr>
-        <p:spPr>
-          <a:xfrm>
-            <a:off x="2651760" y="1755648"/>
-            <a:ext cx="2157984" cy="146304"/>
-          </a:xfrm>
-          <a:prstGeom prst="rect">
-            <a:avLst/>
-          </a:prstGeom>
-          <a:noFill/>
-        </p:spPr>
-        <p:txBody>
-          <a:bodyPr wrap="square">
-            <a:spAutoFit/>
-          </a:bodyPr>
-          <a:lstStyle/>
-          <a:p>
-            <a:pPr algn="l">
-              <a:spcAft>
-                <a:spcPts val="300"/>
-              </a:spcAft>
-            </a:pPr>
-            <a:r>
-              <a:rPr sz="900" b="1">
-                <a:solidFill>
-                  <a:srgbClr val="C9A227"/>
-                </a:solidFill>
-                <a:latin typeface="Calibri"/>
-              </a:rPr>
-              <a:t>000025-24</a:t>
-            </a:r>
-          </a:p>
-        </p:txBody>
-      </p:sp>
-      <p:sp>
-        <p:nvSpPr>
-          <p:cNvPr id="29" name="TextBox 28"/>
-          <p:cNvSpPr txBox="1"/>
-          <p:nvPr/>
-        </p:nvSpPr>
-        <p:spPr>
-          <a:xfrm>
-            <a:off x="2651760" y="1920240"/>
-            <a:ext cx="2157984" cy="201168"/>
-          </a:xfrm>
-          <a:prstGeom prst="rect">
-            <a:avLst/>
-          </a:prstGeom>
-          <a:noFill/>
-        </p:spPr>
-        <p:txBody>
-          <a:bodyPr wrap="square">
-            <a:spAutoFit/>
-          </a:bodyPr>
-          <a:lstStyle/>
-          <a:p>
-            <a:pPr algn="l">
-              <a:spcAft>
-                <a:spcPts val="300"/>
-              </a:spcAft>
-            </a:pPr>
-            <a:r>
-              <a:rPr sz="1100" b="1">
+          <p:cNvPr id="22" name="TextBox 21"/>
+          <p:cNvSpPr txBox="1"/>
+          <p:nvPr/>
+        </p:nvSpPr>
+        <p:spPr>
+          <a:xfrm>
+            <a:off x="8540496" y="3904488"/>
+            <a:ext cx="3200400" cy="164592"/>
+          </a:xfrm>
+          <a:prstGeom prst="rect">
+            <a:avLst/>
+          </a:prstGeom>
+          <a:noFill/>
+        </p:spPr>
+        <p:txBody>
+          <a:bodyPr wrap="square">
+            <a:spAutoFit/>
+          </a:bodyPr>
+          <a:lstStyle/>
+          <a:p>
+            <a:pPr algn="l">
+              <a:spcAft>
+                <a:spcPts val="300"/>
+              </a:spcAft>
+            </a:pPr>
+            <a:r>
+              <a:rPr sz="1300" b="1">
+                <a:solidFill>
+                  <a:srgbClr val="1F77B4"/>
+                </a:solidFill>
+                <a:latin typeface="Calibri"/>
+              </a:rPr>
+              <a:t>Anillo Norte</a:t>
+            </a:r>
+          </a:p>
+        </p:txBody>
+      </p:sp>
+      <p:sp>
+        <p:nvSpPr>
+          <p:cNvPr id="23" name="TextBox 22"/>
+          <p:cNvSpPr txBox="1"/>
+          <p:nvPr/>
+        </p:nvSpPr>
+        <p:spPr>
+          <a:xfrm>
+            <a:off x="8540496" y="4199656"/>
+            <a:ext cx="3200400" cy="237744"/>
+          </a:xfrm>
+          <a:prstGeom prst="rect">
+            <a:avLst/>
+          </a:prstGeom>
+          <a:noFill/>
+        </p:spPr>
+        <p:txBody>
+          <a:bodyPr wrap="square">
+            <a:spAutoFit/>
+          </a:bodyPr>
+          <a:lstStyle/>
+          <a:p>
+            <a:pPr algn="l">
+              <a:spcAft>
+                <a:spcPts val="300"/>
+              </a:spcAft>
+            </a:pPr>
+            <a:r>
+              <a:rPr sz="1600" b="1">
                 <a:solidFill>
                   <a:srgbClr val="0D3B66"/>
                 </a:solidFill>
                 <a:latin typeface="Calibri"/>
               </a:rPr>
-              <a:t>Cascada</a:t>
-            </a:r>
-          </a:p>
-        </p:txBody>
-      </p:sp>
-      <p:sp>
-        <p:nvSpPr>
-          <p:cNvPr id="30" name="Rounded Rectangle 29"/>
+              <a:t>287 m³    46 %</a:t>
+            </a:r>
+          </a:p>
+        </p:txBody>
+      </p:sp>
+      <p:sp>
+        <p:nvSpPr>
+          <p:cNvPr id="24" name="Rounded Rectangle 23"/>
           <p:cNvSpPr/>
           <p:nvPr/>
         </p:nvSpPr>
         <p:spPr>
           <a:xfrm>
-            <a:off x="4956048" y="1719072"/>
-            <a:ext cx="2286000" cy="621792"/>
-          </a:xfrm>
-          <a:prstGeom prst="roundRect">
-            <a:avLst>
-              <a:gd name="adj" fmla="val 8000"/>
-            </a:avLst>
-          </a:prstGeom>
-          <a:solidFill>
-            <a:srgbClr val="FFF9EB"/>
-          </a:solidFill>
-          <a:ln w="6350">
-            <a:solidFill>
-              <a:srgbClr val="C45C26"/>
-            </a:solidFill>
-          </a:ln>
-        </p:spPr>
-        <p:style>
-          <a:lnRef idx="1">
-            <a:schemeClr val="accent1"/>
-          </a:lnRef>
-          <a:fillRef idx="3">
-            <a:schemeClr val="accent1"/>
-          </a:fillRef>
-          <a:effectRef idx="2">
-            <a:schemeClr val="accent1"/>
-          </a:effectRef>
-          <a:fontRef idx="minor">
-            <a:schemeClr val="lt1"/>
-          </a:fontRef>
-        </p:style>
-        <p:txBody>
-          <a:bodyPr rtlCol="0" anchor="ctr"/>
-          <a:lstStyle/>
-          <a:p>
-            <a:pPr algn="ctr"/>
-          </a:p>
-        </p:txBody>
-      </p:sp>
-      <p:sp>
-        <p:nvSpPr>
-          <p:cNvPr id="31" name="TextBox 30"/>
-          <p:cNvSpPr txBox="1"/>
-          <p:nvPr/>
-        </p:nvSpPr>
-        <p:spPr>
-          <a:xfrm>
-            <a:off x="5029200" y="1755648"/>
-            <a:ext cx="2157984" cy="146304"/>
-          </a:xfrm>
-          <a:prstGeom prst="rect">
-            <a:avLst/>
-          </a:prstGeom>
-          <a:noFill/>
-        </p:spPr>
-        <p:txBody>
-          <a:bodyPr wrap="square">
-            <a:spAutoFit/>
-          </a:bodyPr>
-          <a:lstStyle/>
-          <a:p>
-            <a:pPr algn="l">
-              <a:spcAft>
-                <a:spcPts val="300"/>
-              </a:spcAft>
-            </a:pPr>
-            <a:r>
-              <a:rPr sz="900" b="1">
-                <a:solidFill>
-                  <a:srgbClr val="C9A227"/>
-                </a:solidFill>
-                <a:latin typeface="Calibri"/>
-              </a:rPr>
-              <a:t>000025-27</a:t>
-            </a:r>
-          </a:p>
-        </p:txBody>
-      </p:sp>
-      <p:sp>
-        <p:nvSpPr>
-          <p:cNvPr id="32" name="TextBox 31"/>
-          <p:cNvSpPr txBox="1"/>
-          <p:nvPr/>
-        </p:nvSpPr>
-        <p:spPr>
-          <a:xfrm>
-            <a:off x="5029200" y="1920240"/>
-            <a:ext cx="2157984" cy="201168"/>
-          </a:xfrm>
-          <a:prstGeom prst="rect">
-            <a:avLst/>
-          </a:prstGeom>
-          <a:noFill/>
-        </p:spPr>
-        <p:txBody>
-          <a:bodyPr wrap="square">
-            <a:spAutoFit/>
-          </a:bodyPr>
-          <a:lstStyle/>
-          <a:p>
-            <a:pPr algn="l">
-              <a:spcAft>
-                <a:spcPts val="300"/>
-              </a:spcAft>
-            </a:pPr>
-            <a:r>
-              <a:rPr sz="1100" b="1">
-                <a:solidFill>
-                  <a:srgbClr val="0D3B66"/>
-                </a:solidFill>
-                <a:latin typeface="Calibri"/>
-              </a:rPr>
-              <a:t>Distrito Lujo</a:t>
-            </a:r>
-          </a:p>
-        </p:txBody>
-      </p:sp>
-      <p:sp>
-        <p:nvSpPr>
-          <p:cNvPr id="33" name="TextBox 32"/>
-          <p:cNvSpPr txBox="1"/>
-          <p:nvPr/>
-        </p:nvSpPr>
-        <p:spPr>
-          <a:xfrm>
-            <a:off x="5029200" y="2139696"/>
-            <a:ext cx="2157984" cy="164592"/>
-          </a:xfrm>
-          <a:prstGeom prst="rect">
-            <a:avLst/>
-          </a:prstGeom>
-          <a:noFill/>
-        </p:spPr>
-        <p:txBody>
-          <a:bodyPr wrap="square">
-            <a:spAutoFit/>
-          </a:bodyPr>
-          <a:lstStyle/>
-          <a:p>
-            <a:pPr algn="l">
-              <a:spcAft>
-                <a:spcPts val="300"/>
-              </a:spcAft>
-            </a:pPr>
-            <a:r>
-              <a:rPr sz="800" b="0">
-                <a:solidFill>
-                  <a:srgbClr val="5A5A5A"/>
-                </a:solidFill>
-                <a:latin typeface="Calibri"/>
-              </a:rPr>
-              <a:t>cadena · no suma</a:t>
-            </a:r>
-          </a:p>
-        </p:txBody>
-      </p:sp>
-      <p:sp>
-        <p:nvSpPr>
-          <p:cNvPr id="34" name="Rounded Rectangle 33"/>
-          <p:cNvSpPr/>
-          <p:nvPr/>
-        </p:nvSpPr>
-        <p:spPr>
-          <a:xfrm>
-            <a:off x="7333488" y="1719072"/>
-            <a:ext cx="2286000" cy="621792"/>
+            <a:off x="201168" y="5705856"/>
+            <a:ext cx="11795760" cy="438912"/>
           </a:xfrm>
           <a:prstGeom prst="roundRect">
             <a:avLst>
@@ -6770,1404 +5956,7 @@
       </p:sp>
       <p:sp>
         <p:nvSpPr>
-          <p:cNvPr id="35" name="TextBox 34"/>
-          <p:cNvSpPr txBox="1"/>
-          <p:nvPr/>
-        </p:nvSpPr>
-        <p:spPr>
-          <a:xfrm>
-            <a:off x="7406640" y="1755648"/>
-            <a:ext cx="2157984" cy="146304"/>
-          </a:xfrm>
-          <a:prstGeom prst="rect">
-            <a:avLst/>
-          </a:prstGeom>
-          <a:noFill/>
-        </p:spPr>
-        <p:txBody>
-          <a:bodyPr wrap="square">
-            <a:spAutoFit/>
-          </a:bodyPr>
-          <a:lstStyle/>
-          <a:p>
-            <a:pPr algn="l">
-              <a:spcAft>
-                <a:spcPts val="300"/>
-              </a:spcAft>
-            </a:pPr>
-            <a:r>
-              <a:rPr sz="900" b="1">
-                <a:solidFill>
-                  <a:srgbClr val="C9A227"/>
-                </a:solidFill>
-                <a:latin typeface="Calibri"/>
-              </a:rPr>
-              <a:t>000025-35</a:t>
-            </a:r>
-          </a:p>
-        </p:txBody>
-      </p:sp>
-      <p:sp>
-        <p:nvSpPr>
-          <p:cNvPr id="36" name="TextBox 35"/>
-          <p:cNvSpPr txBox="1"/>
-          <p:nvPr/>
-        </p:nvSpPr>
-        <p:spPr>
-          <a:xfrm>
-            <a:off x="7406640" y="1920240"/>
-            <a:ext cx="2157984" cy="201168"/>
-          </a:xfrm>
-          <a:prstGeom prst="rect">
-            <a:avLst/>
-          </a:prstGeom>
-          <a:noFill/>
-        </p:spPr>
-        <p:txBody>
-          <a:bodyPr wrap="square">
-            <a:spAutoFit/>
-          </a:bodyPr>
-          <a:lstStyle/>
-          <a:p>
-            <a:pPr algn="l">
-              <a:spcAft>
-                <a:spcPts val="300"/>
-              </a:spcAft>
-            </a:pPr>
-            <a:r>
-              <a:rPr sz="1100" b="1">
-                <a:solidFill>
-                  <a:srgbClr val="0D3B66"/>
-                </a:solidFill>
-                <a:latin typeface="Calibri"/>
-              </a:rPr>
-              <a:t>Bazar Gourmet</a:t>
-            </a:r>
-          </a:p>
-        </p:txBody>
-      </p:sp>
-      <p:sp>
-        <p:nvSpPr>
-          <p:cNvPr id="37" name="TextBox 36"/>
-          <p:cNvSpPr txBox="1"/>
-          <p:nvPr/>
-        </p:nvSpPr>
-        <p:spPr>
-          <a:xfrm>
-            <a:off x="7406640" y="2139696"/>
-            <a:ext cx="2157984" cy="164592"/>
-          </a:xfrm>
-          <a:prstGeom prst="rect">
-            <a:avLst/>
-          </a:prstGeom>
-          <a:noFill/>
-        </p:spPr>
-        <p:txBody>
-          <a:bodyPr wrap="square">
-            <a:spAutoFit/>
-          </a:bodyPr>
-          <a:lstStyle/>
-          <a:p>
-            <a:pPr algn="l">
-              <a:spcAft>
-                <a:spcPts val="300"/>
-              </a:spcAft>
-            </a:pPr>
-            <a:r>
-              <a:rPr sz="800" b="0">
-                <a:solidFill>
-                  <a:srgbClr val="5A5A5A"/>
-                </a:solidFill>
-                <a:latin typeface="Calibri"/>
-              </a:rPr>
-              <a:t>sale de 27</a:t>
-            </a:r>
-          </a:p>
-        </p:txBody>
-      </p:sp>
-      <p:sp>
-        <p:nvSpPr>
-          <p:cNvPr id="38" name="Rounded Rectangle 37"/>
-          <p:cNvSpPr/>
-          <p:nvPr/>
-        </p:nvSpPr>
-        <p:spPr>
-          <a:xfrm>
-            <a:off x="9710928" y="1719072"/>
-            <a:ext cx="2286000" cy="621792"/>
-          </a:xfrm>
-          <a:prstGeom prst="roundRect">
-            <a:avLst>
-              <a:gd name="adj" fmla="val 8000"/>
-            </a:avLst>
-          </a:prstGeom>
-          <a:solidFill>
-            <a:srgbClr val="FFF9EB"/>
-          </a:solidFill>
-          <a:ln w="6350">
-            <a:solidFill>
-              <a:srgbClr val="5A8C6E"/>
-            </a:solidFill>
-          </a:ln>
-        </p:spPr>
-        <p:style>
-          <a:lnRef idx="1">
-            <a:schemeClr val="accent1"/>
-          </a:lnRef>
-          <a:fillRef idx="3">
-            <a:schemeClr val="accent1"/>
-          </a:fillRef>
-          <a:effectRef idx="2">
-            <a:schemeClr val="accent1"/>
-          </a:effectRef>
-          <a:fontRef idx="minor">
-            <a:schemeClr val="lt1"/>
-          </a:fontRef>
-        </p:style>
-        <p:txBody>
-          <a:bodyPr rtlCol="0" anchor="ctr"/>
-          <a:lstStyle/>
-          <a:p>
-            <a:pPr algn="ctr"/>
-          </a:p>
-        </p:txBody>
-      </p:sp>
-      <p:sp>
-        <p:nvSpPr>
-          <p:cNvPr id="39" name="TextBox 38"/>
-          <p:cNvSpPr txBox="1"/>
-          <p:nvPr/>
-        </p:nvSpPr>
-        <p:spPr>
-          <a:xfrm>
-            <a:off x="9784080" y="1755648"/>
-            <a:ext cx="2157984" cy="146304"/>
-          </a:xfrm>
-          <a:prstGeom prst="rect">
-            <a:avLst/>
-          </a:prstGeom>
-          <a:noFill/>
-        </p:spPr>
-        <p:txBody>
-          <a:bodyPr wrap="square">
-            <a:spAutoFit/>
-          </a:bodyPr>
-          <a:lstStyle/>
-          <a:p>
-            <a:pPr algn="l">
-              <a:spcAft>
-                <a:spcPts val="300"/>
-              </a:spcAft>
-            </a:pPr>
-            <a:r>
-              <a:rPr sz="900" b="1">
-                <a:solidFill>
-                  <a:srgbClr val="C9A227"/>
-                </a:solidFill>
-                <a:latin typeface="Calibri"/>
-              </a:rPr>
-              <a:t>000025-36</a:t>
-            </a:r>
-          </a:p>
-        </p:txBody>
-      </p:sp>
-      <p:sp>
-        <p:nvSpPr>
-          <p:cNvPr id="40" name="TextBox 39"/>
-          <p:cNvSpPr txBox="1"/>
-          <p:nvPr/>
-        </p:nvSpPr>
-        <p:spPr>
-          <a:xfrm>
-            <a:off x="9784080" y="1920240"/>
-            <a:ext cx="2157984" cy="201168"/>
-          </a:xfrm>
-          <a:prstGeom prst="rect">
-            <a:avLst/>
-          </a:prstGeom>
-          <a:noFill/>
-        </p:spPr>
-        <p:txBody>
-          <a:bodyPr wrap="square">
-            <a:spAutoFit/>
-          </a:bodyPr>
-          <a:lstStyle/>
-          <a:p>
-            <a:pPr algn="l">
-              <a:spcAft>
-                <a:spcPts val="300"/>
-              </a:spcAft>
-            </a:pPr>
-            <a:r>
-              <a:rPr sz="1100" b="1">
-                <a:solidFill>
-                  <a:srgbClr val="0D3B66"/>
-                </a:solidFill>
-                <a:latin typeface="Calibri"/>
-              </a:rPr>
-              <a:t>DL Kennedy</a:t>
-            </a:r>
-          </a:p>
-        </p:txBody>
-      </p:sp>
-      <p:sp>
-        <p:nvSpPr>
-          <p:cNvPr id="41" name="TextBox 40"/>
-          <p:cNvSpPr txBox="1"/>
-          <p:nvPr/>
-        </p:nvSpPr>
-        <p:spPr>
-          <a:xfrm>
-            <a:off x="9784080" y="2139696"/>
-            <a:ext cx="2157984" cy="164592"/>
-          </a:xfrm>
-          <a:prstGeom prst="rect">
-            <a:avLst/>
-          </a:prstGeom>
-          <a:noFill/>
-        </p:spPr>
-        <p:txBody>
-          <a:bodyPr wrap="square">
-            <a:spAutoFit/>
-          </a:bodyPr>
-          <a:lstStyle/>
-          <a:p>
-            <a:pPr algn="l">
-              <a:spcAft>
-                <a:spcPts val="300"/>
-              </a:spcAft>
-            </a:pPr>
-            <a:r>
-              <a:rPr sz="800" b="0">
-                <a:solidFill>
-                  <a:srgbClr val="5A5A5A"/>
-                </a:solidFill>
-                <a:latin typeface="Calibri"/>
-              </a:rPr>
-              <a:t>sale de 27</a:t>
-            </a:r>
-          </a:p>
-        </p:txBody>
-      </p:sp>
-      <p:sp>
-        <p:nvSpPr>
-          <p:cNvPr id="42" name="Rounded Rectangle 41"/>
-          <p:cNvSpPr/>
-          <p:nvPr/>
-        </p:nvSpPr>
-        <p:spPr>
-          <a:xfrm>
-            <a:off x="201168" y="2432304"/>
-            <a:ext cx="7973568" cy="3182111"/>
-          </a:xfrm>
-          <a:prstGeom prst="roundRect">
-            <a:avLst>
-              <a:gd name="adj" fmla="val 8000"/>
-            </a:avLst>
-          </a:prstGeom>
-          <a:solidFill>
-            <a:srgbClr val="F5F7FA"/>
-          </a:solidFill>
-          <a:ln>
-            <a:noFill/>
-          </a:ln>
-        </p:spPr>
-        <p:style>
-          <a:lnRef idx="1">
-            <a:schemeClr val="accent1"/>
-          </a:lnRef>
-          <a:fillRef idx="3">
-            <a:schemeClr val="accent1"/>
-          </a:fillRef>
-          <a:effectRef idx="2">
-            <a:schemeClr val="accent1"/>
-          </a:effectRef>
-          <a:fontRef idx="minor">
-            <a:schemeClr val="lt1"/>
-          </a:fontRef>
-        </p:style>
-        <p:txBody>
-          <a:bodyPr rtlCol="0" anchor="ctr"/>
-          <a:lstStyle/>
-          <a:p>
-            <a:pPr algn="ctr"/>
-          </a:p>
-        </p:txBody>
-      </p:sp>
-      <p:pic>
-        <p:nvPicPr>
-          <p:cNvPr id="43" name="Picture 42" descr="pak_mensual_may_ago.png"/>
-          <p:cNvPicPr>
-            <a:picLocks noChangeAspect="1"/>
-          </p:cNvPicPr>
-          <p:nvPr/>
-        </p:nvPicPr>
-        <p:blipFill>
-          <a:blip r:embed="rId3"/>
-          <a:stretch>
-            <a:fillRect/>
-          </a:stretch>
-        </p:blipFill>
-        <p:spPr>
-          <a:xfrm>
-            <a:off x="605863" y="2487168"/>
-            <a:ext cx="7164176" cy="3072383"/>
-          </a:xfrm>
-          <a:prstGeom prst="rect">
-            <a:avLst/>
-          </a:prstGeom>
-        </p:spPr>
-      </p:pic>
-      <p:sp>
-        <p:nvSpPr>
-          <p:cNvPr id="44" name="Rounded Rectangle 43"/>
-          <p:cNvSpPr/>
-          <p:nvPr/>
-        </p:nvSpPr>
-        <p:spPr>
-          <a:xfrm>
-            <a:off x="8302752" y="2432304"/>
-            <a:ext cx="3675887" cy="3182111"/>
-          </a:xfrm>
-          <a:prstGeom prst="roundRect">
-            <a:avLst>
-              <a:gd name="adj" fmla="val 8000"/>
-            </a:avLst>
-          </a:prstGeom>
-          <a:solidFill>
-            <a:srgbClr val="FFFFFF"/>
-          </a:solidFill>
-          <a:ln w="6350">
-            <a:solidFill>
-              <a:srgbClr val="1F77B4"/>
-            </a:solidFill>
-          </a:ln>
-        </p:spPr>
-        <p:style>
-          <a:lnRef idx="1">
-            <a:schemeClr val="accent1"/>
-          </a:lnRef>
-          <a:fillRef idx="3">
-            <a:schemeClr val="accent1"/>
-          </a:fillRef>
-          <a:effectRef idx="2">
-            <a:schemeClr val="accent1"/>
-          </a:effectRef>
-          <a:fontRef idx="minor">
-            <a:schemeClr val="lt1"/>
-          </a:fontRef>
-        </p:style>
-        <p:txBody>
-          <a:bodyPr rtlCol="0" anchor="ctr"/>
-          <a:lstStyle/>
-          <a:p>
-            <a:pPr algn="ctr"/>
-          </a:p>
-        </p:txBody>
-      </p:sp>
-      <p:sp>
-        <p:nvSpPr>
-          <p:cNvPr id="45" name="TextBox 44"/>
-          <p:cNvSpPr txBox="1"/>
-          <p:nvPr/>
-        </p:nvSpPr>
-        <p:spPr>
-          <a:xfrm>
-            <a:off x="8430768" y="2478024"/>
-            <a:ext cx="3419856" cy="164592"/>
-          </a:xfrm>
-          <a:prstGeom prst="rect">
-            <a:avLst/>
-          </a:prstGeom>
-          <a:noFill/>
-        </p:spPr>
-        <p:txBody>
-          <a:bodyPr wrap="square">
-            <a:spAutoFit/>
-          </a:bodyPr>
-          <a:lstStyle/>
-          <a:p>
-            <a:pPr algn="l">
-              <a:spcAft>
-                <a:spcPts val="300"/>
-              </a:spcAft>
-            </a:pPr>
-            <a:r>
-              <a:rPr sz="1100" b="1">
-                <a:solidFill>
-                  <a:srgbClr val="1F77B4"/>
-                </a:solidFill>
-                <a:latin typeface="Calibri"/>
-              </a:rPr>
-              <a:t>JULIO · cabecera</a:t>
-            </a:r>
-          </a:p>
-        </p:txBody>
-      </p:sp>
-      <p:sp>
-        <p:nvSpPr>
-          <p:cNvPr id="46" name="TextBox 45"/>
-          <p:cNvSpPr txBox="1"/>
-          <p:nvPr/>
-        </p:nvSpPr>
-        <p:spPr>
-          <a:xfrm>
-            <a:off x="8430768" y="2642616"/>
-            <a:ext cx="3419856" cy="201168"/>
-          </a:xfrm>
-          <a:prstGeom prst="rect">
-            <a:avLst/>
-          </a:prstGeom>
-          <a:noFill/>
-        </p:spPr>
-        <p:txBody>
-          <a:bodyPr wrap="square">
-            <a:spAutoFit/>
-          </a:bodyPr>
-          <a:lstStyle/>
-          <a:p>
-            <a:pPr algn="l">
-              <a:spcAft>
-                <a:spcPts val="300"/>
-              </a:spcAft>
-            </a:pPr>
-            <a:r>
-              <a:rPr sz="1200" b="0">
-                <a:solidFill>
-                  <a:srgbClr val="5A5A5A"/>
-                </a:solidFill>
-                <a:latin typeface="Calibri"/>
-              </a:rPr>
-              <a:t>El recinto sumó 31.239 m³</a:t>
-            </a:r>
-          </a:p>
-        </p:txBody>
-      </p:sp>
-      <p:sp>
-        <p:nvSpPr>
-          <p:cNvPr id="47" name="Rounded Rectangle 46"/>
-          <p:cNvSpPr/>
-          <p:nvPr/>
-        </p:nvSpPr>
-        <p:spPr>
-          <a:xfrm>
-            <a:off x="8430768" y="2852928"/>
-            <a:ext cx="3419856" cy="347471"/>
-          </a:xfrm>
-          <a:prstGeom prst="roundRect">
-            <a:avLst>
-              <a:gd name="adj" fmla="val 8000"/>
-            </a:avLst>
-          </a:prstGeom>
-          <a:solidFill>
-            <a:srgbClr val="F5F7FA"/>
-          </a:solidFill>
-          <a:ln w="6350">
-            <a:solidFill>
-              <a:srgbClr val="8C5A5A"/>
-            </a:solidFill>
-          </a:ln>
-        </p:spPr>
-        <p:style>
-          <a:lnRef idx="1">
-            <a:schemeClr val="accent1"/>
-          </a:lnRef>
-          <a:fillRef idx="3">
-            <a:schemeClr val="accent1"/>
-          </a:fillRef>
-          <a:effectRef idx="2">
-            <a:schemeClr val="accent1"/>
-          </a:effectRef>
-          <a:fontRef idx="minor">
-            <a:schemeClr val="lt1"/>
-          </a:fontRef>
-        </p:style>
-        <p:txBody>
-          <a:bodyPr rtlCol="0" anchor="ctr"/>
-          <a:lstStyle/>
-          <a:p>
-            <a:pPr algn="ctr"/>
-          </a:p>
-        </p:txBody>
-      </p:sp>
-      <p:sp>
-        <p:nvSpPr>
-          <p:cNvPr id="48" name="TextBox 47"/>
-          <p:cNvSpPr txBox="1"/>
-          <p:nvPr/>
-        </p:nvSpPr>
-        <p:spPr>
-          <a:xfrm>
-            <a:off x="8540496" y="2880360"/>
-            <a:ext cx="3200400" cy="145938"/>
-          </a:xfrm>
-          <a:prstGeom prst="rect">
-            <a:avLst/>
-          </a:prstGeom>
-          <a:noFill/>
-        </p:spPr>
-        <p:txBody>
-          <a:bodyPr wrap="square">
-            <a:spAutoFit/>
-          </a:bodyPr>
-          <a:lstStyle/>
-          <a:p>
-            <a:pPr algn="l">
-              <a:spcAft>
-                <a:spcPts val="300"/>
-              </a:spcAft>
-            </a:pPr>
-            <a:r>
-              <a:rPr sz="1000" b="1">
-                <a:solidFill>
-                  <a:srgbClr val="8C5A5A"/>
-                </a:solidFill>
-                <a:latin typeface="Calibri"/>
-              </a:rPr>
-              <a:t>Sandía Antigua</a:t>
-            </a:r>
-          </a:p>
-        </p:txBody>
-      </p:sp>
-      <p:sp>
-        <p:nvSpPr>
-          <p:cNvPr id="49" name="TextBox 48"/>
-          <p:cNvSpPr txBox="1"/>
-          <p:nvPr/>
-        </p:nvSpPr>
-        <p:spPr>
-          <a:xfrm>
-            <a:off x="8540496" y="2998866"/>
-            <a:ext cx="3200400" cy="180685"/>
-          </a:xfrm>
-          <a:prstGeom prst="rect">
-            <a:avLst/>
-          </a:prstGeom>
-          <a:noFill/>
-        </p:spPr>
-        <p:txBody>
-          <a:bodyPr wrap="square">
-            <a:spAutoFit/>
-          </a:bodyPr>
-          <a:lstStyle/>
-          <a:p>
-            <a:pPr algn="l">
-              <a:spcAft>
-                <a:spcPts val="300"/>
-              </a:spcAft>
-            </a:pPr>
-            <a:r>
-              <a:rPr sz="1200" b="1">
-                <a:solidFill>
-                  <a:srgbClr val="0D3B66"/>
-                </a:solidFill>
-                <a:latin typeface="Calibri"/>
-              </a:rPr>
-              <a:t>13.661 m³    43,7 %</a:t>
-            </a:r>
-          </a:p>
-        </p:txBody>
-      </p:sp>
-      <p:sp>
-        <p:nvSpPr>
-          <p:cNvPr id="50" name="Rounded Rectangle 49"/>
-          <p:cNvSpPr/>
-          <p:nvPr/>
-        </p:nvSpPr>
-        <p:spPr>
-          <a:xfrm>
-            <a:off x="8430768" y="3236976"/>
-            <a:ext cx="3419856" cy="347471"/>
-          </a:xfrm>
-          <a:prstGeom prst="roundRect">
-            <a:avLst>
-              <a:gd name="adj" fmla="val 8000"/>
-            </a:avLst>
-          </a:prstGeom>
-          <a:solidFill>
-            <a:srgbClr val="F5F7FA"/>
-          </a:solidFill>
-          <a:ln w="6350">
-            <a:solidFill>
-              <a:srgbClr val="508282"/>
-            </a:solidFill>
-          </a:ln>
-        </p:spPr>
-        <p:style>
-          <a:lnRef idx="1">
-            <a:schemeClr val="accent1"/>
-          </a:lnRef>
-          <a:fillRef idx="3">
-            <a:schemeClr val="accent1"/>
-          </a:fillRef>
-          <a:effectRef idx="2">
-            <a:schemeClr val="accent1"/>
-          </a:effectRef>
-          <a:fontRef idx="minor">
-            <a:schemeClr val="lt1"/>
-          </a:fontRef>
-        </p:style>
-        <p:txBody>
-          <a:bodyPr rtlCol="0" anchor="ctr"/>
-          <a:lstStyle/>
-          <a:p>
-            <a:pPr algn="ctr"/>
-          </a:p>
-        </p:txBody>
-      </p:sp>
-      <p:sp>
-        <p:nvSpPr>
-          <p:cNvPr id="51" name="TextBox 50"/>
-          <p:cNvSpPr txBox="1"/>
-          <p:nvPr/>
-        </p:nvSpPr>
-        <p:spPr>
-          <a:xfrm>
-            <a:off x="8540496" y="3264408"/>
-            <a:ext cx="3200400" cy="145938"/>
-          </a:xfrm>
-          <a:prstGeom prst="rect">
-            <a:avLst/>
-          </a:prstGeom>
-          <a:noFill/>
-        </p:spPr>
-        <p:txBody>
-          <a:bodyPr wrap="square">
-            <a:spAutoFit/>
-          </a:bodyPr>
-          <a:lstStyle/>
-          <a:p>
-            <a:pPr algn="l">
-              <a:spcAft>
-                <a:spcPts val="300"/>
-              </a:spcAft>
-            </a:pPr>
-            <a:r>
-              <a:rPr sz="1000" b="1">
-                <a:solidFill>
-                  <a:srgbClr val="508282"/>
-                </a:solidFill>
-                <a:latin typeface="Calibri"/>
-              </a:rPr>
-              <a:t>Sandía Nueva</a:t>
-            </a:r>
-          </a:p>
-        </p:txBody>
-      </p:sp>
-      <p:sp>
-        <p:nvSpPr>
-          <p:cNvPr id="52" name="TextBox 51"/>
-          <p:cNvSpPr txBox="1"/>
-          <p:nvPr/>
-        </p:nvSpPr>
-        <p:spPr>
-          <a:xfrm>
-            <a:off x="8540496" y="3382914"/>
-            <a:ext cx="3200400" cy="180685"/>
-          </a:xfrm>
-          <a:prstGeom prst="rect">
-            <a:avLst/>
-          </a:prstGeom>
-          <a:noFill/>
-        </p:spPr>
-        <p:txBody>
-          <a:bodyPr wrap="square">
-            <a:spAutoFit/>
-          </a:bodyPr>
-          <a:lstStyle/>
-          <a:p>
-            <a:pPr algn="l">
-              <a:spcAft>
-                <a:spcPts val="300"/>
-              </a:spcAft>
-            </a:pPr>
-            <a:r>
-              <a:rPr sz="1200" b="1">
-                <a:solidFill>
-                  <a:srgbClr val="0D3B66"/>
-                </a:solidFill>
-                <a:latin typeface="Calibri"/>
-              </a:rPr>
-              <a:t>9.619 m³    30,8 %</a:t>
-            </a:r>
-          </a:p>
-        </p:txBody>
-      </p:sp>
-      <p:sp>
-        <p:nvSpPr>
-          <p:cNvPr id="53" name="Rounded Rectangle 52"/>
-          <p:cNvSpPr/>
-          <p:nvPr/>
-        </p:nvSpPr>
-        <p:spPr>
-          <a:xfrm>
-            <a:off x="8430768" y="3621024"/>
-            <a:ext cx="3419856" cy="347471"/>
-          </a:xfrm>
-          <a:prstGeom prst="roundRect">
-            <a:avLst>
-              <a:gd name="adj" fmla="val 8000"/>
-            </a:avLst>
-          </a:prstGeom>
-          <a:solidFill>
-            <a:srgbClr val="F5F7FA"/>
-          </a:solidFill>
-          <a:ln w="6350">
-            <a:solidFill>
-              <a:srgbClr val="5A8C6E"/>
-            </a:solidFill>
-          </a:ln>
-        </p:spPr>
-        <p:style>
-          <a:lnRef idx="1">
-            <a:schemeClr val="accent1"/>
-          </a:lnRef>
-          <a:fillRef idx="3">
-            <a:schemeClr val="accent1"/>
-          </a:fillRef>
-          <a:effectRef idx="2">
-            <a:schemeClr val="accent1"/>
-          </a:effectRef>
-          <a:fontRef idx="minor">
-            <a:schemeClr val="lt1"/>
-          </a:fontRef>
-        </p:style>
-        <p:txBody>
-          <a:bodyPr rtlCol="0" anchor="ctr"/>
-          <a:lstStyle/>
-          <a:p>
-            <a:pPr algn="ctr"/>
-          </a:p>
-        </p:txBody>
-      </p:sp>
-      <p:sp>
-        <p:nvSpPr>
-          <p:cNvPr id="54" name="TextBox 53"/>
-          <p:cNvSpPr txBox="1"/>
-          <p:nvPr/>
-        </p:nvSpPr>
-        <p:spPr>
-          <a:xfrm>
-            <a:off x="8540496" y="3648456"/>
-            <a:ext cx="3200400" cy="145938"/>
-          </a:xfrm>
-          <a:prstGeom prst="rect">
-            <a:avLst/>
-          </a:prstGeom>
-          <a:noFill/>
-        </p:spPr>
-        <p:txBody>
-          <a:bodyPr wrap="square">
-            <a:spAutoFit/>
-          </a:bodyPr>
-          <a:lstStyle/>
-          <a:p>
-            <a:pPr algn="l">
-              <a:spcAft>
-                <a:spcPts val="300"/>
-              </a:spcAft>
-            </a:pPr>
-            <a:r>
-              <a:rPr sz="1000" b="1">
-                <a:solidFill>
-                  <a:srgbClr val="5A8C6E"/>
-                </a:solidFill>
-                <a:latin typeface="Calibri"/>
-              </a:rPr>
-              <a:t>Locales Gast.</a:t>
-            </a:r>
-          </a:p>
-        </p:txBody>
-      </p:sp>
-      <p:sp>
-        <p:nvSpPr>
-          <p:cNvPr id="55" name="TextBox 54"/>
-          <p:cNvSpPr txBox="1"/>
-          <p:nvPr/>
-        </p:nvSpPr>
-        <p:spPr>
-          <a:xfrm>
-            <a:off x="8540496" y="3766962"/>
-            <a:ext cx="3200400" cy="180685"/>
-          </a:xfrm>
-          <a:prstGeom prst="rect">
-            <a:avLst/>
-          </a:prstGeom>
-          <a:noFill/>
-        </p:spPr>
-        <p:txBody>
-          <a:bodyPr wrap="square">
-            <a:spAutoFit/>
-          </a:bodyPr>
-          <a:lstStyle/>
-          <a:p>
-            <a:pPr algn="l">
-              <a:spcAft>
-                <a:spcPts val="300"/>
-              </a:spcAft>
-            </a:pPr>
-            <a:r>
-              <a:rPr sz="1200" b="1">
-                <a:solidFill>
-                  <a:srgbClr val="0D3B66"/>
-                </a:solidFill>
-                <a:latin typeface="Calibri"/>
-              </a:rPr>
-              <a:t>4.583 m³    14,7 %</a:t>
-            </a:r>
-          </a:p>
-        </p:txBody>
-      </p:sp>
-      <p:sp>
-        <p:nvSpPr>
-          <p:cNvPr id="56" name="Rounded Rectangle 55"/>
-          <p:cNvSpPr/>
-          <p:nvPr/>
-        </p:nvSpPr>
-        <p:spPr>
-          <a:xfrm>
-            <a:off x="8430768" y="4005072"/>
-            <a:ext cx="3419856" cy="347471"/>
-          </a:xfrm>
-          <a:prstGeom prst="roundRect">
-            <a:avLst>
-              <a:gd name="adj" fmla="val 8000"/>
-            </a:avLst>
-          </a:prstGeom>
-          <a:solidFill>
-            <a:srgbClr val="F5F7FA"/>
-          </a:solidFill>
-          <a:ln w="6350">
-            <a:solidFill>
-              <a:srgbClr val="7BA3C9"/>
-            </a:solidFill>
-          </a:ln>
-        </p:spPr>
-        <p:style>
-          <a:lnRef idx="1">
-            <a:schemeClr val="accent1"/>
-          </a:lnRef>
-          <a:fillRef idx="3">
-            <a:schemeClr val="accent1"/>
-          </a:fillRef>
-          <a:effectRef idx="2">
-            <a:schemeClr val="accent1"/>
-          </a:effectRef>
-          <a:fontRef idx="minor">
-            <a:schemeClr val="lt1"/>
-          </a:fontRef>
-        </p:style>
-        <p:txBody>
-          <a:bodyPr rtlCol="0" anchor="ctr"/>
-          <a:lstStyle/>
-          <a:p>
-            <a:pPr algn="ctr"/>
-          </a:p>
-        </p:txBody>
-      </p:sp>
-      <p:sp>
-        <p:nvSpPr>
-          <p:cNvPr id="57" name="TextBox 56"/>
-          <p:cNvSpPr txBox="1"/>
-          <p:nvPr/>
-        </p:nvSpPr>
-        <p:spPr>
-          <a:xfrm>
-            <a:off x="8540496" y="4032504"/>
-            <a:ext cx="3200400" cy="145938"/>
-          </a:xfrm>
-          <a:prstGeom prst="rect">
-            <a:avLst/>
-          </a:prstGeom>
-          <a:noFill/>
-        </p:spPr>
-        <p:txBody>
-          <a:bodyPr wrap="square">
-            <a:spAutoFit/>
-          </a:bodyPr>
-          <a:lstStyle/>
-          <a:p>
-            <a:pPr algn="l">
-              <a:spcAft>
-                <a:spcPts val="300"/>
-              </a:spcAft>
-            </a:pPr>
-            <a:r>
-              <a:rPr sz="1000" b="1">
-                <a:solidFill>
-                  <a:srgbClr val="7BA3C9"/>
-                </a:solidFill>
-                <a:latin typeface="Calibri"/>
-              </a:rPr>
-              <a:t>Matriz Andén</a:t>
-            </a:r>
-          </a:p>
-        </p:txBody>
-      </p:sp>
-      <p:sp>
-        <p:nvSpPr>
-          <p:cNvPr id="58" name="TextBox 57"/>
-          <p:cNvSpPr txBox="1"/>
-          <p:nvPr/>
-        </p:nvSpPr>
-        <p:spPr>
-          <a:xfrm>
-            <a:off x="8540496" y="4151010"/>
-            <a:ext cx="3200400" cy="180685"/>
-          </a:xfrm>
-          <a:prstGeom prst="rect">
-            <a:avLst/>
-          </a:prstGeom>
-          <a:noFill/>
-        </p:spPr>
-        <p:txBody>
-          <a:bodyPr wrap="square">
-            <a:spAutoFit/>
-          </a:bodyPr>
-          <a:lstStyle/>
-          <a:p>
-            <a:pPr algn="l">
-              <a:spcAft>
-                <a:spcPts val="300"/>
-              </a:spcAft>
-            </a:pPr>
-            <a:r>
-              <a:rPr sz="1200" b="1">
-                <a:solidFill>
-                  <a:srgbClr val="0D3B66"/>
-                </a:solidFill>
-                <a:latin typeface="Calibri"/>
-              </a:rPr>
-              <a:t>3.086 m³    9,9 %</a:t>
-            </a:r>
-          </a:p>
-        </p:txBody>
-      </p:sp>
-      <p:sp>
-        <p:nvSpPr>
-          <p:cNvPr id="59" name="Rounded Rectangle 58"/>
-          <p:cNvSpPr/>
-          <p:nvPr/>
-        </p:nvSpPr>
-        <p:spPr>
-          <a:xfrm>
-            <a:off x="8430768" y="4389120"/>
-            <a:ext cx="3419856" cy="347471"/>
-          </a:xfrm>
-          <a:prstGeom prst="roundRect">
-            <a:avLst>
-              <a:gd name="adj" fmla="val 8000"/>
-            </a:avLst>
-          </a:prstGeom>
-          <a:solidFill>
-            <a:srgbClr val="F5F7FA"/>
-          </a:solidFill>
-          <a:ln w="6350">
-            <a:solidFill>
-              <a:srgbClr val="46648C"/>
-            </a:solidFill>
-          </a:ln>
-        </p:spPr>
-        <p:style>
-          <a:lnRef idx="1">
-            <a:schemeClr val="accent1"/>
-          </a:lnRef>
-          <a:fillRef idx="3">
-            <a:schemeClr val="accent1"/>
-          </a:fillRef>
-          <a:effectRef idx="2">
-            <a:schemeClr val="accent1"/>
-          </a:effectRef>
-          <a:fontRef idx="minor">
-            <a:schemeClr val="lt1"/>
-          </a:fontRef>
-        </p:style>
-        <p:txBody>
-          <a:bodyPr rtlCol="0" anchor="ctr"/>
-          <a:lstStyle/>
-          <a:p>
-            <a:pPr algn="ctr"/>
-          </a:p>
-        </p:txBody>
-      </p:sp>
-      <p:sp>
-        <p:nvSpPr>
-          <p:cNvPr id="60" name="TextBox 59"/>
-          <p:cNvSpPr txBox="1"/>
-          <p:nvPr/>
-        </p:nvSpPr>
-        <p:spPr>
-          <a:xfrm>
-            <a:off x="8540496" y="4416552"/>
-            <a:ext cx="3200400" cy="145938"/>
-          </a:xfrm>
-          <a:prstGeom prst="rect">
-            <a:avLst/>
-          </a:prstGeom>
-          <a:noFill/>
-        </p:spPr>
-        <p:txBody>
-          <a:bodyPr wrap="square">
-            <a:spAutoFit/>
-          </a:bodyPr>
-          <a:lstStyle/>
-          <a:p>
-            <a:pPr algn="l">
-              <a:spcAft>
-                <a:spcPts val="300"/>
-              </a:spcAft>
-            </a:pPr>
-            <a:r>
-              <a:rPr sz="1000" b="1">
-                <a:solidFill>
-                  <a:srgbClr val="46648C"/>
-                </a:solidFill>
-                <a:latin typeface="Calibri"/>
-              </a:rPr>
-              <a:t>Pileta</a:t>
-            </a:r>
-          </a:p>
-        </p:txBody>
-      </p:sp>
-      <p:sp>
-        <p:nvSpPr>
-          <p:cNvPr id="61" name="TextBox 60"/>
-          <p:cNvSpPr txBox="1"/>
-          <p:nvPr/>
-        </p:nvSpPr>
-        <p:spPr>
-          <a:xfrm>
-            <a:off x="8540496" y="4535058"/>
-            <a:ext cx="3200400" cy="180685"/>
-          </a:xfrm>
-          <a:prstGeom prst="rect">
-            <a:avLst/>
-          </a:prstGeom>
-          <a:noFill/>
-        </p:spPr>
-        <p:txBody>
-          <a:bodyPr wrap="square">
-            <a:spAutoFit/>
-          </a:bodyPr>
-          <a:lstStyle/>
-          <a:p>
-            <a:pPr algn="l">
-              <a:spcAft>
-                <a:spcPts val="300"/>
-              </a:spcAft>
-            </a:pPr>
-            <a:r>
-              <a:rPr sz="1200" b="1">
-                <a:solidFill>
-                  <a:srgbClr val="0D3B66"/>
-                </a:solidFill>
-                <a:latin typeface="Calibri"/>
-              </a:rPr>
-              <a:t>172 m³    0,5 %</a:t>
-            </a:r>
-          </a:p>
-        </p:txBody>
-      </p:sp>
-      <p:sp>
-        <p:nvSpPr>
-          <p:cNvPr id="62" name="Rounded Rectangle 61"/>
-          <p:cNvSpPr/>
-          <p:nvPr/>
-        </p:nvSpPr>
-        <p:spPr>
-          <a:xfrm>
-            <a:off x="8430768" y="4773168"/>
-            <a:ext cx="3419856" cy="347471"/>
-          </a:xfrm>
-          <a:prstGeom prst="roundRect">
-            <a:avLst>
-              <a:gd name="adj" fmla="val 8000"/>
-            </a:avLst>
-          </a:prstGeom>
-          <a:solidFill>
-            <a:srgbClr val="F5F7FA"/>
-          </a:solidFill>
-          <a:ln w="6350">
-            <a:solidFill>
-              <a:srgbClr val="0D3B66"/>
-            </a:solidFill>
-          </a:ln>
-        </p:spPr>
-        <p:style>
-          <a:lnRef idx="1">
-            <a:schemeClr val="accent1"/>
-          </a:lnRef>
-          <a:fillRef idx="3">
-            <a:schemeClr val="accent1"/>
-          </a:fillRef>
-          <a:effectRef idx="2">
-            <a:schemeClr val="accent1"/>
-          </a:effectRef>
-          <a:fontRef idx="minor">
-            <a:schemeClr val="lt1"/>
-          </a:fontRef>
-        </p:style>
-        <p:txBody>
-          <a:bodyPr rtlCol="0" anchor="ctr"/>
-          <a:lstStyle/>
-          <a:p>
-            <a:pPr algn="ctr"/>
-          </a:p>
-        </p:txBody>
-      </p:sp>
-      <p:sp>
-        <p:nvSpPr>
-          <p:cNvPr id="63" name="TextBox 62"/>
-          <p:cNvSpPr txBox="1"/>
-          <p:nvPr/>
-        </p:nvSpPr>
-        <p:spPr>
-          <a:xfrm>
-            <a:off x="8540496" y="4800600"/>
-            <a:ext cx="3200400" cy="145938"/>
-          </a:xfrm>
-          <a:prstGeom prst="rect">
-            <a:avLst/>
-          </a:prstGeom>
-          <a:noFill/>
-        </p:spPr>
-        <p:txBody>
-          <a:bodyPr wrap="square">
-            <a:spAutoFit/>
-          </a:bodyPr>
-          <a:lstStyle/>
-          <a:p>
-            <a:pPr algn="l">
-              <a:spcAft>
-                <a:spcPts val="300"/>
-              </a:spcAft>
-            </a:pPr>
-            <a:r>
-              <a:rPr sz="1000" b="1">
-                <a:solidFill>
-                  <a:srgbClr val="0D3B66"/>
-                </a:solidFill>
-                <a:latin typeface="Calibri"/>
-              </a:rPr>
-              <a:t>Restaurante</a:t>
-            </a:r>
-          </a:p>
-        </p:txBody>
-      </p:sp>
-      <p:sp>
-        <p:nvSpPr>
-          <p:cNvPr id="64" name="TextBox 63"/>
-          <p:cNvSpPr txBox="1"/>
-          <p:nvPr/>
-        </p:nvSpPr>
-        <p:spPr>
-          <a:xfrm>
-            <a:off x="8540496" y="4919106"/>
-            <a:ext cx="3200400" cy="180685"/>
-          </a:xfrm>
-          <a:prstGeom prst="rect">
-            <a:avLst/>
-          </a:prstGeom>
-          <a:noFill/>
-        </p:spPr>
-        <p:txBody>
-          <a:bodyPr wrap="square">
-            <a:spAutoFit/>
-          </a:bodyPr>
-          <a:lstStyle/>
-          <a:p>
-            <a:pPr algn="l">
-              <a:spcAft>
-                <a:spcPts val="300"/>
-              </a:spcAft>
-            </a:pPr>
-            <a:r>
-              <a:rPr sz="1200" b="1">
-                <a:solidFill>
-                  <a:srgbClr val="0D3B66"/>
-                </a:solidFill>
-                <a:latin typeface="Calibri"/>
-              </a:rPr>
-              <a:t>98 m³    0,3 %</a:t>
-            </a:r>
-          </a:p>
-        </p:txBody>
-      </p:sp>
-      <p:sp>
-        <p:nvSpPr>
-          <p:cNvPr id="65" name="Rounded Rectangle 64"/>
-          <p:cNvSpPr/>
-          <p:nvPr/>
-        </p:nvSpPr>
-        <p:spPr>
-          <a:xfrm>
-            <a:off x="8430768" y="5157216"/>
-            <a:ext cx="3419856" cy="347471"/>
-          </a:xfrm>
-          <a:prstGeom prst="roundRect">
-            <a:avLst>
-              <a:gd name="adj" fmla="val 8000"/>
-            </a:avLst>
-          </a:prstGeom>
-          <a:solidFill>
-            <a:srgbClr val="F5F7FA"/>
-          </a:solidFill>
-          <a:ln w="6350">
-            <a:solidFill>
-              <a:srgbClr val="A0783C"/>
-            </a:solidFill>
-          </a:ln>
-        </p:spPr>
-        <p:style>
-          <a:lnRef idx="1">
-            <a:schemeClr val="accent1"/>
-          </a:lnRef>
-          <a:fillRef idx="3">
-            <a:schemeClr val="accent1"/>
-          </a:fillRef>
-          <a:effectRef idx="2">
-            <a:schemeClr val="accent1"/>
-          </a:effectRef>
-          <a:fontRef idx="minor">
-            <a:schemeClr val="lt1"/>
-          </a:fontRef>
-        </p:style>
-        <p:txBody>
-          <a:bodyPr rtlCol="0" anchor="ctr"/>
-          <a:lstStyle/>
-          <a:p>
-            <a:pPr algn="ctr"/>
-          </a:p>
-        </p:txBody>
-      </p:sp>
-      <p:sp>
-        <p:nvSpPr>
-          <p:cNvPr id="66" name="TextBox 65"/>
-          <p:cNvSpPr txBox="1"/>
-          <p:nvPr/>
-        </p:nvSpPr>
-        <p:spPr>
-          <a:xfrm>
-            <a:off x="8540496" y="5184648"/>
-            <a:ext cx="3200400" cy="145938"/>
-          </a:xfrm>
-          <a:prstGeom prst="rect">
-            <a:avLst/>
-          </a:prstGeom>
-          <a:noFill/>
-        </p:spPr>
-        <p:txBody>
-          <a:bodyPr wrap="square">
-            <a:spAutoFit/>
-          </a:bodyPr>
-          <a:lstStyle/>
-          <a:p>
-            <a:pPr algn="l">
-              <a:spcAft>
-                <a:spcPts val="300"/>
-              </a:spcAft>
-            </a:pPr>
-            <a:r>
-              <a:rPr sz="1000" b="1">
-                <a:solidFill>
-                  <a:srgbClr val="A0783C"/>
-                </a:solidFill>
-                <a:latin typeface="Calibri"/>
-              </a:rPr>
-              <a:t>Cascada</a:t>
-            </a:r>
-          </a:p>
-        </p:txBody>
-      </p:sp>
-      <p:sp>
-        <p:nvSpPr>
-          <p:cNvPr id="67" name="TextBox 66"/>
-          <p:cNvSpPr txBox="1"/>
-          <p:nvPr/>
-        </p:nvSpPr>
-        <p:spPr>
-          <a:xfrm>
-            <a:off x="8540496" y="5303154"/>
-            <a:ext cx="3200400" cy="180685"/>
-          </a:xfrm>
-          <a:prstGeom prst="rect">
-            <a:avLst/>
-          </a:prstGeom>
-          <a:noFill/>
-        </p:spPr>
-        <p:txBody>
-          <a:bodyPr wrap="square">
-            <a:spAutoFit/>
-          </a:bodyPr>
-          <a:lstStyle/>
-          <a:p>
-            <a:pPr algn="l">
-              <a:spcAft>
-                <a:spcPts val="300"/>
-              </a:spcAft>
-            </a:pPr>
-            <a:r>
-              <a:rPr sz="1200" b="1">
-                <a:solidFill>
-                  <a:srgbClr val="0D3B66"/>
-                </a:solidFill>
-                <a:latin typeface="Calibri"/>
-              </a:rPr>
-              <a:t>20 m³    &lt;0,1 %</a:t>
-            </a:r>
-          </a:p>
-        </p:txBody>
-      </p:sp>
-      <p:sp>
-        <p:nvSpPr>
-          <p:cNvPr id="68" name="Rounded Rectangle 67"/>
-          <p:cNvSpPr/>
-          <p:nvPr/>
-        </p:nvSpPr>
-        <p:spPr>
-          <a:xfrm>
-            <a:off x="201168" y="5705856"/>
-            <a:ext cx="11795760" cy="438912"/>
-          </a:xfrm>
-          <a:prstGeom prst="roundRect">
-            <a:avLst>
-              <a:gd name="adj" fmla="val 8000"/>
-            </a:avLst>
-          </a:prstGeom>
-          <a:solidFill>
-            <a:srgbClr val="FFF9EB"/>
-          </a:solidFill>
-          <a:ln w="6350">
-            <a:solidFill>
-              <a:srgbClr val="C9A227"/>
-            </a:solidFill>
-          </a:ln>
-        </p:spPr>
-        <p:style>
-          <a:lnRef idx="1">
-            <a:schemeClr val="accent1"/>
-          </a:lnRef>
-          <a:fillRef idx="3">
-            <a:schemeClr val="accent1"/>
-          </a:fillRef>
-          <a:effectRef idx="2">
-            <a:schemeClr val="accent1"/>
-          </a:effectRef>
-          <a:fontRef idx="minor">
-            <a:schemeClr val="lt1"/>
-          </a:fontRef>
-        </p:style>
-        <p:txBody>
-          <a:bodyPr rtlCol="0" anchor="ctr"/>
-          <a:lstStyle/>
-          <a:p>
-            <a:pPr algn="ctr"/>
-          </a:p>
-        </p:txBody>
-      </p:sp>
-      <p:sp>
-        <p:nvSpPr>
-          <p:cNvPr id="69" name="TextBox 68"/>
+          <p:cNvPr id="25" name="TextBox 24"/>
           <p:cNvSpPr txBox="1"/>
           <p:nvPr/>
         </p:nvSpPr>
@@ -8199,14 +5988,14 @@
                 </a:solidFill>
                 <a:latin typeface="Calibri"/>
               </a:rPr>
-              <a:t>Recepción 12/12/2025  ·  Capacitación 17/12/2025  ·  Francisco Jeldres  ·  Paula Azolas  ·  Mantención: C. Naranjo, M. Jara, R. Moreno, R. Díaz, J. Gutiérrez, H. Fierro</a:t>
-            </a:r>
-          </a:p>
-        </p:txBody>
-      </p:sp>
-      <p:sp>
-        <p:nvSpPr>
-          <p:cNvPr id="70" name="TextBox 69"/>
+              <a:t>Recepción 29/04/2026 (Anillo Norte / Anillo Sur)  ·  Capacitación 12/12/2025  ·  Joceline Lazo  ·  Constanza Vilches</a:t>
+            </a:r>
+          </a:p>
+        </p:txBody>
+      </p:sp>
+      <p:sp>
+        <p:nvSpPr>
+          <p:cNvPr id="26" name="TextBox 25"/>
           <p:cNvSpPr txBox="1"/>
           <p:nvPr/>
         </p:nvSpPr>
@@ -8238,7 +6027,7 @@
                 </a:solidFill>
                 <a:latin typeface="Calibri"/>
               </a:rPr>
-              <a:t>Mayo 26.357   ·   Junio 20.927   ·   Julio 31.239   ·   Agosto 1–17: 21.494   ·   proy. ago 39.195 m³.</a:t>
+              <a:t>Junio 664   ·   Julio 618   ·   Agosto 1–17: 366   ·   proy. ago 667 m³.</a:t>
             </a:r>
           </a:p>
           <a:p>
@@ -8254,7 +6043,7 @@
                 </a:solidFill>
                 <a:latin typeface="Calibri"/>
               </a:rPr>
-              <a:t>Julio = cabecera (7 puntos). 27, 35 y 36 no se suman: cadena Sandía → DL (lámina 2).</a:t>
+              <a:t>Cambio de monitoreo: se dejó Baños y Matriz Principal. Anillo Norte y Sur con lectura correcta desde el 19/05 (mayo no se grafica).</a:t>
             </a:r>
           </a:p>
         </p:txBody>
@@ -8421,7 +6210,7 @@
                 </a:solidFill>
                 <a:latin typeface="Calibri"/>
               </a:rPr>
-              <a:t>PAK  ·  2. Cadena Sandía / Distrito de Lujo</a:t>
+              <a:t>PAK  ·  Equipos y consumo</a:t>
             </a:r>
           </a:p>
         </p:txBody>
@@ -8460,7 +6249,7 @@
                 </a:solidFill>
                 <a:latin typeface="Calibri"/>
               </a:rPr>
-              <a:t>Sandía Antigua y Sandía Nueva alimentan Distrito de Lujo  ·  se divide en Bazar Gourmet y DL Kennedy</a:t>
+              <a:t>Parque Arauco Kennedy   |   10 puntos WES   |   julio = cabecera (sin 27, 35 y 36)   |   01/05/2026 – 17/08/2026</a:t>
             </a:r>
           </a:p>
         </p:txBody>
@@ -8473,8 +6262,1125 @@
         </p:nvSpPr>
         <p:spPr>
           <a:xfrm>
-            <a:off x="201168" y="987552"/>
-            <a:ext cx="11777472" cy="512064"/>
+            <a:off x="201168" y="1024128"/>
+            <a:ext cx="2286000" cy="621792"/>
+          </a:xfrm>
+          <a:prstGeom prst="roundRect">
+            <a:avLst>
+              <a:gd name="adj" fmla="val 8000"/>
+            </a:avLst>
+          </a:prstGeom>
+          <a:solidFill>
+            <a:srgbClr val="F5F7FA"/>
+          </a:solidFill>
+          <a:ln w="6350">
+            <a:solidFill>
+              <a:srgbClr val="C45C26"/>
+            </a:solidFill>
+          </a:ln>
+        </p:spPr>
+        <p:style>
+          <a:lnRef idx="1">
+            <a:schemeClr val="accent1"/>
+          </a:lnRef>
+          <a:fillRef idx="3">
+            <a:schemeClr val="accent1"/>
+          </a:fillRef>
+          <a:effectRef idx="2">
+            <a:schemeClr val="accent1"/>
+          </a:effectRef>
+          <a:fontRef idx="minor">
+            <a:schemeClr val="lt1"/>
+          </a:fontRef>
+        </p:style>
+        <p:txBody>
+          <a:bodyPr rtlCol="0" anchor="ctr"/>
+          <a:lstStyle/>
+          <a:p>
+            <a:pPr algn="ctr"/>
+          </a:p>
+        </p:txBody>
+      </p:sp>
+      <p:sp>
+        <p:nvSpPr>
+          <p:cNvPr id="8" name="TextBox 7"/>
+          <p:cNvSpPr txBox="1"/>
+          <p:nvPr/>
+        </p:nvSpPr>
+        <p:spPr>
+          <a:xfrm>
+            <a:off x="274320" y="1060704"/>
+            <a:ext cx="2157984" cy="146304"/>
+          </a:xfrm>
+          <a:prstGeom prst="rect">
+            <a:avLst/>
+          </a:prstGeom>
+          <a:noFill/>
+        </p:spPr>
+        <p:txBody>
+          <a:bodyPr wrap="square">
+            <a:spAutoFit/>
+          </a:bodyPr>
+          <a:lstStyle/>
+          <a:p>
+            <a:pPr algn="l">
+              <a:spcAft>
+                <a:spcPts val="300"/>
+              </a:spcAft>
+            </a:pPr>
+            <a:r>
+              <a:rPr sz="900" b="1">
+                <a:solidFill>
+                  <a:srgbClr val="C9A227"/>
+                </a:solidFill>
+                <a:latin typeface="Calibri"/>
+              </a:rPr>
+              <a:t>000025-20</a:t>
+            </a:r>
+          </a:p>
+        </p:txBody>
+      </p:sp>
+      <p:sp>
+        <p:nvSpPr>
+          <p:cNvPr id="9" name="TextBox 8"/>
+          <p:cNvSpPr txBox="1"/>
+          <p:nvPr/>
+        </p:nvSpPr>
+        <p:spPr>
+          <a:xfrm>
+            <a:off x="274320" y="1225296"/>
+            <a:ext cx="2157984" cy="201168"/>
+          </a:xfrm>
+          <a:prstGeom prst="rect">
+            <a:avLst/>
+          </a:prstGeom>
+          <a:noFill/>
+        </p:spPr>
+        <p:txBody>
+          <a:bodyPr wrap="square">
+            <a:spAutoFit/>
+          </a:bodyPr>
+          <a:lstStyle/>
+          <a:p>
+            <a:pPr algn="l">
+              <a:spcAft>
+                <a:spcPts val="300"/>
+              </a:spcAft>
+            </a:pPr>
+            <a:r>
+              <a:rPr sz="1100" b="1">
+                <a:solidFill>
+                  <a:srgbClr val="0D3B66"/>
+                </a:solidFill>
+                <a:latin typeface="Calibri"/>
+              </a:rPr>
+              <a:t>Matriz Andén</a:t>
+            </a:r>
+          </a:p>
+        </p:txBody>
+      </p:sp>
+      <p:sp>
+        <p:nvSpPr>
+          <p:cNvPr id="10" name="Rounded Rectangle 9"/>
+          <p:cNvSpPr/>
+          <p:nvPr/>
+        </p:nvSpPr>
+        <p:spPr>
+          <a:xfrm>
+            <a:off x="2578608" y="1024128"/>
+            <a:ext cx="2286000" cy="621792"/>
+          </a:xfrm>
+          <a:prstGeom prst="roundRect">
+            <a:avLst>
+              <a:gd name="adj" fmla="val 8000"/>
+            </a:avLst>
+          </a:prstGeom>
+          <a:solidFill>
+            <a:srgbClr val="F5F7FA"/>
+          </a:solidFill>
+          <a:ln w="6350">
+            <a:solidFill>
+              <a:srgbClr val="C9A227"/>
+            </a:solidFill>
+          </a:ln>
+        </p:spPr>
+        <p:style>
+          <a:lnRef idx="1">
+            <a:schemeClr val="accent1"/>
+          </a:lnRef>
+          <a:fillRef idx="3">
+            <a:schemeClr val="accent1"/>
+          </a:fillRef>
+          <a:effectRef idx="2">
+            <a:schemeClr val="accent1"/>
+          </a:effectRef>
+          <a:fontRef idx="minor">
+            <a:schemeClr val="lt1"/>
+          </a:fontRef>
+        </p:style>
+        <p:txBody>
+          <a:bodyPr rtlCol="0" anchor="ctr"/>
+          <a:lstStyle/>
+          <a:p>
+            <a:pPr algn="ctr"/>
+          </a:p>
+        </p:txBody>
+      </p:sp>
+      <p:sp>
+        <p:nvSpPr>
+          <p:cNvPr id="11" name="TextBox 10"/>
+          <p:cNvSpPr txBox="1"/>
+          <p:nvPr/>
+        </p:nvSpPr>
+        <p:spPr>
+          <a:xfrm>
+            <a:off x="2651760" y="1060704"/>
+            <a:ext cx="2157984" cy="146304"/>
+          </a:xfrm>
+          <a:prstGeom prst="rect">
+            <a:avLst/>
+          </a:prstGeom>
+          <a:noFill/>
+        </p:spPr>
+        <p:txBody>
+          <a:bodyPr wrap="square">
+            <a:spAutoFit/>
+          </a:bodyPr>
+          <a:lstStyle/>
+          <a:p>
+            <a:pPr algn="l">
+              <a:spcAft>
+                <a:spcPts val="300"/>
+              </a:spcAft>
+            </a:pPr>
+            <a:r>
+              <a:rPr sz="900" b="1">
+                <a:solidFill>
+                  <a:srgbClr val="C9A227"/>
+                </a:solidFill>
+                <a:latin typeface="Calibri"/>
+              </a:rPr>
+              <a:t>000025-21</a:t>
+            </a:r>
+          </a:p>
+        </p:txBody>
+      </p:sp>
+      <p:sp>
+        <p:nvSpPr>
+          <p:cNvPr id="12" name="TextBox 11"/>
+          <p:cNvSpPr txBox="1"/>
+          <p:nvPr/>
+        </p:nvSpPr>
+        <p:spPr>
+          <a:xfrm>
+            <a:off x="2651760" y="1225296"/>
+            <a:ext cx="2157984" cy="201168"/>
+          </a:xfrm>
+          <a:prstGeom prst="rect">
+            <a:avLst/>
+          </a:prstGeom>
+          <a:noFill/>
+        </p:spPr>
+        <p:txBody>
+          <a:bodyPr wrap="square">
+            <a:spAutoFit/>
+          </a:bodyPr>
+          <a:lstStyle/>
+          <a:p>
+            <a:pPr algn="l">
+              <a:spcAft>
+                <a:spcPts val="300"/>
+              </a:spcAft>
+            </a:pPr>
+            <a:r>
+              <a:rPr sz="1100" b="1">
+                <a:solidFill>
+                  <a:srgbClr val="0D3B66"/>
+                </a:solidFill>
+                <a:latin typeface="Calibri"/>
+              </a:rPr>
+              <a:t>Locales Gast.</a:t>
+            </a:r>
+          </a:p>
+        </p:txBody>
+      </p:sp>
+      <p:sp>
+        <p:nvSpPr>
+          <p:cNvPr id="13" name="Rounded Rectangle 12"/>
+          <p:cNvSpPr/>
+          <p:nvPr/>
+        </p:nvSpPr>
+        <p:spPr>
+          <a:xfrm>
+            <a:off x="4956048" y="1024128"/>
+            <a:ext cx="2286000" cy="621792"/>
+          </a:xfrm>
+          <a:prstGeom prst="roundRect">
+            <a:avLst>
+              <a:gd name="adj" fmla="val 8000"/>
+            </a:avLst>
+          </a:prstGeom>
+          <a:solidFill>
+            <a:srgbClr val="F5F7FA"/>
+          </a:solidFill>
+          <a:ln w="6350">
+            <a:solidFill>
+              <a:srgbClr val="7BA3C9"/>
+            </a:solidFill>
+          </a:ln>
+        </p:spPr>
+        <p:style>
+          <a:lnRef idx="1">
+            <a:schemeClr val="accent1"/>
+          </a:lnRef>
+          <a:fillRef idx="3">
+            <a:schemeClr val="accent1"/>
+          </a:fillRef>
+          <a:effectRef idx="2">
+            <a:schemeClr val="accent1"/>
+          </a:effectRef>
+          <a:fontRef idx="minor">
+            <a:schemeClr val="lt1"/>
+          </a:fontRef>
+        </p:style>
+        <p:txBody>
+          <a:bodyPr rtlCol="0" anchor="ctr"/>
+          <a:lstStyle/>
+          <a:p>
+            <a:pPr algn="ctr"/>
+          </a:p>
+        </p:txBody>
+      </p:sp>
+      <p:sp>
+        <p:nvSpPr>
+          <p:cNvPr id="14" name="TextBox 13"/>
+          <p:cNvSpPr txBox="1"/>
+          <p:nvPr/>
+        </p:nvSpPr>
+        <p:spPr>
+          <a:xfrm>
+            <a:off x="5029200" y="1060704"/>
+            <a:ext cx="2157984" cy="146304"/>
+          </a:xfrm>
+          <a:prstGeom prst="rect">
+            <a:avLst/>
+          </a:prstGeom>
+          <a:noFill/>
+        </p:spPr>
+        <p:txBody>
+          <a:bodyPr wrap="square">
+            <a:spAutoFit/>
+          </a:bodyPr>
+          <a:lstStyle/>
+          <a:p>
+            <a:pPr algn="l">
+              <a:spcAft>
+                <a:spcPts val="300"/>
+              </a:spcAft>
+            </a:pPr>
+            <a:r>
+              <a:rPr sz="900" b="1">
+                <a:solidFill>
+                  <a:srgbClr val="C9A227"/>
+                </a:solidFill>
+                <a:latin typeface="Calibri"/>
+              </a:rPr>
+              <a:t>000025-22</a:t>
+            </a:r>
+          </a:p>
+        </p:txBody>
+      </p:sp>
+      <p:sp>
+        <p:nvSpPr>
+          <p:cNvPr id="15" name="TextBox 14"/>
+          <p:cNvSpPr txBox="1"/>
+          <p:nvPr/>
+        </p:nvSpPr>
+        <p:spPr>
+          <a:xfrm>
+            <a:off x="5029200" y="1225296"/>
+            <a:ext cx="2157984" cy="201168"/>
+          </a:xfrm>
+          <a:prstGeom prst="rect">
+            <a:avLst/>
+          </a:prstGeom>
+          <a:noFill/>
+        </p:spPr>
+        <p:txBody>
+          <a:bodyPr wrap="square">
+            <a:spAutoFit/>
+          </a:bodyPr>
+          <a:lstStyle/>
+          <a:p>
+            <a:pPr algn="l">
+              <a:spcAft>
+                <a:spcPts val="300"/>
+              </a:spcAft>
+            </a:pPr>
+            <a:r>
+              <a:rPr sz="1100" b="1">
+                <a:solidFill>
+                  <a:srgbClr val="0D3B66"/>
+                </a:solidFill>
+                <a:latin typeface="Calibri"/>
+              </a:rPr>
+              <a:t>Sandía Antigua</a:t>
+            </a:r>
+          </a:p>
+        </p:txBody>
+      </p:sp>
+      <p:sp>
+        <p:nvSpPr>
+          <p:cNvPr id="16" name="TextBox 15"/>
+          <p:cNvSpPr txBox="1"/>
+          <p:nvPr/>
+        </p:nvSpPr>
+        <p:spPr>
+          <a:xfrm>
+            <a:off x="5029200" y="1444752"/>
+            <a:ext cx="2157984" cy="164592"/>
+          </a:xfrm>
+          <a:prstGeom prst="rect">
+            <a:avLst/>
+          </a:prstGeom>
+          <a:noFill/>
+        </p:spPr>
+        <p:txBody>
+          <a:bodyPr wrap="square">
+            <a:spAutoFit/>
+          </a:bodyPr>
+          <a:lstStyle/>
+          <a:p>
+            <a:pPr algn="l">
+              <a:spcAft>
+                <a:spcPts val="300"/>
+              </a:spcAft>
+            </a:pPr>
+            <a:r>
+              <a:rPr sz="800" b="0">
+                <a:solidFill>
+                  <a:srgbClr val="5A5A5A"/>
+                </a:solidFill>
+                <a:latin typeface="Calibri"/>
+              </a:rPr>
+              <a:t>alimenta 27</a:t>
+            </a:r>
+          </a:p>
+        </p:txBody>
+      </p:sp>
+      <p:sp>
+        <p:nvSpPr>
+          <p:cNvPr id="17" name="Rounded Rectangle 16"/>
+          <p:cNvSpPr/>
+          <p:nvPr/>
+        </p:nvSpPr>
+        <p:spPr>
+          <a:xfrm>
+            <a:off x="7333488" y="1024128"/>
+            <a:ext cx="2286000" cy="621792"/>
+          </a:xfrm>
+          <a:prstGeom prst="roundRect">
+            <a:avLst>
+              <a:gd name="adj" fmla="val 8000"/>
+            </a:avLst>
+          </a:prstGeom>
+          <a:solidFill>
+            <a:srgbClr val="F5F7FA"/>
+          </a:solidFill>
+          <a:ln w="6350">
+            <a:solidFill>
+              <a:srgbClr val="46648C"/>
+            </a:solidFill>
+          </a:ln>
+        </p:spPr>
+        <p:style>
+          <a:lnRef idx="1">
+            <a:schemeClr val="accent1"/>
+          </a:lnRef>
+          <a:fillRef idx="3">
+            <a:schemeClr val="accent1"/>
+          </a:fillRef>
+          <a:effectRef idx="2">
+            <a:schemeClr val="accent1"/>
+          </a:effectRef>
+          <a:fontRef idx="minor">
+            <a:schemeClr val="lt1"/>
+          </a:fontRef>
+        </p:style>
+        <p:txBody>
+          <a:bodyPr rtlCol="0" anchor="ctr"/>
+          <a:lstStyle/>
+          <a:p>
+            <a:pPr algn="ctr"/>
+          </a:p>
+        </p:txBody>
+      </p:sp>
+      <p:sp>
+        <p:nvSpPr>
+          <p:cNvPr id="18" name="TextBox 17"/>
+          <p:cNvSpPr txBox="1"/>
+          <p:nvPr/>
+        </p:nvSpPr>
+        <p:spPr>
+          <a:xfrm>
+            <a:off x="7406640" y="1060704"/>
+            <a:ext cx="2157984" cy="146304"/>
+          </a:xfrm>
+          <a:prstGeom prst="rect">
+            <a:avLst/>
+          </a:prstGeom>
+          <a:noFill/>
+        </p:spPr>
+        <p:txBody>
+          <a:bodyPr wrap="square">
+            <a:spAutoFit/>
+          </a:bodyPr>
+          <a:lstStyle/>
+          <a:p>
+            <a:pPr algn="l">
+              <a:spcAft>
+                <a:spcPts val="300"/>
+              </a:spcAft>
+            </a:pPr>
+            <a:r>
+              <a:rPr sz="900" b="1">
+                <a:solidFill>
+                  <a:srgbClr val="C9A227"/>
+                </a:solidFill>
+                <a:latin typeface="Calibri"/>
+              </a:rPr>
+              <a:t>000025-28</a:t>
+            </a:r>
+          </a:p>
+        </p:txBody>
+      </p:sp>
+      <p:sp>
+        <p:nvSpPr>
+          <p:cNvPr id="19" name="TextBox 18"/>
+          <p:cNvSpPr txBox="1"/>
+          <p:nvPr/>
+        </p:nvSpPr>
+        <p:spPr>
+          <a:xfrm>
+            <a:off x="7406640" y="1225296"/>
+            <a:ext cx="2157984" cy="201168"/>
+          </a:xfrm>
+          <a:prstGeom prst="rect">
+            <a:avLst/>
+          </a:prstGeom>
+          <a:noFill/>
+        </p:spPr>
+        <p:txBody>
+          <a:bodyPr wrap="square">
+            <a:spAutoFit/>
+          </a:bodyPr>
+          <a:lstStyle/>
+          <a:p>
+            <a:pPr algn="l">
+              <a:spcAft>
+                <a:spcPts val="300"/>
+              </a:spcAft>
+            </a:pPr>
+            <a:r>
+              <a:rPr sz="1100" b="1">
+                <a:solidFill>
+                  <a:srgbClr val="0D3B66"/>
+                </a:solidFill>
+                <a:latin typeface="Calibri"/>
+              </a:rPr>
+              <a:t>Sandía Nueva</a:t>
+            </a:r>
+          </a:p>
+        </p:txBody>
+      </p:sp>
+      <p:sp>
+        <p:nvSpPr>
+          <p:cNvPr id="20" name="TextBox 19"/>
+          <p:cNvSpPr txBox="1"/>
+          <p:nvPr/>
+        </p:nvSpPr>
+        <p:spPr>
+          <a:xfrm>
+            <a:off x="7406640" y="1444752"/>
+            <a:ext cx="2157984" cy="164592"/>
+          </a:xfrm>
+          <a:prstGeom prst="rect">
+            <a:avLst/>
+          </a:prstGeom>
+          <a:noFill/>
+        </p:spPr>
+        <p:txBody>
+          <a:bodyPr wrap="square">
+            <a:spAutoFit/>
+          </a:bodyPr>
+          <a:lstStyle/>
+          <a:p>
+            <a:pPr algn="l">
+              <a:spcAft>
+                <a:spcPts val="300"/>
+              </a:spcAft>
+            </a:pPr>
+            <a:r>
+              <a:rPr sz="800" b="0">
+                <a:solidFill>
+                  <a:srgbClr val="5A5A5A"/>
+                </a:solidFill>
+                <a:latin typeface="Calibri"/>
+              </a:rPr>
+              <a:t>alimenta 27</a:t>
+            </a:r>
+          </a:p>
+        </p:txBody>
+      </p:sp>
+      <p:sp>
+        <p:nvSpPr>
+          <p:cNvPr id="21" name="Rounded Rectangle 20"/>
+          <p:cNvSpPr/>
+          <p:nvPr/>
+        </p:nvSpPr>
+        <p:spPr>
+          <a:xfrm>
+            <a:off x="9710928" y="1024128"/>
+            <a:ext cx="2286000" cy="621792"/>
+          </a:xfrm>
+          <a:prstGeom prst="roundRect">
+            <a:avLst>
+              <a:gd name="adj" fmla="val 8000"/>
+            </a:avLst>
+          </a:prstGeom>
+          <a:solidFill>
+            <a:srgbClr val="F5F7FA"/>
+          </a:solidFill>
+          <a:ln w="6350">
+            <a:solidFill>
+              <a:srgbClr val="A0783C"/>
+            </a:solidFill>
+          </a:ln>
+        </p:spPr>
+        <p:style>
+          <a:lnRef idx="1">
+            <a:schemeClr val="accent1"/>
+          </a:lnRef>
+          <a:fillRef idx="3">
+            <a:schemeClr val="accent1"/>
+          </a:fillRef>
+          <a:effectRef idx="2">
+            <a:schemeClr val="accent1"/>
+          </a:effectRef>
+          <a:fontRef idx="minor">
+            <a:schemeClr val="lt1"/>
+          </a:fontRef>
+        </p:style>
+        <p:txBody>
+          <a:bodyPr rtlCol="0" anchor="ctr"/>
+          <a:lstStyle/>
+          <a:p>
+            <a:pPr algn="ctr"/>
+          </a:p>
+        </p:txBody>
+      </p:sp>
+      <p:sp>
+        <p:nvSpPr>
+          <p:cNvPr id="22" name="TextBox 21"/>
+          <p:cNvSpPr txBox="1"/>
+          <p:nvPr/>
+        </p:nvSpPr>
+        <p:spPr>
+          <a:xfrm>
+            <a:off x="9784080" y="1060704"/>
+            <a:ext cx="2157984" cy="146304"/>
+          </a:xfrm>
+          <a:prstGeom prst="rect">
+            <a:avLst/>
+          </a:prstGeom>
+          <a:noFill/>
+        </p:spPr>
+        <p:txBody>
+          <a:bodyPr wrap="square">
+            <a:spAutoFit/>
+          </a:bodyPr>
+          <a:lstStyle/>
+          <a:p>
+            <a:pPr algn="l">
+              <a:spcAft>
+                <a:spcPts val="300"/>
+              </a:spcAft>
+            </a:pPr>
+            <a:r>
+              <a:rPr sz="900" b="1">
+                <a:solidFill>
+                  <a:srgbClr val="C9A227"/>
+                </a:solidFill>
+                <a:latin typeface="Calibri"/>
+              </a:rPr>
+              <a:t>000025-29</a:t>
+            </a:r>
+          </a:p>
+        </p:txBody>
+      </p:sp>
+      <p:sp>
+        <p:nvSpPr>
+          <p:cNvPr id="23" name="TextBox 22"/>
+          <p:cNvSpPr txBox="1"/>
+          <p:nvPr/>
+        </p:nvSpPr>
+        <p:spPr>
+          <a:xfrm>
+            <a:off x="9784080" y="1225296"/>
+            <a:ext cx="2157984" cy="201168"/>
+          </a:xfrm>
+          <a:prstGeom prst="rect">
+            <a:avLst/>
+          </a:prstGeom>
+          <a:noFill/>
+        </p:spPr>
+        <p:txBody>
+          <a:bodyPr wrap="square">
+            <a:spAutoFit/>
+          </a:bodyPr>
+          <a:lstStyle/>
+          <a:p>
+            <a:pPr algn="l">
+              <a:spcAft>
+                <a:spcPts val="300"/>
+              </a:spcAft>
+            </a:pPr>
+            <a:r>
+              <a:rPr sz="1100" b="1">
+                <a:solidFill>
+                  <a:srgbClr val="0D3B66"/>
+                </a:solidFill>
+                <a:latin typeface="Calibri"/>
+              </a:rPr>
+              <a:t>Restaurante</a:t>
+            </a:r>
+          </a:p>
+        </p:txBody>
+      </p:sp>
+      <p:sp>
+        <p:nvSpPr>
+          <p:cNvPr id="24" name="Rounded Rectangle 23"/>
+          <p:cNvSpPr/>
+          <p:nvPr/>
+        </p:nvSpPr>
+        <p:spPr>
+          <a:xfrm>
+            <a:off x="201168" y="1719072"/>
+            <a:ext cx="2286000" cy="621792"/>
+          </a:xfrm>
+          <a:prstGeom prst="roundRect">
+            <a:avLst>
+              <a:gd name="adj" fmla="val 8000"/>
+            </a:avLst>
+          </a:prstGeom>
+          <a:solidFill>
+            <a:srgbClr val="F5F7FA"/>
+          </a:solidFill>
+          <a:ln w="6350">
+            <a:solidFill>
+              <a:srgbClr val="5A8C6E"/>
+            </a:solidFill>
+          </a:ln>
+        </p:spPr>
+        <p:style>
+          <a:lnRef idx="1">
+            <a:schemeClr val="accent1"/>
+          </a:lnRef>
+          <a:fillRef idx="3">
+            <a:schemeClr val="accent1"/>
+          </a:fillRef>
+          <a:effectRef idx="2">
+            <a:schemeClr val="accent1"/>
+          </a:effectRef>
+          <a:fontRef idx="minor">
+            <a:schemeClr val="lt1"/>
+          </a:fontRef>
+        </p:style>
+        <p:txBody>
+          <a:bodyPr rtlCol="0" anchor="ctr"/>
+          <a:lstStyle/>
+          <a:p>
+            <a:pPr algn="ctr"/>
+          </a:p>
+        </p:txBody>
+      </p:sp>
+      <p:sp>
+        <p:nvSpPr>
+          <p:cNvPr id="25" name="TextBox 24"/>
+          <p:cNvSpPr txBox="1"/>
+          <p:nvPr/>
+        </p:nvSpPr>
+        <p:spPr>
+          <a:xfrm>
+            <a:off x="274320" y="1755648"/>
+            <a:ext cx="2157984" cy="146304"/>
+          </a:xfrm>
+          <a:prstGeom prst="rect">
+            <a:avLst/>
+          </a:prstGeom>
+          <a:noFill/>
+        </p:spPr>
+        <p:txBody>
+          <a:bodyPr wrap="square">
+            <a:spAutoFit/>
+          </a:bodyPr>
+          <a:lstStyle/>
+          <a:p>
+            <a:pPr algn="l">
+              <a:spcAft>
+                <a:spcPts val="300"/>
+              </a:spcAft>
+            </a:pPr>
+            <a:r>
+              <a:rPr sz="900" b="1">
+                <a:solidFill>
+                  <a:srgbClr val="C9A227"/>
+                </a:solidFill>
+                <a:latin typeface="Calibri"/>
+              </a:rPr>
+              <a:t>000025-23</a:t>
+            </a:r>
+          </a:p>
+        </p:txBody>
+      </p:sp>
+      <p:sp>
+        <p:nvSpPr>
+          <p:cNvPr id="26" name="TextBox 25"/>
+          <p:cNvSpPr txBox="1"/>
+          <p:nvPr/>
+        </p:nvSpPr>
+        <p:spPr>
+          <a:xfrm>
+            <a:off x="274320" y="1920240"/>
+            <a:ext cx="2157984" cy="201168"/>
+          </a:xfrm>
+          <a:prstGeom prst="rect">
+            <a:avLst/>
+          </a:prstGeom>
+          <a:noFill/>
+        </p:spPr>
+        <p:txBody>
+          <a:bodyPr wrap="square">
+            <a:spAutoFit/>
+          </a:bodyPr>
+          <a:lstStyle/>
+          <a:p>
+            <a:pPr algn="l">
+              <a:spcAft>
+                <a:spcPts val="300"/>
+              </a:spcAft>
+            </a:pPr>
+            <a:r>
+              <a:rPr sz="1100" b="1">
+                <a:solidFill>
+                  <a:srgbClr val="0D3B66"/>
+                </a:solidFill>
+                <a:latin typeface="Calibri"/>
+              </a:rPr>
+              <a:t>Pileta</a:t>
+            </a:r>
+          </a:p>
+        </p:txBody>
+      </p:sp>
+      <p:sp>
+        <p:nvSpPr>
+          <p:cNvPr id="27" name="Rounded Rectangle 26"/>
+          <p:cNvSpPr/>
+          <p:nvPr/>
+        </p:nvSpPr>
+        <p:spPr>
+          <a:xfrm>
+            <a:off x="2578608" y="1719072"/>
+            <a:ext cx="2286000" cy="621792"/>
+          </a:xfrm>
+          <a:prstGeom prst="roundRect">
+            <a:avLst>
+              <a:gd name="adj" fmla="val 8000"/>
+            </a:avLst>
+          </a:prstGeom>
+          <a:solidFill>
+            <a:srgbClr val="F5F7FA"/>
+          </a:solidFill>
+          <a:ln w="6350">
+            <a:solidFill>
+              <a:srgbClr val="8C5A5A"/>
+            </a:solidFill>
+          </a:ln>
+        </p:spPr>
+        <p:style>
+          <a:lnRef idx="1">
+            <a:schemeClr val="accent1"/>
+          </a:lnRef>
+          <a:fillRef idx="3">
+            <a:schemeClr val="accent1"/>
+          </a:fillRef>
+          <a:effectRef idx="2">
+            <a:schemeClr val="accent1"/>
+          </a:effectRef>
+          <a:fontRef idx="minor">
+            <a:schemeClr val="lt1"/>
+          </a:fontRef>
+        </p:style>
+        <p:txBody>
+          <a:bodyPr rtlCol="0" anchor="ctr"/>
+          <a:lstStyle/>
+          <a:p>
+            <a:pPr algn="ctr"/>
+          </a:p>
+        </p:txBody>
+      </p:sp>
+      <p:sp>
+        <p:nvSpPr>
+          <p:cNvPr id="28" name="TextBox 27"/>
+          <p:cNvSpPr txBox="1"/>
+          <p:nvPr/>
+        </p:nvSpPr>
+        <p:spPr>
+          <a:xfrm>
+            <a:off x="2651760" y="1755648"/>
+            <a:ext cx="2157984" cy="146304"/>
+          </a:xfrm>
+          <a:prstGeom prst="rect">
+            <a:avLst/>
+          </a:prstGeom>
+          <a:noFill/>
+        </p:spPr>
+        <p:txBody>
+          <a:bodyPr wrap="square">
+            <a:spAutoFit/>
+          </a:bodyPr>
+          <a:lstStyle/>
+          <a:p>
+            <a:pPr algn="l">
+              <a:spcAft>
+                <a:spcPts val="300"/>
+              </a:spcAft>
+            </a:pPr>
+            <a:r>
+              <a:rPr sz="900" b="1">
+                <a:solidFill>
+                  <a:srgbClr val="C9A227"/>
+                </a:solidFill>
+                <a:latin typeface="Calibri"/>
+              </a:rPr>
+              <a:t>000025-24</a:t>
+            </a:r>
+          </a:p>
+        </p:txBody>
+      </p:sp>
+      <p:sp>
+        <p:nvSpPr>
+          <p:cNvPr id="29" name="TextBox 28"/>
+          <p:cNvSpPr txBox="1"/>
+          <p:nvPr/>
+        </p:nvSpPr>
+        <p:spPr>
+          <a:xfrm>
+            <a:off x="2651760" y="1920240"/>
+            <a:ext cx="2157984" cy="201168"/>
+          </a:xfrm>
+          <a:prstGeom prst="rect">
+            <a:avLst/>
+          </a:prstGeom>
+          <a:noFill/>
+        </p:spPr>
+        <p:txBody>
+          <a:bodyPr wrap="square">
+            <a:spAutoFit/>
+          </a:bodyPr>
+          <a:lstStyle/>
+          <a:p>
+            <a:pPr algn="l">
+              <a:spcAft>
+                <a:spcPts val="300"/>
+              </a:spcAft>
+            </a:pPr>
+            <a:r>
+              <a:rPr sz="1100" b="1">
+                <a:solidFill>
+                  <a:srgbClr val="0D3B66"/>
+                </a:solidFill>
+                <a:latin typeface="Calibri"/>
+              </a:rPr>
+              <a:t>Cascada</a:t>
+            </a:r>
+          </a:p>
+        </p:txBody>
+      </p:sp>
+      <p:sp>
+        <p:nvSpPr>
+          <p:cNvPr id="30" name="Rounded Rectangle 29"/>
+          <p:cNvSpPr/>
+          <p:nvPr/>
+        </p:nvSpPr>
+        <p:spPr>
+          <a:xfrm>
+            <a:off x="4956048" y="1719072"/>
+            <a:ext cx="2286000" cy="621792"/>
+          </a:xfrm>
+          <a:prstGeom prst="roundRect">
+            <a:avLst>
+              <a:gd name="adj" fmla="val 8000"/>
+            </a:avLst>
+          </a:prstGeom>
+          <a:solidFill>
+            <a:srgbClr val="FFF9EB"/>
+          </a:solidFill>
+          <a:ln w="6350">
+            <a:solidFill>
+              <a:srgbClr val="C45C26"/>
+            </a:solidFill>
+          </a:ln>
+        </p:spPr>
+        <p:style>
+          <a:lnRef idx="1">
+            <a:schemeClr val="accent1"/>
+          </a:lnRef>
+          <a:fillRef idx="3">
+            <a:schemeClr val="accent1"/>
+          </a:fillRef>
+          <a:effectRef idx="2">
+            <a:schemeClr val="accent1"/>
+          </a:effectRef>
+          <a:fontRef idx="minor">
+            <a:schemeClr val="lt1"/>
+          </a:fontRef>
+        </p:style>
+        <p:txBody>
+          <a:bodyPr rtlCol="0" anchor="ctr"/>
+          <a:lstStyle/>
+          <a:p>
+            <a:pPr algn="ctr"/>
+          </a:p>
+        </p:txBody>
+      </p:sp>
+      <p:sp>
+        <p:nvSpPr>
+          <p:cNvPr id="31" name="TextBox 30"/>
+          <p:cNvSpPr txBox="1"/>
+          <p:nvPr/>
+        </p:nvSpPr>
+        <p:spPr>
+          <a:xfrm>
+            <a:off x="5029200" y="1755648"/>
+            <a:ext cx="2157984" cy="146304"/>
+          </a:xfrm>
+          <a:prstGeom prst="rect">
+            <a:avLst/>
+          </a:prstGeom>
+          <a:noFill/>
+        </p:spPr>
+        <p:txBody>
+          <a:bodyPr wrap="square">
+            <a:spAutoFit/>
+          </a:bodyPr>
+          <a:lstStyle/>
+          <a:p>
+            <a:pPr algn="l">
+              <a:spcAft>
+                <a:spcPts val="300"/>
+              </a:spcAft>
+            </a:pPr>
+            <a:r>
+              <a:rPr sz="900" b="1">
+                <a:solidFill>
+                  <a:srgbClr val="C9A227"/>
+                </a:solidFill>
+                <a:latin typeface="Calibri"/>
+              </a:rPr>
+              <a:t>000025-27</a:t>
+            </a:r>
+          </a:p>
+        </p:txBody>
+      </p:sp>
+      <p:sp>
+        <p:nvSpPr>
+          <p:cNvPr id="32" name="TextBox 31"/>
+          <p:cNvSpPr txBox="1"/>
+          <p:nvPr/>
+        </p:nvSpPr>
+        <p:spPr>
+          <a:xfrm>
+            <a:off x="5029200" y="1920240"/>
+            <a:ext cx="2157984" cy="201168"/>
+          </a:xfrm>
+          <a:prstGeom prst="rect">
+            <a:avLst/>
+          </a:prstGeom>
+          <a:noFill/>
+        </p:spPr>
+        <p:txBody>
+          <a:bodyPr wrap="square">
+            <a:spAutoFit/>
+          </a:bodyPr>
+          <a:lstStyle/>
+          <a:p>
+            <a:pPr algn="l">
+              <a:spcAft>
+                <a:spcPts val="300"/>
+              </a:spcAft>
+            </a:pPr>
+            <a:r>
+              <a:rPr sz="1100" b="1">
+                <a:solidFill>
+                  <a:srgbClr val="0D3B66"/>
+                </a:solidFill>
+                <a:latin typeface="Calibri"/>
+              </a:rPr>
+              <a:t>Distrito Lujo</a:t>
+            </a:r>
+          </a:p>
+        </p:txBody>
+      </p:sp>
+      <p:sp>
+        <p:nvSpPr>
+          <p:cNvPr id="33" name="TextBox 32"/>
+          <p:cNvSpPr txBox="1"/>
+          <p:nvPr/>
+        </p:nvSpPr>
+        <p:spPr>
+          <a:xfrm>
+            <a:off x="5029200" y="2139696"/>
+            <a:ext cx="2157984" cy="164592"/>
+          </a:xfrm>
+          <a:prstGeom prst="rect">
+            <a:avLst/>
+          </a:prstGeom>
+          <a:noFill/>
+        </p:spPr>
+        <p:txBody>
+          <a:bodyPr wrap="square">
+            <a:spAutoFit/>
+          </a:bodyPr>
+          <a:lstStyle/>
+          <a:p>
+            <a:pPr algn="l">
+              <a:spcAft>
+                <a:spcPts val="300"/>
+              </a:spcAft>
+            </a:pPr>
+            <a:r>
+              <a:rPr sz="800" b="0">
+                <a:solidFill>
+                  <a:srgbClr val="5A5A5A"/>
+                </a:solidFill>
+                <a:latin typeface="Calibri"/>
+              </a:rPr>
+              <a:t>cadena · no suma</a:t>
+            </a:r>
+          </a:p>
+        </p:txBody>
+      </p:sp>
+      <p:sp>
+        <p:nvSpPr>
+          <p:cNvPr id="34" name="Rounded Rectangle 33"/>
+          <p:cNvSpPr/>
+          <p:nvPr/>
+        </p:nvSpPr>
+        <p:spPr>
+          <a:xfrm>
+            <a:off x="7333488" y="1719072"/>
+            <a:ext cx="2286000" cy="621792"/>
           </a:xfrm>
           <a:prstGeom prst="roundRect">
             <a:avLst>
@@ -8514,53 +7420,1239 @@
       </p:sp>
       <p:sp>
         <p:nvSpPr>
-          <p:cNvPr id="8" name="TextBox 7"/>
-          <p:cNvSpPr txBox="1"/>
-          <p:nvPr/>
-        </p:nvSpPr>
-        <p:spPr>
-          <a:xfrm>
-            <a:off x="365760" y="1042415"/>
-            <a:ext cx="11475720" cy="402336"/>
-          </a:xfrm>
-          <a:prstGeom prst="rect">
-            <a:avLst/>
-          </a:prstGeom>
-          <a:noFill/>
-        </p:spPr>
-        <p:txBody>
-          <a:bodyPr wrap="square">
-            <a:spAutoFit/>
-          </a:bodyPr>
-          <a:lstStyle/>
-          <a:p>
-            <a:pPr algn="l">
-              <a:spcAft>
-                <a:spcPts val="300"/>
-              </a:spcAft>
-            </a:pPr>
-            <a:r>
-              <a:rPr sz="1300" b="0">
+          <p:cNvPr id="35" name="TextBox 34"/>
+          <p:cNvSpPr txBox="1"/>
+          <p:nvPr/>
+        </p:nvSpPr>
+        <p:spPr>
+          <a:xfrm>
+            <a:off x="7406640" y="1755648"/>
+            <a:ext cx="2157984" cy="146304"/>
+          </a:xfrm>
+          <a:prstGeom prst="rect">
+            <a:avLst/>
+          </a:prstGeom>
+          <a:noFill/>
+        </p:spPr>
+        <p:txBody>
+          <a:bodyPr wrap="square">
+            <a:spAutoFit/>
+          </a:bodyPr>
+          <a:lstStyle/>
+          <a:p>
+            <a:pPr algn="l">
+              <a:spcAft>
+                <a:spcPts val="300"/>
+              </a:spcAft>
+            </a:pPr>
+            <a:r>
+              <a:rPr sz="900" b="1">
+                <a:solidFill>
+                  <a:srgbClr val="C9A227"/>
+                </a:solidFill>
+                <a:latin typeface="Calibri"/>
+              </a:rPr>
+              <a:t>000025-35</a:t>
+            </a:r>
+          </a:p>
+        </p:txBody>
+      </p:sp>
+      <p:sp>
+        <p:nvSpPr>
+          <p:cNvPr id="36" name="TextBox 35"/>
+          <p:cNvSpPr txBox="1"/>
+          <p:nvPr/>
+        </p:nvSpPr>
+        <p:spPr>
+          <a:xfrm>
+            <a:off x="7406640" y="1920240"/>
+            <a:ext cx="2157984" cy="201168"/>
+          </a:xfrm>
+          <a:prstGeom prst="rect">
+            <a:avLst/>
+          </a:prstGeom>
+          <a:noFill/>
+        </p:spPr>
+        <p:txBody>
+          <a:bodyPr wrap="square">
+            <a:spAutoFit/>
+          </a:bodyPr>
+          <a:lstStyle/>
+          <a:p>
+            <a:pPr algn="l">
+              <a:spcAft>
+                <a:spcPts val="300"/>
+              </a:spcAft>
+            </a:pPr>
+            <a:r>
+              <a:rPr sz="1100" b="1">
                 <a:solidFill>
                   <a:srgbClr val="0D3B66"/>
                 </a:solidFill>
                 <a:latin typeface="Calibri"/>
               </a:rPr>
-              <a:t>Sandía Antigua y Sandía Nueva alimentan Distrito de Lujo. Desde ahí el caudal se divide en Bazar Gourmet y DL Kennedy. Por eso esos tres puntos no se suman a la cabecera: sería doble conteo.</a:t>
-            </a:r>
-          </a:p>
-        </p:txBody>
-      </p:sp>
-      <p:sp>
-        <p:nvSpPr>
-          <p:cNvPr id="9" name="Rounded Rectangle 8"/>
+              <a:t>Bazar Gourmet</a:t>
+            </a:r>
+          </a:p>
+        </p:txBody>
+      </p:sp>
+      <p:sp>
+        <p:nvSpPr>
+          <p:cNvPr id="37" name="TextBox 36"/>
+          <p:cNvSpPr txBox="1"/>
+          <p:nvPr/>
+        </p:nvSpPr>
+        <p:spPr>
+          <a:xfrm>
+            <a:off x="7406640" y="2139696"/>
+            <a:ext cx="2157984" cy="164592"/>
+          </a:xfrm>
+          <a:prstGeom prst="rect">
+            <a:avLst/>
+          </a:prstGeom>
+          <a:noFill/>
+        </p:spPr>
+        <p:txBody>
+          <a:bodyPr wrap="square">
+            <a:spAutoFit/>
+          </a:bodyPr>
+          <a:lstStyle/>
+          <a:p>
+            <a:pPr algn="l">
+              <a:spcAft>
+                <a:spcPts val="300"/>
+              </a:spcAft>
+            </a:pPr>
+            <a:r>
+              <a:rPr sz="800" b="0">
+                <a:solidFill>
+                  <a:srgbClr val="5A5A5A"/>
+                </a:solidFill>
+                <a:latin typeface="Calibri"/>
+              </a:rPr>
+              <a:t>sale de 27</a:t>
+            </a:r>
+          </a:p>
+        </p:txBody>
+      </p:sp>
+      <p:sp>
+        <p:nvSpPr>
+          <p:cNvPr id="38" name="Rounded Rectangle 37"/>
           <p:cNvSpPr/>
           <p:nvPr/>
         </p:nvSpPr>
         <p:spPr>
           <a:xfrm>
-            <a:off x="201168" y="1591056"/>
-            <a:ext cx="1938528" cy="457200"/>
+            <a:off x="9710928" y="1719072"/>
+            <a:ext cx="2286000" cy="621792"/>
+          </a:xfrm>
+          <a:prstGeom prst="roundRect">
+            <a:avLst>
+              <a:gd name="adj" fmla="val 8000"/>
+            </a:avLst>
+          </a:prstGeom>
+          <a:solidFill>
+            <a:srgbClr val="FFF9EB"/>
+          </a:solidFill>
+          <a:ln w="6350">
+            <a:solidFill>
+              <a:srgbClr val="5A8C6E"/>
+            </a:solidFill>
+          </a:ln>
+        </p:spPr>
+        <p:style>
+          <a:lnRef idx="1">
+            <a:schemeClr val="accent1"/>
+          </a:lnRef>
+          <a:fillRef idx="3">
+            <a:schemeClr val="accent1"/>
+          </a:fillRef>
+          <a:effectRef idx="2">
+            <a:schemeClr val="accent1"/>
+          </a:effectRef>
+          <a:fontRef idx="minor">
+            <a:schemeClr val="lt1"/>
+          </a:fontRef>
+        </p:style>
+        <p:txBody>
+          <a:bodyPr rtlCol="0" anchor="ctr"/>
+          <a:lstStyle/>
+          <a:p>
+            <a:pPr algn="ctr"/>
+          </a:p>
+        </p:txBody>
+      </p:sp>
+      <p:sp>
+        <p:nvSpPr>
+          <p:cNvPr id="39" name="TextBox 38"/>
+          <p:cNvSpPr txBox="1"/>
+          <p:nvPr/>
+        </p:nvSpPr>
+        <p:spPr>
+          <a:xfrm>
+            <a:off x="9784080" y="1755648"/>
+            <a:ext cx="2157984" cy="146304"/>
+          </a:xfrm>
+          <a:prstGeom prst="rect">
+            <a:avLst/>
+          </a:prstGeom>
+          <a:noFill/>
+        </p:spPr>
+        <p:txBody>
+          <a:bodyPr wrap="square">
+            <a:spAutoFit/>
+          </a:bodyPr>
+          <a:lstStyle/>
+          <a:p>
+            <a:pPr algn="l">
+              <a:spcAft>
+                <a:spcPts val="300"/>
+              </a:spcAft>
+            </a:pPr>
+            <a:r>
+              <a:rPr sz="900" b="1">
+                <a:solidFill>
+                  <a:srgbClr val="C9A227"/>
+                </a:solidFill>
+                <a:latin typeface="Calibri"/>
+              </a:rPr>
+              <a:t>000025-36</a:t>
+            </a:r>
+          </a:p>
+        </p:txBody>
+      </p:sp>
+      <p:sp>
+        <p:nvSpPr>
+          <p:cNvPr id="40" name="TextBox 39"/>
+          <p:cNvSpPr txBox="1"/>
+          <p:nvPr/>
+        </p:nvSpPr>
+        <p:spPr>
+          <a:xfrm>
+            <a:off x="9784080" y="1920240"/>
+            <a:ext cx="2157984" cy="201168"/>
+          </a:xfrm>
+          <a:prstGeom prst="rect">
+            <a:avLst/>
+          </a:prstGeom>
+          <a:noFill/>
+        </p:spPr>
+        <p:txBody>
+          <a:bodyPr wrap="square">
+            <a:spAutoFit/>
+          </a:bodyPr>
+          <a:lstStyle/>
+          <a:p>
+            <a:pPr algn="l">
+              <a:spcAft>
+                <a:spcPts val="300"/>
+              </a:spcAft>
+            </a:pPr>
+            <a:r>
+              <a:rPr sz="1100" b="1">
+                <a:solidFill>
+                  <a:srgbClr val="0D3B66"/>
+                </a:solidFill>
+                <a:latin typeface="Calibri"/>
+              </a:rPr>
+              <a:t>DL Kennedy</a:t>
+            </a:r>
+          </a:p>
+        </p:txBody>
+      </p:sp>
+      <p:sp>
+        <p:nvSpPr>
+          <p:cNvPr id="41" name="TextBox 40"/>
+          <p:cNvSpPr txBox="1"/>
+          <p:nvPr/>
+        </p:nvSpPr>
+        <p:spPr>
+          <a:xfrm>
+            <a:off x="9784080" y="2139696"/>
+            <a:ext cx="2157984" cy="164592"/>
+          </a:xfrm>
+          <a:prstGeom prst="rect">
+            <a:avLst/>
+          </a:prstGeom>
+          <a:noFill/>
+        </p:spPr>
+        <p:txBody>
+          <a:bodyPr wrap="square">
+            <a:spAutoFit/>
+          </a:bodyPr>
+          <a:lstStyle/>
+          <a:p>
+            <a:pPr algn="l">
+              <a:spcAft>
+                <a:spcPts val="300"/>
+              </a:spcAft>
+            </a:pPr>
+            <a:r>
+              <a:rPr sz="800" b="0">
+                <a:solidFill>
+                  <a:srgbClr val="5A5A5A"/>
+                </a:solidFill>
+                <a:latin typeface="Calibri"/>
+              </a:rPr>
+              <a:t>sale de 27</a:t>
+            </a:r>
+          </a:p>
+        </p:txBody>
+      </p:sp>
+      <p:sp>
+        <p:nvSpPr>
+          <p:cNvPr id="42" name="Rounded Rectangle 41"/>
+          <p:cNvSpPr/>
+          <p:nvPr/>
+        </p:nvSpPr>
+        <p:spPr>
+          <a:xfrm>
+            <a:off x="201168" y="2432304"/>
+            <a:ext cx="7973568" cy="3182111"/>
+          </a:xfrm>
+          <a:prstGeom prst="roundRect">
+            <a:avLst>
+              <a:gd name="adj" fmla="val 8000"/>
+            </a:avLst>
+          </a:prstGeom>
+          <a:solidFill>
+            <a:srgbClr val="F5F7FA"/>
+          </a:solidFill>
+          <a:ln>
+            <a:noFill/>
+          </a:ln>
+        </p:spPr>
+        <p:style>
+          <a:lnRef idx="1">
+            <a:schemeClr val="accent1"/>
+          </a:lnRef>
+          <a:fillRef idx="3">
+            <a:schemeClr val="accent1"/>
+          </a:fillRef>
+          <a:effectRef idx="2">
+            <a:schemeClr val="accent1"/>
+          </a:effectRef>
+          <a:fontRef idx="minor">
+            <a:schemeClr val="lt1"/>
+          </a:fontRef>
+        </p:style>
+        <p:txBody>
+          <a:bodyPr rtlCol="0" anchor="ctr"/>
+          <a:lstStyle/>
+          <a:p>
+            <a:pPr algn="ctr"/>
+          </a:p>
+        </p:txBody>
+      </p:sp>
+      <p:pic>
+        <p:nvPicPr>
+          <p:cNvPr id="43" name="Picture 42" descr="pak_mensual_may_ago.png"/>
+          <p:cNvPicPr>
+            <a:picLocks noChangeAspect="1"/>
+          </p:cNvPicPr>
+          <p:nvPr/>
+        </p:nvPicPr>
+        <p:blipFill>
+          <a:blip r:embed="rId3"/>
+          <a:stretch>
+            <a:fillRect/>
+          </a:stretch>
+        </p:blipFill>
+        <p:spPr>
+          <a:xfrm>
+            <a:off x="605863" y="2487168"/>
+            <a:ext cx="7164176" cy="3072383"/>
+          </a:xfrm>
+          <a:prstGeom prst="rect">
+            <a:avLst/>
+          </a:prstGeom>
+        </p:spPr>
+      </p:pic>
+      <p:sp>
+        <p:nvSpPr>
+          <p:cNvPr id="44" name="Rounded Rectangle 43"/>
+          <p:cNvSpPr/>
+          <p:nvPr/>
+        </p:nvSpPr>
+        <p:spPr>
+          <a:xfrm>
+            <a:off x="8302752" y="2432304"/>
+            <a:ext cx="3675887" cy="3182111"/>
+          </a:xfrm>
+          <a:prstGeom prst="roundRect">
+            <a:avLst>
+              <a:gd name="adj" fmla="val 8000"/>
+            </a:avLst>
+          </a:prstGeom>
+          <a:solidFill>
+            <a:srgbClr val="FFFFFF"/>
+          </a:solidFill>
+          <a:ln w="6350">
+            <a:solidFill>
+              <a:srgbClr val="1F77B4"/>
+            </a:solidFill>
+          </a:ln>
+        </p:spPr>
+        <p:style>
+          <a:lnRef idx="1">
+            <a:schemeClr val="accent1"/>
+          </a:lnRef>
+          <a:fillRef idx="3">
+            <a:schemeClr val="accent1"/>
+          </a:fillRef>
+          <a:effectRef idx="2">
+            <a:schemeClr val="accent1"/>
+          </a:effectRef>
+          <a:fontRef idx="minor">
+            <a:schemeClr val="lt1"/>
+          </a:fontRef>
+        </p:style>
+        <p:txBody>
+          <a:bodyPr rtlCol="0" anchor="ctr"/>
+          <a:lstStyle/>
+          <a:p>
+            <a:pPr algn="ctr"/>
+          </a:p>
+        </p:txBody>
+      </p:sp>
+      <p:sp>
+        <p:nvSpPr>
+          <p:cNvPr id="45" name="TextBox 44"/>
+          <p:cNvSpPr txBox="1"/>
+          <p:nvPr/>
+        </p:nvSpPr>
+        <p:spPr>
+          <a:xfrm>
+            <a:off x="8430768" y="2478024"/>
+            <a:ext cx="3419856" cy="164592"/>
+          </a:xfrm>
+          <a:prstGeom prst="rect">
+            <a:avLst/>
+          </a:prstGeom>
+          <a:noFill/>
+        </p:spPr>
+        <p:txBody>
+          <a:bodyPr wrap="square">
+            <a:spAutoFit/>
+          </a:bodyPr>
+          <a:lstStyle/>
+          <a:p>
+            <a:pPr algn="l">
+              <a:spcAft>
+                <a:spcPts val="300"/>
+              </a:spcAft>
+            </a:pPr>
+            <a:r>
+              <a:rPr sz="1100" b="1">
+                <a:solidFill>
+                  <a:srgbClr val="1F77B4"/>
+                </a:solidFill>
+                <a:latin typeface="Calibri"/>
+              </a:rPr>
+              <a:t>JULIO · cabecera</a:t>
+            </a:r>
+          </a:p>
+        </p:txBody>
+      </p:sp>
+      <p:sp>
+        <p:nvSpPr>
+          <p:cNvPr id="46" name="TextBox 45"/>
+          <p:cNvSpPr txBox="1"/>
+          <p:nvPr/>
+        </p:nvSpPr>
+        <p:spPr>
+          <a:xfrm>
+            <a:off x="8430768" y="2642616"/>
+            <a:ext cx="3419856" cy="201168"/>
+          </a:xfrm>
+          <a:prstGeom prst="rect">
+            <a:avLst/>
+          </a:prstGeom>
+          <a:noFill/>
+        </p:spPr>
+        <p:txBody>
+          <a:bodyPr wrap="square">
+            <a:spAutoFit/>
+          </a:bodyPr>
+          <a:lstStyle/>
+          <a:p>
+            <a:pPr algn="l">
+              <a:spcAft>
+                <a:spcPts val="300"/>
+              </a:spcAft>
+            </a:pPr>
+            <a:r>
+              <a:rPr sz="1200" b="0">
+                <a:solidFill>
+                  <a:srgbClr val="5A5A5A"/>
+                </a:solidFill>
+                <a:latin typeface="Calibri"/>
+              </a:rPr>
+              <a:t>El recinto sumó 31.239 m³</a:t>
+            </a:r>
+          </a:p>
+        </p:txBody>
+      </p:sp>
+      <p:sp>
+        <p:nvSpPr>
+          <p:cNvPr id="47" name="Rounded Rectangle 46"/>
+          <p:cNvSpPr/>
+          <p:nvPr/>
+        </p:nvSpPr>
+        <p:spPr>
+          <a:xfrm>
+            <a:off x="8430768" y="2852928"/>
+            <a:ext cx="3419856" cy="347471"/>
+          </a:xfrm>
+          <a:prstGeom prst="roundRect">
+            <a:avLst>
+              <a:gd name="adj" fmla="val 8000"/>
+            </a:avLst>
+          </a:prstGeom>
+          <a:solidFill>
+            <a:srgbClr val="F5F7FA"/>
+          </a:solidFill>
+          <a:ln w="6350">
+            <a:solidFill>
+              <a:srgbClr val="7BA3C9"/>
+            </a:solidFill>
+          </a:ln>
+        </p:spPr>
+        <p:style>
+          <a:lnRef idx="1">
+            <a:schemeClr val="accent1"/>
+          </a:lnRef>
+          <a:fillRef idx="3">
+            <a:schemeClr val="accent1"/>
+          </a:fillRef>
+          <a:effectRef idx="2">
+            <a:schemeClr val="accent1"/>
+          </a:effectRef>
+          <a:fontRef idx="minor">
+            <a:schemeClr val="lt1"/>
+          </a:fontRef>
+        </p:style>
+        <p:txBody>
+          <a:bodyPr rtlCol="0" anchor="ctr"/>
+          <a:lstStyle/>
+          <a:p>
+            <a:pPr algn="ctr"/>
+          </a:p>
+        </p:txBody>
+      </p:sp>
+      <p:sp>
+        <p:nvSpPr>
+          <p:cNvPr id="48" name="TextBox 47"/>
+          <p:cNvSpPr txBox="1"/>
+          <p:nvPr/>
+        </p:nvSpPr>
+        <p:spPr>
+          <a:xfrm>
+            <a:off x="8540496" y="2880360"/>
+            <a:ext cx="3200400" cy="145938"/>
+          </a:xfrm>
+          <a:prstGeom prst="rect">
+            <a:avLst/>
+          </a:prstGeom>
+          <a:noFill/>
+        </p:spPr>
+        <p:txBody>
+          <a:bodyPr wrap="square">
+            <a:spAutoFit/>
+          </a:bodyPr>
+          <a:lstStyle/>
+          <a:p>
+            <a:pPr algn="l">
+              <a:spcAft>
+                <a:spcPts val="300"/>
+              </a:spcAft>
+            </a:pPr>
+            <a:r>
+              <a:rPr sz="1000" b="1">
+                <a:solidFill>
+                  <a:srgbClr val="7BA3C9"/>
+                </a:solidFill>
+                <a:latin typeface="Calibri"/>
+              </a:rPr>
+              <a:t>Sandía Antigua</a:t>
+            </a:r>
+          </a:p>
+        </p:txBody>
+      </p:sp>
+      <p:sp>
+        <p:nvSpPr>
+          <p:cNvPr id="49" name="TextBox 48"/>
+          <p:cNvSpPr txBox="1"/>
+          <p:nvPr/>
+        </p:nvSpPr>
+        <p:spPr>
+          <a:xfrm>
+            <a:off x="8540496" y="2998866"/>
+            <a:ext cx="3200400" cy="180685"/>
+          </a:xfrm>
+          <a:prstGeom prst="rect">
+            <a:avLst/>
+          </a:prstGeom>
+          <a:noFill/>
+        </p:spPr>
+        <p:txBody>
+          <a:bodyPr wrap="square">
+            <a:spAutoFit/>
+          </a:bodyPr>
+          <a:lstStyle/>
+          <a:p>
+            <a:pPr algn="l">
+              <a:spcAft>
+                <a:spcPts val="300"/>
+              </a:spcAft>
+            </a:pPr>
+            <a:r>
+              <a:rPr sz="1200" b="1">
+                <a:solidFill>
+                  <a:srgbClr val="0D3B66"/>
+                </a:solidFill>
+                <a:latin typeface="Calibri"/>
+              </a:rPr>
+              <a:t>13.661 m³    43,7 %</a:t>
+            </a:r>
+          </a:p>
+        </p:txBody>
+      </p:sp>
+      <p:sp>
+        <p:nvSpPr>
+          <p:cNvPr id="50" name="Rounded Rectangle 49"/>
+          <p:cNvSpPr/>
+          <p:nvPr/>
+        </p:nvSpPr>
+        <p:spPr>
+          <a:xfrm>
+            <a:off x="8430768" y="3236976"/>
+            <a:ext cx="3419856" cy="347471"/>
+          </a:xfrm>
+          <a:prstGeom prst="roundRect">
+            <a:avLst>
+              <a:gd name="adj" fmla="val 8000"/>
+            </a:avLst>
+          </a:prstGeom>
+          <a:solidFill>
+            <a:srgbClr val="F5F7FA"/>
+          </a:solidFill>
+          <a:ln w="6350">
+            <a:solidFill>
+              <a:srgbClr val="46648C"/>
+            </a:solidFill>
+          </a:ln>
+        </p:spPr>
+        <p:style>
+          <a:lnRef idx="1">
+            <a:schemeClr val="accent1"/>
+          </a:lnRef>
+          <a:fillRef idx="3">
+            <a:schemeClr val="accent1"/>
+          </a:fillRef>
+          <a:effectRef idx="2">
+            <a:schemeClr val="accent1"/>
+          </a:effectRef>
+          <a:fontRef idx="minor">
+            <a:schemeClr val="lt1"/>
+          </a:fontRef>
+        </p:style>
+        <p:txBody>
+          <a:bodyPr rtlCol="0" anchor="ctr"/>
+          <a:lstStyle/>
+          <a:p>
+            <a:pPr algn="ctr"/>
+          </a:p>
+        </p:txBody>
+      </p:sp>
+      <p:sp>
+        <p:nvSpPr>
+          <p:cNvPr id="51" name="TextBox 50"/>
+          <p:cNvSpPr txBox="1"/>
+          <p:nvPr/>
+        </p:nvSpPr>
+        <p:spPr>
+          <a:xfrm>
+            <a:off x="8540496" y="3264408"/>
+            <a:ext cx="3200400" cy="145938"/>
+          </a:xfrm>
+          <a:prstGeom prst="rect">
+            <a:avLst/>
+          </a:prstGeom>
+          <a:noFill/>
+        </p:spPr>
+        <p:txBody>
+          <a:bodyPr wrap="square">
+            <a:spAutoFit/>
+          </a:bodyPr>
+          <a:lstStyle/>
+          <a:p>
+            <a:pPr algn="l">
+              <a:spcAft>
+                <a:spcPts val="300"/>
+              </a:spcAft>
+            </a:pPr>
+            <a:r>
+              <a:rPr sz="1000" b="1">
+                <a:solidFill>
+                  <a:srgbClr val="46648C"/>
+                </a:solidFill>
+                <a:latin typeface="Calibri"/>
+              </a:rPr>
+              <a:t>Sandía Nueva</a:t>
+            </a:r>
+          </a:p>
+        </p:txBody>
+      </p:sp>
+      <p:sp>
+        <p:nvSpPr>
+          <p:cNvPr id="52" name="TextBox 51"/>
+          <p:cNvSpPr txBox="1"/>
+          <p:nvPr/>
+        </p:nvSpPr>
+        <p:spPr>
+          <a:xfrm>
+            <a:off x="8540496" y="3382914"/>
+            <a:ext cx="3200400" cy="180685"/>
+          </a:xfrm>
+          <a:prstGeom prst="rect">
+            <a:avLst/>
+          </a:prstGeom>
+          <a:noFill/>
+        </p:spPr>
+        <p:txBody>
+          <a:bodyPr wrap="square">
+            <a:spAutoFit/>
+          </a:bodyPr>
+          <a:lstStyle/>
+          <a:p>
+            <a:pPr algn="l">
+              <a:spcAft>
+                <a:spcPts val="300"/>
+              </a:spcAft>
+            </a:pPr>
+            <a:r>
+              <a:rPr sz="1200" b="1">
+                <a:solidFill>
+                  <a:srgbClr val="0D3B66"/>
+                </a:solidFill>
+                <a:latin typeface="Calibri"/>
+              </a:rPr>
+              <a:t>9.619 m³    30,8 %</a:t>
+            </a:r>
+          </a:p>
+        </p:txBody>
+      </p:sp>
+      <p:sp>
+        <p:nvSpPr>
+          <p:cNvPr id="53" name="Rounded Rectangle 52"/>
+          <p:cNvSpPr/>
+          <p:nvPr/>
+        </p:nvSpPr>
+        <p:spPr>
+          <a:xfrm>
+            <a:off x="8430768" y="3621024"/>
+            <a:ext cx="3419856" cy="347471"/>
+          </a:xfrm>
+          <a:prstGeom prst="roundRect">
+            <a:avLst>
+              <a:gd name="adj" fmla="val 8000"/>
+            </a:avLst>
+          </a:prstGeom>
+          <a:solidFill>
+            <a:srgbClr val="F5F7FA"/>
+          </a:solidFill>
+          <a:ln w="6350">
+            <a:solidFill>
+              <a:srgbClr val="C9A227"/>
+            </a:solidFill>
+          </a:ln>
+        </p:spPr>
+        <p:style>
+          <a:lnRef idx="1">
+            <a:schemeClr val="accent1"/>
+          </a:lnRef>
+          <a:fillRef idx="3">
+            <a:schemeClr val="accent1"/>
+          </a:fillRef>
+          <a:effectRef idx="2">
+            <a:schemeClr val="accent1"/>
+          </a:effectRef>
+          <a:fontRef idx="minor">
+            <a:schemeClr val="lt1"/>
+          </a:fontRef>
+        </p:style>
+        <p:txBody>
+          <a:bodyPr rtlCol="0" anchor="ctr"/>
+          <a:lstStyle/>
+          <a:p>
+            <a:pPr algn="ctr"/>
+          </a:p>
+        </p:txBody>
+      </p:sp>
+      <p:sp>
+        <p:nvSpPr>
+          <p:cNvPr id="54" name="TextBox 53"/>
+          <p:cNvSpPr txBox="1"/>
+          <p:nvPr/>
+        </p:nvSpPr>
+        <p:spPr>
+          <a:xfrm>
+            <a:off x="8540496" y="3648456"/>
+            <a:ext cx="3200400" cy="145938"/>
+          </a:xfrm>
+          <a:prstGeom prst="rect">
+            <a:avLst/>
+          </a:prstGeom>
+          <a:noFill/>
+        </p:spPr>
+        <p:txBody>
+          <a:bodyPr wrap="square">
+            <a:spAutoFit/>
+          </a:bodyPr>
+          <a:lstStyle/>
+          <a:p>
+            <a:pPr algn="l">
+              <a:spcAft>
+                <a:spcPts val="300"/>
+              </a:spcAft>
+            </a:pPr>
+            <a:r>
+              <a:rPr sz="1000" b="1">
+                <a:solidFill>
+                  <a:srgbClr val="C9A227"/>
+                </a:solidFill>
+                <a:latin typeface="Calibri"/>
+              </a:rPr>
+              <a:t>Locales Gast.</a:t>
+            </a:r>
+          </a:p>
+        </p:txBody>
+      </p:sp>
+      <p:sp>
+        <p:nvSpPr>
+          <p:cNvPr id="55" name="TextBox 54"/>
+          <p:cNvSpPr txBox="1"/>
+          <p:nvPr/>
+        </p:nvSpPr>
+        <p:spPr>
+          <a:xfrm>
+            <a:off x="8540496" y="3766962"/>
+            <a:ext cx="3200400" cy="180685"/>
+          </a:xfrm>
+          <a:prstGeom prst="rect">
+            <a:avLst/>
+          </a:prstGeom>
+          <a:noFill/>
+        </p:spPr>
+        <p:txBody>
+          <a:bodyPr wrap="square">
+            <a:spAutoFit/>
+          </a:bodyPr>
+          <a:lstStyle/>
+          <a:p>
+            <a:pPr algn="l">
+              <a:spcAft>
+                <a:spcPts val="300"/>
+              </a:spcAft>
+            </a:pPr>
+            <a:r>
+              <a:rPr sz="1200" b="1">
+                <a:solidFill>
+                  <a:srgbClr val="0D3B66"/>
+                </a:solidFill>
+                <a:latin typeface="Calibri"/>
+              </a:rPr>
+              <a:t>4.583 m³    14,7 %</a:t>
+            </a:r>
+          </a:p>
+        </p:txBody>
+      </p:sp>
+      <p:sp>
+        <p:nvSpPr>
+          <p:cNvPr id="56" name="Rounded Rectangle 55"/>
+          <p:cNvSpPr/>
+          <p:nvPr/>
+        </p:nvSpPr>
+        <p:spPr>
+          <a:xfrm>
+            <a:off x="8430768" y="4005072"/>
+            <a:ext cx="3419856" cy="347471"/>
+          </a:xfrm>
+          <a:prstGeom prst="roundRect">
+            <a:avLst>
+              <a:gd name="adj" fmla="val 8000"/>
+            </a:avLst>
+          </a:prstGeom>
+          <a:solidFill>
+            <a:srgbClr val="F5F7FA"/>
+          </a:solidFill>
+          <a:ln w="6350">
+            <a:solidFill>
+              <a:srgbClr val="C45C26"/>
+            </a:solidFill>
+          </a:ln>
+        </p:spPr>
+        <p:style>
+          <a:lnRef idx="1">
+            <a:schemeClr val="accent1"/>
+          </a:lnRef>
+          <a:fillRef idx="3">
+            <a:schemeClr val="accent1"/>
+          </a:fillRef>
+          <a:effectRef idx="2">
+            <a:schemeClr val="accent1"/>
+          </a:effectRef>
+          <a:fontRef idx="minor">
+            <a:schemeClr val="lt1"/>
+          </a:fontRef>
+        </p:style>
+        <p:txBody>
+          <a:bodyPr rtlCol="0" anchor="ctr"/>
+          <a:lstStyle/>
+          <a:p>
+            <a:pPr algn="ctr"/>
+          </a:p>
+        </p:txBody>
+      </p:sp>
+      <p:sp>
+        <p:nvSpPr>
+          <p:cNvPr id="57" name="TextBox 56"/>
+          <p:cNvSpPr txBox="1"/>
+          <p:nvPr/>
+        </p:nvSpPr>
+        <p:spPr>
+          <a:xfrm>
+            <a:off x="8540496" y="4032504"/>
+            <a:ext cx="3200400" cy="145938"/>
+          </a:xfrm>
+          <a:prstGeom prst="rect">
+            <a:avLst/>
+          </a:prstGeom>
+          <a:noFill/>
+        </p:spPr>
+        <p:txBody>
+          <a:bodyPr wrap="square">
+            <a:spAutoFit/>
+          </a:bodyPr>
+          <a:lstStyle/>
+          <a:p>
+            <a:pPr algn="l">
+              <a:spcAft>
+                <a:spcPts val="300"/>
+              </a:spcAft>
+            </a:pPr>
+            <a:r>
+              <a:rPr sz="1000" b="1">
+                <a:solidFill>
+                  <a:srgbClr val="C45C26"/>
+                </a:solidFill>
+                <a:latin typeface="Calibri"/>
+              </a:rPr>
+              <a:t>Matriz Andén</a:t>
+            </a:r>
+          </a:p>
+        </p:txBody>
+      </p:sp>
+      <p:sp>
+        <p:nvSpPr>
+          <p:cNvPr id="58" name="TextBox 57"/>
+          <p:cNvSpPr txBox="1"/>
+          <p:nvPr/>
+        </p:nvSpPr>
+        <p:spPr>
+          <a:xfrm>
+            <a:off x="8540496" y="4151010"/>
+            <a:ext cx="3200400" cy="180685"/>
+          </a:xfrm>
+          <a:prstGeom prst="rect">
+            <a:avLst/>
+          </a:prstGeom>
+          <a:noFill/>
+        </p:spPr>
+        <p:txBody>
+          <a:bodyPr wrap="square">
+            <a:spAutoFit/>
+          </a:bodyPr>
+          <a:lstStyle/>
+          <a:p>
+            <a:pPr algn="l">
+              <a:spcAft>
+                <a:spcPts val="300"/>
+              </a:spcAft>
+            </a:pPr>
+            <a:r>
+              <a:rPr sz="1200" b="1">
+                <a:solidFill>
+                  <a:srgbClr val="0D3B66"/>
+                </a:solidFill>
+                <a:latin typeface="Calibri"/>
+              </a:rPr>
+              <a:t>3.086 m³    9,9 %</a:t>
+            </a:r>
+          </a:p>
+        </p:txBody>
+      </p:sp>
+      <p:sp>
+        <p:nvSpPr>
+          <p:cNvPr id="59" name="Rounded Rectangle 58"/>
+          <p:cNvSpPr/>
+          <p:nvPr/>
+        </p:nvSpPr>
+        <p:spPr>
+          <a:xfrm>
+            <a:off x="8430768" y="4389120"/>
+            <a:ext cx="3419856" cy="347471"/>
+          </a:xfrm>
+          <a:prstGeom prst="roundRect">
+            <a:avLst>
+              <a:gd name="adj" fmla="val 8000"/>
+            </a:avLst>
+          </a:prstGeom>
+          <a:solidFill>
+            <a:srgbClr val="F5F7FA"/>
+          </a:solidFill>
+          <a:ln w="6350">
+            <a:solidFill>
+              <a:srgbClr val="5A8C6E"/>
+            </a:solidFill>
+          </a:ln>
+        </p:spPr>
+        <p:style>
+          <a:lnRef idx="1">
+            <a:schemeClr val="accent1"/>
+          </a:lnRef>
+          <a:fillRef idx="3">
+            <a:schemeClr val="accent1"/>
+          </a:fillRef>
+          <a:effectRef idx="2">
+            <a:schemeClr val="accent1"/>
+          </a:effectRef>
+          <a:fontRef idx="minor">
+            <a:schemeClr val="lt1"/>
+          </a:fontRef>
+        </p:style>
+        <p:txBody>
+          <a:bodyPr rtlCol="0" anchor="ctr"/>
+          <a:lstStyle/>
+          <a:p>
+            <a:pPr algn="ctr"/>
+          </a:p>
+        </p:txBody>
+      </p:sp>
+      <p:sp>
+        <p:nvSpPr>
+          <p:cNvPr id="60" name="TextBox 59"/>
+          <p:cNvSpPr txBox="1"/>
+          <p:nvPr/>
+        </p:nvSpPr>
+        <p:spPr>
+          <a:xfrm>
+            <a:off x="8540496" y="4416552"/>
+            <a:ext cx="3200400" cy="145938"/>
+          </a:xfrm>
+          <a:prstGeom prst="rect">
+            <a:avLst/>
+          </a:prstGeom>
+          <a:noFill/>
+        </p:spPr>
+        <p:txBody>
+          <a:bodyPr wrap="square">
+            <a:spAutoFit/>
+          </a:bodyPr>
+          <a:lstStyle/>
+          <a:p>
+            <a:pPr algn="l">
+              <a:spcAft>
+                <a:spcPts val="300"/>
+              </a:spcAft>
+            </a:pPr>
+            <a:r>
+              <a:rPr sz="1000" b="1">
+                <a:solidFill>
+                  <a:srgbClr val="5A8C6E"/>
+                </a:solidFill>
+                <a:latin typeface="Calibri"/>
+              </a:rPr>
+              <a:t>Pileta</a:t>
+            </a:r>
+          </a:p>
+        </p:txBody>
+      </p:sp>
+      <p:sp>
+        <p:nvSpPr>
+          <p:cNvPr id="61" name="TextBox 60"/>
+          <p:cNvSpPr txBox="1"/>
+          <p:nvPr/>
+        </p:nvSpPr>
+        <p:spPr>
+          <a:xfrm>
+            <a:off x="8540496" y="4535058"/>
+            <a:ext cx="3200400" cy="180685"/>
+          </a:xfrm>
+          <a:prstGeom prst="rect">
+            <a:avLst/>
+          </a:prstGeom>
+          <a:noFill/>
+        </p:spPr>
+        <p:txBody>
+          <a:bodyPr wrap="square">
+            <a:spAutoFit/>
+          </a:bodyPr>
+          <a:lstStyle/>
+          <a:p>
+            <a:pPr algn="l">
+              <a:spcAft>
+                <a:spcPts val="300"/>
+              </a:spcAft>
+            </a:pPr>
+            <a:r>
+              <a:rPr sz="1200" b="1">
+                <a:solidFill>
+                  <a:srgbClr val="0D3B66"/>
+                </a:solidFill>
+                <a:latin typeface="Calibri"/>
+              </a:rPr>
+              <a:t>172 m³    0,5 %</a:t>
+            </a:r>
+          </a:p>
+        </p:txBody>
+      </p:sp>
+      <p:sp>
+        <p:nvSpPr>
+          <p:cNvPr id="62" name="Rounded Rectangle 61"/>
+          <p:cNvSpPr/>
+          <p:nvPr/>
+        </p:nvSpPr>
+        <p:spPr>
+          <a:xfrm>
+            <a:off x="8430768" y="4773168"/>
+            <a:ext cx="3419856" cy="347471"/>
+          </a:xfrm>
+          <a:prstGeom prst="roundRect">
+            <a:avLst>
+              <a:gd name="adj" fmla="val 8000"/>
+            </a:avLst>
+          </a:prstGeom>
+          <a:solidFill>
+            <a:srgbClr val="F5F7FA"/>
+          </a:solidFill>
+          <a:ln w="6350">
+            <a:solidFill>
+              <a:srgbClr val="A0783C"/>
+            </a:solidFill>
+          </a:ln>
+        </p:spPr>
+        <p:style>
+          <a:lnRef idx="1">
+            <a:schemeClr val="accent1"/>
+          </a:lnRef>
+          <a:fillRef idx="3">
+            <a:schemeClr val="accent1"/>
+          </a:fillRef>
+          <a:effectRef idx="2">
+            <a:schemeClr val="accent1"/>
+          </a:effectRef>
+          <a:fontRef idx="minor">
+            <a:schemeClr val="lt1"/>
+          </a:fontRef>
+        </p:style>
+        <p:txBody>
+          <a:bodyPr rtlCol="0" anchor="ctr"/>
+          <a:lstStyle/>
+          <a:p>
+            <a:pPr algn="ctr"/>
+          </a:p>
+        </p:txBody>
+      </p:sp>
+      <p:sp>
+        <p:nvSpPr>
+          <p:cNvPr id="63" name="TextBox 62"/>
+          <p:cNvSpPr txBox="1"/>
+          <p:nvPr/>
+        </p:nvSpPr>
+        <p:spPr>
+          <a:xfrm>
+            <a:off x="8540496" y="4800600"/>
+            <a:ext cx="3200400" cy="145938"/>
+          </a:xfrm>
+          <a:prstGeom prst="rect">
+            <a:avLst/>
+          </a:prstGeom>
+          <a:noFill/>
+        </p:spPr>
+        <p:txBody>
+          <a:bodyPr wrap="square">
+            <a:spAutoFit/>
+          </a:bodyPr>
+          <a:lstStyle/>
+          <a:p>
+            <a:pPr algn="l">
+              <a:spcAft>
+                <a:spcPts val="300"/>
+              </a:spcAft>
+            </a:pPr>
+            <a:r>
+              <a:rPr sz="1000" b="1">
+                <a:solidFill>
+                  <a:srgbClr val="A0783C"/>
+                </a:solidFill>
+                <a:latin typeface="Calibri"/>
+              </a:rPr>
+              <a:t>Restaurante</a:t>
+            </a:r>
+          </a:p>
+        </p:txBody>
+      </p:sp>
+      <p:sp>
+        <p:nvSpPr>
+          <p:cNvPr id="64" name="TextBox 63"/>
+          <p:cNvSpPr txBox="1"/>
+          <p:nvPr/>
+        </p:nvSpPr>
+        <p:spPr>
+          <a:xfrm>
+            <a:off x="8540496" y="4919106"/>
+            <a:ext cx="3200400" cy="180685"/>
+          </a:xfrm>
+          <a:prstGeom prst="rect">
+            <a:avLst/>
+          </a:prstGeom>
+          <a:noFill/>
+        </p:spPr>
+        <p:txBody>
+          <a:bodyPr wrap="square">
+            <a:spAutoFit/>
+          </a:bodyPr>
+          <a:lstStyle/>
+          <a:p>
+            <a:pPr algn="l">
+              <a:spcAft>
+                <a:spcPts val="300"/>
+              </a:spcAft>
+            </a:pPr>
+            <a:r>
+              <a:rPr sz="1200" b="1">
+                <a:solidFill>
+                  <a:srgbClr val="0D3B66"/>
+                </a:solidFill>
+                <a:latin typeface="Calibri"/>
+              </a:rPr>
+              <a:t>98 m³    0,3 %</a:t>
+            </a:r>
+          </a:p>
+        </p:txBody>
+      </p:sp>
+      <p:sp>
+        <p:nvSpPr>
+          <p:cNvPr id="65" name="Rounded Rectangle 64"/>
+          <p:cNvSpPr/>
+          <p:nvPr/>
+        </p:nvSpPr>
+        <p:spPr>
+          <a:xfrm>
+            <a:off x="8430768" y="5157216"/>
+            <a:ext cx="3419856" cy="347471"/>
           </a:xfrm>
           <a:prstGeom prst="roundRect">
             <a:avLst>
@@ -8600,27 +8692,66 @@
       </p:sp>
       <p:sp>
         <p:nvSpPr>
-          <p:cNvPr id="10" name="TextBox 9"/>
-          <p:cNvSpPr txBox="1"/>
-          <p:nvPr/>
-        </p:nvSpPr>
-        <p:spPr>
-          <a:xfrm>
-            <a:off x="274320" y="1700784"/>
-            <a:ext cx="1792224" cy="256032"/>
-          </a:xfrm>
-          <a:prstGeom prst="rect">
-            <a:avLst/>
-          </a:prstGeom>
-          <a:noFill/>
-        </p:spPr>
-        <p:txBody>
-          <a:bodyPr wrap="square">
-            <a:spAutoFit/>
-          </a:bodyPr>
-          <a:lstStyle/>
-          <a:p>
-            <a:pPr algn="ctr">
+          <p:cNvPr id="66" name="TextBox 65"/>
+          <p:cNvSpPr txBox="1"/>
+          <p:nvPr/>
+        </p:nvSpPr>
+        <p:spPr>
+          <a:xfrm>
+            <a:off x="8540496" y="5184648"/>
+            <a:ext cx="3200400" cy="145938"/>
+          </a:xfrm>
+          <a:prstGeom prst="rect">
+            <a:avLst/>
+          </a:prstGeom>
+          <a:noFill/>
+        </p:spPr>
+        <p:txBody>
+          <a:bodyPr wrap="square">
+            <a:spAutoFit/>
+          </a:bodyPr>
+          <a:lstStyle/>
+          <a:p>
+            <a:pPr algn="l">
+              <a:spcAft>
+                <a:spcPts val="300"/>
+              </a:spcAft>
+            </a:pPr>
+            <a:r>
+              <a:rPr sz="1000" b="1">
+                <a:solidFill>
+                  <a:srgbClr val="8C5A5A"/>
+                </a:solidFill>
+                <a:latin typeface="Calibri"/>
+              </a:rPr>
+              <a:t>Cascada</a:t>
+            </a:r>
+          </a:p>
+        </p:txBody>
+      </p:sp>
+      <p:sp>
+        <p:nvSpPr>
+          <p:cNvPr id="67" name="TextBox 66"/>
+          <p:cNvSpPr txBox="1"/>
+          <p:nvPr/>
+        </p:nvSpPr>
+        <p:spPr>
+          <a:xfrm>
+            <a:off x="8540496" y="5303154"/>
+            <a:ext cx="3200400" cy="180685"/>
+          </a:xfrm>
+          <a:prstGeom prst="rect">
+            <a:avLst/>
+          </a:prstGeom>
+          <a:noFill/>
+        </p:spPr>
+        <p:txBody>
+          <a:bodyPr wrap="square">
+            <a:spAutoFit/>
+          </a:bodyPr>
+          <a:lstStyle/>
+          <a:p>
+            <a:pPr algn="l">
               <a:spcAft>
                 <a:spcPts val="300"/>
               </a:spcAft>
@@ -8632,20 +8763,453 @@
                 </a:solidFill>
                 <a:latin typeface="Calibri"/>
               </a:rPr>
-              <a:t>Sandía Antigua</a:t>
-            </a:r>
-          </a:p>
-        </p:txBody>
-      </p:sp>
-      <p:sp>
-        <p:nvSpPr>
-          <p:cNvPr id="11" name="Rounded Rectangle 10"/>
+              <a:t>20 m³    &lt;0,1 %</a:t>
+            </a:r>
+          </a:p>
+        </p:txBody>
+      </p:sp>
+      <p:sp>
+        <p:nvSpPr>
+          <p:cNvPr id="68" name="Rounded Rectangle 67"/>
           <p:cNvSpPr/>
           <p:nvPr/>
         </p:nvSpPr>
         <p:spPr>
           <a:xfrm>
-            <a:off x="2468880" y="1591056"/>
+            <a:off x="201168" y="5705856"/>
+            <a:ext cx="11795760" cy="438912"/>
+          </a:xfrm>
+          <a:prstGeom prst="roundRect">
+            <a:avLst>
+              <a:gd name="adj" fmla="val 8000"/>
+            </a:avLst>
+          </a:prstGeom>
+          <a:solidFill>
+            <a:srgbClr val="FFF9EB"/>
+          </a:solidFill>
+          <a:ln w="6350">
+            <a:solidFill>
+              <a:srgbClr val="C9A227"/>
+            </a:solidFill>
+          </a:ln>
+        </p:spPr>
+        <p:style>
+          <a:lnRef idx="1">
+            <a:schemeClr val="accent1"/>
+          </a:lnRef>
+          <a:fillRef idx="3">
+            <a:schemeClr val="accent1"/>
+          </a:fillRef>
+          <a:effectRef idx="2">
+            <a:schemeClr val="accent1"/>
+          </a:effectRef>
+          <a:fontRef idx="minor">
+            <a:schemeClr val="lt1"/>
+          </a:fontRef>
+        </p:style>
+        <p:txBody>
+          <a:bodyPr rtlCol="0" anchor="ctr"/>
+          <a:lstStyle/>
+          <a:p>
+            <a:pPr algn="ctr"/>
+          </a:p>
+        </p:txBody>
+      </p:sp>
+      <p:sp>
+        <p:nvSpPr>
+          <p:cNvPr id="69" name="TextBox 68"/>
+          <p:cNvSpPr txBox="1"/>
+          <p:nvPr/>
+        </p:nvSpPr>
+        <p:spPr>
+          <a:xfrm>
+            <a:off x="329184" y="5779008"/>
+            <a:ext cx="11539728" cy="310896"/>
+          </a:xfrm>
+          <a:prstGeom prst="rect">
+            <a:avLst/>
+          </a:prstGeom>
+          <a:noFill/>
+        </p:spPr>
+        <p:txBody>
+          <a:bodyPr wrap="square">
+            <a:spAutoFit/>
+          </a:bodyPr>
+          <a:lstStyle/>
+          <a:p>
+            <a:pPr algn="l">
+              <a:spcAft>
+                <a:spcPts val="300"/>
+              </a:spcAft>
+            </a:pPr>
+            <a:r>
+              <a:rPr sz="1100" b="0">
+                <a:solidFill>
+                  <a:srgbClr val="0D3B66"/>
+                </a:solidFill>
+                <a:latin typeface="Calibri"/>
+              </a:rPr>
+              <a:t>Recepción 12/12/2025  ·  Capacitación 17/12/2025  ·  Francisco Jeldres  ·  Paula Azolas  ·  Mantención: C. Naranjo, M. Jara, R. Moreno, R. Díaz, J. Gutiérrez, H. Fierro</a:t>
+            </a:r>
+          </a:p>
+        </p:txBody>
+      </p:sp>
+      <p:sp>
+        <p:nvSpPr>
+          <p:cNvPr id="70" name="TextBox 69"/>
+          <p:cNvSpPr txBox="1"/>
+          <p:nvPr/>
+        </p:nvSpPr>
+        <p:spPr>
+          <a:xfrm>
+            <a:off x="256032" y="6181344"/>
+            <a:ext cx="11704320" cy="566928"/>
+          </a:xfrm>
+          <a:prstGeom prst="rect">
+            <a:avLst/>
+          </a:prstGeom>
+          <a:noFill/>
+        </p:spPr>
+        <p:txBody>
+          <a:bodyPr wrap="square">
+            <a:spAutoFit/>
+          </a:bodyPr>
+          <a:lstStyle/>
+          <a:p>
+            <a:pPr algn="l">
+              <a:spcAft>
+                <a:spcPts val="300"/>
+              </a:spcAft>
+            </a:pPr>
+            <a:r>
+              <a:rPr sz="1200" b="0">
+                <a:solidFill>
+                  <a:srgbClr val="0D3B66"/>
+                </a:solidFill>
+                <a:latin typeface="Calibri"/>
+              </a:rPr>
+              <a:t>Mayo 26.357   ·   Junio 20.927   ·   Julio 31.239   ·   Agosto 1–17: 21.494   ·   proy. ago 39.195 m³.</a:t>
+            </a:r>
+          </a:p>
+          <a:p>
+            <a:pPr algn="l">
+              <a:spcAft>
+                <a:spcPts val="300"/>
+              </a:spcAft>
+            </a:pPr>
+            <a:r>
+              <a:rPr sz="1100" b="0">
+                <a:solidFill>
+                  <a:srgbClr val="5A5A5A"/>
+                </a:solidFill>
+                <a:latin typeface="Calibri"/>
+              </a:rPr>
+              <a:t>Julio = cabecera (7 puntos). 27, 35 y 36 no se suman: cadena Sandía → DL (lámina 2).</a:t>
+            </a:r>
+          </a:p>
+        </p:txBody>
+      </p:sp>
+    </p:spTree>
+  </p:cSld>
+  <p:clrMapOvr>
+    <a:masterClrMapping/>
+  </p:clrMapOvr>
+</p:sld>
+</file>
+
+<file path=ppt/slides/slide14.xml><?xml version="1.0" encoding="utf-8"?>
+<p:sld xmlns:a="http://schemas.openxmlformats.org/drawingml/2006/main" xmlns:p="http://schemas.openxmlformats.org/presentationml/2006/main" xmlns:r="http://schemas.openxmlformats.org/officeDocument/2006/relationships">
+  <p:cSld>
+    <p:spTree>
+      <p:nvGrpSpPr>
+        <p:cNvPr id="1" name=""/>
+        <p:cNvGrpSpPr/>
+        <p:nvPr/>
+      </p:nvGrpSpPr>
+      <p:grpSpPr/>
+      <p:sp>
+        <p:nvSpPr>
+          <p:cNvPr id="2" name="Rectangle 1"/>
+          <p:cNvSpPr/>
+          <p:nvPr/>
+        </p:nvSpPr>
+        <p:spPr>
+          <a:xfrm>
+            <a:off x="0" y="0"/>
+            <a:ext cx="12191695" cy="841248"/>
+          </a:xfrm>
+          <a:prstGeom prst="rect">
+            <a:avLst/>
+          </a:prstGeom>
+          <a:solidFill>
+            <a:srgbClr val="0D3B66"/>
+          </a:solidFill>
+          <a:ln>
+            <a:noFill/>
+          </a:ln>
+        </p:spPr>
+        <p:style>
+          <a:lnRef idx="1">
+            <a:schemeClr val="accent1"/>
+          </a:lnRef>
+          <a:fillRef idx="3">
+            <a:schemeClr val="accent1"/>
+          </a:fillRef>
+          <a:effectRef idx="2">
+            <a:schemeClr val="accent1"/>
+          </a:effectRef>
+          <a:fontRef idx="minor">
+            <a:schemeClr val="lt1"/>
+          </a:fontRef>
+        </p:style>
+        <p:txBody>
+          <a:bodyPr rtlCol="0" anchor="ctr"/>
+          <a:lstStyle/>
+          <a:p>
+            <a:pPr algn="ctr"/>
+          </a:p>
+        </p:txBody>
+      </p:sp>
+      <p:sp>
+        <p:nvSpPr>
+          <p:cNvPr id="3" name="Rectangle 2"/>
+          <p:cNvSpPr/>
+          <p:nvPr/>
+        </p:nvSpPr>
+        <p:spPr>
+          <a:xfrm>
+            <a:off x="0" y="841248"/>
+            <a:ext cx="12191695" cy="54864"/>
+          </a:xfrm>
+          <a:prstGeom prst="rect">
+            <a:avLst/>
+          </a:prstGeom>
+          <a:solidFill>
+            <a:srgbClr val="C9A227"/>
+          </a:solidFill>
+          <a:ln>
+            <a:noFill/>
+          </a:ln>
+        </p:spPr>
+        <p:style>
+          <a:lnRef idx="1">
+            <a:schemeClr val="accent1"/>
+          </a:lnRef>
+          <a:fillRef idx="3">
+            <a:schemeClr val="accent1"/>
+          </a:fillRef>
+          <a:effectRef idx="2">
+            <a:schemeClr val="accent1"/>
+          </a:effectRef>
+          <a:fontRef idx="minor">
+            <a:schemeClr val="lt1"/>
+          </a:fontRef>
+        </p:style>
+        <p:txBody>
+          <a:bodyPr rtlCol="0" anchor="ctr"/>
+          <a:lstStyle/>
+          <a:p>
+            <a:pPr algn="ctr"/>
+          </a:p>
+        </p:txBody>
+      </p:sp>
+      <p:pic>
+        <p:nvPicPr>
+          <p:cNvPr id="4" name="Picture 3" descr="logo wes.bmp"/>
+          <p:cNvPicPr>
+            <a:picLocks noChangeAspect="1"/>
+          </p:cNvPicPr>
+          <p:nvPr/>
+        </p:nvPicPr>
+        <p:blipFill>
+          <a:blip r:embed="rId2"/>
+          <a:stretch>
+            <a:fillRect/>
+          </a:stretch>
+        </p:blipFill>
+        <p:spPr>
+          <a:xfrm>
+            <a:off x="10835640" y="146304"/>
+            <a:ext cx="1143000" cy="253401"/>
+          </a:xfrm>
+          <a:prstGeom prst="rect">
+            <a:avLst/>
+          </a:prstGeom>
+        </p:spPr>
+      </p:pic>
+      <p:sp>
+        <p:nvSpPr>
+          <p:cNvPr id="5" name="TextBox 4"/>
+          <p:cNvSpPr txBox="1"/>
+          <p:nvPr/>
+        </p:nvSpPr>
+        <p:spPr>
+          <a:xfrm>
+            <a:off x="256032" y="109728"/>
+            <a:ext cx="10607040" cy="384048"/>
+          </a:xfrm>
+          <a:prstGeom prst="rect">
+            <a:avLst/>
+          </a:prstGeom>
+          <a:noFill/>
+        </p:spPr>
+        <p:txBody>
+          <a:bodyPr wrap="square">
+            <a:spAutoFit/>
+          </a:bodyPr>
+          <a:lstStyle/>
+          <a:p>
+            <a:pPr algn="l">
+              <a:spcAft>
+                <a:spcPts val="300"/>
+              </a:spcAft>
+            </a:pPr>
+            <a:r>
+              <a:rPr sz="2000" b="1">
+                <a:solidFill>
+                  <a:srgbClr val="FFFFFF"/>
+                </a:solidFill>
+                <a:latin typeface="Calibri"/>
+              </a:rPr>
+              <a:t>PAK  ·  2. Cadena Sandía / Distrito de Lujo</a:t>
+            </a:r>
+          </a:p>
+        </p:txBody>
+      </p:sp>
+      <p:sp>
+        <p:nvSpPr>
+          <p:cNvPr id="6" name="TextBox 5"/>
+          <p:cNvSpPr txBox="1"/>
+          <p:nvPr/>
+        </p:nvSpPr>
+        <p:spPr>
+          <a:xfrm>
+            <a:off x="256032" y="457200"/>
+            <a:ext cx="10607040" cy="329184"/>
+          </a:xfrm>
+          <a:prstGeom prst="rect">
+            <a:avLst/>
+          </a:prstGeom>
+          <a:noFill/>
+        </p:spPr>
+        <p:txBody>
+          <a:bodyPr wrap="square">
+            <a:spAutoFit/>
+          </a:bodyPr>
+          <a:lstStyle/>
+          <a:p>
+            <a:pPr algn="l">
+              <a:spcAft>
+                <a:spcPts val="300"/>
+              </a:spcAft>
+            </a:pPr>
+            <a:r>
+              <a:rPr sz="1100" b="0">
+                <a:solidFill>
+                  <a:srgbClr val="DCE6F0"/>
+                </a:solidFill>
+                <a:latin typeface="Calibri"/>
+              </a:rPr>
+              <a:t>Sandía Antigua y Sandía Nueva alimentan Distrito de Lujo  ·  se divide en Bazar Gourmet y DL Kennedy</a:t>
+            </a:r>
+          </a:p>
+        </p:txBody>
+      </p:sp>
+      <p:sp>
+        <p:nvSpPr>
+          <p:cNvPr id="7" name="Rounded Rectangle 6"/>
+          <p:cNvSpPr/>
+          <p:nvPr/>
+        </p:nvSpPr>
+        <p:spPr>
+          <a:xfrm>
+            <a:off x="201168" y="987552"/>
+            <a:ext cx="11777472" cy="512064"/>
+          </a:xfrm>
+          <a:prstGeom prst="roundRect">
+            <a:avLst>
+              <a:gd name="adj" fmla="val 8000"/>
+            </a:avLst>
+          </a:prstGeom>
+          <a:solidFill>
+            <a:srgbClr val="FFF9EB"/>
+          </a:solidFill>
+          <a:ln w="6350">
+            <a:solidFill>
+              <a:srgbClr val="C9A227"/>
+            </a:solidFill>
+          </a:ln>
+        </p:spPr>
+        <p:style>
+          <a:lnRef idx="1">
+            <a:schemeClr val="accent1"/>
+          </a:lnRef>
+          <a:fillRef idx="3">
+            <a:schemeClr val="accent1"/>
+          </a:fillRef>
+          <a:effectRef idx="2">
+            <a:schemeClr val="accent1"/>
+          </a:effectRef>
+          <a:fontRef idx="minor">
+            <a:schemeClr val="lt1"/>
+          </a:fontRef>
+        </p:style>
+        <p:txBody>
+          <a:bodyPr rtlCol="0" anchor="ctr"/>
+          <a:lstStyle/>
+          <a:p>
+            <a:pPr algn="ctr"/>
+          </a:p>
+        </p:txBody>
+      </p:sp>
+      <p:sp>
+        <p:nvSpPr>
+          <p:cNvPr id="8" name="TextBox 7"/>
+          <p:cNvSpPr txBox="1"/>
+          <p:nvPr/>
+        </p:nvSpPr>
+        <p:spPr>
+          <a:xfrm>
+            <a:off x="365760" y="1042415"/>
+            <a:ext cx="11475720" cy="402336"/>
+          </a:xfrm>
+          <a:prstGeom prst="rect">
+            <a:avLst/>
+          </a:prstGeom>
+          <a:noFill/>
+        </p:spPr>
+        <p:txBody>
+          <a:bodyPr wrap="square">
+            <a:spAutoFit/>
+          </a:bodyPr>
+          <a:lstStyle/>
+          <a:p>
+            <a:pPr algn="l">
+              <a:spcAft>
+                <a:spcPts val="300"/>
+              </a:spcAft>
+            </a:pPr>
+            <a:r>
+              <a:rPr sz="1300" b="0">
+                <a:solidFill>
+                  <a:srgbClr val="0D3B66"/>
+                </a:solidFill>
+                <a:latin typeface="Calibri"/>
+              </a:rPr>
+              <a:t>Sandía Antigua y Sandía Nueva alimentan Distrito de Lujo. Desde ahí el caudal se divide en Bazar Gourmet y DL Kennedy. Por eso esos tres puntos no se suman a la cabecera: sería doble conteo.</a:t>
+            </a:r>
+          </a:p>
+        </p:txBody>
+      </p:sp>
+      <p:sp>
+        <p:nvSpPr>
+          <p:cNvPr id="9" name="Rounded Rectangle 8"/>
+          <p:cNvSpPr/>
+          <p:nvPr/>
+        </p:nvSpPr>
+        <p:spPr>
+          <a:xfrm>
+            <a:off x="201168" y="1591056"/>
             <a:ext cx="1938528" cy="457200"/>
           </a:xfrm>
           <a:prstGeom prst="roundRect">
@@ -8658,7 +9222,93 @@
           </a:solidFill>
           <a:ln w="6350">
             <a:solidFill>
-              <a:srgbClr val="508282"/>
+              <a:srgbClr val="7BA3C9"/>
+            </a:solidFill>
+          </a:ln>
+        </p:spPr>
+        <p:style>
+          <a:lnRef idx="1">
+            <a:schemeClr val="accent1"/>
+          </a:lnRef>
+          <a:fillRef idx="3">
+            <a:schemeClr val="accent1"/>
+          </a:fillRef>
+          <a:effectRef idx="2">
+            <a:schemeClr val="accent1"/>
+          </a:effectRef>
+          <a:fontRef idx="minor">
+            <a:schemeClr val="lt1"/>
+          </a:fontRef>
+        </p:style>
+        <p:txBody>
+          <a:bodyPr rtlCol="0" anchor="ctr"/>
+          <a:lstStyle/>
+          <a:p>
+            <a:pPr algn="ctr"/>
+          </a:p>
+        </p:txBody>
+      </p:sp>
+      <p:sp>
+        <p:nvSpPr>
+          <p:cNvPr id="10" name="TextBox 9"/>
+          <p:cNvSpPr txBox="1"/>
+          <p:nvPr/>
+        </p:nvSpPr>
+        <p:spPr>
+          <a:xfrm>
+            <a:off x="274320" y="1700784"/>
+            <a:ext cx="1792224" cy="256032"/>
+          </a:xfrm>
+          <a:prstGeom prst="rect">
+            <a:avLst/>
+          </a:prstGeom>
+          <a:noFill/>
+        </p:spPr>
+        <p:txBody>
+          <a:bodyPr wrap="square">
+            <a:spAutoFit/>
+          </a:bodyPr>
+          <a:lstStyle/>
+          <a:p>
+            <a:pPr algn="ctr">
+              <a:spcAft>
+                <a:spcPts val="300"/>
+              </a:spcAft>
+            </a:pPr>
+            <a:r>
+              <a:rPr sz="1200" b="1">
+                <a:solidFill>
+                  <a:srgbClr val="0D3B66"/>
+                </a:solidFill>
+                <a:latin typeface="Calibri"/>
+              </a:rPr>
+              <a:t>Sandía Antigua</a:t>
+            </a:r>
+          </a:p>
+        </p:txBody>
+      </p:sp>
+      <p:sp>
+        <p:nvSpPr>
+          <p:cNvPr id="11" name="Rounded Rectangle 10"/>
+          <p:cNvSpPr/>
+          <p:nvPr/>
+        </p:nvSpPr>
+        <p:spPr>
+          <a:xfrm>
+            <a:off x="2468880" y="1591056"/>
+            <a:ext cx="1938528" cy="457200"/>
+          </a:xfrm>
+          <a:prstGeom prst="roundRect">
+            <a:avLst>
+              <a:gd name="adj" fmla="val 8000"/>
+            </a:avLst>
+          </a:prstGeom>
+          <a:solidFill>
+            <a:srgbClr val="F5F7FA"/>
+          </a:solidFill>
+          <a:ln w="6350">
+            <a:solidFill>
+              <a:srgbClr val="46648C"/>
             </a:solidFill>
           </a:ln>
         </p:spPr>

--- a/reports/Parque_Arauco/TMP_7MALLS/entrega_diego_anibal/Recorrido_ejecutivo_PA_MAE_20260817.pptx
+++ b/reports/Parque_Arauco/TMP_7MALLS/entrega_diego_anibal/Recorrido_ejecutivo_PA_MAE_20260817.pptx
@@ -5002,7 +5002,7 @@
                 </a:solidFill>
                 <a:latin typeface="Calibri"/>
               </a:rPr>
-              <a:t>Umbrales a activar: Anillo Plaza diario 22 m³/día (julio 21; el 09/07 llegó a 58). Matriz 1° piso noche 3 m³ 00–06 (el día está estable; la madrugada es lo que hay que ver).</a:t>
+              <a:t>Umbrales a activar: Anillo Plaza diario 22 m³/día (julio 21; el 09/07 llegó a 58). Matriz 1° piso: umbral noche 3 m³ 00–06.</a:t>
             </a:r>
           </a:p>
         </p:txBody>

--- a/reports/Parque_Arauco/TMP_7MALLS/entrega_diego_anibal/Recorrido_ejecutivo_PA_MAE_20260817.pptx
+++ b/reports/Parque_Arauco/TMP_7MALLS/entrega_diego_anibal/Recorrido_ejecutivo_PA_MAE_20260817.pptx
@@ -5002,7 +5002,7 @@
                 </a:solidFill>
                 <a:latin typeface="Calibri"/>
               </a:rPr>
-              <a:t>Umbrales a activar: Anillo Plaza diario 22 m³/día (julio 21; el 09/07 llegó a 58). Matriz 1° piso: umbral noche 3 m³ 00–06.</a:t>
+              <a:t>Umbrales a activar (total del día): Anillo Plaza 22 m³/día (julio 21; el 09/07 llegó a 58). Matriz 1° piso 75 m³/día (agosto ~58 × 1,25).</a:t>
             </a:r>
           </a:p>
         </p:txBody>

--- a/reports/Parque_Arauco/TMP_7MALLS/entrega_diego_anibal/Recorrido_ejecutivo_PA_MAE_20260817.pptx
+++ b/reports/Parque_Arauco/TMP_7MALLS/entrega_diego_anibal/Recorrido_ejecutivo_PA_MAE_20260817.pptx
@@ -19,6 +19,7 @@
     <p:sldId id="267" r:id="rId18"/>
     <p:sldId id="268" r:id="rId19"/>
     <p:sldId id="269" r:id="rId20"/>
+    <p:sldId id="270" r:id="rId21"/>
   </p:sldIdLst>
   <p:sldSz cx="12191695" cy="6858000" type="screen4x3"/>
   <p:notesSz cx="6858000" cy="9144000"/>
@@ -3312,7 +3313,7 @@
                 </a:solidFill>
                 <a:latin typeface="Calibri"/>
               </a:rPr>
-              <a:t>Lámina 2: MAE  ·  MAM Placa  ·  MAQ Matriz  ·  BOM SI500  ·  AEB Anillo  ·  PAK cadena</a:t>
+              <a:t>Lámina 2: MAE  ·  MAM Placa  ·  MAQ Matriz  ·  BOM SI500  ·  AEB Anillo  ·  CUR  ·  PAK cadena</a:t>
             </a:r>
           </a:p>
         </p:txBody>
@@ -5234,7 +5235,7 @@
           </a:solidFill>
           <a:ln w="6350">
             <a:solidFill>
-              <a:srgbClr val="1F77B4"/>
+              <a:srgbClr val="C9A227"/>
             </a:solidFill>
           </a:ln>
         </p:spPr>
@@ -5803,7 +5804,7 @@
           </a:solidFill>
           <a:ln w="6350">
             <a:solidFill>
-              <a:srgbClr val="1F77B4"/>
+              <a:srgbClr val="C9A227"/>
             </a:solidFill>
           </a:ln>
         </p:spPr>
@@ -5859,7 +5860,7 @@
             <a:r>
               <a:rPr sz="1300" b="1">
                 <a:solidFill>
-                  <a:srgbClr val="1F77B4"/>
+                  <a:srgbClr val="C9A227"/>
                 </a:solidFill>
                 <a:latin typeface="Calibri"/>
               </a:rPr>
@@ -6043,7 +6044,7 @@
                 </a:solidFill>
                 <a:latin typeface="Calibri"/>
               </a:rPr>
-              <a:t>Cambio de monitoreo: se dejó Baños y Matriz Principal. Anillo Norte y Sur con lectura correcta desde el 19/05 (mayo no se grafica).</a:t>
+              <a:t>Cambio de monitoreo: Anillo Norte y Sur desde el 19/05 (mayo no se grafica). Lámina 2: diferencia, noche y umbral.</a:t>
             </a:r>
           </a:p>
         </p:txBody>
@@ -6210,7 +6211,7 @@
                 </a:solidFill>
                 <a:latin typeface="Calibri"/>
               </a:rPr>
-              <a:t>PAK  ·  Equipos y consumo</a:t>
+              <a:t>CUR  ·  2. Anillo Sur y Norte</a:t>
             </a:r>
           </a:p>
         </p:txBody>
@@ -6249,7 +6250,7 @@
                 </a:solidFill>
                 <a:latin typeface="Calibri"/>
               </a:rPr>
-              <a:t>Parque Arauco Kennedy   |   10 puntos WES   |   julio = cabecera (sin 27, 35 y 36)   |   01/05/2026 – 17/08/2026</a:t>
+              <a:t>Diferencia chica  ·  noche 00–06  ·  umbral del día</a:t>
             </a:r>
           </a:p>
         </p:txBody>
@@ -6262,1125 +6263,8 @@
         </p:nvSpPr>
         <p:spPr>
           <a:xfrm>
-            <a:off x="201168" y="1024128"/>
-            <a:ext cx="2286000" cy="621792"/>
-          </a:xfrm>
-          <a:prstGeom prst="roundRect">
-            <a:avLst>
-              <a:gd name="adj" fmla="val 8000"/>
-            </a:avLst>
-          </a:prstGeom>
-          <a:solidFill>
-            <a:srgbClr val="F5F7FA"/>
-          </a:solidFill>
-          <a:ln w="6350">
-            <a:solidFill>
-              <a:srgbClr val="C45C26"/>
-            </a:solidFill>
-          </a:ln>
-        </p:spPr>
-        <p:style>
-          <a:lnRef idx="1">
-            <a:schemeClr val="accent1"/>
-          </a:lnRef>
-          <a:fillRef idx="3">
-            <a:schemeClr val="accent1"/>
-          </a:fillRef>
-          <a:effectRef idx="2">
-            <a:schemeClr val="accent1"/>
-          </a:effectRef>
-          <a:fontRef idx="minor">
-            <a:schemeClr val="lt1"/>
-          </a:fontRef>
-        </p:style>
-        <p:txBody>
-          <a:bodyPr rtlCol="0" anchor="ctr"/>
-          <a:lstStyle/>
-          <a:p>
-            <a:pPr algn="ctr"/>
-          </a:p>
-        </p:txBody>
-      </p:sp>
-      <p:sp>
-        <p:nvSpPr>
-          <p:cNvPr id="8" name="TextBox 7"/>
-          <p:cNvSpPr txBox="1"/>
-          <p:nvPr/>
-        </p:nvSpPr>
-        <p:spPr>
-          <a:xfrm>
-            <a:off x="274320" y="1060704"/>
-            <a:ext cx="2157984" cy="146304"/>
-          </a:xfrm>
-          <a:prstGeom prst="rect">
-            <a:avLst/>
-          </a:prstGeom>
-          <a:noFill/>
-        </p:spPr>
-        <p:txBody>
-          <a:bodyPr wrap="square">
-            <a:spAutoFit/>
-          </a:bodyPr>
-          <a:lstStyle/>
-          <a:p>
-            <a:pPr algn="l">
-              <a:spcAft>
-                <a:spcPts val="300"/>
-              </a:spcAft>
-            </a:pPr>
-            <a:r>
-              <a:rPr sz="900" b="1">
-                <a:solidFill>
-                  <a:srgbClr val="C9A227"/>
-                </a:solidFill>
-                <a:latin typeface="Calibri"/>
-              </a:rPr>
-              <a:t>000025-20</a:t>
-            </a:r>
-          </a:p>
-        </p:txBody>
-      </p:sp>
-      <p:sp>
-        <p:nvSpPr>
-          <p:cNvPr id="9" name="TextBox 8"/>
-          <p:cNvSpPr txBox="1"/>
-          <p:nvPr/>
-        </p:nvSpPr>
-        <p:spPr>
-          <a:xfrm>
-            <a:off x="274320" y="1225296"/>
-            <a:ext cx="2157984" cy="201168"/>
-          </a:xfrm>
-          <a:prstGeom prst="rect">
-            <a:avLst/>
-          </a:prstGeom>
-          <a:noFill/>
-        </p:spPr>
-        <p:txBody>
-          <a:bodyPr wrap="square">
-            <a:spAutoFit/>
-          </a:bodyPr>
-          <a:lstStyle/>
-          <a:p>
-            <a:pPr algn="l">
-              <a:spcAft>
-                <a:spcPts val="300"/>
-              </a:spcAft>
-            </a:pPr>
-            <a:r>
-              <a:rPr sz="1100" b="1">
-                <a:solidFill>
-                  <a:srgbClr val="0D3B66"/>
-                </a:solidFill>
-                <a:latin typeface="Calibri"/>
-              </a:rPr>
-              <a:t>Matriz Andén</a:t>
-            </a:r>
-          </a:p>
-        </p:txBody>
-      </p:sp>
-      <p:sp>
-        <p:nvSpPr>
-          <p:cNvPr id="10" name="Rounded Rectangle 9"/>
-          <p:cNvSpPr/>
-          <p:nvPr/>
-        </p:nvSpPr>
-        <p:spPr>
-          <a:xfrm>
-            <a:off x="2578608" y="1024128"/>
-            <a:ext cx="2286000" cy="621792"/>
-          </a:xfrm>
-          <a:prstGeom prst="roundRect">
-            <a:avLst>
-              <a:gd name="adj" fmla="val 8000"/>
-            </a:avLst>
-          </a:prstGeom>
-          <a:solidFill>
-            <a:srgbClr val="F5F7FA"/>
-          </a:solidFill>
-          <a:ln w="6350">
-            <a:solidFill>
-              <a:srgbClr val="C9A227"/>
-            </a:solidFill>
-          </a:ln>
-        </p:spPr>
-        <p:style>
-          <a:lnRef idx="1">
-            <a:schemeClr val="accent1"/>
-          </a:lnRef>
-          <a:fillRef idx="3">
-            <a:schemeClr val="accent1"/>
-          </a:fillRef>
-          <a:effectRef idx="2">
-            <a:schemeClr val="accent1"/>
-          </a:effectRef>
-          <a:fontRef idx="minor">
-            <a:schemeClr val="lt1"/>
-          </a:fontRef>
-        </p:style>
-        <p:txBody>
-          <a:bodyPr rtlCol="0" anchor="ctr"/>
-          <a:lstStyle/>
-          <a:p>
-            <a:pPr algn="ctr"/>
-          </a:p>
-        </p:txBody>
-      </p:sp>
-      <p:sp>
-        <p:nvSpPr>
-          <p:cNvPr id="11" name="TextBox 10"/>
-          <p:cNvSpPr txBox="1"/>
-          <p:nvPr/>
-        </p:nvSpPr>
-        <p:spPr>
-          <a:xfrm>
-            <a:off x="2651760" y="1060704"/>
-            <a:ext cx="2157984" cy="146304"/>
-          </a:xfrm>
-          <a:prstGeom prst="rect">
-            <a:avLst/>
-          </a:prstGeom>
-          <a:noFill/>
-        </p:spPr>
-        <p:txBody>
-          <a:bodyPr wrap="square">
-            <a:spAutoFit/>
-          </a:bodyPr>
-          <a:lstStyle/>
-          <a:p>
-            <a:pPr algn="l">
-              <a:spcAft>
-                <a:spcPts val="300"/>
-              </a:spcAft>
-            </a:pPr>
-            <a:r>
-              <a:rPr sz="900" b="1">
-                <a:solidFill>
-                  <a:srgbClr val="C9A227"/>
-                </a:solidFill>
-                <a:latin typeface="Calibri"/>
-              </a:rPr>
-              <a:t>000025-21</a:t>
-            </a:r>
-          </a:p>
-        </p:txBody>
-      </p:sp>
-      <p:sp>
-        <p:nvSpPr>
-          <p:cNvPr id="12" name="TextBox 11"/>
-          <p:cNvSpPr txBox="1"/>
-          <p:nvPr/>
-        </p:nvSpPr>
-        <p:spPr>
-          <a:xfrm>
-            <a:off x="2651760" y="1225296"/>
-            <a:ext cx="2157984" cy="201168"/>
-          </a:xfrm>
-          <a:prstGeom prst="rect">
-            <a:avLst/>
-          </a:prstGeom>
-          <a:noFill/>
-        </p:spPr>
-        <p:txBody>
-          <a:bodyPr wrap="square">
-            <a:spAutoFit/>
-          </a:bodyPr>
-          <a:lstStyle/>
-          <a:p>
-            <a:pPr algn="l">
-              <a:spcAft>
-                <a:spcPts val="300"/>
-              </a:spcAft>
-            </a:pPr>
-            <a:r>
-              <a:rPr sz="1100" b="1">
-                <a:solidFill>
-                  <a:srgbClr val="0D3B66"/>
-                </a:solidFill>
-                <a:latin typeface="Calibri"/>
-              </a:rPr>
-              <a:t>Locales Gast.</a:t>
-            </a:r>
-          </a:p>
-        </p:txBody>
-      </p:sp>
-      <p:sp>
-        <p:nvSpPr>
-          <p:cNvPr id="13" name="Rounded Rectangle 12"/>
-          <p:cNvSpPr/>
-          <p:nvPr/>
-        </p:nvSpPr>
-        <p:spPr>
-          <a:xfrm>
-            <a:off x="4956048" y="1024128"/>
-            <a:ext cx="2286000" cy="621792"/>
-          </a:xfrm>
-          <a:prstGeom prst="roundRect">
-            <a:avLst>
-              <a:gd name="adj" fmla="val 8000"/>
-            </a:avLst>
-          </a:prstGeom>
-          <a:solidFill>
-            <a:srgbClr val="F5F7FA"/>
-          </a:solidFill>
-          <a:ln w="6350">
-            <a:solidFill>
-              <a:srgbClr val="7BA3C9"/>
-            </a:solidFill>
-          </a:ln>
-        </p:spPr>
-        <p:style>
-          <a:lnRef idx="1">
-            <a:schemeClr val="accent1"/>
-          </a:lnRef>
-          <a:fillRef idx="3">
-            <a:schemeClr val="accent1"/>
-          </a:fillRef>
-          <a:effectRef idx="2">
-            <a:schemeClr val="accent1"/>
-          </a:effectRef>
-          <a:fontRef idx="minor">
-            <a:schemeClr val="lt1"/>
-          </a:fontRef>
-        </p:style>
-        <p:txBody>
-          <a:bodyPr rtlCol="0" anchor="ctr"/>
-          <a:lstStyle/>
-          <a:p>
-            <a:pPr algn="ctr"/>
-          </a:p>
-        </p:txBody>
-      </p:sp>
-      <p:sp>
-        <p:nvSpPr>
-          <p:cNvPr id="14" name="TextBox 13"/>
-          <p:cNvSpPr txBox="1"/>
-          <p:nvPr/>
-        </p:nvSpPr>
-        <p:spPr>
-          <a:xfrm>
-            <a:off x="5029200" y="1060704"/>
-            <a:ext cx="2157984" cy="146304"/>
-          </a:xfrm>
-          <a:prstGeom prst="rect">
-            <a:avLst/>
-          </a:prstGeom>
-          <a:noFill/>
-        </p:spPr>
-        <p:txBody>
-          <a:bodyPr wrap="square">
-            <a:spAutoFit/>
-          </a:bodyPr>
-          <a:lstStyle/>
-          <a:p>
-            <a:pPr algn="l">
-              <a:spcAft>
-                <a:spcPts val="300"/>
-              </a:spcAft>
-            </a:pPr>
-            <a:r>
-              <a:rPr sz="900" b="1">
-                <a:solidFill>
-                  <a:srgbClr val="C9A227"/>
-                </a:solidFill>
-                <a:latin typeface="Calibri"/>
-              </a:rPr>
-              <a:t>000025-22</a:t>
-            </a:r>
-          </a:p>
-        </p:txBody>
-      </p:sp>
-      <p:sp>
-        <p:nvSpPr>
-          <p:cNvPr id="15" name="TextBox 14"/>
-          <p:cNvSpPr txBox="1"/>
-          <p:nvPr/>
-        </p:nvSpPr>
-        <p:spPr>
-          <a:xfrm>
-            <a:off x="5029200" y="1225296"/>
-            <a:ext cx="2157984" cy="201168"/>
-          </a:xfrm>
-          <a:prstGeom prst="rect">
-            <a:avLst/>
-          </a:prstGeom>
-          <a:noFill/>
-        </p:spPr>
-        <p:txBody>
-          <a:bodyPr wrap="square">
-            <a:spAutoFit/>
-          </a:bodyPr>
-          <a:lstStyle/>
-          <a:p>
-            <a:pPr algn="l">
-              <a:spcAft>
-                <a:spcPts val="300"/>
-              </a:spcAft>
-            </a:pPr>
-            <a:r>
-              <a:rPr sz="1100" b="1">
-                <a:solidFill>
-                  <a:srgbClr val="0D3B66"/>
-                </a:solidFill>
-                <a:latin typeface="Calibri"/>
-              </a:rPr>
-              <a:t>Sandía Antigua</a:t>
-            </a:r>
-          </a:p>
-        </p:txBody>
-      </p:sp>
-      <p:sp>
-        <p:nvSpPr>
-          <p:cNvPr id="16" name="TextBox 15"/>
-          <p:cNvSpPr txBox="1"/>
-          <p:nvPr/>
-        </p:nvSpPr>
-        <p:spPr>
-          <a:xfrm>
-            <a:off x="5029200" y="1444752"/>
-            <a:ext cx="2157984" cy="164592"/>
-          </a:xfrm>
-          <a:prstGeom prst="rect">
-            <a:avLst/>
-          </a:prstGeom>
-          <a:noFill/>
-        </p:spPr>
-        <p:txBody>
-          <a:bodyPr wrap="square">
-            <a:spAutoFit/>
-          </a:bodyPr>
-          <a:lstStyle/>
-          <a:p>
-            <a:pPr algn="l">
-              <a:spcAft>
-                <a:spcPts val="300"/>
-              </a:spcAft>
-            </a:pPr>
-            <a:r>
-              <a:rPr sz="800" b="0">
-                <a:solidFill>
-                  <a:srgbClr val="5A5A5A"/>
-                </a:solidFill>
-                <a:latin typeface="Calibri"/>
-              </a:rPr>
-              <a:t>alimenta 27</a:t>
-            </a:r>
-          </a:p>
-        </p:txBody>
-      </p:sp>
-      <p:sp>
-        <p:nvSpPr>
-          <p:cNvPr id="17" name="Rounded Rectangle 16"/>
-          <p:cNvSpPr/>
-          <p:nvPr/>
-        </p:nvSpPr>
-        <p:spPr>
-          <a:xfrm>
-            <a:off x="7333488" y="1024128"/>
-            <a:ext cx="2286000" cy="621792"/>
-          </a:xfrm>
-          <a:prstGeom prst="roundRect">
-            <a:avLst>
-              <a:gd name="adj" fmla="val 8000"/>
-            </a:avLst>
-          </a:prstGeom>
-          <a:solidFill>
-            <a:srgbClr val="F5F7FA"/>
-          </a:solidFill>
-          <a:ln w="6350">
-            <a:solidFill>
-              <a:srgbClr val="46648C"/>
-            </a:solidFill>
-          </a:ln>
-        </p:spPr>
-        <p:style>
-          <a:lnRef idx="1">
-            <a:schemeClr val="accent1"/>
-          </a:lnRef>
-          <a:fillRef idx="3">
-            <a:schemeClr val="accent1"/>
-          </a:fillRef>
-          <a:effectRef idx="2">
-            <a:schemeClr val="accent1"/>
-          </a:effectRef>
-          <a:fontRef idx="minor">
-            <a:schemeClr val="lt1"/>
-          </a:fontRef>
-        </p:style>
-        <p:txBody>
-          <a:bodyPr rtlCol="0" anchor="ctr"/>
-          <a:lstStyle/>
-          <a:p>
-            <a:pPr algn="ctr"/>
-          </a:p>
-        </p:txBody>
-      </p:sp>
-      <p:sp>
-        <p:nvSpPr>
-          <p:cNvPr id="18" name="TextBox 17"/>
-          <p:cNvSpPr txBox="1"/>
-          <p:nvPr/>
-        </p:nvSpPr>
-        <p:spPr>
-          <a:xfrm>
-            <a:off x="7406640" y="1060704"/>
-            <a:ext cx="2157984" cy="146304"/>
-          </a:xfrm>
-          <a:prstGeom prst="rect">
-            <a:avLst/>
-          </a:prstGeom>
-          <a:noFill/>
-        </p:spPr>
-        <p:txBody>
-          <a:bodyPr wrap="square">
-            <a:spAutoFit/>
-          </a:bodyPr>
-          <a:lstStyle/>
-          <a:p>
-            <a:pPr algn="l">
-              <a:spcAft>
-                <a:spcPts val="300"/>
-              </a:spcAft>
-            </a:pPr>
-            <a:r>
-              <a:rPr sz="900" b="1">
-                <a:solidFill>
-                  <a:srgbClr val="C9A227"/>
-                </a:solidFill>
-                <a:latin typeface="Calibri"/>
-              </a:rPr>
-              <a:t>000025-28</a:t>
-            </a:r>
-          </a:p>
-        </p:txBody>
-      </p:sp>
-      <p:sp>
-        <p:nvSpPr>
-          <p:cNvPr id="19" name="TextBox 18"/>
-          <p:cNvSpPr txBox="1"/>
-          <p:nvPr/>
-        </p:nvSpPr>
-        <p:spPr>
-          <a:xfrm>
-            <a:off x="7406640" y="1225296"/>
-            <a:ext cx="2157984" cy="201168"/>
-          </a:xfrm>
-          <a:prstGeom prst="rect">
-            <a:avLst/>
-          </a:prstGeom>
-          <a:noFill/>
-        </p:spPr>
-        <p:txBody>
-          <a:bodyPr wrap="square">
-            <a:spAutoFit/>
-          </a:bodyPr>
-          <a:lstStyle/>
-          <a:p>
-            <a:pPr algn="l">
-              <a:spcAft>
-                <a:spcPts val="300"/>
-              </a:spcAft>
-            </a:pPr>
-            <a:r>
-              <a:rPr sz="1100" b="1">
-                <a:solidFill>
-                  <a:srgbClr val="0D3B66"/>
-                </a:solidFill>
-                <a:latin typeface="Calibri"/>
-              </a:rPr>
-              <a:t>Sandía Nueva</a:t>
-            </a:r>
-          </a:p>
-        </p:txBody>
-      </p:sp>
-      <p:sp>
-        <p:nvSpPr>
-          <p:cNvPr id="20" name="TextBox 19"/>
-          <p:cNvSpPr txBox="1"/>
-          <p:nvPr/>
-        </p:nvSpPr>
-        <p:spPr>
-          <a:xfrm>
-            <a:off x="7406640" y="1444752"/>
-            <a:ext cx="2157984" cy="164592"/>
-          </a:xfrm>
-          <a:prstGeom prst="rect">
-            <a:avLst/>
-          </a:prstGeom>
-          <a:noFill/>
-        </p:spPr>
-        <p:txBody>
-          <a:bodyPr wrap="square">
-            <a:spAutoFit/>
-          </a:bodyPr>
-          <a:lstStyle/>
-          <a:p>
-            <a:pPr algn="l">
-              <a:spcAft>
-                <a:spcPts val="300"/>
-              </a:spcAft>
-            </a:pPr>
-            <a:r>
-              <a:rPr sz="800" b="0">
-                <a:solidFill>
-                  <a:srgbClr val="5A5A5A"/>
-                </a:solidFill>
-                <a:latin typeface="Calibri"/>
-              </a:rPr>
-              <a:t>alimenta 27</a:t>
-            </a:r>
-          </a:p>
-        </p:txBody>
-      </p:sp>
-      <p:sp>
-        <p:nvSpPr>
-          <p:cNvPr id="21" name="Rounded Rectangle 20"/>
-          <p:cNvSpPr/>
-          <p:nvPr/>
-        </p:nvSpPr>
-        <p:spPr>
-          <a:xfrm>
-            <a:off x="9710928" y="1024128"/>
-            <a:ext cx="2286000" cy="621792"/>
-          </a:xfrm>
-          <a:prstGeom prst="roundRect">
-            <a:avLst>
-              <a:gd name="adj" fmla="val 8000"/>
-            </a:avLst>
-          </a:prstGeom>
-          <a:solidFill>
-            <a:srgbClr val="F5F7FA"/>
-          </a:solidFill>
-          <a:ln w="6350">
-            <a:solidFill>
-              <a:srgbClr val="A0783C"/>
-            </a:solidFill>
-          </a:ln>
-        </p:spPr>
-        <p:style>
-          <a:lnRef idx="1">
-            <a:schemeClr val="accent1"/>
-          </a:lnRef>
-          <a:fillRef idx="3">
-            <a:schemeClr val="accent1"/>
-          </a:fillRef>
-          <a:effectRef idx="2">
-            <a:schemeClr val="accent1"/>
-          </a:effectRef>
-          <a:fontRef idx="minor">
-            <a:schemeClr val="lt1"/>
-          </a:fontRef>
-        </p:style>
-        <p:txBody>
-          <a:bodyPr rtlCol="0" anchor="ctr"/>
-          <a:lstStyle/>
-          <a:p>
-            <a:pPr algn="ctr"/>
-          </a:p>
-        </p:txBody>
-      </p:sp>
-      <p:sp>
-        <p:nvSpPr>
-          <p:cNvPr id="22" name="TextBox 21"/>
-          <p:cNvSpPr txBox="1"/>
-          <p:nvPr/>
-        </p:nvSpPr>
-        <p:spPr>
-          <a:xfrm>
-            <a:off x="9784080" y="1060704"/>
-            <a:ext cx="2157984" cy="146304"/>
-          </a:xfrm>
-          <a:prstGeom prst="rect">
-            <a:avLst/>
-          </a:prstGeom>
-          <a:noFill/>
-        </p:spPr>
-        <p:txBody>
-          <a:bodyPr wrap="square">
-            <a:spAutoFit/>
-          </a:bodyPr>
-          <a:lstStyle/>
-          <a:p>
-            <a:pPr algn="l">
-              <a:spcAft>
-                <a:spcPts val="300"/>
-              </a:spcAft>
-            </a:pPr>
-            <a:r>
-              <a:rPr sz="900" b="1">
-                <a:solidFill>
-                  <a:srgbClr val="C9A227"/>
-                </a:solidFill>
-                <a:latin typeface="Calibri"/>
-              </a:rPr>
-              <a:t>000025-29</a:t>
-            </a:r>
-          </a:p>
-        </p:txBody>
-      </p:sp>
-      <p:sp>
-        <p:nvSpPr>
-          <p:cNvPr id="23" name="TextBox 22"/>
-          <p:cNvSpPr txBox="1"/>
-          <p:nvPr/>
-        </p:nvSpPr>
-        <p:spPr>
-          <a:xfrm>
-            <a:off x="9784080" y="1225296"/>
-            <a:ext cx="2157984" cy="201168"/>
-          </a:xfrm>
-          <a:prstGeom prst="rect">
-            <a:avLst/>
-          </a:prstGeom>
-          <a:noFill/>
-        </p:spPr>
-        <p:txBody>
-          <a:bodyPr wrap="square">
-            <a:spAutoFit/>
-          </a:bodyPr>
-          <a:lstStyle/>
-          <a:p>
-            <a:pPr algn="l">
-              <a:spcAft>
-                <a:spcPts val="300"/>
-              </a:spcAft>
-            </a:pPr>
-            <a:r>
-              <a:rPr sz="1100" b="1">
-                <a:solidFill>
-                  <a:srgbClr val="0D3B66"/>
-                </a:solidFill>
-                <a:latin typeface="Calibri"/>
-              </a:rPr>
-              <a:t>Restaurante</a:t>
-            </a:r>
-          </a:p>
-        </p:txBody>
-      </p:sp>
-      <p:sp>
-        <p:nvSpPr>
-          <p:cNvPr id="24" name="Rounded Rectangle 23"/>
-          <p:cNvSpPr/>
-          <p:nvPr/>
-        </p:nvSpPr>
-        <p:spPr>
-          <a:xfrm>
-            <a:off x="201168" y="1719072"/>
-            <a:ext cx="2286000" cy="621792"/>
-          </a:xfrm>
-          <a:prstGeom prst="roundRect">
-            <a:avLst>
-              <a:gd name="adj" fmla="val 8000"/>
-            </a:avLst>
-          </a:prstGeom>
-          <a:solidFill>
-            <a:srgbClr val="F5F7FA"/>
-          </a:solidFill>
-          <a:ln w="6350">
-            <a:solidFill>
-              <a:srgbClr val="5A8C6E"/>
-            </a:solidFill>
-          </a:ln>
-        </p:spPr>
-        <p:style>
-          <a:lnRef idx="1">
-            <a:schemeClr val="accent1"/>
-          </a:lnRef>
-          <a:fillRef idx="3">
-            <a:schemeClr val="accent1"/>
-          </a:fillRef>
-          <a:effectRef idx="2">
-            <a:schemeClr val="accent1"/>
-          </a:effectRef>
-          <a:fontRef idx="minor">
-            <a:schemeClr val="lt1"/>
-          </a:fontRef>
-        </p:style>
-        <p:txBody>
-          <a:bodyPr rtlCol="0" anchor="ctr"/>
-          <a:lstStyle/>
-          <a:p>
-            <a:pPr algn="ctr"/>
-          </a:p>
-        </p:txBody>
-      </p:sp>
-      <p:sp>
-        <p:nvSpPr>
-          <p:cNvPr id="25" name="TextBox 24"/>
-          <p:cNvSpPr txBox="1"/>
-          <p:nvPr/>
-        </p:nvSpPr>
-        <p:spPr>
-          <a:xfrm>
-            <a:off x="274320" y="1755648"/>
-            <a:ext cx="2157984" cy="146304"/>
-          </a:xfrm>
-          <a:prstGeom prst="rect">
-            <a:avLst/>
-          </a:prstGeom>
-          <a:noFill/>
-        </p:spPr>
-        <p:txBody>
-          <a:bodyPr wrap="square">
-            <a:spAutoFit/>
-          </a:bodyPr>
-          <a:lstStyle/>
-          <a:p>
-            <a:pPr algn="l">
-              <a:spcAft>
-                <a:spcPts val="300"/>
-              </a:spcAft>
-            </a:pPr>
-            <a:r>
-              <a:rPr sz="900" b="1">
-                <a:solidFill>
-                  <a:srgbClr val="C9A227"/>
-                </a:solidFill>
-                <a:latin typeface="Calibri"/>
-              </a:rPr>
-              <a:t>000025-23</a:t>
-            </a:r>
-          </a:p>
-        </p:txBody>
-      </p:sp>
-      <p:sp>
-        <p:nvSpPr>
-          <p:cNvPr id="26" name="TextBox 25"/>
-          <p:cNvSpPr txBox="1"/>
-          <p:nvPr/>
-        </p:nvSpPr>
-        <p:spPr>
-          <a:xfrm>
-            <a:off x="274320" y="1920240"/>
-            <a:ext cx="2157984" cy="201168"/>
-          </a:xfrm>
-          <a:prstGeom prst="rect">
-            <a:avLst/>
-          </a:prstGeom>
-          <a:noFill/>
-        </p:spPr>
-        <p:txBody>
-          <a:bodyPr wrap="square">
-            <a:spAutoFit/>
-          </a:bodyPr>
-          <a:lstStyle/>
-          <a:p>
-            <a:pPr algn="l">
-              <a:spcAft>
-                <a:spcPts val="300"/>
-              </a:spcAft>
-            </a:pPr>
-            <a:r>
-              <a:rPr sz="1100" b="1">
-                <a:solidFill>
-                  <a:srgbClr val="0D3B66"/>
-                </a:solidFill>
-                <a:latin typeface="Calibri"/>
-              </a:rPr>
-              <a:t>Pileta</a:t>
-            </a:r>
-          </a:p>
-        </p:txBody>
-      </p:sp>
-      <p:sp>
-        <p:nvSpPr>
-          <p:cNvPr id="27" name="Rounded Rectangle 26"/>
-          <p:cNvSpPr/>
-          <p:nvPr/>
-        </p:nvSpPr>
-        <p:spPr>
-          <a:xfrm>
-            <a:off x="2578608" y="1719072"/>
-            <a:ext cx="2286000" cy="621792"/>
-          </a:xfrm>
-          <a:prstGeom prst="roundRect">
-            <a:avLst>
-              <a:gd name="adj" fmla="val 8000"/>
-            </a:avLst>
-          </a:prstGeom>
-          <a:solidFill>
-            <a:srgbClr val="F5F7FA"/>
-          </a:solidFill>
-          <a:ln w="6350">
-            <a:solidFill>
-              <a:srgbClr val="8C5A5A"/>
-            </a:solidFill>
-          </a:ln>
-        </p:spPr>
-        <p:style>
-          <a:lnRef idx="1">
-            <a:schemeClr val="accent1"/>
-          </a:lnRef>
-          <a:fillRef idx="3">
-            <a:schemeClr val="accent1"/>
-          </a:fillRef>
-          <a:effectRef idx="2">
-            <a:schemeClr val="accent1"/>
-          </a:effectRef>
-          <a:fontRef idx="minor">
-            <a:schemeClr val="lt1"/>
-          </a:fontRef>
-        </p:style>
-        <p:txBody>
-          <a:bodyPr rtlCol="0" anchor="ctr"/>
-          <a:lstStyle/>
-          <a:p>
-            <a:pPr algn="ctr"/>
-          </a:p>
-        </p:txBody>
-      </p:sp>
-      <p:sp>
-        <p:nvSpPr>
-          <p:cNvPr id="28" name="TextBox 27"/>
-          <p:cNvSpPr txBox="1"/>
-          <p:nvPr/>
-        </p:nvSpPr>
-        <p:spPr>
-          <a:xfrm>
-            <a:off x="2651760" y="1755648"/>
-            <a:ext cx="2157984" cy="146304"/>
-          </a:xfrm>
-          <a:prstGeom prst="rect">
-            <a:avLst/>
-          </a:prstGeom>
-          <a:noFill/>
-        </p:spPr>
-        <p:txBody>
-          <a:bodyPr wrap="square">
-            <a:spAutoFit/>
-          </a:bodyPr>
-          <a:lstStyle/>
-          <a:p>
-            <a:pPr algn="l">
-              <a:spcAft>
-                <a:spcPts val="300"/>
-              </a:spcAft>
-            </a:pPr>
-            <a:r>
-              <a:rPr sz="900" b="1">
-                <a:solidFill>
-                  <a:srgbClr val="C9A227"/>
-                </a:solidFill>
-                <a:latin typeface="Calibri"/>
-              </a:rPr>
-              <a:t>000025-24</a:t>
-            </a:r>
-          </a:p>
-        </p:txBody>
-      </p:sp>
-      <p:sp>
-        <p:nvSpPr>
-          <p:cNvPr id="29" name="TextBox 28"/>
-          <p:cNvSpPr txBox="1"/>
-          <p:nvPr/>
-        </p:nvSpPr>
-        <p:spPr>
-          <a:xfrm>
-            <a:off x="2651760" y="1920240"/>
-            <a:ext cx="2157984" cy="201168"/>
-          </a:xfrm>
-          <a:prstGeom prst="rect">
-            <a:avLst/>
-          </a:prstGeom>
-          <a:noFill/>
-        </p:spPr>
-        <p:txBody>
-          <a:bodyPr wrap="square">
-            <a:spAutoFit/>
-          </a:bodyPr>
-          <a:lstStyle/>
-          <a:p>
-            <a:pPr algn="l">
-              <a:spcAft>
-                <a:spcPts val="300"/>
-              </a:spcAft>
-            </a:pPr>
-            <a:r>
-              <a:rPr sz="1100" b="1">
-                <a:solidFill>
-                  <a:srgbClr val="0D3B66"/>
-                </a:solidFill>
-                <a:latin typeface="Calibri"/>
-              </a:rPr>
-              <a:t>Cascada</a:t>
-            </a:r>
-          </a:p>
-        </p:txBody>
-      </p:sp>
-      <p:sp>
-        <p:nvSpPr>
-          <p:cNvPr id="30" name="Rounded Rectangle 29"/>
-          <p:cNvSpPr/>
-          <p:nvPr/>
-        </p:nvSpPr>
-        <p:spPr>
-          <a:xfrm>
-            <a:off x="4956048" y="1719072"/>
-            <a:ext cx="2286000" cy="621792"/>
-          </a:xfrm>
-          <a:prstGeom prst="roundRect">
-            <a:avLst>
-              <a:gd name="adj" fmla="val 8000"/>
-            </a:avLst>
-          </a:prstGeom>
-          <a:solidFill>
-            <a:srgbClr val="FFF9EB"/>
-          </a:solidFill>
-          <a:ln w="6350">
-            <a:solidFill>
-              <a:srgbClr val="C45C26"/>
-            </a:solidFill>
-          </a:ln>
-        </p:spPr>
-        <p:style>
-          <a:lnRef idx="1">
-            <a:schemeClr val="accent1"/>
-          </a:lnRef>
-          <a:fillRef idx="3">
-            <a:schemeClr val="accent1"/>
-          </a:fillRef>
-          <a:effectRef idx="2">
-            <a:schemeClr val="accent1"/>
-          </a:effectRef>
-          <a:fontRef idx="minor">
-            <a:schemeClr val="lt1"/>
-          </a:fontRef>
-        </p:style>
-        <p:txBody>
-          <a:bodyPr rtlCol="0" anchor="ctr"/>
-          <a:lstStyle/>
-          <a:p>
-            <a:pPr algn="ctr"/>
-          </a:p>
-        </p:txBody>
-      </p:sp>
-      <p:sp>
-        <p:nvSpPr>
-          <p:cNvPr id="31" name="TextBox 30"/>
-          <p:cNvSpPr txBox="1"/>
-          <p:nvPr/>
-        </p:nvSpPr>
-        <p:spPr>
-          <a:xfrm>
-            <a:off x="5029200" y="1755648"/>
-            <a:ext cx="2157984" cy="146304"/>
-          </a:xfrm>
-          <a:prstGeom prst="rect">
-            <a:avLst/>
-          </a:prstGeom>
-          <a:noFill/>
-        </p:spPr>
-        <p:txBody>
-          <a:bodyPr wrap="square">
-            <a:spAutoFit/>
-          </a:bodyPr>
-          <a:lstStyle/>
-          <a:p>
-            <a:pPr algn="l">
-              <a:spcAft>
-                <a:spcPts val="300"/>
-              </a:spcAft>
-            </a:pPr>
-            <a:r>
-              <a:rPr sz="900" b="1">
-                <a:solidFill>
-                  <a:srgbClr val="C9A227"/>
-                </a:solidFill>
-                <a:latin typeface="Calibri"/>
-              </a:rPr>
-              <a:t>000025-27</a:t>
-            </a:r>
-          </a:p>
-        </p:txBody>
-      </p:sp>
-      <p:sp>
-        <p:nvSpPr>
-          <p:cNvPr id="32" name="TextBox 31"/>
-          <p:cNvSpPr txBox="1"/>
-          <p:nvPr/>
-        </p:nvSpPr>
-        <p:spPr>
-          <a:xfrm>
-            <a:off x="5029200" y="1920240"/>
-            <a:ext cx="2157984" cy="201168"/>
-          </a:xfrm>
-          <a:prstGeom prst="rect">
-            <a:avLst/>
-          </a:prstGeom>
-          <a:noFill/>
-        </p:spPr>
-        <p:txBody>
-          <a:bodyPr wrap="square">
-            <a:spAutoFit/>
-          </a:bodyPr>
-          <a:lstStyle/>
-          <a:p>
-            <a:pPr algn="l">
-              <a:spcAft>
-                <a:spcPts val="300"/>
-              </a:spcAft>
-            </a:pPr>
-            <a:r>
-              <a:rPr sz="1100" b="1">
-                <a:solidFill>
-                  <a:srgbClr val="0D3B66"/>
-                </a:solidFill>
-                <a:latin typeface="Calibri"/>
-              </a:rPr>
-              <a:t>Distrito Lujo</a:t>
-            </a:r>
-          </a:p>
-        </p:txBody>
-      </p:sp>
-      <p:sp>
-        <p:nvSpPr>
-          <p:cNvPr id="33" name="TextBox 32"/>
-          <p:cNvSpPr txBox="1"/>
-          <p:nvPr/>
-        </p:nvSpPr>
-        <p:spPr>
-          <a:xfrm>
-            <a:off x="5029200" y="2139696"/>
-            <a:ext cx="2157984" cy="164592"/>
-          </a:xfrm>
-          <a:prstGeom prst="rect">
-            <a:avLst/>
-          </a:prstGeom>
-          <a:noFill/>
-        </p:spPr>
-        <p:txBody>
-          <a:bodyPr wrap="square">
-            <a:spAutoFit/>
-          </a:bodyPr>
-          <a:lstStyle/>
-          <a:p>
-            <a:pPr algn="l">
-              <a:spcAft>
-                <a:spcPts val="300"/>
-              </a:spcAft>
-            </a:pPr>
-            <a:r>
-              <a:rPr sz="800" b="0">
-                <a:solidFill>
-                  <a:srgbClr val="5A5A5A"/>
-                </a:solidFill>
-                <a:latin typeface="Calibri"/>
-              </a:rPr>
-              <a:t>cadena · no suma</a:t>
-            </a:r>
-          </a:p>
-        </p:txBody>
-      </p:sp>
-      <p:sp>
-        <p:nvSpPr>
-          <p:cNvPr id="34" name="Rounded Rectangle 33"/>
-          <p:cNvSpPr/>
-          <p:nvPr/>
-        </p:nvSpPr>
-        <p:spPr>
-          <a:xfrm>
-            <a:off x="7333488" y="1719072"/>
-            <a:ext cx="2286000" cy="621792"/>
+            <a:off x="201168" y="987552"/>
+            <a:ext cx="11777472" cy="658368"/>
           </a:xfrm>
           <a:prstGeom prst="roundRect">
             <a:avLst>
@@ -7420,295 +6304,53 @@
       </p:sp>
       <p:sp>
         <p:nvSpPr>
-          <p:cNvPr id="35" name="TextBox 34"/>
-          <p:cNvSpPr txBox="1"/>
-          <p:nvPr/>
-        </p:nvSpPr>
-        <p:spPr>
-          <a:xfrm>
-            <a:off x="7406640" y="1755648"/>
-            <a:ext cx="2157984" cy="146304"/>
-          </a:xfrm>
-          <a:prstGeom prst="rect">
-            <a:avLst/>
-          </a:prstGeom>
-          <a:noFill/>
-        </p:spPr>
-        <p:txBody>
-          <a:bodyPr wrap="square">
-            <a:spAutoFit/>
-          </a:bodyPr>
-          <a:lstStyle/>
-          <a:p>
-            <a:pPr algn="l">
-              <a:spcAft>
-                <a:spcPts val="300"/>
-              </a:spcAft>
-            </a:pPr>
-            <a:r>
-              <a:rPr sz="900" b="1">
-                <a:solidFill>
-                  <a:srgbClr val="C9A227"/>
-                </a:solidFill>
-                <a:latin typeface="Calibri"/>
-              </a:rPr>
-              <a:t>000025-35</a:t>
-            </a:r>
-          </a:p>
-        </p:txBody>
-      </p:sp>
-      <p:sp>
-        <p:nvSpPr>
-          <p:cNvPr id="36" name="TextBox 35"/>
-          <p:cNvSpPr txBox="1"/>
-          <p:nvPr/>
-        </p:nvSpPr>
-        <p:spPr>
-          <a:xfrm>
-            <a:off x="7406640" y="1920240"/>
-            <a:ext cx="2157984" cy="201168"/>
-          </a:xfrm>
-          <a:prstGeom prst="rect">
-            <a:avLst/>
-          </a:prstGeom>
-          <a:noFill/>
-        </p:spPr>
-        <p:txBody>
-          <a:bodyPr wrap="square">
-            <a:spAutoFit/>
-          </a:bodyPr>
-          <a:lstStyle/>
-          <a:p>
-            <a:pPr algn="l">
-              <a:spcAft>
-                <a:spcPts val="300"/>
-              </a:spcAft>
-            </a:pPr>
-            <a:r>
-              <a:rPr sz="1100" b="1">
+          <p:cNvPr id="8" name="TextBox 7"/>
+          <p:cNvSpPr txBox="1"/>
+          <p:nvPr/>
+        </p:nvSpPr>
+        <p:spPr>
+          <a:xfrm>
+            <a:off x="365760" y="1042415"/>
+            <a:ext cx="11475720" cy="548640"/>
+          </a:xfrm>
+          <a:prstGeom prst="rect">
+            <a:avLst/>
+          </a:prstGeom>
+          <a:noFill/>
+        </p:spPr>
+        <p:txBody>
+          <a:bodyPr wrap="square">
+            <a:spAutoFit/>
+          </a:bodyPr>
+          <a:lstStyle/>
+          <a:p>
+            <a:pPr algn="l">
+              <a:spcAft>
+                <a:spcPts val="300"/>
+              </a:spcAft>
+            </a:pPr>
+            <a:r>
+              <a:rPr sz="1400" b="0">
                 <a:solidFill>
                   <a:srgbClr val="0D3B66"/>
                 </a:solidFill>
                 <a:latin typeface="Calibri"/>
               </a:rPr>
-              <a:t>Bazar Gourmet</a:t>
-            </a:r>
-          </a:p>
-        </p:txBody>
-      </p:sp>
-      <p:sp>
-        <p:nvSpPr>
-          <p:cNvPr id="37" name="TextBox 36"/>
-          <p:cNvSpPr txBox="1"/>
-          <p:nvPr/>
-        </p:nvSpPr>
-        <p:spPr>
-          <a:xfrm>
-            <a:off x="7406640" y="2139696"/>
-            <a:ext cx="2157984" cy="164592"/>
-          </a:xfrm>
-          <a:prstGeom prst="rect">
-            <a:avLst/>
-          </a:prstGeom>
-          <a:noFill/>
-        </p:spPr>
-        <p:txBody>
-          <a:bodyPr wrap="square">
-            <a:spAutoFit/>
-          </a:bodyPr>
-          <a:lstStyle/>
-          <a:p>
-            <a:pPr algn="l">
-              <a:spcAft>
-                <a:spcPts val="300"/>
-              </a:spcAft>
-            </a:pPr>
-            <a:r>
-              <a:rPr sz="800" b="0">
-                <a:solidFill>
-                  <a:srgbClr val="5A5A5A"/>
-                </a:solidFill>
-                <a:latin typeface="Calibri"/>
-              </a:rPr>
-              <a:t>sale de 27</a:t>
-            </a:r>
-          </a:p>
-        </p:txBody>
-      </p:sp>
-      <p:sp>
-        <p:nvSpPr>
-          <p:cNvPr id="38" name="Rounded Rectangle 37"/>
+              <a:t>Anillo Sur anda un poco sobre Norte: julio 54 % vs 46 % (unos 1,5 m³/día). Los dos cubren el mall; la diferencia es chica y se sostiene.</a:t>
+            </a:r>
+          </a:p>
+        </p:txBody>
+      </p:sp>
+      <p:sp>
+        <p:nvSpPr>
+          <p:cNvPr id="9" name="Rounded Rectangle 8"/>
           <p:cNvSpPr/>
           <p:nvPr/>
         </p:nvSpPr>
         <p:spPr>
           <a:xfrm>
-            <a:off x="9710928" y="1719072"/>
-            <a:ext cx="2286000" cy="621792"/>
-          </a:xfrm>
-          <a:prstGeom prst="roundRect">
-            <a:avLst>
-              <a:gd name="adj" fmla="val 8000"/>
-            </a:avLst>
-          </a:prstGeom>
-          <a:solidFill>
-            <a:srgbClr val="FFF9EB"/>
-          </a:solidFill>
-          <a:ln w="6350">
-            <a:solidFill>
-              <a:srgbClr val="5A8C6E"/>
-            </a:solidFill>
-          </a:ln>
-        </p:spPr>
-        <p:style>
-          <a:lnRef idx="1">
-            <a:schemeClr val="accent1"/>
-          </a:lnRef>
-          <a:fillRef idx="3">
-            <a:schemeClr val="accent1"/>
-          </a:fillRef>
-          <a:effectRef idx="2">
-            <a:schemeClr val="accent1"/>
-          </a:effectRef>
-          <a:fontRef idx="minor">
-            <a:schemeClr val="lt1"/>
-          </a:fontRef>
-        </p:style>
-        <p:txBody>
-          <a:bodyPr rtlCol="0" anchor="ctr"/>
-          <a:lstStyle/>
-          <a:p>
-            <a:pPr algn="ctr"/>
-          </a:p>
-        </p:txBody>
-      </p:sp>
-      <p:sp>
-        <p:nvSpPr>
-          <p:cNvPr id="39" name="TextBox 38"/>
-          <p:cNvSpPr txBox="1"/>
-          <p:nvPr/>
-        </p:nvSpPr>
-        <p:spPr>
-          <a:xfrm>
-            <a:off x="9784080" y="1755648"/>
-            <a:ext cx="2157984" cy="146304"/>
-          </a:xfrm>
-          <a:prstGeom prst="rect">
-            <a:avLst/>
-          </a:prstGeom>
-          <a:noFill/>
-        </p:spPr>
-        <p:txBody>
-          <a:bodyPr wrap="square">
-            <a:spAutoFit/>
-          </a:bodyPr>
-          <a:lstStyle/>
-          <a:p>
-            <a:pPr algn="l">
-              <a:spcAft>
-                <a:spcPts val="300"/>
-              </a:spcAft>
-            </a:pPr>
-            <a:r>
-              <a:rPr sz="900" b="1">
-                <a:solidFill>
-                  <a:srgbClr val="C9A227"/>
-                </a:solidFill>
-                <a:latin typeface="Calibri"/>
-              </a:rPr>
-              <a:t>000025-36</a:t>
-            </a:r>
-          </a:p>
-        </p:txBody>
-      </p:sp>
-      <p:sp>
-        <p:nvSpPr>
-          <p:cNvPr id="40" name="TextBox 39"/>
-          <p:cNvSpPr txBox="1"/>
-          <p:nvPr/>
-        </p:nvSpPr>
-        <p:spPr>
-          <a:xfrm>
-            <a:off x="9784080" y="1920240"/>
-            <a:ext cx="2157984" cy="201168"/>
-          </a:xfrm>
-          <a:prstGeom prst="rect">
-            <a:avLst/>
-          </a:prstGeom>
-          <a:noFill/>
-        </p:spPr>
-        <p:txBody>
-          <a:bodyPr wrap="square">
-            <a:spAutoFit/>
-          </a:bodyPr>
-          <a:lstStyle/>
-          <a:p>
-            <a:pPr algn="l">
-              <a:spcAft>
-                <a:spcPts val="300"/>
-              </a:spcAft>
-            </a:pPr>
-            <a:r>
-              <a:rPr sz="1100" b="1">
-                <a:solidFill>
-                  <a:srgbClr val="0D3B66"/>
-                </a:solidFill>
-                <a:latin typeface="Calibri"/>
-              </a:rPr>
-              <a:t>DL Kennedy</a:t>
-            </a:r>
-          </a:p>
-        </p:txBody>
-      </p:sp>
-      <p:sp>
-        <p:nvSpPr>
-          <p:cNvPr id="41" name="TextBox 40"/>
-          <p:cNvSpPr txBox="1"/>
-          <p:nvPr/>
-        </p:nvSpPr>
-        <p:spPr>
-          <a:xfrm>
-            <a:off x="9784080" y="2139696"/>
-            <a:ext cx="2157984" cy="164592"/>
-          </a:xfrm>
-          <a:prstGeom prst="rect">
-            <a:avLst/>
-          </a:prstGeom>
-          <a:noFill/>
-        </p:spPr>
-        <p:txBody>
-          <a:bodyPr wrap="square">
-            <a:spAutoFit/>
-          </a:bodyPr>
-          <a:lstStyle/>
-          <a:p>
-            <a:pPr algn="l">
-              <a:spcAft>
-                <a:spcPts val="300"/>
-              </a:spcAft>
-            </a:pPr>
-            <a:r>
-              <a:rPr sz="800" b="0">
-                <a:solidFill>
-                  <a:srgbClr val="5A5A5A"/>
-                </a:solidFill>
-                <a:latin typeface="Calibri"/>
-              </a:rPr>
-              <a:t>sale de 27</a:t>
-            </a:r>
-          </a:p>
-        </p:txBody>
-      </p:sp>
-      <p:sp>
-        <p:nvSpPr>
-          <p:cNvPr id="42" name="Rounded Rectangle 41"/>
-          <p:cNvSpPr/>
-          <p:nvPr/>
-        </p:nvSpPr>
-        <p:spPr>
-          <a:xfrm>
-            <a:off x="201168" y="2432304"/>
-            <a:ext cx="7973568" cy="3182111"/>
+            <a:off x="201168" y="1737360"/>
+            <a:ext cx="5833872" cy="3803904"/>
           </a:xfrm>
           <a:prstGeom prst="roundRect">
             <a:avLst>
@@ -7744,9 +6386,48 @@
           </a:p>
         </p:txBody>
       </p:sp>
+      <p:sp>
+        <p:nvSpPr>
+          <p:cNvPr id="10" name="TextBox 9"/>
+          <p:cNvSpPr txBox="1"/>
+          <p:nvPr/>
+        </p:nvSpPr>
+        <p:spPr>
+          <a:xfrm>
+            <a:off x="329184" y="1773936"/>
+            <a:ext cx="5577840" cy="201168"/>
+          </a:xfrm>
+          <a:prstGeom prst="rect">
+            <a:avLst/>
+          </a:prstGeom>
+          <a:noFill/>
+        </p:spPr>
+        <p:txBody>
+          <a:bodyPr wrap="square">
+            <a:spAutoFit/>
+          </a:bodyPr>
+          <a:lstStyle/>
+          <a:p>
+            <a:pPr algn="l">
+              <a:spcAft>
+                <a:spcPts val="300"/>
+              </a:spcAft>
+            </a:pPr>
+            <a:r>
+              <a:rPr sz="1100" b="1">
+                <a:solidFill>
+                  <a:srgbClr val="1F77B4"/>
+                </a:solidFill>
+                <a:latin typeface="Calibri"/>
+              </a:rPr>
+              <a:t>NOCHE 00–06  ·  los dos anillos</a:t>
+            </a:r>
+          </a:p>
+        </p:txBody>
+      </p:sp>
       <p:pic>
         <p:nvPicPr>
-          <p:cNvPr id="43" name="Picture 42" descr="pak_mensual_may_ago.png"/>
+          <p:cNvPr id="11" name="Picture 10" descr="cur_noches_jun_ago.png"/>
           <p:cNvPicPr>
             <a:picLocks noChangeAspect="1"/>
           </p:cNvPicPr>
@@ -7760,8 +6441,8 @@
         </p:blipFill>
         <p:spPr>
           <a:xfrm>
-            <a:off x="605863" y="2487168"/>
-            <a:ext cx="7164176" cy="3072383"/>
+            <a:off x="292608" y="2462304"/>
+            <a:ext cx="5650992" cy="2518606"/>
           </a:xfrm>
           <a:prstGeom prst="rect">
             <a:avLst/>
@@ -7770,14 +6451,14 @@
       </p:pic>
       <p:sp>
         <p:nvSpPr>
-          <p:cNvPr id="44" name="Rounded Rectangle 43"/>
+          <p:cNvPr id="12" name="Rounded Rectangle 11"/>
           <p:cNvSpPr/>
           <p:nvPr/>
         </p:nvSpPr>
         <p:spPr>
           <a:xfrm>
-            <a:off x="8302752" y="2432304"/>
-            <a:ext cx="3675887" cy="3182111"/>
+            <a:off x="6163056" y="1737360"/>
+            <a:ext cx="5815584" cy="3803904"/>
           </a:xfrm>
           <a:prstGeom prst="roundRect">
             <a:avLst>
@@ -7785,12 +6466,10 @@
             </a:avLst>
           </a:prstGeom>
           <a:solidFill>
-            <a:srgbClr val="FFFFFF"/>
+            <a:srgbClr val="F5F7FA"/>
           </a:solidFill>
-          <a:ln w="6350">
-            <a:solidFill>
-              <a:srgbClr val="1F77B4"/>
-            </a:solidFill>
+          <a:ln>
+            <a:noFill/>
           </a:ln>
         </p:spPr>
         <p:style>
@@ -7817,14 +6496,14 @@
       </p:sp>
       <p:sp>
         <p:nvSpPr>
-          <p:cNvPr id="45" name="TextBox 44"/>
-          <p:cNvSpPr txBox="1"/>
-          <p:nvPr/>
-        </p:nvSpPr>
-        <p:spPr>
-          <a:xfrm>
-            <a:off x="8430768" y="2478024"/>
-            <a:ext cx="3419856" cy="164592"/>
+          <p:cNvPr id="13" name="TextBox 12"/>
+          <p:cNvSpPr txBox="1"/>
+          <p:nvPr/>
+        </p:nvSpPr>
+        <p:spPr>
+          <a:xfrm>
+            <a:off x="6291072" y="1773936"/>
+            <a:ext cx="5559552" cy="201168"/>
           </a:xfrm>
           <a:prstGeom prst="rect">
             <a:avLst/>
@@ -7849,935 +6528,45 @@
                 </a:solidFill>
                 <a:latin typeface="Calibri"/>
               </a:rPr>
-              <a:t>JULIO · cabecera</a:t>
-            </a:r>
-          </a:p>
-        </p:txBody>
-      </p:sp>
-      <p:sp>
-        <p:nvSpPr>
-          <p:cNvPr id="46" name="TextBox 45"/>
-          <p:cNvSpPr txBox="1"/>
-          <p:nvPr/>
-        </p:nvSpPr>
-        <p:spPr>
-          <a:xfrm>
-            <a:off x="8430768" y="2642616"/>
-            <a:ext cx="3419856" cy="201168"/>
-          </a:xfrm>
-          <a:prstGeom prst="rect">
-            <a:avLst/>
-          </a:prstGeom>
-          <a:noFill/>
-        </p:spPr>
-        <p:txBody>
-          <a:bodyPr wrap="square">
-            <a:spAutoFit/>
-          </a:bodyPr>
-          <a:lstStyle/>
-          <a:p>
-            <a:pPr algn="l">
-              <a:spcAft>
-                <a:spcPts val="300"/>
-              </a:spcAft>
-            </a:pPr>
-            <a:r>
-              <a:rPr sz="1200" b="0">
-                <a:solidFill>
-                  <a:srgbClr val="5A5A5A"/>
-                </a:solidFill>
-                <a:latin typeface="Calibri"/>
-              </a:rPr>
-              <a:t>El recinto sumó 31.239 m³</a:t>
-            </a:r>
-          </a:p>
-        </p:txBody>
-      </p:sp>
-      <p:sp>
-        <p:nvSpPr>
-          <p:cNvPr id="47" name="Rounded Rectangle 46"/>
+              <a:t>DÍA  ·  promedio mes  ·  Sur un poco sobre Norte</a:t>
+            </a:r>
+          </a:p>
+        </p:txBody>
+      </p:sp>
+      <p:pic>
+        <p:nvPicPr>
+          <p:cNvPr id="14" name="Picture 13" descr="cur_dia_sur_norte.png"/>
+          <p:cNvPicPr>
+            <a:picLocks noChangeAspect="1"/>
+          </p:cNvPicPr>
+          <p:nvPr/>
+        </p:nvPicPr>
+        <p:blipFill>
+          <a:blip r:embed="rId4"/>
+          <a:stretch>
+            <a:fillRect/>
+          </a:stretch>
+        </p:blipFill>
+        <p:spPr>
+          <a:xfrm>
+            <a:off x="6254496" y="2466379"/>
+            <a:ext cx="5632704" cy="2510456"/>
+          </a:xfrm>
+          <a:prstGeom prst="rect">
+            <a:avLst/>
+          </a:prstGeom>
+        </p:spPr>
+      </p:pic>
+      <p:sp>
+        <p:nvSpPr>
+          <p:cNvPr id="15" name="Rounded Rectangle 14"/>
           <p:cNvSpPr/>
           <p:nvPr/>
         </p:nvSpPr>
         <p:spPr>
           <a:xfrm>
-            <a:off x="8430768" y="2852928"/>
-            <a:ext cx="3419856" cy="347471"/>
-          </a:xfrm>
-          <a:prstGeom prst="roundRect">
-            <a:avLst>
-              <a:gd name="adj" fmla="val 8000"/>
-            </a:avLst>
-          </a:prstGeom>
-          <a:solidFill>
-            <a:srgbClr val="F5F7FA"/>
-          </a:solidFill>
-          <a:ln w="6350">
-            <a:solidFill>
-              <a:srgbClr val="7BA3C9"/>
-            </a:solidFill>
-          </a:ln>
-        </p:spPr>
-        <p:style>
-          <a:lnRef idx="1">
-            <a:schemeClr val="accent1"/>
-          </a:lnRef>
-          <a:fillRef idx="3">
-            <a:schemeClr val="accent1"/>
-          </a:fillRef>
-          <a:effectRef idx="2">
-            <a:schemeClr val="accent1"/>
-          </a:effectRef>
-          <a:fontRef idx="minor">
-            <a:schemeClr val="lt1"/>
-          </a:fontRef>
-        </p:style>
-        <p:txBody>
-          <a:bodyPr rtlCol="0" anchor="ctr"/>
-          <a:lstStyle/>
-          <a:p>
-            <a:pPr algn="ctr"/>
-          </a:p>
-        </p:txBody>
-      </p:sp>
-      <p:sp>
-        <p:nvSpPr>
-          <p:cNvPr id="48" name="TextBox 47"/>
-          <p:cNvSpPr txBox="1"/>
-          <p:nvPr/>
-        </p:nvSpPr>
-        <p:spPr>
-          <a:xfrm>
-            <a:off x="8540496" y="2880360"/>
-            <a:ext cx="3200400" cy="145938"/>
-          </a:xfrm>
-          <a:prstGeom prst="rect">
-            <a:avLst/>
-          </a:prstGeom>
-          <a:noFill/>
-        </p:spPr>
-        <p:txBody>
-          <a:bodyPr wrap="square">
-            <a:spAutoFit/>
-          </a:bodyPr>
-          <a:lstStyle/>
-          <a:p>
-            <a:pPr algn="l">
-              <a:spcAft>
-                <a:spcPts val="300"/>
-              </a:spcAft>
-            </a:pPr>
-            <a:r>
-              <a:rPr sz="1000" b="1">
-                <a:solidFill>
-                  <a:srgbClr val="7BA3C9"/>
-                </a:solidFill>
-                <a:latin typeface="Calibri"/>
-              </a:rPr>
-              <a:t>Sandía Antigua</a:t>
-            </a:r>
-          </a:p>
-        </p:txBody>
-      </p:sp>
-      <p:sp>
-        <p:nvSpPr>
-          <p:cNvPr id="49" name="TextBox 48"/>
-          <p:cNvSpPr txBox="1"/>
-          <p:nvPr/>
-        </p:nvSpPr>
-        <p:spPr>
-          <a:xfrm>
-            <a:off x="8540496" y="2998866"/>
-            <a:ext cx="3200400" cy="180685"/>
-          </a:xfrm>
-          <a:prstGeom prst="rect">
-            <a:avLst/>
-          </a:prstGeom>
-          <a:noFill/>
-        </p:spPr>
-        <p:txBody>
-          <a:bodyPr wrap="square">
-            <a:spAutoFit/>
-          </a:bodyPr>
-          <a:lstStyle/>
-          <a:p>
-            <a:pPr algn="l">
-              <a:spcAft>
-                <a:spcPts val="300"/>
-              </a:spcAft>
-            </a:pPr>
-            <a:r>
-              <a:rPr sz="1200" b="1">
-                <a:solidFill>
-                  <a:srgbClr val="0D3B66"/>
-                </a:solidFill>
-                <a:latin typeface="Calibri"/>
-              </a:rPr>
-              <a:t>13.661 m³    43,7 %</a:t>
-            </a:r>
-          </a:p>
-        </p:txBody>
-      </p:sp>
-      <p:sp>
-        <p:nvSpPr>
-          <p:cNvPr id="50" name="Rounded Rectangle 49"/>
-          <p:cNvSpPr/>
-          <p:nvPr/>
-        </p:nvSpPr>
-        <p:spPr>
-          <a:xfrm>
-            <a:off x="8430768" y="3236976"/>
-            <a:ext cx="3419856" cy="347471"/>
-          </a:xfrm>
-          <a:prstGeom prst="roundRect">
-            <a:avLst>
-              <a:gd name="adj" fmla="val 8000"/>
-            </a:avLst>
-          </a:prstGeom>
-          <a:solidFill>
-            <a:srgbClr val="F5F7FA"/>
-          </a:solidFill>
-          <a:ln w="6350">
-            <a:solidFill>
-              <a:srgbClr val="46648C"/>
-            </a:solidFill>
-          </a:ln>
-        </p:spPr>
-        <p:style>
-          <a:lnRef idx="1">
-            <a:schemeClr val="accent1"/>
-          </a:lnRef>
-          <a:fillRef idx="3">
-            <a:schemeClr val="accent1"/>
-          </a:fillRef>
-          <a:effectRef idx="2">
-            <a:schemeClr val="accent1"/>
-          </a:effectRef>
-          <a:fontRef idx="minor">
-            <a:schemeClr val="lt1"/>
-          </a:fontRef>
-        </p:style>
-        <p:txBody>
-          <a:bodyPr rtlCol="0" anchor="ctr"/>
-          <a:lstStyle/>
-          <a:p>
-            <a:pPr algn="ctr"/>
-          </a:p>
-        </p:txBody>
-      </p:sp>
-      <p:sp>
-        <p:nvSpPr>
-          <p:cNvPr id="51" name="TextBox 50"/>
-          <p:cNvSpPr txBox="1"/>
-          <p:nvPr/>
-        </p:nvSpPr>
-        <p:spPr>
-          <a:xfrm>
-            <a:off x="8540496" y="3264408"/>
-            <a:ext cx="3200400" cy="145938"/>
-          </a:xfrm>
-          <a:prstGeom prst="rect">
-            <a:avLst/>
-          </a:prstGeom>
-          <a:noFill/>
-        </p:spPr>
-        <p:txBody>
-          <a:bodyPr wrap="square">
-            <a:spAutoFit/>
-          </a:bodyPr>
-          <a:lstStyle/>
-          <a:p>
-            <a:pPr algn="l">
-              <a:spcAft>
-                <a:spcPts val="300"/>
-              </a:spcAft>
-            </a:pPr>
-            <a:r>
-              <a:rPr sz="1000" b="1">
-                <a:solidFill>
-                  <a:srgbClr val="46648C"/>
-                </a:solidFill>
-                <a:latin typeface="Calibri"/>
-              </a:rPr>
-              <a:t>Sandía Nueva</a:t>
-            </a:r>
-          </a:p>
-        </p:txBody>
-      </p:sp>
-      <p:sp>
-        <p:nvSpPr>
-          <p:cNvPr id="52" name="TextBox 51"/>
-          <p:cNvSpPr txBox="1"/>
-          <p:nvPr/>
-        </p:nvSpPr>
-        <p:spPr>
-          <a:xfrm>
-            <a:off x="8540496" y="3382914"/>
-            <a:ext cx="3200400" cy="180685"/>
-          </a:xfrm>
-          <a:prstGeom prst="rect">
-            <a:avLst/>
-          </a:prstGeom>
-          <a:noFill/>
-        </p:spPr>
-        <p:txBody>
-          <a:bodyPr wrap="square">
-            <a:spAutoFit/>
-          </a:bodyPr>
-          <a:lstStyle/>
-          <a:p>
-            <a:pPr algn="l">
-              <a:spcAft>
-                <a:spcPts val="300"/>
-              </a:spcAft>
-            </a:pPr>
-            <a:r>
-              <a:rPr sz="1200" b="1">
-                <a:solidFill>
-                  <a:srgbClr val="0D3B66"/>
-                </a:solidFill>
-                <a:latin typeface="Calibri"/>
-              </a:rPr>
-              <a:t>9.619 m³    30,8 %</a:t>
-            </a:r>
-          </a:p>
-        </p:txBody>
-      </p:sp>
-      <p:sp>
-        <p:nvSpPr>
-          <p:cNvPr id="53" name="Rounded Rectangle 52"/>
-          <p:cNvSpPr/>
-          <p:nvPr/>
-        </p:nvSpPr>
-        <p:spPr>
-          <a:xfrm>
-            <a:off x="8430768" y="3621024"/>
-            <a:ext cx="3419856" cy="347471"/>
-          </a:xfrm>
-          <a:prstGeom prst="roundRect">
-            <a:avLst>
-              <a:gd name="adj" fmla="val 8000"/>
-            </a:avLst>
-          </a:prstGeom>
-          <a:solidFill>
-            <a:srgbClr val="F5F7FA"/>
-          </a:solidFill>
-          <a:ln w="6350">
-            <a:solidFill>
-              <a:srgbClr val="C9A227"/>
-            </a:solidFill>
-          </a:ln>
-        </p:spPr>
-        <p:style>
-          <a:lnRef idx="1">
-            <a:schemeClr val="accent1"/>
-          </a:lnRef>
-          <a:fillRef idx="3">
-            <a:schemeClr val="accent1"/>
-          </a:fillRef>
-          <a:effectRef idx="2">
-            <a:schemeClr val="accent1"/>
-          </a:effectRef>
-          <a:fontRef idx="minor">
-            <a:schemeClr val="lt1"/>
-          </a:fontRef>
-        </p:style>
-        <p:txBody>
-          <a:bodyPr rtlCol="0" anchor="ctr"/>
-          <a:lstStyle/>
-          <a:p>
-            <a:pPr algn="ctr"/>
-          </a:p>
-        </p:txBody>
-      </p:sp>
-      <p:sp>
-        <p:nvSpPr>
-          <p:cNvPr id="54" name="TextBox 53"/>
-          <p:cNvSpPr txBox="1"/>
-          <p:nvPr/>
-        </p:nvSpPr>
-        <p:spPr>
-          <a:xfrm>
-            <a:off x="8540496" y="3648456"/>
-            <a:ext cx="3200400" cy="145938"/>
-          </a:xfrm>
-          <a:prstGeom prst="rect">
-            <a:avLst/>
-          </a:prstGeom>
-          <a:noFill/>
-        </p:spPr>
-        <p:txBody>
-          <a:bodyPr wrap="square">
-            <a:spAutoFit/>
-          </a:bodyPr>
-          <a:lstStyle/>
-          <a:p>
-            <a:pPr algn="l">
-              <a:spcAft>
-                <a:spcPts val="300"/>
-              </a:spcAft>
-            </a:pPr>
-            <a:r>
-              <a:rPr sz="1000" b="1">
-                <a:solidFill>
-                  <a:srgbClr val="C9A227"/>
-                </a:solidFill>
-                <a:latin typeface="Calibri"/>
-              </a:rPr>
-              <a:t>Locales Gast.</a:t>
-            </a:r>
-          </a:p>
-        </p:txBody>
-      </p:sp>
-      <p:sp>
-        <p:nvSpPr>
-          <p:cNvPr id="55" name="TextBox 54"/>
-          <p:cNvSpPr txBox="1"/>
-          <p:nvPr/>
-        </p:nvSpPr>
-        <p:spPr>
-          <a:xfrm>
-            <a:off x="8540496" y="3766962"/>
-            <a:ext cx="3200400" cy="180685"/>
-          </a:xfrm>
-          <a:prstGeom prst="rect">
-            <a:avLst/>
-          </a:prstGeom>
-          <a:noFill/>
-        </p:spPr>
-        <p:txBody>
-          <a:bodyPr wrap="square">
-            <a:spAutoFit/>
-          </a:bodyPr>
-          <a:lstStyle/>
-          <a:p>
-            <a:pPr algn="l">
-              <a:spcAft>
-                <a:spcPts val="300"/>
-              </a:spcAft>
-            </a:pPr>
-            <a:r>
-              <a:rPr sz="1200" b="1">
-                <a:solidFill>
-                  <a:srgbClr val="0D3B66"/>
-                </a:solidFill>
-                <a:latin typeface="Calibri"/>
-              </a:rPr>
-              <a:t>4.583 m³    14,7 %</a:t>
-            </a:r>
-          </a:p>
-        </p:txBody>
-      </p:sp>
-      <p:sp>
-        <p:nvSpPr>
-          <p:cNvPr id="56" name="Rounded Rectangle 55"/>
-          <p:cNvSpPr/>
-          <p:nvPr/>
-        </p:nvSpPr>
-        <p:spPr>
-          <a:xfrm>
-            <a:off x="8430768" y="4005072"/>
-            <a:ext cx="3419856" cy="347471"/>
-          </a:xfrm>
-          <a:prstGeom prst="roundRect">
-            <a:avLst>
-              <a:gd name="adj" fmla="val 8000"/>
-            </a:avLst>
-          </a:prstGeom>
-          <a:solidFill>
-            <a:srgbClr val="F5F7FA"/>
-          </a:solidFill>
-          <a:ln w="6350">
-            <a:solidFill>
-              <a:srgbClr val="C45C26"/>
-            </a:solidFill>
-          </a:ln>
-        </p:spPr>
-        <p:style>
-          <a:lnRef idx="1">
-            <a:schemeClr val="accent1"/>
-          </a:lnRef>
-          <a:fillRef idx="3">
-            <a:schemeClr val="accent1"/>
-          </a:fillRef>
-          <a:effectRef idx="2">
-            <a:schemeClr val="accent1"/>
-          </a:effectRef>
-          <a:fontRef idx="minor">
-            <a:schemeClr val="lt1"/>
-          </a:fontRef>
-        </p:style>
-        <p:txBody>
-          <a:bodyPr rtlCol="0" anchor="ctr"/>
-          <a:lstStyle/>
-          <a:p>
-            <a:pPr algn="ctr"/>
-          </a:p>
-        </p:txBody>
-      </p:sp>
-      <p:sp>
-        <p:nvSpPr>
-          <p:cNvPr id="57" name="TextBox 56"/>
-          <p:cNvSpPr txBox="1"/>
-          <p:nvPr/>
-        </p:nvSpPr>
-        <p:spPr>
-          <a:xfrm>
-            <a:off x="8540496" y="4032504"/>
-            <a:ext cx="3200400" cy="145938"/>
-          </a:xfrm>
-          <a:prstGeom prst="rect">
-            <a:avLst/>
-          </a:prstGeom>
-          <a:noFill/>
-        </p:spPr>
-        <p:txBody>
-          <a:bodyPr wrap="square">
-            <a:spAutoFit/>
-          </a:bodyPr>
-          <a:lstStyle/>
-          <a:p>
-            <a:pPr algn="l">
-              <a:spcAft>
-                <a:spcPts val="300"/>
-              </a:spcAft>
-            </a:pPr>
-            <a:r>
-              <a:rPr sz="1000" b="1">
-                <a:solidFill>
-                  <a:srgbClr val="C45C26"/>
-                </a:solidFill>
-                <a:latin typeface="Calibri"/>
-              </a:rPr>
-              <a:t>Matriz Andén</a:t>
-            </a:r>
-          </a:p>
-        </p:txBody>
-      </p:sp>
-      <p:sp>
-        <p:nvSpPr>
-          <p:cNvPr id="58" name="TextBox 57"/>
-          <p:cNvSpPr txBox="1"/>
-          <p:nvPr/>
-        </p:nvSpPr>
-        <p:spPr>
-          <a:xfrm>
-            <a:off x="8540496" y="4151010"/>
-            <a:ext cx="3200400" cy="180685"/>
-          </a:xfrm>
-          <a:prstGeom prst="rect">
-            <a:avLst/>
-          </a:prstGeom>
-          <a:noFill/>
-        </p:spPr>
-        <p:txBody>
-          <a:bodyPr wrap="square">
-            <a:spAutoFit/>
-          </a:bodyPr>
-          <a:lstStyle/>
-          <a:p>
-            <a:pPr algn="l">
-              <a:spcAft>
-                <a:spcPts val="300"/>
-              </a:spcAft>
-            </a:pPr>
-            <a:r>
-              <a:rPr sz="1200" b="1">
-                <a:solidFill>
-                  <a:srgbClr val="0D3B66"/>
-                </a:solidFill>
-                <a:latin typeface="Calibri"/>
-              </a:rPr>
-              <a:t>3.086 m³    9,9 %</a:t>
-            </a:r>
-          </a:p>
-        </p:txBody>
-      </p:sp>
-      <p:sp>
-        <p:nvSpPr>
-          <p:cNvPr id="59" name="Rounded Rectangle 58"/>
-          <p:cNvSpPr/>
-          <p:nvPr/>
-        </p:nvSpPr>
-        <p:spPr>
-          <a:xfrm>
-            <a:off x="8430768" y="4389120"/>
-            <a:ext cx="3419856" cy="347471"/>
-          </a:xfrm>
-          <a:prstGeom prst="roundRect">
-            <a:avLst>
-              <a:gd name="adj" fmla="val 8000"/>
-            </a:avLst>
-          </a:prstGeom>
-          <a:solidFill>
-            <a:srgbClr val="F5F7FA"/>
-          </a:solidFill>
-          <a:ln w="6350">
-            <a:solidFill>
-              <a:srgbClr val="5A8C6E"/>
-            </a:solidFill>
-          </a:ln>
-        </p:spPr>
-        <p:style>
-          <a:lnRef idx="1">
-            <a:schemeClr val="accent1"/>
-          </a:lnRef>
-          <a:fillRef idx="3">
-            <a:schemeClr val="accent1"/>
-          </a:fillRef>
-          <a:effectRef idx="2">
-            <a:schemeClr val="accent1"/>
-          </a:effectRef>
-          <a:fontRef idx="minor">
-            <a:schemeClr val="lt1"/>
-          </a:fontRef>
-        </p:style>
-        <p:txBody>
-          <a:bodyPr rtlCol="0" anchor="ctr"/>
-          <a:lstStyle/>
-          <a:p>
-            <a:pPr algn="ctr"/>
-          </a:p>
-        </p:txBody>
-      </p:sp>
-      <p:sp>
-        <p:nvSpPr>
-          <p:cNvPr id="60" name="TextBox 59"/>
-          <p:cNvSpPr txBox="1"/>
-          <p:nvPr/>
-        </p:nvSpPr>
-        <p:spPr>
-          <a:xfrm>
-            <a:off x="8540496" y="4416552"/>
-            <a:ext cx="3200400" cy="145938"/>
-          </a:xfrm>
-          <a:prstGeom prst="rect">
-            <a:avLst/>
-          </a:prstGeom>
-          <a:noFill/>
-        </p:spPr>
-        <p:txBody>
-          <a:bodyPr wrap="square">
-            <a:spAutoFit/>
-          </a:bodyPr>
-          <a:lstStyle/>
-          <a:p>
-            <a:pPr algn="l">
-              <a:spcAft>
-                <a:spcPts val="300"/>
-              </a:spcAft>
-            </a:pPr>
-            <a:r>
-              <a:rPr sz="1000" b="1">
-                <a:solidFill>
-                  <a:srgbClr val="5A8C6E"/>
-                </a:solidFill>
-                <a:latin typeface="Calibri"/>
-              </a:rPr>
-              <a:t>Pileta</a:t>
-            </a:r>
-          </a:p>
-        </p:txBody>
-      </p:sp>
-      <p:sp>
-        <p:nvSpPr>
-          <p:cNvPr id="61" name="TextBox 60"/>
-          <p:cNvSpPr txBox="1"/>
-          <p:nvPr/>
-        </p:nvSpPr>
-        <p:spPr>
-          <a:xfrm>
-            <a:off x="8540496" y="4535058"/>
-            <a:ext cx="3200400" cy="180685"/>
-          </a:xfrm>
-          <a:prstGeom prst="rect">
-            <a:avLst/>
-          </a:prstGeom>
-          <a:noFill/>
-        </p:spPr>
-        <p:txBody>
-          <a:bodyPr wrap="square">
-            <a:spAutoFit/>
-          </a:bodyPr>
-          <a:lstStyle/>
-          <a:p>
-            <a:pPr algn="l">
-              <a:spcAft>
-                <a:spcPts val="300"/>
-              </a:spcAft>
-            </a:pPr>
-            <a:r>
-              <a:rPr sz="1200" b="1">
-                <a:solidFill>
-                  <a:srgbClr val="0D3B66"/>
-                </a:solidFill>
-                <a:latin typeface="Calibri"/>
-              </a:rPr>
-              <a:t>172 m³    0,5 %</a:t>
-            </a:r>
-          </a:p>
-        </p:txBody>
-      </p:sp>
-      <p:sp>
-        <p:nvSpPr>
-          <p:cNvPr id="62" name="Rounded Rectangle 61"/>
-          <p:cNvSpPr/>
-          <p:nvPr/>
-        </p:nvSpPr>
-        <p:spPr>
-          <a:xfrm>
-            <a:off x="8430768" y="4773168"/>
-            <a:ext cx="3419856" cy="347471"/>
-          </a:xfrm>
-          <a:prstGeom prst="roundRect">
-            <a:avLst>
-              <a:gd name="adj" fmla="val 8000"/>
-            </a:avLst>
-          </a:prstGeom>
-          <a:solidFill>
-            <a:srgbClr val="F5F7FA"/>
-          </a:solidFill>
-          <a:ln w="6350">
-            <a:solidFill>
-              <a:srgbClr val="A0783C"/>
-            </a:solidFill>
-          </a:ln>
-        </p:spPr>
-        <p:style>
-          <a:lnRef idx="1">
-            <a:schemeClr val="accent1"/>
-          </a:lnRef>
-          <a:fillRef idx="3">
-            <a:schemeClr val="accent1"/>
-          </a:fillRef>
-          <a:effectRef idx="2">
-            <a:schemeClr val="accent1"/>
-          </a:effectRef>
-          <a:fontRef idx="minor">
-            <a:schemeClr val="lt1"/>
-          </a:fontRef>
-        </p:style>
-        <p:txBody>
-          <a:bodyPr rtlCol="0" anchor="ctr"/>
-          <a:lstStyle/>
-          <a:p>
-            <a:pPr algn="ctr"/>
-          </a:p>
-        </p:txBody>
-      </p:sp>
-      <p:sp>
-        <p:nvSpPr>
-          <p:cNvPr id="63" name="TextBox 62"/>
-          <p:cNvSpPr txBox="1"/>
-          <p:nvPr/>
-        </p:nvSpPr>
-        <p:spPr>
-          <a:xfrm>
-            <a:off x="8540496" y="4800600"/>
-            <a:ext cx="3200400" cy="145938"/>
-          </a:xfrm>
-          <a:prstGeom prst="rect">
-            <a:avLst/>
-          </a:prstGeom>
-          <a:noFill/>
-        </p:spPr>
-        <p:txBody>
-          <a:bodyPr wrap="square">
-            <a:spAutoFit/>
-          </a:bodyPr>
-          <a:lstStyle/>
-          <a:p>
-            <a:pPr algn="l">
-              <a:spcAft>
-                <a:spcPts val="300"/>
-              </a:spcAft>
-            </a:pPr>
-            <a:r>
-              <a:rPr sz="1000" b="1">
-                <a:solidFill>
-                  <a:srgbClr val="A0783C"/>
-                </a:solidFill>
-                <a:latin typeface="Calibri"/>
-              </a:rPr>
-              <a:t>Restaurante</a:t>
-            </a:r>
-          </a:p>
-        </p:txBody>
-      </p:sp>
-      <p:sp>
-        <p:nvSpPr>
-          <p:cNvPr id="64" name="TextBox 63"/>
-          <p:cNvSpPr txBox="1"/>
-          <p:nvPr/>
-        </p:nvSpPr>
-        <p:spPr>
-          <a:xfrm>
-            <a:off x="8540496" y="4919106"/>
-            <a:ext cx="3200400" cy="180685"/>
-          </a:xfrm>
-          <a:prstGeom prst="rect">
-            <a:avLst/>
-          </a:prstGeom>
-          <a:noFill/>
-        </p:spPr>
-        <p:txBody>
-          <a:bodyPr wrap="square">
-            <a:spAutoFit/>
-          </a:bodyPr>
-          <a:lstStyle/>
-          <a:p>
-            <a:pPr algn="l">
-              <a:spcAft>
-                <a:spcPts val="300"/>
-              </a:spcAft>
-            </a:pPr>
-            <a:r>
-              <a:rPr sz="1200" b="1">
-                <a:solidFill>
-                  <a:srgbClr val="0D3B66"/>
-                </a:solidFill>
-                <a:latin typeface="Calibri"/>
-              </a:rPr>
-              <a:t>98 m³    0,3 %</a:t>
-            </a:r>
-          </a:p>
-        </p:txBody>
-      </p:sp>
-      <p:sp>
-        <p:nvSpPr>
-          <p:cNvPr id="65" name="Rounded Rectangle 64"/>
-          <p:cNvSpPr/>
-          <p:nvPr/>
-        </p:nvSpPr>
-        <p:spPr>
-          <a:xfrm>
-            <a:off x="8430768" y="5157216"/>
-            <a:ext cx="3419856" cy="347471"/>
-          </a:xfrm>
-          <a:prstGeom prst="roundRect">
-            <a:avLst>
-              <a:gd name="adj" fmla="val 8000"/>
-            </a:avLst>
-          </a:prstGeom>
-          <a:solidFill>
-            <a:srgbClr val="F5F7FA"/>
-          </a:solidFill>
-          <a:ln w="6350">
-            <a:solidFill>
-              <a:srgbClr val="8C5A5A"/>
-            </a:solidFill>
-          </a:ln>
-        </p:spPr>
-        <p:style>
-          <a:lnRef idx="1">
-            <a:schemeClr val="accent1"/>
-          </a:lnRef>
-          <a:fillRef idx="3">
-            <a:schemeClr val="accent1"/>
-          </a:fillRef>
-          <a:effectRef idx="2">
-            <a:schemeClr val="accent1"/>
-          </a:effectRef>
-          <a:fontRef idx="minor">
-            <a:schemeClr val="lt1"/>
-          </a:fontRef>
-        </p:style>
-        <p:txBody>
-          <a:bodyPr rtlCol="0" anchor="ctr"/>
-          <a:lstStyle/>
-          <a:p>
-            <a:pPr algn="ctr"/>
-          </a:p>
-        </p:txBody>
-      </p:sp>
-      <p:sp>
-        <p:nvSpPr>
-          <p:cNvPr id="66" name="TextBox 65"/>
-          <p:cNvSpPr txBox="1"/>
-          <p:nvPr/>
-        </p:nvSpPr>
-        <p:spPr>
-          <a:xfrm>
-            <a:off x="8540496" y="5184648"/>
-            <a:ext cx="3200400" cy="145938"/>
-          </a:xfrm>
-          <a:prstGeom prst="rect">
-            <a:avLst/>
-          </a:prstGeom>
-          <a:noFill/>
-        </p:spPr>
-        <p:txBody>
-          <a:bodyPr wrap="square">
-            <a:spAutoFit/>
-          </a:bodyPr>
-          <a:lstStyle/>
-          <a:p>
-            <a:pPr algn="l">
-              <a:spcAft>
-                <a:spcPts val="300"/>
-              </a:spcAft>
-            </a:pPr>
-            <a:r>
-              <a:rPr sz="1000" b="1">
-                <a:solidFill>
-                  <a:srgbClr val="8C5A5A"/>
-                </a:solidFill>
-                <a:latin typeface="Calibri"/>
-              </a:rPr>
-              <a:t>Cascada</a:t>
-            </a:r>
-          </a:p>
-        </p:txBody>
-      </p:sp>
-      <p:sp>
-        <p:nvSpPr>
-          <p:cNvPr id="67" name="TextBox 66"/>
-          <p:cNvSpPr txBox="1"/>
-          <p:nvPr/>
-        </p:nvSpPr>
-        <p:spPr>
-          <a:xfrm>
-            <a:off x="8540496" y="5303154"/>
-            <a:ext cx="3200400" cy="180685"/>
-          </a:xfrm>
-          <a:prstGeom prst="rect">
-            <a:avLst/>
-          </a:prstGeom>
-          <a:noFill/>
-        </p:spPr>
-        <p:txBody>
-          <a:bodyPr wrap="square">
-            <a:spAutoFit/>
-          </a:bodyPr>
-          <a:lstStyle/>
-          <a:p>
-            <a:pPr algn="l">
-              <a:spcAft>
-                <a:spcPts val="300"/>
-              </a:spcAft>
-            </a:pPr>
-            <a:r>
-              <a:rPr sz="1200" b="1">
-                <a:solidFill>
-                  <a:srgbClr val="0D3B66"/>
-                </a:solidFill>
-                <a:latin typeface="Calibri"/>
-              </a:rPr>
-              <a:t>20 m³    &lt;0,1 %</a:t>
-            </a:r>
-          </a:p>
-        </p:txBody>
-      </p:sp>
-      <p:sp>
-        <p:nvSpPr>
-          <p:cNvPr id="68" name="Rounded Rectangle 67"/>
-          <p:cNvSpPr/>
-          <p:nvPr/>
-        </p:nvSpPr>
-        <p:spPr>
-          <a:xfrm>
-            <a:off x="201168" y="5705856"/>
-            <a:ext cx="11795760" cy="438912"/>
+            <a:off x="201168" y="5632704"/>
+            <a:ext cx="11777472" cy="1060704"/>
           </a:xfrm>
           <a:prstGeom prst="roundRect">
             <a:avLst>
@@ -8817,94 +6606,55 @@
       </p:sp>
       <p:sp>
         <p:nvSpPr>
-          <p:cNvPr id="69" name="TextBox 68"/>
-          <p:cNvSpPr txBox="1"/>
-          <p:nvPr/>
-        </p:nvSpPr>
-        <p:spPr>
-          <a:xfrm>
-            <a:off x="329184" y="5779008"/>
-            <a:ext cx="11539728" cy="310896"/>
-          </a:xfrm>
-          <a:prstGeom prst="rect">
-            <a:avLst/>
-          </a:prstGeom>
-          <a:noFill/>
-        </p:spPr>
-        <p:txBody>
-          <a:bodyPr wrap="square">
-            <a:spAutoFit/>
-          </a:bodyPr>
-          <a:lstStyle/>
-          <a:p>
-            <a:pPr algn="l">
-              <a:spcAft>
-                <a:spcPts val="300"/>
-              </a:spcAft>
-            </a:pPr>
-            <a:r>
-              <a:rPr sz="1100" b="0">
+          <p:cNvPr id="16" name="TextBox 15"/>
+          <p:cNvSpPr txBox="1"/>
+          <p:nvPr/>
+        </p:nvSpPr>
+        <p:spPr>
+          <a:xfrm>
+            <a:off x="365760" y="5687568"/>
+            <a:ext cx="11475720" cy="950976"/>
+          </a:xfrm>
+          <a:prstGeom prst="rect">
+            <a:avLst/>
+          </a:prstGeom>
+          <a:noFill/>
+        </p:spPr>
+        <p:txBody>
+          <a:bodyPr wrap="square">
+            <a:spAutoFit/>
+          </a:bodyPr>
+          <a:lstStyle/>
+          <a:p>
+            <a:pPr algn="l">
+              <a:spcAft>
+                <a:spcPts val="300"/>
+              </a:spcAft>
+            </a:pPr>
+            <a:r>
+              <a:rPr sz="1300" b="0">
                 <a:solidFill>
                   <a:srgbClr val="0D3B66"/>
                 </a:solidFill>
                 <a:latin typeface="Calibri"/>
               </a:rPr>
-              <a:t>Recepción 12/12/2025  ·  Capacitación 17/12/2025  ·  Francisco Jeldres  ·  Paula Azolas  ·  Mantención: C. Naranjo, M. Jara, R. Moreno, R. Díaz, J. Gutiérrez, H. Fierro</a:t>
-            </a:r>
-          </a:p>
-        </p:txBody>
-      </p:sp>
-      <p:sp>
-        <p:nvSpPr>
-          <p:cNvPr id="70" name="TextBox 69"/>
-          <p:cNvSpPr txBox="1"/>
-          <p:nvPr/>
-        </p:nvSpPr>
-        <p:spPr>
-          <a:xfrm>
-            <a:off x="256032" y="6181344"/>
-            <a:ext cx="11704320" cy="566928"/>
-          </a:xfrm>
-          <a:prstGeom prst="rect">
-            <a:avLst/>
-          </a:prstGeom>
-          <a:noFill/>
-        </p:spPr>
-        <p:txBody>
-          <a:bodyPr wrap="square">
-            <a:spAutoFit/>
-          </a:bodyPr>
-          <a:lstStyle/>
-          <a:p>
-            <a:pPr algn="l">
-              <a:spcAft>
-                <a:spcPts val="300"/>
-              </a:spcAft>
-            </a:pPr>
-            <a:r>
-              <a:rPr sz="1200" b="0">
+              <a:t>Noche típica 00–06: Sur 0,8 m³  ·  Norte 0,4 m³. La madrugada sigue el mismo patrón chico; no se lee como fuga.</a:t>
+            </a:r>
+          </a:p>
+          <a:p>
+            <a:pPr algn="l">
+              <a:spcAft>
+                <a:spcPts val="300"/>
+              </a:spcAft>
+            </a:pPr>
+            <a:r>
+              <a:rPr sz="1300" b="1">
                 <a:solidFill>
                   <a:srgbClr val="0D3B66"/>
                 </a:solidFill>
                 <a:latin typeface="Calibri"/>
               </a:rPr>
-              <a:t>Mayo 26.357   ·   Junio 20.927   ·   Julio 31.239   ·   Agosto 1–17: 21.494   ·   proy. ago 39.195 m³.</a:t>
-            </a:r>
-          </a:p>
-          <a:p>
-            <a:pPr algn="l">
-              <a:spcAft>
-                <a:spcPts val="300"/>
-              </a:spcAft>
-            </a:pPr>
-            <a:r>
-              <a:rPr sz="1100" b="0">
-                <a:solidFill>
-                  <a:srgbClr val="5A5A5A"/>
-                </a:solidFill>
-                <a:latin typeface="Calibri"/>
-              </a:rPr>
-              <a:t>Julio = cabecera (7 puntos). 27, 35 y 36 no se suman: cadena Sandía → DL (lámina 2).</a:t>
+              <a:t>Umbrales a activar (total del día): Anillo Sur 14 m³/día (junio–agosto ~11 × 1,25). Anillo Norte 13 m³/día (junio–agosto ~10 × 1,25).</a:t>
             </a:r>
           </a:p>
         </p:txBody>
@@ -9071,7 +6821,7 @@
                 </a:solidFill>
                 <a:latin typeface="Calibri"/>
               </a:rPr>
-              <a:t>PAK  ·  2. Cadena Sandía / Distrito de Lujo</a:t>
+              <a:t>PAK  ·  Equipos y consumo</a:t>
             </a:r>
           </a:p>
         </p:txBody>
@@ -9110,7 +6860,7 @@
                 </a:solidFill>
                 <a:latin typeface="Calibri"/>
               </a:rPr>
-              <a:t>Sandía Antigua y Sandía Nueva alimentan Distrito de Lujo  ·  se divide en Bazar Gourmet y DL Kennedy</a:t>
+              <a:t>Parque Arauco Kennedy   |   10 puntos WES   |   julio = cabecera (sin 27, 35 y 36)   |   01/05/2026 – 17/08/2026</a:t>
             </a:r>
           </a:p>
         </p:txBody>
@@ -9123,8 +6873,1125 @@
         </p:nvSpPr>
         <p:spPr>
           <a:xfrm>
-            <a:off x="201168" y="987552"/>
-            <a:ext cx="11777472" cy="512064"/>
+            <a:off x="201168" y="1024128"/>
+            <a:ext cx="2286000" cy="621792"/>
+          </a:xfrm>
+          <a:prstGeom prst="roundRect">
+            <a:avLst>
+              <a:gd name="adj" fmla="val 8000"/>
+            </a:avLst>
+          </a:prstGeom>
+          <a:solidFill>
+            <a:srgbClr val="F5F7FA"/>
+          </a:solidFill>
+          <a:ln w="6350">
+            <a:solidFill>
+              <a:srgbClr val="0D3B66"/>
+            </a:solidFill>
+          </a:ln>
+        </p:spPr>
+        <p:style>
+          <a:lnRef idx="1">
+            <a:schemeClr val="accent1"/>
+          </a:lnRef>
+          <a:fillRef idx="3">
+            <a:schemeClr val="accent1"/>
+          </a:fillRef>
+          <a:effectRef idx="2">
+            <a:schemeClr val="accent1"/>
+          </a:effectRef>
+          <a:fontRef idx="minor">
+            <a:schemeClr val="lt1"/>
+          </a:fontRef>
+        </p:style>
+        <p:txBody>
+          <a:bodyPr rtlCol="0" anchor="ctr"/>
+          <a:lstStyle/>
+          <a:p>
+            <a:pPr algn="ctr"/>
+          </a:p>
+        </p:txBody>
+      </p:sp>
+      <p:sp>
+        <p:nvSpPr>
+          <p:cNvPr id="8" name="TextBox 7"/>
+          <p:cNvSpPr txBox="1"/>
+          <p:nvPr/>
+        </p:nvSpPr>
+        <p:spPr>
+          <a:xfrm>
+            <a:off x="274320" y="1060704"/>
+            <a:ext cx="2157984" cy="146304"/>
+          </a:xfrm>
+          <a:prstGeom prst="rect">
+            <a:avLst/>
+          </a:prstGeom>
+          <a:noFill/>
+        </p:spPr>
+        <p:txBody>
+          <a:bodyPr wrap="square">
+            <a:spAutoFit/>
+          </a:bodyPr>
+          <a:lstStyle/>
+          <a:p>
+            <a:pPr algn="l">
+              <a:spcAft>
+                <a:spcPts val="300"/>
+              </a:spcAft>
+            </a:pPr>
+            <a:r>
+              <a:rPr sz="900" b="1">
+                <a:solidFill>
+                  <a:srgbClr val="C9A227"/>
+                </a:solidFill>
+                <a:latin typeface="Calibri"/>
+              </a:rPr>
+              <a:t>000025-20</a:t>
+            </a:r>
+          </a:p>
+        </p:txBody>
+      </p:sp>
+      <p:sp>
+        <p:nvSpPr>
+          <p:cNvPr id="9" name="TextBox 8"/>
+          <p:cNvSpPr txBox="1"/>
+          <p:nvPr/>
+        </p:nvSpPr>
+        <p:spPr>
+          <a:xfrm>
+            <a:off x="274320" y="1225296"/>
+            <a:ext cx="2157984" cy="201168"/>
+          </a:xfrm>
+          <a:prstGeom prst="rect">
+            <a:avLst/>
+          </a:prstGeom>
+          <a:noFill/>
+        </p:spPr>
+        <p:txBody>
+          <a:bodyPr wrap="square">
+            <a:spAutoFit/>
+          </a:bodyPr>
+          <a:lstStyle/>
+          <a:p>
+            <a:pPr algn="l">
+              <a:spcAft>
+                <a:spcPts val="300"/>
+              </a:spcAft>
+            </a:pPr>
+            <a:r>
+              <a:rPr sz="1100" b="1">
+                <a:solidFill>
+                  <a:srgbClr val="0D3B66"/>
+                </a:solidFill>
+                <a:latin typeface="Calibri"/>
+              </a:rPr>
+              <a:t>Matriz Andén</a:t>
+            </a:r>
+          </a:p>
+        </p:txBody>
+      </p:sp>
+      <p:sp>
+        <p:nvSpPr>
+          <p:cNvPr id="10" name="Rounded Rectangle 9"/>
+          <p:cNvSpPr/>
+          <p:nvPr/>
+        </p:nvSpPr>
+        <p:spPr>
+          <a:xfrm>
+            <a:off x="2578608" y="1024128"/>
+            <a:ext cx="2286000" cy="621792"/>
+          </a:xfrm>
+          <a:prstGeom prst="roundRect">
+            <a:avLst>
+              <a:gd name="adj" fmla="val 8000"/>
+            </a:avLst>
+          </a:prstGeom>
+          <a:solidFill>
+            <a:srgbClr val="F5F7FA"/>
+          </a:solidFill>
+          <a:ln w="6350">
+            <a:solidFill>
+              <a:srgbClr val="1F77B4"/>
+            </a:solidFill>
+          </a:ln>
+        </p:spPr>
+        <p:style>
+          <a:lnRef idx="1">
+            <a:schemeClr val="accent1"/>
+          </a:lnRef>
+          <a:fillRef idx="3">
+            <a:schemeClr val="accent1"/>
+          </a:fillRef>
+          <a:effectRef idx="2">
+            <a:schemeClr val="accent1"/>
+          </a:effectRef>
+          <a:fontRef idx="minor">
+            <a:schemeClr val="lt1"/>
+          </a:fontRef>
+        </p:style>
+        <p:txBody>
+          <a:bodyPr rtlCol="0" anchor="ctr"/>
+          <a:lstStyle/>
+          <a:p>
+            <a:pPr algn="ctr"/>
+          </a:p>
+        </p:txBody>
+      </p:sp>
+      <p:sp>
+        <p:nvSpPr>
+          <p:cNvPr id="11" name="TextBox 10"/>
+          <p:cNvSpPr txBox="1"/>
+          <p:nvPr/>
+        </p:nvSpPr>
+        <p:spPr>
+          <a:xfrm>
+            <a:off x="2651760" y="1060704"/>
+            <a:ext cx="2157984" cy="146304"/>
+          </a:xfrm>
+          <a:prstGeom prst="rect">
+            <a:avLst/>
+          </a:prstGeom>
+          <a:noFill/>
+        </p:spPr>
+        <p:txBody>
+          <a:bodyPr wrap="square">
+            <a:spAutoFit/>
+          </a:bodyPr>
+          <a:lstStyle/>
+          <a:p>
+            <a:pPr algn="l">
+              <a:spcAft>
+                <a:spcPts val="300"/>
+              </a:spcAft>
+            </a:pPr>
+            <a:r>
+              <a:rPr sz="900" b="1">
+                <a:solidFill>
+                  <a:srgbClr val="C9A227"/>
+                </a:solidFill>
+                <a:latin typeface="Calibri"/>
+              </a:rPr>
+              <a:t>000025-21</a:t>
+            </a:r>
+          </a:p>
+        </p:txBody>
+      </p:sp>
+      <p:sp>
+        <p:nvSpPr>
+          <p:cNvPr id="12" name="TextBox 11"/>
+          <p:cNvSpPr txBox="1"/>
+          <p:nvPr/>
+        </p:nvSpPr>
+        <p:spPr>
+          <a:xfrm>
+            <a:off x="2651760" y="1225296"/>
+            <a:ext cx="2157984" cy="201168"/>
+          </a:xfrm>
+          <a:prstGeom prst="rect">
+            <a:avLst/>
+          </a:prstGeom>
+          <a:noFill/>
+        </p:spPr>
+        <p:txBody>
+          <a:bodyPr wrap="square">
+            <a:spAutoFit/>
+          </a:bodyPr>
+          <a:lstStyle/>
+          <a:p>
+            <a:pPr algn="l">
+              <a:spcAft>
+                <a:spcPts val="300"/>
+              </a:spcAft>
+            </a:pPr>
+            <a:r>
+              <a:rPr sz="1100" b="1">
+                <a:solidFill>
+                  <a:srgbClr val="0D3B66"/>
+                </a:solidFill>
+                <a:latin typeface="Calibri"/>
+              </a:rPr>
+              <a:t>Locales Gast.</a:t>
+            </a:r>
+          </a:p>
+        </p:txBody>
+      </p:sp>
+      <p:sp>
+        <p:nvSpPr>
+          <p:cNvPr id="13" name="Rounded Rectangle 12"/>
+          <p:cNvSpPr/>
+          <p:nvPr/>
+        </p:nvSpPr>
+        <p:spPr>
+          <a:xfrm>
+            <a:off x="4956048" y="1024128"/>
+            <a:ext cx="2286000" cy="621792"/>
+          </a:xfrm>
+          <a:prstGeom prst="roundRect">
+            <a:avLst>
+              <a:gd name="adj" fmla="val 8000"/>
+            </a:avLst>
+          </a:prstGeom>
+          <a:solidFill>
+            <a:srgbClr val="F5F7FA"/>
+          </a:solidFill>
+          <a:ln w="6350">
+            <a:solidFill>
+              <a:srgbClr val="C45C26"/>
+            </a:solidFill>
+          </a:ln>
+        </p:spPr>
+        <p:style>
+          <a:lnRef idx="1">
+            <a:schemeClr val="accent1"/>
+          </a:lnRef>
+          <a:fillRef idx="3">
+            <a:schemeClr val="accent1"/>
+          </a:fillRef>
+          <a:effectRef idx="2">
+            <a:schemeClr val="accent1"/>
+          </a:effectRef>
+          <a:fontRef idx="minor">
+            <a:schemeClr val="lt1"/>
+          </a:fontRef>
+        </p:style>
+        <p:txBody>
+          <a:bodyPr rtlCol="0" anchor="ctr"/>
+          <a:lstStyle/>
+          <a:p>
+            <a:pPr algn="ctr"/>
+          </a:p>
+        </p:txBody>
+      </p:sp>
+      <p:sp>
+        <p:nvSpPr>
+          <p:cNvPr id="14" name="TextBox 13"/>
+          <p:cNvSpPr txBox="1"/>
+          <p:nvPr/>
+        </p:nvSpPr>
+        <p:spPr>
+          <a:xfrm>
+            <a:off x="5029200" y="1060704"/>
+            <a:ext cx="2157984" cy="146304"/>
+          </a:xfrm>
+          <a:prstGeom prst="rect">
+            <a:avLst/>
+          </a:prstGeom>
+          <a:noFill/>
+        </p:spPr>
+        <p:txBody>
+          <a:bodyPr wrap="square">
+            <a:spAutoFit/>
+          </a:bodyPr>
+          <a:lstStyle/>
+          <a:p>
+            <a:pPr algn="l">
+              <a:spcAft>
+                <a:spcPts val="300"/>
+              </a:spcAft>
+            </a:pPr>
+            <a:r>
+              <a:rPr sz="900" b="1">
+                <a:solidFill>
+                  <a:srgbClr val="C9A227"/>
+                </a:solidFill>
+                <a:latin typeface="Calibri"/>
+              </a:rPr>
+              <a:t>000025-22</a:t>
+            </a:r>
+          </a:p>
+        </p:txBody>
+      </p:sp>
+      <p:sp>
+        <p:nvSpPr>
+          <p:cNvPr id="15" name="TextBox 14"/>
+          <p:cNvSpPr txBox="1"/>
+          <p:nvPr/>
+        </p:nvSpPr>
+        <p:spPr>
+          <a:xfrm>
+            <a:off x="5029200" y="1225296"/>
+            <a:ext cx="2157984" cy="201168"/>
+          </a:xfrm>
+          <a:prstGeom prst="rect">
+            <a:avLst/>
+          </a:prstGeom>
+          <a:noFill/>
+        </p:spPr>
+        <p:txBody>
+          <a:bodyPr wrap="square">
+            <a:spAutoFit/>
+          </a:bodyPr>
+          <a:lstStyle/>
+          <a:p>
+            <a:pPr algn="l">
+              <a:spcAft>
+                <a:spcPts val="300"/>
+              </a:spcAft>
+            </a:pPr>
+            <a:r>
+              <a:rPr sz="1100" b="1">
+                <a:solidFill>
+                  <a:srgbClr val="0D3B66"/>
+                </a:solidFill>
+                <a:latin typeface="Calibri"/>
+              </a:rPr>
+              <a:t>Sandía Antigua</a:t>
+            </a:r>
+          </a:p>
+        </p:txBody>
+      </p:sp>
+      <p:sp>
+        <p:nvSpPr>
+          <p:cNvPr id="16" name="TextBox 15"/>
+          <p:cNvSpPr txBox="1"/>
+          <p:nvPr/>
+        </p:nvSpPr>
+        <p:spPr>
+          <a:xfrm>
+            <a:off x="5029200" y="1444752"/>
+            <a:ext cx="2157984" cy="164592"/>
+          </a:xfrm>
+          <a:prstGeom prst="rect">
+            <a:avLst/>
+          </a:prstGeom>
+          <a:noFill/>
+        </p:spPr>
+        <p:txBody>
+          <a:bodyPr wrap="square">
+            <a:spAutoFit/>
+          </a:bodyPr>
+          <a:lstStyle/>
+          <a:p>
+            <a:pPr algn="l">
+              <a:spcAft>
+                <a:spcPts val="300"/>
+              </a:spcAft>
+            </a:pPr>
+            <a:r>
+              <a:rPr sz="800" b="0">
+                <a:solidFill>
+                  <a:srgbClr val="5A5A5A"/>
+                </a:solidFill>
+                <a:latin typeface="Calibri"/>
+              </a:rPr>
+              <a:t>alimenta 27</a:t>
+            </a:r>
+          </a:p>
+        </p:txBody>
+      </p:sp>
+      <p:sp>
+        <p:nvSpPr>
+          <p:cNvPr id="17" name="Rounded Rectangle 16"/>
+          <p:cNvSpPr/>
+          <p:nvPr/>
+        </p:nvSpPr>
+        <p:spPr>
+          <a:xfrm>
+            <a:off x="7333488" y="1024128"/>
+            <a:ext cx="2286000" cy="621792"/>
+          </a:xfrm>
+          <a:prstGeom prst="roundRect">
+            <a:avLst>
+              <a:gd name="adj" fmla="val 8000"/>
+            </a:avLst>
+          </a:prstGeom>
+          <a:solidFill>
+            <a:srgbClr val="F5F7FA"/>
+          </a:solidFill>
+          <a:ln w="6350">
+            <a:solidFill>
+              <a:srgbClr val="5A8C6E"/>
+            </a:solidFill>
+          </a:ln>
+        </p:spPr>
+        <p:style>
+          <a:lnRef idx="1">
+            <a:schemeClr val="accent1"/>
+          </a:lnRef>
+          <a:fillRef idx="3">
+            <a:schemeClr val="accent1"/>
+          </a:fillRef>
+          <a:effectRef idx="2">
+            <a:schemeClr val="accent1"/>
+          </a:effectRef>
+          <a:fontRef idx="minor">
+            <a:schemeClr val="lt1"/>
+          </a:fontRef>
+        </p:style>
+        <p:txBody>
+          <a:bodyPr rtlCol="0" anchor="ctr"/>
+          <a:lstStyle/>
+          <a:p>
+            <a:pPr algn="ctr"/>
+          </a:p>
+        </p:txBody>
+      </p:sp>
+      <p:sp>
+        <p:nvSpPr>
+          <p:cNvPr id="18" name="TextBox 17"/>
+          <p:cNvSpPr txBox="1"/>
+          <p:nvPr/>
+        </p:nvSpPr>
+        <p:spPr>
+          <a:xfrm>
+            <a:off x="7406640" y="1060704"/>
+            <a:ext cx="2157984" cy="146304"/>
+          </a:xfrm>
+          <a:prstGeom prst="rect">
+            <a:avLst/>
+          </a:prstGeom>
+          <a:noFill/>
+        </p:spPr>
+        <p:txBody>
+          <a:bodyPr wrap="square">
+            <a:spAutoFit/>
+          </a:bodyPr>
+          <a:lstStyle/>
+          <a:p>
+            <a:pPr algn="l">
+              <a:spcAft>
+                <a:spcPts val="300"/>
+              </a:spcAft>
+            </a:pPr>
+            <a:r>
+              <a:rPr sz="900" b="1">
+                <a:solidFill>
+                  <a:srgbClr val="C9A227"/>
+                </a:solidFill>
+                <a:latin typeface="Calibri"/>
+              </a:rPr>
+              <a:t>000025-28</a:t>
+            </a:r>
+          </a:p>
+        </p:txBody>
+      </p:sp>
+      <p:sp>
+        <p:nvSpPr>
+          <p:cNvPr id="19" name="TextBox 18"/>
+          <p:cNvSpPr txBox="1"/>
+          <p:nvPr/>
+        </p:nvSpPr>
+        <p:spPr>
+          <a:xfrm>
+            <a:off x="7406640" y="1225296"/>
+            <a:ext cx="2157984" cy="201168"/>
+          </a:xfrm>
+          <a:prstGeom prst="rect">
+            <a:avLst/>
+          </a:prstGeom>
+          <a:noFill/>
+        </p:spPr>
+        <p:txBody>
+          <a:bodyPr wrap="square">
+            <a:spAutoFit/>
+          </a:bodyPr>
+          <a:lstStyle/>
+          <a:p>
+            <a:pPr algn="l">
+              <a:spcAft>
+                <a:spcPts val="300"/>
+              </a:spcAft>
+            </a:pPr>
+            <a:r>
+              <a:rPr sz="1100" b="1">
+                <a:solidFill>
+                  <a:srgbClr val="0D3B66"/>
+                </a:solidFill>
+                <a:latin typeface="Calibri"/>
+              </a:rPr>
+              <a:t>Sandía Nueva</a:t>
+            </a:r>
+          </a:p>
+        </p:txBody>
+      </p:sp>
+      <p:sp>
+        <p:nvSpPr>
+          <p:cNvPr id="20" name="TextBox 19"/>
+          <p:cNvSpPr txBox="1"/>
+          <p:nvPr/>
+        </p:nvSpPr>
+        <p:spPr>
+          <a:xfrm>
+            <a:off x="7406640" y="1444752"/>
+            <a:ext cx="2157984" cy="164592"/>
+          </a:xfrm>
+          <a:prstGeom prst="rect">
+            <a:avLst/>
+          </a:prstGeom>
+          <a:noFill/>
+        </p:spPr>
+        <p:txBody>
+          <a:bodyPr wrap="square">
+            <a:spAutoFit/>
+          </a:bodyPr>
+          <a:lstStyle/>
+          <a:p>
+            <a:pPr algn="l">
+              <a:spcAft>
+                <a:spcPts val="300"/>
+              </a:spcAft>
+            </a:pPr>
+            <a:r>
+              <a:rPr sz="800" b="0">
+                <a:solidFill>
+                  <a:srgbClr val="5A5A5A"/>
+                </a:solidFill>
+                <a:latin typeface="Calibri"/>
+              </a:rPr>
+              <a:t>alimenta 27</a:t>
+            </a:r>
+          </a:p>
+        </p:txBody>
+      </p:sp>
+      <p:sp>
+        <p:nvSpPr>
+          <p:cNvPr id="21" name="Rounded Rectangle 20"/>
+          <p:cNvSpPr/>
+          <p:nvPr/>
+        </p:nvSpPr>
+        <p:spPr>
+          <a:xfrm>
+            <a:off x="9710928" y="1024128"/>
+            <a:ext cx="2286000" cy="621792"/>
+          </a:xfrm>
+          <a:prstGeom prst="roundRect">
+            <a:avLst>
+              <a:gd name="adj" fmla="val 8000"/>
+            </a:avLst>
+          </a:prstGeom>
+          <a:solidFill>
+            <a:srgbClr val="F5F7FA"/>
+          </a:solidFill>
+          <a:ln w="6350">
+            <a:solidFill>
+              <a:srgbClr val="8C5A5A"/>
+            </a:solidFill>
+          </a:ln>
+        </p:spPr>
+        <p:style>
+          <a:lnRef idx="1">
+            <a:schemeClr val="accent1"/>
+          </a:lnRef>
+          <a:fillRef idx="3">
+            <a:schemeClr val="accent1"/>
+          </a:fillRef>
+          <a:effectRef idx="2">
+            <a:schemeClr val="accent1"/>
+          </a:effectRef>
+          <a:fontRef idx="minor">
+            <a:schemeClr val="lt1"/>
+          </a:fontRef>
+        </p:style>
+        <p:txBody>
+          <a:bodyPr rtlCol="0" anchor="ctr"/>
+          <a:lstStyle/>
+          <a:p>
+            <a:pPr algn="ctr"/>
+          </a:p>
+        </p:txBody>
+      </p:sp>
+      <p:sp>
+        <p:nvSpPr>
+          <p:cNvPr id="22" name="TextBox 21"/>
+          <p:cNvSpPr txBox="1"/>
+          <p:nvPr/>
+        </p:nvSpPr>
+        <p:spPr>
+          <a:xfrm>
+            <a:off x="9784080" y="1060704"/>
+            <a:ext cx="2157984" cy="146304"/>
+          </a:xfrm>
+          <a:prstGeom prst="rect">
+            <a:avLst/>
+          </a:prstGeom>
+          <a:noFill/>
+        </p:spPr>
+        <p:txBody>
+          <a:bodyPr wrap="square">
+            <a:spAutoFit/>
+          </a:bodyPr>
+          <a:lstStyle/>
+          <a:p>
+            <a:pPr algn="l">
+              <a:spcAft>
+                <a:spcPts val="300"/>
+              </a:spcAft>
+            </a:pPr>
+            <a:r>
+              <a:rPr sz="900" b="1">
+                <a:solidFill>
+                  <a:srgbClr val="C9A227"/>
+                </a:solidFill>
+                <a:latin typeface="Calibri"/>
+              </a:rPr>
+              <a:t>000025-29</a:t>
+            </a:r>
+          </a:p>
+        </p:txBody>
+      </p:sp>
+      <p:sp>
+        <p:nvSpPr>
+          <p:cNvPr id="23" name="TextBox 22"/>
+          <p:cNvSpPr txBox="1"/>
+          <p:nvPr/>
+        </p:nvSpPr>
+        <p:spPr>
+          <a:xfrm>
+            <a:off x="9784080" y="1225296"/>
+            <a:ext cx="2157984" cy="201168"/>
+          </a:xfrm>
+          <a:prstGeom prst="rect">
+            <a:avLst/>
+          </a:prstGeom>
+          <a:noFill/>
+        </p:spPr>
+        <p:txBody>
+          <a:bodyPr wrap="square">
+            <a:spAutoFit/>
+          </a:bodyPr>
+          <a:lstStyle/>
+          <a:p>
+            <a:pPr algn="l">
+              <a:spcAft>
+                <a:spcPts val="300"/>
+              </a:spcAft>
+            </a:pPr>
+            <a:r>
+              <a:rPr sz="1100" b="1">
+                <a:solidFill>
+                  <a:srgbClr val="0D3B66"/>
+                </a:solidFill>
+                <a:latin typeface="Calibri"/>
+              </a:rPr>
+              <a:t>Restaurante</a:t>
+            </a:r>
+          </a:p>
+        </p:txBody>
+      </p:sp>
+      <p:sp>
+        <p:nvSpPr>
+          <p:cNvPr id="24" name="Rounded Rectangle 23"/>
+          <p:cNvSpPr/>
+          <p:nvPr/>
+        </p:nvSpPr>
+        <p:spPr>
+          <a:xfrm>
+            <a:off x="201168" y="1719072"/>
+            <a:ext cx="2286000" cy="621792"/>
+          </a:xfrm>
+          <a:prstGeom prst="roundRect">
+            <a:avLst>
+              <a:gd name="adj" fmla="val 8000"/>
+            </a:avLst>
+          </a:prstGeom>
+          <a:solidFill>
+            <a:srgbClr val="F5F7FA"/>
+          </a:solidFill>
+          <a:ln w="6350">
+            <a:solidFill>
+              <a:srgbClr val="C9A227"/>
+            </a:solidFill>
+          </a:ln>
+        </p:spPr>
+        <p:style>
+          <a:lnRef idx="1">
+            <a:schemeClr val="accent1"/>
+          </a:lnRef>
+          <a:fillRef idx="3">
+            <a:schemeClr val="accent1"/>
+          </a:fillRef>
+          <a:effectRef idx="2">
+            <a:schemeClr val="accent1"/>
+          </a:effectRef>
+          <a:fontRef idx="minor">
+            <a:schemeClr val="lt1"/>
+          </a:fontRef>
+        </p:style>
+        <p:txBody>
+          <a:bodyPr rtlCol="0" anchor="ctr"/>
+          <a:lstStyle/>
+          <a:p>
+            <a:pPr algn="ctr"/>
+          </a:p>
+        </p:txBody>
+      </p:sp>
+      <p:sp>
+        <p:nvSpPr>
+          <p:cNvPr id="25" name="TextBox 24"/>
+          <p:cNvSpPr txBox="1"/>
+          <p:nvPr/>
+        </p:nvSpPr>
+        <p:spPr>
+          <a:xfrm>
+            <a:off x="274320" y="1755648"/>
+            <a:ext cx="2157984" cy="146304"/>
+          </a:xfrm>
+          <a:prstGeom prst="rect">
+            <a:avLst/>
+          </a:prstGeom>
+          <a:noFill/>
+        </p:spPr>
+        <p:txBody>
+          <a:bodyPr wrap="square">
+            <a:spAutoFit/>
+          </a:bodyPr>
+          <a:lstStyle/>
+          <a:p>
+            <a:pPr algn="l">
+              <a:spcAft>
+                <a:spcPts val="300"/>
+              </a:spcAft>
+            </a:pPr>
+            <a:r>
+              <a:rPr sz="900" b="1">
+                <a:solidFill>
+                  <a:srgbClr val="C9A227"/>
+                </a:solidFill>
+                <a:latin typeface="Calibri"/>
+              </a:rPr>
+              <a:t>000025-23</a:t>
+            </a:r>
+          </a:p>
+        </p:txBody>
+      </p:sp>
+      <p:sp>
+        <p:nvSpPr>
+          <p:cNvPr id="26" name="TextBox 25"/>
+          <p:cNvSpPr txBox="1"/>
+          <p:nvPr/>
+        </p:nvSpPr>
+        <p:spPr>
+          <a:xfrm>
+            <a:off x="274320" y="1920240"/>
+            <a:ext cx="2157984" cy="201168"/>
+          </a:xfrm>
+          <a:prstGeom prst="rect">
+            <a:avLst/>
+          </a:prstGeom>
+          <a:noFill/>
+        </p:spPr>
+        <p:txBody>
+          <a:bodyPr wrap="square">
+            <a:spAutoFit/>
+          </a:bodyPr>
+          <a:lstStyle/>
+          <a:p>
+            <a:pPr algn="l">
+              <a:spcAft>
+                <a:spcPts val="300"/>
+              </a:spcAft>
+            </a:pPr>
+            <a:r>
+              <a:rPr sz="1100" b="1">
+                <a:solidFill>
+                  <a:srgbClr val="0D3B66"/>
+                </a:solidFill>
+                <a:latin typeface="Calibri"/>
+              </a:rPr>
+              <a:t>Pileta</a:t>
+            </a:r>
+          </a:p>
+        </p:txBody>
+      </p:sp>
+      <p:sp>
+        <p:nvSpPr>
+          <p:cNvPr id="27" name="Rounded Rectangle 26"/>
+          <p:cNvSpPr/>
+          <p:nvPr/>
+        </p:nvSpPr>
+        <p:spPr>
+          <a:xfrm>
+            <a:off x="2578608" y="1719072"/>
+            <a:ext cx="2286000" cy="621792"/>
+          </a:xfrm>
+          <a:prstGeom prst="roundRect">
+            <a:avLst>
+              <a:gd name="adj" fmla="val 8000"/>
+            </a:avLst>
+          </a:prstGeom>
+          <a:solidFill>
+            <a:srgbClr val="F5F7FA"/>
+          </a:solidFill>
+          <a:ln w="6350">
+            <a:solidFill>
+              <a:srgbClr val="7BA3C9"/>
+            </a:solidFill>
+          </a:ln>
+        </p:spPr>
+        <p:style>
+          <a:lnRef idx="1">
+            <a:schemeClr val="accent1"/>
+          </a:lnRef>
+          <a:fillRef idx="3">
+            <a:schemeClr val="accent1"/>
+          </a:fillRef>
+          <a:effectRef idx="2">
+            <a:schemeClr val="accent1"/>
+          </a:effectRef>
+          <a:fontRef idx="minor">
+            <a:schemeClr val="lt1"/>
+          </a:fontRef>
+        </p:style>
+        <p:txBody>
+          <a:bodyPr rtlCol="0" anchor="ctr"/>
+          <a:lstStyle/>
+          <a:p>
+            <a:pPr algn="ctr"/>
+          </a:p>
+        </p:txBody>
+      </p:sp>
+      <p:sp>
+        <p:nvSpPr>
+          <p:cNvPr id="28" name="TextBox 27"/>
+          <p:cNvSpPr txBox="1"/>
+          <p:nvPr/>
+        </p:nvSpPr>
+        <p:spPr>
+          <a:xfrm>
+            <a:off x="2651760" y="1755648"/>
+            <a:ext cx="2157984" cy="146304"/>
+          </a:xfrm>
+          <a:prstGeom prst="rect">
+            <a:avLst/>
+          </a:prstGeom>
+          <a:noFill/>
+        </p:spPr>
+        <p:txBody>
+          <a:bodyPr wrap="square">
+            <a:spAutoFit/>
+          </a:bodyPr>
+          <a:lstStyle/>
+          <a:p>
+            <a:pPr algn="l">
+              <a:spcAft>
+                <a:spcPts val="300"/>
+              </a:spcAft>
+            </a:pPr>
+            <a:r>
+              <a:rPr sz="900" b="1">
+                <a:solidFill>
+                  <a:srgbClr val="C9A227"/>
+                </a:solidFill>
+                <a:latin typeface="Calibri"/>
+              </a:rPr>
+              <a:t>000025-24</a:t>
+            </a:r>
+          </a:p>
+        </p:txBody>
+      </p:sp>
+      <p:sp>
+        <p:nvSpPr>
+          <p:cNvPr id="29" name="TextBox 28"/>
+          <p:cNvSpPr txBox="1"/>
+          <p:nvPr/>
+        </p:nvSpPr>
+        <p:spPr>
+          <a:xfrm>
+            <a:off x="2651760" y="1920240"/>
+            <a:ext cx="2157984" cy="201168"/>
+          </a:xfrm>
+          <a:prstGeom prst="rect">
+            <a:avLst/>
+          </a:prstGeom>
+          <a:noFill/>
+        </p:spPr>
+        <p:txBody>
+          <a:bodyPr wrap="square">
+            <a:spAutoFit/>
+          </a:bodyPr>
+          <a:lstStyle/>
+          <a:p>
+            <a:pPr algn="l">
+              <a:spcAft>
+                <a:spcPts val="300"/>
+              </a:spcAft>
+            </a:pPr>
+            <a:r>
+              <a:rPr sz="1100" b="1">
+                <a:solidFill>
+                  <a:srgbClr val="0D3B66"/>
+                </a:solidFill>
+                <a:latin typeface="Calibri"/>
+              </a:rPr>
+              <a:t>Cascada</a:t>
+            </a:r>
+          </a:p>
+        </p:txBody>
+      </p:sp>
+      <p:sp>
+        <p:nvSpPr>
+          <p:cNvPr id="30" name="Rounded Rectangle 29"/>
+          <p:cNvSpPr/>
+          <p:nvPr/>
+        </p:nvSpPr>
+        <p:spPr>
+          <a:xfrm>
+            <a:off x="4956048" y="1719072"/>
+            <a:ext cx="2286000" cy="621792"/>
+          </a:xfrm>
+          <a:prstGeom prst="roundRect">
+            <a:avLst>
+              <a:gd name="adj" fmla="val 8000"/>
+            </a:avLst>
+          </a:prstGeom>
+          <a:solidFill>
+            <a:srgbClr val="FFF9EB"/>
+          </a:solidFill>
+          <a:ln w="6350">
+            <a:solidFill>
+              <a:srgbClr val="C45C26"/>
+            </a:solidFill>
+          </a:ln>
+        </p:spPr>
+        <p:style>
+          <a:lnRef idx="1">
+            <a:schemeClr val="accent1"/>
+          </a:lnRef>
+          <a:fillRef idx="3">
+            <a:schemeClr val="accent1"/>
+          </a:fillRef>
+          <a:effectRef idx="2">
+            <a:schemeClr val="accent1"/>
+          </a:effectRef>
+          <a:fontRef idx="minor">
+            <a:schemeClr val="lt1"/>
+          </a:fontRef>
+        </p:style>
+        <p:txBody>
+          <a:bodyPr rtlCol="0" anchor="ctr"/>
+          <a:lstStyle/>
+          <a:p>
+            <a:pPr algn="ctr"/>
+          </a:p>
+        </p:txBody>
+      </p:sp>
+      <p:sp>
+        <p:nvSpPr>
+          <p:cNvPr id="31" name="TextBox 30"/>
+          <p:cNvSpPr txBox="1"/>
+          <p:nvPr/>
+        </p:nvSpPr>
+        <p:spPr>
+          <a:xfrm>
+            <a:off x="5029200" y="1755648"/>
+            <a:ext cx="2157984" cy="146304"/>
+          </a:xfrm>
+          <a:prstGeom prst="rect">
+            <a:avLst/>
+          </a:prstGeom>
+          <a:noFill/>
+        </p:spPr>
+        <p:txBody>
+          <a:bodyPr wrap="square">
+            <a:spAutoFit/>
+          </a:bodyPr>
+          <a:lstStyle/>
+          <a:p>
+            <a:pPr algn="l">
+              <a:spcAft>
+                <a:spcPts val="300"/>
+              </a:spcAft>
+            </a:pPr>
+            <a:r>
+              <a:rPr sz="900" b="1">
+                <a:solidFill>
+                  <a:srgbClr val="C9A227"/>
+                </a:solidFill>
+                <a:latin typeface="Calibri"/>
+              </a:rPr>
+              <a:t>000025-27</a:t>
+            </a:r>
+          </a:p>
+        </p:txBody>
+      </p:sp>
+      <p:sp>
+        <p:nvSpPr>
+          <p:cNvPr id="32" name="TextBox 31"/>
+          <p:cNvSpPr txBox="1"/>
+          <p:nvPr/>
+        </p:nvSpPr>
+        <p:spPr>
+          <a:xfrm>
+            <a:off x="5029200" y="1920240"/>
+            <a:ext cx="2157984" cy="201168"/>
+          </a:xfrm>
+          <a:prstGeom prst="rect">
+            <a:avLst/>
+          </a:prstGeom>
+          <a:noFill/>
+        </p:spPr>
+        <p:txBody>
+          <a:bodyPr wrap="square">
+            <a:spAutoFit/>
+          </a:bodyPr>
+          <a:lstStyle/>
+          <a:p>
+            <a:pPr algn="l">
+              <a:spcAft>
+                <a:spcPts val="300"/>
+              </a:spcAft>
+            </a:pPr>
+            <a:r>
+              <a:rPr sz="1100" b="1">
+                <a:solidFill>
+                  <a:srgbClr val="0D3B66"/>
+                </a:solidFill>
+                <a:latin typeface="Calibri"/>
+              </a:rPr>
+              <a:t>Distrito Lujo</a:t>
+            </a:r>
+          </a:p>
+        </p:txBody>
+      </p:sp>
+      <p:sp>
+        <p:nvSpPr>
+          <p:cNvPr id="33" name="TextBox 32"/>
+          <p:cNvSpPr txBox="1"/>
+          <p:nvPr/>
+        </p:nvSpPr>
+        <p:spPr>
+          <a:xfrm>
+            <a:off x="5029200" y="2139696"/>
+            <a:ext cx="2157984" cy="164592"/>
+          </a:xfrm>
+          <a:prstGeom prst="rect">
+            <a:avLst/>
+          </a:prstGeom>
+          <a:noFill/>
+        </p:spPr>
+        <p:txBody>
+          <a:bodyPr wrap="square">
+            <a:spAutoFit/>
+          </a:bodyPr>
+          <a:lstStyle/>
+          <a:p>
+            <a:pPr algn="l">
+              <a:spcAft>
+                <a:spcPts val="300"/>
+              </a:spcAft>
+            </a:pPr>
+            <a:r>
+              <a:rPr sz="800" b="0">
+                <a:solidFill>
+                  <a:srgbClr val="5A5A5A"/>
+                </a:solidFill>
+                <a:latin typeface="Calibri"/>
+              </a:rPr>
+              <a:t>cadena · no suma</a:t>
+            </a:r>
+          </a:p>
+        </p:txBody>
+      </p:sp>
+      <p:sp>
+        <p:nvSpPr>
+          <p:cNvPr id="34" name="Rounded Rectangle 33"/>
+          <p:cNvSpPr/>
+          <p:nvPr/>
+        </p:nvSpPr>
+        <p:spPr>
+          <a:xfrm>
+            <a:off x="7333488" y="1719072"/>
+            <a:ext cx="2286000" cy="621792"/>
           </a:xfrm>
           <a:prstGeom prst="roundRect">
             <a:avLst>
@@ -9164,53 +8031,1239 @@
       </p:sp>
       <p:sp>
         <p:nvSpPr>
-          <p:cNvPr id="8" name="TextBox 7"/>
-          <p:cNvSpPr txBox="1"/>
-          <p:nvPr/>
-        </p:nvSpPr>
-        <p:spPr>
-          <a:xfrm>
-            <a:off x="365760" y="1042415"/>
-            <a:ext cx="11475720" cy="402336"/>
-          </a:xfrm>
-          <a:prstGeom prst="rect">
-            <a:avLst/>
-          </a:prstGeom>
-          <a:noFill/>
-        </p:spPr>
-        <p:txBody>
-          <a:bodyPr wrap="square">
-            <a:spAutoFit/>
-          </a:bodyPr>
-          <a:lstStyle/>
-          <a:p>
-            <a:pPr algn="l">
-              <a:spcAft>
-                <a:spcPts val="300"/>
-              </a:spcAft>
-            </a:pPr>
-            <a:r>
-              <a:rPr sz="1300" b="0">
+          <p:cNvPr id="35" name="TextBox 34"/>
+          <p:cNvSpPr txBox="1"/>
+          <p:nvPr/>
+        </p:nvSpPr>
+        <p:spPr>
+          <a:xfrm>
+            <a:off x="7406640" y="1755648"/>
+            <a:ext cx="2157984" cy="146304"/>
+          </a:xfrm>
+          <a:prstGeom prst="rect">
+            <a:avLst/>
+          </a:prstGeom>
+          <a:noFill/>
+        </p:spPr>
+        <p:txBody>
+          <a:bodyPr wrap="square">
+            <a:spAutoFit/>
+          </a:bodyPr>
+          <a:lstStyle/>
+          <a:p>
+            <a:pPr algn="l">
+              <a:spcAft>
+                <a:spcPts val="300"/>
+              </a:spcAft>
+            </a:pPr>
+            <a:r>
+              <a:rPr sz="900" b="1">
+                <a:solidFill>
+                  <a:srgbClr val="C9A227"/>
+                </a:solidFill>
+                <a:latin typeface="Calibri"/>
+              </a:rPr>
+              <a:t>000025-35</a:t>
+            </a:r>
+          </a:p>
+        </p:txBody>
+      </p:sp>
+      <p:sp>
+        <p:nvSpPr>
+          <p:cNvPr id="36" name="TextBox 35"/>
+          <p:cNvSpPr txBox="1"/>
+          <p:nvPr/>
+        </p:nvSpPr>
+        <p:spPr>
+          <a:xfrm>
+            <a:off x="7406640" y="1920240"/>
+            <a:ext cx="2157984" cy="201168"/>
+          </a:xfrm>
+          <a:prstGeom prst="rect">
+            <a:avLst/>
+          </a:prstGeom>
+          <a:noFill/>
+        </p:spPr>
+        <p:txBody>
+          <a:bodyPr wrap="square">
+            <a:spAutoFit/>
+          </a:bodyPr>
+          <a:lstStyle/>
+          <a:p>
+            <a:pPr algn="l">
+              <a:spcAft>
+                <a:spcPts val="300"/>
+              </a:spcAft>
+            </a:pPr>
+            <a:r>
+              <a:rPr sz="1100" b="1">
                 <a:solidFill>
                   <a:srgbClr val="0D3B66"/>
                 </a:solidFill>
                 <a:latin typeface="Calibri"/>
               </a:rPr>
-              <a:t>Sandía Antigua y Sandía Nueva alimentan Distrito de Lujo. Desde ahí el caudal se divide en Bazar Gourmet y DL Kennedy. Por eso esos tres puntos no se suman a la cabecera: sería doble conteo.</a:t>
-            </a:r>
-          </a:p>
-        </p:txBody>
-      </p:sp>
-      <p:sp>
-        <p:nvSpPr>
-          <p:cNvPr id="9" name="Rounded Rectangle 8"/>
+              <a:t>Bazar Gourmet</a:t>
+            </a:r>
+          </a:p>
+        </p:txBody>
+      </p:sp>
+      <p:sp>
+        <p:nvSpPr>
+          <p:cNvPr id="37" name="TextBox 36"/>
+          <p:cNvSpPr txBox="1"/>
+          <p:nvPr/>
+        </p:nvSpPr>
+        <p:spPr>
+          <a:xfrm>
+            <a:off x="7406640" y="2139696"/>
+            <a:ext cx="2157984" cy="164592"/>
+          </a:xfrm>
+          <a:prstGeom prst="rect">
+            <a:avLst/>
+          </a:prstGeom>
+          <a:noFill/>
+        </p:spPr>
+        <p:txBody>
+          <a:bodyPr wrap="square">
+            <a:spAutoFit/>
+          </a:bodyPr>
+          <a:lstStyle/>
+          <a:p>
+            <a:pPr algn="l">
+              <a:spcAft>
+                <a:spcPts val="300"/>
+              </a:spcAft>
+            </a:pPr>
+            <a:r>
+              <a:rPr sz="800" b="0">
+                <a:solidFill>
+                  <a:srgbClr val="5A5A5A"/>
+                </a:solidFill>
+                <a:latin typeface="Calibri"/>
+              </a:rPr>
+              <a:t>sale de 27</a:t>
+            </a:r>
+          </a:p>
+        </p:txBody>
+      </p:sp>
+      <p:sp>
+        <p:nvSpPr>
+          <p:cNvPr id="38" name="Rounded Rectangle 37"/>
           <p:cNvSpPr/>
           <p:nvPr/>
         </p:nvSpPr>
         <p:spPr>
           <a:xfrm>
-            <a:off x="201168" y="1591056"/>
-            <a:ext cx="1938528" cy="457200"/>
+            <a:off x="9710928" y="1719072"/>
+            <a:ext cx="2286000" cy="621792"/>
+          </a:xfrm>
+          <a:prstGeom prst="roundRect">
+            <a:avLst>
+              <a:gd name="adj" fmla="val 8000"/>
+            </a:avLst>
+          </a:prstGeom>
+          <a:solidFill>
+            <a:srgbClr val="FFF9EB"/>
+          </a:solidFill>
+          <a:ln w="6350">
+            <a:solidFill>
+              <a:srgbClr val="5A8C6E"/>
+            </a:solidFill>
+          </a:ln>
+        </p:spPr>
+        <p:style>
+          <a:lnRef idx="1">
+            <a:schemeClr val="accent1"/>
+          </a:lnRef>
+          <a:fillRef idx="3">
+            <a:schemeClr val="accent1"/>
+          </a:fillRef>
+          <a:effectRef idx="2">
+            <a:schemeClr val="accent1"/>
+          </a:effectRef>
+          <a:fontRef idx="minor">
+            <a:schemeClr val="lt1"/>
+          </a:fontRef>
+        </p:style>
+        <p:txBody>
+          <a:bodyPr rtlCol="0" anchor="ctr"/>
+          <a:lstStyle/>
+          <a:p>
+            <a:pPr algn="ctr"/>
+          </a:p>
+        </p:txBody>
+      </p:sp>
+      <p:sp>
+        <p:nvSpPr>
+          <p:cNvPr id="39" name="TextBox 38"/>
+          <p:cNvSpPr txBox="1"/>
+          <p:nvPr/>
+        </p:nvSpPr>
+        <p:spPr>
+          <a:xfrm>
+            <a:off x="9784080" y="1755648"/>
+            <a:ext cx="2157984" cy="146304"/>
+          </a:xfrm>
+          <a:prstGeom prst="rect">
+            <a:avLst/>
+          </a:prstGeom>
+          <a:noFill/>
+        </p:spPr>
+        <p:txBody>
+          <a:bodyPr wrap="square">
+            <a:spAutoFit/>
+          </a:bodyPr>
+          <a:lstStyle/>
+          <a:p>
+            <a:pPr algn="l">
+              <a:spcAft>
+                <a:spcPts val="300"/>
+              </a:spcAft>
+            </a:pPr>
+            <a:r>
+              <a:rPr sz="900" b="1">
+                <a:solidFill>
+                  <a:srgbClr val="C9A227"/>
+                </a:solidFill>
+                <a:latin typeface="Calibri"/>
+              </a:rPr>
+              <a:t>000025-36</a:t>
+            </a:r>
+          </a:p>
+        </p:txBody>
+      </p:sp>
+      <p:sp>
+        <p:nvSpPr>
+          <p:cNvPr id="40" name="TextBox 39"/>
+          <p:cNvSpPr txBox="1"/>
+          <p:nvPr/>
+        </p:nvSpPr>
+        <p:spPr>
+          <a:xfrm>
+            <a:off x="9784080" y="1920240"/>
+            <a:ext cx="2157984" cy="201168"/>
+          </a:xfrm>
+          <a:prstGeom prst="rect">
+            <a:avLst/>
+          </a:prstGeom>
+          <a:noFill/>
+        </p:spPr>
+        <p:txBody>
+          <a:bodyPr wrap="square">
+            <a:spAutoFit/>
+          </a:bodyPr>
+          <a:lstStyle/>
+          <a:p>
+            <a:pPr algn="l">
+              <a:spcAft>
+                <a:spcPts val="300"/>
+              </a:spcAft>
+            </a:pPr>
+            <a:r>
+              <a:rPr sz="1100" b="1">
+                <a:solidFill>
+                  <a:srgbClr val="0D3B66"/>
+                </a:solidFill>
+                <a:latin typeface="Calibri"/>
+              </a:rPr>
+              <a:t>DL Kennedy</a:t>
+            </a:r>
+          </a:p>
+        </p:txBody>
+      </p:sp>
+      <p:sp>
+        <p:nvSpPr>
+          <p:cNvPr id="41" name="TextBox 40"/>
+          <p:cNvSpPr txBox="1"/>
+          <p:nvPr/>
+        </p:nvSpPr>
+        <p:spPr>
+          <a:xfrm>
+            <a:off x="9784080" y="2139696"/>
+            <a:ext cx="2157984" cy="164592"/>
+          </a:xfrm>
+          <a:prstGeom prst="rect">
+            <a:avLst/>
+          </a:prstGeom>
+          <a:noFill/>
+        </p:spPr>
+        <p:txBody>
+          <a:bodyPr wrap="square">
+            <a:spAutoFit/>
+          </a:bodyPr>
+          <a:lstStyle/>
+          <a:p>
+            <a:pPr algn="l">
+              <a:spcAft>
+                <a:spcPts val="300"/>
+              </a:spcAft>
+            </a:pPr>
+            <a:r>
+              <a:rPr sz="800" b="0">
+                <a:solidFill>
+                  <a:srgbClr val="5A5A5A"/>
+                </a:solidFill>
+                <a:latin typeface="Calibri"/>
+              </a:rPr>
+              <a:t>sale de 27</a:t>
+            </a:r>
+          </a:p>
+        </p:txBody>
+      </p:sp>
+      <p:sp>
+        <p:nvSpPr>
+          <p:cNvPr id="42" name="Rounded Rectangle 41"/>
+          <p:cNvSpPr/>
+          <p:nvPr/>
+        </p:nvSpPr>
+        <p:spPr>
+          <a:xfrm>
+            <a:off x="201168" y="2432304"/>
+            <a:ext cx="7973568" cy="3182111"/>
+          </a:xfrm>
+          <a:prstGeom prst="roundRect">
+            <a:avLst>
+              <a:gd name="adj" fmla="val 8000"/>
+            </a:avLst>
+          </a:prstGeom>
+          <a:solidFill>
+            <a:srgbClr val="F5F7FA"/>
+          </a:solidFill>
+          <a:ln>
+            <a:noFill/>
+          </a:ln>
+        </p:spPr>
+        <p:style>
+          <a:lnRef idx="1">
+            <a:schemeClr val="accent1"/>
+          </a:lnRef>
+          <a:fillRef idx="3">
+            <a:schemeClr val="accent1"/>
+          </a:fillRef>
+          <a:effectRef idx="2">
+            <a:schemeClr val="accent1"/>
+          </a:effectRef>
+          <a:fontRef idx="minor">
+            <a:schemeClr val="lt1"/>
+          </a:fontRef>
+        </p:style>
+        <p:txBody>
+          <a:bodyPr rtlCol="0" anchor="ctr"/>
+          <a:lstStyle/>
+          <a:p>
+            <a:pPr algn="ctr"/>
+          </a:p>
+        </p:txBody>
+      </p:sp>
+      <p:pic>
+        <p:nvPicPr>
+          <p:cNvPr id="43" name="Picture 42" descr="pak_mensual_may_ago.png"/>
+          <p:cNvPicPr>
+            <a:picLocks noChangeAspect="1"/>
+          </p:cNvPicPr>
+          <p:nvPr/>
+        </p:nvPicPr>
+        <p:blipFill>
+          <a:blip r:embed="rId3"/>
+          <a:stretch>
+            <a:fillRect/>
+          </a:stretch>
+        </p:blipFill>
+        <p:spPr>
+          <a:xfrm>
+            <a:off x="605863" y="2487168"/>
+            <a:ext cx="7164176" cy="3072383"/>
+          </a:xfrm>
+          <a:prstGeom prst="rect">
+            <a:avLst/>
+          </a:prstGeom>
+        </p:spPr>
+      </p:pic>
+      <p:sp>
+        <p:nvSpPr>
+          <p:cNvPr id="44" name="Rounded Rectangle 43"/>
+          <p:cNvSpPr/>
+          <p:nvPr/>
+        </p:nvSpPr>
+        <p:spPr>
+          <a:xfrm>
+            <a:off x="8302752" y="2432304"/>
+            <a:ext cx="3675887" cy="3182111"/>
+          </a:xfrm>
+          <a:prstGeom prst="roundRect">
+            <a:avLst>
+              <a:gd name="adj" fmla="val 8000"/>
+            </a:avLst>
+          </a:prstGeom>
+          <a:solidFill>
+            <a:srgbClr val="FFFFFF"/>
+          </a:solidFill>
+          <a:ln w="6350">
+            <a:solidFill>
+              <a:srgbClr val="1F77B4"/>
+            </a:solidFill>
+          </a:ln>
+        </p:spPr>
+        <p:style>
+          <a:lnRef idx="1">
+            <a:schemeClr val="accent1"/>
+          </a:lnRef>
+          <a:fillRef idx="3">
+            <a:schemeClr val="accent1"/>
+          </a:fillRef>
+          <a:effectRef idx="2">
+            <a:schemeClr val="accent1"/>
+          </a:effectRef>
+          <a:fontRef idx="minor">
+            <a:schemeClr val="lt1"/>
+          </a:fontRef>
+        </p:style>
+        <p:txBody>
+          <a:bodyPr rtlCol="0" anchor="ctr"/>
+          <a:lstStyle/>
+          <a:p>
+            <a:pPr algn="ctr"/>
+          </a:p>
+        </p:txBody>
+      </p:sp>
+      <p:sp>
+        <p:nvSpPr>
+          <p:cNvPr id="45" name="TextBox 44"/>
+          <p:cNvSpPr txBox="1"/>
+          <p:nvPr/>
+        </p:nvSpPr>
+        <p:spPr>
+          <a:xfrm>
+            <a:off x="8430768" y="2478024"/>
+            <a:ext cx="3419856" cy="164592"/>
+          </a:xfrm>
+          <a:prstGeom prst="rect">
+            <a:avLst/>
+          </a:prstGeom>
+          <a:noFill/>
+        </p:spPr>
+        <p:txBody>
+          <a:bodyPr wrap="square">
+            <a:spAutoFit/>
+          </a:bodyPr>
+          <a:lstStyle/>
+          <a:p>
+            <a:pPr algn="l">
+              <a:spcAft>
+                <a:spcPts val="300"/>
+              </a:spcAft>
+            </a:pPr>
+            <a:r>
+              <a:rPr sz="1100" b="1">
+                <a:solidFill>
+                  <a:srgbClr val="1F77B4"/>
+                </a:solidFill>
+                <a:latin typeface="Calibri"/>
+              </a:rPr>
+              <a:t>JULIO · cabecera</a:t>
+            </a:r>
+          </a:p>
+        </p:txBody>
+      </p:sp>
+      <p:sp>
+        <p:nvSpPr>
+          <p:cNvPr id="46" name="TextBox 45"/>
+          <p:cNvSpPr txBox="1"/>
+          <p:nvPr/>
+        </p:nvSpPr>
+        <p:spPr>
+          <a:xfrm>
+            <a:off x="8430768" y="2642616"/>
+            <a:ext cx="3419856" cy="201168"/>
+          </a:xfrm>
+          <a:prstGeom prst="rect">
+            <a:avLst/>
+          </a:prstGeom>
+          <a:noFill/>
+        </p:spPr>
+        <p:txBody>
+          <a:bodyPr wrap="square">
+            <a:spAutoFit/>
+          </a:bodyPr>
+          <a:lstStyle/>
+          <a:p>
+            <a:pPr algn="l">
+              <a:spcAft>
+                <a:spcPts val="300"/>
+              </a:spcAft>
+            </a:pPr>
+            <a:r>
+              <a:rPr sz="1200" b="0">
+                <a:solidFill>
+                  <a:srgbClr val="5A5A5A"/>
+                </a:solidFill>
+                <a:latin typeface="Calibri"/>
+              </a:rPr>
+              <a:t>El recinto sumó 31.239 m³</a:t>
+            </a:r>
+          </a:p>
+        </p:txBody>
+      </p:sp>
+      <p:sp>
+        <p:nvSpPr>
+          <p:cNvPr id="47" name="Rounded Rectangle 46"/>
+          <p:cNvSpPr/>
+          <p:nvPr/>
+        </p:nvSpPr>
+        <p:spPr>
+          <a:xfrm>
+            <a:off x="8430768" y="2852928"/>
+            <a:ext cx="3419856" cy="347471"/>
+          </a:xfrm>
+          <a:prstGeom prst="roundRect">
+            <a:avLst>
+              <a:gd name="adj" fmla="val 8000"/>
+            </a:avLst>
+          </a:prstGeom>
+          <a:solidFill>
+            <a:srgbClr val="F5F7FA"/>
+          </a:solidFill>
+          <a:ln w="6350">
+            <a:solidFill>
+              <a:srgbClr val="C45C26"/>
+            </a:solidFill>
+          </a:ln>
+        </p:spPr>
+        <p:style>
+          <a:lnRef idx="1">
+            <a:schemeClr val="accent1"/>
+          </a:lnRef>
+          <a:fillRef idx="3">
+            <a:schemeClr val="accent1"/>
+          </a:fillRef>
+          <a:effectRef idx="2">
+            <a:schemeClr val="accent1"/>
+          </a:effectRef>
+          <a:fontRef idx="minor">
+            <a:schemeClr val="lt1"/>
+          </a:fontRef>
+        </p:style>
+        <p:txBody>
+          <a:bodyPr rtlCol="0" anchor="ctr"/>
+          <a:lstStyle/>
+          <a:p>
+            <a:pPr algn="ctr"/>
+          </a:p>
+        </p:txBody>
+      </p:sp>
+      <p:sp>
+        <p:nvSpPr>
+          <p:cNvPr id="48" name="TextBox 47"/>
+          <p:cNvSpPr txBox="1"/>
+          <p:nvPr/>
+        </p:nvSpPr>
+        <p:spPr>
+          <a:xfrm>
+            <a:off x="8540496" y="2880360"/>
+            <a:ext cx="3200400" cy="145938"/>
+          </a:xfrm>
+          <a:prstGeom prst="rect">
+            <a:avLst/>
+          </a:prstGeom>
+          <a:noFill/>
+        </p:spPr>
+        <p:txBody>
+          <a:bodyPr wrap="square">
+            <a:spAutoFit/>
+          </a:bodyPr>
+          <a:lstStyle/>
+          <a:p>
+            <a:pPr algn="l">
+              <a:spcAft>
+                <a:spcPts val="300"/>
+              </a:spcAft>
+            </a:pPr>
+            <a:r>
+              <a:rPr sz="1000" b="1">
+                <a:solidFill>
+                  <a:srgbClr val="C45C26"/>
+                </a:solidFill>
+                <a:latin typeface="Calibri"/>
+              </a:rPr>
+              <a:t>Sandía Antigua</a:t>
+            </a:r>
+          </a:p>
+        </p:txBody>
+      </p:sp>
+      <p:sp>
+        <p:nvSpPr>
+          <p:cNvPr id="49" name="TextBox 48"/>
+          <p:cNvSpPr txBox="1"/>
+          <p:nvPr/>
+        </p:nvSpPr>
+        <p:spPr>
+          <a:xfrm>
+            <a:off x="8540496" y="2998866"/>
+            <a:ext cx="3200400" cy="180685"/>
+          </a:xfrm>
+          <a:prstGeom prst="rect">
+            <a:avLst/>
+          </a:prstGeom>
+          <a:noFill/>
+        </p:spPr>
+        <p:txBody>
+          <a:bodyPr wrap="square">
+            <a:spAutoFit/>
+          </a:bodyPr>
+          <a:lstStyle/>
+          <a:p>
+            <a:pPr algn="l">
+              <a:spcAft>
+                <a:spcPts val="300"/>
+              </a:spcAft>
+            </a:pPr>
+            <a:r>
+              <a:rPr sz="1200" b="1">
+                <a:solidFill>
+                  <a:srgbClr val="0D3B66"/>
+                </a:solidFill>
+                <a:latin typeface="Calibri"/>
+              </a:rPr>
+              <a:t>13.661 m³    43,7 %</a:t>
+            </a:r>
+          </a:p>
+        </p:txBody>
+      </p:sp>
+      <p:sp>
+        <p:nvSpPr>
+          <p:cNvPr id="50" name="Rounded Rectangle 49"/>
+          <p:cNvSpPr/>
+          <p:nvPr/>
+        </p:nvSpPr>
+        <p:spPr>
+          <a:xfrm>
+            <a:off x="8430768" y="3236976"/>
+            <a:ext cx="3419856" cy="347471"/>
+          </a:xfrm>
+          <a:prstGeom prst="roundRect">
+            <a:avLst>
+              <a:gd name="adj" fmla="val 8000"/>
+            </a:avLst>
+          </a:prstGeom>
+          <a:solidFill>
+            <a:srgbClr val="F5F7FA"/>
+          </a:solidFill>
+          <a:ln w="6350">
+            <a:solidFill>
+              <a:srgbClr val="5A8C6E"/>
+            </a:solidFill>
+          </a:ln>
+        </p:spPr>
+        <p:style>
+          <a:lnRef idx="1">
+            <a:schemeClr val="accent1"/>
+          </a:lnRef>
+          <a:fillRef idx="3">
+            <a:schemeClr val="accent1"/>
+          </a:fillRef>
+          <a:effectRef idx="2">
+            <a:schemeClr val="accent1"/>
+          </a:effectRef>
+          <a:fontRef idx="minor">
+            <a:schemeClr val="lt1"/>
+          </a:fontRef>
+        </p:style>
+        <p:txBody>
+          <a:bodyPr rtlCol="0" anchor="ctr"/>
+          <a:lstStyle/>
+          <a:p>
+            <a:pPr algn="ctr"/>
+          </a:p>
+        </p:txBody>
+      </p:sp>
+      <p:sp>
+        <p:nvSpPr>
+          <p:cNvPr id="51" name="TextBox 50"/>
+          <p:cNvSpPr txBox="1"/>
+          <p:nvPr/>
+        </p:nvSpPr>
+        <p:spPr>
+          <a:xfrm>
+            <a:off x="8540496" y="3264408"/>
+            <a:ext cx="3200400" cy="145938"/>
+          </a:xfrm>
+          <a:prstGeom prst="rect">
+            <a:avLst/>
+          </a:prstGeom>
+          <a:noFill/>
+        </p:spPr>
+        <p:txBody>
+          <a:bodyPr wrap="square">
+            <a:spAutoFit/>
+          </a:bodyPr>
+          <a:lstStyle/>
+          <a:p>
+            <a:pPr algn="l">
+              <a:spcAft>
+                <a:spcPts val="300"/>
+              </a:spcAft>
+            </a:pPr>
+            <a:r>
+              <a:rPr sz="1000" b="1">
+                <a:solidFill>
+                  <a:srgbClr val="5A8C6E"/>
+                </a:solidFill>
+                <a:latin typeface="Calibri"/>
+              </a:rPr>
+              <a:t>Sandía Nueva</a:t>
+            </a:r>
+          </a:p>
+        </p:txBody>
+      </p:sp>
+      <p:sp>
+        <p:nvSpPr>
+          <p:cNvPr id="52" name="TextBox 51"/>
+          <p:cNvSpPr txBox="1"/>
+          <p:nvPr/>
+        </p:nvSpPr>
+        <p:spPr>
+          <a:xfrm>
+            <a:off x="8540496" y="3382914"/>
+            <a:ext cx="3200400" cy="180685"/>
+          </a:xfrm>
+          <a:prstGeom prst="rect">
+            <a:avLst/>
+          </a:prstGeom>
+          <a:noFill/>
+        </p:spPr>
+        <p:txBody>
+          <a:bodyPr wrap="square">
+            <a:spAutoFit/>
+          </a:bodyPr>
+          <a:lstStyle/>
+          <a:p>
+            <a:pPr algn="l">
+              <a:spcAft>
+                <a:spcPts val="300"/>
+              </a:spcAft>
+            </a:pPr>
+            <a:r>
+              <a:rPr sz="1200" b="1">
+                <a:solidFill>
+                  <a:srgbClr val="0D3B66"/>
+                </a:solidFill>
+                <a:latin typeface="Calibri"/>
+              </a:rPr>
+              <a:t>9.619 m³    30,8 %</a:t>
+            </a:r>
+          </a:p>
+        </p:txBody>
+      </p:sp>
+      <p:sp>
+        <p:nvSpPr>
+          <p:cNvPr id="53" name="Rounded Rectangle 52"/>
+          <p:cNvSpPr/>
+          <p:nvPr/>
+        </p:nvSpPr>
+        <p:spPr>
+          <a:xfrm>
+            <a:off x="8430768" y="3621024"/>
+            <a:ext cx="3419856" cy="347471"/>
+          </a:xfrm>
+          <a:prstGeom prst="roundRect">
+            <a:avLst>
+              <a:gd name="adj" fmla="val 8000"/>
+            </a:avLst>
+          </a:prstGeom>
+          <a:solidFill>
+            <a:srgbClr val="F5F7FA"/>
+          </a:solidFill>
+          <a:ln w="6350">
+            <a:solidFill>
+              <a:srgbClr val="1F77B4"/>
+            </a:solidFill>
+          </a:ln>
+        </p:spPr>
+        <p:style>
+          <a:lnRef idx="1">
+            <a:schemeClr val="accent1"/>
+          </a:lnRef>
+          <a:fillRef idx="3">
+            <a:schemeClr val="accent1"/>
+          </a:fillRef>
+          <a:effectRef idx="2">
+            <a:schemeClr val="accent1"/>
+          </a:effectRef>
+          <a:fontRef idx="minor">
+            <a:schemeClr val="lt1"/>
+          </a:fontRef>
+        </p:style>
+        <p:txBody>
+          <a:bodyPr rtlCol="0" anchor="ctr"/>
+          <a:lstStyle/>
+          <a:p>
+            <a:pPr algn="ctr"/>
+          </a:p>
+        </p:txBody>
+      </p:sp>
+      <p:sp>
+        <p:nvSpPr>
+          <p:cNvPr id="54" name="TextBox 53"/>
+          <p:cNvSpPr txBox="1"/>
+          <p:nvPr/>
+        </p:nvSpPr>
+        <p:spPr>
+          <a:xfrm>
+            <a:off x="8540496" y="3648456"/>
+            <a:ext cx="3200400" cy="145938"/>
+          </a:xfrm>
+          <a:prstGeom prst="rect">
+            <a:avLst/>
+          </a:prstGeom>
+          <a:noFill/>
+        </p:spPr>
+        <p:txBody>
+          <a:bodyPr wrap="square">
+            <a:spAutoFit/>
+          </a:bodyPr>
+          <a:lstStyle/>
+          <a:p>
+            <a:pPr algn="l">
+              <a:spcAft>
+                <a:spcPts val="300"/>
+              </a:spcAft>
+            </a:pPr>
+            <a:r>
+              <a:rPr sz="1000" b="1">
+                <a:solidFill>
+                  <a:srgbClr val="1F77B4"/>
+                </a:solidFill>
+                <a:latin typeface="Calibri"/>
+              </a:rPr>
+              <a:t>Locales Gast.</a:t>
+            </a:r>
+          </a:p>
+        </p:txBody>
+      </p:sp>
+      <p:sp>
+        <p:nvSpPr>
+          <p:cNvPr id="55" name="TextBox 54"/>
+          <p:cNvSpPr txBox="1"/>
+          <p:nvPr/>
+        </p:nvSpPr>
+        <p:spPr>
+          <a:xfrm>
+            <a:off x="8540496" y="3766962"/>
+            <a:ext cx="3200400" cy="180685"/>
+          </a:xfrm>
+          <a:prstGeom prst="rect">
+            <a:avLst/>
+          </a:prstGeom>
+          <a:noFill/>
+        </p:spPr>
+        <p:txBody>
+          <a:bodyPr wrap="square">
+            <a:spAutoFit/>
+          </a:bodyPr>
+          <a:lstStyle/>
+          <a:p>
+            <a:pPr algn="l">
+              <a:spcAft>
+                <a:spcPts val="300"/>
+              </a:spcAft>
+            </a:pPr>
+            <a:r>
+              <a:rPr sz="1200" b="1">
+                <a:solidFill>
+                  <a:srgbClr val="0D3B66"/>
+                </a:solidFill>
+                <a:latin typeface="Calibri"/>
+              </a:rPr>
+              <a:t>4.583 m³    14,7 %</a:t>
+            </a:r>
+          </a:p>
+        </p:txBody>
+      </p:sp>
+      <p:sp>
+        <p:nvSpPr>
+          <p:cNvPr id="56" name="Rounded Rectangle 55"/>
+          <p:cNvSpPr/>
+          <p:nvPr/>
+        </p:nvSpPr>
+        <p:spPr>
+          <a:xfrm>
+            <a:off x="8430768" y="4005072"/>
+            <a:ext cx="3419856" cy="347471"/>
+          </a:xfrm>
+          <a:prstGeom prst="roundRect">
+            <a:avLst>
+              <a:gd name="adj" fmla="val 8000"/>
+            </a:avLst>
+          </a:prstGeom>
+          <a:solidFill>
+            <a:srgbClr val="F5F7FA"/>
+          </a:solidFill>
+          <a:ln w="6350">
+            <a:solidFill>
+              <a:srgbClr val="0D3B66"/>
+            </a:solidFill>
+          </a:ln>
+        </p:spPr>
+        <p:style>
+          <a:lnRef idx="1">
+            <a:schemeClr val="accent1"/>
+          </a:lnRef>
+          <a:fillRef idx="3">
+            <a:schemeClr val="accent1"/>
+          </a:fillRef>
+          <a:effectRef idx="2">
+            <a:schemeClr val="accent1"/>
+          </a:effectRef>
+          <a:fontRef idx="minor">
+            <a:schemeClr val="lt1"/>
+          </a:fontRef>
+        </p:style>
+        <p:txBody>
+          <a:bodyPr rtlCol="0" anchor="ctr"/>
+          <a:lstStyle/>
+          <a:p>
+            <a:pPr algn="ctr"/>
+          </a:p>
+        </p:txBody>
+      </p:sp>
+      <p:sp>
+        <p:nvSpPr>
+          <p:cNvPr id="57" name="TextBox 56"/>
+          <p:cNvSpPr txBox="1"/>
+          <p:nvPr/>
+        </p:nvSpPr>
+        <p:spPr>
+          <a:xfrm>
+            <a:off x="8540496" y="4032504"/>
+            <a:ext cx="3200400" cy="145938"/>
+          </a:xfrm>
+          <a:prstGeom prst="rect">
+            <a:avLst/>
+          </a:prstGeom>
+          <a:noFill/>
+        </p:spPr>
+        <p:txBody>
+          <a:bodyPr wrap="square">
+            <a:spAutoFit/>
+          </a:bodyPr>
+          <a:lstStyle/>
+          <a:p>
+            <a:pPr algn="l">
+              <a:spcAft>
+                <a:spcPts val="300"/>
+              </a:spcAft>
+            </a:pPr>
+            <a:r>
+              <a:rPr sz="1000" b="1">
+                <a:solidFill>
+                  <a:srgbClr val="0D3B66"/>
+                </a:solidFill>
+                <a:latin typeface="Calibri"/>
+              </a:rPr>
+              <a:t>Matriz Andén</a:t>
+            </a:r>
+          </a:p>
+        </p:txBody>
+      </p:sp>
+      <p:sp>
+        <p:nvSpPr>
+          <p:cNvPr id="58" name="TextBox 57"/>
+          <p:cNvSpPr txBox="1"/>
+          <p:nvPr/>
+        </p:nvSpPr>
+        <p:spPr>
+          <a:xfrm>
+            <a:off x="8540496" y="4151010"/>
+            <a:ext cx="3200400" cy="180685"/>
+          </a:xfrm>
+          <a:prstGeom prst="rect">
+            <a:avLst/>
+          </a:prstGeom>
+          <a:noFill/>
+        </p:spPr>
+        <p:txBody>
+          <a:bodyPr wrap="square">
+            <a:spAutoFit/>
+          </a:bodyPr>
+          <a:lstStyle/>
+          <a:p>
+            <a:pPr algn="l">
+              <a:spcAft>
+                <a:spcPts val="300"/>
+              </a:spcAft>
+            </a:pPr>
+            <a:r>
+              <a:rPr sz="1200" b="1">
+                <a:solidFill>
+                  <a:srgbClr val="0D3B66"/>
+                </a:solidFill>
+                <a:latin typeface="Calibri"/>
+              </a:rPr>
+              <a:t>3.086 m³    9,9 %</a:t>
+            </a:r>
+          </a:p>
+        </p:txBody>
+      </p:sp>
+      <p:sp>
+        <p:nvSpPr>
+          <p:cNvPr id="59" name="Rounded Rectangle 58"/>
+          <p:cNvSpPr/>
+          <p:nvPr/>
+        </p:nvSpPr>
+        <p:spPr>
+          <a:xfrm>
+            <a:off x="8430768" y="4389120"/>
+            <a:ext cx="3419856" cy="347471"/>
+          </a:xfrm>
+          <a:prstGeom prst="roundRect">
+            <a:avLst>
+              <a:gd name="adj" fmla="val 8000"/>
+            </a:avLst>
+          </a:prstGeom>
+          <a:solidFill>
+            <a:srgbClr val="F5F7FA"/>
+          </a:solidFill>
+          <a:ln w="6350">
+            <a:solidFill>
+              <a:srgbClr val="C9A227"/>
+            </a:solidFill>
+          </a:ln>
+        </p:spPr>
+        <p:style>
+          <a:lnRef idx="1">
+            <a:schemeClr val="accent1"/>
+          </a:lnRef>
+          <a:fillRef idx="3">
+            <a:schemeClr val="accent1"/>
+          </a:fillRef>
+          <a:effectRef idx="2">
+            <a:schemeClr val="accent1"/>
+          </a:effectRef>
+          <a:fontRef idx="minor">
+            <a:schemeClr val="lt1"/>
+          </a:fontRef>
+        </p:style>
+        <p:txBody>
+          <a:bodyPr rtlCol="0" anchor="ctr"/>
+          <a:lstStyle/>
+          <a:p>
+            <a:pPr algn="ctr"/>
+          </a:p>
+        </p:txBody>
+      </p:sp>
+      <p:sp>
+        <p:nvSpPr>
+          <p:cNvPr id="60" name="TextBox 59"/>
+          <p:cNvSpPr txBox="1"/>
+          <p:nvPr/>
+        </p:nvSpPr>
+        <p:spPr>
+          <a:xfrm>
+            <a:off x="8540496" y="4416552"/>
+            <a:ext cx="3200400" cy="145938"/>
+          </a:xfrm>
+          <a:prstGeom prst="rect">
+            <a:avLst/>
+          </a:prstGeom>
+          <a:noFill/>
+        </p:spPr>
+        <p:txBody>
+          <a:bodyPr wrap="square">
+            <a:spAutoFit/>
+          </a:bodyPr>
+          <a:lstStyle/>
+          <a:p>
+            <a:pPr algn="l">
+              <a:spcAft>
+                <a:spcPts val="300"/>
+              </a:spcAft>
+            </a:pPr>
+            <a:r>
+              <a:rPr sz="1000" b="1">
+                <a:solidFill>
+                  <a:srgbClr val="C9A227"/>
+                </a:solidFill>
+                <a:latin typeface="Calibri"/>
+              </a:rPr>
+              <a:t>Pileta</a:t>
+            </a:r>
+          </a:p>
+        </p:txBody>
+      </p:sp>
+      <p:sp>
+        <p:nvSpPr>
+          <p:cNvPr id="61" name="TextBox 60"/>
+          <p:cNvSpPr txBox="1"/>
+          <p:nvPr/>
+        </p:nvSpPr>
+        <p:spPr>
+          <a:xfrm>
+            <a:off x="8540496" y="4535058"/>
+            <a:ext cx="3200400" cy="180685"/>
+          </a:xfrm>
+          <a:prstGeom prst="rect">
+            <a:avLst/>
+          </a:prstGeom>
+          <a:noFill/>
+        </p:spPr>
+        <p:txBody>
+          <a:bodyPr wrap="square">
+            <a:spAutoFit/>
+          </a:bodyPr>
+          <a:lstStyle/>
+          <a:p>
+            <a:pPr algn="l">
+              <a:spcAft>
+                <a:spcPts val="300"/>
+              </a:spcAft>
+            </a:pPr>
+            <a:r>
+              <a:rPr sz="1200" b="1">
+                <a:solidFill>
+                  <a:srgbClr val="0D3B66"/>
+                </a:solidFill>
+                <a:latin typeface="Calibri"/>
+              </a:rPr>
+              <a:t>172 m³    0,5 %</a:t>
+            </a:r>
+          </a:p>
+        </p:txBody>
+      </p:sp>
+      <p:sp>
+        <p:nvSpPr>
+          <p:cNvPr id="62" name="Rounded Rectangle 61"/>
+          <p:cNvSpPr/>
+          <p:nvPr/>
+        </p:nvSpPr>
+        <p:spPr>
+          <a:xfrm>
+            <a:off x="8430768" y="4773168"/>
+            <a:ext cx="3419856" cy="347471"/>
+          </a:xfrm>
+          <a:prstGeom prst="roundRect">
+            <a:avLst>
+              <a:gd name="adj" fmla="val 8000"/>
+            </a:avLst>
+          </a:prstGeom>
+          <a:solidFill>
+            <a:srgbClr val="F5F7FA"/>
+          </a:solidFill>
+          <a:ln w="6350">
+            <a:solidFill>
+              <a:srgbClr val="8C5A5A"/>
+            </a:solidFill>
+          </a:ln>
+        </p:spPr>
+        <p:style>
+          <a:lnRef idx="1">
+            <a:schemeClr val="accent1"/>
+          </a:lnRef>
+          <a:fillRef idx="3">
+            <a:schemeClr val="accent1"/>
+          </a:fillRef>
+          <a:effectRef idx="2">
+            <a:schemeClr val="accent1"/>
+          </a:effectRef>
+          <a:fontRef idx="minor">
+            <a:schemeClr val="lt1"/>
+          </a:fontRef>
+        </p:style>
+        <p:txBody>
+          <a:bodyPr rtlCol="0" anchor="ctr"/>
+          <a:lstStyle/>
+          <a:p>
+            <a:pPr algn="ctr"/>
+          </a:p>
+        </p:txBody>
+      </p:sp>
+      <p:sp>
+        <p:nvSpPr>
+          <p:cNvPr id="63" name="TextBox 62"/>
+          <p:cNvSpPr txBox="1"/>
+          <p:nvPr/>
+        </p:nvSpPr>
+        <p:spPr>
+          <a:xfrm>
+            <a:off x="8540496" y="4800600"/>
+            <a:ext cx="3200400" cy="145938"/>
+          </a:xfrm>
+          <a:prstGeom prst="rect">
+            <a:avLst/>
+          </a:prstGeom>
+          <a:noFill/>
+        </p:spPr>
+        <p:txBody>
+          <a:bodyPr wrap="square">
+            <a:spAutoFit/>
+          </a:bodyPr>
+          <a:lstStyle/>
+          <a:p>
+            <a:pPr algn="l">
+              <a:spcAft>
+                <a:spcPts val="300"/>
+              </a:spcAft>
+            </a:pPr>
+            <a:r>
+              <a:rPr sz="1000" b="1">
+                <a:solidFill>
+                  <a:srgbClr val="8C5A5A"/>
+                </a:solidFill>
+                <a:latin typeface="Calibri"/>
+              </a:rPr>
+              <a:t>Restaurante</a:t>
+            </a:r>
+          </a:p>
+        </p:txBody>
+      </p:sp>
+      <p:sp>
+        <p:nvSpPr>
+          <p:cNvPr id="64" name="TextBox 63"/>
+          <p:cNvSpPr txBox="1"/>
+          <p:nvPr/>
+        </p:nvSpPr>
+        <p:spPr>
+          <a:xfrm>
+            <a:off x="8540496" y="4919106"/>
+            <a:ext cx="3200400" cy="180685"/>
+          </a:xfrm>
+          <a:prstGeom prst="rect">
+            <a:avLst/>
+          </a:prstGeom>
+          <a:noFill/>
+        </p:spPr>
+        <p:txBody>
+          <a:bodyPr wrap="square">
+            <a:spAutoFit/>
+          </a:bodyPr>
+          <a:lstStyle/>
+          <a:p>
+            <a:pPr algn="l">
+              <a:spcAft>
+                <a:spcPts val="300"/>
+              </a:spcAft>
+            </a:pPr>
+            <a:r>
+              <a:rPr sz="1200" b="1">
+                <a:solidFill>
+                  <a:srgbClr val="0D3B66"/>
+                </a:solidFill>
+                <a:latin typeface="Calibri"/>
+              </a:rPr>
+              <a:t>98 m³    0,3 %</a:t>
+            </a:r>
+          </a:p>
+        </p:txBody>
+      </p:sp>
+      <p:sp>
+        <p:nvSpPr>
+          <p:cNvPr id="65" name="Rounded Rectangle 64"/>
+          <p:cNvSpPr/>
+          <p:nvPr/>
+        </p:nvSpPr>
+        <p:spPr>
+          <a:xfrm>
+            <a:off x="8430768" y="5157216"/>
+            <a:ext cx="3419856" cy="347471"/>
           </a:xfrm>
           <a:prstGeom prst="roundRect">
             <a:avLst>
@@ -9250,27 +9303,66 @@
       </p:sp>
       <p:sp>
         <p:nvSpPr>
-          <p:cNvPr id="10" name="TextBox 9"/>
-          <p:cNvSpPr txBox="1"/>
-          <p:nvPr/>
-        </p:nvSpPr>
-        <p:spPr>
-          <a:xfrm>
-            <a:off x="274320" y="1700784"/>
-            <a:ext cx="1792224" cy="256032"/>
-          </a:xfrm>
-          <a:prstGeom prst="rect">
-            <a:avLst/>
-          </a:prstGeom>
-          <a:noFill/>
-        </p:spPr>
-        <p:txBody>
-          <a:bodyPr wrap="square">
-            <a:spAutoFit/>
-          </a:bodyPr>
-          <a:lstStyle/>
-          <a:p>
-            <a:pPr algn="ctr">
+          <p:cNvPr id="66" name="TextBox 65"/>
+          <p:cNvSpPr txBox="1"/>
+          <p:nvPr/>
+        </p:nvSpPr>
+        <p:spPr>
+          <a:xfrm>
+            <a:off x="8540496" y="5184648"/>
+            <a:ext cx="3200400" cy="145938"/>
+          </a:xfrm>
+          <a:prstGeom prst="rect">
+            <a:avLst/>
+          </a:prstGeom>
+          <a:noFill/>
+        </p:spPr>
+        <p:txBody>
+          <a:bodyPr wrap="square">
+            <a:spAutoFit/>
+          </a:bodyPr>
+          <a:lstStyle/>
+          <a:p>
+            <a:pPr algn="l">
+              <a:spcAft>
+                <a:spcPts val="300"/>
+              </a:spcAft>
+            </a:pPr>
+            <a:r>
+              <a:rPr sz="1000" b="1">
+                <a:solidFill>
+                  <a:srgbClr val="7BA3C9"/>
+                </a:solidFill>
+                <a:latin typeface="Calibri"/>
+              </a:rPr>
+              <a:t>Cascada</a:t>
+            </a:r>
+          </a:p>
+        </p:txBody>
+      </p:sp>
+      <p:sp>
+        <p:nvSpPr>
+          <p:cNvPr id="67" name="TextBox 66"/>
+          <p:cNvSpPr txBox="1"/>
+          <p:nvPr/>
+        </p:nvSpPr>
+        <p:spPr>
+          <a:xfrm>
+            <a:off x="8540496" y="5303154"/>
+            <a:ext cx="3200400" cy="180685"/>
+          </a:xfrm>
+          <a:prstGeom prst="rect">
+            <a:avLst/>
+          </a:prstGeom>
+          <a:noFill/>
+        </p:spPr>
+        <p:txBody>
+          <a:bodyPr wrap="square">
+            <a:spAutoFit/>
+          </a:bodyPr>
+          <a:lstStyle/>
+          <a:p>
+            <a:pPr algn="l">
               <a:spcAft>
                 <a:spcPts val="300"/>
               </a:spcAft>
@@ -9282,20 +9374,453 @@
                 </a:solidFill>
                 <a:latin typeface="Calibri"/>
               </a:rPr>
-              <a:t>Sandía Antigua</a:t>
-            </a:r>
-          </a:p>
-        </p:txBody>
-      </p:sp>
-      <p:sp>
-        <p:nvSpPr>
-          <p:cNvPr id="11" name="Rounded Rectangle 10"/>
+              <a:t>20 m³    &lt;0,1 %</a:t>
+            </a:r>
+          </a:p>
+        </p:txBody>
+      </p:sp>
+      <p:sp>
+        <p:nvSpPr>
+          <p:cNvPr id="68" name="Rounded Rectangle 67"/>
           <p:cNvSpPr/>
           <p:nvPr/>
         </p:nvSpPr>
         <p:spPr>
           <a:xfrm>
-            <a:off x="2468880" y="1591056"/>
+            <a:off x="201168" y="5705856"/>
+            <a:ext cx="11795760" cy="438912"/>
+          </a:xfrm>
+          <a:prstGeom prst="roundRect">
+            <a:avLst>
+              <a:gd name="adj" fmla="val 8000"/>
+            </a:avLst>
+          </a:prstGeom>
+          <a:solidFill>
+            <a:srgbClr val="FFF9EB"/>
+          </a:solidFill>
+          <a:ln w="6350">
+            <a:solidFill>
+              <a:srgbClr val="C9A227"/>
+            </a:solidFill>
+          </a:ln>
+        </p:spPr>
+        <p:style>
+          <a:lnRef idx="1">
+            <a:schemeClr val="accent1"/>
+          </a:lnRef>
+          <a:fillRef idx="3">
+            <a:schemeClr val="accent1"/>
+          </a:fillRef>
+          <a:effectRef idx="2">
+            <a:schemeClr val="accent1"/>
+          </a:effectRef>
+          <a:fontRef idx="minor">
+            <a:schemeClr val="lt1"/>
+          </a:fontRef>
+        </p:style>
+        <p:txBody>
+          <a:bodyPr rtlCol="0" anchor="ctr"/>
+          <a:lstStyle/>
+          <a:p>
+            <a:pPr algn="ctr"/>
+          </a:p>
+        </p:txBody>
+      </p:sp>
+      <p:sp>
+        <p:nvSpPr>
+          <p:cNvPr id="69" name="TextBox 68"/>
+          <p:cNvSpPr txBox="1"/>
+          <p:nvPr/>
+        </p:nvSpPr>
+        <p:spPr>
+          <a:xfrm>
+            <a:off x="329184" y="5779008"/>
+            <a:ext cx="11539728" cy="310896"/>
+          </a:xfrm>
+          <a:prstGeom prst="rect">
+            <a:avLst/>
+          </a:prstGeom>
+          <a:noFill/>
+        </p:spPr>
+        <p:txBody>
+          <a:bodyPr wrap="square">
+            <a:spAutoFit/>
+          </a:bodyPr>
+          <a:lstStyle/>
+          <a:p>
+            <a:pPr algn="l">
+              <a:spcAft>
+                <a:spcPts val="300"/>
+              </a:spcAft>
+            </a:pPr>
+            <a:r>
+              <a:rPr sz="1100" b="0">
+                <a:solidFill>
+                  <a:srgbClr val="0D3B66"/>
+                </a:solidFill>
+                <a:latin typeface="Calibri"/>
+              </a:rPr>
+              <a:t>Recepción 12/12/2025  ·  Capacitación 17/12/2025  ·  Francisco Jeldres  ·  Paula Azolas  ·  Mantención: C. Naranjo, M. Jara, R. Moreno, R. Díaz, J. Gutiérrez, H. Fierro</a:t>
+            </a:r>
+          </a:p>
+        </p:txBody>
+      </p:sp>
+      <p:sp>
+        <p:nvSpPr>
+          <p:cNvPr id="70" name="TextBox 69"/>
+          <p:cNvSpPr txBox="1"/>
+          <p:nvPr/>
+        </p:nvSpPr>
+        <p:spPr>
+          <a:xfrm>
+            <a:off x="256032" y="6181344"/>
+            <a:ext cx="11704320" cy="566928"/>
+          </a:xfrm>
+          <a:prstGeom prst="rect">
+            <a:avLst/>
+          </a:prstGeom>
+          <a:noFill/>
+        </p:spPr>
+        <p:txBody>
+          <a:bodyPr wrap="square">
+            <a:spAutoFit/>
+          </a:bodyPr>
+          <a:lstStyle/>
+          <a:p>
+            <a:pPr algn="l">
+              <a:spcAft>
+                <a:spcPts val="300"/>
+              </a:spcAft>
+            </a:pPr>
+            <a:r>
+              <a:rPr sz="1200" b="0">
+                <a:solidFill>
+                  <a:srgbClr val="0D3B66"/>
+                </a:solidFill>
+                <a:latin typeface="Calibri"/>
+              </a:rPr>
+              <a:t>Mayo 26.357   ·   Junio 20.927   ·   Julio 31.239   ·   Agosto 1–17: 21.494   ·   proy. ago 39.195 m³.</a:t>
+            </a:r>
+          </a:p>
+          <a:p>
+            <a:pPr algn="l">
+              <a:spcAft>
+                <a:spcPts val="300"/>
+              </a:spcAft>
+            </a:pPr>
+            <a:r>
+              <a:rPr sz="1100" b="0">
+                <a:solidFill>
+                  <a:srgbClr val="5A5A5A"/>
+                </a:solidFill>
+                <a:latin typeface="Calibri"/>
+              </a:rPr>
+              <a:t>Julio = cabecera (7 puntos). 27, 35 y 36 no se suman: cadena Sandía → DL (lámina 2).</a:t>
+            </a:r>
+          </a:p>
+        </p:txBody>
+      </p:sp>
+    </p:spTree>
+  </p:cSld>
+  <p:clrMapOvr>
+    <a:masterClrMapping/>
+  </p:clrMapOvr>
+</p:sld>
+</file>
+
+<file path=ppt/slides/slide15.xml><?xml version="1.0" encoding="utf-8"?>
+<p:sld xmlns:a="http://schemas.openxmlformats.org/drawingml/2006/main" xmlns:p="http://schemas.openxmlformats.org/presentationml/2006/main" xmlns:r="http://schemas.openxmlformats.org/officeDocument/2006/relationships">
+  <p:cSld>
+    <p:spTree>
+      <p:nvGrpSpPr>
+        <p:cNvPr id="1" name=""/>
+        <p:cNvGrpSpPr/>
+        <p:nvPr/>
+      </p:nvGrpSpPr>
+      <p:grpSpPr/>
+      <p:sp>
+        <p:nvSpPr>
+          <p:cNvPr id="2" name="Rectangle 1"/>
+          <p:cNvSpPr/>
+          <p:nvPr/>
+        </p:nvSpPr>
+        <p:spPr>
+          <a:xfrm>
+            <a:off x="0" y="0"/>
+            <a:ext cx="12191695" cy="841248"/>
+          </a:xfrm>
+          <a:prstGeom prst="rect">
+            <a:avLst/>
+          </a:prstGeom>
+          <a:solidFill>
+            <a:srgbClr val="0D3B66"/>
+          </a:solidFill>
+          <a:ln>
+            <a:noFill/>
+          </a:ln>
+        </p:spPr>
+        <p:style>
+          <a:lnRef idx="1">
+            <a:schemeClr val="accent1"/>
+          </a:lnRef>
+          <a:fillRef idx="3">
+            <a:schemeClr val="accent1"/>
+          </a:fillRef>
+          <a:effectRef idx="2">
+            <a:schemeClr val="accent1"/>
+          </a:effectRef>
+          <a:fontRef idx="minor">
+            <a:schemeClr val="lt1"/>
+          </a:fontRef>
+        </p:style>
+        <p:txBody>
+          <a:bodyPr rtlCol="0" anchor="ctr"/>
+          <a:lstStyle/>
+          <a:p>
+            <a:pPr algn="ctr"/>
+          </a:p>
+        </p:txBody>
+      </p:sp>
+      <p:sp>
+        <p:nvSpPr>
+          <p:cNvPr id="3" name="Rectangle 2"/>
+          <p:cNvSpPr/>
+          <p:nvPr/>
+        </p:nvSpPr>
+        <p:spPr>
+          <a:xfrm>
+            <a:off x="0" y="841248"/>
+            <a:ext cx="12191695" cy="54864"/>
+          </a:xfrm>
+          <a:prstGeom prst="rect">
+            <a:avLst/>
+          </a:prstGeom>
+          <a:solidFill>
+            <a:srgbClr val="C9A227"/>
+          </a:solidFill>
+          <a:ln>
+            <a:noFill/>
+          </a:ln>
+        </p:spPr>
+        <p:style>
+          <a:lnRef idx="1">
+            <a:schemeClr val="accent1"/>
+          </a:lnRef>
+          <a:fillRef idx="3">
+            <a:schemeClr val="accent1"/>
+          </a:fillRef>
+          <a:effectRef idx="2">
+            <a:schemeClr val="accent1"/>
+          </a:effectRef>
+          <a:fontRef idx="minor">
+            <a:schemeClr val="lt1"/>
+          </a:fontRef>
+        </p:style>
+        <p:txBody>
+          <a:bodyPr rtlCol="0" anchor="ctr"/>
+          <a:lstStyle/>
+          <a:p>
+            <a:pPr algn="ctr"/>
+          </a:p>
+        </p:txBody>
+      </p:sp>
+      <p:pic>
+        <p:nvPicPr>
+          <p:cNvPr id="4" name="Picture 3" descr="logo wes.bmp"/>
+          <p:cNvPicPr>
+            <a:picLocks noChangeAspect="1"/>
+          </p:cNvPicPr>
+          <p:nvPr/>
+        </p:nvPicPr>
+        <p:blipFill>
+          <a:blip r:embed="rId2"/>
+          <a:stretch>
+            <a:fillRect/>
+          </a:stretch>
+        </p:blipFill>
+        <p:spPr>
+          <a:xfrm>
+            <a:off x="10835640" y="146304"/>
+            <a:ext cx="1143000" cy="253401"/>
+          </a:xfrm>
+          <a:prstGeom prst="rect">
+            <a:avLst/>
+          </a:prstGeom>
+        </p:spPr>
+      </p:pic>
+      <p:sp>
+        <p:nvSpPr>
+          <p:cNvPr id="5" name="TextBox 4"/>
+          <p:cNvSpPr txBox="1"/>
+          <p:nvPr/>
+        </p:nvSpPr>
+        <p:spPr>
+          <a:xfrm>
+            <a:off x="256032" y="109728"/>
+            <a:ext cx="10607040" cy="384048"/>
+          </a:xfrm>
+          <a:prstGeom prst="rect">
+            <a:avLst/>
+          </a:prstGeom>
+          <a:noFill/>
+        </p:spPr>
+        <p:txBody>
+          <a:bodyPr wrap="square">
+            <a:spAutoFit/>
+          </a:bodyPr>
+          <a:lstStyle/>
+          <a:p>
+            <a:pPr algn="l">
+              <a:spcAft>
+                <a:spcPts val="300"/>
+              </a:spcAft>
+            </a:pPr>
+            <a:r>
+              <a:rPr sz="2000" b="1">
+                <a:solidFill>
+                  <a:srgbClr val="FFFFFF"/>
+                </a:solidFill>
+                <a:latin typeface="Calibri"/>
+              </a:rPr>
+              <a:t>PAK  ·  2. Cadena Sandía / Distrito de Lujo</a:t>
+            </a:r>
+          </a:p>
+        </p:txBody>
+      </p:sp>
+      <p:sp>
+        <p:nvSpPr>
+          <p:cNvPr id="6" name="TextBox 5"/>
+          <p:cNvSpPr txBox="1"/>
+          <p:nvPr/>
+        </p:nvSpPr>
+        <p:spPr>
+          <a:xfrm>
+            <a:off x="256032" y="457200"/>
+            <a:ext cx="10607040" cy="329184"/>
+          </a:xfrm>
+          <a:prstGeom prst="rect">
+            <a:avLst/>
+          </a:prstGeom>
+          <a:noFill/>
+        </p:spPr>
+        <p:txBody>
+          <a:bodyPr wrap="square">
+            <a:spAutoFit/>
+          </a:bodyPr>
+          <a:lstStyle/>
+          <a:p>
+            <a:pPr algn="l">
+              <a:spcAft>
+                <a:spcPts val="300"/>
+              </a:spcAft>
+            </a:pPr>
+            <a:r>
+              <a:rPr sz="1100" b="0">
+                <a:solidFill>
+                  <a:srgbClr val="DCE6F0"/>
+                </a:solidFill>
+                <a:latin typeface="Calibri"/>
+              </a:rPr>
+              <a:t>Sandía Antigua y Sandía Nueva alimentan Distrito de Lujo  ·  se divide en Bazar Gourmet y DL Kennedy</a:t>
+            </a:r>
+          </a:p>
+        </p:txBody>
+      </p:sp>
+      <p:sp>
+        <p:nvSpPr>
+          <p:cNvPr id="7" name="Rounded Rectangle 6"/>
+          <p:cNvSpPr/>
+          <p:nvPr/>
+        </p:nvSpPr>
+        <p:spPr>
+          <a:xfrm>
+            <a:off x="201168" y="987552"/>
+            <a:ext cx="11777472" cy="512064"/>
+          </a:xfrm>
+          <a:prstGeom prst="roundRect">
+            <a:avLst>
+              <a:gd name="adj" fmla="val 8000"/>
+            </a:avLst>
+          </a:prstGeom>
+          <a:solidFill>
+            <a:srgbClr val="FFF9EB"/>
+          </a:solidFill>
+          <a:ln w="6350">
+            <a:solidFill>
+              <a:srgbClr val="C9A227"/>
+            </a:solidFill>
+          </a:ln>
+        </p:spPr>
+        <p:style>
+          <a:lnRef idx="1">
+            <a:schemeClr val="accent1"/>
+          </a:lnRef>
+          <a:fillRef idx="3">
+            <a:schemeClr val="accent1"/>
+          </a:fillRef>
+          <a:effectRef idx="2">
+            <a:schemeClr val="accent1"/>
+          </a:effectRef>
+          <a:fontRef idx="minor">
+            <a:schemeClr val="lt1"/>
+          </a:fontRef>
+        </p:style>
+        <p:txBody>
+          <a:bodyPr rtlCol="0" anchor="ctr"/>
+          <a:lstStyle/>
+          <a:p>
+            <a:pPr algn="ctr"/>
+          </a:p>
+        </p:txBody>
+      </p:sp>
+      <p:sp>
+        <p:nvSpPr>
+          <p:cNvPr id="8" name="TextBox 7"/>
+          <p:cNvSpPr txBox="1"/>
+          <p:nvPr/>
+        </p:nvSpPr>
+        <p:spPr>
+          <a:xfrm>
+            <a:off x="365760" y="1042415"/>
+            <a:ext cx="11475720" cy="402336"/>
+          </a:xfrm>
+          <a:prstGeom prst="rect">
+            <a:avLst/>
+          </a:prstGeom>
+          <a:noFill/>
+        </p:spPr>
+        <p:txBody>
+          <a:bodyPr wrap="square">
+            <a:spAutoFit/>
+          </a:bodyPr>
+          <a:lstStyle/>
+          <a:p>
+            <a:pPr algn="l">
+              <a:spcAft>
+                <a:spcPts val="300"/>
+              </a:spcAft>
+            </a:pPr>
+            <a:r>
+              <a:rPr sz="1300" b="0">
+                <a:solidFill>
+                  <a:srgbClr val="0D3B66"/>
+                </a:solidFill>
+                <a:latin typeface="Calibri"/>
+              </a:rPr>
+              <a:t>Sandía Antigua y Sandía Nueva alimentan Distrito de Lujo. Desde ahí el caudal se divide en Bazar Gourmet y DL Kennedy. Por eso esos tres puntos no se suman a la cabecera: sería doble conteo.</a:t>
+            </a:r>
+          </a:p>
+        </p:txBody>
+      </p:sp>
+      <p:sp>
+        <p:nvSpPr>
+          <p:cNvPr id="9" name="Rounded Rectangle 8"/>
+          <p:cNvSpPr/>
+          <p:nvPr/>
+        </p:nvSpPr>
+        <p:spPr>
+          <a:xfrm>
+            <a:off x="201168" y="1591056"/>
             <a:ext cx="1938528" cy="457200"/>
           </a:xfrm>
           <a:prstGeom prst="roundRect">
@@ -9308,7 +9833,93 @@
           </a:solidFill>
           <a:ln w="6350">
             <a:solidFill>
-              <a:srgbClr val="46648C"/>
+              <a:srgbClr val="C45C26"/>
+            </a:solidFill>
+          </a:ln>
+        </p:spPr>
+        <p:style>
+          <a:lnRef idx="1">
+            <a:schemeClr val="accent1"/>
+          </a:lnRef>
+          <a:fillRef idx="3">
+            <a:schemeClr val="accent1"/>
+          </a:fillRef>
+          <a:effectRef idx="2">
+            <a:schemeClr val="accent1"/>
+          </a:effectRef>
+          <a:fontRef idx="minor">
+            <a:schemeClr val="lt1"/>
+          </a:fontRef>
+        </p:style>
+        <p:txBody>
+          <a:bodyPr rtlCol="0" anchor="ctr"/>
+          <a:lstStyle/>
+          <a:p>
+            <a:pPr algn="ctr"/>
+          </a:p>
+        </p:txBody>
+      </p:sp>
+      <p:sp>
+        <p:nvSpPr>
+          <p:cNvPr id="10" name="TextBox 9"/>
+          <p:cNvSpPr txBox="1"/>
+          <p:nvPr/>
+        </p:nvSpPr>
+        <p:spPr>
+          <a:xfrm>
+            <a:off x="274320" y="1700784"/>
+            <a:ext cx="1792224" cy="256032"/>
+          </a:xfrm>
+          <a:prstGeom prst="rect">
+            <a:avLst/>
+          </a:prstGeom>
+          <a:noFill/>
+        </p:spPr>
+        <p:txBody>
+          <a:bodyPr wrap="square">
+            <a:spAutoFit/>
+          </a:bodyPr>
+          <a:lstStyle/>
+          <a:p>
+            <a:pPr algn="ctr">
+              <a:spcAft>
+                <a:spcPts val="300"/>
+              </a:spcAft>
+            </a:pPr>
+            <a:r>
+              <a:rPr sz="1200" b="1">
+                <a:solidFill>
+                  <a:srgbClr val="0D3B66"/>
+                </a:solidFill>
+                <a:latin typeface="Calibri"/>
+              </a:rPr>
+              <a:t>Sandía Antigua</a:t>
+            </a:r>
+          </a:p>
+        </p:txBody>
+      </p:sp>
+      <p:sp>
+        <p:nvSpPr>
+          <p:cNvPr id="11" name="Rounded Rectangle 10"/>
+          <p:cNvSpPr/>
+          <p:nvPr/>
+        </p:nvSpPr>
+        <p:spPr>
+          <a:xfrm>
+            <a:off x="2468880" y="1591056"/>
+            <a:ext cx="1938528" cy="457200"/>
+          </a:xfrm>
+          <a:prstGeom prst="roundRect">
+            <a:avLst>
+              <a:gd name="adj" fmla="val 8000"/>
+            </a:avLst>
+          </a:prstGeom>
+          <a:solidFill>
+            <a:srgbClr val="F5F7FA"/>
+          </a:solidFill>
+          <a:ln w="6350">
+            <a:solidFill>
+              <a:srgbClr val="5A8C6E"/>
             </a:solidFill>
           </a:ln>
         </p:spPr>

--- a/reports/Parque_Arauco/TMP_7MALLS/entrega_diego_anibal/Recorrido_ejecutivo_PA_MAE_20260817.pptx
+++ b/reports/Parque_Arauco/TMP_7MALLS/entrega_diego_anibal/Recorrido_ejecutivo_PA_MAE_20260817.pptx
@@ -12871,45 +12871,29 @@
               </a:spcAft>
             </a:pPr>
             <a:r>
+              <a:rPr sz="1200" b="1">
+                <a:solidFill>
+                  <a:srgbClr val="0D3B66"/>
+                </a:solidFill>
+                <a:latin typeface="Calibri"/>
+              </a:rPr>
+              <a:t>Estanque Norte (control 05/08, 00:00–05:00): noche típica 4,8 → 1,1 m³, ahorro 3,7 m³. × 5 h de control × 30 días = 555 m³/mes = $777.000/mes (tarifa $1.400/m³). Es el que más ahorra de los controles MAE.</a:t>
+            </a:r>
+          </a:p>
+          <a:p>
+            <a:pPr algn="l">
+              <a:spcAft>
+                <a:spcPts val="300"/>
+              </a:spcAft>
+            </a:pPr>
+            <a:r>
               <a:rPr sz="1200" b="0">
                 <a:solidFill>
                   <a:srgbClr val="0D3B66"/>
                 </a:solidFill>
                 <a:latin typeface="Calibri"/>
               </a:rPr>
-              <a:t>Estanque Norte (control 05/08): noche típica 4,8 → 1,1 m³. Ahorro 3,7 m³/noche ($5.194/noche · $155.820/mes). En 13 noches: 48 m³ = $67.522 (tarifa $1.400/m³).</a:t>
-            </a:r>
-          </a:p>
-          <a:p>
-            <a:pPr algn="l">
-              <a:spcAft>
-                <a:spcPts val="300"/>
-              </a:spcAft>
-            </a:pPr>
-            <a:r>
-              <a:rPr sz="1200" b="0">
-                <a:solidFill>
-                  <a:srgbClr val="0D3B66"/>
-                </a:solidFill>
-                <a:latin typeface="Calibri"/>
-              </a:rPr>
-              <a:t>Pizza Hut (control 01/07): noche típica 0,1 → 0 m³.</a:t>
-            </a:r>
-          </a:p>
-          <a:p>
-            <a:pPr algn="l">
-              <a:spcAft>
-                <a:spcPts val="300"/>
-              </a:spcAft>
-            </a:pPr>
-            <a:r>
-              <a:rPr sz="1200" b="0">
-                <a:solidFill>
-                  <a:srgbClr val="0D3B66"/>
-                </a:solidFill>
-                <a:latin typeface="Calibri"/>
-              </a:rPr>
-              <a:t>Estanque Sur: corte on/off a cargo de mantención nocturna.</a:t>
+              <a:t>Pizza Hut (control 01/07): noche típica 0,1 → 0 m³. Estanque Sur: corte on/off a cargo de mantención nocturna.</a:t>
             </a:r>
           </a:p>
           <a:p>

--- a/reports/Parque_Arauco/TMP_7MALLS/entrega_diego_anibal/Recorrido_ejecutivo_PA_MAE_20260817.pptx
+++ b/reports/Parque_Arauco/TMP_7MALLS/entrega_diego_anibal/Recorrido_ejecutivo_PA_MAE_20260817.pptx
@@ -3579,33 +3579,33 @@
         </p:nvSpPr>
         <p:spPr>
           <a:xfrm>
-            <a:off x="274320" y="1060704"/>
-            <a:ext cx="5733288" cy="146304"/>
-          </a:xfrm>
-          <a:prstGeom prst="rect">
-            <a:avLst/>
-          </a:prstGeom>
-          <a:noFill/>
-        </p:spPr>
-        <p:txBody>
-          <a:bodyPr wrap="square">
-            <a:spAutoFit/>
-          </a:bodyPr>
-          <a:lstStyle/>
-          <a:p>
-            <a:pPr algn="l">
-              <a:spcAft>
-                <a:spcPts val="300"/>
-              </a:spcAft>
-            </a:pPr>
-            <a:r>
-              <a:rPr sz="1000" b="1">
-                <a:solidFill>
-                  <a:srgbClr val="C9A227"/>
-                </a:solidFill>
-                <a:latin typeface="Calibri"/>
-              </a:rPr>
-              <a:t>000025-11</a:t>
+            <a:off x="274320" y="1115568"/>
+            <a:ext cx="5733288" cy="292608"/>
+          </a:xfrm>
+          <a:prstGeom prst="rect">
+            <a:avLst/>
+          </a:prstGeom>
+          <a:noFill/>
+        </p:spPr>
+        <p:txBody>
+          <a:bodyPr wrap="square">
+            <a:spAutoFit/>
+          </a:bodyPr>
+          <a:lstStyle/>
+          <a:p>
+            <a:pPr algn="l">
+              <a:spcAft>
+                <a:spcPts val="300"/>
+              </a:spcAft>
+            </a:pPr>
+            <a:r>
+              <a:rPr sz="1300" b="1">
+                <a:solidFill>
+                  <a:srgbClr val="0D3B66"/>
+                </a:solidFill>
+                <a:latin typeface="Calibri"/>
+              </a:rPr>
+              <a:t>Matriz 1° piso</a:t>
             </a:r>
           </a:p>
         </p:txBody>
@@ -3613,45 +3613,6 @@
       <p:sp>
         <p:nvSpPr>
           <p:cNvPr id="9" name="TextBox 8"/>
-          <p:cNvSpPr txBox="1"/>
-          <p:nvPr/>
-        </p:nvSpPr>
-        <p:spPr>
-          <a:xfrm>
-            <a:off x="274320" y="1243584"/>
-            <a:ext cx="5733288" cy="201168"/>
-          </a:xfrm>
-          <a:prstGeom prst="rect">
-            <a:avLst/>
-          </a:prstGeom>
-          <a:noFill/>
-        </p:spPr>
-        <p:txBody>
-          <a:bodyPr wrap="square">
-            <a:spAutoFit/>
-          </a:bodyPr>
-          <a:lstStyle/>
-          <a:p>
-            <a:pPr algn="l">
-              <a:spcAft>
-                <a:spcPts val="300"/>
-              </a:spcAft>
-            </a:pPr>
-            <a:r>
-              <a:rPr sz="1200" b="1">
-                <a:solidFill>
-                  <a:srgbClr val="0D3B66"/>
-                </a:solidFill>
-                <a:latin typeface="Calibri"/>
-              </a:rPr>
-              <a:t>Matriz 1° piso</a:t>
-            </a:r>
-          </a:p>
-        </p:txBody>
-      </p:sp>
-      <p:sp>
-        <p:nvSpPr>
-          <p:cNvPr id="10" name="TextBox 9"/>
           <p:cNvSpPr txBox="1"/>
           <p:nvPr/>
         </p:nvSpPr>
@@ -3690,7 +3651,7 @@
       </p:sp>
       <p:sp>
         <p:nvSpPr>
-          <p:cNvPr id="11" name="Rounded Rectangle 10"/>
+          <p:cNvPr id="10" name="Rounded Rectangle 9"/>
           <p:cNvSpPr/>
           <p:nvPr/>
         </p:nvSpPr>
@@ -3737,72 +3698,33 @@
       </p:sp>
       <p:sp>
         <p:nvSpPr>
-          <p:cNvPr id="12" name="TextBox 11"/>
-          <p:cNvSpPr txBox="1"/>
-          <p:nvPr/>
-        </p:nvSpPr>
-        <p:spPr>
-          <a:xfrm>
-            <a:off x="6208776" y="1060704"/>
-            <a:ext cx="5733288" cy="146304"/>
-          </a:xfrm>
-          <a:prstGeom prst="rect">
-            <a:avLst/>
-          </a:prstGeom>
-          <a:noFill/>
-        </p:spPr>
-        <p:txBody>
-          <a:bodyPr wrap="square">
-            <a:spAutoFit/>
-          </a:bodyPr>
-          <a:lstStyle/>
-          <a:p>
-            <a:pPr algn="l">
-              <a:spcAft>
-                <a:spcPts val="300"/>
-              </a:spcAft>
-            </a:pPr>
-            <a:r>
-              <a:rPr sz="1000" b="1">
-                <a:solidFill>
-                  <a:srgbClr val="C9A227"/>
-                </a:solidFill>
-                <a:latin typeface="Calibri"/>
-              </a:rPr>
-              <a:t>000025-12</a:t>
-            </a:r>
-          </a:p>
-        </p:txBody>
-      </p:sp>
-      <p:sp>
-        <p:nvSpPr>
-          <p:cNvPr id="13" name="TextBox 12"/>
-          <p:cNvSpPr txBox="1"/>
-          <p:nvPr/>
-        </p:nvSpPr>
-        <p:spPr>
-          <a:xfrm>
-            <a:off x="6208776" y="1243584"/>
-            <a:ext cx="5733288" cy="201168"/>
-          </a:xfrm>
-          <a:prstGeom prst="rect">
-            <a:avLst/>
-          </a:prstGeom>
-          <a:noFill/>
-        </p:spPr>
-        <p:txBody>
-          <a:bodyPr wrap="square">
-            <a:spAutoFit/>
-          </a:bodyPr>
-          <a:lstStyle/>
-          <a:p>
-            <a:pPr algn="l">
-              <a:spcAft>
-                <a:spcPts val="300"/>
-              </a:spcAft>
-            </a:pPr>
-            <a:r>
-              <a:rPr sz="1200" b="1">
+          <p:cNvPr id="11" name="TextBox 10"/>
+          <p:cNvSpPr txBox="1"/>
+          <p:nvPr/>
+        </p:nvSpPr>
+        <p:spPr>
+          <a:xfrm>
+            <a:off x="6208776" y="1115568"/>
+            <a:ext cx="5733288" cy="292608"/>
+          </a:xfrm>
+          <a:prstGeom prst="rect">
+            <a:avLst/>
+          </a:prstGeom>
+          <a:noFill/>
+        </p:spPr>
+        <p:txBody>
+          <a:bodyPr wrap="square">
+            <a:spAutoFit/>
+          </a:bodyPr>
+          <a:lstStyle/>
+          <a:p>
+            <a:pPr algn="l">
+              <a:spcAft>
+                <a:spcPts val="300"/>
+              </a:spcAft>
+            </a:pPr>
+            <a:r>
+              <a:rPr sz="1300" b="1">
                 <a:solidFill>
                   <a:srgbClr val="0D3B66"/>
                 </a:solidFill>
@@ -3815,7 +3737,7 @@
       </p:sp>
       <p:sp>
         <p:nvSpPr>
-          <p:cNvPr id="14" name="Rounded Rectangle 13"/>
+          <p:cNvPr id="12" name="Rounded Rectangle 11"/>
           <p:cNvSpPr/>
           <p:nvPr/>
         </p:nvSpPr>
@@ -3860,7 +3782,7 @@
       </p:sp>
       <p:pic>
         <p:nvPicPr>
-          <p:cNvPr id="15" name="Picture 14" descr="aeb_mensual_may_ago.png"/>
+          <p:cNvPr id="13" name="Picture 12" descr="aeb_mensual_may_ago.png"/>
           <p:cNvPicPr>
             <a:picLocks noChangeAspect="1"/>
           </p:cNvPicPr>
@@ -3884,7 +3806,7 @@
       </p:pic>
       <p:sp>
         <p:nvSpPr>
-          <p:cNvPr id="16" name="Rounded Rectangle 15"/>
+          <p:cNvPr id="14" name="Rounded Rectangle 13"/>
           <p:cNvSpPr/>
           <p:nvPr/>
         </p:nvSpPr>
@@ -3931,7 +3853,7 @@
       </p:sp>
       <p:sp>
         <p:nvSpPr>
-          <p:cNvPr id="17" name="TextBox 16"/>
+          <p:cNvPr id="15" name="TextBox 14"/>
           <p:cNvSpPr txBox="1"/>
           <p:nvPr/>
         </p:nvSpPr>
@@ -3970,7 +3892,7 @@
       </p:sp>
       <p:sp>
         <p:nvSpPr>
-          <p:cNvPr id="18" name="TextBox 17"/>
+          <p:cNvPr id="16" name="TextBox 15"/>
           <p:cNvSpPr txBox="1"/>
           <p:nvPr/>
         </p:nvSpPr>
@@ -4009,7 +3931,7 @@
       </p:sp>
       <p:sp>
         <p:nvSpPr>
-          <p:cNvPr id="19" name="Rounded Rectangle 18"/>
+          <p:cNvPr id="17" name="Rounded Rectangle 16"/>
           <p:cNvSpPr/>
           <p:nvPr/>
         </p:nvSpPr>
@@ -4056,7 +3978,7 @@
       </p:sp>
       <p:sp>
         <p:nvSpPr>
-          <p:cNvPr id="20" name="TextBox 19"/>
+          <p:cNvPr id="18" name="TextBox 17"/>
           <p:cNvSpPr txBox="1"/>
           <p:nvPr/>
         </p:nvSpPr>
@@ -4095,7 +4017,7 @@
       </p:sp>
       <p:sp>
         <p:nvSpPr>
-          <p:cNvPr id="21" name="TextBox 20"/>
+          <p:cNvPr id="19" name="TextBox 18"/>
           <p:cNvSpPr txBox="1"/>
           <p:nvPr/>
         </p:nvSpPr>
@@ -4134,7 +4056,7 @@
       </p:sp>
       <p:sp>
         <p:nvSpPr>
-          <p:cNvPr id="22" name="Rounded Rectangle 21"/>
+          <p:cNvPr id="20" name="Rounded Rectangle 19"/>
           <p:cNvSpPr/>
           <p:nvPr/>
         </p:nvSpPr>
@@ -4181,7 +4103,7 @@
       </p:sp>
       <p:sp>
         <p:nvSpPr>
-          <p:cNvPr id="23" name="TextBox 22"/>
+          <p:cNvPr id="21" name="TextBox 20"/>
           <p:cNvSpPr txBox="1"/>
           <p:nvPr/>
         </p:nvSpPr>
@@ -4220,7 +4142,7 @@
       </p:sp>
       <p:sp>
         <p:nvSpPr>
-          <p:cNvPr id="24" name="TextBox 23"/>
+          <p:cNvPr id="22" name="TextBox 21"/>
           <p:cNvSpPr txBox="1"/>
           <p:nvPr/>
         </p:nvSpPr>
@@ -4259,7 +4181,7 @@
       </p:sp>
       <p:sp>
         <p:nvSpPr>
-          <p:cNvPr id="25" name="Rounded Rectangle 24"/>
+          <p:cNvPr id="23" name="Rounded Rectangle 22"/>
           <p:cNvSpPr/>
           <p:nvPr/>
         </p:nvSpPr>
@@ -4306,7 +4228,7 @@
       </p:sp>
       <p:sp>
         <p:nvSpPr>
-          <p:cNvPr id="26" name="TextBox 25"/>
+          <p:cNvPr id="24" name="TextBox 23"/>
           <p:cNvSpPr txBox="1"/>
           <p:nvPr/>
         </p:nvSpPr>
@@ -4345,7 +4267,7 @@
       </p:sp>
       <p:sp>
         <p:nvSpPr>
-          <p:cNvPr id="27" name="TextBox 26"/>
+          <p:cNvPr id="25" name="TextBox 24"/>
           <p:cNvSpPr txBox="1"/>
           <p:nvPr/>
         </p:nvSpPr>
@@ -5269,66 +5191,27 @@
         </p:nvSpPr>
         <p:spPr>
           <a:xfrm>
-            <a:off x="274320" y="1060704"/>
-            <a:ext cx="5733288" cy="146304"/>
-          </a:xfrm>
-          <a:prstGeom prst="rect">
-            <a:avLst/>
-          </a:prstGeom>
-          <a:noFill/>
-        </p:spPr>
-        <p:txBody>
-          <a:bodyPr wrap="square">
-            <a:spAutoFit/>
-          </a:bodyPr>
-          <a:lstStyle/>
-          <a:p>
-            <a:pPr algn="l">
-              <a:spcAft>
-                <a:spcPts val="300"/>
-              </a:spcAft>
-            </a:pPr>
-            <a:r>
-              <a:rPr sz="1000" b="1">
-                <a:solidFill>
-                  <a:srgbClr val="C9A227"/>
-                </a:solidFill>
-                <a:latin typeface="Calibri"/>
-              </a:rPr>
-              <a:t>000025-38</a:t>
-            </a:r>
-          </a:p>
-        </p:txBody>
-      </p:sp>
-      <p:sp>
-        <p:nvSpPr>
-          <p:cNvPr id="9" name="TextBox 8"/>
-          <p:cNvSpPr txBox="1"/>
-          <p:nvPr/>
-        </p:nvSpPr>
-        <p:spPr>
-          <a:xfrm>
-            <a:off x="274320" y="1243584"/>
-            <a:ext cx="5733288" cy="201168"/>
-          </a:xfrm>
-          <a:prstGeom prst="rect">
-            <a:avLst/>
-          </a:prstGeom>
-          <a:noFill/>
-        </p:spPr>
-        <p:txBody>
-          <a:bodyPr wrap="square">
-            <a:spAutoFit/>
-          </a:bodyPr>
-          <a:lstStyle/>
-          <a:p>
-            <a:pPr algn="l">
-              <a:spcAft>
-                <a:spcPts val="300"/>
-              </a:spcAft>
-            </a:pPr>
-            <a:r>
-              <a:rPr sz="1200" b="1">
+            <a:off x="274320" y="1115568"/>
+            <a:ext cx="5733288" cy="292608"/>
+          </a:xfrm>
+          <a:prstGeom prst="rect">
+            <a:avLst/>
+          </a:prstGeom>
+          <a:noFill/>
+        </p:spPr>
+        <p:txBody>
+          <a:bodyPr wrap="square">
+            <a:spAutoFit/>
+          </a:bodyPr>
+          <a:lstStyle/>
+          <a:p>
+            <a:pPr algn="l">
+              <a:spcAft>
+                <a:spcPts val="300"/>
+              </a:spcAft>
+            </a:pPr>
+            <a:r>
+              <a:rPr sz="1300" b="1">
                 <a:solidFill>
                   <a:srgbClr val="0D3B66"/>
                 </a:solidFill>
@@ -5341,7 +5224,7 @@
       </p:sp>
       <p:sp>
         <p:nvSpPr>
-          <p:cNvPr id="10" name="Rounded Rectangle 9"/>
+          <p:cNvPr id="9" name="Rounded Rectangle 8"/>
           <p:cNvSpPr/>
           <p:nvPr/>
         </p:nvSpPr>
@@ -5388,72 +5271,33 @@
       </p:sp>
       <p:sp>
         <p:nvSpPr>
-          <p:cNvPr id="11" name="TextBox 10"/>
-          <p:cNvSpPr txBox="1"/>
-          <p:nvPr/>
-        </p:nvSpPr>
-        <p:spPr>
-          <a:xfrm>
-            <a:off x="6208776" y="1060704"/>
-            <a:ext cx="5733288" cy="146304"/>
-          </a:xfrm>
-          <a:prstGeom prst="rect">
-            <a:avLst/>
-          </a:prstGeom>
-          <a:noFill/>
-        </p:spPr>
-        <p:txBody>
-          <a:bodyPr wrap="square">
-            <a:spAutoFit/>
-          </a:bodyPr>
-          <a:lstStyle/>
-          <a:p>
-            <a:pPr algn="l">
-              <a:spcAft>
-                <a:spcPts val="300"/>
-              </a:spcAft>
-            </a:pPr>
-            <a:r>
-              <a:rPr sz="1000" b="1">
-                <a:solidFill>
-                  <a:srgbClr val="C9A227"/>
-                </a:solidFill>
-                <a:latin typeface="Calibri"/>
-              </a:rPr>
-              <a:t>000025-37</a:t>
-            </a:r>
-          </a:p>
-        </p:txBody>
-      </p:sp>
-      <p:sp>
-        <p:nvSpPr>
-          <p:cNvPr id="12" name="TextBox 11"/>
-          <p:cNvSpPr txBox="1"/>
-          <p:nvPr/>
-        </p:nvSpPr>
-        <p:spPr>
-          <a:xfrm>
-            <a:off x="6208776" y="1243584"/>
-            <a:ext cx="5733288" cy="201168"/>
-          </a:xfrm>
-          <a:prstGeom prst="rect">
-            <a:avLst/>
-          </a:prstGeom>
-          <a:noFill/>
-        </p:spPr>
-        <p:txBody>
-          <a:bodyPr wrap="square">
-            <a:spAutoFit/>
-          </a:bodyPr>
-          <a:lstStyle/>
-          <a:p>
-            <a:pPr algn="l">
-              <a:spcAft>
-                <a:spcPts val="300"/>
-              </a:spcAft>
-            </a:pPr>
-            <a:r>
-              <a:rPr sz="1200" b="1">
+          <p:cNvPr id="10" name="TextBox 9"/>
+          <p:cNvSpPr txBox="1"/>
+          <p:nvPr/>
+        </p:nvSpPr>
+        <p:spPr>
+          <a:xfrm>
+            <a:off x="6208776" y="1115568"/>
+            <a:ext cx="5733288" cy="292608"/>
+          </a:xfrm>
+          <a:prstGeom prst="rect">
+            <a:avLst/>
+          </a:prstGeom>
+          <a:noFill/>
+        </p:spPr>
+        <p:txBody>
+          <a:bodyPr wrap="square">
+            <a:spAutoFit/>
+          </a:bodyPr>
+          <a:lstStyle/>
+          <a:p>
+            <a:pPr algn="l">
+              <a:spcAft>
+                <a:spcPts val="300"/>
+              </a:spcAft>
+            </a:pPr>
+            <a:r>
+              <a:rPr sz="1300" b="1">
                 <a:solidFill>
                   <a:srgbClr val="0D3B66"/>
                 </a:solidFill>
@@ -5466,7 +5310,7 @@
       </p:sp>
       <p:sp>
         <p:nvSpPr>
-          <p:cNvPr id="13" name="Rounded Rectangle 12"/>
+          <p:cNvPr id="11" name="Rounded Rectangle 10"/>
           <p:cNvSpPr/>
           <p:nvPr/>
         </p:nvSpPr>
@@ -5511,7 +5355,7 @@
       </p:sp>
       <p:pic>
         <p:nvPicPr>
-          <p:cNvPr id="14" name="Picture 13" descr="cur_mensual_may_ago.png"/>
+          <p:cNvPr id="12" name="Picture 11" descr="cur_mensual_may_ago.png"/>
           <p:cNvPicPr>
             <a:picLocks noChangeAspect="1"/>
           </p:cNvPicPr>
@@ -5535,7 +5379,7 @@
       </p:pic>
       <p:sp>
         <p:nvSpPr>
-          <p:cNvPr id="15" name="Rounded Rectangle 14"/>
+          <p:cNvPr id="13" name="Rounded Rectangle 12"/>
           <p:cNvSpPr/>
           <p:nvPr/>
         </p:nvSpPr>
@@ -5582,7 +5426,7 @@
       </p:sp>
       <p:sp>
         <p:nvSpPr>
-          <p:cNvPr id="16" name="TextBox 15"/>
+          <p:cNvPr id="14" name="TextBox 13"/>
           <p:cNvSpPr txBox="1"/>
           <p:nvPr/>
         </p:nvSpPr>
@@ -5621,7 +5465,7 @@
       </p:sp>
       <p:sp>
         <p:nvSpPr>
-          <p:cNvPr id="17" name="TextBox 16"/>
+          <p:cNvPr id="15" name="TextBox 14"/>
           <p:cNvSpPr txBox="1"/>
           <p:nvPr/>
         </p:nvSpPr>
@@ -5660,7 +5504,7 @@
       </p:sp>
       <p:sp>
         <p:nvSpPr>
-          <p:cNvPr id="18" name="Rounded Rectangle 17"/>
+          <p:cNvPr id="16" name="Rounded Rectangle 15"/>
           <p:cNvSpPr/>
           <p:nvPr/>
         </p:nvSpPr>
@@ -5707,7 +5551,7 @@
       </p:sp>
       <p:sp>
         <p:nvSpPr>
-          <p:cNvPr id="19" name="TextBox 18"/>
+          <p:cNvPr id="17" name="TextBox 16"/>
           <p:cNvSpPr txBox="1"/>
           <p:nvPr/>
         </p:nvSpPr>
@@ -5746,7 +5590,7 @@
       </p:sp>
       <p:sp>
         <p:nvSpPr>
-          <p:cNvPr id="20" name="TextBox 19"/>
+          <p:cNvPr id="18" name="TextBox 17"/>
           <p:cNvSpPr txBox="1"/>
           <p:nvPr/>
         </p:nvSpPr>
@@ -5785,7 +5629,7 @@
       </p:sp>
       <p:sp>
         <p:nvSpPr>
-          <p:cNvPr id="21" name="Rounded Rectangle 20"/>
+          <p:cNvPr id="19" name="Rounded Rectangle 18"/>
           <p:cNvSpPr/>
           <p:nvPr/>
         </p:nvSpPr>
@@ -5832,7 +5676,7 @@
       </p:sp>
       <p:sp>
         <p:nvSpPr>
-          <p:cNvPr id="22" name="TextBox 21"/>
+          <p:cNvPr id="20" name="TextBox 19"/>
           <p:cNvSpPr txBox="1"/>
           <p:nvPr/>
         </p:nvSpPr>
@@ -5871,7 +5715,7 @@
       </p:sp>
       <p:sp>
         <p:nvSpPr>
-          <p:cNvPr id="23" name="TextBox 22"/>
+          <p:cNvPr id="21" name="TextBox 20"/>
           <p:cNvSpPr txBox="1"/>
           <p:nvPr/>
         </p:nvSpPr>
@@ -5910,7 +5754,7 @@
       </p:sp>
       <p:sp>
         <p:nvSpPr>
-          <p:cNvPr id="24" name="Rounded Rectangle 23"/>
+          <p:cNvPr id="22" name="Rounded Rectangle 21"/>
           <p:cNvSpPr/>
           <p:nvPr/>
         </p:nvSpPr>
@@ -5957,7 +5801,7 @@
       </p:sp>
       <p:sp>
         <p:nvSpPr>
-          <p:cNvPr id="25" name="TextBox 24"/>
+          <p:cNvPr id="23" name="TextBox 22"/>
           <p:cNvSpPr txBox="1"/>
           <p:nvPr/>
         </p:nvSpPr>
@@ -5996,7 +5840,7 @@
       </p:sp>
       <p:sp>
         <p:nvSpPr>
-          <p:cNvPr id="26" name="TextBox 25"/>
+          <p:cNvPr id="24" name="TextBox 23"/>
           <p:cNvSpPr txBox="1"/>
           <p:nvPr/>
         </p:nvSpPr>
@@ -6860,7 +6704,7 @@
                 </a:solidFill>
                 <a:latin typeface="Calibri"/>
               </a:rPr>
-              <a:t>Parque Arauco Kennedy   |   10 puntos WES   |   julio = cabecera (sin 27, 35 y 36)   |   01/05/2026 – 17/08/2026</a:t>
+              <a:t>Parque Arauco Kennedy   |   10 puntos WES   |   julio = cabecera (sin cadena DL)   |   01/05/2026 – 17/08/2026</a:t>
             </a:r>
           </a:p>
         </p:txBody>
@@ -6920,66 +6764,27 @@
         </p:nvSpPr>
         <p:spPr>
           <a:xfrm>
-            <a:off x="274320" y="1060704"/>
-            <a:ext cx="2157984" cy="146304"/>
-          </a:xfrm>
-          <a:prstGeom prst="rect">
-            <a:avLst/>
-          </a:prstGeom>
-          <a:noFill/>
-        </p:spPr>
-        <p:txBody>
-          <a:bodyPr wrap="square">
-            <a:spAutoFit/>
-          </a:bodyPr>
-          <a:lstStyle/>
-          <a:p>
-            <a:pPr algn="l">
-              <a:spcAft>
-                <a:spcPts val="300"/>
-              </a:spcAft>
-            </a:pPr>
-            <a:r>
-              <a:rPr sz="900" b="1">
-                <a:solidFill>
-                  <a:srgbClr val="C9A227"/>
-                </a:solidFill>
-                <a:latin typeface="Calibri"/>
-              </a:rPr>
-              <a:t>000025-20</a:t>
-            </a:r>
-          </a:p>
-        </p:txBody>
-      </p:sp>
-      <p:sp>
-        <p:nvSpPr>
-          <p:cNvPr id="9" name="TextBox 8"/>
-          <p:cNvSpPr txBox="1"/>
-          <p:nvPr/>
-        </p:nvSpPr>
-        <p:spPr>
-          <a:xfrm>
-            <a:off x="274320" y="1225296"/>
-            <a:ext cx="2157984" cy="201168"/>
-          </a:xfrm>
-          <a:prstGeom prst="rect">
-            <a:avLst/>
-          </a:prstGeom>
-          <a:noFill/>
-        </p:spPr>
-        <p:txBody>
-          <a:bodyPr wrap="square">
-            <a:spAutoFit/>
-          </a:bodyPr>
-          <a:lstStyle/>
-          <a:p>
-            <a:pPr algn="l">
-              <a:spcAft>
-                <a:spcPts val="300"/>
-              </a:spcAft>
-            </a:pPr>
-            <a:r>
-              <a:rPr sz="1100" b="1">
+            <a:off x="274320" y="1115568"/>
+            <a:ext cx="2157984" cy="292608"/>
+          </a:xfrm>
+          <a:prstGeom prst="rect">
+            <a:avLst/>
+          </a:prstGeom>
+          <a:noFill/>
+        </p:spPr>
+        <p:txBody>
+          <a:bodyPr wrap="square">
+            <a:spAutoFit/>
+          </a:bodyPr>
+          <a:lstStyle/>
+          <a:p>
+            <a:pPr algn="l">
+              <a:spcAft>
+                <a:spcPts val="300"/>
+              </a:spcAft>
+            </a:pPr>
+            <a:r>
+              <a:rPr sz="1200" b="1">
                 <a:solidFill>
                   <a:srgbClr val="0D3B66"/>
                 </a:solidFill>
@@ -6992,7 +6797,7 @@
       </p:sp>
       <p:sp>
         <p:nvSpPr>
-          <p:cNvPr id="10" name="Rounded Rectangle 9"/>
+          <p:cNvPr id="9" name="Rounded Rectangle 8"/>
           <p:cNvSpPr/>
           <p:nvPr/>
         </p:nvSpPr>
@@ -7039,72 +6844,33 @@
       </p:sp>
       <p:sp>
         <p:nvSpPr>
-          <p:cNvPr id="11" name="TextBox 10"/>
-          <p:cNvSpPr txBox="1"/>
-          <p:nvPr/>
-        </p:nvSpPr>
-        <p:spPr>
-          <a:xfrm>
-            <a:off x="2651760" y="1060704"/>
-            <a:ext cx="2157984" cy="146304"/>
-          </a:xfrm>
-          <a:prstGeom prst="rect">
-            <a:avLst/>
-          </a:prstGeom>
-          <a:noFill/>
-        </p:spPr>
-        <p:txBody>
-          <a:bodyPr wrap="square">
-            <a:spAutoFit/>
-          </a:bodyPr>
-          <a:lstStyle/>
-          <a:p>
-            <a:pPr algn="l">
-              <a:spcAft>
-                <a:spcPts val="300"/>
-              </a:spcAft>
-            </a:pPr>
-            <a:r>
-              <a:rPr sz="900" b="1">
-                <a:solidFill>
-                  <a:srgbClr val="C9A227"/>
-                </a:solidFill>
-                <a:latin typeface="Calibri"/>
-              </a:rPr>
-              <a:t>000025-21</a:t>
-            </a:r>
-          </a:p>
-        </p:txBody>
-      </p:sp>
-      <p:sp>
-        <p:nvSpPr>
-          <p:cNvPr id="12" name="TextBox 11"/>
-          <p:cNvSpPr txBox="1"/>
-          <p:nvPr/>
-        </p:nvSpPr>
-        <p:spPr>
-          <a:xfrm>
-            <a:off x="2651760" y="1225296"/>
-            <a:ext cx="2157984" cy="201168"/>
-          </a:xfrm>
-          <a:prstGeom prst="rect">
-            <a:avLst/>
-          </a:prstGeom>
-          <a:noFill/>
-        </p:spPr>
-        <p:txBody>
-          <a:bodyPr wrap="square">
-            <a:spAutoFit/>
-          </a:bodyPr>
-          <a:lstStyle/>
-          <a:p>
-            <a:pPr algn="l">
-              <a:spcAft>
-                <a:spcPts val="300"/>
-              </a:spcAft>
-            </a:pPr>
-            <a:r>
-              <a:rPr sz="1100" b="1">
+          <p:cNvPr id="10" name="TextBox 9"/>
+          <p:cNvSpPr txBox="1"/>
+          <p:nvPr/>
+        </p:nvSpPr>
+        <p:spPr>
+          <a:xfrm>
+            <a:off x="2651760" y="1115568"/>
+            <a:ext cx="2157984" cy="292608"/>
+          </a:xfrm>
+          <a:prstGeom prst="rect">
+            <a:avLst/>
+          </a:prstGeom>
+          <a:noFill/>
+        </p:spPr>
+        <p:txBody>
+          <a:bodyPr wrap="square">
+            <a:spAutoFit/>
+          </a:bodyPr>
+          <a:lstStyle/>
+          <a:p>
+            <a:pPr algn="l">
+              <a:spcAft>
+                <a:spcPts val="300"/>
+              </a:spcAft>
+            </a:pPr>
+            <a:r>
+              <a:rPr sz="1200" b="1">
                 <a:solidFill>
                   <a:srgbClr val="0D3B66"/>
                 </a:solidFill>
@@ -7117,7 +6883,7 @@
       </p:sp>
       <p:sp>
         <p:nvSpPr>
-          <p:cNvPr id="13" name="Rounded Rectangle 12"/>
+          <p:cNvPr id="11" name="Rounded Rectangle 10"/>
           <p:cNvSpPr/>
           <p:nvPr/>
         </p:nvSpPr>
@@ -7164,72 +6930,33 @@
       </p:sp>
       <p:sp>
         <p:nvSpPr>
-          <p:cNvPr id="14" name="TextBox 13"/>
-          <p:cNvSpPr txBox="1"/>
-          <p:nvPr/>
-        </p:nvSpPr>
-        <p:spPr>
-          <a:xfrm>
-            <a:off x="5029200" y="1060704"/>
-            <a:ext cx="2157984" cy="146304"/>
-          </a:xfrm>
-          <a:prstGeom prst="rect">
-            <a:avLst/>
-          </a:prstGeom>
-          <a:noFill/>
-        </p:spPr>
-        <p:txBody>
-          <a:bodyPr wrap="square">
-            <a:spAutoFit/>
-          </a:bodyPr>
-          <a:lstStyle/>
-          <a:p>
-            <a:pPr algn="l">
-              <a:spcAft>
-                <a:spcPts val="300"/>
-              </a:spcAft>
-            </a:pPr>
-            <a:r>
-              <a:rPr sz="900" b="1">
-                <a:solidFill>
-                  <a:srgbClr val="C9A227"/>
-                </a:solidFill>
-                <a:latin typeface="Calibri"/>
-              </a:rPr>
-              <a:t>000025-22</a:t>
-            </a:r>
-          </a:p>
-        </p:txBody>
-      </p:sp>
-      <p:sp>
-        <p:nvSpPr>
-          <p:cNvPr id="15" name="TextBox 14"/>
-          <p:cNvSpPr txBox="1"/>
-          <p:nvPr/>
-        </p:nvSpPr>
-        <p:spPr>
-          <a:xfrm>
-            <a:off x="5029200" y="1225296"/>
-            <a:ext cx="2157984" cy="201168"/>
-          </a:xfrm>
-          <a:prstGeom prst="rect">
-            <a:avLst/>
-          </a:prstGeom>
-          <a:noFill/>
-        </p:spPr>
-        <p:txBody>
-          <a:bodyPr wrap="square">
-            <a:spAutoFit/>
-          </a:bodyPr>
-          <a:lstStyle/>
-          <a:p>
-            <a:pPr algn="l">
-              <a:spcAft>
-                <a:spcPts val="300"/>
-              </a:spcAft>
-            </a:pPr>
-            <a:r>
-              <a:rPr sz="1100" b="1">
+          <p:cNvPr id="12" name="TextBox 11"/>
+          <p:cNvSpPr txBox="1"/>
+          <p:nvPr/>
+        </p:nvSpPr>
+        <p:spPr>
+          <a:xfrm>
+            <a:off x="5029200" y="1115568"/>
+            <a:ext cx="2157984" cy="292608"/>
+          </a:xfrm>
+          <a:prstGeom prst="rect">
+            <a:avLst/>
+          </a:prstGeom>
+          <a:noFill/>
+        </p:spPr>
+        <p:txBody>
+          <a:bodyPr wrap="square">
+            <a:spAutoFit/>
+          </a:bodyPr>
+          <a:lstStyle/>
+          <a:p>
+            <a:pPr algn="l">
+              <a:spcAft>
+                <a:spcPts val="300"/>
+              </a:spcAft>
+            </a:pPr>
+            <a:r>
+              <a:rPr sz="1200" b="1">
                 <a:solidFill>
                   <a:srgbClr val="0D3B66"/>
                 </a:solidFill>
@@ -7242,7 +6969,7 @@
       </p:sp>
       <p:sp>
         <p:nvSpPr>
-          <p:cNvPr id="16" name="TextBox 15"/>
+          <p:cNvPr id="13" name="TextBox 12"/>
           <p:cNvSpPr txBox="1"/>
           <p:nvPr/>
         </p:nvSpPr>
@@ -7274,14 +7001,14 @@
                 </a:solidFill>
                 <a:latin typeface="Calibri"/>
               </a:rPr>
-              <a:t>alimenta 27</a:t>
-            </a:r>
-          </a:p>
-        </p:txBody>
-      </p:sp>
-      <p:sp>
-        <p:nvSpPr>
-          <p:cNvPr id="17" name="Rounded Rectangle 16"/>
+              <a:t>alimenta DL</a:t>
+            </a:r>
+          </a:p>
+        </p:txBody>
+      </p:sp>
+      <p:sp>
+        <p:nvSpPr>
+          <p:cNvPr id="14" name="Rounded Rectangle 13"/>
           <p:cNvSpPr/>
           <p:nvPr/>
         </p:nvSpPr>
@@ -7328,72 +7055,33 @@
       </p:sp>
       <p:sp>
         <p:nvSpPr>
-          <p:cNvPr id="18" name="TextBox 17"/>
-          <p:cNvSpPr txBox="1"/>
-          <p:nvPr/>
-        </p:nvSpPr>
-        <p:spPr>
-          <a:xfrm>
-            <a:off x="7406640" y="1060704"/>
-            <a:ext cx="2157984" cy="146304"/>
-          </a:xfrm>
-          <a:prstGeom prst="rect">
-            <a:avLst/>
-          </a:prstGeom>
-          <a:noFill/>
-        </p:spPr>
-        <p:txBody>
-          <a:bodyPr wrap="square">
-            <a:spAutoFit/>
-          </a:bodyPr>
-          <a:lstStyle/>
-          <a:p>
-            <a:pPr algn="l">
-              <a:spcAft>
-                <a:spcPts val="300"/>
-              </a:spcAft>
-            </a:pPr>
-            <a:r>
-              <a:rPr sz="900" b="1">
-                <a:solidFill>
-                  <a:srgbClr val="C9A227"/>
-                </a:solidFill>
-                <a:latin typeface="Calibri"/>
-              </a:rPr>
-              <a:t>000025-28</a:t>
-            </a:r>
-          </a:p>
-        </p:txBody>
-      </p:sp>
-      <p:sp>
-        <p:nvSpPr>
-          <p:cNvPr id="19" name="TextBox 18"/>
-          <p:cNvSpPr txBox="1"/>
-          <p:nvPr/>
-        </p:nvSpPr>
-        <p:spPr>
-          <a:xfrm>
-            <a:off x="7406640" y="1225296"/>
-            <a:ext cx="2157984" cy="201168"/>
-          </a:xfrm>
-          <a:prstGeom prst="rect">
-            <a:avLst/>
-          </a:prstGeom>
-          <a:noFill/>
-        </p:spPr>
-        <p:txBody>
-          <a:bodyPr wrap="square">
-            <a:spAutoFit/>
-          </a:bodyPr>
-          <a:lstStyle/>
-          <a:p>
-            <a:pPr algn="l">
-              <a:spcAft>
-                <a:spcPts val="300"/>
-              </a:spcAft>
-            </a:pPr>
-            <a:r>
-              <a:rPr sz="1100" b="1">
+          <p:cNvPr id="15" name="TextBox 14"/>
+          <p:cNvSpPr txBox="1"/>
+          <p:nvPr/>
+        </p:nvSpPr>
+        <p:spPr>
+          <a:xfrm>
+            <a:off x="7406640" y="1115568"/>
+            <a:ext cx="2157984" cy="292608"/>
+          </a:xfrm>
+          <a:prstGeom prst="rect">
+            <a:avLst/>
+          </a:prstGeom>
+          <a:noFill/>
+        </p:spPr>
+        <p:txBody>
+          <a:bodyPr wrap="square">
+            <a:spAutoFit/>
+          </a:bodyPr>
+          <a:lstStyle/>
+          <a:p>
+            <a:pPr algn="l">
+              <a:spcAft>
+                <a:spcPts val="300"/>
+              </a:spcAft>
+            </a:pPr>
+            <a:r>
+              <a:rPr sz="1200" b="1">
                 <a:solidFill>
                   <a:srgbClr val="0D3B66"/>
                 </a:solidFill>
@@ -7406,7 +7094,7 @@
       </p:sp>
       <p:sp>
         <p:nvSpPr>
-          <p:cNvPr id="20" name="TextBox 19"/>
+          <p:cNvPr id="16" name="TextBox 15"/>
           <p:cNvSpPr txBox="1"/>
           <p:nvPr/>
         </p:nvSpPr>
@@ -7438,14 +7126,14 @@
                 </a:solidFill>
                 <a:latin typeface="Calibri"/>
               </a:rPr>
-              <a:t>alimenta 27</a:t>
-            </a:r>
-          </a:p>
-        </p:txBody>
-      </p:sp>
-      <p:sp>
-        <p:nvSpPr>
-          <p:cNvPr id="21" name="Rounded Rectangle 20"/>
+              <a:t>alimenta DL</a:t>
+            </a:r>
+          </a:p>
+        </p:txBody>
+      </p:sp>
+      <p:sp>
+        <p:nvSpPr>
+          <p:cNvPr id="17" name="Rounded Rectangle 16"/>
           <p:cNvSpPr/>
           <p:nvPr/>
         </p:nvSpPr>
@@ -7492,72 +7180,33 @@
       </p:sp>
       <p:sp>
         <p:nvSpPr>
-          <p:cNvPr id="22" name="TextBox 21"/>
-          <p:cNvSpPr txBox="1"/>
-          <p:nvPr/>
-        </p:nvSpPr>
-        <p:spPr>
-          <a:xfrm>
-            <a:off x="9784080" y="1060704"/>
-            <a:ext cx="2157984" cy="146304"/>
-          </a:xfrm>
-          <a:prstGeom prst="rect">
-            <a:avLst/>
-          </a:prstGeom>
-          <a:noFill/>
-        </p:spPr>
-        <p:txBody>
-          <a:bodyPr wrap="square">
-            <a:spAutoFit/>
-          </a:bodyPr>
-          <a:lstStyle/>
-          <a:p>
-            <a:pPr algn="l">
-              <a:spcAft>
-                <a:spcPts val="300"/>
-              </a:spcAft>
-            </a:pPr>
-            <a:r>
-              <a:rPr sz="900" b="1">
-                <a:solidFill>
-                  <a:srgbClr val="C9A227"/>
-                </a:solidFill>
-                <a:latin typeface="Calibri"/>
-              </a:rPr>
-              <a:t>000025-29</a:t>
-            </a:r>
-          </a:p>
-        </p:txBody>
-      </p:sp>
-      <p:sp>
-        <p:nvSpPr>
-          <p:cNvPr id="23" name="TextBox 22"/>
-          <p:cNvSpPr txBox="1"/>
-          <p:nvPr/>
-        </p:nvSpPr>
-        <p:spPr>
-          <a:xfrm>
-            <a:off x="9784080" y="1225296"/>
-            <a:ext cx="2157984" cy="201168"/>
-          </a:xfrm>
-          <a:prstGeom prst="rect">
-            <a:avLst/>
-          </a:prstGeom>
-          <a:noFill/>
-        </p:spPr>
-        <p:txBody>
-          <a:bodyPr wrap="square">
-            <a:spAutoFit/>
-          </a:bodyPr>
-          <a:lstStyle/>
-          <a:p>
-            <a:pPr algn="l">
-              <a:spcAft>
-                <a:spcPts val="300"/>
-              </a:spcAft>
-            </a:pPr>
-            <a:r>
-              <a:rPr sz="1100" b="1">
+          <p:cNvPr id="18" name="TextBox 17"/>
+          <p:cNvSpPr txBox="1"/>
+          <p:nvPr/>
+        </p:nvSpPr>
+        <p:spPr>
+          <a:xfrm>
+            <a:off x="9784080" y="1115568"/>
+            <a:ext cx="2157984" cy="292608"/>
+          </a:xfrm>
+          <a:prstGeom prst="rect">
+            <a:avLst/>
+          </a:prstGeom>
+          <a:noFill/>
+        </p:spPr>
+        <p:txBody>
+          <a:bodyPr wrap="square">
+            <a:spAutoFit/>
+          </a:bodyPr>
+          <a:lstStyle/>
+          <a:p>
+            <a:pPr algn="l">
+              <a:spcAft>
+                <a:spcPts val="300"/>
+              </a:spcAft>
+            </a:pPr>
+            <a:r>
+              <a:rPr sz="1200" b="1">
                 <a:solidFill>
                   <a:srgbClr val="0D3B66"/>
                 </a:solidFill>
@@ -7570,7 +7219,7 @@
       </p:sp>
       <p:sp>
         <p:nvSpPr>
-          <p:cNvPr id="24" name="Rounded Rectangle 23"/>
+          <p:cNvPr id="19" name="Rounded Rectangle 18"/>
           <p:cNvSpPr/>
           <p:nvPr/>
         </p:nvSpPr>
@@ -7617,72 +7266,33 @@
       </p:sp>
       <p:sp>
         <p:nvSpPr>
-          <p:cNvPr id="25" name="TextBox 24"/>
-          <p:cNvSpPr txBox="1"/>
-          <p:nvPr/>
-        </p:nvSpPr>
-        <p:spPr>
-          <a:xfrm>
-            <a:off x="274320" y="1755648"/>
-            <a:ext cx="2157984" cy="146304"/>
-          </a:xfrm>
-          <a:prstGeom prst="rect">
-            <a:avLst/>
-          </a:prstGeom>
-          <a:noFill/>
-        </p:spPr>
-        <p:txBody>
-          <a:bodyPr wrap="square">
-            <a:spAutoFit/>
-          </a:bodyPr>
-          <a:lstStyle/>
-          <a:p>
-            <a:pPr algn="l">
-              <a:spcAft>
-                <a:spcPts val="300"/>
-              </a:spcAft>
-            </a:pPr>
-            <a:r>
-              <a:rPr sz="900" b="1">
-                <a:solidFill>
-                  <a:srgbClr val="C9A227"/>
-                </a:solidFill>
-                <a:latin typeface="Calibri"/>
-              </a:rPr>
-              <a:t>000025-23</a:t>
-            </a:r>
-          </a:p>
-        </p:txBody>
-      </p:sp>
-      <p:sp>
-        <p:nvSpPr>
-          <p:cNvPr id="26" name="TextBox 25"/>
-          <p:cNvSpPr txBox="1"/>
-          <p:nvPr/>
-        </p:nvSpPr>
-        <p:spPr>
-          <a:xfrm>
-            <a:off x="274320" y="1920240"/>
-            <a:ext cx="2157984" cy="201168"/>
-          </a:xfrm>
-          <a:prstGeom prst="rect">
-            <a:avLst/>
-          </a:prstGeom>
-          <a:noFill/>
-        </p:spPr>
-        <p:txBody>
-          <a:bodyPr wrap="square">
-            <a:spAutoFit/>
-          </a:bodyPr>
-          <a:lstStyle/>
-          <a:p>
-            <a:pPr algn="l">
-              <a:spcAft>
-                <a:spcPts val="300"/>
-              </a:spcAft>
-            </a:pPr>
-            <a:r>
-              <a:rPr sz="1100" b="1">
+          <p:cNvPr id="20" name="TextBox 19"/>
+          <p:cNvSpPr txBox="1"/>
+          <p:nvPr/>
+        </p:nvSpPr>
+        <p:spPr>
+          <a:xfrm>
+            <a:off x="274320" y="1810512"/>
+            <a:ext cx="2157984" cy="292608"/>
+          </a:xfrm>
+          <a:prstGeom prst="rect">
+            <a:avLst/>
+          </a:prstGeom>
+          <a:noFill/>
+        </p:spPr>
+        <p:txBody>
+          <a:bodyPr wrap="square">
+            <a:spAutoFit/>
+          </a:bodyPr>
+          <a:lstStyle/>
+          <a:p>
+            <a:pPr algn="l">
+              <a:spcAft>
+                <a:spcPts val="300"/>
+              </a:spcAft>
+            </a:pPr>
+            <a:r>
+              <a:rPr sz="1200" b="1">
                 <a:solidFill>
                   <a:srgbClr val="0D3B66"/>
                 </a:solidFill>
@@ -7695,7 +7305,7 @@
       </p:sp>
       <p:sp>
         <p:nvSpPr>
-          <p:cNvPr id="27" name="Rounded Rectangle 26"/>
+          <p:cNvPr id="21" name="Rounded Rectangle 20"/>
           <p:cNvSpPr/>
           <p:nvPr/>
         </p:nvSpPr>
@@ -7742,72 +7352,33 @@
       </p:sp>
       <p:sp>
         <p:nvSpPr>
-          <p:cNvPr id="28" name="TextBox 27"/>
-          <p:cNvSpPr txBox="1"/>
-          <p:nvPr/>
-        </p:nvSpPr>
-        <p:spPr>
-          <a:xfrm>
-            <a:off x="2651760" y="1755648"/>
-            <a:ext cx="2157984" cy="146304"/>
-          </a:xfrm>
-          <a:prstGeom prst="rect">
-            <a:avLst/>
-          </a:prstGeom>
-          <a:noFill/>
-        </p:spPr>
-        <p:txBody>
-          <a:bodyPr wrap="square">
-            <a:spAutoFit/>
-          </a:bodyPr>
-          <a:lstStyle/>
-          <a:p>
-            <a:pPr algn="l">
-              <a:spcAft>
-                <a:spcPts val="300"/>
-              </a:spcAft>
-            </a:pPr>
-            <a:r>
-              <a:rPr sz="900" b="1">
-                <a:solidFill>
-                  <a:srgbClr val="C9A227"/>
-                </a:solidFill>
-                <a:latin typeface="Calibri"/>
-              </a:rPr>
-              <a:t>000025-24</a:t>
-            </a:r>
-          </a:p>
-        </p:txBody>
-      </p:sp>
-      <p:sp>
-        <p:nvSpPr>
-          <p:cNvPr id="29" name="TextBox 28"/>
-          <p:cNvSpPr txBox="1"/>
-          <p:nvPr/>
-        </p:nvSpPr>
-        <p:spPr>
-          <a:xfrm>
-            <a:off x="2651760" y="1920240"/>
-            <a:ext cx="2157984" cy="201168"/>
-          </a:xfrm>
-          <a:prstGeom prst="rect">
-            <a:avLst/>
-          </a:prstGeom>
-          <a:noFill/>
-        </p:spPr>
-        <p:txBody>
-          <a:bodyPr wrap="square">
-            <a:spAutoFit/>
-          </a:bodyPr>
-          <a:lstStyle/>
-          <a:p>
-            <a:pPr algn="l">
-              <a:spcAft>
-                <a:spcPts val="300"/>
-              </a:spcAft>
-            </a:pPr>
-            <a:r>
-              <a:rPr sz="1100" b="1">
+          <p:cNvPr id="22" name="TextBox 21"/>
+          <p:cNvSpPr txBox="1"/>
+          <p:nvPr/>
+        </p:nvSpPr>
+        <p:spPr>
+          <a:xfrm>
+            <a:off x="2651760" y="1810512"/>
+            <a:ext cx="2157984" cy="292608"/>
+          </a:xfrm>
+          <a:prstGeom prst="rect">
+            <a:avLst/>
+          </a:prstGeom>
+          <a:noFill/>
+        </p:spPr>
+        <p:txBody>
+          <a:bodyPr wrap="square">
+            <a:spAutoFit/>
+          </a:bodyPr>
+          <a:lstStyle/>
+          <a:p>
+            <a:pPr algn="l">
+              <a:spcAft>
+                <a:spcPts val="300"/>
+              </a:spcAft>
+            </a:pPr>
+            <a:r>
+              <a:rPr sz="1200" b="1">
                 <a:solidFill>
                   <a:srgbClr val="0D3B66"/>
                 </a:solidFill>
@@ -7820,7 +7391,7 @@
       </p:sp>
       <p:sp>
         <p:nvSpPr>
-          <p:cNvPr id="30" name="Rounded Rectangle 29"/>
+          <p:cNvPr id="23" name="Rounded Rectangle 22"/>
           <p:cNvSpPr/>
           <p:nvPr/>
         </p:nvSpPr>
@@ -7867,72 +7438,33 @@
       </p:sp>
       <p:sp>
         <p:nvSpPr>
-          <p:cNvPr id="31" name="TextBox 30"/>
-          <p:cNvSpPr txBox="1"/>
-          <p:nvPr/>
-        </p:nvSpPr>
-        <p:spPr>
-          <a:xfrm>
-            <a:off x="5029200" y="1755648"/>
-            <a:ext cx="2157984" cy="146304"/>
-          </a:xfrm>
-          <a:prstGeom prst="rect">
-            <a:avLst/>
-          </a:prstGeom>
-          <a:noFill/>
-        </p:spPr>
-        <p:txBody>
-          <a:bodyPr wrap="square">
-            <a:spAutoFit/>
-          </a:bodyPr>
-          <a:lstStyle/>
-          <a:p>
-            <a:pPr algn="l">
-              <a:spcAft>
-                <a:spcPts val="300"/>
-              </a:spcAft>
-            </a:pPr>
-            <a:r>
-              <a:rPr sz="900" b="1">
-                <a:solidFill>
-                  <a:srgbClr val="C9A227"/>
-                </a:solidFill>
-                <a:latin typeface="Calibri"/>
-              </a:rPr>
-              <a:t>000025-27</a:t>
-            </a:r>
-          </a:p>
-        </p:txBody>
-      </p:sp>
-      <p:sp>
-        <p:nvSpPr>
-          <p:cNvPr id="32" name="TextBox 31"/>
-          <p:cNvSpPr txBox="1"/>
-          <p:nvPr/>
-        </p:nvSpPr>
-        <p:spPr>
-          <a:xfrm>
-            <a:off x="5029200" y="1920240"/>
-            <a:ext cx="2157984" cy="201168"/>
-          </a:xfrm>
-          <a:prstGeom prst="rect">
-            <a:avLst/>
-          </a:prstGeom>
-          <a:noFill/>
-        </p:spPr>
-        <p:txBody>
-          <a:bodyPr wrap="square">
-            <a:spAutoFit/>
-          </a:bodyPr>
-          <a:lstStyle/>
-          <a:p>
-            <a:pPr algn="l">
-              <a:spcAft>
-                <a:spcPts val="300"/>
-              </a:spcAft>
-            </a:pPr>
-            <a:r>
-              <a:rPr sz="1100" b="1">
+          <p:cNvPr id="24" name="TextBox 23"/>
+          <p:cNvSpPr txBox="1"/>
+          <p:nvPr/>
+        </p:nvSpPr>
+        <p:spPr>
+          <a:xfrm>
+            <a:off x="5029200" y="1810512"/>
+            <a:ext cx="2157984" cy="292608"/>
+          </a:xfrm>
+          <a:prstGeom prst="rect">
+            <a:avLst/>
+          </a:prstGeom>
+          <a:noFill/>
+        </p:spPr>
+        <p:txBody>
+          <a:bodyPr wrap="square">
+            <a:spAutoFit/>
+          </a:bodyPr>
+          <a:lstStyle/>
+          <a:p>
+            <a:pPr algn="l">
+              <a:spcAft>
+                <a:spcPts val="300"/>
+              </a:spcAft>
+            </a:pPr>
+            <a:r>
+              <a:rPr sz="1200" b="1">
                 <a:solidFill>
                   <a:srgbClr val="0D3B66"/>
                 </a:solidFill>
@@ -7945,7 +7477,7 @@
       </p:sp>
       <p:sp>
         <p:nvSpPr>
-          <p:cNvPr id="33" name="TextBox 32"/>
+          <p:cNvPr id="25" name="TextBox 24"/>
           <p:cNvSpPr txBox="1"/>
           <p:nvPr/>
         </p:nvSpPr>
@@ -7984,7 +7516,7 @@
       </p:sp>
       <p:sp>
         <p:nvSpPr>
-          <p:cNvPr id="34" name="Rounded Rectangle 33"/>
+          <p:cNvPr id="26" name="Rounded Rectangle 25"/>
           <p:cNvSpPr/>
           <p:nvPr/>
         </p:nvSpPr>
@@ -8031,72 +7563,33 @@
       </p:sp>
       <p:sp>
         <p:nvSpPr>
-          <p:cNvPr id="35" name="TextBox 34"/>
-          <p:cNvSpPr txBox="1"/>
-          <p:nvPr/>
-        </p:nvSpPr>
-        <p:spPr>
-          <a:xfrm>
-            <a:off x="7406640" y="1755648"/>
-            <a:ext cx="2157984" cy="146304"/>
-          </a:xfrm>
-          <a:prstGeom prst="rect">
-            <a:avLst/>
-          </a:prstGeom>
-          <a:noFill/>
-        </p:spPr>
-        <p:txBody>
-          <a:bodyPr wrap="square">
-            <a:spAutoFit/>
-          </a:bodyPr>
-          <a:lstStyle/>
-          <a:p>
-            <a:pPr algn="l">
-              <a:spcAft>
-                <a:spcPts val="300"/>
-              </a:spcAft>
-            </a:pPr>
-            <a:r>
-              <a:rPr sz="900" b="1">
-                <a:solidFill>
-                  <a:srgbClr val="C9A227"/>
-                </a:solidFill>
-                <a:latin typeface="Calibri"/>
-              </a:rPr>
-              <a:t>000025-35</a:t>
-            </a:r>
-          </a:p>
-        </p:txBody>
-      </p:sp>
-      <p:sp>
-        <p:nvSpPr>
-          <p:cNvPr id="36" name="TextBox 35"/>
-          <p:cNvSpPr txBox="1"/>
-          <p:nvPr/>
-        </p:nvSpPr>
-        <p:spPr>
-          <a:xfrm>
-            <a:off x="7406640" y="1920240"/>
-            <a:ext cx="2157984" cy="201168"/>
-          </a:xfrm>
-          <a:prstGeom prst="rect">
-            <a:avLst/>
-          </a:prstGeom>
-          <a:noFill/>
-        </p:spPr>
-        <p:txBody>
-          <a:bodyPr wrap="square">
-            <a:spAutoFit/>
-          </a:bodyPr>
-          <a:lstStyle/>
-          <a:p>
-            <a:pPr algn="l">
-              <a:spcAft>
-                <a:spcPts val="300"/>
-              </a:spcAft>
-            </a:pPr>
-            <a:r>
-              <a:rPr sz="1100" b="1">
+          <p:cNvPr id="27" name="TextBox 26"/>
+          <p:cNvSpPr txBox="1"/>
+          <p:nvPr/>
+        </p:nvSpPr>
+        <p:spPr>
+          <a:xfrm>
+            <a:off x="7406640" y="1810512"/>
+            <a:ext cx="2157984" cy="292608"/>
+          </a:xfrm>
+          <a:prstGeom prst="rect">
+            <a:avLst/>
+          </a:prstGeom>
+          <a:noFill/>
+        </p:spPr>
+        <p:txBody>
+          <a:bodyPr wrap="square">
+            <a:spAutoFit/>
+          </a:bodyPr>
+          <a:lstStyle/>
+          <a:p>
+            <a:pPr algn="l">
+              <a:spcAft>
+                <a:spcPts val="300"/>
+              </a:spcAft>
+            </a:pPr>
+            <a:r>
+              <a:rPr sz="1200" b="1">
                 <a:solidFill>
                   <a:srgbClr val="0D3B66"/>
                 </a:solidFill>
@@ -8109,7 +7602,7 @@
       </p:sp>
       <p:sp>
         <p:nvSpPr>
-          <p:cNvPr id="37" name="TextBox 36"/>
+          <p:cNvPr id="28" name="TextBox 27"/>
           <p:cNvSpPr txBox="1"/>
           <p:nvPr/>
         </p:nvSpPr>
@@ -8141,14 +7634,14 @@
                 </a:solidFill>
                 <a:latin typeface="Calibri"/>
               </a:rPr>
-              <a:t>sale de 27</a:t>
-            </a:r>
-          </a:p>
-        </p:txBody>
-      </p:sp>
-      <p:sp>
-        <p:nvSpPr>
-          <p:cNvPr id="38" name="Rounded Rectangle 37"/>
+              <a:t>sale de DL</a:t>
+            </a:r>
+          </a:p>
+        </p:txBody>
+      </p:sp>
+      <p:sp>
+        <p:nvSpPr>
+          <p:cNvPr id="29" name="Rounded Rectangle 28"/>
           <p:cNvSpPr/>
           <p:nvPr/>
         </p:nvSpPr>
@@ -8195,72 +7688,33 @@
       </p:sp>
       <p:sp>
         <p:nvSpPr>
-          <p:cNvPr id="39" name="TextBox 38"/>
-          <p:cNvSpPr txBox="1"/>
-          <p:nvPr/>
-        </p:nvSpPr>
-        <p:spPr>
-          <a:xfrm>
-            <a:off x="9784080" y="1755648"/>
-            <a:ext cx="2157984" cy="146304"/>
-          </a:xfrm>
-          <a:prstGeom prst="rect">
-            <a:avLst/>
-          </a:prstGeom>
-          <a:noFill/>
-        </p:spPr>
-        <p:txBody>
-          <a:bodyPr wrap="square">
-            <a:spAutoFit/>
-          </a:bodyPr>
-          <a:lstStyle/>
-          <a:p>
-            <a:pPr algn="l">
-              <a:spcAft>
-                <a:spcPts val="300"/>
-              </a:spcAft>
-            </a:pPr>
-            <a:r>
-              <a:rPr sz="900" b="1">
-                <a:solidFill>
-                  <a:srgbClr val="C9A227"/>
-                </a:solidFill>
-                <a:latin typeface="Calibri"/>
-              </a:rPr>
-              <a:t>000025-36</a:t>
-            </a:r>
-          </a:p>
-        </p:txBody>
-      </p:sp>
-      <p:sp>
-        <p:nvSpPr>
-          <p:cNvPr id="40" name="TextBox 39"/>
-          <p:cNvSpPr txBox="1"/>
-          <p:nvPr/>
-        </p:nvSpPr>
-        <p:spPr>
-          <a:xfrm>
-            <a:off x="9784080" y="1920240"/>
-            <a:ext cx="2157984" cy="201168"/>
-          </a:xfrm>
-          <a:prstGeom prst="rect">
-            <a:avLst/>
-          </a:prstGeom>
-          <a:noFill/>
-        </p:spPr>
-        <p:txBody>
-          <a:bodyPr wrap="square">
-            <a:spAutoFit/>
-          </a:bodyPr>
-          <a:lstStyle/>
-          <a:p>
-            <a:pPr algn="l">
-              <a:spcAft>
-                <a:spcPts val="300"/>
-              </a:spcAft>
-            </a:pPr>
-            <a:r>
-              <a:rPr sz="1100" b="1">
+          <p:cNvPr id="30" name="TextBox 29"/>
+          <p:cNvSpPr txBox="1"/>
+          <p:nvPr/>
+        </p:nvSpPr>
+        <p:spPr>
+          <a:xfrm>
+            <a:off x="9784080" y="1810512"/>
+            <a:ext cx="2157984" cy="292608"/>
+          </a:xfrm>
+          <a:prstGeom prst="rect">
+            <a:avLst/>
+          </a:prstGeom>
+          <a:noFill/>
+        </p:spPr>
+        <p:txBody>
+          <a:bodyPr wrap="square">
+            <a:spAutoFit/>
+          </a:bodyPr>
+          <a:lstStyle/>
+          <a:p>
+            <a:pPr algn="l">
+              <a:spcAft>
+                <a:spcPts val="300"/>
+              </a:spcAft>
+            </a:pPr>
+            <a:r>
+              <a:rPr sz="1200" b="1">
                 <a:solidFill>
                   <a:srgbClr val="0D3B66"/>
                 </a:solidFill>
@@ -8273,7 +7727,7 @@
       </p:sp>
       <p:sp>
         <p:nvSpPr>
-          <p:cNvPr id="41" name="TextBox 40"/>
+          <p:cNvPr id="31" name="TextBox 30"/>
           <p:cNvSpPr txBox="1"/>
           <p:nvPr/>
         </p:nvSpPr>
@@ -8305,14 +7759,14 @@
                 </a:solidFill>
                 <a:latin typeface="Calibri"/>
               </a:rPr>
-              <a:t>sale de 27</a:t>
-            </a:r>
-          </a:p>
-        </p:txBody>
-      </p:sp>
-      <p:sp>
-        <p:nvSpPr>
-          <p:cNvPr id="42" name="Rounded Rectangle 41"/>
+              <a:t>sale de DL</a:t>
+            </a:r>
+          </a:p>
+        </p:txBody>
+      </p:sp>
+      <p:sp>
+        <p:nvSpPr>
+          <p:cNvPr id="32" name="Rounded Rectangle 31"/>
           <p:cNvSpPr/>
           <p:nvPr/>
         </p:nvSpPr>
@@ -8357,7 +7811,7 @@
       </p:sp>
       <p:pic>
         <p:nvPicPr>
-          <p:cNvPr id="43" name="Picture 42" descr="pak_mensual_may_ago.png"/>
+          <p:cNvPr id="33" name="Picture 32" descr="pak_mensual_may_ago.png"/>
           <p:cNvPicPr>
             <a:picLocks noChangeAspect="1"/>
           </p:cNvPicPr>
@@ -8381,7 +7835,7 @@
       </p:pic>
       <p:sp>
         <p:nvSpPr>
-          <p:cNvPr id="44" name="Rounded Rectangle 43"/>
+          <p:cNvPr id="34" name="Rounded Rectangle 33"/>
           <p:cNvSpPr/>
           <p:nvPr/>
         </p:nvSpPr>
@@ -8428,7 +7882,7 @@
       </p:sp>
       <p:sp>
         <p:nvSpPr>
-          <p:cNvPr id="45" name="TextBox 44"/>
+          <p:cNvPr id="35" name="TextBox 34"/>
           <p:cNvSpPr txBox="1"/>
           <p:nvPr/>
         </p:nvSpPr>
@@ -8467,7 +7921,7 @@
       </p:sp>
       <p:sp>
         <p:nvSpPr>
-          <p:cNvPr id="46" name="TextBox 45"/>
+          <p:cNvPr id="36" name="TextBox 35"/>
           <p:cNvSpPr txBox="1"/>
           <p:nvPr/>
         </p:nvSpPr>
@@ -8506,7 +7960,7 @@
       </p:sp>
       <p:sp>
         <p:nvSpPr>
-          <p:cNvPr id="47" name="Rounded Rectangle 46"/>
+          <p:cNvPr id="37" name="Rounded Rectangle 36"/>
           <p:cNvSpPr/>
           <p:nvPr/>
         </p:nvSpPr>
@@ -8553,7 +8007,7 @@
       </p:sp>
       <p:sp>
         <p:nvSpPr>
-          <p:cNvPr id="48" name="TextBox 47"/>
+          <p:cNvPr id="38" name="TextBox 37"/>
           <p:cNvSpPr txBox="1"/>
           <p:nvPr/>
         </p:nvSpPr>
@@ -8592,7 +8046,7 @@
       </p:sp>
       <p:sp>
         <p:nvSpPr>
-          <p:cNvPr id="49" name="TextBox 48"/>
+          <p:cNvPr id="39" name="TextBox 38"/>
           <p:cNvSpPr txBox="1"/>
           <p:nvPr/>
         </p:nvSpPr>
@@ -8631,7 +8085,7 @@
       </p:sp>
       <p:sp>
         <p:nvSpPr>
-          <p:cNvPr id="50" name="Rounded Rectangle 49"/>
+          <p:cNvPr id="40" name="Rounded Rectangle 39"/>
           <p:cNvSpPr/>
           <p:nvPr/>
         </p:nvSpPr>
@@ -8678,7 +8132,7 @@
       </p:sp>
       <p:sp>
         <p:nvSpPr>
-          <p:cNvPr id="51" name="TextBox 50"/>
+          <p:cNvPr id="41" name="TextBox 40"/>
           <p:cNvSpPr txBox="1"/>
           <p:nvPr/>
         </p:nvSpPr>
@@ -8717,7 +8171,7 @@
       </p:sp>
       <p:sp>
         <p:nvSpPr>
-          <p:cNvPr id="52" name="TextBox 51"/>
+          <p:cNvPr id="42" name="TextBox 41"/>
           <p:cNvSpPr txBox="1"/>
           <p:nvPr/>
         </p:nvSpPr>
@@ -8756,7 +8210,7 @@
       </p:sp>
       <p:sp>
         <p:nvSpPr>
-          <p:cNvPr id="53" name="Rounded Rectangle 52"/>
+          <p:cNvPr id="43" name="Rounded Rectangle 42"/>
           <p:cNvSpPr/>
           <p:nvPr/>
         </p:nvSpPr>
@@ -8803,7 +8257,7 @@
       </p:sp>
       <p:sp>
         <p:nvSpPr>
-          <p:cNvPr id="54" name="TextBox 53"/>
+          <p:cNvPr id="44" name="TextBox 43"/>
           <p:cNvSpPr txBox="1"/>
           <p:nvPr/>
         </p:nvSpPr>
@@ -8842,7 +8296,7 @@
       </p:sp>
       <p:sp>
         <p:nvSpPr>
-          <p:cNvPr id="55" name="TextBox 54"/>
+          <p:cNvPr id="45" name="TextBox 44"/>
           <p:cNvSpPr txBox="1"/>
           <p:nvPr/>
         </p:nvSpPr>
@@ -8881,7 +8335,7 @@
       </p:sp>
       <p:sp>
         <p:nvSpPr>
-          <p:cNvPr id="56" name="Rounded Rectangle 55"/>
+          <p:cNvPr id="46" name="Rounded Rectangle 45"/>
           <p:cNvSpPr/>
           <p:nvPr/>
         </p:nvSpPr>
@@ -8928,7 +8382,7 @@
       </p:sp>
       <p:sp>
         <p:nvSpPr>
-          <p:cNvPr id="57" name="TextBox 56"/>
+          <p:cNvPr id="47" name="TextBox 46"/>
           <p:cNvSpPr txBox="1"/>
           <p:nvPr/>
         </p:nvSpPr>
@@ -8967,7 +8421,7 @@
       </p:sp>
       <p:sp>
         <p:nvSpPr>
-          <p:cNvPr id="58" name="TextBox 57"/>
+          <p:cNvPr id="48" name="TextBox 47"/>
           <p:cNvSpPr txBox="1"/>
           <p:nvPr/>
         </p:nvSpPr>
@@ -9006,7 +8460,7 @@
       </p:sp>
       <p:sp>
         <p:nvSpPr>
-          <p:cNvPr id="59" name="Rounded Rectangle 58"/>
+          <p:cNvPr id="49" name="Rounded Rectangle 48"/>
           <p:cNvSpPr/>
           <p:nvPr/>
         </p:nvSpPr>
@@ -9053,7 +8507,7 @@
       </p:sp>
       <p:sp>
         <p:nvSpPr>
-          <p:cNvPr id="60" name="TextBox 59"/>
+          <p:cNvPr id="50" name="TextBox 49"/>
           <p:cNvSpPr txBox="1"/>
           <p:nvPr/>
         </p:nvSpPr>
@@ -9092,7 +8546,7 @@
       </p:sp>
       <p:sp>
         <p:nvSpPr>
-          <p:cNvPr id="61" name="TextBox 60"/>
+          <p:cNvPr id="51" name="TextBox 50"/>
           <p:cNvSpPr txBox="1"/>
           <p:nvPr/>
         </p:nvSpPr>
@@ -9131,7 +8585,7 @@
       </p:sp>
       <p:sp>
         <p:nvSpPr>
-          <p:cNvPr id="62" name="Rounded Rectangle 61"/>
+          <p:cNvPr id="52" name="Rounded Rectangle 51"/>
           <p:cNvSpPr/>
           <p:nvPr/>
         </p:nvSpPr>
@@ -9178,7 +8632,7 @@
       </p:sp>
       <p:sp>
         <p:nvSpPr>
-          <p:cNvPr id="63" name="TextBox 62"/>
+          <p:cNvPr id="53" name="TextBox 52"/>
           <p:cNvSpPr txBox="1"/>
           <p:nvPr/>
         </p:nvSpPr>
@@ -9217,7 +8671,7 @@
       </p:sp>
       <p:sp>
         <p:nvSpPr>
-          <p:cNvPr id="64" name="TextBox 63"/>
+          <p:cNvPr id="54" name="TextBox 53"/>
           <p:cNvSpPr txBox="1"/>
           <p:nvPr/>
         </p:nvSpPr>
@@ -9256,7 +8710,7 @@
       </p:sp>
       <p:sp>
         <p:nvSpPr>
-          <p:cNvPr id="65" name="Rounded Rectangle 64"/>
+          <p:cNvPr id="55" name="Rounded Rectangle 54"/>
           <p:cNvSpPr/>
           <p:nvPr/>
         </p:nvSpPr>
@@ -9303,7 +8757,7 @@
       </p:sp>
       <p:sp>
         <p:nvSpPr>
-          <p:cNvPr id="66" name="TextBox 65"/>
+          <p:cNvPr id="56" name="TextBox 55"/>
           <p:cNvSpPr txBox="1"/>
           <p:nvPr/>
         </p:nvSpPr>
@@ -9342,7 +8796,7 @@
       </p:sp>
       <p:sp>
         <p:nvSpPr>
-          <p:cNvPr id="67" name="TextBox 66"/>
+          <p:cNvPr id="57" name="TextBox 56"/>
           <p:cNvSpPr txBox="1"/>
           <p:nvPr/>
         </p:nvSpPr>
@@ -9381,7 +8835,7 @@
       </p:sp>
       <p:sp>
         <p:nvSpPr>
-          <p:cNvPr id="68" name="Rounded Rectangle 67"/>
+          <p:cNvPr id="58" name="Rounded Rectangle 57"/>
           <p:cNvSpPr/>
           <p:nvPr/>
         </p:nvSpPr>
@@ -9428,7 +8882,7 @@
       </p:sp>
       <p:sp>
         <p:nvSpPr>
-          <p:cNvPr id="69" name="TextBox 68"/>
+          <p:cNvPr id="59" name="TextBox 58"/>
           <p:cNvSpPr txBox="1"/>
           <p:nvPr/>
         </p:nvSpPr>
@@ -9467,7 +8921,7 @@
       </p:sp>
       <p:sp>
         <p:nvSpPr>
-          <p:cNvPr id="70" name="TextBox 69"/>
+          <p:cNvPr id="60" name="TextBox 59"/>
           <p:cNvSpPr txBox="1"/>
           <p:nvPr/>
         </p:nvSpPr>
@@ -9515,7 +8969,7 @@
                 </a:solidFill>
                 <a:latin typeface="Calibri"/>
               </a:rPr>
-              <a:t>Julio = cabecera (7 puntos). 27, 35 y 36 no se suman: cadena Sandía → DL (lámina 2).</a:t>
+              <a:t>Julio = cabecera (7 puntos). Distrito de Lujo, Bazar y DL Kennedy no se suman (lámina 2).</a:t>
             </a:r>
           </a:p>
         </p:txBody>
@@ -10938,33 +10392,33 @@
         </p:nvSpPr>
         <p:spPr>
           <a:xfrm>
-            <a:off x="274320" y="1060704"/>
-            <a:ext cx="2766060" cy="146304"/>
-          </a:xfrm>
-          <a:prstGeom prst="rect">
-            <a:avLst/>
-          </a:prstGeom>
-          <a:noFill/>
-        </p:spPr>
-        <p:txBody>
-          <a:bodyPr wrap="square">
-            <a:spAutoFit/>
-          </a:bodyPr>
-          <a:lstStyle/>
-          <a:p>
-            <a:pPr algn="l">
-              <a:spcAft>
-                <a:spcPts val="300"/>
-              </a:spcAft>
-            </a:pPr>
-            <a:r>
-              <a:rPr sz="1000" b="1">
-                <a:solidFill>
-                  <a:srgbClr val="C9A227"/>
-                </a:solidFill>
-                <a:latin typeface="Calibri"/>
-              </a:rPr>
-              <a:t>000025-01</a:t>
+            <a:off x="274320" y="1115568"/>
+            <a:ext cx="2766060" cy="292608"/>
+          </a:xfrm>
+          <a:prstGeom prst="rect">
+            <a:avLst/>
+          </a:prstGeom>
+          <a:noFill/>
+        </p:spPr>
+        <p:txBody>
+          <a:bodyPr wrap="square">
+            <a:spAutoFit/>
+          </a:bodyPr>
+          <a:lstStyle/>
+          <a:p>
+            <a:pPr algn="l">
+              <a:spcAft>
+                <a:spcPts val="300"/>
+              </a:spcAft>
+            </a:pPr>
+            <a:r>
+              <a:rPr sz="1300" b="1">
+                <a:solidFill>
+                  <a:srgbClr val="0D3B66"/>
+                </a:solidFill>
+                <a:latin typeface="Calibri"/>
+              </a:rPr>
+              <a:t>Estanque Norte</a:t>
             </a:r>
           </a:p>
         </p:txBody>
@@ -10972,45 +10426,6 @@
       <p:sp>
         <p:nvSpPr>
           <p:cNvPr id="9" name="TextBox 8"/>
-          <p:cNvSpPr txBox="1"/>
-          <p:nvPr/>
-        </p:nvSpPr>
-        <p:spPr>
-          <a:xfrm>
-            <a:off x="274320" y="1243584"/>
-            <a:ext cx="2766060" cy="201168"/>
-          </a:xfrm>
-          <a:prstGeom prst="rect">
-            <a:avLst/>
-          </a:prstGeom>
-          <a:noFill/>
-        </p:spPr>
-        <p:txBody>
-          <a:bodyPr wrap="square">
-            <a:spAutoFit/>
-          </a:bodyPr>
-          <a:lstStyle/>
-          <a:p>
-            <a:pPr algn="l">
-              <a:spcAft>
-                <a:spcPts val="300"/>
-              </a:spcAft>
-            </a:pPr>
-            <a:r>
-              <a:rPr sz="1200" b="1">
-                <a:solidFill>
-                  <a:srgbClr val="0D3B66"/>
-                </a:solidFill>
-                <a:latin typeface="Calibri"/>
-              </a:rPr>
-              <a:t>Estanque Norte</a:t>
-            </a:r>
-          </a:p>
-        </p:txBody>
-      </p:sp>
-      <p:sp>
-        <p:nvSpPr>
-          <p:cNvPr id="10" name="TextBox 9"/>
           <p:cNvSpPr txBox="1"/>
           <p:nvPr/>
         </p:nvSpPr>
@@ -11049,7 +10464,7 @@
       </p:sp>
       <p:sp>
         <p:nvSpPr>
-          <p:cNvPr id="11" name="Rounded Rectangle 10"/>
+          <p:cNvPr id="10" name="Rounded Rectangle 9"/>
           <p:cNvSpPr/>
           <p:nvPr/>
         </p:nvSpPr>
@@ -11096,72 +10511,33 @@
       </p:sp>
       <p:sp>
         <p:nvSpPr>
-          <p:cNvPr id="12" name="TextBox 11"/>
-          <p:cNvSpPr txBox="1"/>
-          <p:nvPr/>
-        </p:nvSpPr>
-        <p:spPr>
-          <a:xfrm>
-            <a:off x="3241548" y="1060704"/>
-            <a:ext cx="2766060" cy="146304"/>
-          </a:xfrm>
-          <a:prstGeom prst="rect">
-            <a:avLst/>
-          </a:prstGeom>
-          <a:noFill/>
-        </p:spPr>
-        <p:txBody>
-          <a:bodyPr wrap="square">
-            <a:spAutoFit/>
-          </a:bodyPr>
-          <a:lstStyle/>
-          <a:p>
-            <a:pPr algn="l">
-              <a:spcAft>
-                <a:spcPts val="300"/>
-              </a:spcAft>
-            </a:pPr>
-            <a:r>
-              <a:rPr sz="1000" b="1">
-                <a:solidFill>
-                  <a:srgbClr val="C9A227"/>
-                </a:solidFill>
-                <a:latin typeface="Calibri"/>
-              </a:rPr>
-              <a:t>000025-07</a:t>
-            </a:r>
-          </a:p>
-        </p:txBody>
-      </p:sp>
-      <p:sp>
-        <p:nvSpPr>
-          <p:cNvPr id="13" name="TextBox 12"/>
-          <p:cNvSpPr txBox="1"/>
-          <p:nvPr/>
-        </p:nvSpPr>
-        <p:spPr>
-          <a:xfrm>
-            <a:off x="3241548" y="1243584"/>
-            <a:ext cx="2766060" cy="201168"/>
-          </a:xfrm>
-          <a:prstGeom prst="rect">
-            <a:avLst/>
-          </a:prstGeom>
-          <a:noFill/>
-        </p:spPr>
-        <p:txBody>
-          <a:bodyPr wrap="square">
-            <a:spAutoFit/>
-          </a:bodyPr>
-          <a:lstStyle/>
-          <a:p>
-            <a:pPr algn="l">
-              <a:spcAft>
-                <a:spcPts val="300"/>
-              </a:spcAft>
-            </a:pPr>
-            <a:r>
-              <a:rPr sz="1200" b="1">
+          <p:cNvPr id="11" name="TextBox 10"/>
+          <p:cNvSpPr txBox="1"/>
+          <p:nvPr/>
+        </p:nvSpPr>
+        <p:spPr>
+          <a:xfrm>
+            <a:off x="3241548" y="1115568"/>
+            <a:ext cx="2766060" cy="292608"/>
+          </a:xfrm>
+          <a:prstGeom prst="rect">
+            <a:avLst/>
+          </a:prstGeom>
+          <a:noFill/>
+        </p:spPr>
+        <p:txBody>
+          <a:bodyPr wrap="square">
+            <a:spAutoFit/>
+          </a:bodyPr>
+          <a:lstStyle/>
+          <a:p>
+            <a:pPr algn="l">
+              <a:spcAft>
+                <a:spcPts val="300"/>
+              </a:spcAft>
+            </a:pPr>
+            <a:r>
+              <a:rPr sz="1300" b="1">
                 <a:solidFill>
                   <a:srgbClr val="0D3B66"/>
                 </a:solidFill>
@@ -11174,7 +10550,7 @@
       </p:sp>
       <p:sp>
         <p:nvSpPr>
-          <p:cNvPr id="14" name="Rounded Rectangle 13"/>
+          <p:cNvPr id="12" name="Rounded Rectangle 11"/>
           <p:cNvSpPr/>
           <p:nvPr/>
         </p:nvSpPr>
@@ -11221,72 +10597,33 @@
       </p:sp>
       <p:sp>
         <p:nvSpPr>
-          <p:cNvPr id="15" name="TextBox 14"/>
-          <p:cNvSpPr txBox="1"/>
-          <p:nvPr/>
-        </p:nvSpPr>
-        <p:spPr>
-          <a:xfrm>
-            <a:off x="6208776" y="1060704"/>
-            <a:ext cx="2766060" cy="146304"/>
-          </a:xfrm>
-          <a:prstGeom prst="rect">
-            <a:avLst/>
-          </a:prstGeom>
-          <a:noFill/>
-        </p:spPr>
-        <p:txBody>
-          <a:bodyPr wrap="square">
-            <a:spAutoFit/>
-          </a:bodyPr>
-          <a:lstStyle/>
-          <a:p>
-            <a:pPr algn="l">
-              <a:spcAft>
-                <a:spcPts val="300"/>
-              </a:spcAft>
-            </a:pPr>
-            <a:r>
-              <a:rPr sz="1000" b="1">
-                <a:solidFill>
-                  <a:srgbClr val="C9A227"/>
-                </a:solidFill>
-                <a:latin typeface="Calibri"/>
-              </a:rPr>
-              <a:t>000025-19</a:t>
-            </a:r>
-          </a:p>
-        </p:txBody>
-      </p:sp>
-      <p:sp>
-        <p:nvSpPr>
-          <p:cNvPr id="16" name="TextBox 15"/>
-          <p:cNvSpPr txBox="1"/>
-          <p:nvPr/>
-        </p:nvSpPr>
-        <p:spPr>
-          <a:xfrm>
-            <a:off x="6208776" y="1243584"/>
-            <a:ext cx="2766060" cy="201168"/>
-          </a:xfrm>
-          <a:prstGeom prst="rect">
-            <a:avLst/>
-          </a:prstGeom>
-          <a:noFill/>
-        </p:spPr>
-        <p:txBody>
-          <a:bodyPr wrap="square">
-            <a:spAutoFit/>
-          </a:bodyPr>
-          <a:lstStyle/>
-          <a:p>
-            <a:pPr algn="l">
-              <a:spcAft>
-                <a:spcPts val="300"/>
-              </a:spcAft>
-            </a:pPr>
-            <a:r>
-              <a:rPr sz="1200" b="1">
+          <p:cNvPr id="13" name="TextBox 12"/>
+          <p:cNvSpPr txBox="1"/>
+          <p:nvPr/>
+        </p:nvSpPr>
+        <p:spPr>
+          <a:xfrm>
+            <a:off x="6208776" y="1115568"/>
+            <a:ext cx="2766060" cy="292608"/>
+          </a:xfrm>
+          <a:prstGeom prst="rect">
+            <a:avLst/>
+          </a:prstGeom>
+          <a:noFill/>
+        </p:spPr>
+        <p:txBody>
+          <a:bodyPr wrap="square">
+            <a:spAutoFit/>
+          </a:bodyPr>
+          <a:lstStyle/>
+          <a:p>
+            <a:pPr algn="l">
+              <a:spcAft>
+                <a:spcPts val="300"/>
+              </a:spcAft>
+            </a:pPr>
+            <a:r>
+              <a:rPr sz="1300" b="1">
                 <a:solidFill>
                   <a:srgbClr val="0D3B66"/>
                 </a:solidFill>
@@ -11299,7 +10636,7 @@
       </p:sp>
       <p:sp>
         <p:nvSpPr>
-          <p:cNvPr id="17" name="TextBox 16"/>
+          <p:cNvPr id="14" name="TextBox 13"/>
           <p:cNvSpPr txBox="1"/>
           <p:nvPr/>
         </p:nvSpPr>
@@ -11338,7 +10675,7 @@
       </p:sp>
       <p:sp>
         <p:nvSpPr>
-          <p:cNvPr id="18" name="Rounded Rectangle 17"/>
+          <p:cNvPr id="15" name="Rounded Rectangle 14"/>
           <p:cNvSpPr/>
           <p:nvPr/>
         </p:nvSpPr>
@@ -11385,72 +10722,33 @@
       </p:sp>
       <p:sp>
         <p:nvSpPr>
-          <p:cNvPr id="19" name="TextBox 18"/>
-          <p:cNvSpPr txBox="1"/>
-          <p:nvPr/>
-        </p:nvSpPr>
-        <p:spPr>
-          <a:xfrm>
-            <a:off x="9176004" y="1060704"/>
-            <a:ext cx="2766060" cy="146304"/>
-          </a:xfrm>
-          <a:prstGeom prst="rect">
-            <a:avLst/>
-          </a:prstGeom>
-          <a:noFill/>
-        </p:spPr>
-        <p:txBody>
-          <a:bodyPr wrap="square">
-            <a:spAutoFit/>
-          </a:bodyPr>
-          <a:lstStyle/>
-          <a:p>
-            <a:pPr algn="l">
-              <a:spcAft>
-                <a:spcPts val="300"/>
-              </a:spcAft>
-            </a:pPr>
-            <a:r>
-              <a:rPr sz="1000" b="1">
-                <a:solidFill>
-                  <a:srgbClr val="C9A227"/>
-                </a:solidFill>
-                <a:latin typeface="Calibri"/>
-              </a:rPr>
-              <a:t>000025-04</a:t>
-            </a:r>
-          </a:p>
-        </p:txBody>
-      </p:sp>
-      <p:sp>
-        <p:nvSpPr>
-          <p:cNvPr id="20" name="TextBox 19"/>
-          <p:cNvSpPr txBox="1"/>
-          <p:nvPr/>
-        </p:nvSpPr>
-        <p:spPr>
-          <a:xfrm>
-            <a:off x="9176004" y="1243584"/>
-            <a:ext cx="2766060" cy="201168"/>
-          </a:xfrm>
-          <a:prstGeom prst="rect">
-            <a:avLst/>
-          </a:prstGeom>
-          <a:noFill/>
-        </p:spPr>
-        <p:txBody>
-          <a:bodyPr wrap="square">
-            <a:spAutoFit/>
-          </a:bodyPr>
-          <a:lstStyle/>
-          <a:p>
-            <a:pPr algn="l">
-              <a:spcAft>
-                <a:spcPts val="300"/>
-              </a:spcAft>
-            </a:pPr>
-            <a:r>
-              <a:rPr sz="1200" b="1">
+          <p:cNvPr id="16" name="TextBox 15"/>
+          <p:cNvSpPr txBox="1"/>
+          <p:nvPr/>
+        </p:nvSpPr>
+        <p:spPr>
+          <a:xfrm>
+            <a:off x="9176004" y="1115568"/>
+            <a:ext cx="2766060" cy="292608"/>
+          </a:xfrm>
+          <a:prstGeom prst="rect">
+            <a:avLst/>
+          </a:prstGeom>
+          <a:noFill/>
+        </p:spPr>
+        <p:txBody>
+          <a:bodyPr wrap="square">
+            <a:spAutoFit/>
+          </a:bodyPr>
+          <a:lstStyle/>
+          <a:p>
+            <a:pPr algn="l">
+              <a:spcAft>
+                <a:spcPts val="300"/>
+              </a:spcAft>
+            </a:pPr>
+            <a:r>
+              <a:rPr sz="1300" b="1">
                 <a:solidFill>
                   <a:srgbClr val="0D3B66"/>
                 </a:solidFill>
@@ -11463,7 +10761,7 @@
       </p:sp>
       <p:sp>
         <p:nvSpPr>
-          <p:cNvPr id="21" name="Rounded Rectangle 20"/>
+          <p:cNvPr id="17" name="Rounded Rectangle 16"/>
           <p:cNvSpPr/>
           <p:nvPr/>
         </p:nvSpPr>
@@ -11508,7 +10806,7 @@
       </p:sp>
       <p:pic>
         <p:nvPicPr>
-          <p:cNvPr id="22" name="Picture 21" descr="mae_mensual_may_ago.png"/>
+          <p:cNvPr id="18" name="Picture 17" descr="mae_mensual_may_ago.png"/>
           <p:cNvPicPr>
             <a:picLocks noChangeAspect="1"/>
           </p:cNvPicPr>
@@ -11532,7 +10830,7 @@
       </p:pic>
       <p:sp>
         <p:nvSpPr>
-          <p:cNvPr id="23" name="Rounded Rectangle 22"/>
+          <p:cNvPr id="19" name="Rounded Rectangle 18"/>
           <p:cNvSpPr/>
           <p:nvPr/>
         </p:nvSpPr>
@@ -11579,7 +10877,7 @@
       </p:sp>
       <p:sp>
         <p:nvSpPr>
-          <p:cNvPr id="24" name="TextBox 23"/>
+          <p:cNvPr id="20" name="TextBox 19"/>
           <p:cNvSpPr txBox="1"/>
           <p:nvPr/>
         </p:nvSpPr>
@@ -11618,7 +10916,7 @@
       </p:sp>
       <p:sp>
         <p:nvSpPr>
-          <p:cNvPr id="25" name="TextBox 24"/>
+          <p:cNvPr id="21" name="TextBox 20"/>
           <p:cNvSpPr txBox="1"/>
           <p:nvPr/>
         </p:nvSpPr>
@@ -11657,7 +10955,7 @@
       </p:sp>
       <p:sp>
         <p:nvSpPr>
-          <p:cNvPr id="26" name="Rounded Rectangle 25"/>
+          <p:cNvPr id="22" name="Rounded Rectangle 21"/>
           <p:cNvSpPr/>
           <p:nvPr/>
         </p:nvSpPr>
@@ -11704,7 +11002,7 @@
       </p:sp>
       <p:sp>
         <p:nvSpPr>
-          <p:cNvPr id="27" name="TextBox 26"/>
+          <p:cNvPr id="23" name="TextBox 22"/>
           <p:cNvSpPr txBox="1"/>
           <p:nvPr/>
         </p:nvSpPr>
@@ -11743,7 +11041,7 @@
       </p:sp>
       <p:sp>
         <p:nvSpPr>
-          <p:cNvPr id="28" name="TextBox 27"/>
+          <p:cNvPr id="24" name="TextBox 23"/>
           <p:cNvSpPr txBox="1"/>
           <p:nvPr/>
         </p:nvSpPr>
@@ -11782,7 +11080,7 @@
       </p:sp>
       <p:sp>
         <p:nvSpPr>
-          <p:cNvPr id="29" name="Rounded Rectangle 28"/>
+          <p:cNvPr id="25" name="Rounded Rectangle 24"/>
           <p:cNvSpPr/>
           <p:nvPr/>
         </p:nvSpPr>
@@ -11829,7 +11127,7 @@
       </p:sp>
       <p:sp>
         <p:nvSpPr>
-          <p:cNvPr id="30" name="TextBox 29"/>
+          <p:cNvPr id="26" name="TextBox 25"/>
           <p:cNvSpPr txBox="1"/>
           <p:nvPr/>
         </p:nvSpPr>
@@ -11868,7 +11166,7 @@
       </p:sp>
       <p:sp>
         <p:nvSpPr>
-          <p:cNvPr id="31" name="TextBox 30"/>
+          <p:cNvPr id="27" name="TextBox 26"/>
           <p:cNvSpPr txBox="1"/>
           <p:nvPr/>
         </p:nvSpPr>
@@ -11907,7 +11205,7 @@
       </p:sp>
       <p:sp>
         <p:nvSpPr>
-          <p:cNvPr id="32" name="Rounded Rectangle 31"/>
+          <p:cNvPr id="28" name="Rounded Rectangle 27"/>
           <p:cNvSpPr/>
           <p:nvPr/>
         </p:nvSpPr>
@@ -11954,7 +11252,7 @@
       </p:sp>
       <p:sp>
         <p:nvSpPr>
-          <p:cNvPr id="33" name="TextBox 32"/>
+          <p:cNvPr id="29" name="TextBox 28"/>
           <p:cNvSpPr txBox="1"/>
           <p:nvPr/>
         </p:nvSpPr>
@@ -11993,7 +11291,7 @@
       </p:sp>
       <p:sp>
         <p:nvSpPr>
-          <p:cNvPr id="34" name="TextBox 33"/>
+          <p:cNvPr id="30" name="TextBox 29"/>
           <p:cNvSpPr txBox="1"/>
           <p:nvPr/>
         </p:nvSpPr>
@@ -12032,7 +11330,7 @@
       </p:sp>
       <p:sp>
         <p:nvSpPr>
-          <p:cNvPr id="35" name="Rounded Rectangle 34"/>
+          <p:cNvPr id="31" name="Rounded Rectangle 30"/>
           <p:cNvSpPr/>
           <p:nvPr/>
         </p:nvSpPr>
@@ -12079,7 +11377,7 @@
       </p:sp>
       <p:sp>
         <p:nvSpPr>
-          <p:cNvPr id="36" name="TextBox 35"/>
+          <p:cNvPr id="32" name="TextBox 31"/>
           <p:cNvSpPr txBox="1"/>
           <p:nvPr/>
         </p:nvSpPr>
@@ -12118,7 +11416,7 @@
       </p:sp>
       <p:sp>
         <p:nvSpPr>
-          <p:cNvPr id="37" name="TextBox 36"/>
+          <p:cNvPr id="33" name="TextBox 32"/>
           <p:cNvSpPr txBox="1"/>
           <p:nvPr/>
         </p:nvSpPr>
@@ -12157,7 +11455,7 @@
       </p:sp>
       <p:sp>
         <p:nvSpPr>
-          <p:cNvPr id="38" name="Rounded Rectangle 37"/>
+          <p:cNvPr id="34" name="Rounded Rectangle 33"/>
           <p:cNvSpPr/>
           <p:nvPr/>
         </p:nvSpPr>
@@ -12204,7 +11502,7 @@
       </p:sp>
       <p:sp>
         <p:nvSpPr>
-          <p:cNvPr id="39" name="TextBox 38"/>
+          <p:cNvPr id="35" name="TextBox 34"/>
           <p:cNvSpPr txBox="1"/>
           <p:nvPr/>
         </p:nvSpPr>
@@ -12243,7 +11541,7 @@
       </p:sp>
       <p:sp>
         <p:nvSpPr>
-          <p:cNvPr id="40" name="TextBox 39"/>
+          <p:cNvPr id="36" name="TextBox 35"/>
           <p:cNvSpPr txBox="1"/>
           <p:nvPr/>
         </p:nvSpPr>
@@ -12583,7 +11881,7 @@
                 </a:solidFill>
                 <a:latin typeface="Calibri"/>
               </a:rPr>
-              <a:t>ESTANQUE SUR  ·  PRESÓSTATOS</a:t>
+              <a:t>ESTANQUE NORTE  ·  CONTROL 05/08</a:t>
             </a:r>
           </a:p>
         </p:txBody>
@@ -12616,13 +11914,13 @@
               </a:spcAft>
             </a:pPr>
             <a:r>
-              <a:rPr sz="1200" b="0">
+              <a:rPr sz="1300" b="1">
                 <a:solidFill>
                   <a:srgbClr val="0D3B66"/>
                 </a:solidFill>
                 <a:latin typeface="Calibri"/>
               </a:rPr>
-              <a:t>El 10/06 se repararon los presostatos. El estanque venía en 89 m³/día (mayo–9/jun) y ese día ya marca 39 m³. Desde el 11/06 se sostiene en 28 m³/día (−61 m³/día, 68%). A $1.400/m³: $84.897/día  ·  $2.546.923/mes  ·  acumulado 11/06–17/08: $5.688.128 (4.063 m³ en 67 días).</a:t>
+              <a:t>Estanque Norte (control 05/08, 00:00–05:00): noche típica 4,8 → 1,1 m³, ahorro 3,7 m³. × 5 h de control × 30 días = 555 m³/mes = $777.000/mes (tarifa $1.400/m³). Es el que más ahorra de los controles MAE.</a:t>
             </a:r>
           </a:p>
         </p:txBody>
@@ -12871,29 +12169,13 @@
               </a:spcAft>
             </a:pPr>
             <a:r>
-              <a:rPr sz="1200" b="1">
+              <a:rPr sz="1200" b="0">
                 <a:solidFill>
                   <a:srgbClr val="0D3B66"/>
                 </a:solidFill>
                 <a:latin typeface="Calibri"/>
               </a:rPr>
-              <a:t>Estanque Norte (control 05/08, 00:00–05:00): noche típica 4,8 → 1,1 m³, ahorro 3,7 m³. × 5 h de control × 30 días = 555 m³/mes = $777.000/mes (tarifa $1.400/m³). Es el que más ahorra de los controles MAE.</a:t>
-            </a:r>
-          </a:p>
-          <a:p>
-            <a:pPr algn="l">
-              <a:spcAft>
-                <a:spcPts val="300"/>
-              </a:spcAft>
-            </a:pPr>
-            <a:r>
-              <a:rPr sz="1200" b="0">
-                <a:solidFill>
-                  <a:srgbClr val="0D3B66"/>
-                </a:solidFill>
-                <a:latin typeface="Calibri"/>
-              </a:rPr>
-              <a:t>Pizza Hut (control 01/07): noche típica 0,1 → 0 m³. Estanque Sur: corte on/off a cargo de mantención nocturna.</a:t>
+              <a:t>Pizza Hut (control 01/07): noche típica 0,1 → 0 m³. Estanque Sur: presostatos 10/06 (−61 m³/día, $2.546.923/mes) y corte on/off de mantención nocturna.</a:t>
             </a:r>
           </a:p>
           <a:p>
@@ -13175,66 +12457,27 @@
         </p:nvSpPr>
         <p:spPr>
           <a:xfrm>
-            <a:off x="274320" y="1060704"/>
-            <a:ext cx="2172614" cy="146304"/>
-          </a:xfrm>
-          <a:prstGeom prst="rect">
-            <a:avLst/>
-          </a:prstGeom>
-          <a:noFill/>
-        </p:spPr>
-        <p:txBody>
-          <a:bodyPr wrap="square">
-            <a:spAutoFit/>
-          </a:bodyPr>
-          <a:lstStyle/>
-          <a:p>
-            <a:pPr algn="l">
-              <a:spcAft>
-                <a:spcPts val="300"/>
-              </a:spcAft>
-            </a:pPr>
-            <a:r>
-              <a:rPr sz="1000" b="1">
-                <a:solidFill>
-                  <a:srgbClr val="C9A227"/>
-                </a:solidFill>
-                <a:latin typeface="Calibri"/>
-              </a:rPr>
-              <a:t>000025-08</a:t>
-            </a:r>
-          </a:p>
-        </p:txBody>
-      </p:sp>
-      <p:sp>
-        <p:nvSpPr>
-          <p:cNvPr id="9" name="TextBox 8"/>
-          <p:cNvSpPr txBox="1"/>
-          <p:nvPr/>
-        </p:nvSpPr>
-        <p:spPr>
-          <a:xfrm>
-            <a:off x="274320" y="1243584"/>
-            <a:ext cx="2172614" cy="201168"/>
-          </a:xfrm>
-          <a:prstGeom prst="rect">
-            <a:avLst/>
-          </a:prstGeom>
-          <a:noFill/>
-        </p:spPr>
-        <p:txBody>
-          <a:bodyPr wrap="square">
-            <a:spAutoFit/>
-          </a:bodyPr>
-          <a:lstStyle/>
-          <a:p>
-            <a:pPr algn="l">
-              <a:spcAft>
-                <a:spcPts val="300"/>
-              </a:spcAft>
-            </a:pPr>
-            <a:r>
-              <a:rPr sz="1200" b="1">
+            <a:off x="274320" y="1115568"/>
+            <a:ext cx="2172614" cy="292608"/>
+          </a:xfrm>
+          <a:prstGeom prst="rect">
+            <a:avLst/>
+          </a:prstGeom>
+          <a:noFill/>
+        </p:spPr>
+        <p:txBody>
+          <a:bodyPr wrap="square">
+            <a:spAutoFit/>
+          </a:bodyPr>
+          <a:lstStyle/>
+          <a:p>
+            <a:pPr algn="l">
+              <a:spcAft>
+                <a:spcPts val="300"/>
+              </a:spcAft>
+            </a:pPr>
+            <a:r>
+              <a:rPr sz="1300" b="1">
                 <a:solidFill>
                   <a:srgbClr val="0D3B66"/>
                 </a:solidFill>
@@ -13247,7 +12490,7 @@
       </p:sp>
       <p:sp>
         <p:nvSpPr>
-          <p:cNvPr id="10" name="Rounded Rectangle 9"/>
+          <p:cNvPr id="9" name="Rounded Rectangle 8"/>
           <p:cNvSpPr/>
           <p:nvPr/>
         </p:nvSpPr>
@@ -13294,72 +12537,33 @@
       </p:sp>
       <p:sp>
         <p:nvSpPr>
-          <p:cNvPr id="11" name="TextBox 10"/>
-          <p:cNvSpPr txBox="1"/>
-          <p:nvPr/>
-        </p:nvSpPr>
-        <p:spPr>
-          <a:xfrm>
-            <a:off x="2648102" y="1060704"/>
-            <a:ext cx="2172614" cy="146304"/>
-          </a:xfrm>
-          <a:prstGeom prst="rect">
-            <a:avLst/>
-          </a:prstGeom>
-          <a:noFill/>
-        </p:spPr>
-        <p:txBody>
-          <a:bodyPr wrap="square">
-            <a:spAutoFit/>
-          </a:bodyPr>
-          <a:lstStyle/>
-          <a:p>
-            <a:pPr algn="l">
-              <a:spcAft>
-                <a:spcPts val="300"/>
-              </a:spcAft>
-            </a:pPr>
-            <a:r>
-              <a:rPr sz="1000" b="1">
-                <a:solidFill>
-                  <a:srgbClr val="C9A227"/>
-                </a:solidFill>
-                <a:latin typeface="Calibri"/>
-              </a:rPr>
-              <a:t>000025-10</a:t>
-            </a:r>
-          </a:p>
-        </p:txBody>
-      </p:sp>
-      <p:sp>
-        <p:nvSpPr>
-          <p:cNvPr id="12" name="TextBox 11"/>
-          <p:cNvSpPr txBox="1"/>
-          <p:nvPr/>
-        </p:nvSpPr>
-        <p:spPr>
-          <a:xfrm>
-            <a:off x="2648102" y="1243584"/>
-            <a:ext cx="2172614" cy="201168"/>
-          </a:xfrm>
-          <a:prstGeom prst="rect">
-            <a:avLst/>
-          </a:prstGeom>
-          <a:noFill/>
-        </p:spPr>
-        <p:txBody>
-          <a:bodyPr wrap="square">
-            <a:spAutoFit/>
-          </a:bodyPr>
-          <a:lstStyle/>
-          <a:p>
-            <a:pPr algn="l">
-              <a:spcAft>
-                <a:spcPts val="300"/>
-              </a:spcAft>
-            </a:pPr>
-            <a:r>
-              <a:rPr sz="1200" b="1">
+          <p:cNvPr id="10" name="TextBox 9"/>
+          <p:cNvSpPr txBox="1"/>
+          <p:nvPr/>
+        </p:nvSpPr>
+        <p:spPr>
+          <a:xfrm>
+            <a:off x="2648102" y="1115568"/>
+            <a:ext cx="2172614" cy="292608"/>
+          </a:xfrm>
+          <a:prstGeom prst="rect">
+            <a:avLst/>
+          </a:prstGeom>
+          <a:noFill/>
+        </p:spPr>
+        <p:txBody>
+          <a:bodyPr wrap="square">
+            <a:spAutoFit/>
+          </a:bodyPr>
+          <a:lstStyle/>
+          <a:p>
+            <a:pPr algn="l">
+              <a:spcAft>
+                <a:spcPts val="300"/>
+              </a:spcAft>
+            </a:pPr>
+            <a:r>
+              <a:rPr sz="1300" b="1">
                 <a:solidFill>
                   <a:srgbClr val="0D3B66"/>
                 </a:solidFill>
@@ -13372,7 +12576,7 @@
       </p:sp>
       <p:sp>
         <p:nvSpPr>
-          <p:cNvPr id="13" name="Rounded Rectangle 12"/>
+          <p:cNvPr id="11" name="Rounded Rectangle 10"/>
           <p:cNvSpPr/>
           <p:nvPr/>
         </p:nvSpPr>
@@ -13419,72 +12623,33 @@
       </p:sp>
       <p:sp>
         <p:nvSpPr>
-          <p:cNvPr id="14" name="TextBox 13"/>
-          <p:cNvSpPr txBox="1"/>
-          <p:nvPr/>
-        </p:nvSpPr>
-        <p:spPr>
-          <a:xfrm>
-            <a:off x="5021884" y="1060704"/>
-            <a:ext cx="2172614" cy="146304"/>
-          </a:xfrm>
-          <a:prstGeom prst="rect">
-            <a:avLst/>
-          </a:prstGeom>
-          <a:noFill/>
-        </p:spPr>
-        <p:txBody>
-          <a:bodyPr wrap="square">
-            <a:spAutoFit/>
-          </a:bodyPr>
-          <a:lstStyle/>
-          <a:p>
-            <a:pPr algn="l">
-              <a:spcAft>
-                <a:spcPts val="300"/>
-              </a:spcAft>
-            </a:pPr>
-            <a:r>
-              <a:rPr sz="1000" b="1">
-                <a:solidFill>
-                  <a:srgbClr val="C9A227"/>
-                </a:solidFill>
-                <a:latin typeface="Calibri"/>
-              </a:rPr>
-              <a:t>000025-09</a:t>
-            </a:r>
-          </a:p>
-        </p:txBody>
-      </p:sp>
-      <p:sp>
-        <p:nvSpPr>
-          <p:cNvPr id="15" name="TextBox 14"/>
-          <p:cNvSpPr txBox="1"/>
-          <p:nvPr/>
-        </p:nvSpPr>
-        <p:spPr>
-          <a:xfrm>
-            <a:off x="5021884" y="1243584"/>
-            <a:ext cx="2172614" cy="201168"/>
-          </a:xfrm>
-          <a:prstGeom prst="rect">
-            <a:avLst/>
-          </a:prstGeom>
-          <a:noFill/>
-        </p:spPr>
-        <p:txBody>
-          <a:bodyPr wrap="square">
-            <a:spAutoFit/>
-          </a:bodyPr>
-          <a:lstStyle/>
-          <a:p>
-            <a:pPr algn="l">
-              <a:spcAft>
-                <a:spcPts val="300"/>
-              </a:spcAft>
-            </a:pPr>
-            <a:r>
-              <a:rPr sz="1200" b="1">
+          <p:cNvPr id="12" name="TextBox 11"/>
+          <p:cNvSpPr txBox="1"/>
+          <p:nvPr/>
+        </p:nvSpPr>
+        <p:spPr>
+          <a:xfrm>
+            <a:off x="5021884" y="1115568"/>
+            <a:ext cx="2172614" cy="292608"/>
+          </a:xfrm>
+          <a:prstGeom prst="rect">
+            <a:avLst/>
+          </a:prstGeom>
+          <a:noFill/>
+        </p:spPr>
+        <p:txBody>
+          <a:bodyPr wrap="square">
+            <a:spAutoFit/>
+          </a:bodyPr>
+          <a:lstStyle/>
+          <a:p>
+            <a:pPr algn="l">
+              <a:spcAft>
+                <a:spcPts val="300"/>
+              </a:spcAft>
+            </a:pPr>
+            <a:r>
+              <a:rPr sz="1300" b="1">
                 <a:solidFill>
                   <a:srgbClr val="0D3B66"/>
                 </a:solidFill>
@@ -13497,7 +12662,7 @@
       </p:sp>
       <p:sp>
         <p:nvSpPr>
-          <p:cNvPr id="16" name="TextBox 15"/>
+          <p:cNvPr id="13" name="TextBox 12"/>
           <p:cNvSpPr txBox="1"/>
           <p:nvPr/>
         </p:nvSpPr>
@@ -13536,7 +12701,7 @@
       </p:sp>
       <p:sp>
         <p:nvSpPr>
-          <p:cNvPr id="17" name="Rounded Rectangle 16"/>
+          <p:cNvPr id="14" name="Rounded Rectangle 13"/>
           <p:cNvSpPr/>
           <p:nvPr/>
         </p:nvSpPr>
@@ -13583,72 +12748,33 @@
       </p:sp>
       <p:sp>
         <p:nvSpPr>
-          <p:cNvPr id="18" name="TextBox 17"/>
-          <p:cNvSpPr txBox="1"/>
-          <p:nvPr/>
-        </p:nvSpPr>
-        <p:spPr>
-          <a:xfrm>
-            <a:off x="7395667" y="1060704"/>
-            <a:ext cx="2172614" cy="146304"/>
-          </a:xfrm>
-          <a:prstGeom prst="rect">
-            <a:avLst/>
-          </a:prstGeom>
-          <a:noFill/>
-        </p:spPr>
-        <p:txBody>
-          <a:bodyPr wrap="square">
-            <a:spAutoFit/>
-          </a:bodyPr>
-          <a:lstStyle/>
-          <a:p>
-            <a:pPr algn="l">
-              <a:spcAft>
-                <a:spcPts val="300"/>
-              </a:spcAft>
-            </a:pPr>
-            <a:r>
-              <a:rPr sz="1000" b="1">
-                <a:solidFill>
-                  <a:srgbClr val="C9A227"/>
-                </a:solidFill>
-                <a:latin typeface="Calibri"/>
-              </a:rPr>
-              <a:t>000025-32</a:t>
-            </a:r>
-          </a:p>
-        </p:txBody>
-      </p:sp>
-      <p:sp>
-        <p:nvSpPr>
-          <p:cNvPr id="19" name="TextBox 18"/>
-          <p:cNvSpPr txBox="1"/>
-          <p:nvPr/>
-        </p:nvSpPr>
-        <p:spPr>
-          <a:xfrm>
-            <a:off x="7395667" y="1243584"/>
-            <a:ext cx="2172614" cy="201168"/>
-          </a:xfrm>
-          <a:prstGeom prst="rect">
-            <a:avLst/>
-          </a:prstGeom>
-          <a:noFill/>
-        </p:spPr>
-        <p:txBody>
-          <a:bodyPr wrap="square">
-            <a:spAutoFit/>
-          </a:bodyPr>
-          <a:lstStyle/>
-          <a:p>
-            <a:pPr algn="l">
-              <a:spcAft>
-                <a:spcPts val="300"/>
-              </a:spcAft>
-            </a:pPr>
-            <a:r>
-              <a:rPr sz="1200" b="1">
+          <p:cNvPr id="15" name="TextBox 14"/>
+          <p:cNvSpPr txBox="1"/>
+          <p:nvPr/>
+        </p:nvSpPr>
+        <p:spPr>
+          <a:xfrm>
+            <a:off x="7395667" y="1115568"/>
+            <a:ext cx="2172614" cy="292608"/>
+          </a:xfrm>
+          <a:prstGeom prst="rect">
+            <a:avLst/>
+          </a:prstGeom>
+          <a:noFill/>
+        </p:spPr>
+        <p:txBody>
+          <a:bodyPr wrap="square">
+            <a:spAutoFit/>
+          </a:bodyPr>
+          <a:lstStyle/>
+          <a:p>
+            <a:pPr algn="l">
+              <a:spcAft>
+                <a:spcPts val="300"/>
+              </a:spcAft>
+            </a:pPr>
+            <a:r>
+              <a:rPr sz="1300" b="1">
                 <a:solidFill>
                   <a:srgbClr val="0D3B66"/>
                 </a:solidFill>
@@ -13661,7 +12787,7 @@
       </p:sp>
       <p:sp>
         <p:nvSpPr>
-          <p:cNvPr id="20" name="TextBox 19"/>
+          <p:cNvPr id="16" name="TextBox 15"/>
           <p:cNvSpPr txBox="1"/>
           <p:nvPr/>
         </p:nvSpPr>
@@ -13700,7 +12826,7 @@
       </p:sp>
       <p:sp>
         <p:nvSpPr>
-          <p:cNvPr id="21" name="Rounded Rectangle 20"/>
+          <p:cNvPr id="17" name="Rounded Rectangle 16"/>
           <p:cNvSpPr